--- a/Athanase_Engaged_Ownership_Allocator_Deck.pptx
+++ b/Athanase_Engaged_Ownership_Allocator_Deck.pptx
@@ -3378,290 +3378,33 @@
           </a:p>
         </p:txBody>
       </p:sp>
-      <p:sp>
-        <p:nvSpPr>
-          <p:cNvPr id="3" name="Rectangle 2"/>
-          <p:cNvSpPr/>
-          <p:nvPr/>
-        </p:nvSpPr>
-        <p:spPr>
-          <a:xfrm>
-            <a:off x="548640" y="683972"/>
-            <a:ext cx="43891" cy="93268"/>
-          </a:xfrm>
-          <a:prstGeom prst="rect">
-            <a:avLst/>
-          </a:prstGeom>
-          <a:solidFill>
-            <a:srgbClr val="FFFFFF"/>
-          </a:solidFill>
-          <a:ln>
-            <a:noFill/>
-          </a:ln>
-          <a:effectLst/>
-        </p:spPr>
-        <p:style>
-          <a:lnRef idx="1">
-            <a:schemeClr val="accent1"/>
-          </a:lnRef>
-          <a:fillRef idx="3">
-            <a:schemeClr val="accent1"/>
-          </a:fillRef>
-          <a:effectRef idx="2">
-            <a:schemeClr val="accent1"/>
-          </a:effectRef>
-          <a:fontRef idx="minor">
-            <a:schemeClr val="lt1"/>
-          </a:fontRef>
-        </p:style>
-        <p:txBody>
-          <a:bodyPr rtlCol="0" anchor="ctr"/>
-          <a:lstStyle/>
-          <a:p>
-            <a:pPr algn="ctr"/>
-          </a:p>
-        </p:txBody>
-      </p:sp>
+      <p:pic>
+        <p:nvPicPr>
+          <p:cNvPr id="3" name="Picture 2" descr="logo_white.png"/>
+          <p:cNvPicPr>
+            <a:picLocks noChangeAspect="1"/>
+          </p:cNvPicPr>
+          <p:nvPr/>
+        </p:nvPicPr>
+        <p:blipFill>
+          <a:blip r:embed="rId2"/>
+          <a:stretch>
+            <a:fillRect/>
+          </a:stretch>
+        </p:blipFill>
+        <p:spPr>
+          <a:xfrm>
+            <a:off x="548640" y="502920"/>
+            <a:ext cx="2210068" cy="475488"/>
+          </a:xfrm>
+          <a:prstGeom prst="rect">
+            <a:avLst/>
+          </a:prstGeom>
+        </p:spPr>
+      </p:pic>
       <p:sp>
         <p:nvSpPr>
           <p:cNvPr id="4" name="Rectangle 3"/>
-          <p:cNvSpPr/>
-          <p:nvPr/>
-        </p:nvSpPr>
-        <p:spPr>
-          <a:xfrm>
-            <a:off x="625449" y="607162"/>
-            <a:ext cx="43891" cy="170078"/>
-          </a:xfrm>
-          <a:prstGeom prst="rect">
-            <a:avLst/>
-          </a:prstGeom>
-          <a:solidFill>
-            <a:srgbClr val="FFFFFF"/>
-          </a:solidFill>
-          <a:ln>
-            <a:noFill/>
-          </a:ln>
-          <a:effectLst/>
-        </p:spPr>
-        <p:style>
-          <a:lnRef idx="1">
-            <a:schemeClr val="accent1"/>
-          </a:lnRef>
-          <a:fillRef idx="3">
-            <a:schemeClr val="accent1"/>
-          </a:fillRef>
-          <a:effectRef idx="2">
-            <a:schemeClr val="accent1"/>
-          </a:effectRef>
-          <a:fontRef idx="minor">
-            <a:schemeClr val="lt1"/>
-          </a:fontRef>
-        </p:style>
-        <p:txBody>
-          <a:bodyPr rtlCol="0" anchor="ctr"/>
-          <a:lstStyle/>
-          <a:p>
-            <a:pPr algn="ctr"/>
-          </a:p>
-        </p:txBody>
-      </p:sp>
-      <p:sp>
-        <p:nvSpPr>
-          <p:cNvPr id="5" name="Rectangle 4"/>
-          <p:cNvSpPr/>
-          <p:nvPr/>
-        </p:nvSpPr>
-        <p:spPr>
-          <a:xfrm>
-            <a:off x="702258" y="502920"/>
-            <a:ext cx="43891" cy="274320"/>
-          </a:xfrm>
-          <a:prstGeom prst="rect">
-            <a:avLst/>
-          </a:prstGeom>
-          <a:solidFill>
-            <a:srgbClr val="FFFFFF"/>
-          </a:solidFill>
-          <a:ln>
-            <a:noFill/>
-          </a:ln>
-          <a:effectLst/>
-        </p:spPr>
-        <p:style>
-          <a:lnRef idx="1">
-            <a:schemeClr val="accent1"/>
-          </a:lnRef>
-          <a:fillRef idx="3">
-            <a:schemeClr val="accent1"/>
-          </a:fillRef>
-          <a:effectRef idx="2">
-            <a:schemeClr val="accent1"/>
-          </a:effectRef>
-          <a:fontRef idx="minor">
-            <a:schemeClr val="lt1"/>
-          </a:fontRef>
-        </p:style>
-        <p:txBody>
-          <a:bodyPr rtlCol="0" anchor="ctr"/>
-          <a:lstStyle/>
-          <a:p>
-            <a:pPr algn="ctr"/>
-          </a:p>
-        </p:txBody>
-      </p:sp>
-      <p:sp>
-        <p:nvSpPr>
-          <p:cNvPr id="6" name="Rectangle 5"/>
-          <p:cNvSpPr/>
-          <p:nvPr/>
-        </p:nvSpPr>
-        <p:spPr>
-          <a:xfrm>
-            <a:off x="779067" y="626364"/>
-            <a:ext cx="43891" cy="150876"/>
-          </a:xfrm>
-          <a:prstGeom prst="rect">
-            <a:avLst/>
-          </a:prstGeom>
-          <a:solidFill>
-            <a:srgbClr val="FFFFFF"/>
-          </a:solidFill>
-          <a:ln>
-            <a:noFill/>
-          </a:ln>
-          <a:effectLst/>
-        </p:spPr>
-        <p:style>
-          <a:lnRef idx="1">
-            <a:schemeClr val="accent1"/>
-          </a:lnRef>
-          <a:fillRef idx="3">
-            <a:schemeClr val="accent1"/>
-          </a:fillRef>
-          <a:effectRef idx="2">
-            <a:schemeClr val="accent1"/>
-          </a:effectRef>
-          <a:fontRef idx="minor">
-            <a:schemeClr val="lt1"/>
-          </a:fontRef>
-        </p:style>
-        <p:txBody>
-          <a:bodyPr rtlCol="0" anchor="ctr"/>
-          <a:lstStyle/>
-          <a:p>
-            <a:pPr algn="ctr"/>
-          </a:p>
-        </p:txBody>
-      </p:sp>
-      <p:sp>
-        <p:nvSpPr>
-          <p:cNvPr id="7" name="Rectangle 6"/>
-          <p:cNvSpPr/>
-          <p:nvPr/>
-        </p:nvSpPr>
-        <p:spPr>
-          <a:xfrm>
-            <a:off x="855876" y="700431"/>
-            <a:ext cx="43891" cy="76809"/>
-          </a:xfrm>
-          <a:prstGeom prst="rect">
-            <a:avLst/>
-          </a:prstGeom>
-          <a:solidFill>
-            <a:srgbClr val="FFFFFF"/>
-          </a:solidFill>
-          <a:ln>
-            <a:noFill/>
-          </a:ln>
-          <a:effectLst/>
-        </p:spPr>
-        <p:style>
-          <a:lnRef idx="1">
-            <a:schemeClr val="accent1"/>
-          </a:lnRef>
-          <a:fillRef idx="3">
-            <a:schemeClr val="accent1"/>
-          </a:fillRef>
-          <a:effectRef idx="2">
-            <a:schemeClr val="accent1"/>
-          </a:effectRef>
-          <a:fontRef idx="minor">
-            <a:schemeClr val="lt1"/>
-          </a:fontRef>
-        </p:style>
-        <p:txBody>
-          <a:bodyPr rtlCol="0" anchor="ctr"/>
-          <a:lstStyle/>
-          <a:p>
-            <a:pPr algn="ctr"/>
-          </a:p>
-        </p:txBody>
-      </p:sp>
-      <p:sp>
-        <p:nvSpPr>
-          <p:cNvPr id="8" name="TextBox 7"/>
-          <p:cNvSpPr txBox="1"/>
-          <p:nvPr/>
-        </p:nvSpPr>
-        <p:spPr>
-          <a:xfrm>
-            <a:off x="1024125" y="466344"/>
-            <a:ext cx="2926080" cy="457200"/>
-          </a:xfrm>
-          <a:prstGeom prst="rect">
-            <a:avLst/>
-          </a:prstGeom>
-          <a:noFill/>
-        </p:spPr>
-        <p:txBody>
-          <a:bodyPr wrap="square" anchor="t" lIns="0" rIns="0" tIns="0" bIns="0">
-            <a:spAutoFit/>
-          </a:bodyPr>
-          <a:lstStyle/>
-          <a:p>
-            <a:pPr>
-              <a:lnSpc>
-                <a:spcPct val="95000"/>
-              </a:lnSpc>
-              <a:spcAft>
-                <a:spcPts val="0"/>
-              </a:spcAft>
-            </a:pPr>
-            <a:r>
-              <a:rPr sz="1800" b="1">
-                <a:solidFill>
-                  <a:srgbClr val="FFFFFF"/>
-                </a:solidFill>
-                <a:latin typeface="Arial"/>
-              </a:rPr>
-              <a:t>Athanase</a:t>
-            </a:r>
-          </a:p>
-          <a:p>
-            <a:pPr>
-              <a:lnSpc>
-                <a:spcPct val="100000"/>
-              </a:lnSpc>
-              <a:spcAft>
-                <a:spcPts val="0"/>
-              </a:spcAft>
-            </a:pPr>
-            <a:r>
-              <a:rPr sz="650">
-                <a:solidFill>
-                  <a:srgbClr val="FFFFFF"/>
-                </a:solidFill>
-                <a:latin typeface="Arial"/>
-              </a:rPr>
-              <a:t>I N D U S T R I A L   P A R T N E R</a:t>
-            </a:r>
-          </a:p>
-        </p:txBody>
-      </p:sp>
-      <p:sp>
-        <p:nvSpPr>
-          <p:cNvPr id="9" name="Rectangle 8"/>
           <p:cNvSpPr/>
           <p:nvPr/>
         </p:nvSpPr>
@@ -3705,7 +3448,7 @@
       </p:sp>
       <p:sp>
         <p:nvSpPr>
-          <p:cNvPr id="10" name="TextBox 9"/>
+          <p:cNvPr id="5" name="TextBox 4"/>
           <p:cNvSpPr txBox="1"/>
           <p:nvPr/>
         </p:nvSpPr>
@@ -3738,7 +3481,7 @@
                 <a:solidFill>
                   <a:srgbClr val="FFFFFF"/>
                 </a:solidFill>
-                <a:latin typeface="Georgia"/>
+                <a:latin typeface="Times New Roman"/>
               </a:rPr>
               <a:t>Engaged Ownership as an Asset Class</a:t>
             </a:r>
@@ -3757,7 +3500,7 @@
                 <a:solidFill>
                   <a:srgbClr val="C9D3DD"/>
                 </a:solidFill>
-                <a:latin typeface="Georgia"/>
+                <a:latin typeface="Times New Roman"/>
               </a:rPr>
               <a:t>Why allocators should consider it — and why Athanase</a:t>
             </a:r>
@@ -3766,7 +3509,7 @@
       </p:sp>
       <p:sp>
         <p:nvSpPr>
-          <p:cNvPr id="11" name="TextBox 10"/>
+          <p:cNvPr id="6" name="TextBox 5"/>
           <p:cNvSpPr txBox="1"/>
           <p:nvPr/>
         </p:nvSpPr>
@@ -3799,7 +3542,7 @@
                 <a:solidFill>
                   <a:srgbClr val="8A99AB"/>
                 </a:solidFill>
-                <a:latin typeface="Arial"/>
+                <a:latin typeface="Calibri"/>
               </a:rPr>
               <a:t>An allocator briefing  ·  May 2026</a:t>
             </a:r>
@@ -3868,235 +3611,39 @@
           </a:p>
         </p:txBody>
       </p:sp>
-      <p:sp>
-        <p:nvSpPr>
-          <p:cNvPr id="3" name="Rectangle 2"/>
-          <p:cNvSpPr/>
-          <p:nvPr/>
-        </p:nvSpPr>
-        <p:spPr>
-          <a:xfrm>
-            <a:off x="502920" y="370515"/>
-            <a:ext cx="32186" cy="68397"/>
-          </a:xfrm>
-          <a:prstGeom prst="rect">
-            <a:avLst/>
-          </a:prstGeom>
-          <a:solidFill>
-            <a:srgbClr val="4A5D75"/>
-          </a:solidFill>
-          <a:ln>
-            <a:noFill/>
-          </a:ln>
-          <a:effectLst/>
-        </p:spPr>
-        <p:style>
-          <a:lnRef idx="1">
-            <a:schemeClr val="accent1"/>
-          </a:lnRef>
-          <a:fillRef idx="3">
-            <a:schemeClr val="accent1"/>
-          </a:fillRef>
-          <a:effectRef idx="2">
-            <a:schemeClr val="accent1"/>
-          </a:effectRef>
-          <a:fontRef idx="minor">
-            <a:schemeClr val="lt1"/>
-          </a:fontRef>
-        </p:style>
-        <p:txBody>
-          <a:bodyPr rtlCol="0" anchor="ctr"/>
-          <a:lstStyle/>
-          <a:p>
-            <a:pPr algn="ctr"/>
-          </a:p>
-        </p:txBody>
-      </p:sp>
-      <p:sp>
-        <p:nvSpPr>
-          <p:cNvPr id="4" name="Rectangle 3"/>
-          <p:cNvSpPr/>
-          <p:nvPr/>
-        </p:nvSpPr>
-        <p:spPr>
-          <a:xfrm>
-            <a:off x="559246" y="314188"/>
-            <a:ext cx="32186" cy="124724"/>
-          </a:xfrm>
-          <a:prstGeom prst="rect">
-            <a:avLst/>
-          </a:prstGeom>
-          <a:solidFill>
-            <a:srgbClr val="4A5D75"/>
-          </a:solidFill>
-          <a:ln>
-            <a:noFill/>
-          </a:ln>
-          <a:effectLst/>
-        </p:spPr>
-        <p:style>
-          <a:lnRef idx="1">
-            <a:schemeClr val="accent1"/>
-          </a:lnRef>
-          <a:fillRef idx="3">
-            <a:schemeClr val="accent1"/>
-          </a:fillRef>
-          <a:effectRef idx="2">
-            <a:schemeClr val="accent1"/>
-          </a:effectRef>
-          <a:fontRef idx="minor">
-            <a:schemeClr val="lt1"/>
-          </a:fontRef>
-        </p:style>
-        <p:txBody>
-          <a:bodyPr rtlCol="0" anchor="ctr"/>
-          <a:lstStyle/>
-          <a:p>
-            <a:pPr algn="ctr"/>
-          </a:p>
-        </p:txBody>
-      </p:sp>
-      <p:sp>
-        <p:nvSpPr>
-          <p:cNvPr id="5" name="Rectangle 4"/>
-          <p:cNvSpPr/>
-          <p:nvPr/>
-        </p:nvSpPr>
-        <p:spPr>
-          <a:xfrm>
-            <a:off x="615572" y="237744"/>
-            <a:ext cx="32186" cy="201168"/>
-          </a:xfrm>
-          <a:prstGeom prst="rect">
-            <a:avLst/>
-          </a:prstGeom>
-          <a:solidFill>
-            <a:srgbClr val="4A5D75"/>
-          </a:solidFill>
-          <a:ln>
-            <a:noFill/>
-          </a:ln>
-          <a:effectLst/>
-        </p:spPr>
-        <p:style>
-          <a:lnRef idx="1">
-            <a:schemeClr val="accent1"/>
-          </a:lnRef>
-          <a:fillRef idx="3">
-            <a:schemeClr val="accent1"/>
-          </a:fillRef>
-          <a:effectRef idx="2">
-            <a:schemeClr val="accent1"/>
-          </a:effectRef>
-          <a:fontRef idx="minor">
-            <a:schemeClr val="lt1"/>
-          </a:fontRef>
-        </p:style>
-        <p:txBody>
-          <a:bodyPr rtlCol="0" anchor="ctr"/>
-          <a:lstStyle/>
-          <a:p>
-            <a:pPr algn="ctr"/>
-          </a:p>
-        </p:txBody>
-      </p:sp>
-      <p:sp>
-        <p:nvSpPr>
-          <p:cNvPr id="6" name="Rectangle 5"/>
-          <p:cNvSpPr/>
-          <p:nvPr/>
-        </p:nvSpPr>
-        <p:spPr>
-          <a:xfrm>
-            <a:off x="671898" y="328270"/>
-            <a:ext cx="32186" cy="110642"/>
-          </a:xfrm>
-          <a:prstGeom prst="rect">
-            <a:avLst/>
-          </a:prstGeom>
-          <a:solidFill>
-            <a:srgbClr val="4A5D75"/>
-          </a:solidFill>
-          <a:ln>
-            <a:noFill/>
-          </a:ln>
-          <a:effectLst/>
-        </p:spPr>
-        <p:style>
-          <a:lnRef idx="1">
-            <a:schemeClr val="accent1"/>
-          </a:lnRef>
-          <a:fillRef idx="3">
-            <a:schemeClr val="accent1"/>
-          </a:fillRef>
-          <a:effectRef idx="2">
-            <a:schemeClr val="accent1"/>
-          </a:effectRef>
-          <a:fontRef idx="minor">
-            <a:schemeClr val="lt1"/>
-          </a:fontRef>
-        </p:style>
-        <p:txBody>
-          <a:bodyPr rtlCol="0" anchor="ctr"/>
-          <a:lstStyle/>
-          <a:p>
-            <a:pPr algn="ctr"/>
-          </a:p>
-        </p:txBody>
-      </p:sp>
-      <p:sp>
-        <p:nvSpPr>
-          <p:cNvPr id="7" name="Rectangle 6"/>
-          <p:cNvSpPr/>
-          <p:nvPr/>
-        </p:nvSpPr>
-        <p:spPr>
-          <a:xfrm>
-            <a:off x="728224" y="382585"/>
-            <a:ext cx="32186" cy="56327"/>
-          </a:xfrm>
-          <a:prstGeom prst="rect">
-            <a:avLst/>
-          </a:prstGeom>
-          <a:solidFill>
-            <a:srgbClr val="4A5D75"/>
-          </a:solidFill>
-          <a:ln>
-            <a:noFill/>
-          </a:ln>
-          <a:effectLst/>
-        </p:spPr>
-        <p:style>
-          <a:lnRef idx="1">
-            <a:schemeClr val="accent1"/>
-          </a:lnRef>
-          <a:fillRef idx="3">
-            <a:schemeClr val="accent1"/>
-          </a:fillRef>
-          <a:effectRef idx="2">
-            <a:schemeClr val="accent1"/>
-          </a:effectRef>
-          <a:fontRef idx="minor">
-            <a:schemeClr val="lt1"/>
-          </a:fontRef>
-        </p:style>
-        <p:txBody>
-          <a:bodyPr rtlCol="0" anchor="ctr"/>
-          <a:lstStyle/>
-          <a:p>
-            <a:pPr algn="ctr"/>
-          </a:p>
-        </p:txBody>
-      </p:sp>
-      <p:sp>
-        <p:nvSpPr>
-          <p:cNvPr id="8" name="TextBox 7"/>
+      <p:pic>
+        <p:nvPicPr>
+          <p:cNvPr id="3" name="Picture 2" descr="mark_dark.png"/>
+          <p:cNvPicPr>
+            <a:picLocks noChangeAspect="1"/>
+          </p:cNvPicPr>
+          <p:nvPr/>
+        </p:nvPicPr>
+        <p:blipFill>
+          <a:blip r:embed="rId2"/>
+          <a:stretch>
+            <a:fillRect/>
+          </a:stretch>
+        </p:blipFill>
+        <p:spPr>
+          <a:xfrm>
+            <a:off x="502920" y="219456"/>
+            <a:ext cx="280009" cy="237744"/>
+          </a:xfrm>
+          <a:prstGeom prst="rect">
+            <a:avLst/>
+          </a:prstGeom>
+        </p:spPr>
+      </p:pic>
+      <p:sp>
+        <p:nvSpPr>
+          <p:cNvPr id="4" name="TextBox 3"/>
           <p:cNvSpPr txBox="1"/>
           <p:nvPr/>
         </p:nvSpPr>
         <p:spPr>
           <a:xfrm>
-            <a:off x="1051560" y="219456"/>
+            <a:off x="896112" y="246888"/>
             <a:ext cx="6400800" cy="274320"/>
           </a:xfrm>
           <a:prstGeom prst="rect">
@@ -4123,7 +3670,7 @@
                 <a:solidFill>
                   <a:srgbClr val="4A5D75"/>
                 </a:solidFill>
-                <a:latin typeface="Arial"/>
+                <a:latin typeface="Calibri"/>
               </a:rPr>
               <a:t>Overview</a:t>
             </a:r>
@@ -4132,7 +3679,7 @@
       </p:sp>
       <p:sp>
         <p:nvSpPr>
-          <p:cNvPr id="9" name="Rectangle 8"/>
+          <p:cNvPr id="5" name="Rectangle 4"/>
           <p:cNvSpPr/>
           <p:nvPr/>
         </p:nvSpPr>
@@ -4176,7 +3723,7 @@
       </p:sp>
       <p:sp>
         <p:nvSpPr>
-          <p:cNvPr id="10" name="TextBox 9"/>
+          <p:cNvPr id="6" name="TextBox 5"/>
           <p:cNvSpPr txBox="1"/>
           <p:nvPr/>
         </p:nvSpPr>
@@ -4209,7 +3756,7 @@
                 <a:solidFill>
                   <a:srgbClr val="1E334E"/>
                 </a:solidFill>
-                <a:latin typeface="Georgia"/>
+                <a:latin typeface="Times New Roman"/>
               </a:rPr>
               <a:t>Athanase at a glance</a:t>
             </a:r>
@@ -4218,7 +3765,7 @@
       </p:sp>
       <p:sp>
         <p:nvSpPr>
-          <p:cNvPr id="11" name="TextBox 10"/>
+          <p:cNvPr id="7" name="TextBox 6"/>
           <p:cNvSpPr txBox="1"/>
           <p:nvPr/>
         </p:nvSpPr>
@@ -4251,7 +3798,7 @@
                 <a:solidFill>
                   <a:srgbClr val="9AA4B0"/>
                 </a:solidFill>
-                <a:latin typeface="Arial"/>
+                <a:latin typeface="Calibri"/>
               </a:rPr>
               <a:t>Strictly confidential          7</a:t>
             </a:r>
@@ -4260,7 +3807,7 @@
       </p:sp>
       <p:sp>
         <p:nvSpPr>
-          <p:cNvPr id="12" name="Rectangle 11"/>
+          <p:cNvPr id="8" name="Rectangle 7"/>
           <p:cNvSpPr/>
           <p:nvPr/>
         </p:nvSpPr>
@@ -4304,7 +3851,7 @@
       </p:sp>
       <p:sp>
         <p:nvSpPr>
-          <p:cNvPr id="13" name="TextBox 12"/>
+          <p:cNvPr id="9" name="TextBox 8"/>
           <p:cNvSpPr txBox="1"/>
           <p:nvPr/>
         </p:nvSpPr>
@@ -4337,7 +3884,7 @@
                 <a:solidFill>
                   <a:srgbClr val="1E334E"/>
                 </a:solidFill>
-                <a:latin typeface="Georgia"/>
+                <a:latin typeface="Times New Roman"/>
               </a:rPr>
               <a:t>40+</a:t>
             </a:r>
@@ -4356,7 +3903,7 @@
                 <a:solidFill>
                   <a:srgbClr val="5A636E"/>
                 </a:solidFill>
-                <a:latin typeface="Arial"/>
+                <a:latin typeface="Calibri"/>
               </a:rPr>
               <a:t>investments as</a:t>
             </a:r>
@@ -4375,7 +3922,7 @@
                 <a:solidFill>
                   <a:srgbClr val="5A636E"/>
                 </a:solidFill>
-                <a:latin typeface="Arial"/>
+                <a:latin typeface="Calibri"/>
               </a:rPr>
               <a:t>engaged owners</a:t>
             </a:r>
@@ -4384,7 +3931,7 @@
       </p:sp>
       <p:sp>
         <p:nvSpPr>
-          <p:cNvPr id="14" name="Rectangle 13"/>
+          <p:cNvPr id="10" name="Rectangle 9"/>
           <p:cNvSpPr/>
           <p:nvPr/>
         </p:nvSpPr>
@@ -4428,7 +3975,7 @@
       </p:sp>
       <p:sp>
         <p:nvSpPr>
-          <p:cNvPr id="15" name="TextBox 14"/>
+          <p:cNvPr id="11" name="TextBox 10"/>
           <p:cNvSpPr txBox="1"/>
           <p:nvPr/>
         </p:nvSpPr>
@@ -4461,7 +4008,7 @@
                 <a:solidFill>
                   <a:srgbClr val="1E334E"/>
                 </a:solidFill>
-                <a:latin typeface="Georgia"/>
+                <a:latin typeface="Times New Roman"/>
               </a:rPr>
               <a:t>18%</a:t>
             </a:r>
@@ -4480,7 +4027,7 @@
                 <a:solidFill>
                   <a:srgbClr val="5A636E"/>
                 </a:solidFill>
-                <a:latin typeface="Arial"/>
+                <a:latin typeface="Calibri"/>
               </a:rPr>
               <a:t>net annual IRR</a:t>
             </a:r>
@@ -4499,7 +4046,7 @@
                 <a:solidFill>
                   <a:srgbClr val="5A636E"/>
                 </a:solidFill>
-                <a:latin typeface="Arial"/>
+                <a:latin typeface="Calibri"/>
               </a:rPr>
               <a:t>since inception</a:t>
             </a:r>
@@ -4508,7 +4055,7 @@
       </p:sp>
       <p:sp>
         <p:nvSpPr>
-          <p:cNvPr id="16" name="Rectangle 15"/>
+          <p:cNvPr id="12" name="Rectangle 11"/>
           <p:cNvSpPr/>
           <p:nvPr/>
         </p:nvSpPr>
@@ -4552,7 +4099,7 @@
       </p:sp>
       <p:sp>
         <p:nvSpPr>
-          <p:cNvPr id="17" name="TextBox 16"/>
+          <p:cNvPr id="13" name="TextBox 12"/>
           <p:cNvSpPr txBox="1"/>
           <p:nvPr/>
         </p:nvSpPr>
@@ -4585,7 +4132,7 @@
                 <a:solidFill>
                   <a:srgbClr val="1E334E"/>
                 </a:solidFill>
-                <a:latin typeface="Georgia"/>
+                <a:latin typeface="Times New Roman"/>
               </a:rPr>
               <a:t>20 yrs</a:t>
             </a:r>
@@ -4604,7 +4151,7 @@
                 <a:solidFill>
                   <a:srgbClr val="5A636E"/>
                 </a:solidFill>
-                <a:latin typeface="Arial"/>
+                <a:latin typeface="Calibri"/>
               </a:rPr>
               <a:t>team working</a:t>
             </a:r>
@@ -4623,7 +4170,7 @@
                 <a:solidFill>
                   <a:srgbClr val="5A636E"/>
                 </a:solidFill>
-                <a:latin typeface="Arial"/>
+                <a:latin typeface="Calibri"/>
               </a:rPr>
               <a:t>together</a:t>
             </a:r>
@@ -4632,7 +4179,7 @@
       </p:sp>
       <p:sp>
         <p:nvSpPr>
-          <p:cNvPr id="18" name="Rectangle 17"/>
+          <p:cNvPr id="14" name="Rectangle 13"/>
           <p:cNvSpPr/>
           <p:nvPr/>
         </p:nvSpPr>
@@ -4676,7 +4223,7 @@
       </p:sp>
       <p:sp>
         <p:nvSpPr>
-          <p:cNvPr id="19" name="TextBox 18"/>
+          <p:cNvPr id="15" name="TextBox 14"/>
           <p:cNvSpPr txBox="1"/>
           <p:nvPr/>
         </p:nvSpPr>
@@ -4709,7 +4256,7 @@
                 <a:solidFill>
                   <a:srgbClr val="1E334E"/>
                 </a:solidFill>
-                <a:latin typeface="Georgia"/>
+                <a:latin typeface="Times New Roman"/>
               </a:rPr>
               <a:t>7.1%</a:t>
             </a:r>
@@ -4728,7 +4275,7 @@
                 <a:solidFill>
                   <a:srgbClr val="5A636E"/>
                 </a:solidFill>
-                <a:latin typeface="Arial"/>
+                <a:latin typeface="Calibri"/>
               </a:rPr>
               <a:t>minimum annual</a:t>
             </a:r>
@@ -4747,7 +4294,7 @@
                 <a:solidFill>
                   <a:srgbClr val="5A636E"/>
                 </a:solidFill>
-                <a:latin typeface="Arial"/>
+                <a:latin typeface="Calibri"/>
               </a:rPr>
               <a:t>net return*</a:t>
             </a:r>
@@ -4756,7 +4303,7 @@
       </p:sp>
       <p:sp>
         <p:nvSpPr>
-          <p:cNvPr id="20" name="TextBox 19"/>
+          <p:cNvPr id="16" name="TextBox 15"/>
           <p:cNvSpPr txBox="1"/>
           <p:nvPr/>
         </p:nvSpPr>
@@ -4789,7 +4336,7 @@
                 <a:solidFill>
                   <a:srgbClr val="4A5D75"/>
                 </a:solidFill>
-                <a:latin typeface="Arial"/>
+                <a:latin typeface="Calibri"/>
               </a:rPr>
               <a:t>›  </a:t>
             </a:r>
@@ -4798,7 +4345,7 @@
                 <a:solidFill>
                   <a:srgbClr val="1E334E"/>
                 </a:solidFill>
-                <a:latin typeface="Arial"/>
+                <a:latin typeface="Calibri"/>
               </a:rPr>
               <a:t>Average net return of 18.6%</a:t>
             </a:r>
@@ -4807,7 +4354,7 @@
                 <a:solidFill>
                   <a:srgbClr val="333840"/>
                 </a:solidFill>
-                <a:latin typeface="Arial"/>
+                <a:latin typeface="Calibri"/>
               </a:rPr>
               <a:t>  (17.1% vs MSCI IMI 7.6% since inception), regardless of entry month.</a:t>
             </a:r>
@@ -4826,7 +4373,7 @@
                 <a:solidFill>
                   <a:srgbClr val="4A5D75"/>
                 </a:solidFill>
-                <a:latin typeface="Arial"/>
+                <a:latin typeface="Calibri"/>
               </a:rPr>
               <a:t>›  </a:t>
             </a:r>
@@ -4835,7 +4382,7 @@
                 <a:solidFill>
                   <a:srgbClr val="1E334E"/>
                 </a:solidFill>
-                <a:latin typeface="Arial"/>
+                <a:latin typeface="Calibri"/>
               </a:rPr>
               <a:t>+14.5% EBITA growth</a:t>
             </a:r>
@@ -4844,7 +4391,7 @@
                 <a:solidFill>
                   <a:srgbClr val="333840"/>
                 </a:solidFill>
-                <a:latin typeface="Arial"/>
+                <a:latin typeface="Calibri"/>
               </a:rPr>
               <a:t>  in portfolio companies during the ownership period.</a:t>
             </a:r>
@@ -4863,7 +4410,7 @@
                 <a:solidFill>
                   <a:srgbClr val="4A5D75"/>
                 </a:solidFill>
-                <a:latin typeface="Arial"/>
+                <a:latin typeface="Calibri"/>
               </a:rPr>
               <a:t>›  </a:t>
             </a:r>
@@ -4872,7 +4419,7 @@
                 <a:solidFill>
                   <a:srgbClr val="1E334E"/>
                 </a:solidFill>
-                <a:latin typeface="Arial"/>
+                <a:latin typeface="Calibri"/>
               </a:rPr>
               <a:t>+0.2% in down markets</a:t>
             </a:r>
@@ -4881,7 +4428,7 @@
                 <a:solidFill>
                   <a:srgbClr val="333840"/>
                 </a:solidFill>
-                <a:latin typeface="Arial"/>
+                <a:latin typeface="Calibri"/>
               </a:rPr>
               <a:t>  versus the market at –1.7% — downside protection when it matters most.</a:t>
             </a:r>
@@ -4890,7 +4437,7 @@
       </p:sp>
       <p:sp>
         <p:nvSpPr>
-          <p:cNvPr id="21" name="TextBox 20"/>
+          <p:cNvPr id="17" name="TextBox 16"/>
           <p:cNvSpPr txBox="1"/>
           <p:nvPr/>
         </p:nvSpPr>
@@ -4923,7 +4470,7 @@
                 <a:solidFill>
                   <a:srgbClr val="9AA4B0"/>
                 </a:solidFill>
-                <a:latin typeface="Arial"/>
+                <a:latin typeface="Calibri"/>
               </a:rPr>
               <a:t>*Invested any month since 2006 and held to Dec 2025. Inception 2015-02-23.</a:t>
             </a:r>
@@ -4992,235 +4539,39 @@
           </a:p>
         </p:txBody>
       </p:sp>
-      <p:sp>
-        <p:nvSpPr>
-          <p:cNvPr id="3" name="Rectangle 2"/>
-          <p:cNvSpPr/>
-          <p:nvPr/>
-        </p:nvSpPr>
-        <p:spPr>
-          <a:xfrm>
-            <a:off x="502920" y="370515"/>
-            <a:ext cx="32186" cy="68397"/>
-          </a:xfrm>
-          <a:prstGeom prst="rect">
-            <a:avLst/>
-          </a:prstGeom>
-          <a:solidFill>
-            <a:srgbClr val="4A5D75"/>
-          </a:solidFill>
-          <a:ln>
-            <a:noFill/>
-          </a:ln>
-          <a:effectLst/>
-        </p:spPr>
-        <p:style>
-          <a:lnRef idx="1">
-            <a:schemeClr val="accent1"/>
-          </a:lnRef>
-          <a:fillRef idx="3">
-            <a:schemeClr val="accent1"/>
-          </a:fillRef>
-          <a:effectRef idx="2">
-            <a:schemeClr val="accent1"/>
-          </a:effectRef>
-          <a:fontRef idx="minor">
-            <a:schemeClr val="lt1"/>
-          </a:fontRef>
-        </p:style>
-        <p:txBody>
-          <a:bodyPr rtlCol="0" anchor="ctr"/>
-          <a:lstStyle/>
-          <a:p>
-            <a:pPr algn="ctr"/>
-          </a:p>
-        </p:txBody>
-      </p:sp>
-      <p:sp>
-        <p:nvSpPr>
-          <p:cNvPr id="4" name="Rectangle 3"/>
-          <p:cNvSpPr/>
-          <p:nvPr/>
-        </p:nvSpPr>
-        <p:spPr>
-          <a:xfrm>
-            <a:off x="559246" y="314188"/>
-            <a:ext cx="32186" cy="124724"/>
-          </a:xfrm>
-          <a:prstGeom prst="rect">
-            <a:avLst/>
-          </a:prstGeom>
-          <a:solidFill>
-            <a:srgbClr val="4A5D75"/>
-          </a:solidFill>
-          <a:ln>
-            <a:noFill/>
-          </a:ln>
-          <a:effectLst/>
-        </p:spPr>
-        <p:style>
-          <a:lnRef idx="1">
-            <a:schemeClr val="accent1"/>
-          </a:lnRef>
-          <a:fillRef idx="3">
-            <a:schemeClr val="accent1"/>
-          </a:fillRef>
-          <a:effectRef idx="2">
-            <a:schemeClr val="accent1"/>
-          </a:effectRef>
-          <a:fontRef idx="minor">
-            <a:schemeClr val="lt1"/>
-          </a:fontRef>
-        </p:style>
-        <p:txBody>
-          <a:bodyPr rtlCol="0" anchor="ctr"/>
-          <a:lstStyle/>
-          <a:p>
-            <a:pPr algn="ctr"/>
-          </a:p>
-        </p:txBody>
-      </p:sp>
-      <p:sp>
-        <p:nvSpPr>
-          <p:cNvPr id="5" name="Rectangle 4"/>
-          <p:cNvSpPr/>
-          <p:nvPr/>
-        </p:nvSpPr>
-        <p:spPr>
-          <a:xfrm>
-            <a:off x="615572" y="237744"/>
-            <a:ext cx="32186" cy="201168"/>
-          </a:xfrm>
-          <a:prstGeom prst="rect">
-            <a:avLst/>
-          </a:prstGeom>
-          <a:solidFill>
-            <a:srgbClr val="4A5D75"/>
-          </a:solidFill>
-          <a:ln>
-            <a:noFill/>
-          </a:ln>
-          <a:effectLst/>
-        </p:spPr>
-        <p:style>
-          <a:lnRef idx="1">
-            <a:schemeClr val="accent1"/>
-          </a:lnRef>
-          <a:fillRef idx="3">
-            <a:schemeClr val="accent1"/>
-          </a:fillRef>
-          <a:effectRef idx="2">
-            <a:schemeClr val="accent1"/>
-          </a:effectRef>
-          <a:fontRef idx="minor">
-            <a:schemeClr val="lt1"/>
-          </a:fontRef>
-        </p:style>
-        <p:txBody>
-          <a:bodyPr rtlCol="0" anchor="ctr"/>
-          <a:lstStyle/>
-          <a:p>
-            <a:pPr algn="ctr"/>
-          </a:p>
-        </p:txBody>
-      </p:sp>
-      <p:sp>
-        <p:nvSpPr>
-          <p:cNvPr id="6" name="Rectangle 5"/>
-          <p:cNvSpPr/>
-          <p:nvPr/>
-        </p:nvSpPr>
-        <p:spPr>
-          <a:xfrm>
-            <a:off x="671898" y="328270"/>
-            <a:ext cx="32186" cy="110642"/>
-          </a:xfrm>
-          <a:prstGeom prst="rect">
-            <a:avLst/>
-          </a:prstGeom>
-          <a:solidFill>
-            <a:srgbClr val="4A5D75"/>
-          </a:solidFill>
-          <a:ln>
-            <a:noFill/>
-          </a:ln>
-          <a:effectLst/>
-        </p:spPr>
-        <p:style>
-          <a:lnRef idx="1">
-            <a:schemeClr val="accent1"/>
-          </a:lnRef>
-          <a:fillRef idx="3">
-            <a:schemeClr val="accent1"/>
-          </a:fillRef>
-          <a:effectRef idx="2">
-            <a:schemeClr val="accent1"/>
-          </a:effectRef>
-          <a:fontRef idx="minor">
-            <a:schemeClr val="lt1"/>
-          </a:fontRef>
-        </p:style>
-        <p:txBody>
-          <a:bodyPr rtlCol="0" anchor="ctr"/>
-          <a:lstStyle/>
-          <a:p>
-            <a:pPr algn="ctr"/>
-          </a:p>
-        </p:txBody>
-      </p:sp>
-      <p:sp>
-        <p:nvSpPr>
-          <p:cNvPr id="7" name="Rectangle 6"/>
-          <p:cNvSpPr/>
-          <p:nvPr/>
-        </p:nvSpPr>
-        <p:spPr>
-          <a:xfrm>
-            <a:off x="728224" y="382585"/>
-            <a:ext cx="32186" cy="56327"/>
-          </a:xfrm>
-          <a:prstGeom prst="rect">
-            <a:avLst/>
-          </a:prstGeom>
-          <a:solidFill>
-            <a:srgbClr val="4A5D75"/>
-          </a:solidFill>
-          <a:ln>
-            <a:noFill/>
-          </a:ln>
-          <a:effectLst/>
-        </p:spPr>
-        <p:style>
-          <a:lnRef idx="1">
-            <a:schemeClr val="accent1"/>
-          </a:lnRef>
-          <a:fillRef idx="3">
-            <a:schemeClr val="accent1"/>
-          </a:fillRef>
-          <a:effectRef idx="2">
-            <a:schemeClr val="accent1"/>
-          </a:effectRef>
-          <a:fontRef idx="minor">
-            <a:schemeClr val="lt1"/>
-          </a:fontRef>
-        </p:style>
-        <p:txBody>
-          <a:bodyPr rtlCol="0" anchor="ctr"/>
-          <a:lstStyle/>
-          <a:p>
-            <a:pPr algn="ctr"/>
-          </a:p>
-        </p:txBody>
-      </p:sp>
-      <p:sp>
-        <p:nvSpPr>
-          <p:cNvPr id="8" name="TextBox 7"/>
+      <p:pic>
+        <p:nvPicPr>
+          <p:cNvPr id="3" name="Picture 2" descr="mark_dark.png"/>
+          <p:cNvPicPr>
+            <a:picLocks noChangeAspect="1"/>
+          </p:cNvPicPr>
+          <p:nvPr/>
+        </p:nvPicPr>
+        <p:blipFill>
+          <a:blip r:embed="rId2"/>
+          <a:stretch>
+            <a:fillRect/>
+          </a:stretch>
+        </p:blipFill>
+        <p:spPr>
+          <a:xfrm>
+            <a:off x="502920" y="219456"/>
+            <a:ext cx="280009" cy="237744"/>
+          </a:xfrm>
+          <a:prstGeom prst="rect">
+            <a:avLst/>
+          </a:prstGeom>
+        </p:spPr>
+      </p:pic>
+      <p:sp>
+        <p:nvSpPr>
+          <p:cNvPr id="4" name="TextBox 3"/>
           <p:cNvSpPr txBox="1"/>
           <p:nvPr/>
         </p:nvSpPr>
         <p:spPr>
           <a:xfrm>
-            <a:off x="1051560" y="219456"/>
+            <a:off x="896112" y="246888"/>
             <a:ext cx="6400800" cy="274320"/>
           </a:xfrm>
           <a:prstGeom prst="rect">
@@ -5247,7 +4598,7 @@
                 <a:solidFill>
                   <a:srgbClr val="4A5D75"/>
                 </a:solidFill>
-                <a:latin typeface="Arial"/>
+                <a:latin typeface="Calibri"/>
               </a:rPr>
               <a:t>Experience</a:t>
             </a:r>
@@ -5256,7 +4607,7 @@
       </p:sp>
       <p:sp>
         <p:nvSpPr>
-          <p:cNvPr id="9" name="Rectangle 8"/>
+          <p:cNvPr id="5" name="Rectangle 4"/>
           <p:cNvSpPr/>
           <p:nvPr/>
         </p:nvSpPr>
@@ -5300,7 +4651,7 @@
       </p:sp>
       <p:sp>
         <p:nvSpPr>
-          <p:cNvPr id="10" name="TextBox 9"/>
+          <p:cNvPr id="6" name="TextBox 5"/>
           <p:cNvSpPr txBox="1"/>
           <p:nvPr/>
         </p:nvSpPr>
@@ -5333,7 +4684,7 @@
                 <a:solidFill>
                   <a:srgbClr val="1E334E"/>
                 </a:solidFill>
-                <a:latin typeface="Georgia"/>
+                <a:latin typeface="Times New Roman"/>
               </a:rPr>
               <a:t>An integrated team, 20 years together</a:t>
             </a:r>
@@ -5342,7 +4693,7 @@
       </p:sp>
       <p:sp>
         <p:nvSpPr>
-          <p:cNvPr id="11" name="TextBox 10"/>
+          <p:cNvPr id="7" name="TextBox 6"/>
           <p:cNvSpPr txBox="1"/>
           <p:nvPr/>
         </p:nvSpPr>
@@ -5375,7 +4726,7 @@
                 <a:solidFill>
                   <a:srgbClr val="5A636E"/>
                 </a:solidFill>
-                <a:latin typeface="Arial"/>
+                <a:latin typeface="Calibri"/>
               </a:rPr>
               <a:t>In a world of specialists, a rare unit that has the operating experience to control the outcome.</a:t>
             </a:r>
@@ -5384,7 +4735,7 @@
       </p:sp>
       <p:sp>
         <p:nvSpPr>
-          <p:cNvPr id="12" name="TextBox 11"/>
+          <p:cNvPr id="8" name="TextBox 7"/>
           <p:cNvSpPr txBox="1"/>
           <p:nvPr/>
         </p:nvSpPr>
@@ -5417,7 +4768,7 @@
                 <a:solidFill>
                   <a:srgbClr val="9AA4B0"/>
                 </a:solidFill>
-                <a:latin typeface="Arial"/>
+                <a:latin typeface="Calibri"/>
               </a:rPr>
               <a:t>Strictly confidential          8</a:t>
             </a:r>
@@ -5426,7 +4777,7 @@
       </p:sp>
       <p:sp>
         <p:nvSpPr>
-          <p:cNvPr id="13" name="TextBox 12"/>
+          <p:cNvPr id="9" name="TextBox 8"/>
           <p:cNvSpPr txBox="1"/>
           <p:nvPr/>
         </p:nvSpPr>
@@ -5459,7 +4810,7 @@
                 <a:solidFill>
                   <a:srgbClr val="4A5D75"/>
                 </a:solidFill>
-                <a:latin typeface="Georgia"/>
+                <a:latin typeface="Times New Roman"/>
               </a:rPr>
               <a:t>Heritage:  Öresund (1992)  →  Custos (1996)  →  Creades  →  Athanase Industrial Partner (2015)</a:t>
             </a:r>
@@ -5468,7 +4819,7 @@
       </p:sp>
       <p:sp>
         <p:nvSpPr>
-          <p:cNvPr id="14" name="TextBox 13"/>
+          <p:cNvPr id="10" name="TextBox 9"/>
           <p:cNvSpPr txBox="1"/>
           <p:nvPr/>
         </p:nvSpPr>
@@ -5501,7 +4852,7 @@
                 <a:solidFill>
                   <a:srgbClr val="4A5D75"/>
                 </a:solidFill>
-                <a:latin typeface="Arial"/>
+                <a:latin typeface="Calibri"/>
               </a:rPr>
               <a:t>›  </a:t>
             </a:r>
@@ -5510,7 +4861,7 @@
                 <a:solidFill>
                   <a:srgbClr val="1E334E"/>
                 </a:solidFill>
-                <a:latin typeface="Arial"/>
+                <a:latin typeface="Calibri"/>
               </a:rPr>
               <a:t>40+ companies managed,</a:t>
             </a:r>
@@ -5519,7 +4870,7 @@
                 <a:solidFill>
                   <a:srgbClr val="333840"/>
                 </a:solidFill>
-                <a:latin typeface="Arial"/>
+                <a:latin typeface="Calibri"/>
               </a:rPr>
               <a:t>  with a proven ability to tell a “strong core” from a “prestige trap”.</a:t>
             </a:r>
@@ -5538,7 +4889,7 @@
                 <a:solidFill>
                   <a:srgbClr val="4A5D75"/>
                 </a:solidFill>
-                <a:latin typeface="Arial"/>
+                <a:latin typeface="Calibri"/>
               </a:rPr>
               <a:t>›  </a:t>
             </a:r>
@@ -5547,7 +4898,7 @@
                 <a:solidFill>
                   <a:srgbClr val="1E334E"/>
                 </a:solidFill>
-                <a:latin typeface="Arial"/>
+                <a:latin typeface="Calibri"/>
               </a:rPr>
               <a:t>30+ public board seats</a:t>
             </a:r>
@@ -5556,7 +4907,7 @@
                 <a:solidFill>
                   <a:srgbClr val="333840"/>
                 </a:solidFill>
-                <a:latin typeface="Arial"/>
+                <a:latin typeface="Calibri"/>
               </a:rPr>
               <a:t>  — real experience mandating pivots and protecting shareholder interests, not writing engagement letters.</a:t>
             </a:r>
@@ -5575,7 +4926,7 @@
                 <a:solidFill>
                   <a:srgbClr val="4A5D75"/>
                 </a:solidFill>
-                <a:latin typeface="Arial"/>
+                <a:latin typeface="Calibri"/>
               </a:rPr>
               <a:t>›  </a:t>
             </a:r>
@@ -5584,7 +4935,7 @@
                 <a:solidFill>
                   <a:srgbClr val="1E334E"/>
                 </a:solidFill>
-                <a:latin typeface="Arial"/>
+                <a:latin typeface="Calibri"/>
               </a:rPr>
               <a:t>A dual lens:</a:t>
             </a:r>
@@ -5593,7 +4944,7 @@
                 <a:solidFill>
                   <a:srgbClr val="333840"/>
                 </a:solidFill>
-                <a:latin typeface="Arial"/>
+                <a:latin typeface="Calibri"/>
               </a:rPr>
               <a:t>  a forensic investing lens to find the value and a C-suite operating lens that understands the “how” of execution.</a:t>
             </a:r>
@@ -5612,7 +4963,7 @@
                 <a:solidFill>
                   <a:srgbClr val="4A5D75"/>
                 </a:solidFill>
-                <a:latin typeface="Arial"/>
+                <a:latin typeface="Calibri"/>
               </a:rPr>
               <a:t>›  </a:t>
             </a:r>
@@ -5621,7 +4972,7 @@
                 <a:solidFill>
                   <a:srgbClr val="1E334E"/>
                 </a:solidFill>
-                <a:latin typeface="Arial"/>
+                <a:latin typeface="Calibri"/>
               </a:rPr>
               <a:t>Skin in the game.</a:t>
             </a:r>
@@ -5630,7 +4981,7 @@
                 <a:solidFill>
                   <a:srgbClr val="333840"/>
                 </a:solidFill>
-                <a:latin typeface="Arial"/>
+                <a:latin typeface="Calibri"/>
               </a:rPr>
               <a:t>  The team uses Athanase as its own investment vehicle and shares in the success economics.</a:t>
             </a:r>
@@ -5649,7 +5000,7 @@
                 <a:solidFill>
                   <a:srgbClr val="4A5D75"/>
                 </a:solidFill>
-                <a:latin typeface="Arial"/>
+                <a:latin typeface="Calibri"/>
               </a:rPr>
               <a:t>›  </a:t>
             </a:r>
@@ -5658,7 +5009,7 @@
                 <a:solidFill>
                   <a:srgbClr val="1E334E"/>
                 </a:solidFill>
-                <a:latin typeface="Arial"/>
+                <a:latin typeface="Calibri"/>
               </a:rPr>
               <a:t>Institutional memory.</a:t>
             </a:r>
@@ -5667,7 +5018,7 @@
                 <a:solidFill>
                   <a:srgbClr val="333840"/>
                 </a:solidFill>
-                <a:latin typeface="Arial"/>
+                <a:latin typeface="Calibri"/>
               </a:rPr>
               <a:t>  Multiple market cycles together eliminate key-person risk and prevent repeating historical mistakes.</a:t>
             </a:r>
@@ -5736,235 +5087,39 @@
           </a:p>
         </p:txBody>
       </p:sp>
-      <p:sp>
-        <p:nvSpPr>
-          <p:cNvPr id="3" name="Rectangle 2"/>
-          <p:cNvSpPr/>
-          <p:nvPr/>
-        </p:nvSpPr>
-        <p:spPr>
-          <a:xfrm>
-            <a:off x="502920" y="370515"/>
-            <a:ext cx="32186" cy="68397"/>
-          </a:xfrm>
-          <a:prstGeom prst="rect">
-            <a:avLst/>
-          </a:prstGeom>
-          <a:solidFill>
-            <a:srgbClr val="4A5D75"/>
-          </a:solidFill>
-          <a:ln>
-            <a:noFill/>
-          </a:ln>
-          <a:effectLst/>
-        </p:spPr>
-        <p:style>
-          <a:lnRef idx="1">
-            <a:schemeClr val="accent1"/>
-          </a:lnRef>
-          <a:fillRef idx="3">
-            <a:schemeClr val="accent1"/>
-          </a:fillRef>
-          <a:effectRef idx="2">
-            <a:schemeClr val="accent1"/>
-          </a:effectRef>
-          <a:fontRef idx="minor">
-            <a:schemeClr val="lt1"/>
-          </a:fontRef>
-        </p:style>
-        <p:txBody>
-          <a:bodyPr rtlCol="0" anchor="ctr"/>
-          <a:lstStyle/>
-          <a:p>
-            <a:pPr algn="ctr"/>
-          </a:p>
-        </p:txBody>
-      </p:sp>
-      <p:sp>
-        <p:nvSpPr>
-          <p:cNvPr id="4" name="Rectangle 3"/>
-          <p:cNvSpPr/>
-          <p:nvPr/>
-        </p:nvSpPr>
-        <p:spPr>
-          <a:xfrm>
-            <a:off x="559246" y="314188"/>
-            <a:ext cx="32186" cy="124724"/>
-          </a:xfrm>
-          <a:prstGeom prst="rect">
-            <a:avLst/>
-          </a:prstGeom>
-          <a:solidFill>
-            <a:srgbClr val="4A5D75"/>
-          </a:solidFill>
-          <a:ln>
-            <a:noFill/>
-          </a:ln>
-          <a:effectLst/>
-        </p:spPr>
-        <p:style>
-          <a:lnRef idx="1">
-            <a:schemeClr val="accent1"/>
-          </a:lnRef>
-          <a:fillRef idx="3">
-            <a:schemeClr val="accent1"/>
-          </a:fillRef>
-          <a:effectRef idx="2">
-            <a:schemeClr val="accent1"/>
-          </a:effectRef>
-          <a:fontRef idx="minor">
-            <a:schemeClr val="lt1"/>
-          </a:fontRef>
-        </p:style>
-        <p:txBody>
-          <a:bodyPr rtlCol="0" anchor="ctr"/>
-          <a:lstStyle/>
-          <a:p>
-            <a:pPr algn="ctr"/>
-          </a:p>
-        </p:txBody>
-      </p:sp>
-      <p:sp>
-        <p:nvSpPr>
-          <p:cNvPr id="5" name="Rectangle 4"/>
-          <p:cNvSpPr/>
-          <p:nvPr/>
-        </p:nvSpPr>
-        <p:spPr>
-          <a:xfrm>
-            <a:off x="615572" y="237744"/>
-            <a:ext cx="32186" cy="201168"/>
-          </a:xfrm>
-          <a:prstGeom prst="rect">
-            <a:avLst/>
-          </a:prstGeom>
-          <a:solidFill>
-            <a:srgbClr val="4A5D75"/>
-          </a:solidFill>
-          <a:ln>
-            <a:noFill/>
-          </a:ln>
-          <a:effectLst/>
-        </p:spPr>
-        <p:style>
-          <a:lnRef idx="1">
-            <a:schemeClr val="accent1"/>
-          </a:lnRef>
-          <a:fillRef idx="3">
-            <a:schemeClr val="accent1"/>
-          </a:fillRef>
-          <a:effectRef idx="2">
-            <a:schemeClr val="accent1"/>
-          </a:effectRef>
-          <a:fontRef idx="minor">
-            <a:schemeClr val="lt1"/>
-          </a:fontRef>
-        </p:style>
-        <p:txBody>
-          <a:bodyPr rtlCol="0" anchor="ctr"/>
-          <a:lstStyle/>
-          <a:p>
-            <a:pPr algn="ctr"/>
-          </a:p>
-        </p:txBody>
-      </p:sp>
-      <p:sp>
-        <p:nvSpPr>
-          <p:cNvPr id="6" name="Rectangle 5"/>
-          <p:cNvSpPr/>
-          <p:nvPr/>
-        </p:nvSpPr>
-        <p:spPr>
-          <a:xfrm>
-            <a:off x="671898" y="328270"/>
-            <a:ext cx="32186" cy="110642"/>
-          </a:xfrm>
-          <a:prstGeom prst="rect">
-            <a:avLst/>
-          </a:prstGeom>
-          <a:solidFill>
-            <a:srgbClr val="4A5D75"/>
-          </a:solidFill>
-          <a:ln>
-            <a:noFill/>
-          </a:ln>
-          <a:effectLst/>
-        </p:spPr>
-        <p:style>
-          <a:lnRef idx="1">
-            <a:schemeClr val="accent1"/>
-          </a:lnRef>
-          <a:fillRef idx="3">
-            <a:schemeClr val="accent1"/>
-          </a:fillRef>
-          <a:effectRef idx="2">
-            <a:schemeClr val="accent1"/>
-          </a:effectRef>
-          <a:fontRef idx="minor">
-            <a:schemeClr val="lt1"/>
-          </a:fontRef>
-        </p:style>
-        <p:txBody>
-          <a:bodyPr rtlCol="0" anchor="ctr"/>
-          <a:lstStyle/>
-          <a:p>
-            <a:pPr algn="ctr"/>
-          </a:p>
-        </p:txBody>
-      </p:sp>
-      <p:sp>
-        <p:nvSpPr>
-          <p:cNvPr id="7" name="Rectangle 6"/>
-          <p:cNvSpPr/>
-          <p:nvPr/>
-        </p:nvSpPr>
-        <p:spPr>
-          <a:xfrm>
-            <a:off x="728224" y="382585"/>
-            <a:ext cx="32186" cy="56327"/>
-          </a:xfrm>
-          <a:prstGeom prst="rect">
-            <a:avLst/>
-          </a:prstGeom>
-          <a:solidFill>
-            <a:srgbClr val="4A5D75"/>
-          </a:solidFill>
-          <a:ln>
-            <a:noFill/>
-          </a:ln>
-          <a:effectLst/>
-        </p:spPr>
-        <p:style>
-          <a:lnRef idx="1">
-            <a:schemeClr val="accent1"/>
-          </a:lnRef>
-          <a:fillRef idx="3">
-            <a:schemeClr val="accent1"/>
-          </a:fillRef>
-          <a:effectRef idx="2">
-            <a:schemeClr val="accent1"/>
-          </a:effectRef>
-          <a:fontRef idx="minor">
-            <a:schemeClr val="lt1"/>
-          </a:fontRef>
-        </p:style>
-        <p:txBody>
-          <a:bodyPr rtlCol="0" anchor="ctr"/>
-          <a:lstStyle/>
-          <a:p>
-            <a:pPr algn="ctr"/>
-          </a:p>
-        </p:txBody>
-      </p:sp>
-      <p:sp>
-        <p:nvSpPr>
-          <p:cNvPr id="8" name="TextBox 7"/>
+      <p:pic>
+        <p:nvPicPr>
+          <p:cNvPr id="3" name="Picture 2" descr="mark_dark.png"/>
+          <p:cNvPicPr>
+            <a:picLocks noChangeAspect="1"/>
+          </p:cNvPicPr>
+          <p:nvPr/>
+        </p:nvPicPr>
+        <p:blipFill>
+          <a:blip r:embed="rId2"/>
+          <a:stretch>
+            <a:fillRect/>
+          </a:stretch>
+        </p:blipFill>
+        <p:spPr>
+          <a:xfrm>
+            <a:off x="502920" y="219456"/>
+            <a:ext cx="280009" cy="237744"/>
+          </a:xfrm>
+          <a:prstGeom prst="rect">
+            <a:avLst/>
+          </a:prstGeom>
+        </p:spPr>
+      </p:pic>
+      <p:sp>
+        <p:nvSpPr>
+          <p:cNvPr id="4" name="TextBox 3"/>
           <p:cNvSpPr txBox="1"/>
           <p:nvPr/>
         </p:nvSpPr>
         <p:spPr>
           <a:xfrm>
-            <a:off x="1051560" y="219456"/>
+            <a:off x="896112" y="246888"/>
             <a:ext cx="6400800" cy="274320"/>
           </a:xfrm>
           <a:prstGeom prst="rect">
@@ -5991,7 +5146,7 @@
                 <a:solidFill>
                   <a:srgbClr val="4A5D75"/>
                 </a:solidFill>
-                <a:latin typeface="Arial"/>
+                <a:latin typeface="Calibri"/>
               </a:rPr>
               <a:t>Market Opportunity</a:t>
             </a:r>
@@ -6000,7 +5155,7 @@
       </p:sp>
       <p:sp>
         <p:nvSpPr>
-          <p:cNvPr id="9" name="Rectangle 8"/>
+          <p:cNvPr id="5" name="Rectangle 4"/>
           <p:cNvSpPr/>
           <p:nvPr/>
         </p:nvSpPr>
@@ -6044,7 +5199,7 @@
       </p:sp>
       <p:sp>
         <p:nvSpPr>
-          <p:cNvPr id="10" name="TextBox 9"/>
+          <p:cNvPr id="6" name="TextBox 5"/>
           <p:cNvSpPr txBox="1"/>
           <p:nvPr/>
         </p:nvSpPr>
@@ -6077,7 +5232,7 @@
                 <a:solidFill>
                   <a:srgbClr val="1E334E"/>
                 </a:solidFill>
-                <a:latin typeface="Georgia"/>
+                <a:latin typeface="Times New Roman"/>
               </a:rPr>
               <a:t>The inefficiency Athanase harvests</a:t>
             </a:r>
@@ -6086,7 +5241,7 @@
       </p:sp>
       <p:sp>
         <p:nvSpPr>
-          <p:cNvPr id="11" name="TextBox 10"/>
+          <p:cNvPr id="7" name="TextBox 6"/>
           <p:cNvSpPr txBox="1"/>
           <p:nvPr/>
         </p:nvSpPr>
@@ -6119,7 +5274,7 @@
                 <a:solidFill>
                   <a:srgbClr val="5A636E"/>
                 </a:solidFill>
-                <a:latin typeface="Arial"/>
+                <a:latin typeface="Calibri"/>
               </a:rPr>
               <a:t>Corporate decay is structural — it continuously recreates low-risk, high-return entry points.</a:t>
             </a:r>
@@ -6128,7 +5283,7 @@
       </p:sp>
       <p:sp>
         <p:nvSpPr>
-          <p:cNvPr id="12" name="TextBox 11"/>
+          <p:cNvPr id="8" name="TextBox 7"/>
           <p:cNvSpPr txBox="1"/>
           <p:nvPr/>
         </p:nvSpPr>
@@ -6161,7 +5316,7 @@
                 <a:solidFill>
                   <a:srgbClr val="9AA4B0"/>
                 </a:solidFill>
-                <a:latin typeface="Arial"/>
+                <a:latin typeface="Calibri"/>
               </a:rPr>
               <a:t>Strictly confidential          9</a:t>
             </a:r>
@@ -6170,7 +5325,7 @@
       </p:sp>
       <p:sp>
         <p:nvSpPr>
-          <p:cNvPr id="13" name="TextBox 12"/>
+          <p:cNvPr id="9" name="TextBox 8"/>
           <p:cNvSpPr txBox="1"/>
           <p:nvPr/>
         </p:nvSpPr>
@@ -6203,7 +5358,7 @@
                 <a:solidFill>
                   <a:srgbClr val="4A5D75"/>
                 </a:solidFill>
-                <a:latin typeface="Arial"/>
+                <a:latin typeface="Calibri"/>
               </a:rPr>
               <a:t>›  </a:t>
             </a:r>
@@ -6212,7 +5367,7 @@
                 <a:solidFill>
                   <a:srgbClr val="1E334E"/>
                 </a:solidFill>
-                <a:latin typeface="Arial"/>
+                <a:latin typeface="Calibri"/>
               </a:rPr>
               <a:t>Duration mismatch.</a:t>
             </a:r>
@@ -6221,7 +5376,7 @@
                 <a:solidFill>
                   <a:srgbClr val="333840"/>
                 </a:solidFill>
-                <a:latin typeface="Arial"/>
+                <a:latin typeface="Calibri"/>
               </a:rPr>
               <a:t>  CEOs run 7–8 year defensive cycles while moats erode at hyper-speed; an 80%-correct strategy decays to ~50% efficient.</a:t>
             </a:r>
@@ -6240,7 +5395,7 @@
                 <a:solidFill>
                   <a:srgbClr val="4A5D75"/>
                 </a:solidFill>
-                <a:latin typeface="Arial"/>
+                <a:latin typeface="Calibri"/>
               </a:rPr>
               <a:t>›  </a:t>
             </a:r>
@@ -6249,7 +5404,7 @@
                 <a:solidFill>
                   <a:srgbClr val="1E334E"/>
                 </a:solidFill>
-                <a:latin typeface="Arial"/>
+                <a:latin typeface="Calibri"/>
               </a:rPr>
               <a:t>The prestige trap.</a:t>
             </a:r>
@@ -6258,7 +5413,7 @@
                 <a:solidFill>
                   <a:srgbClr val="333840"/>
                 </a:solidFill>
-                <a:latin typeface="Arial"/>
+                <a:latin typeface="Calibri"/>
               </a:rPr>
               <a:t>  Empire-building and the sunk-cost fallacy lead management to double down on unprofitable ventures.</a:t>
             </a:r>
@@ -6277,7 +5432,7 @@
                 <a:solidFill>
                   <a:srgbClr val="4A5D75"/>
                 </a:solidFill>
-                <a:latin typeface="Arial"/>
+                <a:latin typeface="Calibri"/>
               </a:rPr>
               <a:t>›  </a:t>
             </a:r>
@@ -6286,7 +5441,7 @@
                 <a:solidFill>
                   <a:srgbClr val="1E334E"/>
                 </a:solidFill>
-                <a:latin typeface="Arial"/>
+                <a:latin typeface="Calibri"/>
               </a:rPr>
               <a:t>Shareholder exhaustion.</a:t>
             </a:r>
@@ -6295,7 +5450,7 @@
                 <a:solidFill>
                   <a:srgbClr val="333840"/>
                 </a:solidFill>
-                <a:latin typeface="Arial"/>
+                <a:latin typeface="Calibri"/>
               </a:rPr>
               <a:t>  As patience runs out, price hits a long-term low and liquidity dries up — Athanase becomes the “buyer of last resort” at a discount.</a:t>
             </a:r>
@@ -6314,7 +5469,7 @@
                 <a:solidFill>
                   <a:srgbClr val="4A5D75"/>
                 </a:solidFill>
-                <a:latin typeface="Arial"/>
+                <a:latin typeface="Calibri"/>
               </a:rPr>
               <a:t>›  </a:t>
             </a:r>
@@ -6323,7 +5478,7 @@
                 <a:solidFill>
                   <a:srgbClr val="1E334E"/>
                 </a:solidFill>
-                <a:latin typeface="Arial"/>
+                <a:latin typeface="Calibri"/>
               </a:rPr>
               <a:t>Low competition.</a:t>
             </a:r>
@@ -6332,7 +5487,7 @@
                 <a:solidFill>
                   <a:srgbClr val="333840"/>
                 </a:solidFill>
-                <a:latin typeface="Arial"/>
+                <a:latin typeface="Calibri"/>
               </a:rPr>
               <a:t>  Passive buys the most expensive names; active managers wait for proof; PE needs 10x the capital — leaving these bargains open.</a:t>
             </a:r>
@@ -6401,16 +5556,252 @@
           </a:p>
         </p:txBody>
       </p:sp>
-      <p:sp>
-        <p:nvSpPr>
-          <p:cNvPr id="3" name="Rectangle 2"/>
+      <p:pic>
+        <p:nvPicPr>
+          <p:cNvPr id="3" name="Picture 2" descr="mark_dark.png"/>
+          <p:cNvPicPr>
+            <a:picLocks noChangeAspect="1"/>
+          </p:cNvPicPr>
+          <p:nvPr/>
+        </p:nvPicPr>
+        <p:blipFill>
+          <a:blip r:embed="rId2"/>
+          <a:stretch>
+            <a:fillRect/>
+          </a:stretch>
+        </p:blipFill>
+        <p:spPr>
+          <a:xfrm>
+            <a:off x="502920" y="219456"/>
+            <a:ext cx="280009" cy="237744"/>
+          </a:xfrm>
+          <a:prstGeom prst="rect">
+            <a:avLst/>
+          </a:prstGeom>
+        </p:spPr>
+      </p:pic>
+      <p:sp>
+        <p:nvSpPr>
+          <p:cNvPr id="4" name="TextBox 3"/>
+          <p:cNvSpPr txBox="1"/>
+          <p:nvPr/>
+        </p:nvSpPr>
+        <p:spPr>
+          <a:xfrm>
+            <a:off x="896112" y="246888"/>
+            <a:ext cx="6400800" cy="274320"/>
+          </a:xfrm>
+          <a:prstGeom prst="rect">
+            <a:avLst/>
+          </a:prstGeom>
+          <a:noFill/>
+        </p:spPr>
+        <p:txBody>
+          <a:bodyPr wrap="square" anchor="t" lIns="0" rIns="0" tIns="0" bIns="0">
+            <a:spAutoFit/>
+          </a:bodyPr>
+          <a:lstStyle/>
+          <a:p>
+            <a:pPr algn="l">
+              <a:lnSpc>
+                <a:spcPct val="110000"/>
+              </a:lnSpc>
+              <a:spcAft>
+                <a:spcPts val="0"/>
+              </a:spcAft>
+            </a:pPr>
+            <a:r>
+              <a:rPr sz="1100" b="0" i="0">
+                <a:solidFill>
+                  <a:srgbClr val="4A5D75"/>
+                </a:solidFill>
+                <a:latin typeface="Calibri"/>
+              </a:rPr>
+              <a:t>Investment Strategy</a:t>
+            </a:r>
+          </a:p>
+        </p:txBody>
+      </p:sp>
+      <p:sp>
+        <p:nvSpPr>
+          <p:cNvPr id="5" name="Rectangle 4"/>
           <p:cNvSpPr/>
           <p:nvPr/>
         </p:nvSpPr>
         <p:spPr>
           <a:xfrm>
-            <a:off x="502920" y="370515"/>
-            <a:ext cx="32186" cy="68397"/>
+            <a:off x="0" y="566928"/>
+            <a:ext cx="12191695" cy="1325880"/>
+          </a:xfrm>
+          <a:prstGeom prst="rect">
+            <a:avLst/>
+          </a:prstGeom>
+          <a:solidFill>
+            <a:srgbClr val="F1F2F4"/>
+          </a:solidFill>
+          <a:ln>
+            <a:noFill/>
+          </a:ln>
+          <a:effectLst/>
+        </p:spPr>
+        <p:style>
+          <a:lnRef idx="1">
+            <a:schemeClr val="accent1"/>
+          </a:lnRef>
+          <a:fillRef idx="3">
+            <a:schemeClr val="accent1"/>
+          </a:fillRef>
+          <a:effectRef idx="2">
+            <a:schemeClr val="accent1"/>
+          </a:effectRef>
+          <a:fontRef idx="minor">
+            <a:schemeClr val="lt1"/>
+          </a:fontRef>
+        </p:style>
+        <p:txBody>
+          <a:bodyPr rtlCol="0" anchor="ctr"/>
+          <a:lstStyle/>
+          <a:p>
+            <a:pPr algn="ctr"/>
+          </a:p>
+        </p:txBody>
+      </p:sp>
+      <p:sp>
+        <p:nvSpPr>
+          <p:cNvPr id="6" name="TextBox 5"/>
+          <p:cNvSpPr txBox="1"/>
+          <p:nvPr/>
+        </p:nvSpPr>
+        <p:spPr>
+          <a:xfrm>
+            <a:off x="548640" y="676656"/>
+            <a:ext cx="11064240" cy="777240"/>
+          </a:xfrm>
+          <a:prstGeom prst="rect">
+            <a:avLst/>
+          </a:prstGeom>
+          <a:noFill/>
+        </p:spPr>
+        <p:txBody>
+          <a:bodyPr wrap="square" anchor="t" lIns="0" rIns="0" tIns="0" bIns="0">
+            <a:spAutoFit/>
+          </a:bodyPr>
+          <a:lstStyle/>
+          <a:p>
+            <a:pPr algn="l">
+              <a:lnSpc>
+                <a:spcPct val="110000"/>
+              </a:lnSpc>
+              <a:spcAft>
+                <a:spcPts val="200"/>
+              </a:spcAft>
+            </a:pPr>
+            <a:r>
+              <a:rPr sz="3000" b="0" i="0">
+                <a:solidFill>
+                  <a:srgbClr val="1E334E"/>
+                </a:solidFill>
+                <a:latin typeface="Times New Roman"/>
+              </a:rPr>
+              <a:t>We don’t need to be right more than ~50%</a:t>
+            </a:r>
+          </a:p>
+        </p:txBody>
+      </p:sp>
+      <p:sp>
+        <p:nvSpPr>
+          <p:cNvPr id="7" name="TextBox 6"/>
+          <p:cNvSpPr txBox="1"/>
+          <p:nvPr/>
+        </p:nvSpPr>
+        <p:spPr>
+          <a:xfrm>
+            <a:off x="566928" y="1417320"/>
+            <a:ext cx="10881360" cy="457200"/>
+          </a:xfrm>
+          <a:prstGeom prst="rect">
+            <a:avLst/>
+          </a:prstGeom>
+          <a:noFill/>
+        </p:spPr>
+        <p:txBody>
+          <a:bodyPr wrap="square" anchor="t" lIns="0" rIns="0" tIns="0" bIns="0">
+            <a:spAutoFit/>
+          </a:bodyPr>
+          <a:lstStyle/>
+          <a:p>
+            <a:pPr algn="l">
+              <a:lnSpc>
+                <a:spcPct val="110000"/>
+              </a:lnSpc>
+              <a:spcAft>
+                <a:spcPts val="0"/>
+              </a:spcAft>
+            </a:pPr>
+            <a:r>
+              <a:rPr sz="1300" b="0" i="1">
+                <a:solidFill>
+                  <a:srgbClr val="5A636E"/>
+                </a:solidFill>
+                <a:latin typeface="Calibri"/>
+              </a:rPr>
+              <a:t>Because we buy at a discount, not at a 40% control premium.</a:t>
+            </a:r>
+          </a:p>
+        </p:txBody>
+      </p:sp>
+      <p:sp>
+        <p:nvSpPr>
+          <p:cNvPr id="8" name="TextBox 7"/>
+          <p:cNvSpPr txBox="1"/>
+          <p:nvPr/>
+        </p:nvSpPr>
+        <p:spPr>
+          <a:xfrm>
+            <a:off x="8229600" y="6446520"/>
+            <a:ext cx="3657600" cy="274320"/>
+          </a:xfrm>
+          <a:prstGeom prst="rect">
+            <a:avLst/>
+          </a:prstGeom>
+          <a:noFill/>
+        </p:spPr>
+        <p:txBody>
+          <a:bodyPr wrap="square" anchor="t" lIns="0" rIns="0" tIns="0" bIns="0">
+            <a:spAutoFit/>
+          </a:bodyPr>
+          <a:lstStyle/>
+          <a:p>
+            <a:pPr algn="r">
+              <a:lnSpc>
+                <a:spcPct val="110000"/>
+              </a:lnSpc>
+              <a:spcAft>
+                <a:spcPts val="0"/>
+              </a:spcAft>
+            </a:pPr>
+            <a:r>
+              <a:rPr sz="850" b="0" i="0">
+                <a:solidFill>
+                  <a:srgbClr val="9AA4B0"/>
+                </a:solidFill>
+                <a:latin typeface="Calibri"/>
+              </a:rPr>
+              <a:t>Strictly confidential          10</a:t>
+            </a:r>
+          </a:p>
+        </p:txBody>
+      </p:sp>
+      <p:sp>
+        <p:nvSpPr>
+          <p:cNvPr id="9" name="Rectangle 8"/>
+          <p:cNvSpPr/>
+          <p:nvPr/>
+        </p:nvSpPr>
+        <p:spPr>
+          <a:xfrm>
+            <a:off x="685800" y="2148840"/>
+            <a:ext cx="3657600" cy="566928"/>
           </a:xfrm>
           <a:prstGeom prst="rect">
             <a:avLst/>
@@ -6447,14 +5838,56 @@
       </p:sp>
       <p:sp>
         <p:nvSpPr>
-          <p:cNvPr id="4" name="Rectangle 3"/>
+          <p:cNvPr id="10" name="TextBox 9"/>
+          <p:cNvSpPr txBox="1"/>
+          <p:nvPr/>
+        </p:nvSpPr>
+        <p:spPr>
+          <a:xfrm>
+            <a:off x="822960" y="2148840"/>
+            <a:ext cx="3383280" cy="566928"/>
+          </a:xfrm>
+          <a:prstGeom prst="rect">
+            <a:avLst/>
+          </a:prstGeom>
+          <a:noFill/>
+        </p:spPr>
+        <p:txBody>
+          <a:bodyPr wrap="square" anchor="ctr" lIns="0" rIns="0" tIns="0" bIns="0">
+            <a:spAutoFit/>
+          </a:bodyPr>
+          <a:lstStyle/>
+          <a:p>
+            <a:pPr algn="l">
+              <a:lnSpc>
+                <a:spcPct val="110000"/>
+              </a:lnSpc>
+              <a:spcAft>
+                <a:spcPts val="0"/>
+              </a:spcAft>
+            </a:pPr>
+            <a:r>
+              <a:rPr sz="1350" b="1" i="0">
+                <a:solidFill>
+                  <a:srgbClr val="FFFFFF"/>
+                </a:solidFill>
+                <a:latin typeface="Calibri"/>
+              </a:rPr>
+              <a:t>Metric</a:t>
+            </a:r>
+          </a:p>
+        </p:txBody>
+      </p:sp>
+      <p:sp>
+        <p:nvSpPr>
+          <p:cNvPr id="11" name="Rectangle 10"/>
           <p:cNvSpPr/>
           <p:nvPr/>
         </p:nvSpPr>
         <p:spPr>
           <a:xfrm>
-            <a:off x="559246" y="314188"/>
-            <a:ext cx="32186" cy="124724"/>
+            <a:off x="4343400" y="2148840"/>
+            <a:ext cx="3657600" cy="566928"/>
           </a:xfrm>
           <a:prstGeom prst="rect">
             <a:avLst/>
@@ -6491,14 +5924,56 @@
       </p:sp>
       <p:sp>
         <p:nvSpPr>
-          <p:cNvPr id="5" name="Rectangle 4"/>
+          <p:cNvPr id="12" name="TextBox 11"/>
+          <p:cNvSpPr txBox="1"/>
+          <p:nvPr/>
+        </p:nvSpPr>
+        <p:spPr>
+          <a:xfrm>
+            <a:off x="4480560" y="2148840"/>
+            <a:ext cx="3383280" cy="566928"/>
+          </a:xfrm>
+          <a:prstGeom prst="rect">
+            <a:avLst/>
+          </a:prstGeom>
+          <a:noFill/>
+        </p:spPr>
+        <p:txBody>
+          <a:bodyPr wrap="square" anchor="ctr" lIns="0" rIns="0" tIns="0" bIns="0">
+            <a:spAutoFit/>
+          </a:bodyPr>
+          <a:lstStyle/>
+          <a:p>
+            <a:pPr algn="l">
+              <a:lnSpc>
+                <a:spcPct val="110000"/>
+              </a:lnSpc>
+              <a:spcAft>
+                <a:spcPts val="0"/>
+              </a:spcAft>
+            </a:pPr>
+            <a:r>
+              <a:rPr sz="1350" b="1" i="0">
+                <a:solidFill>
+                  <a:srgbClr val="FFFFFF"/>
+                </a:solidFill>
+                <a:latin typeface="Calibri"/>
+              </a:rPr>
+              <a:t>Private Equity (take-private)</a:t>
+            </a:r>
+          </a:p>
+        </p:txBody>
+      </p:sp>
+      <p:sp>
+        <p:nvSpPr>
+          <p:cNvPr id="13" name="Rectangle 12"/>
           <p:cNvSpPr/>
           <p:nvPr/>
         </p:nvSpPr>
         <p:spPr>
           <a:xfrm>
-            <a:off x="615572" y="237744"/>
-            <a:ext cx="32186" cy="201168"/>
+            <a:off x="8001000" y="2148840"/>
+            <a:ext cx="3520440" cy="566928"/>
           </a:xfrm>
           <a:prstGeom prst="rect">
             <a:avLst/>
@@ -6535,20 +6010,62 @@
       </p:sp>
       <p:sp>
         <p:nvSpPr>
-          <p:cNvPr id="6" name="Rectangle 5"/>
+          <p:cNvPr id="14" name="TextBox 13"/>
+          <p:cNvSpPr txBox="1"/>
+          <p:nvPr/>
+        </p:nvSpPr>
+        <p:spPr>
+          <a:xfrm>
+            <a:off x="8138160" y="2148840"/>
+            <a:ext cx="3246120" cy="566928"/>
+          </a:xfrm>
+          <a:prstGeom prst="rect">
+            <a:avLst/>
+          </a:prstGeom>
+          <a:noFill/>
+        </p:spPr>
+        <p:txBody>
+          <a:bodyPr wrap="square" anchor="ctr" lIns="0" rIns="0" tIns="0" bIns="0">
+            <a:spAutoFit/>
+          </a:bodyPr>
+          <a:lstStyle/>
+          <a:p>
+            <a:pPr algn="l">
+              <a:lnSpc>
+                <a:spcPct val="110000"/>
+              </a:lnSpc>
+              <a:spcAft>
+                <a:spcPts val="0"/>
+              </a:spcAft>
+            </a:pPr>
+            <a:r>
+              <a:rPr sz="1350" b="1" i="0">
+                <a:solidFill>
+                  <a:srgbClr val="FFFFFF"/>
+                </a:solidFill>
+                <a:latin typeface="Calibri"/>
+              </a:rPr>
+              <a:t>Athanase (engaged owner)</a:t>
+            </a:r>
+          </a:p>
+        </p:txBody>
+      </p:sp>
+      <p:sp>
+        <p:nvSpPr>
+          <p:cNvPr id="15" name="Rectangle 14"/>
           <p:cNvSpPr/>
           <p:nvPr/>
         </p:nvSpPr>
         <p:spPr>
           <a:xfrm>
-            <a:off x="671898" y="328270"/>
-            <a:ext cx="32186" cy="110642"/>
+            <a:off x="685800" y="2715768"/>
+            <a:ext cx="3657600" cy="566928"/>
           </a:xfrm>
           <a:prstGeom prst="rect">
             <a:avLst/>
           </a:prstGeom>
           <a:solidFill>
-            <a:srgbClr val="4A5D75"/>
+            <a:srgbClr val="FFFFFF"/>
           </a:solidFill>
           <a:ln>
             <a:noFill/>
@@ -6579,20 +6096,62 @@
       </p:sp>
       <p:sp>
         <p:nvSpPr>
-          <p:cNvPr id="7" name="Rectangle 6"/>
+          <p:cNvPr id="16" name="TextBox 15"/>
+          <p:cNvSpPr txBox="1"/>
+          <p:nvPr/>
+        </p:nvSpPr>
+        <p:spPr>
+          <a:xfrm>
+            <a:off x="822960" y="2715768"/>
+            <a:ext cx="3383280" cy="566928"/>
+          </a:xfrm>
+          <a:prstGeom prst="rect">
+            <a:avLst/>
+          </a:prstGeom>
+          <a:noFill/>
+        </p:spPr>
+        <p:txBody>
+          <a:bodyPr wrap="square" anchor="ctr" lIns="0" rIns="0" tIns="0" bIns="0">
+            <a:spAutoFit/>
+          </a:bodyPr>
+          <a:lstStyle/>
+          <a:p>
+            <a:pPr algn="l">
+              <a:lnSpc>
+                <a:spcPct val="110000"/>
+              </a:lnSpc>
+              <a:spcAft>
+                <a:spcPts val="0"/>
+              </a:spcAft>
+            </a:pPr>
+            <a:r>
+              <a:rPr sz="1300" b="0" i="0">
+                <a:solidFill>
+                  <a:srgbClr val="333840"/>
+                </a:solidFill>
+                <a:latin typeface="Calibri"/>
+              </a:rPr>
+              <a:t>Entry basis</a:t>
+            </a:r>
+          </a:p>
+        </p:txBody>
+      </p:sp>
+      <p:sp>
+        <p:nvSpPr>
+          <p:cNvPr id="17" name="Rectangle 16"/>
           <p:cNvSpPr/>
           <p:nvPr/>
         </p:nvSpPr>
         <p:spPr>
           <a:xfrm>
-            <a:off x="728224" y="382585"/>
-            <a:ext cx="32186" cy="56327"/>
+            <a:off x="4343400" y="2715768"/>
+            <a:ext cx="3657600" cy="566928"/>
           </a:xfrm>
           <a:prstGeom prst="rect">
             <a:avLst/>
           </a:prstGeom>
           <a:solidFill>
-            <a:srgbClr val="4A5D75"/>
+            <a:srgbClr val="FFFFFF"/>
           </a:solidFill>
           <a:ln>
             <a:noFill/>
@@ -6623,14 +6182,14 @@
       </p:sp>
       <p:sp>
         <p:nvSpPr>
-          <p:cNvPr id="8" name="TextBox 7"/>
+          <p:cNvPr id="18" name="TextBox 17"/>
           <p:cNvSpPr txBox="1"/>
           <p:nvPr/>
         </p:nvSpPr>
         <p:spPr>
           <a:xfrm>
-            <a:off x="1051560" y="219456"/>
-            <a:ext cx="6400800" cy="274320"/>
+            <a:off x="4480560" y="2715768"/>
+            <a:ext cx="3383280" cy="566928"/>
           </a:xfrm>
           <a:prstGeom prst="rect">
             <a:avLst/>
@@ -6638,7 +6197,7 @@
           <a:noFill/>
         </p:spPr>
         <p:txBody>
-          <a:bodyPr wrap="square" anchor="t" lIns="0" rIns="0" tIns="0" bIns="0">
+          <a:bodyPr wrap="square" anchor="ctr" lIns="0" rIns="0" tIns="0" bIns="0">
             <a:spAutoFit/>
           </a:bodyPr>
           <a:lstStyle/>
@@ -6652,27 +6211,113 @@
               </a:spcAft>
             </a:pPr>
             <a:r>
-              <a:rPr sz="1100" b="0" i="0">
-                <a:solidFill>
-                  <a:srgbClr val="4A5D75"/>
-                </a:solidFill>
-                <a:latin typeface="Arial"/>
-              </a:rPr>
-              <a:t>Investment Strategy</a:t>
-            </a:r>
-          </a:p>
-        </p:txBody>
-      </p:sp>
-      <p:sp>
-        <p:nvSpPr>
-          <p:cNvPr id="9" name="Rectangle 8"/>
+              <a:rPr sz="1300" b="0" i="0">
+                <a:solidFill>
+                  <a:srgbClr val="333840"/>
+                </a:solidFill>
+                <a:latin typeface="Calibri"/>
+              </a:rPr>
+              <a:t>$140  (market + 40% premium)</a:t>
+            </a:r>
+          </a:p>
+        </p:txBody>
+      </p:sp>
+      <p:sp>
+        <p:nvSpPr>
+          <p:cNvPr id="19" name="Rectangle 18"/>
           <p:cNvSpPr/>
           <p:nvPr/>
         </p:nvSpPr>
         <p:spPr>
           <a:xfrm>
-            <a:off x="0" y="566928"/>
-            <a:ext cx="12191695" cy="1325880"/>
+            <a:off x="8001000" y="2715768"/>
+            <a:ext cx="3520440" cy="566928"/>
+          </a:xfrm>
+          <a:prstGeom prst="rect">
+            <a:avLst/>
+          </a:prstGeom>
+          <a:solidFill>
+            <a:srgbClr val="FFFFFF"/>
+          </a:solidFill>
+          <a:ln>
+            <a:noFill/>
+          </a:ln>
+          <a:effectLst/>
+        </p:spPr>
+        <p:style>
+          <a:lnRef idx="1">
+            <a:schemeClr val="accent1"/>
+          </a:lnRef>
+          <a:fillRef idx="3">
+            <a:schemeClr val="accent1"/>
+          </a:fillRef>
+          <a:effectRef idx="2">
+            <a:schemeClr val="accent1"/>
+          </a:effectRef>
+          <a:fontRef idx="minor">
+            <a:schemeClr val="lt1"/>
+          </a:fontRef>
+        </p:style>
+        <p:txBody>
+          <a:bodyPr rtlCol="0" anchor="ctr"/>
+          <a:lstStyle/>
+          <a:p>
+            <a:pPr algn="ctr"/>
+          </a:p>
+        </p:txBody>
+      </p:sp>
+      <p:sp>
+        <p:nvSpPr>
+          <p:cNvPr id="20" name="TextBox 19"/>
+          <p:cNvSpPr txBox="1"/>
+          <p:nvPr/>
+        </p:nvSpPr>
+        <p:spPr>
+          <a:xfrm>
+            <a:off x="8138160" y="2715768"/>
+            <a:ext cx="3246120" cy="566928"/>
+          </a:xfrm>
+          <a:prstGeom prst="rect">
+            <a:avLst/>
+          </a:prstGeom>
+          <a:noFill/>
+        </p:spPr>
+        <p:txBody>
+          <a:bodyPr wrap="square" anchor="ctr" lIns="0" rIns="0" tIns="0" bIns="0">
+            <a:spAutoFit/>
+          </a:bodyPr>
+          <a:lstStyle/>
+          <a:p>
+            <a:pPr algn="l">
+              <a:lnSpc>
+                <a:spcPct val="110000"/>
+              </a:lnSpc>
+              <a:spcAft>
+                <a:spcPts val="0"/>
+              </a:spcAft>
+            </a:pPr>
+            <a:r>
+              <a:rPr sz="1300" b="1" i="0">
+                <a:solidFill>
+                  <a:srgbClr val="1E334E"/>
+                </a:solidFill>
+                <a:latin typeface="Calibri"/>
+              </a:rPr>
+              <a:t>$100  (exhaustion price)</a:t>
+            </a:r>
+          </a:p>
+        </p:txBody>
+      </p:sp>
+      <p:sp>
+        <p:nvSpPr>
+          <p:cNvPr id="21" name="Rectangle 20"/>
+          <p:cNvSpPr/>
+          <p:nvPr/>
+        </p:nvSpPr>
+        <p:spPr>
+          <a:xfrm>
+            <a:off x="685800" y="3282696"/>
+            <a:ext cx="3657600" cy="566928"/>
           </a:xfrm>
           <a:prstGeom prst="rect">
             <a:avLst/>
@@ -6709,14 +6354,14 @@
       </p:sp>
       <p:sp>
         <p:nvSpPr>
-          <p:cNvPr id="10" name="TextBox 9"/>
+          <p:cNvPr id="22" name="TextBox 21"/>
           <p:cNvSpPr txBox="1"/>
           <p:nvPr/>
         </p:nvSpPr>
         <p:spPr>
           <a:xfrm>
-            <a:off x="548640" y="676656"/>
-            <a:ext cx="11064240" cy="777240"/>
+            <a:off x="822960" y="3282696"/>
+            <a:ext cx="3383280" cy="566928"/>
           </a:xfrm>
           <a:prstGeom prst="rect">
             <a:avLst/>
@@ -6724,7 +6369,7 @@
           <a:noFill/>
         </p:spPr>
         <p:txBody>
-          <a:bodyPr wrap="square" anchor="t" lIns="0" rIns="0" tIns="0" bIns="0">
+          <a:bodyPr wrap="square" anchor="ctr" lIns="0" rIns="0" tIns="0" bIns="0">
             <a:spAutoFit/>
           </a:bodyPr>
           <a:lstStyle/>
@@ -6734,121 +6379,37 @@
                 <a:spcPct val="110000"/>
               </a:lnSpc>
               <a:spcAft>
-                <a:spcPts val="200"/>
-              </a:spcAft>
-            </a:pPr>
-            <a:r>
-              <a:rPr sz="3000" b="0" i="0">
-                <a:solidFill>
-                  <a:srgbClr val="1E334E"/>
-                </a:solidFill>
-                <a:latin typeface="Georgia"/>
-              </a:rPr>
-              <a:t>We don’t need to be right more than ~50%</a:t>
-            </a:r>
-          </a:p>
-        </p:txBody>
-      </p:sp>
-      <p:sp>
-        <p:nvSpPr>
-          <p:cNvPr id="11" name="TextBox 10"/>
-          <p:cNvSpPr txBox="1"/>
-          <p:nvPr/>
-        </p:nvSpPr>
-        <p:spPr>
-          <a:xfrm>
-            <a:off x="566928" y="1417320"/>
-            <a:ext cx="10881360" cy="457200"/>
-          </a:xfrm>
-          <a:prstGeom prst="rect">
-            <a:avLst/>
-          </a:prstGeom>
-          <a:noFill/>
-        </p:spPr>
-        <p:txBody>
-          <a:bodyPr wrap="square" anchor="t" lIns="0" rIns="0" tIns="0" bIns="0">
-            <a:spAutoFit/>
-          </a:bodyPr>
-          <a:lstStyle/>
-          <a:p>
-            <a:pPr algn="l">
-              <a:lnSpc>
-                <a:spcPct val="110000"/>
-              </a:lnSpc>
-              <a:spcAft>
                 <a:spcPts val="0"/>
               </a:spcAft>
             </a:pPr>
             <a:r>
-              <a:rPr sz="1300" b="0" i="1">
-                <a:solidFill>
-                  <a:srgbClr val="5A636E"/>
-                </a:solidFill>
-                <a:latin typeface="Arial"/>
-              </a:rPr>
-              <a:t>Because we buy at a discount, not at a 40% control premium.</a:t>
-            </a:r>
-          </a:p>
-        </p:txBody>
-      </p:sp>
-      <p:sp>
-        <p:nvSpPr>
-          <p:cNvPr id="12" name="TextBox 11"/>
-          <p:cNvSpPr txBox="1"/>
-          <p:nvPr/>
-        </p:nvSpPr>
-        <p:spPr>
-          <a:xfrm>
-            <a:off x="8229600" y="6446520"/>
-            <a:ext cx="3657600" cy="274320"/>
-          </a:xfrm>
-          <a:prstGeom prst="rect">
-            <a:avLst/>
-          </a:prstGeom>
-          <a:noFill/>
-        </p:spPr>
-        <p:txBody>
-          <a:bodyPr wrap="square" anchor="t" lIns="0" rIns="0" tIns="0" bIns="0">
-            <a:spAutoFit/>
-          </a:bodyPr>
-          <a:lstStyle/>
-          <a:p>
-            <a:pPr algn="r">
-              <a:lnSpc>
-                <a:spcPct val="110000"/>
-              </a:lnSpc>
-              <a:spcAft>
-                <a:spcPts val="0"/>
-              </a:spcAft>
-            </a:pPr>
-            <a:r>
-              <a:rPr sz="850" b="0" i="0">
-                <a:solidFill>
-                  <a:srgbClr val="9AA4B0"/>
-                </a:solidFill>
-                <a:latin typeface="Arial"/>
-              </a:rPr>
-              <a:t>Strictly confidential          10</a:t>
-            </a:r>
-          </a:p>
-        </p:txBody>
-      </p:sp>
-      <p:sp>
-        <p:nvSpPr>
-          <p:cNvPr id="13" name="Rectangle 12"/>
+              <a:rPr sz="1300" b="0" i="0">
+                <a:solidFill>
+                  <a:srgbClr val="333840"/>
+                </a:solidFill>
+                <a:latin typeface="Calibri"/>
+              </a:rPr>
+              <a:t>Holding period</a:t>
+            </a:r>
+          </a:p>
+        </p:txBody>
+      </p:sp>
+      <p:sp>
+        <p:nvSpPr>
+          <p:cNvPr id="23" name="Rectangle 22"/>
           <p:cNvSpPr/>
           <p:nvPr/>
         </p:nvSpPr>
         <p:spPr>
           <a:xfrm>
-            <a:off x="685800" y="2148840"/>
+            <a:off x="4343400" y="3282696"/>
             <a:ext cx="3657600" cy="566928"/>
           </a:xfrm>
           <a:prstGeom prst="rect">
             <a:avLst/>
           </a:prstGeom>
           <a:solidFill>
-            <a:srgbClr val="4A5D75"/>
+            <a:srgbClr val="F1F2F4"/>
           </a:solidFill>
           <a:ln>
             <a:noFill/>
@@ -6879,13 +6440,13 @@
       </p:sp>
       <p:sp>
         <p:nvSpPr>
-          <p:cNvPr id="14" name="TextBox 13"/>
+          <p:cNvPr id="24" name="TextBox 23"/>
           <p:cNvSpPr txBox="1"/>
           <p:nvPr/>
         </p:nvSpPr>
         <p:spPr>
           <a:xfrm>
-            <a:off x="822960" y="2148840"/>
+            <a:off x="4480560" y="3282696"/>
             <a:ext cx="3383280" cy="566928"/>
           </a:xfrm>
           <a:prstGeom prst="rect">
@@ -6908,33 +6469,33 @@
               </a:spcAft>
             </a:pPr>
             <a:r>
-              <a:rPr sz="1350" b="1" i="0">
-                <a:solidFill>
-                  <a:srgbClr val="FFFFFF"/>
-                </a:solidFill>
-                <a:latin typeface="Arial"/>
-              </a:rPr>
-              <a:t>Metric</a:t>
-            </a:r>
-          </a:p>
-        </p:txBody>
-      </p:sp>
-      <p:sp>
-        <p:nvSpPr>
-          <p:cNvPr id="15" name="Rectangle 14"/>
+              <a:rPr sz="1300" b="0" i="0">
+                <a:solidFill>
+                  <a:srgbClr val="333840"/>
+                </a:solidFill>
+                <a:latin typeface="Calibri"/>
+              </a:rPr>
+              <a:t>5 years</a:t>
+            </a:r>
+          </a:p>
+        </p:txBody>
+      </p:sp>
+      <p:sp>
+        <p:nvSpPr>
+          <p:cNvPr id="25" name="Rectangle 24"/>
           <p:cNvSpPr/>
           <p:nvPr/>
         </p:nvSpPr>
         <p:spPr>
           <a:xfrm>
-            <a:off x="4343400" y="2148840"/>
-            <a:ext cx="3657600" cy="566928"/>
+            <a:off x="8001000" y="3282696"/>
+            <a:ext cx="3520440" cy="566928"/>
           </a:xfrm>
           <a:prstGeom prst="rect">
             <a:avLst/>
           </a:prstGeom>
           <a:solidFill>
-            <a:srgbClr val="4A5D75"/>
+            <a:srgbClr val="F1F2F4"/>
           </a:solidFill>
           <a:ln>
             <a:noFill/>
@@ -6965,14 +6526,14 @@
       </p:sp>
       <p:sp>
         <p:nvSpPr>
-          <p:cNvPr id="16" name="TextBox 15"/>
+          <p:cNvPr id="26" name="TextBox 25"/>
           <p:cNvSpPr txBox="1"/>
           <p:nvPr/>
         </p:nvSpPr>
         <p:spPr>
           <a:xfrm>
-            <a:off x="4480560" y="2148840"/>
-            <a:ext cx="3383280" cy="566928"/>
+            <a:off x="8138160" y="3282696"/>
+            <a:ext cx="3246120" cy="566928"/>
           </a:xfrm>
           <a:prstGeom prst="rect">
             <a:avLst/>
@@ -6994,112 +6555,26 @@
               </a:spcAft>
             </a:pPr>
             <a:r>
-              <a:rPr sz="1350" b="1" i="0">
-                <a:solidFill>
-                  <a:srgbClr val="FFFFFF"/>
-                </a:solidFill>
-                <a:latin typeface="Arial"/>
-              </a:rPr>
-              <a:t>Private Equity (take-private)</a:t>
-            </a:r>
-          </a:p>
-        </p:txBody>
-      </p:sp>
-      <p:sp>
-        <p:nvSpPr>
-          <p:cNvPr id="17" name="Rectangle 16"/>
+              <a:rPr sz="1300" b="1" i="0">
+                <a:solidFill>
+                  <a:srgbClr val="1E334E"/>
+                </a:solidFill>
+                <a:latin typeface="Calibri"/>
+              </a:rPr>
+              <a:t>3 years (rerating cycle)</a:t>
+            </a:r>
+          </a:p>
+        </p:txBody>
+      </p:sp>
+      <p:sp>
+        <p:nvSpPr>
+          <p:cNvPr id="27" name="Rectangle 26"/>
           <p:cNvSpPr/>
           <p:nvPr/>
         </p:nvSpPr>
         <p:spPr>
           <a:xfrm>
-            <a:off x="8001000" y="2148840"/>
-            <a:ext cx="3520440" cy="566928"/>
-          </a:xfrm>
-          <a:prstGeom prst="rect">
-            <a:avLst/>
-          </a:prstGeom>
-          <a:solidFill>
-            <a:srgbClr val="4A5D75"/>
-          </a:solidFill>
-          <a:ln>
-            <a:noFill/>
-          </a:ln>
-          <a:effectLst/>
-        </p:spPr>
-        <p:style>
-          <a:lnRef idx="1">
-            <a:schemeClr val="accent1"/>
-          </a:lnRef>
-          <a:fillRef idx="3">
-            <a:schemeClr val="accent1"/>
-          </a:fillRef>
-          <a:effectRef idx="2">
-            <a:schemeClr val="accent1"/>
-          </a:effectRef>
-          <a:fontRef idx="minor">
-            <a:schemeClr val="lt1"/>
-          </a:fontRef>
-        </p:style>
-        <p:txBody>
-          <a:bodyPr rtlCol="0" anchor="ctr"/>
-          <a:lstStyle/>
-          <a:p>
-            <a:pPr algn="ctr"/>
-          </a:p>
-        </p:txBody>
-      </p:sp>
-      <p:sp>
-        <p:nvSpPr>
-          <p:cNvPr id="18" name="TextBox 17"/>
-          <p:cNvSpPr txBox="1"/>
-          <p:nvPr/>
-        </p:nvSpPr>
-        <p:spPr>
-          <a:xfrm>
-            <a:off x="8138160" y="2148840"/>
-            <a:ext cx="3246120" cy="566928"/>
-          </a:xfrm>
-          <a:prstGeom prst="rect">
-            <a:avLst/>
-          </a:prstGeom>
-          <a:noFill/>
-        </p:spPr>
-        <p:txBody>
-          <a:bodyPr wrap="square" anchor="ctr" lIns="0" rIns="0" tIns="0" bIns="0">
-            <a:spAutoFit/>
-          </a:bodyPr>
-          <a:lstStyle/>
-          <a:p>
-            <a:pPr algn="l">
-              <a:lnSpc>
-                <a:spcPct val="110000"/>
-              </a:lnSpc>
-              <a:spcAft>
-                <a:spcPts val="0"/>
-              </a:spcAft>
-            </a:pPr>
-            <a:r>
-              <a:rPr sz="1350" b="1" i="0">
-                <a:solidFill>
-                  <a:srgbClr val="FFFFFF"/>
-                </a:solidFill>
-                <a:latin typeface="Arial"/>
-              </a:rPr>
-              <a:t>Athanase (engaged owner)</a:t>
-            </a:r>
-          </a:p>
-        </p:txBody>
-      </p:sp>
-      <p:sp>
-        <p:nvSpPr>
-          <p:cNvPr id="19" name="Rectangle 18"/>
-          <p:cNvSpPr/>
-          <p:nvPr/>
-        </p:nvSpPr>
-        <p:spPr>
-          <a:xfrm>
-            <a:off x="685800" y="2715768"/>
+            <a:off x="685800" y="3849624"/>
             <a:ext cx="3657600" cy="566928"/>
           </a:xfrm>
           <a:prstGeom prst="rect">
@@ -7137,13 +6612,13 @@
       </p:sp>
       <p:sp>
         <p:nvSpPr>
-          <p:cNvPr id="20" name="TextBox 19"/>
+          <p:cNvPr id="28" name="TextBox 27"/>
           <p:cNvSpPr txBox="1"/>
           <p:nvPr/>
         </p:nvSpPr>
         <p:spPr>
           <a:xfrm>
-            <a:off x="822960" y="2715768"/>
+            <a:off x="822960" y="3849624"/>
             <a:ext cx="3383280" cy="566928"/>
           </a:xfrm>
           <a:prstGeom prst="rect">
@@ -7170,22 +6645,22 @@
                 <a:solidFill>
                   <a:srgbClr val="333840"/>
                 </a:solidFill>
-                <a:latin typeface="Arial"/>
-              </a:rPr>
-              <a:t>Entry basis</a:t>
-            </a:r>
-          </a:p>
-        </p:txBody>
-      </p:sp>
-      <p:sp>
-        <p:nvSpPr>
-          <p:cNvPr id="21" name="Rectangle 20"/>
+                <a:latin typeface="Calibri"/>
+              </a:rPr>
+              <a:t>Value growth required</a:t>
+            </a:r>
+          </a:p>
+        </p:txBody>
+      </p:sp>
+      <p:sp>
+        <p:nvSpPr>
+          <p:cNvPr id="29" name="Rectangle 28"/>
           <p:cNvSpPr/>
           <p:nvPr/>
         </p:nvSpPr>
         <p:spPr>
           <a:xfrm>
-            <a:off x="4343400" y="2715768"/>
+            <a:off x="4343400" y="3849624"/>
             <a:ext cx="3657600" cy="566928"/>
           </a:xfrm>
           <a:prstGeom prst="rect">
@@ -7223,13 +6698,13 @@
       </p:sp>
       <p:sp>
         <p:nvSpPr>
-          <p:cNvPr id="22" name="TextBox 21"/>
+          <p:cNvPr id="30" name="TextBox 29"/>
           <p:cNvSpPr txBox="1"/>
           <p:nvPr/>
         </p:nvSpPr>
         <p:spPr>
           <a:xfrm>
-            <a:off x="4480560" y="2715768"/>
+            <a:off x="4480560" y="3849624"/>
             <a:ext cx="3383280" cy="566928"/>
           </a:xfrm>
           <a:prstGeom prst="rect">
@@ -7256,22 +6731,22 @@
                 <a:solidFill>
                   <a:srgbClr val="333840"/>
                 </a:solidFill>
-                <a:latin typeface="Arial"/>
-              </a:rPr>
-              <a:t>$140  (market + 40% premium)</a:t>
-            </a:r>
-          </a:p>
-        </p:txBody>
-      </p:sp>
-      <p:sp>
-        <p:nvSpPr>
-          <p:cNvPr id="23" name="Rectangle 22"/>
+                <a:latin typeface="Calibri"/>
+              </a:rPr>
+              <a:t>+148% total growth</a:t>
+            </a:r>
+          </a:p>
+        </p:txBody>
+      </p:sp>
+      <p:sp>
+        <p:nvSpPr>
+          <p:cNvPr id="31" name="Rectangle 30"/>
           <p:cNvSpPr/>
           <p:nvPr/>
         </p:nvSpPr>
         <p:spPr>
           <a:xfrm>
-            <a:off x="8001000" y="2715768"/>
+            <a:off x="8001000" y="3849624"/>
             <a:ext cx="3520440" cy="566928"/>
           </a:xfrm>
           <a:prstGeom prst="rect">
@@ -7309,13 +6784,13 @@
       </p:sp>
       <p:sp>
         <p:nvSpPr>
-          <p:cNvPr id="24" name="TextBox 23"/>
+          <p:cNvPr id="32" name="TextBox 31"/>
           <p:cNvSpPr txBox="1"/>
           <p:nvPr/>
         </p:nvSpPr>
         <p:spPr>
           <a:xfrm>
-            <a:off x="8138160" y="2715768"/>
+            <a:off x="8138160" y="3849624"/>
             <a:ext cx="3246120" cy="566928"/>
           </a:xfrm>
           <a:prstGeom prst="rect">
@@ -7342,22 +6817,22 @@
                 <a:solidFill>
                   <a:srgbClr val="1E334E"/>
                 </a:solidFill>
-                <a:latin typeface="Arial"/>
-              </a:rPr>
-              <a:t>$100  (exhaustion price)</a:t>
-            </a:r>
-          </a:p>
-        </p:txBody>
-      </p:sp>
-      <p:sp>
-        <p:nvSpPr>
-          <p:cNvPr id="25" name="Rectangle 24"/>
+                <a:latin typeface="Calibri"/>
+              </a:rPr>
+              <a:t>+73% total growth</a:t>
+            </a:r>
+          </a:p>
+        </p:txBody>
+      </p:sp>
+      <p:sp>
+        <p:nvSpPr>
+          <p:cNvPr id="33" name="Rectangle 32"/>
           <p:cNvSpPr/>
           <p:nvPr/>
         </p:nvSpPr>
         <p:spPr>
           <a:xfrm>
-            <a:off x="685800" y="3282696"/>
+            <a:off x="685800" y="4416552"/>
             <a:ext cx="3657600" cy="566928"/>
           </a:xfrm>
           <a:prstGeom prst="rect">
@@ -7395,13 +6870,13 @@
       </p:sp>
       <p:sp>
         <p:nvSpPr>
-          <p:cNvPr id="26" name="TextBox 25"/>
+          <p:cNvPr id="34" name="TextBox 33"/>
           <p:cNvSpPr txBox="1"/>
           <p:nvPr/>
         </p:nvSpPr>
         <p:spPr>
           <a:xfrm>
-            <a:off x="822960" y="3282696"/>
+            <a:off x="822960" y="4416552"/>
             <a:ext cx="3383280" cy="566928"/>
           </a:xfrm>
           <a:prstGeom prst="rect">
@@ -7428,22 +6903,22 @@
                 <a:solidFill>
                   <a:srgbClr val="333840"/>
                 </a:solidFill>
-                <a:latin typeface="Arial"/>
-              </a:rPr>
-              <a:t>Holding period</a:t>
-            </a:r>
-          </a:p>
-        </p:txBody>
-      </p:sp>
-      <p:sp>
-        <p:nvSpPr>
-          <p:cNvPr id="27" name="Rectangle 26"/>
+                <a:latin typeface="Calibri"/>
+              </a:rPr>
+              <a:t>Operational success needed</a:t>
+            </a:r>
+          </a:p>
+        </p:txBody>
+      </p:sp>
+      <p:sp>
+        <p:nvSpPr>
+          <p:cNvPr id="35" name="Rectangle 34"/>
           <p:cNvSpPr/>
           <p:nvPr/>
         </p:nvSpPr>
         <p:spPr>
           <a:xfrm>
-            <a:off x="4343400" y="3282696"/>
+            <a:off x="4343400" y="4416552"/>
             <a:ext cx="3657600" cy="566928"/>
           </a:xfrm>
           <a:prstGeom prst="rect">
@@ -7481,13 +6956,13 @@
       </p:sp>
       <p:sp>
         <p:nvSpPr>
-          <p:cNvPr id="28" name="TextBox 27"/>
+          <p:cNvPr id="36" name="TextBox 35"/>
           <p:cNvSpPr txBox="1"/>
           <p:nvPr/>
         </p:nvSpPr>
         <p:spPr>
           <a:xfrm>
-            <a:off x="4480560" y="3282696"/>
+            <a:off x="4480560" y="4416552"/>
             <a:ext cx="3383280" cy="566928"/>
           </a:xfrm>
           <a:prstGeom prst="rect">
@@ -7514,22 +6989,22 @@
                 <a:solidFill>
                   <a:srgbClr val="333840"/>
                 </a:solidFill>
-                <a:latin typeface="Arial"/>
-              </a:rPr>
-              <a:t>5 years</a:t>
-            </a:r>
-          </a:p>
-        </p:txBody>
-      </p:sp>
-      <p:sp>
-        <p:nvSpPr>
-          <p:cNvPr id="29" name="Rectangle 28"/>
+                <a:latin typeface="Calibri"/>
+              </a:rPr>
+              <a:t>~85–100% of thesis</a:t>
+            </a:r>
+          </a:p>
+        </p:txBody>
+      </p:sp>
+      <p:sp>
+        <p:nvSpPr>
+          <p:cNvPr id="37" name="Rectangle 36"/>
           <p:cNvSpPr/>
           <p:nvPr/>
         </p:nvSpPr>
         <p:spPr>
           <a:xfrm>
-            <a:off x="8001000" y="3282696"/>
+            <a:off x="8001000" y="4416552"/>
             <a:ext cx="3520440" cy="566928"/>
           </a:xfrm>
           <a:prstGeom prst="rect">
@@ -7567,13 +7042,13 @@
       </p:sp>
       <p:sp>
         <p:nvSpPr>
-          <p:cNvPr id="30" name="TextBox 29"/>
+          <p:cNvPr id="38" name="TextBox 37"/>
           <p:cNvSpPr txBox="1"/>
           <p:nvPr/>
         </p:nvSpPr>
         <p:spPr>
           <a:xfrm>
-            <a:off x="8138160" y="3282696"/>
+            <a:off x="8138160" y="4416552"/>
             <a:ext cx="3246120" cy="566928"/>
           </a:xfrm>
           <a:prstGeom prst="rect">
@@ -7600,523 +7075,7 @@
                 <a:solidFill>
                   <a:srgbClr val="1E334E"/>
                 </a:solidFill>
-                <a:latin typeface="Arial"/>
-              </a:rPr>
-              <a:t>3 years (rerating cycle)</a:t>
-            </a:r>
-          </a:p>
-        </p:txBody>
-      </p:sp>
-      <p:sp>
-        <p:nvSpPr>
-          <p:cNvPr id="31" name="Rectangle 30"/>
-          <p:cNvSpPr/>
-          <p:nvPr/>
-        </p:nvSpPr>
-        <p:spPr>
-          <a:xfrm>
-            <a:off x="685800" y="3849624"/>
-            <a:ext cx="3657600" cy="566928"/>
-          </a:xfrm>
-          <a:prstGeom prst="rect">
-            <a:avLst/>
-          </a:prstGeom>
-          <a:solidFill>
-            <a:srgbClr val="FFFFFF"/>
-          </a:solidFill>
-          <a:ln>
-            <a:noFill/>
-          </a:ln>
-          <a:effectLst/>
-        </p:spPr>
-        <p:style>
-          <a:lnRef idx="1">
-            <a:schemeClr val="accent1"/>
-          </a:lnRef>
-          <a:fillRef idx="3">
-            <a:schemeClr val="accent1"/>
-          </a:fillRef>
-          <a:effectRef idx="2">
-            <a:schemeClr val="accent1"/>
-          </a:effectRef>
-          <a:fontRef idx="minor">
-            <a:schemeClr val="lt1"/>
-          </a:fontRef>
-        </p:style>
-        <p:txBody>
-          <a:bodyPr rtlCol="0" anchor="ctr"/>
-          <a:lstStyle/>
-          <a:p>
-            <a:pPr algn="ctr"/>
-          </a:p>
-        </p:txBody>
-      </p:sp>
-      <p:sp>
-        <p:nvSpPr>
-          <p:cNvPr id="32" name="TextBox 31"/>
-          <p:cNvSpPr txBox="1"/>
-          <p:nvPr/>
-        </p:nvSpPr>
-        <p:spPr>
-          <a:xfrm>
-            <a:off x="822960" y="3849624"/>
-            <a:ext cx="3383280" cy="566928"/>
-          </a:xfrm>
-          <a:prstGeom prst="rect">
-            <a:avLst/>
-          </a:prstGeom>
-          <a:noFill/>
-        </p:spPr>
-        <p:txBody>
-          <a:bodyPr wrap="square" anchor="ctr" lIns="0" rIns="0" tIns="0" bIns="0">
-            <a:spAutoFit/>
-          </a:bodyPr>
-          <a:lstStyle/>
-          <a:p>
-            <a:pPr algn="l">
-              <a:lnSpc>
-                <a:spcPct val="110000"/>
-              </a:lnSpc>
-              <a:spcAft>
-                <a:spcPts val="0"/>
-              </a:spcAft>
-            </a:pPr>
-            <a:r>
-              <a:rPr sz="1300" b="0" i="0">
-                <a:solidFill>
-                  <a:srgbClr val="333840"/>
-                </a:solidFill>
-                <a:latin typeface="Arial"/>
-              </a:rPr>
-              <a:t>Value growth required</a:t>
-            </a:r>
-          </a:p>
-        </p:txBody>
-      </p:sp>
-      <p:sp>
-        <p:nvSpPr>
-          <p:cNvPr id="33" name="Rectangle 32"/>
-          <p:cNvSpPr/>
-          <p:nvPr/>
-        </p:nvSpPr>
-        <p:spPr>
-          <a:xfrm>
-            <a:off x="4343400" y="3849624"/>
-            <a:ext cx="3657600" cy="566928"/>
-          </a:xfrm>
-          <a:prstGeom prst="rect">
-            <a:avLst/>
-          </a:prstGeom>
-          <a:solidFill>
-            <a:srgbClr val="FFFFFF"/>
-          </a:solidFill>
-          <a:ln>
-            <a:noFill/>
-          </a:ln>
-          <a:effectLst/>
-        </p:spPr>
-        <p:style>
-          <a:lnRef idx="1">
-            <a:schemeClr val="accent1"/>
-          </a:lnRef>
-          <a:fillRef idx="3">
-            <a:schemeClr val="accent1"/>
-          </a:fillRef>
-          <a:effectRef idx="2">
-            <a:schemeClr val="accent1"/>
-          </a:effectRef>
-          <a:fontRef idx="minor">
-            <a:schemeClr val="lt1"/>
-          </a:fontRef>
-        </p:style>
-        <p:txBody>
-          <a:bodyPr rtlCol="0" anchor="ctr"/>
-          <a:lstStyle/>
-          <a:p>
-            <a:pPr algn="ctr"/>
-          </a:p>
-        </p:txBody>
-      </p:sp>
-      <p:sp>
-        <p:nvSpPr>
-          <p:cNvPr id="34" name="TextBox 33"/>
-          <p:cNvSpPr txBox="1"/>
-          <p:nvPr/>
-        </p:nvSpPr>
-        <p:spPr>
-          <a:xfrm>
-            <a:off x="4480560" y="3849624"/>
-            <a:ext cx="3383280" cy="566928"/>
-          </a:xfrm>
-          <a:prstGeom prst="rect">
-            <a:avLst/>
-          </a:prstGeom>
-          <a:noFill/>
-        </p:spPr>
-        <p:txBody>
-          <a:bodyPr wrap="square" anchor="ctr" lIns="0" rIns="0" tIns="0" bIns="0">
-            <a:spAutoFit/>
-          </a:bodyPr>
-          <a:lstStyle/>
-          <a:p>
-            <a:pPr algn="l">
-              <a:lnSpc>
-                <a:spcPct val="110000"/>
-              </a:lnSpc>
-              <a:spcAft>
-                <a:spcPts val="0"/>
-              </a:spcAft>
-            </a:pPr>
-            <a:r>
-              <a:rPr sz="1300" b="0" i="0">
-                <a:solidFill>
-                  <a:srgbClr val="333840"/>
-                </a:solidFill>
-                <a:latin typeface="Arial"/>
-              </a:rPr>
-              <a:t>+148% total growth</a:t>
-            </a:r>
-          </a:p>
-        </p:txBody>
-      </p:sp>
-      <p:sp>
-        <p:nvSpPr>
-          <p:cNvPr id="35" name="Rectangle 34"/>
-          <p:cNvSpPr/>
-          <p:nvPr/>
-        </p:nvSpPr>
-        <p:spPr>
-          <a:xfrm>
-            <a:off x="8001000" y="3849624"/>
-            <a:ext cx="3520440" cy="566928"/>
-          </a:xfrm>
-          <a:prstGeom prst="rect">
-            <a:avLst/>
-          </a:prstGeom>
-          <a:solidFill>
-            <a:srgbClr val="FFFFFF"/>
-          </a:solidFill>
-          <a:ln>
-            <a:noFill/>
-          </a:ln>
-          <a:effectLst/>
-        </p:spPr>
-        <p:style>
-          <a:lnRef idx="1">
-            <a:schemeClr val="accent1"/>
-          </a:lnRef>
-          <a:fillRef idx="3">
-            <a:schemeClr val="accent1"/>
-          </a:fillRef>
-          <a:effectRef idx="2">
-            <a:schemeClr val="accent1"/>
-          </a:effectRef>
-          <a:fontRef idx="minor">
-            <a:schemeClr val="lt1"/>
-          </a:fontRef>
-        </p:style>
-        <p:txBody>
-          <a:bodyPr rtlCol="0" anchor="ctr"/>
-          <a:lstStyle/>
-          <a:p>
-            <a:pPr algn="ctr"/>
-          </a:p>
-        </p:txBody>
-      </p:sp>
-      <p:sp>
-        <p:nvSpPr>
-          <p:cNvPr id="36" name="TextBox 35"/>
-          <p:cNvSpPr txBox="1"/>
-          <p:nvPr/>
-        </p:nvSpPr>
-        <p:spPr>
-          <a:xfrm>
-            <a:off x="8138160" y="3849624"/>
-            <a:ext cx="3246120" cy="566928"/>
-          </a:xfrm>
-          <a:prstGeom prst="rect">
-            <a:avLst/>
-          </a:prstGeom>
-          <a:noFill/>
-        </p:spPr>
-        <p:txBody>
-          <a:bodyPr wrap="square" anchor="ctr" lIns="0" rIns="0" tIns="0" bIns="0">
-            <a:spAutoFit/>
-          </a:bodyPr>
-          <a:lstStyle/>
-          <a:p>
-            <a:pPr algn="l">
-              <a:lnSpc>
-                <a:spcPct val="110000"/>
-              </a:lnSpc>
-              <a:spcAft>
-                <a:spcPts val="0"/>
-              </a:spcAft>
-            </a:pPr>
-            <a:r>
-              <a:rPr sz="1300" b="1" i="0">
-                <a:solidFill>
-                  <a:srgbClr val="1E334E"/>
-                </a:solidFill>
-                <a:latin typeface="Arial"/>
-              </a:rPr>
-              <a:t>+73% total growth</a:t>
-            </a:r>
-          </a:p>
-        </p:txBody>
-      </p:sp>
-      <p:sp>
-        <p:nvSpPr>
-          <p:cNvPr id="37" name="Rectangle 36"/>
-          <p:cNvSpPr/>
-          <p:nvPr/>
-        </p:nvSpPr>
-        <p:spPr>
-          <a:xfrm>
-            <a:off x="685800" y="4416552"/>
-            <a:ext cx="3657600" cy="566928"/>
-          </a:xfrm>
-          <a:prstGeom prst="rect">
-            <a:avLst/>
-          </a:prstGeom>
-          <a:solidFill>
-            <a:srgbClr val="F1F2F4"/>
-          </a:solidFill>
-          <a:ln>
-            <a:noFill/>
-          </a:ln>
-          <a:effectLst/>
-        </p:spPr>
-        <p:style>
-          <a:lnRef idx="1">
-            <a:schemeClr val="accent1"/>
-          </a:lnRef>
-          <a:fillRef idx="3">
-            <a:schemeClr val="accent1"/>
-          </a:fillRef>
-          <a:effectRef idx="2">
-            <a:schemeClr val="accent1"/>
-          </a:effectRef>
-          <a:fontRef idx="minor">
-            <a:schemeClr val="lt1"/>
-          </a:fontRef>
-        </p:style>
-        <p:txBody>
-          <a:bodyPr rtlCol="0" anchor="ctr"/>
-          <a:lstStyle/>
-          <a:p>
-            <a:pPr algn="ctr"/>
-          </a:p>
-        </p:txBody>
-      </p:sp>
-      <p:sp>
-        <p:nvSpPr>
-          <p:cNvPr id="38" name="TextBox 37"/>
-          <p:cNvSpPr txBox="1"/>
-          <p:nvPr/>
-        </p:nvSpPr>
-        <p:spPr>
-          <a:xfrm>
-            <a:off x="822960" y="4416552"/>
-            <a:ext cx="3383280" cy="566928"/>
-          </a:xfrm>
-          <a:prstGeom prst="rect">
-            <a:avLst/>
-          </a:prstGeom>
-          <a:noFill/>
-        </p:spPr>
-        <p:txBody>
-          <a:bodyPr wrap="square" anchor="ctr" lIns="0" rIns="0" tIns="0" bIns="0">
-            <a:spAutoFit/>
-          </a:bodyPr>
-          <a:lstStyle/>
-          <a:p>
-            <a:pPr algn="l">
-              <a:lnSpc>
-                <a:spcPct val="110000"/>
-              </a:lnSpc>
-              <a:spcAft>
-                <a:spcPts val="0"/>
-              </a:spcAft>
-            </a:pPr>
-            <a:r>
-              <a:rPr sz="1300" b="0" i="0">
-                <a:solidFill>
-                  <a:srgbClr val="333840"/>
-                </a:solidFill>
-                <a:latin typeface="Arial"/>
-              </a:rPr>
-              <a:t>Operational success needed</a:t>
-            </a:r>
-          </a:p>
-        </p:txBody>
-      </p:sp>
-      <p:sp>
-        <p:nvSpPr>
-          <p:cNvPr id="39" name="Rectangle 38"/>
-          <p:cNvSpPr/>
-          <p:nvPr/>
-        </p:nvSpPr>
-        <p:spPr>
-          <a:xfrm>
-            <a:off x="4343400" y="4416552"/>
-            <a:ext cx="3657600" cy="566928"/>
-          </a:xfrm>
-          <a:prstGeom prst="rect">
-            <a:avLst/>
-          </a:prstGeom>
-          <a:solidFill>
-            <a:srgbClr val="F1F2F4"/>
-          </a:solidFill>
-          <a:ln>
-            <a:noFill/>
-          </a:ln>
-          <a:effectLst/>
-        </p:spPr>
-        <p:style>
-          <a:lnRef idx="1">
-            <a:schemeClr val="accent1"/>
-          </a:lnRef>
-          <a:fillRef idx="3">
-            <a:schemeClr val="accent1"/>
-          </a:fillRef>
-          <a:effectRef idx="2">
-            <a:schemeClr val="accent1"/>
-          </a:effectRef>
-          <a:fontRef idx="minor">
-            <a:schemeClr val="lt1"/>
-          </a:fontRef>
-        </p:style>
-        <p:txBody>
-          <a:bodyPr rtlCol="0" anchor="ctr"/>
-          <a:lstStyle/>
-          <a:p>
-            <a:pPr algn="ctr"/>
-          </a:p>
-        </p:txBody>
-      </p:sp>
-      <p:sp>
-        <p:nvSpPr>
-          <p:cNvPr id="40" name="TextBox 39"/>
-          <p:cNvSpPr txBox="1"/>
-          <p:nvPr/>
-        </p:nvSpPr>
-        <p:spPr>
-          <a:xfrm>
-            <a:off x="4480560" y="4416552"/>
-            <a:ext cx="3383280" cy="566928"/>
-          </a:xfrm>
-          <a:prstGeom prst="rect">
-            <a:avLst/>
-          </a:prstGeom>
-          <a:noFill/>
-        </p:spPr>
-        <p:txBody>
-          <a:bodyPr wrap="square" anchor="ctr" lIns="0" rIns="0" tIns="0" bIns="0">
-            <a:spAutoFit/>
-          </a:bodyPr>
-          <a:lstStyle/>
-          <a:p>
-            <a:pPr algn="l">
-              <a:lnSpc>
-                <a:spcPct val="110000"/>
-              </a:lnSpc>
-              <a:spcAft>
-                <a:spcPts val="0"/>
-              </a:spcAft>
-            </a:pPr>
-            <a:r>
-              <a:rPr sz="1300" b="0" i="0">
-                <a:solidFill>
-                  <a:srgbClr val="333840"/>
-                </a:solidFill>
-                <a:latin typeface="Arial"/>
-              </a:rPr>
-              <a:t>~85–100% of thesis</a:t>
-            </a:r>
-          </a:p>
-        </p:txBody>
-      </p:sp>
-      <p:sp>
-        <p:nvSpPr>
-          <p:cNvPr id="41" name="Rectangle 40"/>
-          <p:cNvSpPr/>
-          <p:nvPr/>
-        </p:nvSpPr>
-        <p:spPr>
-          <a:xfrm>
-            <a:off x="8001000" y="4416552"/>
-            <a:ext cx="3520440" cy="566928"/>
-          </a:xfrm>
-          <a:prstGeom prst="rect">
-            <a:avLst/>
-          </a:prstGeom>
-          <a:solidFill>
-            <a:srgbClr val="F1F2F4"/>
-          </a:solidFill>
-          <a:ln>
-            <a:noFill/>
-          </a:ln>
-          <a:effectLst/>
-        </p:spPr>
-        <p:style>
-          <a:lnRef idx="1">
-            <a:schemeClr val="accent1"/>
-          </a:lnRef>
-          <a:fillRef idx="3">
-            <a:schemeClr val="accent1"/>
-          </a:fillRef>
-          <a:effectRef idx="2">
-            <a:schemeClr val="accent1"/>
-          </a:effectRef>
-          <a:fontRef idx="minor">
-            <a:schemeClr val="lt1"/>
-          </a:fontRef>
-        </p:style>
-        <p:txBody>
-          <a:bodyPr rtlCol="0" anchor="ctr"/>
-          <a:lstStyle/>
-          <a:p>
-            <a:pPr algn="ctr"/>
-          </a:p>
-        </p:txBody>
-      </p:sp>
-      <p:sp>
-        <p:nvSpPr>
-          <p:cNvPr id="42" name="TextBox 41"/>
-          <p:cNvSpPr txBox="1"/>
-          <p:nvPr/>
-        </p:nvSpPr>
-        <p:spPr>
-          <a:xfrm>
-            <a:off x="8138160" y="4416552"/>
-            <a:ext cx="3246120" cy="566928"/>
-          </a:xfrm>
-          <a:prstGeom prst="rect">
-            <a:avLst/>
-          </a:prstGeom>
-          <a:noFill/>
-        </p:spPr>
-        <p:txBody>
-          <a:bodyPr wrap="square" anchor="ctr" lIns="0" rIns="0" tIns="0" bIns="0">
-            <a:spAutoFit/>
-          </a:bodyPr>
-          <a:lstStyle/>
-          <a:p>
-            <a:pPr algn="l">
-              <a:lnSpc>
-                <a:spcPct val="110000"/>
-              </a:lnSpc>
-              <a:spcAft>
-                <a:spcPts val="0"/>
-              </a:spcAft>
-            </a:pPr>
-            <a:r>
-              <a:rPr sz="1300" b="1" i="0">
-                <a:solidFill>
-                  <a:srgbClr val="1E334E"/>
-                </a:solidFill>
-                <a:latin typeface="Arial"/>
+                <a:latin typeface="Calibri"/>
               </a:rPr>
               <a:t>~45–55% of thesis</a:t>
             </a:r>
@@ -8125,7 +7084,7 @@
       </p:sp>
       <p:sp>
         <p:nvSpPr>
-          <p:cNvPr id="43" name="TextBox 42"/>
+          <p:cNvPr id="39" name="TextBox 38"/>
           <p:cNvSpPr txBox="1"/>
           <p:nvPr/>
         </p:nvSpPr>
@@ -8158,7 +7117,7 @@
                 <a:solidFill>
                   <a:srgbClr val="4A5D75"/>
                 </a:solidFill>
-                <a:latin typeface="Arial"/>
+                <a:latin typeface="Calibri"/>
               </a:rPr>
               <a:t>A margin-for-error strategy: we win by being directionally right where PE must be precisely perfect.</a:t>
             </a:r>
@@ -8227,235 +7186,39 @@
           </a:p>
         </p:txBody>
       </p:sp>
-      <p:sp>
-        <p:nvSpPr>
-          <p:cNvPr id="3" name="Rectangle 2"/>
-          <p:cNvSpPr/>
-          <p:nvPr/>
-        </p:nvSpPr>
-        <p:spPr>
-          <a:xfrm>
-            <a:off x="502920" y="370515"/>
-            <a:ext cx="32186" cy="68397"/>
-          </a:xfrm>
-          <a:prstGeom prst="rect">
-            <a:avLst/>
-          </a:prstGeom>
-          <a:solidFill>
-            <a:srgbClr val="4A5D75"/>
-          </a:solidFill>
-          <a:ln>
-            <a:noFill/>
-          </a:ln>
-          <a:effectLst/>
-        </p:spPr>
-        <p:style>
-          <a:lnRef idx="1">
-            <a:schemeClr val="accent1"/>
-          </a:lnRef>
-          <a:fillRef idx="3">
-            <a:schemeClr val="accent1"/>
-          </a:fillRef>
-          <a:effectRef idx="2">
-            <a:schemeClr val="accent1"/>
-          </a:effectRef>
-          <a:fontRef idx="minor">
-            <a:schemeClr val="lt1"/>
-          </a:fontRef>
-        </p:style>
-        <p:txBody>
-          <a:bodyPr rtlCol="0" anchor="ctr"/>
-          <a:lstStyle/>
-          <a:p>
-            <a:pPr algn="ctr"/>
-          </a:p>
-        </p:txBody>
-      </p:sp>
-      <p:sp>
-        <p:nvSpPr>
-          <p:cNvPr id="4" name="Rectangle 3"/>
-          <p:cNvSpPr/>
-          <p:nvPr/>
-        </p:nvSpPr>
-        <p:spPr>
-          <a:xfrm>
-            <a:off x="559246" y="314188"/>
-            <a:ext cx="32186" cy="124724"/>
-          </a:xfrm>
-          <a:prstGeom prst="rect">
-            <a:avLst/>
-          </a:prstGeom>
-          <a:solidFill>
-            <a:srgbClr val="4A5D75"/>
-          </a:solidFill>
-          <a:ln>
-            <a:noFill/>
-          </a:ln>
-          <a:effectLst/>
-        </p:spPr>
-        <p:style>
-          <a:lnRef idx="1">
-            <a:schemeClr val="accent1"/>
-          </a:lnRef>
-          <a:fillRef idx="3">
-            <a:schemeClr val="accent1"/>
-          </a:fillRef>
-          <a:effectRef idx="2">
-            <a:schemeClr val="accent1"/>
-          </a:effectRef>
-          <a:fontRef idx="minor">
-            <a:schemeClr val="lt1"/>
-          </a:fontRef>
-        </p:style>
-        <p:txBody>
-          <a:bodyPr rtlCol="0" anchor="ctr"/>
-          <a:lstStyle/>
-          <a:p>
-            <a:pPr algn="ctr"/>
-          </a:p>
-        </p:txBody>
-      </p:sp>
-      <p:sp>
-        <p:nvSpPr>
-          <p:cNvPr id="5" name="Rectangle 4"/>
-          <p:cNvSpPr/>
-          <p:nvPr/>
-        </p:nvSpPr>
-        <p:spPr>
-          <a:xfrm>
-            <a:off x="615572" y="237744"/>
-            <a:ext cx="32186" cy="201168"/>
-          </a:xfrm>
-          <a:prstGeom prst="rect">
-            <a:avLst/>
-          </a:prstGeom>
-          <a:solidFill>
-            <a:srgbClr val="4A5D75"/>
-          </a:solidFill>
-          <a:ln>
-            <a:noFill/>
-          </a:ln>
-          <a:effectLst/>
-        </p:spPr>
-        <p:style>
-          <a:lnRef idx="1">
-            <a:schemeClr val="accent1"/>
-          </a:lnRef>
-          <a:fillRef idx="3">
-            <a:schemeClr val="accent1"/>
-          </a:fillRef>
-          <a:effectRef idx="2">
-            <a:schemeClr val="accent1"/>
-          </a:effectRef>
-          <a:fontRef idx="minor">
-            <a:schemeClr val="lt1"/>
-          </a:fontRef>
-        </p:style>
-        <p:txBody>
-          <a:bodyPr rtlCol="0" anchor="ctr"/>
-          <a:lstStyle/>
-          <a:p>
-            <a:pPr algn="ctr"/>
-          </a:p>
-        </p:txBody>
-      </p:sp>
-      <p:sp>
-        <p:nvSpPr>
-          <p:cNvPr id="6" name="Rectangle 5"/>
-          <p:cNvSpPr/>
-          <p:nvPr/>
-        </p:nvSpPr>
-        <p:spPr>
-          <a:xfrm>
-            <a:off x="671898" y="328270"/>
-            <a:ext cx="32186" cy="110642"/>
-          </a:xfrm>
-          <a:prstGeom prst="rect">
-            <a:avLst/>
-          </a:prstGeom>
-          <a:solidFill>
-            <a:srgbClr val="4A5D75"/>
-          </a:solidFill>
-          <a:ln>
-            <a:noFill/>
-          </a:ln>
-          <a:effectLst/>
-        </p:spPr>
-        <p:style>
-          <a:lnRef idx="1">
-            <a:schemeClr val="accent1"/>
-          </a:lnRef>
-          <a:fillRef idx="3">
-            <a:schemeClr val="accent1"/>
-          </a:fillRef>
-          <a:effectRef idx="2">
-            <a:schemeClr val="accent1"/>
-          </a:effectRef>
-          <a:fontRef idx="minor">
-            <a:schemeClr val="lt1"/>
-          </a:fontRef>
-        </p:style>
-        <p:txBody>
-          <a:bodyPr rtlCol="0" anchor="ctr"/>
-          <a:lstStyle/>
-          <a:p>
-            <a:pPr algn="ctr"/>
-          </a:p>
-        </p:txBody>
-      </p:sp>
-      <p:sp>
-        <p:nvSpPr>
-          <p:cNvPr id="7" name="Rectangle 6"/>
-          <p:cNvSpPr/>
-          <p:nvPr/>
-        </p:nvSpPr>
-        <p:spPr>
-          <a:xfrm>
-            <a:off x="728224" y="382585"/>
-            <a:ext cx="32186" cy="56327"/>
-          </a:xfrm>
-          <a:prstGeom prst="rect">
-            <a:avLst/>
-          </a:prstGeom>
-          <a:solidFill>
-            <a:srgbClr val="4A5D75"/>
-          </a:solidFill>
-          <a:ln>
-            <a:noFill/>
-          </a:ln>
-          <a:effectLst/>
-        </p:spPr>
-        <p:style>
-          <a:lnRef idx="1">
-            <a:schemeClr val="accent1"/>
-          </a:lnRef>
-          <a:fillRef idx="3">
-            <a:schemeClr val="accent1"/>
-          </a:fillRef>
-          <a:effectRef idx="2">
-            <a:schemeClr val="accent1"/>
-          </a:effectRef>
-          <a:fontRef idx="minor">
-            <a:schemeClr val="lt1"/>
-          </a:fontRef>
-        </p:style>
-        <p:txBody>
-          <a:bodyPr rtlCol="0" anchor="ctr"/>
-          <a:lstStyle/>
-          <a:p>
-            <a:pPr algn="ctr"/>
-          </a:p>
-        </p:txBody>
-      </p:sp>
-      <p:sp>
-        <p:nvSpPr>
-          <p:cNvPr id="8" name="TextBox 7"/>
+      <p:pic>
+        <p:nvPicPr>
+          <p:cNvPr id="3" name="Picture 2" descr="mark_dark.png"/>
+          <p:cNvPicPr>
+            <a:picLocks noChangeAspect="1"/>
+          </p:cNvPicPr>
+          <p:nvPr/>
+        </p:nvPicPr>
+        <p:blipFill>
+          <a:blip r:embed="rId2"/>
+          <a:stretch>
+            <a:fillRect/>
+          </a:stretch>
+        </p:blipFill>
+        <p:spPr>
+          <a:xfrm>
+            <a:off x="502920" y="219456"/>
+            <a:ext cx="280009" cy="237744"/>
+          </a:xfrm>
+          <a:prstGeom prst="rect">
+            <a:avLst/>
+          </a:prstGeom>
+        </p:spPr>
+      </p:pic>
+      <p:sp>
+        <p:nvSpPr>
+          <p:cNvPr id="4" name="TextBox 3"/>
           <p:cNvSpPr txBox="1"/>
           <p:nvPr/>
         </p:nvSpPr>
         <p:spPr>
           <a:xfrm>
-            <a:off x="1051560" y="219456"/>
+            <a:off x="896112" y="246888"/>
             <a:ext cx="6400800" cy="274320"/>
           </a:xfrm>
           <a:prstGeom prst="rect">
@@ -8482,7 +7245,7 @@
                 <a:solidFill>
                   <a:srgbClr val="4A5D75"/>
                 </a:solidFill>
-                <a:latin typeface="Arial"/>
+                <a:latin typeface="Calibri"/>
               </a:rPr>
               <a:t>Risk Management</a:t>
             </a:r>
@@ -8491,7 +7254,7 @@
       </p:sp>
       <p:sp>
         <p:nvSpPr>
-          <p:cNvPr id="9" name="Rectangle 8"/>
+          <p:cNvPr id="5" name="Rectangle 4"/>
           <p:cNvSpPr/>
           <p:nvPr/>
         </p:nvSpPr>
@@ -8535,7 +7298,7 @@
       </p:sp>
       <p:sp>
         <p:nvSpPr>
-          <p:cNvPr id="10" name="TextBox 9"/>
+          <p:cNvPr id="6" name="TextBox 5"/>
           <p:cNvSpPr txBox="1"/>
           <p:nvPr/>
         </p:nvSpPr>
@@ -8568,7 +7331,7 @@
                 <a:solidFill>
                   <a:srgbClr val="1E334E"/>
                 </a:solidFill>
-                <a:latin typeface="Georgia"/>
+                <a:latin typeface="Times New Roman"/>
               </a:rPr>
               <a:t>A risk system built to avoid permanent loss</a:t>
             </a:r>
@@ -8577,7 +7340,7 @@
       </p:sp>
       <p:sp>
         <p:nvSpPr>
-          <p:cNvPr id="11" name="TextBox 10"/>
+          <p:cNvPr id="7" name="TextBox 6"/>
           <p:cNvSpPr txBox="1"/>
           <p:nvPr/>
         </p:nvSpPr>
@@ -8610,7 +7373,7 @@
                 <a:solidFill>
                   <a:srgbClr val="5A636E"/>
                 </a:solidFill>
-                <a:latin typeface="Arial"/>
+                <a:latin typeface="Calibri"/>
               </a:rPr>
               <a:t>Predictability, price and influence combined to lower risk systematically.</a:t>
             </a:r>
@@ -8619,7 +7382,7 @@
       </p:sp>
       <p:sp>
         <p:nvSpPr>
-          <p:cNvPr id="12" name="TextBox 11"/>
+          <p:cNvPr id="8" name="TextBox 7"/>
           <p:cNvSpPr txBox="1"/>
           <p:nvPr/>
         </p:nvSpPr>
@@ -8652,7 +7415,7 @@
                 <a:solidFill>
                   <a:srgbClr val="9AA4B0"/>
                 </a:solidFill>
-                <a:latin typeface="Arial"/>
+                <a:latin typeface="Calibri"/>
               </a:rPr>
               <a:t>Strictly confidential          11</a:t>
             </a:r>
@@ -8661,7 +7424,7 @@
       </p:sp>
       <p:sp>
         <p:nvSpPr>
-          <p:cNvPr id="13" name="TextBox 12"/>
+          <p:cNvPr id="9" name="TextBox 8"/>
           <p:cNvSpPr txBox="1"/>
           <p:nvPr/>
         </p:nvSpPr>
@@ -8694,7 +7457,7 @@
                 <a:solidFill>
                   <a:srgbClr val="4A5D75"/>
                 </a:solidFill>
-                <a:latin typeface="Arial"/>
+                <a:latin typeface="Calibri"/>
               </a:rPr>
               <a:t>THE VALUATION FLOOR</a:t>
             </a:r>
@@ -8713,7 +7476,7 @@
                 <a:solidFill>
                   <a:srgbClr val="333840"/>
                 </a:solidFill>
-                <a:latin typeface="Arial"/>
+                <a:latin typeface="Calibri"/>
               </a:rPr>
               <a:t>Enter only at “shareholder surrender” — dried-up liquidity and long-term price lows</a:t>
             </a:r>
@@ -8732,7 +7495,7 @@
                 <a:solidFill>
                   <a:srgbClr val="333840"/>
                 </a:solidFill>
-                <a:latin typeface="Arial"/>
+                <a:latin typeface="Calibri"/>
               </a:rPr>
               <a:t>Value only the rectifiable core; assign zero to “growth trap” divisions</a:t>
             </a:r>
@@ -8751,7 +7514,7 @@
                 <a:solidFill>
                   <a:srgbClr val="333840"/>
                 </a:solidFill>
-                <a:latin typeface="Arial"/>
+                <a:latin typeface="Calibri"/>
               </a:rPr>
               <a:t>Creates a structural 30–40% margin of safety vs a PE bidder</a:t>
             </a:r>
@@ -8760,7 +7523,7 @@
       </p:sp>
       <p:sp>
         <p:nvSpPr>
-          <p:cNvPr id="14" name="TextBox 13"/>
+          <p:cNvPr id="10" name="TextBox 9"/>
           <p:cNvSpPr txBox="1"/>
           <p:nvPr/>
         </p:nvSpPr>
@@ -8793,7 +7556,7 @@
                 <a:solidFill>
                   <a:srgbClr val="4A5D75"/>
                 </a:solidFill>
-                <a:latin typeface="Arial"/>
+                <a:latin typeface="Calibri"/>
               </a:rPr>
               <a:t>THE BOARD-LEVEL KILL SWITCH</a:t>
             </a:r>
@@ -8812,7 +7575,7 @@
                 <a:solidFill>
                   <a:srgbClr val="333840"/>
                 </a:solidFill>
-                <a:latin typeface="Arial"/>
+                <a:latin typeface="Calibri"/>
               </a:rPr>
               <a:t>Secure board seats and chairmanships as a prerequisite — not proxy threats</a:t>
             </a:r>
@@ -8831,7 +7594,7 @@
                 <a:solidFill>
                   <a:srgbClr val="333840"/>
                 </a:solidFill>
-                <a:latin typeface="Arial"/>
+                <a:latin typeface="Calibri"/>
               </a:rPr>
               <a:t>Mandated rectification: freeze prestige projects the moment the macro shifts</a:t>
             </a:r>
@@ -8850,7 +7613,7 @@
                 <a:solidFill>
                   <a:srgbClr val="333840"/>
                 </a:solidFill>
-                <a:latin typeface="Arial"/>
+                <a:latin typeface="Calibri"/>
               </a:rPr>
               <a:t>Automatic risk metrics (10/20/30% triggers) remove portfolio-manager bias</a:t>
             </a:r>
@@ -8859,7 +7622,7 @@
       </p:sp>
       <p:sp>
         <p:nvSpPr>
-          <p:cNvPr id="15" name="TextBox 14"/>
+          <p:cNvPr id="11" name="TextBox 10"/>
           <p:cNvSpPr txBox="1"/>
           <p:nvPr/>
         </p:nvSpPr>
@@ -8892,7 +7655,7 @@
                 <a:solidFill>
                   <a:srgbClr val="5A636E"/>
                 </a:solidFill>
-                <a:latin typeface="Arial"/>
+                <a:latin typeface="Calibri"/>
               </a:rPr>
               <a:t>Core &amp; satellite: a 30-stock equal-weighted core index compounds capital; 8–12 concentrated ideas must clear a 12% IRR hurdle and a ≤20% downside gate.</a:t>
             </a:r>
@@ -8961,235 +7724,39 @@
           </a:p>
         </p:txBody>
       </p:sp>
-      <p:sp>
-        <p:nvSpPr>
-          <p:cNvPr id="3" name="Rectangle 2"/>
-          <p:cNvSpPr/>
-          <p:nvPr/>
-        </p:nvSpPr>
-        <p:spPr>
-          <a:xfrm>
-            <a:off x="502920" y="370515"/>
-            <a:ext cx="32186" cy="68397"/>
-          </a:xfrm>
-          <a:prstGeom prst="rect">
-            <a:avLst/>
-          </a:prstGeom>
-          <a:solidFill>
-            <a:srgbClr val="4A5D75"/>
-          </a:solidFill>
-          <a:ln>
-            <a:noFill/>
-          </a:ln>
-          <a:effectLst/>
-        </p:spPr>
-        <p:style>
-          <a:lnRef idx="1">
-            <a:schemeClr val="accent1"/>
-          </a:lnRef>
-          <a:fillRef idx="3">
-            <a:schemeClr val="accent1"/>
-          </a:fillRef>
-          <a:effectRef idx="2">
-            <a:schemeClr val="accent1"/>
-          </a:effectRef>
-          <a:fontRef idx="minor">
-            <a:schemeClr val="lt1"/>
-          </a:fontRef>
-        </p:style>
-        <p:txBody>
-          <a:bodyPr rtlCol="0" anchor="ctr"/>
-          <a:lstStyle/>
-          <a:p>
-            <a:pPr algn="ctr"/>
-          </a:p>
-        </p:txBody>
-      </p:sp>
-      <p:sp>
-        <p:nvSpPr>
-          <p:cNvPr id="4" name="Rectangle 3"/>
-          <p:cNvSpPr/>
-          <p:nvPr/>
-        </p:nvSpPr>
-        <p:spPr>
-          <a:xfrm>
-            <a:off x="559246" y="314188"/>
-            <a:ext cx="32186" cy="124724"/>
-          </a:xfrm>
-          <a:prstGeom prst="rect">
-            <a:avLst/>
-          </a:prstGeom>
-          <a:solidFill>
-            <a:srgbClr val="4A5D75"/>
-          </a:solidFill>
-          <a:ln>
-            <a:noFill/>
-          </a:ln>
-          <a:effectLst/>
-        </p:spPr>
-        <p:style>
-          <a:lnRef idx="1">
-            <a:schemeClr val="accent1"/>
-          </a:lnRef>
-          <a:fillRef idx="3">
-            <a:schemeClr val="accent1"/>
-          </a:fillRef>
-          <a:effectRef idx="2">
-            <a:schemeClr val="accent1"/>
-          </a:effectRef>
-          <a:fontRef idx="minor">
-            <a:schemeClr val="lt1"/>
-          </a:fontRef>
-        </p:style>
-        <p:txBody>
-          <a:bodyPr rtlCol="0" anchor="ctr"/>
-          <a:lstStyle/>
-          <a:p>
-            <a:pPr algn="ctr"/>
-          </a:p>
-        </p:txBody>
-      </p:sp>
-      <p:sp>
-        <p:nvSpPr>
-          <p:cNvPr id="5" name="Rectangle 4"/>
-          <p:cNvSpPr/>
-          <p:nvPr/>
-        </p:nvSpPr>
-        <p:spPr>
-          <a:xfrm>
-            <a:off x="615572" y="237744"/>
-            <a:ext cx="32186" cy="201168"/>
-          </a:xfrm>
-          <a:prstGeom prst="rect">
-            <a:avLst/>
-          </a:prstGeom>
-          <a:solidFill>
-            <a:srgbClr val="4A5D75"/>
-          </a:solidFill>
-          <a:ln>
-            <a:noFill/>
-          </a:ln>
-          <a:effectLst/>
-        </p:spPr>
-        <p:style>
-          <a:lnRef idx="1">
-            <a:schemeClr val="accent1"/>
-          </a:lnRef>
-          <a:fillRef idx="3">
-            <a:schemeClr val="accent1"/>
-          </a:fillRef>
-          <a:effectRef idx="2">
-            <a:schemeClr val="accent1"/>
-          </a:effectRef>
-          <a:fontRef idx="minor">
-            <a:schemeClr val="lt1"/>
-          </a:fontRef>
-        </p:style>
-        <p:txBody>
-          <a:bodyPr rtlCol="0" anchor="ctr"/>
-          <a:lstStyle/>
-          <a:p>
-            <a:pPr algn="ctr"/>
-          </a:p>
-        </p:txBody>
-      </p:sp>
-      <p:sp>
-        <p:nvSpPr>
-          <p:cNvPr id="6" name="Rectangle 5"/>
-          <p:cNvSpPr/>
-          <p:nvPr/>
-        </p:nvSpPr>
-        <p:spPr>
-          <a:xfrm>
-            <a:off x="671898" y="328270"/>
-            <a:ext cx="32186" cy="110642"/>
-          </a:xfrm>
-          <a:prstGeom prst="rect">
-            <a:avLst/>
-          </a:prstGeom>
-          <a:solidFill>
-            <a:srgbClr val="4A5D75"/>
-          </a:solidFill>
-          <a:ln>
-            <a:noFill/>
-          </a:ln>
-          <a:effectLst/>
-        </p:spPr>
-        <p:style>
-          <a:lnRef idx="1">
-            <a:schemeClr val="accent1"/>
-          </a:lnRef>
-          <a:fillRef idx="3">
-            <a:schemeClr val="accent1"/>
-          </a:fillRef>
-          <a:effectRef idx="2">
-            <a:schemeClr val="accent1"/>
-          </a:effectRef>
-          <a:fontRef idx="minor">
-            <a:schemeClr val="lt1"/>
-          </a:fontRef>
-        </p:style>
-        <p:txBody>
-          <a:bodyPr rtlCol="0" anchor="ctr"/>
-          <a:lstStyle/>
-          <a:p>
-            <a:pPr algn="ctr"/>
-          </a:p>
-        </p:txBody>
-      </p:sp>
-      <p:sp>
-        <p:nvSpPr>
-          <p:cNvPr id="7" name="Rectangle 6"/>
-          <p:cNvSpPr/>
-          <p:nvPr/>
-        </p:nvSpPr>
-        <p:spPr>
-          <a:xfrm>
-            <a:off x="728224" y="382585"/>
-            <a:ext cx="32186" cy="56327"/>
-          </a:xfrm>
-          <a:prstGeom prst="rect">
-            <a:avLst/>
-          </a:prstGeom>
-          <a:solidFill>
-            <a:srgbClr val="4A5D75"/>
-          </a:solidFill>
-          <a:ln>
-            <a:noFill/>
-          </a:ln>
-          <a:effectLst/>
-        </p:spPr>
-        <p:style>
-          <a:lnRef idx="1">
-            <a:schemeClr val="accent1"/>
-          </a:lnRef>
-          <a:fillRef idx="3">
-            <a:schemeClr val="accent1"/>
-          </a:fillRef>
-          <a:effectRef idx="2">
-            <a:schemeClr val="accent1"/>
-          </a:effectRef>
-          <a:fontRef idx="minor">
-            <a:schemeClr val="lt1"/>
-          </a:fontRef>
-        </p:style>
-        <p:txBody>
-          <a:bodyPr rtlCol="0" anchor="ctr"/>
-          <a:lstStyle/>
-          <a:p>
-            <a:pPr algn="ctr"/>
-          </a:p>
-        </p:txBody>
-      </p:sp>
-      <p:sp>
-        <p:nvSpPr>
-          <p:cNvPr id="8" name="TextBox 7"/>
+      <p:pic>
+        <p:nvPicPr>
+          <p:cNvPr id="3" name="Picture 2" descr="mark_dark.png"/>
+          <p:cNvPicPr>
+            <a:picLocks noChangeAspect="1"/>
+          </p:cNvPicPr>
+          <p:nvPr/>
+        </p:nvPicPr>
+        <p:blipFill>
+          <a:blip r:embed="rId2"/>
+          <a:stretch>
+            <a:fillRect/>
+          </a:stretch>
+        </p:blipFill>
+        <p:spPr>
+          <a:xfrm>
+            <a:off x="502920" y="219456"/>
+            <a:ext cx="280009" cy="237744"/>
+          </a:xfrm>
+          <a:prstGeom prst="rect">
+            <a:avLst/>
+          </a:prstGeom>
+        </p:spPr>
+      </p:pic>
+      <p:sp>
+        <p:nvSpPr>
+          <p:cNvPr id="4" name="TextBox 3"/>
           <p:cNvSpPr txBox="1"/>
           <p:nvPr/>
         </p:nvSpPr>
         <p:spPr>
           <a:xfrm>
-            <a:off x="1051560" y="219456"/>
+            <a:off x="896112" y="246888"/>
             <a:ext cx="6400800" cy="274320"/>
           </a:xfrm>
           <a:prstGeom prst="rect">
@@ -9216,7 +7783,7 @@
                 <a:solidFill>
                   <a:srgbClr val="4A5D75"/>
                 </a:solidFill>
-                <a:latin typeface="Arial"/>
+                <a:latin typeface="Calibri"/>
               </a:rPr>
               <a:t>Track Record</a:t>
             </a:r>
@@ -9225,7 +7792,7 @@
       </p:sp>
       <p:sp>
         <p:nvSpPr>
-          <p:cNvPr id="9" name="Rectangle 8"/>
+          <p:cNvPr id="5" name="Rectangle 4"/>
           <p:cNvSpPr/>
           <p:nvPr/>
         </p:nvSpPr>
@@ -9269,7 +7836,7 @@
       </p:sp>
       <p:sp>
         <p:nvSpPr>
-          <p:cNvPr id="10" name="TextBox 9"/>
+          <p:cNvPr id="6" name="TextBox 5"/>
           <p:cNvSpPr txBox="1"/>
           <p:nvPr/>
         </p:nvSpPr>
@@ -9302,7 +7869,7 @@
                 <a:solidFill>
                   <a:srgbClr val="1E334E"/>
                 </a:solidFill>
-                <a:latin typeface="Georgia"/>
+                <a:latin typeface="Times New Roman"/>
               </a:rPr>
               <a:t>Proof: outperformance with downside protection</a:t>
             </a:r>
@@ -9311,7 +7878,7 @@
       </p:sp>
       <p:sp>
         <p:nvSpPr>
-          <p:cNvPr id="11" name="TextBox 10"/>
+          <p:cNvPr id="7" name="TextBox 6"/>
           <p:cNvSpPr txBox="1"/>
           <p:nvPr/>
         </p:nvSpPr>
@@ -9344,7 +7911,7 @@
                 <a:solidFill>
                   <a:srgbClr val="9AA4B0"/>
                 </a:solidFill>
-                <a:latin typeface="Arial"/>
+                <a:latin typeface="Calibri"/>
               </a:rPr>
               <a:t>Strictly confidential          12</a:t>
             </a:r>
@@ -9353,7 +7920,7 @@
       </p:sp>
       <p:graphicFrame>
         <p:nvGraphicFramePr>
-          <p:cNvPr id="12" name="Chart 11"/>
+          <p:cNvPr id="8" name="Chart 7"/>
           <p:cNvGraphicFramePr>
             <a:graphicFrameLocks noGrp="1"/>
           </p:cNvGraphicFramePr>
@@ -9365,13 +7932,13 @@
         </p:xfrm>
         <a:graphic>
           <a:graphicData uri="http://schemas.openxmlformats.org/drawingml/2006/chart">
-            <c:chart xmlns:c="http://schemas.openxmlformats.org/drawingml/2006/chart" r:id="rId2"/>
+            <c:chart xmlns:c="http://schemas.openxmlformats.org/drawingml/2006/chart" r:id="rId3"/>
           </a:graphicData>
         </a:graphic>
       </p:graphicFrame>
       <p:sp>
         <p:nvSpPr>
-          <p:cNvPr id="13" name="TextBox 12"/>
+          <p:cNvPr id="9" name="TextBox 8"/>
           <p:cNvSpPr txBox="1"/>
           <p:nvPr/>
         </p:nvSpPr>
@@ -9404,7 +7971,7 @@
                 <a:solidFill>
                   <a:srgbClr val="1E334E"/>
                 </a:solidFill>
-                <a:latin typeface="Georgia"/>
+                <a:latin typeface="Times New Roman"/>
               </a:rPr>
               <a:t>Haldex AB</a:t>
             </a:r>
@@ -9423,7 +7990,7 @@
                 <a:solidFill>
                   <a:srgbClr val="333840"/>
                 </a:solidFill>
-                <a:latin typeface="Arial"/>
+                <a:latin typeface="Calibri"/>
               </a:rPr>
               <a:t>81% IRR · 3.9x money multiple. Spun off Concentric, refocused the core, re-invested in 2020 for a further 2.0x in under two years.</a:t>
             </a:r>
@@ -9442,7 +8009,7 @@
                 <a:solidFill>
                   <a:srgbClr val="1E334E"/>
                 </a:solidFill>
-                <a:latin typeface="Georgia"/>
+                <a:latin typeface="Times New Roman"/>
               </a:rPr>
               <a:t>Compounding</a:t>
             </a:r>
@@ -9461,7 +8028,7 @@
                 <a:solidFill>
                   <a:srgbClr val="333840"/>
                 </a:solidFill>
-                <a:latin typeface="Arial"/>
+                <a:latin typeface="Calibri"/>
               </a:rPr>
               <a:t>~18x gross vs ~14x for MSCI IMI since 2006, with EBITA growth of +14.5% across portfolio companies.</a:t>
             </a:r>
@@ -9480,7 +8047,7 @@
                 <a:solidFill>
                   <a:srgbClr val="1E334E"/>
                 </a:solidFill>
-                <a:latin typeface="Georgia"/>
+                <a:latin typeface="Times New Roman"/>
               </a:rPr>
               <a:t>Down-market years</a:t>
             </a:r>
@@ -9499,7 +8066,7 @@
                 <a:solidFill>
                   <a:srgbClr val="333840"/>
                 </a:solidFill>
-                <a:latin typeface="Arial"/>
+                <a:latin typeface="Calibri"/>
               </a:rPr>
               <a:t>Outperformed in 2008 (+2.2%), 2011 (+7.9%), 2015 (+11.8%) and 2022 (+20.1%).</a:t>
             </a:r>
@@ -9568,235 +8135,39 @@
           </a:p>
         </p:txBody>
       </p:sp>
-      <p:sp>
-        <p:nvSpPr>
-          <p:cNvPr id="3" name="Rectangle 2"/>
-          <p:cNvSpPr/>
-          <p:nvPr/>
-        </p:nvSpPr>
-        <p:spPr>
-          <a:xfrm>
-            <a:off x="502920" y="370515"/>
-            <a:ext cx="32186" cy="68397"/>
-          </a:xfrm>
-          <a:prstGeom prst="rect">
-            <a:avLst/>
-          </a:prstGeom>
-          <a:solidFill>
-            <a:srgbClr val="4A5D75"/>
-          </a:solidFill>
-          <a:ln>
-            <a:noFill/>
-          </a:ln>
-          <a:effectLst/>
-        </p:spPr>
-        <p:style>
-          <a:lnRef idx="1">
-            <a:schemeClr val="accent1"/>
-          </a:lnRef>
-          <a:fillRef idx="3">
-            <a:schemeClr val="accent1"/>
-          </a:fillRef>
-          <a:effectRef idx="2">
-            <a:schemeClr val="accent1"/>
-          </a:effectRef>
-          <a:fontRef idx="minor">
-            <a:schemeClr val="lt1"/>
-          </a:fontRef>
-        </p:style>
-        <p:txBody>
-          <a:bodyPr rtlCol="0" anchor="ctr"/>
-          <a:lstStyle/>
-          <a:p>
-            <a:pPr algn="ctr"/>
-          </a:p>
-        </p:txBody>
-      </p:sp>
-      <p:sp>
-        <p:nvSpPr>
-          <p:cNvPr id="4" name="Rectangle 3"/>
-          <p:cNvSpPr/>
-          <p:nvPr/>
-        </p:nvSpPr>
-        <p:spPr>
-          <a:xfrm>
-            <a:off x="559246" y="314188"/>
-            <a:ext cx="32186" cy="124724"/>
-          </a:xfrm>
-          <a:prstGeom prst="rect">
-            <a:avLst/>
-          </a:prstGeom>
-          <a:solidFill>
-            <a:srgbClr val="4A5D75"/>
-          </a:solidFill>
-          <a:ln>
-            <a:noFill/>
-          </a:ln>
-          <a:effectLst/>
-        </p:spPr>
-        <p:style>
-          <a:lnRef idx="1">
-            <a:schemeClr val="accent1"/>
-          </a:lnRef>
-          <a:fillRef idx="3">
-            <a:schemeClr val="accent1"/>
-          </a:fillRef>
-          <a:effectRef idx="2">
-            <a:schemeClr val="accent1"/>
-          </a:effectRef>
-          <a:fontRef idx="minor">
-            <a:schemeClr val="lt1"/>
-          </a:fontRef>
-        </p:style>
-        <p:txBody>
-          <a:bodyPr rtlCol="0" anchor="ctr"/>
-          <a:lstStyle/>
-          <a:p>
-            <a:pPr algn="ctr"/>
-          </a:p>
-        </p:txBody>
-      </p:sp>
-      <p:sp>
-        <p:nvSpPr>
-          <p:cNvPr id="5" name="Rectangle 4"/>
-          <p:cNvSpPr/>
-          <p:nvPr/>
-        </p:nvSpPr>
-        <p:spPr>
-          <a:xfrm>
-            <a:off x="615572" y="237744"/>
-            <a:ext cx="32186" cy="201168"/>
-          </a:xfrm>
-          <a:prstGeom prst="rect">
-            <a:avLst/>
-          </a:prstGeom>
-          <a:solidFill>
-            <a:srgbClr val="4A5D75"/>
-          </a:solidFill>
-          <a:ln>
-            <a:noFill/>
-          </a:ln>
-          <a:effectLst/>
-        </p:spPr>
-        <p:style>
-          <a:lnRef idx="1">
-            <a:schemeClr val="accent1"/>
-          </a:lnRef>
-          <a:fillRef idx="3">
-            <a:schemeClr val="accent1"/>
-          </a:fillRef>
-          <a:effectRef idx="2">
-            <a:schemeClr val="accent1"/>
-          </a:effectRef>
-          <a:fontRef idx="minor">
-            <a:schemeClr val="lt1"/>
-          </a:fontRef>
-        </p:style>
-        <p:txBody>
-          <a:bodyPr rtlCol="0" anchor="ctr"/>
-          <a:lstStyle/>
-          <a:p>
-            <a:pPr algn="ctr"/>
-          </a:p>
-        </p:txBody>
-      </p:sp>
-      <p:sp>
-        <p:nvSpPr>
-          <p:cNvPr id="6" name="Rectangle 5"/>
-          <p:cNvSpPr/>
-          <p:nvPr/>
-        </p:nvSpPr>
-        <p:spPr>
-          <a:xfrm>
-            <a:off x="671898" y="328270"/>
-            <a:ext cx="32186" cy="110642"/>
-          </a:xfrm>
-          <a:prstGeom prst="rect">
-            <a:avLst/>
-          </a:prstGeom>
-          <a:solidFill>
-            <a:srgbClr val="4A5D75"/>
-          </a:solidFill>
-          <a:ln>
-            <a:noFill/>
-          </a:ln>
-          <a:effectLst/>
-        </p:spPr>
-        <p:style>
-          <a:lnRef idx="1">
-            <a:schemeClr val="accent1"/>
-          </a:lnRef>
-          <a:fillRef idx="3">
-            <a:schemeClr val="accent1"/>
-          </a:fillRef>
-          <a:effectRef idx="2">
-            <a:schemeClr val="accent1"/>
-          </a:effectRef>
-          <a:fontRef idx="minor">
-            <a:schemeClr val="lt1"/>
-          </a:fontRef>
-        </p:style>
-        <p:txBody>
-          <a:bodyPr rtlCol="0" anchor="ctr"/>
-          <a:lstStyle/>
-          <a:p>
-            <a:pPr algn="ctr"/>
-          </a:p>
-        </p:txBody>
-      </p:sp>
-      <p:sp>
-        <p:nvSpPr>
-          <p:cNvPr id="7" name="Rectangle 6"/>
-          <p:cNvSpPr/>
-          <p:nvPr/>
-        </p:nvSpPr>
-        <p:spPr>
-          <a:xfrm>
-            <a:off x="728224" y="382585"/>
-            <a:ext cx="32186" cy="56327"/>
-          </a:xfrm>
-          <a:prstGeom prst="rect">
-            <a:avLst/>
-          </a:prstGeom>
-          <a:solidFill>
-            <a:srgbClr val="4A5D75"/>
-          </a:solidFill>
-          <a:ln>
-            <a:noFill/>
-          </a:ln>
-          <a:effectLst/>
-        </p:spPr>
-        <p:style>
-          <a:lnRef idx="1">
-            <a:schemeClr val="accent1"/>
-          </a:lnRef>
-          <a:fillRef idx="3">
-            <a:schemeClr val="accent1"/>
-          </a:fillRef>
-          <a:effectRef idx="2">
-            <a:schemeClr val="accent1"/>
-          </a:effectRef>
-          <a:fontRef idx="minor">
-            <a:schemeClr val="lt1"/>
-          </a:fontRef>
-        </p:style>
-        <p:txBody>
-          <a:bodyPr rtlCol="0" anchor="ctr"/>
-          <a:lstStyle/>
-          <a:p>
-            <a:pPr algn="ctr"/>
-          </a:p>
-        </p:txBody>
-      </p:sp>
-      <p:sp>
-        <p:nvSpPr>
-          <p:cNvPr id="8" name="TextBox 7"/>
+      <p:pic>
+        <p:nvPicPr>
+          <p:cNvPr id="3" name="Picture 2" descr="mark_dark.png"/>
+          <p:cNvPicPr>
+            <a:picLocks noChangeAspect="1"/>
+          </p:cNvPicPr>
+          <p:nvPr/>
+        </p:nvPicPr>
+        <p:blipFill>
+          <a:blip r:embed="rId2"/>
+          <a:stretch>
+            <a:fillRect/>
+          </a:stretch>
+        </p:blipFill>
+        <p:spPr>
+          <a:xfrm>
+            <a:off x="502920" y="219456"/>
+            <a:ext cx="280009" cy="237744"/>
+          </a:xfrm>
+          <a:prstGeom prst="rect">
+            <a:avLst/>
+          </a:prstGeom>
+        </p:spPr>
+      </p:pic>
+      <p:sp>
+        <p:nvSpPr>
+          <p:cNvPr id="4" name="TextBox 3"/>
           <p:cNvSpPr txBox="1"/>
           <p:nvPr/>
         </p:nvSpPr>
         <p:spPr>
           <a:xfrm>
-            <a:off x="1051560" y="219456"/>
+            <a:off x="896112" y="246888"/>
             <a:ext cx="6400800" cy="274320"/>
           </a:xfrm>
           <a:prstGeom prst="rect">
@@ -9823,7 +8194,7 @@
                 <a:solidFill>
                   <a:srgbClr val="4A5D75"/>
                 </a:solidFill>
-                <a:latin typeface="Arial"/>
+                <a:latin typeface="Calibri"/>
               </a:rPr>
               <a:t>Ownership Model</a:t>
             </a:r>
@@ -9832,7 +8203,7 @@
       </p:sp>
       <p:sp>
         <p:nvSpPr>
-          <p:cNvPr id="9" name="Rectangle 8"/>
+          <p:cNvPr id="5" name="Rectangle 4"/>
           <p:cNvSpPr/>
           <p:nvPr/>
         </p:nvSpPr>
@@ -9876,7 +8247,7 @@
       </p:sp>
       <p:sp>
         <p:nvSpPr>
-          <p:cNvPr id="10" name="TextBox 9"/>
+          <p:cNvPr id="6" name="TextBox 5"/>
           <p:cNvSpPr txBox="1"/>
           <p:nvPr/>
         </p:nvSpPr>
@@ -9909,7 +8280,7 @@
                 <a:solidFill>
                   <a:srgbClr val="1E334E"/>
                 </a:solidFill>
-                <a:latin typeface="Georgia"/>
+                <a:latin typeface="Times New Roman"/>
               </a:rPr>
               <a:t>Responsible ownership, by construction</a:t>
             </a:r>
@@ -9918,7 +8289,7 @@
       </p:sp>
       <p:sp>
         <p:nvSpPr>
-          <p:cNvPr id="11" name="TextBox 10"/>
+          <p:cNvPr id="7" name="TextBox 6"/>
           <p:cNvSpPr txBox="1"/>
           <p:nvPr/>
         </p:nvSpPr>
@@ -9951,7 +8322,7 @@
                 <a:solidFill>
                   <a:srgbClr val="9AA4B0"/>
                 </a:solidFill>
-                <a:latin typeface="Arial"/>
+                <a:latin typeface="Calibri"/>
               </a:rPr>
               <a:t>Strictly confidential          13</a:t>
             </a:r>
@@ -9960,7 +8331,7 @@
       </p:sp>
       <p:sp>
         <p:nvSpPr>
-          <p:cNvPr id="12" name="TextBox 11"/>
+          <p:cNvPr id="8" name="TextBox 7"/>
           <p:cNvSpPr txBox="1"/>
           <p:nvPr/>
         </p:nvSpPr>
@@ -9993,7 +8364,7 @@
                 <a:solidFill>
                   <a:srgbClr val="4A5D75"/>
                 </a:solidFill>
-                <a:latin typeface="Arial"/>
+                <a:latin typeface="Calibri"/>
               </a:rPr>
               <a:t>›  </a:t>
             </a:r>
@@ -10002,7 +8373,7 @@
                 <a:solidFill>
                   <a:srgbClr val="1E334E"/>
                 </a:solidFill>
-                <a:latin typeface="Arial"/>
+                <a:latin typeface="Calibri"/>
               </a:rPr>
               <a:t>Governance is the lever.</a:t>
             </a:r>
@@ -10011,7 +8382,7 @@
                 <a:solidFill>
                   <a:srgbClr val="333840"/>
                 </a:solidFill>
-                <a:latin typeface="Arial"/>
+                <a:latin typeface="Calibri"/>
               </a:rPr>
               <a:t>  Value is created through board representation and active promotion of strong corporate governance across all holdings.</a:t>
             </a:r>
@@ -10030,7 +8401,7 @@
                 <a:solidFill>
                   <a:srgbClr val="4A5D75"/>
                 </a:solidFill>
-                <a:latin typeface="Arial"/>
+                <a:latin typeface="Calibri"/>
               </a:rPr>
               <a:t>›  </a:t>
             </a:r>
@@ -10039,7 +8410,7 @@
                 <a:solidFill>
                   <a:srgbClr val="1E334E"/>
                 </a:solidFill>
-                <a:latin typeface="Arial"/>
+                <a:latin typeface="Calibri"/>
               </a:rPr>
               <a:t>Five improvement dimensions.</a:t>
             </a:r>
@@ -10048,7 +8419,7 @@
                 <a:solidFill>
                   <a:srgbClr val="333840"/>
                 </a:solidFill>
-                <a:latin typeface="Arial"/>
+                <a:latin typeface="Calibri"/>
               </a:rPr>
               <a:t>  Operational, financial, structural, environmental and social improvements — each tied to enterprise value.</a:t>
             </a:r>
@@ -10067,7 +8438,7 @@
                 <a:solidFill>
                   <a:srgbClr val="4A5D75"/>
                 </a:solidFill>
-                <a:latin typeface="Arial"/>
+                <a:latin typeface="Calibri"/>
               </a:rPr>
               <a:t>›  </a:t>
             </a:r>
@@ -10076,7 +8447,7 @@
                 <a:solidFill>
                   <a:srgbClr val="1E334E"/>
                 </a:solidFill>
-                <a:latin typeface="Arial"/>
+                <a:latin typeface="Calibri"/>
               </a:rPr>
               <a:t>PRI signatory since 2019,</a:t>
             </a:r>
@@ -10085,7 +8456,7 @@
                 <a:solidFill>
                   <a:srgbClr val="333840"/>
                 </a:solidFill>
-                <a:latin typeface="Arial"/>
+                <a:latin typeface="Calibri"/>
               </a:rPr>
               <a:t>  adhering to the Six Principles for Responsible Investment.</a:t>
             </a:r>
@@ -10104,7 +8475,7 @@
                 <a:solidFill>
                   <a:srgbClr val="4A5D75"/>
                 </a:solidFill>
-                <a:latin typeface="Arial"/>
+                <a:latin typeface="Calibri"/>
               </a:rPr>
               <a:t>›  </a:t>
             </a:r>
@@ -10113,7 +8484,7 @@
                 <a:solidFill>
                   <a:srgbClr val="1E334E"/>
                 </a:solidFill>
-                <a:latin typeface="Arial"/>
+                <a:latin typeface="Calibri"/>
               </a:rPr>
               <a:t>Credible oversight.</a:t>
             </a:r>
@@ -10122,7 +8493,7 @@
                 <a:solidFill>
                   <a:srgbClr val="333840"/>
                 </a:solidFill>
-                <a:latin typeface="Arial"/>
+                <a:latin typeface="Calibri"/>
               </a:rPr>
               <a:t>  SEB custodian · MUFG administrator · KPMG auditor · Swedish FI-registered AIFM.</a:t>
             </a:r>
@@ -10191,290 +8562,33 @@
           </a:p>
         </p:txBody>
       </p:sp>
-      <p:sp>
-        <p:nvSpPr>
-          <p:cNvPr id="3" name="Rectangle 2"/>
-          <p:cNvSpPr/>
-          <p:nvPr/>
-        </p:nvSpPr>
-        <p:spPr>
-          <a:xfrm>
-            <a:off x="548640" y="683972"/>
-            <a:ext cx="43891" cy="93268"/>
-          </a:xfrm>
-          <a:prstGeom prst="rect">
-            <a:avLst/>
-          </a:prstGeom>
-          <a:solidFill>
-            <a:srgbClr val="FFFFFF"/>
-          </a:solidFill>
-          <a:ln>
-            <a:noFill/>
-          </a:ln>
-          <a:effectLst/>
-        </p:spPr>
-        <p:style>
-          <a:lnRef idx="1">
-            <a:schemeClr val="accent1"/>
-          </a:lnRef>
-          <a:fillRef idx="3">
-            <a:schemeClr val="accent1"/>
-          </a:fillRef>
-          <a:effectRef idx="2">
-            <a:schemeClr val="accent1"/>
-          </a:effectRef>
-          <a:fontRef idx="minor">
-            <a:schemeClr val="lt1"/>
-          </a:fontRef>
-        </p:style>
-        <p:txBody>
-          <a:bodyPr rtlCol="0" anchor="ctr"/>
-          <a:lstStyle/>
-          <a:p>
-            <a:pPr algn="ctr"/>
-          </a:p>
-        </p:txBody>
-      </p:sp>
+      <p:pic>
+        <p:nvPicPr>
+          <p:cNvPr id="3" name="Picture 2" descr="logo_white.png"/>
+          <p:cNvPicPr>
+            <a:picLocks noChangeAspect="1"/>
+          </p:cNvPicPr>
+          <p:nvPr/>
+        </p:nvPicPr>
+        <p:blipFill>
+          <a:blip r:embed="rId2"/>
+          <a:stretch>
+            <a:fillRect/>
+          </a:stretch>
+        </p:blipFill>
+        <p:spPr>
+          <a:xfrm>
+            <a:off x="548640" y="502920"/>
+            <a:ext cx="2210068" cy="475488"/>
+          </a:xfrm>
+          <a:prstGeom prst="rect">
+            <a:avLst/>
+          </a:prstGeom>
+        </p:spPr>
+      </p:pic>
       <p:sp>
         <p:nvSpPr>
           <p:cNvPr id="4" name="Rectangle 3"/>
-          <p:cNvSpPr/>
-          <p:nvPr/>
-        </p:nvSpPr>
-        <p:spPr>
-          <a:xfrm>
-            <a:off x="625449" y="607162"/>
-            <a:ext cx="43891" cy="170078"/>
-          </a:xfrm>
-          <a:prstGeom prst="rect">
-            <a:avLst/>
-          </a:prstGeom>
-          <a:solidFill>
-            <a:srgbClr val="FFFFFF"/>
-          </a:solidFill>
-          <a:ln>
-            <a:noFill/>
-          </a:ln>
-          <a:effectLst/>
-        </p:spPr>
-        <p:style>
-          <a:lnRef idx="1">
-            <a:schemeClr val="accent1"/>
-          </a:lnRef>
-          <a:fillRef idx="3">
-            <a:schemeClr val="accent1"/>
-          </a:fillRef>
-          <a:effectRef idx="2">
-            <a:schemeClr val="accent1"/>
-          </a:effectRef>
-          <a:fontRef idx="minor">
-            <a:schemeClr val="lt1"/>
-          </a:fontRef>
-        </p:style>
-        <p:txBody>
-          <a:bodyPr rtlCol="0" anchor="ctr"/>
-          <a:lstStyle/>
-          <a:p>
-            <a:pPr algn="ctr"/>
-          </a:p>
-        </p:txBody>
-      </p:sp>
-      <p:sp>
-        <p:nvSpPr>
-          <p:cNvPr id="5" name="Rectangle 4"/>
-          <p:cNvSpPr/>
-          <p:nvPr/>
-        </p:nvSpPr>
-        <p:spPr>
-          <a:xfrm>
-            <a:off x="702258" y="502920"/>
-            <a:ext cx="43891" cy="274320"/>
-          </a:xfrm>
-          <a:prstGeom prst="rect">
-            <a:avLst/>
-          </a:prstGeom>
-          <a:solidFill>
-            <a:srgbClr val="FFFFFF"/>
-          </a:solidFill>
-          <a:ln>
-            <a:noFill/>
-          </a:ln>
-          <a:effectLst/>
-        </p:spPr>
-        <p:style>
-          <a:lnRef idx="1">
-            <a:schemeClr val="accent1"/>
-          </a:lnRef>
-          <a:fillRef idx="3">
-            <a:schemeClr val="accent1"/>
-          </a:fillRef>
-          <a:effectRef idx="2">
-            <a:schemeClr val="accent1"/>
-          </a:effectRef>
-          <a:fontRef idx="minor">
-            <a:schemeClr val="lt1"/>
-          </a:fontRef>
-        </p:style>
-        <p:txBody>
-          <a:bodyPr rtlCol="0" anchor="ctr"/>
-          <a:lstStyle/>
-          <a:p>
-            <a:pPr algn="ctr"/>
-          </a:p>
-        </p:txBody>
-      </p:sp>
-      <p:sp>
-        <p:nvSpPr>
-          <p:cNvPr id="6" name="Rectangle 5"/>
-          <p:cNvSpPr/>
-          <p:nvPr/>
-        </p:nvSpPr>
-        <p:spPr>
-          <a:xfrm>
-            <a:off x="779067" y="626364"/>
-            <a:ext cx="43891" cy="150876"/>
-          </a:xfrm>
-          <a:prstGeom prst="rect">
-            <a:avLst/>
-          </a:prstGeom>
-          <a:solidFill>
-            <a:srgbClr val="FFFFFF"/>
-          </a:solidFill>
-          <a:ln>
-            <a:noFill/>
-          </a:ln>
-          <a:effectLst/>
-        </p:spPr>
-        <p:style>
-          <a:lnRef idx="1">
-            <a:schemeClr val="accent1"/>
-          </a:lnRef>
-          <a:fillRef idx="3">
-            <a:schemeClr val="accent1"/>
-          </a:fillRef>
-          <a:effectRef idx="2">
-            <a:schemeClr val="accent1"/>
-          </a:effectRef>
-          <a:fontRef idx="minor">
-            <a:schemeClr val="lt1"/>
-          </a:fontRef>
-        </p:style>
-        <p:txBody>
-          <a:bodyPr rtlCol="0" anchor="ctr"/>
-          <a:lstStyle/>
-          <a:p>
-            <a:pPr algn="ctr"/>
-          </a:p>
-        </p:txBody>
-      </p:sp>
-      <p:sp>
-        <p:nvSpPr>
-          <p:cNvPr id="7" name="Rectangle 6"/>
-          <p:cNvSpPr/>
-          <p:nvPr/>
-        </p:nvSpPr>
-        <p:spPr>
-          <a:xfrm>
-            <a:off x="855876" y="700431"/>
-            <a:ext cx="43891" cy="76809"/>
-          </a:xfrm>
-          <a:prstGeom prst="rect">
-            <a:avLst/>
-          </a:prstGeom>
-          <a:solidFill>
-            <a:srgbClr val="FFFFFF"/>
-          </a:solidFill>
-          <a:ln>
-            <a:noFill/>
-          </a:ln>
-          <a:effectLst/>
-        </p:spPr>
-        <p:style>
-          <a:lnRef idx="1">
-            <a:schemeClr val="accent1"/>
-          </a:lnRef>
-          <a:fillRef idx="3">
-            <a:schemeClr val="accent1"/>
-          </a:fillRef>
-          <a:effectRef idx="2">
-            <a:schemeClr val="accent1"/>
-          </a:effectRef>
-          <a:fontRef idx="minor">
-            <a:schemeClr val="lt1"/>
-          </a:fontRef>
-        </p:style>
-        <p:txBody>
-          <a:bodyPr rtlCol="0" anchor="ctr"/>
-          <a:lstStyle/>
-          <a:p>
-            <a:pPr algn="ctr"/>
-          </a:p>
-        </p:txBody>
-      </p:sp>
-      <p:sp>
-        <p:nvSpPr>
-          <p:cNvPr id="8" name="TextBox 7"/>
-          <p:cNvSpPr txBox="1"/>
-          <p:nvPr/>
-        </p:nvSpPr>
-        <p:spPr>
-          <a:xfrm>
-            <a:off x="1024125" y="466344"/>
-            <a:ext cx="2926080" cy="457200"/>
-          </a:xfrm>
-          <a:prstGeom prst="rect">
-            <a:avLst/>
-          </a:prstGeom>
-          <a:noFill/>
-        </p:spPr>
-        <p:txBody>
-          <a:bodyPr wrap="square" anchor="t" lIns="0" rIns="0" tIns="0" bIns="0">
-            <a:spAutoFit/>
-          </a:bodyPr>
-          <a:lstStyle/>
-          <a:p>
-            <a:pPr>
-              <a:lnSpc>
-                <a:spcPct val="95000"/>
-              </a:lnSpc>
-              <a:spcAft>
-                <a:spcPts val="0"/>
-              </a:spcAft>
-            </a:pPr>
-            <a:r>
-              <a:rPr sz="1800" b="1">
-                <a:solidFill>
-                  <a:srgbClr val="FFFFFF"/>
-                </a:solidFill>
-                <a:latin typeface="Arial"/>
-              </a:rPr>
-              <a:t>Athanase</a:t>
-            </a:r>
-          </a:p>
-          <a:p>
-            <a:pPr>
-              <a:lnSpc>
-                <a:spcPct val="100000"/>
-              </a:lnSpc>
-              <a:spcAft>
-                <a:spcPts val="0"/>
-              </a:spcAft>
-            </a:pPr>
-            <a:r>
-              <a:rPr sz="650">
-                <a:solidFill>
-                  <a:srgbClr val="FFFFFF"/>
-                </a:solidFill>
-                <a:latin typeface="Arial"/>
-              </a:rPr>
-              <a:t>I N D U S T R I A L   P A R T N E R</a:t>
-            </a:r>
-          </a:p>
-        </p:txBody>
-      </p:sp>
-      <p:sp>
-        <p:nvSpPr>
-          <p:cNvPr id="9" name="Rectangle 8"/>
           <p:cNvSpPr/>
           <p:nvPr/>
         </p:nvSpPr>
@@ -10518,7 +8632,7 @@
       </p:sp>
       <p:sp>
         <p:nvSpPr>
-          <p:cNvPr id="10" name="TextBox 9"/>
+          <p:cNvPr id="5" name="TextBox 4"/>
           <p:cNvSpPr txBox="1"/>
           <p:nvPr/>
         </p:nvSpPr>
@@ -10551,7 +8665,7 @@
                 <a:solidFill>
                   <a:srgbClr val="FFFFFF"/>
                 </a:solidFill>
-                <a:latin typeface="Georgia"/>
+                <a:latin typeface="Times New Roman"/>
               </a:rPr>
               <a:t>The asset class rewards patient, governance-minded capital.</a:t>
             </a:r>
@@ -10570,7 +8684,7 @@
                 <a:solidFill>
                   <a:srgbClr val="C9D3DD"/>
                 </a:solidFill>
-                <a:latin typeface="Georgia"/>
+                <a:latin typeface="Times New Roman"/>
               </a:rPr>
               <a:t>Among engaged owners, Athanase brings the team, the discipline and the 20-year proof to deliver it.</a:t>
             </a:r>
@@ -10579,7 +8693,7 @@
       </p:sp>
       <p:sp>
         <p:nvSpPr>
-          <p:cNvPr id="11" name="TextBox 10"/>
+          <p:cNvPr id="6" name="TextBox 5"/>
           <p:cNvSpPr txBox="1"/>
           <p:nvPr/>
         </p:nvSpPr>
@@ -10612,7 +8726,7 @@
                 <a:solidFill>
                   <a:srgbClr val="FFFFFF"/>
                 </a:solidFill>
-                <a:latin typeface="Arial"/>
+                <a:latin typeface="Calibri"/>
               </a:rPr>
               <a:t>Stefan Charette</a:t>
             </a:r>
@@ -10631,7 +8745,7 @@
                 <a:solidFill>
                   <a:srgbClr val="C9D3DD"/>
                 </a:solidFill>
-                <a:latin typeface="Arial"/>
+                <a:latin typeface="Calibri"/>
               </a:rPr>
               <a:t>Athanase Industrial Partner</a:t>
             </a:r>
@@ -10650,7 +8764,7 @@
                 <a:solidFill>
                   <a:srgbClr val="8A99AB"/>
                 </a:solidFill>
-                <a:latin typeface="Arial"/>
+                <a:latin typeface="Calibri"/>
               </a:rPr>
               <a:t>charette@athanase.se   ·   +46 73 994 7079</a:t>
             </a:r>
@@ -10659,7 +8773,7 @@
       </p:sp>
       <p:sp>
         <p:nvSpPr>
-          <p:cNvPr id="12" name="TextBox 11"/>
+          <p:cNvPr id="7" name="TextBox 6"/>
           <p:cNvSpPr txBox="1"/>
           <p:nvPr/>
         </p:nvSpPr>
@@ -10692,7 +8806,7 @@
                 <a:solidFill>
                   <a:srgbClr val="FFFFFF"/>
                 </a:solidFill>
-                <a:latin typeface="Arial"/>
+                <a:latin typeface="Calibri"/>
               </a:rPr>
               <a:t>Offices</a:t>
             </a:r>
@@ -10711,7 +8825,7 @@
                 <a:solidFill>
                   <a:srgbClr val="8A99AB"/>
                 </a:solidFill>
-                <a:latin typeface="Arial"/>
+                <a:latin typeface="Calibri"/>
               </a:rPr>
               <a:t>Birger Jarlsgatan 6, 114 34 Stockholm, Sweden</a:t>
             </a:r>
@@ -10730,7 +8844,7 @@
                 <a:solidFill>
                   <a:srgbClr val="8A99AB"/>
                 </a:solidFill>
-                <a:latin typeface="Arial"/>
+                <a:latin typeface="Calibri"/>
               </a:rPr>
               <a:t>Landmark Square, West Bay Road, Grand Cayman</a:t>
             </a:r>
@@ -10799,235 +8913,39 @@
           </a:p>
         </p:txBody>
       </p:sp>
-      <p:sp>
-        <p:nvSpPr>
-          <p:cNvPr id="3" name="Rectangle 2"/>
-          <p:cNvSpPr/>
-          <p:nvPr/>
-        </p:nvSpPr>
-        <p:spPr>
-          <a:xfrm>
-            <a:off x="502920" y="370515"/>
-            <a:ext cx="32186" cy="68397"/>
-          </a:xfrm>
-          <a:prstGeom prst="rect">
-            <a:avLst/>
-          </a:prstGeom>
-          <a:solidFill>
-            <a:srgbClr val="4A5D75"/>
-          </a:solidFill>
-          <a:ln>
-            <a:noFill/>
-          </a:ln>
-          <a:effectLst/>
-        </p:spPr>
-        <p:style>
-          <a:lnRef idx="1">
-            <a:schemeClr val="accent1"/>
-          </a:lnRef>
-          <a:fillRef idx="3">
-            <a:schemeClr val="accent1"/>
-          </a:fillRef>
-          <a:effectRef idx="2">
-            <a:schemeClr val="accent1"/>
-          </a:effectRef>
-          <a:fontRef idx="minor">
-            <a:schemeClr val="lt1"/>
-          </a:fontRef>
-        </p:style>
-        <p:txBody>
-          <a:bodyPr rtlCol="0" anchor="ctr"/>
-          <a:lstStyle/>
-          <a:p>
-            <a:pPr algn="ctr"/>
-          </a:p>
-        </p:txBody>
-      </p:sp>
-      <p:sp>
-        <p:nvSpPr>
-          <p:cNvPr id="4" name="Rectangle 3"/>
-          <p:cNvSpPr/>
-          <p:nvPr/>
-        </p:nvSpPr>
-        <p:spPr>
-          <a:xfrm>
-            <a:off x="559246" y="314188"/>
-            <a:ext cx="32186" cy="124724"/>
-          </a:xfrm>
-          <a:prstGeom prst="rect">
-            <a:avLst/>
-          </a:prstGeom>
-          <a:solidFill>
-            <a:srgbClr val="4A5D75"/>
-          </a:solidFill>
-          <a:ln>
-            <a:noFill/>
-          </a:ln>
-          <a:effectLst/>
-        </p:spPr>
-        <p:style>
-          <a:lnRef idx="1">
-            <a:schemeClr val="accent1"/>
-          </a:lnRef>
-          <a:fillRef idx="3">
-            <a:schemeClr val="accent1"/>
-          </a:fillRef>
-          <a:effectRef idx="2">
-            <a:schemeClr val="accent1"/>
-          </a:effectRef>
-          <a:fontRef idx="minor">
-            <a:schemeClr val="lt1"/>
-          </a:fontRef>
-        </p:style>
-        <p:txBody>
-          <a:bodyPr rtlCol="0" anchor="ctr"/>
-          <a:lstStyle/>
-          <a:p>
-            <a:pPr algn="ctr"/>
-          </a:p>
-        </p:txBody>
-      </p:sp>
-      <p:sp>
-        <p:nvSpPr>
-          <p:cNvPr id="5" name="Rectangle 4"/>
-          <p:cNvSpPr/>
-          <p:nvPr/>
-        </p:nvSpPr>
-        <p:spPr>
-          <a:xfrm>
-            <a:off x="615572" y="237744"/>
-            <a:ext cx="32186" cy="201168"/>
-          </a:xfrm>
-          <a:prstGeom prst="rect">
-            <a:avLst/>
-          </a:prstGeom>
-          <a:solidFill>
-            <a:srgbClr val="4A5D75"/>
-          </a:solidFill>
-          <a:ln>
-            <a:noFill/>
-          </a:ln>
-          <a:effectLst/>
-        </p:spPr>
-        <p:style>
-          <a:lnRef idx="1">
-            <a:schemeClr val="accent1"/>
-          </a:lnRef>
-          <a:fillRef idx="3">
-            <a:schemeClr val="accent1"/>
-          </a:fillRef>
-          <a:effectRef idx="2">
-            <a:schemeClr val="accent1"/>
-          </a:effectRef>
-          <a:fontRef idx="minor">
-            <a:schemeClr val="lt1"/>
-          </a:fontRef>
-        </p:style>
-        <p:txBody>
-          <a:bodyPr rtlCol="0" anchor="ctr"/>
-          <a:lstStyle/>
-          <a:p>
-            <a:pPr algn="ctr"/>
-          </a:p>
-        </p:txBody>
-      </p:sp>
-      <p:sp>
-        <p:nvSpPr>
-          <p:cNvPr id="6" name="Rectangle 5"/>
-          <p:cNvSpPr/>
-          <p:nvPr/>
-        </p:nvSpPr>
-        <p:spPr>
-          <a:xfrm>
-            <a:off x="671898" y="328270"/>
-            <a:ext cx="32186" cy="110642"/>
-          </a:xfrm>
-          <a:prstGeom prst="rect">
-            <a:avLst/>
-          </a:prstGeom>
-          <a:solidFill>
-            <a:srgbClr val="4A5D75"/>
-          </a:solidFill>
-          <a:ln>
-            <a:noFill/>
-          </a:ln>
-          <a:effectLst/>
-        </p:spPr>
-        <p:style>
-          <a:lnRef idx="1">
-            <a:schemeClr val="accent1"/>
-          </a:lnRef>
-          <a:fillRef idx="3">
-            <a:schemeClr val="accent1"/>
-          </a:fillRef>
-          <a:effectRef idx="2">
-            <a:schemeClr val="accent1"/>
-          </a:effectRef>
-          <a:fontRef idx="minor">
-            <a:schemeClr val="lt1"/>
-          </a:fontRef>
-        </p:style>
-        <p:txBody>
-          <a:bodyPr rtlCol="0" anchor="ctr"/>
-          <a:lstStyle/>
-          <a:p>
-            <a:pPr algn="ctr"/>
-          </a:p>
-        </p:txBody>
-      </p:sp>
-      <p:sp>
-        <p:nvSpPr>
-          <p:cNvPr id="7" name="Rectangle 6"/>
-          <p:cNvSpPr/>
-          <p:nvPr/>
-        </p:nvSpPr>
-        <p:spPr>
-          <a:xfrm>
-            <a:off x="728224" y="382585"/>
-            <a:ext cx="32186" cy="56327"/>
-          </a:xfrm>
-          <a:prstGeom prst="rect">
-            <a:avLst/>
-          </a:prstGeom>
-          <a:solidFill>
-            <a:srgbClr val="4A5D75"/>
-          </a:solidFill>
-          <a:ln>
-            <a:noFill/>
-          </a:ln>
-          <a:effectLst/>
-        </p:spPr>
-        <p:style>
-          <a:lnRef idx="1">
-            <a:schemeClr val="accent1"/>
-          </a:lnRef>
-          <a:fillRef idx="3">
-            <a:schemeClr val="accent1"/>
-          </a:fillRef>
-          <a:effectRef idx="2">
-            <a:schemeClr val="accent1"/>
-          </a:effectRef>
-          <a:fontRef idx="minor">
-            <a:schemeClr val="lt1"/>
-          </a:fontRef>
-        </p:style>
-        <p:txBody>
-          <a:bodyPr rtlCol="0" anchor="ctr"/>
-          <a:lstStyle/>
-          <a:p>
-            <a:pPr algn="ctr"/>
-          </a:p>
-        </p:txBody>
-      </p:sp>
-      <p:sp>
-        <p:nvSpPr>
-          <p:cNvPr id="8" name="TextBox 7"/>
+      <p:pic>
+        <p:nvPicPr>
+          <p:cNvPr id="3" name="Picture 2" descr="mark_dark.png"/>
+          <p:cNvPicPr>
+            <a:picLocks noChangeAspect="1"/>
+          </p:cNvPicPr>
+          <p:nvPr/>
+        </p:nvPicPr>
+        <p:blipFill>
+          <a:blip r:embed="rId2"/>
+          <a:stretch>
+            <a:fillRect/>
+          </a:stretch>
+        </p:blipFill>
+        <p:spPr>
+          <a:xfrm>
+            <a:off x="502920" y="219456"/>
+            <a:ext cx="280009" cy="237744"/>
+          </a:xfrm>
+          <a:prstGeom prst="rect">
+            <a:avLst/>
+          </a:prstGeom>
+        </p:spPr>
+      </p:pic>
+      <p:sp>
+        <p:nvSpPr>
+          <p:cNvPr id="4" name="TextBox 3"/>
           <p:cNvSpPr txBox="1"/>
           <p:nvPr/>
         </p:nvSpPr>
         <p:spPr>
           <a:xfrm>
-            <a:off x="1051560" y="219456"/>
+            <a:off x="896112" y="246888"/>
             <a:ext cx="6400800" cy="274320"/>
           </a:xfrm>
           <a:prstGeom prst="rect">
@@ -11054,7 +8972,7 @@
                 <a:solidFill>
                   <a:srgbClr val="4A5D75"/>
                 </a:solidFill>
-                <a:latin typeface="Arial"/>
+                <a:latin typeface="Calibri"/>
               </a:rPr>
               <a:t>Overview</a:t>
             </a:r>
@@ -11063,7 +8981,7 @@
       </p:sp>
       <p:sp>
         <p:nvSpPr>
-          <p:cNvPr id="9" name="Rectangle 8"/>
+          <p:cNvPr id="5" name="Rectangle 4"/>
           <p:cNvSpPr/>
           <p:nvPr/>
         </p:nvSpPr>
@@ -11107,7 +9025,7 @@
       </p:sp>
       <p:sp>
         <p:nvSpPr>
-          <p:cNvPr id="10" name="TextBox 9"/>
+          <p:cNvPr id="6" name="TextBox 5"/>
           <p:cNvSpPr txBox="1"/>
           <p:nvPr/>
         </p:nvSpPr>
@@ -11140,7 +9058,7 @@
                 <a:solidFill>
                   <a:srgbClr val="1E334E"/>
                 </a:solidFill>
-                <a:latin typeface="Georgia"/>
+                <a:latin typeface="Times New Roman"/>
               </a:rPr>
               <a:t>What this presentation covers</a:t>
             </a:r>
@@ -11149,7 +9067,7 @@
       </p:sp>
       <p:sp>
         <p:nvSpPr>
-          <p:cNvPr id="11" name="TextBox 10"/>
+          <p:cNvPr id="7" name="TextBox 6"/>
           <p:cNvSpPr txBox="1"/>
           <p:nvPr/>
         </p:nvSpPr>
@@ -11182,7 +9100,7 @@
                 <a:solidFill>
                   <a:srgbClr val="9AA4B0"/>
                 </a:solidFill>
-                <a:latin typeface="Arial"/>
+                <a:latin typeface="Calibri"/>
               </a:rPr>
               <a:t>Strictly confidential          1</a:t>
             </a:r>
@@ -11191,7 +9109,7 @@
       </p:sp>
       <p:sp>
         <p:nvSpPr>
-          <p:cNvPr id="12" name="TextBox 11"/>
+          <p:cNvPr id="8" name="TextBox 7"/>
           <p:cNvSpPr txBox="1"/>
           <p:nvPr/>
         </p:nvSpPr>
@@ -11224,7 +9142,7 @@
                 <a:solidFill>
                   <a:srgbClr val="4A5D75"/>
                 </a:solidFill>
-                <a:latin typeface="Georgia"/>
+                <a:latin typeface="Times New Roman"/>
               </a:rPr>
               <a:t>Part I   </a:t>
             </a:r>
@@ -11233,7 +9151,7 @@
                 <a:solidFill>
                   <a:srgbClr val="1E334E"/>
                 </a:solidFill>
-                <a:latin typeface="Georgia"/>
+                <a:latin typeface="Times New Roman"/>
               </a:rPr>
               <a:t>Why allocate to engaged ownership</a:t>
             </a:r>
@@ -11252,7 +9170,7 @@
                 <a:solidFill>
                   <a:srgbClr val="333840"/>
                 </a:solidFill>
-                <a:latin typeface="Arial"/>
+                <a:latin typeface="Calibri"/>
               </a:rPr>
               <a:t>The asset-class case: a catalyst-driven, diversifying source of equity return that fits a long-horizon, fiduciary mandate.</a:t>
             </a:r>
@@ -11271,7 +9189,7 @@
                 <a:solidFill>
                   <a:srgbClr val="4A5D75"/>
                 </a:solidFill>
-                <a:latin typeface="Georgia"/>
+                <a:latin typeface="Times New Roman"/>
               </a:rPr>
               <a:t>Part II   </a:t>
             </a:r>
@@ -11280,7 +9198,7 @@
                 <a:solidFill>
                   <a:srgbClr val="1E334E"/>
                 </a:solidFill>
-                <a:latin typeface="Georgia"/>
+                <a:latin typeface="Times New Roman"/>
               </a:rPr>
               <a:t>Why choose Athanase</a:t>
             </a:r>
@@ -11299,7 +9217,7 @@
                 <a:solidFill>
                   <a:srgbClr val="333840"/>
                 </a:solidFill>
-                <a:latin typeface="Arial"/>
+                <a:latin typeface="Calibri"/>
               </a:rPr>
               <a:t>Among engaged owners, the team, opportunity set, margin-for-error and 20-year track record that distinguish Athanase Industrial Partner.</a:t>
             </a:r>
@@ -11368,290 +9286,33 @@
           </a:p>
         </p:txBody>
       </p:sp>
-      <p:sp>
-        <p:nvSpPr>
-          <p:cNvPr id="3" name="Rectangle 2"/>
-          <p:cNvSpPr/>
-          <p:nvPr/>
-        </p:nvSpPr>
-        <p:spPr>
-          <a:xfrm>
-            <a:off x="548640" y="665867"/>
-            <a:ext cx="39502" cy="83941"/>
-          </a:xfrm>
-          <a:prstGeom prst="rect">
-            <a:avLst/>
-          </a:prstGeom>
-          <a:solidFill>
-            <a:srgbClr val="FFFFFF"/>
-          </a:solidFill>
-          <a:ln>
-            <a:noFill/>
-          </a:ln>
-          <a:effectLst/>
-        </p:spPr>
-        <p:style>
-          <a:lnRef idx="1">
-            <a:schemeClr val="accent1"/>
-          </a:lnRef>
-          <a:fillRef idx="3">
-            <a:schemeClr val="accent1"/>
-          </a:fillRef>
-          <a:effectRef idx="2">
-            <a:schemeClr val="accent1"/>
-          </a:effectRef>
-          <a:fontRef idx="minor">
-            <a:schemeClr val="lt1"/>
-          </a:fontRef>
-        </p:style>
-        <p:txBody>
-          <a:bodyPr rtlCol="0" anchor="ctr"/>
-          <a:lstStyle/>
-          <a:p>
-            <a:pPr algn="ctr"/>
-          </a:p>
-        </p:txBody>
-      </p:sp>
-      <p:sp>
-        <p:nvSpPr>
-          <p:cNvPr id="4" name="Rectangle 3"/>
-          <p:cNvSpPr/>
-          <p:nvPr/>
-        </p:nvSpPr>
-        <p:spPr>
-          <a:xfrm>
-            <a:off x="617768" y="596738"/>
-            <a:ext cx="39502" cy="153070"/>
-          </a:xfrm>
-          <a:prstGeom prst="rect">
-            <a:avLst/>
-          </a:prstGeom>
-          <a:solidFill>
-            <a:srgbClr val="FFFFFF"/>
-          </a:solidFill>
-          <a:ln>
-            <a:noFill/>
-          </a:ln>
-          <a:effectLst/>
-        </p:spPr>
-        <p:style>
-          <a:lnRef idx="1">
-            <a:schemeClr val="accent1"/>
-          </a:lnRef>
-          <a:fillRef idx="3">
-            <a:schemeClr val="accent1"/>
-          </a:fillRef>
-          <a:effectRef idx="2">
-            <a:schemeClr val="accent1"/>
-          </a:effectRef>
-          <a:fontRef idx="minor">
-            <a:schemeClr val="lt1"/>
-          </a:fontRef>
-        </p:style>
-        <p:txBody>
-          <a:bodyPr rtlCol="0" anchor="ctr"/>
-          <a:lstStyle/>
-          <a:p>
-            <a:pPr algn="ctr"/>
-          </a:p>
-        </p:txBody>
-      </p:sp>
-      <p:sp>
-        <p:nvSpPr>
-          <p:cNvPr id="5" name="Rectangle 4"/>
-          <p:cNvSpPr/>
-          <p:nvPr/>
-        </p:nvSpPr>
-        <p:spPr>
-          <a:xfrm>
-            <a:off x="686896" y="502920"/>
-            <a:ext cx="39502" cy="246888"/>
-          </a:xfrm>
-          <a:prstGeom prst="rect">
-            <a:avLst/>
-          </a:prstGeom>
-          <a:solidFill>
-            <a:srgbClr val="FFFFFF"/>
-          </a:solidFill>
-          <a:ln>
-            <a:noFill/>
-          </a:ln>
-          <a:effectLst/>
-        </p:spPr>
-        <p:style>
-          <a:lnRef idx="1">
-            <a:schemeClr val="accent1"/>
-          </a:lnRef>
-          <a:fillRef idx="3">
-            <a:schemeClr val="accent1"/>
-          </a:fillRef>
-          <a:effectRef idx="2">
-            <a:schemeClr val="accent1"/>
-          </a:effectRef>
-          <a:fontRef idx="minor">
-            <a:schemeClr val="lt1"/>
-          </a:fontRef>
-        </p:style>
-        <p:txBody>
-          <a:bodyPr rtlCol="0" anchor="ctr"/>
-          <a:lstStyle/>
-          <a:p>
-            <a:pPr algn="ctr"/>
-          </a:p>
-        </p:txBody>
-      </p:sp>
-      <p:sp>
-        <p:nvSpPr>
-          <p:cNvPr id="6" name="Rectangle 5"/>
-          <p:cNvSpPr/>
-          <p:nvPr/>
-        </p:nvSpPr>
-        <p:spPr>
-          <a:xfrm>
-            <a:off x="756024" y="614020"/>
-            <a:ext cx="39502" cy="135788"/>
-          </a:xfrm>
-          <a:prstGeom prst="rect">
-            <a:avLst/>
-          </a:prstGeom>
-          <a:solidFill>
-            <a:srgbClr val="FFFFFF"/>
-          </a:solidFill>
-          <a:ln>
-            <a:noFill/>
-          </a:ln>
-          <a:effectLst/>
-        </p:spPr>
-        <p:style>
-          <a:lnRef idx="1">
-            <a:schemeClr val="accent1"/>
-          </a:lnRef>
-          <a:fillRef idx="3">
-            <a:schemeClr val="accent1"/>
-          </a:fillRef>
-          <a:effectRef idx="2">
-            <a:schemeClr val="accent1"/>
-          </a:effectRef>
-          <a:fontRef idx="minor">
-            <a:schemeClr val="lt1"/>
-          </a:fontRef>
-        </p:style>
-        <p:txBody>
-          <a:bodyPr rtlCol="0" anchor="ctr"/>
-          <a:lstStyle/>
-          <a:p>
-            <a:pPr algn="ctr"/>
-          </a:p>
-        </p:txBody>
-      </p:sp>
-      <p:sp>
-        <p:nvSpPr>
-          <p:cNvPr id="7" name="Rectangle 6"/>
-          <p:cNvSpPr/>
-          <p:nvPr/>
-        </p:nvSpPr>
-        <p:spPr>
-          <a:xfrm>
-            <a:off x="825152" y="680680"/>
-            <a:ext cx="39502" cy="69128"/>
-          </a:xfrm>
-          <a:prstGeom prst="rect">
-            <a:avLst/>
-          </a:prstGeom>
-          <a:solidFill>
-            <a:srgbClr val="FFFFFF"/>
-          </a:solidFill>
-          <a:ln>
-            <a:noFill/>
-          </a:ln>
-          <a:effectLst/>
-        </p:spPr>
-        <p:style>
-          <a:lnRef idx="1">
-            <a:schemeClr val="accent1"/>
-          </a:lnRef>
-          <a:fillRef idx="3">
-            <a:schemeClr val="accent1"/>
-          </a:fillRef>
-          <a:effectRef idx="2">
-            <a:schemeClr val="accent1"/>
-          </a:effectRef>
-          <a:fontRef idx="minor">
-            <a:schemeClr val="lt1"/>
-          </a:fontRef>
-        </p:style>
-        <p:txBody>
-          <a:bodyPr rtlCol="0" anchor="ctr"/>
-          <a:lstStyle/>
-          <a:p>
-            <a:pPr algn="ctr"/>
-          </a:p>
-        </p:txBody>
-      </p:sp>
-      <p:sp>
-        <p:nvSpPr>
-          <p:cNvPr id="8" name="TextBox 7"/>
-          <p:cNvSpPr txBox="1"/>
-          <p:nvPr/>
-        </p:nvSpPr>
-        <p:spPr>
-          <a:xfrm>
-            <a:off x="985720" y="466344"/>
-            <a:ext cx="2633472" cy="411480"/>
-          </a:xfrm>
-          <a:prstGeom prst="rect">
-            <a:avLst/>
-          </a:prstGeom>
-          <a:noFill/>
-        </p:spPr>
-        <p:txBody>
-          <a:bodyPr wrap="square" anchor="t" lIns="0" rIns="0" tIns="0" bIns="0">
-            <a:spAutoFit/>
-          </a:bodyPr>
-          <a:lstStyle/>
-          <a:p>
-            <a:pPr>
-              <a:lnSpc>
-                <a:spcPct val="95000"/>
-              </a:lnSpc>
-              <a:spcAft>
-                <a:spcPts val="0"/>
-              </a:spcAft>
-            </a:pPr>
-            <a:r>
-              <a:rPr sz="1620" b="1">
-                <a:solidFill>
-                  <a:srgbClr val="FFFFFF"/>
-                </a:solidFill>
-                <a:latin typeface="Arial"/>
-              </a:rPr>
-              <a:t>Athanase</a:t>
-            </a:r>
-          </a:p>
-          <a:p>
-            <a:pPr>
-              <a:lnSpc>
-                <a:spcPct val="100000"/>
-              </a:lnSpc>
-              <a:spcAft>
-                <a:spcPts val="0"/>
-              </a:spcAft>
-            </a:pPr>
-            <a:r>
-              <a:rPr sz="585">
-                <a:solidFill>
-                  <a:srgbClr val="FFFFFF"/>
-                </a:solidFill>
-                <a:latin typeface="Arial"/>
-              </a:rPr>
-              <a:t>I N D U S T R I A L   P A R T N E R</a:t>
-            </a:r>
-          </a:p>
-        </p:txBody>
-      </p:sp>
-      <p:sp>
-        <p:nvSpPr>
-          <p:cNvPr id="9" name="TextBox 8"/>
+      <p:pic>
+        <p:nvPicPr>
+          <p:cNvPr id="3" name="Picture 2" descr="logo_white.png"/>
+          <p:cNvPicPr>
+            <a:picLocks noChangeAspect="1"/>
+          </p:cNvPicPr>
+          <p:nvPr/>
+        </p:nvPicPr>
+        <p:blipFill>
+          <a:blip r:embed="rId2"/>
+          <a:stretch>
+            <a:fillRect/>
+          </a:stretch>
+        </p:blipFill>
+        <p:spPr>
+          <a:xfrm>
+            <a:off x="548640" y="502920"/>
+            <a:ext cx="1989060" cy="427939"/>
+          </a:xfrm>
+          <a:prstGeom prst="rect">
+            <a:avLst/>
+          </a:prstGeom>
+        </p:spPr>
+      </p:pic>
+      <p:sp>
+        <p:nvSpPr>
+          <p:cNvPr id="4" name="TextBox 3"/>
           <p:cNvSpPr txBox="1"/>
           <p:nvPr/>
         </p:nvSpPr>
@@ -11684,7 +9345,7 @@
                 <a:solidFill>
                   <a:srgbClr val="8A99AB"/>
                 </a:solidFill>
-                <a:latin typeface="Arial"/>
+                <a:latin typeface="Calibri"/>
               </a:rPr>
               <a:t>PART I  ·  THE ASSET CLASS</a:t>
             </a:r>
@@ -11693,7 +9354,7 @@
       </p:sp>
       <p:sp>
         <p:nvSpPr>
-          <p:cNvPr id="10" name="TextBox 9"/>
+          <p:cNvPr id="5" name="TextBox 4"/>
           <p:cNvSpPr txBox="1"/>
           <p:nvPr/>
         </p:nvSpPr>
@@ -11726,7 +9387,7 @@
                 <a:solidFill>
                   <a:srgbClr val="C9D3DD"/>
                 </a:solidFill>
-                <a:latin typeface="Georgia"/>
+                <a:latin typeface="Times New Roman"/>
               </a:rPr>
               <a:t>Why allocate to engaged ownership</a:t>
             </a:r>
@@ -11795,235 +9456,39 @@
           </a:p>
         </p:txBody>
       </p:sp>
-      <p:sp>
-        <p:nvSpPr>
-          <p:cNvPr id="3" name="Rectangle 2"/>
-          <p:cNvSpPr/>
-          <p:nvPr/>
-        </p:nvSpPr>
-        <p:spPr>
-          <a:xfrm>
-            <a:off x="502920" y="370515"/>
-            <a:ext cx="32186" cy="68397"/>
-          </a:xfrm>
-          <a:prstGeom prst="rect">
-            <a:avLst/>
-          </a:prstGeom>
-          <a:solidFill>
-            <a:srgbClr val="4A5D75"/>
-          </a:solidFill>
-          <a:ln>
-            <a:noFill/>
-          </a:ln>
-          <a:effectLst/>
-        </p:spPr>
-        <p:style>
-          <a:lnRef idx="1">
-            <a:schemeClr val="accent1"/>
-          </a:lnRef>
-          <a:fillRef idx="3">
-            <a:schemeClr val="accent1"/>
-          </a:fillRef>
-          <a:effectRef idx="2">
-            <a:schemeClr val="accent1"/>
-          </a:effectRef>
-          <a:fontRef idx="minor">
-            <a:schemeClr val="lt1"/>
-          </a:fontRef>
-        </p:style>
-        <p:txBody>
-          <a:bodyPr rtlCol="0" anchor="ctr"/>
-          <a:lstStyle/>
-          <a:p>
-            <a:pPr algn="ctr"/>
-          </a:p>
-        </p:txBody>
-      </p:sp>
-      <p:sp>
-        <p:nvSpPr>
-          <p:cNvPr id="4" name="Rectangle 3"/>
-          <p:cNvSpPr/>
-          <p:nvPr/>
-        </p:nvSpPr>
-        <p:spPr>
-          <a:xfrm>
-            <a:off x="559246" y="314188"/>
-            <a:ext cx="32186" cy="124724"/>
-          </a:xfrm>
-          <a:prstGeom prst="rect">
-            <a:avLst/>
-          </a:prstGeom>
-          <a:solidFill>
-            <a:srgbClr val="4A5D75"/>
-          </a:solidFill>
-          <a:ln>
-            <a:noFill/>
-          </a:ln>
-          <a:effectLst/>
-        </p:spPr>
-        <p:style>
-          <a:lnRef idx="1">
-            <a:schemeClr val="accent1"/>
-          </a:lnRef>
-          <a:fillRef idx="3">
-            <a:schemeClr val="accent1"/>
-          </a:fillRef>
-          <a:effectRef idx="2">
-            <a:schemeClr val="accent1"/>
-          </a:effectRef>
-          <a:fontRef idx="minor">
-            <a:schemeClr val="lt1"/>
-          </a:fontRef>
-        </p:style>
-        <p:txBody>
-          <a:bodyPr rtlCol="0" anchor="ctr"/>
-          <a:lstStyle/>
-          <a:p>
-            <a:pPr algn="ctr"/>
-          </a:p>
-        </p:txBody>
-      </p:sp>
-      <p:sp>
-        <p:nvSpPr>
-          <p:cNvPr id="5" name="Rectangle 4"/>
-          <p:cNvSpPr/>
-          <p:nvPr/>
-        </p:nvSpPr>
-        <p:spPr>
-          <a:xfrm>
-            <a:off x="615572" y="237744"/>
-            <a:ext cx="32186" cy="201168"/>
-          </a:xfrm>
-          <a:prstGeom prst="rect">
-            <a:avLst/>
-          </a:prstGeom>
-          <a:solidFill>
-            <a:srgbClr val="4A5D75"/>
-          </a:solidFill>
-          <a:ln>
-            <a:noFill/>
-          </a:ln>
-          <a:effectLst/>
-        </p:spPr>
-        <p:style>
-          <a:lnRef idx="1">
-            <a:schemeClr val="accent1"/>
-          </a:lnRef>
-          <a:fillRef idx="3">
-            <a:schemeClr val="accent1"/>
-          </a:fillRef>
-          <a:effectRef idx="2">
-            <a:schemeClr val="accent1"/>
-          </a:effectRef>
-          <a:fontRef idx="minor">
-            <a:schemeClr val="lt1"/>
-          </a:fontRef>
-        </p:style>
-        <p:txBody>
-          <a:bodyPr rtlCol="0" anchor="ctr"/>
-          <a:lstStyle/>
-          <a:p>
-            <a:pPr algn="ctr"/>
-          </a:p>
-        </p:txBody>
-      </p:sp>
-      <p:sp>
-        <p:nvSpPr>
-          <p:cNvPr id="6" name="Rectangle 5"/>
-          <p:cNvSpPr/>
-          <p:nvPr/>
-        </p:nvSpPr>
-        <p:spPr>
-          <a:xfrm>
-            <a:off x="671898" y="328270"/>
-            <a:ext cx="32186" cy="110642"/>
-          </a:xfrm>
-          <a:prstGeom prst="rect">
-            <a:avLst/>
-          </a:prstGeom>
-          <a:solidFill>
-            <a:srgbClr val="4A5D75"/>
-          </a:solidFill>
-          <a:ln>
-            <a:noFill/>
-          </a:ln>
-          <a:effectLst/>
-        </p:spPr>
-        <p:style>
-          <a:lnRef idx="1">
-            <a:schemeClr val="accent1"/>
-          </a:lnRef>
-          <a:fillRef idx="3">
-            <a:schemeClr val="accent1"/>
-          </a:fillRef>
-          <a:effectRef idx="2">
-            <a:schemeClr val="accent1"/>
-          </a:effectRef>
-          <a:fontRef idx="minor">
-            <a:schemeClr val="lt1"/>
-          </a:fontRef>
-        </p:style>
-        <p:txBody>
-          <a:bodyPr rtlCol="0" anchor="ctr"/>
-          <a:lstStyle/>
-          <a:p>
-            <a:pPr algn="ctr"/>
-          </a:p>
-        </p:txBody>
-      </p:sp>
-      <p:sp>
-        <p:nvSpPr>
-          <p:cNvPr id="7" name="Rectangle 6"/>
-          <p:cNvSpPr/>
-          <p:nvPr/>
-        </p:nvSpPr>
-        <p:spPr>
-          <a:xfrm>
-            <a:off x="728224" y="382585"/>
-            <a:ext cx="32186" cy="56327"/>
-          </a:xfrm>
-          <a:prstGeom prst="rect">
-            <a:avLst/>
-          </a:prstGeom>
-          <a:solidFill>
-            <a:srgbClr val="4A5D75"/>
-          </a:solidFill>
-          <a:ln>
-            <a:noFill/>
-          </a:ln>
-          <a:effectLst/>
-        </p:spPr>
-        <p:style>
-          <a:lnRef idx="1">
-            <a:schemeClr val="accent1"/>
-          </a:lnRef>
-          <a:fillRef idx="3">
-            <a:schemeClr val="accent1"/>
-          </a:fillRef>
-          <a:effectRef idx="2">
-            <a:schemeClr val="accent1"/>
-          </a:effectRef>
-          <a:fontRef idx="minor">
-            <a:schemeClr val="lt1"/>
-          </a:fontRef>
-        </p:style>
-        <p:txBody>
-          <a:bodyPr rtlCol="0" anchor="ctr"/>
-          <a:lstStyle/>
-          <a:p>
-            <a:pPr algn="ctr"/>
-          </a:p>
-        </p:txBody>
-      </p:sp>
-      <p:sp>
-        <p:nvSpPr>
-          <p:cNvPr id="8" name="TextBox 7"/>
+      <p:pic>
+        <p:nvPicPr>
+          <p:cNvPr id="3" name="Picture 2" descr="mark_dark.png"/>
+          <p:cNvPicPr>
+            <a:picLocks noChangeAspect="1"/>
+          </p:cNvPicPr>
+          <p:nvPr/>
+        </p:nvPicPr>
+        <p:blipFill>
+          <a:blip r:embed="rId2"/>
+          <a:stretch>
+            <a:fillRect/>
+          </a:stretch>
+        </p:blipFill>
+        <p:spPr>
+          <a:xfrm>
+            <a:off x="502920" y="219456"/>
+            <a:ext cx="280009" cy="237744"/>
+          </a:xfrm>
+          <a:prstGeom prst="rect">
+            <a:avLst/>
+          </a:prstGeom>
+        </p:spPr>
+      </p:pic>
+      <p:sp>
+        <p:nvSpPr>
+          <p:cNvPr id="4" name="TextBox 3"/>
           <p:cNvSpPr txBox="1"/>
           <p:nvPr/>
         </p:nvSpPr>
         <p:spPr>
           <a:xfrm>
-            <a:off x="1051560" y="219456"/>
+            <a:off x="896112" y="246888"/>
             <a:ext cx="6400800" cy="274320"/>
           </a:xfrm>
           <a:prstGeom prst="rect">
@@ -12050,7 +9515,7 @@
                 <a:solidFill>
                   <a:srgbClr val="4A5D75"/>
                 </a:solidFill>
-                <a:latin typeface="Arial"/>
+                <a:latin typeface="Calibri"/>
               </a:rPr>
               <a:t>The Proposition</a:t>
             </a:r>
@@ -12059,7 +9524,7 @@
       </p:sp>
       <p:sp>
         <p:nvSpPr>
-          <p:cNvPr id="9" name="Rectangle 8"/>
+          <p:cNvPr id="5" name="Rectangle 4"/>
           <p:cNvSpPr/>
           <p:nvPr/>
         </p:nvSpPr>
@@ -12103,7 +9568,7 @@
       </p:sp>
       <p:sp>
         <p:nvSpPr>
-          <p:cNvPr id="10" name="TextBox 9"/>
+          <p:cNvPr id="6" name="TextBox 5"/>
           <p:cNvSpPr txBox="1"/>
           <p:nvPr/>
         </p:nvSpPr>
@@ -12136,7 +9601,7 @@
                 <a:solidFill>
                   <a:srgbClr val="1E334E"/>
                 </a:solidFill>
-                <a:latin typeface="Georgia"/>
+                <a:latin typeface="Times New Roman"/>
               </a:rPr>
               <a:t>A catalyst-driven source of return</a:t>
             </a:r>
@@ -12145,7 +9610,7 @@
       </p:sp>
       <p:sp>
         <p:nvSpPr>
-          <p:cNvPr id="11" name="TextBox 10"/>
+          <p:cNvPr id="7" name="TextBox 6"/>
           <p:cNvSpPr txBox="1"/>
           <p:nvPr/>
         </p:nvSpPr>
@@ -12178,7 +9643,7 @@
                 <a:solidFill>
                   <a:srgbClr val="5A636E"/>
                 </a:solidFill>
-                <a:latin typeface="Arial"/>
+                <a:latin typeface="Calibri"/>
               </a:rPr>
               <a:t>Engaged owners change the outcome — they do not merely absorb underperformance.</a:t>
             </a:r>
@@ -12187,7 +9652,7 @@
       </p:sp>
       <p:sp>
         <p:nvSpPr>
-          <p:cNvPr id="12" name="TextBox 11"/>
+          <p:cNvPr id="8" name="TextBox 7"/>
           <p:cNvSpPr txBox="1"/>
           <p:nvPr/>
         </p:nvSpPr>
@@ -12220,7 +9685,7 @@
                 <a:solidFill>
                   <a:srgbClr val="9AA4B0"/>
                 </a:solidFill>
-                <a:latin typeface="Arial"/>
+                <a:latin typeface="Calibri"/>
               </a:rPr>
               <a:t>Strictly confidential          2</a:t>
             </a:r>
@@ -12229,7 +9694,7 @@
       </p:sp>
       <p:sp>
         <p:nvSpPr>
-          <p:cNvPr id="13" name="TextBox 12"/>
+          <p:cNvPr id="9" name="TextBox 8"/>
           <p:cNvSpPr txBox="1"/>
           <p:nvPr/>
         </p:nvSpPr>
@@ -12262,7 +9727,7 @@
                 <a:solidFill>
                   <a:srgbClr val="4A5D75"/>
                 </a:solidFill>
-                <a:latin typeface="Arial"/>
+                <a:latin typeface="Calibri"/>
               </a:rPr>
               <a:t>›  </a:t>
             </a:r>
@@ -12271,7 +9736,7 @@
                 <a:solidFill>
                   <a:srgbClr val="1E334E"/>
                 </a:solidFill>
-                <a:latin typeface="Arial"/>
+                <a:latin typeface="Calibri"/>
               </a:rPr>
               <a:t>~7% announcement return.</a:t>
             </a:r>
@@ -12280,7 +9745,7 @@
                 <a:solidFill>
                   <a:srgbClr val="333840"/>
                 </a:solidFill>
-                <a:latin typeface="Arial"/>
+                <a:latin typeface="Calibri"/>
               </a:rPr>
               <a:t>  Average abnormal return around an activist filing, with no reversal over the following year; success or partial success in ~two-thirds of campaigns (Brav, Jiang, Partnoy &amp; Thomas, 2008).</a:t>
             </a:r>
@@ -12299,7 +9764,7 @@
                 <a:solidFill>
                   <a:srgbClr val="4A5D75"/>
                 </a:solidFill>
-                <a:latin typeface="Arial"/>
+                <a:latin typeface="Calibri"/>
               </a:rPr>
               <a:t>›  </a:t>
             </a:r>
@@ -12308,7 +9773,7 @@
                 <a:solidFill>
                   <a:srgbClr val="1E334E"/>
                 </a:solidFill>
-                <a:latin typeface="Arial"/>
+                <a:latin typeface="Calibri"/>
               </a:rPr>
               <a:t>~10.2% around the 13D,</a:t>
             </a:r>
@@ -12317,7 +9782,7 @@
                 <a:solidFill>
                   <a:srgbClr val="333840"/>
                 </a:solidFill>
-                <a:latin typeface="Arial"/>
+                <a:latin typeface="Calibri"/>
               </a:rPr>
               <a:t>  plus a further ~11.4% over the next year for engaged-owner targets (Klein &amp; Zur, 2009).</a:t>
             </a:r>
@@ -12336,7 +9801,7 @@
                 <a:solidFill>
                   <a:srgbClr val="4A5D75"/>
                 </a:solidFill>
-                <a:latin typeface="Arial"/>
+                <a:latin typeface="Calibri"/>
               </a:rPr>
               <a:t>›  </a:t>
             </a:r>
@@ -12345,7 +9810,7 @@
                 <a:solidFill>
                   <a:srgbClr val="1E334E"/>
                 </a:solidFill>
-                <a:latin typeface="Arial"/>
+                <a:latin typeface="Calibri"/>
               </a:rPr>
               <a:t>No long-term give-back.</a:t>
             </a:r>
@@ -12354,7 +9819,7 @@
                 <a:solidFill>
                   <a:srgbClr val="333840"/>
                 </a:solidFill>
-                <a:latin typeface="Arial"/>
+                <a:latin typeface="Calibri"/>
               </a:rPr>
               <a:t>  ~2,000 interventions show no negative drift and no “pump-and-dump” (Bebchuk, Brav &amp; Jiang, 2015).</a:t>
             </a:r>
@@ -12373,7 +9838,7 @@
                 <a:solidFill>
                   <a:srgbClr val="4A5D75"/>
                 </a:solidFill>
-                <a:latin typeface="Arial"/>
+                <a:latin typeface="Calibri"/>
               </a:rPr>
               <a:t>›  </a:t>
             </a:r>
@@ -12382,7 +9847,7 @@
                 <a:solidFill>
                   <a:srgbClr val="1E334E"/>
                 </a:solidFill>
-                <a:latin typeface="Arial"/>
+                <a:latin typeface="Calibri"/>
               </a:rPr>
               <a:t>Real, not financial, value.</a:t>
             </a:r>
@@ -12391,7 +9856,7 @@
                 <a:solidFill>
                   <a:srgbClr val="333840"/>
                 </a:solidFill>
-                <a:latin typeface="Arial"/>
+                <a:latin typeface="Calibri"/>
               </a:rPr>
               <a:t>  Production efficiency improves in the three years after intervention (Brav, Jiang &amp; Kim, 2015).</a:t>
             </a:r>
@@ -12410,7 +9875,7 @@
                 <a:solidFill>
                   <a:srgbClr val="4A5D75"/>
                 </a:solidFill>
-                <a:latin typeface="Arial"/>
+                <a:latin typeface="Calibri"/>
               </a:rPr>
               <a:t>›  </a:t>
             </a:r>
@@ -12419,7 +9884,7 @@
                 <a:solidFill>
                   <a:srgbClr val="1E334E"/>
                 </a:solidFill>
-                <a:latin typeface="Arial"/>
+                <a:latin typeface="Calibri"/>
               </a:rPr>
               <a:t>Idiosyncratic alpha.</a:t>
             </a:r>
@@ -12428,7 +9893,7 @@
                 <a:solidFill>
                   <a:srgbClr val="333840"/>
                 </a:solidFill>
-                <a:latin typeface="Arial"/>
+                <a:latin typeface="Calibri"/>
               </a:rPr>
               <a:t>  Returns tied to a specific change at a specific company — scarce in a beta-dominated portfolio.</a:t>
             </a:r>
@@ -12497,235 +9962,39 @@
           </a:p>
         </p:txBody>
       </p:sp>
-      <p:sp>
-        <p:nvSpPr>
-          <p:cNvPr id="3" name="Rectangle 2"/>
-          <p:cNvSpPr/>
-          <p:nvPr/>
-        </p:nvSpPr>
-        <p:spPr>
-          <a:xfrm>
-            <a:off x="502920" y="370515"/>
-            <a:ext cx="32186" cy="68397"/>
-          </a:xfrm>
-          <a:prstGeom prst="rect">
-            <a:avLst/>
-          </a:prstGeom>
-          <a:solidFill>
-            <a:srgbClr val="4A5D75"/>
-          </a:solidFill>
-          <a:ln>
-            <a:noFill/>
-          </a:ln>
-          <a:effectLst/>
-        </p:spPr>
-        <p:style>
-          <a:lnRef idx="1">
-            <a:schemeClr val="accent1"/>
-          </a:lnRef>
-          <a:fillRef idx="3">
-            <a:schemeClr val="accent1"/>
-          </a:fillRef>
-          <a:effectRef idx="2">
-            <a:schemeClr val="accent1"/>
-          </a:effectRef>
-          <a:fontRef idx="minor">
-            <a:schemeClr val="lt1"/>
-          </a:fontRef>
-        </p:style>
-        <p:txBody>
-          <a:bodyPr rtlCol="0" anchor="ctr"/>
-          <a:lstStyle/>
-          <a:p>
-            <a:pPr algn="ctr"/>
-          </a:p>
-        </p:txBody>
-      </p:sp>
-      <p:sp>
-        <p:nvSpPr>
-          <p:cNvPr id="4" name="Rectangle 3"/>
-          <p:cNvSpPr/>
-          <p:nvPr/>
-        </p:nvSpPr>
-        <p:spPr>
-          <a:xfrm>
-            <a:off x="559246" y="314188"/>
-            <a:ext cx="32186" cy="124724"/>
-          </a:xfrm>
-          <a:prstGeom prst="rect">
-            <a:avLst/>
-          </a:prstGeom>
-          <a:solidFill>
-            <a:srgbClr val="4A5D75"/>
-          </a:solidFill>
-          <a:ln>
-            <a:noFill/>
-          </a:ln>
-          <a:effectLst/>
-        </p:spPr>
-        <p:style>
-          <a:lnRef idx="1">
-            <a:schemeClr val="accent1"/>
-          </a:lnRef>
-          <a:fillRef idx="3">
-            <a:schemeClr val="accent1"/>
-          </a:fillRef>
-          <a:effectRef idx="2">
-            <a:schemeClr val="accent1"/>
-          </a:effectRef>
-          <a:fontRef idx="minor">
-            <a:schemeClr val="lt1"/>
-          </a:fontRef>
-        </p:style>
-        <p:txBody>
-          <a:bodyPr rtlCol="0" anchor="ctr"/>
-          <a:lstStyle/>
-          <a:p>
-            <a:pPr algn="ctr"/>
-          </a:p>
-        </p:txBody>
-      </p:sp>
-      <p:sp>
-        <p:nvSpPr>
-          <p:cNvPr id="5" name="Rectangle 4"/>
-          <p:cNvSpPr/>
-          <p:nvPr/>
-        </p:nvSpPr>
-        <p:spPr>
-          <a:xfrm>
-            <a:off x="615572" y="237744"/>
-            <a:ext cx="32186" cy="201168"/>
-          </a:xfrm>
-          <a:prstGeom prst="rect">
-            <a:avLst/>
-          </a:prstGeom>
-          <a:solidFill>
-            <a:srgbClr val="4A5D75"/>
-          </a:solidFill>
-          <a:ln>
-            <a:noFill/>
-          </a:ln>
-          <a:effectLst/>
-        </p:spPr>
-        <p:style>
-          <a:lnRef idx="1">
-            <a:schemeClr val="accent1"/>
-          </a:lnRef>
-          <a:fillRef idx="3">
-            <a:schemeClr val="accent1"/>
-          </a:fillRef>
-          <a:effectRef idx="2">
-            <a:schemeClr val="accent1"/>
-          </a:effectRef>
-          <a:fontRef idx="minor">
-            <a:schemeClr val="lt1"/>
-          </a:fontRef>
-        </p:style>
-        <p:txBody>
-          <a:bodyPr rtlCol="0" anchor="ctr"/>
-          <a:lstStyle/>
-          <a:p>
-            <a:pPr algn="ctr"/>
-          </a:p>
-        </p:txBody>
-      </p:sp>
-      <p:sp>
-        <p:nvSpPr>
-          <p:cNvPr id="6" name="Rectangle 5"/>
-          <p:cNvSpPr/>
-          <p:nvPr/>
-        </p:nvSpPr>
-        <p:spPr>
-          <a:xfrm>
-            <a:off x="671898" y="328270"/>
-            <a:ext cx="32186" cy="110642"/>
-          </a:xfrm>
-          <a:prstGeom prst="rect">
-            <a:avLst/>
-          </a:prstGeom>
-          <a:solidFill>
-            <a:srgbClr val="4A5D75"/>
-          </a:solidFill>
-          <a:ln>
-            <a:noFill/>
-          </a:ln>
-          <a:effectLst/>
-        </p:spPr>
-        <p:style>
-          <a:lnRef idx="1">
-            <a:schemeClr val="accent1"/>
-          </a:lnRef>
-          <a:fillRef idx="3">
-            <a:schemeClr val="accent1"/>
-          </a:fillRef>
-          <a:effectRef idx="2">
-            <a:schemeClr val="accent1"/>
-          </a:effectRef>
-          <a:fontRef idx="minor">
-            <a:schemeClr val="lt1"/>
-          </a:fontRef>
-        </p:style>
-        <p:txBody>
-          <a:bodyPr rtlCol="0" anchor="ctr"/>
-          <a:lstStyle/>
-          <a:p>
-            <a:pPr algn="ctr"/>
-          </a:p>
-        </p:txBody>
-      </p:sp>
-      <p:sp>
-        <p:nvSpPr>
-          <p:cNvPr id="7" name="Rectangle 6"/>
-          <p:cNvSpPr/>
-          <p:nvPr/>
-        </p:nvSpPr>
-        <p:spPr>
-          <a:xfrm>
-            <a:off x="728224" y="382585"/>
-            <a:ext cx="32186" cy="56327"/>
-          </a:xfrm>
-          <a:prstGeom prst="rect">
-            <a:avLst/>
-          </a:prstGeom>
-          <a:solidFill>
-            <a:srgbClr val="4A5D75"/>
-          </a:solidFill>
-          <a:ln>
-            <a:noFill/>
-          </a:ln>
-          <a:effectLst/>
-        </p:spPr>
-        <p:style>
-          <a:lnRef idx="1">
-            <a:schemeClr val="accent1"/>
-          </a:lnRef>
-          <a:fillRef idx="3">
-            <a:schemeClr val="accent1"/>
-          </a:fillRef>
-          <a:effectRef idx="2">
-            <a:schemeClr val="accent1"/>
-          </a:effectRef>
-          <a:fontRef idx="minor">
-            <a:schemeClr val="lt1"/>
-          </a:fontRef>
-        </p:style>
-        <p:txBody>
-          <a:bodyPr rtlCol="0" anchor="ctr"/>
-          <a:lstStyle/>
-          <a:p>
-            <a:pPr algn="ctr"/>
-          </a:p>
-        </p:txBody>
-      </p:sp>
-      <p:sp>
-        <p:nvSpPr>
-          <p:cNvPr id="8" name="TextBox 7"/>
+      <p:pic>
+        <p:nvPicPr>
+          <p:cNvPr id="3" name="Picture 2" descr="mark_dark.png"/>
+          <p:cNvPicPr>
+            <a:picLocks noChangeAspect="1"/>
+          </p:cNvPicPr>
+          <p:nvPr/>
+        </p:nvPicPr>
+        <p:blipFill>
+          <a:blip r:embed="rId2"/>
+          <a:stretch>
+            <a:fillRect/>
+          </a:stretch>
+        </p:blipFill>
+        <p:spPr>
+          <a:xfrm>
+            <a:off x="502920" y="219456"/>
+            <a:ext cx="280009" cy="237744"/>
+          </a:xfrm>
+          <a:prstGeom prst="rect">
+            <a:avLst/>
+          </a:prstGeom>
+        </p:spPr>
+      </p:pic>
+      <p:sp>
+        <p:nvSpPr>
+          <p:cNvPr id="4" name="TextBox 3"/>
           <p:cNvSpPr txBox="1"/>
           <p:nvPr/>
         </p:nvSpPr>
         <p:spPr>
           <a:xfrm>
-            <a:off x="1051560" y="219456"/>
+            <a:off x="896112" y="246888"/>
             <a:ext cx="6400800" cy="274320"/>
           </a:xfrm>
           <a:prstGeom prst="rect">
@@ -12752,7 +10021,7 @@
                 <a:solidFill>
                   <a:srgbClr val="4A5D75"/>
                 </a:solidFill>
-                <a:latin typeface="Arial"/>
+                <a:latin typeface="Calibri"/>
               </a:rPr>
               <a:t>Fit</a:t>
             </a:r>
@@ -12761,7 +10030,7 @@
       </p:sp>
       <p:sp>
         <p:nvSpPr>
-          <p:cNvPr id="9" name="Rectangle 8"/>
+          <p:cNvPr id="5" name="Rectangle 4"/>
           <p:cNvSpPr/>
           <p:nvPr/>
         </p:nvSpPr>
@@ -12805,7 +10074,7 @@
       </p:sp>
       <p:sp>
         <p:nvSpPr>
-          <p:cNvPr id="10" name="TextBox 9"/>
+          <p:cNvPr id="6" name="TextBox 5"/>
           <p:cNvSpPr txBox="1"/>
           <p:nvPr/>
         </p:nvSpPr>
@@ -12838,7 +10107,7 @@
                 <a:solidFill>
                   <a:srgbClr val="1E334E"/>
                 </a:solidFill>
-                <a:latin typeface="Georgia"/>
+                <a:latin typeface="Times New Roman"/>
               </a:rPr>
               <a:t>Aligned with horizon and fiduciary duty</a:t>
             </a:r>
@@ -12847,7 +10116,7 @@
       </p:sp>
       <p:sp>
         <p:nvSpPr>
-          <p:cNvPr id="11" name="TextBox 10"/>
+          <p:cNvPr id="7" name="TextBox 6"/>
           <p:cNvSpPr txBox="1"/>
           <p:nvPr/>
         </p:nvSpPr>
@@ -12880,7 +10149,7 @@
                 <a:solidFill>
                   <a:srgbClr val="9AA4B0"/>
                 </a:solidFill>
-                <a:latin typeface="Arial"/>
+                <a:latin typeface="Calibri"/>
               </a:rPr>
               <a:t>Strictly confidential          3</a:t>
             </a:r>
@@ -12889,7 +10158,7 @@
       </p:sp>
       <p:sp>
         <p:nvSpPr>
-          <p:cNvPr id="12" name="TextBox 11"/>
+          <p:cNvPr id="8" name="TextBox 7"/>
           <p:cNvSpPr txBox="1"/>
           <p:nvPr/>
         </p:nvSpPr>
@@ -12922,7 +10191,7 @@
                 <a:solidFill>
                   <a:srgbClr val="4A5D75"/>
                 </a:solidFill>
-                <a:latin typeface="Arial"/>
+                <a:latin typeface="Calibri"/>
               </a:rPr>
               <a:t>›  </a:t>
             </a:r>
@@ -12931,7 +10200,7 @@
                 <a:solidFill>
                   <a:srgbClr val="1E334E"/>
                 </a:solidFill>
-                <a:latin typeface="Arial"/>
+                <a:latin typeface="Calibri"/>
               </a:rPr>
               <a:t>Patient capital wins.</a:t>
             </a:r>
@@ -12940,7 +10209,7 @@
                 <a:solidFill>
                   <a:srgbClr val="333840"/>
                 </a:solidFill>
-                <a:latin typeface="Arial"/>
+                <a:latin typeface="Calibri"/>
               </a:rPr>
               <a:t>  Board seats, strategic reviews and turnarounds play out over years — perpetual endowments and long-dated pensions can hold through to full value realisation.</a:t>
             </a:r>
@@ -12959,7 +10228,7 @@
                 <a:solidFill>
                   <a:srgbClr val="4A5D75"/>
                 </a:solidFill>
-                <a:latin typeface="Arial"/>
+                <a:latin typeface="Calibri"/>
               </a:rPr>
               <a:t>›  </a:t>
             </a:r>
@@ -12968,7 +10237,7 @@
                 <a:solidFill>
                   <a:srgbClr val="1E334E"/>
                 </a:solidFill>
-                <a:latin typeface="Arial"/>
+                <a:latin typeface="Calibri"/>
               </a:rPr>
               <a:t>Stewardship is the duty.</a:t>
             </a:r>
@@ -12977,7 +10246,7 @@
                 <a:solidFill>
                   <a:srgbClr val="333840"/>
                 </a:solidFill>
-                <a:latin typeface="Arial"/>
+                <a:latin typeface="Calibri"/>
               </a:rPr>
               <a:t>  Engaged ownership expresses fiduciary obligation (UK Stewardship Code; UN PRI) rather than conflicting with it.</a:t>
             </a:r>
@@ -12996,7 +10265,7 @@
                 <a:solidFill>
                   <a:srgbClr val="4A5D75"/>
                 </a:solidFill>
-                <a:latin typeface="Arial"/>
+                <a:latin typeface="Calibri"/>
               </a:rPr>
               <a:t>›  </a:t>
             </a:r>
@@ -13005,7 +10274,7 @@
                 <a:solidFill>
                   <a:srgbClr val="1E334E"/>
                 </a:solidFill>
-                <a:latin typeface="Arial"/>
+                <a:latin typeface="Calibri"/>
               </a:rPr>
               <a:t>Mission alignment.</a:t>
             </a:r>
@@ -13014,7 +10283,7 @@
                 <a:solidFill>
                   <a:srgbClr val="333840"/>
                 </a:solidFill>
-                <a:latin typeface="Arial"/>
+                <a:latin typeface="Calibri"/>
               </a:rPr>
               <a:t>  Demanding accountability and good governance reflects institutional values and is defensible to beneficiaries.</a:t>
             </a:r>
@@ -13033,7 +10302,7 @@
                 <a:solidFill>
                   <a:srgbClr val="4A5D75"/>
                 </a:solidFill>
-                <a:latin typeface="Arial"/>
+                <a:latin typeface="Calibri"/>
               </a:rPr>
               <a:t>›  </a:t>
             </a:r>
@@ -13042,7 +10311,7 @@
                 <a:solidFill>
                   <a:srgbClr val="1E334E"/>
                 </a:solidFill>
-                <a:latin typeface="Arial"/>
+                <a:latin typeface="Calibri"/>
               </a:rPr>
               <a:t>Engagement as risk management.</a:t>
             </a:r>
@@ -13051,7 +10320,7 @@
                 <a:solidFill>
                   <a:srgbClr val="333840"/>
                 </a:solidFill>
-                <a:latin typeface="Arial"/>
+                <a:latin typeface="Calibri"/>
               </a:rPr>
               <a:t>  Turns hidden governance risk in the portfolio into a remediable, return-generating exposure.</a:t>
             </a:r>
@@ -13120,235 +10389,39 @@
           </a:p>
         </p:txBody>
       </p:sp>
-      <p:sp>
-        <p:nvSpPr>
-          <p:cNvPr id="3" name="Rectangle 2"/>
-          <p:cNvSpPr/>
-          <p:nvPr/>
-        </p:nvSpPr>
-        <p:spPr>
-          <a:xfrm>
-            <a:off x="502920" y="370515"/>
-            <a:ext cx="32186" cy="68397"/>
-          </a:xfrm>
-          <a:prstGeom prst="rect">
-            <a:avLst/>
-          </a:prstGeom>
-          <a:solidFill>
-            <a:srgbClr val="4A5D75"/>
-          </a:solidFill>
-          <a:ln>
-            <a:noFill/>
-          </a:ln>
-          <a:effectLst/>
-        </p:spPr>
-        <p:style>
-          <a:lnRef idx="1">
-            <a:schemeClr val="accent1"/>
-          </a:lnRef>
-          <a:fillRef idx="3">
-            <a:schemeClr val="accent1"/>
-          </a:fillRef>
-          <a:effectRef idx="2">
-            <a:schemeClr val="accent1"/>
-          </a:effectRef>
-          <a:fontRef idx="minor">
-            <a:schemeClr val="lt1"/>
-          </a:fontRef>
-        </p:style>
-        <p:txBody>
-          <a:bodyPr rtlCol="0" anchor="ctr"/>
-          <a:lstStyle/>
-          <a:p>
-            <a:pPr algn="ctr"/>
-          </a:p>
-        </p:txBody>
-      </p:sp>
-      <p:sp>
-        <p:nvSpPr>
-          <p:cNvPr id="4" name="Rectangle 3"/>
-          <p:cNvSpPr/>
-          <p:nvPr/>
-        </p:nvSpPr>
-        <p:spPr>
-          <a:xfrm>
-            <a:off x="559246" y="314188"/>
-            <a:ext cx="32186" cy="124724"/>
-          </a:xfrm>
-          <a:prstGeom prst="rect">
-            <a:avLst/>
-          </a:prstGeom>
-          <a:solidFill>
-            <a:srgbClr val="4A5D75"/>
-          </a:solidFill>
-          <a:ln>
-            <a:noFill/>
-          </a:ln>
-          <a:effectLst/>
-        </p:spPr>
-        <p:style>
-          <a:lnRef idx="1">
-            <a:schemeClr val="accent1"/>
-          </a:lnRef>
-          <a:fillRef idx="3">
-            <a:schemeClr val="accent1"/>
-          </a:fillRef>
-          <a:effectRef idx="2">
-            <a:schemeClr val="accent1"/>
-          </a:effectRef>
-          <a:fontRef idx="minor">
-            <a:schemeClr val="lt1"/>
-          </a:fontRef>
-        </p:style>
-        <p:txBody>
-          <a:bodyPr rtlCol="0" anchor="ctr"/>
-          <a:lstStyle/>
-          <a:p>
-            <a:pPr algn="ctr"/>
-          </a:p>
-        </p:txBody>
-      </p:sp>
-      <p:sp>
-        <p:nvSpPr>
-          <p:cNvPr id="5" name="Rectangle 4"/>
-          <p:cNvSpPr/>
-          <p:nvPr/>
-        </p:nvSpPr>
-        <p:spPr>
-          <a:xfrm>
-            <a:off x="615572" y="237744"/>
-            <a:ext cx="32186" cy="201168"/>
-          </a:xfrm>
-          <a:prstGeom prst="rect">
-            <a:avLst/>
-          </a:prstGeom>
-          <a:solidFill>
-            <a:srgbClr val="4A5D75"/>
-          </a:solidFill>
-          <a:ln>
-            <a:noFill/>
-          </a:ln>
-          <a:effectLst/>
-        </p:spPr>
-        <p:style>
-          <a:lnRef idx="1">
-            <a:schemeClr val="accent1"/>
-          </a:lnRef>
-          <a:fillRef idx="3">
-            <a:schemeClr val="accent1"/>
-          </a:fillRef>
-          <a:effectRef idx="2">
-            <a:schemeClr val="accent1"/>
-          </a:effectRef>
-          <a:fontRef idx="minor">
-            <a:schemeClr val="lt1"/>
-          </a:fontRef>
-        </p:style>
-        <p:txBody>
-          <a:bodyPr rtlCol="0" anchor="ctr"/>
-          <a:lstStyle/>
-          <a:p>
-            <a:pPr algn="ctr"/>
-          </a:p>
-        </p:txBody>
-      </p:sp>
-      <p:sp>
-        <p:nvSpPr>
-          <p:cNvPr id="6" name="Rectangle 5"/>
-          <p:cNvSpPr/>
-          <p:nvPr/>
-        </p:nvSpPr>
-        <p:spPr>
-          <a:xfrm>
-            <a:off x="671898" y="328270"/>
-            <a:ext cx="32186" cy="110642"/>
-          </a:xfrm>
-          <a:prstGeom prst="rect">
-            <a:avLst/>
-          </a:prstGeom>
-          <a:solidFill>
-            <a:srgbClr val="4A5D75"/>
-          </a:solidFill>
-          <a:ln>
-            <a:noFill/>
-          </a:ln>
-          <a:effectLst/>
-        </p:spPr>
-        <p:style>
-          <a:lnRef idx="1">
-            <a:schemeClr val="accent1"/>
-          </a:lnRef>
-          <a:fillRef idx="3">
-            <a:schemeClr val="accent1"/>
-          </a:fillRef>
-          <a:effectRef idx="2">
-            <a:schemeClr val="accent1"/>
-          </a:effectRef>
-          <a:fontRef idx="minor">
-            <a:schemeClr val="lt1"/>
-          </a:fontRef>
-        </p:style>
-        <p:txBody>
-          <a:bodyPr rtlCol="0" anchor="ctr"/>
-          <a:lstStyle/>
-          <a:p>
-            <a:pPr algn="ctr"/>
-          </a:p>
-        </p:txBody>
-      </p:sp>
-      <p:sp>
-        <p:nvSpPr>
-          <p:cNvPr id="7" name="Rectangle 6"/>
-          <p:cNvSpPr/>
-          <p:nvPr/>
-        </p:nvSpPr>
-        <p:spPr>
-          <a:xfrm>
-            <a:off x="728224" y="382585"/>
-            <a:ext cx="32186" cy="56327"/>
-          </a:xfrm>
-          <a:prstGeom prst="rect">
-            <a:avLst/>
-          </a:prstGeom>
-          <a:solidFill>
-            <a:srgbClr val="4A5D75"/>
-          </a:solidFill>
-          <a:ln>
-            <a:noFill/>
-          </a:ln>
-          <a:effectLst/>
-        </p:spPr>
-        <p:style>
-          <a:lnRef idx="1">
-            <a:schemeClr val="accent1"/>
-          </a:lnRef>
-          <a:fillRef idx="3">
-            <a:schemeClr val="accent1"/>
-          </a:fillRef>
-          <a:effectRef idx="2">
-            <a:schemeClr val="accent1"/>
-          </a:effectRef>
-          <a:fontRef idx="minor">
-            <a:schemeClr val="lt1"/>
-          </a:fontRef>
-        </p:style>
-        <p:txBody>
-          <a:bodyPr rtlCol="0" anchor="ctr"/>
-          <a:lstStyle/>
-          <a:p>
-            <a:pPr algn="ctr"/>
-          </a:p>
-        </p:txBody>
-      </p:sp>
-      <p:sp>
-        <p:nvSpPr>
-          <p:cNvPr id="8" name="TextBox 7"/>
+      <p:pic>
+        <p:nvPicPr>
+          <p:cNvPr id="3" name="Picture 2" descr="mark_dark.png"/>
+          <p:cNvPicPr>
+            <a:picLocks noChangeAspect="1"/>
+          </p:cNvPicPr>
+          <p:nvPr/>
+        </p:nvPicPr>
+        <p:blipFill>
+          <a:blip r:embed="rId2"/>
+          <a:stretch>
+            <a:fillRect/>
+          </a:stretch>
+        </p:blipFill>
+        <p:spPr>
+          <a:xfrm>
+            <a:off x="502920" y="219456"/>
+            <a:ext cx="280009" cy="237744"/>
+          </a:xfrm>
+          <a:prstGeom prst="rect">
+            <a:avLst/>
+          </a:prstGeom>
+        </p:spPr>
+      </p:pic>
+      <p:sp>
+        <p:nvSpPr>
+          <p:cNvPr id="4" name="TextBox 3"/>
           <p:cNvSpPr txBox="1"/>
           <p:nvPr/>
         </p:nvSpPr>
         <p:spPr>
           <a:xfrm>
-            <a:off x="1051560" y="219456"/>
+            <a:off x="896112" y="246888"/>
             <a:ext cx="6400800" cy="274320"/>
           </a:xfrm>
           <a:prstGeom prst="rect">
@@ -13375,7 +10448,7 @@
                 <a:solidFill>
                   <a:srgbClr val="4A5D75"/>
                 </a:solidFill>
-                <a:latin typeface="Arial"/>
+                <a:latin typeface="Calibri"/>
               </a:rPr>
               <a:t>Portfolio</a:t>
             </a:r>
@@ -13384,7 +10457,7 @@
       </p:sp>
       <p:sp>
         <p:nvSpPr>
-          <p:cNvPr id="9" name="Rectangle 8"/>
+          <p:cNvPr id="5" name="Rectangle 4"/>
           <p:cNvSpPr/>
           <p:nvPr/>
         </p:nvSpPr>
@@ -13428,7 +10501,7 @@
       </p:sp>
       <p:sp>
         <p:nvSpPr>
-          <p:cNvPr id="10" name="TextBox 9"/>
+          <p:cNvPr id="6" name="TextBox 5"/>
           <p:cNvSpPr txBox="1"/>
           <p:nvPr/>
         </p:nvSpPr>
@@ -13461,7 +10534,7 @@
                 <a:solidFill>
                   <a:srgbClr val="1E334E"/>
                 </a:solidFill>
-                <a:latin typeface="Georgia"/>
+                <a:latin typeface="Times New Roman"/>
               </a:rPr>
               <a:t>Diversification and the total-portfolio view</a:t>
             </a:r>
@@ -13470,7 +10543,7 @@
       </p:sp>
       <p:sp>
         <p:nvSpPr>
-          <p:cNvPr id="11" name="TextBox 10"/>
+          <p:cNvPr id="7" name="TextBox 6"/>
           <p:cNvSpPr txBox="1"/>
           <p:nvPr/>
         </p:nvSpPr>
@@ -13503,7 +10576,7 @@
                 <a:solidFill>
                   <a:srgbClr val="9AA4B0"/>
                 </a:solidFill>
-                <a:latin typeface="Arial"/>
+                <a:latin typeface="Calibri"/>
               </a:rPr>
               <a:t>Strictly confidential          4</a:t>
             </a:r>
@@ -13512,7 +10585,7 @@
       </p:sp>
       <p:sp>
         <p:nvSpPr>
-          <p:cNvPr id="12" name="TextBox 11"/>
+          <p:cNvPr id="8" name="TextBox 7"/>
           <p:cNvSpPr txBox="1"/>
           <p:nvPr/>
         </p:nvSpPr>
@@ -13545,7 +10618,7 @@
                 <a:solidFill>
                   <a:srgbClr val="4A5D75"/>
                 </a:solidFill>
-                <a:latin typeface="Arial"/>
+                <a:latin typeface="Calibri"/>
               </a:rPr>
               <a:t>›  </a:t>
             </a:r>
@@ -13554,7 +10627,7 @@
                 <a:solidFill>
                   <a:srgbClr val="1E334E"/>
                 </a:solidFill>
-                <a:latin typeface="Arial"/>
+                <a:latin typeface="Calibri"/>
               </a:rPr>
               <a:t>A distinct return engine.</a:t>
             </a:r>
@@ -13563,7 +10636,7 @@
                 <a:solidFill>
                   <a:srgbClr val="333840"/>
                 </a:solidFill>
-                <a:latin typeface="Arial"/>
+                <a:latin typeface="Calibri"/>
               </a:rPr>
               <a:t>  Alpha driven by proxy contests, spin-offs and capital-return programmes — largely independent of rates, growth and inflation.</a:t>
             </a:r>
@@ -13582,7 +10655,7 @@
                 <a:solidFill>
                   <a:srgbClr val="4A5D75"/>
                 </a:solidFill>
-                <a:latin typeface="Arial"/>
+                <a:latin typeface="Calibri"/>
               </a:rPr>
               <a:t>›  </a:t>
             </a:r>
@@ -13591,7 +10664,7 @@
                 <a:solidFill>
                   <a:srgbClr val="1E334E"/>
                 </a:solidFill>
-                <a:latin typeface="Arial"/>
+                <a:latin typeface="Calibri"/>
               </a:rPr>
               <a:t>Diversifies the equity book.</a:t>
             </a:r>
@@ -13600,7 +10673,7 @@
                 <a:solidFill>
                   <a:srgbClr val="333840"/>
                 </a:solidFill>
-                <a:latin typeface="Arial"/>
+                <a:latin typeface="Calibri"/>
               </a:rPr>
               <a:t>  Small- and mid-cap value and special situations, typically underweight in institutional portfolios.</a:t>
             </a:r>
@@ -13619,7 +10692,7 @@
                 <a:solidFill>
                   <a:srgbClr val="4A5D75"/>
                 </a:solidFill>
-                <a:latin typeface="Arial"/>
+                <a:latin typeface="Calibri"/>
               </a:rPr>
               <a:t>›  </a:t>
             </a:r>
@@ -13628,7 +10701,7 @@
                 <a:solidFill>
                   <a:srgbClr val="1E334E"/>
                 </a:solidFill>
-                <a:latin typeface="Arial"/>
+                <a:latin typeface="Calibri"/>
               </a:rPr>
               <a:t>Counter-cyclical dry powder.</a:t>
             </a:r>
@@ -13637,7 +10710,7 @@
                 <a:solidFill>
                   <a:srgbClr val="333840"/>
                 </a:solidFill>
-                <a:latin typeface="Arial"/>
+                <a:latin typeface="Calibri"/>
               </a:rPr>
               <a:t>  Dislocations create the next targets; patient capital deploys into weakness rather than selling it.</a:t>
             </a:r>
@@ -13656,7 +10729,7 @@
                 <a:solidFill>
                   <a:srgbClr val="4A5D75"/>
                 </a:solidFill>
-                <a:latin typeface="Arial"/>
+                <a:latin typeface="Calibri"/>
               </a:rPr>
               <a:t>›  </a:t>
             </a:r>
@@ -13665,7 +10738,7 @@
                 <a:solidFill>
                   <a:srgbClr val="1E334E"/>
                 </a:solidFill>
-                <a:latin typeface="Arial"/>
+                <a:latin typeface="Calibri"/>
               </a:rPr>
               <a:t>PE-style upside, public-market terms.</a:t>
             </a:r>
@@ -13674,7 +10747,7 @@
                 <a:solidFill>
                   <a:srgbClr val="333840"/>
                 </a:solidFill>
-                <a:latin typeface="Arial"/>
+                <a:latin typeface="Calibri"/>
               </a:rPr>
               <a:t>  Operational engagement with daily pricing, transparency, lower fees and better liquidity.</a:t>
             </a:r>
@@ -13743,235 +10816,39 @@
           </a:p>
         </p:txBody>
       </p:sp>
-      <p:sp>
-        <p:nvSpPr>
-          <p:cNvPr id="3" name="Rectangle 2"/>
-          <p:cNvSpPr/>
-          <p:nvPr/>
-        </p:nvSpPr>
-        <p:spPr>
-          <a:xfrm>
-            <a:off x="502920" y="370515"/>
-            <a:ext cx="32186" cy="68397"/>
-          </a:xfrm>
-          <a:prstGeom prst="rect">
-            <a:avLst/>
-          </a:prstGeom>
-          <a:solidFill>
-            <a:srgbClr val="4A5D75"/>
-          </a:solidFill>
-          <a:ln>
-            <a:noFill/>
-          </a:ln>
-          <a:effectLst/>
-        </p:spPr>
-        <p:style>
-          <a:lnRef idx="1">
-            <a:schemeClr val="accent1"/>
-          </a:lnRef>
-          <a:fillRef idx="3">
-            <a:schemeClr val="accent1"/>
-          </a:fillRef>
-          <a:effectRef idx="2">
-            <a:schemeClr val="accent1"/>
-          </a:effectRef>
-          <a:fontRef idx="minor">
-            <a:schemeClr val="lt1"/>
-          </a:fontRef>
-        </p:style>
-        <p:txBody>
-          <a:bodyPr rtlCol="0" anchor="ctr"/>
-          <a:lstStyle/>
-          <a:p>
-            <a:pPr algn="ctr"/>
-          </a:p>
-        </p:txBody>
-      </p:sp>
-      <p:sp>
-        <p:nvSpPr>
-          <p:cNvPr id="4" name="Rectangle 3"/>
-          <p:cNvSpPr/>
-          <p:nvPr/>
-        </p:nvSpPr>
-        <p:spPr>
-          <a:xfrm>
-            <a:off x="559246" y="314188"/>
-            <a:ext cx="32186" cy="124724"/>
-          </a:xfrm>
-          <a:prstGeom prst="rect">
-            <a:avLst/>
-          </a:prstGeom>
-          <a:solidFill>
-            <a:srgbClr val="4A5D75"/>
-          </a:solidFill>
-          <a:ln>
-            <a:noFill/>
-          </a:ln>
-          <a:effectLst/>
-        </p:spPr>
-        <p:style>
-          <a:lnRef idx="1">
-            <a:schemeClr val="accent1"/>
-          </a:lnRef>
-          <a:fillRef idx="3">
-            <a:schemeClr val="accent1"/>
-          </a:fillRef>
-          <a:effectRef idx="2">
-            <a:schemeClr val="accent1"/>
-          </a:effectRef>
-          <a:fontRef idx="minor">
-            <a:schemeClr val="lt1"/>
-          </a:fontRef>
-        </p:style>
-        <p:txBody>
-          <a:bodyPr rtlCol="0" anchor="ctr"/>
-          <a:lstStyle/>
-          <a:p>
-            <a:pPr algn="ctr"/>
-          </a:p>
-        </p:txBody>
-      </p:sp>
-      <p:sp>
-        <p:nvSpPr>
-          <p:cNvPr id="5" name="Rectangle 4"/>
-          <p:cNvSpPr/>
-          <p:nvPr/>
-        </p:nvSpPr>
-        <p:spPr>
-          <a:xfrm>
-            <a:off x="615572" y="237744"/>
-            <a:ext cx="32186" cy="201168"/>
-          </a:xfrm>
-          <a:prstGeom prst="rect">
-            <a:avLst/>
-          </a:prstGeom>
-          <a:solidFill>
-            <a:srgbClr val="4A5D75"/>
-          </a:solidFill>
-          <a:ln>
-            <a:noFill/>
-          </a:ln>
-          <a:effectLst/>
-        </p:spPr>
-        <p:style>
-          <a:lnRef idx="1">
-            <a:schemeClr val="accent1"/>
-          </a:lnRef>
-          <a:fillRef idx="3">
-            <a:schemeClr val="accent1"/>
-          </a:fillRef>
-          <a:effectRef idx="2">
-            <a:schemeClr val="accent1"/>
-          </a:effectRef>
-          <a:fontRef idx="minor">
-            <a:schemeClr val="lt1"/>
-          </a:fontRef>
-        </p:style>
-        <p:txBody>
-          <a:bodyPr rtlCol="0" anchor="ctr"/>
-          <a:lstStyle/>
-          <a:p>
-            <a:pPr algn="ctr"/>
-          </a:p>
-        </p:txBody>
-      </p:sp>
-      <p:sp>
-        <p:nvSpPr>
-          <p:cNvPr id="6" name="Rectangle 5"/>
-          <p:cNvSpPr/>
-          <p:nvPr/>
-        </p:nvSpPr>
-        <p:spPr>
-          <a:xfrm>
-            <a:off x="671898" y="328270"/>
-            <a:ext cx="32186" cy="110642"/>
-          </a:xfrm>
-          <a:prstGeom prst="rect">
-            <a:avLst/>
-          </a:prstGeom>
-          <a:solidFill>
-            <a:srgbClr val="4A5D75"/>
-          </a:solidFill>
-          <a:ln>
-            <a:noFill/>
-          </a:ln>
-          <a:effectLst/>
-        </p:spPr>
-        <p:style>
-          <a:lnRef idx="1">
-            <a:schemeClr val="accent1"/>
-          </a:lnRef>
-          <a:fillRef idx="3">
-            <a:schemeClr val="accent1"/>
-          </a:fillRef>
-          <a:effectRef idx="2">
-            <a:schemeClr val="accent1"/>
-          </a:effectRef>
-          <a:fontRef idx="minor">
-            <a:schemeClr val="lt1"/>
-          </a:fontRef>
-        </p:style>
-        <p:txBody>
-          <a:bodyPr rtlCol="0" anchor="ctr"/>
-          <a:lstStyle/>
-          <a:p>
-            <a:pPr algn="ctr"/>
-          </a:p>
-        </p:txBody>
-      </p:sp>
-      <p:sp>
-        <p:nvSpPr>
-          <p:cNvPr id="7" name="Rectangle 6"/>
-          <p:cNvSpPr/>
-          <p:nvPr/>
-        </p:nvSpPr>
-        <p:spPr>
-          <a:xfrm>
-            <a:off x="728224" y="382585"/>
-            <a:ext cx="32186" cy="56327"/>
-          </a:xfrm>
-          <a:prstGeom prst="rect">
-            <a:avLst/>
-          </a:prstGeom>
-          <a:solidFill>
-            <a:srgbClr val="4A5D75"/>
-          </a:solidFill>
-          <a:ln>
-            <a:noFill/>
-          </a:ln>
-          <a:effectLst/>
-        </p:spPr>
-        <p:style>
-          <a:lnRef idx="1">
-            <a:schemeClr val="accent1"/>
-          </a:lnRef>
-          <a:fillRef idx="3">
-            <a:schemeClr val="accent1"/>
-          </a:fillRef>
-          <a:effectRef idx="2">
-            <a:schemeClr val="accent1"/>
-          </a:effectRef>
-          <a:fontRef idx="minor">
-            <a:schemeClr val="lt1"/>
-          </a:fontRef>
-        </p:style>
-        <p:txBody>
-          <a:bodyPr rtlCol="0" anchor="ctr"/>
-          <a:lstStyle/>
-          <a:p>
-            <a:pPr algn="ctr"/>
-          </a:p>
-        </p:txBody>
-      </p:sp>
-      <p:sp>
-        <p:nvSpPr>
-          <p:cNvPr id="8" name="TextBox 7"/>
+      <p:pic>
+        <p:nvPicPr>
+          <p:cNvPr id="3" name="Picture 2" descr="mark_dark.png"/>
+          <p:cNvPicPr>
+            <a:picLocks noChangeAspect="1"/>
+          </p:cNvPicPr>
+          <p:nvPr/>
+        </p:nvPicPr>
+        <p:blipFill>
+          <a:blip r:embed="rId2"/>
+          <a:stretch>
+            <a:fillRect/>
+          </a:stretch>
+        </p:blipFill>
+        <p:spPr>
+          <a:xfrm>
+            <a:off x="502920" y="219456"/>
+            <a:ext cx="280009" cy="237744"/>
+          </a:xfrm>
+          <a:prstGeom prst="rect">
+            <a:avLst/>
+          </a:prstGeom>
+        </p:spPr>
+      </p:pic>
+      <p:sp>
+        <p:nvSpPr>
+          <p:cNvPr id="4" name="TextBox 3"/>
           <p:cNvSpPr txBox="1"/>
           <p:nvPr/>
         </p:nvSpPr>
         <p:spPr>
           <a:xfrm>
-            <a:off x="1051560" y="219456"/>
+            <a:off x="896112" y="246888"/>
             <a:ext cx="6400800" cy="274320"/>
           </a:xfrm>
           <a:prstGeom prst="rect">
@@ -13998,7 +10875,7 @@
                 <a:solidFill>
                   <a:srgbClr val="4A5D75"/>
                 </a:solidFill>
-                <a:latin typeface="Arial"/>
+                <a:latin typeface="Calibri"/>
               </a:rPr>
               <a:t>Stewardship</a:t>
             </a:r>
@@ -14007,7 +10884,7 @@
       </p:sp>
       <p:sp>
         <p:nvSpPr>
-          <p:cNvPr id="9" name="Rectangle 8"/>
+          <p:cNvPr id="5" name="Rectangle 4"/>
           <p:cNvSpPr/>
           <p:nvPr/>
         </p:nvSpPr>
@@ -14051,7 +10928,7 @@
       </p:sp>
       <p:sp>
         <p:nvSpPr>
-          <p:cNvPr id="10" name="TextBox 9"/>
+          <p:cNvPr id="6" name="TextBox 5"/>
           <p:cNvSpPr txBox="1"/>
           <p:nvPr/>
         </p:nvSpPr>
@@ -14084,7 +10961,7 @@
                 <a:solidFill>
                   <a:srgbClr val="1E334E"/>
                 </a:solidFill>
-                <a:latin typeface="Georgia"/>
+                <a:latin typeface="Times New Roman"/>
               </a:rPr>
               <a:t>Governance and the ESG synergy</a:t>
             </a:r>
@@ -14093,7 +10970,7 @@
       </p:sp>
       <p:sp>
         <p:nvSpPr>
-          <p:cNvPr id="11" name="TextBox 10"/>
+          <p:cNvPr id="7" name="TextBox 6"/>
           <p:cNvSpPr txBox="1"/>
           <p:nvPr/>
         </p:nvSpPr>
@@ -14126,7 +11003,7 @@
                 <a:solidFill>
                   <a:srgbClr val="9AA4B0"/>
                 </a:solidFill>
-                <a:latin typeface="Arial"/>
+                <a:latin typeface="Calibri"/>
               </a:rPr>
               <a:t>Strictly confidential          5</a:t>
             </a:r>
@@ -14135,7 +11012,7 @@
       </p:sp>
       <p:sp>
         <p:nvSpPr>
-          <p:cNvPr id="12" name="TextBox 11"/>
+          <p:cNvPr id="8" name="TextBox 7"/>
           <p:cNvSpPr txBox="1"/>
           <p:nvPr/>
         </p:nvSpPr>
@@ -14168,7 +11045,7 @@
                 <a:solidFill>
                   <a:srgbClr val="4A5D75"/>
                 </a:solidFill>
-                <a:latin typeface="Arial"/>
+                <a:latin typeface="Calibri"/>
               </a:rPr>
               <a:t>›  </a:t>
             </a:r>
@@ -14177,7 +11054,7 @@
                 <a:solidFill>
                   <a:srgbClr val="1E334E"/>
                 </a:solidFill>
-                <a:latin typeface="Arial"/>
+                <a:latin typeface="Calibri"/>
               </a:rPr>
               <a:t>Applied governance.</a:t>
             </a:r>
@@ -14186,7 +11063,7 @@
                 <a:solidFill>
                   <a:srgbClr val="333840"/>
                 </a:solidFill>
-                <a:latin typeface="Arial"/>
+                <a:latin typeface="Calibri"/>
               </a:rPr>
               <a:t>  Board independence, pay-for-performance and capital discipline are the “G” of ESG put into practice.</a:t>
             </a:r>
@@ -14205,7 +11082,7 @@
                 <a:solidFill>
                   <a:srgbClr val="4A5D75"/>
                 </a:solidFill>
-                <a:latin typeface="Arial"/>
+                <a:latin typeface="Calibri"/>
               </a:rPr>
               <a:t>›  </a:t>
             </a:r>
@@ -14214,7 +11091,7 @@
                 <a:solidFill>
                   <a:srgbClr val="1E334E"/>
                 </a:solidFill>
-                <a:latin typeface="Arial"/>
+                <a:latin typeface="Calibri"/>
               </a:rPr>
               <a:t>Constructive engagement.</a:t>
             </a:r>
@@ -14223,7 +11100,7 @@
                 <a:solidFill>
                   <a:srgbClr val="333840"/>
                 </a:solidFill>
-                <a:latin typeface="Arial"/>
+                <a:latin typeface="Calibri"/>
               </a:rPr>
               <a:t>  Return and stewardship objectives expressed through one allocation, disciplined by a value thesis.</a:t>
             </a:r>
@@ -14242,7 +11119,7 @@
                 <a:solidFill>
                   <a:srgbClr val="4A5D75"/>
                 </a:solidFill>
-                <a:latin typeface="Arial"/>
+                <a:latin typeface="Calibri"/>
               </a:rPr>
               <a:t>›  </a:t>
             </a:r>
@@ -14251,7 +11128,7 @@
                 <a:solidFill>
                   <a:srgbClr val="1E334E"/>
                 </a:solidFill>
-                <a:latin typeface="Arial"/>
+                <a:latin typeface="Calibri"/>
               </a:rPr>
               <a:t>A positive externality.</a:t>
             </a:r>
@@ -14260,7 +11137,7 @@
                 <a:solidFill>
                   <a:srgbClr val="333840"/>
                 </a:solidFill>
-                <a:latin typeface="Arial"/>
+                <a:latin typeface="Calibri"/>
               </a:rPr>
               <a:t>  Governance precedents improve the quality of the beta the whole portfolio owns.</a:t>
             </a:r>
@@ -14279,7 +11156,7 @@
                 <a:solidFill>
                   <a:srgbClr val="4A5D75"/>
                 </a:solidFill>
-                <a:latin typeface="Arial"/>
+                <a:latin typeface="Calibri"/>
               </a:rPr>
               <a:t>›  </a:t>
             </a:r>
@@ -14288,7 +11165,7 @@
                 <a:solidFill>
                   <a:srgbClr val="1E334E"/>
                 </a:solidFill>
-                <a:latin typeface="Arial"/>
+                <a:latin typeface="Calibri"/>
               </a:rPr>
               <a:t>Defensible to stakeholders.</a:t>
             </a:r>
@@ -14297,7 +11174,7 @@
                 <a:solidFill>
                   <a:srgbClr val="333840"/>
                 </a:solidFill>
-                <a:latin typeface="Arial"/>
+                <a:latin typeface="Calibri"/>
               </a:rPr>
               <a:t>  “We own companies and make them better-run and more valuable” is an easy story to tell.</a:t>
             </a:r>
@@ -14366,235 +11243,39 @@
           </a:p>
         </p:txBody>
       </p:sp>
-      <p:sp>
-        <p:nvSpPr>
-          <p:cNvPr id="3" name="Rectangle 2"/>
-          <p:cNvSpPr/>
-          <p:nvPr/>
-        </p:nvSpPr>
-        <p:spPr>
-          <a:xfrm>
-            <a:off x="502920" y="370515"/>
-            <a:ext cx="32186" cy="68397"/>
-          </a:xfrm>
-          <a:prstGeom prst="rect">
-            <a:avLst/>
-          </a:prstGeom>
-          <a:solidFill>
-            <a:srgbClr val="4A5D75"/>
-          </a:solidFill>
-          <a:ln>
-            <a:noFill/>
-          </a:ln>
-          <a:effectLst/>
-        </p:spPr>
-        <p:style>
-          <a:lnRef idx="1">
-            <a:schemeClr val="accent1"/>
-          </a:lnRef>
-          <a:fillRef idx="3">
-            <a:schemeClr val="accent1"/>
-          </a:fillRef>
-          <a:effectRef idx="2">
-            <a:schemeClr val="accent1"/>
-          </a:effectRef>
-          <a:fontRef idx="minor">
-            <a:schemeClr val="lt1"/>
-          </a:fontRef>
-        </p:style>
-        <p:txBody>
-          <a:bodyPr rtlCol="0" anchor="ctr"/>
-          <a:lstStyle/>
-          <a:p>
-            <a:pPr algn="ctr"/>
-          </a:p>
-        </p:txBody>
-      </p:sp>
-      <p:sp>
-        <p:nvSpPr>
-          <p:cNvPr id="4" name="Rectangle 3"/>
-          <p:cNvSpPr/>
-          <p:nvPr/>
-        </p:nvSpPr>
-        <p:spPr>
-          <a:xfrm>
-            <a:off x="559246" y="314188"/>
-            <a:ext cx="32186" cy="124724"/>
-          </a:xfrm>
-          <a:prstGeom prst="rect">
-            <a:avLst/>
-          </a:prstGeom>
-          <a:solidFill>
-            <a:srgbClr val="4A5D75"/>
-          </a:solidFill>
-          <a:ln>
-            <a:noFill/>
-          </a:ln>
-          <a:effectLst/>
-        </p:spPr>
-        <p:style>
-          <a:lnRef idx="1">
-            <a:schemeClr val="accent1"/>
-          </a:lnRef>
-          <a:fillRef idx="3">
-            <a:schemeClr val="accent1"/>
-          </a:fillRef>
-          <a:effectRef idx="2">
-            <a:schemeClr val="accent1"/>
-          </a:effectRef>
-          <a:fontRef idx="minor">
-            <a:schemeClr val="lt1"/>
-          </a:fontRef>
-        </p:style>
-        <p:txBody>
-          <a:bodyPr rtlCol="0" anchor="ctr"/>
-          <a:lstStyle/>
-          <a:p>
-            <a:pPr algn="ctr"/>
-          </a:p>
-        </p:txBody>
-      </p:sp>
-      <p:sp>
-        <p:nvSpPr>
-          <p:cNvPr id="5" name="Rectangle 4"/>
-          <p:cNvSpPr/>
-          <p:nvPr/>
-        </p:nvSpPr>
-        <p:spPr>
-          <a:xfrm>
-            <a:off x="615572" y="237744"/>
-            <a:ext cx="32186" cy="201168"/>
-          </a:xfrm>
-          <a:prstGeom prst="rect">
-            <a:avLst/>
-          </a:prstGeom>
-          <a:solidFill>
-            <a:srgbClr val="4A5D75"/>
-          </a:solidFill>
-          <a:ln>
-            <a:noFill/>
-          </a:ln>
-          <a:effectLst/>
-        </p:spPr>
-        <p:style>
-          <a:lnRef idx="1">
-            <a:schemeClr val="accent1"/>
-          </a:lnRef>
-          <a:fillRef idx="3">
-            <a:schemeClr val="accent1"/>
-          </a:fillRef>
-          <a:effectRef idx="2">
-            <a:schemeClr val="accent1"/>
-          </a:effectRef>
-          <a:fontRef idx="minor">
-            <a:schemeClr val="lt1"/>
-          </a:fontRef>
-        </p:style>
-        <p:txBody>
-          <a:bodyPr rtlCol="0" anchor="ctr"/>
-          <a:lstStyle/>
-          <a:p>
-            <a:pPr algn="ctr"/>
-          </a:p>
-        </p:txBody>
-      </p:sp>
-      <p:sp>
-        <p:nvSpPr>
-          <p:cNvPr id="6" name="Rectangle 5"/>
-          <p:cNvSpPr/>
-          <p:nvPr/>
-        </p:nvSpPr>
-        <p:spPr>
-          <a:xfrm>
-            <a:off x="671898" y="328270"/>
-            <a:ext cx="32186" cy="110642"/>
-          </a:xfrm>
-          <a:prstGeom prst="rect">
-            <a:avLst/>
-          </a:prstGeom>
-          <a:solidFill>
-            <a:srgbClr val="4A5D75"/>
-          </a:solidFill>
-          <a:ln>
-            <a:noFill/>
-          </a:ln>
-          <a:effectLst/>
-        </p:spPr>
-        <p:style>
-          <a:lnRef idx="1">
-            <a:schemeClr val="accent1"/>
-          </a:lnRef>
-          <a:fillRef idx="3">
-            <a:schemeClr val="accent1"/>
-          </a:fillRef>
-          <a:effectRef idx="2">
-            <a:schemeClr val="accent1"/>
-          </a:effectRef>
-          <a:fontRef idx="minor">
-            <a:schemeClr val="lt1"/>
-          </a:fontRef>
-        </p:style>
-        <p:txBody>
-          <a:bodyPr rtlCol="0" anchor="ctr"/>
-          <a:lstStyle/>
-          <a:p>
-            <a:pPr algn="ctr"/>
-          </a:p>
-        </p:txBody>
-      </p:sp>
-      <p:sp>
-        <p:nvSpPr>
-          <p:cNvPr id="7" name="Rectangle 6"/>
-          <p:cNvSpPr/>
-          <p:nvPr/>
-        </p:nvSpPr>
-        <p:spPr>
-          <a:xfrm>
-            <a:off x="728224" y="382585"/>
-            <a:ext cx="32186" cy="56327"/>
-          </a:xfrm>
-          <a:prstGeom prst="rect">
-            <a:avLst/>
-          </a:prstGeom>
-          <a:solidFill>
-            <a:srgbClr val="4A5D75"/>
-          </a:solidFill>
-          <a:ln>
-            <a:noFill/>
-          </a:ln>
-          <a:effectLst/>
-        </p:spPr>
-        <p:style>
-          <a:lnRef idx="1">
-            <a:schemeClr val="accent1"/>
-          </a:lnRef>
-          <a:fillRef idx="3">
-            <a:schemeClr val="accent1"/>
-          </a:fillRef>
-          <a:effectRef idx="2">
-            <a:schemeClr val="accent1"/>
-          </a:effectRef>
-          <a:fontRef idx="minor">
-            <a:schemeClr val="lt1"/>
-          </a:fontRef>
-        </p:style>
-        <p:txBody>
-          <a:bodyPr rtlCol="0" anchor="ctr"/>
-          <a:lstStyle/>
-          <a:p>
-            <a:pPr algn="ctr"/>
-          </a:p>
-        </p:txBody>
-      </p:sp>
-      <p:sp>
-        <p:nvSpPr>
-          <p:cNvPr id="8" name="TextBox 7"/>
+      <p:pic>
+        <p:nvPicPr>
+          <p:cNvPr id="3" name="Picture 2" descr="mark_dark.png"/>
+          <p:cNvPicPr>
+            <a:picLocks noChangeAspect="1"/>
+          </p:cNvPicPr>
+          <p:nvPr/>
+        </p:nvPicPr>
+        <p:blipFill>
+          <a:blip r:embed="rId2"/>
+          <a:stretch>
+            <a:fillRect/>
+          </a:stretch>
+        </p:blipFill>
+        <p:spPr>
+          <a:xfrm>
+            <a:off x="502920" y="219456"/>
+            <a:ext cx="280009" cy="237744"/>
+          </a:xfrm>
+          <a:prstGeom prst="rect">
+            <a:avLst/>
+          </a:prstGeom>
+        </p:spPr>
+      </p:pic>
+      <p:sp>
+        <p:nvSpPr>
+          <p:cNvPr id="4" name="TextBox 3"/>
           <p:cNvSpPr txBox="1"/>
           <p:nvPr/>
         </p:nvSpPr>
         <p:spPr>
           <a:xfrm>
-            <a:off x="1051560" y="219456"/>
+            <a:off x="896112" y="246888"/>
             <a:ext cx="6400800" cy="274320"/>
           </a:xfrm>
           <a:prstGeom prst="rect">
@@ -14621,7 +11302,7 @@
                 <a:solidFill>
                   <a:srgbClr val="4A5D75"/>
                 </a:solidFill>
-                <a:latin typeface="Arial"/>
+                <a:latin typeface="Calibri"/>
               </a:rPr>
               <a:t>Selection</a:t>
             </a:r>
@@ -14630,7 +11311,7 @@
       </p:sp>
       <p:sp>
         <p:nvSpPr>
-          <p:cNvPr id="9" name="Rectangle 8"/>
+          <p:cNvPr id="5" name="Rectangle 4"/>
           <p:cNvSpPr/>
           <p:nvPr/>
         </p:nvSpPr>
@@ -14674,7 +11355,7 @@
       </p:sp>
       <p:sp>
         <p:nvSpPr>
-          <p:cNvPr id="10" name="TextBox 9"/>
+          <p:cNvPr id="6" name="TextBox 5"/>
           <p:cNvSpPr txBox="1"/>
           <p:nvPr/>
         </p:nvSpPr>
@@ -14707,7 +11388,7 @@
                 <a:solidFill>
                   <a:srgbClr val="1E334E"/>
                 </a:solidFill>
-                <a:latin typeface="Georgia"/>
+                <a:latin typeface="Times New Roman"/>
               </a:rPr>
               <a:t>What separates a great engaged owner</a:t>
             </a:r>
@@ -14716,7 +11397,7 @@
       </p:sp>
       <p:sp>
         <p:nvSpPr>
-          <p:cNvPr id="11" name="TextBox 10"/>
+          <p:cNvPr id="7" name="TextBox 6"/>
           <p:cNvSpPr txBox="1"/>
           <p:nvPr/>
         </p:nvSpPr>
@@ -14749,7 +11430,7 @@
                 <a:solidFill>
                   <a:srgbClr val="5A636E"/>
                 </a:solidFill>
-                <a:latin typeface="Arial"/>
+                <a:latin typeface="Calibri"/>
               </a:rPr>
               <a:t>Dispersion is wide — manager selection matters more here than in almost any other equity strategy.</a:t>
             </a:r>
@@ -14758,7 +11439,7 @@
       </p:sp>
       <p:sp>
         <p:nvSpPr>
-          <p:cNvPr id="12" name="TextBox 11"/>
+          <p:cNvPr id="8" name="TextBox 7"/>
           <p:cNvSpPr txBox="1"/>
           <p:nvPr/>
         </p:nvSpPr>
@@ -14791,7 +11472,7 @@
                 <a:solidFill>
                   <a:srgbClr val="9AA4B0"/>
                 </a:solidFill>
-                <a:latin typeface="Arial"/>
+                <a:latin typeface="Calibri"/>
               </a:rPr>
               <a:t>Strictly confidential          6</a:t>
             </a:r>
@@ -14800,7 +11481,7 @@
       </p:sp>
       <p:sp>
         <p:nvSpPr>
-          <p:cNvPr id="13" name="TextBox 12"/>
+          <p:cNvPr id="9" name="TextBox 8"/>
           <p:cNvSpPr txBox="1"/>
           <p:nvPr/>
         </p:nvSpPr>
@@ -14833,7 +11514,7 @@
                 <a:solidFill>
                   <a:srgbClr val="4A5D75"/>
                 </a:solidFill>
-                <a:latin typeface="Arial"/>
+                <a:latin typeface="Calibri"/>
               </a:rPr>
               <a:t>›  </a:t>
             </a:r>
@@ -14842,7 +11523,7 @@
                 <a:solidFill>
                   <a:srgbClr val="1E334E"/>
                 </a:solidFill>
-                <a:latin typeface="Arial"/>
+                <a:latin typeface="Calibri"/>
               </a:rPr>
               <a:t>A repeatable process</a:t>
             </a:r>
@@ -14851,7 +11532,7 @@
                 <a:solidFill>
                   <a:srgbClr val="333840"/>
                 </a:solidFill>
-                <a:latin typeface="Arial"/>
+                <a:latin typeface="Calibri"/>
               </a:rPr>
               <a:t>  for sourcing and underwriting correctable, undervalued companies.</a:t>
             </a:r>
@@ -14870,7 +11551,7 @@
                 <a:solidFill>
                   <a:srgbClr val="4A5D75"/>
                 </a:solidFill>
-                <a:latin typeface="Arial"/>
+                <a:latin typeface="Calibri"/>
               </a:rPr>
               <a:t>›  </a:t>
             </a:r>
@@ -14879,7 +11560,7 @@
                 <a:solidFill>
                   <a:srgbClr val="1E334E"/>
                 </a:solidFill>
-                <a:latin typeface="Arial"/>
+                <a:latin typeface="Calibri"/>
               </a:rPr>
               <a:t>Genuine operating capability,</a:t>
             </a:r>
@@ -14888,7 +11569,7 @@
                 <a:solidFill>
                   <a:srgbClr val="333840"/>
                 </a:solidFill>
-                <a:latin typeface="Arial"/>
+                <a:latin typeface="Calibri"/>
               </a:rPr>
               <a:t>  not just financial engineering — the experience to control the outcome from the boardroom.</a:t>
             </a:r>
@@ -14907,7 +11588,7 @@
                 <a:solidFill>
                   <a:srgbClr val="4A5D75"/>
                 </a:solidFill>
-                <a:latin typeface="Arial"/>
+                <a:latin typeface="Calibri"/>
               </a:rPr>
               <a:t>›  </a:t>
             </a:r>
@@ -14916,7 +11597,7 @@
                 <a:solidFill>
                   <a:srgbClr val="1E334E"/>
                 </a:solidFill>
-                <a:latin typeface="Arial"/>
+                <a:latin typeface="Calibri"/>
               </a:rPr>
               <a:t>A track record of outcomes,</a:t>
             </a:r>
@@ -14925,7 +11606,7 @@
                 <a:solidFill>
                   <a:srgbClr val="333840"/>
                 </a:solidFill>
-                <a:latin typeface="Arial"/>
+                <a:latin typeface="Calibri"/>
               </a:rPr>
               <a:t>  board seats won and value delivered across multiple market cycles.</a:t>
             </a:r>
@@ -14944,7 +11625,7 @@
                 <a:solidFill>
                   <a:srgbClr val="4A5D75"/>
                 </a:solidFill>
-                <a:latin typeface="Arial"/>
+                <a:latin typeface="Calibri"/>
               </a:rPr>
               <a:t>›  </a:t>
             </a:r>
@@ -14953,7 +11634,7 @@
                 <a:solidFill>
                   <a:srgbClr val="1E334E"/>
                 </a:solidFill>
-                <a:latin typeface="Arial"/>
+                <a:latin typeface="Calibri"/>
               </a:rPr>
               <a:t>Aligned economics</a:t>
             </a:r>
@@ -14962,7 +11643,7 @@
                 <a:solidFill>
                   <a:srgbClr val="333840"/>
                 </a:solidFill>
-                <a:latin typeface="Arial"/>
+                <a:latin typeface="Calibri"/>
               </a:rPr>
               <a:t>  and a stable, long-tenured team that invests its own capital.</a:t>
             </a:r>
@@ -14981,7 +11662,7 @@
                 <a:solidFill>
                   <a:srgbClr val="4A5D75"/>
                 </a:solidFill>
-                <a:latin typeface="Arial"/>
+                <a:latin typeface="Calibri"/>
               </a:rPr>
               <a:t>›  </a:t>
             </a:r>
@@ -14990,7 +11671,7 @@
                 <a:solidFill>
                   <a:srgbClr val="1E334E"/>
                 </a:solidFill>
-                <a:latin typeface="Arial"/>
+                <a:latin typeface="Calibri"/>
               </a:rPr>
               <a:t>Disciplined entry and risk control</a:t>
             </a:r>
@@ -14999,7 +11680,7 @@
                 <a:solidFill>
                   <a:srgbClr val="333840"/>
                 </a:solidFill>
-                <a:latin typeface="Arial"/>
+                <a:latin typeface="Calibri"/>
               </a:rPr>
               <a:t>  so the strategy delivers without uncompensated concentration risk.</a:t>
             </a:r>
@@ -15008,7 +11689,7 @@
       </p:sp>
       <p:sp>
         <p:nvSpPr>
-          <p:cNvPr id="14" name="TextBox 13"/>
+          <p:cNvPr id="10" name="TextBox 9"/>
           <p:cNvSpPr txBox="1"/>
           <p:nvPr/>
         </p:nvSpPr>
@@ -15041,7 +11722,7 @@
                 <a:solidFill>
                   <a:srgbClr val="4A5D75"/>
                 </a:solidFill>
-                <a:latin typeface="Arial"/>
+                <a:latin typeface="Calibri"/>
               </a:rPr>
               <a:t>Part II shows how Athanase meets each of these criteria.</a:t>
             </a:r>
@@ -15110,290 +11791,33 @@
           </a:p>
         </p:txBody>
       </p:sp>
-      <p:sp>
-        <p:nvSpPr>
-          <p:cNvPr id="3" name="Rectangle 2"/>
-          <p:cNvSpPr/>
-          <p:nvPr/>
-        </p:nvSpPr>
-        <p:spPr>
-          <a:xfrm>
-            <a:off x="548640" y="665867"/>
-            <a:ext cx="39502" cy="83941"/>
-          </a:xfrm>
-          <a:prstGeom prst="rect">
-            <a:avLst/>
-          </a:prstGeom>
-          <a:solidFill>
-            <a:srgbClr val="FFFFFF"/>
-          </a:solidFill>
-          <a:ln>
-            <a:noFill/>
-          </a:ln>
-          <a:effectLst/>
-        </p:spPr>
-        <p:style>
-          <a:lnRef idx="1">
-            <a:schemeClr val="accent1"/>
-          </a:lnRef>
-          <a:fillRef idx="3">
-            <a:schemeClr val="accent1"/>
-          </a:fillRef>
-          <a:effectRef idx="2">
-            <a:schemeClr val="accent1"/>
-          </a:effectRef>
-          <a:fontRef idx="minor">
-            <a:schemeClr val="lt1"/>
-          </a:fontRef>
-        </p:style>
-        <p:txBody>
-          <a:bodyPr rtlCol="0" anchor="ctr"/>
-          <a:lstStyle/>
-          <a:p>
-            <a:pPr algn="ctr"/>
-          </a:p>
-        </p:txBody>
-      </p:sp>
-      <p:sp>
-        <p:nvSpPr>
-          <p:cNvPr id="4" name="Rectangle 3"/>
-          <p:cNvSpPr/>
-          <p:nvPr/>
-        </p:nvSpPr>
-        <p:spPr>
-          <a:xfrm>
-            <a:off x="617768" y="596738"/>
-            <a:ext cx="39502" cy="153070"/>
-          </a:xfrm>
-          <a:prstGeom prst="rect">
-            <a:avLst/>
-          </a:prstGeom>
-          <a:solidFill>
-            <a:srgbClr val="FFFFFF"/>
-          </a:solidFill>
-          <a:ln>
-            <a:noFill/>
-          </a:ln>
-          <a:effectLst/>
-        </p:spPr>
-        <p:style>
-          <a:lnRef idx="1">
-            <a:schemeClr val="accent1"/>
-          </a:lnRef>
-          <a:fillRef idx="3">
-            <a:schemeClr val="accent1"/>
-          </a:fillRef>
-          <a:effectRef idx="2">
-            <a:schemeClr val="accent1"/>
-          </a:effectRef>
-          <a:fontRef idx="minor">
-            <a:schemeClr val="lt1"/>
-          </a:fontRef>
-        </p:style>
-        <p:txBody>
-          <a:bodyPr rtlCol="0" anchor="ctr"/>
-          <a:lstStyle/>
-          <a:p>
-            <a:pPr algn="ctr"/>
-          </a:p>
-        </p:txBody>
-      </p:sp>
-      <p:sp>
-        <p:nvSpPr>
-          <p:cNvPr id="5" name="Rectangle 4"/>
-          <p:cNvSpPr/>
-          <p:nvPr/>
-        </p:nvSpPr>
-        <p:spPr>
-          <a:xfrm>
-            <a:off x="686896" y="502920"/>
-            <a:ext cx="39502" cy="246888"/>
-          </a:xfrm>
-          <a:prstGeom prst="rect">
-            <a:avLst/>
-          </a:prstGeom>
-          <a:solidFill>
-            <a:srgbClr val="FFFFFF"/>
-          </a:solidFill>
-          <a:ln>
-            <a:noFill/>
-          </a:ln>
-          <a:effectLst/>
-        </p:spPr>
-        <p:style>
-          <a:lnRef idx="1">
-            <a:schemeClr val="accent1"/>
-          </a:lnRef>
-          <a:fillRef idx="3">
-            <a:schemeClr val="accent1"/>
-          </a:fillRef>
-          <a:effectRef idx="2">
-            <a:schemeClr val="accent1"/>
-          </a:effectRef>
-          <a:fontRef idx="minor">
-            <a:schemeClr val="lt1"/>
-          </a:fontRef>
-        </p:style>
-        <p:txBody>
-          <a:bodyPr rtlCol="0" anchor="ctr"/>
-          <a:lstStyle/>
-          <a:p>
-            <a:pPr algn="ctr"/>
-          </a:p>
-        </p:txBody>
-      </p:sp>
-      <p:sp>
-        <p:nvSpPr>
-          <p:cNvPr id="6" name="Rectangle 5"/>
-          <p:cNvSpPr/>
-          <p:nvPr/>
-        </p:nvSpPr>
-        <p:spPr>
-          <a:xfrm>
-            <a:off x="756024" y="614020"/>
-            <a:ext cx="39502" cy="135788"/>
-          </a:xfrm>
-          <a:prstGeom prst="rect">
-            <a:avLst/>
-          </a:prstGeom>
-          <a:solidFill>
-            <a:srgbClr val="FFFFFF"/>
-          </a:solidFill>
-          <a:ln>
-            <a:noFill/>
-          </a:ln>
-          <a:effectLst/>
-        </p:spPr>
-        <p:style>
-          <a:lnRef idx="1">
-            <a:schemeClr val="accent1"/>
-          </a:lnRef>
-          <a:fillRef idx="3">
-            <a:schemeClr val="accent1"/>
-          </a:fillRef>
-          <a:effectRef idx="2">
-            <a:schemeClr val="accent1"/>
-          </a:effectRef>
-          <a:fontRef idx="minor">
-            <a:schemeClr val="lt1"/>
-          </a:fontRef>
-        </p:style>
-        <p:txBody>
-          <a:bodyPr rtlCol="0" anchor="ctr"/>
-          <a:lstStyle/>
-          <a:p>
-            <a:pPr algn="ctr"/>
-          </a:p>
-        </p:txBody>
-      </p:sp>
-      <p:sp>
-        <p:nvSpPr>
-          <p:cNvPr id="7" name="Rectangle 6"/>
-          <p:cNvSpPr/>
-          <p:nvPr/>
-        </p:nvSpPr>
-        <p:spPr>
-          <a:xfrm>
-            <a:off x="825152" y="680680"/>
-            <a:ext cx="39502" cy="69128"/>
-          </a:xfrm>
-          <a:prstGeom prst="rect">
-            <a:avLst/>
-          </a:prstGeom>
-          <a:solidFill>
-            <a:srgbClr val="FFFFFF"/>
-          </a:solidFill>
-          <a:ln>
-            <a:noFill/>
-          </a:ln>
-          <a:effectLst/>
-        </p:spPr>
-        <p:style>
-          <a:lnRef idx="1">
-            <a:schemeClr val="accent1"/>
-          </a:lnRef>
-          <a:fillRef idx="3">
-            <a:schemeClr val="accent1"/>
-          </a:fillRef>
-          <a:effectRef idx="2">
-            <a:schemeClr val="accent1"/>
-          </a:effectRef>
-          <a:fontRef idx="minor">
-            <a:schemeClr val="lt1"/>
-          </a:fontRef>
-        </p:style>
-        <p:txBody>
-          <a:bodyPr rtlCol="0" anchor="ctr"/>
-          <a:lstStyle/>
-          <a:p>
-            <a:pPr algn="ctr"/>
-          </a:p>
-        </p:txBody>
-      </p:sp>
-      <p:sp>
-        <p:nvSpPr>
-          <p:cNvPr id="8" name="TextBox 7"/>
-          <p:cNvSpPr txBox="1"/>
-          <p:nvPr/>
-        </p:nvSpPr>
-        <p:spPr>
-          <a:xfrm>
-            <a:off x="985720" y="466344"/>
-            <a:ext cx="2633472" cy="411480"/>
-          </a:xfrm>
-          <a:prstGeom prst="rect">
-            <a:avLst/>
-          </a:prstGeom>
-          <a:noFill/>
-        </p:spPr>
-        <p:txBody>
-          <a:bodyPr wrap="square" anchor="t" lIns="0" rIns="0" tIns="0" bIns="0">
-            <a:spAutoFit/>
-          </a:bodyPr>
-          <a:lstStyle/>
-          <a:p>
-            <a:pPr>
-              <a:lnSpc>
-                <a:spcPct val="95000"/>
-              </a:lnSpc>
-              <a:spcAft>
-                <a:spcPts val="0"/>
-              </a:spcAft>
-            </a:pPr>
-            <a:r>
-              <a:rPr sz="1620" b="1">
-                <a:solidFill>
-                  <a:srgbClr val="FFFFFF"/>
-                </a:solidFill>
-                <a:latin typeface="Arial"/>
-              </a:rPr>
-              <a:t>Athanase</a:t>
-            </a:r>
-          </a:p>
-          <a:p>
-            <a:pPr>
-              <a:lnSpc>
-                <a:spcPct val="100000"/>
-              </a:lnSpc>
-              <a:spcAft>
-                <a:spcPts val="0"/>
-              </a:spcAft>
-            </a:pPr>
-            <a:r>
-              <a:rPr sz="585">
-                <a:solidFill>
-                  <a:srgbClr val="FFFFFF"/>
-                </a:solidFill>
-                <a:latin typeface="Arial"/>
-              </a:rPr>
-              <a:t>I N D U S T R I A L   P A R T N E R</a:t>
-            </a:r>
-          </a:p>
-        </p:txBody>
-      </p:sp>
-      <p:sp>
-        <p:nvSpPr>
-          <p:cNvPr id="9" name="TextBox 8"/>
+      <p:pic>
+        <p:nvPicPr>
+          <p:cNvPr id="3" name="Picture 2" descr="logo_white.png"/>
+          <p:cNvPicPr>
+            <a:picLocks noChangeAspect="1"/>
+          </p:cNvPicPr>
+          <p:nvPr/>
+        </p:nvPicPr>
+        <p:blipFill>
+          <a:blip r:embed="rId2"/>
+          <a:stretch>
+            <a:fillRect/>
+          </a:stretch>
+        </p:blipFill>
+        <p:spPr>
+          <a:xfrm>
+            <a:off x="548640" y="502920"/>
+            <a:ext cx="1989060" cy="427939"/>
+          </a:xfrm>
+          <a:prstGeom prst="rect">
+            <a:avLst/>
+          </a:prstGeom>
+        </p:spPr>
+      </p:pic>
+      <p:sp>
+        <p:nvSpPr>
+          <p:cNvPr id="4" name="TextBox 3"/>
           <p:cNvSpPr txBox="1"/>
           <p:nvPr/>
         </p:nvSpPr>
@@ -15426,7 +11850,7 @@
                 <a:solidFill>
                   <a:srgbClr val="8A99AB"/>
                 </a:solidFill>
-                <a:latin typeface="Arial"/>
+                <a:latin typeface="Calibri"/>
               </a:rPr>
               <a:t>PART II  ·  AMONG ENGAGED OWNERS</a:t>
             </a:r>
@@ -15435,7 +11859,7 @@
       </p:sp>
       <p:sp>
         <p:nvSpPr>
-          <p:cNvPr id="10" name="TextBox 9"/>
+          <p:cNvPr id="5" name="TextBox 4"/>
           <p:cNvSpPr txBox="1"/>
           <p:nvPr/>
         </p:nvSpPr>
@@ -15468,7 +11892,7 @@
                 <a:solidFill>
                   <a:srgbClr val="C9D3DD"/>
                 </a:solidFill>
-                <a:latin typeface="Georgia"/>
+                <a:latin typeface="Times New Roman"/>
               </a:rPr>
               <a:t>Why Athanase</a:t>
             </a:r>

--- a/Athanase_Engaged_Ownership_Allocator_Deck.pptx
+++ b/Athanase_Engaged_Ownership_Allocator_Deck.pptx
@@ -134,6 +134,198 @@
 </file>
 
 <file path=ppt/charts/chart1.xml><?xml version="1.0" encoding="utf-8"?>
+<c:chartSpace xmlns:c="http://schemas.openxmlformats.org/drawingml/2006/chart" xmlns:a="http://schemas.openxmlformats.org/drawingml/2006/main" xmlns:r="http://schemas.openxmlformats.org/officeDocument/2006/relationships">
+  <c:date1904 val="0"/>
+  <c:chart>
+    <c:title>
+      <c:tx>
+        <c:rich>
+          <a:bodyPr/>
+          <a:lstStyle/>
+          <a:p>
+            <a:r>
+              <a:rPr sz="1100">
+                <a:solidFill>
+                  <a:srgbClr val="5A636E"/>
+                </a:solidFill>
+              </a:rPr>
+              <a:t>“Probability decay”: strategy efficiency over a CEO cycle (%)</a:t>
+            </a:r>
+          </a:p>
+        </c:rich>
+      </c:tx>
+      <c:layout/>
+      <c:overlay val="0"/>
+    </c:title>
+    <c:autoTitleDeleted val="0"/>
+    <c:plotArea>
+      <c:lineChart>
+        <c:grouping val="standard"/>
+        <c:varyColors val="0"/>
+        <c:ser>
+          <c:idx val="0"/>
+          <c:order val="0"/>
+          <c:tx>
+            <c:strRef>
+              <c:f>Sheet1!$B$1</c:f>
+              <c:strCache>
+                <c:ptCount val="1"/>
+                <c:pt idx="0">
+                  <c:v>Strategy efficiency</c:v>
+                </c:pt>
+              </c:strCache>
+            </c:strRef>
+          </c:tx>
+          <c:spPr>
+            <a:ln w="31750">
+              <a:solidFill>
+                <a:srgbClr val="14253B"/>
+              </a:solidFill>
+            </a:ln>
+          </c:spPr>
+          <c:cat>
+            <c:strRef>
+              <c:f>Sheet1!$A$2:$A$9</c:f>
+              <c:strCache>
+                <c:ptCount val="8"/>
+                <c:pt idx="0">
+                  <c:v>Yr 1</c:v>
+                </c:pt>
+                <c:pt idx="1">
+                  <c:v>Yr 2</c:v>
+                </c:pt>
+                <c:pt idx="2">
+                  <c:v>Yr 3</c:v>
+                </c:pt>
+                <c:pt idx="3">
+                  <c:v>Yr 4</c:v>
+                </c:pt>
+                <c:pt idx="4">
+                  <c:v>Yr 5</c:v>
+                </c:pt>
+                <c:pt idx="5">
+                  <c:v>Yr 6</c:v>
+                </c:pt>
+                <c:pt idx="6">
+                  <c:v>Yr 7</c:v>
+                </c:pt>
+                <c:pt idx="7">
+                  <c:v>Yr 8</c:v>
+                </c:pt>
+              </c:strCache>
+            </c:strRef>
+          </c:cat>
+          <c:val>
+            <c:numRef>
+              <c:f>Sheet1!$B$2:$B$9</c:f>
+              <c:numCache>
+                <c:formatCode>General</c:formatCode>
+                <c:ptCount val="8"/>
+                <c:pt idx="0">
+                  <c:v>80</c:v>
+                </c:pt>
+                <c:pt idx="1">
+                  <c:v>76</c:v>
+                </c:pt>
+                <c:pt idx="2">
+                  <c:v>71</c:v>
+                </c:pt>
+                <c:pt idx="3">
+                  <c:v>65</c:v>
+                </c:pt>
+                <c:pt idx="4">
+                  <c:v>60</c:v>
+                </c:pt>
+                <c:pt idx="5">
+                  <c:v>55</c:v>
+                </c:pt>
+                <c:pt idx="6">
+                  <c:v>52</c:v>
+                </c:pt>
+                <c:pt idx="7">
+                  <c:v>50</c:v>
+                </c:pt>
+              </c:numCache>
+            </c:numRef>
+          </c:val>
+          <c:smooth/>
+        </c:ser>
+        <c:marker val="1"/>
+        <c:smooth val="0"/>
+        <c:axId val="2118791784"/>
+        <c:axId val="2140495176"/>
+      </c:lineChart>
+      <c:catAx>
+        <c:axId val="2118791784"/>
+        <c:scaling>
+          <c:orientation val="minMax"/>
+        </c:scaling>
+        <c:delete val="0"/>
+        <c:axPos val="b"/>
+        <c:majorTickMark val="out"/>
+        <c:minorTickMark val="none"/>
+        <c:tickLblPos val="nextTo"/>
+        <c:txPr>
+          <a:bodyPr/>
+          <a:lstStyle/>
+          <a:p>
+            <a:pPr>
+              <a:defRPr sz="900"/>
+            </a:pPr>
+          </a:p>
+        </c:txPr>
+        <c:crossAx val="2140495176"/>
+        <c:crosses val="autoZero"/>
+        <c:auto val="1"/>
+        <c:lblAlgn val="ctr"/>
+        <c:lblOffset val="100"/>
+        <c:noMultiLvlLbl val="0"/>
+      </c:catAx>
+      <c:valAx>
+        <c:axId val="2140495176"/>
+        <c:scaling>
+          <c:max val="100.0"/>
+          <c:min val="0.0"/>
+        </c:scaling>
+        <c:delete val="0"/>
+        <c:axPos val="l"/>
+        <c:majorTickMark val="out"/>
+        <c:minorTickMark val="none"/>
+        <c:tickLblPos val="nextTo"/>
+        <c:txPr>
+          <a:bodyPr/>
+          <a:lstStyle/>
+          <a:p>
+            <a:pPr>
+              <a:defRPr sz="900"/>
+            </a:pPr>
+          </a:p>
+        </c:txPr>
+        <c:crossAx val="2118791784"/>
+        <c:crosses val="autoZero"/>
+      </c:valAx>
+    </c:plotArea>
+    <c:plotVisOnly val="1"/>
+    <c:dispBlanksAs val="gap"/>
+    <c:showDLblsOverMax val="0"/>
+  </c:chart>
+  <c:txPr>
+    <a:bodyPr/>
+    <a:lstStyle/>
+    <a:p>
+      <a:pPr>
+        <a:defRPr sz="1800"/>
+      </a:pPr>
+      <a:endParaRPr lang="en-US"/>
+    </a:p>
+  </c:txPr>
+  <c:externalData r:id="rId1">
+    <c:autoUpdate val="0"/>
+  </c:externalData>
+</c:chartSpace>
+</file>
+
+<file path=ppt/charts/chart2.xml><?xml version="1.0" encoding="utf-8"?>
 <c:chartSpace xmlns:c="http://schemas.openxmlformats.org/drawingml/2006/chart" xmlns:a="http://schemas.openxmlformats.org/drawingml/2006/main" xmlns:r="http://schemas.openxmlformats.org/officeDocument/2006/relationships">
   <c:date1904 val="0"/>
   <c:chart>
@@ -491,7 +683,7 @@
 </c:chartSpace>
 </file>
 
-<file path=ppt/charts/chart2.xml><?xml version="1.0" encoding="utf-8"?>
+<file path=ppt/charts/chart3.xml><?xml version="1.0" encoding="utf-8"?>
 <c:chartSpace xmlns:c="http://schemas.openxmlformats.org/drawingml/2006/chart" xmlns:a="http://schemas.openxmlformats.org/drawingml/2006/main" xmlns:r="http://schemas.openxmlformats.org/officeDocument/2006/relationships">
   <c:date1904 val="0"/>
   <c:chart>
@@ -5145,14 +5337,58 @@
       </p:sp>
       <p:sp>
         <p:nvSpPr>
-          <p:cNvPr id="9" name="TextBox 8"/>
-          <p:cNvSpPr txBox="1"/>
-          <p:nvPr/>
-        </p:nvSpPr>
-        <p:spPr>
-          <a:xfrm>
-            <a:off x="685800" y="2148840"/>
-            <a:ext cx="10789920" cy="548640"/>
+          <p:cNvPr id="9" name="Rectangle 8"/>
+          <p:cNvSpPr/>
+          <p:nvPr/>
+        </p:nvSpPr>
+        <p:spPr>
+          <a:xfrm>
+            <a:off x="1463040" y="2532888"/>
+            <a:ext cx="9052560" cy="20320"/>
+          </a:xfrm>
+          <a:prstGeom prst="rect">
+            <a:avLst/>
+          </a:prstGeom>
+          <a:solidFill>
+            <a:srgbClr val="8A99AB"/>
+          </a:solidFill>
+          <a:ln>
+            <a:noFill/>
+          </a:ln>
+          <a:effectLst/>
+        </p:spPr>
+        <p:style>
+          <a:lnRef idx="1">
+            <a:schemeClr val="accent1"/>
+          </a:lnRef>
+          <a:fillRef idx="3">
+            <a:schemeClr val="accent1"/>
+          </a:fillRef>
+          <a:effectRef idx="2">
+            <a:schemeClr val="accent1"/>
+          </a:effectRef>
+          <a:fontRef idx="minor">
+            <a:schemeClr val="lt1"/>
+          </a:fontRef>
+        </p:style>
+        <p:txBody>
+          <a:bodyPr rtlCol="0" anchor="ctr"/>
+          <a:lstStyle/>
+          <a:p>
+            <a:pPr algn="ctr"/>
+          </a:p>
+        </p:txBody>
+      </p:sp>
+      <p:sp>
+        <p:nvSpPr>
+          <p:cNvPr id="10" name="TextBox 9"/>
+          <p:cNvSpPr txBox="1"/>
+          <p:nvPr/>
+        </p:nvSpPr>
+        <p:spPr>
+          <a:xfrm>
+            <a:off x="548640" y="2148840"/>
+            <a:ext cx="1828800" cy="320040"/>
           </a:xfrm>
           <a:prstGeom prst="rect">
             <a:avLst/>
@@ -5165,7 +5401,7 @@
           </a:bodyPr>
           <a:lstStyle/>
           <a:p>
-            <a:pPr algn="l">
+            <a:pPr algn="ctr">
               <a:lnSpc>
                 <a:spcPct val="110000"/>
               </a:lnSpc>
@@ -5174,26 +5410,504 @@
               </a:spcAft>
             </a:pPr>
             <a:r>
-              <a:rPr sz="1400" b="1" i="0">
+              <a:rPr sz="1500" b="1" i="0">
+                <a:solidFill>
+                  <a:srgbClr val="1E334E"/>
+                </a:solidFill>
+                <a:latin typeface="Times New Roman"/>
+              </a:rPr>
+              <a:t>1992</a:t>
+            </a:r>
+          </a:p>
+        </p:txBody>
+      </p:sp>
+      <p:sp>
+        <p:nvSpPr>
+          <p:cNvPr id="11" name="Oval 10"/>
+          <p:cNvSpPr/>
+          <p:nvPr/>
+        </p:nvSpPr>
+        <p:spPr>
+          <a:xfrm>
+            <a:off x="1380744" y="2468880"/>
+            <a:ext cx="164592" cy="164592"/>
+          </a:xfrm>
+          <a:prstGeom prst="ellipse">
+            <a:avLst/>
+          </a:prstGeom>
+          <a:solidFill>
+            <a:srgbClr val="14253B"/>
+          </a:solidFill>
+          <a:ln w="19050">
+            <a:solidFill>
+              <a:srgbClr val="FFFFFF"/>
+            </a:solidFill>
+          </a:ln>
+          <a:effectLst/>
+        </p:spPr>
+        <p:style>
+          <a:lnRef idx="1">
+            <a:schemeClr val="accent1"/>
+          </a:lnRef>
+          <a:fillRef idx="3">
+            <a:schemeClr val="accent1"/>
+          </a:fillRef>
+          <a:effectRef idx="2">
+            <a:schemeClr val="accent1"/>
+          </a:effectRef>
+          <a:fontRef idx="minor">
+            <a:schemeClr val="lt1"/>
+          </a:fontRef>
+        </p:style>
+        <p:txBody>
+          <a:bodyPr rtlCol="0" anchor="ctr"/>
+          <a:lstStyle/>
+          <a:p>
+            <a:pPr algn="ctr"/>
+          </a:p>
+        </p:txBody>
+      </p:sp>
+      <p:sp>
+        <p:nvSpPr>
+          <p:cNvPr id="12" name="TextBox 11"/>
+          <p:cNvSpPr txBox="1"/>
+          <p:nvPr/>
+        </p:nvSpPr>
+        <p:spPr>
+          <a:xfrm>
+            <a:off x="457200" y="2679192"/>
+            <a:ext cx="2011680" cy="274320"/>
+          </a:xfrm>
+          <a:prstGeom prst="rect">
+            <a:avLst/>
+          </a:prstGeom>
+          <a:noFill/>
+        </p:spPr>
+        <p:txBody>
+          <a:bodyPr wrap="square" anchor="t" lIns="0" rIns="0" tIns="0" bIns="0">
+            <a:spAutoFit/>
+          </a:bodyPr>
+          <a:lstStyle/>
+          <a:p>
+            <a:pPr algn="ctr">
+              <a:lnSpc>
+                <a:spcPct val="110000"/>
+              </a:lnSpc>
+              <a:spcAft>
+                <a:spcPts val="0"/>
+              </a:spcAft>
+            </a:pPr>
+            <a:r>
+              <a:rPr sz="1200" b="0" i="0">
                 <a:solidFill>
                   <a:srgbClr val="4A5D75"/>
                 </a:solidFill>
+                <a:latin typeface="Calibri"/>
+              </a:rPr>
+              <a:t>Öresund</a:t>
+            </a:r>
+          </a:p>
+        </p:txBody>
+      </p:sp>
+      <p:sp>
+        <p:nvSpPr>
+          <p:cNvPr id="13" name="TextBox 12"/>
+          <p:cNvSpPr txBox="1"/>
+          <p:nvPr/>
+        </p:nvSpPr>
+        <p:spPr>
+          <a:xfrm>
+            <a:off x="3566160" y="2148840"/>
+            <a:ext cx="1828800" cy="320040"/>
+          </a:xfrm>
+          <a:prstGeom prst="rect">
+            <a:avLst/>
+          </a:prstGeom>
+          <a:noFill/>
+        </p:spPr>
+        <p:txBody>
+          <a:bodyPr wrap="square" anchor="t" lIns="0" rIns="0" tIns="0" bIns="0">
+            <a:spAutoFit/>
+          </a:bodyPr>
+          <a:lstStyle/>
+          <a:p>
+            <a:pPr algn="ctr">
+              <a:lnSpc>
+                <a:spcPct val="110000"/>
+              </a:lnSpc>
+              <a:spcAft>
+                <a:spcPts val="0"/>
+              </a:spcAft>
+            </a:pPr>
+            <a:r>
+              <a:rPr sz="1500" b="1" i="0">
+                <a:solidFill>
+                  <a:srgbClr val="1E334E"/>
+                </a:solidFill>
                 <a:latin typeface="Times New Roman"/>
               </a:rPr>
-              <a:t>Heritage:  Öresund (1992)  →  Custos (1996)  →  Creades  →  Athanase Industrial Partner (2015)</a:t>
-            </a:r>
-          </a:p>
-        </p:txBody>
-      </p:sp>
-      <p:sp>
-        <p:nvSpPr>
-          <p:cNvPr id="10" name="TextBox 9"/>
-          <p:cNvSpPr txBox="1"/>
-          <p:nvPr/>
-        </p:nvSpPr>
-        <p:spPr>
-          <a:xfrm>
-            <a:off x="685800" y="2788920"/>
+              <a:t>1996</a:t>
+            </a:r>
+          </a:p>
+        </p:txBody>
+      </p:sp>
+      <p:sp>
+        <p:nvSpPr>
+          <p:cNvPr id="14" name="Oval 13"/>
+          <p:cNvSpPr/>
+          <p:nvPr/>
+        </p:nvSpPr>
+        <p:spPr>
+          <a:xfrm>
+            <a:off x="4398264" y="2468880"/>
+            <a:ext cx="164592" cy="164592"/>
+          </a:xfrm>
+          <a:prstGeom prst="ellipse">
+            <a:avLst/>
+          </a:prstGeom>
+          <a:solidFill>
+            <a:srgbClr val="14253B"/>
+          </a:solidFill>
+          <a:ln w="19050">
+            <a:solidFill>
+              <a:srgbClr val="FFFFFF"/>
+            </a:solidFill>
+          </a:ln>
+          <a:effectLst/>
+        </p:spPr>
+        <p:style>
+          <a:lnRef idx="1">
+            <a:schemeClr val="accent1"/>
+          </a:lnRef>
+          <a:fillRef idx="3">
+            <a:schemeClr val="accent1"/>
+          </a:fillRef>
+          <a:effectRef idx="2">
+            <a:schemeClr val="accent1"/>
+          </a:effectRef>
+          <a:fontRef idx="minor">
+            <a:schemeClr val="lt1"/>
+          </a:fontRef>
+        </p:style>
+        <p:txBody>
+          <a:bodyPr rtlCol="0" anchor="ctr"/>
+          <a:lstStyle/>
+          <a:p>
+            <a:pPr algn="ctr"/>
+          </a:p>
+        </p:txBody>
+      </p:sp>
+      <p:sp>
+        <p:nvSpPr>
+          <p:cNvPr id="15" name="TextBox 14"/>
+          <p:cNvSpPr txBox="1"/>
+          <p:nvPr/>
+        </p:nvSpPr>
+        <p:spPr>
+          <a:xfrm>
+            <a:off x="3474720" y="2679192"/>
+            <a:ext cx="2011680" cy="274320"/>
+          </a:xfrm>
+          <a:prstGeom prst="rect">
+            <a:avLst/>
+          </a:prstGeom>
+          <a:noFill/>
+        </p:spPr>
+        <p:txBody>
+          <a:bodyPr wrap="square" anchor="t" lIns="0" rIns="0" tIns="0" bIns="0">
+            <a:spAutoFit/>
+          </a:bodyPr>
+          <a:lstStyle/>
+          <a:p>
+            <a:pPr algn="ctr">
+              <a:lnSpc>
+                <a:spcPct val="110000"/>
+              </a:lnSpc>
+              <a:spcAft>
+                <a:spcPts val="0"/>
+              </a:spcAft>
+            </a:pPr>
+            <a:r>
+              <a:rPr sz="1200" b="0" i="0">
+                <a:solidFill>
+                  <a:srgbClr val="4A5D75"/>
+                </a:solidFill>
+                <a:latin typeface="Calibri"/>
+              </a:rPr>
+              <a:t>Custos</a:t>
+            </a:r>
+          </a:p>
+        </p:txBody>
+      </p:sp>
+      <p:sp>
+        <p:nvSpPr>
+          <p:cNvPr id="16" name="TextBox 15"/>
+          <p:cNvSpPr txBox="1"/>
+          <p:nvPr/>
+        </p:nvSpPr>
+        <p:spPr>
+          <a:xfrm>
+            <a:off x="6583680" y="2148840"/>
+            <a:ext cx="1828800" cy="320040"/>
+          </a:xfrm>
+          <a:prstGeom prst="rect">
+            <a:avLst/>
+          </a:prstGeom>
+          <a:noFill/>
+        </p:spPr>
+        <p:txBody>
+          <a:bodyPr wrap="square" anchor="t" lIns="0" rIns="0" tIns="0" bIns="0">
+            <a:spAutoFit/>
+          </a:bodyPr>
+          <a:lstStyle/>
+          <a:p>
+            <a:pPr algn="ctr">
+              <a:lnSpc>
+                <a:spcPct val="110000"/>
+              </a:lnSpc>
+              <a:spcAft>
+                <a:spcPts val="0"/>
+              </a:spcAft>
+            </a:pPr>
+            <a:r>
+              <a:rPr sz="1500" b="1" i="0">
+                <a:solidFill>
+                  <a:srgbClr val="1E334E"/>
+                </a:solidFill>
+                <a:latin typeface="Times New Roman"/>
+              </a:rPr>
+              <a:t>2006</a:t>
+            </a:r>
+          </a:p>
+        </p:txBody>
+      </p:sp>
+      <p:sp>
+        <p:nvSpPr>
+          <p:cNvPr id="17" name="Oval 16"/>
+          <p:cNvSpPr/>
+          <p:nvPr/>
+        </p:nvSpPr>
+        <p:spPr>
+          <a:xfrm>
+            <a:off x="7415784" y="2468880"/>
+            <a:ext cx="164592" cy="164592"/>
+          </a:xfrm>
+          <a:prstGeom prst="ellipse">
+            <a:avLst/>
+          </a:prstGeom>
+          <a:solidFill>
+            <a:srgbClr val="14253B"/>
+          </a:solidFill>
+          <a:ln w="19050">
+            <a:solidFill>
+              <a:srgbClr val="FFFFFF"/>
+            </a:solidFill>
+          </a:ln>
+          <a:effectLst/>
+        </p:spPr>
+        <p:style>
+          <a:lnRef idx="1">
+            <a:schemeClr val="accent1"/>
+          </a:lnRef>
+          <a:fillRef idx="3">
+            <a:schemeClr val="accent1"/>
+          </a:fillRef>
+          <a:effectRef idx="2">
+            <a:schemeClr val="accent1"/>
+          </a:effectRef>
+          <a:fontRef idx="minor">
+            <a:schemeClr val="lt1"/>
+          </a:fontRef>
+        </p:style>
+        <p:txBody>
+          <a:bodyPr rtlCol="0" anchor="ctr"/>
+          <a:lstStyle/>
+          <a:p>
+            <a:pPr algn="ctr"/>
+          </a:p>
+        </p:txBody>
+      </p:sp>
+      <p:sp>
+        <p:nvSpPr>
+          <p:cNvPr id="18" name="TextBox 17"/>
+          <p:cNvSpPr txBox="1"/>
+          <p:nvPr/>
+        </p:nvSpPr>
+        <p:spPr>
+          <a:xfrm>
+            <a:off x="6492240" y="2679192"/>
+            <a:ext cx="2011680" cy="274320"/>
+          </a:xfrm>
+          <a:prstGeom prst="rect">
+            <a:avLst/>
+          </a:prstGeom>
+          <a:noFill/>
+        </p:spPr>
+        <p:txBody>
+          <a:bodyPr wrap="square" anchor="t" lIns="0" rIns="0" tIns="0" bIns="0">
+            <a:spAutoFit/>
+          </a:bodyPr>
+          <a:lstStyle/>
+          <a:p>
+            <a:pPr algn="ctr">
+              <a:lnSpc>
+                <a:spcPct val="110000"/>
+              </a:lnSpc>
+              <a:spcAft>
+                <a:spcPts val="0"/>
+              </a:spcAft>
+            </a:pPr>
+            <a:r>
+              <a:rPr sz="1200" b="0" i="0">
+                <a:solidFill>
+                  <a:srgbClr val="4A5D75"/>
+                </a:solidFill>
+                <a:latin typeface="Calibri"/>
+              </a:rPr>
+              <a:t>Creades</a:t>
+            </a:r>
+          </a:p>
+        </p:txBody>
+      </p:sp>
+      <p:sp>
+        <p:nvSpPr>
+          <p:cNvPr id="19" name="TextBox 18"/>
+          <p:cNvSpPr txBox="1"/>
+          <p:nvPr/>
+        </p:nvSpPr>
+        <p:spPr>
+          <a:xfrm>
+            <a:off x="9601200" y="2148840"/>
+            <a:ext cx="1828800" cy="320040"/>
+          </a:xfrm>
+          <a:prstGeom prst="rect">
+            <a:avLst/>
+          </a:prstGeom>
+          <a:noFill/>
+        </p:spPr>
+        <p:txBody>
+          <a:bodyPr wrap="square" anchor="t" lIns="0" rIns="0" tIns="0" bIns="0">
+            <a:spAutoFit/>
+          </a:bodyPr>
+          <a:lstStyle/>
+          <a:p>
+            <a:pPr algn="ctr">
+              <a:lnSpc>
+                <a:spcPct val="110000"/>
+              </a:lnSpc>
+              <a:spcAft>
+                <a:spcPts val="0"/>
+              </a:spcAft>
+            </a:pPr>
+            <a:r>
+              <a:rPr sz="1500" b="1" i="0">
+                <a:solidFill>
+                  <a:srgbClr val="1E334E"/>
+                </a:solidFill>
+                <a:latin typeface="Times New Roman"/>
+              </a:rPr>
+              <a:t>2015</a:t>
+            </a:r>
+          </a:p>
+        </p:txBody>
+      </p:sp>
+      <p:sp>
+        <p:nvSpPr>
+          <p:cNvPr id="20" name="Oval 19"/>
+          <p:cNvSpPr/>
+          <p:nvPr/>
+        </p:nvSpPr>
+        <p:spPr>
+          <a:xfrm>
+            <a:off x="10433304" y="2468880"/>
+            <a:ext cx="164592" cy="164592"/>
+          </a:xfrm>
+          <a:prstGeom prst="ellipse">
+            <a:avLst/>
+          </a:prstGeom>
+          <a:solidFill>
+            <a:srgbClr val="14253B"/>
+          </a:solidFill>
+          <a:ln w="19050">
+            <a:solidFill>
+              <a:srgbClr val="FFFFFF"/>
+            </a:solidFill>
+          </a:ln>
+          <a:effectLst/>
+        </p:spPr>
+        <p:style>
+          <a:lnRef idx="1">
+            <a:schemeClr val="accent1"/>
+          </a:lnRef>
+          <a:fillRef idx="3">
+            <a:schemeClr val="accent1"/>
+          </a:fillRef>
+          <a:effectRef idx="2">
+            <a:schemeClr val="accent1"/>
+          </a:effectRef>
+          <a:fontRef idx="minor">
+            <a:schemeClr val="lt1"/>
+          </a:fontRef>
+        </p:style>
+        <p:txBody>
+          <a:bodyPr rtlCol="0" anchor="ctr"/>
+          <a:lstStyle/>
+          <a:p>
+            <a:pPr algn="ctr"/>
+          </a:p>
+        </p:txBody>
+      </p:sp>
+      <p:sp>
+        <p:nvSpPr>
+          <p:cNvPr id="21" name="TextBox 20"/>
+          <p:cNvSpPr txBox="1"/>
+          <p:nvPr/>
+        </p:nvSpPr>
+        <p:spPr>
+          <a:xfrm>
+            <a:off x="9509760" y="2679192"/>
+            <a:ext cx="2011680" cy="274320"/>
+          </a:xfrm>
+          <a:prstGeom prst="rect">
+            <a:avLst/>
+          </a:prstGeom>
+          <a:noFill/>
+        </p:spPr>
+        <p:txBody>
+          <a:bodyPr wrap="square" anchor="t" lIns="0" rIns="0" tIns="0" bIns="0">
+            <a:spAutoFit/>
+          </a:bodyPr>
+          <a:lstStyle/>
+          <a:p>
+            <a:pPr algn="ctr">
+              <a:lnSpc>
+                <a:spcPct val="110000"/>
+              </a:lnSpc>
+              <a:spcAft>
+                <a:spcPts val="0"/>
+              </a:spcAft>
+            </a:pPr>
+            <a:r>
+              <a:rPr sz="1200" b="0" i="0">
+                <a:solidFill>
+                  <a:srgbClr val="4A5D75"/>
+                </a:solidFill>
+                <a:latin typeface="Calibri"/>
+              </a:rPr>
+              <a:t>Athanase</a:t>
+            </a:r>
+          </a:p>
+        </p:txBody>
+      </p:sp>
+      <p:sp>
+        <p:nvSpPr>
+          <p:cNvPr id="22" name="TextBox 21"/>
+          <p:cNvSpPr txBox="1"/>
+          <p:nvPr/>
+        </p:nvSpPr>
+        <p:spPr>
+          <a:xfrm>
+            <a:off x="685800" y="3291840"/>
             <a:ext cx="10881360" cy="4297680"/>
           </a:xfrm>
           <a:prstGeom prst="rect">
@@ -5212,11 +5926,11 @@
                 <a:spcPct val="112000"/>
               </a:lnSpc>
               <a:spcAft>
-                <a:spcPts val="1100"/>
-              </a:spcAft>
-            </a:pPr>
-            <a:r>
-              <a:rPr sz="1500" b="1">
+                <a:spcPts val="1000"/>
+              </a:spcAft>
+            </a:pPr>
+            <a:r>
+              <a:rPr sz="1450" b="1">
                 <a:solidFill>
                   <a:srgbClr val="4A5D75"/>
                 </a:solidFill>
@@ -5225,7 +5939,7 @@
               <a:t>›  </a:t>
             </a:r>
             <a:r>
-              <a:rPr sz="1500" b="1">
+              <a:rPr sz="1450" b="1">
                 <a:solidFill>
                   <a:srgbClr val="1E334E"/>
                 </a:solidFill>
@@ -5234,7 +5948,7 @@
               <a:t>40+ companies managed,</a:t>
             </a:r>
             <a:r>
-              <a:rPr sz="1500">
+              <a:rPr sz="1450">
                 <a:solidFill>
                   <a:srgbClr val="333840"/>
                 </a:solidFill>
@@ -5249,11 +5963,11 @@
                 <a:spcPct val="112000"/>
               </a:lnSpc>
               <a:spcAft>
-                <a:spcPts val="1100"/>
-              </a:spcAft>
-            </a:pPr>
-            <a:r>
-              <a:rPr sz="1500" b="1">
+                <a:spcPts val="1000"/>
+              </a:spcAft>
+            </a:pPr>
+            <a:r>
+              <a:rPr sz="1450" b="1">
                 <a:solidFill>
                   <a:srgbClr val="4A5D75"/>
                 </a:solidFill>
@@ -5262,7 +5976,7 @@
               <a:t>›  </a:t>
             </a:r>
             <a:r>
-              <a:rPr sz="1500" b="1">
+              <a:rPr sz="1450" b="1">
                 <a:solidFill>
                   <a:srgbClr val="1E334E"/>
                 </a:solidFill>
@@ -5271,7 +5985,7 @@
               <a:t>30+ public board seats</a:t>
             </a:r>
             <a:r>
-              <a:rPr sz="1500">
+              <a:rPr sz="1450">
                 <a:solidFill>
                   <a:srgbClr val="333840"/>
                 </a:solidFill>
@@ -5286,11 +6000,11 @@
                 <a:spcPct val="112000"/>
               </a:lnSpc>
               <a:spcAft>
-                <a:spcPts val="1100"/>
-              </a:spcAft>
-            </a:pPr>
-            <a:r>
-              <a:rPr sz="1500" b="1">
+                <a:spcPts val="1000"/>
+              </a:spcAft>
+            </a:pPr>
+            <a:r>
+              <a:rPr sz="1450" b="1">
                 <a:solidFill>
                   <a:srgbClr val="4A5D75"/>
                 </a:solidFill>
@@ -5299,7 +6013,7 @@
               <a:t>›  </a:t>
             </a:r>
             <a:r>
-              <a:rPr sz="1500" b="1">
+              <a:rPr sz="1450" b="1">
                 <a:solidFill>
                   <a:srgbClr val="1E334E"/>
                 </a:solidFill>
@@ -5308,7 +6022,7 @@
               <a:t>A dual lens:</a:t>
             </a:r>
             <a:r>
-              <a:rPr sz="1500">
+              <a:rPr sz="1450">
                 <a:solidFill>
                   <a:srgbClr val="333840"/>
                 </a:solidFill>
@@ -5323,11 +6037,11 @@
                 <a:spcPct val="112000"/>
               </a:lnSpc>
               <a:spcAft>
-                <a:spcPts val="1100"/>
-              </a:spcAft>
-            </a:pPr>
-            <a:r>
-              <a:rPr sz="1500" b="1">
+                <a:spcPts val="1000"/>
+              </a:spcAft>
+            </a:pPr>
+            <a:r>
+              <a:rPr sz="1450" b="1">
                 <a:solidFill>
                   <a:srgbClr val="4A5D75"/>
                 </a:solidFill>
@@ -5336,7 +6050,7 @@
               <a:t>›  </a:t>
             </a:r>
             <a:r>
-              <a:rPr sz="1500" b="1">
+              <a:rPr sz="1450" b="1">
                 <a:solidFill>
                   <a:srgbClr val="1E334E"/>
                 </a:solidFill>
@@ -5345,7 +6059,7 @@
               <a:t>Skin in the game.</a:t>
             </a:r>
             <a:r>
-              <a:rPr sz="1500">
+              <a:rPr sz="1450">
                 <a:solidFill>
                   <a:srgbClr val="333840"/>
                 </a:solidFill>
@@ -5360,11 +6074,11 @@
                 <a:spcPct val="112000"/>
               </a:lnSpc>
               <a:spcAft>
-                <a:spcPts val="1100"/>
-              </a:spcAft>
-            </a:pPr>
-            <a:r>
-              <a:rPr sz="1500" b="1">
+                <a:spcPts val="1000"/>
+              </a:spcAft>
+            </a:pPr>
+            <a:r>
+              <a:rPr sz="1450" b="1">
                 <a:solidFill>
                   <a:srgbClr val="4A5D75"/>
                 </a:solidFill>
@@ -5373,7 +6087,7 @@
               <a:t>›  </a:t>
             </a:r>
             <a:r>
-              <a:rPr sz="1500" b="1">
+              <a:rPr sz="1450" b="1">
                 <a:solidFill>
                   <a:srgbClr val="1E334E"/>
                 </a:solidFill>
@@ -5382,7 +6096,7 @@
               <a:t>Institutional memory.</a:t>
             </a:r>
             <a:r>
-              <a:rPr sz="1500">
+              <a:rPr sz="1450">
                 <a:solidFill>
                   <a:srgbClr val="333840"/>
                 </a:solidFill>
@@ -5699,8 +6413,8 @@
         </p:nvSpPr>
         <p:spPr>
           <a:xfrm>
-            <a:off x="685800" y="2148840"/>
-            <a:ext cx="10881360" cy="4297680"/>
+            <a:off x="640080" y="2148840"/>
+            <a:ext cx="5760720" cy="4297680"/>
           </a:xfrm>
           <a:prstGeom prst="rect">
             <a:avLst/>
@@ -5718,11 +6432,11 @@
                 <a:spcPct val="112000"/>
               </a:lnSpc>
               <a:spcAft>
-                <a:spcPts val="1300"/>
-              </a:spcAft>
-            </a:pPr>
-            <a:r>
-              <a:rPr sz="1550" b="1">
+                <a:spcPts val="1400"/>
+              </a:spcAft>
+            </a:pPr>
+            <a:r>
+              <a:rPr sz="1350" b="1">
                 <a:solidFill>
                   <a:srgbClr val="4A5D75"/>
                 </a:solidFill>
@@ -5731,7 +6445,7 @@
               <a:t>›  </a:t>
             </a:r>
             <a:r>
-              <a:rPr sz="1550" b="1">
+              <a:rPr sz="1350" b="1">
                 <a:solidFill>
                   <a:srgbClr val="1E334E"/>
                 </a:solidFill>
@@ -5740,7 +6454,7 @@
               <a:t>Duration mismatch.</a:t>
             </a:r>
             <a:r>
-              <a:rPr sz="1550">
+              <a:rPr sz="1350">
                 <a:solidFill>
                   <a:srgbClr val="333840"/>
                 </a:solidFill>
@@ -5755,11 +6469,11 @@
                 <a:spcPct val="112000"/>
               </a:lnSpc>
               <a:spcAft>
-                <a:spcPts val="1300"/>
-              </a:spcAft>
-            </a:pPr>
-            <a:r>
-              <a:rPr sz="1550" b="1">
+                <a:spcPts val="1400"/>
+              </a:spcAft>
+            </a:pPr>
+            <a:r>
+              <a:rPr sz="1350" b="1">
                 <a:solidFill>
                   <a:srgbClr val="4A5D75"/>
                 </a:solidFill>
@@ -5768,7 +6482,7 @@
               <a:t>›  </a:t>
             </a:r>
             <a:r>
-              <a:rPr sz="1550" b="1">
+              <a:rPr sz="1350" b="1">
                 <a:solidFill>
                   <a:srgbClr val="1E334E"/>
                 </a:solidFill>
@@ -5777,7 +6491,7 @@
               <a:t>The prestige trap.</a:t>
             </a:r>
             <a:r>
-              <a:rPr sz="1550">
+              <a:rPr sz="1350">
                 <a:solidFill>
                   <a:srgbClr val="333840"/>
                 </a:solidFill>
@@ -5792,11 +6506,11 @@
                 <a:spcPct val="112000"/>
               </a:lnSpc>
               <a:spcAft>
-                <a:spcPts val="1300"/>
-              </a:spcAft>
-            </a:pPr>
-            <a:r>
-              <a:rPr sz="1550" b="1">
+                <a:spcPts val="1400"/>
+              </a:spcAft>
+            </a:pPr>
+            <a:r>
+              <a:rPr sz="1350" b="1">
                 <a:solidFill>
                   <a:srgbClr val="4A5D75"/>
                 </a:solidFill>
@@ -5805,7 +6519,7 @@
               <a:t>›  </a:t>
             </a:r>
             <a:r>
-              <a:rPr sz="1550" b="1">
+              <a:rPr sz="1350" b="1">
                 <a:solidFill>
                   <a:srgbClr val="1E334E"/>
                 </a:solidFill>
@@ -5814,7 +6528,7 @@
               <a:t>Shareholder exhaustion.</a:t>
             </a:r>
             <a:r>
-              <a:rPr sz="1550">
+              <a:rPr sz="1350">
                 <a:solidFill>
                   <a:srgbClr val="333840"/>
                 </a:solidFill>
@@ -5829,11 +6543,11 @@
                 <a:spcPct val="112000"/>
               </a:lnSpc>
               <a:spcAft>
-                <a:spcPts val="1300"/>
-              </a:spcAft>
-            </a:pPr>
-            <a:r>
-              <a:rPr sz="1550" b="1">
+                <a:spcPts val="1400"/>
+              </a:spcAft>
+            </a:pPr>
+            <a:r>
+              <a:rPr sz="1350" b="1">
                 <a:solidFill>
                   <a:srgbClr val="4A5D75"/>
                 </a:solidFill>
@@ -5842,7 +6556,7 @@
               <a:t>›  </a:t>
             </a:r>
             <a:r>
-              <a:rPr sz="1550" b="1">
+              <a:rPr sz="1350" b="1">
                 <a:solidFill>
                   <a:srgbClr val="1E334E"/>
                 </a:solidFill>
@@ -5851,13 +6565,73 @@
               <a:t>Low competition.</a:t>
             </a:r>
             <a:r>
-              <a:rPr sz="1550">
+              <a:rPr sz="1350">
                 <a:solidFill>
                   <a:srgbClr val="333840"/>
                 </a:solidFill>
                 <a:latin typeface="Calibri"/>
               </a:rPr>
               <a:t>  Passive buys the most expensive names; active managers wait for proof; PE needs 10x the capital — leaving these bargains open.</a:t>
+            </a:r>
+          </a:p>
+        </p:txBody>
+      </p:sp>
+      <p:graphicFrame>
+        <p:nvGraphicFramePr>
+          <p:cNvPr id="10" name="Chart 9"/>
+          <p:cNvGraphicFramePr>
+            <a:graphicFrameLocks noGrp="1"/>
+          </p:cNvGraphicFramePr>
+          <p:nvPr/>
+        </p:nvGraphicFramePr>
+        <p:xfrm>
+          <a:off x="6537960" y="2331720"/>
+          <a:ext cx="5212080" cy="3291840"/>
+        </p:xfrm>
+        <a:graphic>
+          <a:graphicData uri="http://schemas.openxmlformats.org/drawingml/2006/chart">
+            <c:chart xmlns:c="http://schemas.openxmlformats.org/drawingml/2006/chart" r:id="rId3"/>
+          </a:graphicData>
+        </a:graphic>
+      </p:graphicFrame>
+      <p:sp>
+        <p:nvSpPr>
+          <p:cNvPr id="11" name="TextBox 10"/>
+          <p:cNvSpPr txBox="1"/>
+          <p:nvPr/>
+        </p:nvSpPr>
+        <p:spPr>
+          <a:xfrm>
+            <a:off x="6537960" y="5669280"/>
+            <a:ext cx="5212080" cy="365760"/>
+          </a:xfrm>
+          <a:prstGeom prst="rect">
+            <a:avLst/>
+          </a:prstGeom>
+          <a:noFill/>
+        </p:spPr>
+        <p:txBody>
+          <a:bodyPr wrap="square" anchor="t" lIns="0" rIns="0" tIns="0" bIns="0">
+            <a:spAutoFit/>
+          </a:bodyPr>
+          <a:lstStyle/>
+          <a:p>
+            <a:pPr algn="l">
+              <a:lnSpc>
+                <a:spcPct val="110000"/>
+              </a:lnSpc>
+              <a:spcAft>
+                <a:spcPts val="0"/>
+              </a:spcAft>
+            </a:pPr>
+            <a:r>
+              <a:rPr sz="1000" b="0" i="1">
+                <a:solidFill>
+                  <a:srgbClr val="9AA4B0"/>
+                </a:solidFill>
+                <a:latin typeface="Calibri"/>
+              </a:rPr>
+              <a:t>Even an excellent team’s edge erodes as the external environment shifts.</a:t>
             </a:r>
           </a:p>
         </p:txBody>
@@ -6169,7 +6943,7 @@
         <p:spPr>
           <a:xfrm>
             <a:off x="640080" y="2148840"/>
-            <a:ext cx="10881360" cy="4297680"/>
+            <a:ext cx="5852160" cy="4297680"/>
           </a:xfrm>
           <a:prstGeom prst="rect">
             <a:avLst/>
@@ -6187,7 +6961,7 @@
                 <a:spcPct val="112000"/>
               </a:lnSpc>
               <a:spcAft>
-                <a:spcPts val="900"/>
+                <a:spcPts val="1300"/>
               </a:spcAft>
             </a:pPr>
             <a:r>
@@ -6215,7 +6989,7 @@
                 </a:solidFill>
                 <a:latin typeface="Calibri"/>
               </a:rPr>
-              <a:t>  Buy “cheap and troubled” and you select for lemons — businesses in structural decline that are worse than they look. The market discounted them for a reason.</a:t>
+              <a:t>  Buy “cheap and troubled” and you select for lemons — worse than they look. The market discounted them for a reason.</a:t>
             </a:r>
           </a:p>
           <a:p>
@@ -6224,7 +6998,7 @@
                 <a:spcPct val="112000"/>
               </a:lnSpc>
               <a:spcAft>
-                <a:spcPts val="900"/>
+                <a:spcPts val="1300"/>
               </a:spcAft>
             </a:pPr>
             <a:r>
@@ -6252,7 +7026,7 @@
                 </a:solidFill>
                 <a:latin typeface="Calibri"/>
               </a:rPr>
-              <a:t>  We invest only where the core is a market leader earning high returns on incremental capital — and only when it is attractive even if we change nothing. We do not underwrite turnarounds of structurally weak businesses.</a:t>
+              <a:t>  We invest only where the core is a market leader earning high returns on capital — attractive even if we change nothing. No structurally-weak turnarounds.</a:t>
             </a:r>
           </a:p>
           <a:p>
@@ -6261,7 +7035,7 @@
                 <a:spcPct val="112000"/>
               </a:lnSpc>
               <a:spcAft>
-                <a:spcPts val="900"/>
+                <a:spcPts val="1300"/>
               </a:spcAft>
             </a:pPr>
             <a:r>
@@ -6289,7 +7063,7 @@
                 </a:solidFill>
                 <a:latin typeface="Calibri"/>
               </a:rPr>
-              <a:t>  Our targets are profitable leaders whose management pivoted into weak adjacencies — chasing growth as the core matured, or something new and “sexy.” The drag is a capital-allocation overlay on a good asset, not a bad asset.</a:t>
+              <a:t>  Profitable leaders whose management pivoted into weak adjacencies — chasing growth as the core matured. A capital-allocation overlay on a good asset, not a bad asset.</a:t>
             </a:r>
           </a:p>
           <a:p>
@@ -6298,7 +7072,7 @@
                 <a:spcPct val="112000"/>
               </a:lnSpc>
               <a:spcAft>
-                <a:spcPts val="900"/>
+                <a:spcPts val="1300"/>
               </a:spcAft>
             </a:pPr>
             <a:r>
@@ -6326,21 +7100,168 @@
                 </a:solidFill>
                 <a:latin typeface="Calibri"/>
               </a:rPr>
-              <a:t>  Blended results make the company look mediocre, so it is priced as mediocre. Forensic separation reveals a strong core subsidising a loss-making periphery — the appearance understates reality.</a:t>
-            </a:r>
-          </a:p>
-        </p:txBody>
-      </p:sp>
-      <p:sp>
-        <p:nvSpPr>
-          <p:cNvPr id="10" name="Rectangle 9"/>
+              <a:t>  Blended results make it look mediocre, so it is priced mediocre. The appearance understates reality.</a:t>
+            </a:r>
+          </a:p>
+        </p:txBody>
+      </p:sp>
+      <p:sp>
+        <p:nvSpPr>
+          <p:cNvPr id="10" name="TextBox 9"/>
+          <p:cNvSpPr txBox="1"/>
+          <p:nvPr/>
+        </p:nvSpPr>
+        <p:spPr>
+          <a:xfrm>
+            <a:off x="6675120" y="2103120"/>
+            <a:ext cx="4937760" cy="274320"/>
+          </a:xfrm>
+          <a:prstGeom prst="rect">
+            <a:avLst/>
+          </a:prstGeom>
+          <a:noFill/>
+        </p:spPr>
+        <p:txBody>
+          <a:bodyPr wrap="square" anchor="t" lIns="0" rIns="0" tIns="0" bIns="0">
+            <a:spAutoFit/>
+          </a:bodyPr>
+          <a:lstStyle/>
+          <a:p>
+            <a:pPr algn="ctr">
+              <a:lnSpc>
+                <a:spcPct val="110000"/>
+              </a:lnSpc>
+              <a:spcAft>
+                <a:spcPts val="0"/>
+              </a:spcAft>
+            </a:pPr>
+            <a:r>
+              <a:rPr sz="1100" b="1" i="0">
+                <a:solidFill>
+                  <a:srgbClr val="4A5D75"/>
+                </a:solidFill>
+                <a:latin typeface="Calibri"/>
+              </a:rPr>
+              <a:t>SUM-OF-THE-PARTS (ILLUSTRATIVE)</a:t>
+            </a:r>
+          </a:p>
+        </p:txBody>
+      </p:sp>
+      <p:sp>
+        <p:nvSpPr>
+          <p:cNvPr id="11" name="Rectangle 10"/>
           <p:cNvSpPr/>
           <p:nvPr/>
         </p:nvSpPr>
         <p:spPr>
           <a:xfrm>
-            <a:off x="640080" y="4892040"/>
-            <a:ext cx="3154680" cy="868680"/>
+            <a:off x="7315200" y="3639312"/>
+            <a:ext cx="1463040" cy="1389888"/>
+          </a:xfrm>
+          <a:prstGeom prst="rect">
+            <a:avLst/>
+          </a:prstGeom>
+          <a:solidFill>
+            <a:srgbClr val="4A5D75"/>
+          </a:solidFill>
+          <a:ln>
+            <a:noFill/>
+          </a:ln>
+          <a:effectLst/>
+        </p:spPr>
+        <p:style>
+          <a:lnRef idx="1">
+            <a:schemeClr val="accent1"/>
+          </a:lnRef>
+          <a:fillRef idx="3">
+            <a:schemeClr val="accent1"/>
+          </a:fillRef>
+          <a:effectRef idx="2">
+            <a:schemeClr val="accent1"/>
+          </a:effectRef>
+          <a:fontRef idx="minor">
+            <a:schemeClr val="lt1"/>
+          </a:fontRef>
+        </p:style>
+        <p:txBody>
+          <a:bodyPr rtlCol="0" anchor="ctr"/>
+          <a:lstStyle/>
+          <a:p>
+            <a:pPr algn="ctr"/>
+          </a:p>
+        </p:txBody>
+      </p:sp>
+      <p:sp>
+        <p:nvSpPr>
+          <p:cNvPr id="12" name="TextBox 11"/>
+          <p:cNvSpPr txBox="1"/>
+          <p:nvPr/>
+        </p:nvSpPr>
+        <p:spPr>
+          <a:xfrm>
+            <a:off x="6949440" y="5120640"/>
+            <a:ext cx="2194560" cy="548640"/>
+          </a:xfrm>
+          <a:prstGeom prst="rect">
+            <a:avLst/>
+          </a:prstGeom>
+          <a:noFill/>
+        </p:spPr>
+        <p:txBody>
+          <a:bodyPr wrap="square" anchor="t" lIns="0" rIns="0" tIns="0" bIns="0">
+            <a:spAutoFit/>
+          </a:bodyPr>
+          <a:lstStyle/>
+          <a:p>
+            <a:pPr algn="ctr">
+              <a:lnSpc>
+                <a:spcPct val="100000"/>
+              </a:lnSpc>
+              <a:spcAft>
+                <a:spcPts val="0"/>
+              </a:spcAft>
+            </a:pPr>
+            <a:r>
+              <a:rPr sz="1150" b="1" i="0">
+                <a:solidFill>
+                  <a:srgbClr val="333840"/>
+                </a:solidFill>
+                <a:latin typeface="Calibri"/>
+              </a:rPr>
+              <a:t>Market price</a:t>
+            </a:r>
+          </a:p>
+          <a:p>
+            <a:pPr algn="ctr">
+              <a:lnSpc>
+                <a:spcPct val="100000"/>
+              </a:lnSpc>
+              <a:spcAft>
+                <a:spcPts val="0"/>
+              </a:spcAft>
+            </a:pPr>
+            <a:r>
+              <a:rPr sz="1000" b="0" i="0">
+                <a:solidFill>
+                  <a:srgbClr val="333840"/>
+                </a:solidFill>
+                <a:latin typeface="Calibri"/>
+              </a:rPr>
+              <a:t>(blended optics)</a:t>
+            </a:r>
+          </a:p>
+        </p:txBody>
+      </p:sp>
+      <p:sp>
+        <p:nvSpPr>
+          <p:cNvPr id="13" name="Rectangle 12"/>
+          <p:cNvSpPr/>
+          <p:nvPr/>
+        </p:nvSpPr>
+        <p:spPr>
+          <a:xfrm>
+            <a:off x="9692640" y="2770632"/>
+            <a:ext cx="1463040" cy="2258568"/>
           </a:xfrm>
           <a:prstGeom prst="rect">
             <a:avLst/>
@@ -6377,75 +7298,119 @@
       </p:sp>
       <p:sp>
         <p:nvSpPr>
-          <p:cNvPr id="11" name="TextBox 10"/>
-          <p:cNvSpPr txBox="1"/>
-          <p:nvPr/>
-        </p:nvSpPr>
-        <p:spPr>
-          <a:xfrm>
-            <a:off x="640080" y="4892040"/>
-            <a:ext cx="3154680" cy="868680"/>
-          </a:xfrm>
-          <a:prstGeom prst="rect">
-            <a:avLst/>
-          </a:prstGeom>
-          <a:noFill/>
-        </p:spPr>
-        <p:txBody>
-          <a:bodyPr wrap="square" anchor="ctr" lIns="0" rIns="0" tIns="0" bIns="0">
+          <p:cNvPr id="14" name="TextBox 13"/>
+          <p:cNvSpPr txBox="1"/>
+          <p:nvPr/>
+        </p:nvSpPr>
+        <p:spPr>
+          <a:xfrm>
+            <a:off x="9326880" y="5120640"/>
+            <a:ext cx="2194560" cy="548640"/>
+          </a:xfrm>
+          <a:prstGeom prst="rect">
+            <a:avLst/>
+          </a:prstGeom>
+          <a:noFill/>
+        </p:spPr>
+        <p:txBody>
+          <a:bodyPr wrap="square" anchor="t" lIns="0" rIns="0" tIns="0" bIns="0">
             <a:spAutoFit/>
           </a:bodyPr>
           <a:lstStyle/>
           <a:p>
             <a:pPr algn="ctr">
               <a:lnSpc>
-                <a:spcPct val="105000"/>
+                <a:spcPct val="100000"/>
               </a:lnSpc>
               <a:spcAft>
                 <a:spcPts val="0"/>
               </a:spcAft>
             </a:pPr>
             <a:r>
-              <a:rPr sz="1250" b="1" i="0">
-                <a:solidFill>
-                  <a:srgbClr val="FFFFFF"/>
-                </a:solidFill>
-                <a:latin typeface="Calibri"/>
-              </a:rPr>
-              <a:t>Market-leading core</a:t>
+              <a:rPr sz="1150" b="1" i="0">
+                <a:solidFill>
+                  <a:srgbClr val="333840"/>
+                </a:solidFill>
+                <a:latin typeface="Calibri"/>
+              </a:rPr>
+              <a:t>Core alone</a:t>
             </a:r>
           </a:p>
           <a:p>
             <a:pPr algn="ctr">
               <a:lnSpc>
-                <a:spcPct val="105000"/>
+                <a:spcPct val="100000"/>
               </a:lnSpc>
               <a:spcAft>
                 <a:spcPts val="0"/>
               </a:spcAft>
             </a:pPr>
             <a:r>
-              <a:rPr sz="1100" b="0" i="0">
-                <a:solidFill>
-                  <a:srgbClr val="FFFFFF"/>
-                </a:solidFill>
-                <a:latin typeface="Calibri"/>
-              </a:rPr>
-              <a:t>high ROIIC, very profitable</a:t>
-            </a:r>
-          </a:p>
-        </p:txBody>
-      </p:sp>
-      <p:sp>
-        <p:nvSpPr>
-          <p:cNvPr id="12" name="Rectangle 11"/>
+              <a:rPr sz="1000" b="0" i="0">
+                <a:solidFill>
+                  <a:srgbClr val="333840"/>
+                </a:solidFill>
+                <a:latin typeface="Calibri"/>
+              </a:rPr>
+              <a:t>(high ROIIC)</a:t>
+            </a:r>
+          </a:p>
+        </p:txBody>
+      </p:sp>
+      <p:sp>
+        <p:nvSpPr>
+          <p:cNvPr id="15" name="Rectangle 14"/>
           <p:cNvSpPr/>
           <p:nvPr/>
         </p:nvSpPr>
         <p:spPr>
           <a:xfrm>
-            <a:off x="4297680" y="4892040"/>
-            <a:ext cx="3154680" cy="868680"/>
+            <a:off x="7315200" y="3639312"/>
+            <a:ext cx="3108960" cy="15240"/>
+          </a:xfrm>
+          <a:prstGeom prst="rect">
+            <a:avLst/>
+          </a:prstGeom>
+          <a:solidFill>
+            <a:srgbClr val="8A99AB"/>
+          </a:solidFill>
+          <a:ln>
+            <a:noFill/>
+          </a:ln>
+          <a:effectLst/>
+        </p:spPr>
+        <p:style>
+          <a:lnRef idx="1">
+            <a:schemeClr val="accent1"/>
+          </a:lnRef>
+          <a:fillRef idx="3">
+            <a:schemeClr val="accent1"/>
+          </a:fillRef>
+          <a:effectRef idx="2">
+            <a:schemeClr val="accent1"/>
+          </a:effectRef>
+          <a:fontRef idx="minor">
+            <a:schemeClr val="lt1"/>
+          </a:fontRef>
+        </p:style>
+        <p:txBody>
+          <a:bodyPr rtlCol="0" anchor="ctr"/>
+          <a:lstStyle/>
+          <a:p>
+            <a:pPr algn="ctr"/>
+          </a:p>
+        </p:txBody>
+      </p:sp>
+      <p:sp>
+        <p:nvSpPr>
+          <p:cNvPr id="16" name="Rectangle 15"/>
+          <p:cNvSpPr/>
+          <p:nvPr/>
+        </p:nvSpPr>
+        <p:spPr>
+          <a:xfrm>
+            <a:off x="10927080" y="2770632"/>
+            <a:ext cx="25400" cy="868680"/>
           </a:xfrm>
           <a:prstGeom prst="rect">
             <a:avLst/>
@@ -6482,173 +7447,49 @@
       </p:sp>
       <p:sp>
         <p:nvSpPr>
-          <p:cNvPr id="13" name="TextBox 12"/>
-          <p:cNvSpPr txBox="1"/>
-          <p:nvPr/>
-        </p:nvSpPr>
-        <p:spPr>
-          <a:xfrm>
-            <a:off x="4297680" y="4892040"/>
-            <a:ext cx="3154680" cy="868680"/>
-          </a:xfrm>
-          <a:prstGeom prst="rect">
-            <a:avLst/>
-          </a:prstGeom>
-          <a:noFill/>
-        </p:spPr>
-        <p:txBody>
-          <a:bodyPr wrap="square" anchor="ctr" lIns="0" rIns="0" tIns="0" bIns="0">
-            <a:spAutoFit/>
-          </a:bodyPr>
-          <a:lstStyle/>
-          <a:p>
-            <a:pPr algn="ctr">
-              <a:lnSpc>
-                <a:spcPct val="105000"/>
+          <p:cNvPr id="17" name="TextBox 16"/>
+          <p:cNvSpPr txBox="1"/>
+          <p:nvPr/>
+        </p:nvSpPr>
+        <p:spPr>
+          <a:xfrm>
+            <a:off x="7452360" y="2816352"/>
+            <a:ext cx="3291840" cy="548640"/>
+          </a:xfrm>
+          <a:prstGeom prst="rect">
+            <a:avLst/>
+          </a:prstGeom>
+          <a:noFill/>
+        </p:spPr>
+        <p:txBody>
+          <a:bodyPr wrap="square" anchor="t" lIns="0" rIns="0" tIns="0" bIns="0">
+            <a:spAutoFit/>
+          </a:bodyPr>
+          <a:lstStyle/>
+          <a:p>
+            <a:pPr algn="l">
+              <a:lnSpc>
+                <a:spcPct val="110000"/>
               </a:lnSpc>
               <a:spcAft>
                 <a:spcPts val="0"/>
               </a:spcAft>
             </a:pPr>
             <a:r>
-              <a:rPr sz="1250" b="1" i="0">
-                <a:solidFill>
-                  <a:srgbClr val="FFFFFF"/>
-                </a:solidFill>
-                <a:latin typeface="Calibri"/>
-              </a:rPr>
-              <a:t>−  weak “growth” adjacencies</a:t>
-            </a:r>
-          </a:p>
-          <a:p>
-            <a:pPr algn="ctr">
-              <a:lnSpc>
-                <a:spcPct val="105000"/>
-              </a:lnSpc>
-              <a:spcAft>
-                <a:spcPts val="0"/>
-              </a:spcAft>
-            </a:pPr>
-            <a:r>
-              <a:rPr sz="1100" b="0" i="0">
-                <a:solidFill>
-                  <a:srgbClr val="FFFFFF"/>
-                </a:solidFill>
-                <a:latin typeface="Calibri"/>
-              </a:rPr>
-              <a:t>bolted on by management</a:t>
-            </a:r>
-          </a:p>
-        </p:txBody>
-      </p:sp>
-      <p:sp>
-        <p:nvSpPr>
-          <p:cNvPr id="14" name="Rectangle 13"/>
-          <p:cNvSpPr/>
-          <p:nvPr/>
-        </p:nvSpPr>
-        <p:spPr>
-          <a:xfrm>
-            <a:off x="7955280" y="4892040"/>
-            <a:ext cx="3154680" cy="868680"/>
-          </a:xfrm>
-          <a:prstGeom prst="rect">
-            <a:avLst/>
-          </a:prstGeom>
-          <a:solidFill>
-            <a:srgbClr val="D8DCE2"/>
-          </a:solidFill>
-          <a:ln>
-            <a:noFill/>
-          </a:ln>
-          <a:effectLst/>
-        </p:spPr>
-        <p:style>
-          <a:lnRef idx="1">
-            <a:schemeClr val="accent1"/>
-          </a:lnRef>
-          <a:fillRef idx="3">
-            <a:schemeClr val="accent1"/>
-          </a:fillRef>
-          <a:effectRef idx="2">
-            <a:schemeClr val="accent1"/>
-          </a:effectRef>
-          <a:fontRef idx="minor">
-            <a:schemeClr val="lt1"/>
-          </a:fontRef>
-        </p:style>
-        <p:txBody>
-          <a:bodyPr rtlCol="0" anchor="ctr"/>
-          <a:lstStyle/>
-          <a:p>
-            <a:pPr algn="ctr"/>
-          </a:p>
-        </p:txBody>
-      </p:sp>
-      <p:sp>
-        <p:nvSpPr>
-          <p:cNvPr id="15" name="TextBox 14"/>
-          <p:cNvSpPr txBox="1"/>
-          <p:nvPr/>
-        </p:nvSpPr>
-        <p:spPr>
-          <a:xfrm>
-            <a:off x="7955280" y="4892040"/>
-            <a:ext cx="3154680" cy="868680"/>
-          </a:xfrm>
-          <a:prstGeom prst="rect">
-            <a:avLst/>
-          </a:prstGeom>
-          <a:noFill/>
-        </p:spPr>
-        <p:txBody>
-          <a:bodyPr wrap="square" anchor="ctr" lIns="0" rIns="0" tIns="0" bIns="0">
-            <a:spAutoFit/>
-          </a:bodyPr>
-          <a:lstStyle/>
-          <a:p>
-            <a:pPr algn="ctr">
-              <a:lnSpc>
-                <a:spcPct val="105000"/>
-              </a:lnSpc>
-              <a:spcAft>
-                <a:spcPts val="0"/>
-              </a:spcAft>
-            </a:pPr>
-            <a:r>
-              <a:rPr sz="1250" b="1" i="0">
-                <a:solidFill>
-                  <a:srgbClr val="1E334E"/>
-                </a:solidFill>
-                <a:latin typeface="Calibri"/>
-              </a:rPr>
-              <a:t>=  reported as mediocre</a:t>
-            </a:r>
-          </a:p>
-          <a:p>
-            <a:pPr algn="ctr">
-              <a:lnSpc>
-                <a:spcPct val="105000"/>
-              </a:lnSpc>
-              <a:spcAft>
-                <a:spcPts val="0"/>
-              </a:spcAft>
-            </a:pPr>
-            <a:r>
-              <a:rPr sz="1100" b="0" i="0">
-                <a:solidFill>
-                  <a:srgbClr val="1E334E"/>
-                </a:solidFill>
-                <a:latin typeface="Calibri"/>
-              </a:rPr>
-              <a:t>priced cheap</a:t>
-            </a:r>
-          </a:p>
-        </p:txBody>
-      </p:sp>
-      <p:sp>
-        <p:nvSpPr>
-          <p:cNvPr id="16" name="TextBox 15"/>
+              <a:rPr sz="1150" b="1" i="0">
+                <a:solidFill>
+                  <a:srgbClr val="A84A4A"/>
+                </a:solidFill>
+                <a:latin typeface="Calibri"/>
+              </a:rPr>
+              <a:t>hidden value ≈ 30–40%</a:t>
+            </a:r>
+          </a:p>
+        </p:txBody>
+      </p:sp>
+      <p:sp>
+        <p:nvSpPr>
+          <p:cNvPr id="18" name="TextBox 17"/>
           <p:cNvSpPr txBox="1"/>
           <p:nvPr/>
         </p:nvSpPr>
@@ -14377,7 +15218,7 @@
         <p:spPr>
           <a:xfrm>
             <a:off x="685800" y="2148840"/>
-            <a:ext cx="3017520" cy="233172"/>
+            <a:ext cx="3017520" cy="193852"/>
           </a:xfrm>
           <a:prstGeom prst="rect">
             <a:avLst/>
@@ -14421,7 +15262,7 @@
         <p:spPr>
           <a:xfrm>
             <a:off x="758952" y="2148840"/>
-            <a:ext cx="2907792" cy="233172"/>
+            <a:ext cx="2907792" cy="193852"/>
           </a:xfrm>
           <a:prstGeom prst="rect">
             <a:avLst/>
@@ -14443,7 +15284,7 @@
               </a:spcAft>
             </a:pPr>
             <a:r>
-              <a:rPr sz="1050" b="1" i="0">
+              <a:rPr sz="1000" b="1" i="0">
                 <a:solidFill>
                   <a:srgbClr val="FFFFFF"/>
                 </a:solidFill>
@@ -14463,7 +15304,7 @@
         <p:spPr>
           <a:xfrm>
             <a:off x="3703320" y="2148840"/>
-            <a:ext cx="1828800" cy="233172"/>
+            <a:ext cx="1828800" cy="193852"/>
           </a:xfrm>
           <a:prstGeom prst="rect">
             <a:avLst/>
@@ -14507,7 +15348,7 @@
         <p:spPr>
           <a:xfrm>
             <a:off x="3776472" y="2148840"/>
-            <a:ext cx="1719072" cy="233172"/>
+            <a:ext cx="1719072" cy="193852"/>
           </a:xfrm>
           <a:prstGeom prst="rect">
             <a:avLst/>
@@ -14529,7 +15370,7 @@
               </a:spcAft>
             </a:pPr>
             <a:r>
-              <a:rPr sz="1050" b="1" i="0">
+              <a:rPr sz="1000" b="1" i="0">
                 <a:solidFill>
                   <a:srgbClr val="FFFFFF"/>
                 </a:solidFill>
@@ -14549,7 +15390,7 @@
         <p:spPr>
           <a:xfrm>
             <a:off x="5532120" y="2148840"/>
-            <a:ext cx="1554480" cy="233172"/>
+            <a:ext cx="1554480" cy="193852"/>
           </a:xfrm>
           <a:prstGeom prst="rect">
             <a:avLst/>
@@ -14593,7 +15434,7 @@
         <p:spPr>
           <a:xfrm>
             <a:off x="5605272" y="2148840"/>
-            <a:ext cx="1444752" cy="233172"/>
+            <a:ext cx="1444752" cy="193852"/>
           </a:xfrm>
           <a:prstGeom prst="rect">
             <a:avLst/>
@@ -14615,7 +15456,7 @@
               </a:spcAft>
             </a:pPr>
             <a:r>
-              <a:rPr sz="1050" b="1" i="0">
+              <a:rPr sz="1000" b="1" i="0">
                 <a:solidFill>
                   <a:srgbClr val="FFFFFF"/>
                 </a:solidFill>
@@ -14635,7 +15476,7 @@
         <p:spPr>
           <a:xfrm>
             <a:off x="7086600" y="2148840"/>
-            <a:ext cx="1554480" cy="233172"/>
+            <a:ext cx="1554480" cy="193852"/>
           </a:xfrm>
           <a:prstGeom prst="rect">
             <a:avLst/>
@@ -14679,7 +15520,7 @@
         <p:spPr>
           <a:xfrm>
             <a:off x="7159752" y="2148840"/>
-            <a:ext cx="1444752" cy="233172"/>
+            <a:ext cx="1444752" cy="193852"/>
           </a:xfrm>
           <a:prstGeom prst="rect">
             <a:avLst/>
@@ -14701,7 +15542,7 @@
               </a:spcAft>
             </a:pPr>
             <a:r>
-              <a:rPr sz="1050" b="1" i="0">
+              <a:rPr sz="1000" b="1" i="0">
                 <a:solidFill>
                   <a:srgbClr val="FFFFFF"/>
                 </a:solidFill>
@@ -14721,7 +15562,7 @@
         <p:spPr>
           <a:xfrm>
             <a:off x="8641080" y="2148840"/>
-            <a:ext cx="1828800" cy="233172"/>
+            <a:ext cx="1828800" cy="193852"/>
           </a:xfrm>
           <a:prstGeom prst="rect">
             <a:avLst/>
@@ -14765,7 +15606,7 @@
         <p:spPr>
           <a:xfrm>
             <a:off x="8714232" y="2148840"/>
-            <a:ext cx="1719072" cy="233172"/>
+            <a:ext cx="1719072" cy="193852"/>
           </a:xfrm>
           <a:prstGeom prst="rect">
             <a:avLst/>
@@ -14787,7 +15628,7 @@
               </a:spcAft>
             </a:pPr>
             <a:r>
-              <a:rPr sz="1050" b="1" i="0">
+              <a:rPr sz="1000" b="1" i="0">
                 <a:solidFill>
                   <a:srgbClr val="FFFFFF"/>
                 </a:solidFill>
@@ -14806,8 +15647,8 @@
         </p:nvSpPr>
         <p:spPr>
           <a:xfrm>
-            <a:off x="685800" y="2382012"/>
-            <a:ext cx="3017520" cy="233172"/>
+            <a:off x="685800" y="2342692"/>
+            <a:ext cx="3017520" cy="193852"/>
           </a:xfrm>
           <a:prstGeom prst="rect">
             <a:avLst/>
@@ -14850,8 +15691,8 @@
         </p:nvSpPr>
         <p:spPr>
           <a:xfrm>
-            <a:off x="758952" y="2382012"/>
-            <a:ext cx="2907792" cy="233172"/>
+            <a:off x="758952" y="2342692"/>
+            <a:ext cx="2907792" cy="193852"/>
           </a:xfrm>
           <a:prstGeom prst="rect">
             <a:avLst/>
@@ -14873,7 +15714,7 @@
               </a:spcAft>
             </a:pPr>
             <a:r>
-              <a:rPr sz="1050" b="1" i="0">
+              <a:rPr sz="1000" b="1" i="0">
                 <a:solidFill>
                   <a:srgbClr val="1E334E"/>
                 </a:solidFill>
@@ -14892,8 +15733,8 @@
         </p:nvSpPr>
         <p:spPr>
           <a:xfrm>
-            <a:off x="3703320" y="2382012"/>
-            <a:ext cx="1828800" cy="233172"/>
+            <a:off x="3703320" y="2342692"/>
+            <a:ext cx="1828800" cy="193852"/>
           </a:xfrm>
           <a:prstGeom prst="rect">
             <a:avLst/>
@@ -14936,8 +15777,8 @@
         </p:nvSpPr>
         <p:spPr>
           <a:xfrm>
-            <a:off x="3776472" y="2382012"/>
-            <a:ext cx="1719072" cy="233172"/>
+            <a:off x="3776472" y="2342692"/>
+            <a:ext cx="1719072" cy="193852"/>
           </a:xfrm>
           <a:prstGeom prst="rect">
             <a:avLst/>
@@ -14959,7 +15800,7 @@
               </a:spcAft>
             </a:pPr>
             <a:r>
-              <a:rPr sz="1050" b="0" i="0">
+              <a:rPr sz="1000" b="0" i="0">
                 <a:solidFill>
                   <a:srgbClr val="333840"/>
                 </a:solidFill>
@@ -14978,8 +15819,8 @@
         </p:nvSpPr>
         <p:spPr>
           <a:xfrm>
-            <a:off x="5532120" y="2382012"/>
-            <a:ext cx="1554480" cy="233172"/>
+            <a:off x="5532120" y="2342692"/>
+            <a:ext cx="1554480" cy="193852"/>
           </a:xfrm>
           <a:prstGeom prst="rect">
             <a:avLst/>
@@ -15022,8 +15863,8 @@
         </p:nvSpPr>
         <p:spPr>
           <a:xfrm>
-            <a:off x="5605272" y="2382012"/>
-            <a:ext cx="1444752" cy="233172"/>
+            <a:off x="5605272" y="2342692"/>
+            <a:ext cx="1444752" cy="193852"/>
           </a:xfrm>
           <a:prstGeom prst="rect">
             <a:avLst/>
@@ -15045,7 +15886,7 @@
               </a:spcAft>
             </a:pPr>
             <a:r>
-              <a:rPr sz="1050" b="0" i="0">
+              <a:rPr sz="1000" b="0" i="0">
                 <a:solidFill>
                   <a:srgbClr val="333840"/>
                 </a:solidFill>
@@ -15064,8 +15905,8 @@
         </p:nvSpPr>
         <p:spPr>
           <a:xfrm>
-            <a:off x="7086600" y="2382012"/>
-            <a:ext cx="1554480" cy="233172"/>
+            <a:off x="7086600" y="2342692"/>
+            <a:ext cx="1554480" cy="193852"/>
           </a:xfrm>
           <a:prstGeom prst="rect">
             <a:avLst/>
@@ -15108,8 +15949,8 @@
         </p:nvSpPr>
         <p:spPr>
           <a:xfrm>
-            <a:off x="7159752" y="2382012"/>
-            <a:ext cx="1444752" cy="233172"/>
+            <a:off x="7159752" y="2342692"/>
+            <a:ext cx="1444752" cy="193852"/>
           </a:xfrm>
           <a:prstGeom prst="rect">
             <a:avLst/>
@@ -15131,7 +15972,7 @@
               </a:spcAft>
             </a:pPr>
             <a:r>
-              <a:rPr sz="1050" b="0" i="0">
+              <a:rPr sz="1000" b="0" i="0">
                 <a:solidFill>
                   <a:srgbClr val="333840"/>
                 </a:solidFill>
@@ -15150,8 +15991,8 @@
         </p:nvSpPr>
         <p:spPr>
           <a:xfrm>
-            <a:off x="8641080" y="2382012"/>
-            <a:ext cx="1828800" cy="233172"/>
+            <a:off x="8641080" y="2342692"/>
+            <a:ext cx="1828800" cy="193852"/>
           </a:xfrm>
           <a:prstGeom prst="rect">
             <a:avLst/>
@@ -15194,8 +16035,8 @@
         </p:nvSpPr>
         <p:spPr>
           <a:xfrm>
-            <a:off x="8714232" y="2382012"/>
-            <a:ext cx="1719072" cy="233172"/>
+            <a:off x="8714232" y="2342692"/>
+            <a:ext cx="1719072" cy="193852"/>
           </a:xfrm>
           <a:prstGeom prst="rect">
             <a:avLst/>
@@ -15217,7 +16058,7 @@
               </a:spcAft>
             </a:pPr>
             <a:r>
-              <a:rPr sz="1050" b="0" i="0">
+              <a:rPr sz="1000" b="0" i="0">
                 <a:solidFill>
                   <a:srgbClr val="333840"/>
                 </a:solidFill>
@@ -15236,8 +16077,8 @@
         </p:nvSpPr>
         <p:spPr>
           <a:xfrm>
-            <a:off x="685800" y="2615184"/>
-            <a:ext cx="3017520" cy="233172"/>
+            <a:off x="685800" y="2536544"/>
+            <a:ext cx="3017520" cy="193852"/>
           </a:xfrm>
           <a:prstGeom prst="rect">
             <a:avLst/>
@@ -15280,8 +16121,8 @@
         </p:nvSpPr>
         <p:spPr>
           <a:xfrm>
-            <a:off x="758952" y="2615184"/>
-            <a:ext cx="2907792" cy="233172"/>
+            <a:off x="758952" y="2536544"/>
+            <a:ext cx="2907792" cy="193852"/>
           </a:xfrm>
           <a:prstGeom prst="rect">
             <a:avLst/>
@@ -15303,7 +16144,7 @@
               </a:spcAft>
             </a:pPr>
             <a:r>
-              <a:rPr sz="1050" b="1" i="0">
+              <a:rPr sz="1000" b="1" i="0">
                 <a:solidFill>
                   <a:srgbClr val="1E334E"/>
                 </a:solidFill>
@@ -15322,8 +16163,8 @@
         </p:nvSpPr>
         <p:spPr>
           <a:xfrm>
-            <a:off x="3703320" y="2615184"/>
-            <a:ext cx="1828800" cy="233172"/>
+            <a:off x="3703320" y="2536544"/>
+            <a:ext cx="1828800" cy="193852"/>
           </a:xfrm>
           <a:prstGeom prst="rect">
             <a:avLst/>
@@ -15366,8 +16207,8 @@
         </p:nvSpPr>
         <p:spPr>
           <a:xfrm>
-            <a:off x="3776472" y="2615184"/>
-            <a:ext cx="1719072" cy="233172"/>
+            <a:off x="3776472" y="2536544"/>
+            <a:ext cx="1719072" cy="193852"/>
           </a:xfrm>
           <a:prstGeom prst="rect">
             <a:avLst/>
@@ -15389,7 +16230,7 @@
               </a:spcAft>
             </a:pPr>
             <a:r>
-              <a:rPr sz="1050" b="0" i="0">
+              <a:rPr sz="1000" b="0" i="0">
                 <a:solidFill>
                   <a:srgbClr val="333840"/>
                 </a:solidFill>
@@ -15408,8 +16249,8 @@
         </p:nvSpPr>
         <p:spPr>
           <a:xfrm>
-            <a:off x="5532120" y="2615184"/>
-            <a:ext cx="1554480" cy="233172"/>
+            <a:off x="5532120" y="2536544"/>
+            <a:ext cx="1554480" cy="193852"/>
           </a:xfrm>
           <a:prstGeom prst="rect">
             <a:avLst/>
@@ -15452,8 +16293,8 @@
         </p:nvSpPr>
         <p:spPr>
           <a:xfrm>
-            <a:off x="5605272" y="2615184"/>
-            <a:ext cx="1444752" cy="233172"/>
+            <a:off x="5605272" y="2536544"/>
+            <a:ext cx="1444752" cy="193852"/>
           </a:xfrm>
           <a:prstGeom prst="rect">
             <a:avLst/>
@@ -15475,7 +16316,7 @@
               </a:spcAft>
             </a:pPr>
             <a:r>
-              <a:rPr sz="1050" b="0" i="0">
+              <a:rPr sz="1000" b="0" i="0">
                 <a:solidFill>
                   <a:srgbClr val="333840"/>
                 </a:solidFill>
@@ -15494,8 +16335,8 @@
         </p:nvSpPr>
         <p:spPr>
           <a:xfrm>
-            <a:off x="7086600" y="2615184"/>
-            <a:ext cx="1554480" cy="233172"/>
+            <a:off x="7086600" y="2536544"/>
+            <a:ext cx="1554480" cy="193852"/>
           </a:xfrm>
           <a:prstGeom prst="rect">
             <a:avLst/>
@@ -15538,8 +16379,8 @@
         </p:nvSpPr>
         <p:spPr>
           <a:xfrm>
-            <a:off x="7159752" y="2615184"/>
-            <a:ext cx="1444752" cy="233172"/>
+            <a:off x="7159752" y="2536544"/>
+            <a:ext cx="1444752" cy="193852"/>
           </a:xfrm>
           <a:prstGeom prst="rect">
             <a:avLst/>
@@ -15561,7 +16402,7 @@
               </a:spcAft>
             </a:pPr>
             <a:r>
-              <a:rPr sz="1050" b="0" i="0">
+              <a:rPr sz="1000" b="0" i="0">
                 <a:solidFill>
                   <a:srgbClr val="333840"/>
                 </a:solidFill>
@@ -15580,8 +16421,8 @@
         </p:nvSpPr>
         <p:spPr>
           <a:xfrm>
-            <a:off x="8641080" y="2615184"/>
-            <a:ext cx="1828800" cy="233172"/>
+            <a:off x="8641080" y="2536544"/>
+            <a:ext cx="1828800" cy="193852"/>
           </a:xfrm>
           <a:prstGeom prst="rect">
             <a:avLst/>
@@ -15624,8 +16465,8 @@
         </p:nvSpPr>
         <p:spPr>
           <a:xfrm>
-            <a:off x="8714232" y="2615184"/>
-            <a:ext cx="1719072" cy="233172"/>
+            <a:off x="8714232" y="2536544"/>
+            <a:ext cx="1719072" cy="193852"/>
           </a:xfrm>
           <a:prstGeom prst="rect">
             <a:avLst/>
@@ -15647,7 +16488,7 @@
               </a:spcAft>
             </a:pPr>
             <a:r>
-              <a:rPr sz="1050" b="0" i="0">
+              <a:rPr sz="1000" b="0" i="0">
                 <a:solidFill>
                   <a:srgbClr val="333840"/>
                 </a:solidFill>
@@ -15666,8 +16507,8 @@
         </p:nvSpPr>
         <p:spPr>
           <a:xfrm>
-            <a:off x="685800" y="2848356"/>
-            <a:ext cx="3017520" cy="233172"/>
+            <a:off x="685800" y="2730396"/>
+            <a:ext cx="3017520" cy="193852"/>
           </a:xfrm>
           <a:prstGeom prst="rect">
             <a:avLst/>
@@ -15710,8 +16551,8 @@
         </p:nvSpPr>
         <p:spPr>
           <a:xfrm>
-            <a:off x="758952" y="2848356"/>
-            <a:ext cx="2907792" cy="233172"/>
+            <a:off x="758952" y="2730396"/>
+            <a:ext cx="2907792" cy="193852"/>
           </a:xfrm>
           <a:prstGeom prst="rect">
             <a:avLst/>
@@ -15733,7 +16574,7 @@
               </a:spcAft>
             </a:pPr>
             <a:r>
-              <a:rPr sz="1050" b="1" i="0">
+              <a:rPr sz="1000" b="1" i="0">
                 <a:solidFill>
                   <a:srgbClr val="1E334E"/>
                 </a:solidFill>
@@ -15752,8 +16593,8 @@
         </p:nvSpPr>
         <p:spPr>
           <a:xfrm>
-            <a:off x="3703320" y="2848356"/>
-            <a:ext cx="1828800" cy="233172"/>
+            <a:off x="3703320" y="2730396"/>
+            <a:ext cx="1828800" cy="193852"/>
           </a:xfrm>
           <a:prstGeom prst="rect">
             <a:avLst/>
@@ -15796,8 +16637,8 @@
         </p:nvSpPr>
         <p:spPr>
           <a:xfrm>
-            <a:off x="3776472" y="2848356"/>
-            <a:ext cx="1719072" cy="233172"/>
+            <a:off x="3776472" y="2730396"/>
+            <a:ext cx="1719072" cy="193852"/>
           </a:xfrm>
           <a:prstGeom prst="rect">
             <a:avLst/>
@@ -15819,7 +16660,7 @@
               </a:spcAft>
             </a:pPr>
             <a:r>
-              <a:rPr sz="1050" b="0" i="0">
+              <a:rPr sz="1000" b="0" i="0">
                 <a:solidFill>
                   <a:srgbClr val="333840"/>
                 </a:solidFill>
@@ -15838,8 +16679,8 @@
         </p:nvSpPr>
         <p:spPr>
           <a:xfrm>
-            <a:off x="5532120" y="2848356"/>
-            <a:ext cx="1554480" cy="233172"/>
+            <a:off x="5532120" y="2730396"/>
+            <a:ext cx="1554480" cy="193852"/>
           </a:xfrm>
           <a:prstGeom prst="rect">
             <a:avLst/>
@@ -15882,8 +16723,8 @@
         </p:nvSpPr>
         <p:spPr>
           <a:xfrm>
-            <a:off x="5605272" y="2848356"/>
-            <a:ext cx="1444752" cy="233172"/>
+            <a:off x="5605272" y="2730396"/>
+            <a:ext cx="1444752" cy="193852"/>
           </a:xfrm>
           <a:prstGeom prst="rect">
             <a:avLst/>
@@ -15905,7 +16746,7 @@
               </a:spcAft>
             </a:pPr>
             <a:r>
-              <a:rPr sz="1050" b="0" i="0">
+              <a:rPr sz="1000" b="0" i="0">
                 <a:solidFill>
                   <a:srgbClr val="333840"/>
                 </a:solidFill>
@@ -15924,8 +16765,8 @@
         </p:nvSpPr>
         <p:spPr>
           <a:xfrm>
-            <a:off x="7086600" y="2848356"/>
-            <a:ext cx="1554480" cy="233172"/>
+            <a:off x="7086600" y="2730396"/>
+            <a:ext cx="1554480" cy="193852"/>
           </a:xfrm>
           <a:prstGeom prst="rect">
             <a:avLst/>
@@ -15968,8 +16809,8 @@
         </p:nvSpPr>
         <p:spPr>
           <a:xfrm>
-            <a:off x="7159752" y="2848356"/>
-            <a:ext cx="1444752" cy="233172"/>
+            <a:off x="7159752" y="2730396"/>
+            <a:ext cx="1444752" cy="193852"/>
           </a:xfrm>
           <a:prstGeom prst="rect">
             <a:avLst/>
@@ -15991,7 +16832,7 @@
               </a:spcAft>
             </a:pPr>
             <a:r>
-              <a:rPr sz="1050" b="0" i="0">
+              <a:rPr sz="1000" b="0" i="0">
                 <a:solidFill>
                   <a:srgbClr val="333840"/>
                 </a:solidFill>
@@ -16010,8 +16851,8 @@
         </p:nvSpPr>
         <p:spPr>
           <a:xfrm>
-            <a:off x="8641080" y="2848356"/>
-            <a:ext cx="1828800" cy="233172"/>
+            <a:off x="8641080" y="2730396"/>
+            <a:ext cx="1828800" cy="193852"/>
           </a:xfrm>
           <a:prstGeom prst="rect">
             <a:avLst/>
@@ -16054,8 +16895,8 @@
         </p:nvSpPr>
         <p:spPr>
           <a:xfrm>
-            <a:off x="8714232" y="2848356"/>
-            <a:ext cx="1719072" cy="233172"/>
+            <a:off x="8714232" y="2730396"/>
+            <a:ext cx="1719072" cy="193852"/>
           </a:xfrm>
           <a:prstGeom prst="rect">
             <a:avLst/>
@@ -16077,7 +16918,7 @@
               </a:spcAft>
             </a:pPr>
             <a:r>
-              <a:rPr sz="1050" b="0" i="0">
+              <a:rPr sz="1000" b="0" i="0">
                 <a:solidFill>
                   <a:srgbClr val="333840"/>
                 </a:solidFill>
@@ -16096,8 +16937,8 @@
         </p:nvSpPr>
         <p:spPr>
           <a:xfrm>
-            <a:off x="685800" y="3081528"/>
-            <a:ext cx="3017520" cy="233172"/>
+            <a:off x="685800" y="2924248"/>
+            <a:ext cx="3017520" cy="193852"/>
           </a:xfrm>
           <a:prstGeom prst="rect">
             <a:avLst/>
@@ -16140,8 +16981,8 @@
         </p:nvSpPr>
         <p:spPr>
           <a:xfrm>
-            <a:off x="758952" y="3081528"/>
-            <a:ext cx="2907792" cy="233172"/>
+            <a:off x="758952" y="2924248"/>
+            <a:ext cx="2907792" cy="193852"/>
           </a:xfrm>
           <a:prstGeom prst="rect">
             <a:avLst/>
@@ -16163,7 +17004,7 @@
               </a:spcAft>
             </a:pPr>
             <a:r>
-              <a:rPr sz="1050" b="1" i="0">
+              <a:rPr sz="1000" b="1" i="0">
                 <a:solidFill>
                   <a:srgbClr val="1E334E"/>
                 </a:solidFill>
@@ -16182,8 +17023,8 @@
         </p:nvSpPr>
         <p:spPr>
           <a:xfrm>
-            <a:off x="3703320" y="3081528"/>
-            <a:ext cx="1828800" cy="233172"/>
+            <a:off x="3703320" y="2924248"/>
+            <a:ext cx="1828800" cy="193852"/>
           </a:xfrm>
           <a:prstGeom prst="rect">
             <a:avLst/>
@@ -16226,8 +17067,8 @@
         </p:nvSpPr>
         <p:spPr>
           <a:xfrm>
-            <a:off x="3776472" y="3081528"/>
-            <a:ext cx="1719072" cy="233172"/>
+            <a:off x="3776472" y="2924248"/>
+            <a:ext cx="1719072" cy="193852"/>
           </a:xfrm>
           <a:prstGeom prst="rect">
             <a:avLst/>
@@ -16249,7 +17090,7 @@
               </a:spcAft>
             </a:pPr>
             <a:r>
-              <a:rPr sz="1050" b="0" i="0">
+              <a:rPr sz="1000" b="0" i="0">
                 <a:solidFill>
                   <a:srgbClr val="333840"/>
                 </a:solidFill>
@@ -16268,8 +17109,8 @@
         </p:nvSpPr>
         <p:spPr>
           <a:xfrm>
-            <a:off x="5532120" y="3081528"/>
-            <a:ext cx="1554480" cy="233172"/>
+            <a:off x="5532120" y="2924248"/>
+            <a:ext cx="1554480" cy="193852"/>
           </a:xfrm>
           <a:prstGeom prst="rect">
             <a:avLst/>
@@ -16312,8 +17153,8 @@
         </p:nvSpPr>
         <p:spPr>
           <a:xfrm>
-            <a:off x="5605272" y="3081528"/>
-            <a:ext cx="1444752" cy="233172"/>
+            <a:off x="5605272" y="2924248"/>
+            <a:ext cx="1444752" cy="193852"/>
           </a:xfrm>
           <a:prstGeom prst="rect">
             <a:avLst/>
@@ -16335,7 +17176,7 @@
               </a:spcAft>
             </a:pPr>
             <a:r>
-              <a:rPr sz="1050" b="0" i="0">
+              <a:rPr sz="1000" b="0" i="0">
                 <a:solidFill>
                   <a:srgbClr val="333840"/>
                 </a:solidFill>
@@ -16354,8 +17195,8 @@
         </p:nvSpPr>
         <p:spPr>
           <a:xfrm>
-            <a:off x="7086600" y="3081528"/>
-            <a:ext cx="1554480" cy="233172"/>
+            <a:off x="7086600" y="2924248"/>
+            <a:ext cx="1554480" cy="193852"/>
           </a:xfrm>
           <a:prstGeom prst="rect">
             <a:avLst/>
@@ -16398,8 +17239,8 @@
         </p:nvSpPr>
         <p:spPr>
           <a:xfrm>
-            <a:off x="7159752" y="3081528"/>
-            <a:ext cx="1444752" cy="233172"/>
+            <a:off x="7159752" y="2924248"/>
+            <a:ext cx="1444752" cy="193852"/>
           </a:xfrm>
           <a:prstGeom prst="rect">
             <a:avLst/>
@@ -16421,7 +17262,7 @@
               </a:spcAft>
             </a:pPr>
             <a:r>
-              <a:rPr sz="1050" b="0" i="0">
+              <a:rPr sz="1000" b="0" i="0">
                 <a:solidFill>
                   <a:srgbClr val="333840"/>
                 </a:solidFill>
@@ -16440,8 +17281,8 @@
         </p:nvSpPr>
         <p:spPr>
           <a:xfrm>
-            <a:off x="8641080" y="3081528"/>
-            <a:ext cx="1828800" cy="233172"/>
+            <a:off x="8641080" y="2924248"/>
+            <a:ext cx="1828800" cy="193852"/>
           </a:xfrm>
           <a:prstGeom prst="rect">
             <a:avLst/>
@@ -16484,8 +17325,8 @@
         </p:nvSpPr>
         <p:spPr>
           <a:xfrm>
-            <a:off x="8714232" y="3081528"/>
-            <a:ext cx="1719072" cy="233172"/>
+            <a:off x="8714232" y="2924248"/>
+            <a:ext cx="1719072" cy="193852"/>
           </a:xfrm>
           <a:prstGeom prst="rect">
             <a:avLst/>
@@ -16507,7 +17348,7 @@
               </a:spcAft>
             </a:pPr>
             <a:r>
-              <a:rPr sz="1050" b="0" i="0">
+              <a:rPr sz="1000" b="0" i="0">
                 <a:solidFill>
                   <a:srgbClr val="333840"/>
                 </a:solidFill>
@@ -16526,8 +17367,8 @@
         </p:nvSpPr>
         <p:spPr>
           <a:xfrm>
-            <a:off x="685800" y="3314700"/>
-            <a:ext cx="3017520" cy="233172"/>
+            <a:off x="685800" y="3118100"/>
+            <a:ext cx="3017520" cy="193852"/>
           </a:xfrm>
           <a:prstGeom prst="rect">
             <a:avLst/>
@@ -16570,8 +17411,8 @@
         </p:nvSpPr>
         <p:spPr>
           <a:xfrm>
-            <a:off x="758952" y="3314700"/>
-            <a:ext cx="2907792" cy="233172"/>
+            <a:off x="758952" y="3118100"/>
+            <a:ext cx="2907792" cy="193852"/>
           </a:xfrm>
           <a:prstGeom prst="rect">
             <a:avLst/>
@@ -16593,7 +17434,7 @@
               </a:spcAft>
             </a:pPr>
             <a:r>
-              <a:rPr sz="1050" b="1" i="0">
+              <a:rPr sz="1000" b="1" i="0">
                 <a:solidFill>
                   <a:srgbClr val="1E334E"/>
                 </a:solidFill>
@@ -16612,8 +17453,8 @@
         </p:nvSpPr>
         <p:spPr>
           <a:xfrm>
-            <a:off x="3703320" y="3314700"/>
-            <a:ext cx="1828800" cy="233172"/>
+            <a:off x="3703320" y="3118100"/>
+            <a:ext cx="1828800" cy="193852"/>
           </a:xfrm>
           <a:prstGeom prst="rect">
             <a:avLst/>
@@ -16656,8 +17497,8 @@
         </p:nvSpPr>
         <p:spPr>
           <a:xfrm>
-            <a:off x="3776472" y="3314700"/>
-            <a:ext cx="1719072" cy="233172"/>
+            <a:off x="3776472" y="3118100"/>
+            <a:ext cx="1719072" cy="193852"/>
           </a:xfrm>
           <a:prstGeom prst="rect">
             <a:avLst/>
@@ -16679,7 +17520,7 @@
               </a:spcAft>
             </a:pPr>
             <a:r>
-              <a:rPr sz="1050" b="0" i="0">
+              <a:rPr sz="1000" b="0" i="0">
                 <a:solidFill>
                   <a:srgbClr val="333840"/>
                 </a:solidFill>
@@ -16698,8 +17539,8 @@
         </p:nvSpPr>
         <p:spPr>
           <a:xfrm>
-            <a:off x="5532120" y="3314700"/>
-            <a:ext cx="1554480" cy="233172"/>
+            <a:off x="5532120" y="3118100"/>
+            <a:ext cx="1554480" cy="193852"/>
           </a:xfrm>
           <a:prstGeom prst="rect">
             <a:avLst/>
@@ -16742,8 +17583,8 @@
         </p:nvSpPr>
         <p:spPr>
           <a:xfrm>
-            <a:off x="5605272" y="3314700"/>
-            <a:ext cx="1444752" cy="233172"/>
+            <a:off x="5605272" y="3118100"/>
+            <a:ext cx="1444752" cy="193852"/>
           </a:xfrm>
           <a:prstGeom prst="rect">
             <a:avLst/>
@@ -16765,7 +17606,7 @@
               </a:spcAft>
             </a:pPr>
             <a:r>
-              <a:rPr sz="1050" b="0" i="0">
+              <a:rPr sz="1000" b="0" i="0">
                 <a:solidFill>
                   <a:srgbClr val="333840"/>
                 </a:solidFill>
@@ -16784,8 +17625,8 @@
         </p:nvSpPr>
         <p:spPr>
           <a:xfrm>
-            <a:off x="7086600" y="3314700"/>
-            <a:ext cx="1554480" cy="233172"/>
+            <a:off x="7086600" y="3118100"/>
+            <a:ext cx="1554480" cy="193852"/>
           </a:xfrm>
           <a:prstGeom prst="rect">
             <a:avLst/>
@@ -16828,8 +17669,8 @@
         </p:nvSpPr>
         <p:spPr>
           <a:xfrm>
-            <a:off x="7159752" y="3314700"/>
-            <a:ext cx="1444752" cy="233172"/>
+            <a:off x="7159752" y="3118100"/>
+            <a:ext cx="1444752" cy="193852"/>
           </a:xfrm>
           <a:prstGeom prst="rect">
             <a:avLst/>
@@ -16851,7 +17692,7 @@
               </a:spcAft>
             </a:pPr>
             <a:r>
-              <a:rPr sz="1050" b="0" i="0">
+              <a:rPr sz="1000" b="0" i="0">
                 <a:solidFill>
                   <a:srgbClr val="333840"/>
                 </a:solidFill>
@@ -16870,8 +17711,8 @@
         </p:nvSpPr>
         <p:spPr>
           <a:xfrm>
-            <a:off x="8641080" y="3314700"/>
-            <a:ext cx="1828800" cy="233172"/>
+            <a:off x="8641080" y="3118100"/>
+            <a:ext cx="1828800" cy="193852"/>
           </a:xfrm>
           <a:prstGeom prst="rect">
             <a:avLst/>
@@ -16914,8 +17755,8 @@
         </p:nvSpPr>
         <p:spPr>
           <a:xfrm>
-            <a:off x="8714232" y="3314700"/>
-            <a:ext cx="1719072" cy="233172"/>
+            <a:off x="8714232" y="3118100"/>
+            <a:ext cx="1719072" cy="193852"/>
           </a:xfrm>
           <a:prstGeom prst="rect">
             <a:avLst/>
@@ -16937,7 +17778,7 @@
               </a:spcAft>
             </a:pPr>
             <a:r>
-              <a:rPr sz="1050" b="0" i="0">
+              <a:rPr sz="1000" b="0" i="0">
                 <a:solidFill>
                   <a:srgbClr val="333840"/>
                 </a:solidFill>
@@ -16956,8 +17797,8 @@
         </p:nvSpPr>
         <p:spPr>
           <a:xfrm>
-            <a:off x="685800" y="3547872"/>
-            <a:ext cx="3017520" cy="233172"/>
+            <a:off x="685800" y="3311952"/>
+            <a:ext cx="3017520" cy="193852"/>
           </a:xfrm>
           <a:prstGeom prst="rect">
             <a:avLst/>
@@ -17000,8 +17841,8 @@
         </p:nvSpPr>
         <p:spPr>
           <a:xfrm>
-            <a:off x="758952" y="3547872"/>
-            <a:ext cx="2907792" cy="233172"/>
+            <a:off x="758952" y="3311952"/>
+            <a:ext cx="2907792" cy="193852"/>
           </a:xfrm>
           <a:prstGeom prst="rect">
             <a:avLst/>
@@ -17023,7 +17864,7 @@
               </a:spcAft>
             </a:pPr>
             <a:r>
-              <a:rPr sz="1050" b="1" i="0">
+              <a:rPr sz="1000" b="1" i="0">
                 <a:solidFill>
                   <a:srgbClr val="1E334E"/>
                 </a:solidFill>
@@ -17042,8 +17883,8 @@
         </p:nvSpPr>
         <p:spPr>
           <a:xfrm>
-            <a:off x="3703320" y="3547872"/>
-            <a:ext cx="1828800" cy="233172"/>
+            <a:off x="3703320" y="3311952"/>
+            <a:ext cx="1828800" cy="193852"/>
           </a:xfrm>
           <a:prstGeom prst="rect">
             <a:avLst/>
@@ -17086,8 +17927,8 @@
         </p:nvSpPr>
         <p:spPr>
           <a:xfrm>
-            <a:off x="3776472" y="3547872"/>
-            <a:ext cx="1719072" cy="233172"/>
+            <a:off x="3776472" y="3311952"/>
+            <a:ext cx="1719072" cy="193852"/>
           </a:xfrm>
           <a:prstGeom prst="rect">
             <a:avLst/>
@@ -17109,7 +17950,7 @@
               </a:spcAft>
             </a:pPr>
             <a:r>
-              <a:rPr sz="1050" b="0" i="0">
+              <a:rPr sz="1000" b="0" i="0">
                 <a:solidFill>
                   <a:srgbClr val="333840"/>
                 </a:solidFill>
@@ -17128,8 +17969,8 @@
         </p:nvSpPr>
         <p:spPr>
           <a:xfrm>
-            <a:off x="5532120" y="3547872"/>
-            <a:ext cx="1554480" cy="233172"/>
+            <a:off x="5532120" y="3311952"/>
+            <a:ext cx="1554480" cy="193852"/>
           </a:xfrm>
           <a:prstGeom prst="rect">
             <a:avLst/>
@@ -17172,8 +18013,8 @@
         </p:nvSpPr>
         <p:spPr>
           <a:xfrm>
-            <a:off x="5605272" y="3547872"/>
-            <a:ext cx="1444752" cy="233172"/>
+            <a:off x="5605272" y="3311952"/>
+            <a:ext cx="1444752" cy="193852"/>
           </a:xfrm>
           <a:prstGeom prst="rect">
             <a:avLst/>
@@ -17195,7 +18036,7 @@
               </a:spcAft>
             </a:pPr>
             <a:r>
-              <a:rPr sz="1050" b="0" i="0">
+              <a:rPr sz="1000" b="0" i="0">
                 <a:solidFill>
                   <a:srgbClr val="333840"/>
                 </a:solidFill>
@@ -17214,8 +18055,8 @@
         </p:nvSpPr>
         <p:spPr>
           <a:xfrm>
-            <a:off x="7086600" y="3547872"/>
-            <a:ext cx="1554480" cy="233172"/>
+            <a:off x="7086600" y="3311952"/>
+            <a:ext cx="1554480" cy="193852"/>
           </a:xfrm>
           <a:prstGeom prst="rect">
             <a:avLst/>
@@ -17258,8 +18099,8 @@
         </p:nvSpPr>
         <p:spPr>
           <a:xfrm>
-            <a:off x="7159752" y="3547872"/>
-            <a:ext cx="1444752" cy="233172"/>
+            <a:off x="7159752" y="3311952"/>
+            <a:ext cx="1444752" cy="193852"/>
           </a:xfrm>
           <a:prstGeom prst="rect">
             <a:avLst/>
@@ -17281,7 +18122,7 @@
               </a:spcAft>
             </a:pPr>
             <a:r>
-              <a:rPr sz="1050" b="0" i="0">
+              <a:rPr sz="1000" b="0" i="0">
                 <a:solidFill>
                   <a:srgbClr val="333840"/>
                 </a:solidFill>
@@ -17300,8 +18141,8 @@
         </p:nvSpPr>
         <p:spPr>
           <a:xfrm>
-            <a:off x="8641080" y="3547872"/>
-            <a:ext cx="1828800" cy="233172"/>
+            <a:off x="8641080" y="3311952"/>
+            <a:ext cx="1828800" cy="193852"/>
           </a:xfrm>
           <a:prstGeom prst="rect">
             <a:avLst/>
@@ -17344,8 +18185,8 @@
         </p:nvSpPr>
         <p:spPr>
           <a:xfrm>
-            <a:off x="8714232" y="3547872"/>
-            <a:ext cx="1719072" cy="233172"/>
+            <a:off x="8714232" y="3311952"/>
+            <a:ext cx="1719072" cy="193852"/>
           </a:xfrm>
           <a:prstGeom prst="rect">
             <a:avLst/>
@@ -17367,7 +18208,7 @@
               </a:spcAft>
             </a:pPr>
             <a:r>
-              <a:rPr sz="1050" b="0" i="0">
+              <a:rPr sz="1000" b="0" i="0">
                 <a:solidFill>
                   <a:srgbClr val="333840"/>
                 </a:solidFill>
@@ -17386,8 +18227,8 @@
         </p:nvSpPr>
         <p:spPr>
           <a:xfrm>
-            <a:off x="685800" y="3781044"/>
-            <a:ext cx="3017520" cy="233172"/>
+            <a:off x="685800" y="3505804"/>
+            <a:ext cx="3017520" cy="193852"/>
           </a:xfrm>
           <a:prstGeom prst="rect">
             <a:avLst/>
@@ -17430,8 +18271,8 @@
         </p:nvSpPr>
         <p:spPr>
           <a:xfrm>
-            <a:off x="758952" y="3781044"/>
-            <a:ext cx="2907792" cy="233172"/>
+            <a:off x="758952" y="3505804"/>
+            <a:ext cx="2907792" cy="193852"/>
           </a:xfrm>
           <a:prstGeom prst="rect">
             <a:avLst/>
@@ -17453,7 +18294,7 @@
               </a:spcAft>
             </a:pPr>
             <a:r>
-              <a:rPr sz="1050" b="1" i="0">
+              <a:rPr sz="1000" b="1" i="0">
                 <a:solidFill>
                   <a:srgbClr val="1E334E"/>
                 </a:solidFill>
@@ -17472,8 +18313,8 @@
         </p:nvSpPr>
         <p:spPr>
           <a:xfrm>
-            <a:off x="3703320" y="3781044"/>
-            <a:ext cx="1828800" cy="233172"/>
+            <a:off x="3703320" y="3505804"/>
+            <a:ext cx="1828800" cy="193852"/>
           </a:xfrm>
           <a:prstGeom prst="rect">
             <a:avLst/>
@@ -17516,8 +18357,8 @@
         </p:nvSpPr>
         <p:spPr>
           <a:xfrm>
-            <a:off x="3776472" y="3781044"/>
-            <a:ext cx="1719072" cy="233172"/>
+            <a:off x="3776472" y="3505804"/>
+            <a:ext cx="1719072" cy="193852"/>
           </a:xfrm>
           <a:prstGeom prst="rect">
             <a:avLst/>
@@ -17539,7 +18380,7 @@
               </a:spcAft>
             </a:pPr>
             <a:r>
-              <a:rPr sz="1050" b="0" i="0">
+              <a:rPr sz="1000" b="0" i="0">
                 <a:solidFill>
                   <a:srgbClr val="333840"/>
                 </a:solidFill>
@@ -17558,8 +18399,8 @@
         </p:nvSpPr>
         <p:spPr>
           <a:xfrm>
-            <a:off x="5532120" y="3781044"/>
-            <a:ext cx="1554480" cy="233172"/>
+            <a:off x="5532120" y="3505804"/>
+            <a:ext cx="1554480" cy="193852"/>
           </a:xfrm>
           <a:prstGeom prst="rect">
             <a:avLst/>
@@ -17602,8 +18443,8 @@
         </p:nvSpPr>
         <p:spPr>
           <a:xfrm>
-            <a:off x="5605272" y="3781044"/>
-            <a:ext cx="1444752" cy="233172"/>
+            <a:off x="5605272" y="3505804"/>
+            <a:ext cx="1444752" cy="193852"/>
           </a:xfrm>
           <a:prstGeom prst="rect">
             <a:avLst/>
@@ -17625,7 +18466,7 @@
               </a:spcAft>
             </a:pPr>
             <a:r>
-              <a:rPr sz="1050" b="0" i="0">
+              <a:rPr sz="1000" b="0" i="0">
                 <a:solidFill>
                   <a:srgbClr val="333840"/>
                 </a:solidFill>
@@ -17644,8 +18485,8 @@
         </p:nvSpPr>
         <p:spPr>
           <a:xfrm>
-            <a:off x="7086600" y="3781044"/>
-            <a:ext cx="1554480" cy="233172"/>
+            <a:off x="7086600" y="3505804"/>
+            <a:ext cx="1554480" cy="193852"/>
           </a:xfrm>
           <a:prstGeom prst="rect">
             <a:avLst/>
@@ -17688,8 +18529,8 @@
         </p:nvSpPr>
         <p:spPr>
           <a:xfrm>
-            <a:off x="7159752" y="3781044"/>
-            <a:ext cx="1444752" cy="233172"/>
+            <a:off x="7159752" y="3505804"/>
+            <a:ext cx="1444752" cy="193852"/>
           </a:xfrm>
           <a:prstGeom prst="rect">
             <a:avLst/>
@@ -17711,7 +18552,7 @@
               </a:spcAft>
             </a:pPr>
             <a:r>
-              <a:rPr sz="1050" b="0" i="0">
+              <a:rPr sz="1000" b="0" i="0">
                 <a:solidFill>
                   <a:srgbClr val="333840"/>
                 </a:solidFill>
@@ -17730,8 +18571,8 @@
         </p:nvSpPr>
         <p:spPr>
           <a:xfrm>
-            <a:off x="8641080" y="3781044"/>
-            <a:ext cx="1828800" cy="233172"/>
+            <a:off x="8641080" y="3505804"/>
+            <a:ext cx="1828800" cy="193852"/>
           </a:xfrm>
           <a:prstGeom prst="rect">
             <a:avLst/>
@@ -17774,8 +18615,8 @@
         </p:nvSpPr>
         <p:spPr>
           <a:xfrm>
-            <a:off x="8714232" y="3781044"/>
-            <a:ext cx="1719072" cy="233172"/>
+            <a:off x="8714232" y="3505804"/>
+            <a:ext cx="1719072" cy="193852"/>
           </a:xfrm>
           <a:prstGeom prst="rect">
             <a:avLst/>
@@ -17797,7 +18638,7 @@
               </a:spcAft>
             </a:pPr>
             <a:r>
-              <a:rPr sz="1050" b="0" i="0">
+              <a:rPr sz="1000" b="0" i="0">
                 <a:solidFill>
                   <a:srgbClr val="333840"/>
                 </a:solidFill>
@@ -17816,8 +18657,8 @@
         </p:nvSpPr>
         <p:spPr>
           <a:xfrm>
-            <a:off x="685800" y="4014216"/>
-            <a:ext cx="3017520" cy="233172"/>
+            <a:off x="685800" y="3699656"/>
+            <a:ext cx="3017520" cy="193852"/>
           </a:xfrm>
           <a:prstGeom prst="rect">
             <a:avLst/>
@@ -17860,8 +18701,8 @@
         </p:nvSpPr>
         <p:spPr>
           <a:xfrm>
-            <a:off x="758952" y="4014216"/>
-            <a:ext cx="2907792" cy="233172"/>
+            <a:off x="758952" y="3699656"/>
+            <a:ext cx="2907792" cy="193852"/>
           </a:xfrm>
           <a:prstGeom prst="rect">
             <a:avLst/>
@@ -17883,7 +18724,7 @@
               </a:spcAft>
             </a:pPr>
             <a:r>
-              <a:rPr sz="1050" b="1" i="0">
+              <a:rPr sz="1000" b="1" i="0">
                 <a:solidFill>
                   <a:srgbClr val="1E334E"/>
                 </a:solidFill>
@@ -17902,8 +18743,8 @@
         </p:nvSpPr>
         <p:spPr>
           <a:xfrm>
-            <a:off x="3703320" y="4014216"/>
-            <a:ext cx="1828800" cy="233172"/>
+            <a:off x="3703320" y="3699656"/>
+            <a:ext cx="1828800" cy="193852"/>
           </a:xfrm>
           <a:prstGeom prst="rect">
             <a:avLst/>
@@ -17946,8 +18787,8 @@
         </p:nvSpPr>
         <p:spPr>
           <a:xfrm>
-            <a:off x="3776472" y="4014216"/>
-            <a:ext cx="1719072" cy="233172"/>
+            <a:off x="3776472" y="3699656"/>
+            <a:ext cx="1719072" cy="193852"/>
           </a:xfrm>
           <a:prstGeom prst="rect">
             <a:avLst/>
@@ -17969,7 +18810,7 @@
               </a:spcAft>
             </a:pPr>
             <a:r>
-              <a:rPr sz="1050" b="0" i="0">
+              <a:rPr sz="1000" b="0" i="0">
                 <a:solidFill>
                   <a:srgbClr val="333840"/>
                 </a:solidFill>
@@ -17988,8 +18829,8 @@
         </p:nvSpPr>
         <p:spPr>
           <a:xfrm>
-            <a:off x="5532120" y="4014216"/>
-            <a:ext cx="1554480" cy="233172"/>
+            <a:off x="5532120" y="3699656"/>
+            <a:ext cx="1554480" cy="193852"/>
           </a:xfrm>
           <a:prstGeom prst="rect">
             <a:avLst/>
@@ -18032,8 +18873,8 @@
         </p:nvSpPr>
         <p:spPr>
           <a:xfrm>
-            <a:off x="5605272" y="4014216"/>
-            <a:ext cx="1444752" cy="233172"/>
+            <a:off x="5605272" y="3699656"/>
+            <a:ext cx="1444752" cy="193852"/>
           </a:xfrm>
           <a:prstGeom prst="rect">
             <a:avLst/>
@@ -18055,7 +18896,7 @@
               </a:spcAft>
             </a:pPr>
             <a:r>
-              <a:rPr sz="1050" b="0" i="0">
+              <a:rPr sz="1000" b="0" i="0">
                 <a:solidFill>
                   <a:srgbClr val="333840"/>
                 </a:solidFill>
@@ -18074,8 +18915,8 @@
         </p:nvSpPr>
         <p:spPr>
           <a:xfrm>
-            <a:off x="7086600" y="4014216"/>
-            <a:ext cx="1554480" cy="233172"/>
+            <a:off x="7086600" y="3699656"/>
+            <a:ext cx="1554480" cy="193852"/>
           </a:xfrm>
           <a:prstGeom prst="rect">
             <a:avLst/>
@@ -18118,8 +18959,8 @@
         </p:nvSpPr>
         <p:spPr>
           <a:xfrm>
-            <a:off x="7159752" y="4014216"/>
-            <a:ext cx="1444752" cy="233172"/>
+            <a:off x="7159752" y="3699656"/>
+            <a:ext cx="1444752" cy="193852"/>
           </a:xfrm>
           <a:prstGeom prst="rect">
             <a:avLst/>
@@ -18141,7 +18982,7 @@
               </a:spcAft>
             </a:pPr>
             <a:r>
-              <a:rPr sz="1050" b="0" i="0">
+              <a:rPr sz="1000" b="0" i="0">
                 <a:solidFill>
                   <a:srgbClr val="333840"/>
                 </a:solidFill>
@@ -18160,8 +19001,8 @@
         </p:nvSpPr>
         <p:spPr>
           <a:xfrm>
-            <a:off x="8641080" y="4014216"/>
-            <a:ext cx="1828800" cy="233172"/>
+            <a:off x="8641080" y="3699656"/>
+            <a:ext cx="1828800" cy="193852"/>
           </a:xfrm>
           <a:prstGeom prst="rect">
             <a:avLst/>
@@ -18204,8 +19045,8 @@
         </p:nvSpPr>
         <p:spPr>
           <a:xfrm>
-            <a:off x="8714232" y="4014216"/>
-            <a:ext cx="1719072" cy="233172"/>
+            <a:off x="8714232" y="3699656"/>
+            <a:ext cx="1719072" cy="193852"/>
           </a:xfrm>
           <a:prstGeom prst="rect">
             <a:avLst/>
@@ -18227,7 +19068,7 @@
               </a:spcAft>
             </a:pPr>
             <a:r>
-              <a:rPr sz="1050" b="0" i="0">
+              <a:rPr sz="1000" b="0" i="0">
                 <a:solidFill>
                   <a:srgbClr val="333840"/>
                 </a:solidFill>
@@ -18246,8 +19087,8 @@
         </p:nvSpPr>
         <p:spPr>
           <a:xfrm>
-            <a:off x="685800" y="4247388"/>
-            <a:ext cx="3017520" cy="233172"/>
+            <a:off x="685800" y="3893508"/>
+            <a:ext cx="3017520" cy="193852"/>
           </a:xfrm>
           <a:prstGeom prst="rect">
             <a:avLst/>
@@ -18290,8 +19131,8 @@
         </p:nvSpPr>
         <p:spPr>
           <a:xfrm>
-            <a:off x="758952" y="4247388"/>
-            <a:ext cx="2907792" cy="233172"/>
+            <a:off x="758952" y="3893508"/>
+            <a:ext cx="2907792" cy="193852"/>
           </a:xfrm>
           <a:prstGeom prst="rect">
             <a:avLst/>
@@ -18313,7 +19154,7 @@
               </a:spcAft>
             </a:pPr>
             <a:r>
-              <a:rPr sz="1050" b="1" i="0">
+              <a:rPr sz="1000" b="1" i="0">
                 <a:solidFill>
                   <a:srgbClr val="1E334E"/>
                 </a:solidFill>
@@ -18332,8 +19173,8 @@
         </p:nvSpPr>
         <p:spPr>
           <a:xfrm>
-            <a:off x="3703320" y="4247388"/>
-            <a:ext cx="1828800" cy="233172"/>
+            <a:off x="3703320" y="3893508"/>
+            <a:ext cx="1828800" cy="193852"/>
           </a:xfrm>
           <a:prstGeom prst="rect">
             <a:avLst/>
@@ -18376,8 +19217,8 @@
         </p:nvSpPr>
         <p:spPr>
           <a:xfrm>
-            <a:off x="3776472" y="4247388"/>
-            <a:ext cx="1719072" cy="233172"/>
+            <a:off x="3776472" y="3893508"/>
+            <a:ext cx="1719072" cy="193852"/>
           </a:xfrm>
           <a:prstGeom prst="rect">
             <a:avLst/>
@@ -18399,7 +19240,7 @@
               </a:spcAft>
             </a:pPr>
             <a:r>
-              <a:rPr sz="1050" b="0" i="0">
+              <a:rPr sz="1000" b="0" i="0">
                 <a:solidFill>
                   <a:srgbClr val="333840"/>
                 </a:solidFill>
@@ -18418,8 +19259,8 @@
         </p:nvSpPr>
         <p:spPr>
           <a:xfrm>
-            <a:off x="5532120" y="4247388"/>
-            <a:ext cx="1554480" cy="233172"/>
+            <a:off x="5532120" y="3893508"/>
+            <a:ext cx="1554480" cy="193852"/>
           </a:xfrm>
           <a:prstGeom prst="rect">
             <a:avLst/>
@@ -18462,8 +19303,8 @@
         </p:nvSpPr>
         <p:spPr>
           <a:xfrm>
-            <a:off x="5605272" y="4247388"/>
-            <a:ext cx="1444752" cy="233172"/>
+            <a:off x="5605272" y="3893508"/>
+            <a:ext cx="1444752" cy="193852"/>
           </a:xfrm>
           <a:prstGeom prst="rect">
             <a:avLst/>
@@ -18485,7 +19326,7 @@
               </a:spcAft>
             </a:pPr>
             <a:r>
-              <a:rPr sz="1050" b="0" i="0">
+              <a:rPr sz="1000" b="0" i="0">
                 <a:solidFill>
                   <a:srgbClr val="333840"/>
                 </a:solidFill>
@@ -18504,8 +19345,8 @@
         </p:nvSpPr>
         <p:spPr>
           <a:xfrm>
-            <a:off x="7086600" y="4247388"/>
-            <a:ext cx="1554480" cy="233172"/>
+            <a:off x="7086600" y="3893508"/>
+            <a:ext cx="1554480" cy="193852"/>
           </a:xfrm>
           <a:prstGeom prst="rect">
             <a:avLst/>
@@ -18548,8 +19389,8 @@
         </p:nvSpPr>
         <p:spPr>
           <a:xfrm>
-            <a:off x="7159752" y="4247388"/>
-            <a:ext cx="1444752" cy="233172"/>
+            <a:off x="7159752" y="3893508"/>
+            <a:ext cx="1444752" cy="193852"/>
           </a:xfrm>
           <a:prstGeom prst="rect">
             <a:avLst/>
@@ -18571,7 +19412,7 @@
               </a:spcAft>
             </a:pPr>
             <a:r>
-              <a:rPr sz="1050" b="0" i="0">
+              <a:rPr sz="1000" b="0" i="0">
                 <a:solidFill>
                   <a:srgbClr val="333840"/>
                 </a:solidFill>
@@ -18590,8 +19431,8 @@
         </p:nvSpPr>
         <p:spPr>
           <a:xfrm>
-            <a:off x="8641080" y="4247388"/>
-            <a:ext cx="1828800" cy="233172"/>
+            <a:off x="8641080" y="3893508"/>
+            <a:ext cx="1828800" cy="193852"/>
           </a:xfrm>
           <a:prstGeom prst="rect">
             <a:avLst/>
@@ -18634,8 +19475,8 @@
         </p:nvSpPr>
         <p:spPr>
           <a:xfrm>
-            <a:off x="8714232" y="4247388"/>
-            <a:ext cx="1719072" cy="233172"/>
+            <a:off x="8714232" y="3893508"/>
+            <a:ext cx="1719072" cy="193852"/>
           </a:xfrm>
           <a:prstGeom prst="rect">
             <a:avLst/>
@@ -18657,7 +19498,7 @@
               </a:spcAft>
             </a:pPr>
             <a:r>
-              <a:rPr sz="1050" b="0" i="0">
+              <a:rPr sz="1000" b="0" i="0">
                 <a:solidFill>
                   <a:srgbClr val="333840"/>
                 </a:solidFill>
@@ -18676,8 +19517,8 @@
         </p:nvSpPr>
         <p:spPr>
           <a:xfrm>
-            <a:off x="685800" y="4480560"/>
-            <a:ext cx="3017520" cy="233172"/>
+            <a:off x="685800" y="4087360"/>
+            <a:ext cx="3017520" cy="193852"/>
           </a:xfrm>
           <a:prstGeom prst="rect">
             <a:avLst/>
@@ -18720,8 +19561,8 @@
         </p:nvSpPr>
         <p:spPr>
           <a:xfrm>
-            <a:off x="758952" y="4480560"/>
-            <a:ext cx="2907792" cy="233172"/>
+            <a:off x="758952" y="4087360"/>
+            <a:ext cx="2907792" cy="193852"/>
           </a:xfrm>
           <a:prstGeom prst="rect">
             <a:avLst/>
@@ -18743,7 +19584,7 @@
               </a:spcAft>
             </a:pPr>
             <a:r>
-              <a:rPr sz="1050" b="1" i="0">
+              <a:rPr sz="1000" b="1" i="0">
                 <a:solidFill>
                   <a:srgbClr val="1E334E"/>
                 </a:solidFill>
@@ -18762,8 +19603,8 @@
         </p:nvSpPr>
         <p:spPr>
           <a:xfrm>
-            <a:off x="3703320" y="4480560"/>
-            <a:ext cx="1828800" cy="233172"/>
+            <a:off x="3703320" y="4087360"/>
+            <a:ext cx="1828800" cy="193852"/>
           </a:xfrm>
           <a:prstGeom prst="rect">
             <a:avLst/>
@@ -18806,8 +19647,8 @@
         </p:nvSpPr>
         <p:spPr>
           <a:xfrm>
-            <a:off x="3776472" y="4480560"/>
-            <a:ext cx="1719072" cy="233172"/>
+            <a:off x="3776472" y="4087360"/>
+            <a:ext cx="1719072" cy="193852"/>
           </a:xfrm>
           <a:prstGeom prst="rect">
             <a:avLst/>
@@ -18829,7 +19670,7 @@
               </a:spcAft>
             </a:pPr>
             <a:r>
-              <a:rPr sz="1050" b="0" i="0">
+              <a:rPr sz="1000" b="0" i="0">
                 <a:solidFill>
                   <a:srgbClr val="333840"/>
                 </a:solidFill>
@@ -18848,8 +19689,8 @@
         </p:nvSpPr>
         <p:spPr>
           <a:xfrm>
-            <a:off x="5532120" y="4480560"/>
-            <a:ext cx="1554480" cy="233172"/>
+            <a:off x="5532120" y="4087360"/>
+            <a:ext cx="1554480" cy="193852"/>
           </a:xfrm>
           <a:prstGeom prst="rect">
             <a:avLst/>
@@ -18892,8 +19733,8 @@
         </p:nvSpPr>
         <p:spPr>
           <a:xfrm>
-            <a:off x="5605272" y="4480560"/>
-            <a:ext cx="1444752" cy="233172"/>
+            <a:off x="5605272" y="4087360"/>
+            <a:ext cx="1444752" cy="193852"/>
           </a:xfrm>
           <a:prstGeom prst="rect">
             <a:avLst/>
@@ -18915,7 +19756,7 @@
               </a:spcAft>
             </a:pPr>
             <a:r>
-              <a:rPr sz="1050" b="0" i="0">
+              <a:rPr sz="1000" b="0" i="0">
                 <a:solidFill>
                   <a:srgbClr val="333840"/>
                 </a:solidFill>
@@ -18934,8 +19775,8 @@
         </p:nvSpPr>
         <p:spPr>
           <a:xfrm>
-            <a:off x="7086600" y="4480560"/>
-            <a:ext cx="1554480" cy="233172"/>
+            <a:off x="7086600" y="4087360"/>
+            <a:ext cx="1554480" cy="193852"/>
           </a:xfrm>
           <a:prstGeom prst="rect">
             <a:avLst/>
@@ -18978,8 +19819,8 @@
         </p:nvSpPr>
         <p:spPr>
           <a:xfrm>
-            <a:off x="7159752" y="4480560"/>
-            <a:ext cx="1444752" cy="233172"/>
+            <a:off x="7159752" y="4087360"/>
+            <a:ext cx="1444752" cy="193852"/>
           </a:xfrm>
           <a:prstGeom prst="rect">
             <a:avLst/>
@@ -19001,7 +19842,7 @@
               </a:spcAft>
             </a:pPr>
             <a:r>
-              <a:rPr sz="1050" b="0" i="0">
+              <a:rPr sz="1000" b="0" i="0">
                 <a:solidFill>
                   <a:srgbClr val="333840"/>
                 </a:solidFill>
@@ -19020,8 +19861,8 @@
         </p:nvSpPr>
         <p:spPr>
           <a:xfrm>
-            <a:off x="8641080" y="4480560"/>
-            <a:ext cx="1828800" cy="233172"/>
+            <a:off x="8641080" y="4087360"/>
+            <a:ext cx="1828800" cy="193852"/>
           </a:xfrm>
           <a:prstGeom prst="rect">
             <a:avLst/>
@@ -19064,8 +19905,8 @@
         </p:nvSpPr>
         <p:spPr>
           <a:xfrm>
-            <a:off x="8714232" y="4480560"/>
-            <a:ext cx="1719072" cy="233172"/>
+            <a:off x="8714232" y="4087360"/>
+            <a:ext cx="1719072" cy="193852"/>
           </a:xfrm>
           <a:prstGeom prst="rect">
             <a:avLst/>
@@ -19087,7 +19928,7 @@
               </a:spcAft>
             </a:pPr>
             <a:r>
-              <a:rPr sz="1050" b="0" i="0">
+              <a:rPr sz="1000" b="0" i="0">
                 <a:solidFill>
                   <a:srgbClr val="333840"/>
                 </a:solidFill>
@@ -19106,8 +19947,8 @@
         </p:nvSpPr>
         <p:spPr>
           <a:xfrm>
-            <a:off x="685800" y="4713732"/>
-            <a:ext cx="3017520" cy="233172"/>
+            <a:off x="685800" y="4281212"/>
+            <a:ext cx="3017520" cy="193852"/>
           </a:xfrm>
           <a:prstGeom prst="rect">
             <a:avLst/>
@@ -19150,8 +19991,8 @@
         </p:nvSpPr>
         <p:spPr>
           <a:xfrm>
-            <a:off x="758952" y="4713732"/>
-            <a:ext cx="2907792" cy="233172"/>
+            <a:off x="758952" y="4281212"/>
+            <a:ext cx="2907792" cy="193852"/>
           </a:xfrm>
           <a:prstGeom prst="rect">
             <a:avLst/>
@@ -19173,7 +20014,7 @@
               </a:spcAft>
             </a:pPr>
             <a:r>
-              <a:rPr sz="1050" b="1" i="0">
+              <a:rPr sz="1000" b="1" i="0">
                 <a:solidFill>
                   <a:srgbClr val="1E334E"/>
                 </a:solidFill>
@@ -19192,8 +20033,8 @@
         </p:nvSpPr>
         <p:spPr>
           <a:xfrm>
-            <a:off x="3703320" y="4713732"/>
-            <a:ext cx="1828800" cy="233172"/>
+            <a:off x="3703320" y="4281212"/>
+            <a:ext cx="1828800" cy="193852"/>
           </a:xfrm>
           <a:prstGeom prst="rect">
             <a:avLst/>
@@ -19236,8 +20077,8 @@
         </p:nvSpPr>
         <p:spPr>
           <a:xfrm>
-            <a:off x="3776472" y="4713732"/>
-            <a:ext cx="1719072" cy="233172"/>
+            <a:off x="3776472" y="4281212"/>
+            <a:ext cx="1719072" cy="193852"/>
           </a:xfrm>
           <a:prstGeom prst="rect">
             <a:avLst/>
@@ -19259,7 +20100,7 @@
               </a:spcAft>
             </a:pPr>
             <a:r>
-              <a:rPr sz="1050" b="0" i="0">
+              <a:rPr sz="1000" b="0" i="0">
                 <a:solidFill>
                   <a:srgbClr val="333840"/>
                 </a:solidFill>
@@ -19278,8 +20119,8 @@
         </p:nvSpPr>
         <p:spPr>
           <a:xfrm>
-            <a:off x="5532120" y="4713732"/>
-            <a:ext cx="1554480" cy="233172"/>
+            <a:off x="5532120" y="4281212"/>
+            <a:ext cx="1554480" cy="193852"/>
           </a:xfrm>
           <a:prstGeom prst="rect">
             <a:avLst/>
@@ -19322,8 +20163,8 @@
         </p:nvSpPr>
         <p:spPr>
           <a:xfrm>
-            <a:off x="5605272" y="4713732"/>
-            <a:ext cx="1444752" cy="233172"/>
+            <a:off x="5605272" y="4281212"/>
+            <a:ext cx="1444752" cy="193852"/>
           </a:xfrm>
           <a:prstGeom prst="rect">
             <a:avLst/>
@@ -19345,7 +20186,7 @@
               </a:spcAft>
             </a:pPr>
             <a:r>
-              <a:rPr sz="1050" b="0" i="0">
+              <a:rPr sz="1000" b="0" i="0">
                 <a:solidFill>
                   <a:srgbClr val="333840"/>
                 </a:solidFill>
@@ -19364,8 +20205,8 @@
         </p:nvSpPr>
         <p:spPr>
           <a:xfrm>
-            <a:off x="7086600" y="4713732"/>
-            <a:ext cx="1554480" cy="233172"/>
+            <a:off x="7086600" y="4281212"/>
+            <a:ext cx="1554480" cy="193852"/>
           </a:xfrm>
           <a:prstGeom prst="rect">
             <a:avLst/>
@@ -19408,8 +20249,8 @@
         </p:nvSpPr>
         <p:spPr>
           <a:xfrm>
-            <a:off x="7159752" y="4713732"/>
-            <a:ext cx="1444752" cy="233172"/>
+            <a:off x="7159752" y="4281212"/>
+            <a:ext cx="1444752" cy="193852"/>
           </a:xfrm>
           <a:prstGeom prst="rect">
             <a:avLst/>
@@ -19431,7 +20272,7 @@
               </a:spcAft>
             </a:pPr>
             <a:r>
-              <a:rPr sz="1050" b="0" i="0">
+              <a:rPr sz="1000" b="0" i="0">
                 <a:solidFill>
                   <a:srgbClr val="333840"/>
                 </a:solidFill>
@@ -19450,8 +20291,8 @@
         </p:nvSpPr>
         <p:spPr>
           <a:xfrm>
-            <a:off x="8641080" y="4713732"/>
-            <a:ext cx="1828800" cy="233172"/>
+            <a:off x="8641080" y="4281212"/>
+            <a:ext cx="1828800" cy="193852"/>
           </a:xfrm>
           <a:prstGeom prst="rect">
             <a:avLst/>
@@ -19494,8 +20335,8 @@
         </p:nvSpPr>
         <p:spPr>
           <a:xfrm>
-            <a:off x="8714232" y="4713732"/>
-            <a:ext cx="1719072" cy="233172"/>
+            <a:off x="8714232" y="4281212"/>
+            <a:ext cx="1719072" cy="193852"/>
           </a:xfrm>
           <a:prstGeom prst="rect">
             <a:avLst/>
@@ -19517,7 +20358,7 @@
               </a:spcAft>
             </a:pPr>
             <a:r>
-              <a:rPr sz="1050" b="0" i="0">
+              <a:rPr sz="1000" b="0" i="0">
                 <a:solidFill>
                   <a:srgbClr val="333840"/>
                 </a:solidFill>
@@ -19536,8 +20377,8 @@
         </p:nvSpPr>
         <p:spPr>
           <a:xfrm>
-            <a:off x="685800" y="4946904"/>
-            <a:ext cx="3017520" cy="233172"/>
+            <a:off x="685800" y="4475064"/>
+            <a:ext cx="3017520" cy="193852"/>
           </a:xfrm>
           <a:prstGeom prst="rect">
             <a:avLst/>
@@ -19580,8 +20421,8 @@
         </p:nvSpPr>
         <p:spPr>
           <a:xfrm>
-            <a:off x="758952" y="4946904"/>
-            <a:ext cx="2907792" cy="233172"/>
+            <a:off x="758952" y="4475064"/>
+            <a:ext cx="2907792" cy="193852"/>
           </a:xfrm>
           <a:prstGeom prst="rect">
             <a:avLst/>
@@ -19603,7 +20444,7 @@
               </a:spcAft>
             </a:pPr>
             <a:r>
-              <a:rPr sz="1050" b="1" i="0">
+              <a:rPr sz="1000" b="1" i="0">
                 <a:solidFill>
                   <a:srgbClr val="1E334E"/>
                 </a:solidFill>
@@ -19622,8 +20463,8 @@
         </p:nvSpPr>
         <p:spPr>
           <a:xfrm>
-            <a:off x="3703320" y="4946904"/>
-            <a:ext cx="1828800" cy="233172"/>
+            <a:off x="3703320" y="4475064"/>
+            <a:ext cx="1828800" cy="193852"/>
           </a:xfrm>
           <a:prstGeom prst="rect">
             <a:avLst/>
@@ -19666,8 +20507,8 @@
         </p:nvSpPr>
         <p:spPr>
           <a:xfrm>
-            <a:off x="3776472" y="4946904"/>
-            <a:ext cx="1719072" cy="233172"/>
+            <a:off x="3776472" y="4475064"/>
+            <a:ext cx="1719072" cy="193852"/>
           </a:xfrm>
           <a:prstGeom prst="rect">
             <a:avLst/>
@@ -19689,7 +20530,7 @@
               </a:spcAft>
             </a:pPr>
             <a:r>
-              <a:rPr sz="1050" b="0" i="0">
+              <a:rPr sz="1000" b="0" i="0">
                 <a:solidFill>
                   <a:srgbClr val="333840"/>
                 </a:solidFill>
@@ -19708,8 +20549,8 @@
         </p:nvSpPr>
         <p:spPr>
           <a:xfrm>
-            <a:off x="5532120" y="4946904"/>
-            <a:ext cx="1554480" cy="233172"/>
+            <a:off x="5532120" y="4475064"/>
+            <a:ext cx="1554480" cy="193852"/>
           </a:xfrm>
           <a:prstGeom prst="rect">
             <a:avLst/>
@@ -19752,8 +20593,8 @@
         </p:nvSpPr>
         <p:spPr>
           <a:xfrm>
-            <a:off x="5605272" y="4946904"/>
-            <a:ext cx="1444752" cy="233172"/>
+            <a:off x="5605272" y="4475064"/>
+            <a:ext cx="1444752" cy="193852"/>
           </a:xfrm>
           <a:prstGeom prst="rect">
             <a:avLst/>
@@ -19775,7 +20616,7 @@
               </a:spcAft>
             </a:pPr>
             <a:r>
-              <a:rPr sz="1050" b="0" i="0">
+              <a:rPr sz="1000" b="0" i="0">
                 <a:solidFill>
                   <a:srgbClr val="A84A4A"/>
                 </a:solidFill>
@@ -19794,8 +20635,8 @@
         </p:nvSpPr>
         <p:spPr>
           <a:xfrm>
-            <a:off x="7086600" y="4946904"/>
-            <a:ext cx="1554480" cy="233172"/>
+            <a:off x="7086600" y="4475064"/>
+            <a:ext cx="1554480" cy="193852"/>
           </a:xfrm>
           <a:prstGeom prst="rect">
             <a:avLst/>
@@ -19838,8 +20679,8 @@
         </p:nvSpPr>
         <p:spPr>
           <a:xfrm>
-            <a:off x="7159752" y="4946904"/>
-            <a:ext cx="1444752" cy="233172"/>
+            <a:off x="7159752" y="4475064"/>
+            <a:ext cx="1444752" cy="193852"/>
           </a:xfrm>
           <a:prstGeom prst="rect">
             <a:avLst/>
@@ -19861,7 +20702,7 @@
               </a:spcAft>
             </a:pPr>
             <a:r>
-              <a:rPr sz="1050" b="0" i="0">
+              <a:rPr sz="1000" b="0" i="0">
                 <a:solidFill>
                   <a:srgbClr val="A84A4A"/>
                 </a:solidFill>
@@ -19880,8 +20721,8 @@
         </p:nvSpPr>
         <p:spPr>
           <a:xfrm>
-            <a:off x="8641080" y="4946904"/>
-            <a:ext cx="1828800" cy="233172"/>
+            <a:off x="8641080" y="4475064"/>
+            <a:ext cx="1828800" cy="193852"/>
           </a:xfrm>
           <a:prstGeom prst="rect">
             <a:avLst/>
@@ -19924,8 +20765,8 @@
         </p:nvSpPr>
         <p:spPr>
           <a:xfrm>
-            <a:off x="8714232" y="4946904"/>
-            <a:ext cx="1719072" cy="233172"/>
+            <a:off x="8714232" y="4475064"/>
+            <a:ext cx="1719072" cy="193852"/>
           </a:xfrm>
           <a:prstGeom prst="rect">
             <a:avLst/>
@@ -19947,7 +20788,7 @@
               </a:spcAft>
             </a:pPr>
             <a:r>
-              <a:rPr sz="1050" b="0" i="0">
+              <a:rPr sz="1000" b="0" i="0">
                 <a:solidFill>
                   <a:srgbClr val="A84A4A"/>
                 </a:solidFill>
@@ -19966,8 +20807,8 @@
         </p:nvSpPr>
         <p:spPr>
           <a:xfrm>
-            <a:off x="685800" y="5180076"/>
-            <a:ext cx="3017520" cy="233172"/>
+            <a:off x="685800" y="4668916"/>
+            <a:ext cx="3017520" cy="193852"/>
           </a:xfrm>
           <a:prstGeom prst="rect">
             <a:avLst/>
@@ -20010,8 +20851,8 @@
         </p:nvSpPr>
         <p:spPr>
           <a:xfrm>
-            <a:off x="758952" y="5180076"/>
-            <a:ext cx="2907792" cy="233172"/>
+            <a:off x="758952" y="4668916"/>
+            <a:ext cx="2907792" cy="193852"/>
           </a:xfrm>
           <a:prstGeom prst="rect">
             <a:avLst/>
@@ -20033,7 +20874,7 @@
               </a:spcAft>
             </a:pPr>
             <a:r>
-              <a:rPr sz="1050" b="1" i="0">
+              <a:rPr sz="1000" b="1" i="0">
                 <a:solidFill>
                   <a:srgbClr val="1E334E"/>
                 </a:solidFill>
@@ -20052,8 +20893,8 @@
         </p:nvSpPr>
         <p:spPr>
           <a:xfrm>
-            <a:off x="3703320" y="5180076"/>
-            <a:ext cx="1828800" cy="233172"/>
+            <a:off x="3703320" y="4668916"/>
+            <a:ext cx="1828800" cy="193852"/>
           </a:xfrm>
           <a:prstGeom prst="rect">
             <a:avLst/>
@@ -20096,8 +20937,8 @@
         </p:nvSpPr>
         <p:spPr>
           <a:xfrm>
-            <a:off x="3776472" y="5180076"/>
-            <a:ext cx="1719072" cy="233172"/>
+            <a:off x="3776472" y="4668916"/>
+            <a:ext cx="1719072" cy="193852"/>
           </a:xfrm>
           <a:prstGeom prst="rect">
             <a:avLst/>
@@ -20119,7 +20960,7 @@
               </a:spcAft>
             </a:pPr>
             <a:r>
-              <a:rPr sz="1050" b="0" i="0">
+              <a:rPr sz="1000" b="0" i="0">
                 <a:solidFill>
                   <a:srgbClr val="333840"/>
                 </a:solidFill>
@@ -20138,8 +20979,8 @@
         </p:nvSpPr>
         <p:spPr>
           <a:xfrm>
-            <a:off x="5532120" y="5180076"/>
-            <a:ext cx="1554480" cy="233172"/>
+            <a:off x="5532120" y="4668916"/>
+            <a:ext cx="1554480" cy="193852"/>
           </a:xfrm>
           <a:prstGeom prst="rect">
             <a:avLst/>
@@ -20182,8 +21023,8 @@
         </p:nvSpPr>
         <p:spPr>
           <a:xfrm>
-            <a:off x="5605272" y="5180076"/>
-            <a:ext cx="1444752" cy="233172"/>
+            <a:off x="5605272" y="4668916"/>
+            <a:ext cx="1444752" cy="193852"/>
           </a:xfrm>
           <a:prstGeom prst="rect">
             <a:avLst/>
@@ -20205,7 +21046,7 @@
               </a:spcAft>
             </a:pPr>
             <a:r>
-              <a:rPr sz="1050" b="0" i="0">
+              <a:rPr sz="1000" b="0" i="0">
                 <a:solidFill>
                   <a:srgbClr val="333840"/>
                 </a:solidFill>
@@ -20224,8 +21065,8 @@
         </p:nvSpPr>
         <p:spPr>
           <a:xfrm>
-            <a:off x="7086600" y="5180076"/>
-            <a:ext cx="1554480" cy="233172"/>
+            <a:off x="7086600" y="4668916"/>
+            <a:ext cx="1554480" cy="193852"/>
           </a:xfrm>
           <a:prstGeom prst="rect">
             <a:avLst/>
@@ -20268,8 +21109,8 @@
         </p:nvSpPr>
         <p:spPr>
           <a:xfrm>
-            <a:off x="7159752" y="5180076"/>
-            <a:ext cx="1444752" cy="233172"/>
+            <a:off x="7159752" y="4668916"/>
+            <a:ext cx="1444752" cy="193852"/>
           </a:xfrm>
           <a:prstGeom prst="rect">
             <a:avLst/>
@@ -20291,7 +21132,7 @@
               </a:spcAft>
             </a:pPr>
             <a:r>
-              <a:rPr sz="1050" b="0" i="0">
+              <a:rPr sz="1000" b="0" i="0">
                 <a:solidFill>
                   <a:srgbClr val="333840"/>
                 </a:solidFill>
@@ -20310,8 +21151,8 @@
         </p:nvSpPr>
         <p:spPr>
           <a:xfrm>
-            <a:off x="8641080" y="5180076"/>
-            <a:ext cx="1828800" cy="233172"/>
+            <a:off x="8641080" y="4668916"/>
+            <a:ext cx="1828800" cy="193852"/>
           </a:xfrm>
           <a:prstGeom prst="rect">
             <a:avLst/>
@@ -20354,8 +21195,8 @@
         </p:nvSpPr>
         <p:spPr>
           <a:xfrm>
-            <a:off x="8714232" y="5180076"/>
-            <a:ext cx="1719072" cy="233172"/>
+            <a:off x="8714232" y="4668916"/>
+            <a:ext cx="1719072" cy="193852"/>
           </a:xfrm>
           <a:prstGeom prst="rect">
             <a:avLst/>
@@ -20377,7 +21218,7 @@
               </a:spcAft>
             </a:pPr>
             <a:r>
-              <a:rPr sz="1050" b="0" i="0">
+              <a:rPr sz="1000" b="0" i="0">
                 <a:solidFill>
                   <a:srgbClr val="333840"/>
                 </a:solidFill>
@@ -20396,8 +21237,8 @@
         </p:nvSpPr>
         <p:spPr>
           <a:xfrm>
-            <a:off x="685800" y="5413248"/>
-            <a:ext cx="3017520" cy="233172"/>
+            <a:off x="685800" y="4862768"/>
+            <a:ext cx="3017520" cy="193852"/>
           </a:xfrm>
           <a:prstGeom prst="rect">
             <a:avLst/>
@@ -20440,8 +21281,8 @@
         </p:nvSpPr>
         <p:spPr>
           <a:xfrm>
-            <a:off x="758952" y="5413248"/>
-            <a:ext cx="2907792" cy="233172"/>
+            <a:off x="758952" y="4862768"/>
+            <a:ext cx="2907792" cy="193852"/>
           </a:xfrm>
           <a:prstGeom prst="rect">
             <a:avLst/>
@@ -20463,7 +21304,7 @@
               </a:spcAft>
             </a:pPr>
             <a:r>
-              <a:rPr sz="1050" b="1" i="0">
+              <a:rPr sz="1000" b="1" i="0">
                 <a:solidFill>
                   <a:srgbClr val="1E334E"/>
                 </a:solidFill>
@@ -20482,8 +21323,8 @@
         </p:nvSpPr>
         <p:spPr>
           <a:xfrm>
-            <a:off x="3703320" y="5413248"/>
-            <a:ext cx="1828800" cy="233172"/>
+            <a:off x="3703320" y="4862768"/>
+            <a:ext cx="1828800" cy="193852"/>
           </a:xfrm>
           <a:prstGeom prst="rect">
             <a:avLst/>
@@ -20526,8 +21367,8 @@
         </p:nvSpPr>
         <p:spPr>
           <a:xfrm>
-            <a:off x="3776472" y="5413248"/>
-            <a:ext cx="1719072" cy="233172"/>
+            <a:off x="3776472" y="4862768"/>
+            <a:ext cx="1719072" cy="193852"/>
           </a:xfrm>
           <a:prstGeom prst="rect">
             <a:avLst/>
@@ -20549,7 +21390,7 @@
               </a:spcAft>
             </a:pPr>
             <a:r>
-              <a:rPr sz="1050" b="0" i="0">
+              <a:rPr sz="1000" b="0" i="0">
                 <a:solidFill>
                   <a:srgbClr val="333840"/>
                 </a:solidFill>
@@ -20568,8 +21409,8 @@
         </p:nvSpPr>
         <p:spPr>
           <a:xfrm>
-            <a:off x="5532120" y="5413248"/>
-            <a:ext cx="1554480" cy="233172"/>
+            <a:off x="5532120" y="4862768"/>
+            <a:ext cx="1554480" cy="193852"/>
           </a:xfrm>
           <a:prstGeom prst="rect">
             <a:avLst/>
@@ -20612,8 +21453,8 @@
         </p:nvSpPr>
         <p:spPr>
           <a:xfrm>
-            <a:off x="5605272" y="5413248"/>
-            <a:ext cx="1444752" cy="233172"/>
+            <a:off x="5605272" y="4862768"/>
+            <a:ext cx="1444752" cy="193852"/>
           </a:xfrm>
           <a:prstGeom prst="rect">
             <a:avLst/>
@@ -20635,7 +21476,7 @@
               </a:spcAft>
             </a:pPr>
             <a:r>
-              <a:rPr sz="1050" b="0" i="0">
+              <a:rPr sz="1000" b="0" i="0">
                 <a:solidFill>
                   <a:srgbClr val="333840"/>
                 </a:solidFill>
@@ -20654,8 +21495,8 @@
         </p:nvSpPr>
         <p:spPr>
           <a:xfrm>
-            <a:off x="7086600" y="5413248"/>
-            <a:ext cx="1554480" cy="233172"/>
+            <a:off x="7086600" y="4862768"/>
+            <a:ext cx="1554480" cy="193852"/>
           </a:xfrm>
           <a:prstGeom prst="rect">
             <a:avLst/>
@@ -20698,8 +21539,8 @@
         </p:nvSpPr>
         <p:spPr>
           <a:xfrm>
-            <a:off x="7159752" y="5413248"/>
-            <a:ext cx="1444752" cy="233172"/>
+            <a:off x="7159752" y="4862768"/>
+            <a:ext cx="1444752" cy="193852"/>
           </a:xfrm>
           <a:prstGeom prst="rect">
             <a:avLst/>
@@ -20721,7 +21562,7 @@
               </a:spcAft>
             </a:pPr>
             <a:r>
-              <a:rPr sz="1050" b="0" i="0">
+              <a:rPr sz="1000" b="0" i="0">
                 <a:solidFill>
                   <a:srgbClr val="333840"/>
                 </a:solidFill>
@@ -20740,8 +21581,8 @@
         </p:nvSpPr>
         <p:spPr>
           <a:xfrm>
-            <a:off x="8641080" y="5413248"/>
-            <a:ext cx="1828800" cy="233172"/>
+            <a:off x="8641080" y="4862768"/>
+            <a:ext cx="1828800" cy="193852"/>
           </a:xfrm>
           <a:prstGeom prst="rect">
             <a:avLst/>
@@ -20784,8 +21625,8 @@
         </p:nvSpPr>
         <p:spPr>
           <a:xfrm>
-            <a:off x="8714232" y="5413248"/>
-            <a:ext cx="1719072" cy="233172"/>
+            <a:off x="8714232" y="4862768"/>
+            <a:ext cx="1719072" cy="193852"/>
           </a:xfrm>
           <a:prstGeom prst="rect">
             <a:avLst/>
@@ -20807,7 +21648,7 @@
               </a:spcAft>
             </a:pPr>
             <a:r>
-              <a:rPr sz="1050" b="0" i="0">
+              <a:rPr sz="1000" b="0" i="0">
                 <a:solidFill>
                   <a:srgbClr val="333840"/>
                 </a:solidFill>
@@ -20826,8 +21667,8 @@
         </p:nvSpPr>
         <p:spPr>
           <a:xfrm>
-            <a:off x="685800" y="5646420"/>
-            <a:ext cx="3017520" cy="233172"/>
+            <a:off x="685800" y="5056620"/>
+            <a:ext cx="3017520" cy="193852"/>
           </a:xfrm>
           <a:prstGeom prst="rect">
             <a:avLst/>
@@ -20870,8 +21711,8 @@
         </p:nvSpPr>
         <p:spPr>
           <a:xfrm>
-            <a:off x="758952" y="5646420"/>
-            <a:ext cx="2907792" cy="233172"/>
+            <a:off x="758952" y="5056620"/>
+            <a:ext cx="2907792" cy="193852"/>
           </a:xfrm>
           <a:prstGeom prst="rect">
             <a:avLst/>
@@ -20893,7 +21734,7 @@
               </a:spcAft>
             </a:pPr>
             <a:r>
-              <a:rPr sz="1050" b="1" i="0">
+              <a:rPr sz="1000" b="1" i="0">
                 <a:solidFill>
                   <a:srgbClr val="1E334E"/>
                 </a:solidFill>
@@ -20912,8 +21753,8 @@
         </p:nvSpPr>
         <p:spPr>
           <a:xfrm>
-            <a:off x="3703320" y="5646420"/>
-            <a:ext cx="1828800" cy="233172"/>
+            <a:off x="3703320" y="5056620"/>
+            <a:ext cx="1828800" cy="193852"/>
           </a:xfrm>
           <a:prstGeom prst="rect">
             <a:avLst/>
@@ -20956,8 +21797,8 @@
         </p:nvSpPr>
         <p:spPr>
           <a:xfrm>
-            <a:off x="3776472" y="5646420"/>
-            <a:ext cx="1719072" cy="233172"/>
+            <a:off x="3776472" y="5056620"/>
+            <a:ext cx="1719072" cy="193852"/>
           </a:xfrm>
           <a:prstGeom prst="rect">
             <a:avLst/>
@@ -20979,7 +21820,7 @@
               </a:spcAft>
             </a:pPr>
             <a:r>
-              <a:rPr sz="1050" b="0" i="0">
+              <a:rPr sz="1000" b="0" i="0">
                 <a:solidFill>
                   <a:srgbClr val="333840"/>
                 </a:solidFill>
@@ -20998,8 +21839,8 @@
         </p:nvSpPr>
         <p:spPr>
           <a:xfrm>
-            <a:off x="5532120" y="5646420"/>
-            <a:ext cx="1554480" cy="233172"/>
+            <a:off x="5532120" y="5056620"/>
+            <a:ext cx="1554480" cy="193852"/>
           </a:xfrm>
           <a:prstGeom prst="rect">
             <a:avLst/>
@@ -21042,8 +21883,8 @@
         </p:nvSpPr>
         <p:spPr>
           <a:xfrm>
-            <a:off x="5605272" y="5646420"/>
-            <a:ext cx="1444752" cy="233172"/>
+            <a:off x="5605272" y="5056620"/>
+            <a:ext cx="1444752" cy="193852"/>
           </a:xfrm>
           <a:prstGeom prst="rect">
             <a:avLst/>
@@ -21065,7 +21906,7 @@
               </a:spcAft>
             </a:pPr>
             <a:r>
-              <a:rPr sz="1050" b="0" i="0">
+              <a:rPr sz="1000" b="0" i="0">
                 <a:solidFill>
                   <a:srgbClr val="333840"/>
                 </a:solidFill>
@@ -21084,8 +21925,8 @@
         </p:nvSpPr>
         <p:spPr>
           <a:xfrm>
-            <a:off x="7086600" y="5646420"/>
-            <a:ext cx="1554480" cy="233172"/>
+            <a:off x="7086600" y="5056620"/>
+            <a:ext cx="1554480" cy="193852"/>
           </a:xfrm>
           <a:prstGeom prst="rect">
             <a:avLst/>
@@ -21128,8 +21969,8 @@
         </p:nvSpPr>
         <p:spPr>
           <a:xfrm>
-            <a:off x="7159752" y="5646420"/>
-            <a:ext cx="1444752" cy="233172"/>
+            <a:off x="7159752" y="5056620"/>
+            <a:ext cx="1444752" cy="193852"/>
           </a:xfrm>
           <a:prstGeom prst="rect">
             <a:avLst/>
@@ -21151,7 +21992,7 @@
               </a:spcAft>
             </a:pPr>
             <a:r>
-              <a:rPr sz="1050" b="0" i="0">
+              <a:rPr sz="1000" b="0" i="0">
                 <a:solidFill>
                   <a:srgbClr val="333840"/>
                 </a:solidFill>
@@ -21170,8 +22011,8 @@
         </p:nvSpPr>
         <p:spPr>
           <a:xfrm>
-            <a:off x="8641080" y="5646420"/>
-            <a:ext cx="1828800" cy="233172"/>
+            <a:off x="8641080" y="5056620"/>
+            <a:ext cx="1828800" cy="193852"/>
           </a:xfrm>
           <a:prstGeom prst="rect">
             <a:avLst/>
@@ -21214,8 +22055,8 @@
         </p:nvSpPr>
         <p:spPr>
           <a:xfrm>
-            <a:off x="8714232" y="5646420"/>
-            <a:ext cx="1719072" cy="233172"/>
+            <a:off x="8714232" y="5056620"/>
+            <a:ext cx="1719072" cy="193852"/>
           </a:xfrm>
           <a:prstGeom prst="rect">
             <a:avLst/>
@@ -21237,7 +22078,7 @@
               </a:spcAft>
             </a:pPr>
             <a:r>
-              <a:rPr sz="1050" b="0" i="0">
+              <a:rPr sz="1000" b="0" i="0">
                 <a:solidFill>
                   <a:srgbClr val="333840"/>
                 </a:solidFill>
@@ -21256,8 +22097,8 @@
         </p:nvSpPr>
         <p:spPr>
           <a:xfrm>
-            <a:off x="685800" y="5879592"/>
-            <a:ext cx="3017520" cy="233172"/>
+            <a:off x="685800" y="5250472"/>
+            <a:ext cx="3017520" cy="193852"/>
           </a:xfrm>
           <a:prstGeom prst="rect">
             <a:avLst/>
@@ -21300,8 +22141,8 @@
         </p:nvSpPr>
         <p:spPr>
           <a:xfrm>
-            <a:off x="758952" y="5879592"/>
-            <a:ext cx="2907792" cy="233172"/>
+            <a:off x="758952" y="5250472"/>
+            <a:ext cx="2907792" cy="193852"/>
           </a:xfrm>
           <a:prstGeom prst="rect">
             <a:avLst/>
@@ -21323,7 +22164,7 @@
               </a:spcAft>
             </a:pPr>
             <a:r>
-              <a:rPr sz="1050" b="1" i="0">
+              <a:rPr sz="1000" b="1" i="0">
                 <a:solidFill>
                   <a:srgbClr val="1E334E"/>
                 </a:solidFill>
@@ -21342,8 +22183,8 @@
         </p:nvSpPr>
         <p:spPr>
           <a:xfrm>
-            <a:off x="3703320" y="5879592"/>
-            <a:ext cx="1828800" cy="233172"/>
+            <a:off x="3703320" y="5250472"/>
+            <a:ext cx="1828800" cy="193852"/>
           </a:xfrm>
           <a:prstGeom prst="rect">
             <a:avLst/>
@@ -21386,8 +22227,8 @@
         </p:nvSpPr>
         <p:spPr>
           <a:xfrm>
-            <a:off x="3776472" y="5879592"/>
-            <a:ext cx="1719072" cy="233172"/>
+            <a:off x="3776472" y="5250472"/>
+            <a:ext cx="1719072" cy="193852"/>
           </a:xfrm>
           <a:prstGeom prst="rect">
             <a:avLst/>
@@ -21409,7 +22250,7 @@
               </a:spcAft>
             </a:pPr>
             <a:r>
-              <a:rPr sz="1050" b="0" i="0">
+              <a:rPr sz="1000" b="0" i="0">
                 <a:solidFill>
                   <a:srgbClr val="333840"/>
                 </a:solidFill>
@@ -21428,8 +22269,8 @@
         </p:nvSpPr>
         <p:spPr>
           <a:xfrm>
-            <a:off x="5532120" y="5879592"/>
-            <a:ext cx="1554480" cy="233172"/>
+            <a:off x="5532120" y="5250472"/>
+            <a:ext cx="1554480" cy="193852"/>
           </a:xfrm>
           <a:prstGeom prst="rect">
             <a:avLst/>
@@ -21472,8 +22313,8 @@
         </p:nvSpPr>
         <p:spPr>
           <a:xfrm>
-            <a:off x="5605272" y="5879592"/>
-            <a:ext cx="1444752" cy="233172"/>
+            <a:off x="5605272" y="5250472"/>
+            <a:ext cx="1444752" cy="193852"/>
           </a:xfrm>
           <a:prstGeom prst="rect">
             <a:avLst/>
@@ -21495,7 +22336,7 @@
               </a:spcAft>
             </a:pPr>
             <a:r>
-              <a:rPr sz="1050" b="0" i="0">
+              <a:rPr sz="1000" b="0" i="0">
                 <a:solidFill>
                   <a:srgbClr val="333840"/>
                 </a:solidFill>
@@ -21514,8 +22355,8 @@
         </p:nvSpPr>
         <p:spPr>
           <a:xfrm>
-            <a:off x="7086600" y="5879592"/>
-            <a:ext cx="1554480" cy="233172"/>
+            <a:off x="7086600" y="5250472"/>
+            <a:ext cx="1554480" cy="193852"/>
           </a:xfrm>
           <a:prstGeom prst="rect">
             <a:avLst/>
@@ -21558,8 +22399,8 @@
         </p:nvSpPr>
         <p:spPr>
           <a:xfrm>
-            <a:off x="7159752" y="5879592"/>
-            <a:ext cx="1444752" cy="233172"/>
+            <a:off x="7159752" y="5250472"/>
+            <a:ext cx="1444752" cy="193852"/>
           </a:xfrm>
           <a:prstGeom prst="rect">
             <a:avLst/>
@@ -21581,7 +22422,7 @@
               </a:spcAft>
             </a:pPr>
             <a:r>
-              <a:rPr sz="1050" b="0" i="0">
+              <a:rPr sz="1000" b="0" i="0">
                 <a:solidFill>
                   <a:srgbClr val="333840"/>
                 </a:solidFill>
@@ -21600,8 +22441,8 @@
         </p:nvSpPr>
         <p:spPr>
           <a:xfrm>
-            <a:off x="8641080" y="5879592"/>
-            <a:ext cx="1828800" cy="233172"/>
+            <a:off x="8641080" y="5250472"/>
+            <a:ext cx="1828800" cy="193852"/>
           </a:xfrm>
           <a:prstGeom prst="rect">
             <a:avLst/>
@@ -21644,8 +22485,8 @@
         </p:nvSpPr>
         <p:spPr>
           <a:xfrm>
-            <a:off x="8714232" y="5879592"/>
-            <a:ext cx="1719072" cy="233172"/>
+            <a:off x="8714232" y="5250472"/>
+            <a:ext cx="1719072" cy="193852"/>
           </a:xfrm>
           <a:prstGeom prst="rect">
             <a:avLst/>
@@ -21667,7 +22508,7 @@
               </a:spcAft>
             </a:pPr>
             <a:r>
-              <a:rPr sz="1050" b="0" i="0">
+              <a:rPr sz="1000" b="0" i="0">
                 <a:solidFill>
                   <a:srgbClr val="333840"/>
                 </a:solidFill>
@@ -21686,8 +22527,8 @@
         </p:nvSpPr>
         <p:spPr>
           <a:xfrm>
-            <a:off x="685800" y="6112764"/>
-            <a:ext cx="3017520" cy="233172"/>
+            <a:off x="685800" y="5444324"/>
+            <a:ext cx="3017520" cy="193852"/>
           </a:xfrm>
           <a:prstGeom prst="rect">
             <a:avLst/>
@@ -21730,8 +22571,8 @@
         </p:nvSpPr>
         <p:spPr>
           <a:xfrm>
-            <a:off x="758952" y="6112764"/>
-            <a:ext cx="2907792" cy="233172"/>
+            <a:off x="758952" y="5444324"/>
+            <a:ext cx="2907792" cy="193852"/>
           </a:xfrm>
           <a:prstGeom prst="rect">
             <a:avLst/>
@@ -21753,7 +22594,7 @@
               </a:spcAft>
             </a:pPr>
             <a:r>
-              <a:rPr sz="1050" b="1" i="0">
+              <a:rPr sz="1000" b="1" i="0">
                 <a:solidFill>
                   <a:srgbClr val="1E334E"/>
                 </a:solidFill>
@@ -21772,8 +22613,8 @@
         </p:nvSpPr>
         <p:spPr>
           <a:xfrm>
-            <a:off x="3703320" y="6112764"/>
-            <a:ext cx="1828800" cy="233172"/>
+            <a:off x="3703320" y="5444324"/>
+            <a:ext cx="1828800" cy="193852"/>
           </a:xfrm>
           <a:prstGeom prst="rect">
             <a:avLst/>
@@ -21816,8 +22657,8 @@
         </p:nvSpPr>
         <p:spPr>
           <a:xfrm>
-            <a:off x="3776472" y="6112764"/>
-            <a:ext cx="1719072" cy="233172"/>
+            <a:off x="3776472" y="5444324"/>
+            <a:ext cx="1719072" cy="193852"/>
           </a:xfrm>
           <a:prstGeom prst="rect">
             <a:avLst/>
@@ -21839,7 +22680,7 @@
               </a:spcAft>
             </a:pPr>
             <a:r>
-              <a:rPr sz="1050" b="0" i="0">
+              <a:rPr sz="1000" b="0" i="0">
                 <a:solidFill>
                   <a:srgbClr val="333840"/>
                 </a:solidFill>
@@ -21858,8 +22699,8 @@
         </p:nvSpPr>
         <p:spPr>
           <a:xfrm>
-            <a:off x="5532120" y="6112764"/>
-            <a:ext cx="1554480" cy="233172"/>
+            <a:off x="5532120" y="5444324"/>
+            <a:ext cx="1554480" cy="193852"/>
           </a:xfrm>
           <a:prstGeom prst="rect">
             <a:avLst/>
@@ -21902,8 +22743,8 @@
         </p:nvSpPr>
         <p:spPr>
           <a:xfrm>
-            <a:off x="5605272" y="6112764"/>
-            <a:ext cx="1444752" cy="233172"/>
+            <a:off x="5605272" y="5444324"/>
+            <a:ext cx="1444752" cy="193852"/>
           </a:xfrm>
           <a:prstGeom prst="rect">
             <a:avLst/>
@@ -21925,7 +22766,7 @@
               </a:spcAft>
             </a:pPr>
             <a:r>
-              <a:rPr sz="1050" b="0" i="0">
+              <a:rPr sz="1000" b="0" i="0">
                 <a:solidFill>
                   <a:srgbClr val="333840"/>
                 </a:solidFill>
@@ -21944,8 +22785,8 @@
         </p:nvSpPr>
         <p:spPr>
           <a:xfrm>
-            <a:off x="7086600" y="6112764"/>
-            <a:ext cx="1554480" cy="233172"/>
+            <a:off x="7086600" y="5444324"/>
+            <a:ext cx="1554480" cy="193852"/>
           </a:xfrm>
           <a:prstGeom prst="rect">
             <a:avLst/>
@@ -21988,8 +22829,8 @@
         </p:nvSpPr>
         <p:spPr>
           <a:xfrm>
-            <a:off x="7159752" y="6112764"/>
-            <a:ext cx="1444752" cy="233172"/>
+            <a:off x="7159752" y="5444324"/>
+            <a:ext cx="1444752" cy="193852"/>
           </a:xfrm>
           <a:prstGeom prst="rect">
             <a:avLst/>
@@ -22011,7 +22852,7 @@
               </a:spcAft>
             </a:pPr>
             <a:r>
-              <a:rPr sz="1050" b="0" i="0">
+              <a:rPr sz="1000" b="0" i="0">
                 <a:solidFill>
                   <a:srgbClr val="333840"/>
                 </a:solidFill>
@@ -22030,8 +22871,8 @@
         </p:nvSpPr>
         <p:spPr>
           <a:xfrm>
-            <a:off x="8641080" y="6112764"/>
-            <a:ext cx="1828800" cy="233172"/>
+            <a:off x="8641080" y="5444324"/>
+            <a:ext cx="1828800" cy="193852"/>
           </a:xfrm>
           <a:prstGeom prst="rect">
             <a:avLst/>
@@ -22074,8 +22915,8 @@
         </p:nvSpPr>
         <p:spPr>
           <a:xfrm>
-            <a:off x="8714232" y="6112764"/>
-            <a:ext cx="1719072" cy="233172"/>
+            <a:off x="8714232" y="5444324"/>
+            <a:ext cx="1719072" cy="193852"/>
           </a:xfrm>
           <a:prstGeom prst="rect">
             <a:avLst/>
@@ -22097,7 +22938,7 @@
               </a:spcAft>
             </a:pPr>
             <a:r>
-              <a:rPr sz="1050" b="0" i="0">
+              <a:rPr sz="1000" b="0" i="0">
                 <a:solidFill>
                   <a:srgbClr val="333840"/>
                 </a:solidFill>
@@ -22116,7 +22957,7 @@
         </p:nvSpPr>
         <p:spPr>
           <a:xfrm>
-            <a:off x="685800" y="6437376"/>
+            <a:off x="685800" y="5729616"/>
             <a:ext cx="9784080" cy="310896"/>
           </a:xfrm>
           <a:prstGeom prst="rect">
@@ -22160,7 +23001,7 @@
         </p:nvSpPr>
         <p:spPr>
           <a:xfrm>
-            <a:off x="822960" y="6437376"/>
+            <a:off x="822960" y="5729616"/>
             <a:ext cx="9509760" cy="310896"/>
           </a:xfrm>
           <a:prstGeom prst="rect">
@@ -22202,8 +23043,8 @@
         </p:nvSpPr>
         <p:spPr>
           <a:xfrm>
-            <a:off x="685800" y="6355080"/>
-            <a:ext cx="10789920" cy="365760"/>
+            <a:off x="685800" y="6113664"/>
+            <a:ext cx="10789920" cy="320040"/>
           </a:xfrm>
           <a:prstGeom prst="rect">
             <a:avLst/>

--- a/Athanase_Engaged_Ownership_Allocator_Deck.pptx
+++ b/Athanase_Engaged_Ownership_Allocator_Deck.pptx
@@ -149,7 +149,7 @@
                   <a:srgbClr val="5A636E"/>
                 </a:solidFill>
               </a:rPr>
-              <a:t>“Probability decay”: strategy efficiency over a CEO cycle (%)</a:t>
+              <a:t>Figure 1.  “Probability decay”: strategy efficiency over a CEO cycle (%)</a:t>
             </a:r>
           </a:p>
         </c:rich>
@@ -183,6 +183,30 @@
               </a:solidFill>
             </a:ln>
           </c:spPr>
+          <c:dLbls>
+            <c:numFmt formatCode="0&quot;%&quot;" sourceLinked="0"/>
+            <c:txPr>
+              <a:bodyPr/>
+              <a:lstStyle/>
+              <a:p>
+                <a:pPr>
+                  <a:defRPr sz="900">
+                    <a:solidFill>
+                      <a:srgbClr val="1E334E"/>
+                    </a:solidFill>
+                  </a:defRPr>
+                </a:pPr>
+              </a:p>
+            </c:txPr>
+            <c:dLblPos val="t"/>
+            <c:showLegendKey val="0"/>
+            <c:showVal val="0"/>
+            <c:showCatName val="0"/>
+            <c:showSerName val="0"/>
+            <c:showPercent val="0"/>
+            <c:showBubbleSize val="0"/>
+            <c:showLeaderLines val="1"/>
+          </c:dLbls>
           <c:cat>
             <c:strRef>
               <c:f>Sheet1!$A$2:$A$9</c:f>
@@ -341,7 +365,7 @@
                   <a:srgbClr val="5A636E"/>
                 </a:solidFill>
               </a:rPr>
-              <a:t>Same destination, different reported path (indexed to 100)</a:t>
+              <a:t>Figure 3.  Same destination, different reported path (indexed to 100)</a:t>
             </a:r>
           </a:p>
         </c:rich>
@@ -378,6 +402,30 @@
           <c:marker>
             <c:symbol val="none"/>
           </c:marker>
+          <c:dLbls>
+            <c:numFmt formatCode="0" sourceLinked="0"/>
+            <c:txPr>
+              <a:bodyPr/>
+              <a:lstStyle/>
+              <a:p>
+                <a:pPr>
+                  <a:defRPr sz="800">
+                    <a:solidFill>
+                      <a:srgbClr val="1E334E"/>
+                    </a:solidFill>
+                  </a:defRPr>
+                </a:pPr>
+              </a:p>
+            </c:txPr>
+            <c:dLblPos val="b"/>
+            <c:showLegendKey val="0"/>
+            <c:showVal val="0"/>
+            <c:showCatName val="0"/>
+            <c:showSerName val="0"/>
+            <c:showPercent val="0"/>
+            <c:showBubbleSize val="0"/>
+            <c:showLeaderLines val="1"/>
+          </c:dLbls>
           <c:cat>
             <c:strRef>
               <c:f>Sheet1!$A$2:$A$14</c:f>
@@ -699,7 +747,7 @@
                   <a:srgbClr val="5A636E"/>
                 </a:solidFill>
               </a:rPr>
-              <a:t>Average monthly return (%)</a:t>
+              <a:t>Figure 4.  Average monthly return (%)</a:t>
             </a:r>
           </a:p>
         </c:rich>
@@ -822,6 +870,30 @@
             </c:numRef>
           </c:val>
         </c:ser>
+        <c:dLbls>
+          <c:numFmt formatCode="0.0&quot;%&quot;" sourceLinked="0"/>
+          <c:txPr>
+            <a:bodyPr/>
+            <a:lstStyle/>
+            <a:p>
+              <a:pPr>
+                <a:defRPr sz="900">
+                  <a:solidFill>
+                    <a:srgbClr val="333840"/>
+                  </a:solidFill>
+                </a:defRPr>
+              </a:pPr>
+            </a:p>
+          </c:txPr>
+          <c:dLblPos val="outEnd"/>
+          <c:showLegendKey val="0"/>
+          <c:showVal val="1"/>
+          <c:showCatName val="0"/>
+          <c:showSerName val="0"/>
+          <c:showPercent val="0"/>
+          <c:showBubbleSize val="0"/>
+          <c:showLeaderLines val="1"/>
+        </c:dLbls>
         <c:gapWidth val="80"/>
         <c:axId val="-2068027336"/>
         <c:axId val="-2113994440"/>
@@ -4318,7 +4390,7 @@
                 </a:solidFill>
                 <a:latin typeface="Times New Roman"/>
               </a:rPr>
-              <a:t>Athanase at a glance</a:t>
+              <a:t>2.1 Athanase at a glance</a:t>
             </a:r>
           </a:p>
         </p:txBody>
@@ -5246,7 +5318,7 @@
                 </a:solidFill>
                 <a:latin typeface="Times New Roman"/>
               </a:rPr>
-              <a:t>An integrated team, 20 years together</a:t>
+              <a:t>2.2 An integrated team, 20 years together</a:t>
             </a:r>
           </a:p>
         </p:txBody>
@@ -6237,7 +6309,49 @@
       </p:sp>
       <p:sp>
         <p:nvSpPr>
-          <p:cNvPr id="5" name="Rectangle 4"/>
+          <p:cNvPr id="5" name="TextBox 4"/>
+          <p:cNvSpPr txBox="1"/>
+          <p:nvPr/>
+        </p:nvSpPr>
+        <p:spPr>
+          <a:xfrm>
+            <a:off x="9052560" y="246888"/>
+            <a:ext cx="2606040" cy="274320"/>
+          </a:xfrm>
+          <a:prstGeom prst="rect">
+            <a:avLst/>
+          </a:prstGeom>
+          <a:noFill/>
+        </p:spPr>
+        <p:txBody>
+          <a:bodyPr wrap="square" anchor="t" lIns="0" rIns="0" tIns="0" bIns="0">
+            <a:spAutoFit/>
+          </a:bodyPr>
+          <a:lstStyle/>
+          <a:p>
+            <a:pPr algn="r">
+              <a:lnSpc>
+                <a:spcPct val="110000"/>
+              </a:lnSpc>
+              <a:spcAft>
+                <a:spcPts val="0"/>
+              </a:spcAft>
+            </a:pPr>
+            <a:r>
+              <a:rPr sz="1100" b="1" i="0">
+                <a:solidFill>
+                  <a:srgbClr val="4A5D75"/>
+                </a:solidFill>
+                <a:latin typeface="Calibri"/>
+              </a:rPr>
+              <a:t>Figure 1</a:t>
+            </a:r>
+          </a:p>
+        </p:txBody>
+      </p:sp>
+      <p:sp>
+        <p:nvSpPr>
+          <p:cNvPr id="6" name="Rectangle 5"/>
           <p:cNvSpPr/>
           <p:nvPr/>
         </p:nvSpPr>
@@ -6281,7 +6395,7 @@
       </p:sp>
       <p:sp>
         <p:nvSpPr>
-          <p:cNvPr id="6" name="TextBox 5"/>
+          <p:cNvPr id="7" name="TextBox 6"/>
           <p:cNvSpPr txBox="1"/>
           <p:nvPr/>
         </p:nvSpPr>
@@ -6316,14 +6430,14 @@
                 </a:solidFill>
                 <a:latin typeface="Times New Roman"/>
               </a:rPr>
-              <a:t>The inefficiency Athanase harvests</a:t>
-            </a:r>
-          </a:p>
-        </p:txBody>
-      </p:sp>
-      <p:sp>
-        <p:nvSpPr>
-          <p:cNvPr id="7" name="TextBox 6"/>
+              <a:t>2.3 The inefficiency Athanase harvests</a:t>
+            </a:r>
+          </a:p>
+        </p:txBody>
+      </p:sp>
+      <p:sp>
+        <p:nvSpPr>
+          <p:cNvPr id="8" name="TextBox 7"/>
           <p:cNvSpPr txBox="1"/>
           <p:nvPr/>
         </p:nvSpPr>
@@ -6365,7 +6479,7 @@
       </p:sp>
       <p:sp>
         <p:nvSpPr>
-          <p:cNvPr id="8" name="TextBox 7"/>
+          <p:cNvPr id="9" name="TextBox 8"/>
           <p:cNvSpPr txBox="1"/>
           <p:nvPr/>
         </p:nvSpPr>
@@ -6407,7 +6521,7 @@
       </p:sp>
       <p:sp>
         <p:nvSpPr>
-          <p:cNvPr id="9" name="TextBox 8"/>
+          <p:cNvPr id="10" name="TextBox 9"/>
           <p:cNvSpPr txBox="1"/>
           <p:nvPr/>
         </p:nvSpPr>
@@ -6578,7 +6692,7 @@
       </p:sp>
       <p:graphicFrame>
         <p:nvGraphicFramePr>
-          <p:cNvPr id="10" name="Chart 9"/>
+          <p:cNvPr id="11" name="Chart 10"/>
           <p:cNvGraphicFramePr>
             <a:graphicFrameLocks noGrp="1"/>
           </p:cNvGraphicFramePr>
@@ -6596,7 +6710,7 @@
       </p:graphicFrame>
       <p:sp>
         <p:nvSpPr>
-          <p:cNvPr id="11" name="TextBox 10"/>
+          <p:cNvPr id="12" name="TextBox 11"/>
           <p:cNvSpPr txBox="1"/>
           <p:nvPr/>
         </p:nvSpPr>
@@ -6766,7 +6880,49 @@
       </p:sp>
       <p:sp>
         <p:nvSpPr>
-          <p:cNvPr id="5" name="Rectangle 4"/>
+          <p:cNvPr id="5" name="TextBox 4"/>
+          <p:cNvSpPr txBox="1"/>
+          <p:nvPr/>
+        </p:nvSpPr>
+        <p:spPr>
+          <a:xfrm>
+            <a:off x="9052560" y="246888"/>
+            <a:ext cx="2606040" cy="274320"/>
+          </a:xfrm>
+          <a:prstGeom prst="rect">
+            <a:avLst/>
+          </a:prstGeom>
+          <a:noFill/>
+        </p:spPr>
+        <p:txBody>
+          <a:bodyPr wrap="square" anchor="t" lIns="0" rIns="0" tIns="0" bIns="0">
+            <a:spAutoFit/>
+          </a:bodyPr>
+          <a:lstStyle/>
+          <a:p>
+            <a:pPr algn="r">
+              <a:lnSpc>
+                <a:spcPct val="110000"/>
+              </a:lnSpc>
+              <a:spcAft>
+                <a:spcPts val="0"/>
+              </a:spcAft>
+            </a:pPr>
+            <a:r>
+              <a:rPr sz="1100" b="1" i="0">
+                <a:solidFill>
+                  <a:srgbClr val="4A5D75"/>
+                </a:solidFill>
+                <a:latin typeface="Calibri"/>
+              </a:rPr>
+              <a:t>Figure 2</a:t>
+            </a:r>
+          </a:p>
+        </p:txBody>
+      </p:sp>
+      <p:sp>
+        <p:nvSpPr>
+          <p:cNvPr id="6" name="Rectangle 5"/>
           <p:cNvSpPr/>
           <p:nvPr/>
         </p:nvSpPr>
@@ -6810,7 +6966,7 @@
       </p:sp>
       <p:sp>
         <p:nvSpPr>
-          <p:cNvPr id="6" name="TextBox 5"/>
+          <p:cNvPr id="7" name="TextBox 6"/>
           <p:cNvSpPr txBox="1"/>
           <p:nvPr/>
         </p:nvSpPr>
@@ -6845,14 +7001,14 @@
                 </a:solidFill>
                 <a:latin typeface="Times New Roman"/>
               </a:rPr>
-              <a:t>We don’t buy broken companies — we buy hidden cores</a:t>
-            </a:r>
-          </a:p>
-        </p:txBody>
-      </p:sp>
-      <p:sp>
-        <p:nvSpPr>
-          <p:cNvPr id="7" name="TextBox 6"/>
+              <a:t>2.4 We don’t buy broken companies — we buy hidden cores</a:t>
+            </a:r>
+          </a:p>
+        </p:txBody>
+      </p:sp>
+      <p:sp>
+        <p:nvSpPr>
+          <p:cNvPr id="8" name="TextBox 7"/>
           <p:cNvSpPr txBox="1"/>
           <p:nvPr/>
         </p:nvSpPr>
@@ -6894,7 +7050,7 @@
       </p:sp>
       <p:sp>
         <p:nvSpPr>
-          <p:cNvPr id="8" name="TextBox 7"/>
+          <p:cNvPr id="9" name="TextBox 8"/>
           <p:cNvSpPr txBox="1"/>
           <p:nvPr/>
         </p:nvSpPr>
@@ -6936,7 +7092,7 @@
       </p:sp>
       <p:sp>
         <p:nvSpPr>
-          <p:cNvPr id="9" name="TextBox 8"/>
+          <p:cNvPr id="10" name="TextBox 9"/>
           <p:cNvSpPr txBox="1"/>
           <p:nvPr/>
         </p:nvSpPr>
@@ -7107,7 +7263,7 @@
       </p:sp>
       <p:sp>
         <p:nvSpPr>
-          <p:cNvPr id="10" name="TextBox 9"/>
+          <p:cNvPr id="11" name="TextBox 10"/>
           <p:cNvSpPr txBox="1"/>
           <p:nvPr/>
         </p:nvSpPr>
@@ -7142,21 +7298,21 @@
                 </a:solidFill>
                 <a:latin typeface="Calibri"/>
               </a:rPr>
-              <a:t>SUM-OF-THE-PARTS (ILLUSTRATIVE)</a:t>
-            </a:r>
-          </a:p>
-        </p:txBody>
-      </p:sp>
-      <p:sp>
-        <p:nvSpPr>
-          <p:cNvPr id="11" name="Rectangle 10"/>
+              <a:t>Figure 2  ·  SUM-OF-THE-PARTS (ILLUSTRATIVE, INDEXED)</a:t>
+            </a:r>
+          </a:p>
+        </p:txBody>
+      </p:sp>
+      <p:sp>
+        <p:nvSpPr>
+          <p:cNvPr id="12" name="Rectangle 11"/>
           <p:cNvSpPr/>
           <p:nvPr/>
         </p:nvSpPr>
         <p:spPr>
           <a:xfrm>
-            <a:off x="7315200" y="3639312"/>
-            <a:ext cx="1463040" cy="1389888"/>
+            <a:off x="7315200" y="3474720"/>
+            <a:ext cx="1463040" cy="1554480"/>
           </a:xfrm>
           <a:prstGeom prst="rect">
             <a:avLst/>
@@ -7193,7 +7349,49 @@
       </p:sp>
       <p:sp>
         <p:nvSpPr>
-          <p:cNvPr id="12" name="TextBox 11"/>
+          <p:cNvPr id="13" name="TextBox 12"/>
+          <p:cNvSpPr txBox="1"/>
+          <p:nvPr/>
+        </p:nvSpPr>
+        <p:spPr>
+          <a:xfrm>
+            <a:off x="7315200" y="3145536"/>
+            <a:ext cx="1463040" cy="292608"/>
+          </a:xfrm>
+          <a:prstGeom prst="rect">
+            <a:avLst/>
+          </a:prstGeom>
+          <a:noFill/>
+        </p:spPr>
+        <p:txBody>
+          <a:bodyPr wrap="square" anchor="t" lIns="0" rIns="0" tIns="0" bIns="0">
+            <a:spAutoFit/>
+          </a:bodyPr>
+          <a:lstStyle/>
+          <a:p>
+            <a:pPr algn="ctr">
+              <a:lnSpc>
+                <a:spcPct val="110000"/>
+              </a:lnSpc>
+              <a:spcAft>
+                <a:spcPts val="0"/>
+              </a:spcAft>
+            </a:pPr>
+            <a:r>
+              <a:rPr sz="1400" b="1" i="0">
+                <a:solidFill>
+                  <a:srgbClr val="1E334E"/>
+                </a:solidFill>
+                <a:latin typeface="Calibri"/>
+              </a:rPr>
+              <a:t>100</a:t>
+            </a:r>
+          </a:p>
+        </p:txBody>
+      </p:sp>
+      <p:sp>
+        <p:nvSpPr>
+          <p:cNvPr id="14" name="TextBox 13"/>
           <p:cNvSpPr txBox="1"/>
           <p:nvPr/>
         </p:nvSpPr>
@@ -7254,14 +7452,14 @@
       </p:sp>
       <p:sp>
         <p:nvSpPr>
-          <p:cNvPr id="13" name="Rectangle 12"/>
+          <p:cNvPr id="15" name="Rectangle 14"/>
           <p:cNvSpPr/>
           <p:nvPr/>
         </p:nvSpPr>
         <p:spPr>
           <a:xfrm>
-            <a:off x="9692640" y="2770632"/>
-            <a:ext cx="1463040" cy="2258568"/>
+            <a:off x="9692640" y="2852928"/>
+            <a:ext cx="1463040" cy="2176272"/>
           </a:xfrm>
           <a:prstGeom prst="rect">
             <a:avLst/>
@@ -7298,7 +7496,49 @@
       </p:sp>
       <p:sp>
         <p:nvSpPr>
-          <p:cNvPr id="14" name="TextBox 13"/>
+          <p:cNvPr id="16" name="TextBox 15"/>
+          <p:cNvSpPr txBox="1"/>
+          <p:nvPr/>
+        </p:nvSpPr>
+        <p:spPr>
+          <a:xfrm>
+            <a:off x="9692640" y="2523744"/>
+            <a:ext cx="1463040" cy="292608"/>
+          </a:xfrm>
+          <a:prstGeom prst="rect">
+            <a:avLst/>
+          </a:prstGeom>
+          <a:noFill/>
+        </p:spPr>
+        <p:txBody>
+          <a:bodyPr wrap="square" anchor="t" lIns="0" rIns="0" tIns="0" bIns="0">
+            <a:spAutoFit/>
+          </a:bodyPr>
+          <a:lstStyle/>
+          <a:p>
+            <a:pPr algn="ctr">
+              <a:lnSpc>
+                <a:spcPct val="110000"/>
+              </a:lnSpc>
+              <a:spcAft>
+                <a:spcPts val="0"/>
+              </a:spcAft>
+            </a:pPr>
+            <a:r>
+              <a:rPr sz="1400" b="1" i="0">
+                <a:solidFill>
+                  <a:srgbClr val="1E334E"/>
+                </a:solidFill>
+                <a:latin typeface="Calibri"/>
+              </a:rPr>
+              <a:t>140</a:t>
+            </a:r>
+          </a:p>
+        </p:txBody>
+      </p:sp>
+      <p:sp>
+        <p:nvSpPr>
+          <p:cNvPr id="17" name="TextBox 16"/>
           <p:cNvSpPr txBox="1"/>
           <p:nvPr/>
         </p:nvSpPr>
@@ -7359,13 +7599,13 @@
       </p:sp>
       <p:sp>
         <p:nvSpPr>
-          <p:cNvPr id="15" name="Rectangle 14"/>
+          <p:cNvPr id="18" name="Rectangle 17"/>
           <p:cNvSpPr/>
           <p:nvPr/>
         </p:nvSpPr>
         <p:spPr>
           <a:xfrm>
-            <a:off x="7315200" y="3639312"/>
+            <a:off x="7315200" y="3474720"/>
             <a:ext cx="3108960" cy="15240"/>
           </a:xfrm>
           <a:prstGeom prst="rect">
@@ -7403,14 +7643,14 @@
       </p:sp>
       <p:sp>
         <p:nvSpPr>
-          <p:cNvPr id="16" name="Rectangle 15"/>
+          <p:cNvPr id="19" name="Rectangle 18"/>
           <p:cNvSpPr/>
           <p:nvPr/>
         </p:nvSpPr>
         <p:spPr>
           <a:xfrm>
-            <a:off x="10927080" y="2770632"/>
-            <a:ext cx="25400" cy="868680"/>
+            <a:off x="10927080" y="2852928"/>
+            <a:ext cx="25400" cy="621792"/>
           </a:xfrm>
           <a:prstGeom prst="rect">
             <a:avLst/>
@@ -7447,14 +7687,14 @@
       </p:sp>
       <p:sp>
         <p:nvSpPr>
-          <p:cNvPr id="17" name="TextBox 16"/>
-          <p:cNvSpPr txBox="1"/>
-          <p:nvPr/>
-        </p:nvSpPr>
-        <p:spPr>
-          <a:xfrm>
-            <a:off x="7452360" y="2816352"/>
-            <a:ext cx="3291840" cy="548640"/>
+          <p:cNvPr id="20" name="TextBox 19"/>
+          <p:cNvSpPr txBox="1"/>
+          <p:nvPr/>
+        </p:nvSpPr>
+        <p:spPr>
+          <a:xfrm>
+            <a:off x="7452360" y="2889504"/>
+            <a:ext cx="3291840" cy="457200"/>
           </a:xfrm>
           <a:prstGeom prst="rect">
             <a:avLst/>
@@ -7476,20 +7716,20 @@
               </a:spcAft>
             </a:pPr>
             <a:r>
-              <a:rPr sz="1150" b="1" i="0">
+              <a:rPr sz="1200" b="1" i="0">
                 <a:solidFill>
                   <a:srgbClr val="A84A4A"/>
                 </a:solidFill>
                 <a:latin typeface="Calibri"/>
               </a:rPr>
-              <a:t>hidden value ≈ 30–40%</a:t>
-            </a:r>
-          </a:p>
-        </p:txBody>
-      </p:sp>
-      <p:sp>
-        <p:nvSpPr>
-          <p:cNvPr id="18" name="TextBox 17"/>
+              <a:t>+40% hidden value</a:t>
+            </a:r>
+          </a:p>
+        </p:txBody>
+      </p:sp>
+      <p:sp>
+        <p:nvSpPr>
+          <p:cNvPr id="21" name="TextBox 20"/>
           <p:cNvSpPr txBox="1"/>
           <p:nvPr/>
         </p:nvSpPr>
@@ -7659,7 +7899,49 @@
       </p:sp>
       <p:sp>
         <p:nvSpPr>
-          <p:cNvPr id="5" name="Rectangle 4"/>
+          <p:cNvPr id="5" name="TextBox 4"/>
+          <p:cNvSpPr txBox="1"/>
+          <p:nvPr/>
+        </p:nvSpPr>
+        <p:spPr>
+          <a:xfrm>
+            <a:off x="9052560" y="246888"/>
+            <a:ext cx="2606040" cy="274320"/>
+          </a:xfrm>
+          <a:prstGeom prst="rect">
+            <a:avLst/>
+          </a:prstGeom>
+          <a:noFill/>
+        </p:spPr>
+        <p:txBody>
+          <a:bodyPr wrap="square" anchor="t" lIns="0" rIns="0" tIns="0" bIns="0">
+            <a:spAutoFit/>
+          </a:bodyPr>
+          <a:lstStyle/>
+          <a:p>
+            <a:pPr algn="r">
+              <a:lnSpc>
+                <a:spcPct val="110000"/>
+              </a:lnSpc>
+              <a:spcAft>
+                <a:spcPts val="0"/>
+              </a:spcAft>
+            </a:pPr>
+            <a:r>
+              <a:rPr sz="1100" b="1" i="0">
+                <a:solidFill>
+                  <a:srgbClr val="4A5D75"/>
+                </a:solidFill>
+                <a:latin typeface="Calibri"/>
+              </a:rPr>
+              <a:t>Table 1</a:t>
+            </a:r>
+          </a:p>
+        </p:txBody>
+      </p:sp>
+      <p:sp>
+        <p:nvSpPr>
+          <p:cNvPr id="6" name="Rectangle 5"/>
           <p:cNvSpPr/>
           <p:nvPr/>
         </p:nvSpPr>
@@ -7703,7 +7985,7 @@
       </p:sp>
       <p:sp>
         <p:nvSpPr>
-          <p:cNvPr id="6" name="TextBox 5"/>
+          <p:cNvPr id="7" name="TextBox 6"/>
           <p:cNvSpPr txBox="1"/>
           <p:nvPr/>
         </p:nvSpPr>
@@ -7738,14 +8020,14 @@
                 </a:solidFill>
                 <a:latin typeface="Times New Roman"/>
               </a:rPr>
-              <a:t>Quality-core constructivism — how we differ</a:t>
-            </a:r>
-          </a:p>
-        </p:txBody>
-      </p:sp>
-      <p:sp>
-        <p:nvSpPr>
-          <p:cNvPr id="7" name="TextBox 6"/>
+              <a:t>2.5 Quality-core constructivism — how we differ</a:t>
+            </a:r>
+          </a:p>
+        </p:txBody>
+      </p:sp>
+      <p:sp>
+        <p:nvSpPr>
+          <p:cNvPr id="8" name="TextBox 7"/>
           <p:cNvSpPr txBox="1"/>
           <p:nvPr/>
         </p:nvSpPr>
@@ -7787,7 +8069,7 @@
       </p:sp>
       <p:sp>
         <p:nvSpPr>
-          <p:cNvPr id="8" name="TextBox 7"/>
+          <p:cNvPr id="9" name="TextBox 8"/>
           <p:cNvSpPr txBox="1"/>
           <p:nvPr/>
         </p:nvSpPr>
@@ -7829,7 +8111,7 @@
       </p:sp>
       <p:sp>
         <p:nvSpPr>
-          <p:cNvPr id="9" name="Rectangle 8"/>
+          <p:cNvPr id="10" name="Rectangle 9"/>
           <p:cNvSpPr/>
           <p:nvPr/>
         </p:nvSpPr>
@@ -7873,7 +8155,7 @@
       </p:sp>
       <p:sp>
         <p:nvSpPr>
-          <p:cNvPr id="10" name="TextBox 9"/>
+          <p:cNvPr id="11" name="TextBox 10"/>
           <p:cNvSpPr txBox="1"/>
           <p:nvPr/>
         </p:nvSpPr>
@@ -7915,7 +8197,7 @@
       </p:sp>
       <p:sp>
         <p:nvSpPr>
-          <p:cNvPr id="11" name="Rectangle 10"/>
+          <p:cNvPr id="12" name="Rectangle 11"/>
           <p:cNvSpPr/>
           <p:nvPr/>
         </p:nvSpPr>
@@ -7959,7 +8241,7 @@
       </p:sp>
       <p:sp>
         <p:nvSpPr>
-          <p:cNvPr id="12" name="TextBox 11"/>
+          <p:cNvPr id="13" name="TextBox 12"/>
           <p:cNvSpPr txBox="1"/>
           <p:nvPr/>
         </p:nvSpPr>
@@ -8001,7 +8283,7 @@
       </p:sp>
       <p:sp>
         <p:nvSpPr>
-          <p:cNvPr id="13" name="Rectangle 12"/>
+          <p:cNvPr id="14" name="Rectangle 13"/>
           <p:cNvSpPr/>
           <p:nvPr/>
         </p:nvSpPr>
@@ -8045,7 +8327,7 @@
       </p:sp>
       <p:sp>
         <p:nvSpPr>
-          <p:cNvPr id="14" name="TextBox 13"/>
+          <p:cNvPr id="15" name="TextBox 14"/>
           <p:cNvSpPr txBox="1"/>
           <p:nvPr/>
         </p:nvSpPr>
@@ -8087,7 +8369,7 @@
       </p:sp>
       <p:sp>
         <p:nvSpPr>
-          <p:cNvPr id="15" name="Rectangle 14"/>
+          <p:cNvPr id="16" name="Rectangle 15"/>
           <p:cNvSpPr/>
           <p:nvPr/>
         </p:nvSpPr>
@@ -8131,7 +8413,7 @@
       </p:sp>
       <p:sp>
         <p:nvSpPr>
-          <p:cNvPr id="16" name="TextBox 15"/>
+          <p:cNvPr id="17" name="TextBox 16"/>
           <p:cNvSpPr txBox="1"/>
           <p:nvPr/>
         </p:nvSpPr>
@@ -8173,7 +8455,7 @@
       </p:sp>
       <p:sp>
         <p:nvSpPr>
-          <p:cNvPr id="17" name="Rectangle 16"/>
+          <p:cNvPr id="18" name="Rectangle 17"/>
           <p:cNvSpPr/>
           <p:nvPr/>
         </p:nvSpPr>
@@ -8217,7 +8499,7 @@
       </p:sp>
       <p:sp>
         <p:nvSpPr>
-          <p:cNvPr id="18" name="TextBox 17"/>
+          <p:cNvPr id="19" name="TextBox 18"/>
           <p:cNvSpPr txBox="1"/>
           <p:nvPr/>
         </p:nvSpPr>
@@ -8259,7 +8541,7 @@
       </p:sp>
       <p:sp>
         <p:nvSpPr>
-          <p:cNvPr id="19" name="Rectangle 18"/>
+          <p:cNvPr id="20" name="Rectangle 19"/>
           <p:cNvSpPr/>
           <p:nvPr/>
         </p:nvSpPr>
@@ -8303,7 +8585,7 @@
       </p:sp>
       <p:sp>
         <p:nvSpPr>
-          <p:cNvPr id="20" name="TextBox 19"/>
+          <p:cNvPr id="21" name="TextBox 20"/>
           <p:cNvSpPr txBox="1"/>
           <p:nvPr/>
         </p:nvSpPr>
@@ -8345,7 +8627,7 @@
       </p:sp>
       <p:sp>
         <p:nvSpPr>
-          <p:cNvPr id="21" name="Rectangle 20"/>
+          <p:cNvPr id="22" name="Rectangle 21"/>
           <p:cNvSpPr/>
           <p:nvPr/>
         </p:nvSpPr>
@@ -8389,7 +8671,7 @@
       </p:sp>
       <p:sp>
         <p:nvSpPr>
-          <p:cNvPr id="22" name="TextBox 21"/>
+          <p:cNvPr id="23" name="TextBox 22"/>
           <p:cNvSpPr txBox="1"/>
           <p:nvPr/>
         </p:nvSpPr>
@@ -8431,7 +8713,7 @@
       </p:sp>
       <p:sp>
         <p:nvSpPr>
-          <p:cNvPr id="23" name="Rectangle 22"/>
+          <p:cNvPr id="24" name="Rectangle 23"/>
           <p:cNvSpPr/>
           <p:nvPr/>
         </p:nvSpPr>
@@ -8475,7 +8757,7 @@
       </p:sp>
       <p:sp>
         <p:nvSpPr>
-          <p:cNvPr id="24" name="TextBox 23"/>
+          <p:cNvPr id="25" name="TextBox 24"/>
           <p:cNvSpPr txBox="1"/>
           <p:nvPr/>
         </p:nvSpPr>
@@ -8517,7 +8799,7 @@
       </p:sp>
       <p:sp>
         <p:nvSpPr>
-          <p:cNvPr id="25" name="Rectangle 24"/>
+          <p:cNvPr id="26" name="Rectangle 25"/>
           <p:cNvSpPr/>
           <p:nvPr/>
         </p:nvSpPr>
@@ -8561,7 +8843,7 @@
       </p:sp>
       <p:sp>
         <p:nvSpPr>
-          <p:cNvPr id="26" name="TextBox 25"/>
+          <p:cNvPr id="27" name="TextBox 26"/>
           <p:cNvSpPr txBox="1"/>
           <p:nvPr/>
         </p:nvSpPr>
@@ -8603,7 +8885,7 @@
       </p:sp>
       <p:sp>
         <p:nvSpPr>
-          <p:cNvPr id="27" name="Rectangle 26"/>
+          <p:cNvPr id="28" name="Rectangle 27"/>
           <p:cNvSpPr/>
           <p:nvPr/>
         </p:nvSpPr>
@@ -8647,7 +8929,7 @@
       </p:sp>
       <p:sp>
         <p:nvSpPr>
-          <p:cNvPr id="28" name="TextBox 27"/>
+          <p:cNvPr id="29" name="TextBox 28"/>
           <p:cNvSpPr txBox="1"/>
           <p:nvPr/>
         </p:nvSpPr>
@@ -8689,7 +8971,7 @@
       </p:sp>
       <p:sp>
         <p:nvSpPr>
-          <p:cNvPr id="29" name="Rectangle 28"/>
+          <p:cNvPr id="30" name="Rectangle 29"/>
           <p:cNvSpPr/>
           <p:nvPr/>
         </p:nvSpPr>
@@ -8733,7 +9015,7 @@
       </p:sp>
       <p:sp>
         <p:nvSpPr>
-          <p:cNvPr id="30" name="TextBox 29"/>
+          <p:cNvPr id="31" name="TextBox 30"/>
           <p:cNvSpPr txBox="1"/>
           <p:nvPr/>
         </p:nvSpPr>
@@ -8775,7 +9057,7 @@
       </p:sp>
       <p:sp>
         <p:nvSpPr>
-          <p:cNvPr id="31" name="Rectangle 30"/>
+          <p:cNvPr id="32" name="Rectangle 31"/>
           <p:cNvSpPr/>
           <p:nvPr/>
         </p:nvSpPr>
@@ -8819,7 +9101,7 @@
       </p:sp>
       <p:sp>
         <p:nvSpPr>
-          <p:cNvPr id="32" name="TextBox 31"/>
+          <p:cNvPr id="33" name="TextBox 32"/>
           <p:cNvSpPr txBox="1"/>
           <p:nvPr/>
         </p:nvSpPr>
@@ -8861,7 +9143,7 @@
       </p:sp>
       <p:sp>
         <p:nvSpPr>
-          <p:cNvPr id="33" name="Rectangle 32"/>
+          <p:cNvPr id="34" name="Rectangle 33"/>
           <p:cNvSpPr/>
           <p:nvPr/>
         </p:nvSpPr>
@@ -8905,7 +9187,7 @@
       </p:sp>
       <p:sp>
         <p:nvSpPr>
-          <p:cNvPr id="34" name="TextBox 33"/>
+          <p:cNvPr id="35" name="TextBox 34"/>
           <p:cNvSpPr txBox="1"/>
           <p:nvPr/>
         </p:nvSpPr>
@@ -8947,7 +9229,7 @@
       </p:sp>
       <p:sp>
         <p:nvSpPr>
-          <p:cNvPr id="35" name="Rectangle 34"/>
+          <p:cNvPr id="36" name="Rectangle 35"/>
           <p:cNvSpPr/>
           <p:nvPr/>
         </p:nvSpPr>
@@ -8991,7 +9273,7 @@
       </p:sp>
       <p:sp>
         <p:nvSpPr>
-          <p:cNvPr id="36" name="TextBox 35"/>
+          <p:cNvPr id="37" name="TextBox 36"/>
           <p:cNvSpPr txBox="1"/>
           <p:nvPr/>
         </p:nvSpPr>
@@ -9033,7 +9315,7 @@
       </p:sp>
       <p:sp>
         <p:nvSpPr>
-          <p:cNvPr id="37" name="Rectangle 36"/>
+          <p:cNvPr id="38" name="Rectangle 37"/>
           <p:cNvSpPr/>
           <p:nvPr/>
         </p:nvSpPr>
@@ -9077,7 +9359,7 @@
       </p:sp>
       <p:sp>
         <p:nvSpPr>
-          <p:cNvPr id="38" name="TextBox 37"/>
+          <p:cNvPr id="39" name="TextBox 38"/>
           <p:cNvSpPr txBox="1"/>
           <p:nvPr/>
         </p:nvSpPr>
@@ -9119,7 +9401,7 @@
       </p:sp>
       <p:sp>
         <p:nvSpPr>
-          <p:cNvPr id="39" name="Rectangle 38"/>
+          <p:cNvPr id="40" name="Rectangle 39"/>
           <p:cNvSpPr/>
           <p:nvPr/>
         </p:nvSpPr>
@@ -9163,7 +9445,7 @@
       </p:sp>
       <p:sp>
         <p:nvSpPr>
-          <p:cNvPr id="40" name="TextBox 39"/>
+          <p:cNvPr id="41" name="TextBox 40"/>
           <p:cNvSpPr txBox="1"/>
           <p:nvPr/>
         </p:nvSpPr>
@@ -9205,7 +9487,7 @@
       </p:sp>
       <p:sp>
         <p:nvSpPr>
-          <p:cNvPr id="41" name="Rectangle 40"/>
+          <p:cNvPr id="42" name="Rectangle 41"/>
           <p:cNvSpPr/>
           <p:nvPr/>
         </p:nvSpPr>
@@ -9249,7 +9531,7 @@
       </p:sp>
       <p:sp>
         <p:nvSpPr>
-          <p:cNvPr id="42" name="TextBox 41"/>
+          <p:cNvPr id="43" name="TextBox 42"/>
           <p:cNvSpPr txBox="1"/>
           <p:nvPr/>
         </p:nvSpPr>
@@ -9291,7 +9573,7 @@
       </p:sp>
       <p:sp>
         <p:nvSpPr>
-          <p:cNvPr id="43" name="Rectangle 42"/>
+          <p:cNvPr id="44" name="Rectangle 43"/>
           <p:cNvSpPr/>
           <p:nvPr/>
         </p:nvSpPr>
@@ -9335,7 +9617,7 @@
       </p:sp>
       <p:sp>
         <p:nvSpPr>
-          <p:cNvPr id="44" name="TextBox 43"/>
+          <p:cNvPr id="45" name="TextBox 44"/>
           <p:cNvSpPr txBox="1"/>
           <p:nvPr/>
         </p:nvSpPr>
@@ -9377,7 +9659,7 @@
       </p:sp>
       <p:sp>
         <p:nvSpPr>
-          <p:cNvPr id="45" name="TextBox 44"/>
+          <p:cNvPr id="46" name="TextBox 45"/>
           <p:cNvSpPr txBox="1"/>
           <p:nvPr/>
         </p:nvSpPr>
@@ -9547,7 +9829,49 @@
       </p:sp>
       <p:sp>
         <p:nvSpPr>
-          <p:cNvPr id="5" name="Rectangle 4"/>
+          <p:cNvPr id="5" name="TextBox 4"/>
+          <p:cNvSpPr txBox="1"/>
+          <p:nvPr/>
+        </p:nvSpPr>
+        <p:spPr>
+          <a:xfrm>
+            <a:off x="9052560" y="246888"/>
+            <a:ext cx="2606040" cy="274320"/>
+          </a:xfrm>
+          <a:prstGeom prst="rect">
+            <a:avLst/>
+          </a:prstGeom>
+          <a:noFill/>
+        </p:spPr>
+        <p:txBody>
+          <a:bodyPr wrap="square" anchor="t" lIns="0" rIns="0" tIns="0" bIns="0">
+            <a:spAutoFit/>
+          </a:bodyPr>
+          <a:lstStyle/>
+          <a:p>
+            <a:pPr algn="r">
+              <a:lnSpc>
+                <a:spcPct val="110000"/>
+              </a:lnSpc>
+              <a:spcAft>
+                <a:spcPts val="0"/>
+              </a:spcAft>
+            </a:pPr>
+            <a:r>
+              <a:rPr sz="1100" b="1" i="0">
+                <a:solidFill>
+                  <a:srgbClr val="4A5D75"/>
+                </a:solidFill>
+                <a:latin typeface="Calibri"/>
+              </a:rPr>
+              <a:t>Table 2</a:t>
+            </a:r>
+          </a:p>
+        </p:txBody>
+      </p:sp>
+      <p:sp>
+        <p:nvSpPr>
+          <p:cNvPr id="6" name="Rectangle 5"/>
           <p:cNvSpPr/>
           <p:nvPr/>
         </p:nvSpPr>
@@ -9591,7 +9915,7 @@
       </p:sp>
       <p:sp>
         <p:nvSpPr>
-          <p:cNvPr id="6" name="TextBox 5"/>
+          <p:cNvPr id="7" name="TextBox 6"/>
           <p:cNvSpPr txBox="1"/>
           <p:nvPr/>
         </p:nvSpPr>
@@ -9626,14 +9950,14 @@
                 </a:solidFill>
                 <a:latin typeface="Times New Roman"/>
               </a:rPr>
-              <a:t>We don’t need to be right more than ~50%</a:t>
-            </a:r>
-          </a:p>
-        </p:txBody>
-      </p:sp>
-      <p:sp>
-        <p:nvSpPr>
-          <p:cNvPr id="7" name="TextBox 6"/>
+              <a:t>2.6 We don’t need to be right more than ~50%</a:t>
+            </a:r>
+          </a:p>
+        </p:txBody>
+      </p:sp>
+      <p:sp>
+        <p:nvSpPr>
+          <p:cNvPr id="8" name="TextBox 7"/>
           <p:cNvSpPr txBox="1"/>
           <p:nvPr/>
         </p:nvSpPr>
@@ -9675,7 +9999,7 @@
       </p:sp>
       <p:sp>
         <p:nvSpPr>
-          <p:cNvPr id="8" name="TextBox 7"/>
+          <p:cNvPr id="9" name="TextBox 8"/>
           <p:cNvSpPr txBox="1"/>
           <p:nvPr/>
         </p:nvSpPr>
@@ -9717,7 +10041,7 @@
       </p:sp>
       <p:sp>
         <p:nvSpPr>
-          <p:cNvPr id="9" name="Rectangle 8"/>
+          <p:cNvPr id="10" name="Rectangle 9"/>
           <p:cNvSpPr/>
           <p:nvPr/>
         </p:nvSpPr>
@@ -9761,7 +10085,7 @@
       </p:sp>
       <p:sp>
         <p:nvSpPr>
-          <p:cNvPr id="10" name="TextBox 9"/>
+          <p:cNvPr id="11" name="TextBox 10"/>
           <p:cNvSpPr txBox="1"/>
           <p:nvPr/>
         </p:nvSpPr>
@@ -9803,7 +10127,7 @@
       </p:sp>
       <p:sp>
         <p:nvSpPr>
-          <p:cNvPr id="11" name="Rectangle 10"/>
+          <p:cNvPr id="12" name="Rectangle 11"/>
           <p:cNvSpPr/>
           <p:nvPr/>
         </p:nvSpPr>
@@ -9847,7 +10171,7 @@
       </p:sp>
       <p:sp>
         <p:nvSpPr>
-          <p:cNvPr id="12" name="TextBox 11"/>
+          <p:cNvPr id="13" name="TextBox 12"/>
           <p:cNvSpPr txBox="1"/>
           <p:nvPr/>
         </p:nvSpPr>
@@ -9889,7 +10213,7 @@
       </p:sp>
       <p:sp>
         <p:nvSpPr>
-          <p:cNvPr id="13" name="Rectangle 12"/>
+          <p:cNvPr id="14" name="Rectangle 13"/>
           <p:cNvSpPr/>
           <p:nvPr/>
         </p:nvSpPr>
@@ -9933,7 +10257,7 @@
       </p:sp>
       <p:sp>
         <p:nvSpPr>
-          <p:cNvPr id="14" name="TextBox 13"/>
+          <p:cNvPr id="15" name="TextBox 14"/>
           <p:cNvSpPr txBox="1"/>
           <p:nvPr/>
         </p:nvSpPr>
@@ -9975,7 +10299,7 @@
       </p:sp>
       <p:sp>
         <p:nvSpPr>
-          <p:cNvPr id="15" name="Rectangle 14"/>
+          <p:cNvPr id="16" name="Rectangle 15"/>
           <p:cNvSpPr/>
           <p:nvPr/>
         </p:nvSpPr>
@@ -10019,7 +10343,7 @@
       </p:sp>
       <p:sp>
         <p:nvSpPr>
-          <p:cNvPr id="16" name="TextBox 15"/>
+          <p:cNvPr id="17" name="TextBox 16"/>
           <p:cNvSpPr txBox="1"/>
           <p:nvPr/>
         </p:nvSpPr>
@@ -10061,7 +10385,7 @@
       </p:sp>
       <p:sp>
         <p:nvSpPr>
-          <p:cNvPr id="17" name="Rectangle 16"/>
+          <p:cNvPr id="18" name="Rectangle 17"/>
           <p:cNvSpPr/>
           <p:nvPr/>
         </p:nvSpPr>
@@ -10105,7 +10429,7 @@
       </p:sp>
       <p:sp>
         <p:nvSpPr>
-          <p:cNvPr id="18" name="TextBox 17"/>
+          <p:cNvPr id="19" name="TextBox 18"/>
           <p:cNvSpPr txBox="1"/>
           <p:nvPr/>
         </p:nvSpPr>
@@ -10147,7 +10471,7 @@
       </p:sp>
       <p:sp>
         <p:nvSpPr>
-          <p:cNvPr id="19" name="Rectangle 18"/>
+          <p:cNvPr id="20" name="Rectangle 19"/>
           <p:cNvSpPr/>
           <p:nvPr/>
         </p:nvSpPr>
@@ -10191,7 +10515,7 @@
       </p:sp>
       <p:sp>
         <p:nvSpPr>
-          <p:cNvPr id="20" name="TextBox 19"/>
+          <p:cNvPr id="21" name="TextBox 20"/>
           <p:cNvSpPr txBox="1"/>
           <p:nvPr/>
         </p:nvSpPr>
@@ -10233,7 +10557,7 @@
       </p:sp>
       <p:sp>
         <p:nvSpPr>
-          <p:cNvPr id="21" name="Rectangle 20"/>
+          <p:cNvPr id="22" name="Rectangle 21"/>
           <p:cNvSpPr/>
           <p:nvPr/>
         </p:nvSpPr>
@@ -10277,7 +10601,7 @@
       </p:sp>
       <p:sp>
         <p:nvSpPr>
-          <p:cNvPr id="22" name="TextBox 21"/>
+          <p:cNvPr id="23" name="TextBox 22"/>
           <p:cNvSpPr txBox="1"/>
           <p:nvPr/>
         </p:nvSpPr>
@@ -10319,7 +10643,7 @@
       </p:sp>
       <p:sp>
         <p:nvSpPr>
-          <p:cNvPr id="23" name="Rectangle 22"/>
+          <p:cNvPr id="24" name="Rectangle 23"/>
           <p:cNvSpPr/>
           <p:nvPr/>
         </p:nvSpPr>
@@ -10363,7 +10687,7 @@
       </p:sp>
       <p:sp>
         <p:nvSpPr>
-          <p:cNvPr id="24" name="TextBox 23"/>
+          <p:cNvPr id="25" name="TextBox 24"/>
           <p:cNvSpPr txBox="1"/>
           <p:nvPr/>
         </p:nvSpPr>
@@ -10405,7 +10729,7 @@
       </p:sp>
       <p:sp>
         <p:nvSpPr>
-          <p:cNvPr id="25" name="Rectangle 24"/>
+          <p:cNvPr id="26" name="Rectangle 25"/>
           <p:cNvSpPr/>
           <p:nvPr/>
         </p:nvSpPr>
@@ -10449,7 +10773,7 @@
       </p:sp>
       <p:sp>
         <p:nvSpPr>
-          <p:cNvPr id="26" name="TextBox 25"/>
+          <p:cNvPr id="27" name="TextBox 26"/>
           <p:cNvSpPr txBox="1"/>
           <p:nvPr/>
         </p:nvSpPr>
@@ -10491,7 +10815,7 @@
       </p:sp>
       <p:sp>
         <p:nvSpPr>
-          <p:cNvPr id="27" name="Rectangle 26"/>
+          <p:cNvPr id="28" name="Rectangle 27"/>
           <p:cNvSpPr/>
           <p:nvPr/>
         </p:nvSpPr>
@@ -10535,7 +10859,7 @@
       </p:sp>
       <p:sp>
         <p:nvSpPr>
-          <p:cNvPr id="28" name="TextBox 27"/>
+          <p:cNvPr id="29" name="TextBox 28"/>
           <p:cNvSpPr txBox="1"/>
           <p:nvPr/>
         </p:nvSpPr>
@@ -10577,7 +10901,7 @@
       </p:sp>
       <p:sp>
         <p:nvSpPr>
-          <p:cNvPr id="29" name="Rectangle 28"/>
+          <p:cNvPr id="30" name="Rectangle 29"/>
           <p:cNvSpPr/>
           <p:nvPr/>
         </p:nvSpPr>
@@ -10621,7 +10945,7 @@
       </p:sp>
       <p:sp>
         <p:nvSpPr>
-          <p:cNvPr id="30" name="TextBox 29"/>
+          <p:cNvPr id="31" name="TextBox 30"/>
           <p:cNvSpPr txBox="1"/>
           <p:nvPr/>
         </p:nvSpPr>
@@ -10663,7 +10987,7 @@
       </p:sp>
       <p:sp>
         <p:nvSpPr>
-          <p:cNvPr id="31" name="Rectangle 30"/>
+          <p:cNvPr id="32" name="Rectangle 31"/>
           <p:cNvSpPr/>
           <p:nvPr/>
         </p:nvSpPr>
@@ -10707,7 +11031,7 @@
       </p:sp>
       <p:sp>
         <p:nvSpPr>
-          <p:cNvPr id="32" name="TextBox 31"/>
+          <p:cNvPr id="33" name="TextBox 32"/>
           <p:cNvSpPr txBox="1"/>
           <p:nvPr/>
         </p:nvSpPr>
@@ -10749,7 +11073,7 @@
       </p:sp>
       <p:sp>
         <p:nvSpPr>
-          <p:cNvPr id="33" name="Rectangle 32"/>
+          <p:cNvPr id="34" name="Rectangle 33"/>
           <p:cNvSpPr/>
           <p:nvPr/>
         </p:nvSpPr>
@@ -10793,7 +11117,7 @@
       </p:sp>
       <p:sp>
         <p:nvSpPr>
-          <p:cNvPr id="34" name="TextBox 33"/>
+          <p:cNvPr id="35" name="TextBox 34"/>
           <p:cNvSpPr txBox="1"/>
           <p:nvPr/>
         </p:nvSpPr>
@@ -10835,7 +11159,7 @@
       </p:sp>
       <p:sp>
         <p:nvSpPr>
-          <p:cNvPr id="35" name="Rectangle 34"/>
+          <p:cNvPr id="36" name="Rectangle 35"/>
           <p:cNvSpPr/>
           <p:nvPr/>
         </p:nvSpPr>
@@ -10879,7 +11203,7 @@
       </p:sp>
       <p:sp>
         <p:nvSpPr>
-          <p:cNvPr id="36" name="TextBox 35"/>
+          <p:cNvPr id="37" name="TextBox 36"/>
           <p:cNvSpPr txBox="1"/>
           <p:nvPr/>
         </p:nvSpPr>
@@ -10921,7 +11245,7 @@
       </p:sp>
       <p:sp>
         <p:nvSpPr>
-          <p:cNvPr id="37" name="Rectangle 36"/>
+          <p:cNvPr id="38" name="Rectangle 37"/>
           <p:cNvSpPr/>
           <p:nvPr/>
         </p:nvSpPr>
@@ -10965,7 +11289,7 @@
       </p:sp>
       <p:sp>
         <p:nvSpPr>
-          <p:cNvPr id="38" name="TextBox 37"/>
+          <p:cNvPr id="39" name="TextBox 38"/>
           <p:cNvSpPr txBox="1"/>
           <p:nvPr/>
         </p:nvSpPr>
@@ -11007,7 +11331,7 @@
       </p:sp>
       <p:sp>
         <p:nvSpPr>
-          <p:cNvPr id="39" name="TextBox 38"/>
+          <p:cNvPr id="40" name="TextBox 39"/>
           <p:cNvSpPr txBox="1"/>
           <p:nvPr/>
         </p:nvSpPr>
@@ -11256,7 +11580,7 @@
                 </a:solidFill>
                 <a:latin typeface="Times New Roman"/>
               </a:rPr>
-              <a:t>A risk system built to avoid permanent loss</a:t>
+              <a:t>2.7 A risk system built to avoid permanent loss</a:t>
             </a:r>
           </a:p>
         </p:txBody>
@@ -11794,7 +12118,7 @@
                 </a:solidFill>
                 <a:latin typeface="Times New Roman"/>
               </a:rPr>
-              <a:t>The visible risks are the engine — not the cost</a:t>
+              <a:t>2.8 The visible risks are the engine — not the cost</a:t>
             </a:r>
           </a:p>
         </p:txBody>
@@ -12221,7 +12545,49 @@
       </p:sp>
       <p:sp>
         <p:nvSpPr>
-          <p:cNvPr id="5" name="Rectangle 4"/>
+          <p:cNvPr id="5" name="TextBox 4"/>
+          <p:cNvSpPr txBox="1"/>
+          <p:nvPr/>
+        </p:nvSpPr>
+        <p:spPr>
+          <a:xfrm>
+            <a:off x="9052560" y="246888"/>
+            <a:ext cx="2606040" cy="274320"/>
+          </a:xfrm>
+          <a:prstGeom prst="rect">
+            <a:avLst/>
+          </a:prstGeom>
+          <a:noFill/>
+        </p:spPr>
+        <p:txBody>
+          <a:bodyPr wrap="square" anchor="t" lIns="0" rIns="0" tIns="0" bIns="0">
+            <a:spAutoFit/>
+          </a:bodyPr>
+          <a:lstStyle/>
+          <a:p>
+            <a:pPr algn="r">
+              <a:lnSpc>
+                <a:spcPct val="110000"/>
+              </a:lnSpc>
+              <a:spcAft>
+                <a:spcPts val="0"/>
+              </a:spcAft>
+            </a:pPr>
+            <a:r>
+              <a:rPr sz="1100" b="1" i="0">
+                <a:solidFill>
+                  <a:srgbClr val="4A5D75"/>
+                </a:solidFill>
+                <a:latin typeface="Calibri"/>
+              </a:rPr>
+              <a:t>Figure 3</a:t>
+            </a:r>
+          </a:p>
+        </p:txBody>
+      </p:sp>
+      <p:sp>
+        <p:nvSpPr>
+          <p:cNvPr id="6" name="Rectangle 5"/>
           <p:cNvSpPr/>
           <p:nvPr/>
         </p:nvSpPr>
@@ -12265,7 +12631,7 @@
       </p:sp>
       <p:sp>
         <p:nvSpPr>
-          <p:cNvPr id="6" name="TextBox 5"/>
+          <p:cNvPr id="7" name="TextBox 6"/>
           <p:cNvSpPr txBox="1"/>
           <p:nvPr/>
         </p:nvSpPr>
@@ -12300,14 +12666,14 @@
                 </a:solidFill>
                 <a:latin typeface="Times New Roman"/>
               </a:rPr>
-              <a:t>A non-linear path — honestly priced</a:t>
-            </a:r>
-          </a:p>
-        </p:txBody>
-      </p:sp>
-      <p:sp>
-        <p:nvSpPr>
-          <p:cNvPr id="7" name="TextBox 6"/>
+              <a:t>2.9 A non-linear path — honestly priced</a:t>
+            </a:r>
+          </a:p>
+        </p:txBody>
+      </p:sp>
+      <p:sp>
+        <p:nvSpPr>
+          <p:cNvPr id="8" name="TextBox 7"/>
           <p:cNvSpPr txBox="1"/>
           <p:nvPr/>
         </p:nvSpPr>
@@ -12349,7 +12715,7 @@
       </p:sp>
       <p:sp>
         <p:nvSpPr>
-          <p:cNvPr id="8" name="TextBox 7"/>
+          <p:cNvPr id="9" name="TextBox 8"/>
           <p:cNvSpPr txBox="1"/>
           <p:nvPr/>
         </p:nvSpPr>
@@ -12391,7 +12757,7 @@
       </p:sp>
       <p:sp>
         <p:nvSpPr>
-          <p:cNvPr id="9" name="TextBox 8"/>
+          <p:cNvPr id="10" name="TextBox 9"/>
           <p:cNvSpPr txBox="1"/>
           <p:nvPr/>
         </p:nvSpPr>
@@ -12525,7 +12891,7 @@
       </p:sp>
       <p:graphicFrame>
         <p:nvGraphicFramePr>
-          <p:cNvPr id="10" name="Chart 9"/>
+          <p:cNvPr id="11" name="Chart 10"/>
           <p:cNvGraphicFramePr>
             <a:graphicFrameLocks noGrp="1"/>
           </p:cNvGraphicFramePr>
@@ -12543,7 +12909,7 @@
       </p:graphicFrame>
       <p:sp>
         <p:nvSpPr>
-          <p:cNvPr id="11" name="TextBox 10"/>
+          <p:cNvPr id="12" name="TextBox 11"/>
           <p:cNvSpPr txBox="1"/>
           <p:nvPr/>
         </p:nvSpPr>
@@ -12713,7 +13079,49 @@
       </p:sp>
       <p:sp>
         <p:nvSpPr>
-          <p:cNvPr id="5" name="Rectangle 4"/>
+          <p:cNvPr id="5" name="TextBox 4"/>
+          <p:cNvSpPr txBox="1"/>
+          <p:nvPr/>
+        </p:nvSpPr>
+        <p:spPr>
+          <a:xfrm>
+            <a:off x="9052560" y="246888"/>
+            <a:ext cx="2606040" cy="274320"/>
+          </a:xfrm>
+          <a:prstGeom prst="rect">
+            <a:avLst/>
+          </a:prstGeom>
+          <a:noFill/>
+        </p:spPr>
+        <p:txBody>
+          <a:bodyPr wrap="square" anchor="t" lIns="0" rIns="0" tIns="0" bIns="0">
+            <a:spAutoFit/>
+          </a:bodyPr>
+          <a:lstStyle/>
+          <a:p>
+            <a:pPr algn="r">
+              <a:lnSpc>
+                <a:spcPct val="110000"/>
+              </a:lnSpc>
+              <a:spcAft>
+                <a:spcPts val="0"/>
+              </a:spcAft>
+            </a:pPr>
+            <a:r>
+              <a:rPr sz="1100" b="1" i="0">
+                <a:solidFill>
+                  <a:srgbClr val="4A5D75"/>
+                </a:solidFill>
+                <a:latin typeface="Calibri"/>
+              </a:rPr>
+              <a:t>Table 3</a:t>
+            </a:r>
+          </a:p>
+        </p:txBody>
+      </p:sp>
+      <p:sp>
+        <p:nvSpPr>
+          <p:cNvPr id="6" name="Rectangle 5"/>
           <p:cNvSpPr/>
           <p:nvPr/>
         </p:nvSpPr>
@@ -12757,7 +13165,7 @@
       </p:sp>
       <p:sp>
         <p:nvSpPr>
-          <p:cNvPr id="6" name="TextBox 5"/>
+          <p:cNvPr id="7" name="TextBox 6"/>
           <p:cNvSpPr txBox="1"/>
           <p:nvPr/>
         </p:nvSpPr>
@@ -12792,14 +13200,14 @@
                 </a:solidFill>
                 <a:latin typeface="Times New Roman"/>
               </a:rPr>
-              <a:t>Risk reframing for the investment committee</a:t>
-            </a:r>
-          </a:p>
-        </p:txBody>
-      </p:sp>
-      <p:sp>
-        <p:nvSpPr>
-          <p:cNvPr id="7" name="TextBox 6"/>
+              <a:t>2.10 Risk reframing for the investment committee</a:t>
+            </a:r>
+          </a:p>
+        </p:txBody>
+      </p:sp>
+      <p:sp>
+        <p:nvSpPr>
+          <p:cNvPr id="8" name="TextBox 7"/>
           <p:cNvSpPr txBox="1"/>
           <p:nvPr/>
         </p:nvSpPr>
@@ -12841,7 +13249,7 @@
       </p:sp>
       <p:sp>
         <p:nvSpPr>
-          <p:cNvPr id="8" name="TextBox 7"/>
+          <p:cNvPr id="9" name="TextBox 8"/>
           <p:cNvSpPr txBox="1"/>
           <p:nvPr/>
         </p:nvSpPr>
@@ -12883,7 +13291,7 @@
       </p:sp>
       <p:sp>
         <p:nvSpPr>
-          <p:cNvPr id="9" name="Rectangle 8"/>
+          <p:cNvPr id="10" name="Rectangle 9"/>
           <p:cNvSpPr/>
           <p:nvPr/>
         </p:nvSpPr>
@@ -12927,7 +13335,7 @@
       </p:sp>
       <p:sp>
         <p:nvSpPr>
-          <p:cNvPr id="10" name="TextBox 9"/>
+          <p:cNvPr id="11" name="TextBox 10"/>
           <p:cNvSpPr txBox="1"/>
           <p:nvPr/>
         </p:nvSpPr>
@@ -12969,7 +13377,7 @@
       </p:sp>
       <p:sp>
         <p:nvSpPr>
-          <p:cNvPr id="11" name="Rectangle 10"/>
+          <p:cNvPr id="12" name="Rectangle 11"/>
           <p:cNvSpPr/>
           <p:nvPr/>
         </p:nvSpPr>
@@ -13013,7 +13421,7 @@
       </p:sp>
       <p:sp>
         <p:nvSpPr>
-          <p:cNvPr id="12" name="TextBox 11"/>
+          <p:cNvPr id="13" name="TextBox 12"/>
           <p:cNvSpPr txBox="1"/>
           <p:nvPr/>
         </p:nvSpPr>
@@ -13055,7 +13463,7 @@
       </p:sp>
       <p:sp>
         <p:nvSpPr>
-          <p:cNvPr id="13" name="Rectangle 12"/>
+          <p:cNvPr id="14" name="Rectangle 13"/>
           <p:cNvSpPr/>
           <p:nvPr/>
         </p:nvSpPr>
@@ -13099,7 +13507,7 @@
       </p:sp>
       <p:sp>
         <p:nvSpPr>
-          <p:cNvPr id="14" name="TextBox 13"/>
+          <p:cNvPr id="15" name="TextBox 14"/>
           <p:cNvSpPr txBox="1"/>
           <p:nvPr/>
         </p:nvSpPr>
@@ -13141,7 +13549,7 @@
       </p:sp>
       <p:sp>
         <p:nvSpPr>
-          <p:cNvPr id="15" name="Rectangle 14"/>
+          <p:cNvPr id="16" name="Rectangle 15"/>
           <p:cNvSpPr/>
           <p:nvPr/>
         </p:nvSpPr>
@@ -13185,7 +13593,7 @@
       </p:sp>
       <p:sp>
         <p:nvSpPr>
-          <p:cNvPr id="16" name="TextBox 15"/>
+          <p:cNvPr id="17" name="TextBox 16"/>
           <p:cNvSpPr txBox="1"/>
           <p:nvPr/>
         </p:nvSpPr>
@@ -13227,7 +13635,7 @@
       </p:sp>
       <p:sp>
         <p:nvSpPr>
-          <p:cNvPr id="17" name="Rectangle 16"/>
+          <p:cNvPr id="18" name="Rectangle 17"/>
           <p:cNvSpPr/>
           <p:nvPr/>
         </p:nvSpPr>
@@ -13271,7 +13679,7 @@
       </p:sp>
       <p:sp>
         <p:nvSpPr>
-          <p:cNvPr id="18" name="TextBox 17"/>
+          <p:cNvPr id="19" name="TextBox 18"/>
           <p:cNvSpPr txBox="1"/>
           <p:nvPr/>
         </p:nvSpPr>
@@ -13313,7 +13721,7 @@
       </p:sp>
       <p:sp>
         <p:nvSpPr>
-          <p:cNvPr id="19" name="Rectangle 18"/>
+          <p:cNvPr id="20" name="Rectangle 19"/>
           <p:cNvSpPr/>
           <p:nvPr/>
         </p:nvSpPr>
@@ -13357,7 +13765,7 @@
       </p:sp>
       <p:sp>
         <p:nvSpPr>
-          <p:cNvPr id="20" name="TextBox 19"/>
+          <p:cNvPr id="21" name="TextBox 20"/>
           <p:cNvSpPr txBox="1"/>
           <p:nvPr/>
         </p:nvSpPr>
@@ -13399,7 +13807,7 @@
       </p:sp>
       <p:sp>
         <p:nvSpPr>
-          <p:cNvPr id="21" name="Rectangle 20"/>
+          <p:cNvPr id="22" name="Rectangle 21"/>
           <p:cNvSpPr/>
           <p:nvPr/>
         </p:nvSpPr>
@@ -13443,7 +13851,7 @@
       </p:sp>
       <p:sp>
         <p:nvSpPr>
-          <p:cNvPr id="22" name="TextBox 21"/>
+          <p:cNvPr id="23" name="TextBox 22"/>
           <p:cNvSpPr txBox="1"/>
           <p:nvPr/>
         </p:nvSpPr>
@@ -13485,7 +13893,7 @@
       </p:sp>
       <p:sp>
         <p:nvSpPr>
-          <p:cNvPr id="23" name="Rectangle 22"/>
+          <p:cNvPr id="24" name="Rectangle 23"/>
           <p:cNvSpPr/>
           <p:nvPr/>
         </p:nvSpPr>
@@ -13529,7 +13937,7 @@
       </p:sp>
       <p:sp>
         <p:nvSpPr>
-          <p:cNvPr id="24" name="TextBox 23"/>
+          <p:cNvPr id="25" name="TextBox 24"/>
           <p:cNvSpPr txBox="1"/>
           <p:nvPr/>
         </p:nvSpPr>
@@ -13571,7 +13979,7 @@
       </p:sp>
       <p:sp>
         <p:nvSpPr>
-          <p:cNvPr id="25" name="Rectangle 24"/>
+          <p:cNvPr id="26" name="Rectangle 25"/>
           <p:cNvSpPr/>
           <p:nvPr/>
         </p:nvSpPr>
@@ -13615,7 +14023,7 @@
       </p:sp>
       <p:sp>
         <p:nvSpPr>
-          <p:cNvPr id="26" name="TextBox 25"/>
+          <p:cNvPr id="27" name="TextBox 26"/>
           <p:cNvSpPr txBox="1"/>
           <p:nvPr/>
         </p:nvSpPr>
@@ -13657,7 +14065,7 @@
       </p:sp>
       <p:sp>
         <p:nvSpPr>
-          <p:cNvPr id="27" name="Rectangle 26"/>
+          <p:cNvPr id="28" name="Rectangle 27"/>
           <p:cNvSpPr/>
           <p:nvPr/>
         </p:nvSpPr>
@@ -13701,7 +14109,7 @@
       </p:sp>
       <p:sp>
         <p:nvSpPr>
-          <p:cNvPr id="28" name="TextBox 27"/>
+          <p:cNvPr id="29" name="TextBox 28"/>
           <p:cNvSpPr txBox="1"/>
           <p:nvPr/>
         </p:nvSpPr>
@@ -13743,7 +14151,7 @@
       </p:sp>
       <p:sp>
         <p:nvSpPr>
-          <p:cNvPr id="29" name="Rectangle 28"/>
+          <p:cNvPr id="30" name="Rectangle 29"/>
           <p:cNvSpPr/>
           <p:nvPr/>
         </p:nvSpPr>
@@ -13787,7 +14195,7 @@
       </p:sp>
       <p:sp>
         <p:nvSpPr>
-          <p:cNvPr id="30" name="TextBox 29"/>
+          <p:cNvPr id="31" name="TextBox 30"/>
           <p:cNvSpPr txBox="1"/>
           <p:nvPr/>
         </p:nvSpPr>
@@ -13829,7 +14237,7 @@
       </p:sp>
       <p:sp>
         <p:nvSpPr>
-          <p:cNvPr id="31" name="Rectangle 30"/>
+          <p:cNvPr id="32" name="Rectangle 31"/>
           <p:cNvSpPr/>
           <p:nvPr/>
         </p:nvSpPr>
@@ -13873,7 +14281,7 @@
       </p:sp>
       <p:sp>
         <p:nvSpPr>
-          <p:cNvPr id="32" name="TextBox 31"/>
+          <p:cNvPr id="33" name="TextBox 32"/>
           <p:cNvSpPr txBox="1"/>
           <p:nvPr/>
         </p:nvSpPr>
@@ -13915,7 +14323,7 @@
       </p:sp>
       <p:sp>
         <p:nvSpPr>
-          <p:cNvPr id="33" name="Rectangle 32"/>
+          <p:cNvPr id="34" name="Rectangle 33"/>
           <p:cNvSpPr/>
           <p:nvPr/>
         </p:nvSpPr>
@@ -13959,7 +14367,7 @@
       </p:sp>
       <p:sp>
         <p:nvSpPr>
-          <p:cNvPr id="34" name="TextBox 33"/>
+          <p:cNvPr id="35" name="TextBox 34"/>
           <p:cNvSpPr txBox="1"/>
           <p:nvPr/>
         </p:nvSpPr>
@@ -14001,7 +14409,7 @@
       </p:sp>
       <p:sp>
         <p:nvSpPr>
-          <p:cNvPr id="35" name="Rectangle 34"/>
+          <p:cNvPr id="36" name="Rectangle 35"/>
           <p:cNvSpPr/>
           <p:nvPr/>
         </p:nvSpPr>
@@ -14045,7 +14453,7 @@
       </p:sp>
       <p:sp>
         <p:nvSpPr>
-          <p:cNvPr id="36" name="TextBox 35"/>
+          <p:cNvPr id="37" name="TextBox 36"/>
           <p:cNvSpPr txBox="1"/>
           <p:nvPr/>
         </p:nvSpPr>
@@ -14087,7 +14495,7 @@
       </p:sp>
       <p:sp>
         <p:nvSpPr>
-          <p:cNvPr id="37" name="TextBox 36"/>
+          <p:cNvPr id="38" name="TextBox 37"/>
           <p:cNvSpPr txBox="1"/>
           <p:nvPr/>
         </p:nvSpPr>
@@ -14630,7 +15038,49 @@
       </p:sp>
       <p:sp>
         <p:nvSpPr>
-          <p:cNvPr id="5" name="Rectangle 4"/>
+          <p:cNvPr id="5" name="TextBox 4"/>
+          <p:cNvSpPr txBox="1"/>
+          <p:nvPr/>
+        </p:nvSpPr>
+        <p:spPr>
+          <a:xfrm>
+            <a:off x="9052560" y="246888"/>
+            <a:ext cx="2606040" cy="274320"/>
+          </a:xfrm>
+          <a:prstGeom prst="rect">
+            <a:avLst/>
+          </a:prstGeom>
+          <a:noFill/>
+        </p:spPr>
+        <p:txBody>
+          <a:bodyPr wrap="square" anchor="t" lIns="0" rIns="0" tIns="0" bIns="0">
+            <a:spAutoFit/>
+          </a:bodyPr>
+          <a:lstStyle/>
+          <a:p>
+            <a:pPr algn="r">
+              <a:lnSpc>
+                <a:spcPct val="110000"/>
+              </a:lnSpc>
+              <a:spcAft>
+                <a:spcPts val="0"/>
+              </a:spcAft>
+            </a:pPr>
+            <a:r>
+              <a:rPr sz="1100" b="1" i="0">
+                <a:solidFill>
+                  <a:srgbClr val="4A5D75"/>
+                </a:solidFill>
+                <a:latin typeface="Calibri"/>
+              </a:rPr>
+              <a:t>Figure 4</a:t>
+            </a:r>
+          </a:p>
+        </p:txBody>
+      </p:sp>
+      <p:sp>
+        <p:nvSpPr>
+          <p:cNvPr id="6" name="Rectangle 5"/>
           <p:cNvSpPr/>
           <p:nvPr/>
         </p:nvSpPr>
@@ -14674,7 +15124,7 @@
       </p:sp>
       <p:sp>
         <p:nvSpPr>
-          <p:cNvPr id="6" name="TextBox 5"/>
+          <p:cNvPr id="7" name="TextBox 6"/>
           <p:cNvSpPr txBox="1"/>
           <p:nvPr/>
         </p:nvSpPr>
@@ -14709,14 +15159,14 @@
                 </a:solidFill>
                 <a:latin typeface="Times New Roman"/>
               </a:rPr>
-              <a:t>Proof: outperformance with downside protection</a:t>
-            </a:r>
-          </a:p>
-        </p:txBody>
-      </p:sp>
-      <p:sp>
-        <p:nvSpPr>
-          <p:cNvPr id="7" name="TextBox 6"/>
+              <a:t>2.11 Proof: outperformance with downside protection</a:t>
+            </a:r>
+          </a:p>
+        </p:txBody>
+      </p:sp>
+      <p:sp>
+        <p:nvSpPr>
+          <p:cNvPr id="8" name="TextBox 7"/>
           <p:cNvSpPr txBox="1"/>
           <p:nvPr/>
         </p:nvSpPr>
@@ -14758,7 +15208,7 @@
       </p:sp>
       <p:graphicFrame>
         <p:nvGraphicFramePr>
-          <p:cNvPr id="8" name="Chart 7"/>
+          <p:cNvPr id="9" name="Chart 8"/>
           <p:cNvGraphicFramePr>
             <a:graphicFrameLocks noGrp="1"/>
           </p:cNvGraphicFramePr>
@@ -14776,7 +15226,7 @@
       </p:graphicFrame>
       <p:sp>
         <p:nvSpPr>
-          <p:cNvPr id="9" name="TextBox 8"/>
+          <p:cNvPr id="10" name="TextBox 9"/>
           <p:cNvSpPr txBox="1"/>
           <p:nvPr/>
         </p:nvSpPr>
@@ -15041,7 +15491,49 @@
       </p:sp>
       <p:sp>
         <p:nvSpPr>
-          <p:cNvPr id="5" name="Rectangle 4"/>
+          <p:cNvPr id="5" name="TextBox 4"/>
+          <p:cNvSpPr txBox="1"/>
+          <p:nvPr/>
+        </p:nvSpPr>
+        <p:spPr>
+          <a:xfrm>
+            <a:off x="9052560" y="246888"/>
+            <a:ext cx="2606040" cy="274320"/>
+          </a:xfrm>
+          <a:prstGeom prst="rect">
+            <a:avLst/>
+          </a:prstGeom>
+          <a:noFill/>
+        </p:spPr>
+        <p:txBody>
+          <a:bodyPr wrap="square" anchor="t" lIns="0" rIns="0" tIns="0" bIns="0">
+            <a:spAutoFit/>
+          </a:bodyPr>
+          <a:lstStyle/>
+          <a:p>
+            <a:pPr algn="r">
+              <a:lnSpc>
+                <a:spcPct val="110000"/>
+              </a:lnSpc>
+              <a:spcAft>
+                <a:spcPts val="0"/>
+              </a:spcAft>
+            </a:pPr>
+            <a:r>
+              <a:rPr sz="1100" b="1" i="0">
+                <a:solidFill>
+                  <a:srgbClr val="4A5D75"/>
+                </a:solidFill>
+                <a:latin typeface="Calibri"/>
+              </a:rPr>
+              <a:t>Table 4</a:t>
+            </a:r>
+          </a:p>
+        </p:txBody>
+      </p:sp>
+      <p:sp>
+        <p:nvSpPr>
+          <p:cNvPr id="6" name="Rectangle 5"/>
           <p:cNvSpPr/>
           <p:nvPr/>
         </p:nvSpPr>
@@ -15085,7 +15577,7 @@
       </p:sp>
       <p:sp>
         <p:nvSpPr>
-          <p:cNvPr id="6" name="TextBox 5"/>
+          <p:cNvPr id="7" name="TextBox 6"/>
           <p:cNvSpPr txBox="1"/>
           <p:nvPr/>
         </p:nvSpPr>
@@ -15120,14 +15612,14 @@
                 </a:solidFill>
                 <a:latin typeface="Times New Roman"/>
               </a:rPr>
-              <a:t>AIP Fund II — transactions (2015–present)</a:t>
-            </a:r>
-          </a:p>
-        </p:txBody>
-      </p:sp>
-      <p:sp>
-        <p:nvSpPr>
-          <p:cNvPr id="7" name="TextBox 6"/>
+              <a:t>2.12 AIP Fund II — transactions (2015–present)</a:t>
+            </a:r>
+          </a:p>
+        </p:txBody>
+      </p:sp>
+      <p:sp>
+        <p:nvSpPr>
+          <p:cNvPr id="8" name="TextBox 7"/>
           <p:cNvSpPr txBox="1"/>
           <p:nvPr/>
         </p:nvSpPr>
@@ -15169,7 +15661,7 @@
       </p:sp>
       <p:sp>
         <p:nvSpPr>
-          <p:cNvPr id="8" name="TextBox 7"/>
+          <p:cNvPr id="9" name="TextBox 8"/>
           <p:cNvSpPr txBox="1"/>
           <p:nvPr/>
         </p:nvSpPr>
@@ -15211,7 +15703,7 @@
       </p:sp>
       <p:sp>
         <p:nvSpPr>
-          <p:cNvPr id="9" name="Rectangle 8"/>
+          <p:cNvPr id="10" name="Rectangle 9"/>
           <p:cNvSpPr/>
           <p:nvPr/>
         </p:nvSpPr>
@@ -15255,7 +15747,7 @@
       </p:sp>
       <p:sp>
         <p:nvSpPr>
-          <p:cNvPr id="10" name="TextBox 9"/>
+          <p:cNvPr id="11" name="TextBox 10"/>
           <p:cNvSpPr txBox="1"/>
           <p:nvPr/>
         </p:nvSpPr>
@@ -15297,7 +15789,7 @@
       </p:sp>
       <p:sp>
         <p:nvSpPr>
-          <p:cNvPr id="11" name="Rectangle 10"/>
+          <p:cNvPr id="12" name="Rectangle 11"/>
           <p:cNvSpPr/>
           <p:nvPr/>
         </p:nvSpPr>
@@ -15341,7 +15833,7 @@
       </p:sp>
       <p:sp>
         <p:nvSpPr>
-          <p:cNvPr id="12" name="TextBox 11"/>
+          <p:cNvPr id="13" name="TextBox 12"/>
           <p:cNvSpPr txBox="1"/>
           <p:nvPr/>
         </p:nvSpPr>
@@ -15383,7 +15875,7 @@
       </p:sp>
       <p:sp>
         <p:nvSpPr>
-          <p:cNvPr id="13" name="Rectangle 12"/>
+          <p:cNvPr id="14" name="Rectangle 13"/>
           <p:cNvSpPr/>
           <p:nvPr/>
         </p:nvSpPr>
@@ -15427,7 +15919,7 @@
       </p:sp>
       <p:sp>
         <p:nvSpPr>
-          <p:cNvPr id="14" name="TextBox 13"/>
+          <p:cNvPr id="15" name="TextBox 14"/>
           <p:cNvSpPr txBox="1"/>
           <p:nvPr/>
         </p:nvSpPr>
@@ -15469,7 +15961,7 @@
       </p:sp>
       <p:sp>
         <p:nvSpPr>
-          <p:cNvPr id="15" name="Rectangle 14"/>
+          <p:cNvPr id="16" name="Rectangle 15"/>
           <p:cNvSpPr/>
           <p:nvPr/>
         </p:nvSpPr>
@@ -15513,7 +16005,7 @@
       </p:sp>
       <p:sp>
         <p:nvSpPr>
-          <p:cNvPr id="16" name="TextBox 15"/>
+          <p:cNvPr id="17" name="TextBox 16"/>
           <p:cNvSpPr txBox="1"/>
           <p:nvPr/>
         </p:nvSpPr>
@@ -15555,7 +16047,7 @@
       </p:sp>
       <p:sp>
         <p:nvSpPr>
-          <p:cNvPr id="17" name="Rectangle 16"/>
+          <p:cNvPr id="18" name="Rectangle 17"/>
           <p:cNvSpPr/>
           <p:nvPr/>
         </p:nvSpPr>
@@ -15599,7 +16091,7 @@
       </p:sp>
       <p:sp>
         <p:nvSpPr>
-          <p:cNvPr id="18" name="TextBox 17"/>
+          <p:cNvPr id="19" name="TextBox 18"/>
           <p:cNvSpPr txBox="1"/>
           <p:nvPr/>
         </p:nvSpPr>
@@ -15641,7 +16133,7 @@
       </p:sp>
       <p:sp>
         <p:nvSpPr>
-          <p:cNvPr id="19" name="Rectangle 18"/>
+          <p:cNvPr id="20" name="Rectangle 19"/>
           <p:cNvSpPr/>
           <p:nvPr/>
         </p:nvSpPr>
@@ -15685,7 +16177,7 @@
       </p:sp>
       <p:sp>
         <p:nvSpPr>
-          <p:cNvPr id="20" name="TextBox 19"/>
+          <p:cNvPr id="21" name="TextBox 20"/>
           <p:cNvSpPr txBox="1"/>
           <p:nvPr/>
         </p:nvSpPr>
@@ -15727,7 +16219,7 @@
       </p:sp>
       <p:sp>
         <p:nvSpPr>
-          <p:cNvPr id="21" name="Rectangle 20"/>
+          <p:cNvPr id="22" name="Rectangle 21"/>
           <p:cNvSpPr/>
           <p:nvPr/>
         </p:nvSpPr>
@@ -15771,7 +16263,7 @@
       </p:sp>
       <p:sp>
         <p:nvSpPr>
-          <p:cNvPr id="22" name="TextBox 21"/>
+          <p:cNvPr id="23" name="TextBox 22"/>
           <p:cNvSpPr txBox="1"/>
           <p:nvPr/>
         </p:nvSpPr>
@@ -15813,7 +16305,7 @@
       </p:sp>
       <p:sp>
         <p:nvSpPr>
-          <p:cNvPr id="23" name="Rectangle 22"/>
+          <p:cNvPr id="24" name="Rectangle 23"/>
           <p:cNvSpPr/>
           <p:nvPr/>
         </p:nvSpPr>
@@ -15857,7 +16349,7 @@
       </p:sp>
       <p:sp>
         <p:nvSpPr>
-          <p:cNvPr id="24" name="TextBox 23"/>
+          <p:cNvPr id="25" name="TextBox 24"/>
           <p:cNvSpPr txBox="1"/>
           <p:nvPr/>
         </p:nvSpPr>
@@ -15899,7 +16391,7 @@
       </p:sp>
       <p:sp>
         <p:nvSpPr>
-          <p:cNvPr id="25" name="Rectangle 24"/>
+          <p:cNvPr id="26" name="Rectangle 25"/>
           <p:cNvSpPr/>
           <p:nvPr/>
         </p:nvSpPr>
@@ -15943,7 +16435,7 @@
       </p:sp>
       <p:sp>
         <p:nvSpPr>
-          <p:cNvPr id="26" name="TextBox 25"/>
+          <p:cNvPr id="27" name="TextBox 26"/>
           <p:cNvSpPr txBox="1"/>
           <p:nvPr/>
         </p:nvSpPr>
@@ -15985,7 +16477,7 @@
       </p:sp>
       <p:sp>
         <p:nvSpPr>
-          <p:cNvPr id="27" name="Rectangle 26"/>
+          <p:cNvPr id="28" name="Rectangle 27"/>
           <p:cNvSpPr/>
           <p:nvPr/>
         </p:nvSpPr>
@@ -16029,7 +16521,7 @@
       </p:sp>
       <p:sp>
         <p:nvSpPr>
-          <p:cNvPr id="28" name="TextBox 27"/>
+          <p:cNvPr id="29" name="TextBox 28"/>
           <p:cNvSpPr txBox="1"/>
           <p:nvPr/>
         </p:nvSpPr>
@@ -16071,7 +16563,7 @@
       </p:sp>
       <p:sp>
         <p:nvSpPr>
-          <p:cNvPr id="29" name="Rectangle 28"/>
+          <p:cNvPr id="30" name="Rectangle 29"/>
           <p:cNvSpPr/>
           <p:nvPr/>
         </p:nvSpPr>
@@ -16115,7 +16607,7 @@
       </p:sp>
       <p:sp>
         <p:nvSpPr>
-          <p:cNvPr id="30" name="TextBox 29"/>
+          <p:cNvPr id="31" name="TextBox 30"/>
           <p:cNvSpPr txBox="1"/>
           <p:nvPr/>
         </p:nvSpPr>
@@ -16157,7 +16649,7 @@
       </p:sp>
       <p:sp>
         <p:nvSpPr>
-          <p:cNvPr id="31" name="Rectangle 30"/>
+          <p:cNvPr id="32" name="Rectangle 31"/>
           <p:cNvSpPr/>
           <p:nvPr/>
         </p:nvSpPr>
@@ -16201,7 +16693,7 @@
       </p:sp>
       <p:sp>
         <p:nvSpPr>
-          <p:cNvPr id="32" name="TextBox 31"/>
+          <p:cNvPr id="33" name="TextBox 32"/>
           <p:cNvSpPr txBox="1"/>
           <p:nvPr/>
         </p:nvSpPr>
@@ -16243,7 +16735,7 @@
       </p:sp>
       <p:sp>
         <p:nvSpPr>
-          <p:cNvPr id="33" name="Rectangle 32"/>
+          <p:cNvPr id="34" name="Rectangle 33"/>
           <p:cNvSpPr/>
           <p:nvPr/>
         </p:nvSpPr>
@@ -16287,7 +16779,7 @@
       </p:sp>
       <p:sp>
         <p:nvSpPr>
-          <p:cNvPr id="34" name="TextBox 33"/>
+          <p:cNvPr id="35" name="TextBox 34"/>
           <p:cNvSpPr txBox="1"/>
           <p:nvPr/>
         </p:nvSpPr>
@@ -16329,7 +16821,7 @@
       </p:sp>
       <p:sp>
         <p:nvSpPr>
-          <p:cNvPr id="35" name="Rectangle 34"/>
+          <p:cNvPr id="36" name="Rectangle 35"/>
           <p:cNvSpPr/>
           <p:nvPr/>
         </p:nvSpPr>
@@ -16373,7 +16865,7 @@
       </p:sp>
       <p:sp>
         <p:nvSpPr>
-          <p:cNvPr id="36" name="TextBox 35"/>
+          <p:cNvPr id="37" name="TextBox 36"/>
           <p:cNvSpPr txBox="1"/>
           <p:nvPr/>
         </p:nvSpPr>
@@ -16415,7 +16907,7 @@
       </p:sp>
       <p:sp>
         <p:nvSpPr>
-          <p:cNvPr id="37" name="Rectangle 36"/>
+          <p:cNvPr id="38" name="Rectangle 37"/>
           <p:cNvSpPr/>
           <p:nvPr/>
         </p:nvSpPr>
@@ -16459,7 +16951,7 @@
       </p:sp>
       <p:sp>
         <p:nvSpPr>
-          <p:cNvPr id="38" name="TextBox 37"/>
+          <p:cNvPr id="39" name="TextBox 38"/>
           <p:cNvSpPr txBox="1"/>
           <p:nvPr/>
         </p:nvSpPr>
@@ -16501,7 +16993,7 @@
       </p:sp>
       <p:sp>
         <p:nvSpPr>
-          <p:cNvPr id="39" name="Rectangle 38"/>
+          <p:cNvPr id="40" name="Rectangle 39"/>
           <p:cNvSpPr/>
           <p:nvPr/>
         </p:nvSpPr>
@@ -16545,7 +17037,7 @@
       </p:sp>
       <p:sp>
         <p:nvSpPr>
-          <p:cNvPr id="40" name="TextBox 39"/>
+          <p:cNvPr id="41" name="TextBox 40"/>
           <p:cNvSpPr txBox="1"/>
           <p:nvPr/>
         </p:nvSpPr>
@@ -16587,7 +17079,7 @@
       </p:sp>
       <p:sp>
         <p:nvSpPr>
-          <p:cNvPr id="41" name="Rectangle 40"/>
+          <p:cNvPr id="42" name="Rectangle 41"/>
           <p:cNvSpPr/>
           <p:nvPr/>
         </p:nvSpPr>
@@ -16631,7 +17123,7 @@
       </p:sp>
       <p:sp>
         <p:nvSpPr>
-          <p:cNvPr id="42" name="TextBox 41"/>
+          <p:cNvPr id="43" name="TextBox 42"/>
           <p:cNvSpPr txBox="1"/>
           <p:nvPr/>
         </p:nvSpPr>
@@ -16673,7 +17165,7 @@
       </p:sp>
       <p:sp>
         <p:nvSpPr>
-          <p:cNvPr id="43" name="Rectangle 42"/>
+          <p:cNvPr id="44" name="Rectangle 43"/>
           <p:cNvSpPr/>
           <p:nvPr/>
         </p:nvSpPr>
@@ -16717,7 +17209,7 @@
       </p:sp>
       <p:sp>
         <p:nvSpPr>
-          <p:cNvPr id="44" name="TextBox 43"/>
+          <p:cNvPr id="45" name="TextBox 44"/>
           <p:cNvSpPr txBox="1"/>
           <p:nvPr/>
         </p:nvSpPr>
@@ -16759,7 +17251,7 @@
       </p:sp>
       <p:sp>
         <p:nvSpPr>
-          <p:cNvPr id="45" name="Rectangle 44"/>
+          <p:cNvPr id="46" name="Rectangle 45"/>
           <p:cNvSpPr/>
           <p:nvPr/>
         </p:nvSpPr>
@@ -16803,7 +17295,7 @@
       </p:sp>
       <p:sp>
         <p:nvSpPr>
-          <p:cNvPr id="46" name="TextBox 45"/>
+          <p:cNvPr id="47" name="TextBox 46"/>
           <p:cNvSpPr txBox="1"/>
           <p:nvPr/>
         </p:nvSpPr>
@@ -16845,7 +17337,7 @@
       </p:sp>
       <p:sp>
         <p:nvSpPr>
-          <p:cNvPr id="47" name="Rectangle 46"/>
+          <p:cNvPr id="48" name="Rectangle 47"/>
           <p:cNvSpPr/>
           <p:nvPr/>
         </p:nvSpPr>
@@ -16889,7 +17381,7 @@
       </p:sp>
       <p:sp>
         <p:nvSpPr>
-          <p:cNvPr id="48" name="TextBox 47"/>
+          <p:cNvPr id="49" name="TextBox 48"/>
           <p:cNvSpPr txBox="1"/>
           <p:nvPr/>
         </p:nvSpPr>
@@ -16931,7 +17423,7 @@
       </p:sp>
       <p:sp>
         <p:nvSpPr>
-          <p:cNvPr id="49" name="Rectangle 48"/>
+          <p:cNvPr id="50" name="Rectangle 49"/>
           <p:cNvSpPr/>
           <p:nvPr/>
         </p:nvSpPr>
@@ -16975,7 +17467,7 @@
       </p:sp>
       <p:sp>
         <p:nvSpPr>
-          <p:cNvPr id="50" name="TextBox 49"/>
+          <p:cNvPr id="51" name="TextBox 50"/>
           <p:cNvSpPr txBox="1"/>
           <p:nvPr/>
         </p:nvSpPr>
@@ -17017,7 +17509,7 @@
       </p:sp>
       <p:sp>
         <p:nvSpPr>
-          <p:cNvPr id="51" name="Rectangle 50"/>
+          <p:cNvPr id="52" name="Rectangle 51"/>
           <p:cNvSpPr/>
           <p:nvPr/>
         </p:nvSpPr>
@@ -17061,7 +17553,7 @@
       </p:sp>
       <p:sp>
         <p:nvSpPr>
-          <p:cNvPr id="52" name="TextBox 51"/>
+          <p:cNvPr id="53" name="TextBox 52"/>
           <p:cNvSpPr txBox="1"/>
           <p:nvPr/>
         </p:nvSpPr>
@@ -17103,7 +17595,7 @@
       </p:sp>
       <p:sp>
         <p:nvSpPr>
-          <p:cNvPr id="53" name="Rectangle 52"/>
+          <p:cNvPr id="54" name="Rectangle 53"/>
           <p:cNvSpPr/>
           <p:nvPr/>
         </p:nvSpPr>
@@ -17147,7 +17639,7 @@
       </p:sp>
       <p:sp>
         <p:nvSpPr>
-          <p:cNvPr id="54" name="TextBox 53"/>
+          <p:cNvPr id="55" name="TextBox 54"/>
           <p:cNvSpPr txBox="1"/>
           <p:nvPr/>
         </p:nvSpPr>
@@ -17189,7 +17681,7 @@
       </p:sp>
       <p:sp>
         <p:nvSpPr>
-          <p:cNvPr id="55" name="Rectangle 54"/>
+          <p:cNvPr id="56" name="Rectangle 55"/>
           <p:cNvSpPr/>
           <p:nvPr/>
         </p:nvSpPr>
@@ -17233,7 +17725,7 @@
       </p:sp>
       <p:sp>
         <p:nvSpPr>
-          <p:cNvPr id="56" name="TextBox 55"/>
+          <p:cNvPr id="57" name="TextBox 56"/>
           <p:cNvSpPr txBox="1"/>
           <p:nvPr/>
         </p:nvSpPr>
@@ -17275,7 +17767,7 @@
       </p:sp>
       <p:sp>
         <p:nvSpPr>
-          <p:cNvPr id="57" name="Rectangle 56"/>
+          <p:cNvPr id="58" name="Rectangle 57"/>
           <p:cNvSpPr/>
           <p:nvPr/>
         </p:nvSpPr>
@@ -17319,7 +17811,7 @@
       </p:sp>
       <p:sp>
         <p:nvSpPr>
-          <p:cNvPr id="58" name="TextBox 57"/>
+          <p:cNvPr id="59" name="TextBox 58"/>
           <p:cNvSpPr txBox="1"/>
           <p:nvPr/>
         </p:nvSpPr>
@@ -17361,7 +17853,7 @@
       </p:sp>
       <p:sp>
         <p:nvSpPr>
-          <p:cNvPr id="59" name="Rectangle 58"/>
+          <p:cNvPr id="60" name="Rectangle 59"/>
           <p:cNvSpPr/>
           <p:nvPr/>
         </p:nvSpPr>
@@ -17405,7 +17897,7 @@
       </p:sp>
       <p:sp>
         <p:nvSpPr>
-          <p:cNvPr id="60" name="TextBox 59"/>
+          <p:cNvPr id="61" name="TextBox 60"/>
           <p:cNvSpPr txBox="1"/>
           <p:nvPr/>
         </p:nvSpPr>
@@ -17447,7 +17939,7 @@
       </p:sp>
       <p:sp>
         <p:nvSpPr>
-          <p:cNvPr id="61" name="Rectangle 60"/>
+          <p:cNvPr id="62" name="Rectangle 61"/>
           <p:cNvSpPr/>
           <p:nvPr/>
         </p:nvSpPr>
@@ -17491,7 +17983,7 @@
       </p:sp>
       <p:sp>
         <p:nvSpPr>
-          <p:cNvPr id="62" name="TextBox 61"/>
+          <p:cNvPr id="63" name="TextBox 62"/>
           <p:cNvSpPr txBox="1"/>
           <p:nvPr/>
         </p:nvSpPr>
@@ -17533,7 +18025,7 @@
       </p:sp>
       <p:sp>
         <p:nvSpPr>
-          <p:cNvPr id="63" name="Rectangle 62"/>
+          <p:cNvPr id="64" name="Rectangle 63"/>
           <p:cNvSpPr/>
           <p:nvPr/>
         </p:nvSpPr>
@@ -17577,7 +18069,7 @@
       </p:sp>
       <p:sp>
         <p:nvSpPr>
-          <p:cNvPr id="64" name="TextBox 63"/>
+          <p:cNvPr id="65" name="TextBox 64"/>
           <p:cNvSpPr txBox="1"/>
           <p:nvPr/>
         </p:nvSpPr>
@@ -17619,7 +18111,7 @@
       </p:sp>
       <p:sp>
         <p:nvSpPr>
-          <p:cNvPr id="65" name="Rectangle 64"/>
+          <p:cNvPr id="66" name="Rectangle 65"/>
           <p:cNvSpPr/>
           <p:nvPr/>
         </p:nvSpPr>
@@ -17663,7 +18155,7 @@
       </p:sp>
       <p:sp>
         <p:nvSpPr>
-          <p:cNvPr id="66" name="TextBox 65"/>
+          <p:cNvPr id="67" name="TextBox 66"/>
           <p:cNvSpPr txBox="1"/>
           <p:nvPr/>
         </p:nvSpPr>
@@ -17705,7 +18197,7 @@
       </p:sp>
       <p:sp>
         <p:nvSpPr>
-          <p:cNvPr id="67" name="Rectangle 66"/>
+          <p:cNvPr id="68" name="Rectangle 67"/>
           <p:cNvSpPr/>
           <p:nvPr/>
         </p:nvSpPr>
@@ -17749,7 +18241,7 @@
       </p:sp>
       <p:sp>
         <p:nvSpPr>
-          <p:cNvPr id="68" name="TextBox 67"/>
+          <p:cNvPr id="69" name="TextBox 68"/>
           <p:cNvSpPr txBox="1"/>
           <p:nvPr/>
         </p:nvSpPr>
@@ -17791,7 +18283,7 @@
       </p:sp>
       <p:sp>
         <p:nvSpPr>
-          <p:cNvPr id="69" name="Rectangle 68"/>
+          <p:cNvPr id="70" name="Rectangle 69"/>
           <p:cNvSpPr/>
           <p:nvPr/>
         </p:nvSpPr>
@@ -17835,7 +18327,7 @@
       </p:sp>
       <p:sp>
         <p:nvSpPr>
-          <p:cNvPr id="70" name="TextBox 69"/>
+          <p:cNvPr id="71" name="TextBox 70"/>
           <p:cNvSpPr txBox="1"/>
           <p:nvPr/>
         </p:nvSpPr>
@@ -17877,7 +18369,7 @@
       </p:sp>
       <p:sp>
         <p:nvSpPr>
-          <p:cNvPr id="71" name="Rectangle 70"/>
+          <p:cNvPr id="72" name="Rectangle 71"/>
           <p:cNvSpPr/>
           <p:nvPr/>
         </p:nvSpPr>
@@ -17921,7 +18413,7 @@
       </p:sp>
       <p:sp>
         <p:nvSpPr>
-          <p:cNvPr id="72" name="TextBox 71"/>
+          <p:cNvPr id="73" name="TextBox 72"/>
           <p:cNvSpPr txBox="1"/>
           <p:nvPr/>
         </p:nvSpPr>
@@ -17963,7 +18455,7 @@
       </p:sp>
       <p:sp>
         <p:nvSpPr>
-          <p:cNvPr id="73" name="Rectangle 72"/>
+          <p:cNvPr id="74" name="Rectangle 73"/>
           <p:cNvSpPr/>
           <p:nvPr/>
         </p:nvSpPr>
@@ -18007,7 +18499,7 @@
       </p:sp>
       <p:sp>
         <p:nvSpPr>
-          <p:cNvPr id="74" name="TextBox 73"/>
+          <p:cNvPr id="75" name="TextBox 74"/>
           <p:cNvSpPr txBox="1"/>
           <p:nvPr/>
         </p:nvSpPr>
@@ -18049,7 +18541,7 @@
       </p:sp>
       <p:sp>
         <p:nvSpPr>
-          <p:cNvPr id="75" name="Rectangle 74"/>
+          <p:cNvPr id="76" name="Rectangle 75"/>
           <p:cNvSpPr/>
           <p:nvPr/>
         </p:nvSpPr>
@@ -18093,7 +18585,7 @@
       </p:sp>
       <p:sp>
         <p:nvSpPr>
-          <p:cNvPr id="76" name="TextBox 75"/>
+          <p:cNvPr id="77" name="TextBox 76"/>
           <p:cNvSpPr txBox="1"/>
           <p:nvPr/>
         </p:nvSpPr>
@@ -18135,7 +18627,7 @@
       </p:sp>
       <p:sp>
         <p:nvSpPr>
-          <p:cNvPr id="77" name="Rectangle 76"/>
+          <p:cNvPr id="78" name="Rectangle 77"/>
           <p:cNvSpPr/>
           <p:nvPr/>
         </p:nvSpPr>
@@ -18179,7 +18671,7 @@
       </p:sp>
       <p:sp>
         <p:nvSpPr>
-          <p:cNvPr id="78" name="TextBox 77"/>
+          <p:cNvPr id="79" name="TextBox 78"/>
           <p:cNvSpPr txBox="1"/>
           <p:nvPr/>
         </p:nvSpPr>
@@ -18221,7 +18713,7 @@
       </p:sp>
       <p:sp>
         <p:nvSpPr>
-          <p:cNvPr id="79" name="Rectangle 78"/>
+          <p:cNvPr id="80" name="Rectangle 79"/>
           <p:cNvSpPr/>
           <p:nvPr/>
         </p:nvSpPr>
@@ -18265,7 +18757,7 @@
       </p:sp>
       <p:sp>
         <p:nvSpPr>
-          <p:cNvPr id="80" name="TextBox 79"/>
+          <p:cNvPr id="81" name="TextBox 80"/>
           <p:cNvSpPr txBox="1"/>
           <p:nvPr/>
         </p:nvSpPr>
@@ -18307,7 +18799,7 @@
       </p:sp>
       <p:sp>
         <p:nvSpPr>
-          <p:cNvPr id="81" name="Rectangle 80"/>
+          <p:cNvPr id="82" name="Rectangle 81"/>
           <p:cNvSpPr/>
           <p:nvPr/>
         </p:nvSpPr>
@@ -18351,7 +18843,7 @@
       </p:sp>
       <p:sp>
         <p:nvSpPr>
-          <p:cNvPr id="82" name="TextBox 81"/>
+          <p:cNvPr id="83" name="TextBox 82"/>
           <p:cNvSpPr txBox="1"/>
           <p:nvPr/>
         </p:nvSpPr>
@@ -18393,7 +18885,7 @@
       </p:sp>
       <p:sp>
         <p:nvSpPr>
-          <p:cNvPr id="83" name="Rectangle 82"/>
+          <p:cNvPr id="84" name="Rectangle 83"/>
           <p:cNvSpPr/>
           <p:nvPr/>
         </p:nvSpPr>
@@ -18437,7 +18929,7 @@
       </p:sp>
       <p:sp>
         <p:nvSpPr>
-          <p:cNvPr id="84" name="TextBox 83"/>
+          <p:cNvPr id="85" name="TextBox 84"/>
           <p:cNvSpPr txBox="1"/>
           <p:nvPr/>
         </p:nvSpPr>
@@ -18479,7 +18971,7 @@
       </p:sp>
       <p:sp>
         <p:nvSpPr>
-          <p:cNvPr id="85" name="Rectangle 84"/>
+          <p:cNvPr id="86" name="Rectangle 85"/>
           <p:cNvSpPr/>
           <p:nvPr/>
         </p:nvSpPr>
@@ -18523,7 +19015,7 @@
       </p:sp>
       <p:sp>
         <p:nvSpPr>
-          <p:cNvPr id="86" name="TextBox 85"/>
+          <p:cNvPr id="87" name="TextBox 86"/>
           <p:cNvSpPr txBox="1"/>
           <p:nvPr/>
         </p:nvSpPr>
@@ -18565,7 +19057,7 @@
       </p:sp>
       <p:sp>
         <p:nvSpPr>
-          <p:cNvPr id="87" name="Rectangle 86"/>
+          <p:cNvPr id="88" name="Rectangle 87"/>
           <p:cNvSpPr/>
           <p:nvPr/>
         </p:nvSpPr>
@@ -18609,7 +19101,7 @@
       </p:sp>
       <p:sp>
         <p:nvSpPr>
-          <p:cNvPr id="88" name="TextBox 87"/>
+          <p:cNvPr id="89" name="TextBox 88"/>
           <p:cNvSpPr txBox="1"/>
           <p:nvPr/>
         </p:nvSpPr>
@@ -18651,7 +19143,7 @@
       </p:sp>
       <p:sp>
         <p:nvSpPr>
-          <p:cNvPr id="89" name="Rectangle 88"/>
+          <p:cNvPr id="90" name="Rectangle 89"/>
           <p:cNvSpPr/>
           <p:nvPr/>
         </p:nvSpPr>
@@ -18695,7 +19187,7 @@
       </p:sp>
       <p:sp>
         <p:nvSpPr>
-          <p:cNvPr id="90" name="TextBox 89"/>
+          <p:cNvPr id="91" name="TextBox 90"/>
           <p:cNvSpPr txBox="1"/>
           <p:nvPr/>
         </p:nvSpPr>
@@ -18737,7 +19229,7 @@
       </p:sp>
       <p:sp>
         <p:nvSpPr>
-          <p:cNvPr id="91" name="Rectangle 90"/>
+          <p:cNvPr id="92" name="Rectangle 91"/>
           <p:cNvSpPr/>
           <p:nvPr/>
         </p:nvSpPr>
@@ -18781,7 +19273,7 @@
       </p:sp>
       <p:sp>
         <p:nvSpPr>
-          <p:cNvPr id="92" name="TextBox 91"/>
+          <p:cNvPr id="93" name="TextBox 92"/>
           <p:cNvSpPr txBox="1"/>
           <p:nvPr/>
         </p:nvSpPr>
@@ -18823,7 +19315,7 @@
       </p:sp>
       <p:sp>
         <p:nvSpPr>
-          <p:cNvPr id="93" name="Rectangle 92"/>
+          <p:cNvPr id="94" name="Rectangle 93"/>
           <p:cNvSpPr/>
           <p:nvPr/>
         </p:nvSpPr>
@@ -18867,7 +19359,7 @@
       </p:sp>
       <p:sp>
         <p:nvSpPr>
-          <p:cNvPr id="94" name="TextBox 93"/>
+          <p:cNvPr id="95" name="TextBox 94"/>
           <p:cNvSpPr txBox="1"/>
           <p:nvPr/>
         </p:nvSpPr>
@@ -18909,7 +19401,7 @@
       </p:sp>
       <p:sp>
         <p:nvSpPr>
-          <p:cNvPr id="95" name="Rectangle 94"/>
+          <p:cNvPr id="96" name="Rectangle 95"/>
           <p:cNvSpPr/>
           <p:nvPr/>
         </p:nvSpPr>
@@ -18953,7 +19445,7 @@
       </p:sp>
       <p:sp>
         <p:nvSpPr>
-          <p:cNvPr id="96" name="TextBox 95"/>
+          <p:cNvPr id="97" name="TextBox 96"/>
           <p:cNvSpPr txBox="1"/>
           <p:nvPr/>
         </p:nvSpPr>
@@ -18995,7 +19487,7 @@
       </p:sp>
       <p:sp>
         <p:nvSpPr>
-          <p:cNvPr id="97" name="Rectangle 96"/>
+          <p:cNvPr id="98" name="Rectangle 97"/>
           <p:cNvSpPr/>
           <p:nvPr/>
         </p:nvSpPr>
@@ -19039,7 +19531,7 @@
       </p:sp>
       <p:sp>
         <p:nvSpPr>
-          <p:cNvPr id="98" name="TextBox 97"/>
+          <p:cNvPr id="99" name="TextBox 98"/>
           <p:cNvSpPr txBox="1"/>
           <p:nvPr/>
         </p:nvSpPr>
@@ -19081,7 +19573,7 @@
       </p:sp>
       <p:sp>
         <p:nvSpPr>
-          <p:cNvPr id="99" name="Rectangle 98"/>
+          <p:cNvPr id="100" name="Rectangle 99"/>
           <p:cNvSpPr/>
           <p:nvPr/>
         </p:nvSpPr>
@@ -19125,7 +19617,7 @@
       </p:sp>
       <p:sp>
         <p:nvSpPr>
-          <p:cNvPr id="100" name="TextBox 99"/>
+          <p:cNvPr id="101" name="TextBox 100"/>
           <p:cNvSpPr txBox="1"/>
           <p:nvPr/>
         </p:nvSpPr>
@@ -19167,7 +19659,7 @@
       </p:sp>
       <p:sp>
         <p:nvSpPr>
-          <p:cNvPr id="101" name="Rectangle 100"/>
+          <p:cNvPr id="102" name="Rectangle 101"/>
           <p:cNvSpPr/>
           <p:nvPr/>
         </p:nvSpPr>
@@ -19211,7 +19703,7 @@
       </p:sp>
       <p:sp>
         <p:nvSpPr>
-          <p:cNvPr id="102" name="TextBox 101"/>
+          <p:cNvPr id="103" name="TextBox 102"/>
           <p:cNvSpPr txBox="1"/>
           <p:nvPr/>
         </p:nvSpPr>
@@ -19253,7 +19745,7 @@
       </p:sp>
       <p:sp>
         <p:nvSpPr>
-          <p:cNvPr id="103" name="Rectangle 102"/>
+          <p:cNvPr id="104" name="Rectangle 103"/>
           <p:cNvSpPr/>
           <p:nvPr/>
         </p:nvSpPr>
@@ -19297,7 +19789,7 @@
       </p:sp>
       <p:sp>
         <p:nvSpPr>
-          <p:cNvPr id="104" name="TextBox 103"/>
+          <p:cNvPr id="105" name="TextBox 104"/>
           <p:cNvSpPr txBox="1"/>
           <p:nvPr/>
         </p:nvSpPr>
@@ -19339,7 +19831,7 @@
       </p:sp>
       <p:sp>
         <p:nvSpPr>
-          <p:cNvPr id="105" name="Rectangle 104"/>
+          <p:cNvPr id="106" name="Rectangle 105"/>
           <p:cNvSpPr/>
           <p:nvPr/>
         </p:nvSpPr>
@@ -19383,7 +19875,7 @@
       </p:sp>
       <p:sp>
         <p:nvSpPr>
-          <p:cNvPr id="106" name="TextBox 105"/>
+          <p:cNvPr id="107" name="TextBox 106"/>
           <p:cNvSpPr txBox="1"/>
           <p:nvPr/>
         </p:nvSpPr>
@@ -19425,7 +19917,7 @@
       </p:sp>
       <p:sp>
         <p:nvSpPr>
-          <p:cNvPr id="107" name="Rectangle 106"/>
+          <p:cNvPr id="108" name="Rectangle 107"/>
           <p:cNvSpPr/>
           <p:nvPr/>
         </p:nvSpPr>
@@ -19469,7 +19961,7 @@
       </p:sp>
       <p:sp>
         <p:nvSpPr>
-          <p:cNvPr id="108" name="TextBox 107"/>
+          <p:cNvPr id="109" name="TextBox 108"/>
           <p:cNvSpPr txBox="1"/>
           <p:nvPr/>
         </p:nvSpPr>
@@ -19511,7 +20003,7 @@
       </p:sp>
       <p:sp>
         <p:nvSpPr>
-          <p:cNvPr id="109" name="Rectangle 108"/>
+          <p:cNvPr id="110" name="Rectangle 109"/>
           <p:cNvSpPr/>
           <p:nvPr/>
         </p:nvSpPr>
@@ -19555,7 +20047,7 @@
       </p:sp>
       <p:sp>
         <p:nvSpPr>
-          <p:cNvPr id="110" name="TextBox 109"/>
+          <p:cNvPr id="111" name="TextBox 110"/>
           <p:cNvSpPr txBox="1"/>
           <p:nvPr/>
         </p:nvSpPr>
@@ -19597,7 +20089,7 @@
       </p:sp>
       <p:sp>
         <p:nvSpPr>
-          <p:cNvPr id="111" name="Rectangle 110"/>
+          <p:cNvPr id="112" name="Rectangle 111"/>
           <p:cNvSpPr/>
           <p:nvPr/>
         </p:nvSpPr>
@@ -19641,7 +20133,7 @@
       </p:sp>
       <p:sp>
         <p:nvSpPr>
-          <p:cNvPr id="112" name="TextBox 111"/>
+          <p:cNvPr id="113" name="TextBox 112"/>
           <p:cNvSpPr txBox="1"/>
           <p:nvPr/>
         </p:nvSpPr>
@@ -19683,7 +20175,7 @@
       </p:sp>
       <p:sp>
         <p:nvSpPr>
-          <p:cNvPr id="113" name="Rectangle 112"/>
+          <p:cNvPr id="114" name="Rectangle 113"/>
           <p:cNvSpPr/>
           <p:nvPr/>
         </p:nvSpPr>
@@ -19727,7 +20219,7 @@
       </p:sp>
       <p:sp>
         <p:nvSpPr>
-          <p:cNvPr id="114" name="TextBox 113"/>
+          <p:cNvPr id="115" name="TextBox 114"/>
           <p:cNvSpPr txBox="1"/>
           <p:nvPr/>
         </p:nvSpPr>
@@ -19769,7 +20261,7 @@
       </p:sp>
       <p:sp>
         <p:nvSpPr>
-          <p:cNvPr id="115" name="Rectangle 114"/>
+          <p:cNvPr id="116" name="Rectangle 115"/>
           <p:cNvSpPr/>
           <p:nvPr/>
         </p:nvSpPr>
@@ -19813,7 +20305,7 @@
       </p:sp>
       <p:sp>
         <p:nvSpPr>
-          <p:cNvPr id="116" name="TextBox 115"/>
+          <p:cNvPr id="117" name="TextBox 116"/>
           <p:cNvSpPr txBox="1"/>
           <p:nvPr/>
         </p:nvSpPr>
@@ -19855,7 +20347,7 @@
       </p:sp>
       <p:sp>
         <p:nvSpPr>
-          <p:cNvPr id="117" name="Rectangle 116"/>
+          <p:cNvPr id="118" name="Rectangle 117"/>
           <p:cNvSpPr/>
           <p:nvPr/>
         </p:nvSpPr>
@@ -19899,7 +20391,7 @@
       </p:sp>
       <p:sp>
         <p:nvSpPr>
-          <p:cNvPr id="118" name="TextBox 117"/>
+          <p:cNvPr id="119" name="TextBox 118"/>
           <p:cNvSpPr txBox="1"/>
           <p:nvPr/>
         </p:nvSpPr>
@@ -19941,7 +20433,7 @@
       </p:sp>
       <p:sp>
         <p:nvSpPr>
-          <p:cNvPr id="119" name="Rectangle 118"/>
+          <p:cNvPr id="120" name="Rectangle 119"/>
           <p:cNvSpPr/>
           <p:nvPr/>
         </p:nvSpPr>
@@ -19985,7 +20477,7 @@
       </p:sp>
       <p:sp>
         <p:nvSpPr>
-          <p:cNvPr id="120" name="TextBox 119"/>
+          <p:cNvPr id="121" name="TextBox 120"/>
           <p:cNvSpPr txBox="1"/>
           <p:nvPr/>
         </p:nvSpPr>
@@ -20027,7 +20519,7 @@
       </p:sp>
       <p:sp>
         <p:nvSpPr>
-          <p:cNvPr id="121" name="Rectangle 120"/>
+          <p:cNvPr id="122" name="Rectangle 121"/>
           <p:cNvSpPr/>
           <p:nvPr/>
         </p:nvSpPr>
@@ -20071,7 +20563,7 @@
       </p:sp>
       <p:sp>
         <p:nvSpPr>
-          <p:cNvPr id="122" name="TextBox 121"/>
+          <p:cNvPr id="123" name="TextBox 122"/>
           <p:cNvSpPr txBox="1"/>
           <p:nvPr/>
         </p:nvSpPr>
@@ -20113,7 +20605,7 @@
       </p:sp>
       <p:sp>
         <p:nvSpPr>
-          <p:cNvPr id="123" name="Rectangle 122"/>
+          <p:cNvPr id="124" name="Rectangle 123"/>
           <p:cNvSpPr/>
           <p:nvPr/>
         </p:nvSpPr>
@@ -20157,7 +20649,7 @@
       </p:sp>
       <p:sp>
         <p:nvSpPr>
-          <p:cNvPr id="124" name="TextBox 123"/>
+          <p:cNvPr id="125" name="TextBox 124"/>
           <p:cNvSpPr txBox="1"/>
           <p:nvPr/>
         </p:nvSpPr>
@@ -20199,7 +20691,7 @@
       </p:sp>
       <p:sp>
         <p:nvSpPr>
-          <p:cNvPr id="125" name="Rectangle 124"/>
+          <p:cNvPr id="126" name="Rectangle 125"/>
           <p:cNvSpPr/>
           <p:nvPr/>
         </p:nvSpPr>
@@ -20243,7 +20735,7 @@
       </p:sp>
       <p:sp>
         <p:nvSpPr>
-          <p:cNvPr id="126" name="TextBox 125"/>
+          <p:cNvPr id="127" name="TextBox 126"/>
           <p:cNvSpPr txBox="1"/>
           <p:nvPr/>
         </p:nvSpPr>
@@ -20285,7 +20777,7 @@
       </p:sp>
       <p:sp>
         <p:nvSpPr>
-          <p:cNvPr id="127" name="Rectangle 126"/>
+          <p:cNvPr id="128" name="Rectangle 127"/>
           <p:cNvSpPr/>
           <p:nvPr/>
         </p:nvSpPr>
@@ -20329,7 +20821,7 @@
       </p:sp>
       <p:sp>
         <p:nvSpPr>
-          <p:cNvPr id="128" name="TextBox 127"/>
+          <p:cNvPr id="129" name="TextBox 128"/>
           <p:cNvSpPr txBox="1"/>
           <p:nvPr/>
         </p:nvSpPr>
@@ -20371,7 +20863,7 @@
       </p:sp>
       <p:sp>
         <p:nvSpPr>
-          <p:cNvPr id="129" name="Rectangle 128"/>
+          <p:cNvPr id="130" name="Rectangle 129"/>
           <p:cNvSpPr/>
           <p:nvPr/>
         </p:nvSpPr>
@@ -20415,7 +20907,7 @@
       </p:sp>
       <p:sp>
         <p:nvSpPr>
-          <p:cNvPr id="130" name="TextBox 129"/>
+          <p:cNvPr id="131" name="TextBox 130"/>
           <p:cNvSpPr txBox="1"/>
           <p:nvPr/>
         </p:nvSpPr>
@@ -20457,7 +20949,7 @@
       </p:sp>
       <p:sp>
         <p:nvSpPr>
-          <p:cNvPr id="131" name="Rectangle 130"/>
+          <p:cNvPr id="132" name="Rectangle 131"/>
           <p:cNvSpPr/>
           <p:nvPr/>
         </p:nvSpPr>
@@ -20501,7 +20993,7 @@
       </p:sp>
       <p:sp>
         <p:nvSpPr>
-          <p:cNvPr id="132" name="TextBox 131"/>
+          <p:cNvPr id="133" name="TextBox 132"/>
           <p:cNvSpPr txBox="1"/>
           <p:nvPr/>
         </p:nvSpPr>
@@ -20543,7 +21035,7 @@
       </p:sp>
       <p:sp>
         <p:nvSpPr>
-          <p:cNvPr id="133" name="Rectangle 132"/>
+          <p:cNvPr id="134" name="Rectangle 133"/>
           <p:cNvSpPr/>
           <p:nvPr/>
         </p:nvSpPr>
@@ -20587,7 +21079,7 @@
       </p:sp>
       <p:sp>
         <p:nvSpPr>
-          <p:cNvPr id="134" name="TextBox 133"/>
+          <p:cNvPr id="135" name="TextBox 134"/>
           <p:cNvSpPr txBox="1"/>
           <p:nvPr/>
         </p:nvSpPr>
@@ -20629,7 +21121,7 @@
       </p:sp>
       <p:sp>
         <p:nvSpPr>
-          <p:cNvPr id="135" name="Rectangle 134"/>
+          <p:cNvPr id="136" name="Rectangle 135"/>
           <p:cNvSpPr/>
           <p:nvPr/>
         </p:nvSpPr>
@@ -20673,7 +21165,7 @@
       </p:sp>
       <p:sp>
         <p:nvSpPr>
-          <p:cNvPr id="136" name="TextBox 135"/>
+          <p:cNvPr id="137" name="TextBox 136"/>
           <p:cNvSpPr txBox="1"/>
           <p:nvPr/>
         </p:nvSpPr>
@@ -20715,7 +21207,7 @@
       </p:sp>
       <p:sp>
         <p:nvSpPr>
-          <p:cNvPr id="137" name="Rectangle 136"/>
+          <p:cNvPr id="138" name="Rectangle 137"/>
           <p:cNvSpPr/>
           <p:nvPr/>
         </p:nvSpPr>
@@ -20759,7 +21251,7 @@
       </p:sp>
       <p:sp>
         <p:nvSpPr>
-          <p:cNvPr id="138" name="TextBox 137"/>
+          <p:cNvPr id="139" name="TextBox 138"/>
           <p:cNvSpPr txBox="1"/>
           <p:nvPr/>
         </p:nvSpPr>
@@ -20801,7 +21293,7 @@
       </p:sp>
       <p:sp>
         <p:nvSpPr>
-          <p:cNvPr id="139" name="Rectangle 138"/>
+          <p:cNvPr id="140" name="Rectangle 139"/>
           <p:cNvSpPr/>
           <p:nvPr/>
         </p:nvSpPr>
@@ -20845,7 +21337,7 @@
       </p:sp>
       <p:sp>
         <p:nvSpPr>
-          <p:cNvPr id="140" name="TextBox 139"/>
+          <p:cNvPr id="141" name="TextBox 140"/>
           <p:cNvSpPr txBox="1"/>
           <p:nvPr/>
         </p:nvSpPr>
@@ -20887,7 +21379,7 @@
       </p:sp>
       <p:sp>
         <p:nvSpPr>
-          <p:cNvPr id="141" name="Rectangle 140"/>
+          <p:cNvPr id="142" name="Rectangle 141"/>
           <p:cNvSpPr/>
           <p:nvPr/>
         </p:nvSpPr>
@@ -20931,7 +21423,7 @@
       </p:sp>
       <p:sp>
         <p:nvSpPr>
-          <p:cNvPr id="142" name="TextBox 141"/>
+          <p:cNvPr id="143" name="TextBox 142"/>
           <p:cNvSpPr txBox="1"/>
           <p:nvPr/>
         </p:nvSpPr>
@@ -20973,7 +21465,7 @@
       </p:sp>
       <p:sp>
         <p:nvSpPr>
-          <p:cNvPr id="143" name="Rectangle 142"/>
+          <p:cNvPr id="144" name="Rectangle 143"/>
           <p:cNvSpPr/>
           <p:nvPr/>
         </p:nvSpPr>
@@ -21017,7 +21509,7 @@
       </p:sp>
       <p:sp>
         <p:nvSpPr>
-          <p:cNvPr id="144" name="TextBox 143"/>
+          <p:cNvPr id="145" name="TextBox 144"/>
           <p:cNvSpPr txBox="1"/>
           <p:nvPr/>
         </p:nvSpPr>
@@ -21059,7 +21551,7 @@
       </p:sp>
       <p:sp>
         <p:nvSpPr>
-          <p:cNvPr id="145" name="Rectangle 144"/>
+          <p:cNvPr id="146" name="Rectangle 145"/>
           <p:cNvSpPr/>
           <p:nvPr/>
         </p:nvSpPr>
@@ -21103,7 +21595,7 @@
       </p:sp>
       <p:sp>
         <p:nvSpPr>
-          <p:cNvPr id="146" name="TextBox 145"/>
+          <p:cNvPr id="147" name="TextBox 146"/>
           <p:cNvSpPr txBox="1"/>
           <p:nvPr/>
         </p:nvSpPr>
@@ -21145,7 +21637,7 @@
       </p:sp>
       <p:sp>
         <p:nvSpPr>
-          <p:cNvPr id="147" name="Rectangle 146"/>
+          <p:cNvPr id="148" name="Rectangle 147"/>
           <p:cNvSpPr/>
           <p:nvPr/>
         </p:nvSpPr>
@@ -21189,7 +21681,7 @@
       </p:sp>
       <p:sp>
         <p:nvSpPr>
-          <p:cNvPr id="148" name="TextBox 147"/>
+          <p:cNvPr id="149" name="TextBox 148"/>
           <p:cNvSpPr txBox="1"/>
           <p:nvPr/>
         </p:nvSpPr>
@@ -21231,7 +21723,7 @@
       </p:sp>
       <p:sp>
         <p:nvSpPr>
-          <p:cNvPr id="149" name="Rectangle 148"/>
+          <p:cNvPr id="150" name="Rectangle 149"/>
           <p:cNvSpPr/>
           <p:nvPr/>
         </p:nvSpPr>
@@ -21275,7 +21767,7 @@
       </p:sp>
       <p:sp>
         <p:nvSpPr>
-          <p:cNvPr id="150" name="TextBox 149"/>
+          <p:cNvPr id="151" name="TextBox 150"/>
           <p:cNvSpPr txBox="1"/>
           <p:nvPr/>
         </p:nvSpPr>
@@ -21317,7 +21809,7 @@
       </p:sp>
       <p:sp>
         <p:nvSpPr>
-          <p:cNvPr id="151" name="Rectangle 150"/>
+          <p:cNvPr id="152" name="Rectangle 151"/>
           <p:cNvSpPr/>
           <p:nvPr/>
         </p:nvSpPr>
@@ -21361,7 +21853,7 @@
       </p:sp>
       <p:sp>
         <p:nvSpPr>
-          <p:cNvPr id="152" name="TextBox 151"/>
+          <p:cNvPr id="153" name="TextBox 152"/>
           <p:cNvSpPr txBox="1"/>
           <p:nvPr/>
         </p:nvSpPr>
@@ -21403,7 +21895,7 @@
       </p:sp>
       <p:sp>
         <p:nvSpPr>
-          <p:cNvPr id="153" name="Rectangle 152"/>
+          <p:cNvPr id="154" name="Rectangle 153"/>
           <p:cNvSpPr/>
           <p:nvPr/>
         </p:nvSpPr>
@@ -21447,7 +21939,7 @@
       </p:sp>
       <p:sp>
         <p:nvSpPr>
-          <p:cNvPr id="154" name="TextBox 153"/>
+          <p:cNvPr id="155" name="TextBox 154"/>
           <p:cNvSpPr txBox="1"/>
           <p:nvPr/>
         </p:nvSpPr>
@@ -21489,7 +21981,7 @@
       </p:sp>
       <p:sp>
         <p:nvSpPr>
-          <p:cNvPr id="155" name="Rectangle 154"/>
+          <p:cNvPr id="156" name="Rectangle 155"/>
           <p:cNvSpPr/>
           <p:nvPr/>
         </p:nvSpPr>
@@ -21533,7 +22025,7 @@
       </p:sp>
       <p:sp>
         <p:nvSpPr>
-          <p:cNvPr id="156" name="TextBox 155"/>
+          <p:cNvPr id="157" name="TextBox 156"/>
           <p:cNvSpPr txBox="1"/>
           <p:nvPr/>
         </p:nvSpPr>
@@ -21575,7 +22067,7 @@
       </p:sp>
       <p:sp>
         <p:nvSpPr>
-          <p:cNvPr id="157" name="Rectangle 156"/>
+          <p:cNvPr id="158" name="Rectangle 157"/>
           <p:cNvSpPr/>
           <p:nvPr/>
         </p:nvSpPr>
@@ -21619,7 +22111,7 @@
       </p:sp>
       <p:sp>
         <p:nvSpPr>
-          <p:cNvPr id="158" name="TextBox 157"/>
+          <p:cNvPr id="159" name="TextBox 158"/>
           <p:cNvSpPr txBox="1"/>
           <p:nvPr/>
         </p:nvSpPr>
@@ -21661,7 +22153,7 @@
       </p:sp>
       <p:sp>
         <p:nvSpPr>
-          <p:cNvPr id="159" name="Rectangle 158"/>
+          <p:cNvPr id="160" name="Rectangle 159"/>
           <p:cNvSpPr/>
           <p:nvPr/>
         </p:nvSpPr>
@@ -21705,7 +22197,7 @@
       </p:sp>
       <p:sp>
         <p:nvSpPr>
-          <p:cNvPr id="160" name="TextBox 159"/>
+          <p:cNvPr id="161" name="TextBox 160"/>
           <p:cNvSpPr txBox="1"/>
           <p:nvPr/>
         </p:nvSpPr>
@@ -21747,7 +22239,7 @@
       </p:sp>
       <p:sp>
         <p:nvSpPr>
-          <p:cNvPr id="161" name="Rectangle 160"/>
+          <p:cNvPr id="162" name="Rectangle 161"/>
           <p:cNvSpPr/>
           <p:nvPr/>
         </p:nvSpPr>
@@ -21791,7 +22283,7 @@
       </p:sp>
       <p:sp>
         <p:nvSpPr>
-          <p:cNvPr id="162" name="TextBox 161"/>
+          <p:cNvPr id="163" name="TextBox 162"/>
           <p:cNvSpPr txBox="1"/>
           <p:nvPr/>
         </p:nvSpPr>
@@ -21833,7 +22325,7 @@
       </p:sp>
       <p:sp>
         <p:nvSpPr>
-          <p:cNvPr id="163" name="Rectangle 162"/>
+          <p:cNvPr id="164" name="Rectangle 163"/>
           <p:cNvSpPr/>
           <p:nvPr/>
         </p:nvSpPr>
@@ -21877,7 +22369,7 @@
       </p:sp>
       <p:sp>
         <p:nvSpPr>
-          <p:cNvPr id="164" name="TextBox 163"/>
+          <p:cNvPr id="165" name="TextBox 164"/>
           <p:cNvSpPr txBox="1"/>
           <p:nvPr/>
         </p:nvSpPr>
@@ -21919,7 +22411,7 @@
       </p:sp>
       <p:sp>
         <p:nvSpPr>
-          <p:cNvPr id="165" name="Rectangle 164"/>
+          <p:cNvPr id="166" name="Rectangle 165"/>
           <p:cNvSpPr/>
           <p:nvPr/>
         </p:nvSpPr>
@@ -21963,7 +22455,7 @@
       </p:sp>
       <p:sp>
         <p:nvSpPr>
-          <p:cNvPr id="166" name="TextBox 165"/>
+          <p:cNvPr id="167" name="TextBox 166"/>
           <p:cNvSpPr txBox="1"/>
           <p:nvPr/>
         </p:nvSpPr>
@@ -22005,7 +22497,7 @@
       </p:sp>
       <p:sp>
         <p:nvSpPr>
-          <p:cNvPr id="167" name="Rectangle 166"/>
+          <p:cNvPr id="168" name="Rectangle 167"/>
           <p:cNvSpPr/>
           <p:nvPr/>
         </p:nvSpPr>
@@ -22049,7 +22541,7 @@
       </p:sp>
       <p:sp>
         <p:nvSpPr>
-          <p:cNvPr id="168" name="TextBox 167"/>
+          <p:cNvPr id="169" name="TextBox 168"/>
           <p:cNvSpPr txBox="1"/>
           <p:nvPr/>
         </p:nvSpPr>
@@ -22091,7 +22583,7 @@
       </p:sp>
       <p:sp>
         <p:nvSpPr>
-          <p:cNvPr id="169" name="Rectangle 168"/>
+          <p:cNvPr id="170" name="Rectangle 169"/>
           <p:cNvSpPr/>
           <p:nvPr/>
         </p:nvSpPr>
@@ -22135,7 +22627,7 @@
       </p:sp>
       <p:sp>
         <p:nvSpPr>
-          <p:cNvPr id="170" name="TextBox 169"/>
+          <p:cNvPr id="171" name="TextBox 170"/>
           <p:cNvSpPr txBox="1"/>
           <p:nvPr/>
         </p:nvSpPr>
@@ -22177,7 +22669,7 @@
       </p:sp>
       <p:sp>
         <p:nvSpPr>
-          <p:cNvPr id="171" name="Rectangle 170"/>
+          <p:cNvPr id="172" name="Rectangle 171"/>
           <p:cNvSpPr/>
           <p:nvPr/>
         </p:nvSpPr>
@@ -22221,7 +22713,7 @@
       </p:sp>
       <p:sp>
         <p:nvSpPr>
-          <p:cNvPr id="172" name="TextBox 171"/>
+          <p:cNvPr id="173" name="TextBox 172"/>
           <p:cNvSpPr txBox="1"/>
           <p:nvPr/>
         </p:nvSpPr>
@@ -22263,7 +22755,7 @@
       </p:sp>
       <p:sp>
         <p:nvSpPr>
-          <p:cNvPr id="173" name="Rectangle 172"/>
+          <p:cNvPr id="174" name="Rectangle 173"/>
           <p:cNvSpPr/>
           <p:nvPr/>
         </p:nvSpPr>
@@ -22307,7 +22799,7 @@
       </p:sp>
       <p:sp>
         <p:nvSpPr>
-          <p:cNvPr id="174" name="TextBox 173"/>
+          <p:cNvPr id="175" name="TextBox 174"/>
           <p:cNvSpPr txBox="1"/>
           <p:nvPr/>
         </p:nvSpPr>
@@ -22349,7 +22841,7 @@
       </p:sp>
       <p:sp>
         <p:nvSpPr>
-          <p:cNvPr id="175" name="Rectangle 174"/>
+          <p:cNvPr id="176" name="Rectangle 175"/>
           <p:cNvSpPr/>
           <p:nvPr/>
         </p:nvSpPr>
@@ -22393,7 +22885,7 @@
       </p:sp>
       <p:sp>
         <p:nvSpPr>
-          <p:cNvPr id="176" name="TextBox 175"/>
+          <p:cNvPr id="177" name="TextBox 176"/>
           <p:cNvSpPr txBox="1"/>
           <p:nvPr/>
         </p:nvSpPr>
@@ -22435,7 +22927,7 @@
       </p:sp>
       <p:sp>
         <p:nvSpPr>
-          <p:cNvPr id="177" name="Rectangle 176"/>
+          <p:cNvPr id="178" name="Rectangle 177"/>
           <p:cNvSpPr/>
           <p:nvPr/>
         </p:nvSpPr>
@@ -22479,7 +22971,7 @@
       </p:sp>
       <p:sp>
         <p:nvSpPr>
-          <p:cNvPr id="178" name="TextBox 177"/>
+          <p:cNvPr id="179" name="TextBox 178"/>
           <p:cNvSpPr txBox="1"/>
           <p:nvPr/>
         </p:nvSpPr>
@@ -22521,7 +23013,7 @@
       </p:sp>
       <p:sp>
         <p:nvSpPr>
-          <p:cNvPr id="179" name="Rectangle 178"/>
+          <p:cNvPr id="180" name="Rectangle 179"/>
           <p:cNvSpPr/>
           <p:nvPr/>
         </p:nvSpPr>
@@ -22565,7 +23057,7 @@
       </p:sp>
       <p:sp>
         <p:nvSpPr>
-          <p:cNvPr id="180" name="TextBox 179"/>
+          <p:cNvPr id="181" name="TextBox 180"/>
           <p:cNvSpPr txBox="1"/>
           <p:nvPr/>
         </p:nvSpPr>
@@ -22607,7 +23099,7 @@
       </p:sp>
       <p:sp>
         <p:nvSpPr>
-          <p:cNvPr id="181" name="Rectangle 180"/>
+          <p:cNvPr id="182" name="Rectangle 181"/>
           <p:cNvSpPr/>
           <p:nvPr/>
         </p:nvSpPr>
@@ -22651,7 +23143,7 @@
       </p:sp>
       <p:sp>
         <p:nvSpPr>
-          <p:cNvPr id="182" name="TextBox 181"/>
+          <p:cNvPr id="183" name="TextBox 182"/>
           <p:cNvSpPr txBox="1"/>
           <p:nvPr/>
         </p:nvSpPr>
@@ -22693,7 +23185,7 @@
       </p:sp>
       <p:sp>
         <p:nvSpPr>
-          <p:cNvPr id="183" name="Rectangle 182"/>
+          <p:cNvPr id="184" name="Rectangle 183"/>
           <p:cNvSpPr/>
           <p:nvPr/>
         </p:nvSpPr>
@@ -22737,7 +23229,7 @@
       </p:sp>
       <p:sp>
         <p:nvSpPr>
-          <p:cNvPr id="184" name="TextBox 183"/>
+          <p:cNvPr id="185" name="TextBox 184"/>
           <p:cNvSpPr txBox="1"/>
           <p:nvPr/>
         </p:nvSpPr>
@@ -22779,7 +23271,7 @@
       </p:sp>
       <p:sp>
         <p:nvSpPr>
-          <p:cNvPr id="185" name="Rectangle 184"/>
+          <p:cNvPr id="186" name="Rectangle 185"/>
           <p:cNvSpPr/>
           <p:nvPr/>
         </p:nvSpPr>
@@ -22823,7 +23315,7 @@
       </p:sp>
       <p:sp>
         <p:nvSpPr>
-          <p:cNvPr id="186" name="TextBox 185"/>
+          <p:cNvPr id="187" name="TextBox 186"/>
           <p:cNvSpPr txBox="1"/>
           <p:nvPr/>
         </p:nvSpPr>
@@ -22865,7 +23357,7 @@
       </p:sp>
       <p:sp>
         <p:nvSpPr>
-          <p:cNvPr id="187" name="Rectangle 186"/>
+          <p:cNvPr id="188" name="Rectangle 187"/>
           <p:cNvSpPr/>
           <p:nvPr/>
         </p:nvSpPr>
@@ -22909,7 +23401,7 @@
       </p:sp>
       <p:sp>
         <p:nvSpPr>
-          <p:cNvPr id="188" name="TextBox 187"/>
+          <p:cNvPr id="189" name="TextBox 188"/>
           <p:cNvSpPr txBox="1"/>
           <p:nvPr/>
         </p:nvSpPr>
@@ -22951,7 +23443,7 @@
       </p:sp>
       <p:sp>
         <p:nvSpPr>
-          <p:cNvPr id="189" name="Rectangle 188"/>
+          <p:cNvPr id="190" name="Rectangle 189"/>
           <p:cNvSpPr/>
           <p:nvPr/>
         </p:nvSpPr>
@@ -22995,7 +23487,7 @@
       </p:sp>
       <p:sp>
         <p:nvSpPr>
-          <p:cNvPr id="190" name="TextBox 189"/>
+          <p:cNvPr id="191" name="TextBox 190"/>
           <p:cNvSpPr txBox="1"/>
           <p:nvPr/>
         </p:nvSpPr>
@@ -23037,7 +23529,7 @@
       </p:sp>
       <p:sp>
         <p:nvSpPr>
-          <p:cNvPr id="191" name="TextBox 190"/>
+          <p:cNvPr id="192" name="TextBox 191"/>
           <p:cNvSpPr txBox="1"/>
           <p:nvPr/>
         </p:nvSpPr>
@@ -23207,7 +23699,49 @@
       </p:sp>
       <p:sp>
         <p:nvSpPr>
-          <p:cNvPr id="5" name="Rectangle 4"/>
+          <p:cNvPr id="5" name="TextBox 4"/>
+          <p:cNvSpPr txBox="1"/>
+          <p:nvPr/>
+        </p:nvSpPr>
+        <p:spPr>
+          <a:xfrm>
+            <a:off x="9052560" y="246888"/>
+            <a:ext cx="2606040" cy="274320"/>
+          </a:xfrm>
+          <a:prstGeom prst="rect">
+            <a:avLst/>
+          </a:prstGeom>
+          <a:noFill/>
+        </p:spPr>
+        <p:txBody>
+          <a:bodyPr wrap="square" anchor="t" lIns="0" rIns="0" tIns="0" bIns="0">
+            <a:spAutoFit/>
+          </a:bodyPr>
+          <a:lstStyle/>
+          <a:p>
+            <a:pPr algn="r">
+              <a:lnSpc>
+                <a:spcPct val="110000"/>
+              </a:lnSpc>
+              <a:spcAft>
+                <a:spcPts val="0"/>
+              </a:spcAft>
+            </a:pPr>
+            <a:r>
+              <a:rPr sz="1100" b="1" i="0">
+                <a:solidFill>
+                  <a:srgbClr val="4A5D75"/>
+                </a:solidFill>
+                <a:latin typeface="Calibri"/>
+              </a:rPr>
+              <a:t>Table 5</a:t>
+            </a:r>
+          </a:p>
+        </p:txBody>
+      </p:sp>
+      <p:sp>
+        <p:nvSpPr>
+          <p:cNvPr id="6" name="Rectangle 5"/>
           <p:cNvSpPr/>
           <p:nvPr/>
         </p:nvSpPr>
@@ -23251,7 +23785,7 @@
       </p:sp>
       <p:sp>
         <p:nvSpPr>
-          <p:cNvPr id="6" name="TextBox 5"/>
+          <p:cNvPr id="7" name="TextBox 6"/>
           <p:cNvSpPr txBox="1"/>
           <p:nvPr/>
         </p:nvSpPr>
@@ -23286,14 +23820,14 @@
                 </a:solidFill>
                 <a:latin typeface="Times New Roman"/>
               </a:rPr>
-              <a:t>Prior period — transactions (2006–2014)</a:t>
-            </a:r>
-          </a:p>
-        </p:txBody>
-      </p:sp>
-      <p:sp>
-        <p:nvSpPr>
-          <p:cNvPr id="7" name="TextBox 6"/>
+              <a:t>2.13 Prior period — transactions (2006–2014)</a:t>
+            </a:r>
+          </a:p>
+        </p:txBody>
+      </p:sp>
+      <p:sp>
+        <p:nvSpPr>
+          <p:cNvPr id="8" name="TextBox 7"/>
           <p:cNvSpPr txBox="1"/>
           <p:nvPr/>
         </p:nvSpPr>
@@ -23335,7 +23869,7 @@
       </p:sp>
       <p:sp>
         <p:nvSpPr>
-          <p:cNvPr id="8" name="TextBox 7"/>
+          <p:cNvPr id="9" name="TextBox 8"/>
           <p:cNvSpPr txBox="1"/>
           <p:nvPr/>
         </p:nvSpPr>
@@ -23377,7 +23911,7 @@
       </p:sp>
       <p:sp>
         <p:nvSpPr>
-          <p:cNvPr id="9" name="Rectangle 8"/>
+          <p:cNvPr id="10" name="Rectangle 9"/>
           <p:cNvSpPr/>
           <p:nvPr/>
         </p:nvSpPr>
@@ -23421,7 +23955,7 @@
       </p:sp>
       <p:sp>
         <p:nvSpPr>
-          <p:cNvPr id="10" name="TextBox 9"/>
+          <p:cNvPr id="11" name="TextBox 10"/>
           <p:cNvSpPr txBox="1"/>
           <p:nvPr/>
         </p:nvSpPr>
@@ -23463,7 +23997,7 @@
       </p:sp>
       <p:sp>
         <p:nvSpPr>
-          <p:cNvPr id="11" name="Rectangle 10"/>
+          <p:cNvPr id="12" name="Rectangle 11"/>
           <p:cNvSpPr/>
           <p:nvPr/>
         </p:nvSpPr>
@@ -23507,7 +24041,7 @@
       </p:sp>
       <p:sp>
         <p:nvSpPr>
-          <p:cNvPr id="12" name="TextBox 11"/>
+          <p:cNvPr id="13" name="TextBox 12"/>
           <p:cNvSpPr txBox="1"/>
           <p:nvPr/>
         </p:nvSpPr>
@@ -23549,7 +24083,7 @@
       </p:sp>
       <p:sp>
         <p:nvSpPr>
-          <p:cNvPr id="13" name="Rectangle 12"/>
+          <p:cNvPr id="14" name="Rectangle 13"/>
           <p:cNvSpPr/>
           <p:nvPr/>
         </p:nvSpPr>
@@ -23593,7 +24127,7 @@
       </p:sp>
       <p:sp>
         <p:nvSpPr>
-          <p:cNvPr id="14" name="TextBox 13"/>
+          <p:cNvPr id="15" name="TextBox 14"/>
           <p:cNvSpPr txBox="1"/>
           <p:nvPr/>
         </p:nvSpPr>
@@ -23635,7 +24169,7 @@
       </p:sp>
       <p:sp>
         <p:nvSpPr>
-          <p:cNvPr id="15" name="Rectangle 14"/>
+          <p:cNvPr id="16" name="Rectangle 15"/>
           <p:cNvSpPr/>
           <p:nvPr/>
         </p:nvSpPr>
@@ -23679,7 +24213,7 @@
       </p:sp>
       <p:sp>
         <p:nvSpPr>
-          <p:cNvPr id="16" name="TextBox 15"/>
+          <p:cNvPr id="17" name="TextBox 16"/>
           <p:cNvSpPr txBox="1"/>
           <p:nvPr/>
         </p:nvSpPr>
@@ -23721,7 +24255,7 @@
       </p:sp>
       <p:sp>
         <p:nvSpPr>
-          <p:cNvPr id="17" name="Rectangle 16"/>
+          <p:cNvPr id="18" name="Rectangle 17"/>
           <p:cNvSpPr/>
           <p:nvPr/>
         </p:nvSpPr>
@@ -23765,7 +24299,7 @@
       </p:sp>
       <p:sp>
         <p:nvSpPr>
-          <p:cNvPr id="18" name="TextBox 17"/>
+          <p:cNvPr id="19" name="TextBox 18"/>
           <p:cNvSpPr txBox="1"/>
           <p:nvPr/>
         </p:nvSpPr>
@@ -23807,7 +24341,7 @@
       </p:sp>
       <p:sp>
         <p:nvSpPr>
-          <p:cNvPr id="19" name="Rectangle 18"/>
+          <p:cNvPr id="20" name="Rectangle 19"/>
           <p:cNvSpPr/>
           <p:nvPr/>
         </p:nvSpPr>
@@ -23851,7 +24385,7 @@
       </p:sp>
       <p:sp>
         <p:nvSpPr>
-          <p:cNvPr id="20" name="TextBox 19"/>
+          <p:cNvPr id="21" name="TextBox 20"/>
           <p:cNvSpPr txBox="1"/>
           <p:nvPr/>
         </p:nvSpPr>
@@ -23893,7 +24427,7 @@
       </p:sp>
       <p:sp>
         <p:nvSpPr>
-          <p:cNvPr id="21" name="Rectangle 20"/>
+          <p:cNvPr id="22" name="Rectangle 21"/>
           <p:cNvSpPr/>
           <p:nvPr/>
         </p:nvSpPr>
@@ -23937,7 +24471,7 @@
       </p:sp>
       <p:sp>
         <p:nvSpPr>
-          <p:cNvPr id="22" name="TextBox 21"/>
+          <p:cNvPr id="23" name="TextBox 22"/>
           <p:cNvSpPr txBox="1"/>
           <p:nvPr/>
         </p:nvSpPr>
@@ -23979,7 +24513,7 @@
       </p:sp>
       <p:sp>
         <p:nvSpPr>
-          <p:cNvPr id="23" name="Rectangle 22"/>
+          <p:cNvPr id="24" name="Rectangle 23"/>
           <p:cNvSpPr/>
           <p:nvPr/>
         </p:nvSpPr>
@@ -24023,7 +24557,7 @@
       </p:sp>
       <p:sp>
         <p:nvSpPr>
-          <p:cNvPr id="24" name="TextBox 23"/>
+          <p:cNvPr id="25" name="TextBox 24"/>
           <p:cNvSpPr txBox="1"/>
           <p:nvPr/>
         </p:nvSpPr>
@@ -24065,7 +24599,7 @@
       </p:sp>
       <p:sp>
         <p:nvSpPr>
-          <p:cNvPr id="25" name="Rectangle 24"/>
+          <p:cNvPr id="26" name="Rectangle 25"/>
           <p:cNvSpPr/>
           <p:nvPr/>
         </p:nvSpPr>
@@ -24109,7 +24643,7 @@
       </p:sp>
       <p:sp>
         <p:nvSpPr>
-          <p:cNvPr id="26" name="TextBox 25"/>
+          <p:cNvPr id="27" name="TextBox 26"/>
           <p:cNvSpPr txBox="1"/>
           <p:nvPr/>
         </p:nvSpPr>
@@ -24151,7 +24685,7 @@
       </p:sp>
       <p:sp>
         <p:nvSpPr>
-          <p:cNvPr id="27" name="Rectangle 26"/>
+          <p:cNvPr id="28" name="Rectangle 27"/>
           <p:cNvSpPr/>
           <p:nvPr/>
         </p:nvSpPr>
@@ -24195,7 +24729,7 @@
       </p:sp>
       <p:sp>
         <p:nvSpPr>
-          <p:cNvPr id="28" name="TextBox 27"/>
+          <p:cNvPr id="29" name="TextBox 28"/>
           <p:cNvSpPr txBox="1"/>
           <p:nvPr/>
         </p:nvSpPr>
@@ -24237,7 +24771,7 @@
       </p:sp>
       <p:sp>
         <p:nvSpPr>
-          <p:cNvPr id="29" name="Rectangle 28"/>
+          <p:cNvPr id="30" name="Rectangle 29"/>
           <p:cNvSpPr/>
           <p:nvPr/>
         </p:nvSpPr>
@@ -24281,7 +24815,7 @@
       </p:sp>
       <p:sp>
         <p:nvSpPr>
-          <p:cNvPr id="30" name="TextBox 29"/>
+          <p:cNvPr id="31" name="TextBox 30"/>
           <p:cNvSpPr txBox="1"/>
           <p:nvPr/>
         </p:nvSpPr>
@@ -24323,7 +24857,7 @@
       </p:sp>
       <p:sp>
         <p:nvSpPr>
-          <p:cNvPr id="31" name="Rectangle 30"/>
+          <p:cNvPr id="32" name="Rectangle 31"/>
           <p:cNvSpPr/>
           <p:nvPr/>
         </p:nvSpPr>
@@ -24367,7 +24901,7 @@
       </p:sp>
       <p:sp>
         <p:nvSpPr>
-          <p:cNvPr id="32" name="TextBox 31"/>
+          <p:cNvPr id="33" name="TextBox 32"/>
           <p:cNvSpPr txBox="1"/>
           <p:nvPr/>
         </p:nvSpPr>
@@ -24409,7 +24943,7 @@
       </p:sp>
       <p:sp>
         <p:nvSpPr>
-          <p:cNvPr id="33" name="Rectangle 32"/>
+          <p:cNvPr id="34" name="Rectangle 33"/>
           <p:cNvSpPr/>
           <p:nvPr/>
         </p:nvSpPr>
@@ -24453,7 +24987,7 @@
       </p:sp>
       <p:sp>
         <p:nvSpPr>
-          <p:cNvPr id="34" name="TextBox 33"/>
+          <p:cNvPr id="35" name="TextBox 34"/>
           <p:cNvSpPr txBox="1"/>
           <p:nvPr/>
         </p:nvSpPr>
@@ -24495,7 +25029,7 @@
       </p:sp>
       <p:sp>
         <p:nvSpPr>
-          <p:cNvPr id="35" name="Rectangle 34"/>
+          <p:cNvPr id="36" name="Rectangle 35"/>
           <p:cNvSpPr/>
           <p:nvPr/>
         </p:nvSpPr>
@@ -24539,7 +25073,7 @@
       </p:sp>
       <p:sp>
         <p:nvSpPr>
-          <p:cNvPr id="36" name="TextBox 35"/>
+          <p:cNvPr id="37" name="TextBox 36"/>
           <p:cNvSpPr txBox="1"/>
           <p:nvPr/>
         </p:nvSpPr>
@@ -24581,7 +25115,7 @@
       </p:sp>
       <p:sp>
         <p:nvSpPr>
-          <p:cNvPr id="37" name="Rectangle 36"/>
+          <p:cNvPr id="38" name="Rectangle 37"/>
           <p:cNvSpPr/>
           <p:nvPr/>
         </p:nvSpPr>
@@ -24625,7 +25159,7 @@
       </p:sp>
       <p:sp>
         <p:nvSpPr>
-          <p:cNvPr id="38" name="TextBox 37"/>
+          <p:cNvPr id="39" name="TextBox 38"/>
           <p:cNvSpPr txBox="1"/>
           <p:nvPr/>
         </p:nvSpPr>
@@ -24667,7 +25201,7 @@
       </p:sp>
       <p:sp>
         <p:nvSpPr>
-          <p:cNvPr id="39" name="Rectangle 38"/>
+          <p:cNvPr id="40" name="Rectangle 39"/>
           <p:cNvSpPr/>
           <p:nvPr/>
         </p:nvSpPr>
@@ -24711,7 +25245,7 @@
       </p:sp>
       <p:sp>
         <p:nvSpPr>
-          <p:cNvPr id="40" name="TextBox 39"/>
+          <p:cNvPr id="41" name="TextBox 40"/>
           <p:cNvSpPr txBox="1"/>
           <p:nvPr/>
         </p:nvSpPr>
@@ -24753,7 +25287,7 @@
       </p:sp>
       <p:sp>
         <p:nvSpPr>
-          <p:cNvPr id="41" name="Rectangle 40"/>
+          <p:cNvPr id="42" name="Rectangle 41"/>
           <p:cNvSpPr/>
           <p:nvPr/>
         </p:nvSpPr>
@@ -24797,7 +25331,7 @@
       </p:sp>
       <p:sp>
         <p:nvSpPr>
-          <p:cNvPr id="42" name="TextBox 41"/>
+          <p:cNvPr id="43" name="TextBox 42"/>
           <p:cNvSpPr txBox="1"/>
           <p:nvPr/>
         </p:nvSpPr>
@@ -24839,7 +25373,7 @@
       </p:sp>
       <p:sp>
         <p:nvSpPr>
-          <p:cNvPr id="43" name="Rectangle 42"/>
+          <p:cNvPr id="44" name="Rectangle 43"/>
           <p:cNvSpPr/>
           <p:nvPr/>
         </p:nvSpPr>
@@ -24883,7 +25417,7 @@
       </p:sp>
       <p:sp>
         <p:nvSpPr>
-          <p:cNvPr id="44" name="TextBox 43"/>
+          <p:cNvPr id="45" name="TextBox 44"/>
           <p:cNvSpPr txBox="1"/>
           <p:nvPr/>
         </p:nvSpPr>
@@ -24925,7 +25459,7 @@
       </p:sp>
       <p:sp>
         <p:nvSpPr>
-          <p:cNvPr id="45" name="Rectangle 44"/>
+          <p:cNvPr id="46" name="Rectangle 45"/>
           <p:cNvSpPr/>
           <p:nvPr/>
         </p:nvSpPr>
@@ -24969,7 +25503,7 @@
       </p:sp>
       <p:sp>
         <p:nvSpPr>
-          <p:cNvPr id="46" name="TextBox 45"/>
+          <p:cNvPr id="47" name="TextBox 46"/>
           <p:cNvSpPr txBox="1"/>
           <p:nvPr/>
         </p:nvSpPr>
@@ -25011,7 +25545,7 @@
       </p:sp>
       <p:sp>
         <p:nvSpPr>
-          <p:cNvPr id="47" name="Rectangle 46"/>
+          <p:cNvPr id="48" name="Rectangle 47"/>
           <p:cNvSpPr/>
           <p:nvPr/>
         </p:nvSpPr>
@@ -25055,7 +25589,7 @@
       </p:sp>
       <p:sp>
         <p:nvSpPr>
-          <p:cNvPr id="48" name="TextBox 47"/>
+          <p:cNvPr id="49" name="TextBox 48"/>
           <p:cNvSpPr txBox="1"/>
           <p:nvPr/>
         </p:nvSpPr>
@@ -25097,7 +25631,7 @@
       </p:sp>
       <p:sp>
         <p:nvSpPr>
-          <p:cNvPr id="49" name="Rectangle 48"/>
+          <p:cNvPr id="50" name="Rectangle 49"/>
           <p:cNvSpPr/>
           <p:nvPr/>
         </p:nvSpPr>
@@ -25141,7 +25675,7 @@
       </p:sp>
       <p:sp>
         <p:nvSpPr>
-          <p:cNvPr id="50" name="TextBox 49"/>
+          <p:cNvPr id="51" name="TextBox 50"/>
           <p:cNvSpPr txBox="1"/>
           <p:nvPr/>
         </p:nvSpPr>
@@ -25183,7 +25717,7 @@
       </p:sp>
       <p:sp>
         <p:nvSpPr>
-          <p:cNvPr id="51" name="Rectangle 50"/>
+          <p:cNvPr id="52" name="Rectangle 51"/>
           <p:cNvSpPr/>
           <p:nvPr/>
         </p:nvSpPr>
@@ -25227,7 +25761,7 @@
       </p:sp>
       <p:sp>
         <p:nvSpPr>
-          <p:cNvPr id="52" name="TextBox 51"/>
+          <p:cNvPr id="53" name="TextBox 52"/>
           <p:cNvSpPr txBox="1"/>
           <p:nvPr/>
         </p:nvSpPr>
@@ -25269,7 +25803,7 @@
       </p:sp>
       <p:sp>
         <p:nvSpPr>
-          <p:cNvPr id="53" name="Rectangle 52"/>
+          <p:cNvPr id="54" name="Rectangle 53"/>
           <p:cNvSpPr/>
           <p:nvPr/>
         </p:nvSpPr>
@@ -25313,7 +25847,7 @@
       </p:sp>
       <p:sp>
         <p:nvSpPr>
-          <p:cNvPr id="54" name="TextBox 53"/>
+          <p:cNvPr id="55" name="TextBox 54"/>
           <p:cNvSpPr txBox="1"/>
           <p:nvPr/>
         </p:nvSpPr>
@@ -25355,7 +25889,7 @@
       </p:sp>
       <p:sp>
         <p:nvSpPr>
-          <p:cNvPr id="55" name="Rectangle 54"/>
+          <p:cNvPr id="56" name="Rectangle 55"/>
           <p:cNvSpPr/>
           <p:nvPr/>
         </p:nvSpPr>
@@ -25399,7 +25933,7 @@
       </p:sp>
       <p:sp>
         <p:nvSpPr>
-          <p:cNvPr id="56" name="TextBox 55"/>
+          <p:cNvPr id="57" name="TextBox 56"/>
           <p:cNvSpPr txBox="1"/>
           <p:nvPr/>
         </p:nvSpPr>
@@ -25441,7 +25975,7 @@
       </p:sp>
       <p:sp>
         <p:nvSpPr>
-          <p:cNvPr id="57" name="Rectangle 56"/>
+          <p:cNvPr id="58" name="Rectangle 57"/>
           <p:cNvSpPr/>
           <p:nvPr/>
         </p:nvSpPr>
@@ -25485,7 +26019,7 @@
       </p:sp>
       <p:sp>
         <p:nvSpPr>
-          <p:cNvPr id="58" name="TextBox 57"/>
+          <p:cNvPr id="59" name="TextBox 58"/>
           <p:cNvSpPr txBox="1"/>
           <p:nvPr/>
         </p:nvSpPr>
@@ -25527,7 +26061,7 @@
       </p:sp>
       <p:sp>
         <p:nvSpPr>
-          <p:cNvPr id="59" name="Rectangle 58"/>
+          <p:cNvPr id="60" name="Rectangle 59"/>
           <p:cNvSpPr/>
           <p:nvPr/>
         </p:nvSpPr>
@@ -25571,7 +26105,7 @@
       </p:sp>
       <p:sp>
         <p:nvSpPr>
-          <p:cNvPr id="60" name="TextBox 59"/>
+          <p:cNvPr id="61" name="TextBox 60"/>
           <p:cNvSpPr txBox="1"/>
           <p:nvPr/>
         </p:nvSpPr>
@@ -25613,7 +26147,7 @@
       </p:sp>
       <p:sp>
         <p:nvSpPr>
-          <p:cNvPr id="61" name="Rectangle 60"/>
+          <p:cNvPr id="62" name="Rectangle 61"/>
           <p:cNvSpPr/>
           <p:nvPr/>
         </p:nvSpPr>
@@ -25657,7 +26191,7 @@
       </p:sp>
       <p:sp>
         <p:nvSpPr>
-          <p:cNvPr id="62" name="TextBox 61"/>
+          <p:cNvPr id="63" name="TextBox 62"/>
           <p:cNvSpPr txBox="1"/>
           <p:nvPr/>
         </p:nvSpPr>
@@ -25699,7 +26233,7 @@
       </p:sp>
       <p:sp>
         <p:nvSpPr>
-          <p:cNvPr id="63" name="Rectangle 62"/>
+          <p:cNvPr id="64" name="Rectangle 63"/>
           <p:cNvSpPr/>
           <p:nvPr/>
         </p:nvSpPr>
@@ -25743,7 +26277,7 @@
       </p:sp>
       <p:sp>
         <p:nvSpPr>
-          <p:cNvPr id="64" name="TextBox 63"/>
+          <p:cNvPr id="65" name="TextBox 64"/>
           <p:cNvSpPr txBox="1"/>
           <p:nvPr/>
         </p:nvSpPr>
@@ -25785,7 +26319,7 @@
       </p:sp>
       <p:sp>
         <p:nvSpPr>
-          <p:cNvPr id="65" name="Rectangle 64"/>
+          <p:cNvPr id="66" name="Rectangle 65"/>
           <p:cNvSpPr/>
           <p:nvPr/>
         </p:nvSpPr>
@@ -25829,7 +26363,7 @@
       </p:sp>
       <p:sp>
         <p:nvSpPr>
-          <p:cNvPr id="66" name="TextBox 65"/>
+          <p:cNvPr id="67" name="TextBox 66"/>
           <p:cNvSpPr txBox="1"/>
           <p:nvPr/>
         </p:nvSpPr>
@@ -25871,7 +26405,7 @@
       </p:sp>
       <p:sp>
         <p:nvSpPr>
-          <p:cNvPr id="67" name="Rectangle 66"/>
+          <p:cNvPr id="68" name="Rectangle 67"/>
           <p:cNvSpPr/>
           <p:nvPr/>
         </p:nvSpPr>
@@ -25915,7 +26449,7 @@
       </p:sp>
       <p:sp>
         <p:nvSpPr>
-          <p:cNvPr id="68" name="TextBox 67"/>
+          <p:cNvPr id="69" name="TextBox 68"/>
           <p:cNvSpPr txBox="1"/>
           <p:nvPr/>
         </p:nvSpPr>
@@ -25957,7 +26491,7 @@
       </p:sp>
       <p:sp>
         <p:nvSpPr>
-          <p:cNvPr id="69" name="Rectangle 68"/>
+          <p:cNvPr id="70" name="Rectangle 69"/>
           <p:cNvSpPr/>
           <p:nvPr/>
         </p:nvSpPr>
@@ -26001,7 +26535,7 @@
       </p:sp>
       <p:sp>
         <p:nvSpPr>
-          <p:cNvPr id="70" name="TextBox 69"/>
+          <p:cNvPr id="71" name="TextBox 70"/>
           <p:cNvSpPr txBox="1"/>
           <p:nvPr/>
         </p:nvSpPr>
@@ -26043,7 +26577,7 @@
       </p:sp>
       <p:sp>
         <p:nvSpPr>
-          <p:cNvPr id="71" name="Rectangle 70"/>
+          <p:cNvPr id="72" name="Rectangle 71"/>
           <p:cNvSpPr/>
           <p:nvPr/>
         </p:nvSpPr>
@@ -26087,7 +26621,7 @@
       </p:sp>
       <p:sp>
         <p:nvSpPr>
-          <p:cNvPr id="72" name="TextBox 71"/>
+          <p:cNvPr id="73" name="TextBox 72"/>
           <p:cNvSpPr txBox="1"/>
           <p:nvPr/>
         </p:nvSpPr>
@@ -26129,7 +26663,7 @@
       </p:sp>
       <p:sp>
         <p:nvSpPr>
-          <p:cNvPr id="73" name="Rectangle 72"/>
+          <p:cNvPr id="74" name="Rectangle 73"/>
           <p:cNvSpPr/>
           <p:nvPr/>
         </p:nvSpPr>
@@ -26173,7 +26707,7 @@
       </p:sp>
       <p:sp>
         <p:nvSpPr>
-          <p:cNvPr id="74" name="TextBox 73"/>
+          <p:cNvPr id="75" name="TextBox 74"/>
           <p:cNvSpPr txBox="1"/>
           <p:nvPr/>
         </p:nvSpPr>
@@ -26215,7 +26749,7 @@
       </p:sp>
       <p:sp>
         <p:nvSpPr>
-          <p:cNvPr id="75" name="Rectangle 74"/>
+          <p:cNvPr id="76" name="Rectangle 75"/>
           <p:cNvSpPr/>
           <p:nvPr/>
         </p:nvSpPr>
@@ -26259,7 +26793,7 @@
       </p:sp>
       <p:sp>
         <p:nvSpPr>
-          <p:cNvPr id="76" name="TextBox 75"/>
+          <p:cNvPr id="77" name="TextBox 76"/>
           <p:cNvSpPr txBox="1"/>
           <p:nvPr/>
         </p:nvSpPr>
@@ -26301,7 +26835,7 @@
       </p:sp>
       <p:sp>
         <p:nvSpPr>
-          <p:cNvPr id="77" name="Rectangle 76"/>
+          <p:cNvPr id="78" name="Rectangle 77"/>
           <p:cNvSpPr/>
           <p:nvPr/>
         </p:nvSpPr>
@@ -26345,7 +26879,7 @@
       </p:sp>
       <p:sp>
         <p:nvSpPr>
-          <p:cNvPr id="78" name="TextBox 77"/>
+          <p:cNvPr id="79" name="TextBox 78"/>
           <p:cNvSpPr txBox="1"/>
           <p:nvPr/>
         </p:nvSpPr>
@@ -26387,7 +26921,7 @@
       </p:sp>
       <p:sp>
         <p:nvSpPr>
-          <p:cNvPr id="79" name="Rectangle 78"/>
+          <p:cNvPr id="80" name="Rectangle 79"/>
           <p:cNvSpPr/>
           <p:nvPr/>
         </p:nvSpPr>
@@ -26431,7 +26965,7 @@
       </p:sp>
       <p:sp>
         <p:nvSpPr>
-          <p:cNvPr id="80" name="TextBox 79"/>
+          <p:cNvPr id="81" name="TextBox 80"/>
           <p:cNvSpPr txBox="1"/>
           <p:nvPr/>
         </p:nvSpPr>
@@ -26473,7 +27007,7 @@
       </p:sp>
       <p:sp>
         <p:nvSpPr>
-          <p:cNvPr id="81" name="Rectangle 80"/>
+          <p:cNvPr id="82" name="Rectangle 81"/>
           <p:cNvSpPr/>
           <p:nvPr/>
         </p:nvSpPr>
@@ -26517,7 +27051,7 @@
       </p:sp>
       <p:sp>
         <p:nvSpPr>
-          <p:cNvPr id="82" name="TextBox 81"/>
+          <p:cNvPr id="83" name="TextBox 82"/>
           <p:cNvSpPr txBox="1"/>
           <p:nvPr/>
         </p:nvSpPr>
@@ -26559,7 +27093,7 @@
       </p:sp>
       <p:sp>
         <p:nvSpPr>
-          <p:cNvPr id="83" name="Rectangle 82"/>
+          <p:cNvPr id="84" name="Rectangle 83"/>
           <p:cNvSpPr/>
           <p:nvPr/>
         </p:nvSpPr>
@@ -26603,7 +27137,7 @@
       </p:sp>
       <p:sp>
         <p:nvSpPr>
-          <p:cNvPr id="84" name="TextBox 83"/>
+          <p:cNvPr id="85" name="TextBox 84"/>
           <p:cNvSpPr txBox="1"/>
           <p:nvPr/>
         </p:nvSpPr>
@@ -26645,7 +27179,7 @@
       </p:sp>
       <p:sp>
         <p:nvSpPr>
-          <p:cNvPr id="85" name="Rectangle 84"/>
+          <p:cNvPr id="86" name="Rectangle 85"/>
           <p:cNvSpPr/>
           <p:nvPr/>
         </p:nvSpPr>
@@ -26689,7 +27223,7 @@
       </p:sp>
       <p:sp>
         <p:nvSpPr>
-          <p:cNvPr id="86" name="TextBox 85"/>
+          <p:cNvPr id="87" name="TextBox 86"/>
           <p:cNvSpPr txBox="1"/>
           <p:nvPr/>
         </p:nvSpPr>
@@ -26731,7 +27265,7 @@
       </p:sp>
       <p:sp>
         <p:nvSpPr>
-          <p:cNvPr id="87" name="Rectangle 86"/>
+          <p:cNvPr id="88" name="Rectangle 87"/>
           <p:cNvSpPr/>
           <p:nvPr/>
         </p:nvSpPr>
@@ -26775,7 +27309,7 @@
       </p:sp>
       <p:sp>
         <p:nvSpPr>
-          <p:cNvPr id="88" name="TextBox 87"/>
+          <p:cNvPr id="89" name="TextBox 88"/>
           <p:cNvSpPr txBox="1"/>
           <p:nvPr/>
         </p:nvSpPr>
@@ -26817,7 +27351,7 @@
       </p:sp>
       <p:sp>
         <p:nvSpPr>
-          <p:cNvPr id="89" name="Rectangle 88"/>
+          <p:cNvPr id="90" name="Rectangle 89"/>
           <p:cNvSpPr/>
           <p:nvPr/>
         </p:nvSpPr>
@@ -26861,7 +27395,7 @@
       </p:sp>
       <p:sp>
         <p:nvSpPr>
-          <p:cNvPr id="90" name="TextBox 89"/>
+          <p:cNvPr id="91" name="TextBox 90"/>
           <p:cNvSpPr txBox="1"/>
           <p:nvPr/>
         </p:nvSpPr>
@@ -26903,7 +27437,7 @@
       </p:sp>
       <p:sp>
         <p:nvSpPr>
-          <p:cNvPr id="91" name="Rectangle 90"/>
+          <p:cNvPr id="92" name="Rectangle 91"/>
           <p:cNvSpPr/>
           <p:nvPr/>
         </p:nvSpPr>
@@ -26947,7 +27481,7 @@
       </p:sp>
       <p:sp>
         <p:nvSpPr>
-          <p:cNvPr id="92" name="TextBox 91"/>
+          <p:cNvPr id="93" name="TextBox 92"/>
           <p:cNvSpPr txBox="1"/>
           <p:nvPr/>
         </p:nvSpPr>
@@ -26989,7 +27523,7 @@
       </p:sp>
       <p:sp>
         <p:nvSpPr>
-          <p:cNvPr id="93" name="Rectangle 92"/>
+          <p:cNvPr id="94" name="Rectangle 93"/>
           <p:cNvSpPr/>
           <p:nvPr/>
         </p:nvSpPr>
@@ -27033,7 +27567,7 @@
       </p:sp>
       <p:sp>
         <p:nvSpPr>
-          <p:cNvPr id="94" name="TextBox 93"/>
+          <p:cNvPr id="95" name="TextBox 94"/>
           <p:cNvSpPr txBox="1"/>
           <p:nvPr/>
         </p:nvSpPr>
@@ -27075,7 +27609,7 @@
       </p:sp>
       <p:sp>
         <p:nvSpPr>
-          <p:cNvPr id="95" name="Rectangle 94"/>
+          <p:cNvPr id="96" name="Rectangle 95"/>
           <p:cNvSpPr/>
           <p:nvPr/>
         </p:nvSpPr>
@@ -27119,7 +27653,7 @@
       </p:sp>
       <p:sp>
         <p:nvSpPr>
-          <p:cNvPr id="96" name="TextBox 95"/>
+          <p:cNvPr id="97" name="TextBox 96"/>
           <p:cNvSpPr txBox="1"/>
           <p:nvPr/>
         </p:nvSpPr>
@@ -27161,7 +27695,7 @@
       </p:sp>
       <p:sp>
         <p:nvSpPr>
-          <p:cNvPr id="97" name="Rectangle 96"/>
+          <p:cNvPr id="98" name="Rectangle 97"/>
           <p:cNvSpPr/>
           <p:nvPr/>
         </p:nvSpPr>
@@ -27205,7 +27739,7 @@
       </p:sp>
       <p:sp>
         <p:nvSpPr>
-          <p:cNvPr id="98" name="TextBox 97"/>
+          <p:cNvPr id="99" name="TextBox 98"/>
           <p:cNvSpPr txBox="1"/>
           <p:nvPr/>
         </p:nvSpPr>
@@ -27247,7 +27781,7 @@
       </p:sp>
       <p:sp>
         <p:nvSpPr>
-          <p:cNvPr id="99" name="Rectangle 98"/>
+          <p:cNvPr id="100" name="Rectangle 99"/>
           <p:cNvSpPr/>
           <p:nvPr/>
         </p:nvSpPr>
@@ -27291,7 +27825,7 @@
       </p:sp>
       <p:sp>
         <p:nvSpPr>
-          <p:cNvPr id="100" name="TextBox 99"/>
+          <p:cNvPr id="101" name="TextBox 100"/>
           <p:cNvSpPr txBox="1"/>
           <p:nvPr/>
         </p:nvSpPr>
@@ -27333,7 +27867,7 @@
       </p:sp>
       <p:sp>
         <p:nvSpPr>
-          <p:cNvPr id="101" name="Rectangle 100"/>
+          <p:cNvPr id="102" name="Rectangle 101"/>
           <p:cNvSpPr/>
           <p:nvPr/>
         </p:nvSpPr>
@@ -27377,7 +27911,7 @@
       </p:sp>
       <p:sp>
         <p:nvSpPr>
-          <p:cNvPr id="102" name="TextBox 101"/>
+          <p:cNvPr id="103" name="TextBox 102"/>
           <p:cNvSpPr txBox="1"/>
           <p:nvPr/>
         </p:nvSpPr>
@@ -27419,7 +27953,7 @@
       </p:sp>
       <p:sp>
         <p:nvSpPr>
-          <p:cNvPr id="103" name="Rectangle 102"/>
+          <p:cNvPr id="104" name="Rectangle 103"/>
           <p:cNvSpPr/>
           <p:nvPr/>
         </p:nvSpPr>
@@ -27463,7 +27997,7 @@
       </p:sp>
       <p:sp>
         <p:nvSpPr>
-          <p:cNvPr id="104" name="TextBox 103"/>
+          <p:cNvPr id="105" name="TextBox 104"/>
           <p:cNvSpPr txBox="1"/>
           <p:nvPr/>
         </p:nvSpPr>
@@ -27505,7 +28039,7 @@
       </p:sp>
       <p:sp>
         <p:nvSpPr>
-          <p:cNvPr id="105" name="Rectangle 104"/>
+          <p:cNvPr id="106" name="Rectangle 105"/>
           <p:cNvSpPr/>
           <p:nvPr/>
         </p:nvSpPr>
@@ -27549,7 +28083,7 @@
       </p:sp>
       <p:sp>
         <p:nvSpPr>
-          <p:cNvPr id="106" name="TextBox 105"/>
+          <p:cNvPr id="107" name="TextBox 106"/>
           <p:cNvSpPr txBox="1"/>
           <p:nvPr/>
         </p:nvSpPr>
@@ -27591,7 +28125,7 @@
       </p:sp>
       <p:sp>
         <p:nvSpPr>
-          <p:cNvPr id="107" name="Rectangle 106"/>
+          <p:cNvPr id="108" name="Rectangle 107"/>
           <p:cNvSpPr/>
           <p:nvPr/>
         </p:nvSpPr>
@@ -27635,7 +28169,7 @@
       </p:sp>
       <p:sp>
         <p:nvSpPr>
-          <p:cNvPr id="108" name="TextBox 107"/>
+          <p:cNvPr id="109" name="TextBox 108"/>
           <p:cNvSpPr txBox="1"/>
           <p:nvPr/>
         </p:nvSpPr>
@@ -27677,7 +28211,7 @@
       </p:sp>
       <p:sp>
         <p:nvSpPr>
-          <p:cNvPr id="109" name="Rectangle 108"/>
+          <p:cNvPr id="110" name="Rectangle 109"/>
           <p:cNvSpPr/>
           <p:nvPr/>
         </p:nvSpPr>
@@ -27721,7 +28255,7 @@
       </p:sp>
       <p:sp>
         <p:nvSpPr>
-          <p:cNvPr id="110" name="TextBox 109"/>
+          <p:cNvPr id="111" name="TextBox 110"/>
           <p:cNvSpPr txBox="1"/>
           <p:nvPr/>
         </p:nvSpPr>
@@ -27763,7 +28297,7 @@
       </p:sp>
       <p:sp>
         <p:nvSpPr>
-          <p:cNvPr id="111" name="Rectangle 110"/>
+          <p:cNvPr id="112" name="Rectangle 111"/>
           <p:cNvSpPr/>
           <p:nvPr/>
         </p:nvSpPr>
@@ -27807,7 +28341,7 @@
       </p:sp>
       <p:sp>
         <p:nvSpPr>
-          <p:cNvPr id="112" name="TextBox 111"/>
+          <p:cNvPr id="113" name="TextBox 112"/>
           <p:cNvSpPr txBox="1"/>
           <p:nvPr/>
         </p:nvSpPr>
@@ -27849,7 +28383,7 @@
       </p:sp>
       <p:sp>
         <p:nvSpPr>
-          <p:cNvPr id="113" name="Rectangle 112"/>
+          <p:cNvPr id="114" name="Rectangle 113"/>
           <p:cNvSpPr/>
           <p:nvPr/>
         </p:nvSpPr>
@@ -27893,7 +28427,7 @@
       </p:sp>
       <p:sp>
         <p:nvSpPr>
-          <p:cNvPr id="114" name="TextBox 113"/>
+          <p:cNvPr id="115" name="TextBox 114"/>
           <p:cNvSpPr txBox="1"/>
           <p:nvPr/>
         </p:nvSpPr>
@@ -27935,7 +28469,7 @@
       </p:sp>
       <p:sp>
         <p:nvSpPr>
-          <p:cNvPr id="115" name="Rectangle 114"/>
+          <p:cNvPr id="116" name="Rectangle 115"/>
           <p:cNvSpPr/>
           <p:nvPr/>
         </p:nvSpPr>
@@ -27979,7 +28513,7 @@
       </p:sp>
       <p:sp>
         <p:nvSpPr>
-          <p:cNvPr id="116" name="TextBox 115"/>
+          <p:cNvPr id="117" name="TextBox 116"/>
           <p:cNvSpPr txBox="1"/>
           <p:nvPr/>
         </p:nvSpPr>
@@ -28021,7 +28555,7 @@
       </p:sp>
       <p:sp>
         <p:nvSpPr>
-          <p:cNvPr id="117" name="Rectangle 116"/>
+          <p:cNvPr id="118" name="Rectangle 117"/>
           <p:cNvSpPr/>
           <p:nvPr/>
         </p:nvSpPr>
@@ -28065,7 +28599,7 @@
       </p:sp>
       <p:sp>
         <p:nvSpPr>
-          <p:cNvPr id="118" name="TextBox 117"/>
+          <p:cNvPr id="119" name="TextBox 118"/>
           <p:cNvSpPr txBox="1"/>
           <p:nvPr/>
         </p:nvSpPr>
@@ -28107,7 +28641,7 @@
       </p:sp>
       <p:sp>
         <p:nvSpPr>
-          <p:cNvPr id="119" name="Rectangle 118"/>
+          <p:cNvPr id="120" name="Rectangle 119"/>
           <p:cNvSpPr/>
           <p:nvPr/>
         </p:nvSpPr>
@@ -28151,7 +28685,7 @@
       </p:sp>
       <p:sp>
         <p:nvSpPr>
-          <p:cNvPr id="120" name="TextBox 119"/>
+          <p:cNvPr id="121" name="TextBox 120"/>
           <p:cNvSpPr txBox="1"/>
           <p:nvPr/>
         </p:nvSpPr>
@@ -28193,7 +28727,7 @@
       </p:sp>
       <p:sp>
         <p:nvSpPr>
-          <p:cNvPr id="121" name="Rectangle 120"/>
+          <p:cNvPr id="122" name="Rectangle 121"/>
           <p:cNvSpPr/>
           <p:nvPr/>
         </p:nvSpPr>
@@ -28237,7 +28771,7 @@
       </p:sp>
       <p:sp>
         <p:nvSpPr>
-          <p:cNvPr id="122" name="TextBox 121"/>
+          <p:cNvPr id="123" name="TextBox 122"/>
           <p:cNvSpPr txBox="1"/>
           <p:nvPr/>
         </p:nvSpPr>
@@ -28279,7 +28813,7 @@
       </p:sp>
       <p:sp>
         <p:nvSpPr>
-          <p:cNvPr id="123" name="Rectangle 122"/>
+          <p:cNvPr id="124" name="Rectangle 123"/>
           <p:cNvSpPr/>
           <p:nvPr/>
         </p:nvSpPr>
@@ -28323,7 +28857,7 @@
       </p:sp>
       <p:sp>
         <p:nvSpPr>
-          <p:cNvPr id="124" name="TextBox 123"/>
+          <p:cNvPr id="125" name="TextBox 124"/>
           <p:cNvSpPr txBox="1"/>
           <p:nvPr/>
         </p:nvSpPr>
@@ -28365,7 +28899,7 @@
       </p:sp>
       <p:sp>
         <p:nvSpPr>
-          <p:cNvPr id="125" name="Rectangle 124"/>
+          <p:cNvPr id="126" name="Rectangle 125"/>
           <p:cNvSpPr/>
           <p:nvPr/>
         </p:nvSpPr>
@@ -28409,7 +28943,7 @@
       </p:sp>
       <p:sp>
         <p:nvSpPr>
-          <p:cNvPr id="126" name="TextBox 125"/>
+          <p:cNvPr id="127" name="TextBox 126"/>
           <p:cNvSpPr txBox="1"/>
           <p:nvPr/>
         </p:nvSpPr>
@@ -28451,7 +28985,7 @@
       </p:sp>
       <p:sp>
         <p:nvSpPr>
-          <p:cNvPr id="127" name="Rectangle 126"/>
+          <p:cNvPr id="128" name="Rectangle 127"/>
           <p:cNvSpPr/>
           <p:nvPr/>
         </p:nvSpPr>
@@ -28495,7 +29029,7 @@
       </p:sp>
       <p:sp>
         <p:nvSpPr>
-          <p:cNvPr id="128" name="TextBox 127"/>
+          <p:cNvPr id="129" name="TextBox 128"/>
           <p:cNvSpPr txBox="1"/>
           <p:nvPr/>
         </p:nvSpPr>
@@ -28537,7 +29071,7 @@
       </p:sp>
       <p:sp>
         <p:nvSpPr>
-          <p:cNvPr id="129" name="Rectangle 128"/>
+          <p:cNvPr id="130" name="Rectangle 129"/>
           <p:cNvSpPr/>
           <p:nvPr/>
         </p:nvSpPr>
@@ -28581,7 +29115,7 @@
       </p:sp>
       <p:sp>
         <p:nvSpPr>
-          <p:cNvPr id="130" name="TextBox 129"/>
+          <p:cNvPr id="131" name="TextBox 130"/>
           <p:cNvSpPr txBox="1"/>
           <p:nvPr/>
         </p:nvSpPr>
@@ -28623,7 +29157,7 @@
       </p:sp>
       <p:sp>
         <p:nvSpPr>
-          <p:cNvPr id="131" name="Rectangle 130"/>
+          <p:cNvPr id="132" name="Rectangle 131"/>
           <p:cNvSpPr/>
           <p:nvPr/>
         </p:nvSpPr>
@@ -28667,7 +29201,7 @@
       </p:sp>
       <p:sp>
         <p:nvSpPr>
-          <p:cNvPr id="132" name="TextBox 131"/>
+          <p:cNvPr id="133" name="TextBox 132"/>
           <p:cNvSpPr txBox="1"/>
           <p:nvPr/>
         </p:nvSpPr>
@@ -28709,7 +29243,7 @@
       </p:sp>
       <p:sp>
         <p:nvSpPr>
-          <p:cNvPr id="133" name="Rectangle 132"/>
+          <p:cNvPr id="134" name="Rectangle 133"/>
           <p:cNvSpPr/>
           <p:nvPr/>
         </p:nvSpPr>
@@ -28753,7 +29287,7 @@
       </p:sp>
       <p:sp>
         <p:nvSpPr>
-          <p:cNvPr id="134" name="TextBox 133"/>
+          <p:cNvPr id="135" name="TextBox 134"/>
           <p:cNvSpPr txBox="1"/>
           <p:nvPr/>
         </p:nvSpPr>
@@ -28795,7 +29329,7 @@
       </p:sp>
       <p:sp>
         <p:nvSpPr>
-          <p:cNvPr id="135" name="Rectangle 134"/>
+          <p:cNvPr id="136" name="Rectangle 135"/>
           <p:cNvSpPr/>
           <p:nvPr/>
         </p:nvSpPr>
@@ -28839,7 +29373,7 @@
       </p:sp>
       <p:sp>
         <p:nvSpPr>
-          <p:cNvPr id="136" name="TextBox 135"/>
+          <p:cNvPr id="137" name="TextBox 136"/>
           <p:cNvSpPr txBox="1"/>
           <p:nvPr/>
         </p:nvSpPr>
@@ -28881,7 +29415,7 @@
       </p:sp>
       <p:sp>
         <p:nvSpPr>
-          <p:cNvPr id="137" name="Rectangle 136"/>
+          <p:cNvPr id="138" name="Rectangle 137"/>
           <p:cNvSpPr/>
           <p:nvPr/>
         </p:nvSpPr>
@@ -28925,7 +29459,7 @@
       </p:sp>
       <p:sp>
         <p:nvSpPr>
-          <p:cNvPr id="138" name="TextBox 137"/>
+          <p:cNvPr id="139" name="TextBox 138"/>
           <p:cNvSpPr txBox="1"/>
           <p:nvPr/>
         </p:nvSpPr>
@@ -28967,7 +29501,7 @@
       </p:sp>
       <p:sp>
         <p:nvSpPr>
-          <p:cNvPr id="139" name="Rectangle 138"/>
+          <p:cNvPr id="140" name="Rectangle 139"/>
           <p:cNvSpPr/>
           <p:nvPr/>
         </p:nvSpPr>
@@ -29011,7 +29545,7 @@
       </p:sp>
       <p:sp>
         <p:nvSpPr>
-          <p:cNvPr id="140" name="TextBox 139"/>
+          <p:cNvPr id="141" name="TextBox 140"/>
           <p:cNvSpPr txBox="1"/>
           <p:nvPr/>
         </p:nvSpPr>
@@ -29053,7 +29587,7 @@
       </p:sp>
       <p:sp>
         <p:nvSpPr>
-          <p:cNvPr id="141" name="Rectangle 140"/>
+          <p:cNvPr id="142" name="Rectangle 141"/>
           <p:cNvSpPr/>
           <p:nvPr/>
         </p:nvSpPr>
@@ -29097,7 +29631,7 @@
       </p:sp>
       <p:sp>
         <p:nvSpPr>
-          <p:cNvPr id="142" name="TextBox 141"/>
+          <p:cNvPr id="143" name="TextBox 142"/>
           <p:cNvSpPr txBox="1"/>
           <p:nvPr/>
         </p:nvSpPr>
@@ -29139,7 +29673,7 @@
       </p:sp>
       <p:sp>
         <p:nvSpPr>
-          <p:cNvPr id="143" name="Rectangle 142"/>
+          <p:cNvPr id="144" name="Rectangle 143"/>
           <p:cNvSpPr/>
           <p:nvPr/>
         </p:nvSpPr>
@@ -29183,7 +29717,7 @@
       </p:sp>
       <p:sp>
         <p:nvSpPr>
-          <p:cNvPr id="144" name="TextBox 143"/>
+          <p:cNvPr id="145" name="TextBox 144"/>
           <p:cNvSpPr txBox="1"/>
           <p:nvPr/>
         </p:nvSpPr>
@@ -29225,7 +29759,7 @@
       </p:sp>
       <p:sp>
         <p:nvSpPr>
-          <p:cNvPr id="145" name="Rectangle 144"/>
+          <p:cNvPr id="146" name="Rectangle 145"/>
           <p:cNvSpPr/>
           <p:nvPr/>
         </p:nvSpPr>
@@ -29269,7 +29803,7 @@
       </p:sp>
       <p:sp>
         <p:nvSpPr>
-          <p:cNvPr id="146" name="TextBox 145"/>
+          <p:cNvPr id="147" name="TextBox 146"/>
           <p:cNvSpPr txBox="1"/>
           <p:nvPr/>
         </p:nvSpPr>
@@ -29311,7 +29845,7 @@
       </p:sp>
       <p:sp>
         <p:nvSpPr>
-          <p:cNvPr id="147" name="Rectangle 146"/>
+          <p:cNvPr id="148" name="Rectangle 147"/>
           <p:cNvSpPr/>
           <p:nvPr/>
         </p:nvSpPr>
@@ -29355,7 +29889,7 @@
       </p:sp>
       <p:sp>
         <p:nvSpPr>
-          <p:cNvPr id="148" name="TextBox 147"/>
+          <p:cNvPr id="149" name="TextBox 148"/>
           <p:cNvSpPr txBox="1"/>
           <p:nvPr/>
         </p:nvSpPr>
@@ -29397,7 +29931,7 @@
       </p:sp>
       <p:sp>
         <p:nvSpPr>
-          <p:cNvPr id="149" name="Rectangle 148"/>
+          <p:cNvPr id="150" name="Rectangle 149"/>
           <p:cNvSpPr/>
           <p:nvPr/>
         </p:nvSpPr>
@@ -29441,7 +29975,7 @@
       </p:sp>
       <p:sp>
         <p:nvSpPr>
-          <p:cNvPr id="150" name="TextBox 149"/>
+          <p:cNvPr id="151" name="TextBox 150"/>
           <p:cNvSpPr txBox="1"/>
           <p:nvPr/>
         </p:nvSpPr>
@@ -29483,7 +30017,7 @@
       </p:sp>
       <p:sp>
         <p:nvSpPr>
-          <p:cNvPr id="151" name="Rectangle 150"/>
+          <p:cNvPr id="152" name="Rectangle 151"/>
           <p:cNvSpPr/>
           <p:nvPr/>
         </p:nvSpPr>
@@ -29527,7 +30061,7 @@
       </p:sp>
       <p:sp>
         <p:nvSpPr>
-          <p:cNvPr id="152" name="TextBox 151"/>
+          <p:cNvPr id="153" name="TextBox 152"/>
           <p:cNvSpPr txBox="1"/>
           <p:nvPr/>
         </p:nvSpPr>
@@ -29569,7 +30103,7 @@
       </p:sp>
       <p:sp>
         <p:nvSpPr>
-          <p:cNvPr id="153" name="Rectangle 152"/>
+          <p:cNvPr id="154" name="Rectangle 153"/>
           <p:cNvSpPr/>
           <p:nvPr/>
         </p:nvSpPr>
@@ -29613,7 +30147,7 @@
       </p:sp>
       <p:sp>
         <p:nvSpPr>
-          <p:cNvPr id="154" name="TextBox 153"/>
+          <p:cNvPr id="155" name="TextBox 154"/>
           <p:cNvSpPr txBox="1"/>
           <p:nvPr/>
         </p:nvSpPr>
@@ -29655,7 +30189,7 @@
       </p:sp>
       <p:sp>
         <p:nvSpPr>
-          <p:cNvPr id="155" name="TextBox 154"/>
+          <p:cNvPr id="156" name="TextBox 155"/>
           <p:cNvSpPr txBox="1"/>
           <p:nvPr/>
         </p:nvSpPr>
@@ -29904,7 +30438,7 @@
                 </a:solidFill>
                 <a:latin typeface="Times New Roman"/>
               </a:rPr>
-              <a:t>Independently validated: 20 years, net of every fee</a:t>
+              <a:t>2.14 Independently validated: 20 years, net of every fee</a:t>
             </a:r>
           </a:p>
         </p:txBody>
@@ -30874,7 +31408,7 @@
                 </a:solidFill>
                 <a:latin typeface="Times New Roman"/>
               </a:rPr>
-              <a:t>Repeatable and conviction-sized — not lucky</a:t>
+              <a:t>2.15 Repeatable and conviction-sized — not lucky</a:t>
             </a:r>
           </a:p>
         </p:txBody>
@@ -31431,7 +31965,7 @@
                 </a:solidFill>
                 <a:latin typeface="Times New Roman"/>
               </a:rPr>
-              <a:t>Why a non-linear path won’t get you fired</a:t>
+              <a:t>2.16 Why a non-linear path won’t get you fired</a:t>
             </a:r>
           </a:p>
         </p:txBody>
@@ -32013,7 +32547,7 @@
                 </a:solidFill>
                 <a:latin typeface="Times New Roman"/>
               </a:rPr>
-              <a:t>Responsible ownership, by construction</a:t>
+              <a:t>2.17 Responsible ownership, by construction</a:t>
             </a:r>
           </a:p>
         </p:txBody>
@@ -32961,7 +33495,7 @@
                 </a:solidFill>
                 <a:latin typeface="Times New Roman"/>
               </a:rPr>
-              <a:t>A catalyst-driven source of return</a:t>
+              <a:t>1.1 A catalyst-driven source of return</a:t>
             </a:r>
           </a:p>
         </p:txBody>
@@ -33467,7 +34001,7 @@
                 </a:solidFill>
                 <a:latin typeface="Times New Roman"/>
               </a:rPr>
-              <a:t>Aligned with horizon and fiduciary duty</a:t>
+              <a:t>1.2 Aligned with horizon and fiduciary duty</a:t>
             </a:r>
           </a:p>
         </p:txBody>
@@ -33894,7 +34428,7 @@
                 </a:solidFill>
                 <a:latin typeface="Times New Roman"/>
               </a:rPr>
-              <a:t>Diversification and the total-portfolio view</a:t>
+              <a:t>1.3 Diversification and the total-portfolio view</a:t>
             </a:r>
           </a:p>
         </p:txBody>
@@ -34321,7 +34855,7 @@
                 </a:solidFill>
                 <a:latin typeface="Times New Roman"/>
               </a:rPr>
-              <a:t>Governance and the ESG synergy</a:t>
+              <a:t>1.4 Governance and the ESG synergy</a:t>
             </a:r>
           </a:p>
         </p:txBody>
@@ -34748,7 +35282,7 @@
                 </a:solidFill>
                 <a:latin typeface="Times New Roman"/>
               </a:rPr>
-              <a:t>What separates a great engaged owner</a:t>
+              <a:t>1.5 What separates a great engaged owner</a:t>
             </a:r>
           </a:p>
         </p:txBody>

--- a/Athanase_Engaged_Ownership_Allocator_Deck.pptx
+++ b/Athanase_Engaged_Ownership_Allocator_Deck.pptx
@@ -14744,7 +14744,7 @@
                 </a:solidFill>
                 <a:latin typeface="Times New Roman"/>
               </a:rPr>
-              <a:t>What this presentation covers</a:t>
+              <a:t>Contents</a:t>
             </a:r>
           </a:p>
         </p:txBody>
@@ -14799,8 +14799,8 @@
         </p:nvSpPr>
         <p:spPr>
           <a:xfrm>
-            <a:off x="685800" y="1783080"/>
-            <a:ext cx="10789920" cy="4206240"/>
+            <a:off x="640080" y="1783080"/>
+            <a:ext cx="5349240" cy="365760"/>
           </a:xfrm>
           <a:prstGeom prst="rect">
             <a:avLst/>
@@ -14813,97 +14813,807 @@
           </a:bodyPr>
           <a:lstStyle/>
           <a:p>
+            <a:pPr algn="l">
+              <a:lnSpc>
+                <a:spcPct val="110000"/>
+              </a:lnSpc>
+              <a:spcAft>
+                <a:spcPts val="0"/>
+              </a:spcAft>
+            </a:pPr>
+            <a:r>
+              <a:rPr sz="1400" b="1" i="0">
+                <a:solidFill>
+                  <a:srgbClr val="4A5D75"/>
+                </a:solidFill>
+                <a:latin typeface="Times New Roman"/>
+              </a:rPr>
+              <a:t>Part I  ·  Why allocate to engaged ownership</a:t>
+            </a:r>
+          </a:p>
+        </p:txBody>
+      </p:sp>
+      <p:sp>
+        <p:nvSpPr>
+          <p:cNvPr id="9" name="TextBox 8"/>
+          <p:cNvSpPr txBox="1"/>
+          <p:nvPr/>
+        </p:nvSpPr>
+        <p:spPr>
+          <a:xfrm>
+            <a:off x="640080" y="2240280"/>
+            <a:ext cx="5349240" cy="4297680"/>
+          </a:xfrm>
+          <a:prstGeom prst="rect">
+            <a:avLst/>
+          </a:prstGeom>
+          <a:noFill/>
+        </p:spPr>
+        <p:txBody>
+          <a:bodyPr wrap="square" anchor="t" lIns="0" rIns="0" tIns="0" bIns="0">
+            <a:spAutoFit/>
+          </a:bodyPr>
+          <a:lstStyle/>
+          <a:p>
             <a:pPr>
               <a:lnSpc>
-                <a:spcPct val="112000"/>
-              </a:lnSpc>
-              <a:spcAft>
-                <a:spcPts val="1000"/>
-              </a:spcAft>
-            </a:pPr>
-            <a:r>
-              <a:rPr sz="2000" b="1">
+                <a:spcPct val="104000"/>
+              </a:lnSpc>
+              <a:spcAft>
+                <a:spcPts val="700"/>
+              </a:spcAft>
+            </a:pPr>
+            <a:r>
+              <a:rPr sz="1150" b="1">
                 <a:solidFill>
                   <a:srgbClr val="4A5D75"/>
                 </a:solidFill>
+                <a:latin typeface="Calibri"/>
+              </a:rPr>
+              <a:t>1.1   </a:t>
+            </a:r>
+            <a:r>
+              <a:rPr sz="1150">
+                <a:solidFill>
+                  <a:srgbClr val="1E334E"/>
+                </a:solidFill>
+                <a:latin typeface="Calibri"/>
+              </a:rPr>
+              <a:t>A catalyst-driven source of return</a:t>
+            </a:r>
+          </a:p>
+          <a:p>
+            <a:pPr>
+              <a:lnSpc>
+                <a:spcPct val="104000"/>
+              </a:lnSpc>
+              <a:spcAft>
+                <a:spcPts val="700"/>
+              </a:spcAft>
+            </a:pPr>
+            <a:r>
+              <a:rPr sz="1150" b="1">
+                <a:solidFill>
+                  <a:srgbClr val="4A5D75"/>
+                </a:solidFill>
+                <a:latin typeface="Calibri"/>
+              </a:rPr>
+              <a:t>1.2   </a:t>
+            </a:r>
+            <a:r>
+              <a:rPr sz="1150">
+                <a:solidFill>
+                  <a:srgbClr val="1E334E"/>
+                </a:solidFill>
+                <a:latin typeface="Calibri"/>
+              </a:rPr>
+              <a:t>Aligned with horizon and fiduciary duty</a:t>
+            </a:r>
+          </a:p>
+          <a:p>
+            <a:pPr>
+              <a:lnSpc>
+                <a:spcPct val="104000"/>
+              </a:lnSpc>
+              <a:spcAft>
+                <a:spcPts val="700"/>
+              </a:spcAft>
+            </a:pPr>
+            <a:r>
+              <a:rPr sz="1150" b="1">
+                <a:solidFill>
+                  <a:srgbClr val="4A5D75"/>
+                </a:solidFill>
+                <a:latin typeface="Calibri"/>
+              </a:rPr>
+              <a:t>1.3   </a:t>
+            </a:r>
+            <a:r>
+              <a:rPr sz="1150">
+                <a:solidFill>
+                  <a:srgbClr val="1E334E"/>
+                </a:solidFill>
+                <a:latin typeface="Calibri"/>
+              </a:rPr>
+              <a:t>Diversification and the total-portfolio view</a:t>
+            </a:r>
+          </a:p>
+          <a:p>
+            <a:pPr>
+              <a:lnSpc>
+                <a:spcPct val="104000"/>
+              </a:lnSpc>
+              <a:spcAft>
+                <a:spcPts val="700"/>
+              </a:spcAft>
+            </a:pPr>
+            <a:r>
+              <a:rPr sz="1150" b="1">
+                <a:solidFill>
+                  <a:srgbClr val="4A5D75"/>
+                </a:solidFill>
+                <a:latin typeface="Calibri"/>
+              </a:rPr>
+              <a:t>1.4   </a:t>
+            </a:r>
+            <a:r>
+              <a:rPr sz="1150">
+                <a:solidFill>
+                  <a:srgbClr val="1E334E"/>
+                </a:solidFill>
+                <a:latin typeface="Calibri"/>
+              </a:rPr>
+              <a:t>Governance and the ESG synergy</a:t>
+            </a:r>
+          </a:p>
+          <a:p>
+            <a:pPr>
+              <a:lnSpc>
+                <a:spcPct val="104000"/>
+              </a:lnSpc>
+              <a:spcAft>
+                <a:spcPts val="700"/>
+              </a:spcAft>
+            </a:pPr>
+            <a:r>
+              <a:rPr sz="1150" b="1">
+                <a:solidFill>
+                  <a:srgbClr val="4A5D75"/>
+                </a:solidFill>
+                <a:latin typeface="Calibri"/>
+              </a:rPr>
+              <a:t>1.5   </a:t>
+            </a:r>
+            <a:r>
+              <a:rPr sz="1150">
+                <a:solidFill>
+                  <a:srgbClr val="1E334E"/>
+                </a:solidFill>
+                <a:latin typeface="Calibri"/>
+              </a:rPr>
+              <a:t>What separates a great engaged owner</a:t>
+            </a:r>
+          </a:p>
+        </p:txBody>
+      </p:sp>
+      <p:sp>
+        <p:nvSpPr>
+          <p:cNvPr id="10" name="TextBox 9"/>
+          <p:cNvSpPr txBox="1"/>
+          <p:nvPr/>
+        </p:nvSpPr>
+        <p:spPr>
+          <a:xfrm>
+            <a:off x="6446520" y="1783080"/>
+            <a:ext cx="5349240" cy="365760"/>
+          </a:xfrm>
+          <a:prstGeom prst="rect">
+            <a:avLst/>
+          </a:prstGeom>
+          <a:noFill/>
+        </p:spPr>
+        <p:txBody>
+          <a:bodyPr wrap="square" anchor="t" lIns="0" rIns="0" tIns="0" bIns="0">
+            <a:spAutoFit/>
+          </a:bodyPr>
+          <a:lstStyle/>
+          <a:p>
+            <a:pPr algn="l">
+              <a:lnSpc>
+                <a:spcPct val="110000"/>
+              </a:lnSpc>
+              <a:spcAft>
+                <a:spcPts val="0"/>
+              </a:spcAft>
+            </a:pPr>
+            <a:r>
+              <a:rPr sz="1400" b="1" i="0">
+                <a:solidFill>
+                  <a:srgbClr val="4A5D75"/>
+                </a:solidFill>
                 <a:latin typeface="Times New Roman"/>
               </a:rPr>
-              <a:t>Part I   </a:t>
-            </a:r>
-            <a:r>
-              <a:rPr sz="2000" b="1">
+              <a:t>Part II  ·  Why choose Athanase</a:t>
+            </a:r>
+          </a:p>
+        </p:txBody>
+      </p:sp>
+      <p:sp>
+        <p:nvSpPr>
+          <p:cNvPr id="11" name="TextBox 10"/>
+          <p:cNvSpPr txBox="1"/>
+          <p:nvPr/>
+        </p:nvSpPr>
+        <p:spPr>
+          <a:xfrm>
+            <a:off x="6446520" y="2240280"/>
+            <a:ext cx="5349240" cy="4297680"/>
+          </a:xfrm>
+          <a:prstGeom prst="rect">
+            <a:avLst/>
+          </a:prstGeom>
+          <a:noFill/>
+        </p:spPr>
+        <p:txBody>
+          <a:bodyPr wrap="square" anchor="t" lIns="0" rIns="0" tIns="0" bIns="0">
+            <a:spAutoFit/>
+          </a:bodyPr>
+          <a:lstStyle/>
+          <a:p>
+            <a:pPr>
+              <a:lnSpc>
+                <a:spcPct val="104000"/>
+              </a:lnSpc>
+              <a:spcAft>
+                <a:spcPts val="700"/>
+              </a:spcAft>
+            </a:pPr>
+            <a:r>
+              <a:rPr sz="1150" b="1">
+                <a:solidFill>
+                  <a:srgbClr val="4A5D75"/>
+                </a:solidFill>
+                <a:latin typeface="Calibri"/>
+              </a:rPr>
+              <a:t>2.1   </a:t>
+            </a:r>
+            <a:r>
+              <a:rPr sz="1150">
                 <a:solidFill>
                   <a:srgbClr val="1E334E"/>
                 </a:solidFill>
-                <a:latin typeface="Times New Roman"/>
-              </a:rPr>
-              <a:t>Why allocate to engaged ownership</a:t>
+                <a:latin typeface="Calibri"/>
+              </a:rPr>
+              <a:t>Athanase at a glance</a:t>
             </a:r>
           </a:p>
           <a:p>
             <a:pPr>
               <a:lnSpc>
-                <a:spcPct val="112000"/>
-              </a:lnSpc>
-              <a:spcAft>
-                <a:spcPts val="2000"/>
-              </a:spcAft>
-            </a:pPr>
-            <a:r>
-              <a:rPr sz="1500">
-                <a:solidFill>
-                  <a:srgbClr val="333840"/>
-                </a:solidFill>
-                <a:latin typeface="Calibri"/>
-              </a:rPr>
-              <a:t>The asset-class case: a catalyst-driven, diversifying source of equity return that fits a long-horizon, fiduciary mandate.</a:t>
+                <a:spcPct val="104000"/>
+              </a:lnSpc>
+              <a:spcAft>
+                <a:spcPts val="700"/>
+              </a:spcAft>
+            </a:pPr>
+            <a:r>
+              <a:rPr sz="1150" b="1">
+                <a:solidFill>
+                  <a:srgbClr val="4A5D75"/>
+                </a:solidFill>
+                <a:latin typeface="Calibri"/>
+              </a:rPr>
+              <a:t>2.2   </a:t>
+            </a:r>
+            <a:r>
+              <a:rPr sz="1150">
+                <a:solidFill>
+                  <a:srgbClr val="1E334E"/>
+                </a:solidFill>
+                <a:latin typeface="Calibri"/>
+              </a:rPr>
+              <a:t>An integrated team, 20 years together</a:t>
             </a:r>
           </a:p>
           <a:p>
             <a:pPr>
               <a:lnSpc>
-                <a:spcPct val="112000"/>
-              </a:lnSpc>
-              <a:spcAft>
-                <a:spcPts val="1000"/>
-              </a:spcAft>
-            </a:pPr>
-            <a:r>
-              <a:rPr sz="2000" b="1">
+                <a:spcPct val="104000"/>
+              </a:lnSpc>
+              <a:spcAft>
+                <a:spcPts val="700"/>
+              </a:spcAft>
+            </a:pPr>
+            <a:r>
+              <a:rPr sz="1150" b="1">
                 <a:solidFill>
                   <a:srgbClr val="4A5D75"/>
                 </a:solidFill>
-                <a:latin typeface="Times New Roman"/>
-              </a:rPr>
-              <a:t>Part II   </a:t>
-            </a:r>
-            <a:r>
-              <a:rPr sz="2000" b="1">
+                <a:latin typeface="Calibri"/>
+              </a:rPr>
+              <a:t>2.3   </a:t>
+            </a:r>
+            <a:r>
+              <a:rPr sz="1150">
                 <a:solidFill>
                   <a:srgbClr val="1E334E"/>
                 </a:solidFill>
-                <a:latin typeface="Times New Roman"/>
-              </a:rPr>
-              <a:t>Why choose Athanase</a:t>
+                <a:latin typeface="Calibri"/>
+              </a:rPr>
+              <a:t>The inefficiency Athanase harvests</a:t>
+            </a:r>
+            <a:r>
+              <a:rPr sz="950" i="1">
+                <a:solidFill>
+                  <a:srgbClr val="5A636E"/>
+                </a:solidFill>
+                <a:latin typeface="Calibri"/>
+              </a:rPr>
+              <a:t>   (Figure 1)</a:t>
             </a:r>
           </a:p>
           <a:p>
             <a:pPr>
               <a:lnSpc>
-                <a:spcPct val="112000"/>
-              </a:lnSpc>
-              <a:spcAft>
-                <a:spcPts val="2000"/>
-              </a:spcAft>
-            </a:pPr>
-            <a:r>
-              <a:rPr sz="1500">
-                <a:solidFill>
-                  <a:srgbClr val="333840"/>
-                </a:solidFill>
-                <a:latin typeface="Calibri"/>
-              </a:rPr>
-              <a:t>Among engaged owners, the team, opportunity set, margin-for-error and 20-year track record that distinguish Athanase Industrial Partner.</a:t>
+                <a:spcPct val="104000"/>
+              </a:lnSpc>
+              <a:spcAft>
+                <a:spcPts val="700"/>
+              </a:spcAft>
+            </a:pPr>
+            <a:r>
+              <a:rPr sz="1150" b="1">
+                <a:solidFill>
+                  <a:srgbClr val="4A5D75"/>
+                </a:solidFill>
+                <a:latin typeface="Calibri"/>
+              </a:rPr>
+              <a:t>2.4   </a:t>
+            </a:r>
+            <a:r>
+              <a:rPr sz="1150">
+                <a:solidFill>
+                  <a:srgbClr val="1E334E"/>
+                </a:solidFill>
+                <a:latin typeface="Calibri"/>
+              </a:rPr>
+              <a:t>We don’t buy broken companies — we buy hidden cores</a:t>
+            </a:r>
+            <a:r>
+              <a:rPr sz="950" i="1">
+                <a:solidFill>
+                  <a:srgbClr val="5A636E"/>
+                </a:solidFill>
+                <a:latin typeface="Calibri"/>
+              </a:rPr>
+              <a:t>   (Figure 2)</a:t>
+            </a:r>
+          </a:p>
+          <a:p>
+            <a:pPr>
+              <a:lnSpc>
+                <a:spcPct val="104000"/>
+              </a:lnSpc>
+              <a:spcAft>
+                <a:spcPts val="700"/>
+              </a:spcAft>
+            </a:pPr>
+            <a:r>
+              <a:rPr sz="1150" b="1">
+                <a:solidFill>
+                  <a:srgbClr val="4A5D75"/>
+                </a:solidFill>
+                <a:latin typeface="Calibri"/>
+              </a:rPr>
+              <a:t>2.5   </a:t>
+            </a:r>
+            <a:r>
+              <a:rPr sz="1150">
+                <a:solidFill>
+                  <a:srgbClr val="1E334E"/>
+                </a:solidFill>
+                <a:latin typeface="Calibri"/>
+              </a:rPr>
+              <a:t>Quality-core constructivism — how we differ</a:t>
+            </a:r>
+            <a:r>
+              <a:rPr sz="950" i="1">
+                <a:solidFill>
+                  <a:srgbClr val="5A636E"/>
+                </a:solidFill>
+                <a:latin typeface="Calibri"/>
+              </a:rPr>
+              <a:t>   (Table 1)</a:t>
+            </a:r>
+          </a:p>
+          <a:p>
+            <a:pPr>
+              <a:lnSpc>
+                <a:spcPct val="104000"/>
+              </a:lnSpc>
+              <a:spcAft>
+                <a:spcPts val="700"/>
+              </a:spcAft>
+            </a:pPr>
+            <a:r>
+              <a:rPr sz="1150" b="1">
+                <a:solidFill>
+                  <a:srgbClr val="4A5D75"/>
+                </a:solidFill>
+                <a:latin typeface="Calibri"/>
+              </a:rPr>
+              <a:t>2.6   </a:t>
+            </a:r>
+            <a:r>
+              <a:rPr sz="1150">
+                <a:solidFill>
+                  <a:srgbClr val="1E334E"/>
+                </a:solidFill>
+                <a:latin typeface="Calibri"/>
+              </a:rPr>
+              <a:t>We don’t need to be right more than ~50%</a:t>
+            </a:r>
+            <a:r>
+              <a:rPr sz="950" i="1">
+                <a:solidFill>
+                  <a:srgbClr val="5A636E"/>
+                </a:solidFill>
+                <a:latin typeface="Calibri"/>
+              </a:rPr>
+              <a:t>   (Table 2)</a:t>
+            </a:r>
+          </a:p>
+          <a:p>
+            <a:pPr>
+              <a:lnSpc>
+                <a:spcPct val="104000"/>
+              </a:lnSpc>
+              <a:spcAft>
+                <a:spcPts val="700"/>
+              </a:spcAft>
+            </a:pPr>
+            <a:r>
+              <a:rPr sz="1150" b="1">
+                <a:solidFill>
+                  <a:srgbClr val="4A5D75"/>
+                </a:solidFill>
+                <a:latin typeface="Calibri"/>
+              </a:rPr>
+              <a:t>2.7   </a:t>
+            </a:r>
+            <a:r>
+              <a:rPr sz="1150">
+                <a:solidFill>
+                  <a:srgbClr val="1E334E"/>
+                </a:solidFill>
+                <a:latin typeface="Calibri"/>
+              </a:rPr>
+              <a:t>A risk system built to avoid permanent loss</a:t>
+            </a:r>
+          </a:p>
+          <a:p>
+            <a:pPr>
+              <a:lnSpc>
+                <a:spcPct val="104000"/>
+              </a:lnSpc>
+              <a:spcAft>
+                <a:spcPts val="700"/>
+              </a:spcAft>
+            </a:pPr>
+            <a:r>
+              <a:rPr sz="1150" b="1">
+                <a:solidFill>
+                  <a:srgbClr val="4A5D75"/>
+                </a:solidFill>
+                <a:latin typeface="Calibri"/>
+              </a:rPr>
+              <a:t>2.8   </a:t>
+            </a:r>
+            <a:r>
+              <a:rPr sz="1150">
+                <a:solidFill>
+                  <a:srgbClr val="1E334E"/>
+                </a:solidFill>
+                <a:latin typeface="Calibri"/>
+              </a:rPr>
+              <a:t>The visible risks are the engine — not the cost</a:t>
+            </a:r>
+          </a:p>
+          <a:p>
+            <a:pPr>
+              <a:lnSpc>
+                <a:spcPct val="104000"/>
+              </a:lnSpc>
+              <a:spcAft>
+                <a:spcPts val="700"/>
+              </a:spcAft>
+            </a:pPr>
+            <a:r>
+              <a:rPr sz="1150" b="1">
+                <a:solidFill>
+                  <a:srgbClr val="4A5D75"/>
+                </a:solidFill>
+                <a:latin typeface="Calibri"/>
+              </a:rPr>
+              <a:t>2.9   </a:t>
+            </a:r>
+            <a:r>
+              <a:rPr sz="1150">
+                <a:solidFill>
+                  <a:srgbClr val="1E334E"/>
+                </a:solidFill>
+                <a:latin typeface="Calibri"/>
+              </a:rPr>
+              <a:t>A non-linear path — honestly priced</a:t>
+            </a:r>
+            <a:r>
+              <a:rPr sz="950" i="1">
+                <a:solidFill>
+                  <a:srgbClr val="5A636E"/>
+                </a:solidFill>
+                <a:latin typeface="Calibri"/>
+              </a:rPr>
+              <a:t>   (Figure 3)</a:t>
+            </a:r>
+          </a:p>
+          <a:p>
+            <a:pPr>
+              <a:lnSpc>
+                <a:spcPct val="104000"/>
+              </a:lnSpc>
+              <a:spcAft>
+                <a:spcPts val="700"/>
+              </a:spcAft>
+            </a:pPr>
+            <a:r>
+              <a:rPr sz="1150" b="1">
+                <a:solidFill>
+                  <a:srgbClr val="4A5D75"/>
+                </a:solidFill>
+                <a:latin typeface="Calibri"/>
+              </a:rPr>
+              <a:t>2.10   </a:t>
+            </a:r>
+            <a:r>
+              <a:rPr sz="1150">
+                <a:solidFill>
+                  <a:srgbClr val="1E334E"/>
+                </a:solidFill>
+                <a:latin typeface="Calibri"/>
+              </a:rPr>
+              <a:t>Risk reframing for the investment committee</a:t>
+            </a:r>
+            <a:r>
+              <a:rPr sz="950" i="1">
+                <a:solidFill>
+                  <a:srgbClr val="5A636E"/>
+                </a:solidFill>
+                <a:latin typeface="Calibri"/>
+              </a:rPr>
+              <a:t>   (Table 3)</a:t>
+            </a:r>
+          </a:p>
+          <a:p>
+            <a:pPr>
+              <a:lnSpc>
+                <a:spcPct val="104000"/>
+              </a:lnSpc>
+              <a:spcAft>
+                <a:spcPts val="700"/>
+              </a:spcAft>
+            </a:pPr>
+            <a:r>
+              <a:rPr sz="1150" b="1">
+                <a:solidFill>
+                  <a:srgbClr val="4A5D75"/>
+                </a:solidFill>
+                <a:latin typeface="Calibri"/>
+              </a:rPr>
+              <a:t>2.11   </a:t>
+            </a:r>
+            <a:r>
+              <a:rPr sz="1150">
+                <a:solidFill>
+                  <a:srgbClr val="1E334E"/>
+                </a:solidFill>
+                <a:latin typeface="Calibri"/>
+              </a:rPr>
+              <a:t>Proof: outperformance with downside protection</a:t>
+            </a:r>
+            <a:r>
+              <a:rPr sz="950" i="1">
+                <a:solidFill>
+                  <a:srgbClr val="5A636E"/>
+                </a:solidFill>
+                <a:latin typeface="Calibri"/>
+              </a:rPr>
+              <a:t>   (Figure 4)</a:t>
+            </a:r>
+          </a:p>
+          <a:p>
+            <a:pPr>
+              <a:lnSpc>
+                <a:spcPct val="104000"/>
+              </a:lnSpc>
+              <a:spcAft>
+                <a:spcPts val="700"/>
+              </a:spcAft>
+            </a:pPr>
+            <a:r>
+              <a:rPr sz="1150" b="1">
+                <a:solidFill>
+                  <a:srgbClr val="4A5D75"/>
+                </a:solidFill>
+                <a:latin typeface="Calibri"/>
+              </a:rPr>
+              <a:t>2.12   </a:t>
+            </a:r>
+            <a:r>
+              <a:rPr sz="1150">
+                <a:solidFill>
+                  <a:srgbClr val="1E334E"/>
+                </a:solidFill>
+                <a:latin typeface="Calibri"/>
+              </a:rPr>
+              <a:t>AIP Fund II — transactions (2015–present)</a:t>
+            </a:r>
+            <a:r>
+              <a:rPr sz="950" i="1">
+                <a:solidFill>
+                  <a:srgbClr val="5A636E"/>
+                </a:solidFill>
+                <a:latin typeface="Calibri"/>
+              </a:rPr>
+              <a:t>   (Table 4)</a:t>
+            </a:r>
+          </a:p>
+          <a:p>
+            <a:pPr>
+              <a:lnSpc>
+                <a:spcPct val="104000"/>
+              </a:lnSpc>
+              <a:spcAft>
+                <a:spcPts val="700"/>
+              </a:spcAft>
+            </a:pPr>
+            <a:r>
+              <a:rPr sz="1150" b="1">
+                <a:solidFill>
+                  <a:srgbClr val="4A5D75"/>
+                </a:solidFill>
+                <a:latin typeface="Calibri"/>
+              </a:rPr>
+              <a:t>2.13   </a:t>
+            </a:r>
+            <a:r>
+              <a:rPr sz="1150">
+                <a:solidFill>
+                  <a:srgbClr val="1E334E"/>
+                </a:solidFill>
+                <a:latin typeface="Calibri"/>
+              </a:rPr>
+              <a:t>Prior period — transactions (2006–2014)</a:t>
+            </a:r>
+            <a:r>
+              <a:rPr sz="950" i="1">
+                <a:solidFill>
+                  <a:srgbClr val="5A636E"/>
+                </a:solidFill>
+                <a:latin typeface="Calibri"/>
+              </a:rPr>
+              <a:t>   (Table 5)</a:t>
+            </a:r>
+          </a:p>
+          <a:p>
+            <a:pPr>
+              <a:lnSpc>
+                <a:spcPct val="104000"/>
+              </a:lnSpc>
+              <a:spcAft>
+                <a:spcPts val="700"/>
+              </a:spcAft>
+            </a:pPr>
+            <a:r>
+              <a:rPr sz="1150" b="1">
+                <a:solidFill>
+                  <a:srgbClr val="4A5D75"/>
+                </a:solidFill>
+                <a:latin typeface="Calibri"/>
+              </a:rPr>
+              <a:t>2.14   </a:t>
+            </a:r>
+            <a:r>
+              <a:rPr sz="1150">
+                <a:solidFill>
+                  <a:srgbClr val="1E334E"/>
+                </a:solidFill>
+                <a:latin typeface="Calibri"/>
+              </a:rPr>
+              <a:t>Independently validated: 20 years, net of every fee</a:t>
+            </a:r>
+          </a:p>
+          <a:p>
+            <a:pPr>
+              <a:lnSpc>
+                <a:spcPct val="104000"/>
+              </a:lnSpc>
+              <a:spcAft>
+                <a:spcPts val="700"/>
+              </a:spcAft>
+            </a:pPr>
+            <a:r>
+              <a:rPr sz="1150" b="1">
+                <a:solidFill>
+                  <a:srgbClr val="4A5D75"/>
+                </a:solidFill>
+                <a:latin typeface="Calibri"/>
+              </a:rPr>
+              <a:t>2.15   </a:t>
+            </a:r>
+            <a:r>
+              <a:rPr sz="1150">
+                <a:solidFill>
+                  <a:srgbClr val="1E334E"/>
+                </a:solidFill>
+                <a:latin typeface="Calibri"/>
+              </a:rPr>
+              <a:t>Repeatable and conviction-sized — not lucky</a:t>
+            </a:r>
+          </a:p>
+          <a:p>
+            <a:pPr>
+              <a:lnSpc>
+                <a:spcPct val="104000"/>
+              </a:lnSpc>
+              <a:spcAft>
+                <a:spcPts val="700"/>
+              </a:spcAft>
+            </a:pPr>
+            <a:r>
+              <a:rPr sz="1150" b="1">
+                <a:solidFill>
+                  <a:srgbClr val="4A5D75"/>
+                </a:solidFill>
+                <a:latin typeface="Calibri"/>
+              </a:rPr>
+              <a:t>2.16   </a:t>
+            </a:r>
+            <a:r>
+              <a:rPr sz="1150">
+                <a:solidFill>
+                  <a:srgbClr val="1E334E"/>
+                </a:solidFill>
+                <a:latin typeface="Calibri"/>
+              </a:rPr>
+              <a:t>Why a non-linear path won’t get you fired</a:t>
+            </a:r>
+          </a:p>
+          <a:p>
+            <a:pPr>
+              <a:lnSpc>
+                <a:spcPct val="104000"/>
+              </a:lnSpc>
+              <a:spcAft>
+                <a:spcPts val="700"/>
+              </a:spcAft>
+            </a:pPr>
+            <a:r>
+              <a:rPr sz="1150" b="1">
+                <a:solidFill>
+                  <a:srgbClr val="4A5D75"/>
+                </a:solidFill>
+                <a:latin typeface="Calibri"/>
+              </a:rPr>
+              <a:t>2.17   </a:t>
+            </a:r>
+            <a:r>
+              <a:rPr sz="1150">
+                <a:solidFill>
+                  <a:srgbClr val="1E334E"/>
+                </a:solidFill>
+                <a:latin typeface="Calibri"/>
+              </a:rPr>
+              <a:t>Responsible ownership, by construction</a:t>
             </a:r>
           </a:p>
         </p:txBody>

--- a/Athanase_Engaged_Ownership_Allocator_Deck.pptx
+++ b/Athanase_Engaged_Ownership_Allocator_Deck.pptx
@@ -146,7 +146,7 @@
             <a:r>
               <a:rPr sz="1100">
                 <a:solidFill>
-                  <a:srgbClr val="5A636E"/>
+                  <a:srgbClr val="64615E"/>
                 </a:solidFill>
               </a:rPr>
               <a:t>Figure 1.  “Probability decay”: strategy efficiency over a CEO cycle (%)</a:t>
@@ -179,7 +179,7 @@
           <c:spPr>
             <a:ln w="31750">
               <a:solidFill>
-                <a:srgbClr val="14253B"/>
+                <a:srgbClr val="152130"/>
               </a:solidFill>
             </a:ln>
           </c:spPr>
@@ -192,7 +192,7 @@
                 <a:pPr>
                   <a:defRPr sz="900">
                     <a:solidFill>
-                      <a:srgbClr val="1E334E"/>
+                      <a:srgbClr val="314359"/>
                     </a:solidFill>
                   </a:defRPr>
                 </a:pPr>
@@ -362,7 +362,7 @@
             <a:r>
               <a:rPr sz="1100">
                 <a:solidFill>
-                  <a:srgbClr val="5A636E"/>
+                  <a:srgbClr val="64615E"/>
                 </a:solidFill>
               </a:rPr>
               <a:t>Figure 3.  Same destination, different reported path (indexed to 100)</a:t>
@@ -395,7 +395,7 @@
           <c:spPr>
             <a:ln w="31750">
               <a:solidFill>
-                <a:srgbClr val="14253B"/>
+                <a:srgbClr val="152130"/>
               </a:solidFill>
             </a:ln>
           </c:spPr>
@@ -411,7 +411,7 @@
                 <a:pPr>
                   <a:defRPr sz="800">
                     <a:solidFill>
-                      <a:srgbClr val="1E334E"/>
+                      <a:srgbClr val="314359"/>
                     </a:solidFill>
                   </a:defRPr>
                 </a:pPr>
@@ -540,7 +540,7 @@
           <c:spPr>
             <a:ln w="25400">
               <a:solidFill>
-                <a:srgbClr val="8A99AB"/>
+                <a:srgbClr val="6F8990"/>
               </a:solidFill>
               <a:prstDash val="sysDash"/>
             </a:ln>
@@ -744,7 +744,7 @@
             <a:r>
               <a:rPr sz="1200">
                 <a:solidFill>
-                  <a:srgbClr val="5A636E"/>
+                  <a:srgbClr val="64615E"/>
                 </a:solidFill>
               </a:rPr>
               <a:t>Figure 4.  Average monthly return (%)</a:t>
@@ -776,7 +776,7 @@
           </c:tx>
           <c:spPr>
             <a:solidFill>
-              <a:srgbClr val="14253B"/>
+              <a:srgbClr val="152130"/>
             </a:solidFill>
           </c:spPr>
           <c:cat>
@@ -831,7 +831,7 @@
           </c:tx>
           <c:spPr>
             <a:solidFill>
-              <a:srgbClr val="8A99AB"/>
+              <a:srgbClr val="6F8990"/>
             </a:solidFill>
           </c:spPr>
           <c:cat>
@@ -879,7 +879,7 @@
               <a:pPr>
                 <a:defRPr sz="900">
                   <a:solidFill>
-                    <a:srgbClr val="333840"/>
+                    <a:srgbClr val="3C3937"/>
                   </a:solidFill>
                 </a:defRPr>
               </a:pPr>
@@ -915,7 +915,7 @@
             <a:pPr>
               <a:defRPr sz="1000">
                 <a:solidFill>
-                  <a:srgbClr val="333840"/>
+                  <a:srgbClr val="3C3937"/>
                 </a:solidFill>
               </a:defRPr>
             </a:pPr>
@@ -944,7 +944,7 @@
             <a:pPr>
               <a:defRPr sz="1000">
                 <a:solidFill>
-                  <a:srgbClr val="333840"/>
+                  <a:srgbClr val="3C3937"/>
                 </a:solidFill>
               </a:defRPr>
             </a:pPr>
@@ -3981,7 +3981,7 @@
             <a:avLst/>
           </a:prstGeom>
           <a:solidFill>
-            <a:srgbClr val="14253B"/>
+            <a:srgbClr val="152130"/>
           </a:solidFill>
           <a:ln>
             <a:noFill/>
@@ -4049,7 +4049,7 @@
             <a:avLst/>
           </a:prstGeom>
           <a:solidFill>
-            <a:srgbClr val="8A99AB"/>
+            <a:srgbClr val="6F8990"/>
           </a:solidFill>
           <a:ln>
             <a:noFill/>
@@ -4130,7 +4130,7 @@
             <a:r>
               <a:rPr sz="2400" b="0" i="1">
                 <a:solidFill>
-                  <a:srgbClr val="C9D3DD"/>
+                  <a:srgbClr val="E2E5E9"/>
                 </a:solidFill>
                 <a:latin typeface="Times New Roman"/>
               </a:rPr>
@@ -4172,9 +4172,9 @@
             <a:r>
               <a:rPr sz="1300" b="0" i="0">
                 <a:solidFill>
-                  <a:srgbClr val="8A99AB"/>
-                </a:solidFill>
-                <a:latin typeface="Calibri"/>
+                  <a:srgbClr val="6F8990"/>
+                </a:solidFill>
+                <a:latin typeface="Arial"/>
               </a:rPr>
               <a:t>An allocator briefing  ·  May 2026</a:t>
             </a:r>
@@ -4300,9 +4300,9 @@
             <a:r>
               <a:rPr sz="1100" b="0" i="0">
                 <a:solidFill>
-                  <a:srgbClr val="4A5D75"/>
-                </a:solidFill>
-                <a:latin typeface="Calibri"/>
+                  <a:srgbClr val="6F8990"/>
+                </a:solidFill>
+                <a:latin typeface="Arial"/>
               </a:rPr>
               <a:t>Overview</a:t>
             </a:r>
@@ -4324,7 +4324,7 @@
             <a:avLst/>
           </a:prstGeom>
           <a:solidFill>
-            <a:srgbClr val="F1F2F4"/>
+            <a:srgbClr val="F6F7F9"/>
           </a:solidFill>
           <a:ln>
             <a:noFill/>
@@ -4386,7 +4386,7 @@
             <a:r>
               <a:rPr sz="3000" b="0" i="0">
                 <a:solidFill>
-                  <a:srgbClr val="1E334E"/>
+                  <a:srgbClr val="314359"/>
                 </a:solidFill>
                 <a:latin typeface="Times New Roman"/>
               </a:rPr>
@@ -4428,9 +4428,9 @@
             <a:r>
               <a:rPr sz="850" b="0" i="0">
                 <a:solidFill>
-                  <a:srgbClr val="9AA4B0"/>
-                </a:solidFill>
-                <a:latin typeface="Calibri"/>
+                  <a:srgbClr val="9A958E"/>
+                </a:solidFill>
+                <a:latin typeface="Arial"/>
               </a:rPr>
               <a:t>Strictly confidential          7</a:t>
             </a:r>
@@ -4452,7 +4452,7 @@
             <a:avLst/>
           </a:prstGeom>
           <a:solidFill>
-            <a:srgbClr val="F1F2F4"/>
+            <a:srgbClr val="F6F7F9"/>
           </a:solidFill>
           <a:ln>
             <a:noFill/>
@@ -4514,7 +4514,7 @@
             <a:r>
               <a:rPr sz="4000" b="0" i="0">
                 <a:solidFill>
-                  <a:srgbClr val="1E334E"/>
+                  <a:srgbClr val="314359"/>
                 </a:solidFill>
                 <a:latin typeface="Times New Roman"/>
               </a:rPr>
@@ -4533,9 +4533,9 @@
             <a:r>
               <a:rPr sz="1200" b="0" i="0">
                 <a:solidFill>
-                  <a:srgbClr val="5A636E"/>
-                </a:solidFill>
-                <a:latin typeface="Calibri"/>
+                  <a:srgbClr val="64615E"/>
+                </a:solidFill>
+                <a:latin typeface="Arial"/>
               </a:rPr>
               <a:t>investments as</a:t>
             </a:r>
@@ -4552,9 +4552,9 @@
             <a:r>
               <a:rPr sz="1200" b="0" i="0">
                 <a:solidFill>
-                  <a:srgbClr val="5A636E"/>
-                </a:solidFill>
-                <a:latin typeface="Calibri"/>
+                  <a:srgbClr val="64615E"/>
+                </a:solidFill>
+                <a:latin typeface="Arial"/>
               </a:rPr>
               <a:t>engaged owners</a:t>
             </a:r>
@@ -4576,7 +4576,7 @@
             <a:avLst/>
           </a:prstGeom>
           <a:solidFill>
-            <a:srgbClr val="F1F2F4"/>
+            <a:srgbClr val="F6F7F9"/>
           </a:solidFill>
           <a:ln>
             <a:noFill/>
@@ -4638,7 +4638,7 @@
             <a:r>
               <a:rPr sz="4000" b="0" i="0">
                 <a:solidFill>
-                  <a:srgbClr val="1E334E"/>
+                  <a:srgbClr val="314359"/>
                 </a:solidFill>
                 <a:latin typeface="Times New Roman"/>
               </a:rPr>
@@ -4657,9 +4657,9 @@
             <a:r>
               <a:rPr sz="1200" b="0" i="0">
                 <a:solidFill>
-                  <a:srgbClr val="5A636E"/>
-                </a:solidFill>
-                <a:latin typeface="Calibri"/>
+                  <a:srgbClr val="64615E"/>
+                </a:solidFill>
+                <a:latin typeface="Arial"/>
               </a:rPr>
               <a:t>net annual IRR</a:t>
             </a:r>
@@ -4676,9 +4676,9 @@
             <a:r>
               <a:rPr sz="1200" b="0" i="0">
                 <a:solidFill>
-                  <a:srgbClr val="5A636E"/>
-                </a:solidFill>
-                <a:latin typeface="Calibri"/>
+                  <a:srgbClr val="64615E"/>
+                </a:solidFill>
+                <a:latin typeface="Arial"/>
               </a:rPr>
               <a:t>since inception</a:t>
             </a:r>
@@ -4700,7 +4700,7 @@
             <a:avLst/>
           </a:prstGeom>
           <a:solidFill>
-            <a:srgbClr val="F1F2F4"/>
+            <a:srgbClr val="F6F7F9"/>
           </a:solidFill>
           <a:ln>
             <a:noFill/>
@@ -4762,7 +4762,7 @@
             <a:r>
               <a:rPr sz="4000" b="0" i="0">
                 <a:solidFill>
-                  <a:srgbClr val="1E334E"/>
+                  <a:srgbClr val="314359"/>
                 </a:solidFill>
                 <a:latin typeface="Times New Roman"/>
               </a:rPr>
@@ -4781,9 +4781,9 @@
             <a:r>
               <a:rPr sz="1200" b="0" i="0">
                 <a:solidFill>
-                  <a:srgbClr val="5A636E"/>
-                </a:solidFill>
-                <a:latin typeface="Calibri"/>
+                  <a:srgbClr val="64615E"/>
+                </a:solidFill>
+                <a:latin typeface="Arial"/>
               </a:rPr>
               <a:t>team working</a:t>
             </a:r>
@@ -4800,9 +4800,9 @@
             <a:r>
               <a:rPr sz="1200" b="0" i="0">
                 <a:solidFill>
-                  <a:srgbClr val="5A636E"/>
-                </a:solidFill>
-                <a:latin typeface="Calibri"/>
+                  <a:srgbClr val="64615E"/>
+                </a:solidFill>
+                <a:latin typeface="Arial"/>
               </a:rPr>
               <a:t>together</a:t>
             </a:r>
@@ -4824,7 +4824,7 @@
             <a:avLst/>
           </a:prstGeom>
           <a:solidFill>
-            <a:srgbClr val="F1F2F4"/>
+            <a:srgbClr val="F6F7F9"/>
           </a:solidFill>
           <a:ln>
             <a:noFill/>
@@ -4886,7 +4886,7 @@
             <a:r>
               <a:rPr sz="4000" b="0" i="0">
                 <a:solidFill>
-                  <a:srgbClr val="1E334E"/>
+                  <a:srgbClr val="314359"/>
                 </a:solidFill>
                 <a:latin typeface="Times New Roman"/>
               </a:rPr>
@@ -4905,9 +4905,9 @@
             <a:r>
               <a:rPr sz="1200" b="0" i="0">
                 <a:solidFill>
-                  <a:srgbClr val="5A636E"/>
-                </a:solidFill>
-                <a:latin typeface="Calibri"/>
+                  <a:srgbClr val="64615E"/>
+                </a:solidFill>
+                <a:latin typeface="Arial"/>
               </a:rPr>
               <a:t>minimum annual</a:t>
             </a:r>
@@ -4924,9 +4924,9 @@
             <a:r>
               <a:rPr sz="1200" b="0" i="0">
                 <a:solidFill>
-                  <a:srgbClr val="5A636E"/>
-                </a:solidFill>
-                <a:latin typeface="Calibri"/>
+                  <a:srgbClr val="64615E"/>
+                </a:solidFill>
+                <a:latin typeface="Arial"/>
               </a:rPr>
               <a:t>net return*</a:t>
             </a:r>
@@ -4966,27 +4966,27 @@
             <a:r>
               <a:rPr sz="1500" b="1">
                 <a:solidFill>
-                  <a:srgbClr val="4A5D75"/>
-                </a:solidFill>
-                <a:latin typeface="Calibri"/>
+                  <a:srgbClr val="556A83"/>
+                </a:solidFill>
+                <a:latin typeface="Arial"/>
               </a:rPr>
               <a:t>›  </a:t>
             </a:r>
             <a:r>
               <a:rPr sz="1500" b="1">
                 <a:solidFill>
-                  <a:srgbClr val="1E334E"/>
-                </a:solidFill>
-                <a:latin typeface="Calibri"/>
+                  <a:srgbClr val="314359"/>
+                </a:solidFill>
+                <a:latin typeface="Arial"/>
               </a:rPr>
               <a:t>Average net return of 18.6%</a:t>
             </a:r>
             <a:r>
               <a:rPr sz="1500">
                 <a:solidFill>
-                  <a:srgbClr val="333840"/>
-                </a:solidFill>
-                <a:latin typeface="Calibri"/>
+                  <a:srgbClr val="3C3937"/>
+                </a:solidFill>
+                <a:latin typeface="Arial"/>
               </a:rPr>
               <a:t>  (17.1% vs MSCI IMI 7.6% since inception), regardless of entry month.</a:t>
             </a:r>
@@ -5003,27 +5003,27 @@
             <a:r>
               <a:rPr sz="1500" b="1">
                 <a:solidFill>
-                  <a:srgbClr val="4A5D75"/>
-                </a:solidFill>
-                <a:latin typeface="Calibri"/>
+                  <a:srgbClr val="556A83"/>
+                </a:solidFill>
+                <a:latin typeface="Arial"/>
               </a:rPr>
               <a:t>›  </a:t>
             </a:r>
             <a:r>
               <a:rPr sz="1500" b="1">
                 <a:solidFill>
-                  <a:srgbClr val="1E334E"/>
-                </a:solidFill>
-                <a:latin typeface="Calibri"/>
+                  <a:srgbClr val="314359"/>
+                </a:solidFill>
+                <a:latin typeface="Arial"/>
               </a:rPr>
               <a:t>+14.5% EBITA growth</a:t>
             </a:r>
             <a:r>
               <a:rPr sz="1500">
                 <a:solidFill>
-                  <a:srgbClr val="333840"/>
-                </a:solidFill>
-                <a:latin typeface="Calibri"/>
+                  <a:srgbClr val="3C3937"/>
+                </a:solidFill>
+                <a:latin typeface="Arial"/>
               </a:rPr>
               <a:t>  in portfolio companies during the ownership period.</a:t>
             </a:r>
@@ -5040,27 +5040,27 @@
             <a:r>
               <a:rPr sz="1500" b="1">
                 <a:solidFill>
-                  <a:srgbClr val="4A5D75"/>
-                </a:solidFill>
-                <a:latin typeface="Calibri"/>
+                  <a:srgbClr val="556A83"/>
+                </a:solidFill>
+                <a:latin typeface="Arial"/>
               </a:rPr>
               <a:t>›  </a:t>
             </a:r>
             <a:r>
               <a:rPr sz="1500" b="1">
                 <a:solidFill>
-                  <a:srgbClr val="1E334E"/>
-                </a:solidFill>
-                <a:latin typeface="Calibri"/>
+                  <a:srgbClr val="314359"/>
+                </a:solidFill>
+                <a:latin typeface="Arial"/>
               </a:rPr>
               <a:t>+0.2% in down markets</a:t>
             </a:r>
             <a:r>
               <a:rPr sz="1500">
                 <a:solidFill>
-                  <a:srgbClr val="333840"/>
-                </a:solidFill>
-                <a:latin typeface="Calibri"/>
+                  <a:srgbClr val="3C3937"/>
+                </a:solidFill>
+                <a:latin typeface="Arial"/>
               </a:rPr>
               <a:t>  versus the market at –1.7% — downside protection when it matters most.</a:t>
             </a:r>
@@ -5100,9 +5100,9 @@
             <a:r>
               <a:rPr sz="900" b="0" i="0">
                 <a:solidFill>
-                  <a:srgbClr val="9AA4B0"/>
-                </a:solidFill>
-                <a:latin typeface="Calibri"/>
+                  <a:srgbClr val="9A958E"/>
+                </a:solidFill>
+                <a:latin typeface="Arial"/>
               </a:rPr>
               <a:t>*Invested any month since 2006 and held to Dec 2025. Inception 2015-02-23.</a:t>
             </a:r>
@@ -5228,9 +5228,9 @@
             <a:r>
               <a:rPr sz="1100" b="0" i="0">
                 <a:solidFill>
-                  <a:srgbClr val="4A5D75"/>
-                </a:solidFill>
-                <a:latin typeface="Calibri"/>
+                  <a:srgbClr val="6F8990"/>
+                </a:solidFill>
+                <a:latin typeface="Arial"/>
               </a:rPr>
               <a:t>Experience</a:t>
             </a:r>
@@ -5252,7 +5252,7 @@
             <a:avLst/>
           </a:prstGeom>
           <a:solidFill>
-            <a:srgbClr val="F1F2F4"/>
+            <a:srgbClr val="F6F7F9"/>
           </a:solidFill>
           <a:ln>
             <a:noFill/>
@@ -5314,7 +5314,7 @@
             <a:r>
               <a:rPr sz="3000" b="0" i="0">
                 <a:solidFill>
-                  <a:srgbClr val="1E334E"/>
+                  <a:srgbClr val="314359"/>
                 </a:solidFill>
                 <a:latin typeface="Times New Roman"/>
               </a:rPr>
@@ -5356,9 +5356,9 @@
             <a:r>
               <a:rPr sz="1300" b="0" i="1">
                 <a:solidFill>
-                  <a:srgbClr val="5A636E"/>
-                </a:solidFill>
-                <a:latin typeface="Calibri"/>
+                  <a:srgbClr val="64615E"/>
+                </a:solidFill>
+                <a:latin typeface="Arial"/>
               </a:rPr>
               <a:t>In a world of specialists, a rare unit that has the operating experience to control the outcome.</a:t>
             </a:r>
@@ -5398,9 +5398,9 @@
             <a:r>
               <a:rPr sz="850" b="0" i="0">
                 <a:solidFill>
-                  <a:srgbClr val="9AA4B0"/>
-                </a:solidFill>
-                <a:latin typeface="Calibri"/>
+                  <a:srgbClr val="9A958E"/>
+                </a:solidFill>
+                <a:latin typeface="Arial"/>
               </a:rPr>
               <a:t>Strictly confidential          8</a:t>
             </a:r>
@@ -5422,7 +5422,7 @@
             <a:avLst/>
           </a:prstGeom>
           <a:solidFill>
-            <a:srgbClr val="8A99AB"/>
+            <a:srgbClr val="6F8990"/>
           </a:solidFill>
           <a:ln>
             <a:noFill/>
@@ -5484,7 +5484,7 @@
             <a:r>
               <a:rPr sz="1500" b="1" i="0">
                 <a:solidFill>
-                  <a:srgbClr val="1E334E"/>
+                  <a:srgbClr val="314359"/>
                 </a:solidFill>
                 <a:latin typeface="Times New Roman"/>
               </a:rPr>
@@ -5508,7 +5508,7 @@
             <a:avLst/>
           </a:prstGeom>
           <a:solidFill>
-            <a:srgbClr val="14253B"/>
+            <a:srgbClr val="152130"/>
           </a:solidFill>
           <a:ln w="19050">
             <a:solidFill>
@@ -5572,9 +5572,9 @@
             <a:r>
               <a:rPr sz="1200" b="0" i="0">
                 <a:solidFill>
-                  <a:srgbClr val="4A5D75"/>
-                </a:solidFill>
-                <a:latin typeface="Calibri"/>
+                  <a:srgbClr val="556A83"/>
+                </a:solidFill>
+                <a:latin typeface="Arial"/>
               </a:rPr>
               <a:t>Öresund</a:t>
             </a:r>
@@ -5614,7 +5614,7 @@
             <a:r>
               <a:rPr sz="1500" b="1" i="0">
                 <a:solidFill>
-                  <a:srgbClr val="1E334E"/>
+                  <a:srgbClr val="314359"/>
                 </a:solidFill>
                 <a:latin typeface="Times New Roman"/>
               </a:rPr>
@@ -5638,7 +5638,7 @@
             <a:avLst/>
           </a:prstGeom>
           <a:solidFill>
-            <a:srgbClr val="14253B"/>
+            <a:srgbClr val="152130"/>
           </a:solidFill>
           <a:ln w="19050">
             <a:solidFill>
@@ -5702,9 +5702,9 @@
             <a:r>
               <a:rPr sz="1200" b="0" i="0">
                 <a:solidFill>
-                  <a:srgbClr val="4A5D75"/>
-                </a:solidFill>
-                <a:latin typeface="Calibri"/>
+                  <a:srgbClr val="556A83"/>
+                </a:solidFill>
+                <a:latin typeface="Arial"/>
               </a:rPr>
               <a:t>Custos</a:t>
             </a:r>
@@ -5744,7 +5744,7 @@
             <a:r>
               <a:rPr sz="1500" b="1" i="0">
                 <a:solidFill>
-                  <a:srgbClr val="1E334E"/>
+                  <a:srgbClr val="314359"/>
                 </a:solidFill>
                 <a:latin typeface="Times New Roman"/>
               </a:rPr>
@@ -5768,7 +5768,7 @@
             <a:avLst/>
           </a:prstGeom>
           <a:solidFill>
-            <a:srgbClr val="14253B"/>
+            <a:srgbClr val="152130"/>
           </a:solidFill>
           <a:ln w="19050">
             <a:solidFill>
@@ -5832,9 +5832,9 @@
             <a:r>
               <a:rPr sz="1200" b="0" i="0">
                 <a:solidFill>
-                  <a:srgbClr val="4A5D75"/>
-                </a:solidFill>
-                <a:latin typeface="Calibri"/>
+                  <a:srgbClr val="556A83"/>
+                </a:solidFill>
+                <a:latin typeface="Arial"/>
               </a:rPr>
               <a:t>Creades</a:t>
             </a:r>
@@ -5874,7 +5874,7 @@
             <a:r>
               <a:rPr sz="1500" b="1" i="0">
                 <a:solidFill>
-                  <a:srgbClr val="1E334E"/>
+                  <a:srgbClr val="314359"/>
                 </a:solidFill>
                 <a:latin typeface="Times New Roman"/>
               </a:rPr>
@@ -5898,7 +5898,7 @@
             <a:avLst/>
           </a:prstGeom>
           <a:solidFill>
-            <a:srgbClr val="14253B"/>
+            <a:srgbClr val="152130"/>
           </a:solidFill>
           <a:ln w="19050">
             <a:solidFill>
@@ -5962,9 +5962,9 @@
             <a:r>
               <a:rPr sz="1200" b="0" i="0">
                 <a:solidFill>
-                  <a:srgbClr val="4A5D75"/>
-                </a:solidFill>
-                <a:latin typeface="Calibri"/>
+                  <a:srgbClr val="556A83"/>
+                </a:solidFill>
+                <a:latin typeface="Arial"/>
               </a:rPr>
               <a:t>Athanase</a:t>
             </a:r>
@@ -6004,27 +6004,27 @@
             <a:r>
               <a:rPr sz="1450" b="1">
                 <a:solidFill>
-                  <a:srgbClr val="4A5D75"/>
-                </a:solidFill>
-                <a:latin typeface="Calibri"/>
+                  <a:srgbClr val="556A83"/>
+                </a:solidFill>
+                <a:latin typeface="Arial"/>
               </a:rPr>
               <a:t>›  </a:t>
             </a:r>
             <a:r>
               <a:rPr sz="1450" b="1">
                 <a:solidFill>
-                  <a:srgbClr val="1E334E"/>
-                </a:solidFill>
-                <a:latin typeface="Calibri"/>
+                  <a:srgbClr val="314359"/>
+                </a:solidFill>
+                <a:latin typeface="Arial"/>
               </a:rPr>
               <a:t>40+ companies managed,</a:t>
             </a:r>
             <a:r>
               <a:rPr sz="1450">
                 <a:solidFill>
-                  <a:srgbClr val="333840"/>
-                </a:solidFill>
-                <a:latin typeface="Calibri"/>
+                  <a:srgbClr val="3C3937"/>
+                </a:solidFill>
+                <a:latin typeface="Arial"/>
               </a:rPr>
               <a:t>  with a proven ability to tell a “strong core” from a “prestige trap”.</a:t>
             </a:r>
@@ -6041,27 +6041,27 @@
             <a:r>
               <a:rPr sz="1450" b="1">
                 <a:solidFill>
-                  <a:srgbClr val="4A5D75"/>
-                </a:solidFill>
-                <a:latin typeface="Calibri"/>
+                  <a:srgbClr val="556A83"/>
+                </a:solidFill>
+                <a:latin typeface="Arial"/>
               </a:rPr>
               <a:t>›  </a:t>
             </a:r>
             <a:r>
               <a:rPr sz="1450" b="1">
                 <a:solidFill>
-                  <a:srgbClr val="1E334E"/>
-                </a:solidFill>
-                <a:latin typeface="Calibri"/>
+                  <a:srgbClr val="314359"/>
+                </a:solidFill>
+                <a:latin typeface="Arial"/>
               </a:rPr>
               <a:t>30+ public board seats</a:t>
             </a:r>
             <a:r>
               <a:rPr sz="1450">
                 <a:solidFill>
-                  <a:srgbClr val="333840"/>
-                </a:solidFill>
-                <a:latin typeface="Calibri"/>
+                  <a:srgbClr val="3C3937"/>
+                </a:solidFill>
+                <a:latin typeface="Arial"/>
               </a:rPr>
               <a:t>  — real experience mandating pivots and protecting shareholder interests, not writing engagement letters.</a:t>
             </a:r>
@@ -6078,27 +6078,27 @@
             <a:r>
               <a:rPr sz="1450" b="1">
                 <a:solidFill>
-                  <a:srgbClr val="4A5D75"/>
-                </a:solidFill>
-                <a:latin typeface="Calibri"/>
+                  <a:srgbClr val="556A83"/>
+                </a:solidFill>
+                <a:latin typeface="Arial"/>
               </a:rPr>
               <a:t>›  </a:t>
             </a:r>
             <a:r>
               <a:rPr sz="1450" b="1">
                 <a:solidFill>
-                  <a:srgbClr val="1E334E"/>
-                </a:solidFill>
-                <a:latin typeface="Calibri"/>
+                  <a:srgbClr val="314359"/>
+                </a:solidFill>
+                <a:latin typeface="Arial"/>
               </a:rPr>
               <a:t>A dual lens:</a:t>
             </a:r>
             <a:r>
               <a:rPr sz="1450">
                 <a:solidFill>
-                  <a:srgbClr val="333840"/>
-                </a:solidFill>
-                <a:latin typeface="Calibri"/>
+                  <a:srgbClr val="3C3937"/>
+                </a:solidFill>
+                <a:latin typeface="Arial"/>
               </a:rPr>
               <a:t>  a forensic investing lens to find the value and a C-suite operating lens that understands the “how” of execution.</a:t>
             </a:r>
@@ -6115,27 +6115,27 @@
             <a:r>
               <a:rPr sz="1450" b="1">
                 <a:solidFill>
-                  <a:srgbClr val="4A5D75"/>
-                </a:solidFill>
-                <a:latin typeface="Calibri"/>
+                  <a:srgbClr val="556A83"/>
+                </a:solidFill>
+                <a:latin typeface="Arial"/>
               </a:rPr>
               <a:t>›  </a:t>
             </a:r>
             <a:r>
               <a:rPr sz="1450" b="1">
                 <a:solidFill>
-                  <a:srgbClr val="1E334E"/>
-                </a:solidFill>
-                <a:latin typeface="Calibri"/>
+                  <a:srgbClr val="314359"/>
+                </a:solidFill>
+                <a:latin typeface="Arial"/>
               </a:rPr>
               <a:t>Skin in the game.</a:t>
             </a:r>
             <a:r>
               <a:rPr sz="1450">
                 <a:solidFill>
-                  <a:srgbClr val="333840"/>
-                </a:solidFill>
-                <a:latin typeface="Calibri"/>
+                  <a:srgbClr val="3C3937"/>
+                </a:solidFill>
+                <a:latin typeface="Arial"/>
               </a:rPr>
               <a:t>  The team uses Athanase as its own investment vehicle and shares in the success economics.</a:t>
             </a:r>
@@ -6152,27 +6152,27 @@
             <a:r>
               <a:rPr sz="1450" b="1">
                 <a:solidFill>
-                  <a:srgbClr val="4A5D75"/>
-                </a:solidFill>
-                <a:latin typeface="Calibri"/>
+                  <a:srgbClr val="556A83"/>
+                </a:solidFill>
+                <a:latin typeface="Arial"/>
               </a:rPr>
               <a:t>›  </a:t>
             </a:r>
             <a:r>
               <a:rPr sz="1450" b="1">
                 <a:solidFill>
-                  <a:srgbClr val="1E334E"/>
-                </a:solidFill>
-                <a:latin typeface="Calibri"/>
+                  <a:srgbClr val="314359"/>
+                </a:solidFill>
+                <a:latin typeface="Arial"/>
               </a:rPr>
               <a:t>Institutional memory.</a:t>
             </a:r>
             <a:r>
               <a:rPr sz="1450">
                 <a:solidFill>
-                  <a:srgbClr val="333840"/>
-                </a:solidFill>
-                <a:latin typeface="Calibri"/>
+                  <a:srgbClr val="3C3937"/>
+                </a:solidFill>
+                <a:latin typeface="Arial"/>
               </a:rPr>
               <a:t>  Multiple market cycles together eliminate key-person risk and prevent repeating historical mistakes.</a:t>
             </a:r>
@@ -6298,9 +6298,9 @@
             <a:r>
               <a:rPr sz="1100" b="0" i="0">
                 <a:solidFill>
-                  <a:srgbClr val="4A5D75"/>
-                </a:solidFill>
-                <a:latin typeface="Calibri"/>
+                  <a:srgbClr val="6F8990"/>
+                </a:solidFill>
+                <a:latin typeface="Arial"/>
               </a:rPr>
               <a:t>Market Opportunity</a:t>
             </a:r>
@@ -6340,9 +6340,9 @@
             <a:r>
               <a:rPr sz="1100" b="1" i="0">
                 <a:solidFill>
-                  <a:srgbClr val="4A5D75"/>
-                </a:solidFill>
-                <a:latin typeface="Calibri"/>
+                  <a:srgbClr val="6F8990"/>
+                </a:solidFill>
+                <a:latin typeface="Arial"/>
               </a:rPr>
               <a:t>Figure 1</a:t>
             </a:r>
@@ -6364,7 +6364,7 @@
             <a:avLst/>
           </a:prstGeom>
           <a:solidFill>
-            <a:srgbClr val="F1F2F4"/>
+            <a:srgbClr val="F6F7F9"/>
           </a:solidFill>
           <a:ln>
             <a:noFill/>
@@ -6426,7 +6426,7 @@
             <a:r>
               <a:rPr sz="3000" b="0" i="0">
                 <a:solidFill>
-                  <a:srgbClr val="1E334E"/>
+                  <a:srgbClr val="314359"/>
                 </a:solidFill>
                 <a:latin typeface="Times New Roman"/>
               </a:rPr>
@@ -6468,9 +6468,9 @@
             <a:r>
               <a:rPr sz="1300" b="0" i="1">
                 <a:solidFill>
-                  <a:srgbClr val="5A636E"/>
-                </a:solidFill>
-                <a:latin typeface="Calibri"/>
+                  <a:srgbClr val="64615E"/>
+                </a:solidFill>
+                <a:latin typeface="Arial"/>
               </a:rPr>
               <a:t>Corporate decay is structural — it continuously recreates low-risk, high-return entry points.</a:t>
             </a:r>
@@ -6510,9 +6510,9 @@
             <a:r>
               <a:rPr sz="850" b="0" i="0">
                 <a:solidFill>
-                  <a:srgbClr val="9AA4B0"/>
-                </a:solidFill>
-                <a:latin typeface="Calibri"/>
+                  <a:srgbClr val="9A958E"/>
+                </a:solidFill>
+                <a:latin typeface="Arial"/>
               </a:rPr>
               <a:t>Strictly confidential          9</a:t>
             </a:r>
@@ -6552,27 +6552,27 @@
             <a:r>
               <a:rPr sz="1350" b="1">
                 <a:solidFill>
-                  <a:srgbClr val="4A5D75"/>
-                </a:solidFill>
-                <a:latin typeface="Calibri"/>
+                  <a:srgbClr val="556A83"/>
+                </a:solidFill>
+                <a:latin typeface="Arial"/>
               </a:rPr>
               <a:t>›  </a:t>
             </a:r>
             <a:r>
               <a:rPr sz="1350" b="1">
                 <a:solidFill>
-                  <a:srgbClr val="1E334E"/>
-                </a:solidFill>
-                <a:latin typeface="Calibri"/>
+                  <a:srgbClr val="314359"/>
+                </a:solidFill>
+                <a:latin typeface="Arial"/>
               </a:rPr>
               <a:t>Duration mismatch.</a:t>
             </a:r>
             <a:r>
               <a:rPr sz="1350">
                 <a:solidFill>
-                  <a:srgbClr val="333840"/>
-                </a:solidFill>
-                <a:latin typeface="Calibri"/>
+                  <a:srgbClr val="3C3937"/>
+                </a:solidFill>
+                <a:latin typeface="Arial"/>
               </a:rPr>
               <a:t>  CEOs run 7–8 year defensive cycles while moats erode at hyper-speed; an 80%-correct strategy decays to ~50% efficient.</a:t>
             </a:r>
@@ -6589,27 +6589,27 @@
             <a:r>
               <a:rPr sz="1350" b="1">
                 <a:solidFill>
-                  <a:srgbClr val="4A5D75"/>
-                </a:solidFill>
-                <a:latin typeface="Calibri"/>
+                  <a:srgbClr val="556A83"/>
+                </a:solidFill>
+                <a:latin typeface="Arial"/>
               </a:rPr>
               <a:t>›  </a:t>
             </a:r>
             <a:r>
               <a:rPr sz="1350" b="1">
                 <a:solidFill>
-                  <a:srgbClr val="1E334E"/>
-                </a:solidFill>
-                <a:latin typeface="Calibri"/>
+                  <a:srgbClr val="314359"/>
+                </a:solidFill>
+                <a:latin typeface="Arial"/>
               </a:rPr>
               <a:t>The prestige trap.</a:t>
             </a:r>
             <a:r>
               <a:rPr sz="1350">
                 <a:solidFill>
-                  <a:srgbClr val="333840"/>
-                </a:solidFill>
-                <a:latin typeface="Calibri"/>
+                  <a:srgbClr val="3C3937"/>
+                </a:solidFill>
+                <a:latin typeface="Arial"/>
               </a:rPr>
               <a:t>  Empire-building and the sunk-cost fallacy lead management to double down on unprofitable ventures.</a:t>
             </a:r>
@@ -6626,27 +6626,27 @@
             <a:r>
               <a:rPr sz="1350" b="1">
                 <a:solidFill>
-                  <a:srgbClr val="4A5D75"/>
-                </a:solidFill>
-                <a:latin typeface="Calibri"/>
+                  <a:srgbClr val="556A83"/>
+                </a:solidFill>
+                <a:latin typeface="Arial"/>
               </a:rPr>
               <a:t>›  </a:t>
             </a:r>
             <a:r>
               <a:rPr sz="1350" b="1">
                 <a:solidFill>
-                  <a:srgbClr val="1E334E"/>
-                </a:solidFill>
-                <a:latin typeface="Calibri"/>
+                  <a:srgbClr val="314359"/>
+                </a:solidFill>
+                <a:latin typeface="Arial"/>
               </a:rPr>
               <a:t>Shareholder exhaustion.</a:t>
             </a:r>
             <a:r>
               <a:rPr sz="1350">
                 <a:solidFill>
-                  <a:srgbClr val="333840"/>
-                </a:solidFill>
-                <a:latin typeface="Calibri"/>
+                  <a:srgbClr val="3C3937"/>
+                </a:solidFill>
+                <a:latin typeface="Arial"/>
               </a:rPr>
               <a:t>  As patience runs out, price hits a long-term low and liquidity dries up — Athanase becomes the “buyer of last resort” at a discount.</a:t>
             </a:r>
@@ -6663,27 +6663,27 @@
             <a:r>
               <a:rPr sz="1350" b="1">
                 <a:solidFill>
-                  <a:srgbClr val="4A5D75"/>
-                </a:solidFill>
-                <a:latin typeface="Calibri"/>
+                  <a:srgbClr val="556A83"/>
+                </a:solidFill>
+                <a:latin typeface="Arial"/>
               </a:rPr>
               <a:t>›  </a:t>
             </a:r>
             <a:r>
               <a:rPr sz="1350" b="1">
                 <a:solidFill>
-                  <a:srgbClr val="1E334E"/>
-                </a:solidFill>
-                <a:latin typeface="Calibri"/>
+                  <a:srgbClr val="314359"/>
+                </a:solidFill>
+                <a:latin typeface="Arial"/>
               </a:rPr>
               <a:t>Low competition.</a:t>
             </a:r>
             <a:r>
               <a:rPr sz="1350">
                 <a:solidFill>
-                  <a:srgbClr val="333840"/>
-                </a:solidFill>
-                <a:latin typeface="Calibri"/>
+                  <a:srgbClr val="3C3937"/>
+                </a:solidFill>
+                <a:latin typeface="Arial"/>
               </a:rPr>
               <a:t>  Passive buys the most expensive names; active managers wait for proof; PE needs 10x the capital — leaving these bargains open.</a:t>
             </a:r>
@@ -6741,9 +6741,9 @@
             <a:r>
               <a:rPr sz="1000" b="0" i="1">
                 <a:solidFill>
-                  <a:srgbClr val="9AA4B0"/>
-                </a:solidFill>
-                <a:latin typeface="Calibri"/>
+                  <a:srgbClr val="9A958E"/>
+                </a:solidFill>
+                <a:latin typeface="Arial"/>
               </a:rPr>
               <a:t>Even an excellent team’s edge erodes as the external environment shifts.</a:t>
             </a:r>
@@ -6869,9 +6869,9 @@
             <a:r>
               <a:rPr sz="1100" b="0" i="0">
                 <a:solidFill>
-                  <a:srgbClr val="4A5D75"/>
-                </a:solidFill>
-                <a:latin typeface="Calibri"/>
+                  <a:srgbClr val="6F8990"/>
+                </a:solidFill>
+                <a:latin typeface="Arial"/>
               </a:rPr>
               <a:t>Investment Strategy</a:t>
             </a:r>
@@ -6911,9 +6911,9 @@
             <a:r>
               <a:rPr sz="1100" b="1" i="0">
                 <a:solidFill>
-                  <a:srgbClr val="4A5D75"/>
-                </a:solidFill>
-                <a:latin typeface="Calibri"/>
+                  <a:srgbClr val="6F8990"/>
+                </a:solidFill>
+                <a:latin typeface="Arial"/>
               </a:rPr>
               <a:t>Figure 2</a:t>
             </a:r>
@@ -6935,7 +6935,7 @@
             <a:avLst/>
           </a:prstGeom>
           <a:solidFill>
-            <a:srgbClr val="F1F2F4"/>
+            <a:srgbClr val="F6F7F9"/>
           </a:solidFill>
           <a:ln>
             <a:noFill/>
@@ -6997,7 +6997,7 @@
             <a:r>
               <a:rPr sz="3000" b="0" i="0">
                 <a:solidFill>
-                  <a:srgbClr val="1E334E"/>
+                  <a:srgbClr val="314359"/>
                 </a:solidFill>
                 <a:latin typeface="Times New Roman"/>
               </a:rPr>
@@ -7039,9 +7039,9 @@
             <a:r>
               <a:rPr sz="1300" b="0" i="1">
                 <a:solidFill>
-                  <a:srgbClr val="5A636E"/>
-                </a:solidFill>
-                <a:latin typeface="Calibri"/>
+                  <a:srgbClr val="64615E"/>
+                </a:solidFill>
+                <a:latin typeface="Arial"/>
               </a:rPr>
               <a:t>The classic objection to activism is adverse selection. Our model inverts it.</a:t>
             </a:r>
@@ -7081,9 +7081,9 @@
             <a:r>
               <a:rPr sz="850" b="0" i="0">
                 <a:solidFill>
-                  <a:srgbClr val="9AA4B0"/>
-                </a:solidFill>
-                <a:latin typeface="Calibri"/>
+                  <a:srgbClr val="9A958E"/>
+                </a:solidFill>
+                <a:latin typeface="Arial"/>
               </a:rPr>
               <a:t>Strictly confidential          10</a:t>
             </a:r>
@@ -7123,27 +7123,27 @@
             <a:r>
               <a:rPr sz="1350" b="1">
                 <a:solidFill>
-                  <a:srgbClr val="4A5D75"/>
-                </a:solidFill>
-                <a:latin typeface="Calibri"/>
+                  <a:srgbClr val="556A83"/>
+                </a:solidFill>
+                <a:latin typeface="Arial"/>
               </a:rPr>
               <a:t>›  </a:t>
             </a:r>
             <a:r>
               <a:rPr sz="1350" b="1">
                 <a:solidFill>
-                  <a:srgbClr val="1E334E"/>
-                </a:solidFill>
-                <a:latin typeface="Calibri"/>
+                  <a:srgbClr val="314359"/>
+                </a:solidFill>
+                <a:latin typeface="Arial"/>
               </a:rPr>
               <a:t>The critique.</a:t>
             </a:r>
             <a:r>
               <a:rPr sz="1350">
                 <a:solidFill>
-                  <a:srgbClr val="333840"/>
-                </a:solidFill>
-                <a:latin typeface="Calibri"/>
+                  <a:srgbClr val="3C3937"/>
+                </a:solidFill>
+                <a:latin typeface="Arial"/>
               </a:rPr>
               <a:t>  Buy “cheap and troubled” and you select for lemons — worse than they look. The market discounted them for a reason.</a:t>
             </a:r>
@@ -7160,27 +7160,27 @@
             <a:r>
               <a:rPr sz="1350" b="1">
                 <a:solidFill>
-                  <a:srgbClr val="4A5D75"/>
-                </a:solidFill>
-                <a:latin typeface="Calibri"/>
+                  <a:srgbClr val="556A83"/>
+                </a:solidFill>
+                <a:latin typeface="Arial"/>
               </a:rPr>
               <a:t>›  </a:t>
             </a:r>
             <a:r>
               <a:rPr sz="1350" b="1">
                 <a:solidFill>
-                  <a:srgbClr val="1E334E"/>
-                </a:solidFill>
-                <a:latin typeface="Calibri"/>
+                  <a:srgbClr val="314359"/>
+                </a:solidFill>
+                <a:latin typeface="Arial"/>
               </a:rPr>
               <a:t>Our precondition removes it.</a:t>
             </a:r>
             <a:r>
               <a:rPr sz="1350">
                 <a:solidFill>
-                  <a:srgbClr val="333840"/>
-                </a:solidFill>
-                <a:latin typeface="Calibri"/>
+                  <a:srgbClr val="3C3937"/>
+                </a:solidFill>
+                <a:latin typeface="Arial"/>
               </a:rPr>
               <a:t>  We invest only where the core is a market leader earning high returns on capital — attractive even if we change nothing. No structurally-weak turnarounds.</a:t>
             </a:r>
@@ -7197,27 +7197,27 @@
             <a:r>
               <a:rPr sz="1350" b="1">
                 <a:solidFill>
-                  <a:srgbClr val="4A5D75"/>
-                </a:solidFill>
-                <a:latin typeface="Calibri"/>
+                  <a:srgbClr val="556A83"/>
+                </a:solidFill>
+                <a:latin typeface="Arial"/>
               </a:rPr>
               <a:t>›  </a:t>
             </a:r>
             <a:r>
               <a:rPr sz="1350" b="1">
                 <a:solidFill>
-                  <a:srgbClr val="1E334E"/>
-                </a:solidFill>
-                <a:latin typeface="Calibri"/>
+                  <a:srgbClr val="314359"/>
+                </a:solidFill>
+                <a:latin typeface="Arial"/>
               </a:rPr>
               <a:t>The real setup.</a:t>
             </a:r>
             <a:r>
               <a:rPr sz="1350">
                 <a:solidFill>
-                  <a:srgbClr val="333840"/>
-                </a:solidFill>
-                <a:latin typeface="Calibri"/>
+                  <a:srgbClr val="3C3937"/>
+                </a:solidFill>
+                <a:latin typeface="Arial"/>
               </a:rPr>
               <a:t>  Profitable leaders whose management pivoted into weak adjacencies — chasing growth as the core matured. A capital-allocation overlay on a good asset, not a bad asset.</a:t>
             </a:r>
@@ -7234,27 +7234,27 @@
             <a:r>
               <a:rPr sz="1350" b="1">
                 <a:solidFill>
-                  <a:srgbClr val="4A5D75"/>
-                </a:solidFill>
-                <a:latin typeface="Calibri"/>
+                  <a:srgbClr val="556A83"/>
+                </a:solidFill>
+                <a:latin typeface="Arial"/>
               </a:rPr>
               <a:t>›  </a:t>
             </a:r>
             <a:r>
               <a:rPr sz="1350" b="1">
                 <a:solidFill>
-                  <a:srgbClr val="1E334E"/>
-                </a:solidFill>
-                <a:latin typeface="Calibri"/>
+                  <a:srgbClr val="314359"/>
+                </a:solidFill>
+                <a:latin typeface="Arial"/>
               </a:rPr>
               <a:t>The inversion.</a:t>
             </a:r>
             <a:r>
               <a:rPr sz="1350">
                 <a:solidFill>
-                  <a:srgbClr val="333840"/>
-                </a:solidFill>
-                <a:latin typeface="Calibri"/>
+                  <a:srgbClr val="3C3937"/>
+                </a:solidFill>
+                <a:latin typeface="Arial"/>
               </a:rPr>
               <a:t>  Blended results make it look mediocre, so it is priced mediocre. The appearance understates reality.</a:t>
             </a:r>
@@ -7294,9 +7294,9 @@
             <a:r>
               <a:rPr sz="1100" b="1" i="0">
                 <a:solidFill>
-                  <a:srgbClr val="4A5D75"/>
-                </a:solidFill>
-                <a:latin typeface="Calibri"/>
+                  <a:srgbClr val="556A83"/>
+                </a:solidFill>
+                <a:latin typeface="Arial"/>
               </a:rPr>
               <a:t>Figure 2  ·  SUM-OF-THE-PARTS (ILLUSTRATIVE, INDEXED)</a:t>
             </a:r>
@@ -7318,7 +7318,7 @@
             <a:avLst/>
           </a:prstGeom>
           <a:solidFill>
-            <a:srgbClr val="4A5D75"/>
+            <a:srgbClr val="556A83"/>
           </a:solidFill>
           <a:ln>
             <a:noFill/>
@@ -7380,9 +7380,9 @@
             <a:r>
               <a:rPr sz="1400" b="1" i="0">
                 <a:solidFill>
-                  <a:srgbClr val="1E334E"/>
-                </a:solidFill>
-                <a:latin typeface="Calibri"/>
+                  <a:srgbClr val="314359"/>
+                </a:solidFill>
+                <a:latin typeface="Arial"/>
               </a:rPr>
               <a:t>100</a:t>
             </a:r>
@@ -7422,9 +7422,9 @@
             <a:r>
               <a:rPr sz="1150" b="1" i="0">
                 <a:solidFill>
-                  <a:srgbClr val="333840"/>
-                </a:solidFill>
-                <a:latin typeface="Calibri"/>
+                  <a:srgbClr val="3C3937"/>
+                </a:solidFill>
+                <a:latin typeface="Arial"/>
               </a:rPr>
               <a:t>Market price</a:t>
             </a:r>
@@ -7441,9 +7441,9 @@
             <a:r>
               <a:rPr sz="1000" b="0" i="0">
                 <a:solidFill>
-                  <a:srgbClr val="333840"/>
-                </a:solidFill>
-                <a:latin typeface="Calibri"/>
+                  <a:srgbClr val="3C3937"/>
+                </a:solidFill>
+                <a:latin typeface="Arial"/>
               </a:rPr>
               <a:t>(blended optics)</a:t>
             </a:r>
@@ -7465,7 +7465,7 @@
             <a:avLst/>
           </a:prstGeom>
           <a:solidFill>
-            <a:srgbClr val="14253B"/>
+            <a:srgbClr val="152130"/>
           </a:solidFill>
           <a:ln>
             <a:noFill/>
@@ -7527,9 +7527,9 @@
             <a:r>
               <a:rPr sz="1400" b="1" i="0">
                 <a:solidFill>
-                  <a:srgbClr val="1E334E"/>
-                </a:solidFill>
-                <a:latin typeface="Calibri"/>
+                  <a:srgbClr val="314359"/>
+                </a:solidFill>
+                <a:latin typeface="Arial"/>
               </a:rPr>
               <a:t>140</a:t>
             </a:r>
@@ -7569,9 +7569,9 @@
             <a:r>
               <a:rPr sz="1150" b="1" i="0">
                 <a:solidFill>
-                  <a:srgbClr val="333840"/>
-                </a:solidFill>
-                <a:latin typeface="Calibri"/>
+                  <a:srgbClr val="3C3937"/>
+                </a:solidFill>
+                <a:latin typeface="Arial"/>
               </a:rPr>
               <a:t>Core alone</a:t>
             </a:r>
@@ -7588,9 +7588,9 @@
             <a:r>
               <a:rPr sz="1000" b="0" i="0">
                 <a:solidFill>
-                  <a:srgbClr val="333840"/>
-                </a:solidFill>
-                <a:latin typeface="Calibri"/>
+                  <a:srgbClr val="3C3937"/>
+                </a:solidFill>
+                <a:latin typeface="Arial"/>
               </a:rPr>
               <a:t>(high ROIIC)</a:t>
             </a:r>
@@ -7612,7 +7612,7 @@
             <a:avLst/>
           </a:prstGeom>
           <a:solidFill>
-            <a:srgbClr val="8A99AB"/>
+            <a:srgbClr val="6F8990"/>
           </a:solidFill>
           <a:ln>
             <a:noFill/>
@@ -7720,7 +7720,7 @@
                 <a:solidFill>
                   <a:srgbClr val="A84A4A"/>
                 </a:solidFill>
-                <a:latin typeface="Calibri"/>
+                <a:latin typeface="Arial"/>
               </a:rPr>
               <a:t>+40% hidden value</a:t>
             </a:r>
@@ -7760,9 +7760,9 @@
             <a:r>
               <a:rPr sz="1300" b="0" i="1">
                 <a:solidFill>
-                  <a:srgbClr val="4A5D75"/>
-                </a:solidFill>
-                <a:latin typeface="Calibri"/>
+                  <a:srgbClr val="556A83"/>
+                </a:solidFill>
+                <a:latin typeface="Arial"/>
               </a:rPr>
               <a:t>We remove the drag and refocus capital on the core — positive selection on a concealed asset, not negative selection on a lemon.</a:t>
             </a:r>
@@ -7888,9 +7888,9 @@
             <a:r>
               <a:rPr sz="1100" b="0" i="0">
                 <a:solidFill>
-                  <a:srgbClr val="4A5D75"/>
-                </a:solidFill>
-                <a:latin typeface="Calibri"/>
+                  <a:srgbClr val="6F8990"/>
+                </a:solidFill>
+                <a:latin typeface="Arial"/>
               </a:rPr>
               <a:t>Investment Strategy</a:t>
             </a:r>
@@ -7930,9 +7930,9 @@
             <a:r>
               <a:rPr sz="1100" b="1" i="0">
                 <a:solidFill>
-                  <a:srgbClr val="4A5D75"/>
-                </a:solidFill>
-                <a:latin typeface="Calibri"/>
+                  <a:srgbClr val="6F8990"/>
+                </a:solidFill>
+                <a:latin typeface="Arial"/>
               </a:rPr>
               <a:t>Table 1</a:t>
             </a:r>
@@ -7954,7 +7954,7 @@
             <a:avLst/>
           </a:prstGeom>
           <a:solidFill>
-            <a:srgbClr val="F1F2F4"/>
+            <a:srgbClr val="F6F7F9"/>
           </a:solidFill>
           <a:ln>
             <a:noFill/>
@@ -8016,7 +8016,7 @@
             <a:r>
               <a:rPr sz="3000" b="0" i="0">
                 <a:solidFill>
-                  <a:srgbClr val="1E334E"/>
+                  <a:srgbClr val="314359"/>
                 </a:solidFill>
                 <a:latin typeface="Times New Roman"/>
               </a:rPr>
@@ -8058,9 +8058,9 @@
             <a:r>
               <a:rPr sz="1300" b="0" i="1">
                 <a:solidFill>
-                  <a:srgbClr val="5A636E"/>
-                </a:solidFill>
-                <a:latin typeface="Calibri"/>
+                  <a:srgbClr val="64615E"/>
+                </a:solidFill>
+                <a:latin typeface="Arial"/>
               </a:rPr>
               <a:t>Even Hohn (TCI) and Loeb (Third Point) pivoted to quality — we capture quality at a discount, with a catalyst in our control.</a:t>
             </a:r>
@@ -8100,9 +8100,9 @@
             <a:r>
               <a:rPr sz="850" b="0" i="0">
                 <a:solidFill>
-                  <a:srgbClr val="9AA4B0"/>
-                </a:solidFill>
-                <a:latin typeface="Calibri"/>
+                  <a:srgbClr val="9A958E"/>
+                </a:solidFill>
+                <a:latin typeface="Arial"/>
               </a:rPr>
               <a:t>Strictly confidential          11</a:t>
             </a:r>
@@ -8188,7 +8188,7 @@
                 <a:solidFill>
                   <a:srgbClr val="FFFFFF"/>
                 </a:solidFill>
-                <a:latin typeface="Calibri"/>
+                <a:latin typeface="Arial"/>
               </a:rPr>
               <a:t/>
             </a:r>
@@ -8210,7 +8210,7 @@
             <a:avLst/>
           </a:prstGeom>
           <a:solidFill>
-            <a:srgbClr val="4A5D75"/>
+            <a:srgbClr val="556A83"/>
           </a:solidFill>
           <a:ln>
             <a:noFill/>
@@ -8274,7 +8274,7 @@
                 <a:solidFill>
                   <a:srgbClr val="FFFFFF"/>
                 </a:solidFill>
-                <a:latin typeface="Calibri"/>
+                <a:latin typeface="Arial"/>
               </a:rPr>
               <a:t>Large generalist activists (e.g. Elliott)</a:t>
             </a:r>
@@ -8296,7 +8296,7 @@
             <a:avLst/>
           </a:prstGeom>
           <a:solidFill>
-            <a:srgbClr val="4A5D75"/>
+            <a:srgbClr val="556A83"/>
           </a:solidFill>
           <a:ln>
             <a:noFill/>
@@ -8360,7 +8360,7 @@
                 <a:solidFill>
                   <a:srgbClr val="FFFFFF"/>
                 </a:solidFill>
-                <a:latin typeface="Calibri"/>
+                <a:latin typeface="Arial"/>
               </a:rPr>
               <a:t>Athanase — quality-core constructivism</a:t>
             </a:r>
@@ -8382,7 +8382,7 @@
             <a:avLst/>
           </a:prstGeom>
           <a:solidFill>
-            <a:srgbClr val="F1F2F4"/>
+            <a:srgbClr val="F6F7F9"/>
           </a:solidFill>
           <a:ln>
             <a:noFill/>
@@ -8444,9 +8444,9 @@
             <a:r>
               <a:rPr sz="1150" b="1" i="0">
                 <a:solidFill>
-                  <a:srgbClr val="4A5D75"/>
-                </a:solidFill>
-                <a:latin typeface="Calibri"/>
+                  <a:srgbClr val="556A83"/>
+                </a:solidFill>
+                <a:latin typeface="Arial"/>
               </a:rPr>
               <a:t>Entry precondition</a:t>
             </a:r>
@@ -8468,7 +8468,7 @@
             <a:avLst/>
           </a:prstGeom>
           <a:solidFill>
-            <a:srgbClr val="F1F2F4"/>
+            <a:srgbClr val="F6F7F9"/>
           </a:solidFill>
           <a:ln>
             <a:noFill/>
@@ -8530,9 +8530,9 @@
             <a:r>
               <a:rPr sz="1150" b="0" i="0">
                 <a:solidFill>
-                  <a:srgbClr val="333840"/>
-                </a:solidFill>
-                <a:latin typeface="Calibri"/>
+                  <a:srgbClr val="3C3937"/>
+                </a:solidFill>
+                <a:latin typeface="Arial"/>
               </a:rPr>
               <a:t>Wide range of situations — breakups, credit, event-driven; business quality often secondary</a:t>
             </a:r>
@@ -8554,7 +8554,7 @@
             <a:avLst/>
           </a:prstGeom>
           <a:solidFill>
-            <a:srgbClr val="F1F2F4"/>
+            <a:srgbClr val="F6F7F9"/>
           </a:solidFill>
           <a:ln>
             <a:noFill/>
@@ -8616,9 +8616,9 @@
             <a:r>
               <a:rPr sz="1150" b="1" i="0">
                 <a:solidFill>
-                  <a:srgbClr val="1E334E"/>
-                </a:solidFill>
-                <a:latin typeface="Calibri"/>
+                  <a:srgbClr val="314359"/>
+                </a:solidFill>
+                <a:latin typeface="Arial"/>
               </a:rPr>
               <a:t>Only a market-leading, high-ROIIC core — “attractive even if we change nothing”</a:t>
             </a:r>
@@ -8702,9 +8702,9 @@
             <a:r>
               <a:rPr sz="1150" b="1" i="0">
                 <a:solidFill>
-                  <a:srgbClr val="4A5D75"/>
-                </a:solidFill>
-                <a:latin typeface="Calibri"/>
+                  <a:srgbClr val="556A83"/>
+                </a:solidFill>
+                <a:latin typeface="Arial"/>
               </a:rPr>
               <a:t>Source of return</a:t>
             </a:r>
@@ -8788,9 +8788,9 @@
             <a:r>
               <a:rPr sz="1150" b="0" i="0">
                 <a:solidFill>
-                  <a:srgbClr val="333840"/>
-                </a:solidFill>
-                <a:latin typeface="Calibri"/>
+                  <a:srgbClr val="3C3937"/>
+                </a:solidFill>
+                <a:latin typeface="Arial"/>
               </a:rPr>
               <a:t>Financial / transactional pressure: force a sale, return cash, exit</a:t>
             </a:r>
@@ -8874,9 +8874,9 @@
             <a:r>
               <a:rPr sz="1150" b="1" i="0">
                 <a:solidFill>
-                  <a:srgbClr val="1E334E"/>
-                </a:solidFill>
-                <a:latin typeface="Calibri"/>
+                  <a:srgbClr val="314359"/>
+                </a:solidFill>
+                <a:latin typeface="Arial"/>
               </a:rPr>
               <a:t>Operational refocus of a genuinely good business, from a board seat, over years</a:t>
             </a:r>
@@ -8898,7 +8898,7 @@
             <a:avLst/>
           </a:prstGeom>
           <a:solidFill>
-            <a:srgbClr val="F1F2F4"/>
+            <a:srgbClr val="F6F7F9"/>
           </a:solidFill>
           <a:ln>
             <a:noFill/>
@@ -8960,9 +8960,9 @@
             <a:r>
               <a:rPr sz="1150" b="1" i="0">
                 <a:solidFill>
-                  <a:srgbClr val="4A5D75"/>
-                </a:solidFill>
-                <a:latin typeface="Calibri"/>
+                  <a:srgbClr val="556A83"/>
+                </a:solidFill>
+                <a:latin typeface="Arial"/>
               </a:rPr>
               <a:t>What gets fixed</a:t>
             </a:r>
@@ -8984,7 +8984,7 @@
             <a:avLst/>
           </a:prstGeom>
           <a:solidFill>
-            <a:srgbClr val="F1F2F4"/>
+            <a:srgbClr val="F6F7F9"/>
           </a:solidFill>
           <a:ln>
             <a:noFill/>
@@ -9046,9 +9046,9 @@
             <a:r>
               <a:rPr sz="1150" b="0" i="0">
                 <a:solidFill>
-                  <a:srgbClr val="333840"/>
-                </a:solidFill>
-                <a:latin typeface="Calibri"/>
+                  <a:srgbClr val="3C3937"/>
+                </a:solidFill>
+                <a:latin typeface="Arial"/>
               </a:rPr>
               <a:t>The price, the structure, the outcome of a contest</a:t>
             </a:r>
@@ -9070,7 +9070,7 @@
             <a:avLst/>
           </a:prstGeom>
           <a:solidFill>
-            <a:srgbClr val="F1F2F4"/>
+            <a:srgbClr val="F6F7F9"/>
           </a:solidFill>
           <a:ln>
             <a:noFill/>
@@ -9132,9 +9132,9 @@
             <a:r>
               <a:rPr sz="1150" b="1" i="0">
                 <a:solidFill>
-                  <a:srgbClr val="1E334E"/>
-                </a:solidFill>
-                <a:latin typeface="Calibri"/>
+                  <a:srgbClr val="314359"/>
+                </a:solidFill>
+                <a:latin typeface="Arial"/>
               </a:rPr>
               <a:t>The capital-allocation overlay — the core already works</a:t>
             </a:r>
@@ -9218,9 +9218,9 @@
             <a:r>
               <a:rPr sz="1150" b="1" i="0">
                 <a:solidFill>
-                  <a:srgbClr val="4A5D75"/>
-                </a:solidFill>
-                <a:latin typeface="Calibri"/>
+                  <a:srgbClr val="556A83"/>
+                </a:solidFill>
+                <a:latin typeface="Arial"/>
               </a:rPr>
               <a:t>Margin of safety</a:t>
             </a:r>
@@ -9304,9 +9304,9 @@
             <a:r>
               <a:rPr sz="1150" b="0" i="0">
                 <a:solidFill>
-                  <a:srgbClr val="333840"/>
-                </a:solidFill>
-                <a:latin typeface="Calibri"/>
+                  <a:srgbClr val="3C3937"/>
+                </a:solidFill>
+                <a:latin typeface="Arial"/>
               </a:rPr>
               <a:t>Winning the campaign</a:t>
             </a:r>
@@ -9390,9 +9390,9 @@
             <a:r>
               <a:rPr sz="1150" b="1" i="0">
                 <a:solidFill>
-                  <a:srgbClr val="1E334E"/>
-                </a:solidFill>
-                <a:latin typeface="Calibri"/>
+                  <a:srgbClr val="314359"/>
+                </a:solidFill>
+                <a:latin typeface="Arial"/>
               </a:rPr>
               <a:t>The core’s proven high-ROIIC economics — the hard floor</a:t>
             </a:r>
@@ -9414,7 +9414,7 @@
             <a:avLst/>
           </a:prstGeom>
           <a:solidFill>
-            <a:srgbClr val="F1F2F4"/>
+            <a:srgbClr val="F6F7F9"/>
           </a:solidFill>
           <a:ln>
             <a:noFill/>
@@ -9476,9 +9476,9 @@
             <a:r>
               <a:rPr sz="1150" b="1" i="0">
                 <a:solidFill>
-                  <a:srgbClr val="4A5D75"/>
-                </a:solidFill>
-                <a:latin typeface="Calibri"/>
+                  <a:srgbClr val="556A83"/>
+                </a:solidFill>
+                <a:latin typeface="Arial"/>
               </a:rPr>
               <a:t>Cadence &amp; style</a:t>
             </a:r>
@@ -9500,7 +9500,7 @@
             <a:avLst/>
           </a:prstGeom>
           <a:solidFill>
-            <a:srgbClr val="F1F2F4"/>
+            <a:srgbClr val="F6F7F9"/>
           </a:solidFill>
           <a:ln>
             <a:noFill/>
@@ -9562,9 +9562,9 @@
             <a:r>
               <a:rPr sz="1150" b="0" i="0">
                 <a:solidFill>
-                  <a:srgbClr val="333840"/>
-                </a:solidFill>
-                <a:latin typeface="Calibri"/>
+                  <a:srgbClr val="3C3937"/>
+                </a:solidFill>
+                <a:latin typeface="Arial"/>
               </a:rPr>
               <a:t>Many simultaneous campaigns, leverage, often confrontational</a:t>
             </a:r>
@@ -9586,7 +9586,7 @@
             <a:avLst/>
           </a:prstGeom>
           <a:solidFill>
-            <a:srgbClr val="F1F2F4"/>
+            <a:srgbClr val="F6F7F9"/>
           </a:solidFill>
           <a:ln>
             <a:noFill/>
@@ -9648,9 +9648,9 @@
             <a:r>
               <a:rPr sz="1150" b="1" i="0">
                 <a:solidFill>
-                  <a:srgbClr val="1E334E"/>
-                </a:solidFill>
-                <a:latin typeface="Calibri"/>
+                  <a:srgbClr val="314359"/>
+                </a:solidFill>
+                <a:latin typeface="Arial"/>
               </a:rPr>
               <a:t>~one deal a year, constructive, board-led, mid-cap surgical</a:t>
             </a:r>
@@ -9690,9 +9690,9 @@
             <a:r>
               <a:rPr sz="1300" b="0" i="1">
                 <a:solidFill>
-                  <a:srgbClr val="4A5D75"/>
-                </a:solidFill>
-                <a:latin typeface="Calibri"/>
+                  <a:srgbClr val="556A83"/>
+                </a:solidFill>
+                <a:latin typeface="Arial"/>
               </a:rPr>
               <a:t>The megacap activists left mid-cap surgical engagements behind as they scaled. That hidden-core niche is our lane.</a:t>
             </a:r>
@@ -9818,9 +9818,9 @@
             <a:r>
               <a:rPr sz="1100" b="0" i="0">
                 <a:solidFill>
-                  <a:srgbClr val="4A5D75"/>
-                </a:solidFill>
-                <a:latin typeface="Calibri"/>
+                  <a:srgbClr val="6F8990"/>
+                </a:solidFill>
+                <a:latin typeface="Arial"/>
               </a:rPr>
               <a:t>Investment Strategy</a:t>
             </a:r>
@@ -9860,9 +9860,9 @@
             <a:r>
               <a:rPr sz="1100" b="1" i="0">
                 <a:solidFill>
-                  <a:srgbClr val="4A5D75"/>
-                </a:solidFill>
-                <a:latin typeface="Calibri"/>
+                  <a:srgbClr val="6F8990"/>
+                </a:solidFill>
+                <a:latin typeface="Arial"/>
               </a:rPr>
               <a:t>Table 2</a:t>
             </a:r>
@@ -9884,7 +9884,7 @@
             <a:avLst/>
           </a:prstGeom>
           <a:solidFill>
-            <a:srgbClr val="F1F2F4"/>
+            <a:srgbClr val="F6F7F9"/>
           </a:solidFill>
           <a:ln>
             <a:noFill/>
@@ -9946,7 +9946,7 @@
             <a:r>
               <a:rPr sz="3000" b="0" i="0">
                 <a:solidFill>
-                  <a:srgbClr val="1E334E"/>
+                  <a:srgbClr val="314359"/>
                 </a:solidFill>
                 <a:latin typeface="Times New Roman"/>
               </a:rPr>
@@ -9988,9 +9988,9 @@
             <a:r>
               <a:rPr sz="1300" b="0" i="1">
                 <a:solidFill>
-                  <a:srgbClr val="5A636E"/>
-                </a:solidFill>
-                <a:latin typeface="Calibri"/>
+                  <a:srgbClr val="64615E"/>
+                </a:solidFill>
+                <a:latin typeface="Arial"/>
               </a:rPr>
               <a:t>Because we buy at a discount, not at a 40% control premium.</a:t>
             </a:r>
@@ -10030,9 +10030,9 @@
             <a:r>
               <a:rPr sz="850" b="0" i="0">
                 <a:solidFill>
-                  <a:srgbClr val="9AA4B0"/>
-                </a:solidFill>
-                <a:latin typeface="Calibri"/>
+                  <a:srgbClr val="9A958E"/>
+                </a:solidFill>
+                <a:latin typeface="Arial"/>
               </a:rPr>
               <a:t>Strictly confidential          12</a:t>
             </a:r>
@@ -10054,7 +10054,7 @@
             <a:avLst/>
           </a:prstGeom>
           <a:solidFill>
-            <a:srgbClr val="4A5D75"/>
+            <a:srgbClr val="556A83"/>
           </a:solidFill>
           <a:ln>
             <a:noFill/>
@@ -10118,7 +10118,7 @@
                 <a:solidFill>
                   <a:srgbClr val="FFFFFF"/>
                 </a:solidFill>
-                <a:latin typeface="Calibri"/>
+                <a:latin typeface="Arial"/>
               </a:rPr>
               <a:t>Metric</a:t>
             </a:r>
@@ -10140,7 +10140,7 @@
             <a:avLst/>
           </a:prstGeom>
           <a:solidFill>
-            <a:srgbClr val="4A5D75"/>
+            <a:srgbClr val="556A83"/>
           </a:solidFill>
           <a:ln>
             <a:noFill/>
@@ -10204,7 +10204,7 @@
                 <a:solidFill>
                   <a:srgbClr val="FFFFFF"/>
                 </a:solidFill>
-                <a:latin typeface="Calibri"/>
+                <a:latin typeface="Arial"/>
               </a:rPr>
               <a:t>Private Equity (take-private)</a:t>
             </a:r>
@@ -10226,7 +10226,7 @@
             <a:avLst/>
           </a:prstGeom>
           <a:solidFill>
-            <a:srgbClr val="4A5D75"/>
+            <a:srgbClr val="556A83"/>
           </a:solidFill>
           <a:ln>
             <a:noFill/>
@@ -10290,7 +10290,7 @@
                 <a:solidFill>
                   <a:srgbClr val="FFFFFF"/>
                 </a:solidFill>
-                <a:latin typeface="Calibri"/>
+                <a:latin typeface="Arial"/>
               </a:rPr>
               <a:t>Athanase (engaged owner)</a:t>
             </a:r>
@@ -10374,9 +10374,9 @@
             <a:r>
               <a:rPr sz="1300" b="0" i="0">
                 <a:solidFill>
-                  <a:srgbClr val="333840"/>
-                </a:solidFill>
-                <a:latin typeface="Calibri"/>
+                  <a:srgbClr val="3C3937"/>
+                </a:solidFill>
+                <a:latin typeface="Arial"/>
               </a:rPr>
               <a:t>Entry basis</a:t>
             </a:r>
@@ -10460,9 +10460,9 @@
             <a:r>
               <a:rPr sz="1300" b="0" i="0">
                 <a:solidFill>
-                  <a:srgbClr val="333840"/>
-                </a:solidFill>
-                <a:latin typeface="Calibri"/>
+                  <a:srgbClr val="3C3937"/>
+                </a:solidFill>
+                <a:latin typeface="Arial"/>
               </a:rPr>
               <a:t>$140  (market + 40% premium)</a:t>
             </a:r>
@@ -10546,9 +10546,9 @@
             <a:r>
               <a:rPr sz="1300" b="1" i="0">
                 <a:solidFill>
-                  <a:srgbClr val="1E334E"/>
-                </a:solidFill>
-                <a:latin typeface="Calibri"/>
+                  <a:srgbClr val="314359"/>
+                </a:solidFill>
+                <a:latin typeface="Arial"/>
               </a:rPr>
               <a:t>$100  (exhaustion price)</a:t>
             </a:r>
@@ -10570,7 +10570,7 @@
             <a:avLst/>
           </a:prstGeom>
           <a:solidFill>
-            <a:srgbClr val="F1F2F4"/>
+            <a:srgbClr val="F6F7F9"/>
           </a:solidFill>
           <a:ln>
             <a:noFill/>
@@ -10632,9 +10632,9 @@
             <a:r>
               <a:rPr sz="1300" b="0" i="0">
                 <a:solidFill>
-                  <a:srgbClr val="333840"/>
-                </a:solidFill>
-                <a:latin typeface="Calibri"/>
+                  <a:srgbClr val="3C3937"/>
+                </a:solidFill>
+                <a:latin typeface="Arial"/>
               </a:rPr>
               <a:t>Holding period</a:t>
             </a:r>
@@ -10656,7 +10656,7 @@
             <a:avLst/>
           </a:prstGeom>
           <a:solidFill>
-            <a:srgbClr val="F1F2F4"/>
+            <a:srgbClr val="F6F7F9"/>
           </a:solidFill>
           <a:ln>
             <a:noFill/>
@@ -10718,9 +10718,9 @@
             <a:r>
               <a:rPr sz="1300" b="0" i="0">
                 <a:solidFill>
-                  <a:srgbClr val="333840"/>
-                </a:solidFill>
-                <a:latin typeface="Calibri"/>
+                  <a:srgbClr val="3C3937"/>
+                </a:solidFill>
+                <a:latin typeface="Arial"/>
               </a:rPr>
               <a:t>5 years</a:t>
             </a:r>
@@ -10742,7 +10742,7 @@
             <a:avLst/>
           </a:prstGeom>
           <a:solidFill>
-            <a:srgbClr val="F1F2F4"/>
+            <a:srgbClr val="F6F7F9"/>
           </a:solidFill>
           <a:ln>
             <a:noFill/>
@@ -10804,9 +10804,9 @@
             <a:r>
               <a:rPr sz="1300" b="1" i="0">
                 <a:solidFill>
-                  <a:srgbClr val="1E334E"/>
-                </a:solidFill>
-                <a:latin typeface="Calibri"/>
+                  <a:srgbClr val="314359"/>
+                </a:solidFill>
+                <a:latin typeface="Arial"/>
               </a:rPr>
               <a:t>3 years (rerating cycle)</a:t>
             </a:r>
@@ -10890,9 +10890,9 @@
             <a:r>
               <a:rPr sz="1300" b="0" i="0">
                 <a:solidFill>
-                  <a:srgbClr val="333840"/>
-                </a:solidFill>
-                <a:latin typeface="Calibri"/>
+                  <a:srgbClr val="3C3937"/>
+                </a:solidFill>
+                <a:latin typeface="Arial"/>
               </a:rPr>
               <a:t>Value growth required</a:t>
             </a:r>
@@ -10976,9 +10976,9 @@
             <a:r>
               <a:rPr sz="1300" b="0" i="0">
                 <a:solidFill>
-                  <a:srgbClr val="333840"/>
-                </a:solidFill>
-                <a:latin typeface="Calibri"/>
+                  <a:srgbClr val="3C3937"/>
+                </a:solidFill>
+                <a:latin typeface="Arial"/>
               </a:rPr>
               <a:t>+148% total growth</a:t>
             </a:r>
@@ -11062,9 +11062,9 @@
             <a:r>
               <a:rPr sz="1300" b="1" i="0">
                 <a:solidFill>
-                  <a:srgbClr val="1E334E"/>
-                </a:solidFill>
-                <a:latin typeface="Calibri"/>
+                  <a:srgbClr val="314359"/>
+                </a:solidFill>
+                <a:latin typeface="Arial"/>
               </a:rPr>
               <a:t>+73% total growth</a:t>
             </a:r>
@@ -11086,7 +11086,7 @@
             <a:avLst/>
           </a:prstGeom>
           <a:solidFill>
-            <a:srgbClr val="F1F2F4"/>
+            <a:srgbClr val="F6F7F9"/>
           </a:solidFill>
           <a:ln>
             <a:noFill/>
@@ -11148,9 +11148,9 @@
             <a:r>
               <a:rPr sz="1300" b="0" i="0">
                 <a:solidFill>
-                  <a:srgbClr val="333840"/>
-                </a:solidFill>
-                <a:latin typeface="Calibri"/>
+                  <a:srgbClr val="3C3937"/>
+                </a:solidFill>
+                <a:latin typeface="Arial"/>
               </a:rPr>
               <a:t>Operational success needed</a:t>
             </a:r>
@@ -11172,7 +11172,7 @@
             <a:avLst/>
           </a:prstGeom>
           <a:solidFill>
-            <a:srgbClr val="F1F2F4"/>
+            <a:srgbClr val="F6F7F9"/>
           </a:solidFill>
           <a:ln>
             <a:noFill/>
@@ -11234,9 +11234,9 @@
             <a:r>
               <a:rPr sz="1300" b="0" i="0">
                 <a:solidFill>
-                  <a:srgbClr val="333840"/>
-                </a:solidFill>
-                <a:latin typeface="Calibri"/>
+                  <a:srgbClr val="3C3937"/>
+                </a:solidFill>
+                <a:latin typeface="Arial"/>
               </a:rPr>
               <a:t>~85–100% of thesis</a:t>
             </a:r>
@@ -11258,7 +11258,7 @@
             <a:avLst/>
           </a:prstGeom>
           <a:solidFill>
-            <a:srgbClr val="F1F2F4"/>
+            <a:srgbClr val="F6F7F9"/>
           </a:solidFill>
           <a:ln>
             <a:noFill/>
@@ -11320,9 +11320,9 @@
             <a:r>
               <a:rPr sz="1300" b="1" i="0">
                 <a:solidFill>
-                  <a:srgbClr val="1E334E"/>
-                </a:solidFill>
-                <a:latin typeface="Calibri"/>
+                  <a:srgbClr val="314359"/>
+                </a:solidFill>
+                <a:latin typeface="Arial"/>
               </a:rPr>
               <a:t>~45–55% of thesis</a:t>
             </a:r>
@@ -11362,9 +11362,9 @@
             <a:r>
               <a:rPr sz="1400" b="0" i="1">
                 <a:solidFill>
-                  <a:srgbClr val="4A5D75"/>
-                </a:solidFill>
-                <a:latin typeface="Calibri"/>
+                  <a:srgbClr val="556A83"/>
+                </a:solidFill>
+                <a:latin typeface="Arial"/>
               </a:rPr>
               <a:t>A margin-for-error strategy: we win by being directionally right where PE must be precisely perfect.</a:t>
             </a:r>
@@ -11490,9 +11490,9 @@
             <a:r>
               <a:rPr sz="1100" b="0" i="0">
                 <a:solidFill>
-                  <a:srgbClr val="4A5D75"/>
-                </a:solidFill>
-                <a:latin typeface="Calibri"/>
+                  <a:srgbClr val="6F8990"/>
+                </a:solidFill>
+                <a:latin typeface="Arial"/>
               </a:rPr>
               <a:t>Risk Management</a:t>
             </a:r>
@@ -11514,7 +11514,7 @@
             <a:avLst/>
           </a:prstGeom>
           <a:solidFill>
-            <a:srgbClr val="F1F2F4"/>
+            <a:srgbClr val="F6F7F9"/>
           </a:solidFill>
           <a:ln>
             <a:noFill/>
@@ -11576,7 +11576,7 @@
             <a:r>
               <a:rPr sz="3000" b="0" i="0">
                 <a:solidFill>
-                  <a:srgbClr val="1E334E"/>
+                  <a:srgbClr val="314359"/>
                 </a:solidFill>
                 <a:latin typeface="Times New Roman"/>
               </a:rPr>
@@ -11618,9 +11618,9 @@
             <a:r>
               <a:rPr sz="1300" b="0" i="1">
                 <a:solidFill>
-                  <a:srgbClr val="5A636E"/>
-                </a:solidFill>
-                <a:latin typeface="Calibri"/>
+                  <a:srgbClr val="64615E"/>
+                </a:solidFill>
+                <a:latin typeface="Arial"/>
               </a:rPr>
               <a:t>Predictability, price and influence combined to lower risk systematically.</a:t>
             </a:r>
@@ -11660,9 +11660,9 @@
             <a:r>
               <a:rPr sz="850" b="0" i="0">
                 <a:solidFill>
-                  <a:srgbClr val="9AA4B0"/>
-                </a:solidFill>
-                <a:latin typeface="Calibri"/>
+                  <a:srgbClr val="9A958E"/>
+                </a:solidFill>
+                <a:latin typeface="Arial"/>
               </a:rPr>
               <a:t>Strictly confidential          13</a:t>
             </a:r>
@@ -11702,9 +11702,9 @@
             <a:r>
               <a:rPr sz="1300" b="1" i="0">
                 <a:solidFill>
-                  <a:srgbClr val="4A5D75"/>
-                </a:solidFill>
-                <a:latin typeface="Calibri"/>
+                  <a:srgbClr val="556A83"/>
+                </a:solidFill>
+                <a:latin typeface="Arial"/>
               </a:rPr>
               <a:t>THE VALUATION FLOOR</a:t>
             </a:r>
@@ -11721,9 +11721,9 @@
             <a:r>
               <a:rPr sz="1400" b="0" i="0">
                 <a:solidFill>
-                  <a:srgbClr val="333840"/>
-                </a:solidFill>
-                <a:latin typeface="Calibri"/>
+                  <a:srgbClr val="3C3937"/>
+                </a:solidFill>
+                <a:latin typeface="Arial"/>
               </a:rPr>
               <a:t>Enter only at “shareholder surrender” — dried-up liquidity and long-term price lows</a:t>
             </a:r>
@@ -11740,9 +11740,9 @@
             <a:r>
               <a:rPr sz="1400" b="0" i="0">
                 <a:solidFill>
-                  <a:srgbClr val="333840"/>
-                </a:solidFill>
-                <a:latin typeface="Calibri"/>
+                  <a:srgbClr val="3C3937"/>
+                </a:solidFill>
+                <a:latin typeface="Arial"/>
               </a:rPr>
               <a:t>Value only the rectifiable core; assign zero to “growth trap” divisions</a:t>
             </a:r>
@@ -11759,9 +11759,9 @@
             <a:r>
               <a:rPr sz="1400" b="0" i="0">
                 <a:solidFill>
-                  <a:srgbClr val="333840"/>
-                </a:solidFill>
-                <a:latin typeface="Calibri"/>
+                  <a:srgbClr val="3C3937"/>
+                </a:solidFill>
+                <a:latin typeface="Arial"/>
               </a:rPr>
               <a:t>Creates a structural 30–40% margin of safety vs a PE bidder</a:t>
             </a:r>
@@ -11801,9 +11801,9 @@
             <a:r>
               <a:rPr sz="1300" b="1" i="0">
                 <a:solidFill>
-                  <a:srgbClr val="4A5D75"/>
-                </a:solidFill>
-                <a:latin typeface="Calibri"/>
+                  <a:srgbClr val="556A83"/>
+                </a:solidFill>
+                <a:latin typeface="Arial"/>
               </a:rPr>
               <a:t>THE BOARD-LEVEL KILL SWITCH</a:t>
             </a:r>
@@ -11820,9 +11820,9 @@
             <a:r>
               <a:rPr sz="1400" b="0" i="0">
                 <a:solidFill>
-                  <a:srgbClr val="333840"/>
-                </a:solidFill>
-                <a:latin typeface="Calibri"/>
+                  <a:srgbClr val="3C3937"/>
+                </a:solidFill>
+                <a:latin typeface="Arial"/>
               </a:rPr>
               <a:t>Secure board seats and chairmanships as a prerequisite — not proxy threats</a:t>
             </a:r>
@@ -11839,9 +11839,9 @@
             <a:r>
               <a:rPr sz="1400" b="0" i="0">
                 <a:solidFill>
-                  <a:srgbClr val="333840"/>
-                </a:solidFill>
-                <a:latin typeface="Calibri"/>
+                  <a:srgbClr val="3C3937"/>
+                </a:solidFill>
+                <a:latin typeface="Arial"/>
               </a:rPr>
               <a:t>Mandated rectification: freeze prestige projects the moment the macro shifts</a:t>
             </a:r>
@@ -11858,9 +11858,9 @@
             <a:r>
               <a:rPr sz="1400" b="0" i="0">
                 <a:solidFill>
-                  <a:srgbClr val="333840"/>
-                </a:solidFill>
-                <a:latin typeface="Calibri"/>
+                  <a:srgbClr val="3C3937"/>
+                </a:solidFill>
+                <a:latin typeface="Arial"/>
               </a:rPr>
               <a:t>Automatic risk metrics (10/20/30% triggers) remove portfolio-manager bias</a:t>
             </a:r>
@@ -11900,9 +11900,9 @@
             <a:r>
               <a:rPr sz="1300" b="0" i="1">
                 <a:solidFill>
-                  <a:srgbClr val="5A636E"/>
-                </a:solidFill>
-                <a:latin typeface="Calibri"/>
+                  <a:srgbClr val="64615E"/>
+                </a:solidFill>
+                <a:latin typeface="Arial"/>
               </a:rPr>
               <a:t>Core &amp; satellite: a 30-stock equal-weighted core index compounds capital; 8–12 concentrated ideas must clear a 12% IRR hurdle and a ≤20% downside gate.</a:t>
             </a:r>
@@ -12028,9 +12028,9 @@
             <a:r>
               <a:rPr sz="1100" b="0" i="0">
                 <a:solidFill>
-                  <a:srgbClr val="4A5D75"/>
-                </a:solidFill>
-                <a:latin typeface="Calibri"/>
+                  <a:srgbClr val="6F8990"/>
+                </a:solidFill>
+                <a:latin typeface="Arial"/>
               </a:rPr>
               <a:t>Strategic Case</a:t>
             </a:r>
@@ -12052,7 +12052,7 @@
             <a:avLst/>
           </a:prstGeom>
           <a:solidFill>
-            <a:srgbClr val="F1F2F4"/>
+            <a:srgbClr val="F6F7F9"/>
           </a:solidFill>
           <a:ln>
             <a:noFill/>
@@ -12114,7 +12114,7 @@
             <a:r>
               <a:rPr sz="3000" b="0" i="0">
                 <a:solidFill>
-                  <a:srgbClr val="1E334E"/>
+                  <a:srgbClr val="314359"/>
                 </a:solidFill>
                 <a:latin typeface="Times New Roman"/>
               </a:rPr>
@@ -12156,9 +12156,9 @@
             <a:r>
               <a:rPr sz="1300" b="0" i="1">
                 <a:solidFill>
-                  <a:srgbClr val="5A636E"/>
-                </a:solidFill>
-                <a:latin typeface="Calibri"/>
+                  <a:srgbClr val="64615E"/>
+                </a:solidFill>
+                <a:latin typeface="Arial"/>
               </a:rPr>
               <a:t>From “corporate raider” to “industrial constructivist”: reputational friction and the public J-curve source the alpha and protect it from arbitrage.</a:t>
             </a:r>
@@ -12198,9 +12198,9 @@
             <a:r>
               <a:rPr sz="850" b="0" i="0">
                 <a:solidFill>
-                  <a:srgbClr val="9AA4B0"/>
-                </a:solidFill>
-                <a:latin typeface="Calibri"/>
+                  <a:srgbClr val="9A958E"/>
+                </a:solidFill>
+                <a:latin typeface="Arial"/>
               </a:rPr>
               <a:t>Strictly confidential          14</a:t>
             </a:r>
@@ -12240,27 +12240,27 @@
             <a:r>
               <a:rPr sz="1450" b="1">
                 <a:solidFill>
-                  <a:srgbClr val="4A5D75"/>
-                </a:solidFill>
-                <a:latin typeface="Calibri"/>
+                  <a:srgbClr val="556A83"/>
+                </a:solidFill>
+                <a:latin typeface="Arial"/>
               </a:rPr>
               <a:t>›  </a:t>
             </a:r>
             <a:r>
               <a:rPr sz="1450" b="1">
                 <a:solidFill>
-                  <a:srgbClr val="1E334E"/>
-                </a:solidFill>
-                <a:latin typeface="Calibri"/>
+                  <a:srgbClr val="314359"/>
+                </a:solidFill>
+                <a:latin typeface="Arial"/>
               </a:rPr>
               <a:t>Friction is the catalyst.</a:t>
             </a:r>
             <a:r>
               <a:rPr sz="1450">
                 <a:solidFill>
-                  <a:srgbClr val="333840"/>
-                </a:solidFill>
-                <a:latin typeface="Calibri"/>
+                  <a:srgbClr val="3C3937"/>
+                </a:solidFill>
+                <a:latin typeface="Arial"/>
               </a:rPr>
               <a:t>  Quiet engagement does not reprice a stock; public engagement forces the market to re-rate — and a 20-year reputation pulls sophisticated capital in behind us (the coattail effect).</a:t>
             </a:r>
@@ -12277,27 +12277,27 @@
             <a:r>
               <a:rPr sz="1450" b="1">
                 <a:solidFill>
-                  <a:srgbClr val="4A5D75"/>
-                </a:solidFill>
-                <a:latin typeface="Calibri"/>
+                  <a:srgbClr val="556A83"/>
+                </a:solidFill>
+                <a:latin typeface="Arial"/>
               </a:rPr>
               <a:t>›  </a:t>
             </a:r>
             <a:r>
               <a:rPr sz="1450" b="1">
                 <a:solidFill>
-                  <a:srgbClr val="1E334E"/>
-                </a:solidFill>
-                <a:latin typeface="Calibri"/>
+                  <a:srgbClr val="314359"/>
+                </a:solidFill>
+                <a:latin typeface="Arial"/>
               </a:rPr>
               <a:t>The discomfort is the moat.</a:t>
             </a:r>
             <a:r>
               <a:rPr sz="1450">
                 <a:solidFill>
-                  <a:srgbClr val="333840"/>
-                </a:solidFill>
-                <a:latin typeface="Calibri"/>
+                  <a:srgbClr val="3C3937"/>
+                </a:solidFill>
+                <a:latin typeface="Arial"/>
               </a:rPr>
               <a:t>  Few managers have the industrial background and stamina to wage a multi-year campaign — so headline-shy capital leaves a persistent pricing inefficiency for those who will.</a:t>
             </a:r>
@@ -12314,27 +12314,27 @@
             <a:r>
               <a:rPr sz="1450" b="1">
                 <a:solidFill>
-                  <a:srgbClr val="4A5D75"/>
-                </a:solidFill>
-                <a:latin typeface="Calibri"/>
+                  <a:srgbClr val="556A83"/>
+                </a:solidFill>
+                <a:latin typeface="Arial"/>
               </a:rPr>
               <a:t>›  </a:t>
             </a:r>
             <a:r>
               <a:rPr sz="1450" b="1">
                 <a:solidFill>
-                  <a:srgbClr val="1E334E"/>
-                </a:solidFill>
-                <a:latin typeface="Calibri"/>
+                  <a:srgbClr val="314359"/>
+                </a:solidFill>
+                <a:latin typeface="Arial"/>
               </a:rPr>
               <a:t>A board seat de-risks the asset.</a:t>
             </a:r>
             <a:r>
               <a:rPr sz="1450">
                 <a:solidFill>
-                  <a:srgbClr val="333840"/>
-                </a:solidFill>
-                <a:latin typeface="Calibri"/>
+                  <a:srgbClr val="3C3937"/>
+                </a:solidFill>
+                <a:latin typeface="Arial"/>
               </a:rPr>
               <a:t>  We trade optical, mark-to-market volatility for direct control of cash flow, capex and pay. Fundamental risk falls the moment control is secured — whatever the share price does.</a:t>
             </a:r>
@@ -12351,27 +12351,27 @@
             <a:r>
               <a:rPr sz="1450" b="1">
                 <a:solidFill>
-                  <a:srgbClr val="4A5D75"/>
-                </a:solidFill>
-                <a:latin typeface="Calibri"/>
+                  <a:srgbClr val="556A83"/>
+                </a:solidFill>
+                <a:latin typeface="Arial"/>
               </a:rPr>
               <a:t>›  </a:t>
             </a:r>
             <a:r>
               <a:rPr sz="1450" b="1">
                 <a:solidFill>
-                  <a:srgbClr val="1E334E"/>
-                </a:solidFill>
-                <a:latin typeface="Calibri"/>
+                  <a:srgbClr val="314359"/>
+                </a:solidFill>
+                <a:latin typeface="Arial"/>
               </a:rPr>
               <a:t>The J-curve is tradable, not painful.</a:t>
             </a:r>
             <a:r>
               <a:rPr sz="1450">
                 <a:solidFill>
-                  <a:srgbClr val="333840"/>
-                </a:solidFill>
-                <a:latin typeface="Calibri"/>
+                  <a:srgbClr val="3C3937"/>
+                </a:solidFill>
+                <a:latin typeface="Arial"/>
               </a:rPr>
               <a:t>  Unlike PE’s accounting J-curve, ours is live and observable — an engineered entry point (and a co-invest “free look”) at de-risked governance at distressed prices.</a:t>
             </a:r>
@@ -12388,27 +12388,27 @@
             <a:r>
               <a:rPr sz="1450" b="1">
                 <a:solidFill>
-                  <a:srgbClr val="4A5D75"/>
-                </a:solidFill>
-                <a:latin typeface="Calibri"/>
+                  <a:srgbClr val="556A83"/>
+                </a:solidFill>
+                <a:latin typeface="Arial"/>
               </a:rPr>
               <a:t>›  </a:t>
             </a:r>
             <a:r>
               <a:rPr sz="1450" b="1">
                 <a:solidFill>
-                  <a:srgbClr val="1E334E"/>
-                </a:solidFill>
-                <a:latin typeface="Calibri"/>
+                  <a:srgbClr val="314359"/>
+                </a:solidFill>
+                <a:latin typeface="Arial"/>
               </a:rPr>
               <a:t>Public scoreboard, daily.</a:t>
             </a:r>
             <a:r>
               <a:rPr sz="1450">
                 <a:solidFill>
-                  <a:srgbClr val="333840"/>
-                </a:solidFill>
-                <a:latin typeface="Calibri"/>
+                  <a:srgbClr val="3C3937"/>
+                </a:solidFill>
+                <a:latin typeface="Arial"/>
               </a:rPr>
               <a:t>  There is nowhere to hide poor capital allocation — the discipline behind a 92% deal-level hit rate over 20 years.</a:t>
             </a:r>
@@ -12534,9 +12534,9 @@
             <a:r>
               <a:rPr sz="1100" b="0" i="0">
                 <a:solidFill>
-                  <a:srgbClr val="4A5D75"/>
-                </a:solidFill>
-                <a:latin typeface="Calibri"/>
+                  <a:srgbClr val="6F8990"/>
+                </a:solidFill>
+                <a:latin typeface="Arial"/>
               </a:rPr>
               <a:t>Strategic Case</a:t>
             </a:r>
@@ -12576,9 +12576,9 @@
             <a:r>
               <a:rPr sz="1100" b="1" i="0">
                 <a:solidFill>
-                  <a:srgbClr val="4A5D75"/>
-                </a:solidFill>
-                <a:latin typeface="Calibri"/>
+                  <a:srgbClr val="6F8990"/>
+                </a:solidFill>
+                <a:latin typeface="Arial"/>
               </a:rPr>
               <a:t>Figure 3</a:t>
             </a:r>
@@ -12600,7 +12600,7 @@
             <a:avLst/>
           </a:prstGeom>
           <a:solidFill>
-            <a:srgbClr val="F1F2F4"/>
+            <a:srgbClr val="F6F7F9"/>
           </a:solidFill>
           <a:ln>
             <a:noFill/>
@@ -12662,7 +12662,7 @@
             <a:r>
               <a:rPr sz="3000" b="0" i="0">
                 <a:solidFill>
-                  <a:srgbClr val="1E334E"/>
+                  <a:srgbClr val="314359"/>
                 </a:solidFill>
                 <a:latin typeface="Times New Roman"/>
               </a:rPr>
@@ -12704,9 +12704,9 @@
             <a:r>
               <a:rPr sz="1300" b="0" i="1">
                 <a:solidFill>
-                  <a:srgbClr val="5A636E"/>
-                </a:solidFill>
-                <a:latin typeface="Calibri"/>
+                  <a:srgbClr val="64615E"/>
+                </a:solidFill>
+                <a:latin typeface="Arial"/>
               </a:rPr>
               <a:t>Public engaged ownership marks to market every day. The destination is the multiple; the route is rarely a straight line.</a:t>
             </a:r>
@@ -12746,9 +12746,9 @@
             <a:r>
               <a:rPr sz="850" b="0" i="0">
                 <a:solidFill>
-                  <a:srgbClr val="9AA4B0"/>
-                </a:solidFill>
-                <a:latin typeface="Calibri"/>
+                  <a:srgbClr val="9A958E"/>
+                </a:solidFill>
+                <a:latin typeface="Arial"/>
               </a:rPr>
               <a:t>Strictly confidential          15</a:t>
             </a:r>
@@ -12788,27 +12788,27 @@
             <a:r>
               <a:rPr sz="1350" b="1">
                 <a:solidFill>
-                  <a:srgbClr val="4A5D75"/>
-                </a:solidFill>
-                <a:latin typeface="Calibri"/>
+                  <a:srgbClr val="556A83"/>
+                </a:solidFill>
+                <a:latin typeface="Arial"/>
               </a:rPr>
               <a:t>›  </a:t>
             </a:r>
             <a:r>
               <a:rPr sz="1350" b="1">
                 <a:solidFill>
-                  <a:srgbClr val="1E334E"/>
-                </a:solidFill>
-                <a:latin typeface="Calibri"/>
+                  <a:srgbClr val="314359"/>
+                </a:solidFill>
+                <a:latin typeface="Arial"/>
               </a:rPr>
               <a:t>Value moves over the holding period.</a:t>
             </a:r>
             <a:r>
               <a:rPr sz="1350">
                 <a:solidFill>
-                  <a:srgbClr val="333840"/>
-                </a:solidFill>
-                <a:latin typeface="Calibri"/>
+                  <a:srgbClr val="3C3937"/>
+                </a:solidFill>
+                <a:latin typeface="Arial"/>
               </a:rPr>
               <a:t>  A 5× outcome is realised over years — the interim mark moves with the market, the cycle and the campaign. It is a journey, not a coupon.</a:t>
             </a:r>
@@ -12825,27 +12825,27 @@
             <a:r>
               <a:rPr sz="1350" b="1">
                 <a:solidFill>
-                  <a:srgbClr val="4A5D75"/>
-                </a:solidFill>
-                <a:latin typeface="Calibri"/>
+                  <a:srgbClr val="556A83"/>
+                </a:solidFill>
+                <a:latin typeface="Arial"/>
               </a:rPr>
               <a:t>›  </a:t>
             </a:r>
             <a:r>
               <a:rPr sz="1350" b="1">
                 <a:solidFill>
-                  <a:srgbClr val="1E334E"/>
-                </a:solidFill>
-                <a:latin typeface="Calibri"/>
+                  <a:srgbClr val="314359"/>
+                </a:solidFill>
+                <a:latin typeface="Arial"/>
               </a:rPr>
               <a:t>PE looks smooth because it is appraised, not traded.</a:t>
             </a:r>
             <a:r>
               <a:rPr sz="1350">
                 <a:solidFill>
-                  <a:srgbClr val="333840"/>
-                </a:solidFill>
-                <a:latin typeface="Calibri"/>
+                  <a:srgbClr val="3C3937"/>
+                </a:solidFill>
+                <a:latin typeface="Arial"/>
               </a:rPr>
               <a:t>  Infrequent, model-based marks understate true economic volatility — “volatility laundering.” Marked daily, a levered buyout would swing as much or more.</a:t>
             </a:r>
@@ -12862,27 +12862,27 @@
             <a:r>
               <a:rPr sz="1350" b="1">
                 <a:solidFill>
-                  <a:srgbClr val="4A5D75"/>
-                </a:solidFill>
-                <a:latin typeface="Calibri"/>
+                  <a:srgbClr val="556A83"/>
+                </a:solidFill>
+                <a:latin typeface="Arial"/>
               </a:rPr>
               <a:t>›  </a:t>
             </a:r>
             <a:r>
               <a:rPr sz="1350" b="1">
                 <a:solidFill>
-                  <a:srgbClr val="1E334E"/>
-                </a:solidFill>
-                <a:latin typeface="Calibri"/>
+                  <a:srgbClr val="314359"/>
+                </a:solidFill>
+                <a:latin typeface="Arial"/>
               </a:rPr>
               <a:t>Same economics, honest optics.</a:t>
             </a:r>
             <a:r>
               <a:rPr sz="1350">
                 <a:solidFill>
-                  <a:srgbClr val="333840"/>
-                </a:solidFill>
-                <a:latin typeface="Calibri"/>
+                  <a:srgbClr val="3C3937"/>
+                </a:solidFill>
+                <a:latin typeface="Arial"/>
               </a:rPr>
               <a:t>  We hold the same kind of assets PE does — we simply report them at live prices and accept the J-curve as the toll paid for liquidity.</a:t>
             </a:r>
@@ -12940,9 +12940,9 @@
             <a:r>
               <a:rPr sz="1000" b="0" i="1">
                 <a:solidFill>
-                  <a:srgbClr val="9AA4B0"/>
-                </a:solidFill>
-                <a:latin typeface="Calibri"/>
+                  <a:srgbClr val="9A958E"/>
+                </a:solidFill>
+                <a:latin typeface="Arial"/>
               </a:rPr>
               <a:t>Illustrative. Both reach the same value; only the public line shows the honest interim drawdown.</a:t>
             </a:r>
@@ -13068,9 +13068,9 @@
             <a:r>
               <a:rPr sz="1100" b="0" i="0">
                 <a:solidFill>
-                  <a:srgbClr val="4A5D75"/>
-                </a:solidFill>
-                <a:latin typeface="Calibri"/>
+                  <a:srgbClr val="6F8990"/>
+                </a:solidFill>
+                <a:latin typeface="Arial"/>
               </a:rPr>
               <a:t>Strategic Case</a:t>
             </a:r>
@@ -13110,9 +13110,9 @@
             <a:r>
               <a:rPr sz="1100" b="1" i="0">
                 <a:solidFill>
-                  <a:srgbClr val="4A5D75"/>
-                </a:solidFill>
-                <a:latin typeface="Calibri"/>
+                  <a:srgbClr val="6F8990"/>
+                </a:solidFill>
+                <a:latin typeface="Arial"/>
               </a:rPr>
               <a:t>Table 3</a:t>
             </a:r>
@@ -13134,7 +13134,7 @@
             <a:avLst/>
           </a:prstGeom>
           <a:solidFill>
-            <a:srgbClr val="F1F2F4"/>
+            <a:srgbClr val="F6F7F9"/>
           </a:solidFill>
           <a:ln>
             <a:noFill/>
@@ -13196,7 +13196,7 @@
             <a:r>
               <a:rPr sz="3000" b="0" i="0">
                 <a:solidFill>
-                  <a:srgbClr val="1E334E"/>
+                  <a:srgbClr val="314359"/>
                 </a:solidFill>
                 <a:latin typeface="Times New Roman"/>
               </a:rPr>
@@ -13238,9 +13238,9 @@
             <a:r>
               <a:rPr sz="1300" b="0" i="1">
                 <a:solidFill>
-                  <a:srgbClr val="5A636E"/>
-                </a:solidFill>
-                <a:latin typeface="Calibri"/>
+                  <a:srgbClr val="64615E"/>
+                </a:solidFill>
+                <a:latin typeface="Arial"/>
               </a:rPr>
               <a:t>What the committee sees on the surface — versus what it is actually underwriting.</a:t>
             </a:r>
@@ -13280,9 +13280,9 @@
             <a:r>
               <a:rPr sz="850" b="0" i="0">
                 <a:solidFill>
-                  <a:srgbClr val="9AA4B0"/>
-                </a:solidFill>
-                <a:latin typeface="Calibri"/>
+                  <a:srgbClr val="9A958E"/>
+                </a:solidFill>
+                <a:latin typeface="Arial"/>
               </a:rPr>
               <a:t>Strictly confidential          16</a:t>
             </a:r>
@@ -13304,7 +13304,7 @@
             <a:avLst/>
           </a:prstGeom>
           <a:solidFill>
-            <a:srgbClr val="4A5D75"/>
+            <a:srgbClr val="556A83"/>
           </a:solidFill>
           <a:ln>
             <a:noFill/>
@@ -13368,7 +13368,7 @@
                 <a:solidFill>
                   <a:srgbClr val="FFFFFF"/>
                 </a:solidFill>
-                <a:latin typeface="Calibri"/>
+                <a:latin typeface="Arial"/>
               </a:rPr>
               <a:t>What the IC sees</a:t>
             </a:r>
@@ -13390,7 +13390,7 @@
             <a:avLst/>
           </a:prstGeom>
           <a:solidFill>
-            <a:srgbClr val="4A5D75"/>
+            <a:srgbClr val="556A83"/>
           </a:solidFill>
           <a:ln>
             <a:noFill/>
@@ -13454,7 +13454,7 @@
                 <a:solidFill>
                   <a:srgbClr val="FFFFFF"/>
                 </a:solidFill>
-                <a:latin typeface="Calibri"/>
+                <a:latin typeface="Arial"/>
               </a:rPr>
               <a:t>What it is actually underwriting</a:t>
             </a:r>
@@ -13476,7 +13476,7 @@
             <a:avLst/>
           </a:prstGeom>
           <a:solidFill>
-            <a:srgbClr val="F1F2F4"/>
+            <a:srgbClr val="F6F7F9"/>
           </a:solidFill>
           <a:ln>
             <a:noFill/>
@@ -13538,9 +13538,9 @@
             <a:r>
               <a:rPr sz="1200" b="0" i="0">
                 <a:solidFill>
-                  <a:srgbClr val="5A636E"/>
-                </a:solidFill>
-                <a:latin typeface="Calibri"/>
+                  <a:srgbClr val="64615E"/>
+                </a:solidFill>
+                <a:latin typeface="Arial"/>
               </a:rPr>
               <a:t>Reputational / headline risk</a:t>
             </a:r>
@@ -13562,7 +13562,7 @@
             <a:avLst/>
           </a:prstGeom>
           <a:solidFill>
-            <a:srgbClr val="F1F2F4"/>
+            <a:srgbClr val="F6F7F9"/>
           </a:solidFill>
           <a:ln>
             <a:noFill/>
@@ -13624,9 +13624,9 @@
             <a:r>
               <a:rPr sz="1200" b="1" i="0">
                 <a:solidFill>
-                  <a:srgbClr val="1E334E"/>
-                </a:solidFill>
-                <a:latin typeface="Calibri"/>
+                  <a:srgbClr val="314359"/>
+                </a:solidFill>
+                <a:latin typeface="Arial"/>
               </a:rPr>
               <a:t>The catalyst that forces repricing — and a moat that keeps competitors out</a:t>
             </a:r>
@@ -13710,9 +13710,9 @@
             <a:r>
               <a:rPr sz="1200" b="0" i="0">
                 <a:solidFill>
-                  <a:srgbClr val="5A636E"/>
-                </a:solidFill>
-                <a:latin typeface="Calibri"/>
+                  <a:srgbClr val="64615E"/>
+                </a:solidFill>
+                <a:latin typeface="Arial"/>
               </a:rPr>
               <a:t>Public J-curve &amp; mark-to-market drawdown</a:t>
             </a:r>
@@ -13796,9 +13796,9 @@
             <a:r>
               <a:rPr sz="1200" b="1" i="0">
                 <a:solidFill>
-                  <a:srgbClr val="1E334E"/>
-                </a:solidFill>
-                <a:latin typeface="Calibri"/>
+                  <a:srgbClr val="314359"/>
+                </a:solidFill>
+                <a:latin typeface="Arial"/>
               </a:rPr>
               <a:t>A live, tradable entry into an asset already de-risked by board control</a:t>
             </a:r>
@@ -13820,7 +13820,7 @@
             <a:avLst/>
           </a:prstGeom>
           <a:solidFill>
-            <a:srgbClr val="F1F2F4"/>
+            <a:srgbClr val="F6F7F9"/>
           </a:solidFill>
           <a:ln>
             <a:noFill/>
@@ -13882,9 +13882,9 @@
             <a:r>
               <a:rPr sz="1200" b="0" i="0">
                 <a:solidFill>
-                  <a:srgbClr val="5A636E"/>
-                </a:solidFill>
-                <a:latin typeface="Calibri"/>
+                  <a:srgbClr val="64615E"/>
+                </a:solidFill>
+                <a:latin typeface="Arial"/>
               </a:rPr>
               <a:t>~50% peak-to-trough swings</a:t>
             </a:r>
@@ -13906,7 +13906,7 @@
             <a:avLst/>
           </a:prstGeom>
           <a:solidFill>
-            <a:srgbClr val="F1F2F4"/>
+            <a:srgbClr val="F6F7F9"/>
           </a:solidFill>
           <a:ln>
             <a:noFill/>
@@ -13968,9 +13968,9 @@
             <a:r>
               <a:rPr sz="1200" b="1" i="0">
                 <a:solidFill>
-                  <a:srgbClr val="1E334E"/>
-                </a:solidFill>
-                <a:latin typeface="Calibri"/>
+                  <a:srgbClr val="314359"/>
+                </a:solidFill>
+                <a:latin typeface="Arial"/>
               </a:rPr>
               <a:t>Optical volatility; two such drawdowns fully recovered (2010, 2020) · Sortino 2.40</a:t>
             </a:r>
@@ -14054,9 +14054,9 @@
             <a:r>
               <a:rPr sz="1200" b="0" i="0">
                 <a:solidFill>
-                  <a:srgbClr val="5A636E"/>
-                </a:solidFill>
-                <a:latin typeface="Calibri"/>
+                  <a:srgbClr val="64615E"/>
+                </a:solidFill>
+                <a:latin typeface="Arial"/>
               </a:rPr>
               <a:t>Concentration in 8–12 names</a:t>
             </a:r>
@@ -14140,9 +14140,9 @@
             <a:r>
               <a:rPr sz="1200" b="1" i="0">
                 <a:solidFill>
-                  <a:srgbClr val="1E334E"/>
-                </a:solidFill>
-                <a:latin typeface="Calibri"/>
+                  <a:srgbClr val="314359"/>
+                </a:solidFill>
+                <a:latin typeface="Arial"/>
               </a:rPr>
               <a:t>Deliberate conviction sizing — the skill (85.7% hit on ≥10% names; +0.73)</a:t>
             </a:r>
@@ -14164,7 +14164,7 @@
             <a:avLst/>
           </a:prstGeom>
           <a:solidFill>
-            <a:srgbClr val="F1F2F4"/>
+            <a:srgbClr val="F6F7F9"/>
           </a:solidFill>
           <a:ln>
             <a:noFill/>
@@ -14226,9 +14226,9 @@
             <a:r>
               <a:rPr sz="1200" b="0" i="0">
                 <a:solidFill>
-                  <a:srgbClr val="5A636E"/>
-                </a:solidFill>
-                <a:latin typeface="Calibri"/>
+                  <a:srgbClr val="64615E"/>
+                </a:solidFill>
+                <a:latin typeface="Arial"/>
               </a:rPr>
               <a:t>“Catching a falling knife”</a:t>
             </a:r>
@@ -14250,7 +14250,7 @@
             <a:avLst/>
           </a:prstGeom>
           <a:solidFill>
-            <a:srgbClr val="F1F2F4"/>
+            <a:srgbClr val="F6F7F9"/>
           </a:solidFill>
           <a:ln>
             <a:noFill/>
@@ -14312,9 +14312,9 @@
             <a:r>
               <a:rPr sz="1200" b="1" i="0">
                 <a:solidFill>
-                  <a:srgbClr val="1E334E"/>
-                </a:solidFill>
-                <a:latin typeface="Calibri"/>
+                  <a:srgbClr val="314359"/>
+                </a:solidFill>
+                <a:latin typeface="Arial"/>
               </a:rPr>
               <a:t>Hard-floor valuation gates; entry below the value of the rectifiable core</a:t>
             </a:r>
@@ -14398,9 +14398,9 @@
             <a:r>
               <a:rPr sz="1200" b="0" i="0">
                 <a:solidFill>
-                  <a:srgbClr val="5A636E"/>
-                </a:solidFill>
-                <a:latin typeface="Calibri"/>
+                  <a:srgbClr val="64615E"/>
+                </a:solidFill>
+                <a:latin typeface="Arial"/>
               </a:rPr>
               <a:t>Single-name dependence</a:t>
             </a:r>
@@ -14484,9 +14484,9 @@
             <a:r>
               <a:rPr sz="1200" b="1" i="0">
                 <a:solidFill>
-                  <a:srgbClr val="1E334E"/>
-                </a:solidFill>
-                <a:latin typeface="Calibri"/>
+                  <a:srgbClr val="314359"/>
+                </a:solidFill>
+                <a:latin typeface="Arial"/>
               </a:rPr>
               <a:t>One ≥5× MOIC win every ~2 years; competitive even excluding the largest</a:t>
             </a:r>
@@ -14526,9 +14526,9 @@
             <a:r>
               <a:rPr sz="1300" b="0" i="1">
                 <a:solidFill>
-                  <a:srgbClr val="4A5D75"/>
-                </a:solidFill>
-                <a:latin typeface="Calibri"/>
+                  <a:srgbClr val="556A83"/>
+                </a:solidFill>
+                <a:latin typeface="Arial"/>
               </a:rPr>
               <a:t>The IC is not paying for safety. It is paying for proven willingness to take compensated discomfort — +6 percentage points per year, net of every fee, for 20 years.</a:t>
             </a:r>
@@ -14654,9 +14654,9 @@
             <a:r>
               <a:rPr sz="1100" b="0" i="0">
                 <a:solidFill>
-                  <a:srgbClr val="4A5D75"/>
-                </a:solidFill>
-                <a:latin typeface="Calibri"/>
+                  <a:srgbClr val="6F8990"/>
+                </a:solidFill>
+                <a:latin typeface="Arial"/>
               </a:rPr>
               <a:t>Overview</a:t>
             </a:r>
@@ -14678,7 +14678,7 @@
             <a:avLst/>
           </a:prstGeom>
           <a:solidFill>
-            <a:srgbClr val="F1F2F4"/>
+            <a:srgbClr val="F6F7F9"/>
           </a:solidFill>
           <a:ln>
             <a:noFill/>
@@ -14740,7 +14740,7 @@
             <a:r>
               <a:rPr sz="3000" b="0" i="0">
                 <a:solidFill>
-                  <a:srgbClr val="1E334E"/>
+                  <a:srgbClr val="314359"/>
                 </a:solidFill>
                 <a:latin typeface="Times New Roman"/>
               </a:rPr>
@@ -14782,9 +14782,9 @@
             <a:r>
               <a:rPr sz="850" b="0" i="0">
                 <a:solidFill>
-                  <a:srgbClr val="9AA4B0"/>
-                </a:solidFill>
-                <a:latin typeface="Calibri"/>
+                  <a:srgbClr val="9A958E"/>
+                </a:solidFill>
+                <a:latin typeface="Arial"/>
               </a:rPr>
               <a:t>Strictly confidential          1</a:t>
             </a:r>
@@ -14824,7 +14824,7 @@
             <a:r>
               <a:rPr sz="1400" b="1" i="0">
                 <a:solidFill>
-                  <a:srgbClr val="4A5D75"/>
+                  <a:srgbClr val="556A83"/>
                 </a:solidFill>
                 <a:latin typeface="Times New Roman"/>
               </a:rPr>
@@ -14866,18 +14866,18 @@
             <a:r>
               <a:rPr sz="1150" b="1">
                 <a:solidFill>
-                  <a:srgbClr val="4A5D75"/>
-                </a:solidFill>
-                <a:latin typeface="Calibri"/>
+                  <a:srgbClr val="556A83"/>
+                </a:solidFill>
+                <a:latin typeface="Arial"/>
               </a:rPr>
               <a:t>1.1   </a:t>
             </a:r>
             <a:r>
               <a:rPr sz="1150">
                 <a:solidFill>
-                  <a:srgbClr val="1E334E"/>
-                </a:solidFill>
-                <a:latin typeface="Calibri"/>
+                  <a:srgbClr val="314359"/>
+                </a:solidFill>
+                <a:latin typeface="Arial"/>
               </a:rPr>
               <a:t>A catalyst-driven source of return</a:t>
             </a:r>
@@ -14894,18 +14894,18 @@
             <a:r>
               <a:rPr sz="1150" b="1">
                 <a:solidFill>
-                  <a:srgbClr val="4A5D75"/>
-                </a:solidFill>
-                <a:latin typeface="Calibri"/>
+                  <a:srgbClr val="556A83"/>
+                </a:solidFill>
+                <a:latin typeface="Arial"/>
               </a:rPr>
               <a:t>1.2   </a:t>
             </a:r>
             <a:r>
               <a:rPr sz="1150">
                 <a:solidFill>
-                  <a:srgbClr val="1E334E"/>
-                </a:solidFill>
-                <a:latin typeface="Calibri"/>
+                  <a:srgbClr val="314359"/>
+                </a:solidFill>
+                <a:latin typeface="Arial"/>
               </a:rPr>
               <a:t>Aligned with horizon and fiduciary duty</a:t>
             </a:r>
@@ -14922,18 +14922,18 @@
             <a:r>
               <a:rPr sz="1150" b="1">
                 <a:solidFill>
-                  <a:srgbClr val="4A5D75"/>
-                </a:solidFill>
-                <a:latin typeface="Calibri"/>
+                  <a:srgbClr val="556A83"/>
+                </a:solidFill>
+                <a:latin typeface="Arial"/>
               </a:rPr>
               <a:t>1.3   </a:t>
             </a:r>
             <a:r>
               <a:rPr sz="1150">
                 <a:solidFill>
-                  <a:srgbClr val="1E334E"/>
-                </a:solidFill>
-                <a:latin typeface="Calibri"/>
+                  <a:srgbClr val="314359"/>
+                </a:solidFill>
+                <a:latin typeface="Arial"/>
               </a:rPr>
               <a:t>Diversification and the total-portfolio view</a:t>
             </a:r>
@@ -14950,18 +14950,18 @@
             <a:r>
               <a:rPr sz="1150" b="1">
                 <a:solidFill>
-                  <a:srgbClr val="4A5D75"/>
-                </a:solidFill>
-                <a:latin typeface="Calibri"/>
+                  <a:srgbClr val="556A83"/>
+                </a:solidFill>
+                <a:latin typeface="Arial"/>
               </a:rPr>
               <a:t>1.4   </a:t>
             </a:r>
             <a:r>
               <a:rPr sz="1150">
                 <a:solidFill>
-                  <a:srgbClr val="1E334E"/>
-                </a:solidFill>
-                <a:latin typeface="Calibri"/>
+                  <a:srgbClr val="314359"/>
+                </a:solidFill>
+                <a:latin typeface="Arial"/>
               </a:rPr>
               <a:t>Governance and the ESG synergy</a:t>
             </a:r>
@@ -14978,18 +14978,18 @@
             <a:r>
               <a:rPr sz="1150" b="1">
                 <a:solidFill>
-                  <a:srgbClr val="4A5D75"/>
-                </a:solidFill>
-                <a:latin typeface="Calibri"/>
+                  <a:srgbClr val="556A83"/>
+                </a:solidFill>
+                <a:latin typeface="Arial"/>
               </a:rPr>
               <a:t>1.5   </a:t>
             </a:r>
             <a:r>
               <a:rPr sz="1150">
                 <a:solidFill>
-                  <a:srgbClr val="1E334E"/>
-                </a:solidFill>
-                <a:latin typeface="Calibri"/>
+                  <a:srgbClr val="314359"/>
+                </a:solidFill>
+                <a:latin typeface="Arial"/>
               </a:rPr>
               <a:t>What separates a great engaged owner</a:t>
             </a:r>
@@ -15029,7 +15029,7 @@
             <a:r>
               <a:rPr sz="1400" b="1" i="0">
                 <a:solidFill>
-                  <a:srgbClr val="4A5D75"/>
+                  <a:srgbClr val="556A83"/>
                 </a:solidFill>
                 <a:latin typeface="Times New Roman"/>
               </a:rPr>
@@ -15071,18 +15071,18 @@
             <a:r>
               <a:rPr sz="1150" b="1">
                 <a:solidFill>
-                  <a:srgbClr val="4A5D75"/>
-                </a:solidFill>
-                <a:latin typeface="Calibri"/>
+                  <a:srgbClr val="556A83"/>
+                </a:solidFill>
+                <a:latin typeface="Arial"/>
               </a:rPr>
               <a:t>2.1   </a:t>
             </a:r>
             <a:r>
               <a:rPr sz="1150">
                 <a:solidFill>
-                  <a:srgbClr val="1E334E"/>
-                </a:solidFill>
-                <a:latin typeface="Calibri"/>
+                  <a:srgbClr val="314359"/>
+                </a:solidFill>
+                <a:latin typeface="Arial"/>
               </a:rPr>
               <a:t>Athanase at a glance</a:t>
             </a:r>
@@ -15099,18 +15099,18 @@
             <a:r>
               <a:rPr sz="1150" b="1">
                 <a:solidFill>
-                  <a:srgbClr val="4A5D75"/>
-                </a:solidFill>
-                <a:latin typeface="Calibri"/>
+                  <a:srgbClr val="556A83"/>
+                </a:solidFill>
+                <a:latin typeface="Arial"/>
               </a:rPr>
               <a:t>2.2   </a:t>
             </a:r>
             <a:r>
               <a:rPr sz="1150">
                 <a:solidFill>
-                  <a:srgbClr val="1E334E"/>
-                </a:solidFill>
-                <a:latin typeface="Calibri"/>
+                  <a:srgbClr val="314359"/>
+                </a:solidFill>
+                <a:latin typeface="Arial"/>
               </a:rPr>
               <a:t>An integrated team, 20 years together</a:t>
             </a:r>
@@ -15127,27 +15127,27 @@
             <a:r>
               <a:rPr sz="1150" b="1">
                 <a:solidFill>
-                  <a:srgbClr val="4A5D75"/>
-                </a:solidFill>
-                <a:latin typeface="Calibri"/>
+                  <a:srgbClr val="556A83"/>
+                </a:solidFill>
+                <a:latin typeface="Arial"/>
               </a:rPr>
               <a:t>2.3   </a:t>
             </a:r>
             <a:r>
               <a:rPr sz="1150">
                 <a:solidFill>
-                  <a:srgbClr val="1E334E"/>
-                </a:solidFill>
-                <a:latin typeface="Calibri"/>
+                  <a:srgbClr val="314359"/>
+                </a:solidFill>
+                <a:latin typeface="Arial"/>
               </a:rPr>
               <a:t>The inefficiency Athanase harvests</a:t>
             </a:r>
             <a:r>
               <a:rPr sz="950" i="1">
                 <a:solidFill>
-                  <a:srgbClr val="5A636E"/>
-                </a:solidFill>
-                <a:latin typeface="Calibri"/>
+                  <a:srgbClr val="64615E"/>
+                </a:solidFill>
+                <a:latin typeface="Arial"/>
               </a:rPr>
               <a:t>   (Figure 1)</a:t>
             </a:r>
@@ -15164,27 +15164,27 @@
             <a:r>
               <a:rPr sz="1150" b="1">
                 <a:solidFill>
-                  <a:srgbClr val="4A5D75"/>
-                </a:solidFill>
-                <a:latin typeface="Calibri"/>
+                  <a:srgbClr val="556A83"/>
+                </a:solidFill>
+                <a:latin typeface="Arial"/>
               </a:rPr>
               <a:t>2.4   </a:t>
             </a:r>
             <a:r>
               <a:rPr sz="1150">
                 <a:solidFill>
-                  <a:srgbClr val="1E334E"/>
-                </a:solidFill>
-                <a:latin typeface="Calibri"/>
+                  <a:srgbClr val="314359"/>
+                </a:solidFill>
+                <a:latin typeface="Arial"/>
               </a:rPr>
               <a:t>We don’t buy broken companies — we buy hidden cores</a:t>
             </a:r>
             <a:r>
               <a:rPr sz="950" i="1">
                 <a:solidFill>
-                  <a:srgbClr val="5A636E"/>
-                </a:solidFill>
-                <a:latin typeface="Calibri"/>
+                  <a:srgbClr val="64615E"/>
+                </a:solidFill>
+                <a:latin typeface="Arial"/>
               </a:rPr>
               <a:t>   (Figure 2)</a:t>
             </a:r>
@@ -15201,27 +15201,27 @@
             <a:r>
               <a:rPr sz="1150" b="1">
                 <a:solidFill>
-                  <a:srgbClr val="4A5D75"/>
-                </a:solidFill>
-                <a:latin typeface="Calibri"/>
+                  <a:srgbClr val="556A83"/>
+                </a:solidFill>
+                <a:latin typeface="Arial"/>
               </a:rPr>
               <a:t>2.5   </a:t>
             </a:r>
             <a:r>
               <a:rPr sz="1150">
                 <a:solidFill>
-                  <a:srgbClr val="1E334E"/>
-                </a:solidFill>
-                <a:latin typeface="Calibri"/>
+                  <a:srgbClr val="314359"/>
+                </a:solidFill>
+                <a:latin typeface="Arial"/>
               </a:rPr>
               <a:t>Quality-core constructivism — how we differ</a:t>
             </a:r>
             <a:r>
               <a:rPr sz="950" i="1">
                 <a:solidFill>
-                  <a:srgbClr val="5A636E"/>
-                </a:solidFill>
-                <a:latin typeface="Calibri"/>
+                  <a:srgbClr val="64615E"/>
+                </a:solidFill>
+                <a:latin typeface="Arial"/>
               </a:rPr>
               <a:t>   (Table 1)</a:t>
             </a:r>
@@ -15238,27 +15238,27 @@
             <a:r>
               <a:rPr sz="1150" b="1">
                 <a:solidFill>
-                  <a:srgbClr val="4A5D75"/>
-                </a:solidFill>
-                <a:latin typeface="Calibri"/>
+                  <a:srgbClr val="556A83"/>
+                </a:solidFill>
+                <a:latin typeface="Arial"/>
               </a:rPr>
               <a:t>2.6   </a:t>
             </a:r>
             <a:r>
               <a:rPr sz="1150">
                 <a:solidFill>
-                  <a:srgbClr val="1E334E"/>
-                </a:solidFill>
-                <a:latin typeface="Calibri"/>
+                  <a:srgbClr val="314359"/>
+                </a:solidFill>
+                <a:latin typeface="Arial"/>
               </a:rPr>
               <a:t>We don’t need to be right more than ~50%</a:t>
             </a:r>
             <a:r>
               <a:rPr sz="950" i="1">
                 <a:solidFill>
-                  <a:srgbClr val="5A636E"/>
-                </a:solidFill>
-                <a:latin typeface="Calibri"/>
+                  <a:srgbClr val="64615E"/>
+                </a:solidFill>
+                <a:latin typeface="Arial"/>
               </a:rPr>
               <a:t>   (Table 2)</a:t>
             </a:r>
@@ -15275,18 +15275,18 @@
             <a:r>
               <a:rPr sz="1150" b="1">
                 <a:solidFill>
-                  <a:srgbClr val="4A5D75"/>
-                </a:solidFill>
-                <a:latin typeface="Calibri"/>
+                  <a:srgbClr val="556A83"/>
+                </a:solidFill>
+                <a:latin typeface="Arial"/>
               </a:rPr>
               <a:t>2.7   </a:t>
             </a:r>
             <a:r>
               <a:rPr sz="1150">
                 <a:solidFill>
-                  <a:srgbClr val="1E334E"/>
-                </a:solidFill>
-                <a:latin typeface="Calibri"/>
+                  <a:srgbClr val="314359"/>
+                </a:solidFill>
+                <a:latin typeface="Arial"/>
               </a:rPr>
               <a:t>A risk system built to avoid permanent loss</a:t>
             </a:r>
@@ -15303,18 +15303,18 @@
             <a:r>
               <a:rPr sz="1150" b="1">
                 <a:solidFill>
-                  <a:srgbClr val="4A5D75"/>
-                </a:solidFill>
-                <a:latin typeface="Calibri"/>
+                  <a:srgbClr val="556A83"/>
+                </a:solidFill>
+                <a:latin typeface="Arial"/>
               </a:rPr>
               <a:t>2.8   </a:t>
             </a:r>
             <a:r>
               <a:rPr sz="1150">
                 <a:solidFill>
-                  <a:srgbClr val="1E334E"/>
-                </a:solidFill>
-                <a:latin typeface="Calibri"/>
+                  <a:srgbClr val="314359"/>
+                </a:solidFill>
+                <a:latin typeface="Arial"/>
               </a:rPr>
               <a:t>The visible risks are the engine — not the cost</a:t>
             </a:r>
@@ -15331,27 +15331,27 @@
             <a:r>
               <a:rPr sz="1150" b="1">
                 <a:solidFill>
-                  <a:srgbClr val="4A5D75"/>
-                </a:solidFill>
-                <a:latin typeface="Calibri"/>
+                  <a:srgbClr val="556A83"/>
+                </a:solidFill>
+                <a:latin typeface="Arial"/>
               </a:rPr>
               <a:t>2.9   </a:t>
             </a:r>
             <a:r>
               <a:rPr sz="1150">
                 <a:solidFill>
-                  <a:srgbClr val="1E334E"/>
-                </a:solidFill>
-                <a:latin typeface="Calibri"/>
+                  <a:srgbClr val="314359"/>
+                </a:solidFill>
+                <a:latin typeface="Arial"/>
               </a:rPr>
               <a:t>A non-linear path — honestly priced</a:t>
             </a:r>
             <a:r>
               <a:rPr sz="950" i="1">
                 <a:solidFill>
-                  <a:srgbClr val="5A636E"/>
-                </a:solidFill>
-                <a:latin typeface="Calibri"/>
+                  <a:srgbClr val="64615E"/>
+                </a:solidFill>
+                <a:latin typeface="Arial"/>
               </a:rPr>
               <a:t>   (Figure 3)</a:t>
             </a:r>
@@ -15368,27 +15368,27 @@
             <a:r>
               <a:rPr sz="1150" b="1">
                 <a:solidFill>
-                  <a:srgbClr val="4A5D75"/>
-                </a:solidFill>
-                <a:latin typeface="Calibri"/>
+                  <a:srgbClr val="556A83"/>
+                </a:solidFill>
+                <a:latin typeface="Arial"/>
               </a:rPr>
               <a:t>2.10   </a:t>
             </a:r>
             <a:r>
               <a:rPr sz="1150">
                 <a:solidFill>
-                  <a:srgbClr val="1E334E"/>
-                </a:solidFill>
-                <a:latin typeface="Calibri"/>
+                  <a:srgbClr val="314359"/>
+                </a:solidFill>
+                <a:latin typeface="Arial"/>
               </a:rPr>
               <a:t>Risk reframing for the investment committee</a:t>
             </a:r>
             <a:r>
               <a:rPr sz="950" i="1">
                 <a:solidFill>
-                  <a:srgbClr val="5A636E"/>
-                </a:solidFill>
-                <a:latin typeface="Calibri"/>
+                  <a:srgbClr val="64615E"/>
+                </a:solidFill>
+                <a:latin typeface="Arial"/>
               </a:rPr>
               <a:t>   (Table 3)</a:t>
             </a:r>
@@ -15405,27 +15405,27 @@
             <a:r>
               <a:rPr sz="1150" b="1">
                 <a:solidFill>
-                  <a:srgbClr val="4A5D75"/>
-                </a:solidFill>
-                <a:latin typeface="Calibri"/>
+                  <a:srgbClr val="556A83"/>
+                </a:solidFill>
+                <a:latin typeface="Arial"/>
               </a:rPr>
               <a:t>2.11   </a:t>
             </a:r>
             <a:r>
               <a:rPr sz="1150">
                 <a:solidFill>
-                  <a:srgbClr val="1E334E"/>
-                </a:solidFill>
-                <a:latin typeface="Calibri"/>
+                  <a:srgbClr val="314359"/>
+                </a:solidFill>
+                <a:latin typeface="Arial"/>
               </a:rPr>
               <a:t>Proof: outperformance with downside protection</a:t>
             </a:r>
             <a:r>
               <a:rPr sz="950" i="1">
                 <a:solidFill>
-                  <a:srgbClr val="5A636E"/>
-                </a:solidFill>
-                <a:latin typeface="Calibri"/>
+                  <a:srgbClr val="64615E"/>
+                </a:solidFill>
+                <a:latin typeface="Arial"/>
               </a:rPr>
               <a:t>   (Figure 4)</a:t>
             </a:r>
@@ -15442,27 +15442,27 @@
             <a:r>
               <a:rPr sz="1150" b="1">
                 <a:solidFill>
-                  <a:srgbClr val="4A5D75"/>
-                </a:solidFill>
-                <a:latin typeface="Calibri"/>
+                  <a:srgbClr val="556A83"/>
+                </a:solidFill>
+                <a:latin typeface="Arial"/>
               </a:rPr>
               <a:t>2.12   </a:t>
             </a:r>
             <a:r>
               <a:rPr sz="1150">
                 <a:solidFill>
-                  <a:srgbClr val="1E334E"/>
-                </a:solidFill>
-                <a:latin typeface="Calibri"/>
+                  <a:srgbClr val="314359"/>
+                </a:solidFill>
+                <a:latin typeface="Arial"/>
               </a:rPr>
               <a:t>AIP Fund II — transactions (2015–present)</a:t>
             </a:r>
             <a:r>
               <a:rPr sz="950" i="1">
                 <a:solidFill>
-                  <a:srgbClr val="5A636E"/>
-                </a:solidFill>
-                <a:latin typeface="Calibri"/>
+                  <a:srgbClr val="64615E"/>
+                </a:solidFill>
+                <a:latin typeface="Arial"/>
               </a:rPr>
               <a:t>   (Table 4)</a:t>
             </a:r>
@@ -15479,27 +15479,27 @@
             <a:r>
               <a:rPr sz="1150" b="1">
                 <a:solidFill>
-                  <a:srgbClr val="4A5D75"/>
-                </a:solidFill>
-                <a:latin typeface="Calibri"/>
+                  <a:srgbClr val="556A83"/>
+                </a:solidFill>
+                <a:latin typeface="Arial"/>
               </a:rPr>
               <a:t>2.13   </a:t>
             </a:r>
             <a:r>
               <a:rPr sz="1150">
                 <a:solidFill>
-                  <a:srgbClr val="1E334E"/>
-                </a:solidFill>
-                <a:latin typeface="Calibri"/>
+                  <a:srgbClr val="314359"/>
+                </a:solidFill>
+                <a:latin typeface="Arial"/>
               </a:rPr>
               <a:t>Prior period — transactions (2006–2014)</a:t>
             </a:r>
             <a:r>
               <a:rPr sz="950" i="1">
                 <a:solidFill>
-                  <a:srgbClr val="5A636E"/>
-                </a:solidFill>
-                <a:latin typeface="Calibri"/>
+                  <a:srgbClr val="64615E"/>
+                </a:solidFill>
+                <a:latin typeface="Arial"/>
               </a:rPr>
               <a:t>   (Table 5)</a:t>
             </a:r>
@@ -15516,18 +15516,18 @@
             <a:r>
               <a:rPr sz="1150" b="1">
                 <a:solidFill>
-                  <a:srgbClr val="4A5D75"/>
-                </a:solidFill>
-                <a:latin typeface="Calibri"/>
+                  <a:srgbClr val="556A83"/>
+                </a:solidFill>
+                <a:latin typeface="Arial"/>
               </a:rPr>
               <a:t>2.14   </a:t>
             </a:r>
             <a:r>
               <a:rPr sz="1150">
                 <a:solidFill>
-                  <a:srgbClr val="1E334E"/>
-                </a:solidFill>
-                <a:latin typeface="Calibri"/>
+                  <a:srgbClr val="314359"/>
+                </a:solidFill>
+                <a:latin typeface="Arial"/>
               </a:rPr>
               <a:t>Independently validated: 20 years, net of every fee</a:t>
             </a:r>
@@ -15544,18 +15544,18 @@
             <a:r>
               <a:rPr sz="1150" b="1">
                 <a:solidFill>
-                  <a:srgbClr val="4A5D75"/>
-                </a:solidFill>
-                <a:latin typeface="Calibri"/>
+                  <a:srgbClr val="556A83"/>
+                </a:solidFill>
+                <a:latin typeface="Arial"/>
               </a:rPr>
               <a:t>2.15   </a:t>
             </a:r>
             <a:r>
               <a:rPr sz="1150">
                 <a:solidFill>
-                  <a:srgbClr val="1E334E"/>
-                </a:solidFill>
-                <a:latin typeface="Calibri"/>
+                  <a:srgbClr val="314359"/>
+                </a:solidFill>
+                <a:latin typeface="Arial"/>
               </a:rPr>
               <a:t>Repeatable and conviction-sized — not lucky</a:t>
             </a:r>
@@ -15572,18 +15572,18 @@
             <a:r>
               <a:rPr sz="1150" b="1">
                 <a:solidFill>
-                  <a:srgbClr val="4A5D75"/>
-                </a:solidFill>
-                <a:latin typeface="Calibri"/>
+                  <a:srgbClr val="556A83"/>
+                </a:solidFill>
+                <a:latin typeface="Arial"/>
               </a:rPr>
               <a:t>2.16   </a:t>
             </a:r>
             <a:r>
               <a:rPr sz="1150">
                 <a:solidFill>
-                  <a:srgbClr val="1E334E"/>
-                </a:solidFill>
-                <a:latin typeface="Calibri"/>
+                  <a:srgbClr val="314359"/>
+                </a:solidFill>
+                <a:latin typeface="Arial"/>
               </a:rPr>
               <a:t>Why a non-linear path won’t get you fired</a:t>
             </a:r>
@@ -15600,18 +15600,18 @@
             <a:r>
               <a:rPr sz="1150" b="1">
                 <a:solidFill>
-                  <a:srgbClr val="4A5D75"/>
-                </a:solidFill>
-                <a:latin typeface="Calibri"/>
+                  <a:srgbClr val="556A83"/>
+                </a:solidFill>
+                <a:latin typeface="Arial"/>
               </a:rPr>
               <a:t>2.17   </a:t>
             </a:r>
             <a:r>
               <a:rPr sz="1150">
                 <a:solidFill>
-                  <a:srgbClr val="1E334E"/>
-                </a:solidFill>
-                <a:latin typeface="Calibri"/>
+                  <a:srgbClr val="314359"/>
+                </a:solidFill>
+                <a:latin typeface="Arial"/>
               </a:rPr>
               <a:t>Responsible ownership, by construction</a:t>
             </a:r>
@@ -15737,9 +15737,9 @@
             <a:r>
               <a:rPr sz="1100" b="0" i="0">
                 <a:solidFill>
-                  <a:srgbClr val="4A5D75"/>
-                </a:solidFill>
-                <a:latin typeface="Calibri"/>
+                  <a:srgbClr val="6F8990"/>
+                </a:solidFill>
+                <a:latin typeface="Arial"/>
               </a:rPr>
               <a:t>Track Record</a:t>
             </a:r>
@@ -15779,9 +15779,9 @@
             <a:r>
               <a:rPr sz="1100" b="1" i="0">
                 <a:solidFill>
-                  <a:srgbClr val="4A5D75"/>
-                </a:solidFill>
-                <a:latin typeface="Calibri"/>
+                  <a:srgbClr val="6F8990"/>
+                </a:solidFill>
+                <a:latin typeface="Arial"/>
               </a:rPr>
               <a:t>Figure 4</a:t>
             </a:r>
@@ -15803,7 +15803,7 @@
             <a:avLst/>
           </a:prstGeom>
           <a:solidFill>
-            <a:srgbClr val="F1F2F4"/>
+            <a:srgbClr val="F6F7F9"/>
           </a:solidFill>
           <a:ln>
             <a:noFill/>
@@ -15865,7 +15865,7 @@
             <a:r>
               <a:rPr sz="3000" b="0" i="0">
                 <a:solidFill>
-                  <a:srgbClr val="1E334E"/>
+                  <a:srgbClr val="314359"/>
                 </a:solidFill>
                 <a:latin typeface="Times New Roman"/>
               </a:rPr>
@@ -15907,9 +15907,9 @@
             <a:r>
               <a:rPr sz="850" b="0" i="0">
                 <a:solidFill>
-                  <a:srgbClr val="9AA4B0"/>
-                </a:solidFill>
-                <a:latin typeface="Calibri"/>
+                  <a:srgbClr val="9A958E"/>
+                </a:solidFill>
+                <a:latin typeface="Arial"/>
               </a:rPr>
               <a:t>Strictly confidential          17</a:t>
             </a:r>
@@ -15967,7 +15967,7 @@
             <a:r>
               <a:rPr sz="1600" b="1" i="0">
                 <a:solidFill>
-                  <a:srgbClr val="1E334E"/>
+                  <a:srgbClr val="314359"/>
                 </a:solidFill>
                 <a:latin typeface="Times New Roman"/>
               </a:rPr>
@@ -15986,9 +15986,9 @@
             <a:r>
               <a:rPr sz="1300" b="0" i="0">
                 <a:solidFill>
-                  <a:srgbClr val="333840"/>
-                </a:solidFill>
-                <a:latin typeface="Calibri"/>
+                  <a:srgbClr val="3C3937"/>
+                </a:solidFill>
+                <a:latin typeface="Arial"/>
               </a:rPr>
               <a:t>81% IRR · 3.9x money multiple. Spun off Concentric, refocused the core, re-invested in 2020 for a further 2.0x in under two years.</a:t>
             </a:r>
@@ -16005,7 +16005,7 @@
             <a:r>
               <a:rPr sz="1600" b="1" i="0">
                 <a:solidFill>
-                  <a:srgbClr val="1E334E"/>
+                  <a:srgbClr val="314359"/>
                 </a:solidFill>
                 <a:latin typeface="Times New Roman"/>
               </a:rPr>
@@ -16024,9 +16024,9 @@
             <a:r>
               <a:rPr sz="1300" b="0" i="0">
                 <a:solidFill>
-                  <a:srgbClr val="333840"/>
-                </a:solidFill>
-                <a:latin typeface="Calibri"/>
+                  <a:srgbClr val="3C3937"/>
+                </a:solidFill>
+                <a:latin typeface="Arial"/>
               </a:rPr>
               <a:t>~18x gross vs ~14x for MSCI IMI since 2006, with EBITA growth of +14.5% across portfolio companies.</a:t>
             </a:r>
@@ -16043,7 +16043,7 @@
             <a:r>
               <a:rPr sz="1600" b="1" i="0">
                 <a:solidFill>
-                  <a:srgbClr val="1E334E"/>
+                  <a:srgbClr val="314359"/>
                 </a:solidFill>
                 <a:latin typeface="Times New Roman"/>
               </a:rPr>
@@ -16062,9 +16062,9 @@
             <a:r>
               <a:rPr sz="1300" b="0" i="0">
                 <a:solidFill>
-                  <a:srgbClr val="333840"/>
-                </a:solidFill>
-                <a:latin typeface="Calibri"/>
+                  <a:srgbClr val="3C3937"/>
+                </a:solidFill>
+                <a:latin typeface="Arial"/>
               </a:rPr>
               <a:t>39 larger investments since 2006 — profitable in 36, lost money in only 3.</a:t>
             </a:r>
@@ -16190,9 +16190,9 @@
             <a:r>
               <a:rPr sz="1100" b="0" i="0">
                 <a:solidFill>
-                  <a:srgbClr val="4A5D75"/>
-                </a:solidFill>
-                <a:latin typeface="Calibri"/>
+                  <a:srgbClr val="6F8990"/>
+                </a:solidFill>
+                <a:latin typeface="Arial"/>
               </a:rPr>
               <a:t>Track Record</a:t>
             </a:r>
@@ -16232,9 +16232,9 @@
             <a:r>
               <a:rPr sz="1100" b="1" i="0">
                 <a:solidFill>
-                  <a:srgbClr val="4A5D75"/>
-                </a:solidFill>
-                <a:latin typeface="Calibri"/>
+                  <a:srgbClr val="6F8990"/>
+                </a:solidFill>
+                <a:latin typeface="Arial"/>
               </a:rPr>
               <a:t>Table 4</a:t>
             </a:r>
@@ -16256,7 +16256,7 @@
             <a:avLst/>
           </a:prstGeom>
           <a:solidFill>
-            <a:srgbClr val="F1F2F4"/>
+            <a:srgbClr val="F6F7F9"/>
           </a:solidFill>
           <a:ln>
             <a:noFill/>
@@ -16318,7 +16318,7 @@
             <a:r>
               <a:rPr sz="3000" b="0" i="0">
                 <a:solidFill>
-                  <a:srgbClr val="1E334E"/>
+                  <a:srgbClr val="314359"/>
                 </a:solidFill>
                 <a:latin typeface="Times New Roman"/>
               </a:rPr>
@@ -16360,9 +16360,9 @@
             <a:r>
               <a:rPr sz="1300" b="0" i="1">
                 <a:solidFill>
-                  <a:srgbClr val="5A636E"/>
-                </a:solidFill>
-                <a:latin typeface="Calibri"/>
+                  <a:srgbClr val="64615E"/>
+                </a:solidFill>
+                <a:latin typeface="Arial"/>
               </a:rPr>
               <a:t>Each position shown against its benchmark; invested capital weighted MOIC of 2.2x.</a:t>
             </a:r>
@@ -16402,9 +16402,9 @@
             <a:r>
               <a:rPr sz="850" b="0" i="0">
                 <a:solidFill>
-                  <a:srgbClr val="9AA4B0"/>
-                </a:solidFill>
-                <a:latin typeface="Calibri"/>
+                  <a:srgbClr val="9A958E"/>
+                </a:solidFill>
+                <a:latin typeface="Arial"/>
               </a:rPr>
               <a:t>Strictly confidential          18</a:t>
             </a:r>
@@ -16426,7 +16426,7 @@
             <a:avLst/>
           </a:prstGeom>
           <a:solidFill>
-            <a:srgbClr val="4A5D75"/>
+            <a:srgbClr val="556A83"/>
           </a:solidFill>
           <a:ln>
             <a:noFill/>
@@ -16490,7 +16490,7 @@
                 <a:solidFill>
                   <a:srgbClr val="FFFFFF"/>
                 </a:solidFill>
-                <a:latin typeface="Calibri"/>
+                <a:latin typeface="Arial"/>
               </a:rPr>
               <a:t>Company</a:t>
             </a:r>
@@ -16512,7 +16512,7 @@
             <a:avLst/>
           </a:prstGeom>
           <a:solidFill>
-            <a:srgbClr val="4A5D75"/>
+            <a:srgbClr val="556A83"/>
           </a:solidFill>
           <a:ln>
             <a:noFill/>
@@ -16576,7 +16576,7 @@
                 <a:solidFill>
                   <a:srgbClr val="FFFFFF"/>
                 </a:solidFill>
-                <a:latin typeface="Calibri"/>
+                <a:latin typeface="Arial"/>
               </a:rPr>
               <a:t>Holding</a:t>
             </a:r>
@@ -16598,7 +16598,7 @@
             <a:avLst/>
           </a:prstGeom>
           <a:solidFill>
-            <a:srgbClr val="4A5D75"/>
+            <a:srgbClr val="556A83"/>
           </a:solidFill>
           <a:ln>
             <a:noFill/>
@@ -16662,7 +16662,7 @@
                 <a:solidFill>
                   <a:srgbClr val="FFFFFF"/>
                 </a:solidFill>
-                <a:latin typeface="Calibri"/>
+                <a:latin typeface="Arial"/>
               </a:rPr>
               <a:t>IRR</a:t>
             </a:r>
@@ -16684,7 +16684,7 @@
             <a:avLst/>
           </a:prstGeom>
           <a:solidFill>
-            <a:srgbClr val="4A5D75"/>
+            <a:srgbClr val="556A83"/>
           </a:solidFill>
           <a:ln>
             <a:noFill/>
@@ -16748,7 +16748,7 @@
                 <a:solidFill>
                   <a:srgbClr val="FFFFFF"/>
                 </a:solidFill>
-                <a:latin typeface="Calibri"/>
+                <a:latin typeface="Arial"/>
               </a:rPr>
               <a:t>MOIC</a:t>
             </a:r>
@@ -16770,7 +16770,7 @@
             <a:avLst/>
           </a:prstGeom>
           <a:solidFill>
-            <a:srgbClr val="4A5D75"/>
+            <a:srgbClr val="556A83"/>
           </a:solidFill>
           <a:ln>
             <a:noFill/>
@@ -16834,7 +16834,7 @@
                 <a:solidFill>
                   <a:srgbClr val="FFFFFF"/>
                 </a:solidFill>
-                <a:latin typeface="Calibri"/>
+                <a:latin typeface="Arial"/>
               </a:rPr>
               <a:t>vs Index</a:t>
             </a:r>
@@ -16856,7 +16856,7 @@
             <a:avLst/>
           </a:prstGeom>
           <a:solidFill>
-            <a:srgbClr val="F1F2F4"/>
+            <a:srgbClr val="F6F7F9"/>
           </a:solidFill>
           <a:ln>
             <a:noFill/>
@@ -16918,9 +16918,9 @@
             <a:r>
               <a:rPr sz="1000" b="1" i="0">
                 <a:solidFill>
-                  <a:srgbClr val="1E334E"/>
-                </a:solidFill>
-                <a:latin typeface="Calibri"/>
+                  <a:srgbClr val="314359"/>
+                </a:solidFill>
+                <a:latin typeface="Arial"/>
               </a:rPr>
               <a:t>Bufab</a:t>
             </a:r>
@@ -16942,7 +16942,7 @@
             <a:avLst/>
           </a:prstGeom>
           <a:solidFill>
-            <a:srgbClr val="F1F2F4"/>
+            <a:srgbClr val="F6F7F9"/>
           </a:solidFill>
           <a:ln>
             <a:noFill/>
@@ -17004,9 +17004,9 @@
             <a:r>
               <a:rPr sz="1000" b="0" i="0">
                 <a:solidFill>
-                  <a:srgbClr val="333840"/>
-                </a:solidFill>
-                <a:latin typeface="Calibri"/>
+                  <a:srgbClr val="3C3937"/>
+                </a:solidFill>
+                <a:latin typeface="Arial"/>
               </a:rPr>
               <a:t>2015-2025</a:t>
             </a:r>
@@ -17028,7 +17028,7 @@
             <a:avLst/>
           </a:prstGeom>
           <a:solidFill>
-            <a:srgbClr val="F1F2F4"/>
+            <a:srgbClr val="F6F7F9"/>
           </a:solidFill>
           <a:ln>
             <a:noFill/>
@@ -17090,9 +17090,9 @@
             <a:r>
               <a:rPr sz="1000" b="0" i="0">
                 <a:solidFill>
-                  <a:srgbClr val="333840"/>
-                </a:solidFill>
-                <a:latin typeface="Calibri"/>
+                  <a:srgbClr val="3C3937"/>
+                </a:solidFill>
+                <a:latin typeface="Arial"/>
               </a:rPr>
               <a:t>35%</a:t>
             </a:r>
@@ -17114,7 +17114,7 @@
             <a:avLst/>
           </a:prstGeom>
           <a:solidFill>
-            <a:srgbClr val="F1F2F4"/>
+            <a:srgbClr val="F6F7F9"/>
           </a:solidFill>
           <a:ln>
             <a:noFill/>
@@ -17176,9 +17176,9 @@
             <a:r>
               <a:rPr sz="1000" b="0" i="0">
                 <a:solidFill>
-                  <a:srgbClr val="333840"/>
-                </a:solidFill>
-                <a:latin typeface="Calibri"/>
+                  <a:srgbClr val="3C3937"/>
+                </a:solidFill>
+                <a:latin typeface="Arial"/>
               </a:rPr>
               <a:t>2.0x</a:t>
             </a:r>
@@ -17200,7 +17200,7 @@
             <a:avLst/>
           </a:prstGeom>
           <a:solidFill>
-            <a:srgbClr val="F1F2F4"/>
+            <a:srgbClr val="F6F7F9"/>
           </a:solidFill>
           <a:ln>
             <a:noFill/>
@@ -17262,9 +17262,9 @@
             <a:r>
               <a:rPr sz="1000" b="0" i="0">
                 <a:solidFill>
-                  <a:srgbClr val="333840"/>
-                </a:solidFill>
-                <a:latin typeface="Calibri"/>
+                  <a:srgbClr val="3C3937"/>
+                </a:solidFill>
+                <a:latin typeface="Arial"/>
               </a:rPr>
               <a:t>+27%</a:t>
             </a:r>
@@ -17348,9 +17348,9 @@
             <a:r>
               <a:rPr sz="1000" b="1" i="0">
                 <a:solidFill>
-                  <a:srgbClr val="1E334E"/>
-                </a:solidFill>
-                <a:latin typeface="Calibri"/>
+                  <a:srgbClr val="314359"/>
+                </a:solidFill>
+                <a:latin typeface="Arial"/>
               </a:rPr>
               <a:t>DistIt</a:t>
             </a:r>
@@ -17434,9 +17434,9 @@
             <a:r>
               <a:rPr sz="1000" b="0" i="0">
                 <a:solidFill>
-                  <a:srgbClr val="333840"/>
-                </a:solidFill>
-                <a:latin typeface="Calibri"/>
+                  <a:srgbClr val="3C3937"/>
+                </a:solidFill>
+                <a:latin typeface="Arial"/>
               </a:rPr>
               <a:t>2015-2025</a:t>
             </a:r>
@@ -17520,9 +17520,9 @@
             <a:r>
               <a:rPr sz="1000" b="0" i="0">
                 <a:solidFill>
-                  <a:srgbClr val="333840"/>
-                </a:solidFill>
-                <a:latin typeface="Calibri"/>
+                  <a:srgbClr val="3C3937"/>
+                </a:solidFill>
+                <a:latin typeface="Arial"/>
               </a:rPr>
               <a:t>7%</a:t>
             </a:r>
@@ -17606,9 +17606,9 @@
             <a:r>
               <a:rPr sz="1000" b="0" i="0">
                 <a:solidFill>
-                  <a:srgbClr val="333840"/>
-                </a:solidFill>
-                <a:latin typeface="Calibri"/>
+                  <a:srgbClr val="3C3937"/>
+                </a:solidFill>
+                <a:latin typeface="Arial"/>
               </a:rPr>
               <a:t>1.2x</a:t>
             </a:r>
@@ -17692,9 +17692,9 @@
             <a:r>
               <a:rPr sz="1000" b="0" i="0">
                 <a:solidFill>
-                  <a:srgbClr val="333840"/>
-                </a:solidFill>
-                <a:latin typeface="Calibri"/>
+                  <a:srgbClr val="3C3937"/>
+                </a:solidFill>
+                <a:latin typeface="Arial"/>
               </a:rPr>
               <a:t>-1%</a:t>
             </a:r>
@@ -17716,7 +17716,7 @@
             <a:avLst/>
           </a:prstGeom>
           <a:solidFill>
-            <a:srgbClr val="F1F2F4"/>
+            <a:srgbClr val="F6F7F9"/>
           </a:solidFill>
           <a:ln>
             <a:noFill/>
@@ -17778,9 +17778,9 @@
             <a:r>
               <a:rPr sz="1000" b="1" i="0">
                 <a:solidFill>
-                  <a:srgbClr val="1E334E"/>
-                </a:solidFill>
-                <a:latin typeface="Calibri"/>
+                  <a:srgbClr val="314359"/>
+                </a:solidFill>
+                <a:latin typeface="Arial"/>
               </a:rPr>
               <a:t>Ngex</a:t>
             </a:r>
@@ -17802,7 +17802,7 @@
             <a:avLst/>
           </a:prstGeom>
           <a:solidFill>
-            <a:srgbClr val="F1F2F4"/>
+            <a:srgbClr val="F6F7F9"/>
           </a:solidFill>
           <a:ln>
             <a:noFill/>
@@ -17864,9 +17864,9 @@
             <a:r>
               <a:rPr sz="1000" b="0" i="0">
                 <a:solidFill>
-                  <a:srgbClr val="333840"/>
-                </a:solidFill>
-                <a:latin typeface="Calibri"/>
+                  <a:srgbClr val="3C3937"/>
+                </a:solidFill>
+                <a:latin typeface="Arial"/>
               </a:rPr>
               <a:t>2016-2025</a:t>
             </a:r>
@@ -17888,7 +17888,7 @@
             <a:avLst/>
           </a:prstGeom>
           <a:solidFill>
-            <a:srgbClr val="F1F2F4"/>
+            <a:srgbClr val="F6F7F9"/>
           </a:solidFill>
           <a:ln>
             <a:noFill/>
@@ -17950,9 +17950,9 @@
             <a:r>
               <a:rPr sz="1000" b="0" i="0">
                 <a:solidFill>
-                  <a:srgbClr val="333840"/>
-                </a:solidFill>
-                <a:latin typeface="Calibri"/>
+                  <a:srgbClr val="3C3937"/>
+                </a:solidFill>
+                <a:latin typeface="Arial"/>
               </a:rPr>
               <a:t>69%</a:t>
             </a:r>
@@ -17974,7 +17974,7 @@
             <a:avLst/>
           </a:prstGeom>
           <a:solidFill>
-            <a:srgbClr val="F1F2F4"/>
+            <a:srgbClr val="F6F7F9"/>
           </a:solidFill>
           <a:ln>
             <a:noFill/>
@@ -18036,9 +18036,9 @@
             <a:r>
               <a:rPr sz="1000" b="0" i="0">
                 <a:solidFill>
-                  <a:srgbClr val="333840"/>
-                </a:solidFill>
-                <a:latin typeface="Calibri"/>
+                  <a:srgbClr val="3C3937"/>
+                </a:solidFill>
+                <a:latin typeface="Arial"/>
               </a:rPr>
               <a:t>6.2x</a:t>
             </a:r>
@@ -18060,7 +18060,7 @@
             <a:avLst/>
           </a:prstGeom>
           <a:solidFill>
-            <a:srgbClr val="F1F2F4"/>
+            <a:srgbClr val="F6F7F9"/>
           </a:solidFill>
           <a:ln>
             <a:noFill/>
@@ -18122,9 +18122,9 @@
             <a:r>
               <a:rPr sz="1000" b="0" i="0">
                 <a:solidFill>
-                  <a:srgbClr val="333840"/>
-                </a:solidFill>
-                <a:latin typeface="Calibri"/>
+                  <a:srgbClr val="3C3937"/>
+                </a:solidFill>
+                <a:latin typeface="Arial"/>
               </a:rPr>
               <a:t>+59%</a:t>
             </a:r>
@@ -18208,9 +18208,9 @@
             <a:r>
               <a:rPr sz="1000" b="1" i="0">
                 <a:solidFill>
-                  <a:srgbClr val="1E334E"/>
-                </a:solidFill>
-                <a:latin typeface="Calibri"/>
+                  <a:srgbClr val="314359"/>
+                </a:solidFill>
+                <a:latin typeface="Arial"/>
               </a:rPr>
               <a:t>Alcadon</a:t>
             </a:r>
@@ -18294,9 +18294,9 @@
             <a:r>
               <a:rPr sz="1000" b="0" i="0">
                 <a:solidFill>
-                  <a:srgbClr val="333840"/>
-                </a:solidFill>
-                <a:latin typeface="Calibri"/>
+                  <a:srgbClr val="3C3937"/>
+                </a:solidFill>
+                <a:latin typeface="Arial"/>
               </a:rPr>
               <a:t>2016-2025</a:t>
             </a:r>
@@ -18380,9 +18380,9 @@
             <a:r>
               <a:rPr sz="1000" b="0" i="0">
                 <a:solidFill>
-                  <a:srgbClr val="333840"/>
-                </a:solidFill>
-                <a:latin typeface="Calibri"/>
+                  <a:srgbClr val="3C3937"/>
+                </a:solidFill>
+                <a:latin typeface="Arial"/>
               </a:rPr>
               <a:t>74%</a:t>
             </a:r>
@@ -18466,9 +18466,9 @@
             <a:r>
               <a:rPr sz="1000" b="0" i="0">
                 <a:solidFill>
-                  <a:srgbClr val="333840"/>
-                </a:solidFill>
-                <a:latin typeface="Calibri"/>
+                  <a:srgbClr val="3C3937"/>
+                </a:solidFill>
+                <a:latin typeface="Arial"/>
               </a:rPr>
               <a:t>1.7x</a:t>
             </a:r>
@@ -18552,9 +18552,9 @@
             <a:r>
               <a:rPr sz="1000" b="0" i="0">
                 <a:solidFill>
-                  <a:srgbClr val="333840"/>
-                </a:solidFill>
-                <a:latin typeface="Calibri"/>
+                  <a:srgbClr val="3C3937"/>
+                </a:solidFill>
+                <a:latin typeface="Arial"/>
               </a:rPr>
               <a:t>+65%</a:t>
             </a:r>
@@ -18576,7 +18576,7 @@
             <a:avLst/>
           </a:prstGeom>
           <a:solidFill>
-            <a:srgbClr val="F1F2F4"/>
+            <a:srgbClr val="F6F7F9"/>
           </a:solidFill>
           <a:ln>
             <a:noFill/>
@@ -18638,9 +18638,9 @@
             <a:r>
               <a:rPr sz="1000" b="1" i="0">
                 <a:solidFill>
-                  <a:srgbClr val="1E334E"/>
-                </a:solidFill>
-                <a:latin typeface="Calibri"/>
+                  <a:srgbClr val="314359"/>
+                </a:solidFill>
+                <a:latin typeface="Arial"/>
               </a:rPr>
               <a:t>Tempest</a:t>
             </a:r>
@@ -18662,7 +18662,7 @@
             <a:avLst/>
           </a:prstGeom>
           <a:solidFill>
-            <a:srgbClr val="F1F2F4"/>
+            <a:srgbClr val="F6F7F9"/>
           </a:solidFill>
           <a:ln>
             <a:noFill/>
@@ -18724,9 +18724,9 @@
             <a:r>
               <a:rPr sz="1000" b="0" i="0">
                 <a:solidFill>
-                  <a:srgbClr val="333840"/>
-                </a:solidFill>
-                <a:latin typeface="Calibri"/>
+                  <a:srgbClr val="3C3937"/>
+                </a:solidFill>
+                <a:latin typeface="Arial"/>
               </a:rPr>
               <a:t>2018-2025</a:t>
             </a:r>
@@ -18748,7 +18748,7 @@
             <a:avLst/>
           </a:prstGeom>
           <a:solidFill>
-            <a:srgbClr val="F1F2F4"/>
+            <a:srgbClr val="F6F7F9"/>
           </a:solidFill>
           <a:ln>
             <a:noFill/>
@@ -18810,9 +18810,9 @@
             <a:r>
               <a:rPr sz="1000" b="0" i="0">
                 <a:solidFill>
-                  <a:srgbClr val="333840"/>
-                </a:solidFill>
-                <a:latin typeface="Calibri"/>
+                  <a:srgbClr val="3C3937"/>
+                </a:solidFill>
+                <a:latin typeface="Arial"/>
               </a:rPr>
               <a:t>12%</a:t>
             </a:r>
@@ -18834,7 +18834,7 @@
             <a:avLst/>
           </a:prstGeom>
           <a:solidFill>
-            <a:srgbClr val="F1F2F4"/>
+            <a:srgbClr val="F6F7F9"/>
           </a:solidFill>
           <a:ln>
             <a:noFill/>
@@ -18896,9 +18896,9 @@
             <a:r>
               <a:rPr sz="1000" b="0" i="0">
                 <a:solidFill>
-                  <a:srgbClr val="333840"/>
-                </a:solidFill>
-                <a:latin typeface="Calibri"/>
+                  <a:srgbClr val="3C3937"/>
+                </a:solidFill>
+                <a:latin typeface="Arial"/>
               </a:rPr>
               <a:t>1.2x</a:t>
             </a:r>
@@ -18920,7 +18920,7 @@
             <a:avLst/>
           </a:prstGeom>
           <a:solidFill>
-            <a:srgbClr val="F1F2F4"/>
+            <a:srgbClr val="F6F7F9"/>
           </a:solidFill>
           <a:ln>
             <a:noFill/>
@@ -18982,9 +18982,9 @@
             <a:r>
               <a:rPr sz="1000" b="0" i="0">
                 <a:solidFill>
-                  <a:srgbClr val="333840"/>
-                </a:solidFill>
-                <a:latin typeface="Calibri"/>
+                  <a:srgbClr val="3C3937"/>
+                </a:solidFill>
+                <a:latin typeface="Arial"/>
               </a:rPr>
               <a:t>+3%</a:t>
             </a:r>
@@ -19068,9 +19068,9 @@
             <a:r>
               <a:rPr sz="1000" b="1" i="0">
                 <a:solidFill>
-                  <a:srgbClr val="1E334E"/>
-                </a:solidFill>
-                <a:latin typeface="Calibri"/>
+                  <a:srgbClr val="314359"/>
+                </a:solidFill>
+                <a:latin typeface="Arial"/>
               </a:rPr>
               <a:t>Zalaris</a:t>
             </a:r>
@@ -19154,9 +19154,9 @@
             <a:r>
               <a:rPr sz="1000" b="0" i="0">
                 <a:solidFill>
-                  <a:srgbClr val="333840"/>
-                </a:solidFill>
-                <a:latin typeface="Calibri"/>
+                  <a:srgbClr val="3C3937"/>
+                </a:solidFill>
+                <a:latin typeface="Arial"/>
               </a:rPr>
               <a:t>2018-2025</a:t>
             </a:r>
@@ -19240,9 +19240,9 @@
             <a:r>
               <a:rPr sz="1000" b="0" i="0">
                 <a:solidFill>
-                  <a:srgbClr val="333840"/>
-                </a:solidFill>
-                <a:latin typeface="Calibri"/>
+                  <a:srgbClr val="3C3937"/>
+                </a:solidFill>
+                <a:latin typeface="Arial"/>
               </a:rPr>
               <a:t>26%</a:t>
             </a:r>
@@ -19326,9 +19326,9 @@
             <a:r>
               <a:rPr sz="1000" b="0" i="0">
                 <a:solidFill>
-                  <a:srgbClr val="333840"/>
-                </a:solidFill>
-                <a:latin typeface="Calibri"/>
+                  <a:srgbClr val="3C3937"/>
+                </a:solidFill>
+                <a:latin typeface="Arial"/>
               </a:rPr>
               <a:t>1.5x</a:t>
             </a:r>
@@ -19412,9 +19412,9 @@
             <a:r>
               <a:rPr sz="1000" b="0" i="0">
                 <a:solidFill>
-                  <a:srgbClr val="333840"/>
-                </a:solidFill>
-                <a:latin typeface="Calibri"/>
+                  <a:srgbClr val="3C3937"/>
+                </a:solidFill>
+                <a:latin typeface="Arial"/>
               </a:rPr>
               <a:t>+16%</a:t>
             </a:r>
@@ -19436,7 +19436,7 @@
             <a:avLst/>
           </a:prstGeom>
           <a:solidFill>
-            <a:srgbClr val="F1F2F4"/>
+            <a:srgbClr val="F6F7F9"/>
           </a:solidFill>
           <a:ln>
             <a:noFill/>
@@ -19498,9 +19498,9 @@
             <a:r>
               <a:rPr sz="1000" b="1" i="0">
                 <a:solidFill>
-                  <a:srgbClr val="1E334E"/>
-                </a:solidFill>
-                <a:latin typeface="Calibri"/>
+                  <a:srgbClr val="314359"/>
+                </a:solidFill>
+                <a:latin typeface="Arial"/>
               </a:rPr>
               <a:t>Zutec</a:t>
             </a:r>
@@ -19522,7 +19522,7 @@
             <a:avLst/>
           </a:prstGeom>
           <a:solidFill>
-            <a:srgbClr val="F1F2F4"/>
+            <a:srgbClr val="F6F7F9"/>
           </a:solidFill>
           <a:ln>
             <a:noFill/>
@@ -19584,9 +19584,9 @@
             <a:r>
               <a:rPr sz="1000" b="0" i="0">
                 <a:solidFill>
-                  <a:srgbClr val="333840"/>
-                </a:solidFill>
-                <a:latin typeface="Calibri"/>
+                  <a:srgbClr val="3C3937"/>
+                </a:solidFill>
+                <a:latin typeface="Arial"/>
               </a:rPr>
               <a:t>2018-2025</a:t>
             </a:r>
@@ -19608,7 +19608,7 @@
             <a:avLst/>
           </a:prstGeom>
           <a:solidFill>
-            <a:srgbClr val="F1F2F4"/>
+            <a:srgbClr val="F6F7F9"/>
           </a:solidFill>
           <a:ln>
             <a:noFill/>
@@ -19670,9 +19670,9 @@
             <a:r>
               <a:rPr sz="1000" b="0" i="0">
                 <a:solidFill>
-                  <a:srgbClr val="333840"/>
-                </a:solidFill>
-                <a:latin typeface="Calibri"/>
+                  <a:srgbClr val="3C3937"/>
+                </a:solidFill>
+                <a:latin typeface="Arial"/>
               </a:rPr>
               <a:t>38%</a:t>
             </a:r>
@@ -19694,7 +19694,7 @@
             <a:avLst/>
           </a:prstGeom>
           <a:solidFill>
-            <a:srgbClr val="F1F2F4"/>
+            <a:srgbClr val="F6F7F9"/>
           </a:solidFill>
           <a:ln>
             <a:noFill/>
@@ -19756,9 +19756,9 @@
             <a:r>
               <a:rPr sz="1000" b="0" i="0">
                 <a:solidFill>
-                  <a:srgbClr val="333840"/>
-                </a:solidFill>
-                <a:latin typeface="Calibri"/>
+                  <a:srgbClr val="3C3937"/>
+                </a:solidFill>
+                <a:latin typeface="Arial"/>
               </a:rPr>
               <a:t>2.8x</a:t>
             </a:r>
@@ -19780,7 +19780,7 @@
             <a:avLst/>
           </a:prstGeom>
           <a:solidFill>
-            <a:srgbClr val="F1F2F4"/>
+            <a:srgbClr val="F6F7F9"/>
           </a:solidFill>
           <a:ln>
             <a:noFill/>
@@ -19842,9 +19842,9 @@
             <a:r>
               <a:rPr sz="1000" b="0" i="0">
                 <a:solidFill>
-                  <a:srgbClr val="333840"/>
-                </a:solidFill>
-                <a:latin typeface="Calibri"/>
+                  <a:srgbClr val="3C3937"/>
+                </a:solidFill>
+                <a:latin typeface="Arial"/>
               </a:rPr>
               <a:t>+29%</a:t>
             </a:r>
@@ -19928,9 +19928,9 @@
             <a:r>
               <a:rPr sz="1000" b="1" i="0">
                 <a:solidFill>
-                  <a:srgbClr val="1E334E"/>
-                </a:solidFill>
-                <a:latin typeface="Calibri"/>
+                  <a:srgbClr val="314359"/>
+                </a:solidFill>
+                <a:latin typeface="Arial"/>
               </a:rPr>
               <a:t>Roko</a:t>
             </a:r>
@@ -20014,9 +20014,9 @@
             <a:r>
               <a:rPr sz="1000" b="0" i="0">
                 <a:solidFill>
-                  <a:srgbClr val="333840"/>
-                </a:solidFill>
-                <a:latin typeface="Calibri"/>
+                  <a:srgbClr val="3C3937"/>
+                </a:solidFill>
+                <a:latin typeface="Arial"/>
               </a:rPr>
               <a:t>2019-2025</a:t>
             </a:r>
@@ -20100,9 +20100,9 @@
             <a:r>
               <a:rPr sz="1000" b="0" i="0">
                 <a:solidFill>
-                  <a:srgbClr val="333840"/>
-                </a:solidFill>
-                <a:latin typeface="Calibri"/>
+                  <a:srgbClr val="3C3937"/>
+                </a:solidFill>
+                <a:latin typeface="Arial"/>
               </a:rPr>
               <a:t>28%</a:t>
             </a:r>
@@ -20186,9 +20186,9 @@
             <a:r>
               <a:rPr sz="1000" b="0" i="0">
                 <a:solidFill>
-                  <a:srgbClr val="333840"/>
-                </a:solidFill>
-                <a:latin typeface="Calibri"/>
+                  <a:srgbClr val="3C3937"/>
+                </a:solidFill>
+                <a:latin typeface="Arial"/>
               </a:rPr>
               <a:t>5.1x</a:t>
             </a:r>
@@ -20272,9 +20272,9 @@
             <a:r>
               <a:rPr sz="1000" b="0" i="0">
                 <a:solidFill>
-                  <a:srgbClr val="333840"/>
-                </a:solidFill>
-                <a:latin typeface="Calibri"/>
+                  <a:srgbClr val="3C3937"/>
+                </a:solidFill>
+                <a:latin typeface="Arial"/>
               </a:rPr>
               <a:t>+18%</a:t>
             </a:r>
@@ -20296,7 +20296,7 @@
             <a:avLst/>
           </a:prstGeom>
           <a:solidFill>
-            <a:srgbClr val="F1F2F4"/>
+            <a:srgbClr val="F6F7F9"/>
           </a:solidFill>
           <a:ln>
             <a:noFill/>
@@ -20358,9 +20358,9 @@
             <a:r>
               <a:rPr sz="1000" b="1" i="0">
                 <a:solidFill>
-                  <a:srgbClr val="1E334E"/>
-                </a:solidFill>
-                <a:latin typeface="Calibri"/>
+                  <a:srgbClr val="314359"/>
+                </a:solidFill>
+                <a:latin typeface="Arial"/>
               </a:rPr>
               <a:t>Catella</a:t>
             </a:r>
@@ -20382,7 +20382,7 @@
             <a:avLst/>
           </a:prstGeom>
           <a:solidFill>
-            <a:srgbClr val="F1F2F4"/>
+            <a:srgbClr val="F6F7F9"/>
           </a:solidFill>
           <a:ln>
             <a:noFill/>
@@ -20444,9 +20444,9 @@
             <a:r>
               <a:rPr sz="1000" b="0" i="0">
                 <a:solidFill>
-                  <a:srgbClr val="333840"/>
-                </a:solidFill>
-                <a:latin typeface="Calibri"/>
+                  <a:srgbClr val="3C3937"/>
+                </a:solidFill>
+                <a:latin typeface="Arial"/>
               </a:rPr>
               <a:t>2020-2025</a:t>
             </a:r>
@@ -20468,7 +20468,7 @@
             <a:avLst/>
           </a:prstGeom>
           <a:solidFill>
-            <a:srgbClr val="F1F2F4"/>
+            <a:srgbClr val="F6F7F9"/>
           </a:solidFill>
           <a:ln>
             <a:noFill/>
@@ -20530,9 +20530,9 @@
             <a:r>
               <a:rPr sz="1000" b="0" i="0">
                 <a:solidFill>
-                  <a:srgbClr val="333840"/>
-                </a:solidFill>
-                <a:latin typeface="Calibri"/>
+                  <a:srgbClr val="3C3937"/>
+                </a:solidFill>
+                <a:latin typeface="Arial"/>
               </a:rPr>
               <a:t>12%</a:t>
             </a:r>
@@ -20554,7 +20554,7 @@
             <a:avLst/>
           </a:prstGeom>
           <a:solidFill>
-            <a:srgbClr val="F1F2F4"/>
+            <a:srgbClr val="F6F7F9"/>
           </a:solidFill>
           <a:ln>
             <a:noFill/>
@@ -20616,9 +20616,9 @@
             <a:r>
               <a:rPr sz="1000" b="0" i="0">
                 <a:solidFill>
-                  <a:srgbClr val="333840"/>
-                </a:solidFill>
-                <a:latin typeface="Calibri"/>
+                  <a:srgbClr val="3C3937"/>
+                </a:solidFill>
+                <a:latin typeface="Arial"/>
               </a:rPr>
               <a:t>1.2x</a:t>
             </a:r>
@@ -20640,7 +20640,7 @@
             <a:avLst/>
           </a:prstGeom>
           <a:solidFill>
-            <a:srgbClr val="F1F2F4"/>
+            <a:srgbClr val="F6F7F9"/>
           </a:solidFill>
           <a:ln>
             <a:noFill/>
@@ -20702,9 +20702,9 @@
             <a:r>
               <a:rPr sz="1000" b="0" i="0">
                 <a:solidFill>
-                  <a:srgbClr val="333840"/>
-                </a:solidFill>
-                <a:latin typeface="Calibri"/>
+                  <a:srgbClr val="3C3937"/>
+                </a:solidFill>
+                <a:latin typeface="Arial"/>
               </a:rPr>
               <a:t>+2%</a:t>
             </a:r>
@@ -20788,9 +20788,9 @@
             <a:r>
               <a:rPr sz="1000" b="1" i="0">
                 <a:solidFill>
-                  <a:srgbClr val="1E334E"/>
-                </a:solidFill>
-                <a:latin typeface="Calibri"/>
+                  <a:srgbClr val="314359"/>
+                </a:solidFill>
+                <a:latin typeface="Arial"/>
               </a:rPr>
               <a:t>AI</a:t>
             </a:r>
@@ -20874,9 +20874,9 @@
             <a:r>
               <a:rPr sz="1000" b="0" i="0">
                 <a:solidFill>
-                  <a:srgbClr val="333840"/>
-                </a:solidFill>
-                <a:latin typeface="Calibri"/>
+                  <a:srgbClr val="3C3937"/>
+                </a:solidFill>
+                <a:latin typeface="Arial"/>
               </a:rPr>
               <a:t>2020-2025</a:t>
             </a:r>
@@ -20960,9 +20960,9 @@
             <a:r>
               <a:rPr sz="1000" b="0" i="0">
                 <a:solidFill>
-                  <a:srgbClr val="333840"/>
-                </a:solidFill>
-                <a:latin typeface="Calibri"/>
+                  <a:srgbClr val="3C3937"/>
+                </a:solidFill>
+                <a:latin typeface="Arial"/>
               </a:rPr>
               <a:t>n.m.</a:t>
             </a:r>
@@ -21046,9 +21046,9 @@
             <a:r>
               <a:rPr sz="1000" b="0" i="0">
                 <a:solidFill>
-                  <a:srgbClr val="333840"/>
-                </a:solidFill>
-                <a:latin typeface="Calibri"/>
+                  <a:srgbClr val="3C3937"/>
+                </a:solidFill>
+                <a:latin typeface="Arial"/>
               </a:rPr>
               <a:t>5.4x</a:t>
             </a:r>
@@ -21132,9 +21132,9 @@
             <a:r>
               <a:rPr sz="1000" b="0" i="0">
                 <a:solidFill>
-                  <a:srgbClr val="333840"/>
-                </a:solidFill>
-                <a:latin typeface="Calibri"/>
+                  <a:srgbClr val="3C3937"/>
+                </a:solidFill>
+                <a:latin typeface="Arial"/>
               </a:rPr>
               <a:t>n.m.</a:t>
             </a:r>
@@ -21156,7 +21156,7 @@
             <a:avLst/>
           </a:prstGeom>
           <a:solidFill>
-            <a:srgbClr val="F1F2F4"/>
+            <a:srgbClr val="F6F7F9"/>
           </a:solidFill>
           <a:ln>
             <a:noFill/>
@@ -21218,9 +21218,9 @@
             <a:r>
               <a:rPr sz="1000" b="1" i="0">
                 <a:solidFill>
-                  <a:srgbClr val="1E334E"/>
-                </a:solidFill>
-                <a:latin typeface="Calibri"/>
+                  <a:srgbClr val="314359"/>
+                </a:solidFill>
+                <a:latin typeface="Arial"/>
               </a:rPr>
               <a:t>Renold</a:t>
             </a:r>
@@ -21242,7 +21242,7 @@
             <a:avLst/>
           </a:prstGeom>
           <a:solidFill>
-            <a:srgbClr val="F1F2F4"/>
+            <a:srgbClr val="F6F7F9"/>
           </a:solidFill>
           <a:ln>
             <a:noFill/>
@@ -21304,9 +21304,9 @@
             <a:r>
               <a:rPr sz="1000" b="0" i="0">
                 <a:solidFill>
-                  <a:srgbClr val="333840"/>
-                </a:solidFill>
-                <a:latin typeface="Calibri"/>
+                  <a:srgbClr val="3C3937"/>
+                </a:solidFill>
+                <a:latin typeface="Arial"/>
               </a:rPr>
               <a:t>2024-2025</a:t>
             </a:r>
@@ -21328,7 +21328,7 @@
             <a:avLst/>
           </a:prstGeom>
           <a:solidFill>
-            <a:srgbClr val="F1F2F4"/>
+            <a:srgbClr val="F6F7F9"/>
           </a:solidFill>
           <a:ln>
             <a:noFill/>
@@ -21390,9 +21390,9 @@
             <a:r>
               <a:rPr sz="1000" b="0" i="0">
                 <a:solidFill>
-                  <a:srgbClr val="333840"/>
-                </a:solidFill>
-                <a:latin typeface="Calibri"/>
+                  <a:srgbClr val="3C3937"/>
+                </a:solidFill>
+                <a:latin typeface="Arial"/>
               </a:rPr>
               <a:t>220%</a:t>
             </a:r>
@@ -21414,7 +21414,7 @@
             <a:avLst/>
           </a:prstGeom>
           <a:solidFill>
-            <a:srgbClr val="F1F2F4"/>
+            <a:srgbClr val="F6F7F9"/>
           </a:solidFill>
           <a:ln>
             <a:noFill/>
@@ -21476,9 +21476,9 @@
             <a:r>
               <a:rPr sz="1000" b="0" i="0">
                 <a:solidFill>
-                  <a:srgbClr val="333840"/>
-                </a:solidFill>
-                <a:latin typeface="Calibri"/>
+                  <a:srgbClr val="3C3937"/>
+                </a:solidFill>
+                <a:latin typeface="Arial"/>
               </a:rPr>
               <a:t>1.6x</a:t>
             </a:r>
@@ -21500,7 +21500,7 @@
             <a:avLst/>
           </a:prstGeom>
           <a:solidFill>
-            <a:srgbClr val="F1F2F4"/>
+            <a:srgbClr val="F6F7F9"/>
           </a:solidFill>
           <a:ln>
             <a:noFill/>
@@ -21562,9 +21562,9 @@
             <a:r>
               <a:rPr sz="1000" b="0" i="0">
                 <a:solidFill>
-                  <a:srgbClr val="333840"/>
-                </a:solidFill>
-                <a:latin typeface="Calibri"/>
+                  <a:srgbClr val="3C3937"/>
+                </a:solidFill>
+                <a:latin typeface="Arial"/>
               </a:rPr>
               <a:t>+211%</a:t>
             </a:r>
@@ -21648,9 +21648,9 @@
             <a:r>
               <a:rPr sz="1000" b="1" i="0">
                 <a:solidFill>
-                  <a:srgbClr val="1E334E"/>
-                </a:solidFill>
-                <a:latin typeface="Calibri"/>
+                  <a:srgbClr val="314359"/>
+                </a:solidFill>
+                <a:latin typeface="Arial"/>
               </a:rPr>
               <a:t>Actic</a:t>
             </a:r>
@@ -21734,9 +21734,9 @@
             <a:r>
               <a:rPr sz="1000" b="0" i="0">
                 <a:solidFill>
-                  <a:srgbClr val="333840"/>
-                </a:solidFill>
-                <a:latin typeface="Calibri"/>
+                  <a:srgbClr val="3C3937"/>
+                </a:solidFill>
+                <a:latin typeface="Arial"/>
               </a:rPr>
               <a:t>2017-2023</a:t>
             </a:r>
@@ -21822,7 +21822,7 @@
                 <a:solidFill>
                   <a:srgbClr val="A84A4A"/>
                 </a:solidFill>
-                <a:latin typeface="Calibri"/>
+                <a:latin typeface="Arial"/>
               </a:rPr>
               <a:t>-27%</a:t>
             </a:r>
@@ -21908,7 +21908,7 @@
                 <a:solidFill>
                   <a:srgbClr val="A84A4A"/>
                 </a:solidFill>
-                <a:latin typeface="Calibri"/>
+                <a:latin typeface="Arial"/>
               </a:rPr>
               <a:t>0.4x</a:t>
             </a:r>
@@ -21994,7 +21994,7 @@
                 <a:solidFill>
                   <a:srgbClr val="A84A4A"/>
                 </a:solidFill>
-                <a:latin typeface="Calibri"/>
+                <a:latin typeface="Arial"/>
               </a:rPr>
               <a:t>-33%</a:t>
             </a:r>
@@ -22016,7 +22016,7 @@
             <a:avLst/>
           </a:prstGeom>
           <a:solidFill>
-            <a:srgbClr val="F1F2F4"/>
+            <a:srgbClr val="F6F7F9"/>
           </a:solidFill>
           <a:ln>
             <a:noFill/>
@@ -22078,9 +22078,9 @@
             <a:r>
               <a:rPr sz="1000" b="1" i="0">
                 <a:solidFill>
-                  <a:srgbClr val="1E334E"/>
-                </a:solidFill>
-                <a:latin typeface="Calibri"/>
+                  <a:srgbClr val="314359"/>
+                </a:solidFill>
+                <a:latin typeface="Arial"/>
               </a:rPr>
               <a:t>Haldex</a:t>
             </a:r>
@@ -22102,7 +22102,7 @@
             <a:avLst/>
           </a:prstGeom>
           <a:solidFill>
-            <a:srgbClr val="F1F2F4"/>
+            <a:srgbClr val="F6F7F9"/>
           </a:solidFill>
           <a:ln>
             <a:noFill/>
@@ -22164,9 +22164,9 @@
             <a:r>
               <a:rPr sz="1000" b="0" i="0">
                 <a:solidFill>
-                  <a:srgbClr val="333840"/>
-                </a:solidFill>
-                <a:latin typeface="Calibri"/>
+                  <a:srgbClr val="3C3937"/>
+                </a:solidFill>
+                <a:latin typeface="Arial"/>
               </a:rPr>
               <a:t>2019-2022</a:t>
             </a:r>
@@ -22188,7 +22188,7 @@
             <a:avLst/>
           </a:prstGeom>
           <a:solidFill>
-            <a:srgbClr val="F1F2F4"/>
+            <a:srgbClr val="F6F7F9"/>
           </a:solidFill>
           <a:ln>
             <a:noFill/>
@@ -22250,9 +22250,9 @@
             <a:r>
               <a:rPr sz="1000" b="0" i="0">
                 <a:solidFill>
-                  <a:srgbClr val="333840"/>
-                </a:solidFill>
-                <a:latin typeface="Calibri"/>
+                  <a:srgbClr val="3C3937"/>
+                </a:solidFill>
+                <a:latin typeface="Arial"/>
               </a:rPr>
               <a:t>36%</a:t>
             </a:r>
@@ -22274,7 +22274,7 @@
             <a:avLst/>
           </a:prstGeom>
           <a:solidFill>
-            <a:srgbClr val="F1F2F4"/>
+            <a:srgbClr val="F6F7F9"/>
           </a:solidFill>
           <a:ln>
             <a:noFill/>
@@ -22336,9 +22336,9 @@
             <a:r>
               <a:rPr sz="1000" b="0" i="0">
                 <a:solidFill>
-                  <a:srgbClr val="333840"/>
-                </a:solidFill>
-                <a:latin typeface="Calibri"/>
+                  <a:srgbClr val="3C3937"/>
+                </a:solidFill>
+                <a:latin typeface="Arial"/>
               </a:rPr>
               <a:t>1.6x</a:t>
             </a:r>
@@ -22360,7 +22360,7 @@
             <a:avLst/>
           </a:prstGeom>
           <a:solidFill>
-            <a:srgbClr val="F1F2F4"/>
+            <a:srgbClr val="F6F7F9"/>
           </a:solidFill>
           <a:ln>
             <a:noFill/>
@@ -22422,9 +22422,9 @@
             <a:r>
               <a:rPr sz="1000" b="0" i="0">
                 <a:solidFill>
-                  <a:srgbClr val="333840"/>
-                </a:solidFill>
-                <a:latin typeface="Calibri"/>
+                  <a:srgbClr val="3C3937"/>
+                </a:solidFill>
+                <a:latin typeface="Arial"/>
               </a:rPr>
               <a:t>+33%</a:t>
             </a:r>
@@ -22508,9 +22508,9 @@
             <a:r>
               <a:rPr sz="1000" b="1" i="0">
                 <a:solidFill>
-                  <a:srgbClr val="1E334E"/>
-                </a:solidFill>
-                <a:latin typeface="Calibri"/>
+                  <a:srgbClr val="314359"/>
+                </a:solidFill>
+                <a:latin typeface="Arial"/>
               </a:rPr>
               <a:t>Robit</a:t>
             </a:r>
@@ -22594,9 +22594,9 @@
             <a:r>
               <a:rPr sz="1000" b="0" i="0">
                 <a:solidFill>
-                  <a:srgbClr val="333840"/>
-                </a:solidFill>
-                <a:latin typeface="Calibri"/>
+                  <a:srgbClr val="3C3937"/>
+                </a:solidFill>
+                <a:latin typeface="Arial"/>
               </a:rPr>
               <a:t>2015-2020</a:t>
             </a:r>
@@ -22680,9 +22680,9 @@
             <a:r>
               <a:rPr sz="1000" b="0" i="0">
                 <a:solidFill>
-                  <a:srgbClr val="333840"/>
-                </a:solidFill>
-                <a:latin typeface="Calibri"/>
+                  <a:srgbClr val="3C3937"/>
+                </a:solidFill>
+                <a:latin typeface="Arial"/>
               </a:rPr>
               <a:t>14%</a:t>
             </a:r>
@@ -22766,9 +22766,9 @@
             <a:r>
               <a:rPr sz="1000" b="0" i="0">
                 <a:solidFill>
-                  <a:srgbClr val="333840"/>
-                </a:solidFill>
-                <a:latin typeface="Calibri"/>
+                  <a:srgbClr val="3C3937"/>
+                </a:solidFill>
+                <a:latin typeface="Arial"/>
               </a:rPr>
               <a:t>1.4x</a:t>
             </a:r>
@@ -22852,9 +22852,9 @@
             <a:r>
               <a:rPr sz="1000" b="0" i="0">
                 <a:solidFill>
-                  <a:srgbClr val="333840"/>
-                </a:solidFill>
-                <a:latin typeface="Calibri"/>
+                  <a:srgbClr val="3C3937"/>
+                </a:solidFill>
+                <a:latin typeface="Arial"/>
               </a:rPr>
               <a:t>+8%</a:t>
             </a:r>
@@ -22876,7 +22876,7 @@
             <a:avLst/>
           </a:prstGeom>
           <a:solidFill>
-            <a:srgbClr val="F1F2F4"/>
+            <a:srgbClr val="F6F7F9"/>
           </a:solidFill>
           <a:ln>
             <a:noFill/>
@@ -22938,9 +22938,9 @@
             <a:r>
               <a:rPr sz="1000" b="1" i="0">
                 <a:solidFill>
-                  <a:srgbClr val="1E334E"/>
-                </a:solidFill>
-                <a:latin typeface="Calibri"/>
+                  <a:srgbClr val="314359"/>
+                </a:solidFill>
+                <a:latin typeface="Arial"/>
               </a:rPr>
               <a:t>Kitron</a:t>
             </a:r>
@@ -22962,7 +22962,7 @@
             <a:avLst/>
           </a:prstGeom>
           <a:solidFill>
-            <a:srgbClr val="F1F2F4"/>
+            <a:srgbClr val="F6F7F9"/>
           </a:solidFill>
           <a:ln>
             <a:noFill/>
@@ -23024,9 +23024,9 @@
             <a:r>
               <a:rPr sz="1000" b="0" i="0">
                 <a:solidFill>
-                  <a:srgbClr val="333840"/>
-                </a:solidFill>
-                <a:latin typeface="Calibri"/>
+                  <a:srgbClr val="3C3937"/>
+                </a:solidFill>
+                <a:latin typeface="Arial"/>
               </a:rPr>
               <a:t>2016-2018</a:t>
             </a:r>
@@ -23048,7 +23048,7 @@
             <a:avLst/>
           </a:prstGeom>
           <a:solidFill>
-            <a:srgbClr val="F1F2F4"/>
+            <a:srgbClr val="F6F7F9"/>
           </a:solidFill>
           <a:ln>
             <a:noFill/>
@@ -23110,9 +23110,9 @@
             <a:r>
               <a:rPr sz="1000" b="0" i="0">
                 <a:solidFill>
-                  <a:srgbClr val="333840"/>
-                </a:solidFill>
-                <a:latin typeface="Calibri"/>
+                  <a:srgbClr val="3C3937"/>
+                </a:solidFill>
+                <a:latin typeface="Arial"/>
               </a:rPr>
               <a:t>40%</a:t>
             </a:r>
@@ -23134,7 +23134,7 @@
             <a:avLst/>
           </a:prstGeom>
           <a:solidFill>
-            <a:srgbClr val="F1F2F4"/>
+            <a:srgbClr val="F6F7F9"/>
           </a:solidFill>
           <a:ln>
             <a:noFill/>
@@ -23196,9 +23196,9 @@
             <a:r>
               <a:rPr sz="1000" b="0" i="0">
                 <a:solidFill>
-                  <a:srgbClr val="333840"/>
-                </a:solidFill>
-                <a:latin typeface="Calibri"/>
+                  <a:srgbClr val="3C3937"/>
+                </a:solidFill>
+                <a:latin typeface="Arial"/>
               </a:rPr>
               <a:t>1.5x</a:t>
             </a:r>
@@ -23220,7 +23220,7 @@
             <a:avLst/>
           </a:prstGeom>
           <a:solidFill>
-            <a:srgbClr val="F1F2F4"/>
+            <a:srgbClr val="F6F7F9"/>
           </a:solidFill>
           <a:ln>
             <a:noFill/>
@@ -23282,9 +23282,9 @@
             <a:r>
               <a:rPr sz="1000" b="0" i="0">
                 <a:solidFill>
-                  <a:srgbClr val="333840"/>
-                </a:solidFill>
-                <a:latin typeface="Calibri"/>
+                  <a:srgbClr val="3C3937"/>
+                </a:solidFill>
+                <a:latin typeface="Arial"/>
               </a:rPr>
               <a:t>+16%</a:t>
             </a:r>
@@ -23368,9 +23368,9 @@
             <a:r>
               <a:rPr sz="1000" b="1" i="0">
                 <a:solidFill>
-                  <a:srgbClr val="1E334E"/>
-                </a:solidFill>
-                <a:latin typeface="Calibri"/>
+                  <a:srgbClr val="314359"/>
+                </a:solidFill>
+                <a:latin typeface="Arial"/>
               </a:rPr>
               <a:t>Sandvik</a:t>
             </a:r>
@@ -23454,9 +23454,9 @@
             <a:r>
               <a:rPr sz="1000" b="0" i="0">
                 <a:solidFill>
-                  <a:srgbClr val="333840"/>
-                </a:solidFill>
-                <a:latin typeface="Calibri"/>
+                  <a:srgbClr val="3C3937"/>
+                </a:solidFill>
+                <a:latin typeface="Arial"/>
               </a:rPr>
               <a:t>2015-2017</a:t>
             </a:r>
@@ -23540,9 +23540,9 @@
             <a:r>
               <a:rPr sz="1000" b="0" i="0">
                 <a:solidFill>
-                  <a:srgbClr val="333840"/>
-                </a:solidFill>
-                <a:latin typeface="Calibri"/>
+                  <a:srgbClr val="3C3937"/>
+                </a:solidFill>
+                <a:latin typeface="Arial"/>
               </a:rPr>
               <a:t>49%</a:t>
             </a:r>
@@ -23626,9 +23626,9 @@
             <a:r>
               <a:rPr sz="1000" b="0" i="0">
                 <a:solidFill>
-                  <a:srgbClr val="333840"/>
-                </a:solidFill>
-                <a:latin typeface="Calibri"/>
+                  <a:srgbClr val="3C3937"/>
+                </a:solidFill>
+                <a:latin typeface="Arial"/>
               </a:rPr>
               <a:t>1.6x</a:t>
             </a:r>
@@ -23712,9 +23712,9 @@
             <a:r>
               <a:rPr sz="1000" b="0" i="0">
                 <a:solidFill>
-                  <a:srgbClr val="333840"/>
-                </a:solidFill>
-                <a:latin typeface="Calibri"/>
+                  <a:srgbClr val="3C3937"/>
+                </a:solidFill>
+                <a:latin typeface="Arial"/>
               </a:rPr>
               <a:t>+43%</a:t>
             </a:r>
@@ -23736,7 +23736,7 @@
             <a:avLst/>
           </a:prstGeom>
           <a:solidFill>
-            <a:srgbClr val="F1F2F4"/>
+            <a:srgbClr val="F6F7F9"/>
           </a:solidFill>
           <a:ln>
             <a:noFill/>
@@ -23798,9 +23798,9 @@
             <a:r>
               <a:rPr sz="1000" b="1" i="0">
                 <a:solidFill>
-                  <a:srgbClr val="1E334E"/>
-                </a:solidFill>
-                <a:latin typeface="Calibri"/>
+                  <a:srgbClr val="314359"/>
+                </a:solidFill>
+                <a:latin typeface="Arial"/>
               </a:rPr>
               <a:t>Transcom</a:t>
             </a:r>
@@ -23822,7 +23822,7 @@
             <a:avLst/>
           </a:prstGeom>
           <a:solidFill>
-            <a:srgbClr val="F1F2F4"/>
+            <a:srgbClr val="F6F7F9"/>
           </a:solidFill>
           <a:ln>
             <a:noFill/>
@@ -23884,9 +23884,9 @@
             <a:r>
               <a:rPr sz="1000" b="0" i="0">
                 <a:solidFill>
-                  <a:srgbClr val="333840"/>
-                </a:solidFill>
-                <a:latin typeface="Calibri"/>
+                  <a:srgbClr val="3C3937"/>
+                </a:solidFill>
+                <a:latin typeface="Arial"/>
               </a:rPr>
               <a:t>2015-2016</a:t>
             </a:r>
@@ -23908,7 +23908,7 @@
             <a:avLst/>
           </a:prstGeom>
           <a:solidFill>
-            <a:srgbClr val="F1F2F4"/>
+            <a:srgbClr val="F6F7F9"/>
           </a:solidFill>
           <a:ln>
             <a:noFill/>
@@ -23970,9 +23970,9 @@
             <a:r>
               <a:rPr sz="1000" b="0" i="0">
                 <a:solidFill>
-                  <a:srgbClr val="333840"/>
-                </a:solidFill>
-                <a:latin typeface="Calibri"/>
+                  <a:srgbClr val="3C3937"/>
+                </a:solidFill>
+                <a:latin typeface="Arial"/>
               </a:rPr>
               <a:t>80%</a:t>
             </a:r>
@@ -23994,7 +23994,7 @@
             <a:avLst/>
           </a:prstGeom>
           <a:solidFill>
-            <a:srgbClr val="F1F2F4"/>
+            <a:srgbClr val="F6F7F9"/>
           </a:solidFill>
           <a:ln>
             <a:noFill/>
@@ -24056,9 +24056,9 @@
             <a:r>
               <a:rPr sz="1000" b="0" i="0">
                 <a:solidFill>
-                  <a:srgbClr val="333840"/>
-                </a:solidFill>
-                <a:latin typeface="Calibri"/>
+                  <a:srgbClr val="3C3937"/>
+                </a:solidFill>
+                <a:latin typeface="Arial"/>
               </a:rPr>
               <a:t>1.7x</a:t>
             </a:r>
@@ -24080,7 +24080,7 @@
             <a:avLst/>
           </a:prstGeom>
           <a:solidFill>
-            <a:srgbClr val="F1F2F4"/>
+            <a:srgbClr val="F6F7F9"/>
           </a:solidFill>
           <a:ln>
             <a:noFill/>
@@ -24142,9 +24142,9 @@
             <a:r>
               <a:rPr sz="1000" b="0" i="0">
                 <a:solidFill>
-                  <a:srgbClr val="333840"/>
-                </a:solidFill>
-                <a:latin typeface="Calibri"/>
+                  <a:srgbClr val="3C3937"/>
+                </a:solidFill>
+                <a:latin typeface="Arial"/>
               </a:rPr>
               <a:t>+80%</a:t>
             </a:r>
@@ -24166,7 +24166,7 @@
             <a:avLst/>
           </a:prstGeom>
           <a:solidFill>
-            <a:srgbClr val="14253B"/>
+            <a:srgbClr val="152130"/>
           </a:solidFill>
           <a:ln>
             <a:noFill/>
@@ -24230,7 +24230,7 @@
                 <a:solidFill>
                   <a:srgbClr val="FFFFFF"/>
                 </a:solidFill>
-                <a:latin typeface="Calibri"/>
+                <a:latin typeface="Arial"/>
               </a:rPr>
               <a:t>17 deals   ·   weighted MOIC 2.2x   ·   ex best/worst IRR 41% vs index ~9%   ·   36 of 39 deals profitable since 2006</a:t>
             </a:r>
@@ -24270,9 +24270,9 @@
             <a:r>
               <a:rPr sz="850" b="0" i="0">
                 <a:solidFill>
-                  <a:srgbClr val="9AA4B0"/>
-                </a:solidFill>
-                <a:latin typeface="Calibri"/>
+                  <a:srgbClr val="9A958E"/>
+                </a:solidFill>
+                <a:latin typeface="Arial"/>
               </a:rPr>
               <a:t>IRR/MOIC net of the position; “n.m.” where short holding periods make annualised figures not meaningful. Capital in SEK.</a:t>
             </a:r>
@@ -24398,9 +24398,9 @@
             <a:r>
               <a:rPr sz="1100" b="0" i="0">
                 <a:solidFill>
-                  <a:srgbClr val="4A5D75"/>
-                </a:solidFill>
-                <a:latin typeface="Calibri"/>
+                  <a:srgbClr val="6F8990"/>
+                </a:solidFill>
+                <a:latin typeface="Arial"/>
               </a:rPr>
               <a:t>Track Record</a:t>
             </a:r>
@@ -24440,9 +24440,9 @@
             <a:r>
               <a:rPr sz="1100" b="1" i="0">
                 <a:solidFill>
-                  <a:srgbClr val="4A5D75"/>
-                </a:solidFill>
-                <a:latin typeface="Calibri"/>
+                  <a:srgbClr val="6F8990"/>
+                </a:solidFill>
+                <a:latin typeface="Arial"/>
               </a:rPr>
               <a:t>Table 5</a:t>
             </a:r>
@@ -24464,7 +24464,7 @@
             <a:avLst/>
           </a:prstGeom>
           <a:solidFill>
-            <a:srgbClr val="F1F2F4"/>
+            <a:srgbClr val="F6F7F9"/>
           </a:solidFill>
           <a:ln>
             <a:noFill/>
@@ -24526,7 +24526,7 @@
             <a:r>
               <a:rPr sz="3000" b="0" i="0">
                 <a:solidFill>
-                  <a:srgbClr val="1E334E"/>
+                  <a:srgbClr val="314359"/>
                 </a:solidFill>
                 <a:latin typeface="Times New Roman"/>
               </a:rPr>
@@ -24568,9 +24568,9 @@
             <a:r>
               <a:rPr sz="1300" b="0" i="1">
                 <a:solidFill>
-                  <a:srgbClr val="5A636E"/>
-                </a:solidFill>
-                <a:latin typeface="Calibri"/>
+                  <a:srgbClr val="64615E"/>
+                </a:solidFill>
+                <a:latin typeface="Arial"/>
               </a:rPr>
               <a:t>The same strategy, the prior fund — repeatable across two decades and multiple cycles.</a:t>
             </a:r>
@@ -24610,9 +24610,9 @@
             <a:r>
               <a:rPr sz="850" b="0" i="0">
                 <a:solidFill>
-                  <a:srgbClr val="9AA4B0"/>
-                </a:solidFill>
-                <a:latin typeface="Calibri"/>
+                  <a:srgbClr val="9A958E"/>
+                </a:solidFill>
+                <a:latin typeface="Arial"/>
               </a:rPr>
               <a:t>Strictly confidential          19</a:t>
             </a:r>
@@ -24634,7 +24634,7 @@
             <a:avLst/>
           </a:prstGeom>
           <a:solidFill>
-            <a:srgbClr val="4A5D75"/>
+            <a:srgbClr val="556A83"/>
           </a:solidFill>
           <a:ln>
             <a:noFill/>
@@ -24698,7 +24698,7 @@
                 <a:solidFill>
                   <a:srgbClr val="FFFFFF"/>
                 </a:solidFill>
-                <a:latin typeface="Calibri"/>
+                <a:latin typeface="Arial"/>
               </a:rPr>
               <a:t>Company</a:t>
             </a:r>
@@ -24720,7 +24720,7 @@
             <a:avLst/>
           </a:prstGeom>
           <a:solidFill>
-            <a:srgbClr val="4A5D75"/>
+            <a:srgbClr val="556A83"/>
           </a:solidFill>
           <a:ln>
             <a:noFill/>
@@ -24784,7 +24784,7 @@
                 <a:solidFill>
                   <a:srgbClr val="FFFFFF"/>
                 </a:solidFill>
-                <a:latin typeface="Calibri"/>
+                <a:latin typeface="Arial"/>
               </a:rPr>
               <a:t>IRR</a:t>
             </a:r>
@@ -24806,7 +24806,7 @@
             <a:avLst/>
           </a:prstGeom>
           <a:solidFill>
-            <a:srgbClr val="4A5D75"/>
+            <a:srgbClr val="556A83"/>
           </a:solidFill>
           <a:ln>
             <a:noFill/>
@@ -24870,7 +24870,7 @@
                 <a:solidFill>
                   <a:srgbClr val="FFFFFF"/>
                 </a:solidFill>
-                <a:latin typeface="Calibri"/>
+                <a:latin typeface="Arial"/>
               </a:rPr>
               <a:t>MOIC</a:t>
             </a:r>
@@ -24892,7 +24892,7 @@
             <a:avLst/>
           </a:prstGeom>
           <a:solidFill>
-            <a:srgbClr val="F1F2F4"/>
+            <a:srgbClr val="F6F7F9"/>
           </a:solidFill>
           <a:ln>
             <a:noFill/>
@@ -24954,9 +24954,9 @@
             <a:r>
               <a:rPr sz="1000" b="1" i="0">
                 <a:solidFill>
-                  <a:srgbClr val="1E334E"/>
-                </a:solidFill>
-                <a:latin typeface="Calibri"/>
+                  <a:srgbClr val="314359"/>
+                </a:solidFill>
+                <a:latin typeface="Arial"/>
               </a:rPr>
               <a:t>Bilia</a:t>
             </a:r>
@@ -24978,7 +24978,7 @@
             <a:avLst/>
           </a:prstGeom>
           <a:solidFill>
-            <a:srgbClr val="F1F2F4"/>
+            <a:srgbClr val="F6F7F9"/>
           </a:solidFill>
           <a:ln>
             <a:noFill/>
@@ -25040,9 +25040,9 @@
             <a:r>
               <a:rPr sz="1000" b="0" i="0">
                 <a:solidFill>
-                  <a:srgbClr val="333840"/>
-                </a:solidFill>
-                <a:latin typeface="Calibri"/>
+                  <a:srgbClr val="3C3937"/>
+                </a:solidFill>
+                <a:latin typeface="Arial"/>
               </a:rPr>
               <a:t>11%</a:t>
             </a:r>
@@ -25064,7 +25064,7 @@
             <a:avLst/>
           </a:prstGeom>
           <a:solidFill>
-            <a:srgbClr val="F1F2F4"/>
+            <a:srgbClr val="F6F7F9"/>
           </a:solidFill>
           <a:ln>
             <a:noFill/>
@@ -25126,9 +25126,9 @@
             <a:r>
               <a:rPr sz="1000" b="0" i="0">
                 <a:solidFill>
-                  <a:srgbClr val="333840"/>
-                </a:solidFill>
-                <a:latin typeface="Calibri"/>
+                  <a:srgbClr val="3C3937"/>
+                </a:solidFill>
+                <a:latin typeface="Arial"/>
               </a:rPr>
               <a:t>2.9x</a:t>
             </a:r>
@@ -25212,9 +25212,9 @@
             <a:r>
               <a:rPr sz="1000" b="1" i="0">
                 <a:solidFill>
-                  <a:srgbClr val="1E334E"/>
-                </a:solidFill>
-                <a:latin typeface="Calibri"/>
+                  <a:srgbClr val="314359"/>
+                </a:solidFill>
+                <a:latin typeface="Arial"/>
               </a:rPr>
               <a:t>Concentric</a:t>
             </a:r>
@@ -25298,9 +25298,9 @@
             <a:r>
               <a:rPr sz="1000" b="0" i="0">
                 <a:solidFill>
-                  <a:srgbClr val="333840"/>
-                </a:solidFill>
-                <a:latin typeface="Calibri"/>
+                  <a:srgbClr val="3C3937"/>
+                </a:solidFill>
+                <a:latin typeface="Arial"/>
               </a:rPr>
               <a:t>81%</a:t>
             </a:r>
@@ -25384,9 +25384,9 @@
             <a:r>
               <a:rPr sz="1000" b="0" i="0">
                 <a:solidFill>
-                  <a:srgbClr val="333840"/>
-                </a:solidFill>
-                <a:latin typeface="Calibri"/>
+                  <a:srgbClr val="3C3937"/>
+                </a:solidFill>
+                <a:latin typeface="Arial"/>
               </a:rPr>
               <a:t>3.9x</a:t>
             </a:r>
@@ -25408,7 +25408,7 @@
             <a:avLst/>
           </a:prstGeom>
           <a:solidFill>
-            <a:srgbClr val="F1F2F4"/>
+            <a:srgbClr val="F6F7F9"/>
           </a:solidFill>
           <a:ln>
             <a:noFill/>
@@ -25470,9 +25470,9 @@
             <a:r>
               <a:rPr sz="1000" b="1" i="0">
                 <a:solidFill>
-                  <a:srgbClr val="1E334E"/>
-                </a:solidFill>
-                <a:latin typeface="Calibri"/>
+                  <a:srgbClr val="314359"/>
+                </a:solidFill>
+                <a:latin typeface="Arial"/>
               </a:rPr>
               <a:t>eWork</a:t>
             </a:r>
@@ -25494,7 +25494,7 @@
             <a:avLst/>
           </a:prstGeom>
           <a:solidFill>
-            <a:srgbClr val="F1F2F4"/>
+            <a:srgbClr val="F6F7F9"/>
           </a:solidFill>
           <a:ln>
             <a:noFill/>
@@ -25556,9 +25556,9 @@
             <a:r>
               <a:rPr sz="1000" b="0" i="0">
                 <a:solidFill>
-                  <a:srgbClr val="333840"/>
-                </a:solidFill>
-                <a:latin typeface="Calibri"/>
+                  <a:srgbClr val="3C3937"/>
+                </a:solidFill>
+                <a:latin typeface="Arial"/>
               </a:rPr>
               <a:t>30%</a:t>
             </a:r>
@@ -25580,7 +25580,7 @@
             <a:avLst/>
           </a:prstGeom>
           <a:solidFill>
-            <a:srgbClr val="F1F2F4"/>
+            <a:srgbClr val="F6F7F9"/>
           </a:solidFill>
           <a:ln>
             <a:noFill/>
@@ -25642,9 +25642,9 @@
             <a:r>
               <a:rPr sz="1000" b="0" i="0">
                 <a:solidFill>
-                  <a:srgbClr val="333840"/>
-                </a:solidFill>
-                <a:latin typeface="Calibri"/>
+                  <a:srgbClr val="3C3937"/>
+                </a:solidFill>
+                <a:latin typeface="Arial"/>
               </a:rPr>
               <a:t>4.4x</a:t>
             </a:r>
@@ -25728,9 +25728,9 @@
             <a:r>
               <a:rPr sz="1000" b="1" i="0">
                 <a:solidFill>
-                  <a:srgbClr val="1E334E"/>
-                </a:solidFill>
-                <a:latin typeface="Calibri"/>
+                  <a:srgbClr val="314359"/>
+                </a:solidFill>
+                <a:latin typeface="Arial"/>
               </a:rPr>
               <a:t>Haldex</a:t>
             </a:r>
@@ -25814,9 +25814,9 @@
             <a:r>
               <a:rPr sz="1000" b="0" i="0">
                 <a:solidFill>
-                  <a:srgbClr val="333840"/>
-                </a:solidFill>
-                <a:latin typeface="Calibri"/>
+                  <a:srgbClr val="3C3937"/>
+                </a:solidFill>
+                <a:latin typeface="Arial"/>
               </a:rPr>
               <a:t>94%</a:t>
             </a:r>
@@ -25900,9 +25900,9 @@
             <a:r>
               <a:rPr sz="1000" b="0" i="0">
                 <a:solidFill>
-                  <a:srgbClr val="333840"/>
-                </a:solidFill>
-                <a:latin typeface="Calibri"/>
+                  <a:srgbClr val="3C3937"/>
+                </a:solidFill>
+                <a:latin typeface="Arial"/>
               </a:rPr>
               <a:t>5.5x</a:t>
             </a:r>
@@ -25924,7 +25924,7 @@
             <a:avLst/>
           </a:prstGeom>
           <a:solidFill>
-            <a:srgbClr val="F1F2F4"/>
+            <a:srgbClr val="F6F7F9"/>
           </a:solidFill>
           <a:ln>
             <a:noFill/>
@@ -25986,9 +25986,9 @@
             <a:r>
               <a:rPr sz="1000" b="1" i="0">
                 <a:solidFill>
-                  <a:srgbClr val="1E334E"/>
-                </a:solidFill>
-                <a:latin typeface="Calibri"/>
+                  <a:srgbClr val="314359"/>
+                </a:solidFill>
+                <a:latin typeface="Arial"/>
               </a:rPr>
               <a:t>Lindab</a:t>
             </a:r>
@@ -26010,7 +26010,7 @@
             <a:avLst/>
           </a:prstGeom>
           <a:solidFill>
-            <a:srgbClr val="F1F2F4"/>
+            <a:srgbClr val="F6F7F9"/>
           </a:solidFill>
           <a:ln>
             <a:noFill/>
@@ -26072,9 +26072,9 @@
             <a:r>
               <a:rPr sz="1000" b="0" i="0">
                 <a:solidFill>
-                  <a:srgbClr val="333840"/>
-                </a:solidFill>
-                <a:latin typeface="Calibri"/>
+                  <a:srgbClr val="3C3937"/>
+                </a:solidFill>
+                <a:latin typeface="Arial"/>
               </a:rPr>
               <a:t>32%</a:t>
             </a:r>
@@ -26096,7 +26096,7 @@
             <a:avLst/>
           </a:prstGeom>
           <a:solidFill>
-            <a:srgbClr val="F1F2F4"/>
+            <a:srgbClr val="F6F7F9"/>
           </a:solidFill>
           <a:ln>
             <a:noFill/>
@@ -26158,9 +26158,9 @@
             <a:r>
               <a:rPr sz="1000" b="0" i="0">
                 <a:solidFill>
-                  <a:srgbClr val="333840"/>
-                </a:solidFill>
-                <a:latin typeface="Calibri"/>
+                  <a:srgbClr val="3C3937"/>
+                </a:solidFill>
+                <a:latin typeface="Arial"/>
               </a:rPr>
               <a:t>1.6x</a:t>
             </a:r>
@@ -26244,9 +26244,9 @@
             <a:r>
               <a:rPr sz="1000" b="1" i="0">
                 <a:solidFill>
-                  <a:srgbClr val="1E334E"/>
-                </a:solidFill>
-                <a:latin typeface="Calibri"/>
+                  <a:srgbClr val="314359"/>
+                </a:solidFill>
+                <a:latin typeface="Arial"/>
               </a:rPr>
               <a:t>Note</a:t>
             </a:r>
@@ -26330,9 +26330,9 @@
             <a:r>
               <a:rPr sz="1000" b="0" i="0">
                 <a:solidFill>
-                  <a:srgbClr val="333840"/>
-                </a:solidFill>
-                <a:latin typeface="Calibri"/>
+                  <a:srgbClr val="3C3937"/>
+                </a:solidFill>
+                <a:latin typeface="Arial"/>
               </a:rPr>
               <a:t>32%</a:t>
             </a:r>
@@ -26416,9 +26416,9 @@
             <a:r>
               <a:rPr sz="1000" b="0" i="0">
                 <a:solidFill>
-                  <a:srgbClr val="333840"/>
-                </a:solidFill>
-                <a:latin typeface="Calibri"/>
+                  <a:srgbClr val="3C3937"/>
+                </a:solidFill>
+                <a:latin typeface="Arial"/>
               </a:rPr>
               <a:t>5.1x</a:t>
             </a:r>
@@ -26440,7 +26440,7 @@
             <a:avLst/>
           </a:prstGeom>
           <a:solidFill>
-            <a:srgbClr val="F1F2F4"/>
+            <a:srgbClr val="F6F7F9"/>
           </a:solidFill>
           <a:ln>
             <a:noFill/>
@@ -26502,9 +26502,9 @@
             <a:r>
               <a:rPr sz="1000" b="1" i="0">
                 <a:solidFill>
-                  <a:srgbClr val="1E334E"/>
-                </a:solidFill>
-                <a:latin typeface="Calibri"/>
+                  <a:srgbClr val="314359"/>
+                </a:solidFill>
+                <a:latin typeface="Arial"/>
               </a:rPr>
               <a:t>Transcom</a:t>
             </a:r>
@@ -26526,7 +26526,7 @@
             <a:avLst/>
           </a:prstGeom>
           <a:solidFill>
-            <a:srgbClr val="F1F2F4"/>
+            <a:srgbClr val="F6F7F9"/>
           </a:solidFill>
           <a:ln>
             <a:noFill/>
@@ -26588,9 +26588,9 @@
             <a:r>
               <a:rPr sz="1000" b="0" i="0">
                 <a:solidFill>
-                  <a:srgbClr val="333840"/>
-                </a:solidFill>
-                <a:latin typeface="Calibri"/>
+                  <a:srgbClr val="3C3937"/>
+                </a:solidFill>
+                <a:latin typeface="Arial"/>
               </a:rPr>
               <a:t>13%</a:t>
             </a:r>
@@ -26612,7 +26612,7 @@
             <a:avLst/>
           </a:prstGeom>
           <a:solidFill>
-            <a:srgbClr val="F1F2F4"/>
+            <a:srgbClr val="F6F7F9"/>
           </a:solidFill>
           <a:ln>
             <a:noFill/>
@@ -26674,9 +26674,9 @@
             <a:r>
               <a:rPr sz="1000" b="0" i="0">
                 <a:solidFill>
-                  <a:srgbClr val="333840"/>
-                </a:solidFill>
-                <a:latin typeface="Calibri"/>
+                  <a:srgbClr val="3C3937"/>
+                </a:solidFill>
+                <a:latin typeface="Arial"/>
               </a:rPr>
               <a:t>1.3x</a:t>
             </a:r>
@@ -26760,9 +26760,9 @@
             <a:r>
               <a:rPr sz="1000" b="1" i="0">
                 <a:solidFill>
-                  <a:srgbClr val="1E334E"/>
-                </a:solidFill>
-                <a:latin typeface="Calibri"/>
+                  <a:srgbClr val="314359"/>
+                </a:solidFill>
+                <a:latin typeface="Arial"/>
               </a:rPr>
               <a:t>Global</a:t>
             </a:r>
@@ -26846,9 +26846,9 @@
             <a:r>
               <a:rPr sz="1000" b="0" i="0">
                 <a:solidFill>
-                  <a:srgbClr val="333840"/>
-                </a:solidFill>
-                <a:latin typeface="Calibri"/>
+                  <a:srgbClr val="3C3937"/>
+                </a:solidFill>
+                <a:latin typeface="Arial"/>
               </a:rPr>
               <a:t>16%</a:t>
             </a:r>
@@ -26932,9 +26932,9 @@
             <a:r>
               <a:rPr sz="1000" b="0" i="0">
                 <a:solidFill>
-                  <a:srgbClr val="333840"/>
-                </a:solidFill>
-                <a:latin typeface="Calibri"/>
+                  <a:srgbClr val="3C3937"/>
+                </a:solidFill>
+                <a:latin typeface="Arial"/>
               </a:rPr>
               <a:t>1.5x</a:t>
             </a:r>
@@ -26956,7 +26956,7 @@
             <a:avLst/>
           </a:prstGeom>
           <a:solidFill>
-            <a:srgbClr val="F1F2F4"/>
+            <a:srgbClr val="F6F7F9"/>
           </a:solidFill>
           <a:ln>
             <a:noFill/>
@@ -27018,9 +27018,9 @@
             <a:r>
               <a:rPr sz="1000" b="1" i="0">
                 <a:solidFill>
-                  <a:srgbClr val="1E334E"/>
-                </a:solidFill>
-                <a:latin typeface="Calibri"/>
+                  <a:srgbClr val="314359"/>
+                </a:solidFill>
+                <a:latin typeface="Arial"/>
               </a:rPr>
               <a:t>Ferronordic Machines</a:t>
             </a:r>
@@ -27042,7 +27042,7 @@
             <a:avLst/>
           </a:prstGeom>
           <a:solidFill>
-            <a:srgbClr val="F1F2F4"/>
+            <a:srgbClr val="F6F7F9"/>
           </a:solidFill>
           <a:ln>
             <a:noFill/>
@@ -27104,9 +27104,9 @@
             <a:r>
               <a:rPr sz="1000" b="0" i="0">
                 <a:solidFill>
-                  <a:srgbClr val="333840"/>
-                </a:solidFill>
-                <a:latin typeface="Calibri"/>
+                  <a:srgbClr val="3C3937"/>
+                </a:solidFill>
+                <a:latin typeface="Arial"/>
               </a:rPr>
               <a:t>43%</a:t>
             </a:r>
@@ -27128,7 +27128,7 @@
             <a:avLst/>
           </a:prstGeom>
           <a:solidFill>
-            <a:srgbClr val="F1F2F4"/>
+            <a:srgbClr val="F6F7F9"/>
           </a:solidFill>
           <a:ln>
             <a:noFill/>
@@ -27190,9 +27190,9 @@
             <a:r>
               <a:rPr sz="1000" b="0" i="0">
                 <a:solidFill>
-                  <a:srgbClr val="333840"/>
-                </a:solidFill>
-                <a:latin typeface="Calibri"/>
+                  <a:srgbClr val="3C3937"/>
+                </a:solidFill>
+                <a:latin typeface="Arial"/>
               </a:rPr>
               <a:t>2.0x</a:t>
             </a:r>
@@ -27276,9 +27276,9 @@
             <a:r>
               <a:rPr sz="1000" b="1" i="0">
                 <a:solidFill>
-                  <a:srgbClr val="1E334E"/>
-                </a:solidFill>
-                <a:latin typeface="Calibri"/>
+                  <a:srgbClr val="314359"/>
+                </a:solidFill>
+                <a:latin typeface="Arial"/>
               </a:rPr>
               <a:t>Klarna</a:t>
             </a:r>
@@ -27362,9 +27362,9 @@
             <a:r>
               <a:rPr sz="1000" b="0" i="0">
                 <a:solidFill>
-                  <a:srgbClr val="333840"/>
-                </a:solidFill>
-                <a:latin typeface="Calibri"/>
+                  <a:srgbClr val="3C3937"/>
+                </a:solidFill>
+                <a:latin typeface="Arial"/>
               </a:rPr>
               <a:t>108%</a:t>
             </a:r>
@@ -27448,9 +27448,9 @@
             <a:r>
               <a:rPr sz="1000" b="0" i="0">
                 <a:solidFill>
-                  <a:srgbClr val="333840"/>
-                </a:solidFill>
-                <a:latin typeface="Calibri"/>
+                  <a:srgbClr val="3C3937"/>
+                </a:solidFill>
+                <a:latin typeface="Arial"/>
               </a:rPr>
               <a:t>28.2x</a:t>
             </a:r>
@@ -27472,7 +27472,7 @@
             <a:avLst/>
           </a:prstGeom>
           <a:solidFill>
-            <a:srgbClr val="F1F2F4"/>
+            <a:srgbClr val="F6F7F9"/>
           </a:solidFill>
           <a:ln>
             <a:noFill/>
@@ -27534,9 +27534,9 @@
             <a:r>
               <a:rPr sz="1000" b="1" i="0">
                 <a:solidFill>
-                  <a:srgbClr val="1E334E"/>
-                </a:solidFill>
-                <a:latin typeface="Calibri"/>
+                  <a:srgbClr val="314359"/>
+                </a:solidFill>
+                <a:latin typeface="Arial"/>
               </a:rPr>
               <a:t>Acne</a:t>
             </a:r>
@@ -27558,7 +27558,7 @@
             <a:avLst/>
           </a:prstGeom>
           <a:solidFill>
-            <a:srgbClr val="F1F2F4"/>
+            <a:srgbClr val="F6F7F9"/>
           </a:solidFill>
           <a:ln>
             <a:noFill/>
@@ -27620,9 +27620,9 @@
             <a:r>
               <a:rPr sz="1000" b="0" i="0">
                 <a:solidFill>
-                  <a:srgbClr val="333840"/>
-                </a:solidFill>
-                <a:latin typeface="Calibri"/>
+                  <a:srgbClr val="3C3937"/>
+                </a:solidFill>
+                <a:latin typeface="Arial"/>
               </a:rPr>
               <a:t>29%</a:t>
             </a:r>
@@ -27644,7 +27644,7 @@
             <a:avLst/>
           </a:prstGeom>
           <a:solidFill>
-            <a:srgbClr val="F1F2F4"/>
+            <a:srgbClr val="F6F7F9"/>
           </a:solidFill>
           <a:ln>
             <a:noFill/>
@@ -27706,9 +27706,9 @@
             <a:r>
               <a:rPr sz="1000" b="0" i="0">
                 <a:solidFill>
-                  <a:srgbClr val="333840"/>
-                </a:solidFill>
-                <a:latin typeface="Calibri"/>
+                  <a:srgbClr val="3C3937"/>
+                </a:solidFill>
+                <a:latin typeface="Arial"/>
               </a:rPr>
               <a:t>5.5x</a:t>
             </a:r>
@@ -27730,7 +27730,7 @@
             <a:avLst/>
           </a:prstGeom>
           <a:solidFill>
-            <a:srgbClr val="4A5D75"/>
+            <a:srgbClr val="556A83"/>
           </a:solidFill>
           <a:ln>
             <a:noFill/>
@@ -27794,7 +27794,7 @@
                 <a:solidFill>
                   <a:srgbClr val="FFFFFF"/>
                 </a:solidFill>
-                <a:latin typeface="Calibri"/>
+                <a:latin typeface="Arial"/>
               </a:rPr>
               <a:t>Company</a:t>
             </a:r>
@@ -27816,7 +27816,7 @@
             <a:avLst/>
           </a:prstGeom>
           <a:solidFill>
-            <a:srgbClr val="4A5D75"/>
+            <a:srgbClr val="556A83"/>
           </a:solidFill>
           <a:ln>
             <a:noFill/>
@@ -27880,7 +27880,7 @@
                 <a:solidFill>
                   <a:srgbClr val="FFFFFF"/>
                 </a:solidFill>
-                <a:latin typeface="Calibri"/>
+                <a:latin typeface="Arial"/>
               </a:rPr>
               <a:t>IRR</a:t>
             </a:r>
@@ -27902,7 +27902,7 @@
             <a:avLst/>
           </a:prstGeom>
           <a:solidFill>
-            <a:srgbClr val="4A5D75"/>
+            <a:srgbClr val="556A83"/>
           </a:solidFill>
           <a:ln>
             <a:noFill/>
@@ -27966,7 +27966,7 @@
                 <a:solidFill>
                   <a:srgbClr val="FFFFFF"/>
                 </a:solidFill>
-                <a:latin typeface="Calibri"/>
+                <a:latin typeface="Arial"/>
               </a:rPr>
               <a:t>MOIC</a:t>
             </a:r>
@@ -27988,7 +27988,7 @@
             <a:avLst/>
           </a:prstGeom>
           <a:solidFill>
-            <a:srgbClr val="F1F2F4"/>
+            <a:srgbClr val="F6F7F9"/>
           </a:solidFill>
           <a:ln>
             <a:noFill/>
@@ -28050,9 +28050,9 @@
             <a:r>
               <a:rPr sz="1000" b="1" i="0">
                 <a:solidFill>
-                  <a:srgbClr val="1E334E"/>
-                </a:solidFill>
-                <a:latin typeface="Calibri"/>
+                  <a:srgbClr val="314359"/>
+                </a:solidFill>
+                <a:latin typeface="Arial"/>
               </a:rPr>
               <a:t>Usports</a:t>
             </a:r>
@@ -28074,7 +28074,7 @@
             <a:avLst/>
           </a:prstGeom>
           <a:solidFill>
-            <a:srgbClr val="F1F2F4"/>
+            <a:srgbClr val="F6F7F9"/>
           </a:solidFill>
           <a:ln>
             <a:noFill/>
@@ -28138,7 +28138,7 @@
                 <a:solidFill>
                   <a:srgbClr val="A84A4A"/>
                 </a:solidFill>
-                <a:latin typeface="Calibri"/>
+                <a:latin typeface="Arial"/>
               </a:rPr>
               <a:t>-51%</a:t>
             </a:r>
@@ -28160,7 +28160,7 @@
             <a:avLst/>
           </a:prstGeom>
           <a:solidFill>
-            <a:srgbClr val="F1F2F4"/>
+            <a:srgbClr val="F6F7F9"/>
           </a:solidFill>
           <a:ln>
             <a:noFill/>
@@ -28224,7 +28224,7 @@
                 <a:solidFill>
                   <a:srgbClr val="A84A4A"/>
                 </a:solidFill>
-                <a:latin typeface="Calibri"/>
+                <a:latin typeface="Arial"/>
               </a:rPr>
               <a:t>0.3x</a:t>
             </a:r>
@@ -28308,9 +28308,9 @@
             <a:r>
               <a:rPr sz="1000" b="1" i="0">
                 <a:solidFill>
-                  <a:srgbClr val="1E334E"/>
-                </a:solidFill>
-                <a:latin typeface="Calibri"/>
+                  <a:srgbClr val="314359"/>
+                </a:solidFill>
+                <a:latin typeface="Arial"/>
               </a:rPr>
               <a:t>Catena</a:t>
             </a:r>
@@ -28394,9 +28394,9 @@
             <a:r>
               <a:rPr sz="1000" b="0" i="0">
                 <a:solidFill>
-                  <a:srgbClr val="333840"/>
-                </a:solidFill>
-                <a:latin typeface="Calibri"/>
+                  <a:srgbClr val="3C3937"/>
+                </a:solidFill>
+                <a:latin typeface="Arial"/>
               </a:rPr>
               <a:t>n.m.</a:t>
             </a:r>
@@ -28480,9 +28480,9 @@
             <a:r>
               <a:rPr sz="1000" b="0" i="0">
                 <a:solidFill>
-                  <a:srgbClr val="333840"/>
-                </a:solidFill>
-                <a:latin typeface="Calibri"/>
+                  <a:srgbClr val="3C3937"/>
+                </a:solidFill>
+                <a:latin typeface="Arial"/>
               </a:rPr>
               <a:t>3.1x</a:t>
             </a:r>
@@ -28504,7 +28504,7 @@
             <a:avLst/>
           </a:prstGeom>
           <a:solidFill>
-            <a:srgbClr val="F1F2F4"/>
+            <a:srgbClr val="F6F7F9"/>
           </a:solidFill>
           <a:ln>
             <a:noFill/>
@@ -28566,9 +28566,9 @@
             <a:r>
               <a:rPr sz="1000" b="1" i="0">
                 <a:solidFill>
-                  <a:srgbClr val="1E334E"/>
-                </a:solidFill>
-                <a:latin typeface="Calibri"/>
+                  <a:srgbClr val="314359"/>
+                </a:solidFill>
+                <a:latin typeface="Arial"/>
               </a:rPr>
               <a:t>Tigerholm Products</a:t>
             </a:r>
@@ -28590,7 +28590,7 @@
             <a:avLst/>
           </a:prstGeom>
           <a:solidFill>
-            <a:srgbClr val="F1F2F4"/>
+            <a:srgbClr val="F6F7F9"/>
           </a:solidFill>
           <a:ln>
             <a:noFill/>
@@ -28652,9 +28652,9 @@
             <a:r>
               <a:rPr sz="1000" b="0" i="0">
                 <a:solidFill>
-                  <a:srgbClr val="333840"/>
-                </a:solidFill>
-                <a:latin typeface="Calibri"/>
+                  <a:srgbClr val="3C3937"/>
+                </a:solidFill>
+                <a:latin typeface="Arial"/>
               </a:rPr>
               <a:t>111%</a:t>
             </a:r>
@@ -28676,7 +28676,7 @@
             <a:avLst/>
           </a:prstGeom>
           <a:solidFill>
-            <a:srgbClr val="F1F2F4"/>
+            <a:srgbClr val="F6F7F9"/>
           </a:solidFill>
           <a:ln>
             <a:noFill/>
@@ -28738,9 +28738,9 @@
             <a:r>
               <a:rPr sz="1000" b="0" i="0">
                 <a:solidFill>
-                  <a:srgbClr val="333840"/>
-                </a:solidFill>
-                <a:latin typeface="Calibri"/>
+                  <a:srgbClr val="3C3937"/>
+                </a:solidFill>
+                <a:latin typeface="Arial"/>
               </a:rPr>
               <a:t>1.4x</a:t>
             </a:r>
@@ -28824,9 +28824,9 @@
             <a:r>
               <a:rPr sz="1000" b="1" i="0">
                 <a:solidFill>
-                  <a:srgbClr val="1E334E"/>
-                </a:solidFill>
-                <a:latin typeface="Calibri"/>
+                  <a:srgbClr val="314359"/>
+                </a:solidFill>
+                <a:latin typeface="Arial"/>
               </a:rPr>
               <a:t>Avanza</a:t>
             </a:r>
@@ -28910,9 +28910,9 @@
             <a:r>
               <a:rPr sz="1000" b="0" i="0">
                 <a:solidFill>
-                  <a:srgbClr val="333840"/>
-                </a:solidFill>
-                <a:latin typeface="Calibri"/>
+                  <a:srgbClr val="3C3937"/>
+                </a:solidFill>
+                <a:latin typeface="Arial"/>
               </a:rPr>
               <a:t>34%</a:t>
             </a:r>
@@ -28996,9 +28996,9 @@
             <a:r>
               <a:rPr sz="1000" b="0" i="0">
                 <a:solidFill>
-                  <a:srgbClr val="333840"/>
-                </a:solidFill>
-                <a:latin typeface="Calibri"/>
+                  <a:srgbClr val="3C3937"/>
+                </a:solidFill>
+                <a:latin typeface="Arial"/>
               </a:rPr>
               <a:t>8.4x</a:t>
             </a:r>
@@ -29020,7 +29020,7 @@
             <a:avLst/>
           </a:prstGeom>
           <a:solidFill>
-            <a:srgbClr val="F1F2F4"/>
+            <a:srgbClr val="F6F7F9"/>
           </a:solidFill>
           <a:ln>
             <a:noFill/>
@@ -29082,9 +29082,9 @@
             <a:r>
               <a:rPr sz="1000" b="1" i="0">
                 <a:solidFill>
-                  <a:srgbClr val="1E334E"/>
-                </a:solidFill>
-                <a:latin typeface="Calibri"/>
+                  <a:srgbClr val="314359"/>
+                </a:solidFill>
+                <a:latin typeface="Arial"/>
               </a:rPr>
               <a:t>Fabege</a:t>
             </a:r>
@@ -29106,7 +29106,7 @@
             <a:avLst/>
           </a:prstGeom>
           <a:solidFill>
-            <a:srgbClr val="F1F2F4"/>
+            <a:srgbClr val="F6F7F9"/>
           </a:solidFill>
           <a:ln>
             <a:noFill/>
@@ -29168,9 +29168,9 @@
             <a:r>
               <a:rPr sz="1000" b="0" i="0">
                 <a:solidFill>
-                  <a:srgbClr val="333840"/>
-                </a:solidFill>
-                <a:latin typeface="Calibri"/>
+                  <a:srgbClr val="3C3937"/>
+                </a:solidFill>
+                <a:latin typeface="Arial"/>
               </a:rPr>
               <a:t>25%</a:t>
             </a:r>
@@ -29192,7 +29192,7 @@
             <a:avLst/>
           </a:prstGeom>
           <a:solidFill>
-            <a:srgbClr val="F1F2F4"/>
+            <a:srgbClr val="F6F7F9"/>
           </a:solidFill>
           <a:ln>
             <a:noFill/>
@@ -29254,9 +29254,9 @@
             <a:r>
               <a:rPr sz="1000" b="0" i="0">
                 <a:solidFill>
-                  <a:srgbClr val="333840"/>
-                </a:solidFill>
-                <a:latin typeface="Calibri"/>
+                  <a:srgbClr val="3C3937"/>
+                </a:solidFill>
+                <a:latin typeface="Arial"/>
               </a:rPr>
               <a:t>2.3x</a:t>
             </a:r>
@@ -29340,9 +29340,9 @@
             <a:r>
               <a:rPr sz="1000" b="1" i="0">
                 <a:solidFill>
-                  <a:srgbClr val="1E334E"/>
-                </a:solidFill>
-                <a:latin typeface="Calibri"/>
+                  <a:srgbClr val="314359"/>
+                </a:solidFill>
+                <a:latin typeface="Arial"/>
               </a:rPr>
               <a:t>Johnson Pump</a:t>
             </a:r>
@@ -29426,9 +29426,9 @@
             <a:r>
               <a:rPr sz="1000" b="0" i="0">
                 <a:solidFill>
-                  <a:srgbClr val="333840"/>
-                </a:solidFill>
-                <a:latin typeface="Calibri"/>
+                  <a:srgbClr val="3C3937"/>
+                </a:solidFill>
+                <a:latin typeface="Arial"/>
               </a:rPr>
               <a:t>52%</a:t>
             </a:r>
@@ -29512,9 +29512,9 @@
             <a:r>
               <a:rPr sz="1000" b="0" i="0">
                 <a:solidFill>
-                  <a:srgbClr val="333840"/>
-                </a:solidFill>
-                <a:latin typeface="Calibri"/>
+                  <a:srgbClr val="3C3937"/>
+                </a:solidFill>
+                <a:latin typeface="Arial"/>
               </a:rPr>
               <a:t>3.0x</a:t>
             </a:r>
@@ -29536,7 +29536,7 @@
             <a:avLst/>
           </a:prstGeom>
           <a:solidFill>
-            <a:srgbClr val="F1F2F4"/>
+            <a:srgbClr val="F6F7F9"/>
           </a:solidFill>
           <a:ln>
             <a:noFill/>
@@ -29598,9 +29598,9 @@
             <a:r>
               <a:rPr sz="1000" b="1" i="0">
                 <a:solidFill>
-                  <a:srgbClr val="1E334E"/>
-                </a:solidFill>
-                <a:latin typeface="Calibri"/>
+                  <a:srgbClr val="314359"/>
+                </a:solidFill>
+                <a:latin typeface="Arial"/>
               </a:rPr>
               <a:t>Klövern</a:t>
             </a:r>
@@ -29622,7 +29622,7 @@
             <a:avLst/>
           </a:prstGeom>
           <a:solidFill>
-            <a:srgbClr val="F1F2F4"/>
+            <a:srgbClr val="F6F7F9"/>
           </a:solidFill>
           <a:ln>
             <a:noFill/>
@@ -29684,9 +29684,9 @@
             <a:r>
               <a:rPr sz="1000" b="0" i="0">
                 <a:solidFill>
-                  <a:srgbClr val="333840"/>
-                </a:solidFill>
-                <a:latin typeface="Calibri"/>
+                  <a:srgbClr val="3C3937"/>
+                </a:solidFill>
+                <a:latin typeface="Arial"/>
               </a:rPr>
               <a:t>18%</a:t>
             </a:r>
@@ -29708,7 +29708,7 @@
             <a:avLst/>
           </a:prstGeom>
           <a:solidFill>
-            <a:srgbClr val="F1F2F4"/>
+            <a:srgbClr val="F6F7F9"/>
           </a:solidFill>
           <a:ln>
             <a:noFill/>
@@ -29770,9 +29770,9 @@
             <a:r>
               <a:rPr sz="1000" b="0" i="0">
                 <a:solidFill>
-                  <a:srgbClr val="333840"/>
-                </a:solidFill>
-                <a:latin typeface="Calibri"/>
+                  <a:srgbClr val="3C3937"/>
+                </a:solidFill>
+                <a:latin typeface="Arial"/>
               </a:rPr>
               <a:t>2.1x</a:t>
             </a:r>
@@ -29856,9 +29856,9 @@
             <a:r>
               <a:rPr sz="1000" b="1" i="0">
                 <a:solidFill>
-                  <a:srgbClr val="1E334E"/>
-                </a:solidFill>
-                <a:latin typeface="Calibri"/>
+                  <a:srgbClr val="314359"/>
+                </a:solidFill>
+                <a:latin typeface="Arial"/>
               </a:rPr>
               <a:t>Nobia</a:t>
             </a:r>
@@ -29942,9 +29942,9 @@
             <a:r>
               <a:rPr sz="1000" b="0" i="0">
                 <a:solidFill>
-                  <a:srgbClr val="333840"/>
-                </a:solidFill>
-                <a:latin typeface="Calibri"/>
+                  <a:srgbClr val="3C3937"/>
+                </a:solidFill>
+                <a:latin typeface="Arial"/>
               </a:rPr>
               <a:t>8%</a:t>
             </a:r>
@@ -30028,9 +30028,9 @@
             <a:r>
               <a:rPr sz="1000" b="0" i="0">
                 <a:solidFill>
-                  <a:srgbClr val="333840"/>
-                </a:solidFill>
-                <a:latin typeface="Calibri"/>
+                  <a:srgbClr val="3C3937"/>
+                </a:solidFill>
+                <a:latin typeface="Arial"/>
               </a:rPr>
               <a:t>1.4x</a:t>
             </a:r>
@@ -30052,7 +30052,7 @@
             <a:avLst/>
           </a:prstGeom>
           <a:solidFill>
-            <a:srgbClr val="F1F2F4"/>
+            <a:srgbClr val="F6F7F9"/>
           </a:solidFill>
           <a:ln>
             <a:noFill/>
@@ -30114,9 +30114,9 @@
             <a:r>
               <a:rPr sz="1000" b="1" i="0">
                 <a:solidFill>
-                  <a:srgbClr val="1E334E"/>
-                </a:solidFill>
-                <a:latin typeface="Calibri"/>
+                  <a:srgbClr val="314359"/>
+                </a:solidFill>
+                <a:latin typeface="Arial"/>
               </a:rPr>
               <a:t>SkiStar</a:t>
             </a:r>
@@ -30138,7 +30138,7 @@
             <a:avLst/>
           </a:prstGeom>
           <a:solidFill>
-            <a:srgbClr val="F1F2F4"/>
+            <a:srgbClr val="F6F7F9"/>
           </a:solidFill>
           <a:ln>
             <a:noFill/>
@@ -30200,9 +30200,9 @@
             <a:r>
               <a:rPr sz="1000" b="0" i="0">
                 <a:solidFill>
-                  <a:srgbClr val="333840"/>
-                </a:solidFill>
-                <a:latin typeface="Calibri"/>
+                  <a:srgbClr val="3C3937"/>
+                </a:solidFill>
+                <a:latin typeface="Arial"/>
               </a:rPr>
               <a:t>20%</a:t>
             </a:r>
@@ -30224,7 +30224,7 @@
             <a:avLst/>
           </a:prstGeom>
           <a:solidFill>
-            <a:srgbClr val="F1F2F4"/>
+            <a:srgbClr val="F6F7F9"/>
           </a:solidFill>
           <a:ln>
             <a:noFill/>
@@ -30286,9 +30286,9 @@
             <a:r>
               <a:rPr sz="1000" b="0" i="0">
                 <a:solidFill>
-                  <a:srgbClr val="333840"/>
-                </a:solidFill>
-                <a:latin typeface="Calibri"/>
+                  <a:srgbClr val="3C3937"/>
+                </a:solidFill>
+                <a:latin typeface="Arial"/>
               </a:rPr>
               <a:t>5.4x</a:t>
             </a:r>
@@ -30372,9 +30372,9 @@
             <a:r>
               <a:rPr sz="1000" b="1" i="0">
                 <a:solidFill>
-                  <a:srgbClr val="1E334E"/>
-                </a:solidFill>
-                <a:latin typeface="Calibri"/>
+                  <a:srgbClr val="314359"/>
+                </a:solidFill>
+                <a:latin typeface="Arial"/>
               </a:rPr>
               <a:t>Brokk</a:t>
             </a:r>
@@ -30458,9 +30458,9 @@
             <a:r>
               <a:rPr sz="1000" b="0" i="0">
                 <a:solidFill>
-                  <a:srgbClr val="333840"/>
-                </a:solidFill>
-                <a:latin typeface="Calibri"/>
+                  <a:srgbClr val="3C3937"/>
+                </a:solidFill>
+                <a:latin typeface="Arial"/>
               </a:rPr>
               <a:t>74%</a:t>
             </a:r>
@@ -30544,9 +30544,9 @@
             <a:r>
               <a:rPr sz="1000" b="0" i="0">
                 <a:solidFill>
-                  <a:srgbClr val="333840"/>
-                </a:solidFill>
-                <a:latin typeface="Calibri"/>
+                  <a:srgbClr val="3C3937"/>
+                </a:solidFill>
+                <a:latin typeface="Arial"/>
               </a:rPr>
               <a:t>5.2x</a:t>
             </a:r>
@@ -30568,7 +30568,7 @@
             <a:avLst/>
           </a:prstGeom>
           <a:solidFill>
-            <a:srgbClr val="F1F2F4"/>
+            <a:srgbClr val="F6F7F9"/>
           </a:solidFill>
           <a:ln>
             <a:noFill/>
@@ -30630,9 +30630,9 @@
             <a:r>
               <a:rPr sz="1000" b="1" i="0">
                 <a:solidFill>
-                  <a:srgbClr val="1E334E"/>
-                </a:solidFill>
-                <a:latin typeface="Calibri"/>
+                  <a:srgbClr val="314359"/>
+                </a:solidFill>
+                <a:latin typeface="Arial"/>
               </a:rPr>
               <a:t>HQ</a:t>
             </a:r>
@@ -30654,7 +30654,7 @@
             <a:avLst/>
           </a:prstGeom>
           <a:solidFill>
-            <a:srgbClr val="F1F2F4"/>
+            <a:srgbClr val="F6F7F9"/>
           </a:solidFill>
           <a:ln>
             <a:noFill/>
@@ -30718,7 +30718,7 @@
                 <a:solidFill>
                   <a:srgbClr val="A84A4A"/>
                 </a:solidFill>
-                <a:latin typeface="Calibri"/>
+                <a:latin typeface="Arial"/>
               </a:rPr>
               <a:t>-5%</a:t>
             </a:r>
@@ -30740,7 +30740,7 @@
             <a:avLst/>
           </a:prstGeom>
           <a:solidFill>
-            <a:srgbClr val="F1F2F4"/>
+            <a:srgbClr val="F6F7F9"/>
           </a:solidFill>
           <a:ln>
             <a:noFill/>
@@ -30804,7 +30804,7 @@
                 <a:solidFill>
                   <a:srgbClr val="A84A4A"/>
                 </a:solidFill>
-                <a:latin typeface="Calibri"/>
+                <a:latin typeface="Arial"/>
               </a:rPr>
               <a:t>0.6x</a:t>
             </a:r>
@@ -30826,7 +30826,7 @@
             <a:avLst/>
           </a:prstGeom>
           <a:solidFill>
-            <a:srgbClr val="14253B"/>
+            <a:srgbClr val="152130"/>
           </a:solidFill>
           <a:ln>
             <a:noFill/>
@@ -30890,7 +30890,7 @@
                 <a:solidFill>
                   <a:srgbClr val="FFFFFF"/>
                 </a:solidFill>
-                <a:latin typeface="Calibri"/>
+                <a:latin typeface="Arial"/>
               </a:rPr>
               <a:t>22 deals   ·   weighted MOIC 2.7x   ·   average IRR 68%   ·   index outperformance +25 pts (invested-weighted)</a:t>
             </a:r>
@@ -30930,9 +30930,9 @@
             <a:r>
               <a:rPr sz="850" b="0" i="0">
                 <a:solidFill>
-                  <a:srgbClr val="9AA4B0"/>
-                </a:solidFill>
-                <a:latin typeface="Calibri"/>
+                  <a:srgbClr val="9A958E"/>
+                </a:solidFill>
+                <a:latin typeface="Arial"/>
               </a:rPr>
               <a:t>Selected larger deals of the investment team. Losses shown in red. Capital in SEK; ~$400M invested over the period.</a:t>
             </a:r>
@@ -31058,9 +31058,9 @@
             <a:r>
               <a:rPr sz="1100" b="0" i="0">
                 <a:solidFill>
-                  <a:srgbClr val="4A5D75"/>
-                </a:solidFill>
-                <a:latin typeface="Calibri"/>
+                  <a:srgbClr val="6F8990"/>
+                </a:solidFill>
+                <a:latin typeface="Arial"/>
               </a:rPr>
               <a:t>Independent Review</a:t>
             </a:r>
@@ -31082,7 +31082,7 @@
             <a:avLst/>
           </a:prstGeom>
           <a:solidFill>
-            <a:srgbClr val="F1F2F4"/>
+            <a:srgbClr val="F6F7F9"/>
           </a:solidFill>
           <a:ln>
             <a:noFill/>
@@ -31144,7 +31144,7 @@
             <a:r>
               <a:rPr sz="3000" b="0" i="0">
                 <a:solidFill>
-                  <a:srgbClr val="1E334E"/>
+                  <a:srgbClr val="314359"/>
                 </a:solidFill>
                 <a:latin typeface="Times New Roman"/>
               </a:rPr>
@@ -31186,9 +31186,9 @@
             <a:r>
               <a:rPr sz="1300" b="0" i="1">
                 <a:solidFill>
-                  <a:srgbClr val="5A636E"/>
-                </a:solidFill>
-                <a:latin typeface="Calibri"/>
+                  <a:srgbClr val="64615E"/>
+                </a:solidFill>
+                <a:latin typeface="Arial"/>
               </a:rPr>
               <a:t>A prospective LP’s investment committee reconciled the security-level (StatPro) data and the 236-month LP-level NET return series.</a:t>
             </a:r>
@@ -31228,9 +31228,9 @@
             <a:r>
               <a:rPr sz="850" b="0" i="0">
                 <a:solidFill>
-                  <a:srgbClr val="9AA4B0"/>
-                </a:solidFill>
-                <a:latin typeface="Calibri"/>
+                  <a:srgbClr val="9A958E"/>
+                </a:solidFill>
+                <a:latin typeface="Arial"/>
               </a:rPr>
               <a:t>Strictly confidential          20</a:t>
             </a:r>
@@ -31252,7 +31252,7 @@
             <a:avLst/>
           </a:prstGeom>
           <a:solidFill>
-            <a:srgbClr val="F1F2F4"/>
+            <a:srgbClr val="F6F7F9"/>
           </a:solidFill>
           <a:ln>
             <a:noFill/>
@@ -31314,7 +31314,7 @@
             <a:r>
               <a:rPr sz="3400" b="0" i="0">
                 <a:solidFill>
-                  <a:srgbClr val="1E334E"/>
+                  <a:srgbClr val="314359"/>
                 </a:solidFill>
                 <a:latin typeface="Times New Roman"/>
               </a:rPr>
@@ -31333,9 +31333,9 @@
             <a:r>
               <a:rPr sz="1150" b="0" i="0">
                 <a:solidFill>
-                  <a:srgbClr val="5A636E"/>
-                </a:solidFill>
-                <a:latin typeface="Calibri"/>
+                  <a:srgbClr val="64615E"/>
+                </a:solidFill>
+                <a:latin typeface="Arial"/>
               </a:rPr>
               <a:t>cumulative NET return</a:t>
             </a:r>
@@ -31352,9 +31352,9 @@
             <a:r>
               <a:rPr sz="1150" b="0" i="0">
                 <a:solidFill>
-                  <a:srgbClr val="5A636E"/>
-                </a:solidFill>
-                <a:latin typeface="Calibri"/>
+                  <a:srgbClr val="64615E"/>
+                </a:solidFill>
+                <a:latin typeface="Arial"/>
               </a:rPr>
               <a:t>over 19.7 years</a:t>
             </a:r>
@@ -31376,7 +31376,7 @@
             <a:avLst/>
           </a:prstGeom>
           <a:solidFill>
-            <a:srgbClr val="F1F2F4"/>
+            <a:srgbClr val="F6F7F9"/>
           </a:solidFill>
           <a:ln>
             <a:noFill/>
@@ -31438,7 +31438,7 @@
             <a:r>
               <a:rPr sz="3400" b="0" i="0">
                 <a:solidFill>
-                  <a:srgbClr val="1E334E"/>
+                  <a:srgbClr val="314359"/>
                 </a:solidFill>
                 <a:latin typeface="Times New Roman"/>
               </a:rPr>
@@ -31457,9 +31457,9 @@
             <a:r>
               <a:rPr sz="1150" b="0" i="0">
                 <a:solidFill>
-                  <a:srgbClr val="5A636E"/>
-                </a:solidFill>
-                <a:latin typeface="Calibri"/>
+                  <a:srgbClr val="64615E"/>
+                </a:solidFill>
+                <a:latin typeface="Arial"/>
               </a:rPr>
               <a:t>annualised NET</a:t>
             </a:r>
@@ -31476,9 +31476,9 @@
             <a:r>
               <a:rPr sz="1150" b="0" i="0">
                 <a:solidFill>
-                  <a:srgbClr val="5A636E"/>
-                </a:solidFill>
-                <a:latin typeface="Calibri"/>
+                  <a:srgbClr val="64615E"/>
+                </a:solidFill>
+                <a:latin typeface="Arial"/>
               </a:rPr>
               <a:t>(time-weighted, all fees)</a:t>
             </a:r>
@@ -31500,7 +31500,7 @@
             <a:avLst/>
           </a:prstGeom>
           <a:solidFill>
-            <a:srgbClr val="F1F2F4"/>
+            <a:srgbClr val="F6F7F9"/>
           </a:solidFill>
           <a:ln>
             <a:noFill/>
@@ -31562,7 +31562,7 @@
             <a:r>
               <a:rPr sz="3400" b="0" i="0">
                 <a:solidFill>
-                  <a:srgbClr val="1E334E"/>
+                  <a:srgbClr val="314359"/>
                 </a:solidFill>
                 <a:latin typeface="Times New Roman"/>
               </a:rPr>
@@ -31581,9 +31581,9 @@
             <a:r>
               <a:rPr sz="1150" b="0" i="0">
                 <a:solidFill>
-                  <a:srgbClr val="5A636E"/>
-                </a:solidFill>
-                <a:latin typeface="Calibri"/>
+                  <a:srgbClr val="64615E"/>
+                </a:solidFill>
+                <a:latin typeface="Arial"/>
               </a:rPr>
               <a:t>annualised alpha,</a:t>
             </a:r>
@@ -31600,9 +31600,9 @@
             <a:r>
               <a:rPr sz="1150" b="0" i="0">
                 <a:solidFill>
-                  <a:srgbClr val="5A636E"/>
-                </a:solidFill>
-                <a:latin typeface="Calibri"/>
+                  <a:srgbClr val="64615E"/>
+                </a:solidFill>
+                <a:latin typeface="Arial"/>
               </a:rPr>
               <a:t>net, for 20 years</a:t>
             </a:r>
@@ -31624,7 +31624,7 @@
             <a:avLst/>
           </a:prstGeom>
           <a:solidFill>
-            <a:srgbClr val="F1F2F4"/>
+            <a:srgbClr val="F6F7F9"/>
           </a:solidFill>
           <a:ln>
             <a:noFill/>
@@ -31686,7 +31686,7 @@
             <a:r>
               <a:rPr sz="3400" b="0" i="0">
                 <a:solidFill>
-                  <a:srgbClr val="1E334E"/>
+                  <a:srgbClr val="314359"/>
                 </a:solidFill>
                 <a:latin typeface="Times New Roman"/>
               </a:rPr>
@@ -31705,9 +31705,9 @@
             <a:r>
               <a:rPr sz="1150" b="0" i="0">
                 <a:solidFill>
-                  <a:srgbClr val="5A636E"/>
-                </a:solidFill>
-                <a:latin typeface="Calibri"/>
+                  <a:srgbClr val="64615E"/>
+                </a:solidFill>
+                <a:latin typeface="Arial"/>
               </a:rPr>
               <a:t>the relevant equity</a:t>
             </a:r>
@@ -31724,9 +31724,9 @@
             <a:r>
               <a:rPr sz="1150" b="0" i="0">
                 <a:solidFill>
-                  <a:srgbClr val="5A636E"/>
-                </a:solidFill>
-                <a:latin typeface="Calibri"/>
+                  <a:srgbClr val="64615E"/>
+                </a:solidFill>
+                <a:latin typeface="Arial"/>
               </a:rPr>
               <a:t>benchmark</a:t>
             </a:r>
@@ -31766,27 +31766,27 @@
             <a:r>
               <a:rPr sz="1400" b="1">
                 <a:solidFill>
-                  <a:srgbClr val="4A5D75"/>
-                </a:solidFill>
-                <a:latin typeface="Calibri"/>
+                  <a:srgbClr val="556A83"/>
+                </a:solidFill>
+                <a:latin typeface="Arial"/>
               </a:rPr>
               <a:t>›  </a:t>
             </a:r>
             <a:r>
               <a:rPr sz="1400" b="1">
                 <a:solidFill>
-                  <a:srgbClr val="1E334E"/>
-                </a:solidFill>
-                <a:latin typeface="Calibri"/>
+                  <a:srgbClr val="314359"/>
+                </a:solidFill>
+                <a:latin typeface="Arial"/>
               </a:rPr>
               <a:t>Two full cycles, survived.</a:t>
             </a:r>
             <a:r>
               <a:rPr sz="1400">
                 <a:solidFill>
-                  <a:srgbClr val="333840"/>
-                </a:solidFill>
-                <a:latin typeface="Calibri"/>
+                  <a:srgbClr val="3C3937"/>
+                </a:solidFill>
+                <a:latin typeface="Arial"/>
               </a:rPr>
               <a:t>  Drawdowns of −52.8% (2008, recovered by 2010) and −45.9% (2017–2020, recovered by Sep 2020) — navigated live with the same philosophy, not back-tested.</a:t>
             </a:r>
@@ -31803,27 +31803,27 @@
             <a:r>
               <a:rPr sz="1400" b="1">
                 <a:solidFill>
-                  <a:srgbClr val="4A5D75"/>
-                </a:solidFill>
-                <a:latin typeface="Calibri"/>
+                  <a:srgbClr val="556A83"/>
+                </a:solidFill>
+                <a:latin typeface="Arial"/>
               </a:rPr>
               <a:t>›  </a:t>
             </a:r>
             <a:r>
               <a:rPr sz="1400" b="1">
                 <a:solidFill>
-                  <a:srgbClr val="1E334E"/>
-                </a:solidFill>
-                <a:latin typeface="Calibri"/>
+                  <a:srgbClr val="314359"/>
+                </a:solidFill>
+                <a:latin typeface="Arial"/>
               </a:rPr>
               <a:t>Top-tier downside-adjusted return.</a:t>
             </a:r>
             <a:r>
               <a:rPr sz="1400">
                 <a:solidFill>
-                  <a:srgbClr val="333840"/>
-                </a:solidFill>
-                <a:latin typeface="Calibri"/>
+                  <a:srgbClr val="3C3937"/>
+                </a:solidFill>
+                <a:latin typeface="Arial"/>
               </a:rPr>
               <a:t>  20-year Sortino 1.54; AIPFII Sortino 2.40, with upside volatility 3.9× the downside.</a:t>
             </a:r>
@@ -31840,27 +31840,27 @@
             <a:r>
               <a:rPr sz="1400" b="1">
                 <a:solidFill>
-                  <a:srgbClr val="4A5D75"/>
-                </a:solidFill>
-                <a:latin typeface="Calibri"/>
+                  <a:srgbClr val="556A83"/>
+                </a:solidFill>
+                <a:latin typeface="Arial"/>
               </a:rPr>
               <a:t>›  </a:t>
             </a:r>
             <a:r>
               <a:rPr sz="1400" b="1">
                 <a:solidFill>
-                  <a:srgbClr val="1E334E"/>
-                </a:solidFill>
-                <a:latin typeface="Calibri"/>
+                  <a:srgbClr val="314359"/>
+                </a:solidFill>
+                <a:latin typeface="Arial"/>
               </a:rPr>
               <a:t>Realised cash, not marks.</a:t>
             </a:r>
             <a:r>
               <a:rPr sz="1400">
                 <a:solidFill>
-                  <a:srgbClr val="333840"/>
-                </a:solidFill>
-                <a:latin typeface="Calibri"/>
+                  <a:srgbClr val="3C3937"/>
+                </a:solidFill>
+                <a:latin typeface="Arial"/>
               </a:rPr>
               <a:t>  The largest contributors are realised LP cash — removing the mark-to-model objection.</a:t>
             </a:r>
@@ -31900,9 +31900,9 @@
             <a:r>
               <a:rPr sz="850" b="0" i="0">
                 <a:solidFill>
-                  <a:srgbClr val="9AA4B0"/>
-                </a:solidFill>
-                <a:latin typeface="Calibri"/>
+                  <a:srgbClr val="9A958E"/>
+                </a:solidFill>
+                <a:latin typeface="Arial"/>
               </a:rPr>
               <a:t>Source: independent institutional due-diligence review, May 2026, on StatPro security-level data and LP-level NET monthly returns (2006–2026).</a:t>
             </a:r>
@@ -32028,9 +32028,9 @@
             <a:r>
               <a:rPr sz="1100" b="0" i="0">
                 <a:solidFill>
-                  <a:srgbClr val="4A5D75"/>
-                </a:solidFill>
-                <a:latin typeface="Calibri"/>
+                  <a:srgbClr val="6F8990"/>
+                </a:solidFill>
+                <a:latin typeface="Arial"/>
               </a:rPr>
               <a:t>Independent Review</a:t>
             </a:r>
@@ -32052,7 +32052,7 @@
             <a:avLst/>
           </a:prstGeom>
           <a:solidFill>
-            <a:srgbClr val="F1F2F4"/>
+            <a:srgbClr val="F6F7F9"/>
           </a:solidFill>
           <a:ln>
             <a:noFill/>
@@ -32114,7 +32114,7 @@
             <a:r>
               <a:rPr sz="3000" b="0" i="0">
                 <a:solidFill>
-                  <a:srgbClr val="1E334E"/>
+                  <a:srgbClr val="314359"/>
                 </a:solidFill>
                 <a:latin typeface="Times New Roman"/>
               </a:rPr>
@@ -32156,9 +32156,9 @@
             <a:r>
               <a:rPr sz="1300" b="0" i="1">
                 <a:solidFill>
-                  <a:srgbClr val="5A636E"/>
-                </a:solidFill>
-                <a:latin typeface="Calibri"/>
+                  <a:srgbClr val="64615E"/>
+                </a:solidFill>
+                <a:latin typeface="Arial"/>
               </a:rPr>
               <a:t>The review tested the “you can’t rely on the big winners” objection directly against 39 deals over 20 years.</a:t>
             </a:r>
@@ -32198,9 +32198,9 @@
             <a:r>
               <a:rPr sz="850" b="0" i="0">
                 <a:solidFill>
-                  <a:srgbClr val="9AA4B0"/>
-                </a:solidFill>
-                <a:latin typeface="Calibri"/>
+                  <a:srgbClr val="9A958E"/>
+                </a:solidFill>
+                <a:latin typeface="Arial"/>
               </a:rPr>
               <a:t>Strictly confidential          21</a:t>
             </a:r>
@@ -32240,9 +32240,9 @@
             <a:r>
               <a:rPr sz="1300" b="1" i="0">
                 <a:solidFill>
-                  <a:srgbClr val="4A5D75"/>
-                </a:solidFill>
-                <a:latin typeface="Calibri"/>
+                  <a:srgbClr val="556A83"/>
+                </a:solidFill>
+                <a:latin typeface="Arial"/>
               </a:rPr>
               <a:t>REPEATABLE</a:t>
             </a:r>
@@ -32259,9 +32259,9 @@
             <a:r>
               <a:rPr sz="1400" b="0" i="0">
                 <a:solidFill>
-                  <a:srgbClr val="333840"/>
-                </a:solidFill>
-                <a:latin typeface="Calibri"/>
+                  <a:srgbClr val="3C3937"/>
+                </a:solidFill>
+                <a:latin typeface="Arial"/>
               </a:rPr>
               <a:t>92% deal-level hit rate (36 of 39 profitable); losses ~8% of cumulative invested capital</a:t>
             </a:r>
@@ -32278,9 +32278,9 @@
             <a:r>
               <a:rPr sz="1400" b="0" i="0">
                 <a:solidFill>
-                  <a:srgbClr val="333840"/>
-                </a:solidFill>
-                <a:latin typeface="Calibri"/>
+                  <a:srgbClr val="3C3937"/>
+                </a:solidFill>
+                <a:latin typeface="Arial"/>
               </a:rPr>
               <a:t>10 of 39 deals returned ≥5× MOIC — one such win every ~2 years</a:t>
             </a:r>
@@ -32297,9 +32297,9 @@
             <a:r>
               <a:rPr sz="1400" b="0" i="0">
                 <a:solidFill>
-                  <a:srgbClr val="333840"/>
-                </a:solidFill>
-                <a:latin typeface="Calibri"/>
+                  <a:srgbClr val="3C3937"/>
+                </a:solidFill>
+                <a:latin typeface="Arial"/>
               </a:rPr>
               <a:t>Two decade-definers, not one: Klarna 28× (2007) and Athanase Tech 5.4× (2021)</a:t>
             </a:r>
@@ -32316,9 +32316,9 @@
             <a:r>
               <a:rPr sz="1400" b="0" i="0">
                 <a:solidFill>
-                  <a:srgbClr val="333840"/>
-                </a:solidFill>
-                <a:latin typeface="Calibri"/>
+                  <a:srgbClr val="3C3937"/>
+                </a:solidFill>
+                <a:latin typeface="Arial"/>
               </a:rPr>
               <a:t>Robust: even excluding Athanase Tech entirely, AIPFII still ~10% net annualised</a:t>
             </a:r>
@@ -32358,9 +32358,9 @@
             <a:r>
               <a:rPr sz="1300" b="1" i="0">
                 <a:solidFill>
-                  <a:srgbClr val="4A5D75"/>
-                </a:solidFill>
-                <a:latin typeface="Calibri"/>
+                  <a:srgbClr val="556A83"/>
+                </a:solidFill>
+                <a:latin typeface="Arial"/>
               </a:rPr>
               <a:t>CONVICTION-SIZED (THE SKILL SIGNAL)</a:t>
             </a:r>
@@ -32377,9 +32377,9 @@
             <a:r>
               <a:rPr sz="1400" b="0" i="0">
                 <a:solidFill>
-                  <a:srgbClr val="333840"/>
-                </a:solidFill>
-                <a:latin typeface="Calibri"/>
+                  <a:srgbClr val="3C3937"/>
+                </a:solidFill>
+                <a:latin typeface="Arial"/>
               </a:rPr>
               <a:t>The 7 positions ever sized ≥10% of NAV hit at 85.7% and contributed +209 pts — ~77% of the positive book</a:t>
             </a:r>
@@ -32396,9 +32396,9 @@
             <a:r>
               <a:rPr sz="1400" b="0" i="0">
                 <a:solidFill>
-                  <a:srgbClr val="333840"/>
-                </a:solidFill>
-                <a:latin typeface="Calibri"/>
+                  <a:srgbClr val="3C3937"/>
+                </a:solidFill>
+                <a:latin typeface="Arial"/>
               </a:rPr>
               <a:t>+0.73 rank correlation between position size and outcome within winners — they size their best ideas biggest</a:t>
             </a:r>
@@ -32415,9 +32415,9 @@
             <a:r>
               <a:rPr sz="1400" b="0" i="0">
                 <a:solidFill>
-                  <a:srgbClr val="333840"/>
-                </a:solidFill>
-                <a:latin typeface="Calibri"/>
+                  <a:srgbClr val="3C3937"/>
+                </a:solidFill>
+                <a:latin typeface="Arial"/>
               </a:rPr>
               <a:t>Win/loss asymmetry: average winner 2.74× the average loser; +333 pts of winners vs −61 pts of losers</a:t>
             </a:r>
@@ -32457,9 +32457,9 @@
             <a:r>
               <a:rPr sz="1300" b="0" i="1">
                 <a:solidFill>
-                  <a:srgbClr val="4A5D75"/>
-                </a:solidFill>
-                <a:latin typeface="Calibri"/>
+                  <a:srgbClr val="556A83"/>
+                </a:solidFill>
+                <a:latin typeface="Arial"/>
               </a:rPr>
               <a:t>“The team has done this twice in 20 years, not once — the ‘every 10–20 years’ objection is empirically unsupportable.”</a:t>
             </a:r>
@@ -32585,9 +32585,9 @@
             <a:r>
               <a:rPr sz="1100" b="0" i="0">
                 <a:solidFill>
-                  <a:srgbClr val="4A5D75"/>
-                </a:solidFill>
-                <a:latin typeface="Calibri"/>
+                  <a:srgbClr val="6F8990"/>
+                </a:solidFill>
+                <a:latin typeface="Arial"/>
               </a:rPr>
               <a:t>Allocation</a:t>
             </a:r>
@@ -32609,7 +32609,7 @@
             <a:avLst/>
           </a:prstGeom>
           <a:solidFill>
-            <a:srgbClr val="F1F2F4"/>
+            <a:srgbClr val="F6F7F9"/>
           </a:solidFill>
           <a:ln>
             <a:noFill/>
@@ -32671,7 +32671,7 @@
             <a:r>
               <a:rPr sz="3000" b="0" i="0">
                 <a:solidFill>
-                  <a:srgbClr val="1E334E"/>
+                  <a:srgbClr val="314359"/>
                 </a:solidFill>
                 <a:latin typeface="Times New Roman"/>
               </a:rPr>
@@ -32713,9 +32713,9 @@
             <a:r>
               <a:rPr sz="1300" b="0" i="1">
                 <a:solidFill>
-                  <a:srgbClr val="5A636E"/>
-                </a:solidFill>
-                <a:latin typeface="Calibri"/>
+                  <a:srgbClr val="64615E"/>
+                </a:solidFill>
+                <a:latin typeface="Arial"/>
               </a:rPr>
               <a:t>Career risk is managed by mandate design — not by hoping the line goes straight.</a:t>
             </a:r>
@@ -32755,9 +32755,9 @@
             <a:r>
               <a:rPr sz="850" b="0" i="0">
                 <a:solidFill>
-                  <a:srgbClr val="9AA4B0"/>
-                </a:solidFill>
-                <a:latin typeface="Calibri"/>
+                  <a:srgbClr val="9A958E"/>
+                </a:solidFill>
+                <a:latin typeface="Arial"/>
               </a:rPr>
               <a:t>Strictly confidential          22</a:t>
             </a:r>
@@ -32797,9 +32797,9 @@
             <a:r>
               <a:rPr sz="1300" b="1" i="0">
                 <a:solidFill>
-                  <a:srgbClr val="4A5D75"/>
-                </a:solidFill>
-                <a:latin typeface="Calibri"/>
+                  <a:srgbClr val="556A83"/>
+                </a:solidFill>
+                <a:latin typeface="Arial"/>
               </a:rPr>
               <a:t>SIZE AND STRUCTURE IT RIGHT</a:t>
             </a:r>
@@ -32816,9 +32816,9 @@
             <a:r>
               <a:rPr sz="1400" b="0" i="0">
                 <a:solidFill>
-                  <a:srgbClr val="333840"/>
-                </a:solidFill>
-                <a:latin typeface="Calibri"/>
+                  <a:srgbClr val="3C3937"/>
+                </a:solidFill>
+                <a:latin typeface="Arial"/>
               </a:rPr>
               <a:t>Size at 1–3% of total assets in a special-situations sleeve — no single mark can dominate the portfolio or force action</a:t>
             </a:r>
@@ -32835,9 +32835,9 @@
             <a:r>
               <a:rPr sz="1400" b="0" i="0">
                 <a:solidFill>
-                  <a:srgbClr val="333840"/>
-                </a:solidFill>
-                <a:latin typeface="Calibri"/>
+                  <a:srgbClr val="3C3937"/>
+                </a:solidFill>
+                <a:latin typeface="Arial"/>
               </a:rPr>
               <a:t>Pre-agree a ~50% mark-to-market drawdown tolerance with the IC at commitment; align reporting to the multi-year holding cycle, not monthly marks</a:t>
             </a:r>
@@ -32854,9 +32854,9 @@
             <a:r>
               <a:rPr sz="1400" b="0" i="0">
                 <a:solidFill>
-                  <a:srgbClr val="333840"/>
-                </a:solidFill>
-                <a:latin typeface="Calibri"/>
+                  <a:srgbClr val="3C3937"/>
+                </a:solidFill>
+                <a:latin typeface="Arial"/>
               </a:rPr>
               <a:t>Define reallocation triggers in advance — manager turnover, style drift, weaker sizing discipline — never the share price</a:t>
             </a:r>
@@ -32896,9 +32896,9 @@
             <a:r>
               <a:rPr sz="1300" b="1" i="0">
                 <a:solidFill>
-                  <a:srgbClr val="4A5D75"/>
-                </a:solidFill>
-                <a:latin typeface="Calibri"/>
+                  <a:srgbClr val="556A83"/>
+                </a:solidFill>
+                <a:latin typeface="Arial"/>
               </a:rPr>
               <a:t>JUDGE THE RIGHT THING</a:t>
             </a:r>
@@ -32915,9 +32915,9 @@
             <a:r>
               <a:rPr sz="1400" b="0" i="0">
                 <a:solidFill>
-                  <a:srgbClr val="333840"/>
-                </a:solidFill>
-                <a:latin typeface="Calibri"/>
+                  <a:srgbClr val="3C3937"/>
+                </a:solidFill>
+                <a:latin typeface="Arial"/>
               </a:rPr>
               <a:t>Underwrite whether business risk is falling — board seat secured, cash-flow control — not whether the news flow looks calm</a:t>
             </a:r>
@@ -32934,9 +32934,9 @@
             <a:r>
               <a:rPr sz="1400" b="0" i="0">
                 <a:solidFill>
-                  <a:srgbClr val="333840"/>
-                </a:solidFill>
-                <a:latin typeface="Calibri"/>
+                  <a:srgbClr val="3C3937"/>
+                </a:solidFill>
+                <a:latin typeface="Arial"/>
               </a:rPr>
               <a:t>The big winners are realised LP cash, not marks: the value is bankable, not modelled</a:t>
             </a:r>
@@ -32953,9 +32953,9 @@
             <a:r>
               <a:rPr sz="1400" b="0" i="0">
                 <a:solidFill>
-                  <a:srgbClr val="333840"/>
-                </a:solidFill>
-                <a:latin typeface="Calibri"/>
+                  <a:srgbClr val="3C3937"/>
+                </a:solidFill>
+                <a:latin typeface="Arial"/>
               </a:rPr>
               <a:t>Two ~50% drawdowns have already been recovered with the same philosophy — the path has been bumpy before and still paid +6 pts/yr net</a:t>
             </a:r>
@@ -32977,7 +32977,7 @@
             <a:avLst/>
           </a:prstGeom>
           <a:solidFill>
-            <a:srgbClr val="14253B"/>
+            <a:srgbClr val="152130"/>
           </a:solidFill>
           <a:ln>
             <a:noFill/>
@@ -33041,7 +33041,7 @@
                 <a:solidFill>
                   <a:srgbClr val="FFFFFF"/>
                 </a:solidFill>
-                <a:latin typeface="Calibri"/>
+                <a:latin typeface="Arial"/>
               </a:rPr>
               <a:t>A pre-underwritten, correctly-sized, fundamentally-monitored allocation turns a bad quarter into “as expected” — not a surprise that invites blame.</a:t>
             </a:r>
@@ -33167,9 +33167,9 @@
             <a:r>
               <a:rPr sz="1100" b="0" i="0">
                 <a:solidFill>
-                  <a:srgbClr val="4A5D75"/>
-                </a:solidFill>
-                <a:latin typeface="Calibri"/>
+                  <a:srgbClr val="6F8990"/>
+                </a:solidFill>
+                <a:latin typeface="Arial"/>
               </a:rPr>
               <a:t>Ownership Model</a:t>
             </a:r>
@@ -33191,7 +33191,7 @@
             <a:avLst/>
           </a:prstGeom>
           <a:solidFill>
-            <a:srgbClr val="F1F2F4"/>
+            <a:srgbClr val="F6F7F9"/>
           </a:solidFill>
           <a:ln>
             <a:noFill/>
@@ -33253,7 +33253,7 @@
             <a:r>
               <a:rPr sz="3000" b="0" i="0">
                 <a:solidFill>
-                  <a:srgbClr val="1E334E"/>
+                  <a:srgbClr val="314359"/>
                 </a:solidFill>
                 <a:latin typeface="Times New Roman"/>
               </a:rPr>
@@ -33295,9 +33295,9 @@
             <a:r>
               <a:rPr sz="850" b="0" i="0">
                 <a:solidFill>
-                  <a:srgbClr val="9AA4B0"/>
-                </a:solidFill>
-                <a:latin typeface="Calibri"/>
+                  <a:srgbClr val="9A958E"/>
+                </a:solidFill>
+                <a:latin typeface="Arial"/>
               </a:rPr>
               <a:t>Strictly confidential          23</a:t>
             </a:r>
@@ -33337,27 +33337,27 @@
             <a:r>
               <a:rPr sz="1600" b="1">
                 <a:solidFill>
-                  <a:srgbClr val="4A5D75"/>
-                </a:solidFill>
-                <a:latin typeface="Calibri"/>
+                  <a:srgbClr val="556A83"/>
+                </a:solidFill>
+                <a:latin typeface="Arial"/>
               </a:rPr>
               <a:t>›  </a:t>
             </a:r>
             <a:r>
               <a:rPr sz="1600" b="1">
                 <a:solidFill>
-                  <a:srgbClr val="1E334E"/>
-                </a:solidFill>
-                <a:latin typeface="Calibri"/>
+                  <a:srgbClr val="314359"/>
+                </a:solidFill>
+                <a:latin typeface="Arial"/>
               </a:rPr>
               <a:t>Governance is the lever.</a:t>
             </a:r>
             <a:r>
               <a:rPr sz="1600">
                 <a:solidFill>
-                  <a:srgbClr val="333840"/>
-                </a:solidFill>
-                <a:latin typeface="Calibri"/>
+                  <a:srgbClr val="3C3937"/>
+                </a:solidFill>
+                <a:latin typeface="Arial"/>
               </a:rPr>
               <a:t>  Value is created through board representation and active promotion of strong corporate governance across all holdings.</a:t>
             </a:r>
@@ -33374,27 +33374,27 @@
             <a:r>
               <a:rPr sz="1600" b="1">
                 <a:solidFill>
-                  <a:srgbClr val="4A5D75"/>
-                </a:solidFill>
-                <a:latin typeface="Calibri"/>
+                  <a:srgbClr val="556A83"/>
+                </a:solidFill>
+                <a:latin typeface="Arial"/>
               </a:rPr>
               <a:t>›  </a:t>
             </a:r>
             <a:r>
               <a:rPr sz="1600" b="1">
                 <a:solidFill>
-                  <a:srgbClr val="1E334E"/>
-                </a:solidFill>
-                <a:latin typeface="Calibri"/>
+                  <a:srgbClr val="314359"/>
+                </a:solidFill>
+                <a:latin typeface="Arial"/>
               </a:rPr>
               <a:t>Five improvement dimensions.</a:t>
             </a:r>
             <a:r>
               <a:rPr sz="1600">
                 <a:solidFill>
-                  <a:srgbClr val="333840"/>
-                </a:solidFill>
-                <a:latin typeface="Calibri"/>
+                  <a:srgbClr val="3C3937"/>
+                </a:solidFill>
+                <a:latin typeface="Arial"/>
               </a:rPr>
               <a:t>  Operational, financial, structural, environmental and social improvements — each tied to enterprise value.</a:t>
             </a:r>
@@ -33411,27 +33411,27 @@
             <a:r>
               <a:rPr sz="1600" b="1">
                 <a:solidFill>
-                  <a:srgbClr val="4A5D75"/>
-                </a:solidFill>
-                <a:latin typeface="Calibri"/>
+                  <a:srgbClr val="556A83"/>
+                </a:solidFill>
+                <a:latin typeface="Arial"/>
               </a:rPr>
               <a:t>›  </a:t>
             </a:r>
             <a:r>
               <a:rPr sz="1600" b="1">
                 <a:solidFill>
-                  <a:srgbClr val="1E334E"/>
-                </a:solidFill>
-                <a:latin typeface="Calibri"/>
+                  <a:srgbClr val="314359"/>
+                </a:solidFill>
+                <a:latin typeface="Arial"/>
               </a:rPr>
               <a:t>PRI signatory since 2019,</a:t>
             </a:r>
             <a:r>
               <a:rPr sz="1600">
                 <a:solidFill>
-                  <a:srgbClr val="333840"/>
-                </a:solidFill>
-                <a:latin typeface="Calibri"/>
+                  <a:srgbClr val="3C3937"/>
+                </a:solidFill>
+                <a:latin typeface="Arial"/>
               </a:rPr>
               <a:t>  adhering to the Six Principles for Responsible Investment.</a:t>
             </a:r>
@@ -33448,27 +33448,27 @@
             <a:r>
               <a:rPr sz="1600" b="1">
                 <a:solidFill>
-                  <a:srgbClr val="4A5D75"/>
-                </a:solidFill>
-                <a:latin typeface="Calibri"/>
+                  <a:srgbClr val="556A83"/>
+                </a:solidFill>
+                <a:latin typeface="Arial"/>
               </a:rPr>
               <a:t>›  </a:t>
             </a:r>
             <a:r>
               <a:rPr sz="1600" b="1">
                 <a:solidFill>
-                  <a:srgbClr val="1E334E"/>
-                </a:solidFill>
-                <a:latin typeface="Calibri"/>
+                  <a:srgbClr val="314359"/>
+                </a:solidFill>
+                <a:latin typeface="Arial"/>
               </a:rPr>
               <a:t>Credible oversight.</a:t>
             </a:r>
             <a:r>
               <a:rPr sz="1600">
                 <a:solidFill>
-                  <a:srgbClr val="333840"/>
-                </a:solidFill>
-                <a:latin typeface="Calibri"/>
+                  <a:srgbClr val="3C3937"/>
+                </a:solidFill>
+                <a:latin typeface="Arial"/>
               </a:rPr>
               <a:t>  SEB custodian · MUFG administrator · KPMG auditor · Swedish FI-registered AIFM.</a:t>
             </a:r>
@@ -33508,7 +33508,7 @@
             <a:avLst/>
           </a:prstGeom>
           <a:solidFill>
-            <a:srgbClr val="14253B"/>
+            <a:srgbClr val="152130"/>
           </a:solidFill>
           <a:ln>
             <a:noFill/>
@@ -33576,7 +33576,7 @@
             <a:avLst/>
           </a:prstGeom>
           <a:solidFill>
-            <a:srgbClr val="8A99AB"/>
+            <a:srgbClr val="6F8990"/>
           </a:solidFill>
           <a:ln>
             <a:noFill/>
@@ -33657,7 +33657,7 @@
             <a:r>
               <a:rPr sz="1800" b="0" i="1">
                 <a:solidFill>
-                  <a:srgbClr val="C9D3DD"/>
+                  <a:srgbClr val="E2E5E9"/>
                 </a:solidFill>
                 <a:latin typeface="Times New Roman"/>
               </a:rPr>
@@ -33701,7 +33701,7 @@
                 <a:solidFill>
                   <a:srgbClr val="FFFFFF"/>
                 </a:solidFill>
-                <a:latin typeface="Calibri"/>
+                <a:latin typeface="Arial"/>
               </a:rPr>
               <a:t>Stefan Charette</a:t>
             </a:r>
@@ -33718,9 +33718,9 @@
             <a:r>
               <a:rPr sz="1200" b="0" i="0">
                 <a:solidFill>
-                  <a:srgbClr val="C9D3DD"/>
-                </a:solidFill>
-                <a:latin typeface="Calibri"/>
+                  <a:srgbClr val="E2E5E9"/>
+                </a:solidFill>
+                <a:latin typeface="Arial"/>
               </a:rPr>
               <a:t>Athanase Industrial Partner</a:t>
             </a:r>
@@ -33737,9 +33737,9 @@
             <a:r>
               <a:rPr sz="1200" b="0" i="0">
                 <a:solidFill>
-                  <a:srgbClr val="8A99AB"/>
-                </a:solidFill>
-                <a:latin typeface="Calibri"/>
+                  <a:srgbClr val="6F8990"/>
+                </a:solidFill>
+                <a:latin typeface="Arial"/>
               </a:rPr>
               <a:t>charette@athanase.se   ·   +46 73 994 7079</a:t>
             </a:r>
@@ -33781,7 +33781,7 @@
                 <a:solidFill>
                   <a:srgbClr val="FFFFFF"/>
                 </a:solidFill>
-                <a:latin typeface="Calibri"/>
+                <a:latin typeface="Arial"/>
               </a:rPr>
               <a:t>Offices</a:t>
             </a:r>
@@ -33798,9 +33798,9 @@
             <a:r>
               <a:rPr sz="1100" b="0" i="0">
                 <a:solidFill>
-                  <a:srgbClr val="8A99AB"/>
-                </a:solidFill>
-                <a:latin typeface="Calibri"/>
+                  <a:srgbClr val="6F8990"/>
+                </a:solidFill>
+                <a:latin typeface="Arial"/>
               </a:rPr>
               <a:t>Birger Jarlsgatan 6, 114 34 Stockholm, Sweden</a:t>
             </a:r>
@@ -33817,9 +33817,9 @@
             <a:r>
               <a:rPr sz="1100" b="0" i="0">
                 <a:solidFill>
-                  <a:srgbClr val="8A99AB"/>
-                </a:solidFill>
-                <a:latin typeface="Calibri"/>
+                  <a:srgbClr val="6F8990"/>
+                </a:solidFill>
+                <a:latin typeface="Arial"/>
               </a:rPr>
               <a:t>Landmark Square, West Bay Road, Grand Cayman</a:t>
             </a:r>
@@ -33859,7 +33859,7 @@
             <a:avLst/>
           </a:prstGeom>
           <a:solidFill>
-            <a:srgbClr val="14253B"/>
+            <a:srgbClr val="152130"/>
           </a:solidFill>
           <a:ln>
             <a:noFill/>
@@ -33945,9 +33945,9 @@
             <a:r>
               <a:rPr sz="1300" b="0" i="0">
                 <a:solidFill>
-                  <a:srgbClr val="8A99AB"/>
-                </a:solidFill>
-                <a:latin typeface="Calibri"/>
+                  <a:srgbClr val="6F8990"/>
+                </a:solidFill>
+                <a:latin typeface="Arial"/>
               </a:rPr>
               <a:t>PART I  ·  THE ASSET CLASS</a:t>
             </a:r>
@@ -33987,7 +33987,7 @@
             <a:r>
               <a:rPr sz="4000" b="0" i="1">
                 <a:solidFill>
-                  <a:srgbClr val="C9D3DD"/>
+                  <a:srgbClr val="E2E5E9"/>
                 </a:solidFill>
                 <a:latin typeface="Times New Roman"/>
               </a:rPr>
@@ -34115,9 +34115,9 @@
             <a:r>
               <a:rPr sz="1100" b="0" i="0">
                 <a:solidFill>
-                  <a:srgbClr val="4A5D75"/>
-                </a:solidFill>
-                <a:latin typeface="Calibri"/>
+                  <a:srgbClr val="6F8990"/>
+                </a:solidFill>
+                <a:latin typeface="Arial"/>
               </a:rPr>
               <a:t>The Proposition</a:t>
             </a:r>
@@ -34139,7 +34139,7 @@
             <a:avLst/>
           </a:prstGeom>
           <a:solidFill>
-            <a:srgbClr val="F1F2F4"/>
+            <a:srgbClr val="F6F7F9"/>
           </a:solidFill>
           <a:ln>
             <a:noFill/>
@@ -34201,7 +34201,7 @@
             <a:r>
               <a:rPr sz="3000" b="0" i="0">
                 <a:solidFill>
-                  <a:srgbClr val="1E334E"/>
+                  <a:srgbClr val="314359"/>
                 </a:solidFill>
                 <a:latin typeface="Times New Roman"/>
               </a:rPr>
@@ -34243,9 +34243,9 @@
             <a:r>
               <a:rPr sz="1300" b="0" i="1">
                 <a:solidFill>
-                  <a:srgbClr val="5A636E"/>
-                </a:solidFill>
-                <a:latin typeface="Calibri"/>
+                  <a:srgbClr val="64615E"/>
+                </a:solidFill>
+                <a:latin typeface="Arial"/>
               </a:rPr>
               <a:t>Engaged owners change the outcome — they do not merely absorb underperformance.</a:t>
             </a:r>
@@ -34285,9 +34285,9 @@
             <a:r>
               <a:rPr sz="850" b="0" i="0">
                 <a:solidFill>
-                  <a:srgbClr val="9AA4B0"/>
-                </a:solidFill>
-                <a:latin typeface="Calibri"/>
+                  <a:srgbClr val="9A958E"/>
+                </a:solidFill>
+                <a:latin typeface="Arial"/>
               </a:rPr>
               <a:t>Strictly confidential          2</a:t>
             </a:r>
@@ -34327,27 +34327,27 @@
             <a:r>
               <a:rPr sz="1550" b="1">
                 <a:solidFill>
-                  <a:srgbClr val="4A5D75"/>
-                </a:solidFill>
-                <a:latin typeface="Calibri"/>
+                  <a:srgbClr val="556A83"/>
+                </a:solidFill>
+                <a:latin typeface="Arial"/>
               </a:rPr>
               <a:t>›  </a:t>
             </a:r>
             <a:r>
               <a:rPr sz="1550" b="1">
                 <a:solidFill>
-                  <a:srgbClr val="1E334E"/>
-                </a:solidFill>
-                <a:latin typeface="Calibri"/>
+                  <a:srgbClr val="314359"/>
+                </a:solidFill>
+                <a:latin typeface="Arial"/>
               </a:rPr>
               <a:t>~7% announcement return.</a:t>
             </a:r>
             <a:r>
               <a:rPr sz="1550">
                 <a:solidFill>
-                  <a:srgbClr val="333840"/>
-                </a:solidFill>
-                <a:latin typeface="Calibri"/>
+                  <a:srgbClr val="3C3937"/>
+                </a:solidFill>
+                <a:latin typeface="Arial"/>
               </a:rPr>
               <a:t>  Average abnormal return around an activist filing, with no reversal over the following year; success or partial success in ~two-thirds of campaigns (Brav, Jiang, Partnoy &amp; Thomas, 2008).</a:t>
             </a:r>
@@ -34364,27 +34364,27 @@
             <a:r>
               <a:rPr sz="1550" b="1">
                 <a:solidFill>
-                  <a:srgbClr val="4A5D75"/>
-                </a:solidFill>
-                <a:latin typeface="Calibri"/>
+                  <a:srgbClr val="556A83"/>
+                </a:solidFill>
+                <a:latin typeface="Arial"/>
               </a:rPr>
               <a:t>›  </a:t>
             </a:r>
             <a:r>
               <a:rPr sz="1550" b="1">
                 <a:solidFill>
-                  <a:srgbClr val="1E334E"/>
-                </a:solidFill>
-                <a:latin typeface="Calibri"/>
+                  <a:srgbClr val="314359"/>
+                </a:solidFill>
+                <a:latin typeface="Arial"/>
               </a:rPr>
               <a:t>~10.2% around the 13D,</a:t>
             </a:r>
             <a:r>
               <a:rPr sz="1550">
                 <a:solidFill>
-                  <a:srgbClr val="333840"/>
-                </a:solidFill>
-                <a:latin typeface="Calibri"/>
+                  <a:srgbClr val="3C3937"/>
+                </a:solidFill>
+                <a:latin typeface="Arial"/>
               </a:rPr>
               <a:t>  plus a further ~11.4% over the next year for engaged-owner targets (Klein &amp; Zur, 2009).</a:t>
             </a:r>
@@ -34401,27 +34401,27 @@
             <a:r>
               <a:rPr sz="1550" b="1">
                 <a:solidFill>
-                  <a:srgbClr val="4A5D75"/>
-                </a:solidFill>
-                <a:latin typeface="Calibri"/>
+                  <a:srgbClr val="556A83"/>
+                </a:solidFill>
+                <a:latin typeface="Arial"/>
               </a:rPr>
               <a:t>›  </a:t>
             </a:r>
             <a:r>
               <a:rPr sz="1550" b="1">
                 <a:solidFill>
-                  <a:srgbClr val="1E334E"/>
-                </a:solidFill>
-                <a:latin typeface="Calibri"/>
+                  <a:srgbClr val="314359"/>
+                </a:solidFill>
+                <a:latin typeface="Arial"/>
               </a:rPr>
               <a:t>No long-term give-back.</a:t>
             </a:r>
             <a:r>
               <a:rPr sz="1550">
                 <a:solidFill>
-                  <a:srgbClr val="333840"/>
-                </a:solidFill>
-                <a:latin typeface="Calibri"/>
+                  <a:srgbClr val="3C3937"/>
+                </a:solidFill>
+                <a:latin typeface="Arial"/>
               </a:rPr>
               <a:t>  ~2,000 interventions show no negative drift and no “pump-and-dump” (Bebchuk, Brav &amp; Jiang, 2015).</a:t>
             </a:r>
@@ -34438,27 +34438,27 @@
             <a:r>
               <a:rPr sz="1550" b="1">
                 <a:solidFill>
-                  <a:srgbClr val="4A5D75"/>
-                </a:solidFill>
-                <a:latin typeface="Calibri"/>
+                  <a:srgbClr val="556A83"/>
+                </a:solidFill>
+                <a:latin typeface="Arial"/>
               </a:rPr>
               <a:t>›  </a:t>
             </a:r>
             <a:r>
               <a:rPr sz="1550" b="1">
                 <a:solidFill>
-                  <a:srgbClr val="1E334E"/>
-                </a:solidFill>
-                <a:latin typeface="Calibri"/>
+                  <a:srgbClr val="314359"/>
+                </a:solidFill>
+                <a:latin typeface="Arial"/>
               </a:rPr>
               <a:t>Real, not financial, value.</a:t>
             </a:r>
             <a:r>
               <a:rPr sz="1550">
                 <a:solidFill>
-                  <a:srgbClr val="333840"/>
-                </a:solidFill>
-                <a:latin typeface="Calibri"/>
+                  <a:srgbClr val="3C3937"/>
+                </a:solidFill>
+                <a:latin typeface="Arial"/>
               </a:rPr>
               <a:t>  Production efficiency improves in the three years after intervention (Brav, Jiang &amp; Kim, 2015).</a:t>
             </a:r>
@@ -34475,27 +34475,27 @@
             <a:r>
               <a:rPr sz="1550" b="1">
                 <a:solidFill>
-                  <a:srgbClr val="4A5D75"/>
-                </a:solidFill>
-                <a:latin typeface="Calibri"/>
+                  <a:srgbClr val="556A83"/>
+                </a:solidFill>
+                <a:latin typeface="Arial"/>
               </a:rPr>
               <a:t>›  </a:t>
             </a:r>
             <a:r>
               <a:rPr sz="1550" b="1">
                 <a:solidFill>
-                  <a:srgbClr val="1E334E"/>
-                </a:solidFill>
-                <a:latin typeface="Calibri"/>
+                  <a:srgbClr val="314359"/>
+                </a:solidFill>
+                <a:latin typeface="Arial"/>
               </a:rPr>
               <a:t>Idiosyncratic alpha.</a:t>
             </a:r>
             <a:r>
               <a:rPr sz="1550">
                 <a:solidFill>
-                  <a:srgbClr val="333840"/>
-                </a:solidFill>
-                <a:latin typeface="Calibri"/>
+                  <a:srgbClr val="3C3937"/>
+                </a:solidFill>
+                <a:latin typeface="Arial"/>
               </a:rPr>
               <a:t>  Returns tied to a specific change at a specific company — scarce in a beta-dominated portfolio.</a:t>
             </a:r>
@@ -34621,9 +34621,9 @@
             <a:r>
               <a:rPr sz="1100" b="0" i="0">
                 <a:solidFill>
-                  <a:srgbClr val="4A5D75"/>
-                </a:solidFill>
-                <a:latin typeface="Calibri"/>
+                  <a:srgbClr val="6F8990"/>
+                </a:solidFill>
+                <a:latin typeface="Arial"/>
               </a:rPr>
               <a:t>Fit</a:t>
             </a:r>
@@ -34645,7 +34645,7 @@
             <a:avLst/>
           </a:prstGeom>
           <a:solidFill>
-            <a:srgbClr val="F1F2F4"/>
+            <a:srgbClr val="F6F7F9"/>
           </a:solidFill>
           <a:ln>
             <a:noFill/>
@@ -34707,7 +34707,7 @@
             <a:r>
               <a:rPr sz="3000" b="0" i="0">
                 <a:solidFill>
-                  <a:srgbClr val="1E334E"/>
+                  <a:srgbClr val="314359"/>
                 </a:solidFill>
                 <a:latin typeface="Times New Roman"/>
               </a:rPr>
@@ -34749,9 +34749,9 @@
             <a:r>
               <a:rPr sz="850" b="0" i="0">
                 <a:solidFill>
-                  <a:srgbClr val="9AA4B0"/>
-                </a:solidFill>
-                <a:latin typeface="Calibri"/>
+                  <a:srgbClr val="9A958E"/>
+                </a:solidFill>
+                <a:latin typeface="Arial"/>
               </a:rPr>
               <a:t>Strictly confidential          3</a:t>
             </a:r>
@@ -34791,27 +34791,27 @@
             <a:r>
               <a:rPr sz="1650" b="1">
                 <a:solidFill>
-                  <a:srgbClr val="4A5D75"/>
-                </a:solidFill>
-                <a:latin typeface="Calibri"/>
+                  <a:srgbClr val="556A83"/>
+                </a:solidFill>
+                <a:latin typeface="Arial"/>
               </a:rPr>
               <a:t>›  </a:t>
             </a:r>
             <a:r>
               <a:rPr sz="1650" b="1">
                 <a:solidFill>
-                  <a:srgbClr val="1E334E"/>
-                </a:solidFill>
-                <a:latin typeface="Calibri"/>
+                  <a:srgbClr val="314359"/>
+                </a:solidFill>
+                <a:latin typeface="Arial"/>
               </a:rPr>
               <a:t>Patient capital wins.</a:t>
             </a:r>
             <a:r>
               <a:rPr sz="1650">
                 <a:solidFill>
-                  <a:srgbClr val="333840"/>
-                </a:solidFill>
-                <a:latin typeface="Calibri"/>
+                  <a:srgbClr val="3C3937"/>
+                </a:solidFill>
+                <a:latin typeface="Arial"/>
               </a:rPr>
               <a:t>  Board seats, strategic reviews and turnarounds play out over years — perpetual endowments and long-dated pensions can hold through to full value realisation.</a:t>
             </a:r>
@@ -34828,27 +34828,27 @@
             <a:r>
               <a:rPr sz="1650" b="1">
                 <a:solidFill>
-                  <a:srgbClr val="4A5D75"/>
-                </a:solidFill>
-                <a:latin typeface="Calibri"/>
+                  <a:srgbClr val="556A83"/>
+                </a:solidFill>
+                <a:latin typeface="Arial"/>
               </a:rPr>
               <a:t>›  </a:t>
             </a:r>
             <a:r>
               <a:rPr sz="1650" b="1">
                 <a:solidFill>
-                  <a:srgbClr val="1E334E"/>
-                </a:solidFill>
-                <a:latin typeface="Calibri"/>
+                  <a:srgbClr val="314359"/>
+                </a:solidFill>
+                <a:latin typeface="Arial"/>
               </a:rPr>
               <a:t>Stewardship is the duty.</a:t>
             </a:r>
             <a:r>
               <a:rPr sz="1650">
                 <a:solidFill>
-                  <a:srgbClr val="333840"/>
-                </a:solidFill>
-                <a:latin typeface="Calibri"/>
+                  <a:srgbClr val="3C3937"/>
+                </a:solidFill>
+                <a:latin typeface="Arial"/>
               </a:rPr>
               <a:t>  Engaged ownership expresses fiduciary obligation (UK Stewardship Code; UN PRI) rather than conflicting with it.</a:t>
             </a:r>
@@ -34865,27 +34865,27 @@
             <a:r>
               <a:rPr sz="1650" b="1">
                 <a:solidFill>
-                  <a:srgbClr val="4A5D75"/>
-                </a:solidFill>
-                <a:latin typeface="Calibri"/>
+                  <a:srgbClr val="556A83"/>
+                </a:solidFill>
+                <a:latin typeface="Arial"/>
               </a:rPr>
               <a:t>›  </a:t>
             </a:r>
             <a:r>
               <a:rPr sz="1650" b="1">
                 <a:solidFill>
-                  <a:srgbClr val="1E334E"/>
-                </a:solidFill>
-                <a:latin typeface="Calibri"/>
+                  <a:srgbClr val="314359"/>
+                </a:solidFill>
+                <a:latin typeface="Arial"/>
               </a:rPr>
               <a:t>Mission alignment.</a:t>
             </a:r>
             <a:r>
               <a:rPr sz="1650">
                 <a:solidFill>
-                  <a:srgbClr val="333840"/>
-                </a:solidFill>
-                <a:latin typeface="Calibri"/>
+                  <a:srgbClr val="3C3937"/>
+                </a:solidFill>
+                <a:latin typeface="Arial"/>
               </a:rPr>
               <a:t>  Demanding accountability and good governance reflects institutional values and is defensible to beneficiaries.</a:t>
             </a:r>
@@ -34902,27 +34902,27 @@
             <a:r>
               <a:rPr sz="1650" b="1">
                 <a:solidFill>
-                  <a:srgbClr val="4A5D75"/>
-                </a:solidFill>
-                <a:latin typeface="Calibri"/>
+                  <a:srgbClr val="556A83"/>
+                </a:solidFill>
+                <a:latin typeface="Arial"/>
               </a:rPr>
               <a:t>›  </a:t>
             </a:r>
             <a:r>
               <a:rPr sz="1650" b="1">
                 <a:solidFill>
-                  <a:srgbClr val="1E334E"/>
-                </a:solidFill>
-                <a:latin typeface="Calibri"/>
+                  <a:srgbClr val="314359"/>
+                </a:solidFill>
+                <a:latin typeface="Arial"/>
               </a:rPr>
               <a:t>Engagement as risk management.</a:t>
             </a:r>
             <a:r>
               <a:rPr sz="1650">
                 <a:solidFill>
-                  <a:srgbClr val="333840"/>
-                </a:solidFill>
-                <a:latin typeface="Calibri"/>
+                  <a:srgbClr val="3C3937"/>
+                </a:solidFill>
+                <a:latin typeface="Arial"/>
               </a:rPr>
               <a:t>  Turns hidden governance risk in the portfolio into a remediable, return-generating exposure.</a:t>
             </a:r>
@@ -35048,9 +35048,9 @@
             <a:r>
               <a:rPr sz="1100" b="0" i="0">
                 <a:solidFill>
-                  <a:srgbClr val="4A5D75"/>
-                </a:solidFill>
-                <a:latin typeface="Calibri"/>
+                  <a:srgbClr val="6F8990"/>
+                </a:solidFill>
+                <a:latin typeface="Arial"/>
               </a:rPr>
               <a:t>Portfolio</a:t>
             </a:r>
@@ -35072,7 +35072,7 @@
             <a:avLst/>
           </a:prstGeom>
           <a:solidFill>
-            <a:srgbClr val="F1F2F4"/>
+            <a:srgbClr val="F6F7F9"/>
           </a:solidFill>
           <a:ln>
             <a:noFill/>
@@ -35134,7 +35134,7 @@
             <a:r>
               <a:rPr sz="3000" b="0" i="0">
                 <a:solidFill>
-                  <a:srgbClr val="1E334E"/>
+                  <a:srgbClr val="314359"/>
                 </a:solidFill>
                 <a:latin typeface="Times New Roman"/>
               </a:rPr>
@@ -35176,9 +35176,9 @@
             <a:r>
               <a:rPr sz="850" b="0" i="0">
                 <a:solidFill>
-                  <a:srgbClr val="9AA4B0"/>
-                </a:solidFill>
-                <a:latin typeface="Calibri"/>
+                  <a:srgbClr val="9A958E"/>
+                </a:solidFill>
+                <a:latin typeface="Arial"/>
               </a:rPr>
               <a:t>Strictly confidential          4</a:t>
             </a:r>
@@ -35218,27 +35218,27 @@
             <a:r>
               <a:rPr sz="1650" b="1">
                 <a:solidFill>
-                  <a:srgbClr val="4A5D75"/>
-                </a:solidFill>
-                <a:latin typeface="Calibri"/>
+                  <a:srgbClr val="556A83"/>
+                </a:solidFill>
+                <a:latin typeface="Arial"/>
               </a:rPr>
               <a:t>›  </a:t>
             </a:r>
             <a:r>
               <a:rPr sz="1650" b="1">
                 <a:solidFill>
-                  <a:srgbClr val="1E334E"/>
-                </a:solidFill>
-                <a:latin typeface="Calibri"/>
+                  <a:srgbClr val="314359"/>
+                </a:solidFill>
+                <a:latin typeface="Arial"/>
               </a:rPr>
               <a:t>A distinct return engine.</a:t>
             </a:r>
             <a:r>
               <a:rPr sz="1650">
                 <a:solidFill>
-                  <a:srgbClr val="333840"/>
-                </a:solidFill>
-                <a:latin typeface="Calibri"/>
+                  <a:srgbClr val="3C3937"/>
+                </a:solidFill>
+                <a:latin typeface="Arial"/>
               </a:rPr>
               <a:t>  Alpha driven by proxy contests, spin-offs and capital-return programmes — largely independent of rates, growth and inflation.</a:t>
             </a:r>
@@ -35255,27 +35255,27 @@
             <a:r>
               <a:rPr sz="1650" b="1">
                 <a:solidFill>
-                  <a:srgbClr val="4A5D75"/>
-                </a:solidFill>
-                <a:latin typeface="Calibri"/>
+                  <a:srgbClr val="556A83"/>
+                </a:solidFill>
+                <a:latin typeface="Arial"/>
               </a:rPr>
               <a:t>›  </a:t>
             </a:r>
             <a:r>
               <a:rPr sz="1650" b="1">
                 <a:solidFill>
-                  <a:srgbClr val="1E334E"/>
-                </a:solidFill>
-                <a:latin typeface="Calibri"/>
+                  <a:srgbClr val="314359"/>
+                </a:solidFill>
+                <a:latin typeface="Arial"/>
               </a:rPr>
               <a:t>Diversifies the equity book.</a:t>
             </a:r>
             <a:r>
               <a:rPr sz="1650">
                 <a:solidFill>
-                  <a:srgbClr val="333840"/>
-                </a:solidFill>
-                <a:latin typeface="Calibri"/>
+                  <a:srgbClr val="3C3937"/>
+                </a:solidFill>
+                <a:latin typeface="Arial"/>
               </a:rPr>
               <a:t>  Small- and mid-cap value and special situations, typically underweight in institutional portfolios.</a:t>
             </a:r>
@@ -35292,27 +35292,27 @@
             <a:r>
               <a:rPr sz="1650" b="1">
                 <a:solidFill>
-                  <a:srgbClr val="4A5D75"/>
-                </a:solidFill>
-                <a:latin typeface="Calibri"/>
+                  <a:srgbClr val="556A83"/>
+                </a:solidFill>
+                <a:latin typeface="Arial"/>
               </a:rPr>
               <a:t>›  </a:t>
             </a:r>
             <a:r>
               <a:rPr sz="1650" b="1">
                 <a:solidFill>
-                  <a:srgbClr val="1E334E"/>
-                </a:solidFill>
-                <a:latin typeface="Calibri"/>
+                  <a:srgbClr val="314359"/>
+                </a:solidFill>
+                <a:latin typeface="Arial"/>
               </a:rPr>
               <a:t>Counter-cyclical dry powder.</a:t>
             </a:r>
             <a:r>
               <a:rPr sz="1650">
                 <a:solidFill>
-                  <a:srgbClr val="333840"/>
-                </a:solidFill>
-                <a:latin typeface="Calibri"/>
+                  <a:srgbClr val="3C3937"/>
+                </a:solidFill>
+                <a:latin typeface="Arial"/>
               </a:rPr>
               <a:t>  Dislocations create the next targets; patient capital deploys into weakness rather than selling it.</a:t>
             </a:r>
@@ -35329,27 +35329,27 @@
             <a:r>
               <a:rPr sz="1650" b="1">
                 <a:solidFill>
-                  <a:srgbClr val="4A5D75"/>
-                </a:solidFill>
-                <a:latin typeface="Calibri"/>
+                  <a:srgbClr val="556A83"/>
+                </a:solidFill>
+                <a:latin typeface="Arial"/>
               </a:rPr>
               <a:t>›  </a:t>
             </a:r>
             <a:r>
               <a:rPr sz="1650" b="1">
                 <a:solidFill>
-                  <a:srgbClr val="1E334E"/>
-                </a:solidFill>
-                <a:latin typeface="Calibri"/>
+                  <a:srgbClr val="314359"/>
+                </a:solidFill>
+                <a:latin typeface="Arial"/>
               </a:rPr>
               <a:t>PE-style upside, public-market terms.</a:t>
             </a:r>
             <a:r>
               <a:rPr sz="1650">
                 <a:solidFill>
-                  <a:srgbClr val="333840"/>
-                </a:solidFill>
-                <a:latin typeface="Calibri"/>
+                  <a:srgbClr val="3C3937"/>
+                </a:solidFill>
+                <a:latin typeface="Arial"/>
               </a:rPr>
               <a:t>  Operational engagement with daily pricing, transparency, lower fees and better liquidity.</a:t>
             </a:r>
@@ -35475,9 +35475,9 @@
             <a:r>
               <a:rPr sz="1100" b="0" i="0">
                 <a:solidFill>
-                  <a:srgbClr val="4A5D75"/>
-                </a:solidFill>
-                <a:latin typeface="Calibri"/>
+                  <a:srgbClr val="6F8990"/>
+                </a:solidFill>
+                <a:latin typeface="Arial"/>
               </a:rPr>
               <a:t>Stewardship</a:t>
             </a:r>
@@ -35499,7 +35499,7 @@
             <a:avLst/>
           </a:prstGeom>
           <a:solidFill>
-            <a:srgbClr val="F1F2F4"/>
+            <a:srgbClr val="F6F7F9"/>
           </a:solidFill>
           <a:ln>
             <a:noFill/>
@@ -35561,7 +35561,7 @@
             <a:r>
               <a:rPr sz="3000" b="0" i="0">
                 <a:solidFill>
-                  <a:srgbClr val="1E334E"/>
+                  <a:srgbClr val="314359"/>
                 </a:solidFill>
                 <a:latin typeface="Times New Roman"/>
               </a:rPr>
@@ -35603,9 +35603,9 @@
             <a:r>
               <a:rPr sz="850" b="0" i="0">
                 <a:solidFill>
-                  <a:srgbClr val="9AA4B0"/>
-                </a:solidFill>
-                <a:latin typeface="Calibri"/>
+                  <a:srgbClr val="9A958E"/>
+                </a:solidFill>
+                <a:latin typeface="Arial"/>
               </a:rPr>
               <a:t>Strictly confidential          5</a:t>
             </a:r>
@@ -35645,27 +35645,27 @@
             <a:r>
               <a:rPr sz="1650" b="1">
                 <a:solidFill>
-                  <a:srgbClr val="4A5D75"/>
-                </a:solidFill>
-                <a:latin typeface="Calibri"/>
+                  <a:srgbClr val="556A83"/>
+                </a:solidFill>
+                <a:latin typeface="Arial"/>
               </a:rPr>
               <a:t>›  </a:t>
             </a:r>
             <a:r>
               <a:rPr sz="1650" b="1">
                 <a:solidFill>
-                  <a:srgbClr val="1E334E"/>
-                </a:solidFill>
-                <a:latin typeface="Calibri"/>
+                  <a:srgbClr val="314359"/>
+                </a:solidFill>
+                <a:latin typeface="Arial"/>
               </a:rPr>
               <a:t>Applied governance.</a:t>
             </a:r>
             <a:r>
               <a:rPr sz="1650">
                 <a:solidFill>
-                  <a:srgbClr val="333840"/>
-                </a:solidFill>
-                <a:latin typeface="Calibri"/>
+                  <a:srgbClr val="3C3937"/>
+                </a:solidFill>
+                <a:latin typeface="Arial"/>
               </a:rPr>
               <a:t>  Board independence, pay-for-performance and capital discipline are the “G” of ESG put into practice.</a:t>
             </a:r>
@@ -35682,27 +35682,27 @@
             <a:r>
               <a:rPr sz="1650" b="1">
                 <a:solidFill>
-                  <a:srgbClr val="4A5D75"/>
-                </a:solidFill>
-                <a:latin typeface="Calibri"/>
+                  <a:srgbClr val="556A83"/>
+                </a:solidFill>
+                <a:latin typeface="Arial"/>
               </a:rPr>
               <a:t>›  </a:t>
             </a:r>
             <a:r>
               <a:rPr sz="1650" b="1">
                 <a:solidFill>
-                  <a:srgbClr val="1E334E"/>
-                </a:solidFill>
-                <a:latin typeface="Calibri"/>
+                  <a:srgbClr val="314359"/>
+                </a:solidFill>
+                <a:latin typeface="Arial"/>
               </a:rPr>
               <a:t>Constructive engagement.</a:t>
             </a:r>
             <a:r>
               <a:rPr sz="1650">
                 <a:solidFill>
-                  <a:srgbClr val="333840"/>
-                </a:solidFill>
-                <a:latin typeface="Calibri"/>
+                  <a:srgbClr val="3C3937"/>
+                </a:solidFill>
+                <a:latin typeface="Arial"/>
               </a:rPr>
               <a:t>  Return and stewardship objectives expressed through one allocation, disciplined by a value thesis.</a:t>
             </a:r>
@@ -35719,27 +35719,27 @@
             <a:r>
               <a:rPr sz="1650" b="1">
                 <a:solidFill>
-                  <a:srgbClr val="4A5D75"/>
-                </a:solidFill>
-                <a:latin typeface="Calibri"/>
+                  <a:srgbClr val="556A83"/>
+                </a:solidFill>
+                <a:latin typeface="Arial"/>
               </a:rPr>
               <a:t>›  </a:t>
             </a:r>
             <a:r>
               <a:rPr sz="1650" b="1">
                 <a:solidFill>
-                  <a:srgbClr val="1E334E"/>
-                </a:solidFill>
-                <a:latin typeface="Calibri"/>
+                  <a:srgbClr val="314359"/>
+                </a:solidFill>
+                <a:latin typeface="Arial"/>
               </a:rPr>
               <a:t>A positive externality.</a:t>
             </a:r>
             <a:r>
               <a:rPr sz="1650">
                 <a:solidFill>
-                  <a:srgbClr val="333840"/>
-                </a:solidFill>
-                <a:latin typeface="Calibri"/>
+                  <a:srgbClr val="3C3937"/>
+                </a:solidFill>
+                <a:latin typeface="Arial"/>
               </a:rPr>
               <a:t>  Governance precedents improve the quality of the beta the whole portfolio owns.</a:t>
             </a:r>
@@ -35756,27 +35756,27 @@
             <a:r>
               <a:rPr sz="1650" b="1">
                 <a:solidFill>
-                  <a:srgbClr val="4A5D75"/>
-                </a:solidFill>
-                <a:latin typeface="Calibri"/>
+                  <a:srgbClr val="556A83"/>
+                </a:solidFill>
+                <a:latin typeface="Arial"/>
               </a:rPr>
               <a:t>›  </a:t>
             </a:r>
             <a:r>
               <a:rPr sz="1650" b="1">
                 <a:solidFill>
-                  <a:srgbClr val="1E334E"/>
-                </a:solidFill>
-                <a:latin typeface="Calibri"/>
+                  <a:srgbClr val="314359"/>
+                </a:solidFill>
+                <a:latin typeface="Arial"/>
               </a:rPr>
               <a:t>Defensible to stakeholders.</a:t>
             </a:r>
             <a:r>
               <a:rPr sz="1650">
                 <a:solidFill>
-                  <a:srgbClr val="333840"/>
-                </a:solidFill>
-                <a:latin typeface="Calibri"/>
+                  <a:srgbClr val="3C3937"/>
+                </a:solidFill>
+                <a:latin typeface="Arial"/>
               </a:rPr>
               <a:t>  “We own companies and make them better-run and more valuable” is an easy story to tell.</a:t>
             </a:r>
@@ -35902,9 +35902,9 @@
             <a:r>
               <a:rPr sz="1100" b="0" i="0">
                 <a:solidFill>
-                  <a:srgbClr val="4A5D75"/>
-                </a:solidFill>
-                <a:latin typeface="Calibri"/>
+                  <a:srgbClr val="6F8990"/>
+                </a:solidFill>
+                <a:latin typeface="Arial"/>
               </a:rPr>
               <a:t>Selection</a:t>
             </a:r>
@@ -35926,7 +35926,7 @@
             <a:avLst/>
           </a:prstGeom>
           <a:solidFill>
-            <a:srgbClr val="F1F2F4"/>
+            <a:srgbClr val="F6F7F9"/>
           </a:solidFill>
           <a:ln>
             <a:noFill/>
@@ -35988,7 +35988,7 @@
             <a:r>
               <a:rPr sz="3000" b="0" i="0">
                 <a:solidFill>
-                  <a:srgbClr val="1E334E"/>
+                  <a:srgbClr val="314359"/>
                 </a:solidFill>
                 <a:latin typeface="Times New Roman"/>
               </a:rPr>
@@ -36030,9 +36030,9 @@
             <a:r>
               <a:rPr sz="1300" b="0" i="1">
                 <a:solidFill>
-                  <a:srgbClr val="5A636E"/>
-                </a:solidFill>
-                <a:latin typeface="Calibri"/>
+                  <a:srgbClr val="64615E"/>
+                </a:solidFill>
+                <a:latin typeface="Arial"/>
               </a:rPr>
               <a:t>Dispersion is wide — manager selection matters more here than in almost any other equity strategy.</a:t>
             </a:r>
@@ -36072,9 +36072,9 @@
             <a:r>
               <a:rPr sz="850" b="0" i="0">
                 <a:solidFill>
-                  <a:srgbClr val="9AA4B0"/>
-                </a:solidFill>
-                <a:latin typeface="Calibri"/>
+                  <a:srgbClr val="9A958E"/>
+                </a:solidFill>
+                <a:latin typeface="Arial"/>
               </a:rPr>
               <a:t>Strictly confidential          6</a:t>
             </a:r>
@@ -36114,27 +36114,27 @@
             <a:r>
               <a:rPr sz="1550" b="1">
                 <a:solidFill>
-                  <a:srgbClr val="4A5D75"/>
-                </a:solidFill>
-                <a:latin typeface="Calibri"/>
+                  <a:srgbClr val="556A83"/>
+                </a:solidFill>
+                <a:latin typeface="Arial"/>
               </a:rPr>
               <a:t>›  </a:t>
             </a:r>
             <a:r>
               <a:rPr sz="1550" b="1">
                 <a:solidFill>
-                  <a:srgbClr val="1E334E"/>
-                </a:solidFill>
-                <a:latin typeface="Calibri"/>
+                  <a:srgbClr val="314359"/>
+                </a:solidFill>
+                <a:latin typeface="Arial"/>
               </a:rPr>
               <a:t>A repeatable process</a:t>
             </a:r>
             <a:r>
               <a:rPr sz="1550">
                 <a:solidFill>
-                  <a:srgbClr val="333840"/>
-                </a:solidFill>
-                <a:latin typeface="Calibri"/>
+                  <a:srgbClr val="3C3937"/>
+                </a:solidFill>
+                <a:latin typeface="Arial"/>
               </a:rPr>
               <a:t>  for sourcing and underwriting correctable, undervalued companies.</a:t>
             </a:r>
@@ -36151,27 +36151,27 @@
             <a:r>
               <a:rPr sz="1550" b="1">
                 <a:solidFill>
-                  <a:srgbClr val="4A5D75"/>
-                </a:solidFill>
-                <a:latin typeface="Calibri"/>
+                  <a:srgbClr val="556A83"/>
+                </a:solidFill>
+                <a:latin typeface="Arial"/>
               </a:rPr>
               <a:t>›  </a:t>
             </a:r>
             <a:r>
               <a:rPr sz="1550" b="1">
                 <a:solidFill>
-                  <a:srgbClr val="1E334E"/>
-                </a:solidFill>
-                <a:latin typeface="Calibri"/>
+                  <a:srgbClr val="314359"/>
+                </a:solidFill>
+                <a:latin typeface="Arial"/>
               </a:rPr>
               <a:t>Genuine operating capability,</a:t>
             </a:r>
             <a:r>
               <a:rPr sz="1550">
                 <a:solidFill>
-                  <a:srgbClr val="333840"/>
-                </a:solidFill>
-                <a:latin typeface="Calibri"/>
+                  <a:srgbClr val="3C3937"/>
+                </a:solidFill>
+                <a:latin typeface="Arial"/>
               </a:rPr>
               <a:t>  not just financial engineering — the experience to control the outcome from the boardroom.</a:t>
             </a:r>
@@ -36188,27 +36188,27 @@
             <a:r>
               <a:rPr sz="1550" b="1">
                 <a:solidFill>
-                  <a:srgbClr val="4A5D75"/>
-                </a:solidFill>
-                <a:latin typeface="Calibri"/>
+                  <a:srgbClr val="556A83"/>
+                </a:solidFill>
+                <a:latin typeface="Arial"/>
               </a:rPr>
               <a:t>›  </a:t>
             </a:r>
             <a:r>
               <a:rPr sz="1550" b="1">
                 <a:solidFill>
-                  <a:srgbClr val="1E334E"/>
-                </a:solidFill>
-                <a:latin typeface="Calibri"/>
+                  <a:srgbClr val="314359"/>
+                </a:solidFill>
+                <a:latin typeface="Arial"/>
               </a:rPr>
               <a:t>A track record of outcomes,</a:t>
             </a:r>
             <a:r>
               <a:rPr sz="1550">
                 <a:solidFill>
-                  <a:srgbClr val="333840"/>
-                </a:solidFill>
-                <a:latin typeface="Calibri"/>
+                  <a:srgbClr val="3C3937"/>
+                </a:solidFill>
+                <a:latin typeface="Arial"/>
               </a:rPr>
               <a:t>  board seats won and value delivered across multiple market cycles.</a:t>
             </a:r>
@@ -36225,27 +36225,27 @@
             <a:r>
               <a:rPr sz="1550" b="1">
                 <a:solidFill>
-                  <a:srgbClr val="4A5D75"/>
-                </a:solidFill>
-                <a:latin typeface="Calibri"/>
+                  <a:srgbClr val="556A83"/>
+                </a:solidFill>
+                <a:latin typeface="Arial"/>
               </a:rPr>
               <a:t>›  </a:t>
             </a:r>
             <a:r>
               <a:rPr sz="1550" b="1">
                 <a:solidFill>
-                  <a:srgbClr val="1E334E"/>
-                </a:solidFill>
-                <a:latin typeface="Calibri"/>
+                  <a:srgbClr val="314359"/>
+                </a:solidFill>
+                <a:latin typeface="Arial"/>
               </a:rPr>
               <a:t>Aligned economics</a:t>
             </a:r>
             <a:r>
               <a:rPr sz="1550">
                 <a:solidFill>
-                  <a:srgbClr val="333840"/>
-                </a:solidFill>
-                <a:latin typeface="Calibri"/>
+                  <a:srgbClr val="3C3937"/>
+                </a:solidFill>
+                <a:latin typeface="Arial"/>
               </a:rPr>
               <a:t>  and a stable, long-tenured team that invests its own capital.</a:t>
             </a:r>
@@ -36262,27 +36262,27 @@
             <a:r>
               <a:rPr sz="1550" b="1">
                 <a:solidFill>
-                  <a:srgbClr val="4A5D75"/>
-                </a:solidFill>
-                <a:latin typeface="Calibri"/>
+                  <a:srgbClr val="556A83"/>
+                </a:solidFill>
+                <a:latin typeface="Arial"/>
               </a:rPr>
               <a:t>›  </a:t>
             </a:r>
             <a:r>
               <a:rPr sz="1550" b="1">
                 <a:solidFill>
-                  <a:srgbClr val="1E334E"/>
-                </a:solidFill>
-                <a:latin typeface="Calibri"/>
+                  <a:srgbClr val="314359"/>
+                </a:solidFill>
+                <a:latin typeface="Arial"/>
               </a:rPr>
               <a:t>Disciplined entry and risk control</a:t>
             </a:r>
             <a:r>
               <a:rPr sz="1550">
                 <a:solidFill>
-                  <a:srgbClr val="333840"/>
-                </a:solidFill>
-                <a:latin typeface="Calibri"/>
+                  <a:srgbClr val="3C3937"/>
+                </a:solidFill>
+                <a:latin typeface="Arial"/>
               </a:rPr>
               <a:t>  so the strategy delivers without uncompensated concentration risk.</a:t>
             </a:r>
@@ -36322,9 +36322,9 @@
             <a:r>
               <a:rPr sz="1400" b="0" i="1">
                 <a:solidFill>
-                  <a:srgbClr val="4A5D75"/>
-                </a:solidFill>
-                <a:latin typeface="Calibri"/>
+                  <a:srgbClr val="556A83"/>
+                </a:solidFill>
+                <a:latin typeface="Arial"/>
               </a:rPr>
               <a:t>Part II shows how Athanase meets each of these criteria.</a:t>
             </a:r>
@@ -36364,7 +36364,7 @@
             <a:avLst/>
           </a:prstGeom>
           <a:solidFill>
-            <a:srgbClr val="14253B"/>
+            <a:srgbClr val="152130"/>
           </a:solidFill>
           <a:ln>
             <a:noFill/>
@@ -36450,9 +36450,9 @@
             <a:r>
               <a:rPr sz="1300" b="0" i="0">
                 <a:solidFill>
-                  <a:srgbClr val="8A99AB"/>
-                </a:solidFill>
-                <a:latin typeface="Calibri"/>
+                  <a:srgbClr val="6F8990"/>
+                </a:solidFill>
+                <a:latin typeface="Arial"/>
               </a:rPr>
               <a:t>PART II  ·  AMONG ENGAGED OWNERS</a:t>
             </a:r>
@@ -36492,7 +36492,7 @@
             <a:r>
               <a:rPr sz="4000" b="0" i="1">
                 <a:solidFill>
-                  <a:srgbClr val="C9D3DD"/>
+                  <a:srgbClr val="E2E5E9"/>
                 </a:solidFill>
                 <a:latin typeface="Times New Roman"/>
               </a:rPr>

--- a/Athanase_Engaged_Ownership_Allocator_Deck.pptx
+++ b/Athanase_Engaged_Ownership_Allocator_Deck.pptx
@@ -146,7 +146,7 @@
             <a:r>
               <a:rPr sz="880">
                 <a:solidFill>
-                  <a:srgbClr val="64615E"/>
+                  <a:srgbClr val="556A83"/>
                 </a:solidFill>
               </a:rPr>
               <a:t>Figure 1.  “Probability decay”: strategy efficiency over a CEO cycle (%)</a:t>
@@ -362,7 +362,7 @@
             <a:r>
               <a:rPr sz="880">
                 <a:solidFill>
-                  <a:srgbClr val="64615E"/>
+                  <a:srgbClr val="556A83"/>
                 </a:solidFill>
               </a:rPr>
               <a:t>Figure 3.  Same destination, different reported path (indexed to 100)</a:t>
@@ -540,7 +540,7 @@
           <c:spPr>
             <a:ln w="25400">
               <a:solidFill>
-                <a:srgbClr val="6F8990"/>
+                <a:srgbClr val="556A83"/>
               </a:solidFill>
               <a:prstDash val="sysDash"/>
             </a:ln>
@@ -744,7 +744,7 @@
             <a:r>
               <a:rPr sz="960">
                 <a:solidFill>
-                  <a:srgbClr val="64615E"/>
+                  <a:srgbClr val="556A83"/>
                 </a:solidFill>
               </a:rPr>
               <a:t>Figure 4.  Average monthly return (%)</a:t>
@@ -831,7 +831,7 @@
           </c:tx>
           <c:spPr>
             <a:solidFill>
-              <a:srgbClr val="6F8990"/>
+              <a:srgbClr val="556A83"/>
             </a:solidFill>
           </c:spPr>
           <c:cat>
@@ -879,7 +879,7 @@
               <a:pPr>
                 <a:defRPr sz="720">
                   <a:solidFill>
-                    <a:srgbClr val="3C3937"/>
+                    <a:srgbClr val="0E1620"/>
                   </a:solidFill>
                 </a:defRPr>
               </a:pPr>
@@ -915,7 +915,7 @@
             <a:pPr>
               <a:defRPr sz="800">
                 <a:solidFill>
-                  <a:srgbClr val="3C3937"/>
+                  <a:srgbClr val="0E1620"/>
                 </a:solidFill>
               </a:defRPr>
             </a:pPr>
@@ -944,7 +944,7 @@
             <a:pPr>
               <a:defRPr sz="800">
                 <a:solidFill>
-                  <a:srgbClr val="3C3937"/>
+                  <a:srgbClr val="0E1620"/>
                 </a:solidFill>
               </a:defRPr>
             </a:pPr>
@@ -4049,7 +4049,7 @@
             <a:avLst/>
           </a:prstGeom>
           <a:solidFill>
-            <a:srgbClr val="6F8990"/>
+            <a:srgbClr val="556A83"/>
           </a:solidFill>
           <a:ln>
             <a:noFill/>
@@ -4109,7 +4109,7 @@
               </a:spcAft>
             </a:pPr>
             <a:r>
-              <a:rPr sz="3360" b="0" i="0">
+              <a:rPr sz="3360" b="0" i="0" spc="-126">
                 <a:solidFill>
                   <a:srgbClr val="FFFFFF"/>
                 </a:solidFill>
@@ -4128,7 +4128,7 @@
               </a:spcAft>
             </a:pPr>
             <a:r>
-              <a:rPr sz="1920" b="0" i="1">
+              <a:rPr sz="1920" b="0" i="1" spc="-72">
                 <a:solidFill>
                   <a:srgbClr val="E2E5E9"/>
                 </a:solidFill>
@@ -4172,7 +4172,7 @@
             <a:r>
               <a:rPr sz="1040" b="0" i="0">
                 <a:solidFill>
-                  <a:srgbClr val="6F8990"/>
+                  <a:srgbClr val="556A83"/>
                 </a:solidFill>
                 <a:latin typeface="Arial"/>
               </a:rPr>
@@ -4300,7 +4300,7 @@
             <a:r>
               <a:rPr sz="880" b="0" i="0">
                 <a:solidFill>
-                  <a:srgbClr val="6F8990"/>
+                  <a:srgbClr val="556A83"/>
                 </a:solidFill>
                 <a:latin typeface="Arial"/>
               </a:rPr>
@@ -4384,7 +4384,7 @@
               </a:spcAft>
             </a:pPr>
             <a:r>
-              <a:rPr sz="2400" b="0" i="0">
+              <a:rPr sz="2400" b="0" i="0" spc="-90">
                 <a:solidFill>
                   <a:srgbClr val="314359"/>
                 </a:solidFill>
@@ -4428,7 +4428,7 @@
             <a:r>
               <a:rPr sz="680" b="0" i="0">
                 <a:solidFill>
-                  <a:srgbClr val="9A958E"/>
+                  <a:srgbClr val="556A83"/>
                 </a:solidFill>
                 <a:latin typeface="Arial"/>
               </a:rPr>
@@ -4512,7 +4512,7 @@
               </a:spcAft>
             </a:pPr>
             <a:r>
-              <a:rPr sz="3200" b="0" i="0">
+              <a:rPr sz="3200" b="0" i="0" spc="-120">
                 <a:solidFill>
                   <a:srgbClr val="314359"/>
                 </a:solidFill>
@@ -4533,7 +4533,7 @@
             <a:r>
               <a:rPr sz="960" b="0" i="0">
                 <a:solidFill>
-                  <a:srgbClr val="64615E"/>
+                  <a:srgbClr val="556A83"/>
                 </a:solidFill>
                 <a:latin typeface="Arial"/>
               </a:rPr>
@@ -4552,7 +4552,7 @@
             <a:r>
               <a:rPr sz="960" b="0" i="0">
                 <a:solidFill>
-                  <a:srgbClr val="64615E"/>
+                  <a:srgbClr val="556A83"/>
                 </a:solidFill>
                 <a:latin typeface="Arial"/>
               </a:rPr>
@@ -4636,7 +4636,7 @@
               </a:spcAft>
             </a:pPr>
             <a:r>
-              <a:rPr sz="3200" b="0" i="0">
+              <a:rPr sz="3200" b="0" i="0" spc="-120">
                 <a:solidFill>
                   <a:srgbClr val="314359"/>
                 </a:solidFill>
@@ -4657,7 +4657,7 @@
             <a:r>
               <a:rPr sz="960" b="0" i="0">
                 <a:solidFill>
-                  <a:srgbClr val="64615E"/>
+                  <a:srgbClr val="556A83"/>
                 </a:solidFill>
                 <a:latin typeface="Arial"/>
               </a:rPr>
@@ -4676,7 +4676,7 @@
             <a:r>
               <a:rPr sz="960" b="0" i="0">
                 <a:solidFill>
-                  <a:srgbClr val="64615E"/>
+                  <a:srgbClr val="556A83"/>
                 </a:solidFill>
                 <a:latin typeface="Arial"/>
               </a:rPr>
@@ -4760,7 +4760,7 @@
               </a:spcAft>
             </a:pPr>
             <a:r>
-              <a:rPr sz="3200" b="0" i="0">
+              <a:rPr sz="3200" b="0" i="0" spc="-120">
                 <a:solidFill>
                   <a:srgbClr val="314359"/>
                 </a:solidFill>
@@ -4781,7 +4781,7 @@
             <a:r>
               <a:rPr sz="960" b="0" i="0">
                 <a:solidFill>
-                  <a:srgbClr val="64615E"/>
+                  <a:srgbClr val="556A83"/>
                 </a:solidFill>
                 <a:latin typeface="Arial"/>
               </a:rPr>
@@ -4800,7 +4800,7 @@
             <a:r>
               <a:rPr sz="960" b="0" i="0">
                 <a:solidFill>
-                  <a:srgbClr val="64615E"/>
+                  <a:srgbClr val="556A83"/>
                 </a:solidFill>
                 <a:latin typeface="Arial"/>
               </a:rPr>
@@ -4884,7 +4884,7 @@
               </a:spcAft>
             </a:pPr>
             <a:r>
-              <a:rPr sz="3200" b="0" i="0">
+              <a:rPr sz="3200" b="0" i="0" spc="-120">
                 <a:solidFill>
                   <a:srgbClr val="314359"/>
                 </a:solidFill>
@@ -4905,7 +4905,7 @@
             <a:r>
               <a:rPr sz="960" b="0" i="0">
                 <a:solidFill>
-                  <a:srgbClr val="64615E"/>
+                  <a:srgbClr val="556A83"/>
                 </a:solidFill>
                 <a:latin typeface="Arial"/>
               </a:rPr>
@@ -4924,7 +4924,7 @@
             <a:r>
               <a:rPr sz="960" b="0" i="0">
                 <a:solidFill>
-                  <a:srgbClr val="64615E"/>
+                  <a:srgbClr val="556A83"/>
                 </a:solidFill>
                 <a:latin typeface="Arial"/>
               </a:rPr>
@@ -4966,7 +4966,7 @@
             <a:r>
               <a:rPr sz="1200" b="1">
                 <a:solidFill>
-                  <a:srgbClr val="556A83"/>
+                  <a:srgbClr val="314359"/>
                 </a:solidFill>
                 <a:latin typeface="Arial"/>
               </a:rPr>
@@ -4984,7 +4984,7 @@
             <a:r>
               <a:rPr sz="1200">
                 <a:solidFill>
-                  <a:srgbClr val="3C3937"/>
+                  <a:srgbClr val="0E1620"/>
                 </a:solidFill>
                 <a:latin typeface="Arial"/>
               </a:rPr>
@@ -5003,7 +5003,7 @@
             <a:r>
               <a:rPr sz="1200" b="1">
                 <a:solidFill>
-                  <a:srgbClr val="556A83"/>
+                  <a:srgbClr val="314359"/>
                 </a:solidFill>
                 <a:latin typeface="Arial"/>
               </a:rPr>
@@ -5021,7 +5021,7 @@
             <a:r>
               <a:rPr sz="1200">
                 <a:solidFill>
-                  <a:srgbClr val="3C3937"/>
+                  <a:srgbClr val="0E1620"/>
                 </a:solidFill>
                 <a:latin typeface="Arial"/>
               </a:rPr>
@@ -5040,7 +5040,7 @@
             <a:r>
               <a:rPr sz="1200" b="1">
                 <a:solidFill>
-                  <a:srgbClr val="556A83"/>
+                  <a:srgbClr val="314359"/>
                 </a:solidFill>
                 <a:latin typeface="Arial"/>
               </a:rPr>
@@ -5058,7 +5058,7 @@
             <a:r>
               <a:rPr sz="1200">
                 <a:solidFill>
-                  <a:srgbClr val="3C3937"/>
+                  <a:srgbClr val="0E1620"/>
                 </a:solidFill>
                 <a:latin typeface="Arial"/>
               </a:rPr>
@@ -5100,7 +5100,7 @@
             <a:r>
               <a:rPr sz="720" b="0" i="0">
                 <a:solidFill>
-                  <a:srgbClr val="9A958E"/>
+                  <a:srgbClr val="556A83"/>
                 </a:solidFill>
                 <a:latin typeface="Arial"/>
               </a:rPr>
@@ -5228,7 +5228,7 @@
             <a:r>
               <a:rPr sz="880" b="0" i="0">
                 <a:solidFill>
-                  <a:srgbClr val="6F8990"/>
+                  <a:srgbClr val="556A83"/>
                 </a:solidFill>
                 <a:latin typeface="Arial"/>
               </a:rPr>
@@ -5312,7 +5312,7 @@
               </a:spcAft>
             </a:pPr>
             <a:r>
-              <a:rPr sz="2400" b="0" i="0">
+              <a:rPr sz="2400" b="0" i="0" spc="-90">
                 <a:solidFill>
                   <a:srgbClr val="314359"/>
                 </a:solidFill>
@@ -5356,7 +5356,7 @@
             <a:r>
               <a:rPr sz="1040" b="0" i="1">
                 <a:solidFill>
-                  <a:srgbClr val="64615E"/>
+                  <a:srgbClr val="556A83"/>
                 </a:solidFill>
                 <a:latin typeface="Arial"/>
               </a:rPr>
@@ -5398,7 +5398,7 @@
             <a:r>
               <a:rPr sz="680" b="0" i="0">
                 <a:solidFill>
-                  <a:srgbClr val="9A958E"/>
+                  <a:srgbClr val="556A83"/>
                 </a:solidFill>
                 <a:latin typeface="Arial"/>
               </a:rPr>
@@ -5422,7 +5422,7 @@
             <a:avLst/>
           </a:prstGeom>
           <a:solidFill>
-            <a:srgbClr val="6F8990"/>
+            <a:srgbClr val="556A83"/>
           </a:solidFill>
           <a:ln>
             <a:noFill/>
@@ -5572,7 +5572,7 @@
             <a:r>
               <a:rPr sz="960" b="0" i="0">
                 <a:solidFill>
-                  <a:srgbClr val="556A83"/>
+                  <a:srgbClr val="314359"/>
                 </a:solidFill>
                 <a:latin typeface="Arial"/>
               </a:rPr>
@@ -5702,7 +5702,7 @@
             <a:r>
               <a:rPr sz="960" b="0" i="0">
                 <a:solidFill>
-                  <a:srgbClr val="556A83"/>
+                  <a:srgbClr val="314359"/>
                 </a:solidFill>
                 <a:latin typeface="Arial"/>
               </a:rPr>
@@ -5832,7 +5832,7 @@
             <a:r>
               <a:rPr sz="960" b="0" i="0">
                 <a:solidFill>
-                  <a:srgbClr val="556A83"/>
+                  <a:srgbClr val="314359"/>
                 </a:solidFill>
                 <a:latin typeface="Arial"/>
               </a:rPr>
@@ -5962,7 +5962,7 @@
             <a:r>
               <a:rPr sz="960" b="0" i="0">
                 <a:solidFill>
-                  <a:srgbClr val="556A83"/>
+                  <a:srgbClr val="314359"/>
                 </a:solidFill>
                 <a:latin typeface="Arial"/>
               </a:rPr>
@@ -6004,7 +6004,7 @@
             <a:r>
               <a:rPr sz="1160" b="1">
                 <a:solidFill>
-                  <a:srgbClr val="556A83"/>
+                  <a:srgbClr val="314359"/>
                 </a:solidFill>
                 <a:latin typeface="Arial"/>
               </a:rPr>
@@ -6022,7 +6022,7 @@
             <a:r>
               <a:rPr sz="1160">
                 <a:solidFill>
-                  <a:srgbClr val="3C3937"/>
+                  <a:srgbClr val="0E1620"/>
                 </a:solidFill>
                 <a:latin typeface="Arial"/>
               </a:rPr>
@@ -6041,7 +6041,7 @@
             <a:r>
               <a:rPr sz="1160" b="1">
                 <a:solidFill>
-                  <a:srgbClr val="556A83"/>
+                  <a:srgbClr val="314359"/>
                 </a:solidFill>
                 <a:latin typeface="Arial"/>
               </a:rPr>
@@ -6059,7 +6059,7 @@
             <a:r>
               <a:rPr sz="1160">
                 <a:solidFill>
-                  <a:srgbClr val="3C3937"/>
+                  <a:srgbClr val="0E1620"/>
                 </a:solidFill>
                 <a:latin typeface="Arial"/>
               </a:rPr>
@@ -6078,7 +6078,7 @@
             <a:r>
               <a:rPr sz="1160" b="1">
                 <a:solidFill>
-                  <a:srgbClr val="556A83"/>
+                  <a:srgbClr val="314359"/>
                 </a:solidFill>
                 <a:latin typeface="Arial"/>
               </a:rPr>
@@ -6096,7 +6096,7 @@
             <a:r>
               <a:rPr sz="1160">
                 <a:solidFill>
-                  <a:srgbClr val="3C3937"/>
+                  <a:srgbClr val="0E1620"/>
                 </a:solidFill>
                 <a:latin typeface="Arial"/>
               </a:rPr>
@@ -6115,7 +6115,7 @@
             <a:r>
               <a:rPr sz="1160" b="1">
                 <a:solidFill>
-                  <a:srgbClr val="556A83"/>
+                  <a:srgbClr val="314359"/>
                 </a:solidFill>
                 <a:latin typeface="Arial"/>
               </a:rPr>
@@ -6133,7 +6133,7 @@
             <a:r>
               <a:rPr sz="1160">
                 <a:solidFill>
-                  <a:srgbClr val="3C3937"/>
+                  <a:srgbClr val="0E1620"/>
                 </a:solidFill>
                 <a:latin typeface="Arial"/>
               </a:rPr>
@@ -6152,7 +6152,7 @@
             <a:r>
               <a:rPr sz="1160" b="1">
                 <a:solidFill>
-                  <a:srgbClr val="556A83"/>
+                  <a:srgbClr val="314359"/>
                 </a:solidFill>
                 <a:latin typeface="Arial"/>
               </a:rPr>
@@ -6170,7 +6170,7 @@
             <a:r>
               <a:rPr sz="1160">
                 <a:solidFill>
-                  <a:srgbClr val="3C3937"/>
+                  <a:srgbClr val="0E1620"/>
                 </a:solidFill>
                 <a:latin typeface="Arial"/>
               </a:rPr>
@@ -6298,7 +6298,7 @@
             <a:r>
               <a:rPr sz="880" b="0" i="0">
                 <a:solidFill>
-                  <a:srgbClr val="6F8990"/>
+                  <a:srgbClr val="556A83"/>
                 </a:solidFill>
                 <a:latin typeface="Arial"/>
               </a:rPr>
@@ -6340,7 +6340,7 @@
             <a:r>
               <a:rPr sz="880" b="1" i="0">
                 <a:solidFill>
-                  <a:srgbClr val="6F8990"/>
+                  <a:srgbClr val="556A83"/>
                 </a:solidFill>
                 <a:latin typeface="Arial"/>
               </a:rPr>
@@ -6424,7 +6424,7 @@
               </a:spcAft>
             </a:pPr>
             <a:r>
-              <a:rPr sz="2400" b="0" i="0">
+              <a:rPr sz="2400" b="0" i="0" spc="-90">
                 <a:solidFill>
                   <a:srgbClr val="314359"/>
                 </a:solidFill>
@@ -6468,7 +6468,7 @@
             <a:r>
               <a:rPr sz="1040" b="0" i="1">
                 <a:solidFill>
-                  <a:srgbClr val="64615E"/>
+                  <a:srgbClr val="556A83"/>
                 </a:solidFill>
                 <a:latin typeface="Arial"/>
               </a:rPr>
@@ -6510,7 +6510,7 @@
             <a:r>
               <a:rPr sz="680" b="0" i="0">
                 <a:solidFill>
-                  <a:srgbClr val="9A958E"/>
+                  <a:srgbClr val="556A83"/>
                 </a:solidFill>
                 <a:latin typeface="Arial"/>
               </a:rPr>
@@ -6552,7 +6552,7 @@
             <a:r>
               <a:rPr sz="1080" b="1">
                 <a:solidFill>
-                  <a:srgbClr val="556A83"/>
+                  <a:srgbClr val="314359"/>
                 </a:solidFill>
                 <a:latin typeface="Arial"/>
               </a:rPr>
@@ -6570,7 +6570,7 @@
             <a:r>
               <a:rPr sz="1080">
                 <a:solidFill>
-                  <a:srgbClr val="3C3937"/>
+                  <a:srgbClr val="0E1620"/>
                 </a:solidFill>
                 <a:latin typeface="Arial"/>
               </a:rPr>
@@ -6589,7 +6589,7 @@
             <a:r>
               <a:rPr sz="1080" b="1">
                 <a:solidFill>
-                  <a:srgbClr val="556A83"/>
+                  <a:srgbClr val="314359"/>
                 </a:solidFill>
                 <a:latin typeface="Arial"/>
               </a:rPr>
@@ -6607,7 +6607,7 @@
             <a:r>
               <a:rPr sz="1080">
                 <a:solidFill>
-                  <a:srgbClr val="3C3937"/>
+                  <a:srgbClr val="0E1620"/>
                 </a:solidFill>
                 <a:latin typeface="Arial"/>
               </a:rPr>
@@ -6626,7 +6626,7 @@
             <a:r>
               <a:rPr sz="1080" b="1">
                 <a:solidFill>
-                  <a:srgbClr val="556A83"/>
+                  <a:srgbClr val="314359"/>
                 </a:solidFill>
                 <a:latin typeface="Arial"/>
               </a:rPr>
@@ -6644,7 +6644,7 @@
             <a:r>
               <a:rPr sz="1080">
                 <a:solidFill>
-                  <a:srgbClr val="3C3937"/>
+                  <a:srgbClr val="0E1620"/>
                 </a:solidFill>
                 <a:latin typeface="Arial"/>
               </a:rPr>
@@ -6663,7 +6663,7 @@
             <a:r>
               <a:rPr sz="1080" b="1">
                 <a:solidFill>
-                  <a:srgbClr val="556A83"/>
+                  <a:srgbClr val="314359"/>
                 </a:solidFill>
                 <a:latin typeface="Arial"/>
               </a:rPr>
@@ -6681,7 +6681,7 @@
             <a:r>
               <a:rPr sz="1080">
                 <a:solidFill>
-                  <a:srgbClr val="3C3937"/>
+                  <a:srgbClr val="0E1620"/>
                 </a:solidFill>
                 <a:latin typeface="Arial"/>
               </a:rPr>
@@ -6741,7 +6741,7 @@
             <a:r>
               <a:rPr sz="800" b="0" i="1">
                 <a:solidFill>
-                  <a:srgbClr val="9A958E"/>
+                  <a:srgbClr val="556A83"/>
                 </a:solidFill>
                 <a:latin typeface="Arial"/>
               </a:rPr>
@@ -6869,7 +6869,7 @@
             <a:r>
               <a:rPr sz="880" b="0" i="0">
                 <a:solidFill>
-                  <a:srgbClr val="6F8990"/>
+                  <a:srgbClr val="556A83"/>
                 </a:solidFill>
                 <a:latin typeface="Arial"/>
               </a:rPr>
@@ -6911,7 +6911,7 @@
             <a:r>
               <a:rPr sz="880" b="1" i="0">
                 <a:solidFill>
-                  <a:srgbClr val="6F8990"/>
+                  <a:srgbClr val="556A83"/>
                 </a:solidFill>
                 <a:latin typeface="Arial"/>
               </a:rPr>
@@ -6995,7 +6995,7 @@
               </a:spcAft>
             </a:pPr>
             <a:r>
-              <a:rPr sz="2400" b="0" i="0">
+              <a:rPr sz="2400" b="0" i="0" spc="-90">
                 <a:solidFill>
                   <a:srgbClr val="314359"/>
                 </a:solidFill>
@@ -7039,7 +7039,7 @@
             <a:r>
               <a:rPr sz="1040" b="0" i="1">
                 <a:solidFill>
-                  <a:srgbClr val="64615E"/>
+                  <a:srgbClr val="556A83"/>
                 </a:solidFill>
                 <a:latin typeface="Arial"/>
               </a:rPr>
@@ -7081,7 +7081,7 @@
             <a:r>
               <a:rPr sz="680" b="0" i="0">
                 <a:solidFill>
-                  <a:srgbClr val="9A958E"/>
+                  <a:srgbClr val="556A83"/>
                 </a:solidFill>
                 <a:latin typeface="Arial"/>
               </a:rPr>
@@ -7123,7 +7123,7 @@
             <a:r>
               <a:rPr sz="1080" b="1">
                 <a:solidFill>
-                  <a:srgbClr val="556A83"/>
+                  <a:srgbClr val="314359"/>
                 </a:solidFill>
                 <a:latin typeface="Arial"/>
               </a:rPr>
@@ -7141,7 +7141,7 @@
             <a:r>
               <a:rPr sz="1080">
                 <a:solidFill>
-                  <a:srgbClr val="3C3937"/>
+                  <a:srgbClr val="0E1620"/>
                 </a:solidFill>
                 <a:latin typeface="Arial"/>
               </a:rPr>
@@ -7160,7 +7160,7 @@
             <a:r>
               <a:rPr sz="1080" b="1">
                 <a:solidFill>
-                  <a:srgbClr val="556A83"/>
+                  <a:srgbClr val="314359"/>
                 </a:solidFill>
                 <a:latin typeface="Arial"/>
               </a:rPr>
@@ -7178,7 +7178,7 @@
             <a:r>
               <a:rPr sz="1080">
                 <a:solidFill>
-                  <a:srgbClr val="3C3937"/>
+                  <a:srgbClr val="0E1620"/>
                 </a:solidFill>
                 <a:latin typeface="Arial"/>
               </a:rPr>
@@ -7197,7 +7197,7 @@
             <a:r>
               <a:rPr sz="1080" b="1">
                 <a:solidFill>
-                  <a:srgbClr val="556A83"/>
+                  <a:srgbClr val="314359"/>
                 </a:solidFill>
                 <a:latin typeface="Arial"/>
               </a:rPr>
@@ -7215,7 +7215,7 @@
             <a:r>
               <a:rPr sz="1080">
                 <a:solidFill>
-                  <a:srgbClr val="3C3937"/>
+                  <a:srgbClr val="0E1620"/>
                 </a:solidFill>
                 <a:latin typeface="Arial"/>
               </a:rPr>
@@ -7234,7 +7234,7 @@
             <a:r>
               <a:rPr sz="1080" b="1">
                 <a:solidFill>
-                  <a:srgbClr val="556A83"/>
+                  <a:srgbClr val="314359"/>
                 </a:solidFill>
                 <a:latin typeface="Arial"/>
               </a:rPr>
@@ -7252,7 +7252,7 @@
             <a:r>
               <a:rPr sz="1080">
                 <a:solidFill>
-                  <a:srgbClr val="3C3937"/>
+                  <a:srgbClr val="0E1620"/>
                 </a:solidFill>
                 <a:latin typeface="Arial"/>
               </a:rPr>
@@ -7294,7 +7294,7 @@
             <a:r>
               <a:rPr sz="880" b="1" i="0">
                 <a:solidFill>
-                  <a:srgbClr val="556A83"/>
+                  <a:srgbClr val="314359"/>
                 </a:solidFill>
                 <a:latin typeface="Arial"/>
               </a:rPr>
@@ -7313,6 +7313,300 @@
           <a:xfrm>
             <a:off x="5852306" y="3706368"/>
             <a:ext cx="1170461" cy="1658112"/>
+          </a:xfrm>
+          <a:prstGeom prst="rect">
+            <a:avLst/>
+          </a:prstGeom>
+          <a:solidFill>
+            <a:srgbClr val="314359"/>
+          </a:solidFill>
+          <a:ln>
+            <a:noFill/>
+          </a:ln>
+          <a:effectLst/>
+        </p:spPr>
+        <p:style>
+          <a:lnRef idx="1">
+            <a:schemeClr val="accent1"/>
+          </a:lnRef>
+          <a:fillRef idx="3">
+            <a:schemeClr val="accent1"/>
+          </a:fillRef>
+          <a:effectRef idx="2">
+            <a:schemeClr val="accent1"/>
+          </a:effectRef>
+          <a:fontRef idx="minor">
+            <a:schemeClr val="lt1"/>
+          </a:fontRef>
+        </p:style>
+        <p:txBody>
+          <a:bodyPr rtlCol="0" anchor="ctr"/>
+          <a:lstStyle/>
+          <a:p>
+            <a:pPr algn="ctr"/>
+          </a:p>
+        </p:txBody>
+      </p:sp>
+      <p:sp>
+        <p:nvSpPr>
+          <p:cNvPr id="13" name="TextBox 12"/>
+          <p:cNvSpPr txBox="1"/>
+          <p:nvPr/>
+        </p:nvSpPr>
+        <p:spPr>
+          <a:xfrm>
+            <a:off x="5852306" y="3355238"/>
+            <a:ext cx="1170461" cy="312115"/>
+          </a:xfrm>
+          <a:prstGeom prst="rect">
+            <a:avLst/>
+          </a:prstGeom>
+          <a:noFill/>
+        </p:spPr>
+        <p:txBody>
+          <a:bodyPr wrap="square" anchor="t" lIns="0" rIns="0" tIns="0" bIns="0">
+            <a:spAutoFit/>
+          </a:bodyPr>
+          <a:lstStyle/>
+          <a:p>
+            <a:pPr algn="ctr">
+              <a:lnSpc>
+                <a:spcPct val="110000"/>
+              </a:lnSpc>
+              <a:spcAft>
+                <a:spcPts val="0"/>
+              </a:spcAft>
+            </a:pPr>
+            <a:r>
+              <a:rPr sz="1120" b="1" i="0">
+                <a:solidFill>
+                  <a:srgbClr val="314359"/>
+                </a:solidFill>
+                <a:latin typeface="Arial"/>
+              </a:rPr>
+              <a:t>100</a:t>
+            </a:r>
+          </a:p>
+        </p:txBody>
+      </p:sp>
+      <p:sp>
+        <p:nvSpPr>
+          <p:cNvPr id="14" name="TextBox 13"/>
+          <p:cNvSpPr txBox="1"/>
+          <p:nvPr/>
+        </p:nvSpPr>
+        <p:spPr>
+          <a:xfrm>
+            <a:off x="5559691" y="5462016"/>
+            <a:ext cx="1755691" cy="585216"/>
+          </a:xfrm>
+          <a:prstGeom prst="rect">
+            <a:avLst/>
+          </a:prstGeom>
+          <a:noFill/>
+        </p:spPr>
+        <p:txBody>
+          <a:bodyPr wrap="square" anchor="t" lIns="0" rIns="0" tIns="0" bIns="0">
+            <a:spAutoFit/>
+          </a:bodyPr>
+          <a:lstStyle/>
+          <a:p>
+            <a:pPr algn="ctr">
+              <a:lnSpc>
+                <a:spcPct val="100000"/>
+              </a:lnSpc>
+              <a:spcAft>
+                <a:spcPts val="0"/>
+              </a:spcAft>
+            </a:pPr>
+            <a:r>
+              <a:rPr sz="919" b="1" i="0">
+                <a:solidFill>
+                  <a:srgbClr val="0E1620"/>
+                </a:solidFill>
+                <a:latin typeface="Arial"/>
+              </a:rPr>
+              <a:t>Market price</a:t>
+            </a:r>
+          </a:p>
+          <a:p>
+            <a:pPr algn="ctr">
+              <a:lnSpc>
+                <a:spcPct val="100000"/>
+              </a:lnSpc>
+              <a:spcAft>
+                <a:spcPts val="0"/>
+              </a:spcAft>
+            </a:pPr>
+            <a:r>
+              <a:rPr sz="800" b="0" i="0">
+                <a:solidFill>
+                  <a:srgbClr val="0E1620"/>
+                </a:solidFill>
+                <a:latin typeface="Arial"/>
+              </a:rPr>
+              <a:t>(blended optics)</a:t>
+            </a:r>
+          </a:p>
+        </p:txBody>
+      </p:sp>
+      <p:sp>
+        <p:nvSpPr>
+          <p:cNvPr id="15" name="Rectangle 14"/>
+          <p:cNvSpPr/>
+          <p:nvPr/>
+        </p:nvSpPr>
+        <p:spPr>
+          <a:xfrm>
+            <a:off x="7754305" y="3043123"/>
+            <a:ext cx="1170461" cy="2321356"/>
+          </a:xfrm>
+          <a:prstGeom prst="rect">
+            <a:avLst/>
+          </a:prstGeom>
+          <a:solidFill>
+            <a:srgbClr val="152130"/>
+          </a:solidFill>
+          <a:ln>
+            <a:noFill/>
+          </a:ln>
+          <a:effectLst/>
+        </p:spPr>
+        <p:style>
+          <a:lnRef idx="1">
+            <a:schemeClr val="accent1"/>
+          </a:lnRef>
+          <a:fillRef idx="3">
+            <a:schemeClr val="accent1"/>
+          </a:fillRef>
+          <a:effectRef idx="2">
+            <a:schemeClr val="accent1"/>
+          </a:effectRef>
+          <a:fontRef idx="minor">
+            <a:schemeClr val="lt1"/>
+          </a:fontRef>
+        </p:style>
+        <p:txBody>
+          <a:bodyPr rtlCol="0" anchor="ctr"/>
+          <a:lstStyle/>
+          <a:p>
+            <a:pPr algn="ctr"/>
+          </a:p>
+        </p:txBody>
+      </p:sp>
+      <p:sp>
+        <p:nvSpPr>
+          <p:cNvPr id="16" name="TextBox 15"/>
+          <p:cNvSpPr txBox="1"/>
+          <p:nvPr/>
+        </p:nvSpPr>
+        <p:spPr>
+          <a:xfrm>
+            <a:off x="7754305" y="2691993"/>
+            <a:ext cx="1170461" cy="312115"/>
+          </a:xfrm>
+          <a:prstGeom prst="rect">
+            <a:avLst/>
+          </a:prstGeom>
+          <a:noFill/>
+        </p:spPr>
+        <p:txBody>
+          <a:bodyPr wrap="square" anchor="t" lIns="0" rIns="0" tIns="0" bIns="0">
+            <a:spAutoFit/>
+          </a:bodyPr>
+          <a:lstStyle/>
+          <a:p>
+            <a:pPr algn="ctr">
+              <a:lnSpc>
+                <a:spcPct val="110000"/>
+              </a:lnSpc>
+              <a:spcAft>
+                <a:spcPts val="0"/>
+              </a:spcAft>
+            </a:pPr>
+            <a:r>
+              <a:rPr sz="1120" b="1" i="0">
+                <a:solidFill>
+                  <a:srgbClr val="314359"/>
+                </a:solidFill>
+                <a:latin typeface="Arial"/>
+              </a:rPr>
+              <a:t>140</a:t>
+            </a:r>
+          </a:p>
+        </p:txBody>
+      </p:sp>
+      <p:sp>
+        <p:nvSpPr>
+          <p:cNvPr id="17" name="TextBox 16"/>
+          <p:cNvSpPr txBox="1"/>
+          <p:nvPr/>
+        </p:nvSpPr>
+        <p:spPr>
+          <a:xfrm>
+            <a:off x="7461690" y="5462016"/>
+            <a:ext cx="1755691" cy="585216"/>
+          </a:xfrm>
+          <a:prstGeom prst="rect">
+            <a:avLst/>
+          </a:prstGeom>
+          <a:noFill/>
+        </p:spPr>
+        <p:txBody>
+          <a:bodyPr wrap="square" anchor="t" lIns="0" rIns="0" tIns="0" bIns="0">
+            <a:spAutoFit/>
+          </a:bodyPr>
+          <a:lstStyle/>
+          <a:p>
+            <a:pPr algn="ctr">
+              <a:lnSpc>
+                <a:spcPct val="100000"/>
+              </a:lnSpc>
+              <a:spcAft>
+                <a:spcPts val="0"/>
+              </a:spcAft>
+            </a:pPr>
+            <a:r>
+              <a:rPr sz="919" b="1" i="0">
+                <a:solidFill>
+                  <a:srgbClr val="0E1620"/>
+                </a:solidFill>
+                <a:latin typeface="Arial"/>
+              </a:rPr>
+              <a:t>Core alone</a:t>
+            </a:r>
+          </a:p>
+          <a:p>
+            <a:pPr algn="ctr">
+              <a:lnSpc>
+                <a:spcPct val="100000"/>
+              </a:lnSpc>
+              <a:spcAft>
+                <a:spcPts val="0"/>
+              </a:spcAft>
+            </a:pPr>
+            <a:r>
+              <a:rPr sz="800" b="0" i="0">
+                <a:solidFill>
+                  <a:srgbClr val="0E1620"/>
+                </a:solidFill>
+                <a:latin typeface="Arial"/>
+              </a:rPr>
+              <a:t>(high ROIIC)</a:t>
+            </a:r>
+          </a:p>
+        </p:txBody>
+      </p:sp>
+      <p:sp>
+        <p:nvSpPr>
+          <p:cNvPr id="18" name="Rectangle 17"/>
+          <p:cNvSpPr/>
+          <p:nvPr/>
+        </p:nvSpPr>
+        <p:spPr>
+          <a:xfrm>
+            <a:off x="5852306" y="3706368"/>
+            <a:ext cx="2487230" cy="16256"/>
           </a:xfrm>
           <a:prstGeom prst="rect">
             <a:avLst/>
@@ -7349,300 +7643,6 @@
       </p:sp>
       <p:sp>
         <p:nvSpPr>
-          <p:cNvPr id="13" name="TextBox 12"/>
-          <p:cNvSpPr txBox="1"/>
-          <p:nvPr/>
-        </p:nvSpPr>
-        <p:spPr>
-          <a:xfrm>
-            <a:off x="5852306" y="3355238"/>
-            <a:ext cx="1170461" cy="312115"/>
-          </a:xfrm>
-          <a:prstGeom prst="rect">
-            <a:avLst/>
-          </a:prstGeom>
-          <a:noFill/>
-        </p:spPr>
-        <p:txBody>
-          <a:bodyPr wrap="square" anchor="t" lIns="0" rIns="0" tIns="0" bIns="0">
-            <a:spAutoFit/>
-          </a:bodyPr>
-          <a:lstStyle/>
-          <a:p>
-            <a:pPr algn="ctr">
-              <a:lnSpc>
-                <a:spcPct val="110000"/>
-              </a:lnSpc>
-              <a:spcAft>
-                <a:spcPts val="0"/>
-              </a:spcAft>
-            </a:pPr>
-            <a:r>
-              <a:rPr sz="1120" b="1" i="0">
-                <a:solidFill>
-                  <a:srgbClr val="314359"/>
-                </a:solidFill>
-                <a:latin typeface="Arial"/>
-              </a:rPr>
-              <a:t>100</a:t>
-            </a:r>
-          </a:p>
-        </p:txBody>
-      </p:sp>
-      <p:sp>
-        <p:nvSpPr>
-          <p:cNvPr id="14" name="TextBox 13"/>
-          <p:cNvSpPr txBox="1"/>
-          <p:nvPr/>
-        </p:nvSpPr>
-        <p:spPr>
-          <a:xfrm>
-            <a:off x="5559691" y="5462016"/>
-            <a:ext cx="1755691" cy="585216"/>
-          </a:xfrm>
-          <a:prstGeom prst="rect">
-            <a:avLst/>
-          </a:prstGeom>
-          <a:noFill/>
-        </p:spPr>
-        <p:txBody>
-          <a:bodyPr wrap="square" anchor="t" lIns="0" rIns="0" tIns="0" bIns="0">
-            <a:spAutoFit/>
-          </a:bodyPr>
-          <a:lstStyle/>
-          <a:p>
-            <a:pPr algn="ctr">
-              <a:lnSpc>
-                <a:spcPct val="100000"/>
-              </a:lnSpc>
-              <a:spcAft>
-                <a:spcPts val="0"/>
-              </a:spcAft>
-            </a:pPr>
-            <a:r>
-              <a:rPr sz="919" b="1" i="0">
-                <a:solidFill>
-                  <a:srgbClr val="3C3937"/>
-                </a:solidFill>
-                <a:latin typeface="Arial"/>
-              </a:rPr>
-              <a:t>Market price</a:t>
-            </a:r>
-          </a:p>
-          <a:p>
-            <a:pPr algn="ctr">
-              <a:lnSpc>
-                <a:spcPct val="100000"/>
-              </a:lnSpc>
-              <a:spcAft>
-                <a:spcPts val="0"/>
-              </a:spcAft>
-            </a:pPr>
-            <a:r>
-              <a:rPr sz="800" b="0" i="0">
-                <a:solidFill>
-                  <a:srgbClr val="3C3937"/>
-                </a:solidFill>
-                <a:latin typeface="Arial"/>
-              </a:rPr>
-              <a:t>(blended optics)</a:t>
-            </a:r>
-          </a:p>
-        </p:txBody>
-      </p:sp>
-      <p:sp>
-        <p:nvSpPr>
-          <p:cNvPr id="15" name="Rectangle 14"/>
-          <p:cNvSpPr/>
-          <p:nvPr/>
-        </p:nvSpPr>
-        <p:spPr>
-          <a:xfrm>
-            <a:off x="7754305" y="3043123"/>
-            <a:ext cx="1170461" cy="2321356"/>
-          </a:xfrm>
-          <a:prstGeom prst="rect">
-            <a:avLst/>
-          </a:prstGeom>
-          <a:solidFill>
-            <a:srgbClr val="152130"/>
-          </a:solidFill>
-          <a:ln>
-            <a:noFill/>
-          </a:ln>
-          <a:effectLst/>
-        </p:spPr>
-        <p:style>
-          <a:lnRef idx="1">
-            <a:schemeClr val="accent1"/>
-          </a:lnRef>
-          <a:fillRef idx="3">
-            <a:schemeClr val="accent1"/>
-          </a:fillRef>
-          <a:effectRef idx="2">
-            <a:schemeClr val="accent1"/>
-          </a:effectRef>
-          <a:fontRef idx="minor">
-            <a:schemeClr val="lt1"/>
-          </a:fontRef>
-        </p:style>
-        <p:txBody>
-          <a:bodyPr rtlCol="0" anchor="ctr"/>
-          <a:lstStyle/>
-          <a:p>
-            <a:pPr algn="ctr"/>
-          </a:p>
-        </p:txBody>
-      </p:sp>
-      <p:sp>
-        <p:nvSpPr>
-          <p:cNvPr id="16" name="TextBox 15"/>
-          <p:cNvSpPr txBox="1"/>
-          <p:nvPr/>
-        </p:nvSpPr>
-        <p:spPr>
-          <a:xfrm>
-            <a:off x="7754305" y="2691993"/>
-            <a:ext cx="1170461" cy="312115"/>
-          </a:xfrm>
-          <a:prstGeom prst="rect">
-            <a:avLst/>
-          </a:prstGeom>
-          <a:noFill/>
-        </p:spPr>
-        <p:txBody>
-          <a:bodyPr wrap="square" anchor="t" lIns="0" rIns="0" tIns="0" bIns="0">
-            <a:spAutoFit/>
-          </a:bodyPr>
-          <a:lstStyle/>
-          <a:p>
-            <a:pPr algn="ctr">
-              <a:lnSpc>
-                <a:spcPct val="110000"/>
-              </a:lnSpc>
-              <a:spcAft>
-                <a:spcPts val="0"/>
-              </a:spcAft>
-            </a:pPr>
-            <a:r>
-              <a:rPr sz="1120" b="1" i="0">
-                <a:solidFill>
-                  <a:srgbClr val="314359"/>
-                </a:solidFill>
-                <a:latin typeface="Arial"/>
-              </a:rPr>
-              <a:t>140</a:t>
-            </a:r>
-          </a:p>
-        </p:txBody>
-      </p:sp>
-      <p:sp>
-        <p:nvSpPr>
-          <p:cNvPr id="17" name="TextBox 16"/>
-          <p:cNvSpPr txBox="1"/>
-          <p:nvPr/>
-        </p:nvSpPr>
-        <p:spPr>
-          <a:xfrm>
-            <a:off x="7461690" y="5462016"/>
-            <a:ext cx="1755691" cy="585216"/>
-          </a:xfrm>
-          <a:prstGeom prst="rect">
-            <a:avLst/>
-          </a:prstGeom>
-          <a:noFill/>
-        </p:spPr>
-        <p:txBody>
-          <a:bodyPr wrap="square" anchor="t" lIns="0" rIns="0" tIns="0" bIns="0">
-            <a:spAutoFit/>
-          </a:bodyPr>
-          <a:lstStyle/>
-          <a:p>
-            <a:pPr algn="ctr">
-              <a:lnSpc>
-                <a:spcPct val="100000"/>
-              </a:lnSpc>
-              <a:spcAft>
-                <a:spcPts val="0"/>
-              </a:spcAft>
-            </a:pPr>
-            <a:r>
-              <a:rPr sz="919" b="1" i="0">
-                <a:solidFill>
-                  <a:srgbClr val="3C3937"/>
-                </a:solidFill>
-                <a:latin typeface="Arial"/>
-              </a:rPr>
-              <a:t>Core alone</a:t>
-            </a:r>
-          </a:p>
-          <a:p>
-            <a:pPr algn="ctr">
-              <a:lnSpc>
-                <a:spcPct val="100000"/>
-              </a:lnSpc>
-              <a:spcAft>
-                <a:spcPts val="0"/>
-              </a:spcAft>
-            </a:pPr>
-            <a:r>
-              <a:rPr sz="800" b="0" i="0">
-                <a:solidFill>
-                  <a:srgbClr val="3C3937"/>
-                </a:solidFill>
-                <a:latin typeface="Arial"/>
-              </a:rPr>
-              <a:t>(high ROIIC)</a:t>
-            </a:r>
-          </a:p>
-        </p:txBody>
-      </p:sp>
-      <p:sp>
-        <p:nvSpPr>
-          <p:cNvPr id="18" name="Rectangle 17"/>
-          <p:cNvSpPr/>
-          <p:nvPr/>
-        </p:nvSpPr>
-        <p:spPr>
-          <a:xfrm>
-            <a:off x="5852306" y="3706368"/>
-            <a:ext cx="2487230" cy="16256"/>
-          </a:xfrm>
-          <a:prstGeom prst="rect">
-            <a:avLst/>
-          </a:prstGeom>
-          <a:solidFill>
-            <a:srgbClr val="6F8990"/>
-          </a:solidFill>
-          <a:ln>
-            <a:noFill/>
-          </a:ln>
-          <a:effectLst/>
-        </p:spPr>
-        <p:style>
-          <a:lnRef idx="1">
-            <a:schemeClr val="accent1"/>
-          </a:lnRef>
-          <a:fillRef idx="3">
-            <a:schemeClr val="accent1"/>
-          </a:fillRef>
-          <a:effectRef idx="2">
-            <a:schemeClr val="accent1"/>
-          </a:effectRef>
-          <a:fontRef idx="minor">
-            <a:schemeClr val="lt1"/>
-          </a:fontRef>
-        </p:style>
-        <p:txBody>
-          <a:bodyPr rtlCol="0" anchor="ctr"/>
-          <a:lstStyle/>
-          <a:p>
-            <a:pPr algn="ctr"/>
-          </a:p>
-        </p:txBody>
-      </p:sp>
-      <p:sp>
-        <p:nvSpPr>
           <p:cNvPr id="19" name="Rectangle 18"/>
           <p:cNvSpPr/>
           <p:nvPr/>
@@ -7760,7 +7760,7 @@
             <a:r>
               <a:rPr sz="1040" b="0" i="1">
                 <a:solidFill>
-                  <a:srgbClr val="556A83"/>
+                  <a:srgbClr val="314359"/>
                 </a:solidFill>
                 <a:latin typeface="Arial"/>
               </a:rPr>
@@ -7888,7 +7888,7 @@
             <a:r>
               <a:rPr sz="880" b="0" i="0">
                 <a:solidFill>
-                  <a:srgbClr val="6F8990"/>
+                  <a:srgbClr val="556A83"/>
                 </a:solidFill>
                 <a:latin typeface="Arial"/>
               </a:rPr>
@@ -7930,7 +7930,7 @@
             <a:r>
               <a:rPr sz="880" b="1" i="0">
                 <a:solidFill>
-                  <a:srgbClr val="6F8990"/>
+                  <a:srgbClr val="556A83"/>
                 </a:solidFill>
                 <a:latin typeface="Arial"/>
               </a:rPr>
@@ -8014,7 +8014,7 @@
               </a:spcAft>
             </a:pPr>
             <a:r>
-              <a:rPr sz="2400" b="0" i="0">
+              <a:rPr sz="2400" b="0" i="0" spc="-90">
                 <a:solidFill>
                   <a:srgbClr val="314359"/>
                 </a:solidFill>
@@ -8058,7 +8058,7 @@
             <a:r>
               <a:rPr sz="1040" b="0" i="1">
                 <a:solidFill>
-                  <a:srgbClr val="64615E"/>
+                  <a:srgbClr val="556A83"/>
                 </a:solidFill>
                 <a:latin typeface="Arial"/>
               </a:rPr>
@@ -8100,7 +8100,7 @@
             <a:r>
               <a:rPr sz="680" b="0" i="0">
                 <a:solidFill>
-                  <a:srgbClr val="9A958E"/>
+                  <a:srgbClr val="556A83"/>
                 </a:solidFill>
                 <a:latin typeface="Arial"/>
               </a:rPr>
@@ -8210,7 +8210,7 @@
             <a:avLst/>
           </a:prstGeom>
           <a:solidFill>
-            <a:srgbClr val="556A83"/>
+            <a:srgbClr val="314359"/>
           </a:solidFill>
           <a:ln>
             <a:noFill/>
@@ -8296,7 +8296,7 @@
             <a:avLst/>
           </a:prstGeom>
           <a:solidFill>
-            <a:srgbClr val="556A83"/>
+            <a:srgbClr val="314359"/>
           </a:solidFill>
           <a:ln>
             <a:noFill/>
@@ -8444,7 +8444,7 @@
             <a:r>
               <a:rPr sz="919" b="1" i="0">
                 <a:solidFill>
-                  <a:srgbClr val="556A83"/>
+                  <a:srgbClr val="314359"/>
                 </a:solidFill>
                 <a:latin typeface="Arial"/>
               </a:rPr>
@@ -8530,7 +8530,7 @@
             <a:r>
               <a:rPr sz="919" b="0" i="0">
                 <a:solidFill>
-                  <a:srgbClr val="3C3937"/>
+                  <a:srgbClr val="0E1620"/>
                 </a:solidFill>
                 <a:latin typeface="Arial"/>
               </a:rPr>
@@ -8702,7 +8702,7 @@
             <a:r>
               <a:rPr sz="919" b="1" i="0">
                 <a:solidFill>
-                  <a:srgbClr val="556A83"/>
+                  <a:srgbClr val="314359"/>
                 </a:solidFill>
                 <a:latin typeface="Arial"/>
               </a:rPr>
@@ -8788,7 +8788,7 @@
             <a:r>
               <a:rPr sz="919" b="0" i="0">
                 <a:solidFill>
-                  <a:srgbClr val="3C3937"/>
+                  <a:srgbClr val="0E1620"/>
                 </a:solidFill>
                 <a:latin typeface="Arial"/>
               </a:rPr>
@@ -8960,7 +8960,7 @@
             <a:r>
               <a:rPr sz="919" b="1" i="0">
                 <a:solidFill>
-                  <a:srgbClr val="556A83"/>
+                  <a:srgbClr val="314359"/>
                 </a:solidFill>
                 <a:latin typeface="Arial"/>
               </a:rPr>
@@ -9046,7 +9046,7 @@
             <a:r>
               <a:rPr sz="919" b="0" i="0">
                 <a:solidFill>
-                  <a:srgbClr val="3C3937"/>
+                  <a:srgbClr val="0E1620"/>
                 </a:solidFill>
                 <a:latin typeface="Arial"/>
               </a:rPr>
@@ -9218,7 +9218,7 @@
             <a:r>
               <a:rPr sz="919" b="1" i="0">
                 <a:solidFill>
-                  <a:srgbClr val="556A83"/>
+                  <a:srgbClr val="314359"/>
                 </a:solidFill>
                 <a:latin typeface="Arial"/>
               </a:rPr>
@@ -9304,7 +9304,7 @@
             <a:r>
               <a:rPr sz="919" b="0" i="0">
                 <a:solidFill>
-                  <a:srgbClr val="3C3937"/>
+                  <a:srgbClr val="0E1620"/>
                 </a:solidFill>
                 <a:latin typeface="Arial"/>
               </a:rPr>
@@ -9476,7 +9476,7 @@
             <a:r>
               <a:rPr sz="919" b="1" i="0">
                 <a:solidFill>
-                  <a:srgbClr val="556A83"/>
+                  <a:srgbClr val="314359"/>
                 </a:solidFill>
                 <a:latin typeface="Arial"/>
               </a:rPr>
@@ -9562,7 +9562,7 @@
             <a:r>
               <a:rPr sz="919" b="0" i="0">
                 <a:solidFill>
-                  <a:srgbClr val="3C3937"/>
+                  <a:srgbClr val="0E1620"/>
                 </a:solidFill>
                 <a:latin typeface="Arial"/>
               </a:rPr>
@@ -9690,7 +9690,7 @@
             <a:r>
               <a:rPr sz="1040" b="0" i="1">
                 <a:solidFill>
-                  <a:srgbClr val="556A83"/>
+                  <a:srgbClr val="314359"/>
                 </a:solidFill>
                 <a:latin typeface="Arial"/>
               </a:rPr>
@@ -9818,7 +9818,7 @@
             <a:r>
               <a:rPr sz="880" b="0" i="0">
                 <a:solidFill>
-                  <a:srgbClr val="6F8990"/>
+                  <a:srgbClr val="556A83"/>
                 </a:solidFill>
                 <a:latin typeface="Arial"/>
               </a:rPr>
@@ -9860,7 +9860,7 @@
             <a:r>
               <a:rPr sz="880" b="1" i="0">
                 <a:solidFill>
-                  <a:srgbClr val="6F8990"/>
+                  <a:srgbClr val="556A83"/>
                 </a:solidFill>
                 <a:latin typeface="Arial"/>
               </a:rPr>
@@ -9944,7 +9944,7 @@
               </a:spcAft>
             </a:pPr>
             <a:r>
-              <a:rPr sz="2400" b="0" i="0">
+              <a:rPr sz="2400" b="0" i="0" spc="-90">
                 <a:solidFill>
                   <a:srgbClr val="314359"/>
                 </a:solidFill>
@@ -9988,7 +9988,7 @@
             <a:r>
               <a:rPr sz="1040" b="0" i="1">
                 <a:solidFill>
-                  <a:srgbClr val="64615E"/>
+                  <a:srgbClr val="556A83"/>
                 </a:solidFill>
                 <a:latin typeface="Arial"/>
               </a:rPr>
@@ -10030,7 +10030,7 @@
             <a:r>
               <a:rPr sz="680" b="0" i="0">
                 <a:solidFill>
-                  <a:srgbClr val="9A958E"/>
+                  <a:srgbClr val="556A83"/>
                 </a:solidFill>
                 <a:latin typeface="Arial"/>
               </a:rPr>
@@ -10054,7 +10054,7 @@
             <a:avLst/>
           </a:prstGeom>
           <a:solidFill>
-            <a:srgbClr val="556A83"/>
+            <a:srgbClr val="314359"/>
           </a:solidFill>
           <a:ln>
             <a:noFill/>
@@ -10140,7 +10140,7 @@
             <a:avLst/>
           </a:prstGeom>
           <a:solidFill>
-            <a:srgbClr val="556A83"/>
+            <a:srgbClr val="314359"/>
           </a:solidFill>
           <a:ln>
             <a:noFill/>
@@ -10226,7 +10226,7 @@
             <a:avLst/>
           </a:prstGeom>
           <a:solidFill>
-            <a:srgbClr val="556A83"/>
+            <a:srgbClr val="314359"/>
           </a:solidFill>
           <a:ln>
             <a:noFill/>
@@ -10374,7 +10374,7 @@
             <a:r>
               <a:rPr sz="1040" b="0" i="0">
                 <a:solidFill>
-                  <a:srgbClr val="3C3937"/>
+                  <a:srgbClr val="0E1620"/>
                 </a:solidFill>
                 <a:latin typeface="Arial"/>
               </a:rPr>
@@ -10460,7 +10460,7 @@
             <a:r>
               <a:rPr sz="1040" b="0" i="0">
                 <a:solidFill>
-                  <a:srgbClr val="3C3937"/>
+                  <a:srgbClr val="0E1620"/>
                 </a:solidFill>
                 <a:latin typeface="Arial"/>
               </a:rPr>
@@ -10632,7 +10632,7 @@
             <a:r>
               <a:rPr sz="1040" b="0" i="0">
                 <a:solidFill>
-                  <a:srgbClr val="3C3937"/>
+                  <a:srgbClr val="0E1620"/>
                 </a:solidFill>
                 <a:latin typeface="Arial"/>
               </a:rPr>
@@ -10718,7 +10718,7 @@
             <a:r>
               <a:rPr sz="1040" b="0" i="0">
                 <a:solidFill>
-                  <a:srgbClr val="3C3937"/>
+                  <a:srgbClr val="0E1620"/>
                 </a:solidFill>
                 <a:latin typeface="Arial"/>
               </a:rPr>
@@ -10890,7 +10890,7 @@
             <a:r>
               <a:rPr sz="1040" b="0" i="0">
                 <a:solidFill>
-                  <a:srgbClr val="3C3937"/>
+                  <a:srgbClr val="0E1620"/>
                 </a:solidFill>
                 <a:latin typeface="Arial"/>
               </a:rPr>
@@ -10976,7 +10976,7 @@
             <a:r>
               <a:rPr sz="1040" b="0" i="0">
                 <a:solidFill>
-                  <a:srgbClr val="3C3937"/>
+                  <a:srgbClr val="0E1620"/>
                 </a:solidFill>
                 <a:latin typeface="Arial"/>
               </a:rPr>
@@ -11148,7 +11148,7 @@
             <a:r>
               <a:rPr sz="1040" b="0" i="0">
                 <a:solidFill>
-                  <a:srgbClr val="3C3937"/>
+                  <a:srgbClr val="0E1620"/>
                 </a:solidFill>
                 <a:latin typeface="Arial"/>
               </a:rPr>
@@ -11234,7 +11234,7 @@
             <a:r>
               <a:rPr sz="1040" b="0" i="0">
                 <a:solidFill>
-                  <a:srgbClr val="3C3937"/>
+                  <a:srgbClr val="0E1620"/>
                 </a:solidFill>
                 <a:latin typeface="Arial"/>
               </a:rPr>
@@ -11362,7 +11362,7 @@
             <a:r>
               <a:rPr sz="1120" b="0" i="1">
                 <a:solidFill>
-                  <a:srgbClr val="556A83"/>
+                  <a:srgbClr val="314359"/>
                 </a:solidFill>
                 <a:latin typeface="Arial"/>
               </a:rPr>
@@ -11490,7 +11490,7 @@
             <a:r>
               <a:rPr sz="880" b="0" i="0">
                 <a:solidFill>
-                  <a:srgbClr val="6F8990"/>
+                  <a:srgbClr val="556A83"/>
                 </a:solidFill>
                 <a:latin typeface="Arial"/>
               </a:rPr>
@@ -11574,7 +11574,7 @@
               </a:spcAft>
             </a:pPr>
             <a:r>
-              <a:rPr sz="2400" b="0" i="0">
+              <a:rPr sz="2400" b="0" i="0" spc="-90">
                 <a:solidFill>
                   <a:srgbClr val="314359"/>
                 </a:solidFill>
@@ -11618,7 +11618,7 @@
             <a:r>
               <a:rPr sz="1040" b="0" i="1">
                 <a:solidFill>
-                  <a:srgbClr val="64615E"/>
+                  <a:srgbClr val="556A83"/>
                 </a:solidFill>
                 <a:latin typeface="Arial"/>
               </a:rPr>
@@ -11660,7 +11660,7 @@
             <a:r>
               <a:rPr sz="680" b="0" i="0">
                 <a:solidFill>
-                  <a:srgbClr val="9A958E"/>
+                  <a:srgbClr val="556A83"/>
                 </a:solidFill>
                 <a:latin typeface="Arial"/>
               </a:rPr>
@@ -11702,7 +11702,7 @@
             <a:r>
               <a:rPr sz="1040" b="1" i="0">
                 <a:solidFill>
-                  <a:srgbClr val="556A83"/>
+                  <a:srgbClr val="314359"/>
                 </a:solidFill>
                 <a:latin typeface="Arial"/>
               </a:rPr>
@@ -11721,7 +11721,7 @@
             <a:r>
               <a:rPr sz="1120" b="0" i="0">
                 <a:solidFill>
-                  <a:srgbClr val="3C3937"/>
+                  <a:srgbClr val="0E1620"/>
                 </a:solidFill>
                 <a:latin typeface="Arial"/>
               </a:rPr>
@@ -11740,7 +11740,7 @@
             <a:r>
               <a:rPr sz="1120" b="0" i="0">
                 <a:solidFill>
-                  <a:srgbClr val="3C3937"/>
+                  <a:srgbClr val="0E1620"/>
                 </a:solidFill>
                 <a:latin typeface="Arial"/>
               </a:rPr>
@@ -11759,7 +11759,7 @@
             <a:r>
               <a:rPr sz="1120" b="0" i="0">
                 <a:solidFill>
-                  <a:srgbClr val="3C3937"/>
+                  <a:srgbClr val="0E1620"/>
                 </a:solidFill>
                 <a:latin typeface="Arial"/>
               </a:rPr>
@@ -11801,7 +11801,7 @@
             <a:r>
               <a:rPr sz="1040" b="1" i="0">
                 <a:solidFill>
-                  <a:srgbClr val="556A83"/>
+                  <a:srgbClr val="314359"/>
                 </a:solidFill>
                 <a:latin typeface="Arial"/>
               </a:rPr>
@@ -11820,7 +11820,7 @@
             <a:r>
               <a:rPr sz="1120" b="0" i="0">
                 <a:solidFill>
-                  <a:srgbClr val="3C3937"/>
+                  <a:srgbClr val="0E1620"/>
                 </a:solidFill>
                 <a:latin typeface="Arial"/>
               </a:rPr>
@@ -11839,7 +11839,7 @@
             <a:r>
               <a:rPr sz="1120" b="0" i="0">
                 <a:solidFill>
-                  <a:srgbClr val="3C3937"/>
+                  <a:srgbClr val="0E1620"/>
                 </a:solidFill>
                 <a:latin typeface="Arial"/>
               </a:rPr>
@@ -11858,7 +11858,7 @@
             <a:r>
               <a:rPr sz="1120" b="0" i="0">
                 <a:solidFill>
-                  <a:srgbClr val="3C3937"/>
+                  <a:srgbClr val="0E1620"/>
                 </a:solidFill>
                 <a:latin typeface="Arial"/>
               </a:rPr>
@@ -11900,7 +11900,7 @@
             <a:r>
               <a:rPr sz="1040" b="0" i="1">
                 <a:solidFill>
-                  <a:srgbClr val="64615E"/>
+                  <a:srgbClr val="556A83"/>
                 </a:solidFill>
                 <a:latin typeface="Arial"/>
               </a:rPr>
@@ -12028,7 +12028,7 @@
             <a:r>
               <a:rPr sz="880" b="0" i="0">
                 <a:solidFill>
-                  <a:srgbClr val="6F8990"/>
+                  <a:srgbClr val="556A83"/>
                 </a:solidFill>
                 <a:latin typeface="Arial"/>
               </a:rPr>
@@ -12112,7 +12112,7 @@
               </a:spcAft>
             </a:pPr>
             <a:r>
-              <a:rPr sz="2400" b="0" i="0">
+              <a:rPr sz="2400" b="0" i="0" spc="-90">
                 <a:solidFill>
                   <a:srgbClr val="314359"/>
                 </a:solidFill>
@@ -12156,7 +12156,7 @@
             <a:r>
               <a:rPr sz="1040" b="0" i="1">
                 <a:solidFill>
-                  <a:srgbClr val="64615E"/>
+                  <a:srgbClr val="556A83"/>
                 </a:solidFill>
                 <a:latin typeface="Arial"/>
               </a:rPr>
@@ -12198,7 +12198,7 @@
             <a:r>
               <a:rPr sz="680" b="0" i="0">
                 <a:solidFill>
-                  <a:srgbClr val="9A958E"/>
+                  <a:srgbClr val="556A83"/>
                 </a:solidFill>
                 <a:latin typeface="Arial"/>
               </a:rPr>
@@ -12240,7 +12240,7 @@
             <a:r>
               <a:rPr sz="1160" b="1">
                 <a:solidFill>
-                  <a:srgbClr val="556A83"/>
+                  <a:srgbClr val="314359"/>
                 </a:solidFill>
                 <a:latin typeface="Arial"/>
               </a:rPr>
@@ -12258,7 +12258,7 @@
             <a:r>
               <a:rPr sz="1160">
                 <a:solidFill>
-                  <a:srgbClr val="3C3937"/>
+                  <a:srgbClr val="0E1620"/>
                 </a:solidFill>
                 <a:latin typeface="Arial"/>
               </a:rPr>
@@ -12277,7 +12277,7 @@
             <a:r>
               <a:rPr sz="1160" b="1">
                 <a:solidFill>
-                  <a:srgbClr val="556A83"/>
+                  <a:srgbClr val="314359"/>
                 </a:solidFill>
                 <a:latin typeface="Arial"/>
               </a:rPr>
@@ -12295,7 +12295,7 @@
             <a:r>
               <a:rPr sz="1160">
                 <a:solidFill>
-                  <a:srgbClr val="3C3937"/>
+                  <a:srgbClr val="0E1620"/>
                 </a:solidFill>
                 <a:latin typeface="Arial"/>
               </a:rPr>
@@ -12314,7 +12314,7 @@
             <a:r>
               <a:rPr sz="1160" b="1">
                 <a:solidFill>
-                  <a:srgbClr val="556A83"/>
+                  <a:srgbClr val="314359"/>
                 </a:solidFill>
                 <a:latin typeface="Arial"/>
               </a:rPr>
@@ -12332,7 +12332,7 @@
             <a:r>
               <a:rPr sz="1160">
                 <a:solidFill>
-                  <a:srgbClr val="3C3937"/>
+                  <a:srgbClr val="0E1620"/>
                 </a:solidFill>
                 <a:latin typeface="Arial"/>
               </a:rPr>
@@ -12351,7 +12351,7 @@
             <a:r>
               <a:rPr sz="1160" b="1">
                 <a:solidFill>
-                  <a:srgbClr val="556A83"/>
+                  <a:srgbClr val="314359"/>
                 </a:solidFill>
                 <a:latin typeface="Arial"/>
               </a:rPr>
@@ -12369,7 +12369,7 @@
             <a:r>
               <a:rPr sz="1160">
                 <a:solidFill>
-                  <a:srgbClr val="3C3937"/>
+                  <a:srgbClr val="0E1620"/>
                 </a:solidFill>
                 <a:latin typeface="Arial"/>
               </a:rPr>
@@ -12388,7 +12388,7 @@
             <a:r>
               <a:rPr sz="1160" b="1">
                 <a:solidFill>
-                  <a:srgbClr val="556A83"/>
+                  <a:srgbClr val="314359"/>
                 </a:solidFill>
                 <a:latin typeface="Arial"/>
               </a:rPr>
@@ -12406,7 +12406,7 @@
             <a:r>
               <a:rPr sz="1160">
                 <a:solidFill>
-                  <a:srgbClr val="3C3937"/>
+                  <a:srgbClr val="0E1620"/>
                 </a:solidFill>
                 <a:latin typeface="Arial"/>
               </a:rPr>
@@ -12534,7 +12534,7 @@
             <a:r>
               <a:rPr sz="880" b="0" i="0">
                 <a:solidFill>
-                  <a:srgbClr val="6F8990"/>
+                  <a:srgbClr val="556A83"/>
                 </a:solidFill>
                 <a:latin typeface="Arial"/>
               </a:rPr>
@@ -12576,7 +12576,7 @@
             <a:r>
               <a:rPr sz="880" b="1" i="0">
                 <a:solidFill>
-                  <a:srgbClr val="6F8990"/>
+                  <a:srgbClr val="556A83"/>
                 </a:solidFill>
                 <a:latin typeface="Arial"/>
               </a:rPr>
@@ -12660,7 +12660,7 @@
               </a:spcAft>
             </a:pPr>
             <a:r>
-              <a:rPr sz="2400" b="0" i="0">
+              <a:rPr sz="2400" b="0" i="0" spc="-90">
                 <a:solidFill>
                   <a:srgbClr val="314359"/>
                 </a:solidFill>
@@ -12704,7 +12704,7 @@
             <a:r>
               <a:rPr sz="1040" b="0" i="1">
                 <a:solidFill>
-                  <a:srgbClr val="64615E"/>
+                  <a:srgbClr val="556A83"/>
                 </a:solidFill>
                 <a:latin typeface="Arial"/>
               </a:rPr>
@@ -12746,7 +12746,7 @@
             <a:r>
               <a:rPr sz="680" b="0" i="0">
                 <a:solidFill>
-                  <a:srgbClr val="9A958E"/>
+                  <a:srgbClr val="556A83"/>
                 </a:solidFill>
                 <a:latin typeface="Arial"/>
               </a:rPr>
@@ -12788,7 +12788,7 @@
             <a:r>
               <a:rPr sz="1080" b="1">
                 <a:solidFill>
-                  <a:srgbClr val="556A83"/>
+                  <a:srgbClr val="314359"/>
                 </a:solidFill>
                 <a:latin typeface="Arial"/>
               </a:rPr>
@@ -12806,7 +12806,7 @@
             <a:r>
               <a:rPr sz="1080">
                 <a:solidFill>
-                  <a:srgbClr val="3C3937"/>
+                  <a:srgbClr val="0E1620"/>
                 </a:solidFill>
                 <a:latin typeface="Arial"/>
               </a:rPr>
@@ -12825,7 +12825,7 @@
             <a:r>
               <a:rPr sz="1080" b="1">
                 <a:solidFill>
-                  <a:srgbClr val="556A83"/>
+                  <a:srgbClr val="314359"/>
                 </a:solidFill>
                 <a:latin typeface="Arial"/>
               </a:rPr>
@@ -12843,7 +12843,7 @@
             <a:r>
               <a:rPr sz="1080">
                 <a:solidFill>
-                  <a:srgbClr val="3C3937"/>
+                  <a:srgbClr val="0E1620"/>
                 </a:solidFill>
                 <a:latin typeface="Arial"/>
               </a:rPr>
@@ -12862,7 +12862,7 @@
             <a:r>
               <a:rPr sz="1080" b="1">
                 <a:solidFill>
-                  <a:srgbClr val="556A83"/>
+                  <a:srgbClr val="314359"/>
                 </a:solidFill>
                 <a:latin typeface="Arial"/>
               </a:rPr>
@@ -12880,7 +12880,7 @@
             <a:r>
               <a:rPr sz="1080">
                 <a:solidFill>
-                  <a:srgbClr val="3C3937"/>
+                  <a:srgbClr val="0E1620"/>
                 </a:solidFill>
                 <a:latin typeface="Arial"/>
               </a:rPr>
@@ -12940,7 +12940,7 @@
             <a:r>
               <a:rPr sz="800" b="0" i="1">
                 <a:solidFill>
-                  <a:srgbClr val="9A958E"/>
+                  <a:srgbClr val="556A83"/>
                 </a:solidFill>
                 <a:latin typeface="Arial"/>
               </a:rPr>
@@ -13068,7 +13068,7 @@
             <a:r>
               <a:rPr sz="880" b="0" i="0">
                 <a:solidFill>
-                  <a:srgbClr val="6F8990"/>
+                  <a:srgbClr val="556A83"/>
                 </a:solidFill>
                 <a:latin typeface="Arial"/>
               </a:rPr>
@@ -13110,7 +13110,7 @@
             <a:r>
               <a:rPr sz="880" b="1" i="0">
                 <a:solidFill>
-                  <a:srgbClr val="6F8990"/>
+                  <a:srgbClr val="556A83"/>
                 </a:solidFill>
                 <a:latin typeface="Arial"/>
               </a:rPr>
@@ -13194,7 +13194,7 @@
               </a:spcAft>
             </a:pPr>
             <a:r>
-              <a:rPr sz="2400" b="0" i="0">
+              <a:rPr sz="2400" b="0" i="0" spc="-90">
                 <a:solidFill>
                   <a:srgbClr val="314359"/>
                 </a:solidFill>
@@ -13238,7 +13238,7 @@
             <a:r>
               <a:rPr sz="1040" b="0" i="1">
                 <a:solidFill>
-                  <a:srgbClr val="64615E"/>
+                  <a:srgbClr val="556A83"/>
                 </a:solidFill>
                 <a:latin typeface="Arial"/>
               </a:rPr>
@@ -13280,7 +13280,7 @@
             <a:r>
               <a:rPr sz="680" b="0" i="0">
                 <a:solidFill>
-                  <a:srgbClr val="9A958E"/>
+                  <a:srgbClr val="556A83"/>
                 </a:solidFill>
                 <a:latin typeface="Arial"/>
               </a:rPr>
@@ -13304,7 +13304,7 @@
             <a:avLst/>
           </a:prstGeom>
           <a:solidFill>
-            <a:srgbClr val="556A83"/>
+            <a:srgbClr val="314359"/>
           </a:solidFill>
           <a:ln>
             <a:noFill/>
@@ -13390,7 +13390,7 @@
             <a:avLst/>
           </a:prstGeom>
           <a:solidFill>
-            <a:srgbClr val="556A83"/>
+            <a:srgbClr val="314359"/>
           </a:solidFill>
           <a:ln>
             <a:noFill/>
@@ -13538,7 +13538,7 @@
             <a:r>
               <a:rPr sz="960" b="0" i="0">
                 <a:solidFill>
-                  <a:srgbClr val="64615E"/>
+                  <a:srgbClr val="556A83"/>
                 </a:solidFill>
                 <a:latin typeface="Arial"/>
               </a:rPr>
@@ -13710,7 +13710,7 @@
             <a:r>
               <a:rPr sz="960" b="0" i="0">
                 <a:solidFill>
-                  <a:srgbClr val="64615E"/>
+                  <a:srgbClr val="556A83"/>
                 </a:solidFill>
                 <a:latin typeface="Arial"/>
               </a:rPr>
@@ -13882,7 +13882,7 @@
             <a:r>
               <a:rPr sz="960" b="0" i="0">
                 <a:solidFill>
-                  <a:srgbClr val="64615E"/>
+                  <a:srgbClr val="556A83"/>
                 </a:solidFill>
                 <a:latin typeface="Arial"/>
               </a:rPr>
@@ -14054,7 +14054,7 @@
             <a:r>
               <a:rPr sz="960" b="0" i="0">
                 <a:solidFill>
-                  <a:srgbClr val="64615E"/>
+                  <a:srgbClr val="556A83"/>
                 </a:solidFill>
                 <a:latin typeface="Arial"/>
               </a:rPr>
@@ -14226,7 +14226,7 @@
             <a:r>
               <a:rPr sz="960" b="0" i="0">
                 <a:solidFill>
-                  <a:srgbClr val="64615E"/>
+                  <a:srgbClr val="556A83"/>
                 </a:solidFill>
                 <a:latin typeface="Arial"/>
               </a:rPr>
@@ -14398,7 +14398,7 @@
             <a:r>
               <a:rPr sz="960" b="0" i="0">
                 <a:solidFill>
-                  <a:srgbClr val="64615E"/>
+                  <a:srgbClr val="556A83"/>
                 </a:solidFill>
                 <a:latin typeface="Arial"/>
               </a:rPr>
@@ -14526,7 +14526,7 @@
             <a:r>
               <a:rPr sz="1040" b="0" i="1">
                 <a:solidFill>
-                  <a:srgbClr val="556A83"/>
+                  <a:srgbClr val="314359"/>
                 </a:solidFill>
                 <a:latin typeface="Arial"/>
               </a:rPr>
@@ -14654,7 +14654,7 @@
             <a:r>
               <a:rPr sz="880" b="0" i="0">
                 <a:solidFill>
-                  <a:srgbClr val="6F8990"/>
+                  <a:srgbClr val="556A83"/>
                 </a:solidFill>
                 <a:latin typeface="Arial"/>
               </a:rPr>
@@ -14738,7 +14738,7 @@
               </a:spcAft>
             </a:pPr>
             <a:r>
-              <a:rPr sz="2400" b="0" i="0">
+              <a:rPr sz="2400" b="0" i="0" spc="-90">
                 <a:solidFill>
                   <a:srgbClr val="314359"/>
                 </a:solidFill>
@@ -14782,7 +14782,7 @@
             <a:r>
               <a:rPr sz="680" b="0" i="0">
                 <a:solidFill>
-                  <a:srgbClr val="9A958E"/>
+                  <a:srgbClr val="556A83"/>
                 </a:solidFill>
                 <a:latin typeface="Arial"/>
               </a:rPr>
@@ -14824,7 +14824,7 @@
             <a:r>
               <a:rPr sz="1120" b="1" i="0">
                 <a:solidFill>
-                  <a:srgbClr val="556A83"/>
+                  <a:srgbClr val="314359"/>
                 </a:solidFill>
                 <a:latin typeface="Times New Roman"/>
               </a:rPr>
@@ -14866,7 +14866,7 @@
             <a:r>
               <a:rPr sz="919" b="1">
                 <a:solidFill>
-                  <a:srgbClr val="556A83"/>
+                  <a:srgbClr val="314359"/>
                 </a:solidFill>
                 <a:latin typeface="Arial"/>
               </a:rPr>
@@ -14894,7 +14894,7 @@
             <a:r>
               <a:rPr sz="919" b="1">
                 <a:solidFill>
-                  <a:srgbClr val="556A83"/>
+                  <a:srgbClr val="314359"/>
                 </a:solidFill>
                 <a:latin typeface="Arial"/>
               </a:rPr>
@@ -14922,7 +14922,7 @@
             <a:r>
               <a:rPr sz="919" b="1">
                 <a:solidFill>
-                  <a:srgbClr val="556A83"/>
+                  <a:srgbClr val="314359"/>
                 </a:solidFill>
                 <a:latin typeface="Arial"/>
               </a:rPr>
@@ -14950,7 +14950,7 @@
             <a:r>
               <a:rPr sz="919" b="1">
                 <a:solidFill>
-                  <a:srgbClr val="556A83"/>
+                  <a:srgbClr val="314359"/>
                 </a:solidFill>
                 <a:latin typeface="Arial"/>
               </a:rPr>
@@ -14978,7 +14978,7 @@
             <a:r>
               <a:rPr sz="919" b="1">
                 <a:solidFill>
-                  <a:srgbClr val="556A83"/>
+                  <a:srgbClr val="314359"/>
                 </a:solidFill>
                 <a:latin typeface="Arial"/>
               </a:rPr>
@@ -15029,7 +15029,7 @@
             <a:r>
               <a:rPr sz="1120" b="1" i="0">
                 <a:solidFill>
-                  <a:srgbClr val="556A83"/>
+                  <a:srgbClr val="314359"/>
                 </a:solidFill>
                 <a:latin typeface="Times New Roman"/>
               </a:rPr>
@@ -15071,11 +15071,104 @@
             <a:r>
               <a:rPr sz="919" b="1">
                 <a:solidFill>
+                  <a:srgbClr val="314359"/>
+                </a:solidFill>
+                <a:latin typeface="Arial"/>
+              </a:rPr>
+              <a:t>2.1   </a:t>
+            </a:r>
+            <a:r>
+              <a:rPr sz="919">
+                <a:solidFill>
+                  <a:srgbClr val="314359"/>
+                </a:solidFill>
+                <a:latin typeface="Arial"/>
+              </a:rPr>
+              <a:t>Athanase at a glance</a:t>
+            </a:r>
+          </a:p>
+          <a:p>
+            <a:pPr>
+              <a:lnSpc>
+                <a:spcPct val="104000"/>
+              </a:lnSpc>
+              <a:spcAft>
+                <a:spcPts val="700"/>
+              </a:spcAft>
+            </a:pPr>
+            <a:r>
+              <a:rPr sz="919" b="1">
+                <a:solidFill>
+                  <a:srgbClr val="314359"/>
+                </a:solidFill>
+                <a:latin typeface="Arial"/>
+              </a:rPr>
+              <a:t>2.2   </a:t>
+            </a:r>
+            <a:r>
+              <a:rPr sz="919">
+                <a:solidFill>
+                  <a:srgbClr val="314359"/>
+                </a:solidFill>
+                <a:latin typeface="Arial"/>
+              </a:rPr>
+              <a:t>An integrated team, 20 years together</a:t>
+            </a:r>
+          </a:p>
+          <a:p>
+            <a:pPr>
+              <a:lnSpc>
+                <a:spcPct val="104000"/>
+              </a:lnSpc>
+              <a:spcAft>
+                <a:spcPts val="700"/>
+              </a:spcAft>
+            </a:pPr>
+            <a:r>
+              <a:rPr sz="919" b="1">
+                <a:solidFill>
+                  <a:srgbClr val="314359"/>
+                </a:solidFill>
+                <a:latin typeface="Arial"/>
+              </a:rPr>
+              <a:t>2.3   </a:t>
+            </a:r>
+            <a:r>
+              <a:rPr sz="919">
+                <a:solidFill>
+                  <a:srgbClr val="314359"/>
+                </a:solidFill>
+                <a:latin typeface="Arial"/>
+              </a:rPr>
+              <a:t>The inefficiency Athanase harvests</a:t>
+            </a:r>
+            <a:r>
+              <a:rPr sz="760" i="1">
+                <a:solidFill>
                   <a:srgbClr val="556A83"/>
                 </a:solidFill>
                 <a:latin typeface="Arial"/>
               </a:rPr>
-              <a:t>2.1   </a:t>
+              <a:t>   (Figure 1)</a:t>
+            </a:r>
+          </a:p>
+          <a:p>
+            <a:pPr>
+              <a:lnSpc>
+                <a:spcPct val="104000"/>
+              </a:lnSpc>
+              <a:spcAft>
+                <a:spcPts val="700"/>
+              </a:spcAft>
+            </a:pPr>
+            <a:r>
+              <a:rPr sz="919" b="1">
+                <a:solidFill>
+                  <a:srgbClr val="314359"/>
+                </a:solidFill>
+                <a:latin typeface="Arial"/>
+              </a:rPr>
+              <a:t>2.4   </a:t>
             </a:r>
             <a:r>
               <a:rPr sz="919">
@@ -15084,7 +15177,16 @@
                 </a:solidFill>
                 <a:latin typeface="Arial"/>
               </a:rPr>
-              <a:t>Athanase at a glance</a:t>
+              <a:t>We don’t buy broken companies — we buy hidden cores</a:t>
+            </a:r>
+            <a:r>
+              <a:rPr sz="760" i="1">
+                <a:solidFill>
+                  <a:srgbClr val="556A83"/>
+                </a:solidFill>
+                <a:latin typeface="Arial"/>
+              </a:rPr>
+              <a:t>   (Figure 2)</a:t>
             </a:r>
           </a:p>
           <a:p>
@@ -15099,11 +15201,48 @@
             <a:r>
               <a:rPr sz="919" b="1">
                 <a:solidFill>
+                  <a:srgbClr val="314359"/>
+                </a:solidFill>
+                <a:latin typeface="Arial"/>
+              </a:rPr>
+              <a:t>2.5   </a:t>
+            </a:r>
+            <a:r>
+              <a:rPr sz="919">
+                <a:solidFill>
+                  <a:srgbClr val="314359"/>
+                </a:solidFill>
+                <a:latin typeface="Arial"/>
+              </a:rPr>
+              <a:t>Quality-core constructivism — how we differ</a:t>
+            </a:r>
+            <a:r>
+              <a:rPr sz="760" i="1">
+                <a:solidFill>
                   <a:srgbClr val="556A83"/>
                 </a:solidFill>
                 <a:latin typeface="Arial"/>
               </a:rPr>
-              <a:t>2.2   </a:t>
+              <a:t>   (Table 1)</a:t>
+            </a:r>
+          </a:p>
+          <a:p>
+            <a:pPr>
+              <a:lnSpc>
+                <a:spcPct val="104000"/>
+              </a:lnSpc>
+              <a:spcAft>
+                <a:spcPts val="700"/>
+              </a:spcAft>
+            </a:pPr>
+            <a:r>
+              <a:rPr sz="919" b="1">
+                <a:solidFill>
+                  <a:srgbClr val="314359"/>
+                </a:solidFill>
+                <a:latin typeface="Arial"/>
+              </a:rPr>
+              <a:t>2.6   </a:t>
             </a:r>
             <a:r>
               <a:rPr sz="919">
@@ -15112,7 +15251,16 @@
                 </a:solidFill>
                 <a:latin typeface="Arial"/>
               </a:rPr>
-              <a:t>An integrated team, 20 years together</a:t>
+              <a:t>We don’t need to be right more than ~50%</a:t>
+            </a:r>
+            <a:r>
+              <a:rPr sz="760" i="1">
+                <a:solidFill>
+                  <a:srgbClr val="556A83"/>
+                </a:solidFill>
+                <a:latin typeface="Arial"/>
+              </a:rPr>
+              <a:t>   (Table 2)</a:t>
             </a:r>
           </a:p>
           <a:p>
@@ -15127,11 +15275,104 @@
             <a:r>
               <a:rPr sz="919" b="1">
                 <a:solidFill>
+                  <a:srgbClr val="314359"/>
+                </a:solidFill>
+                <a:latin typeface="Arial"/>
+              </a:rPr>
+              <a:t>2.7   </a:t>
+            </a:r>
+            <a:r>
+              <a:rPr sz="919">
+                <a:solidFill>
+                  <a:srgbClr val="314359"/>
+                </a:solidFill>
+                <a:latin typeface="Arial"/>
+              </a:rPr>
+              <a:t>A risk system built to avoid permanent loss</a:t>
+            </a:r>
+          </a:p>
+          <a:p>
+            <a:pPr>
+              <a:lnSpc>
+                <a:spcPct val="104000"/>
+              </a:lnSpc>
+              <a:spcAft>
+                <a:spcPts val="700"/>
+              </a:spcAft>
+            </a:pPr>
+            <a:r>
+              <a:rPr sz="919" b="1">
+                <a:solidFill>
+                  <a:srgbClr val="314359"/>
+                </a:solidFill>
+                <a:latin typeface="Arial"/>
+              </a:rPr>
+              <a:t>2.8   </a:t>
+            </a:r>
+            <a:r>
+              <a:rPr sz="919">
+                <a:solidFill>
+                  <a:srgbClr val="314359"/>
+                </a:solidFill>
+                <a:latin typeface="Arial"/>
+              </a:rPr>
+              <a:t>The visible risks are the engine — not the cost</a:t>
+            </a:r>
+          </a:p>
+          <a:p>
+            <a:pPr>
+              <a:lnSpc>
+                <a:spcPct val="104000"/>
+              </a:lnSpc>
+              <a:spcAft>
+                <a:spcPts val="700"/>
+              </a:spcAft>
+            </a:pPr>
+            <a:r>
+              <a:rPr sz="919" b="1">
+                <a:solidFill>
+                  <a:srgbClr val="314359"/>
+                </a:solidFill>
+                <a:latin typeface="Arial"/>
+              </a:rPr>
+              <a:t>2.9   </a:t>
+            </a:r>
+            <a:r>
+              <a:rPr sz="919">
+                <a:solidFill>
+                  <a:srgbClr val="314359"/>
+                </a:solidFill>
+                <a:latin typeface="Arial"/>
+              </a:rPr>
+              <a:t>A non-linear path — honestly priced</a:t>
+            </a:r>
+            <a:r>
+              <a:rPr sz="760" i="1">
+                <a:solidFill>
                   <a:srgbClr val="556A83"/>
                 </a:solidFill>
                 <a:latin typeface="Arial"/>
               </a:rPr>
-              <a:t>2.3   </a:t>
+              <a:t>   (Figure 3)</a:t>
+            </a:r>
+          </a:p>
+          <a:p>
+            <a:pPr>
+              <a:lnSpc>
+                <a:spcPct val="104000"/>
+              </a:lnSpc>
+              <a:spcAft>
+                <a:spcPts val="700"/>
+              </a:spcAft>
+            </a:pPr>
+            <a:r>
+              <a:rPr sz="919" b="1">
+                <a:solidFill>
+                  <a:srgbClr val="314359"/>
+                </a:solidFill>
+                <a:latin typeface="Arial"/>
+              </a:rPr>
+              <a:t>2.10   </a:t>
             </a:r>
             <a:r>
               <a:rPr sz="919">
@@ -15140,16 +15381,16 @@
                 </a:solidFill>
                 <a:latin typeface="Arial"/>
               </a:rPr>
-              <a:t>The inefficiency Athanase harvests</a:t>
+              <a:t>Risk reframing for the investment committee</a:t>
             </a:r>
             <a:r>
               <a:rPr sz="760" i="1">
                 <a:solidFill>
-                  <a:srgbClr val="64615E"/>
-                </a:solidFill>
-                <a:latin typeface="Arial"/>
-              </a:rPr>
-              <a:t>   (Figure 1)</a:t>
+                  <a:srgbClr val="556A83"/>
+                </a:solidFill>
+                <a:latin typeface="Arial"/>
+              </a:rPr>
+              <a:t>   (Table 3)</a:t>
             </a:r>
           </a:p>
           <a:p>
@@ -15164,11 +15405,48 @@
             <a:r>
               <a:rPr sz="919" b="1">
                 <a:solidFill>
+                  <a:srgbClr val="314359"/>
+                </a:solidFill>
+                <a:latin typeface="Arial"/>
+              </a:rPr>
+              <a:t>2.11   </a:t>
+            </a:r>
+            <a:r>
+              <a:rPr sz="919">
+                <a:solidFill>
+                  <a:srgbClr val="314359"/>
+                </a:solidFill>
+                <a:latin typeface="Arial"/>
+              </a:rPr>
+              <a:t>Proof: outperformance with downside protection</a:t>
+            </a:r>
+            <a:r>
+              <a:rPr sz="760" i="1">
+                <a:solidFill>
                   <a:srgbClr val="556A83"/>
                 </a:solidFill>
                 <a:latin typeface="Arial"/>
               </a:rPr>
-              <a:t>2.4   </a:t>
+              <a:t>   (Figure 4)</a:t>
+            </a:r>
+          </a:p>
+          <a:p>
+            <a:pPr>
+              <a:lnSpc>
+                <a:spcPct val="104000"/>
+              </a:lnSpc>
+              <a:spcAft>
+                <a:spcPts val="700"/>
+              </a:spcAft>
+            </a:pPr>
+            <a:r>
+              <a:rPr sz="919" b="1">
+                <a:solidFill>
+                  <a:srgbClr val="314359"/>
+                </a:solidFill>
+                <a:latin typeface="Arial"/>
+              </a:rPr>
+              <a:t>2.12   </a:t>
             </a:r>
             <a:r>
               <a:rPr sz="919">
@@ -15177,16 +15455,16 @@
                 </a:solidFill>
                 <a:latin typeface="Arial"/>
               </a:rPr>
-              <a:t>We don’t buy broken companies — we buy hidden cores</a:t>
+              <a:t>AIP Fund II — transactions (2015–present)</a:t>
             </a:r>
             <a:r>
               <a:rPr sz="760" i="1">
                 <a:solidFill>
-                  <a:srgbClr val="64615E"/>
-                </a:solidFill>
-                <a:latin typeface="Arial"/>
-              </a:rPr>
-              <a:t>   (Figure 2)</a:t>
+                  <a:srgbClr val="556A83"/>
+                </a:solidFill>
+                <a:latin typeface="Arial"/>
+              </a:rPr>
+              <a:t>   (Table 4)</a:t>
             </a:r>
           </a:p>
           <a:p>
@@ -15201,11 +15479,48 @@
             <a:r>
               <a:rPr sz="919" b="1">
                 <a:solidFill>
+                  <a:srgbClr val="314359"/>
+                </a:solidFill>
+                <a:latin typeface="Arial"/>
+              </a:rPr>
+              <a:t>2.13   </a:t>
+            </a:r>
+            <a:r>
+              <a:rPr sz="919">
+                <a:solidFill>
+                  <a:srgbClr val="314359"/>
+                </a:solidFill>
+                <a:latin typeface="Arial"/>
+              </a:rPr>
+              <a:t>Prior period — transactions (2006–2014)</a:t>
+            </a:r>
+            <a:r>
+              <a:rPr sz="760" i="1">
+                <a:solidFill>
                   <a:srgbClr val="556A83"/>
                 </a:solidFill>
                 <a:latin typeface="Arial"/>
               </a:rPr>
-              <a:t>2.5   </a:t>
+              <a:t>   (Table 5)</a:t>
+            </a:r>
+          </a:p>
+          <a:p>
+            <a:pPr>
+              <a:lnSpc>
+                <a:spcPct val="104000"/>
+              </a:lnSpc>
+              <a:spcAft>
+                <a:spcPts val="700"/>
+              </a:spcAft>
+            </a:pPr>
+            <a:r>
+              <a:rPr sz="919" b="1">
+                <a:solidFill>
+                  <a:srgbClr val="314359"/>
+                </a:solidFill>
+                <a:latin typeface="Arial"/>
+              </a:rPr>
+              <a:t>2.14   </a:t>
             </a:r>
             <a:r>
               <a:rPr sz="919">
@@ -15214,16 +15529,7 @@
                 </a:solidFill>
                 <a:latin typeface="Arial"/>
               </a:rPr>
-              <a:t>Quality-core constructivism — how we differ</a:t>
-            </a:r>
-            <a:r>
-              <a:rPr sz="760" i="1">
-                <a:solidFill>
-                  <a:srgbClr val="64615E"/>
-                </a:solidFill>
-                <a:latin typeface="Arial"/>
-              </a:rPr>
-              <a:t>   (Table 1)</a:t>
+              <a:t>Independently validated: 20 years, net of every fee</a:t>
             </a:r>
           </a:p>
           <a:p>
@@ -15238,11 +15544,11 @@
             <a:r>
               <a:rPr sz="919" b="1">
                 <a:solidFill>
-                  <a:srgbClr val="556A83"/>
-                </a:solidFill>
-                <a:latin typeface="Arial"/>
-              </a:rPr>
-              <a:t>2.6   </a:t>
+                  <a:srgbClr val="314359"/>
+                </a:solidFill>
+                <a:latin typeface="Arial"/>
+              </a:rPr>
+              <a:t>2.15   </a:t>
             </a:r>
             <a:r>
               <a:rPr sz="919">
@@ -15251,16 +15557,7 @@
                 </a:solidFill>
                 <a:latin typeface="Arial"/>
               </a:rPr>
-              <a:t>We don’t need to be right more than ~50%</a:t>
-            </a:r>
-            <a:r>
-              <a:rPr sz="760" i="1">
-                <a:solidFill>
-                  <a:srgbClr val="64615E"/>
-                </a:solidFill>
-                <a:latin typeface="Arial"/>
-              </a:rPr>
-              <a:t>   (Table 2)</a:t>
+              <a:t>Repeatable and conviction-sized — not lucky</a:t>
             </a:r>
           </a:p>
           <a:p>
@@ -15275,11 +15572,11 @@
             <a:r>
               <a:rPr sz="919" b="1">
                 <a:solidFill>
-                  <a:srgbClr val="556A83"/>
-                </a:solidFill>
-                <a:latin typeface="Arial"/>
-              </a:rPr>
-              <a:t>2.7   </a:t>
+                  <a:srgbClr val="314359"/>
+                </a:solidFill>
+                <a:latin typeface="Arial"/>
+              </a:rPr>
+              <a:t>2.16   </a:t>
             </a:r>
             <a:r>
               <a:rPr sz="919">
@@ -15288,7 +15585,7 @@
                 </a:solidFill>
                 <a:latin typeface="Arial"/>
               </a:rPr>
-              <a:t>A risk system built to avoid permanent loss</a:t>
+              <a:t>Why a non-linear path won’t get you fired</a:t>
             </a:r>
           </a:p>
           <a:p>
@@ -15303,304 +15600,7 @@
             <a:r>
               <a:rPr sz="919" b="1">
                 <a:solidFill>
-                  <a:srgbClr val="556A83"/>
-                </a:solidFill>
-                <a:latin typeface="Arial"/>
-              </a:rPr>
-              <a:t>2.8   </a:t>
-            </a:r>
-            <a:r>
-              <a:rPr sz="919">
-                <a:solidFill>
                   <a:srgbClr val="314359"/>
-                </a:solidFill>
-                <a:latin typeface="Arial"/>
-              </a:rPr>
-              <a:t>The visible risks are the engine — not the cost</a:t>
-            </a:r>
-          </a:p>
-          <a:p>
-            <a:pPr>
-              <a:lnSpc>
-                <a:spcPct val="104000"/>
-              </a:lnSpc>
-              <a:spcAft>
-                <a:spcPts val="700"/>
-              </a:spcAft>
-            </a:pPr>
-            <a:r>
-              <a:rPr sz="919" b="1">
-                <a:solidFill>
-                  <a:srgbClr val="556A83"/>
-                </a:solidFill>
-                <a:latin typeface="Arial"/>
-              </a:rPr>
-              <a:t>2.9   </a:t>
-            </a:r>
-            <a:r>
-              <a:rPr sz="919">
-                <a:solidFill>
-                  <a:srgbClr val="314359"/>
-                </a:solidFill>
-                <a:latin typeface="Arial"/>
-              </a:rPr>
-              <a:t>A non-linear path — honestly priced</a:t>
-            </a:r>
-            <a:r>
-              <a:rPr sz="760" i="1">
-                <a:solidFill>
-                  <a:srgbClr val="64615E"/>
-                </a:solidFill>
-                <a:latin typeface="Arial"/>
-              </a:rPr>
-              <a:t>   (Figure 3)</a:t>
-            </a:r>
-          </a:p>
-          <a:p>
-            <a:pPr>
-              <a:lnSpc>
-                <a:spcPct val="104000"/>
-              </a:lnSpc>
-              <a:spcAft>
-                <a:spcPts val="700"/>
-              </a:spcAft>
-            </a:pPr>
-            <a:r>
-              <a:rPr sz="919" b="1">
-                <a:solidFill>
-                  <a:srgbClr val="556A83"/>
-                </a:solidFill>
-                <a:latin typeface="Arial"/>
-              </a:rPr>
-              <a:t>2.10   </a:t>
-            </a:r>
-            <a:r>
-              <a:rPr sz="919">
-                <a:solidFill>
-                  <a:srgbClr val="314359"/>
-                </a:solidFill>
-                <a:latin typeface="Arial"/>
-              </a:rPr>
-              <a:t>Risk reframing for the investment committee</a:t>
-            </a:r>
-            <a:r>
-              <a:rPr sz="760" i="1">
-                <a:solidFill>
-                  <a:srgbClr val="64615E"/>
-                </a:solidFill>
-                <a:latin typeface="Arial"/>
-              </a:rPr>
-              <a:t>   (Table 3)</a:t>
-            </a:r>
-          </a:p>
-          <a:p>
-            <a:pPr>
-              <a:lnSpc>
-                <a:spcPct val="104000"/>
-              </a:lnSpc>
-              <a:spcAft>
-                <a:spcPts val="700"/>
-              </a:spcAft>
-            </a:pPr>
-            <a:r>
-              <a:rPr sz="919" b="1">
-                <a:solidFill>
-                  <a:srgbClr val="556A83"/>
-                </a:solidFill>
-                <a:latin typeface="Arial"/>
-              </a:rPr>
-              <a:t>2.11   </a:t>
-            </a:r>
-            <a:r>
-              <a:rPr sz="919">
-                <a:solidFill>
-                  <a:srgbClr val="314359"/>
-                </a:solidFill>
-                <a:latin typeface="Arial"/>
-              </a:rPr>
-              <a:t>Proof: outperformance with downside protection</a:t>
-            </a:r>
-            <a:r>
-              <a:rPr sz="760" i="1">
-                <a:solidFill>
-                  <a:srgbClr val="64615E"/>
-                </a:solidFill>
-                <a:latin typeface="Arial"/>
-              </a:rPr>
-              <a:t>   (Figure 4)</a:t>
-            </a:r>
-          </a:p>
-          <a:p>
-            <a:pPr>
-              <a:lnSpc>
-                <a:spcPct val="104000"/>
-              </a:lnSpc>
-              <a:spcAft>
-                <a:spcPts val="700"/>
-              </a:spcAft>
-            </a:pPr>
-            <a:r>
-              <a:rPr sz="919" b="1">
-                <a:solidFill>
-                  <a:srgbClr val="556A83"/>
-                </a:solidFill>
-                <a:latin typeface="Arial"/>
-              </a:rPr>
-              <a:t>2.12   </a:t>
-            </a:r>
-            <a:r>
-              <a:rPr sz="919">
-                <a:solidFill>
-                  <a:srgbClr val="314359"/>
-                </a:solidFill>
-                <a:latin typeface="Arial"/>
-              </a:rPr>
-              <a:t>AIP Fund II — transactions (2015–present)</a:t>
-            </a:r>
-            <a:r>
-              <a:rPr sz="760" i="1">
-                <a:solidFill>
-                  <a:srgbClr val="64615E"/>
-                </a:solidFill>
-                <a:latin typeface="Arial"/>
-              </a:rPr>
-              <a:t>   (Table 4)</a:t>
-            </a:r>
-          </a:p>
-          <a:p>
-            <a:pPr>
-              <a:lnSpc>
-                <a:spcPct val="104000"/>
-              </a:lnSpc>
-              <a:spcAft>
-                <a:spcPts val="700"/>
-              </a:spcAft>
-            </a:pPr>
-            <a:r>
-              <a:rPr sz="919" b="1">
-                <a:solidFill>
-                  <a:srgbClr val="556A83"/>
-                </a:solidFill>
-                <a:latin typeface="Arial"/>
-              </a:rPr>
-              <a:t>2.13   </a:t>
-            </a:r>
-            <a:r>
-              <a:rPr sz="919">
-                <a:solidFill>
-                  <a:srgbClr val="314359"/>
-                </a:solidFill>
-                <a:latin typeface="Arial"/>
-              </a:rPr>
-              <a:t>Prior period — transactions (2006–2014)</a:t>
-            </a:r>
-            <a:r>
-              <a:rPr sz="760" i="1">
-                <a:solidFill>
-                  <a:srgbClr val="64615E"/>
-                </a:solidFill>
-                <a:latin typeface="Arial"/>
-              </a:rPr>
-              <a:t>   (Table 5)</a:t>
-            </a:r>
-          </a:p>
-          <a:p>
-            <a:pPr>
-              <a:lnSpc>
-                <a:spcPct val="104000"/>
-              </a:lnSpc>
-              <a:spcAft>
-                <a:spcPts val="700"/>
-              </a:spcAft>
-            </a:pPr>
-            <a:r>
-              <a:rPr sz="919" b="1">
-                <a:solidFill>
-                  <a:srgbClr val="556A83"/>
-                </a:solidFill>
-                <a:latin typeface="Arial"/>
-              </a:rPr>
-              <a:t>2.14   </a:t>
-            </a:r>
-            <a:r>
-              <a:rPr sz="919">
-                <a:solidFill>
-                  <a:srgbClr val="314359"/>
-                </a:solidFill>
-                <a:latin typeface="Arial"/>
-              </a:rPr>
-              <a:t>Independently validated: 20 years, net of every fee</a:t>
-            </a:r>
-          </a:p>
-          <a:p>
-            <a:pPr>
-              <a:lnSpc>
-                <a:spcPct val="104000"/>
-              </a:lnSpc>
-              <a:spcAft>
-                <a:spcPts val="700"/>
-              </a:spcAft>
-            </a:pPr>
-            <a:r>
-              <a:rPr sz="919" b="1">
-                <a:solidFill>
-                  <a:srgbClr val="556A83"/>
-                </a:solidFill>
-                <a:latin typeface="Arial"/>
-              </a:rPr>
-              <a:t>2.15   </a:t>
-            </a:r>
-            <a:r>
-              <a:rPr sz="919">
-                <a:solidFill>
-                  <a:srgbClr val="314359"/>
-                </a:solidFill>
-                <a:latin typeface="Arial"/>
-              </a:rPr>
-              <a:t>Repeatable and conviction-sized — not lucky</a:t>
-            </a:r>
-          </a:p>
-          <a:p>
-            <a:pPr>
-              <a:lnSpc>
-                <a:spcPct val="104000"/>
-              </a:lnSpc>
-              <a:spcAft>
-                <a:spcPts val="700"/>
-              </a:spcAft>
-            </a:pPr>
-            <a:r>
-              <a:rPr sz="919" b="1">
-                <a:solidFill>
-                  <a:srgbClr val="556A83"/>
-                </a:solidFill>
-                <a:latin typeface="Arial"/>
-              </a:rPr>
-              <a:t>2.16   </a:t>
-            </a:r>
-            <a:r>
-              <a:rPr sz="919">
-                <a:solidFill>
-                  <a:srgbClr val="314359"/>
-                </a:solidFill>
-                <a:latin typeface="Arial"/>
-              </a:rPr>
-              <a:t>Why a non-linear path won’t get you fired</a:t>
-            </a:r>
-          </a:p>
-          <a:p>
-            <a:pPr>
-              <a:lnSpc>
-                <a:spcPct val="104000"/>
-              </a:lnSpc>
-              <a:spcAft>
-                <a:spcPts val="700"/>
-              </a:spcAft>
-            </a:pPr>
-            <a:r>
-              <a:rPr sz="919" b="1">
-                <a:solidFill>
-                  <a:srgbClr val="556A83"/>
                 </a:solidFill>
                 <a:latin typeface="Arial"/>
               </a:rPr>
@@ -15737,7 +15737,7 @@
             <a:r>
               <a:rPr sz="880" b="0" i="0">
                 <a:solidFill>
-                  <a:srgbClr val="6F8990"/>
+                  <a:srgbClr val="556A83"/>
                 </a:solidFill>
                 <a:latin typeface="Arial"/>
               </a:rPr>
@@ -15779,7 +15779,7 @@
             <a:r>
               <a:rPr sz="880" b="1" i="0">
                 <a:solidFill>
-                  <a:srgbClr val="6F8990"/>
+                  <a:srgbClr val="556A83"/>
                 </a:solidFill>
                 <a:latin typeface="Arial"/>
               </a:rPr>
@@ -15863,7 +15863,7 @@
               </a:spcAft>
             </a:pPr>
             <a:r>
-              <a:rPr sz="2400" b="0" i="0">
+              <a:rPr sz="2400" b="0" i="0" spc="-90">
                 <a:solidFill>
                   <a:srgbClr val="314359"/>
                 </a:solidFill>
@@ -15907,7 +15907,7 @@
             <a:r>
               <a:rPr sz="680" b="0" i="0">
                 <a:solidFill>
-                  <a:srgbClr val="9A958E"/>
+                  <a:srgbClr val="556A83"/>
                 </a:solidFill>
                 <a:latin typeface="Arial"/>
               </a:rPr>
@@ -15986,7 +15986,7 @@
             <a:r>
               <a:rPr sz="1040" b="0" i="0">
                 <a:solidFill>
-                  <a:srgbClr val="3C3937"/>
+                  <a:srgbClr val="0E1620"/>
                 </a:solidFill>
                 <a:latin typeface="Arial"/>
               </a:rPr>
@@ -16024,7 +16024,7 @@
             <a:r>
               <a:rPr sz="1040" b="0" i="0">
                 <a:solidFill>
-                  <a:srgbClr val="3C3937"/>
+                  <a:srgbClr val="0E1620"/>
                 </a:solidFill>
                 <a:latin typeface="Arial"/>
               </a:rPr>
@@ -16062,7 +16062,7 @@
             <a:r>
               <a:rPr sz="1040" b="0" i="0">
                 <a:solidFill>
-                  <a:srgbClr val="3C3937"/>
+                  <a:srgbClr val="0E1620"/>
                 </a:solidFill>
                 <a:latin typeface="Arial"/>
               </a:rPr>
@@ -16190,7 +16190,7 @@
             <a:r>
               <a:rPr sz="880" b="0" i="0">
                 <a:solidFill>
-                  <a:srgbClr val="6F8990"/>
+                  <a:srgbClr val="556A83"/>
                 </a:solidFill>
                 <a:latin typeface="Arial"/>
               </a:rPr>
@@ -16232,7 +16232,7 @@
             <a:r>
               <a:rPr sz="880" b="1" i="0">
                 <a:solidFill>
-                  <a:srgbClr val="6F8990"/>
+                  <a:srgbClr val="556A83"/>
                 </a:solidFill>
                 <a:latin typeface="Arial"/>
               </a:rPr>
@@ -16316,7 +16316,7 @@
               </a:spcAft>
             </a:pPr>
             <a:r>
-              <a:rPr sz="2400" b="0" i="0">
+              <a:rPr sz="2400" b="0" i="0" spc="-90">
                 <a:solidFill>
                   <a:srgbClr val="314359"/>
                 </a:solidFill>
@@ -16360,7 +16360,7 @@
             <a:r>
               <a:rPr sz="1040" b="0" i="1">
                 <a:solidFill>
-                  <a:srgbClr val="64615E"/>
+                  <a:srgbClr val="556A83"/>
                 </a:solidFill>
                 <a:latin typeface="Arial"/>
               </a:rPr>
@@ -16402,7 +16402,7 @@
             <a:r>
               <a:rPr sz="680" b="0" i="0">
                 <a:solidFill>
-                  <a:srgbClr val="9A958E"/>
+                  <a:srgbClr val="556A83"/>
                 </a:solidFill>
                 <a:latin typeface="Arial"/>
               </a:rPr>
@@ -16426,7 +16426,7 @@
             <a:avLst/>
           </a:prstGeom>
           <a:solidFill>
-            <a:srgbClr val="556A83"/>
+            <a:srgbClr val="314359"/>
           </a:solidFill>
           <a:ln>
             <a:noFill/>
@@ -16512,7 +16512,7 @@
             <a:avLst/>
           </a:prstGeom>
           <a:solidFill>
-            <a:srgbClr val="556A83"/>
+            <a:srgbClr val="314359"/>
           </a:solidFill>
           <a:ln>
             <a:noFill/>
@@ -16598,7 +16598,7 @@
             <a:avLst/>
           </a:prstGeom>
           <a:solidFill>
-            <a:srgbClr val="556A83"/>
+            <a:srgbClr val="314359"/>
           </a:solidFill>
           <a:ln>
             <a:noFill/>
@@ -16684,7 +16684,7 @@
             <a:avLst/>
           </a:prstGeom>
           <a:solidFill>
-            <a:srgbClr val="556A83"/>
+            <a:srgbClr val="314359"/>
           </a:solidFill>
           <a:ln>
             <a:noFill/>
@@ -16770,7 +16770,7 @@
             <a:avLst/>
           </a:prstGeom>
           <a:solidFill>
-            <a:srgbClr val="556A83"/>
+            <a:srgbClr val="314359"/>
           </a:solidFill>
           <a:ln>
             <a:noFill/>
@@ -17004,7 +17004,7 @@
             <a:r>
               <a:rPr sz="800" b="0" i="0">
                 <a:solidFill>
-                  <a:srgbClr val="3C3937"/>
+                  <a:srgbClr val="0E1620"/>
                 </a:solidFill>
                 <a:latin typeface="Arial"/>
               </a:rPr>
@@ -17090,7 +17090,7 @@
             <a:r>
               <a:rPr sz="800" b="0" i="0">
                 <a:solidFill>
-                  <a:srgbClr val="3C3937"/>
+                  <a:srgbClr val="0E1620"/>
                 </a:solidFill>
                 <a:latin typeface="Arial"/>
               </a:rPr>
@@ -17176,7 +17176,7 @@
             <a:r>
               <a:rPr sz="800" b="0" i="0">
                 <a:solidFill>
-                  <a:srgbClr val="3C3937"/>
+                  <a:srgbClr val="0E1620"/>
                 </a:solidFill>
                 <a:latin typeface="Arial"/>
               </a:rPr>
@@ -17262,7 +17262,7 @@
             <a:r>
               <a:rPr sz="800" b="0" i="0">
                 <a:solidFill>
-                  <a:srgbClr val="3C3937"/>
+                  <a:srgbClr val="0E1620"/>
                 </a:solidFill>
                 <a:latin typeface="Arial"/>
               </a:rPr>
@@ -17434,7 +17434,7 @@
             <a:r>
               <a:rPr sz="800" b="0" i="0">
                 <a:solidFill>
-                  <a:srgbClr val="3C3937"/>
+                  <a:srgbClr val="0E1620"/>
                 </a:solidFill>
                 <a:latin typeface="Arial"/>
               </a:rPr>
@@ -17520,7 +17520,7 @@
             <a:r>
               <a:rPr sz="800" b="0" i="0">
                 <a:solidFill>
-                  <a:srgbClr val="3C3937"/>
+                  <a:srgbClr val="0E1620"/>
                 </a:solidFill>
                 <a:latin typeface="Arial"/>
               </a:rPr>
@@ -17606,7 +17606,7 @@
             <a:r>
               <a:rPr sz="800" b="0" i="0">
                 <a:solidFill>
-                  <a:srgbClr val="3C3937"/>
+                  <a:srgbClr val="0E1620"/>
                 </a:solidFill>
                 <a:latin typeface="Arial"/>
               </a:rPr>
@@ -17692,7 +17692,7 @@
             <a:r>
               <a:rPr sz="800" b="0" i="0">
                 <a:solidFill>
-                  <a:srgbClr val="3C3937"/>
+                  <a:srgbClr val="0E1620"/>
                 </a:solidFill>
                 <a:latin typeface="Arial"/>
               </a:rPr>
@@ -17864,7 +17864,7 @@
             <a:r>
               <a:rPr sz="800" b="0" i="0">
                 <a:solidFill>
-                  <a:srgbClr val="3C3937"/>
+                  <a:srgbClr val="0E1620"/>
                 </a:solidFill>
                 <a:latin typeface="Arial"/>
               </a:rPr>
@@ -17950,7 +17950,7 @@
             <a:r>
               <a:rPr sz="800" b="0" i="0">
                 <a:solidFill>
-                  <a:srgbClr val="3C3937"/>
+                  <a:srgbClr val="0E1620"/>
                 </a:solidFill>
                 <a:latin typeface="Arial"/>
               </a:rPr>
@@ -18036,7 +18036,7 @@
             <a:r>
               <a:rPr sz="800" b="0" i="0">
                 <a:solidFill>
-                  <a:srgbClr val="3C3937"/>
+                  <a:srgbClr val="0E1620"/>
                 </a:solidFill>
                 <a:latin typeface="Arial"/>
               </a:rPr>
@@ -18122,7 +18122,7 @@
             <a:r>
               <a:rPr sz="800" b="0" i="0">
                 <a:solidFill>
-                  <a:srgbClr val="3C3937"/>
+                  <a:srgbClr val="0E1620"/>
                 </a:solidFill>
                 <a:latin typeface="Arial"/>
               </a:rPr>
@@ -18294,7 +18294,7 @@
             <a:r>
               <a:rPr sz="800" b="0" i="0">
                 <a:solidFill>
-                  <a:srgbClr val="3C3937"/>
+                  <a:srgbClr val="0E1620"/>
                 </a:solidFill>
                 <a:latin typeface="Arial"/>
               </a:rPr>
@@ -18380,7 +18380,7 @@
             <a:r>
               <a:rPr sz="800" b="0" i="0">
                 <a:solidFill>
-                  <a:srgbClr val="3C3937"/>
+                  <a:srgbClr val="0E1620"/>
                 </a:solidFill>
                 <a:latin typeface="Arial"/>
               </a:rPr>
@@ -18466,7 +18466,7 @@
             <a:r>
               <a:rPr sz="800" b="0" i="0">
                 <a:solidFill>
-                  <a:srgbClr val="3C3937"/>
+                  <a:srgbClr val="0E1620"/>
                 </a:solidFill>
                 <a:latin typeface="Arial"/>
               </a:rPr>
@@ -18552,7 +18552,7 @@
             <a:r>
               <a:rPr sz="800" b="0" i="0">
                 <a:solidFill>
-                  <a:srgbClr val="3C3937"/>
+                  <a:srgbClr val="0E1620"/>
                 </a:solidFill>
                 <a:latin typeface="Arial"/>
               </a:rPr>
@@ -18724,7 +18724,7 @@
             <a:r>
               <a:rPr sz="800" b="0" i="0">
                 <a:solidFill>
-                  <a:srgbClr val="3C3937"/>
+                  <a:srgbClr val="0E1620"/>
                 </a:solidFill>
                 <a:latin typeface="Arial"/>
               </a:rPr>
@@ -18810,7 +18810,7 @@
             <a:r>
               <a:rPr sz="800" b="0" i="0">
                 <a:solidFill>
-                  <a:srgbClr val="3C3937"/>
+                  <a:srgbClr val="0E1620"/>
                 </a:solidFill>
                 <a:latin typeface="Arial"/>
               </a:rPr>
@@ -18896,7 +18896,7 @@
             <a:r>
               <a:rPr sz="800" b="0" i="0">
                 <a:solidFill>
-                  <a:srgbClr val="3C3937"/>
+                  <a:srgbClr val="0E1620"/>
                 </a:solidFill>
                 <a:latin typeface="Arial"/>
               </a:rPr>
@@ -18982,7 +18982,7 @@
             <a:r>
               <a:rPr sz="800" b="0" i="0">
                 <a:solidFill>
-                  <a:srgbClr val="3C3937"/>
+                  <a:srgbClr val="0E1620"/>
                 </a:solidFill>
                 <a:latin typeface="Arial"/>
               </a:rPr>
@@ -19154,7 +19154,7 @@
             <a:r>
               <a:rPr sz="800" b="0" i="0">
                 <a:solidFill>
-                  <a:srgbClr val="3C3937"/>
+                  <a:srgbClr val="0E1620"/>
                 </a:solidFill>
                 <a:latin typeface="Arial"/>
               </a:rPr>
@@ -19240,7 +19240,7 @@
             <a:r>
               <a:rPr sz="800" b="0" i="0">
                 <a:solidFill>
-                  <a:srgbClr val="3C3937"/>
+                  <a:srgbClr val="0E1620"/>
                 </a:solidFill>
                 <a:latin typeface="Arial"/>
               </a:rPr>
@@ -19326,7 +19326,7 @@
             <a:r>
               <a:rPr sz="800" b="0" i="0">
                 <a:solidFill>
-                  <a:srgbClr val="3C3937"/>
+                  <a:srgbClr val="0E1620"/>
                 </a:solidFill>
                 <a:latin typeface="Arial"/>
               </a:rPr>
@@ -19412,7 +19412,7 @@
             <a:r>
               <a:rPr sz="800" b="0" i="0">
                 <a:solidFill>
-                  <a:srgbClr val="3C3937"/>
+                  <a:srgbClr val="0E1620"/>
                 </a:solidFill>
                 <a:latin typeface="Arial"/>
               </a:rPr>
@@ -19584,7 +19584,7 @@
             <a:r>
               <a:rPr sz="800" b="0" i="0">
                 <a:solidFill>
-                  <a:srgbClr val="3C3937"/>
+                  <a:srgbClr val="0E1620"/>
                 </a:solidFill>
                 <a:latin typeface="Arial"/>
               </a:rPr>
@@ -19670,7 +19670,7 @@
             <a:r>
               <a:rPr sz="800" b="0" i="0">
                 <a:solidFill>
-                  <a:srgbClr val="3C3937"/>
+                  <a:srgbClr val="0E1620"/>
                 </a:solidFill>
                 <a:latin typeface="Arial"/>
               </a:rPr>
@@ -19756,7 +19756,7 @@
             <a:r>
               <a:rPr sz="800" b="0" i="0">
                 <a:solidFill>
-                  <a:srgbClr val="3C3937"/>
+                  <a:srgbClr val="0E1620"/>
                 </a:solidFill>
                 <a:latin typeface="Arial"/>
               </a:rPr>
@@ -19842,7 +19842,7 @@
             <a:r>
               <a:rPr sz="800" b="0" i="0">
                 <a:solidFill>
-                  <a:srgbClr val="3C3937"/>
+                  <a:srgbClr val="0E1620"/>
                 </a:solidFill>
                 <a:latin typeface="Arial"/>
               </a:rPr>
@@ -20014,7 +20014,7 @@
             <a:r>
               <a:rPr sz="800" b="0" i="0">
                 <a:solidFill>
-                  <a:srgbClr val="3C3937"/>
+                  <a:srgbClr val="0E1620"/>
                 </a:solidFill>
                 <a:latin typeface="Arial"/>
               </a:rPr>
@@ -20100,7 +20100,7 @@
             <a:r>
               <a:rPr sz="800" b="0" i="0">
                 <a:solidFill>
-                  <a:srgbClr val="3C3937"/>
+                  <a:srgbClr val="0E1620"/>
                 </a:solidFill>
                 <a:latin typeface="Arial"/>
               </a:rPr>
@@ -20186,7 +20186,7 @@
             <a:r>
               <a:rPr sz="800" b="0" i="0">
                 <a:solidFill>
-                  <a:srgbClr val="3C3937"/>
+                  <a:srgbClr val="0E1620"/>
                 </a:solidFill>
                 <a:latin typeface="Arial"/>
               </a:rPr>
@@ -20272,7 +20272,7 @@
             <a:r>
               <a:rPr sz="800" b="0" i="0">
                 <a:solidFill>
-                  <a:srgbClr val="3C3937"/>
+                  <a:srgbClr val="0E1620"/>
                 </a:solidFill>
                 <a:latin typeface="Arial"/>
               </a:rPr>
@@ -20444,7 +20444,7 @@
             <a:r>
               <a:rPr sz="800" b="0" i="0">
                 <a:solidFill>
-                  <a:srgbClr val="3C3937"/>
+                  <a:srgbClr val="0E1620"/>
                 </a:solidFill>
                 <a:latin typeface="Arial"/>
               </a:rPr>
@@ -20530,7 +20530,7 @@
             <a:r>
               <a:rPr sz="800" b="0" i="0">
                 <a:solidFill>
-                  <a:srgbClr val="3C3937"/>
+                  <a:srgbClr val="0E1620"/>
                 </a:solidFill>
                 <a:latin typeface="Arial"/>
               </a:rPr>
@@ -20616,7 +20616,7 @@
             <a:r>
               <a:rPr sz="800" b="0" i="0">
                 <a:solidFill>
-                  <a:srgbClr val="3C3937"/>
+                  <a:srgbClr val="0E1620"/>
                 </a:solidFill>
                 <a:latin typeface="Arial"/>
               </a:rPr>
@@ -20702,7 +20702,7 @@
             <a:r>
               <a:rPr sz="800" b="0" i="0">
                 <a:solidFill>
-                  <a:srgbClr val="3C3937"/>
+                  <a:srgbClr val="0E1620"/>
                 </a:solidFill>
                 <a:latin typeface="Arial"/>
               </a:rPr>
@@ -20874,7 +20874,7 @@
             <a:r>
               <a:rPr sz="800" b="0" i="0">
                 <a:solidFill>
-                  <a:srgbClr val="3C3937"/>
+                  <a:srgbClr val="0E1620"/>
                 </a:solidFill>
                 <a:latin typeface="Arial"/>
               </a:rPr>
@@ -20960,7 +20960,7 @@
             <a:r>
               <a:rPr sz="800" b="0" i="0">
                 <a:solidFill>
-                  <a:srgbClr val="3C3937"/>
+                  <a:srgbClr val="0E1620"/>
                 </a:solidFill>
                 <a:latin typeface="Arial"/>
               </a:rPr>
@@ -21046,7 +21046,7 @@
             <a:r>
               <a:rPr sz="800" b="0" i="0">
                 <a:solidFill>
-                  <a:srgbClr val="3C3937"/>
+                  <a:srgbClr val="0E1620"/>
                 </a:solidFill>
                 <a:latin typeface="Arial"/>
               </a:rPr>
@@ -21132,7 +21132,7 @@
             <a:r>
               <a:rPr sz="800" b="0" i="0">
                 <a:solidFill>
-                  <a:srgbClr val="3C3937"/>
+                  <a:srgbClr val="0E1620"/>
                 </a:solidFill>
                 <a:latin typeface="Arial"/>
               </a:rPr>
@@ -21304,7 +21304,7 @@
             <a:r>
               <a:rPr sz="800" b="0" i="0">
                 <a:solidFill>
-                  <a:srgbClr val="3C3937"/>
+                  <a:srgbClr val="0E1620"/>
                 </a:solidFill>
                 <a:latin typeface="Arial"/>
               </a:rPr>
@@ -21390,7 +21390,7 @@
             <a:r>
               <a:rPr sz="800" b="0" i="0">
                 <a:solidFill>
-                  <a:srgbClr val="3C3937"/>
+                  <a:srgbClr val="0E1620"/>
                 </a:solidFill>
                 <a:latin typeface="Arial"/>
               </a:rPr>
@@ -21476,7 +21476,7 @@
             <a:r>
               <a:rPr sz="800" b="0" i="0">
                 <a:solidFill>
-                  <a:srgbClr val="3C3937"/>
+                  <a:srgbClr val="0E1620"/>
                 </a:solidFill>
                 <a:latin typeface="Arial"/>
               </a:rPr>
@@ -21562,7 +21562,7 @@
             <a:r>
               <a:rPr sz="800" b="0" i="0">
                 <a:solidFill>
-                  <a:srgbClr val="3C3937"/>
+                  <a:srgbClr val="0E1620"/>
                 </a:solidFill>
                 <a:latin typeface="Arial"/>
               </a:rPr>
@@ -21734,7 +21734,7 @@
             <a:r>
               <a:rPr sz="800" b="0" i="0">
                 <a:solidFill>
-                  <a:srgbClr val="3C3937"/>
+                  <a:srgbClr val="0E1620"/>
                 </a:solidFill>
                 <a:latin typeface="Arial"/>
               </a:rPr>
@@ -22164,7 +22164,7 @@
             <a:r>
               <a:rPr sz="800" b="0" i="0">
                 <a:solidFill>
-                  <a:srgbClr val="3C3937"/>
+                  <a:srgbClr val="0E1620"/>
                 </a:solidFill>
                 <a:latin typeface="Arial"/>
               </a:rPr>
@@ -22250,7 +22250,7 @@
             <a:r>
               <a:rPr sz="800" b="0" i="0">
                 <a:solidFill>
-                  <a:srgbClr val="3C3937"/>
+                  <a:srgbClr val="0E1620"/>
                 </a:solidFill>
                 <a:latin typeface="Arial"/>
               </a:rPr>
@@ -22336,7 +22336,7 @@
             <a:r>
               <a:rPr sz="800" b="0" i="0">
                 <a:solidFill>
-                  <a:srgbClr val="3C3937"/>
+                  <a:srgbClr val="0E1620"/>
                 </a:solidFill>
                 <a:latin typeface="Arial"/>
               </a:rPr>
@@ -22422,7 +22422,7 @@
             <a:r>
               <a:rPr sz="800" b="0" i="0">
                 <a:solidFill>
-                  <a:srgbClr val="3C3937"/>
+                  <a:srgbClr val="0E1620"/>
                 </a:solidFill>
                 <a:latin typeface="Arial"/>
               </a:rPr>
@@ -22594,7 +22594,7 @@
             <a:r>
               <a:rPr sz="800" b="0" i="0">
                 <a:solidFill>
-                  <a:srgbClr val="3C3937"/>
+                  <a:srgbClr val="0E1620"/>
                 </a:solidFill>
                 <a:latin typeface="Arial"/>
               </a:rPr>
@@ -22680,7 +22680,7 @@
             <a:r>
               <a:rPr sz="800" b="0" i="0">
                 <a:solidFill>
-                  <a:srgbClr val="3C3937"/>
+                  <a:srgbClr val="0E1620"/>
                 </a:solidFill>
                 <a:latin typeface="Arial"/>
               </a:rPr>
@@ -22766,7 +22766,7 @@
             <a:r>
               <a:rPr sz="800" b="0" i="0">
                 <a:solidFill>
-                  <a:srgbClr val="3C3937"/>
+                  <a:srgbClr val="0E1620"/>
                 </a:solidFill>
                 <a:latin typeface="Arial"/>
               </a:rPr>
@@ -22852,7 +22852,7 @@
             <a:r>
               <a:rPr sz="800" b="0" i="0">
                 <a:solidFill>
-                  <a:srgbClr val="3C3937"/>
+                  <a:srgbClr val="0E1620"/>
                 </a:solidFill>
                 <a:latin typeface="Arial"/>
               </a:rPr>
@@ -23024,7 +23024,7 @@
             <a:r>
               <a:rPr sz="800" b="0" i="0">
                 <a:solidFill>
-                  <a:srgbClr val="3C3937"/>
+                  <a:srgbClr val="0E1620"/>
                 </a:solidFill>
                 <a:latin typeface="Arial"/>
               </a:rPr>
@@ -23110,7 +23110,7 @@
             <a:r>
               <a:rPr sz="800" b="0" i="0">
                 <a:solidFill>
-                  <a:srgbClr val="3C3937"/>
+                  <a:srgbClr val="0E1620"/>
                 </a:solidFill>
                 <a:latin typeface="Arial"/>
               </a:rPr>
@@ -23196,7 +23196,7 @@
             <a:r>
               <a:rPr sz="800" b="0" i="0">
                 <a:solidFill>
-                  <a:srgbClr val="3C3937"/>
+                  <a:srgbClr val="0E1620"/>
                 </a:solidFill>
                 <a:latin typeface="Arial"/>
               </a:rPr>
@@ -23282,7 +23282,7 @@
             <a:r>
               <a:rPr sz="800" b="0" i="0">
                 <a:solidFill>
-                  <a:srgbClr val="3C3937"/>
+                  <a:srgbClr val="0E1620"/>
                 </a:solidFill>
                 <a:latin typeface="Arial"/>
               </a:rPr>
@@ -23454,7 +23454,7 @@
             <a:r>
               <a:rPr sz="800" b="0" i="0">
                 <a:solidFill>
-                  <a:srgbClr val="3C3937"/>
+                  <a:srgbClr val="0E1620"/>
                 </a:solidFill>
                 <a:latin typeface="Arial"/>
               </a:rPr>
@@ -23540,7 +23540,7 @@
             <a:r>
               <a:rPr sz="800" b="0" i="0">
                 <a:solidFill>
-                  <a:srgbClr val="3C3937"/>
+                  <a:srgbClr val="0E1620"/>
                 </a:solidFill>
                 <a:latin typeface="Arial"/>
               </a:rPr>
@@ -23626,7 +23626,7 @@
             <a:r>
               <a:rPr sz="800" b="0" i="0">
                 <a:solidFill>
-                  <a:srgbClr val="3C3937"/>
+                  <a:srgbClr val="0E1620"/>
                 </a:solidFill>
                 <a:latin typeface="Arial"/>
               </a:rPr>
@@ -23712,7 +23712,7 @@
             <a:r>
               <a:rPr sz="800" b="0" i="0">
                 <a:solidFill>
-                  <a:srgbClr val="3C3937"/>
+                  <a:srgbClr val="0E1620"/>
                 </a:solidFill>
                 <a:latin typeface="Arial"/>
               </a:rPr>
@@ -23884,7 +23884,7 @@
             <a:r>
               <a:rPr sz="800" b="0" i="0">
                 <a:solidFill>
-                  <a:srgbClr val="3C3937"/>
+                  <a:srgbClr val="0E1620"/>
                 </a:solidFill>
                 <a:latin typeface="Arial"/>
               </a:rPr>
@@ -23970,7 +23970,7 @@
             <a:r>
               <a:rPr sz="800" b="0" i="0">
                 <a:solidFill>
-                  <a:srgbClr val="3C3937"/>
+                  <a:srgbClr val="0E1620"/>
                 </a:solidFill>
                 <a:latin typeface="Arial"/>
               </a:rPr>
@@ -24056,7 +24056,7 @@
             <a:r>
               <a:rPr sz="800" b="0" i="0">
                 <a:solidFill>
-                  <a:srgbClr val="3C3937"/>
+                  <a:srgbClr val="0E1620"/>
                 </a:solidFill>
                 <a:latin typeface="Arial"/>
               </a:rPr>
@@ -24142,7 +24142,7 @@
             <a:r>
               <a:rPr sz="800" b="0" i="0">
                 <a:solidFill>
-                  <a:srgbClr val="3C3937"/>
+                  <a:srgbClr val="0E1620"/>
                 </a:solidFill>
                 <a:latin typeface="Arial"/>
               </a:rPr>
@@ -24270,7 +24270,7 @@
             <a:r>
               <a:rPr sz="680" b="0" i="0">
                 <a:solidFill>
-                  <a:srgbClr val="9A958E"/>
+                  <a:srgbClr val="556A83"/>
                 </a:solidFill>
                 <a:latin typeface="Arial"/>
               </a:rPr>
@@ -24398,7 +24398,7 @@
             <a:r>
               <a:rPr sz="880" b="0" i="0">
                 <a:solidFill>
-                  <a:srgbClr val="6F8990"/>
+                  <a:srgbClr val="556A83"/>
                 </a:solidFill>
                 <a:latin typeface="Arial"/>
               </a:rPr>
@@ -24440,7 +24440,7 @@
             <a:r>
               <a:rPr sz="880" b="1" i="0">
                 <a:solidFill>
-                  <a:srgbClr val="6F8990"/>
+                  <a:srgbClr val="556A83"/>
                 </a:solidFill>
                 <a:latin typeface="Arial"/>
               </a:rPr>
@@ -24524,7 +24524,7 @@
               </a:spcAft>
             </a:pPr>
             <a:r>
-              <a:rPr sz="2400" b="0" i="0">
+              <a:rPr sz="2400" b="0" i="0" spc="-90">
                 <a:solidFill>
                   <a:srgbClr val="314359"/>
                 </a:solidFill>
@@ -24568,7 +24568,7 @@
             <a:r>
               <a:rPr sz="1040" b="0" i="1">
                 <a:solidFill>
-                  <a:srgbClr val="64615E"/>
+                  <a:srgbClr val="556A83"/>
                 </a:solidFill>
                 <a:latin typeface="Arial"/>
               </a:rPr>
@@ -24610,7 +24610,7 @@
             <a:r>
               <a:rPr sz="680" b="0" i="0">
                 <a:solidFill>
-                  <a:srgbClr val="9A958E"/>
+                  <a:srgbClr val="556A83"/>
                 </a:solidFill>
                 <a:latin typeface="Arial"/>
               </a:rPr>
@@ -24634,7 +24634,7 @@
             <a:avLst/>
           </a:prstGeom>
           <a:solidFill>
-            <a:srgbClr val="556A83"/>
+            <a:srgbClr val="314359"/>
           </a:solidFill>
           <a:ln>
             <a:noFill/>
@@ -24720,7 +24720,7 @@
             <a:avLst/>
           </a:prstGeom>
           <a:solidFill>
-            <a:srgbClr val="556A83"/>
+            <a:srgbClr val="314359"/>
           </a:solidFill>
           <a:ln>
             <a:noFill/>
@@ -24806,7 +24806,7 @@
             <a:avLst/>
           </a:prstGeom>
           <a:solidFill>
-            <a:srgbClr val="556A83"/>
+            <a:srgbClr val="314359"/>
           </a:solidFill>
           <a:ln>
             <a:noFill/>
@@ -25040,7 +25040,7 @@
             <a:r>
               <a:rPr sz="800" b="0" i="0">
                 <a:solidFill>
-                  <a:srgbClr val="3C3937"/>
+                  <a:srgbClr val="0E1620"/>
                 </a:solidFill>
                 <a:latin typeface="Arial"/>
               </a:rPr>
@@ -25126,7 +25126,7 @@
             <a:r>
               <a:rPr sz="800" b="0" i="0">
                 <a:solidFill>
-                  <a:srgbClr val="3C3937"/>
+                  <a:srgbClr val="0E1620"/>
                 </a:solidFill>
                 <a:latin typeface="Arial"/>
               </a:rPr>
@@ -25298,7 +25298,7 @@
             <a:r>
               <a:rPr sz="800" b="0" i="0">
                 <a:solidFill>
-                  <a:srgbClr val="3C3937"/>
+                  <a:srgbClr val="0E1620"/>
                 </a:solidFill>
                 <a:latin typeface="Arial"/>
               </a:rPr>
@@ -25384,7 +25384,7 @@
             <a:r>
               <a:rPr sz="800" b="0" i="0">
                 <a:solidFill>
-                  <a:srgbClr val="3C3937"/>
+                  <a:srgbClr val="0E1620"/>
                 </a:solidFill>
                 <a:latin typeface="Arial"/>
               </a:rPr>
@@ -25556,7 +25556,7 @@
             <a:r>
               <a:rPr sz="800" b="0" i="0">
                 <a:solidFill>
-                  <a:srgbClr val="3C3937"/>
+                  <a:srgbClr val="0E1620"/>
                 </a:solidFill>
                 <a:latin typeface="Arial"/>
               </a:rPr>
@@ -25642,7 +25642,7 @@
             <a:r>
               <a:rPr sz="800" b="0" i="0">
                 <a:solidFill>
-                  <a:srgbClr val="3C3937"/>
+                  <a:srgbClr val="0E1620"/>
                 </a:solidFill>
                 <a:latin typeface="Arial"/>
               </a:rPr>
@@ -25814,7 +25814,7 @@
             <a:r>
               <a:rPr sz="800" b="0" i="0">
                 <a:solidFill>
-                  <a:srgbClr val="3C3937"/>
+                  <a:srgbClr val="0E1620"/>
                 </a:solidFill>
                 <a:latin typeface="Arial"/>
               </a:rPr>
@@ -25900,7 +25900,7 @@
             <a:r>
               <a:rPr sz="800" b="0" i="0">
                 <a:solidFill>
-                  <a:srgbClr val="3C3937"/>
+                  <a:srgbClr val="0E1620"/>
                 </a:solidFill>
                 <a:latin typeface="Arial"/>
               </a:rPr>
@@ -26072,7 +26072,7 @@
             <a:r>
               <a:rPr sz="800" b="0" i="0">
                 <a:solidFill>
-                  <a:srgbClr val="3C3937"/>
+                  <a:srgbClr val="0E1620"/>
                 </a:solidFill>
                 <a:latin typeface="Arial"/>
               </a:rPr>
@@ -26158,7 +26158,7 @@
             <a:r>
               <a:rPr sz="800" b="0" i="0">
                 <a:solidFill>
-                  <a:srgbClr val="3C3937"/>
+                  <a:srgbClr val="0E1620"/>
                 </a:solidFill>
                 <a:latin typeface="Arial"/>
               </a:rPr>
@@ -26330,7 +26330,7 @@
             <a:r>
               <a:rPr sz="800" b="0" i="0">
                 <a:solidFill>
-                  <a:srgbClr val="3C3937"/>
+                  <a:srgbClr val="0E1620"/>
                 </a:solidFill>
                 <a:latin typeface="Arial"/>
               </a:rPr>
@@ -26416,7 +26416,7 @@
             <a:r>
               <a:rPr sz="800" b="0" i="0">
                 <a:solidFill>
-                  <a:srgbClr val="3C3937"/>
+                  <a:srgbClr val="0E1620"/>
                 </a:solidFill>
                 <a:latin typeface="Arial"/>
               </a:rPr>
@@ -26588,7 +26588,7 @@
             <a:r>
               <a:rPr sz="800" b="0" i="0">
                 <a:solidFill>
-                  <a:srgbClr val="3C3937"/>
+                  <a:srgbClr val="0E1620"/>
                 </a:solidFill>
                 <a:latin typeface="Arial"/>
               </a:rPr>
@@ -26674,7 +26674,7 @@
             <a:r>
               <a:rPr sz="800" b="0" i="0">
                 <a:solidFill>
-                  <a:srgbClr val="3C3937"/>
+                  <a:srgbClr val="0E1620"/>
                 </a:solidFill>
                 <a:latin typeface="Arial"/>
               </a:rPr>
@@ -26846,7 +26846,7 @@
             <a:r>
               <a:rPr sz="800" b="0" i="0">
                 <a:solidFill>
-                  <a:srgbClr val="3C3937"/>
+                  <a:srgbClr val="0E1620"/>
                 </a:solidFill>
                 <a:latin typeface="Arial"/>
               </a:rPr>
@@ -26932,7 +26932,7 @@
             <a:r>
               <a:rPr sz="800" b="0" i="0">
                 <a:solidFill>
-                  <a:srgbClr val="3C3937"/>
+                  <a:srgbClr val="0E1620"/>
                 </a:solidFill>
                 <a:latin typeface="Arial"/>
               </a:rPr>
@@ -27104,7 +27104,7 @@
             <a:r>
               <a:rPr sz="800" b="0" i="0">
                 <a:solidFill>
-                  <a:srgbClr val="3C3937"/>
+                  <a:srgbClr val="0E1620"/>
                 </a:solidFill>
                 <a:latin typeface="Arial"/>
               </a:rPr>
@@ -27190,7 +27190,7 @@
             <a:r>
               <a:rPr sz="800" b="0" i="0">
                 <a:solidFill>
-                  <a:srgbClr val="3C3937"/>
+                  <a:srgbClr val="0E1620"/>
                 </a:solidFill>
                 <a:latin typeface="Arial"/>
               </a:rPr>
@@ -27362,7 +27362,7 @@
             <a:r>
               <a:rPr sz="800" b="0" i="0">
                 <a:solidFill>
-                  <a:srgbClr val="3C3937"/>
+                  <a:srgbClr val="0E1620"/>
                 </a:solidFill>
                 <a:latin typeface="Arial"/>
               </a:rPr>
@@ -27448,7 +27448,7 @@
             <a:r>
               <a:rPr sz="800" b="0" i="0">
                 <a:solidFill>
-                  <a:srgbClr val="3C3937"/>
+                  <a:srgbClr val="0E1620"/>
                 </a:solidFill>
                 <a:latin typeface="Arial"/>
               </a:rPr>
@@ -27620,7 +27620,7 @@
             <a:r>
               <a:rPr sz="800" b="0" i="0">
                 <a:solidFill>
-                  <a:srgbClr val="3C3937"/>
+                  <a:srgbClr val="0E1620"/>
                 </a:solidFill>
                 <a:latin typeface="Arial"/>
               </a:rPr>
@@ -27706,7 +27706,7 @@
             <a:r>
               <a:rPr sz="800" b="0" i="0">
                 <a:solidFill>
-                  <a:srgbClr val="3C3937"/>
+                  <a:srgbClr val="0E1620"/>
                 </a:solidFill>
                 <a:latin typeface="Arial"/>
               </a:rPr>
@@ -27730,7 +27730,7 @@
             <a:avLst/>
           </a:prstGeom>
           <a:solidFill>
-            <a:srgbClr val="556A83"/>
+            <a:srgbClr val="314359"/>
           </a:solidFill>
           <a:ln>
             <a:noFill/>
@@ -27816,7 +27816,7 @@
             <a:avLst/>
           </a:prstGeom>
           <a:solidFill>
-            <a:srgbClr val="556A83"/>
+            <a:srgbClr val="314359"/>
           </a:solidFill>
           <a:ln>
             <a:noFill/>
@@ -27902,7 +27902,7 @@
             <a:avLst/>
           </a:prstGeom>
           <a:solidFill>
-            <a:srgbClr val="556A83"/>
+            <a:srgbClr val="314359"/>
           </a:solidFill>
           <a:ln>
             <a:noFill/>
@@ -28394,7 +28394,7 @@
             <a:r>
               <a:rPr sz="800" b="0" i="0">
                 <a:solidFill>
-                  <a:srgbClr val="3C3937"/>
+                  <a:srgbClr val="0E1620"/>
                 </a:solidFill>
                 <a:latin typeface="Arial"/>
               </a:rPr>
@@ -28480,7 +28480,7 @@
             <a:r>
               <a:rPr sz="800" b="0" i="0">
                 <a:solidFill>
-                  <a:srgbClr val="3C3937"/>
+                  <a:srgbClr val="0E1620"/>
                 </a:solidFill>
                 <a:latin typeface="Arial"/>
               </a:rPr>
@@ -28652,7 +28652,7 @@
             <a:r>
               <a:rPr sz="800" b="0" i="0">
                 <a:solidFill>
-                  <a:srgbClr val="3C3937"/>
+                  <a:srgbClr val="0E1620"/>
                 </a:solidFill>
                 <a:latin typeface="Arial"/>
               </a:rPr>
@@ -28738,7 +28738,7 @@
             <a:r>
               <a:rPr sz="800" b="0" i="0">
                 <a:solidFill>
-                  <a:srgbClr val="3C3937"/>
+                  <a:srgbClr val="0E1620"/>
                 </a:solidFill>
                 <a:latin typeface="Arial"/>
               </a:rPr>
@@ -28910,7 +28910,7 @@
             <a:r>
               <a:rPr sz="800" b="0" i="0">
                 <a:solidFill>
-                  <a:srgbClr val="3C3937"/>
+                  <a:srgbClr val="0E1620"/>
                 </a:solidFill>
                 <a:latin typeface="Arial"/>
               </a:rPr>
@@ -28996,7 +28996,7 @@
             <a:r>
               <a:rPr sz="800" b="0" i="0">
                 <a:solidFill>
-                  <a:srgbClr val="3C3937"/>
+                  <a:srgbClr val="0E1620"/>
                 </a:solidFill>
                 <a:latin typeface="Arial"/>
               </a:rPr>
@@ -29168,7 +29168,7 @@
             <a:r>
               <a:rPr sz="800" b="0" i="0">
                 <a:solidFill>
-                  <a:srgbClr val="3C3937"/>
+                  <a:srgbClr val="0E1620"/>
                 </a:solidFill>
                 <a:latin typeface="Arial"/>
               </a:rPr>
@@ -29254,7 +29254,7 @@
             <a:r>
               <a:rPr sz="800" b="0" i="0">
                 <a:solidFill>
-                  <a:srgbClr val="3C3937"/>
+                  <a:srgbClr val="0E1620"/>
                 </a:solidFill>
                 <a:latin typeface="Arial"/>
               </a:rPr>
@@ -29426,7 +29426,7 @@
             <a:r>
               <a:rPr sz="800" b="0" i="0">
                 <a:solidFill>
-                  <a:srgbClr val="3C3937"/>
+                  <a:srgbClr val="0E1620"/>
                 </a:solidFill>
                 <a:latin typeface="Arial"/>
               </a:rPr>
@@ -29512,7 +29512,7 @@
             <a:r>
               <a:rPr sz="800" b="0" i="0">
                 <a:solidFill>
-                  <a:srgbClr val="3C3937"/>
+                  <a:srgbClr val="0E1620"/>
                 </a:solidFill>
                 <a:latin typeface="Arial"/>
               </a:rPr>
@@ -29684,7 +29684,7 @@
             <a:r>
               <a:rPr sz="800" b="0" i="0">
                 <a:solidFill>
-                  <a:srgbClr val="3C3937"/>
+                  <a:srgbClr val="0E1620"/>
                 </a:solidFill>
                 <a:latin typeface="Arial"/>
               </a:rPr>
@@ -29770,7 +29770,7 @@
             <a:r>
               <a:rPr sz="800" b="0" i="0">
                 <a:solidFill>
-                  <a:srgbClr val="3C3937"/>
+                  <a:srgbClr val="0E1620"/>
                 </a:solidFill>
                 <a:latin typeface="Arial"/>
               </a:rPr>
@@ -29942,7 +29942,7 @@
             <a:r>
               <a:rPr sz="800" b="0" i="0">
                 <a:solidFill>
-                  <a:srgbClr val="3C3937"/>
+                  <a:srgbClr val="0E1620"/>
                 </a:solidFill>
                 <a:latin typeface="Arial"/>
               </a:rPr>
@@ -30028,7 +30028,7 @@
             <a:r>
               <a:rPr sz="800" b="0" i="0">
                 <a:solidFill>
-                  <a:srgbClr val="3C3937"/>
+                  <a:srgbClr val="0E1620"/>
                 </a:solidFill>
                 <a:latin typeface="Arial"/>
               </a:rPr>
@@ -30200,7 +30200,7 @@
             <a:r>
               <a:rPr sz="800" b="0" i="0">
                 <a:solidFill>
-                  <a:srgbClr val="3C3937"/>
+                  <a:srgbClr val="0E1620"/>
                 </a:solidFill>
                 <a:latin typeface="Arial"/>
               </a:rPr>
@@ -30286,7 +30286,7 @@
             <a:r>
               <a:rPr sz="800" b="0" i="0">
                 <a:solidFill>
-                  <a:srgbClr val="3C3937"/>
+                  <a:srgbClr val="0E1620"/>
                 </a:solidFill>
                 <a:latin typeface="Arial"/>
               </a:rPr>
@@ -30458,7 +30458,7 @@
             <a:r>
               <a:rPr sz="800" b="0" i="0">
                 <a:solidFill>
-                  <a:srgbClr val="3C3937"/>
+                  <a:srgbClr val="0E1620"/>
                 </a:solidFill>
                 <a:latin typeface="Arial"/>
               </a:rPr>
@@ -30544,7 +30544,7 @@
             <a:r>
               <a:rPr sz="800" b="0" i="0">
                 <a:solidFill>
-                  <a:srgbClr val="3C3937"/>
+                  <a:srgbClr val="0E1620"/>
                 </a:solidFill>
                 <a:latin typeface="Arial"/>
               </a:rPr>
@@ -30930,7 +30930,7 @@
             <a:r>
               <a:rPr sz="680" b="0" i="0">
                 <a:solidFill>
-                  <a:srgbClr val="9A958E"/>
+                  <a:srgbClr val="556A83"/>
                 </a:solidFill>
                 <a:latin typeface="Arial"/>
               </a:rPr>
@@ -31058,7 +31058,7 @@
             <a:r>
               <a:rPr sz="880" b="0" i="0">
                 <a:solidFill>
-                  <a:srgbClr val="6F8990"/>
+                  <a:srgbClr val="556A83"/>
                 </a:solidFill>
                 <a:latin typeface="Arial"/>
               </a:rPr>
@@ -31142,7 +31142,7 @@
               </a:spcAft>
             </a:pPr>
             <a:r>
-              <a:rPr sz="2400" b="0" i="0">
+              <a:rPr sz="2400" b="0" i="0" spc="-90">
                 <a:solidFill>
                   <a:srgbClr val="314359"/>
                 </a:solidFill>
@@ -31186,7 +31186,7 @@
             <a:r>
               <a:rPr sz="1040" b="0" i="1">
                 <a:solidFill>
-                  <a:srgbClr val="64615E"/>
+                  <a:srgbClr val="556A83"/>
                 </a:solidFill>
                 <a:latin typeface="Arial"/>
               </a:rPr>
@@ -31228,7 +31228,7 @@
             <a:r>
               <a:rPr sz="680" b="0" i="0">
                 <a:solidFill>
-                  <a:srgbClr val="9A958E"/>
+                  <a:srgbClr val="556A83"/>
                 </a:solidFill>
                 <a:latin typeface="Arial"/>
               </a:rPr>
@@ -31312,7 +31312,7 @@
               </a:spcAft>
             </a:pPr>
             <a:r>
-              <a:rPr sz="2720" b="0" i="0">
+              <a:rPr sz="2720" b="0" i="0" spc="-102">
                 <a:solidFill>
                   <a:srgbClr val="314359"/>
                 </a:solidFill>
@@ -31333,7 +31333,7 @@
             <a:r>
               <a:rPr sz="919" b="0" i="0">
                 <a:solidFill>
-                  <a:srgbClr val="64615E"/>
+                  <a:srgbClr val="556A83"/>
                 </a:solidFill>
                 <a:latin typeface="Arial"/>
               </a:rPr>
@@ -31352,7 +31352,7 @@
             <a:r>
               <a:rPr sz="919" b="0" i="0">
                 <a:solidFill>
-                  <a:srgbClr val="64615E"/>
+                  <a:srgbClr val="556A83"/>
                 </a:solidFill>
                 <a:latin typeface="Arial"/>
               </a:rPr>
@@ -31436,7 +31436,7 @@
               </a:spcAft>
             </a:pPr>
             <a:r>
-              <a:rPr sz="2720" b="0" i="0">
+              <a:rPr sz="2720" b="0" i="0" spc="-102">
                 <a:solidFill>
                   <a:srgbClr val="314359"/>
                 </a:solidFill>
@@ -31457,7 +31457,7 @@
             <a:r>
               <a:rPr sz="919" b="0" i="0">
                 <a:solidFill>
-                  <a:srgbClr val="64615E"/>
+                  <a:srgbClr val="556A83"/>
                 </a:solidFill>
                 <a:latin typeface="Arial"/>
               </a:rPr>
@@ -31476,7 +31476,7 @@
             <a:r>
               <a:rPr sz="919" b="0" i="0">
                 <a:solidFill>
-                  <a:srgbClr val="64615E"/>
+                  <a:srgbClr val="556A83"/>
                 </a:solidFill>
                 <a:latin typeface="Arial"/>
               </a:rPr>
@@ -31560,7 +31560,7 @@
               </a:spcAft>
             </a:pPr>
             <a:r>
-              <a:rPr sz="2720" b="0" i="0">
+              <a:rPr sz="2720" b="0" i="0" spc="-102">
                 <a:solidFill>
                   <a:srgbClr val="314359"/>
                 </a:solidFill>
@@ -31581,7 +31581,7 @@
             <a:r>
               <a:rPr sz="919" b="0" i="0">
                 <a:solidFill>
-                  <a:srgbClr val="64615E"/>
+                  <a:srgbClr val="556A83"/>
                 </a:solidFill>
                 <a:latin typeface="Arial"/>
               </a:rPr>
@@ -31600,7 +31600,7 @@
             <a:r>
               <a:rPr sz="919" b="0" i="0">
                 <a:solidFill>
-                  <a:srgbClr val="64615E"/>
+                  <a:srgbClr val="556A83"/>
                 </a:solidFill>
                 <a:latin typeface="Arial"/>
               </a:rPr>
@@ -31684,7 +31684,7 @@
               </a:spcAft>
             </a:pPr>
             <a:r>
-              <a:rPr sz="2720" b="0" i="0">
+              <a:rPr sz="2720" b="0" i="0" spc="-102">
                 <a:solidFill>
                   <a:srgbClr val="314359"/>
                 </a:solidFill>
@@ -31705,7 +31705,7 @@
             <a:r>
               <a:rPr sz="919" b="0" i="0">
                 <a:solidFill>
-                  <a:srgbClr val="64615E"/>
+                  <a:srgbClr val="556A83"/>
                 </a:solidFill>
                 <a:latin typeface="Arial"/>
               </a:rPr>
@@ -31724,7 +31724,7 @@
             <a:r>
               <a:rPr sz="919" b="0" i="0">
                 <a:solidFill>
-                  <a:srgbClr val="64615E"/>
+                  <a:srgbClr val="556A83"/>
                 </a:solidFill>
                 <a:latin typeface="Arial"/>
               </a:rPr>
@@ -31766,7 +31766,7 @@
             <a:r>
               <a:rPr sz="1120" b="1">
                 <a:solidFill>
-                  <a:srgbClr val="556A83"/>
+                  <a:srgbClr val="314359"/>
                 </a:solidFill>
                 <a:latin typeface="Arial"/>
               </a:rPr>
@@ -31784,7 +31784,7 @@
             <a:r>
               <a:rPr sz="1120">
                 <a:solidFill>
-                  <a:srgbClr val="3C3937"/>
+                  <a:srgbClr val="0E1620"/>
                 </a:solidFill>
                 <a:latin typeface="Arial"/>
               </a:rPr>
@@ -31803,7 +31803,7 @@
             <a:r>
               <a:rPr sz="1120" b="1">
                 <a:solidFill>
-                  <a:srgbClr val="556A83"/>
+                  <a:srgbClr val="314359"/>
                 </a:solidFill>
                 <a:latin typeface="Arial"/>
               </a:rPr>
@@ -31821,7 +31821,7 @@
             <a:r>
               <a:rPr sz="1120">
                 <a:solidFill>
-                  <a:srgbClr val="3C3937"/>
+                  <a:srgbClr val="0E1620"/>
                 </a:solidFill>
                 <a:latin typeface="Arial"/>
               </a:rPr>
@@ -31840,7 +31840,7 @@
             <a:r>
               <a:rPr sz="1120" b="1">
                 <a:solidFill>
-                  <a:srgbClr val="556A83"/>
+                  <a:srgbClr val="314359"/>
                 </a:solidFill>
                 <a:latin typeface="Arial"/>
               </a:rPr>
@@ -31858,7 +31858,7 @@
             <a:r>
               <a:rPr sz="1120">
                 <a:solidFill>
-                  <a:srgbClr val="3C3937"/>
+                  <a:srgbClr val="0E1620"/>
                 </a:solidFill>
                 <a:latin typeface="Arial"/>
               </a:rPr>
@@ -31900,7 +31900,7 @@
             <a:r>
               <a:rPr sz="680" b="0" i="0">
                 <a:solidFill>
-                  <a:srgbClr val="9A958E"/>
+                  <a:srgbClr val="556A83"/>
                 </a:solidFill>
                 <a:latin typeface="Arial"/>
               </a:rPr>
@@ -32028,7 +32028,7 @@
             <a:r>
               <a:rPr sz="880" b="0" i="0">
                 <a:solidFill>
-                  <a:srgbClr val="6F8990"/>
+                  <a:srgbClr val="556A83"/>
                 </a:solidFill>
                 <a:latin typeface="Arial"/>
               </a:rPr>
@@ -32112,7 +32112,7 @@
               </a:spcAft>
             </a:pPr>
             <a:r>
-              <a:rPr sz="2400" b="0" i="0">
+              <a:rPr sz="2400" b="0" i="0" spc="-90">
                 <a:solidFill>
                   <a:srgbClr val="314359"/>
                 </a:solidFill>
@@ -32156,7 +32156,7 @@
             <a:r>
               <a:rPr sz="1040" b="0" i="1">
                 <a:solidFill>
-                  <a:srgbClr val="64615E"/>
+                  <a:srgbClr val="556A83"/>
                 </a:solidFill>
                 <a:latin typeface="Arial"/>
               </a:rPr>
@@ -32198,7 +32198,7 @@
             <a:r>
               <a:rPr sz="680" b="0" i="0">
                 <a:solidFill>
-                  <a:srgbClr val="9A958E"/>
+                  <a:srgbClr val="556A83"/>
                 </a:solidFill>
                 <a:latin typeface="Arial"/>
               </a:rPr>
@@ -32240,7 +32240,7 @@
             <a:r>
               <a:rPr sz="1040" b="1" i="0">
                 <a:solidFill>
-                  <a:srgbClr val="556A83"/>
+                  <a:srgbClr val="314359"/>
                 </a:solidFill>
                 <a:latin typeface="Arial"/>
               </a:rPr>
@@ -32259,7 +32259,7 @@
             <a:r>
               <a:rPr sz="1120" b="0" i="0">
                 <a:solidFill>
-                  <a:srgbClr val="3C3937"/>
+                  <a:srgbClr val="0E1620"/>
                 </a:solidFill>
                 <a:latin typeface="Arial"/>
               </a:rPr>
@@ -32278,7 +32278,7 @@
             <a:r>
               <a:rPr sz="1120" b="0" i="0">
                 <a:solidFill>
-                  <a:srgbClr val="3C3937"/>
+                  <a:srgbClr val="0E1620"/>
                 </a:solidFill>
                 <a:latin typeface="Arial"/>
               </a:rPr>
@@ -32297,7 +32297,7 @@
             <a:r>
               <a:rPr sz="1120" b="0" i="0">
                 <a:solidFill>
-                  <a:srgbClr val="3C3937"/>
+                  <a:srgbClr val="0E1620"/>
                 </a:solidFill>
                 <a:latin typeface="Arial"/>
               </a:rPr>
@@ -32316,7 +32316,7 @@
             <a:r>
               <a:rPr sz="1120" b="0" i="0">
                 <a:solidFill>
-                  <a:srgbClr val="3C3937"/>
+                  <a:srgbClr val="0E1620"/>
                 </a:solidFill>
                 <a:latin typeface="Arial"/>
               </a:rPr>
@@ -32358,7 +32358,7 @@
             <a:r>
               <a:rPr sz="1040" b="1" i="0">
                 <a:solidFill>
-                  <a:srgbClr val="556A83"/>
+                  <a:srgbClr val="314359"/>
                 </a:solidFill>
                 <a:latin typeface="Arial"/>
               </a:rPr>
@@ -32377,7 +32377,7 @@
             <a:r>
               <a:rPr sz="1120" b="0" i="0">
                 <a:solidFill>
-                  <a:srgbClr val="3C3937"/>
+                  <a:srgbClr val="0E1620"/>
                 </a:solidFill>
                 <a:latin typeface="Arial"/>
               </a:rPr>
@@ -32396,7 +32396,7 @@
             <a:r>
               <a:rPr sz="1120" b="0" i="0">
                 <a:solidFill>
-                  <a:srgbClr val="3C3937"/>
+                  <a:srgbClr val="0E1620"/>
                 </a:solidFill>
                 <a:latin typeface="Arial"/>
               </a:rPr>
@@ -32415,7 +32415,7 @@
             <a:r>
               <a:rPr sz="1120" b="0" i="0">
                 <a:solidFill>
-                  <a:srgbClr val="3C3937"/>
+                  <a:srgbClr val="0E1620"/>
                 </a:solidFill>
                 <a:latin typeface="Arial"/>
               </a:rPr>
@@ -32457,7 +32457,7 @@
             <a:r>
               <a:rPr sz="1040" b="0" i="1">
                 <a:solidFill>
-                  <a:srgbClr val="556A83"/>
+                  <a:srgbClr val="314359"/>
                 </a:solidFill>
                 <a:latin typeface="Arial"/>
               </a:rPr>
@@ -32585,7 +32585,7 @@
             <a:r>
               <a:rPr sz="880" b="0" i="0">
                 <a:solidFill>
-                  <a:srgbClr val="6F8990"/>
+                  <a:srgbClr val="556A83"/>
                 </a:solidFill>
                 <a:latin typeface="Arial"/>
               </a:rPr>
@@ -32669,7 +32669,7 @@
               </a:spcAft>
             </a:pPr>
             <a:r>
-              <a:rPr sz="2400" b="0" i="0">
+              <a:rPr sz="2400" b="0" i="0" spc="-90">
                 <a:solidFill>
                   <a:srgbClr val="314359"/>
                 </a:solidFill>
@@ -32713,7 +32713,7 @@
             <a:r>
               <a:rPr sz="1040" b="0" i="1">
                 <a:solidFill>
-                  <a:srgbClr val="64615E"/>
+                  <a:srgbClr val="556A83"/>
                 </a:solidFill>
                 <a:latin typeface="Arial"/>
               </a:rPr>
@@ -32755,7 +32755,7 @@
             <a:r>
               <a:rPr sz="680" b="0" i="0">
                 <a:solidFill>
-                  <a:srgbClr val="9A958E"/>
+                  <a:srgbClr val="556A83"/>
                 </a:solidFill>
                 <a:latin typeface="Arial"/>
               </a:rPr>
@@ -32797,7 +32797,7 @@
             <a:r>
               <a:rPr sz="1040" b="1" i="0">
                 <a:solidFill>
-                  <a:srgbClr val="556A83"/>
+                  <a:srgbClr val="314359"/>
                 </a:solidFill>
                 <a:latin typeface="Arial"/>
               </a:rPr>
@@ -32816,7 +32816,7 @@
             <a:r>
               <a:rPr sz="1120" b="0" i="0">
                 <a:solidFill>
-                  <a:srgbClr val="3C3937"/>
+                  <a:srgbClr val="0E1620"/>
                 </a:solidFill>
                 <a:latin typeface="Arial"/>
               </a:rPr>
@@ -32835,7 +32835,7 @@
             <a:r>
               <a:rPr sz="1120" b="0" i="0">
                 <a:solidFill>
-                  <a:srgbClr val="3C3937"/>
+                  <a:srgbClr val="0E1620"/>
                 </a:solidFill>
                 <a:latin typeface="Arial"/>
               </a:rPr>
@@ -32854,7 +32854,7 @@
             <a:r>
               <a:rPr sz="1120" b="0" i="0">
                 <a:solidFill>
-                  <a:srgbClr val="3C3937"/>
+                  <a:srgbClr val="0E1620"/>
                 </a:solidFill>
                 <a:latin typeface="Arial"/>
               </a:rPr>
@@ -32896,7 +32896,7 @@
             <a:r>
               <a:rPr sz="1040" b="1" i="0">
                 <a:solidFill>
-                  <a:srgbClr val="556A83"/>
+                  <a:srgbClr val="314359"/>
                 </a:solidFill>
                 <a:latin typeface="Arial"/>
               </a:rPr>
@@ -32915,7 +32915,7 @@
             <a:r>
               <a:rPr sz="1120" b="0" i="0">
                 <a:solidFill>
-                  <a:srgbClr val="3C3937"/>
+                  <a:srgbClr val="0E1620"/>
                 </a:solidFill>
                 <a:latin typeface="Arial"/>
               </a:rPr>
@@ -32934,7 +32934,7 @@
             <a:r>
               <a:rPr sz="1120" b="0" i="0">
                 <a:solidFill>
-                  <a:srgbClr val="3C3937"/>
+                  <a:srgbClr val="0E1620"/>
                 </a:solidFill>
                 <a:latin typeface="Arial"/>
               </a:rPr>
@@ -32953,7 +32953,7 @@
             <a:r>
               <a:rPr sz="1120" b="0" i="0">
                 <a:solidFill>
-                  <a:srgbClr val="3C3937"/>
+                  <a:srgbClr val="0E1620"/>
                 </a:solidFill>
                 <a:latin typeface="Arial"/>
               </a:rPr>
@@ -33167,7 +33167,7 @@
             <a:r>
               <a:rPr sz="880" b="0" i="0">
                 <a:solidFill>
-                  <a:srgbClr val="6F8990"/>
+                  <a:srgbClr val="556A83"/>
                 </a:solidFill>
                 <a:latin typeface="Arial"/>
               </a:rPr>
@@ -33251,7 +33251,7 @@
               </a:spcAft>
             </a:pPr>
             <a:r>
-              <a:rPr sz="2400" b="0" i="0">
+              <a:rPr sz="2400" b="0" i="0" spc="-90">
                 <a:solidFill>
                   <a:srgbClr val="314359"/>
                 </a:solidFill>
@@ -33295,7 +33295,7 @@
             <a:r>
               <a:rPr sz="680" b="0" i="0">
                 <a:solidFill>
-                  <a:srgbClr val="9A958E"/>
+                  <a:srgbClr val="556A83"/>
                 </a:solidFill>
                 <a:latin typeface="Arial"/>
               </a:rPr>
@@ -33337,7 +33337,7 @@
             <a:r>
               <a:rPr sz="1280" b="1">
                 <a:solidFill>
-                  <a:srgbClr val="556A83"/>
+                  <a:srgbClr val="314359"/>
                 </a:solidFill>
                 <a:latin typeface="Arial"/>
               </a:rPr>
@@ -33355,7 +33355,7 @@
             <a:r>
               <a:rPr sz="1280">
                 <a:solidFill>
-                  <a:srgbClr val="3C3937"/>
+                  <a:srgbClr val="0E1620"/>
                 </a:solidFill>
                 <a:latin typeface="Arial"/>
               </a:rPr>
@@ -33374,7 +33374,7 @@
             <a:r>
               <a:rPr sz="1280" b="1">
                 <a:solidFill>
-                  <a:srgbClr val="556A83"/>
+                  <a:srgbClr val="314359"/>
                 </a:solidFill>
                 <a:latin typeface="Arial"/>
               </a:rPr>
@@ -33392,7 +33392,7 @@
             <a:r>
               <a:rPr sz="1280">
                 <a:solidFill>
-                  <a:srgbClr val="3C3937"/>
+                  <a:srgbClr val="0E1620"/>
                 </a:solidFill>
                 <a:latin typeface="Arial"/>
               </a:rPr>
@@ -33411,7 +33411,7 @@
             <a:r>
               <a:rPr sz="1280" b="1">
                 <a:solidFill>
-                  <a:srgbClr val="556A83"/>
+                  <a:srgbClr val="314359"/>
                 </a:solidFill>
                 <a:latin typeface="Arial"/>
               </a:rPr>
@@ -33429,7 +33429,7 @@
             <a:r>
               <a:rPr sz="1280">
                 <a:solidFill>
-                  <a:srgbClr val="3C3937"/>
+                  <a:srgbClr val="0E1620"/>
                 </a:solidFill>
                 <a:latin typeface="Arial"/>
               </a:rPr>
@@ -33448,7 +33448,7 @@
             <a:r>
               <a:rPr sz="1280" b="1">
                 <a:solidFill>
-                  <a:srgbClr val="556A83"/>
+                  <a:srgbClr val="314359"/>
                 </a:solidFill>
                 <a:latin typeface="Arial"/>
               </a:rPr>
@@ -33466,7 +33466,7 @@
             <a:r>
               <a:rPr sz="1280">
                 <a:solidFill>
-                  <a:srgbClr val="3C3937"/>
+                  <a:srgbClr val="0E1620"/>
                 </a:solidFill>
                 <a:latin typeface="Arial"/>
               </a:rPr>
@@ -33576,7 +33576,7 @@
             <a:avLst/>
           </a:prstGeom>
           <a:solidFill>
-            <a:srgbClr val="6F8990"/>
+            <a:srgbClr val="556A83"/>
           </a:solidFill>
           <a:ln>
             <a:noFill/>
@@ -33636,7 +33636,7 @@
               </a:spcAft>
             </a:pPr>
             <a:r>
-              <a:rPr sz="2080" b="0" i="0">
+              <a:rPr sz="2080" b="0" i="0" spc="-78">
                 <a:solidFill>
                   <a:srgbClr val="FFFFFF"/>
                 </a:solidFill>
@@ -33737,7 +33737,7 @@
             <a:r>
               <a:rPr sz="960" b="0" i="0">
                 <a:solidFill>
-                  <a:srgbClr val="6F8990"/>
+                  <a:srgbClr val="556A83"/>
                 </a:solidFill>
                 <a:latin typeface="Arial"/>
               </a:rPr>
@@ -33798,7 +33798,7 @@
             <a:r>
               <a:rPr sz="880" b="0" i="0">
                 <a:solidFill>
-                  <a:srgbClr val="6F8990"/>
+                  <a:srgbClr val="556A83"/>
                 </a:solidFill>
                 <a:latin typeface="Arial"/>
               </a:rPr>
@@ -33817,7 +33817,7 @@
             <a:r>
               <a:rPr sz="880" b="0" i="0">
                 <a:solidFill>
-                  <a:srgbClr val="6F8990"/>
+                  <a:srgbClr val="556A83"/>
                 </a:solidFill>
                 <a:latin typeface="Arial"/>
               </a:rPr>
@@ -33914,27 +33914,71 @@
       </p:pic>
       <p:sp>
         <p:nvSpPr>
-          <p:cNvPr id="4" name="TextBox 3"/>
-          <p:cNvSpPr txBox="1"/>
-          <p:nvPr/>
-        </p:nvSpPr>
-        <p:spPr>
-          <a:xfrm>
-            <a:off x="731538" y="2974848"/>
-            <a:ext cx="8266382" cy="487680"/>
-          </a:xfrm>
-          <a:prstGeom prst="rect">
-            <a:avLst/>
-          </a:prstGeom>
-          <a:noFill/>
-        </p:spPr>
-        <p:txBody>
-          <a:bodyPr wrap="square" anchor="ctr" lIns="0" rIns="0" tIns="0" bIns="0">
-            <a:spAutoFit/>
-          </a:bodyPr>
-          <a:lstStyle/>
-          <a:p>
-            <a:pPr algn="ctr">
+          <p:cNvPr id="4" name="Rectangle 3"/>
+          <p:cNvSpPr/>
+          <p:nvPr/>
+        </p:nvSpPr>
+        <p:spPr>
+          <a:xfrm>
+            <a:off x="453553" y="2974848"/>
+            <a:ext cx="365769" cy="29802"/>
+          </a:xfrm>
+          <a:prstGeom prst="rect">
+            <a:avLst/>
+          </a:prstGeom>
+          <a:solidFill>
+            <a:srgbClr val="556A83"/>
+          </a:solidFill>
+          <a:ln>
+            <a:noFill/>
+          </a:ln>
+          <a:effectLst/>
+        </p:spPr>
+        <p:style>
+          <a:lnRef idx="1">
+            <a:schemeClr val="accent1"/>
+          </a:lnRef>
+          <a:fillRef idx="3">
+            <a:schemeClr val="accent1"/>
+          </a:fillRef>
+          <a:effectRef idx="2">
+            <a:schemeClr val="accent1"/>
+          </a:effectRef>
+          <a:fontRef idx="minor">
+            <a:schemeClr val="lt1"/>
+          </a:fontRef>
+        </p:style>
+        <p:txBody>
+          <a:bodyPr rtlCol="0" anchor="ctr"/>
+          <a:lstStyle/>
+          <a:p>
+            <a:pPr algn="ctr"/>
+          </a:p>
+        </p:txBody>
+      </p:sp>
+      <p:sp>
+        <p:nvSpPr>
+          <p:cNvPr id="5" name="TextBox 4"/>
+          <p:cNvSpPr txBox="1"/>
+          <p:nvPr/>
+        </p:nvSpPr>
+        <p:spPr>
+          <a:xfrm>
+            <a:off x="438922" y="3169920"/>
+            <a:ext cx="8558998" cy="487680"/>
+          </a:xfrm>
+          <a:prstGeom prst="rect">
+            <a:avLst/>
+          </a:prstGeom>
+          <a:noFill/>
+        </p:spPr>
+        <p:txBody>
+          <a:bodyPr wrap="square" anchor="t" lIns="0" rIns="0" tIns="0" bIns="0">
+            <a:spAutoFit/>
+          </a:bodyPr>
+          <a:lstStyle/>
+          <a:p>
+            <a:pPr algn="l">
               <a:lnSpc>
                 <a:spcPct val="110000"/>
               </a:lnSpc>
@@ -33945,7 +33989,7 @@
             <a:r>
               <a:rPr sz="1040" b="0" i="0">
                 <a:solidFill>
-                  <a:srgbClr val="6F8990"/>
+                  <a:srgbClr val="556A83"/>
                 </a:solidFill>
                 <a:latin typeface="Arial"/>
               </a:rPr>
@@ -33956,27 +34000,27 @@
       </p:sp>
       <p:sp>
         <p:nvSpPr>
-          <p:cNvPr id="5" name="TextBox 4"/>
-          <p:cNvSpPr txBox="1"/>
-          <p:nvPr/>
-        </p:nvSpPr>
-        <p:spPr>
-          <a:xfrm>
-            <a:off x="731538" y="3316224"/>
-            <a:ext cx="8266382" cy="1170432"/>
-          </a:xfrm>
-          <a:prstGeom prst="rect">
-            <a:avLst/>
-          </a:prstGeom>
-          <a:noFill/>
-        </p:spPr>
-        <p:txBody>
-          <a:bodyPr wrap="square" anchor="ctr" lIns="0" rIns="0" tIns="0" bIns="0">
-            <a:spAutoFit/>
-          </a:bodyPr>
-          <a:lstStyle/>
-          <a:p>
-            <a:pPr algn="ctr">
+          <p:cNvPr id="6" name="TextBox 5"/>
+          <p:cNvSpPr txBox="1"/>
+          <p:nvPr/>
+        </p:nvSpPr>
+        <p:spPr>
+          <a:xfrm>
+            <a:off x="438922" y="3511296"/>
+            <a:ext cx="8705305" cy="1365504"/>
+          </a:xfrm>
+          <a:prstGeom prst="rect">
+            <a:avLst/>
+          </a:prstGeom>
+          <a:noFill/>
+        </p:spPr>
+        <p:txBody>
+          <a:bodyPr wrap="square" anchor="t" lIns="0" rIns="0" tIns="0" bIns="0">
+            <a:spAutoFit/>
+          </a:bodyPr>
+          <a:lstStyle/>
+          <a:p>
+            <a:pPr algn="l">
               <a:lnSpc>
                 <a:spcPct val="110000"/>
               </a:lnSpc>
@@ -33985,7 +34029,7 @@
               </a:spcAft>
             </a:pPr>
             <a:r>
-              <a:rPr sz="3200" b="0" i="1">
+              <a:rPr sz="3200" b="0" i="1" spc="-120">
                 <a:solidFill>
                   <a:srgbClr val="E2E5E9"/>
                 </a:solidFill>
@@ -34115,7 +34159,7 @@
             <a:r>
               <a:rPr sz="880" b="0" i="0">
                 <a:solidFill>
-                  <a:srgbClr val="6F8990"/>
+                  <a:srgbClr val="556A83"/>
                 </a:solidFill>
                 <a:latin typeface="Arial"/>
               </a:rPr>
@@ -34199,7 +34243,7 @@
               </a:spcAft>
             </a:pPr>
             <a:r>
-              <a:rPr sz="2400" b="0" i="0">
+              <a:rPr sz="2400" b="0" i="0" spc="-90">
                 <a:solidFill>
                   <a:srgbClr val="314359"/>
                 </a:solidFill>
@@ -34243,7 +34287,7 @@
             <a:r>
               <a:rPr sz="1040" b="0" i="1">
                 <a:solidFill>
-                  <a:srgbClr val="64615E"/>
+                  <a:srgbClr val="556A83"/>
                 </a:solidFill>
                 <a:latin typeface="Arial"/>
               </a:rPr>
@@ -34285,7 +34329,7 @@
             <a:r>
               <a:rPr sz="680" b="0" i="0">
                 <a:solidFill>
-                  <a:srgbClr val="9A958E"/>
+                  <a:srgbClr val="556A83"/>
                 </a:solidFill>
                 <a:latin typeface="Arial"/>
               </a:rPr>
@@ -34327,7 +34371,7 @@
             <a:r>
               <a:rPr sz="1240" b="1">
                 <a:solidFill>
-                  <a:srgbClr val="556A83"/>
+                  <a:srgbClr val="314359"/>
                 </a:solidFill>
                 <a:latin typeface="Arial"/>
               </a:rPr>
@@ -34345,7 +34389,7 @@
             <a:r>
               <a:rPr sz="1240">
                 <a:solidFill>
-                  <a:srgbClr val="3C3937"/>
+                  <a:srgbClr val="0E1620"/>
                 </a:solidFill>
                 <a:latin typeface="Arial"/>
               </a:rPr>
@@ -34364,7 +34408,7 @@
             <a:r>
               <a:rPr sz="1240" b="1">
                 <a:solidFill>
-                  <a:srgbClr val="556A83"/>
+                  <a:srgbClr val="314359"/>
                 </a:solidFill>
                 <a:latin typeface="Arial"/>
               </a:rPr>
@@ -34382,7 +34426,7 @@
             <a:r>
               <a:rPr sz="1240">
                 <a:solidFill>
-                  <a:srgbClr val="3C3937"/>
+                  <a:srgbClr val="0E1620"/>
                 </a:solidFill>
                 <a:latin typeface="Arial"/>
               </a:rPr>
@@ -34401,7 +34445,7 @@
             <a:r>
               <a:rPr sz="1240" b="1">
                 <a:solidFill>
-                  <a:srgbClr val="556A83"/>
+                  <a:srgbClr val="314359"/>
                 </a:solidFill>
                 <a:latin typeface="Arial"/>
               </a:rPr>
@@ -34419,7 +34463,7 @@
             <a:r>
               <a:rPr sz="1240">
                 <a:solidFill>
-                  <a:srgbClr val="3C3937"/>
+                  <a:srgbClr val="0E1620"/>
                 </a:solidFill>
                 <a:latin typeface="Arial"/>
               </a:rPr>
@@ -34438,7 +34482,7 @@
             <a:r>
               <a:rPr sz="1240" b="1">
                 <a:solidFill>
-                  <a:srgbClr val="556A83"/>
+                  <a:srgbClr val="314359"/>
                 </a:solidFill>
                 <a:latin typeface="Arial"/>
               </a:rPr>
@@ -34456,7 +34500,7 @@
             <a:r>
               <a:rPr sz="1240">
                 <a:solidFill>
-                  <a:srgbClr val="3C3937"/>
+                  <a:srgbClr val="0E1620"/>
                 </a:solidFill>
                 <a:latin typeface="Arial"/>
               </a:rPr>
@@ -34475,7 +34519,7 @@
             <a:r>
               <a:rPr sz="1240" b="1">
                 <a:solidFill>
-                  <a:srgbClr val="556A83"/>
+                  <a:srgbClr val="314359"/>
                 </a:solidFill>
                 <a:latin typeface="Arial"/>
               </a:rPr>
@@ -34493,7 +34537,7 @@
             <a:r>
               <a:rPr sz="1240">
                 <a:solidFill>
-                  <a:srgbClr val="3C3937"/>
+                  <a:srgbClr val="0E1620"/>
                 </a:solidFill>
                 <a:latin typeface="Arial"/>
               </a:rPr>
@@ -34621,7 +34665,7 @@
             <a:r>
               <a:rPr sz="880" b="0" i="0">
                 <a:solidFill>
-                  <a:srgbClr val="6F8990"/>
+                  <a:srgbClr val="556A83"/>
                 </a:solidFill>
                 <a:latin typeface="Arial"/>
               </a:rPr>
@@ -34705,7 +34749,7 @@
               </a:spcAft>
             </a:pPr>
             <a:r>
-              <a:rPr sz="2400" b="0" i="0">
+              <a:rPr sz="2400" b="0" i="0" spc="-90">
                 <a:solidFill>
                   <a:srgbClr val="314359"/>
                 </a:solidFill>
@@ -34749,7 +34793,7 @@
             <a:r>
               <a:rPr sz="680" b="0" i="0">
                 <a:solidFill>
-                  <a:srgbClr val="9A958E"/>
+                  <a:srgbClr val="556A83"/>
                 </a:solidFill>
                 <a:latin typeface="Arial"/>
               </a:rPr>
@@ -34791,7 +34835,7 @@
             <a:r>
               <a:rPr sz="1320" b="1">
                 <a:solidFill>
-                  <a:srgbClr val="556A83"/>
+                  <a:srgbClr val="314359"/>
                 </a:solidFill>
                 <a:latin typeface="Arial"/>
               </a:rPr>
@@ -34809,7 +34853,7 @@
             <a:r>
               <a:rPr sz="1320">
                 <a:solidFill>
-                  <a:srgbClr val="3C3937"/>
+                  <a:srgbClr val="0E1620"/>
                 </a:solidFill>
                 <a:latin typeface="Arial"/>
               </a:rPr>
@@ -34828,7 +34872,7 @@
             <a:r>
               <a:rPr sz="1320" b="1">
                 <a:solidFill>
-                  <a:srgbClr val="556A83"/>
+                  <a:srgbClr val="314359"/>
                 </a:solidFill>
                 <a:latin typeface="Arial"/>
               </a:rPr>
@@ -34846,7 +34890,7 @@
             <a:r>
               <a:rPr sz="1320">
                 <a:solidFill>
-                  <a:srgbClr val="3C3937"/>
+                  <a:srgbClr val="0E1620"/>
                 </a:solidFill>
                 <a:latin typeface="Arial"/>
               </a:rPr>
@@ -34865,7 +34909,7 @@
             <a:r>
               <a:rPr sz="1320" b="1">
                 <a:solidFill>
-                  <a:srgbClr val="556A83"/>
+                  <a:srgbClr val="314359"/>
                 </a:solidFill>
                 <a:latin typeface="Arial"/>
               </a:rPr>
@@ -34883,7 +34927,7 @@
             <a:r>
               <a:rPr sz="1320">
                 <a:solidFill>
-                  <a:srgbClr val="3C3937"/>
+                  <a:srgbClr val="0E1620"/>
                 </a:solidFill>
                 <a:latin typeface="Arial"/>
               </a:rPr>
@@ -34902,7 +34946,7 @@
             <a:r>
               <a:rPr sz="1320" b="1">
                 <a:solidFill>
-                  <a:srgbClr val="556A83"/>
+                  <a:srgbClr val="314359"/>
                 </a:solidFill>
                 <a:latin typeface="Arial"/>
               </a:rPr>
@@ -34920,7 +34964,7 @@
             <a:r>
               <a:rPr sz="1320">
                 <a:solidFill>
-                  <a:srgbClr val="3C3937"/>
+                  <a:srgbClr val="0E1620"/>
                 </a:solidFill>
                 <a:latin typeface="Arial"/>
               </a:rPr>
@@ -35048,7 +35092,7 @@
             <a:r>
               <a:rPr sz="880" b="0" i="0">
                 <a:solidFill>
-                  <a:srgbClr val="6F8990"/>
+                  <a:srgbClr val="556A83"/>
                 </a:solidFill>
                 <a:latin typeface="Arial"/>
               </a:rPr>
@@ -35132,7 +35176,7 @@
               </a:spcAft>
             </a:pPr>
             <a:r>
-              <a:rPr sz="2400" b="0" i="0">
+              <a:rPr sz="2400" b="0" i="0" spc="-90">
                 <a:solidFill>
                   <a:srgbClr val="314359"/>
                 </a:solidFill>
@@ -35176,7 +35220,7 @@
             <a:r>
               <a:rPr sz="680" b="0" i="0">
                 <a:solidFill>
-                  <a:srgbClr val="9A958E"/>
+                  <a:srgbClr val="556A83"/>
                 </a:solidFill>
                 <a:latin typeface="Arial"/>
               </a:rPr>
@@ -35218,7 +35262,7 @@
             <a:r>
               <a:rPr sz="1320" b="1">
                 <a:solidFill>
-                  <a:srgbClr val="556A83"/>
+                  <a:srgbClr val="314359"/>
                 </a:solidFill>
                 <a:latin typeface="Arial"/>
               </a:rPr>
@@ -35236,7 +35280,7 @@
             <a:r>
               <a:rPr sz="1320">
                 <a:solidFill>
-                  <a:srgbClr val="3C3937"/>
+                  <a:srgbClr val="0E1620"/>
                 </a:solidFill>
                 <a:latin typeface="Arial"/>
               </a:rPr>
@@ -35255,7 +35299,7 @@
             <a:r>
               <a:rPr sz="1320" b="1">
                 <a:solidFill>
-                  <a:srgbClr val="556A83"/>
+                  <a:srgbClr val="314359"/>
                 </a:solidFill>
                 <a:latin typeface="Arial"/>
               </a:rPr>
@@ -35273,7 +35317,7 @@
             <a:r>
               <a:rPr sz="1320">
                 <a:solidFill>
-                  <a:srgbClr val="3C3937"/>
+                  <a:srgbClr val="0E1620"/>
                 </a:solidFill>
                 <a:latin typeface="Arial"/>
               </a:rPr>
@@ -35292,7 +35336,7 @@
             <a:r>
               <a:rPr sz="1320" b="1">
                 <a:solidFill>
-                  <a:srgbClr val="556A83"/>
+                  <a:srgbClr val="314359"/>
                 </a:solidFill>
                 <a:latin typeface="Arial"/>
               </a:rPr>
@@ -35310,7 +35354,7 @@
             <a:r>
               <a:rPr sz="1320">
                 <a:solidFill>
-                  <a:srgbClr val="3C3937"/>
+                  <a:srgbClr val="0E1620"/>
                 </a:solidFill>
                 <a:latin typeface="Arial"/>
               </a:rPr>
@@ -35329,7 +35373,7 @@
             <a:r>
               <a:rPr sz="1320" b="1">
                 <a:solidFill>
-                  <a:srgbClr val="556A83"/>
+                  <a:srgbClr val="314359"/>
                 </a:solidFill>
                 <a:latin typeface="Arial"/>
               </a:rPr>
@@ -35347,7 +35391,7 @@
             <a:r>
               <a:rPr sz="1320">
                 <a:solidFill>
-                  <a:srgbClr val="3C3937"/>
+                  <a:srgbClr val="0E1620"/>
                 </a:solidFill>
                 <a:latin typeface="Arial"/>
               </a:rPr>
@@ -35475,7 +35519,7 @@
             <a:r>
               <a:rPr sz="880" b="0" i="0">
                 <a:solidFill>
-                  <a:srgbClr val="6F8990"/>
+                  <a:srgbClr val="556A83"/>
                 </a:solidFill>
                 <a:latin typeface="Arial"/>
               </a:rPr>
@@ -35559,7 +35603,7 @@
               </a:spcAft>
             </a:pPr>
             <a:r>
-              <a:rPr sz="2400" b="0" i="0">
+              <a:rPr sz="2400" b="0" i="0" spc="-90">
                 <a:solidFill>
                   <a:srgbClr val="314359"/>
                 </a:solidFill>
@@ -35603,7 +35647,7 @@
             <a:r>
               <a:rPr sz="680" b="0" i="0">
                 <a:solidFill>
-                  <a:srgbClr val="9A958E"/>
+                  <a:srgbClr val="556A83"/>
                 </a:solidFill>
                 <a:latin typeface="Arial"/>
               </a:rPr>
@@ -35645,7 +35689,7 @@
             <a:r>
               <a:rPr sz="1320" b="1">
                 <a:solidFill>
-                  <a:srgbClr val="556A83"/>
+                  <a:srgbClr val="314359"/>
                 </a:solidFill>
                 <a:latin typeface="Arial"/>
               </a:rPr>
@@ -35663,7 +35707,7 @@
             <a:r>
               <a:rPr sz="1320">
                 <a:solidFill>
-                  <a:srgbClr val="3C3937"/>
+                  <a:srgbClr val="0E1620"/>
                 </a:solidFill>
                 <a:latin typeface="Arial"/>
               </a:rPr>
@@ -35682,7 +35726,7 @@
             <a:r>
               <a:rPr sz="1320" b="1">
                 <a:solidFill>
-                  <a:srgbClr val="556A83"/>
+                  <a:srgbClr val="314359"/>
                 </a:solidFill>
                 <a:latin typeface="Arial"/>
               </a:rPr>
@@ -35700,7 +35744,7 @@
             <a:r>
               <a:rPr sz="1320">
                 <a:solidFill>
-                  <a:srgbClr val="3C3937"/>
+                  <a:srgbClr val="0E1620"/>
                 </a:solidFill>
                 <a:latin typeface="Arial"/>
               </a:rPr>
@@ -35719,7 +35763,7 @@
             <a:r>
               <a:rPr sz="1320" b="1">
                 <a:solidFill>
-                  <a:srgbClr val="556A83"/>
+                  <a:srgbClr val="314359"/>
                 </a:solidFill>
                 <a:latin typeface="Arial"/>
               </a:rPr>
@@ -35737,7 +35781,7 @@
             <a:r>
               <a:rPr sz="1320">
                 <a:solidFill>
-                  <a:srgbClr val="3C3937"/>
+                  <a:srgbClr val="0E1620"/>
                 </a:solidFill>
                 <a:latin typeface="Arial"/>
               </a:rPr>
@@ -35756,7 +35800,7 @@
             <a:r>
               <a:rPr sz="1320" b="1">
                 <a:solidFill>
-                  <a:srgbClr val="556A83"/>
+                  <a:srgbClr val="314359"/>
                 </a:solidFill>
                 <a:latin typeface="Arial"/>
               </a:rPr>
@@ -35774,7 +35818,7 @@
             <a:r>
               <a:rPr sz="1320">
                 <a:solidFill>
-                  <a:srgbClr val="3C3937"/>
+                  <a:srgbClr val="0E1620"/>
                 </a:solidFill>
                 <a:latin typeface="Arial"/>
               </a:rPr>
@@ -35902,7 +35946,7 @@
             <a:r>
               <a:rPr sz="880" b="0" i="0">
                 <a:solidFill>
-                  <a:srgbClr val="6F8990"/>
+                  <a:srgbClr val="556A83"/>
                 </a:solidFill>
                 <a:latin typeface="Arial"/>
               </a:rPr>
@@ -35986,7 +36030,7 @@
               </a:spcAft>
             </a:pPr>
             <a:r>
-              <a:rPr sz="2400" b="0" i="0">
+              <a:rPr sz="2400" b="0" i="0" spc="-90">
                 <a:solidFill>
                   <a:srgbClr val="314359"/>
                 </a:solidFill>
@@ -36030,7 +36074,7 @@
             <a:r>
               <a:rPr sz="1040" b="0" i="1">
                 <a:solidFill>
-                  <a:srgbClr val="64615E"/>
+                  <a:srgbClr val="556A83"/>
                 </a:solidFill>
                 <a:latin typeface="Arial"/>
               </a:rPr>
@@ -36072,7 +36116,7 @@
             <a:r>
               <a:rPr sz="680" b="0" i="0">
                 <a:solidFill>
-                  <a:srgbClr val="9A958E"/>
+                  <a:srgbClr val="556A83"/>
                 </a:solidFill>
                 <a:latin typeface="Arial"/>
               </a:rPr>
@@ -36114,7 +36158,7 @@
             <a:r>
               <a:rPr sz="1240" b="1">
                 <a:solidFill>
-                  <a:srgbClr val="556A83"/>
+                  <a:srgbClr val="314359"/>
                 </a:solidFill>
                 <a:latin typeface="Arial"/>
               </a:rPr>
@@ -36132,7 +36176,7 @@
             <a:r>
               <a:rPr sz="1240">
                 <a:solidFill>
-                  <a:srgbClr val="3C3937"/>
+                  <a:srgbClr val="0E1620"/>
                 </a:solidFill>
                 <a:latin typeface="Arial"/>
               </a:rPr>
@@ -36151,7 +36195,7 @@
             <a:r>
               <a:rPr sz="1240" b="1">
                 <a:solidFill>
-                  <a:srgbClr val="556A83"/>
+                  <a:srgbClr val="314359"/>
                 </a:solidFill>
                 <a:latin typeface="Arial"/>
               </a:rPr>
@@ -36169,7 +36213,7 @@
             <a:r>
               <a:rPr sz="1240">
                 <a:solidFill>
-                  <a:srgbClr val="3C3937"/>
+                  <a:srgbClr val="0E1620"/>
                 </a:solidFill>
                 <a:latin typeface="Arial"/>
               </a:rPr>
@@ -36188,7 +36232,7 @@
             <a:r>
               <a:rPr sz="1240" b="1">
                 <a:solidFill>
-                  <a:srgbClr val="556A83"/>
+                  <a:srgbClr val="314359"/>
                 </a:solidFill>
                 <a:latin typeface="Arial"/>
               </a:rPr>
@@ -36206,7 +36250,7 @@
             <a:r>
               <a:rPr sz="1240">
                 <a:solidFill>
-                  <a:srgbClr val="3C3937"/>
+                  <a:srgbClr val="0E1620"/>
                 </a:solidFill>
                 <a:latin typeface="Arial"/>
               </a:rPr>
@@ -36225,7 +36269,7 @@
             <a:r>
               <a:rPr sz="1240" b="1">
                 <a:solidFill>
-                  <a:srgbClr val="556A83"/>
+                  <a:srgbClr val="314359"/>
                 </a:solidFill>
                 <a:latin typeface="Arial"/>
               </a:rPr>
@@ -36243,7 +36287,7 @@
             <a:r>
               <a:rPr sz="1240">
                 <a:solidFill>
-                  <a:srgbClr val="3C3937"/>
+                  <a:srgbClr val="0E1620"/>
                 </a:solidFill>
                 <a:latin typeface="Arial"/>
               </a:rPr>
@@ -36262,7 +36306,7 @@
             <a:r>
               <a:rPr sz="1240" b="1">
                 <a:solidFill>
-                  <a:srgbClr val="556A83"/>
+                  <a:srgbClr val="314359"/>
                 </a:solidFill>
                 <a:latin typeface="Arial"/>
               </a:rPr>
@@ -36280,7 +36324,7 @@
             <a:r>
               <a:rPr sz="1240">
                 <a:solidFill>
-                  <a:srgbClr val="3C3937"/>
+                  <a:srgbClr val="0E1620"/>
                 </a:solidFill>
                 <a:latin typeface="Arial"/>
               </a:rPr>
@@ -36322,7 +36366,7 @@
             <a:r>
               <a:rPr sz="1120" b="0" i="1">
                 <a:solidFill>
-                  <a:srgbClr val="556A83"/>
+                  <a:srgbClr val="314359"/>
                 </a:solidFill>
                 <a:latin typeface="Arial"/>
               </a:rPr>
@@ -36419,27 +36463,71 @@
       </p:pic>
       <p:sp>
         <p:nvSpPr>
-          <p:cNvPr id="4" name="TextBox 3"/>
-          <p:cNvSpPr txBox="1"/>
-          <p:nvPr/>
-        </p:nvSpPr>
-        <p:spPr>
-          <a:xfrm>
-            <a:off x="731538" y="2974848"/>
-            <a:ext cx="8266382" cy="487680"/>
-          </a:xfrm>
-          <a:prstGeom prst="rect">
-            <a:avLst/>
-          </a:prstGeom>
-          <a:noFill/>
-        </p:spPr>
-        <p:txBody>
-          <a:bodyPr wrap="square" anchor="ctr" lIns="0" rIns="0" tIns="0" bIns="0">
-            <a:spAutoFit/>
-          </a:bodyPr>
-          <a:lstStyle/>
-          <a:p>
-            <a:pPr algn="ctr">
+          <p:cNvPr id="4" name="Rectangle 3"/>
+          <p:cNvSpPr/>
+          <p:nvPr/>
+        </p:nvSpPr>
+        <p:spPr>
+          <a:xfrm>
+            <a:off x="453553" y="2974848"/>
+            <a:ext cx="365769" cy="29802"/>
+          </a:xfrm>
+          <a:prstGeom prst="rect">
+            <a:avLst/>
+          </a:prstGeom>
+          <a:solidFill>
+            <a:srgbClr val="556A83"/>
+          </a:solidFill>
+          <a:ln>
+            <a:noFill/>
+          </a:ln>
+          <a:effectLst/>
+        </p:spPr>
+        <p:style>
+          <a:lnRef idx="1">
+            <a:schemeClr val="accent1"/>
+          </a:lnRef>
+          <a:fillRef idx="3">
+            <a:schemeClr val="accent1"/>
+          </a:fillRef>
+          <a:effectRef idx="2">
+            <a:schemeClr val="accent1"/>
+          </a:effectRef>
+          <a:fontRef idx="minor">
+            <a:schemeClr val="lt1"/>
+          </a:fontRef>
+        </p:style>
+        <p:txBody>
+          <a:bodyPr rtlCol="0" anchor="ctr"/>
+          <a:lstStyle/>
+          <a:p>
+            <a:pPr algn="ctr"/>
+          </a:p>
+        </p:txBody>
+      </p:sp>
+      <p:sp>
+        <p:nvSpPr>
+          <p:cNvPr id="5" name="TextBox 4"/>
+          <p:cNvSpPr txBox="1"/>
+          <p:nvPr/>
+        </p:nvSpPr>
+        <p:spPr>
+          <a:xfrm>
+            <a:off x="438922" y="3169920"/>
+            <a:ext cx="8558998" cy="487680"/>
+          </a:xfrm>
+          <a:prstGeom prst="rect">
+            <a:avLst/>
+          </a:prstGeom>
+          <a:noFill/>
+        </p:spPr>
+        <p:txBody>
+          <a:bodyPr wrap="square" anchor="t" lIns="0" rIns="0" tIns="0" bIns="0">
+            <a:spAutoFit/>
+          </a:bodyPr>
+          <a:lstStyle/>
+          <a:p>
+            <a:pPr algn="l">
               <a:lnSpc>
                 <a:spcPct val="110000"/>
               </a:lnSpc>
@@ -36450,7 +36538,7 @@
             <a:r>
               <a:rPr sz="1040" b="0" i="0">
                 <a:solidFill>
-                  <a:srgbClr val="6F8990"/>
+                  <a:srgbClr val="556A83"/>
                 </a:solidFill>
                 <a:latin typeface="Arial"/>
               </a:rPr>
@@ -36461,27 +36549,27 @@
       </p:sp>
       <p:sp>
         <p:nvSpPr>
-          <p:cNvPr id="5" name="TextBox 4"/>
-          <p:cNvSpPr txBox="1"/>
-          <p:nvPr/>
-        </p:nvSpPr>
-        <p:spPr>
-          <a:xfrm>
-            <a:off x="731538" y="3316224"/>
-            <a:ext cx="8266382" cy="1170432"/>
-          </a:xfrm>
-          <a:prstGeom prst="rect">
-            <a:avLst/>
-          </a:prstGeom>
-          <a:noFill/>
-        </p:spPr>
-        <p:txBody>
-          <a:bodyPr wrap="square" anchor="ctr" lIns="0" rIns="0" tIns="0" bIns="0">
-            <a:spAutoFit/>
-          </a:bodyPr>
-          <a:lstStyle/>
-          <a:p>
-            <a:pPr algn="ctr">
+          <p:cNvPr id="6" name="TextBox 5"/>
+          <p:cNvSpPr txBox="1"/>
+          <p:nvPr/>
+        </p:nvSpPr>
+        <p:spPr>
+          <a:xfrm>
+            <a:off x="438922" y="3511296"/>
+            <a:ext cx="8705305" cy="1365504"/>
+          </a:xfrm>
+          <a:prstGeom prst="rect">
+            <a:avLst/>
+          </a:prstGeom>
+          <a:noFill/>
+        </p:spPr>
+        <p:txBody>
+          <a:bodyPr wrap="square" anchor="t" lIns="0" rIns="0" tIns="0" bIns="0">
+            <a:spAutoFit/>
+          </a:bodyPr>
+          <a:lstStyle/>
+          <a:p>
+            <a:pPr algn="l">
               <a:lnSpc>
                 <a:spcPct val="110000"/>
               </a:lnSpc>
@@ -36490,7 +36578,7 @@
               </a:spcAft>
             </a:pPr>
             <a:r>
-              <a:rPr sz="3200" b="0" i="1">
+              <a:rPr sz="3200" b="0" i="1" spc="-120">
                 <a:solidFill>
                   <a:srgbClr val="E2E5E9"/>
                 </a:solidFill>

--- a/Athanase_Engaged_Ownership_Allocator_Deck.pptx
+++ b/Athanase_Engaged_Ownership_Allocator_Deck.pptx
@@ -7656,7 +7656,7 @@
             <a:avLst/>
           </a:prstGeom>
           <a:solidFill>
-            <a:srgbClr val="A84A4A"/>
+            <a:srgbClr val="314359"/>
           </a:solidFill>
           <a:ln>
             <a:noFill/>
@@ -7718,7 +7718,7 @@
             <a:r>
               <a:rPr sz="960" b="1" i="0">
                 <a:solidFill>
-                  <a:srgbClr val="A84A4A"/>
+                  <a:srgbClr val="314359"/>
                 </a:solidFill>
                 <a:latin typeface="Arial"/>
               </a:rPr>
@@ -21818,9 +21818,9 @@
               </a:spcAft>
             </a:pPr>
             <a:r>
-              <a:rPr sz="800" b="0" i="0">
-                <a:solidFill>
-                  <a:srgbClr val="A84A4A"/>
+              <a:rPr sz="800" b="0" i="1">
+                <a:solidFill>
+                  <a:srgbClr val="556A83"/>
                 </a:solidFill>
                 <a:latin typeface="Arial"/>
               </a:rPr>
@@ -21904,9 +21904,9 @@
               </a:spcAft>
             </a:pPr>
             <a:r>
-              <a:rPr sz="800" b="0" i="0">
-                <a:solidFill>
-                  <a:srgbClr val="A84A4A"/>
+              <a:rPr sz="800" b="0" i="1">
+                <a:solidFill>
+                  <a:srgbClr val="556A83"/>
                 </a:solidFill>
                 <a:latin typeface="Arial"/>
               </a:rPr>
@@ -21990,9 +21990,9 @@
               </a:spcAft>
             </a:pPr>
             <a:r>
-              <a:rPr sz="800" b="0" i="0">
-                <a:solidFill>
-                  <a:srgbClr val="A84A4A"/>
+              <a:rPr sz="800" b="0" i="1">
+                <a:solidFill>
+                  <a:srgbClr val="556A83"/>
                 </a:solidFill>
                 <a:latin typeface="Arial"/>
               </a:rPr>
@@ -28134,9 +28134,9 @@
               </a:spcAft>
             </a:pPr>
             <a:r>
-              <a:rPr sz="800" b="0" i="0">
-                <a:solidFill>
-                  <a:srgbClr val="A84A4A"/>
+              <a:rPr sz="800" b="0" i="1">
+                <a:solidFill>
+                  <a:srgbClr val="556A83"/>
                 </a:solidFill>
                 <a:latin typeface="Arial"/>
               </a:rPr>
@@ -28220,9 +28220,9 @@
               </a:spcAft>
             </a:pPr>
             <a:r>
-              <a:rPr sz="800" b="0" i="0">
-                <a:solidFill>
-                  <a:srgbClr val="A84A4A"/>
+              <a:rPr sz="800" b="0" i="1">
+                <a:solidFill>
+                  <a:srgbClr val="556A83"/>
                 </a:solidFill>
                 <a:latin typeface="Arial"/>
               </a:rPr>
@@ -30714,9 +30714,9 @@
               </a:spcAft>
             </a:pPr>
             <a:r>
-              <a:rPr sz="800" b="0" i="0">
-                <a:solidFill>
-                  <a:srgbClr val="A84A4A"/>
+              <a:rPr sz="800" b="0" i="1">
+                <a:solidFill>
+                  <a:srgbClr val="556A83"/>
                 </a:solidFill>
                 <a:latin typeface="Arial"/>
               </a:rPr>
@@ -30800,9 +30800,9 @@
               </a:spcAft>
             </a:pPr>
             <a:r>
-              <a:rPr sz="800" b="0" i="0">
-                <a:solidFill>
-                  <a:srgbClr val="A84A4A"/>
+              <a:rPr sz="800" b="0" i="1">
+                <a:solidFill>
+                  <a:srgbClr val="556A83"/>
                 </a:solidFill>
                 <a:latin typeface="Arial"/>
               </a:rPr>
@@ -30934,7 +30934,7 @@
                 </a:solidFill>
                 <a:latin typeface="Arial"/>
               </a:rPr>
-              <a:t>Selected larger deals of the investment team. Losses shown in red. Capital in SEK; ~$400M invested over the period.</a:t>
+              <a:t>Selected larger deals of the investment team. Losses shown in italic. Capital in SEK; ~$400M invested over the period.</a:t>
             </a:r>
           </a:p>
         </p:txBody>
@@ -36602,45 +36602,45 @@
   <a:themeElements>
     <a:clrScheme name="Office">
       <a:dk1>
-        <a:sysClr val="windowText" lastClr="000000"/>
+        <a:srgbClr val="152130"/>
       </a:dk1>
       <a:lt1>
-        <a:sysClr val="window" lastClr="FFFFFF"/>
+        <a:srgbClr val="FFFFFF"/>
       </a:lt1>
       <a:dk2>
-        <a:srgbClr val="1F497D"/>
+        <a:srgbClr val="0E1620"/>
       </a:dk2>
       <a:lt2>
-        <a:srgbClr val="EEECE1"/>
+        <a:srgbClr val="F6F7F9"/>
       </a:lt2>
       <a:accent1>
-        <a:srgbClr val="4F81BD"/>
+        <a:srgbClr val="152130"/>
       </a:accent1>
       <a:accent2>
-        <a:srgbClr val="C0504D"/>
+        <a:srgbClr val="314359"/>
       </a:accent2>
       <a:accent3>
-        <a:srgbClr val="9BBB59"/>
+        <a:srgbClr val="556A83"/>
       </a:accent3>
       <a:accent4>
-        <a:srgbClr val="8064A2"/>
+        <a:srgbClr val="0E1620"/>
       </a:accent4>
       <a:accent5>
-        <a:srgbClr val="4BACC6"/>
+        <a:srgbClr val="E2E5E9"/>
       </a:accent5>
       <a:accent6>
-        <a:srgbClr val="F79646"/>
+        <a:srgbClr val="F6F7F9"/>
       </a:accent6>
       <a:hlink>
-        <a:srgbClr val="0000FF"/>
+        <a:srgbClr val="314359"/>
       </a:hlink>
       <a:folHlink>
-        <a:srgbClr val="800080"/>
+        <a:srgbClr val="556A83"/>
       </a:folHlink>
     </a:clrScheme>
     <a:fontScheme name="Office">
       <a:majorFont>
-        <a:latin typeface="Calibri"/>
+        <a:latin typeface="Times New Roman"/>
         <a:ea typeface=""/>
         <a:cs typeface=""/>
         <a:font script="Jpan" typeface="ＭＳ Ｐゴシック"/>
@@ -36675,7 +36675,7 @@
         <a:font script="Geor" typeface="Sylfaen"/>
       </a:majorFont>
       <a:minorFont>
-        <a:latin typeface="Calibri"/>
+        <a:latin typeface="Arial"/>
         <a:ea typeface=""/>
         <a:cs typeface=""/>
         <a:font script="Jpan" typeface="ＭＳ Ｐゴシック"/>

--- a/Athanase_Engaged_Ownership_Allocator_Deck.pptx
+++ b/Athanase_Engaged_Ownership_Allocator_Deck.pptx
@@ -4955,7 +4955,7 @@
           </a:bodyPr>
           <a:lstStyle/>
           <a:p>
-            <a:pPr>
+            <a:pPr marL="175264" indent="-175264">
               <a:lnSpc>
                 <a:spcPct val="112000"/>
               </a:lnSpc>
@@ -4992,7 +4992,7 @@
             </a:r>
           </a:p>
           <a:p>
-            <a:pPr>
+            <a:pPr marL="175264" indent="-175264">
               <a:lnSpc>
                 <a:spcPct val="112000"/>
               </a:lnSpc>
@@ -5029,7 +5029,7 @@
             </a:r>
           </a:p>
           <a:p>
-            <a:pPr>
+            <a:pPr marL="175264" indent="-175264">
               <a:lnSpc>
                 <a:spcPct val="112000"/>
               </a:lnSpc>
@@ -5993,7 +5993,7 @@
           </a:bodyPr>
           <a:lstStyle/>
           <a:p>
-            <a:pPr>
+            <a:pPr marL="169422" indent="-169422">
               <a:lnSpc>
                 <a:spcPct val="112000"/>
               </a:lnSpc>
@@ -6030,7 +6030,7 @@
             </a:r>
           </a:p>
           <a:p>
-            <a:pPr>
+            <a:pPr marL="169422" indent="-169422">
               <a:lnSpc>
                 <a:spcPct val="112000"/>
               </a:lnSpc>
@@ -6067,7 +6067,7 @@
             </a:r>
           </a:p>
           <a:p>
-            <a:pPr>
+            <a:pPr marL="169422" indent="-169422">
               <a:lnSpc>
                 <a:spcPct val="112000"/>
               </a:lnSpc>
@@ -6104,7 +6104,7 @@
             </a:r>
           </a:p>
           <a:p>
-            <a:pPr>
+            <a:pPr marL="169422" indent="-169422">
               <a:lnSpc>
                 <a:spcPct val="112000"/>
               </a:lnSpc>
@@ -6141,7 +6141,7 @@
             </a:r>
           </a:p>
           <a:p>
-            <a:pPr>
+            <a:pPr marL="169422" indent="-169422">
               <a:lnSpc>
                 <a:spcPct val="112000"/>
               </a:lnSpc>
@@ -6541,7 +6541,7 @@
           </a:bodyPr>
           <a:lstStyle/>
           <a:p>
-            <a:pPr>
+            <a:pPr marL="157738" indent="-157738">
               <a:lnSpc>
                 <a:spcPct val="112000"/>
               </a:lnSpc>
@@ -6578,7 +6578,7 @@
             </a:r>
           </a:p>
           <a:p>
-            <a:pPr>
+            <a:pPr marL="157738" indent="-157738">
               <a:lnSpc>
                 <a:spcPct val="112000"/>
               </a:lnSpc>
@@ -6615,7 +6615,7 @@
             </a:r>
           </a:p>
           <a:p>
-            <a:pPr>
+            <a:pPr marL="157738" indent="-157738">
               <a:lnSpc>
                 <a:spcPct val="112000"/>
               </a:lnSpc>
@@ -6652,7 +6652,7 @@
             </a:r>
           </a:p>
           <a:p>
-            <a:pPr>
+            <a:pPr marL="157738" indent="-157738">
               <a:lnSpc>
                 <a:spcPct val="112000"/>
               </a:lnSpc>
@@ -7112,7 +7112,7 @@
           </a:bodyPr>
           <a:lstStyle/>
           <a:p>
-            <a:pPr>
+            <a:pPr marL="157738" indent="-157738">
               <a:lnSpc>
                 <a:spcPct val="112000"/>
               </a:lnSpc>
@@ -7149,7 +7149,7 @@
             </a:r>
           </a:p>
           <a:p>
-            <a:pPr>
+            <a:pPr marL="157738" indent="-157738">
               <a:lnSpc>
                 <a:spcPct val="112000"/>
               </a:lnSpc>
@@ -7186,7 +7186,7 @@
             </a:r>
           </a:p>
           <a:p>
-            <a:pPr>
+            <a:pPr marL="157738" indent="-157738">
               <a:lnSpc>
                 <a:spcPct val="112000"/>
               </a:lnSpc>
@@ -7223,7 +7223,7 @@
             </a:r>
           </a:p>
           <a:p>
-            <a:pPr>
+            <a:pPr marL="157738" indent="-157738">
               <a:lnSpc>
                 <a:spcPct val="112000"/>
               </a:lnSpc>
@@ -12229,7 +12229,7 @@
           </a:bodyPr>
           <a:lstStyle/>
           <a:p>
-            <a:pPr>
+            <a:pPr marL="169422" indent="-169422">
               <a:lnSpc>
                 <a:spcPct val="112000"/>
               </a:lnSpc>
@@ -12266,7 +12266,7 @@
             </a:r>
           </a:p>
           <a:p>
-            <a:pPr>
+            <a:pPr marL="169422" indent="-169422">
               <a:lnSpc>
                 <a:spcPct val="112000"/>
               </a:lnSpc>
@@ -12303,7 +12303,7 @@
             </a:r>
           </a:p>
           <a:p>
-            <a:pPr>
+            <a:pPr marL="169422" indent="-169422">
               <a:lnSpc>
                 <a:spcPct val="112000"/>
               </a:lnSpc>
@@ -12340,7 +12340,7 @@
             </a:r>
           </a:p>
           <a:p>
-            <a:pPr>
+            <a:pPr marL="169422" indent="-169422">
               <a:lnSpc>
                 <a:spcPct val="112000"/>
               </a:lnSpc>
@@ -12377,7 +12377,7 @@
             </a:r>
           </a:p>
           <a:p>
-            <a:pPr>
+            <a:pPr marL="169422" indent="-169422">
               <a:lnSpc>
                 <a:spcPct val="112000"/>
               </a:lnSpc>
@@ -12777,7 +12777,7 @@
           </a:bodyPr>
           <a:lstStyle/>
           <a:p>
-            <a:pPr>
+            <a:pPr marL="157738" indent="-157738">
               <a:lnSpc>
                 <a:spcPct val="112000"/>
               </a:lnSpc>
@@ -12814,7 +12814,7 @@
             </a:r>
           </a:p>
           <a:p>
-            <a:pPr>
+            <a:pPr marL="157738" indent="-157738">
               <a:lnSpc>
                 <a:spcPct val="112000"/>
               </a:lnSpc>
@@ -12851,7 +12851,7 @@
             </a:r>
           </a:p>
           <a:p>
-            <a:pPr>
+            <a:pPr marL="157738" indent="-157738">
               <a:lnSpc>
                 <a:spcPct val="112000"/>
               </a:lnSpc>
@@ -31755,7 +31755,7 @@
           </a:bodyPr>
           <a:lstStyle/>
           <a:p>
-            <a:pPr>
+            <a:pPr marL="163580" indent="-163580">
               <a:lnSpc>
                 <a:spcPct val="112000"/>
               </a:lnSpc>
@@ -31792,7 +31792,7 @@
             </a:r>
           </a:p>
           <a:p>
-            <a:pPr>
+            <a:pPr marL="163580" indent="-163580">
               <a:lnSpc>
                 <a:spcPct val="112000"/>
               </a:lnSpc>
@@ -31829,7 +31829,7 @@
             </a:r>
           </a:p>
           <a:p>
-            <a:pPr>
+            <a:pPr marL="163580" indent="-163580">
               <a:lnSpc>
                 <a:spcPct val="112000"/>
               </a:lnSpc>
@@ -33326,7 +33326,7 @@
           </a:bodyPr>
           <a:lstStyle/>
           <a:p>
-            <a:pPr>
+            <a:pPr marL="186949" indent="-186949">
               <a:lnSpc>
                 <a:spcPct val="112000"/>
               </a:lnSpc>
@@ -33363,7 +33363,7 @@
             </a:r>
           </a:p>
           <a:p>
-            <a:pPr>
+            <a:pPr marL="186949" indent="-186949">
               <a:lnSpc>
                 <a:spcPct val="112000"/>
               </a:lnSpc>
@@ -33400,7 +33400,7 @@
             </a:r>
           </a:p>
           <a:p>
-            <a:pPr>
+            <a:pPr marL="186949" indent="-186949">
               <a:lnSpc>
                 <a:spcPct val="112000"/>
               </a:lnSpc>
@@ -33437,7 +33437,7 @@
             </a:r>
           </a:p>
           <a:p>
-            <a:pPr>
+            <a:pPr marL="186949" indent="-186949">
               <a:lnSpc>
                 <a:spcPct val="112000"/>
               </a:lnSpc>
@@ -34360,7 +34360,7 @@
           </a:bodyPr>
           <a:lstStyle/>
           <a:p>
-            <a:pPr>
+            <a:pPr marL="181107" indent="-181107">
               <a:lnSpc>
                 <a:spcPct val="112000"/>
               </a:lnSpc>
@@ -34397,7 +34397,7 @@
             </a:r>
           </a:p>
           <a:p>
-            <a:pPr>
+            <a:pPr marL="181107" indent="-181107">
               <a:lnSpc>
                 <a:spcPct val="112000"/>
               </a:lnSpc>
@@ -34434,7 +34434,7 @@
             </a:r>
           </a:p>
           <a:p>
-            <a:pPr>
+            <a:pPr marL="181107" indent="-181107">
               <a:lnSpc>
                 <a:spcPct val="112000"/>
               </a:lnSpc>
@@ -34471,7 +34471,7 @@
             </a:r>
           </a:p>
           <a:p>
-            <a:pPr>
+            <a:pPr marL="181107" indent="-181107">
               <a:lnSpc>
                 <a:spcPct val="112000"/>
               </a:lnSpc>
@@ -34508,7 +34508,7 @@
             </a:r>
           </a:p>
           <a:p>
-            <a:pPr>
+            <a:pPr marL="181107" indent="-181107">
               <a:lnSpc>
                 <a:spcPct val="112000"/>
               </a:lnSpc>
@@ -34824,7 +34824,7 @@
           </a:bodyPr>
           <a:lstStyle/>
           <a:p>
-            <a:pPr>
+            <a:pPr marL="192790" indent="-192790">
               <a:lnSpc>
                 <a:spcPct val="112000"/>
               </a:lnSpc>
@@ -34861,7 +34861,7 @@
             </a:r>
           </a:p>
           <a:p>
-            <a:pPr>
+            <a:pPr marL="192790" indent="-192790">
               <a:lnSpc>
                 <a:spcPct val="112000"/>
               </a:lnSpc>
@@ -34898,7 +34898,7 @@
             </a:r>
           </a:p>
           <a:p>
-            <a:pPr>
+            <a:pPr marL="192790" indent="-192790">
               <a:lnSpc>
                 <a:spcPct val="112000"/>
               </a:lnSpc>
@@ -34935,7 +34935,7 @@
             </a:r>
           </a:p>
           <a:p>
-            <a:pPr>
+            <a:pPr marL="192790" indent="-192790">
               <a:lnSpc>
                 <a:spcPct val="112000"/>
               </a:lnSpc>
@@ -35251,7 +35251,7 @@
           </a:bodyPr>
           <a:lstStyle/>
           <a:p>
-            <a:pPr>
+            <a:pPr marL="192790" indent="-192790">
               <a:lnSpc>
                 <a:spcPct val="112000"/>
               </a:lnSpc>
@@ -35288,7 +35288,7 @@
             </a:r>
           </a:p>
           <a:p>
-            <a:pPr>
+            <a:pPr marL="192790" indent="-192790">
               <a:lnSpc>
                 <a:spcPct val="112000"/>
               </a:lnSpc>
@@ -35325,7 +35325,7 @@
             </a:r>
           </a:p>
           <a:p>
-            <a:pPr>
+            <a:pPr marL="192790" indent="-192790">
               <a:lnSpc>
                 <a:spcPct val="112000"/>
               </a:lnSpc>
@@ -35362,7 +35362,7 @@
             </a:r>
           </a:p>
           <a:p>
-            <a:pPr>
+            <a:pPr marL="192790" indent="-192790">
               <a:lnSpc>
                 <a:spcPct val="112000"/>
               </a:lnSpc>
@@ -35678,7 +35678,7 @@
           </a:bodyPr>
           <a:lstStyle/>
           <a:p>
-            <a:pPr>
+            <a:pPr marL="192790" indent="-192790">
               <a:lnSpc>
                 <a:spcPct val="112000"/>
               </a:lnSpc>
@@ -35715,7 +35715,7 @@
             </a:r>
           </a:p>
           <a:p>
-            <a:pPr>
+            <a:pPr marL="192790" indent="-192790">
               <a:lnSpc>
                 <a:spcPct val="112000"/>
               </a:lnSpc>
@@ -35752,7 +35752,7 @@
             </a:r>
           </a:p>
           <a:p>
-            <a:pPr>
+            <a:pPr marL="192790" indent="-192790">
               <a:lnSpc>
                 <a:spcPct val="112000"/>
               </a:lnSpc>
@@ -35789,7 +35789,7 @@
             </a:r>
           </a:p>
           <a:p>
-            <a:pPr>
+            <a:pPr marL="192790" indent="-192790">
               <a:lnSpc>
                 <a:spcPct val="112000"/>
               </a:lnSpc>
@@ -36147,7 +36147,7 @@
           </a:bodyPr>
           <a:lstStyle/>
           <a:p>
-            <a:pPr>
+            <a:pPr marL="181107" indent="-181107">
               <a:lnSpc>
                 <a:spcPct val="112000"/>
               </a:lnSpc>
@@ -36184,7 +36184,7 @@
             </a:r>
           </a:p>
           <a:p>
-            <a:pPr>
+            <a:pPr marL="181107" indent="-181107">
               <a:lnSpc>
                 <a:spcPct val="112000"/>
               </a:lnSpc>
@@ -36221,7 +36221,7 @@
             </a:r>
           </a:p>
           <a:p>
-            <a:pPr>
+            <a:pPr marL="181107" indent="-181107">
               <a:lnSpc>
                 <a:spcPct val="112000"/>
               </a:lnSpc>
@@ -36258,7 +36258,7 @@
             </a:r>
           </a:p>
           <a:p>
-            <a:pPr>
+            <a:pPr marL="181107" indent="-181107">
               <a:lnSpc>
                 <a:spcPct val="112000"/>
               </a:lnSpc>
@@ -36295,7 +36295,7 @@
             </a:r>
           </a:p>
           <a:p>
-            <a:pPr>
+            <a:pPr marL="181107" indent="-181107">
               <a:lnSpc>
                 <a:spcPct val="112000"/>
               </a:lnSpc>

--- a/Athanase_Engaged_Ownership_Allocator_Deck.pptx
+++ b/Athanase_Engaged_Ownership_Allocator_Deck.pptx
@@ -32,6 +32,7 @@
     <p:sldId id="280" r:id="rId31"/>
     <p:sldId id="281" r:id="rId32"/>
     <p:sldId id="282" r:id="rId33"/>
+    <p:sldId id="283" r:id="rId34"/>
   </p:sldIdLst>
   <p:sldSz cx="9753600" cy="7315200" type="screen4x3"/>
   <p:notesSz cx="6858000" cy="9144000"/>
@@ -985,6 +986,449 @@
 </c:chartSpace>
 </file>
 
+<file path=ppt/charts/chart4.xml><?xml version="1.0" encoding="utf-8"?>
+<c:chartSpace xmlns:c="http://schemas.openxmlformats.org/drawingml/2006/chart" xmlns:a="http://schemas.openxmlformats.org/drawingml/2006/main" xmlns:r="http://schemas.openxmlformats.org/officeDocument/2006/relationships">
+  <c:date1904 val="0"/>
+  <c:chart>
+    <c:title>
+      <c:tx>
+        <c:rich>
+          <a:bodyPr/>
+          <a:lstStyle/>
+          <a:p>
+            <a:r>
+              <a:rPr sz="880">
+                <a:solidFill>
+                  <a:srgbClr val="556A83"/>
+                </a:solidFill>
+              </a:rPr>
+              <a:t>Figure 5.  Growth of a 100 sleeve over 10 years (indexed)</a:t>
+            </a:r>
+          </a:p>
+        </c:rich>
+      </c:tx>
+      <c:layout/>
+      <c:overlay val="0"/>
+    </c:title>
+    <c:autoTitleDeleted val="0"/>
+    <c:plotArea>
+      <c:lineChart>
+        <c:grouping val="standard"/>
+        <c:varyColors val="0"/>
+        <c:ser>
+          <c:idx val="0"/>
+          <c:order val="0"/>
+          <c:tx>
+            <c:strRef>
+              <c:f>Sheet1!$B$1</c:f>
+              <c:strCache>
+                <c:ptCount val="1"/>
+                <c:pt idx="0">
+                  <c:v>Athanase (18%)</c:v>
+                </c:pt>
+              </c:strCache>
+            </c:strRef>
+          </c:tx>
+          <c:spPr>
+            <a:ln w="38100">
+              <a:solidFill>
+                <a:srgbClr val="152130"/>
+              </a:solidFill>
+            </a:ln>
+          </c:spPr>
+          <c:marker>
+            <c:symbol val="none"/>
+          </c:marker>
+          <c:cat>
+            <c:strRef>
+              <c:f>Sheet1!$A$2:$A$12</c:f>
+              <c:strCache>
+                <c:ptCount val="11"/>
+                <c:pt idx="0">
+                  <c:v>0</c:v>
+                </c:pt>
+                <c:pt idx="1">
+                  <c:v>1</c:v>
+                </c:pt>
+                <c:pt idx="2">
+                  <c:v>2</c:v>
+                </c:pt>
+                <c:pt idx="3">
+                  <c:v>3</c:v>
+                </c:pt>
+                <c:pt idx="4">
+                  <c:v>4</c:v>
+                </c:pt>
+                <c:pt idx="5">
+                  <c:v>5</c:v>
+                </c:pt>
+                <c:pt idx="6">
+                  <c:v>6</c:v>
+                </c:pt>
+                <c:pt idx="7">
+                  <c:v>7</c:v>
+                </c:pt>
+                <c:pt idx="8">
+                  <c:v>8</c:v>
+                </c:pt>
+                <c:pt idx="9">
+                  <c:v>9</c:v>
+                </c:pt>
+                <c:pt idx="10">
+                  <c:v>10</c:v>
+                </c:pt>
+              </c:strCache>
+            </c:strRef>
+          </c:cat>
+          <c:val>
+            <c:numRef>
+              <c:f>Sheet1!$B$2:$B$12</c:f>
+              <c:numCache>
+                <c:formatCode>General</c:formatCode>
+                <c:ptCount val="11"/>
+                <c:pt idx="0">
+                  <c:v>100</c:v>
+                </c:pt>
+                <c:pt idx="1">
+                  <c:v>118</c:v>
+                </c:pt>
+                <c:pt idx="2">
+                  <c:v>139</c:v>
+                </c:pt>
+                <c:pt idx="3">
+                  <c:v>164</c:v>
+                </c:pt>
+                <c:pt idx="4">
+                  <c:v>194</c:v>
+                </c:pt>
+                <c:pt idx="5">
+                  <c:v>229</c:v>
+                </c:pt>
+                <c:pt idx="6">
+                  <c:v>270</c:v>
+                </c:pt>
+                <c:pt idx="7">
+                  <c:v>319</c:v>
+                </c:pt>
+                <c:pt idx="8">
+                  <c:v>376</c:v>
+                </c:pt>
+                <c:pt idx="9">
+                  <c:v>444</c:v>
+                </c:pt>
+                <c:pt idx="10">
+                  <c:v>523</c:v>
+                </c:pt>
+              </c:numCache>
+            </c:numRef>
+          </c:val>
+          <c:smooth/>
+        </c:ser>
+        <c:ser>
+          <c:idx val="1"/>
+          <c:order val="1"/>
+          <c:tx>
+            <c:strRef>
+              <c:f>Sheet1!$C$1</c:f>
+              <c:strCache>
+                <c:ptCount val="1"/>
+                <c:pt idx="0">
+                  <c:v>Other activist (10.5%)</c:v>
+                </c:pt>
+              </c:strCache>
+            </c:strRef>
+          </c:tx>
+          <c:spPr>
+            <a:ln w="25400">
+              <a:solidFill>
+                <a:srgbClr val="556A83"/>
+              </a:solidFill>
+            </a:ln>
+          </c:spPr>
+          <c:marker>
+            <c:symbol val="none"/>
+          </c:marker>
+          <c:cat>
+            <c:strRef>
+              <c:f>Sheet1!$A$2:$A$12</c:f>
+              <c:strCache>
+                <c:ptCount val="11"/>
+                <c:pt idx="0">
+                  <c:v>0</c:v>
+                </c:pt>
+                <c:pt idx="1">
+                  <c:v>1</c:v>
+                </c:pt>
+                <c:pt idx="2">
+                  <c:v>2</c:v>
+                </c:pt>
+                <c:pt idx="3">
+                  <c:v>3</c:v>
+                </c:pt>
+                <c:pt idx="4">
+                  <c:v>4</c:v>
+                </c:pt>
+                <c:pt idx="5">
+                  <c:v>5</c:v>
+                </c:pt>
+                <c:pt idx="6">
+                  <c:v>6</c:v>
+                </c:pt>
+                <c:pt idx="7">
+                  <c:v>7</c:v>
+                </c:pt>
+                <c:pt idx="8">
+                  <c:v>8</c:v>
+                </c:pt>
+                <c:pt idx="9">
+                  <c:v>9</c:v>
+                </c:pt>
+                <c:pt idx="10">
+                  <c:v>10</c:v>
+                </c:pt>
+              </c:strCache>
+            </c:strRef>
+          </c:cat>
+          <c:val>
+            <c:numRef>
+              <c:f>Sheet1!$C$2:$C$12</c:f>
+              <c:numCache>
+                <c:formatCode>General</c:formatCode>
+                <c:ptCount val="11"/>
+                <c:pt idx="0">
+                  <c:v>100</c:v>
+                </c:pt>
+                <c:pt idx="1">
+                  <c:v>111</c:v>
+                </c:pt>
+                <c:pt idx="2">
+                  <c:v>122</c:v>
+                </c:pt>
+                <c:pt idx="3">
+                  <c:v>135</c:v>
+                </c:pt>
+                <c:pt idx="4">
+                  <c:v>149</c:v>
+                </c:pt>
+                <c:pt idx="5">
+                  <c:v>165</c:v>
+                </c:pt>
+                <c:pt idx="6">
+                  <c:v>182</c:v>
+                </c:pt>
+                <c:pt idx="7">
+                  <c:v>201</c:v>
+                </c:pt>
+                <c:pt idx="8">
+                  <c:v>222</c:v>
+                </c:pt>
+                <c:pt idx="9">
+                  <c:v>246</c:v>
+                </c:pt>
+                <c:pt idx="10">
+                  <c:v>271</c:v>
+                </c:pt>
+              </c:numCache>
+            </c:numRef>
+          </c:val>
+          <c:smooth/>
+        </c:ser>
+        <c:ser>
+          <c:idx val="2"/>
+          <c:order val="2"/>
+          <c:tx>
+            <c:strRef>
+              <c:f>Sheet1!$D$1</c:f>
+              <c:strCache>
+                <c:ptCount val="1"/>
+                <c:pt idx="0">
+                  <c:v>Long-only global (7.6%)</c:v>
+                </c:pt>
+              </c:strCache>
+            </c:strRef>
+          </c:tx>
+          <c:spPr>
+            <a:ln w="25400">
+              <a:solidFill>
+                <a:srgbClr val="E2E5E9"/>
+              </a:solidFill>
+              <a:prstDash val="sysDash"/>
+            </a:ln>
+          </c:spPr>
+          <c:marker>
+            <c:symbol val="none"/>
+          </c:marker>
+          <c:cat>
+            <c:strRef>
+              <c:f>Sheet1!$A$2:$A$12</c:f>
+              <c:strCache>
+                <c:ptCount val="11"/>
+                <c:pt idx="0">
+                  <c:v>0</c:v>
+                </c:pt>
+                <c:pt idx="1">
+                  <c:v>1</c:v>
+                </c:pt>
+                <c:pt idx="2">
+                  <c:v>2</c:v>
+                </c:pt>
+                <c:pt idx="3">
+                  <c:v>3</c:v>
+                </c:pt>
+                <c:pt idx="4">
+                  <c:v>4</c:v>
+                </c:pt>
+                <c:pt idx="5">
+                  <c:v>5</c:v>
+                </c:pt>
+                <c:pt idx="6">
+                  <c:v>6</c:v>
+                </c:pt>
+                <c:pt idx="7">
+                  <c:v>7</c:v>
+                </c:pt>
+                <c:pt idx="8">
+                  <c:v>8</c:v>
+                </c:pt>
+                <c:pt idx="9">
+                  <c:v>9</c:v>
+                </c:pt>
+                <c:pt idx="10">
+                  <c:v>10</c:v>
+                </c:pt>
+              </c:strCache>
+            </c:strRef>
+          </c:cat>
+          <c:val>
+            <c:numRef>
+              <c:f>Sheet1!$D$2:$D$12</c:f>
+              <c:numCache>
+                <c:formatCode>General</c:formatCode>
+                <c:ptCount val="11"/>
+                <c:pt idx="0">
+                  <c:v>100</c:v>
+                </c:pt>
+                <c:pt idx="1">
+                  <c:v>108</c:v>
+                </c:pt>
+                <c:pt idx="2">
+                  <c:v>116</c:v>
+                </c:pt>
+                <c:pt idx="3">
+                  <c:v>125</c:v>
+                </c:pt>
+                <c:pt idx="4">
+                  <c:v>134</c:v>
+                </c:pt>
+                <c:pt idx="5">
+                  <c:v>144</c:v>
+                </c:pt>
+                <c:pt idx="6">
+                  <c:v>155</c:v>
+                </c:pt>
+                <c:pt idx="7">
+                  <c:v>167</c:v>
+                </c:pt>
+                <c:pt idx="8">
+                  <c:v>180</c:v>
+                </c:pt>
+                <c:pt idx="9">
+                  <c:v>193</c:v>
+                </c:pt>
+                <c:pt idx="10">
+                  <c:v>208</c:v>
+                </c:pt>
+              </c:numCache>
+            </c:numRef>
+          </c:val>
+          <c:smooth/>
+        </c:ser>
+        <c:marker val="1"/>
+        <c:smooth val="0"/>
+        <c:axId val="2118791784"/>
+        <c:axId val="2140495176"/>
+      </c:lineChart>
+      <c:catAx>
+        <c:axId val="2118791784"/>
+        <c:scaling>
+          <c:orientation val="minMax"/>
+        </c:scaling>
+        <c:delete val="0"/>
+        <c:axPos val="b"/>
+        <c:majorTickMark val="out"/>
+        <c:minorTickMark val="none"/>
+        <c:tickLblPos val="nextTo"/>
+        <c:txPr>
+          <a:bodyPr/>
+          <a:lstStyle/>
+          <a:p>
+            <a:pPr>
+              <a:defRPr sz="720"/>
+            </a:pPr>
+          </a:p>
+        </c:txPr>
+        <c:crossAx val="2140495176"/>
+        <c:crosses val="autoZero"/>
+        <c:auto val="1"/>
+        <c:lblAlgn val="ctr"/>
+        <c:lblOffset val="100"/>
+        <c:noMultiLvlLbl val="0"/>
+      </c:catAx>
+      <c:valAx>
+        <c:axId val="2140495176"/>
+        <c:scaling/>
+        <c:delete val="0"/>
+        <c:axPos val="l"/>
+        <c:majorTickMark val="out"/>
+        <c:minorTickMark val="none"/>
+        <c:tickLblPos val="nextTo"/>
+        <c:txPr>
+          <a:bodyPr/>
+          <a:lstStyle/>
+          <a:p>
+            <a:pPr>
+              <a:defRPr sz="720"/>
+            </a:pPr>
+          </a:p>
+        </c:txPr>
+        <c:crossAx val="2118791784"/>
+        <c:crosses val="autoZero"/>
+      </c:valAx>
+    </c:plotArea>
+    <c:legend>
+      <c:legendPos val="b"/>
+      <c:layout/>
+      <c:overlay val="0"/>
+      <c:txPr>
+        <a:bodyPr/>
+        <a:lstStyle/>
+        <a:p>
+          <a:pPr>
+            <a:defRPr sz="800"/>
+          </a:pPr>
+        </a:p>
+      </c:txPr>
+    </c:legend>
+    <c:plotVisOnly val="1"/>
+    <c:dispBlanksAs val="gap"/>
+    <c:showDLblsOverMax val="0"/>
+  </c:chart>
+  <c:txPr>
+    <a:bodyPr/>
+    <a:lstStyle/>
+    <a:p>
+      <a:pPr>
+        <a:defRPr sz="1440"/>
+      </a:pPr>
+      <a:endParaRPr lang="en-US"/>
+    </a:p>
+  </c:txPr>
+  <c:externalData r:id="rId1">
+    <c:autoUpdate val="0"/>
+  </c:externalData>
+</c:chartSpace>
+</file>
+
 <file path=ppt/slideLayouts/slideLayout1.xml><?xml version="1.0" encoding="utf-8"?>
 <p:sldLayout xmlns:a="http://schemas.openxmlformats.org/drawingml/2006/main" xmlns:r="http://schemas.openxmlformats.org/officeDocument/2006/relationships" xmlns:p="http://schemas.openxmlformats.org/presentationml/2006/main" type="title" preserve="1">
   <p:cSld name="Title Slide">
@@ -15613,6 +16057,43 @@
                 </a:solidFill>
                 <a:latin typeface="Arial"/>
               </a:rPr>
+              <a:t>What it does to an allocator’s portfolio</a:t>
+            </a:r>
+            <a:r>
+              <a:rPr sz="760" i="1">
+                <a:solidFill>
+                  <a:srgbClr val="556A83"/>
+                </a:solidFill>
+                <a:latin typeface="Arial"/>
+              </a:rPr>
+              <a:t>   (Figure 5)</a:t>
+            </a:r>
+          </a:p>
+          <a:p>
+            <a:pPr>
+              <a:lnSpc>
+                <a:spcPct val="104000"/>
+              </a:lnSpc>
+              <a:spcAft>
+                <a:spcPts val="700"/>
+              </a:spcAft>
+            </a:pPr>
+            <a:r>
+              <a:rPr sz="919" b="1">
+                <a:solidFill>
+                  <a:srgbClr val="314359"/>
+                </a:solidFill>
+                <a:latin typeface="Arial"/>
+              </a:rPr>
+              <a:t>2.18   </a:t>
+            </a:r>
+            <a:r>
+              <a:rPr sz="919">
+                <a:solidFill>
+                  <a:srgbClr val="314359"/>
+                </a:solidFill>
+                <a:latin typeface="Arial"/>
+              </a:rPr>
               <a:t>Responsible ownership, by construction</a:t>
             </a:r>
           </a:p>
@@ -33171,21 +33652,63 @@
                 </a:solidFill>
                 <a:latin typeface="Arial"/>
               </a:rPr>
-              <a:t>Ownership Model</a:t>
-            </a:r>
-          </a:p>
-        </p:txBody>
-      </p:sp>
-      <p:sp>
-        <p:nvSpPr>
-          <p:cNvPr id="5" name="Rectangle 4"/>
+              <a:t>Portfolio Impact</a:t>
+            </a:r>
+          </a:p>
+        </p:txBody>
+      </p:sp>
+      <p:sp>
+        <p:nvSpPr>
+          <p:cNvPr id="5" name="TextBox 4"/>
+          <p:cNvSpPr txBox="1"/>
+          <p:nvPr/>
+        </p:nvSpPr>
+        <p:spPr>
+          <a:xfrm>
+            <a:off x="7242229" y="263347"/>
+            <a:ext cx="2084884" cy="292608"/>
+          </a:xfrm>
+          <a:prstGeom prst="rect">
+            <a:avLst/>
+          </a:prstGeom>
+          <a:noFill/>
+        </p:spPr>
+        <p:txBody>
+          <a:bodyPr wrap="square" anchor="t" lIns="0" rIns="0" tIns="0" bIns="0">
+            <a:spAutoFit/>
+          </a:bodyPr>
+          <a:lstStyle/>
+          <a:p>
+            <a:pPr algn="r">
+              <a:lnSpc>
+                <a:spcPct val="110000"/>
+              </a:lnSpc>
+              <a:spcAft>
+                <a:spcPts val="0"/>
+              </a:spcAft>
+            </a:pPr>
+            <a:r>
+              <a:rPr sz="880" b="1" i="0">
+                <a:solidFill>
+                  <a:srgbClr val="556A83"/>
+                </a:solidFill>
+                <a:latin typeface="Arial"/>
+              </a:rPr>
+              <a:t>Figure 5</a:t>
+            </a:r>
+          </a:p>
+        </p:txBody>
+      </p:sp>
+      <p:sp>
+        <p:nvSpPr>
+          <p:cNvPr id="6" name="Rectangle 5"/>
           <p:cNvSpPr/>
           <p:nvPr/>
         </p:nvSpPr>
         <p:spPr>
           <a:xfrm>
             <a:off x="0" y="604723"/>
-            <a:ext cx="9753600" cy="1024128"/>
+            <a:ext cx="9753600" cy="1414272"/>
           </a:xfrm>
           <a:prstGeom prst="rect">
             <a:avLst/>
@@ -33222,7 +33745,7 @@
       </p:sp>
       <p:sp>
         <p:nvSpPr>
-          <p:cNvPr id="6" name="TextBox 5"/>
+          <p:cNvPr id="7" name="TextBox 6"/>
           <p:cNvSpPr txBox="1"/>
           <p:nvPr/>
         </p:nvSpPr>
@@ -33257,14 +33780,56 @@
                 </a:solidFill>
                 <a:latin typeface="Times New Roman"/>
               </a:rPr>
-              <a:t>2.17 Responsible ownership, by construction</a:t>
-            </a:r>
-          </a:p>
-        </p:txBody>
-      </p:sp>
-      <p:sp>
-        <p:nvSpPr>
-          <p:cNvPr id="7" name="TextBox 6"/>
+              <a:t>2.17 What it does to an allocator’s portfolio</a:t>
+            </a:r>
+          </a:p>
+        </p:txBody>
+      </p:sp>
+      <p:sp>
+        <p:nvSpPr>
+          <p:cNvPr id="8" name="TextBox 7"/>
+          <p:cNvSpPr txBox="1"/>
+          <p:nvPr/>
+        </p:nvSpPr>
+        <p:spPr>
+          <a:xfrm>
+            <a:off x="453553" y="1511808"/>
+            <a:ext cx="8705305" cy="487680"/>
+          </a:xfrm>
+          <a:prstGeom prst="rect">
+            <a:avLst/>
+          </a:prstGeom>
+          <a:noFill/>
+        </p:spPr>
+        <p:txBody>
+          <a:bodyPr wrap="square" anchor="t" lIns="0" rIns="0" tIns="0" bIns="0">
+            <a:spAutoFit/>
+          </a:bodyPr>
+          <a:lstStyle/>
+          <a:p>
+            <a:pPr algn="l">
+              <a:lnSpc>
+                <a:spcPct val="110000"/>
+              </a:lnSpc>
+              <a:spcAft>
+                <a:spcPts val="0"/>
+              </a:spcAft>
+            </a:pPr>
+            <a:r>
+              <a:rPr sz="1040" b="0" i="1">
+                <a:solidFill>
+                  <a:srgbClr val="556A83"/>
+                </a:solidFill>
+                <a:latin typeface="Arial"/>
+              </a:rPr>
+              <a:t>Illustrative: redirecting a sleeve into Athanase rather than a long-only global fund or another activist.</a:t>
+            </a:r>
+          </a:p>
+        </p:txBody>
+      </p:sp>
+      <p:sp>
+        <p:nvSpPr>
+          <p:cNvPr id="9" name="TextBox 8"/>
           <p:cNvSpPr txBox="1"/>
           <p:nvPr/>
         </p:nvSpPr>
@@ -33304,16 +33869,34 @@
           </a:p>
         </p:txBody>
       </p:sp>
-      <p:sp>
-        <p:nvSpPr>
-          <p:cNvPr id="8" name="TextBox 7"/>
-          <p:cNvSpPr txBox="1"/>
-          <p:nvPr/>
-        </p:nvSpPr>
-        <p:spPr>
-          <a:xfrm>
-            <a:off x="548653" y="1901952"/>
-            <a:ext cx="8705305" cy="4584192"/>
+      <p:graphicFrame>
+        <p:nvGraphicFramePr>
+          <p:cNvPr id="10" name="Chart 9"/>
+          <p:cNvGraphicFramePr>
+            <a:graphicFrameLocks noGrp="1"/>
+          </p:cNvGraphicFramePr>
+          <p:nvPr/>
+        </p:nvGraphicFramePr>
+        <p:xfrm>
+          <a:off x="438922" y="2340864"/>
+          <a:ext cx="4901306" cy="4096512"/>
+        </p:xfrm>
+        <a:graphic>
+          <a:graphicData uri="http://schemas.openxmlformats.org/drawingml/2006/chart">
+            <c:chart xmlns:c="http://schemas.openxmlformats.org/drawingml/2006/chart" r:id="rId3"/>
+          </a:graphicData>
+        </a:graphic>
+      </p:graphicFrame>
+      <p:sp>
+        <p:nvSpPr>
+          <p:cNvPr id="11" name="TextBox 10"/>
+          <p:cNvSpPr txBox="1"/>
+          <p:nvPr/>
+        </p:nvSpPr>
+        <p:spPr>
+          <a:xfrm>
+            <a:off x="4791575" y="2828544"/>
+            <a:ext cx="950999" cy="292608"/>
           </a:xfrm>
           <a:prstGeom prst="rect">
             <a:avLst/>
@@ -33326,151 +33909,1264 @@
           </a:bodyPr>
           <a:lstStyle/>
           <a:p>
-            <a:pPr marL="186949" indent="-186949">
-              <a:lnSpc>
-                <a:spcPct val="112000"/>
-              </a:lnSpc>
-              <a:spcAft>
-                <a:spcPts val="1400"/>
-              </a:spcAft>
-            </a:pPr>
-            <a:r>
-              <a:rPr sz="1280" b="1">
+            <a:pPr algn="l">
+              <a:lnSpc>
+                <a:spcPct val="110000"/>
+              </a:lnSpc>
+              <a:spcAft>
+                <a:spcPts val="0"/>
+              </a:spcAft>
+            </a:pPr>
+            <a:r>
+              <a:rPr sz="960" b="1" i="0">
                 <a:solidFill>
                   <a:srgbClr val="314359"/>
                 </a:solidFill>
                 <a:latin typeface="Arial"/>
               </a:rPr>
-              <a:t>›  </a:t>
-            </a:r>
-            <a:r>
-              <a:rPr sz="1280" b="1">
+              <a:t>523</a:t>
+            </a:r>
+          </a:p>
+        </p:txBody>
+      </p:sp>
+      <p:sp>
+        <p:nvSpPr>
+          <p:cNvPr id="12" name="TextBox 11"/>
+          <p:cNvSpPr txBox="1"/>
+          <p:nvPr/>
+        </p:nvSpPr>
+        <p:spPr>
+          <a:xfrm>
+            <a:off x="4791575" y="4584192"/>
+            <a:ext cx="950999" cy="292608"/>
+          </a:xfrm>
+          <a:prstGeom prst="rect">
+            <a:avLst/>
+          </a:prstGeom>
+          <a:noFill/>
+        </p:spPr>
+        <p:txBody>
+          <a:bodyPr wrap="square" anchor="t" lIns="0" rIns="0" tIns="0" bIns="0">
+            <a:spAutoFit/>
+          </a:bodyPr>
+          <a:lstStyle/>
+          <a:p>
+            <a:pPr algn="l">
+              <a:lnSpc>
+                <a:spcPct val="110000"/>
+              </a:lnSpc>
+              <a:spcAft>
+                <a:spcPts val="0"/>
+              </a:spcAft>
+            </a:pPr>
+            <a:r>
+              <a:rPr sz="880" b="1" i="0">
+                <a:solidFill>
+                  <a:srgbClr val="556A83"/>
+                </a:solidFill>
+                <a:latin typeface="Arial"/>
+              </a:rPr>
+              <a:t>271</a:t>
+            </a:r>
+          </a:p>
+        </p:txBody>
+      </p:sp>
+      <p:sp>
+        <p:nvSpPr>
+          <p:cNvPr id="13" name="TextBox 12"/>
+          <p:cNvSpPr txBox="1"/>
+          <p:nvPr/>
+        </p:nvSpPr>
+        <p:spPr>
+          <a:xfrm>
+            <a:off x="4791575" y="5169408"/>
+            <a:ext cx="950999" cy="292608"/>
+          </a:xfrm>
+          <a:prstGeom prst="rect">
+            <a:avLst/>
+          </a:prstGeom>
+          <a:noFill/>
+        </p:spPr>
+        <p:txBody>
+          <a:bodyPr wrap="square" anchor="t" lIns="0" rIns="0" tIns="0" bIns="0">
+            <a:spAutoFit/>
+          </a:bodyPr>
+          <a:lstStyle/>
+          <a:p>
+            <a:pPr algn="l">
+              <a:lnSpc>
+                <a:spcPct val="110000"/>
+              </a:lnSpc>
+              <a:spcAft>
+                <a:spcPts val="0"/>
+              </a:spcAft>
+            </a:pPr>
+            <a:r>
+              <a:rPr sz="880" b="0" i="0">
+                <a:solidFill>
+                  <a:srgbClr val="556A83"/>
+                </a:solidFill>
+                <a:latin typeface="Arial"/>
+              </a:rPr>
+              <a:t>208</a:t>
+            </a:r>
+          </a:p>
+        </p:txBody>
+      </p:sp>
+      <p:sp>
+        <p:nvSpPr>
+          <p:cNvPr id="14" name="TextBox 13"/>
+          <p:cNvSpPr txBox="1"/>
+          <p:nvPr/>
+        </p:nvSpPr>
+        <p:spPr>
+          <a:xfrm>
+            <a:off x="5888883" y="2340864"/>
+            <a:ext cx="3365076" cy="536448"/>
+          </a:xfrm>
+          <a:prstGeom prst="rect">
+            <a:avLst/>
+          </a:prstGeom>
+          <a:noFill/>
+        </p:spPr>
+        <p:txBody>
+          <a:bodyPr wrap="square" anchor="t" lIns="0" rIns="0" tIns="0" bIns="0">
+            <a:spAutoFit/>
+          </a:bodyPr>
+          <a:lstStyle/>
+          <a:p>
+            <a:pPr algn="l">
+              <a:lnSpc>
+                <a:spcPct val="110000"/>
+              </a:lnSpc>
+              <a:spcAft>
+                <a:spcPts val="0"/>
+              </a:spcAft>
+            </a:pPr>
+            <a:r>
+              <a:rPr sz="880" b="1" i="0">
                 <a:solidFill>
                   <a:srgbClr val="314359"/>
                 </a:solidFill>
                 <a:latin typeface="Arial"/>
               </a:rPr>
-              <a:t>Governance is the lever.</a:t>
-            </a:r>
-            <a:r>
-              <a:rPr sz="1280">
+              <a:t>Table 6.  Annual uplift to TOTAL-portfolio return (bps), by sleeve size</a:t>
+            </a:r>
+          </a:p>
+        </p:txBody>
+      </p:sp>
+      <p:sp>
+        <p:nvSpPr>
+          <p:cNvPr id="15" name="Rectangle 14"/>
+          <p:cNvSpPr/>
+          <p:nvPr/>
+        </p:nvSpPr>
+        <p:spPr>
+          <a:xfrm>
+            <a:off x="5888883" y="2974848"/>
+            <a:ext cx="1097307" cy="487680"/>
+          </a:xfrm>
+          <a:prstGeom prst="rect">
+            <a:avLst/>
+          </a:prstGeom>
+          <a:solidFill>
+            <a:srgbClr val="314359"/>
+          </a:solidFill>
+          <a:ln>
+            <a:noFill/>
+          </a:ln>
+          <a:effectLst/>
+        </p:spPr>
+        <p:style>
+          <a:lnRef idx="1">
+            <a:schemeClr val="accent1"/>
+          </a:lnRef>
+          <a:fillRef idx="3">
+            <a:schemeClr val="accent1"/>
+          </a:fillRef>
+          <a:effectRef idx="2">
+            <a:schemeClr val="accent1"/>
+          </a:effectRef>
+          <a:fontRef idx="minor">
+            <a:schemeClr val="lt1"/>
+          </a:fontRef>
+        </p:style>
+        <p:txBody>
+          <a:bodyPr rtlCol="0" anchor="ctr"/>
+          <a:lstStyle/>
+          <a:p>
+            <a:pPr algn="ctr"/>
+          </a:p>
+        </p:txBody>
+      </p:sp>
+      <p:sp>
+        <p:nvSpPr>
+          <p:cNvPr id="16" name="TextBox 15"/>
+          <p:cNvSpPr txBox="1"/>
+          <p:nvPr/>
+        </p:nvSpPr>
+        <p:spPr>
+          <a:xfrm>
+            <a:off x="5962037" y="2974848"/>
+            <a:ext cx="980261" cy="487680"/>
+          </a:xfrm>
+          <a:prstGeom prst="rect">
+            <a:avLst/>
+          </a:prstGeom>
+          <a:noFill/>
+        </p:spPr>
+        <p:txBody>
+          <a:bodyPr wrap="square" anchor="ctr" lIns="0" rIns="0" tIns="0" bIns="0">
+            <a:spAutoFit/>
+          </a:bodyPr>
+          <a:lstStyle/>
+          <a:p>
+            <a:pPr algn="l">
+              <a:lnSpc>
+                <a:spcPct val="110000"/>
+              </a:lnSpc>
+              <a:spcAft>
+                <a:spcPts val="0"/>
+              </a:spcAft>
+            </a:pPr>
+            <a:r>
+              <a:rPr sz="1000" b="1" i="0">
+                <a:solidFill>
+                  <a:srgbClr val="FFFFFF"/>
+                </a:solidFill>
+                <a:latin typeface="Arial"/>
+              </a:rPr>
+              <a:t>Sleeve</a:t>
+            </a:r>
+          </a:p>
+        </p:txBody>
+      </p:sp>
+      <p:sp>
+        <p:nvSpPr>
+          <p:cNvPr id="17" name="Rectangle 16"/>
+          <p:cNvSpPr/>
+          <p:nvPr/>
+        </p:nvSpPr>
+        <p:spPr>
+          <a:xfrm>
+            <a:off x="6986190" y="2974848"/>
+            <a:ext cx="1133884" cy="487680"/>
+          </a:xfrm>
+          <a:prstGeom prst="rect">
+            <a:avLst/>
+          </a:prstGeom>
+          <a:solidFill>
+            <a:srgbClr val="314359"/>
+          </a:solidFill>
+          <a:ln>
+            <a:noFill/>
+          </a:ln>
+          <a:effectLst/>
+        </p:spPr>
+        <p:style>
+          <a:lnRef idx="1">
+            <a:schemeClr val="accent1"/>
+          </a:lnRef>
+          <a:fillRef idx="3">
+            <a:schemeClr val="accent1"/>
+          </a:fillRef>
+          <a:effectRef idx="2">
+            <a:schemeClr val="accent1"/>
+          </a:effectRef>
+          <a:fontRef idx="minor">
+            <a:schemeClr val="lt1"/>
+          </a:fontRef>
+        </p:style>
+        <p:txBody>
+          <a:bodyPr rtlCol="0" anchor="ctr"/>
+          <a:lstStyle/>
+          <a:p>
+            <a:pPr algn="ctr"/>
+          </a:p>
+        </p:txBody>
+      </p:sp>
+      <p:sp>
+        <p:nvSpPr>
+          <p:cNvPr id="18" name="TextBox 17"/>
+          <p:cNvSpPr txBox="1"/>
+          <p:nvPr/>
+        </p:nvSpPr>
+        <p:spPr>
+          <a:xfrm>
+            <a:off x="7059344" y="2974848"/>
+            <a:ext cx="1016838" cy="487680"/>
+          </a:xfrm>
+          <a:prstGeom prst="rect">
+            <a:avLst/>
+          </a:prstGeom>
+          <a:noFill/>
+        </p:spPr>
+        <p:txBody>
+          <a:bodyPr wrap="square" anchor="ctr" lIns="0" rIns="0" tIns="0" bIns="0">
+            <a:spAutoFit/>
+          </a:bodyPr>
+          <a:lstStyle/>
+          <a:p>
+            <a:pPr algn="r">
+              <a:lnSpc>
+                <a:spcPct val="110000"/>
+              </a:lnSpc>
+              <a:spcAft>
+                <a:spcPts val="0"/>
+              </a:spcAft>
+            </a:pPr>
+            <a:r>
+              <a:rPr sz="1000" b="1" i="0">
+                <a:solidFill>
+                  <a:srgbClr val="FFFFFF"/>
+                </a:solidFill>
+                <a:latin typeface="Arial"/>
+              </a:rPr>
+              <a:t>vs Long-only</a:t>
+            </a:r>
+          </a:p>
+        </p:txBody>
+      </p:sp>
+      <p:sp>
+        <p:nvSpPr>
+          <p:cNvPr id="19" name="Rectangle 18"/>
+          <p:cNvSpPr/>
+          <p:nvPr/>
+        </p:nvSpPr>
+        <p:spPr>
+          <a:xfrm>
+            <a:off x="8120075" y="2974848"/>
+            <a:ext cx="1426499" cy="487680"/>
+          </a:xfrm>
+          <a:prstGeom prst="rect">
+            <a:avLst/>
+          </a:prstGeom>
+          <a:solidFill>
+            <a:srgbClr val="314359"/>
+          </a:solidFill>
+          <a:ln>
+            <a:noFill/>
+          </a:ln>
+          <a:effectLst/>
+        </p:spPr>
+        <p:style>
+          <a:lnRef idx="1">
+            <a:schemeClr val="accent1"/>
+          </a:lnRef>
+          <a:fillRef idx="3">
+            <a:schemeClr val="accent1"/>
+          </a:fillRef>
+          <a:effectRef idx="2">
+            <a:schemeClr val="accent1"/>
+          </a:effectRef>
+          <a:fontRef idx="minor">
+            <a:schemeClr val="lt1"/>
+          </a:fontRef>
+        </p:style>
+        <p:txBody>
+          <a:bodyPr rtlCol="0" anchor="ctr"/>
+          <a:lstStyle/>
+          <a:p>
+            <a:pPr algn="ctr"/>
+          </a:p>
+        </p:txBody>
+      </p:sp>
+      <p:sp>
+        <p:nvSpPr>
+          <p:cNvPr id="20" name="TextBox 19"/>
+          <p:cNvSpPr txBox="1"/>
+          <p:nvPr/>
+        </p:nvSpPr>
+        <p:spPr>
+          <a:xfrm>
+            <a:off x="8193228" y="2974848"/>
+            <a:ext cx="1309453" cy="487680"/>
+          </a:xfrm>
+          <a:prstGeom prst="rect">
+            <a:avLst/>
+          </a:prstGeom>
+          <a:noFill/>
+        </p:spPr>
+        <p:txBody>
+          <a:bodyPr wrap="square" anchor="ctr" lIns="0" rIns="0" tIns="0" bIns="0">
+            <a:spAutoFit/>
+          </a:bodyPr>
+          <a:lstStyle/>
+          <a:p>
+            <a:pPr algn="r">
+              <a:lnSpc>
+                <a:spcPct val="110000"/>
+              </a:lnSpc>
+              <a:spcAft>
+                <a:spcPts val="0"/>
+              </a:spcAft>
+            </a:pPr>
+            <a:r>
+              <a:rPr sz="1000" b="1" i="0">
+                <a:solidFill>
+                  <a:srgbClr val="FFFFFF"/>
+                </a:solidFill>
+                <a:latin typeface="Arial"/>
+              </a:rPr>
+              <a:t>vs Other activist</a:t>
+            </a:r>
+          </a:p>
+        </p:txBody>
+      </p:sp>
+      <p:sp>
+        <p:nvSpPr>
+          <p:cNvPr id="21" name="Rectangle 20"/>
+          <p:cNvSpPr/>
+          <p:nvPr/>
+        </p:nvSpPr>
+        <p:spPr>
+          <a:xfrm>
+            <a:off x="5888883" y="3462528"/>
+            <a:ext cx="1097307" cy="487680"/>
+          </a:xfrm>
+          <a:prstGeom prst="rect">
+            <a:avLst/>
+          </a:prstGeom>
+          <a:solidFill>
+            <a:srgbClr val="F6F7F9"/>
+          </a:solidFill>
+          <a:ln>
+            <a:noFill/>
+          </a:ln>
+          <a:effectLst/>
+        </p:spPr>
+        <p:style>
+          <a:lnRef idx="1">
+            <a:schemeClr val="accent1"/>
+          </a:lnRef>
+          <a:fillRef idx="3">
+            <a:schemeClr val="accent1"/>
+          </a:fillRef>
+          <a:effectRef idx="2">
+            <a:schemeClr val="accent1"/>
+          </a:effectRef>
+          <a:fontRef idx="minor">
+            <a:schemeClr val="lt1"/>
+          </a:fontRef>
+        </p:style>
+        <p:txBody>
+          <a:bodyPr rtlCol="0" anchor="ctr"/>
+          <a:lstStyle/>
+          <a:p>
+            <a:pPr algn="ctr"/>
+          </a:p>
+        </p:txBody>
+      </p:sp>
+      <p:sp>
+        <p:nvSpPr>
+          <p:cNvPr id="22" name="TextBox 21"/>
+          <p:cNvSpPr txBox="1"/>
+          <p:nvPr/>
+        </p:nvSpPr>
+        <p:spPr>
+          <a:xfrm>
+            <a:off x="5962037" y="3462528"/>
+            <a:ext cx="980261" cy="487680"/>
+          </a:xfrm>
+          <a:prstGeom prst="rect">
+            <a:avLst/>
+          </a:prstGeom>
+          <a:noFill/>
+        </p:spPr>
+        <p:txBody>
+          <a:bodyPr wrap="square" anchor="ctr" lIns="0" rIns="0" tIns="0" bIns="0">
+            <a:spAutoFit/>
+          </a:bodyPr>
+          <a:lstStyle/>
+          <a:p>
+            <a:pPr algn="l">
+              <a:lnSpc>
+                <a:spcPct val="110000"/>
+              </a:lnSpc>
+              <a:spcAft>
+                <a:spcPts val="0"/>
+              </a:spcAft>
+            </a:pPr>
+            <a:r>
+              <a:rPr sz="960" b="1" i="0">
+                <a:solidFill>
+                  <a:srgbClr val="314359"/>
+                </a:solidFill>
+                <a:latin typeface="Arial"/>
+              </a:rPr>
+              <a:t>3%</a:t>
+            </a:r>
+          </a:p>
+        </p:txBody>
+      </p:sp>
+      <p:sp>
+        <p:nvSpPr>
+          <p:cNvPr id="23" name="Rectangle 22"/>
+          <p:cNvSpPr/>
+          <p:nvPr/>
+        </p:nvSpPr>
+        <p:spPr>
+          <a:xfrm>
+            <a:off x="6986190" y="3462528"/>
+            <a:ext cx="1133884" cy="487680"/>
+          </a:xfrm>
+          <a:prstGeom prst="rect">
+            <a:avLst/>
+          </a:prstGeom>
+          <a:solidFill>
+            <a:srgbClr val="F6F7F9"/>
+          </a:solidFill>
+          <a:ln>
+            <a:noFill/>
+          </a:ln>
+          <a:effectLst/>
+        </p:spPr>
+        <p:style>
+          <a:lnRef idx="1">
+            <a:schemeClr val="accent1"/>
+          </a:lnRef>
+          <a:fillRef idx="3">
+            <a:schemeClr val="accent1"/>
+          </a:fillRef>
+          <a:effectRef idx="2">
+            <a:schemeClr val="accent1"/>
+          </a:effectRef>
+          <a:fontRef idx="minor">
+            <a:schemeClr val="lt1"/>
+          </a:fontRef>
+        </p:style>
+        <p:txBody>
+          <a:bodyPr rtlCol="0" anchor="ctr"/>
+          <a:lstStyle/>
+          <a:p>
+            <a:pPr algn="ctr"/>
+          </a:p>
+        </p:txBody>
+      </p:sp>
+      <p:sp>
+        <p:nvSpPr>
+          <p:cNvPr id="24" name="TextBox 23"/>
+          <p:cNvSpPr txBox="1"/>
+          <p:nvPr/>
+        </p:nvSpPr>
+        <p:spPr>
+          <a:xfrm>
+            <a:off x="7059344" y="3462528"/>
+            <a:ext cx="1016838" cy="487680"/>
+          </a:xfrm>
+          <a:prstGeom prst="rect">
+            <a:avLst/>
+          </a:prstGeom>
+          <a:noFill/>
+        </p:spPr>
+        <p:txBody>
+          <a:bodyPr wrap="square" anchor="ctr" lIns="0" rIns="0" tIns="0" bIns="0">
+            <a:spAutoFit/>
+          </a:bodyPr>
+          <a:lstStyle/>
+          <a:p>
+            <a:pPr algn="r">
+              <a:lnSpc>
+                <a:spcPct val="110000"/>
+              </a:lnSpc>
+              <a:spcAft>
+                <a:spcPts val="0"/>
+              </a:spcAft>
+            </a:pPr>
+            <a:r>
+              <a:rPr sz="960" b="0" i="0">
                 <a:solidFill>
                   <a:srgbClr val="0E1620"/>
                 </a:solidFill>
                 <a:latin typeface="Arial"/>
               </a:rPr>
-              <a:t>  Value is created through board representation and active promotion of strong corporate governance across all holdings.</a:t>
-            </a:r>
-          </a:p>
-          <a:p>
-            <a:pPr marL="186949" indent="-186949">
-              <a:lnSpc>
-                <a:spcPct val="112000"/>
-              </a:lnSpc>
-              <a:spcAft>
-                <a:spcPts val="1400"/>
-              </a:spcAft>
-            </a:pPr>
-            <a:r>
-              <a:rPr sz="1280" b="1">
+              <a:t>+31 bps</a:t>
+            </a:r>
+          </a:p>
+        </p:txBody>
+      </p:sp>
+      <p:sp>
+        <p:nvSpPr>
+          <p:cNvPr id="25" name="Rectangle 24"/>
+          <p:cNvSpPr/>
+          <p:nvPr/>
+        </p:nvSpPr>
+        <p:spPr>
+          <a:xfrm>
+            <a:off x="8120075" y="3462528"/>
+            <a:ext cx="1426499" cy="487680"/>
+          </a:xfrm>
+          <a:prstGeom prst="rect">
+            <a:avLst/>
+          </a:prstGeom>
+          <a:solidFill>
+            <a:srgbClr val="F6F7F9"/>
+          </a:solidFill>
+          <a:ln>
+            <a:noFill/>
+          </a:ln>
+          <a:effectLst/>
+        </p:spPr>
+        <p:style>
+          <a:lnRef idx="1">
+            <a:schemeClr val="accent1"/>
+          </a:lnRef>
+          <a:fillRef idx="3">
+            <a:schemeClr val="accent1"/>
+          </a:fillRef>
+          <a:effectRef idx="2">
+            <a:schemeClr val="accent1"/>
+          </a:effectRef>
+          <a:fontRef idx="minor">
+            <a:schemeClr val="lt1"/>
+          </a:fontRef>
+        </p:style>
+        <p:txBody>
+          <a:bodyPr rtlCol="0" anchor="ctr"/>
+          <a:lstStyle/>
+          <a:p>
+            <a:pPr algn="ctr"/>
+          </a:p>
+        </p:txBody>
+      </p:sp>
+      <p:sp>
+        <p:nvSpPr>
+          <p:cNvPr id="26" name="TextBox 25"/>
+          <p:cNvSpPr txBox="1"/>
+          <p:nvPr/>
+        </p:nvSpPr>
+        <p:spPr>
+          <a:xfrm>
+            <a:off x="8193228" y="3462528"/>
+            <a:ext cx="1309453" cy="487680"/>
+          </a:xfrm>
+          <a:prstGeom prst="rect">
+            <a:avLst/>
+          </a:prstGeom>
+          <a:noFill/>
+        </p:spPr>
+        <p:txBody>
+          <a:bodyPr wrap="square" anchor="ctr" lIns="0" rIns="0" tIns="0" bIns="0">
+            <a:spAutoFit/>
+          </a:bodyPr>
+          <a:lstStyle/>
+          <a:p>
+            <a:pPr algn="r">
+              <a:lnSpc>
+                <a:spcPct val="110000"/>
+              </a:lnSpc>
+              <a:spcAft>
+                <a:spcPts val="0"/>
+              </a:spcAft>
+            </a:pPr>
+            <a:r>
+              <a:rPr sz="960" b="0" i="0">
+                <a:solidFill>
+                  <a:srgbClr val="0E1620"/>
+                </a:solidFill>
+                <a:latin typeface="Arial"/>
+              </a:rPr>
+              <a:t>+23 bps</a:t>
+            </a:r>
+          </a:p>
+        </p:txBody>
+      </p:sp>
+      <p:sp>
+        <p:nvSpPr>
+          <p:cNvPr id="27" name="Rectangle 26"/>
+          <p:cNvSpPr/>
+          <p:nvPr/>
+        </p:nvSpPr>
+        <p:spPr>
+          <a:xfrm>
+            <a:off x="5888883" y="3950208"/>
+            <a:ext cx="1097307" cy="487680"/>
+          </a:xfrm>
+          <a:prstGeom prst="rect">
+            <a:avLst/>
+          </a:prstGeom>
+          <a:solidFill>
+            <a:srgbClr val="FFFFFF"/>
+          </a:solidFill>
+          <a:ln>
+            <a:noFill/>
+          </a:ln>
+          <a:effectLst/>
+        </p:spPr>
+        <p:style>
+          <a:lnRef idx="1">
+            <a:schemeClr val="accent1"/>
+          </a:lnRef>
+          <a:fillRef idx="3">
+            <a:schemeClr val="accent1"/>
+          </a:fillRef>
+          <a:effectRef idx="2">
+            <a:schemeClr val="accent1"/>
+          </a:effectRef>
+          <a:fontRef idx="minor">
+            <a:schemeClr val="lt1"/>
+          </a:fontRef>
+        </p:style>
+        <p:txBody>
+          <a:bodyPr rtlCol="0" anchor="ctr"/>
+          <a:lstStyle/>
+          <a:p>
+            <a:pPr algn="ctr"/>
+          </a:p>
+        </p:txBody>
+      </p:sp>
+      <p:sp>
+        <p:nvSpPr>
+          <p:cNvPr id="28" name="TextBox 27"/>
+          <p:cNvSpPr txBox="1"/>
+          <p:nvPr/>
+        </p:nvSpPr>
+        <p:spPr>
+          <a:xfrm>
+            <a:off x="5962037" y="3950208"/>
+            <a:ext cx="980261" cy="487680"/>
+          </a:xfrm>
+          <a:prstGeom prst="rect">
+            <a:avLst/>
+          </a:prstGeom>
+          <a:noFill/>
+        </p:spPr>
+        <p:txBody>
+          <a:bodyPr wrap="square" anchor="ctr" lIns="0" rIns="0" tIns="0" bIns="0">
+            <a:spAutoFit/>
+          </a:bodyPr>
+          <a:lstStyle/>
+          <a:p>
+            <a:pPr algn="l">
+              <a:lnSpc>
+                <a:spcPct val="110000"/>
+              </a:lnSpc>
+              <a:spcAft>
+                <a:spcPts val="0"/>
+              </a:spcAft>
+            </a:pPr>
+            <a:r>
+              <a:rPr sz="960" b="1" i="0">
                 <a:solidFill>
                   <a:srgbClr val="314359"/>
                 </a:solidFill>
                 <a:latin typeface="Arial"/>
               </a:rPr>
-              <a:t>›  </a:t>
-            </a:r>
-            <a:r>
-              <a:rPr sz="1280" b="1">
+              <a:t>5%</a:t>
+            </a:r>
+          </a:p>
+        </p:txBody>
+      </p:sp>
+      <p:sp>
+        <p:nvSpPr>
+          <p:cNvPr id="29" name="Rectangle 28"/>
+          <p:cNvSpPr/>
+          <p:nvPr/>
+        </p:nvSpPr>
+        <p:spPr>
+          <a:xfrm>
+            <a:off x="6986190" y="3950208"/>
+            <a:ext cx="1133884" cy="487680"/>
+          </a:xfrm>
+          <a:prstGeom prst="rect">
+            <a:avLst/>
+          </a:prstGeom>
+          <a:solidFill>
+            <a:srgbClr val="FFFFFF"/>
+          </a:solidFill>
+          <a:ln>
+            <a:noFill/>
+          </a:ln>
+          <a:effectLst/>
+        </p:spPr>
+        <p:style>
+          <a:lnRef idx="1">
+            <a:schemeClr val="accent1"/>
+          </a:lnRef>
+          <a:fillRef idx="3">
+            <a:schemeClr val="accent1"/>
+          </a:fillRef>
+          <a:effectRef idx="2">
+            <a:schemeClr val="accent1"/>
+          </a:effectRef>
+          <a:fontRef idx="minor">
+            <a:schemeClr val="lt1"/>
+          </a:fontRef>
+        </p:style>
+        <p:txBody>
+          <a:bodyPr rtlCol="0" anchor="ctr"/>
+          <a:lstStyle/>
+          <a:p>
+            <a:pPr algn="ctr"/>
+          </a:p>
+        </p:txBody>
+      </p:sp>
+      <p:sp>
+        <p:nvSpPr>
+          <p:cNvPr id="30" name="TextBox 29"/>
+          <p:cNvSpPr txBox="1"/>
+          <p:nvPr/>
+        </p:nvSpPr>
+        <p:spPr>
+          <a:xfrm>
+            <a:off x="7059344" y="3950208"/>
+            <a:ext cx="1016838" cy="487680"/>
+          </a:xfrm>
+          <a:prstGeom prst="rect">
+            <a:avLst/>
+          </a:prstGeom>
+          <a:noFill/>
+        </p:spPr>
+        <p:txBody>
+          <a:bodyPr wrap="square" anchor="ctr" lIns="0" rIns="0" tIns="0" bIns="0">
+            <a:spAutoFit/>
+          </a:bodyPr>
+          <a:lstStyle/>
+          <a:p>
+            <a:pPr algn="r">
+              <a:lnSpc>
+                <a:spcPct val="110000"/>
+              </a:lnSpc>
+              <a:spcAft>
+                <a:spcPts val="0"/>
+              </a:spcAft>
+            </a:pPr>
+            <a:r>
+              <a:rPr sz="960" b="0" i="0">
+                <a:solidFill>
+                  <a:srgbClr val="0E1620"/>
+                </a:solidFill>
+                <a:latin typeface="Arial"/>
+              </a:rPr>
+              <a:t>+52 bps</a:t>
+            </a:r>
+          </a:p>
+        </p:txBody>
+      </p:sp>
+      <p:sp>
+        <p:nvSpPr>
+          <p:cNvPr id="31" name="Rectangle 30"/>
+          <p:cNvSpPr/>
+          <p:nvPr/>
+        </p:nvSpPr>
+        <p:spPr>
+          <a:xfrm>
+            <a:off x="8120075" y="3950208"/>
+            <a:ext cx="1426499" cy="487680"/>
+          </a:xfrm>
+          <a:prstGeom prst="rect">
+            <a:avLst/>
+          </a:prstGeom>
+          <a:solidFill>
+            <a:srgbClr val="FFFFFF"/>
+          </a:solidFill>
+          <a:ln>
+            <a:noFill/>
+          </a:ln>
+          <a:effectLst/>
+        </p:spPr>
+        <p:style>
+          <a:lnRef idx="1">
+            <a:schemeClr val="accent1"/>
+          </a:lnRef>
+          <a:fillRef idx="3">
+            <a:schemeClr val="accent1"/>
+          </a:fillRef>
+          <a:effectRef idx="2">
+            <a:schemeClr val="accent1"/>
+          </a:effectRef>
+          <a:fontRef idx="minor">
+            <a:schemeClr val="lt1"/>
+          </a:fontRef>
+        </p:style>
+        <p:txBody>
+          <a:bodyPr rtlCol="0" anchor="ctr"/>
+          <a:lstStyle/>
+          <a:p>
+            <a:pPr algn="ctr"/>
+          </a:p>
+        </p:txBody>
+      </p:sp>
+      <p:sp>
+        <p:nvSpPr>
+          <p:cNvPr id="32" name="TextBox 31"/>
+          <p:cNvSpPr txBox="1"/>
+          <p:nvPr/>
+        </p:nvSpPr>
+        <p:spPr>
+          <a:xfrm>
+            <a:off x="8193228" y="3950208"/>
+            <a:ext cx="1309453" cy="487680"/>
+          </a:xfrm>
+          <a:prstGeom prst="rect">
+            <a:avLst/>
+          </a:prstGeom>
+          <a:noFill/>
+        </p:spPr>
+        <p:txBody>
+          <a:bodyPr wrap="square" anchor="ctr" lIns="0" rIns="0" tIns="0" bIns="0">
+            <a:spAutoFit/>
+          </a:bodyPr>
+          <a:lstStyle/>
+          <a:p>
+            <a:pPr algn="r">
+              <a:lnSpc>
+                <a:spcPct val="110000"/>
+              </a:lnSpc>
+              <a:spcAft>
+                <a:spcPts val="0"/>
+              </a:spcAft>
+            </a:pPr>
+            <a:r>
+              <a:rPr sz="960" b="0" i="0">
+                <a:solidFill>
+                  <a:srgbClr val="0E1620"/>
+                </a:solidFill>
+                <a:latin typeface="Arial"/>
+              </a:rPr>
+              <a:t>+38 bps</a:t>
+            </a:r>
+          </a:p>
+        </p:txBody>
+      </p:sp>
+      <p:sp>
+        <p:nvSpPr>
+          <p:cNvPr id="33" name="Rectangle 32"/>
+          <p:cNvSpPr/>
+          <p:nvPr/>
+        </p:nvSpPr>
+        <p:spPr>
+          <a:xfrm>
+            <a:off x="5888883" y="4437888"/>
+            <a:ext cx="1097307" cy="487680"/>
+          </a:xfrm>
+          <a:prstGeom prst="rect">
+            <a:avLst/>
+          </a:prstGeom>
+          <a:solidFill>
+            <a:srgbClr val="F6F7F9"/>
+          </a:solidFill>
+          <a:ln>
+            <a:noFill/>
+          </a:ln>
+          <a:effectLst/>
+        </p:spPr>
+        <p:style>
+          <a:lnRef idx="1">
+            <a:schemeClr val="accent1"/>
+          </a:lnRef>
+          <a:fillRef idx="3">
+            <a:schemeClr val="accent1"/>
+          </a:fillRef>
+          <a:effectRef idx="2">
+            <a:schemeClr val="accent1"/>
+          </a:effectRef>
+          <a:fontRef idx="minor">
+            <a:schemeClr val="lt1"/>
+          </a:fontRef>
+        </p:style>
+        <p:txBody>
+          <a:bodyPr rtlCol="0" anchor="ctr"/>
+          <a:lstStyle/>
+          <a:p>
+            <a:pPr algn="ctr"/>
+          </a:p>
+        </p:txBody>
+      </p:sp>
+      <p:sp>
+        <p:nvSpPr>
+          <p:cNvPr id="34" name="TextBox 33"/>
+          <p:cNvSpPr txBox="1"/>
+          <p:nvPr/>
+        </p:nvSpPr>
+        <p:spPr>
+          <a:xfrm>
+            <a:off x="5962037" y="4437888"/>
+            <a:ext cx="980261" cy="487680"/>
+          </a:xfrm>
+          <a:prstGeom prst="rect">
+            <a:avLst/>
+          </a:prstGeom>
+          <a:noFill/>
+        </p:spPr>
+        <p:txBody>
+          <a:bodyPr wrap="square" anchor="ctr" lIns="0" rIns="0" tIns="0" bIns="0">
+            <a:spAutoFit/>
+          </a:bodyPr>
+          <a:lstStyle/>
+          <a:p>
+            <a:pPr algn="l">
+              <a:lnSpc>
+                <a:spcPct val="110000"/>
+              </a:lnSpc>
+              <a:spcAft>
+                <a:spcPts val="0"/>
+              </a:spcAft>
+            </a:pPr>
+            <a:r>
+              <a:rPr sz="960" b="1" i="0">
                 <a:solidFill>
                   <a:srgbClr val="314359"/>
                 </a:solidFill>
                 <a:latin typeface="Arial"/>
               </a:rPr>
-              <a:t>Five improvement dimensions.</a:t>
-            </a:r>
-            <a:r>
-              <a:rPr sz="1280">
+              <a:t>8%</a:t>
+            </a:r>
+          </a:p>
+        </p:txBody>
+      </p:sp>
+      <p:sp>
+        <p:nvSpPr>
+          <p:cNvPr id="35" name="Rectangle 34"/>
+          <p:cNvSpPr/>
+          <p:nvPr/>
+        </p:nvSpPr>
+        <p:spPr>
+          <a:xfrm>
+            <a:off x="6986190" y="4437888"/>
+            <a:ext cx="1133884" cy="487680"/>
+          </a:xfrm>
+          <a:prstGeom prst="rect">
+            <a:avLst/>
+          </a:prstGeom>
+          <a:solidFill>
+            <a:srgbClr val="F6F7F9"/>
+          </a:solidFill>
+          <a:ln>
+            <a:noFill/>
+          </a:ln>
+          <a:effectLst/>
+        </p:spPr>
+        <p:style>
+          <a:lnRef idx="1">
+            <a:schemeClr val="accent1"/>
+          </a:lnRef>
+          <a:fillRef idx="3">
+            <a:schemeClr val="accent1"/>
+          </a:fillRef>
+          <a:effectRef idx="2">
+            <a:schemeClr val="accent1"/>
+          </a:effectRef>
+          <a:fontRef idx="minor">
+            <a:schemeClr val="lt1"/>
+          </a:fontRef>
+        </p:style>
+        <p:txBody>
+          <a:bodyPr rtlCol="0" anchor="ctr"/>
+          <a:lstStyle/>
+          <a:p>
+            <a:pPr algn="ctr"/>
+          </a:p>
+        </p:txBody>
+      </p:sp>
+      <p:sp>
+        <p:nvSpPr>
+          <p:cNvPr id="36" name="TextBox 35"/>
+          <p:cNvSpPr txBox="1"/>
+          <p:nvPr/>
+        </p:nvSpPr>
+        <p:spPr>
+          <a:xfrm>
+            <a:off x="7059344" y="4437888"/>
+            <a:ext cx="1016838" cy="487680"/>
+          </a:xfrm>
+          <a:prstGeom prst="rect">
+            <a:avLst/>
+          </a:prstGeom>
+          <a:noFill/>
+        </p:spPr>
+        <p:txBody>
+          <a:bodyPr wrap="square" anchor="ctr" lIns="0" rIns="0" tIns="0" bIns="0">
+            <a:spAutoFit/>
+          </a:bodyPr>
+          <a:lstStyle/>
+          <a:p>
+            <a:pPr algn="r">
+              <a:lnSpc>
+                <a:spcPct val="110000"/>
+              </a:lnSpc>
+              <a:spcAft>
+                <a:spcPts val="0"/>
+              </a:spcAft>
+            </a:pPr>
+            <a:r>
+              <a:rPr sz="960" b="0" i="0">
                 <a:solidFill>
                   <a:srgbClr val="0E1620"/>
                 </a:solidFill>
                 <a:latin typeface="Arial"/>
               </a:rPr>
-              <a:t>  Operational, financial, structural, environmental and social improvements — each tied to enterprise value.</a:t>
-            </a:r>
-          </a:p>
-          <a:p>
-            <a:pPr marL="186949" indent="-186949">
-              <a:lnSpc>
-                <a:spcPct val="112000"/>
-              </a:lnSpc>
-              <a:spcAft>
-                <a:spcPts val="1400"/>
-              </a:spcAft>
-            </a:pPr>
-            <a:r>
-              <a:rPr sz="1280" b="1">
-                <a:solidFill>
-                  <a:srgbClr val="314359"/>
-                </a:solidFill>
-                <a:latin typeface="Arial"/>
-              </a:rPr>
-              <a:t>›  </a:t>
-            </a:r>
-            <a:r>
-              <a:rPr sz="1280" b="1">
-                <a:solidFill>
-                  <a:srgbClr val="314359"/>
-                </a:solidFill>
-                <a:latin typeface="Arial"/>
-              </a:rPr>
-              <a:t>PRI signatory since 2019,</a:t>
-            </a:r>
-            <a:r>
-              <a:rPr sz="1280">
+              <a:t>+83 bps</a:t>
+            </a:r>
+          </a:p>
+        </p:txBody>
+      </p:sp>
+      <p:sp>
+        <p:nvSpPr>
+          <p:cNvPr id="37" name="Rectangle 36"/>
+          <p:cNvSpPr/>
+          <p:nvPr/>
+        </p:nvSpPr>
+        <p:spPr>
+          <a:xfrm>
+            <a:off x="8120075" y="4437888"/>
+            <a:ext cx="1426499" cy="487680"/>
+          </a:xfrm>
+          <a:prstGeom prst="rect">
+            <a:avLst/>
+          </a:prstGeom>
+          <a:solidFill>
+            <a:srgbClr val="F6F7F9"/>
+          </a:solidFill>
+          <a:ln>
+            <a:noFill/>
+          </a:ln>
+          <a:effectLst/>
+        </p:spPr>
+        <p:style>
+          <a:lnRef idx="1">
+            <a:schemeClr val="accent1"/>
+          </a:lnRef>
+          <a:fillRef idx="3">
+            <a:schemeClr val="accent1"/>
+          </a:fillRef>
+          <a:effectRef idx="2">
+            <a:schemeClr val="accent1"/>
+          </a:effectRef>
+          <a:fontRef idx="minor">
+            <a:schemeClr val="lt1"/>
+          </a:fontRef>
+        </p:style>
+        <p:txBody>
+          <a:bodyPr rtlCol="0" anchor="ctr"/>
+          <a:lstStyle/>
+          <a:p>
+            <a:pPr algn="ctr"/>
+          </a:p>
+        </p:txBody>
+      </p:sp>
+      <p:sp>
+        <p:nvSpPr>
+          <p:cNvPr id="38" name="TextBox 37"/>
+          <p:cNvSpPr txBox="1"/>
+          <p:nvPr/>
+        </p:nvSpPr>
+        <p:spPr>
+          <a:xfrm>
+            <a:off x="8193228" y="4437888"/>
+            <a:ext cx="1309453" cy="487680"/>
+          </a:xfrm>
+          <a:prstGeom prst="rect">
+            <a:avLst/>
+          </a:prstGeom>
+          <a:noFill/>
+        </p:spPr>
+        <p:txBody>
+          <a:bodyPr wrap="square" anchor="ctr" lIns="0" rIns="0" tIns="0" bIns="0">
+            <a:spAutoFit/>
+          </a:bodyPr>
+          <a:lstStyle/>
+          <a:p>
+            <a:pPr algn="r">
+              <a:lnSpc>
+                <a:spcPct val="110000"/>
+              </a:lnSpc>
+              <a:spcAft>
+                <a:spcPts val="0"/>
+              </a:spcAft>
+            </a:pPr>
+            <a:r>
+              <a:rPr sz="960" b="0" i="0">
                 <a:solidFill>
                   <a:srgbClr val="0E1620"/>
                 </a:solidFill>
                 <a:latin typeface="Arial"/>
               </a:rPr>
-              <a:t>  adhering to the Six Principles for Responsible Investment.</a:t>
-            </a:r>
-          </a:p>
-          <a:p>
-            <a:pPr marL="186949" indent="-186949">
-              <a:lnSpc>
-                <a:spcPct val="112000"/>
-              </a:lnSpc>
-              <a:spcAft>
-                <a:spcPts val="1400"/>
-              </a:spcAft>
-            </a:pPr>
-            <a:r>
-              <a:rPr sz="1280" b="1">
-                <a:solidFill>
-                  <a:srgbClr val="314359"/>
-                </a:solidFill>
-                <a:latin typeface="Arial"/>
-              </a:rPr>
-              <a:t>›  </a:t>
-            </a:r>
-            <a:r>
-              <a:rPr sz="1280" b="1">
-                <a:solidFill>
-                  <a:srgbClr val="314359"/>
-                </a:solidFill>
-                <a:latin typeface="Arial"/>
-              </a:rPr>
-              <a:t>Credible oversight.</a:t>
-            </a:r>
-            <a:r>
-              <a:rPr sz="1280">
+              <a:t>+60 bps</a:t>
+            </a:r>
+          </a:p>
+        </p:txBody>
+      </p:sp>
+      <p:sp>
+        <p:nvSpPr>
+          <p:cNvPr id="39" name="TextBox 38"/>
+          <p:cNvSpPr txBox="1"/>
+          <p:nvPr/>
+        </p:nvSpPr>
+        <p:spPr>
+          <a:xfrm>
+            <a:off x="5888883" y="5120640"/>
+            <a:ext cx="3365076" cy="1658112"/>
+          </a:xfrm>
+          <a:prstGeom prst="rect">
+            <a:avLst/>
+          </a:prstGeom>
+          <a:noFill/>
+        </p:spPr>
+        <p:txBody>
+          <a:bodyPr wrap="square" anchor="t" lIns="0" rIns="0" tIns="0" bIns="0">
+            <a:spAutoFit/>
+          </a:bodyPr>
+          <a:lstStyle/>
+          <a:p>
+            <a:pPr algn="l">
+              <a:lnSpc>
+                <a:spcPct val="120000"/>
+              </a:lnSpc>
+              <a:spcAft>
+                <a:spcPts val="0"/>
+              </a:spcAft>
+            </a:pPr>
+            <a:r>
+              <a:rPr sz="1000" b="0" i="0">
                 <a:solidFill>
                   <a:srgbClr val="0E1620"/>
                 </a:solidFill>
                 <a:latin typeface="Arial"/>
               </a:rPr>
-              <a:t>  SEB custodian · MUFG administrator · KPMG auditor · Swedish FI-registered AIFM.</a:t>
+              <a:t>A 5% sleeve in Athanase rather than a long-only global fund adds roughly half a percent (≈52 bps) to total-portfolio return every year — and compounds: the sleeve itself reaches ~2.5× the long-only outcome over a decade, with the diversification and downside profile shown earlier.</a:t>
+            </a:r>
+          </a:p>
+        </p:txBody>
+      </p:sp>
+      <p:sp>
+        <p:nvSpPr>
+          <p:cNvPr id="40" name="TextBox 39"/>
+          <p:cNvSpPr txBox="1"/>
+          <p:nvPr/>
+        </p:nvSpPr>
+        <p:spPr>
+          <a:xfrm>
+            <a:off x="438922" y="6729984"/>
+            <a:ext cx="7900613" cy="438912"/>
+          </a:xfrm>
+          <a:prstGeom prst="rect">
+            <a:avLst/>
+          </a:prstGeom>
+          <a:noFill/>
+        </p:spPr>
+        <p:txBody>
+          <a:bodyPr wrap="square" anchor="t" lIns="0" rIns="0" tIns="0" bIns="0">
+            <a:spAutoFit/>
+          </a:bodyPr>
+          <a:lstStyle/>
+          <a:p>
+            <a:pPr algn="l">
+              <a:lnSpc>
+                <a:spcPct val="115000"/>
+              </a:lnSpc>
+              <a:spcAft>
+                <a:spcPts val="0"/>
+              </a:spcAft>
+            </a:pPr>
+            <a:r>
+              <a:rPr sz="680" b="0" i="0">
+                <a:solidFill>
+                  <a:srgbClr val="556A83"/>
+                </a:solidFill>
+                <a:latin typeface="Arial"/>
+              </a:rPr>
+              <a:t>Illustrative only; not a projection. Athanase 18% (headline net IRR); other activist 10.5%; long-only global 7.6% (MSCI IMI since inception). Uplift = sleeve size × return spread; growth = annual compounding. Past performance is not indicative of future results.</a:t>
             </a:r>
           </a:p>
         </p:txBody>
@@ -33484,6 +35180,433 @@
 </file>
 
 <file path=ppt/slides/slide27.xml><?xml version="1.0" encoding="utf-8"?>
+<p:sld xmlns:a="http://schemas.openxmlformats.org/drawingml/2006/main" xmlns:p="http://schemas.openxmlformats.org/presentationml/2006/main" xmlns:r="http://schemas.openxmlformats.org/officeDocument/2006/relationships">
+  <p:cSld>
+    <p:spTree>
+      <p:nvGrpSpPr>
+        <p:cNvPr id="1" name=""/>
+        <p:cNvGrpSpPr/>
+        <p:nvPr/>
+      </p:nvGrpSpPr>
+      <p:grpSpPr/>
+      <p:sp>
+        <p:nvSpPr>
+          <p:cNvPr id="2" name="Rectangle 1"/>
+          <p:cNvSpPr/>
+          <p:nvPr/>
+        </p:nvSpPr>
+        <p:spPr>
+          <a:xfrm>
+            <a:off x="0" y="0"/>
+            <a:ext cx="9753600" cy="7315200"/>
+          </a:xfrm>
+          <a:prstGeom prst="rect">
+            <a:avLst/>
+          </a:prstGeom>
+          <a:solidFill>
+            <a:srgbClr val="FFFFFF"/>
+          </a:solidFill>
+          <a:ln>
+            <a:noFill/>
+          </a:ln>
+          <a:effectLst/>
+        </p:spPr>
+        <p:style>
+          <a:lnRef idx="1">
+            <a:schemeClr val="accent1"/>
+          </a:lnRef>
+          <a:fillRef idx="3">
+            <a:schemeClr val="accent1"/>
+          </a:fillRef>
+          <a:effectRef idx="2">
+            <a:schemeClr val="accent1"/>
+          </a:effectRef>
+          <a:fontRef idx="minor">
+            <a:schemeClr val="lt1"/>
+          </a:fontRef>
+        </p:style>
+        <p:txBody>
+          <a:bodyPr rtlCol="0" anchor="ctr"/>
+          <a:lstStyle/>
+          <a:p>
+            <a:pPr algn="ctr"/>
+          </a:p>
+        </p:txBody>
+      </p:sp>
+      <p:pic>
+        <p:nvPicPr>
+          <p:cNvPr id="3" name="Picture 2" descr="mark_dark.png"/>
+          <p:cNvPicPr>
+            <a:picLocks noChangeAspect="1"/>
+          </p:cNvPicPr>
+          <p:nvPr/>
+        </p:nvPicPr>
+        <p:blipFill>
+          <a:blip r:embed="rId2"/>
+          <a:stretch>
+            <a:fillRect/>
+          </a:stretch>
+        </p:blipFill>
+        <p:spPr>
+          <a:xfrm>
+            <a:off x="402346" y="234086"/>
+            <a:ext cx="224012" cy="190199"/>
+          </a:xfrm>
+          <a:prstGeom prst="rect">
+            <a:avLst/>
+          </a:prstGeom>
+        </p:spPr>
+      </p:pic>
+      <p:sp>
+        <p:nvSpPr>
+          <p:cNvPr id="4" name="TextBox 3"/>
+          <p:cNvSpPr txBox="1"/>
+          <p:nvPr/>
+        </p:nvSpPr>
+        <p:spPr>
+          <a:xfrm>
+            <a:off x="716907" y="263347"/>
+            <a:ext cx="5120768" cy="292608"/>
+          </a:xfrm>
+          <a:prstGeom prst="rect">
+            <a:avLst/>
+          </a:prstGeom>
+          <a:noFill/>
+        </p:spPr>
+        <p:txBody>
+          <a:bodyPr wrap="square" anchor="t" lIns="0" rIns="0" tIns="0" bIns="0">
+            <a:spAutoFit/>
+          </a:bodyPr>
+          <a:lstStyle/>
+          <a:p>
+            <a:pPr algn="l">
+              <a:lnSpc>
+                <a:spcPct val="110000"/>
+              </a:lnSpc>
+              <a:spcAft>
+                <a:spcPts val="0"/>
+              </a:spcAft>
+            </a:pPr>
+            <a:r>
+              <a:rPr sz="880" b="0" i="0">
+                <a:solidFill>
+                  <a:srgbClr val="556A83"/>
+                </a:solidFill>
+                <a:latin typeface="Arial"/>
+              </a:rPr>
+              <a:t>Ownership Model</a:t>
+            </a:r>
+          </a:p>
+        </p:txBody>
+      </p:sp>
+      <p:sp>
+        <p:nvSpPr>
+          <p:cNvPr id="5" name="Rectangle 4"/>
+          <p:cNvSpPr/>
+          <p:nvPr/>
+        </p:nvSpPr>
+        <p:spPr>
+          <a:xfrm>
+            <a:off x="0" y="604723"/>
+            <a:ext cx="9753600" cy="1024128"/>
+          </a:xfrm>
+          <a:prstGeom prst="rect">
+            <a:avLst/>
+          </a:prstGeom>
+          <a:solidFill>
+            <a:srgbClr val="F6F7F9"/>
+          </a:solidFill>
+          <a:ln>
+            <a:noFill/>
+          </a:ln>
+          <a:effectLst/>
+        </p:spPr>
+        <p:style>
+          <a:lnRef idx="1">
+            <a:schemeClr val="accent1"/>
+          </a:lnRef>
+          <a:fillRef idx="3">
+            <a:schemeClr val="accent1"/>
+          </a:fillRef>
+          <a:effectRef idx="2">
+            <a:schemeClr val="accent1"/>
+          </a:effectRef>
+          <a:fontRef idx="minor">
+            <a:schemeClr val="lt1"/>
+          </a:fontRef>
+        </p:style>
+        <p:txBody>
+          <a:bodyPr rtlCol="0" anchor="ctr"/>
+          <a:lstStyle/>
+          <a:p>
+            <a:pPr algn="ctr"/>
+          </a:p>
+        </p:txBody>
+      </p:sp>
+      <p:sp>
+        <p:nvSpPr>
+          <p:cNvPr id="6" name="TextBox 5"/>
+          <p:cNvSpPr txBox="1"/>
+          <p:nvPr/>
+        </p:nvSpPr>
+        <p:spPr>
+          <a:xfrm>
+            <a:off x="438922" y="721766"/>
+            <a:ext cx="8851613" cy="829056"/>
+          </a:xfrm>
+          <a:prstGeom prst="rect">
+            <a:avLst/>
+          </a:prstGeom>
+          <a:noFill/>
+        </p:spPr>
+        <p:txBody>
+          <a:bodyPr wrap="square" anchor="t" lIns="0" rIns="0" tIns="0" bIns="0">
+            <a:spAutoFit/>
+          </a:bodyPr>
+          <a:lstStyle/>
+          <a:p>
+            <a:pPr algn="l">
+              <a:lnSpc>
+                <a:spcPct val="110000"/>
+              </a:lnSpc>
+              <a:spcAft>
+                <a:spcPts val="200"/>
+              </a:spcAft>
+            </a:pPr>
+            <a:r>
+              <a:rPr sz="2400" b="0" i="0" spc="-90">
+                <a:solidFill>
+                  <a:srgbClr val="314359"/>
+                </a:solidFill>
+                <a:latin typeface="Times New Roman"/>
+              </a:rPr>
+              <a:t>2.18 Responsible ownership, by construction</a:t>
+            </a:r>
+          </a:p>
+        </p:txBody>
+      </p:sp>
+      <p:sp>
+        <p:nvSpPr>
+          <p:cNvPr id="7" name="TextBox 6"/>
+          <p:cNvSpPr txBox="1"/>
+          <p:nvPr/>
+        </p:nvSpPr>
+        <p:spPr>
+          <a:xfrm>
+            <a:off x="6583844" y="6876288"/>
+            <a:ext cx="2926153" cy="292608"/>
+          </a:xfrm>
+          <a:prstGeom prst="rect">
+            <a:avLst/>
+          </a:prstGeom>
+          <a:noFill/>
+        </p:spPr>
+        <p:txBody>
+          <a:bodyPr wrap="square" anchor="t" lIns="0" rIns="0" tIns="0" bIns="0">
+            <a:spAutoFit/>
+          </a:bodyPr>
+          <a:lstStyle/>
+          <a:p>
+            <a:pPr algn="r">
+              <a:lnSpc>
+                <a:spcPct val="110000"/>
+              </a:lnSpc>
+              <a:spcAft>
+                <a:spcPts val="0"/>
+              </a:spcAft>
+            </a:pPr>
+            <a:r>
+              <a:rPr sz="680" b="0" i="0">
+                <a:solidFill>
+                  <a:srgbClr val="556A83"/>
+                </a:solidFill>
+                <a:latin typeface="Arial"/>
+              </a:rPr>
+              <a:t>Strictly confidential          24</a:t>
+            </a:r>
+          </a:p>
+        </p:txBody>
+      </p:sp>
+      <p:sp>
+        <p:nvSpPr>
+          <p:cNvPr id="8" name="TextBox 7"/>
+          <p:cNvSpPr txBox="1"/>
+          <p:nvPr/>
+        </p:nvSpPr>
+        <p:spPr>
+          <a:xfrm>
+            <a:off x="548653" y="1901952"/>
+            <a:ext cx="8705305" cy="4584192"/>
+          </a:xfrm>
+          <a:prstGeom prst="rect">
+            <a:avLst/>
+          </a:prstGeom>
+          <a:noFill/>
+        </p:spPr>
+        <p:txBody>
+          <a:bodyPr wrap="square" anchor="t" lIns="0" rIns="0" tIns="0" bIns="0">
+            <a:spAutoFit/>
+          </a:bodyPr>
+          <a:lstStyle/>
+          <a:p>
+            <a:pPr marL="186949" indent="-186949">
+              <a:lnSpc>
+                <a:spcPct val="112000"/>
+              </a:lnSpc>
+              <a:spcAft>
+                <a:spcPts val="1400"/>
+              </a:spcAft>
+            </a:pPr>
+            <a:r>
+              <a:rPr sz="1280" b="1">
+                <a:solidFill>
+                  <a:srgbClr val="314359"/>
+                </a:solidFill>
+                <a:latin typeface="Arial"/>
+              </a:rPr>
+              <a:t>›  </a:t>
+            </a:r>
+            <a:r>
+              <a:rPr sz="1280" b="1">
+                <a:solidFill>
+                  <a:srgbClr val="314359"/>
+                </a:solidFill>
+                <a:latin typeface="Arial"/>
+              </a:rPr>
+              <a:t>Governance is the lever.</a:t>
+            </a:r>
+            <a:r>
+              <a:rPr sz="1280">
+                <a:solidFill>
+                  <a:srgbClr val="0E1620"/>
+                </a:solidFill>
+                <a:latin typeface="Arial"/>
+              </a:rPr>
+              <a:t>  Value is created through board representation and active promotion of strong corporate governance across all holdings.</a:t>
+            </a:r>
+          </a:p>
+          <a:p>
+            <a:pPr marL="186949" indent="-186949">
+              <a:lnSpc>
+                <a:spcPct val="112000"/>
+              </a:lnSpc>
+              <a:spcAft>
+                <a:spcPts val="1400"/>
+              </a:spcAft>
+            </a:pPr>
+            <a:r>
+              <a:rPr sz="1280" b="1">
+                <a:solidFill>
+                  <a:srgbClr val="314359"/>
+                </a:solidFill>
+                <a:latin typeface="Arial"/>
+              </a:rPr>
+              <a:t>›  </a:t>
+            </a:r>
+            <a:r>
+              <a:rPr sz="1280" b="1">
+                <a:solidFill>
+                  <a:srgbClr val="314359"/>
+                </a:solidFill>
+                <a:latin typeface="Arial"/>
+              </a:rPr>
+              <a:t>Five improvement dimensions.</a:t>
+            </a:r>
+            <a:r>
+              <a:rPr sz="1280">
+                <a:solidFill>
+                  <a:srgbClr val="0E1620"/>
+                </a:solidFill>
+                <a:latin typeface="Arial"/>
+              </a:rPr>
+              <a:t>  Operational, financial, structural, environmental and social improvements — each tied to enterprise value.</a:t>
+            </a:r>
+          </a:p>
+          <a:p>
+            <a:pPr marL="186949" indent="-186949">
+              <a:lnSpc>
+                <a:spcPct val="112000"/>
+              </a:lnSpc>
+              <a:spcAft>
+                <a:spcPts val="1400"/>
+              </a:spcAft>
+            </a:pPr>
+            <a:r>
+              <a:rPr sz="1280" b="1">
+                <a:solidFill>
+                  <a:srgbClr val="314359"/>
+                </a:solidFill>
+                <a:latin typeface="Arial"/>
+              </a:rPr>
+              <a:t>›  </a:t>
+            </a:r>
+            <a:r>
+              <a:rPr sz="1280" b="1">
+                <a:solidFill>
+                  <a:srgbClr val="314359"/>
+                </a:solidFill>
+                <a:latin typeface="Arial"/>
+              </a:rPr>
+              <a:t>PRI signatory since 2019,</a:t>
+            </a:r>
+            <a:r>
+              <a:rPr sz="1280">
+                <a:solidFill>
+                  <a:srgbClr val="0E1620"/>
+                </a:solidFill>
+                <a:latin typeface="Arial"/>
+              </a:rPr>
+              <a:t>  adhering to the Six Principles for Responsible Investment.</a:t>
+            </a:r>
+          </a:p>
+          <a:p>
+            <a:pPr marL="186949" indent="-186949">
+              <a:lnSpc>
+                <a:spcPct val="112000"/>
+              </a:lnSpc>
+              <a:spcAft>
+                <a:spcPts val="1400"/>
+              </a:spcAft>
+            </a:pPr>
+            <a:r>
+              <a:rPr sz="1280" b="1">
+                <a:solidFill>
+                  <a:srgbClr val="314359"/>
+                </a:solidFill>
+                <a:latin typeface="Arial"/>
+              </a:rPr>
+              <a:t>›  </a:t>
+            </a:r>
+            <a:r>
+              <a:rPr sz="1280" b="1">
+                <a:solidFill>
+                  <a:srgbClr val="314359"/>
+                </a:solidFill>
+                <a:latin typeface="Arial"/>
+              </a:rPr>
+              <a:t>Credible oversight.</a:t>
+            </a:r>
+            <a:r>
+              <a:rPr sz="1280">
+                <a:solidFill>
+                  <a:srgbClr val="0E1620"/>
+                </a:solidFill>
+                <a:latin typeface="Arial"/>
+              </a:rPr>
+              <a:t>  SEB custodian · MUFG administrator · KPMG auditor · Swedish FI-registered AIFM.</a:t>
+            </a:r>
+          </a:p>
+        </p:txBody>
+      </p:sp>
+    </p:spTree>
+  </p:cSld>
+  <p:clrMapOvr>
+    <a:masterClrMapping/>
+  </p:clrMapOvr>
+</p:sld>
+</file>
+
+<file path=ppt/slides/slide28.xml><?xml version="1.0" encoding="utf-8"?>
 <p:sld xmlns:a="http://schemas.openxmlformats.org/drawingml/2006/main" xmlns:p="http://schemas.openxmlformats.org/presentationml/2006/main" xmlns:r="http://schemas.openxmlformats.org/officeDocument/2006/relationships">
   <p:cSld>
     <p:spTree>

--- a/Athanase_Engaged_Ownership_Allocator_Deck.pptx
+++ b/Athanase_Engaged_Ownership_Allocator_Deck.pptx
@@ -34063,8 +34063,8 @@
         </p:nvSpPr>
         <p:spPr>
           <a:xfrm>
-            <a:off x="5888883" y="2974848"/>
-            <a:ext cx="1097307" cy="487680"/>
+            <a:off x="5888883" y="2896819"/>
+            <a:ext cx="1097307" cy="448665"/>
           </a:xfrm>
           <a:prstGeom prst="rect">
             <a:avLst/>
@@ -34107,8 +34107,8 @@
         </p:nvSpPr>
         <p:spPr>
           <a:xfrm>
-            <a:off x="5962037" y="2974848"/>
-            <a:ext cx="980261" cy="487680"/>
+            <a:off x="5962037" y="2896819"/>
+            <a:ext cx="980261" cy="448665"/>
           </a:xfrm>
           <a:prstGeom prst="rect">
             <a:avLst/>
@@ -34149,8 +34149,8 @@
         </p:nvSpPr>
         <p:spPr>
           <a:xfrm>
-            <a:off x="6986190" y="2974848"/>
-            <a:ext cx="1133884" cy="487680"/>
+            <a:off x="6986190" y="2896819"/>
+            <a:ext cx="1133884" cy="448665"/>
           </a:xfrm>
           <a:prstGeom prst="rect">
             <a:avLst/>
@@ -34193,8 +34193,8 @@
         </p:nvSpPr>
         <p:spPr>
           <a:xfrm>
-            <a:off x="7059344" y="2974848"/>
-            <a:ext cx="1016838" cy="487680"/>
+            <a:off x="7059344" y="2896819"/>
+            <a:ext cx="1016838" cy="448665"/>
           </a:xfrm>
           <a:prstGeom prst="rect">
             <a:avLst/>
@@ -34235,8 +34235,8 @@
         </p:nvSpPr>
         <p:spPr>
           <a:xfrm>
-            <a:off x="8120075" y="2974848"/>
-            <a:ext cx="1426499" cy="487680"/>
+            <a:off x="8120075" y="2896819"/>
+            <a:ext cx="1426499" cy="448665"/>
           </a:xfrm>
           <a:prstGeom prst="rect">
             <a:avLst/>
@@ -34279,8 +34279,8 @@
         </p:nvSpPr>
         <p:spPr>
           <a:xfrm>
-            <a:off x="8193228" y="2974848"/>
-            <a:ext cx="1309453" cy="487680"/>
+            <a:off x="8193228" y="2896819"/>
+            <a:ext cx="1309453" cy="448665"/>
           </a:xfrm>
           <a:prstGeom prst="rect">
             <a:avLst/>
@@ -34321,8 +34321,8 @@
         </p:nvSpPr>
         <p:spPr>
           <a:xfrm>
-            <a:off x="5888883" y="3462528"/>
-            <a:ext cx="1097307" cy="487680"/>
+            <a:off x="5888883" y="3345484"/>
+            <a:ext cx="1097307" cy="448665"/>
           </a:xfrm>
           <a:prstGeom prst="rect">
             <a:avLst/>
@@ -34365,8 +34365,8 @@
         </p:nvSpPr>
         <p:spPr>
           <a:xfrm>
-            <a:off x="5962037" y="3462528"/>
-            <a:ext cx="980261" cy="487680"/>
+            <a:off x="5962037" y="3345484"/>
+            <a:ext cx="980261" cy="448665"/>
           </a:xfrm>
           <a:prstGeom prst="rect">
             <a:avLst/>
@@ -34407,8 +34407,8 @@
         </p:nvSpPr>
         <p:spPr>
           <a:xfrm>
-            <a:off x="6986190" y="3462528"/>
-            <a:ext cx="1133884" cy="487680"/>
+            <a:off x="6986190" y="3345484"/>
+            <a:ext cx="1133884" cy="448665"/>
           </a:xfrm>
           <a:prstGeom prst="rect">
             <a:avLst/>
@@ -34451,8 +34451,8 @@
         </p:nvSpPr>
         <p:spPr>
           <a:xfrm>
-            <a:off x="7059344" y="3462528"/>
-            <a:ext cx="1016838" cy="487680"/>
+            <a:off x="7059344" y="3345484"/>
+            <a:ext cx="1016838" cy="448665"/>
           </a:xfrm>
           <a:prstGeom prst="rect">
             <a:avLst/>
@@ -34493,8 +34493,8 @@
         </p:nvSpPr>
         <p:spPr>
           <a:xfrm>
-            <a:off x="8120075" y="3462528"/>
-            <a:ext cx="1426499" cy="487680"/>
+            <a:off x="8120075" y="3345484"/>
+            <a:ext cx="1426499" cy="448665"/>
           </a:xfrm>
           <a:prstGeom prst="rect">
             <a:avLst/>
@@ -34537,8 +34537,8 @@
         </p:nvSpPr>
         <p:spPr>
           <a:xfrm>
-            <a:off x="8193228" y="3462528"/>
-            <a:ext cx="1309453" cy="487680"/>
+            <a:off x="8193228" y="3345484"/>
+            <a:ext cx="1309453" cy="448665"/>
           </a:xfrm>
           <a:prstGeom prst="rect">
             <a:avLst/>
@@ -34579,8 +34579,8 @@
         </p:nvSpPr>
         <p:spPr>
           <a:xfrm>
-            <a:off x="5888883" y="3950208"/>
-            <a:ext cx="1097307" cy="487680"/>
+            <a:off x="5888883" y="3794150"/>
+            <a:ext cx="1097307" cy="448665"/>
           </a:xfrm>
           <a:prstGeom prst="rect">
             <a:avLst/>
@@ -34623,8 +34623,8 @@
         </p:nvSpPr>
         <p:spPr>
           <a:xfrm>
-            <a:off x="5962037" y="3950208"/>
-            <a:ext cx="980261" cy="487680"/>
+            <a:off x="5962037" y="3794150"/>
+            <a:ext cx="980261" cy="448665"/>
           </a:xfrm>
           <a:prstGeom prst="rect">
             <a:avLst/>
@@ -34665,8 +34665,8 @@
         </p:nvSpPr>
         <p:spPr>
           <a:xfrm>
-            <a:off x="6986190" y="3950208"/>
-            <a:ext cx="1133884" cy="487680"/>
+            <a:off x="6986190" y="3794150"/>
+            <a:ext cx="1133884" cy="448665"/>
           </a:xfrm>
           <a:prstGeom prst="rect">
             <a:avLst/>
@@ -34709,8 +34709,8 @@
         </p:nvSpPr>
         <p:spPr>
           <a:xfrm>
-            <a:off x="7059344" y="3950208"/>
-            <a:ext cx="1016838" cy="487680"/>
+            <a:off x="7059344" y="3794150"/>
+            <a:ext cx="1016838" cy="448665"/>
           </a:xfrm>
           <a:prstGeom prst="rect">
             <a:avLst/>
@@ -34751,8 +34751,8 @@
         </p:nvSpPr>
         <p:spPr>
           <a:xfrm>
-            <a:off x="8120075" y="3950208"/>
-            <a:ext cx="1426499" cy="487680"/>
+            <a:off x="8120075" y="3794150"/>
+            <a:ext cx="1426499" cy="448665"/>
           </a:xfrm>
           <a:prstGeom prst="rect">
             <a:avLst/>
@@ -34795,8 +34795,8 @@
         </p:nvSpPr>
         <p:spPr>
           <a:xfrm>
-            <a:off x="8193228" y="3950208"/>
-            <a:ext cx="1309453" cy="487680"/>
+            <a:off x="8193228" y="3794150"/>
+            <a:ext cx="1309453" cy="448665"/>
           </a:xfrm>
           <a:prstGeom prst="rect">
             <a:avLst/>
@@ -34837,8 +34837,8 @@
         </p:nvSpPr>
         <p:spPr>
           <a:xfrm>
-            <a:off x="5888883" y="4437888"/>
-            <a:ext cx="1097307" cy="487680"/>
+            <a:off x="5888883" y="4242816"/>
+            <a:ext cx="1097307" cy="448665"/>
           </a:xfrm>
           <a:prstGeom prst="rect">
             <a:avLst/>
@@ -34881,8 +34881,8 @@
         </p:nvSpPr>
         <p:spPr>
           <a:xfrm>
-            <a:off x="5962037" y="4437888"/>
-            <a:ext cx="980261" cy="487680"/>
+            <a:off x="5962037" y="4242816"/>
+            <a:ext cx="980261" cy="448665"/>
           </a:xfrm>
           <a:prstGeom prst="rect">
             <a:avLst/>
@@ -34923,8 +34923,8 @@
         </p:nvSpPr>
         <p:spPr>
           <a:xfrm>
-            <a:off x="6986190" y="4437888"/>
-            <a:ext cx="1133884" cy="487680"/>
+            <a:off x="6986190" y="4242816"/>
+            <a:ext cx="1133884" cy="448665"/>
           </a:xfrm>
           <a:prstGeom prst="rect">
             <a:avLst/>
@@ -34967,8 +34967,8 @@
         </p:nvSpPr>
         <p:spPr>
           <a:xfrm>
-            <a:off x="7059344" y="4437888"/>
-            <a:ext cx="1016838" cy="487680"/>
+            <a:off x="7059344" y="4242816"/>
+            <a:ext cx="1016838" cy="448665"/>
           </a:xfrm>
           <a:prstGeom prst="rect">
             <a:avLst/>
@@ -35009,8 +35009,8 @@
         </p:nvSpPr>
         <p:spPr>
           <a:xfrm>
-            <a:off x="8120075" y="4437888"/>
-            <a:ext cx="1426499" cy="487680"/>
+            <a:off x="8120075" y="4242816"/>
+            <a:ext cx="1426499" cy="448665"/>
           </a:xfrm>
           <a:prstGeom prst="rect">
             <a:avLst/>
@@ -35053,8 +35053,8 @@
         </p:nvSpPr>
         <p:spPr>
           <a:xfrm>
-            <a:off x="8193228" y="4437888"/>
-            <a:ext cx="1309453" cy="487680"/>
+            <a:off x="8193228" y="4242816"/>
+            <a:ext cx="1309453" cy="448665"/>
           </a:xfrm>
           <a:prstGeom prst="rect">
             <a:avLst/>
@@ -35095,8 +35095,8 @@
         </p:nvSpPr>
         <p:spPr>
           <a:xfrm>
-            <a:off x="5888883" y="5120640"/>
-            <a:ext cx="3365076" cy="1658112"/>
+            <a:off x="5888883" y="4847539"/>
+            <a:ext cx="3365076" cy="292608"/>
           </a:xfrm>
           <a:prstGeom prst="rect">
             <a:avLst/>
@@ -35111,34 +35111,95 @@
           <a:p>
             <a:pPr algn="l">
               <a:lnSpc>
-                <a:spcPct val="120000"/>
+                <a:spcPct val="110000"/>
               </a:lnSpc>
               <a:spcAft>
                 <a:spcPts val="0"/>
               </a:spcAft>
             </a:pPr>
             <a:r>
-              <a:rPr sz="1000" b="0" i="0">
+              <a:rPr sz="880" b="1" i="0">
+                <a:solidFill>
+                  <a:srgbClr val="314359"/>
+                </a:solidFill>
+                <a:latin typeface="Arial"/>
+              </a:rPr>
+              <a:t>HOW THE PATH IS EARNED</a:t>
+            </a:r>
+          </a:p>
+        </p:txBody>
+      </p:sp>
+      <p:sp>
+        <p:nvSpPr>
+          <p:cNvPr id="40" name="TextBox 39"/>
+          <p:cNvSpPr txBox="1"/>
+          <p:nvPr/>
+        </p:nvSpPr>
+        <p:spPr>
+          <a:xfrm>
+            <a:off x="5888883" y="5140147"/>
+            <a:ext cx="3365076" cy="2145792"/>
+          </a:xfrm>
+          <a:prstGeom prst="rect">
+            <a:avLst/>
+          </a:prstGeom>
+          <a:noFill/>
+        </p:spPr>
+        <p:txBody>
+          <a:bodyPr wrap="square" anchor="t" lIns="0" rIns="0" tIns="0" bIns="0">
+            <a:spAutoFit/>
+          </a:bodyPr>
+          <a:lstStyle/>
+          <a:p>
+            <a:pPr algn="l">
+              <a:lnSpc>
+                <a:spcPct val="115000"/>
+              </a:lnSpc>
+              <a:spcAft>
+                <a:spcPts val="700"/>
+              </a:spcAft>
+            </a:pPr>
+            <a:r>
+              <a:rPr sz="919" b="0" i="0">
                 <a:solidFill>
                   <a:srgbClr val="0E1620"/>
                 </a:solidFill>
                 <a:latin typeface="Arial"/>
               </a:rPr>
-              <a:t>A 5% sleeve in Athanase rather than a long-only global fund adds roughly half a percent (≈52 bps) to total-portfolio return every year — and compounds: the sleeve itself reaches ~2.5× the long-only outcome over a decade, with the diversification and downside profile shown earlier.</a:t>
-            </a:r>
-          </a:p>
-        </p:txBody>
-      </p:sp>
-      <p:sp>
-        <p:nvSpPr>
-          <p:cNvPr id="40" name="TextBox 39"/>
-          <p:cNvSpPr txBox="1"/>
-          <p:nvPr/>
-        </p:nvSpPr>
-        <p:spPr>
-          <a:xfrm>
-            <a:off x="438922" y="6729984"/>
-            <a:ext cx="7900613" cy="438912"/>
+              <a:t>The smooth line is not won by chasing rallies. On average monthly returns (p.17), Athanase roughly matches the market up (1.2% vs 1.3%) but protects sharply down (+0.2% vs −1.7%).</a:t>
+            </a:r>
+          </a:p>
+          <a:p>
+            <a:pPr algn="l">
+              <a:lnSpc>
+                <a:spcPct val="115000"/>
+              </a:lnSpc>
+              <a:spcAft>
+                <a:spcPts val="0"/>
+              </a:spcAft>
+            </a:pPr>
+            <a:r>
+              <a:rPr sz="919" b="0" i="0">
+                <a:solidFill>
+                  <a:srgbClr val="0E1620"/>
+                </a:solidFill>
+                <a:latin typeface="Arial"/>
+              </a:rPr>
+              <a:t>Losing less in the down months — not winning more up — is what compounds the lines apart: a steadier path, not just a higher one.</a:t>
+            </a:r>
+          </a:p>
+        </p:txBody>
+      </p:sp>
+      <p:sp>
+        <p:nvSpPr>
+          <p:cNvPr id="41" name="TextBox 40"/>
+          <p:cNvSpPr txBox="1"/>
+          <p:nvPr/>
+        </p:nvSpPr>
+        <p:spPr>
+          <a:xfrm>
+            <a:off x="438922" y="6973824"/>
+            <a:ext cx="6510690" cy="390144"/>
           </a:xfrm>
           <a:prstGeom prst="rect">
             <a:avLst/>
@@ -35166,7 +35227,7 @@
                 </a:solidFill>
                 <a:latin typeface="Arial"/>
               </a:rPr>
-              <a:t>Illustrative only; not a projection. Athanase 18% (headline net IRR); other activist 10.5%; long-only global 7.6% (MSCI IMI since inception). Uplift = sleeve size × return spread; growth = annual compounding. Past performance is not indicative of future results.</a:t>
+              <a:t>Illustrative only; not a projection. Athanase 18% (headline net IRR); other activist 10.5%; long-only 7.6% (MSCI IMI). Uplift = sleeve × return spread; growth = annual compounding. Past performance ≠ future results.</a:t>
             </a:r>
           </a:p>
         </p:txBody>

--- a/Athanase_Engaged_Ownership_Allocator_Deck.pptx
+++ b/Athanase_Engaged_Ownership_Allocator_Deck.pptx
@@ -1002,7 +1002,7 @@
                   <a:srgbClr val="556A83"/>
                 </a:solidFill>
               </a:rPr>
-              <a:t>Figure 5.  Growth of a 100 sleeve over 10 years (indexed)</a:t>
+              <a:t>Figure 5.  Growth of a 100 sleeve through a market cycle (indexed)</a:t>
             </a:r>
           </a:p>
         </c:rich>
@@ -1093,28 +1093,28 @@
                   <c:v>118</c:v>
                 </c:pt>
                 <c:pt idx="2">
-                  <c:v>139</c:v>
+                  <c:v>140</c:v>
                 </c:pt>
                 <c:pt idx="3">
-                  <c:v>164</c:v>
+                  <c:v>166</c:v>
                 </c:pt>
                 <c:pt idx="4">
-                  <c:v>194</c:v>
+                  <c:v>197</c:v>
                 </c:pt>
                 <c:pt idx="5">
-                  <c:v>229</c:v>
+                  <c:v>233</c:v>
                 </c:pt>
                 <c:pt idx="6">
-                  <c:v>270</c:v>
+                  <c:v>236</c:v>
                 </c:pt>
                 <c:pt idx="7">
-                  <c:v>319</c:v>
+                  <c:v>296</c:v>
                 </c:pt>
                 <c:pt idx="8">
-                  <c:v>376</c:v>
+                  <c:v>366</c:v>
                 </c:pt>
                 <c:pt idx="9">
-                  <c:v>444</c:v>
+                  <c:v>442</c:v>
                 </c:pt>
                 <c:pt idx="10">
                   <c:v>523</c:v>
@@ -1202,28 +1202,28 @@
                   <c:v>111</c:v>
                 </c:pt>
                 <c:pt idx="2">
-                  <c:v>122</c:v>
+                  <c:v>123</c:v>
                 </c:pt>
                 <c:pt idx="3">
-                  <c:v>135</c:v>
+                  <c:v>137</c:v>
                 </c:pt>
                 <c:pt idx="4">
-                  <c:v>149</c:v>
+                  <c:v>152</c:v>
                 </c:pt>
                 <c:pt idx="5">
-                  <c:v>165</c:v>
+                  <c:v>168</c:v>
                 </c:pt>
                 <c:pt idx="6">
+                  <c:v>150</c:v>
+                </c:pt>
+                <c:pt idx="7">
                   <c:v>182</c:v>
                 </c:pt>
-                <c:pt idx="7">
-                  <c:v>201</c:v>
-                </c:pt>
                 <c:pt idx="8">
-                  <c:v>222</c:v>
+                  <c:v>214</c:v>
                 </c:pt>
                 <c:pt idx="9">
-                  <c:v>246</c:v>
+                  <c:v>244</c:v>
                 </c:pt>
                 <c:pt idx="10">
                   <c:v>271</c:v>
@@ -1312,28 +1312,28 @@
                   <c:v>108</c:v>
                 </c:pt>
                 <c:pt idx="2">
-                  <c:v>116</c:v>
+                  <c:v>117</c:v>
                 </c:pt>
                 <c:pt idx="3">
-                  <c:v>125</c:v>
+                  <c:v>126</c:v>
                 </c:pt>
                 <c:pt idx="4">
-                  <c:v>134</c:v>
+                  <c:v>136</c:v>
                 </c:pt>
                 <c:pt idx="5">
-                  <c:v>144</c:v>
+                  <c:v>147</c:v>
                 </c:pt>
                 <c:pt idx="6">
-                  <c:v>155</c:v>
+                  <c:v>119</c:v>
                 </c:pt>
                 <c:pt idx="7">
-                  <c:v>167</c:v>
+                  <c:v>142</c:v>
                 </c:pt>
                 <c:pt idx="8">
-                  <c:v>180</c:v>
+                  <c:v>168</c:v>
                 </c:pt>
                 <c:pt idx="9">
-                  <c:v>193</c:v>
+                  <c:v>190</c:v>
                 </c:pt>
                 <c:pt idx="10">
                   <c:v>208</c:v>
@@ -1376,7 +1376,10 @@
       </c:catAx>
       <c:valAx>
         <c:axId val="2140495176"/>
-        <c:scaling/>
+        <c:scaling>
+          <c:max val="600.0"/>
+          <c:min val="0.0"/>
+        </c:scaling>
         <c:delete val="0"/>
         <c:axPos val="l"/>
         <c:majorTickMark val="out"/>
@@ -33889,7 +33892,177 @@
       </p:graphicFrame>
       <p:sp>
         <p:nvSpPr>
-          <p:cNvPr id="11" name="TextBox 10"/>
+          <p:cNvPr id="11" name="Rectangle 10"/>
+          <p:cNvSpPr/>
+          <p:nvPr/>
+        </p:nvSpPr>
+        <p:spPr>
+          <a:xfrm>
+            <a:off x="3526014" y="2896819"/>
+            <a:ext cx="12192" cy="2926080"/>
+          </a:xfrm>
+          <a:prstGeom prst="rect">
+            <a:avLst/>
+          </a:prstGeom>
+          <a:solidFill>
+            <a:srgbClr val="556A83"/>
+          </a:solidFill>
+          <a:ln>
+            <a:noFill/>
+          </a:ln>
+          <a:effectLst/>
+        </p:spPr>
+        <p:style>
+          <a:lnRef idx="1">
+            <a:schemeClr val="accent1"/>
+          </a:lnRef>
+          <a:fillRef idx="3">
+            <a:schemeClr val="accent1"/>
+          </a:fillRef>
+          <a:effectRef idx="2">
+            <a:schemeClr val="accent1"/>
+          </a:effectRef>
+          <a:fontRef idx="minor">
+            <a:schemeClr val="lt1"/>
+          </a:fontRef>
+        </p:style>
+        <p:txBody>
+          <a:bodyPr rtlCol="0" anchor="ctr"/>
+          <a:lstStyle/>
+          <a:p>
+            <a:pPr algn="ctr"/>
+          </a:p>
+        </p:txBody>
+      </p:sp>
+      <p:sp>
+        <p:nvSpPr>
+          <p:cNvPr id="12" name="TextBox 11"/>
+          <p:cNvSpPr txBox="1"/>
+          <p:nvPr/>
+        </p:nvSpPr>
+        <p:spPr>
+          <a:xfrm>
+            <a:off x="2794476" y="2643225"/>
+            <a:ext cx="1463076" cy="292608"/>
+          </a:xfrm>
+          <a:prstGeom prst="rect">
+            <a:avLst/>
+          </a:prstGeom>
+          <a:noFill/>
+        </p:spPr>
+        <p:txBody>
+          <a:bodyPr wrap="square" anchor="t" lIns="0" rIns="0" tIns="0" bIns="0">
+            <a:spAutoFit/>
+          </a:bodyPr>
+          <a:lstStyle/>
+          <a:p>
+            <a:pPr algn="ctr">
+              <a:lnSpc>
+                <a:spcPct val="110000"/>
+              </a:lnSpc>
+              <a:spcAft>
+                <a:spcPts val="0"/>
+              </a:spcAft>
+            </a:pPr>
+            <a:r>
+              <a:rPr sz="800" b="1" i="0">
+                <a:solidFill>
+                  <a:srgbClr val="314359"/>
+                </a:solidFill>
+                <a:latin typeface="Arial"/>
+              </a:rPr>
+              <a:t>Down-market year</a:t>
+            </a:r>
+          </a:p>
+        </p:txBody>
+      </p:sp>
+      <p:sp>
+        <p:nvSpPr>
+          <p:cNvPr id="13" name="TextBox 12"/>
+          <p:cNvSpPr txBox="1"/>
+          <p:nvPr/>
+        </p:nvSpPr>
+        <p:spPr>
+          <a:xfrm>
+            <a:off x="3584537" y="4392177"/>
+            <a:ext cx="1170461" cy="253593"/>
+          </a:xfrm>
+          <a:prstGeom prst="rect">
+            <a:avLst/>
+          </a:prstGeom>
+          <a:noFill/>
+        </p:spPr>
+        <p:txBody>
+          <a:bodyPr wrap="square" anchor="t" lIns="0" rIns="0" tIns="0" bIns="0">
+            <a:spAutoFit/>
+          </a:bodyPr>
+          <a:lstStyle/>
+          <a:p>
+            <a:pPr algn="l">
+              <a:lnSpc>
+                <a:spcPct val="110000"/>
+              </a:lnSpc>
+              <a:spcAft>
+                <a:spcPts val="0"/>
+              </a:spcAft>
+            </a:pPr>
+            <a:r>
+              <a:rPr sz="760" b="1" i="0">
+                <a:solidFill>
+                  <a:srgbClr val="314359"/>
+                </a:solidFill>
+                <a:latin typeface="Arial"/>
+              </a:rPr>
+              <a:t>Athanase: holds</a:t>
+            </a:r>
+          </a:p>
+        </p:txBody>
+      </p:sp>
+      <p:sp>
+        <p:nvSpPr>
+          <p:cNvPr id="14" name="TextBox 13"/>
+          <p:cNvSpPr txBox="1"/>
+          <p:nvPr/>
+        </p:nvSpPr>
+        <p:spPr>
+          <a:xfrm>
+            <a:off x="3584537" y="5248689"/>
+            <a:ext cx="1170461" cy="253593"/>
+          </a:xfrm>
+          <a:prstGeom prst="rect">
+            <a:avLst/>
+          </a:prstGeom>
+          <a:noFill/>
+        </p:spPr>
+        <p:txBody>
+          <a:bodyPr wrap="square" anchor="t" lIns="0" rIns="0" tIns="0" bIns="0">
+            <a:spAutoFit/>
+          </a:bodyPr>
+          <a:lstStyle/>
+          <a:p>
+            <a:pPr algn="l">
+              <a:lnSpc>
+                <a:spcPct val="110000"/>
+              </a:lnSpc>
+              <a:spcAft>
+                <a:spcPts val="0"/>
+              </a:spcAft>
+            </a:pPr>
+            <a:r>
+              <a:rPr sz="760" b="0" i="0">
+                <a:solidFill>
+                  <a:srgbClr val="556A83"/>
+                </a:solidFill>
+                <a:latin typeface="Arial"/>
+              </a:rPr>
+              <a:t>Long-only: −19%</a:t>
+            </a:r>
+          </a:p>
+        </p:txBody>
+      </p:sp>
+      <p:sp>
+        <p:nvSpPr>
+          <p:cNvPr id="15" name="TextBox 14"/>
           <p:cNvSpPr txBox="1"/>
           <p:nvPr/>
         </p:nvSpPr>
@@ -33931,7 +34104,7 @@
       </p:sp>
       <p:sp>
         <p:nvSpPr>
-          <p:cNvPr id="12" name="TextBox 11"/>
+          <p:cNvPr id="16" name="TextBox 15"/>
           <p:cNvSpPr txBox="1"/>
           <p:nvPr/>
         </p:nvSpPr>
@@ -33973,7 +34146,7 @@
       </p:sp>
       <p:sp>
         <p:nvSpPr>
-          <p:cNvPr id="13" name="TextBox 12"/>
+          <p:cNvPr id="17" name="TextBox 16"/>
           <p:cNvSpPr txBox="1"/>
           <p:nvPr/>
         </p:nvSpPr>
@@ -34015,7 +34188,7 @@
       </p:sp>
       <p:sp>
         <p:nvSpPr>
-          <p:cNvPr id="14" name="TextBox 13"/>
+          <p:cNvPr id="18" name="TextBox 17"/>
           <p:cNvSpPr txBox="1"/>
           <p:nvPr/>
         </p:nvSpPr>
@@ -34057,7 +34230,7 @@
       </p:sp>
       <p:sp>
         <p:nvSpPr>
-          <p:cNvPr id="15" name="Rectangle 14"/>
+          <p:cNvPr id="19" name="Rectangle 18"/>
           <p:cNvSpPr/>
           <p:nvPr/>
         </p:nvSpPr>
@@ -34101,7 +34274,7 @@
       </p:sp>
       <p:sp>
         <p:nvSpPr>
-          <p:cNvPr id="16" name="TextBox 15"/>
+          <p:cNvPr id="20" name="TextBox 19"/>
           <p:cNvSpPr txBox="1"/>
           <p:nvPr/>
         </p:nvSpPr>
@@ -34143,7 +34316,7 @@
       </p:sp>
       <p:sp>
         <p:nvSpPr>
-          <p:cNvPr id="17" name="Rectangle 16"/>
+          <p:cNvPr id="21" name="Rectangle 20"/>
           <p:cNvSpPr/>
           <p:nvPr/>
         </p:nvSpPr>
@@ -34187,7 +34360,7 @@
       </p:sp>
       <p:sp>
         <p:nvSpPr>
-          <p:cNvPr id="18" name="TextBox 17"/>
+          <p:cNvPr id="22" name="TextBox 21"/>
           <p:cNvSpPr txBox="1"/>
           <p:nvPr/>
         </p:nvSpPr>
@@ -34229,7 +34402,7 @@
       </p:sp>
       <p:sp>
         <p:nvSpPr>
-          <p:cNvPr id="19" name="Rectangle 18"/>
+          <p:cNvPr id="23" name="Rectangle 22"/>
           <p:cNvSpPr/>
           <p:nvPr/>
         </p:nvSpPr>
@@ -34273,7 +34446,7 @@
       </p:sp>
       <p:sp>
         <p:nvSpPr>
-          <p:cNvPr id="20" name="TextBox 19"/>
+          <p:cNvPr id="24" name="TextBox 23"/>
           <p:cNvSpPr txBox="1"/>
           <p:nvPr/>
         </p:nvSpPr>
@@ -34315,7 +34488,7 @@
       </p:sp>
       <p:sp>
         <p:nvSpPr>
-          <p:cNvPr id="21" name="Rectangle 20"/>
+          <p:cNvPr id="25" name="Rectangle 24"/>
           <p:cNvSpPr/>
           <p:nvPr/>
         </p:nvSpPr>
@@ -34359,7 +34532,7 @@
       </p:sp>
       <p:sp>
         <p:nvSpPr>
-          <p:cNvPr id="22" name="TextBox 21"/>
+          <p:cNvPr id="26" name="TextBox 25"/>
           <p:cNvSpPr txBox="1"/>
           <p:nvPr/>
         </p:nvSpPr>
@@ -34401,7 +34574,7 @@
       </p:sp>
       <p:sp>
         <p:nvSpPr>
-          <p:cNvPr id="23" name="Rectangle 22"/>
+          <p:cNvPr id="27" name="Rectangle 26"/>
           <p:cNvSpPr/>
           <p:nvPr/>
         </p:nvSpPr>
@@ -34445,7 +34618,7 @@
       </p:sp>
       <p:sp>
         <p:nvSpPr>
-          <p:cNvPr id="24" name="TextBox 23"/>
+          <p:cNvPr id="28" name="TextBox 27"/>
           <p:cNvSpPr txBox="1"/>
           <p:nvPr/>
         </p:nvSpPr>
@@ -34487,7 +34660,7 @@
       </p:sp>
       <p:sp>
         <p:nvSpPr>
-          <p:cNvPr id="25" name="Rectangle 24"/>
+          <p:cNvPr id="29" name="Rectangle 28"/>
           <p:cNvSpPr/>
           <p:nvPr/>
         </p:nvSpPr>
@@ -34531,7 +34704,7 @@
       </p:sp>
       <p:sp>
         <p:nvSpPr>
-          <p:cNvPr id="26" name="TextBox 25"/>
+          <p:cNvPr id="30" name="TextBox 29"/>
           <p:cNvSpPr txBox="1"/>
           <p:nvPr/>
         </p:nvSpPr>
@@ -34573,7 +34746,7 @@
       </p:sp>
       <p:sp>
         <p:nvSpPr>
-          <p:cNvPr id="27" name="Rectangle 26"/>
+          <p:cNvPr id="31" name="Rectangle 30"/>
           <p:cNvSpPr/>
           <p:nvPr/>
         </p:nvSpPr>
@@ -34617,7 +34790,7 @@
       </p:sp>
       <p:sp>
         <p:nvSpPr>
-          <p:cNvPr id="28" name="TextBox 27"/>
+          <p:cNvPr id="32" name="TextBox 31"/>
           <p:cNvSpPr txBox="1"/>
           <p:nvPr/>
         </p:nvSpPr>
@@ -34659,7 +34832,7 @@
       </p:sp>
       <p:sp>
         <p:nvSpPr>
-          <p:cNvPr id="29" name="Rectangle 28"/>
+          <p:cNvPr id="33" name="Rectangle 32"/>
           <p:cNvSpPr/>
           <p:nvPr/>
         </p:nvSpPr>
@@ -34703,7 +34876,7 @@
       </p:sp>
       <p:sp>
         <p:nvSpPr>
-          <p:cNvPr id="30" name="TextBox 29"/>
+          <p:cNvPr id="34" name="TextBox 33"/>
           <p:cNvSpPr txBox="1"/>
           <p:nvPr/>
         </p:nvSpPr>
@@ -34745,7 +34918,7 @@
       </p:sp>
       <p:sp>
         <p:nvSpPr>
-          <p:cNvPr id="31" name="Rectangle 30"/>
+          <p:cNvPr id="35" name="Rectangle 34"/>
           <p:cNvSpPr/>
           <p:nvPr/>
         </p:nvSpPr>
@@ -34789,7 +34962,7 @@
       </p:sp>
       <p:sp>
         <p:nvSpPr>
-          <p:cNvPr id="32" name="TextBox 31"/>
+          <p:cNvPr id="36" name="TextBox 35"/>
           <p:cNvSpPr txBox="1"/>
           <p:nvPr/>
         </p:nvSpPr>
@@ -34831,7 +35004,7 @@
       </p:sp>
       <p:sp>
         <p:nvSpPr>
-          <p:cNvPr id="33" name="Rectangle 32"/>
+          <p:cNvPr id="37" name="Rectangle 36"/>
           <p:cNvSpPr/>
           <p:nvPr/>
         </p:nvSpPr>
@@ -34875,7 +35048,7 @@
       </p:sp>
       <p:sp>
         <p:nvSpPr>
-          <p:cNvPr id="34" name="TextBox 33"/>
+          <p:cNvPr id="38" name="TextBox 37"/>
           <p:cNvSpPr txBox="1"/>
           <p:nvPr/>
         </p:nvSpPr>
@@ -34917,7 +35090,7 @@
       </p:sp>
       <p:sp>
         <p:nvSpPr>
-          <p:cNvPr id="35" name="Rectangle 34"/>
+          <p:cNvPr id="39" name="Rectangle 38"/>
           <p:cNvSpPr/>
           <p:nvPr/>
         </p:nvSpPr>
@@ -34961,7 +35134,7 @@
       </p:sp>
       <p:sp>
         <p:nvSpPr>
-          <p:cNvPr id="36" name="TextBox 35"/>
+          <p:cNvPr id="40" name="TextBox 39"/>
           <p:cNvSpPr txBox="1"/>
           <p:nvPr/>
         </p:nvSpPr>
@@ -35003,7 +35176,7 @@
       </p:sp>
       <p:sp>
         <p:nvSpPr>
-          <p:cNvPr id="37" name="Rectangle 36"/>
+          <p:cNvPr id="41" name="Rectangle 40"/>
           <p:cNvSpPr/>
           <p:nvPr/>
         </p:nvSpPr>
@@ -35047,7 +35220,7 @@
       </p:sp>
       <p:sp>
         <p:nvSpPr>
-          <p:cNvPr id="38" name="TextBox 37"/>
+          <p:cNvPr id="42" name="TextBox 41"/>
           <p:cNvSpPr txBox="1"/>
           <p:nvPr/>
         </p:nvSpPr>
@@ -35089,7 +35262,7 @@
       </p:sp>
       <p:sp>
         <p:nvSpPr>
-          <p:cNvPr id="39" name="TextBox 38"/>
+          <p:cNvPr id="43" name="TextBox 42"/>
           <p:cNvSpPr txBox="1"/>
           <p:nvPr/>
         </p:nvSpPr>
@@ -35131,7 +35304,7 @@
       </p:sp>
       <p:sp>
         <p:nvSpPr>
-          <p:cNvPr id="40" name="TextBox 39"/>
+          <p:cNvPr id="44" name="TextBox 43"/>
           <p:cNvSpPr txBox="1"/>
           <p:nvPr/>
         </p:nvSpPr>
@@ -35192,7 +35365,7 @@
       </p:sp>
       <p:sp>
         <p:nvSpPr>
-          <p:cNvPr id="41" name="TextBox 40"/>
+          <p:cNvPr id="45" name="TextBox 44"/>
           <p:cNvSpPr txBox="1"/>
           <p:nvPr/>
         </p:nvSpPr>

--- a/Athanase_Engaged_Ownership_Allocator_Deck.pptx
+++ b/Athanase_Engaged_Ownership_Allocator_Deck.pptx
@@ -33,6 +33,9 @@
     <p:sldId id="281" r:id="rId32"/>
     <p:sldId id="282" r:id="rId33"/>
     <p:sldId id="283" r:id="rId34"/>
+    <p:sldId id="284" r:id="rId35"/>
+    <p:sldId id="285" r:id="rId36"/>
+    <p:sldId id="286" r:id="rId37"/>
   </p:sldIdLst>
   <p:sldSz cx="9753600" cy="7315200" type="screen4x3"/>
   <p:notesSz cx="6858000" cy="9144000"/>
@@ -15304,7 +15307,7 @@
           <a:p>
             <a:pPr>
               <a:lnSpc>
-                <a:spcPct val="104000"/>
+                <a:spcPct val="103000"/>
               </a:lnSpc>
               <a:spcAft>
                 <a:spcPts val="700"/>
@@ -15332,7 +15335,7 @@
           <a:p>
             <a:pPr>
               <a:lnSpc>
-                <a:spcPct val="104000"/>
+                <a:spcPct val="103000"/>
               </a:lnSpc>
               <a:spcAft>
                 <a:spcPts val="700"/>
@@ -15360,7 +15363,7 @@
           <a:p>
             <a:pPr>
               <a:lnSpc>
-                <a:spcPct val="104000"/>
+                <a:spcPct val="103000"/>
               </a:lnSpc>
               <a:spcAft>
                 <a:spcPts val="700"/>
@@ -15388,7 +15391,7 @@
           <a:p>
             <a:pPr>
               <a:lnSpc>
-                <a:spcPct val="104000"/>
+                <a:spcPct val="103000"/>
               </a:lnSpc>
               <a:spcAft>
                 <a:spcPts val="700"/>
@@ -15416,7 +15419,7 @@
           <a:p>
             <a:pPr>
               <a:lnSpc>
-                <a:spcPct val="104000"/>
+                <a:spcPct val="103000"/>
               </a:lnSpc>
               <a:spcAft>
                 <a:spcPts val="700"/>
@@ -15509,14 +15512,14 @@
           <a:p>
             <a:pPr>
               <a:lnSpc>
-                <a:spcPct val="104000"/>
-              </a:lnSpc>
-              <a:spcAft>
-                <a:spcPts val="700"/>
-              </a:spcAft>
-            </a:pPr>
-            <a:r>
-              <a:rPr sz="919" b="1">
+                <a:spcPct val="103000"/>
+              </a:lnSpc>
+              <a:spcAft>
+                <a:spcPts val="450"/>
+              </a:spcAft>
+            </a:pPr>
+            <a:r>
+              <a:rPr sz="840" b="1">
                 <a:solidFill>
                   <a:srgbClr val="314359"/>
                 </a:solidFill>
@@ -15525,7 +15528,7 @@
               <a:t>2.1   </a:t>
             </a:r>
             <a:r>
-              <a:rPr sz="919">
+              <a:rPr sz="840">
                 <a:solidFill>
                   <a:srgbClr val="314359"/>
                 </a:solidFill>
@@ -15537,14 +15540,14 @@
           <a:p>
             <a:pPr>
               <a:lnSpc>
-                <a:spcPct val="104000"/>
-              </a:lnSpc>
-              <a:spcAft>
-                <a:spcPts val="700"/>
-              </a:spcAft>
-            </a:pPr>
-            <a:r>
-              <a:rPr sz="919" b="1">
+                <a:spcPct val="103000"/>
+              </a:lnSpc>
+              <a:spcAft>
+                <a:spcPts val="450"/>
+              </a:spcAft>
+            </a:pPr>
+            <a:r>
+              <a:rPr sz="840" b="1">
                 <a:solidFill>
                   <a:srgbClr val="314359"/>
                 </a:solidFill>
@@ -15553,7 +15556,7 @@
               <a:t>2.2   </a:t>
             </a:r>
             <a:r>
-              <a:rPr sz="919">
+              <a:rPr sz="840">
                 <a:solidFill>
                   <a:srgbClr val="314359"/>
                 </a:solidFill>
@@ -15565,14 +15568,14 @@
           <a:p>
             <a:pPr>
               <a:lnSpc>
-                <a:spcPct val="104000"/>
-              </a:lnSpc>
-              <a:spcAft>
-                <a:spcPts val="700"/>
-              </a:spcAft>
-            </a:pPr>
-            <a:r>
-              <a:rPr sz="919" b="1">
+                <a:spcPct val="103000"/>
+              </a:lnSpc>
+              <a:spcAft>
+                <a:spcPts val="450"/>
+              </a:spcAft>
+            </a:pPr>
+            <a:r>
+              <a:rPr sz="840" b="1">
                 <a:solidFill>
                   <a:srgbClr val="314359"/>
                 </a:solidFill>
@@ -15581,7 +15584,7 @@
               <a:t>2.3   </a:t>
             </a:r>
             <a:r>
-              <a:rPr sz="919">
+              <a:rPr sz="840">
                 <a:solidFill>
                   <a:srgbClr val="314359"/>
                 </a:solidFill>
@@ -15590,7 +15593,7 @@
               <a:t>The inefficiency Athanase harvests</a:t>
             </a:r>
             <a:r>
-              <a:rPr sz="760" i="1">
+              <a:rPr sz="680" i="1">
                 <a:solidFill>
                   <a:srgbClr val="556A83"/>
                 </a:solidFill>
@@ -15602,14 +15605,14 @@
           <a:p>
             <a:pPr>
               <a:lnSpc>
-                <a:spcPct val="104000"/>
-              </a:lnSpc>
-              <a:spcAft>
-                <a:spcPts val="700"/>
-              </a:spcAft>
-            </a:pPr>
-            <a:r>
-              <a:rPr sz="919" b="1">
+                <a:spcPct val="103000"/>
+              </a:lnSpc>
+              <a:spcAft>
+                <a:spcPts val="450"/>
+              </a:spcAft>
+            </a:pPr>
+            <a:r>
+              <a:rPr sz="840" b="1">
                 <a:solidFill>
                   <a:srgbClr val="314359"/>
                 </a:solidFill>
@@ -15618,7 +15621,7 @@
               <a:t>2.4   </a:t>
             </a:r>
             <a:r>
-              <a:rPr sz="919">
+              <a:rPr sz="840">
                 <a:solidFill>
                   <a:srgbClr val="314359"/>
                 </a:solidFill>
@@ -15627,7 +15630,7 @@
               <a:t>We don’t buy broken companies — we buy hidden cores</a:t>
             </a:r>
             <a:r>
-              <a:rPr sz="760" i="1">
+              <a:rPr sz="680" i="1">
                 <a:solidFill>
                   <a:srgbClr val="556A83"/>
                 </a:solidFill>
@@ -15639,14 +15642,14 @@
           <a:p>
             <a:pPr>
               <a:lnSpc>
-                <a:spcPct val="104000"/>
-              </a:lnSpc>
-              <a:spcAft>
-                <a:spcPts val="700"/>
-              </a:spcAft>
-            </a:pPr>
-            <a:r>
-              <a:rPr sz="919" b="1">
+                <a:spcPct val="103000"/>
+              </a:lnSpc>
+              <a:spcAft>
+                <a:spcPts val="450"/>
+              </a:spcAft>
+            </a:pPr>
+            <a:r>
+              <a:rPr sz="840" b="1">
                 <a:solidFill>
                   <a:srgbClr val="314359"/>
                 </a:solidFill>
@@ -15655,7 +15658,7 @@
               <a:t>2.5   </a:t>
             </a:r>
             <a:r>
-              <a:rPr sz="919">
+              <a:rPr sz="840">
                 <a:solidFill>
                   <a:srgbClr val="314359"/>
                 </a:solidFill>
@@ -15664,7 +15667,7 @@
               <a:t>Quality-core constructivism — how we differ</a:t>
             </a:r>
             <a:r>
-              <a:rPr sz="760" i="1">
+              <a:rPr sz="680" i="1">
                 <a:solidFill>
                   <a:srgbClr val="556A83"/>
                 </a:solidFill>
@@ -15676,14 +15679,14 @@
           <a:p>
             <a:pPr>
               <a:lnSpc>
-                <a:spcPct val="104000"/>
-              </a:lnSpc>
-              <a:spcAft>
-                <a:spcPts val="700"/>
-              </a:spcAft>
-            </a:pPr>
-            <a:r>
-              <a:rPr sz="919" b="1">
+                <a:spcPct val="103000"/>
+              </a:lnSpc>
+              <a:spcAft>
+                <a:spcPts val="450"/>
+              </a:spcAft>
+            </a:pPr>
+            <a:r>
+              <a:rPr sz="840" b="1">
                 <a:solidFill>
                   <a:srgbClr val="314359"/>
                 </a:solidFill>
@@ -15692,7 +15695,7 @@
               <a:t>2.6   </a:t>
             </a:r>
             <a:r>
-              <a:rPr sz="919">
+              <a:rPr sz="840">
                 <a:solidFill>
                   <a:srgbClr val="314359"/>
                 </a:solidFill>
@@ -15701,7 +15704,7 @@
               <a:t>We don’t need to be right more than ~50%</a:t>
             </a:r>
             <a:r>
-              <a:rPr sz="760" i="1">
+              <a:rPr sz="680" i="1">
                 <a:solidFill>
                   <a:srgbClr val="556A83"/>
                 </a:solidFill>
@@ -15713,14 +15716,14 @@
           <a:p>
             <a:pPr>
               <a:lnSpc>
-                <a:spcPct val="104000"/>
-              </a:lnSpc>
-              <a:spcAft>
-                <a:spcPts val="700"/>
-              </a:spcAft>
-            </a:pPr>
-            <a:r>
-              <a:rPr sz="919" b="1">
+                <a:spcPct val="103000"/>
+              </a:lnSpc>
+              <a:spcAft>
+                <a:spcPts val="450"/>
+              </a:spcAft>
+            </a:pPr>
+            <a:r>
+              <a:rPr sz="840" b="1">
                 <a:solidFill>
                   <a:srgbClr val="314359"/>
                 </a:solidFill>
@@ -15729,7 +15732,7 @@
               <a:t>2.7   </a:t>
             </a:r>
             <a:r>
-              <a:rPr sz="919">
+              <a:rPr sz="840">
                 <a:solidFill>
                   <a:srgbClr val="314359"/>
                 </a:solidFill>
@@ -15741,14 +15744,14 @@
           <a:p>
             <a:pPr>
               <a:lnSpc>
-                <a:spcPct val="104000"/>
-              </a:lnSpc>
-              <a:spcAft>
-                <a:spcPts val="700"/>
-              </a:spcAft>
-            </a:pPr>
-            <a:r>
-              <a:rPr sz="919" b="1">
+                <a:spcPct val="103000"/>
+              </a:lnSpc>
+              <a:spcAft>
+                <a:spcPts val="450"/>
+              </a:spcAft>
+            </a:pPr>
+            <a:r>
+              <a:rPr sz="840" b="1">
                 <a:solidFill>
                   <a:srgbClr val="314359"/>
                 </a:solidFill>
@@ -15757,7 +15760,7 @@
               <a:t>2.8   </a:t>
             </a:r>
             <a:r>
-              <a:rPr sz="919">
+              <a:rPr sz="840">
                 <a:solidFill>
                   <a:srgbClr val="314359"/>
                 </a:solidFill>
@@ -15769,14 +15772,14 @@
           <a:p>
             <a:pPr>
               <a:lnSpc>
-                <a:spcPct val="104000"/>
-              </a:lnSpc>
-              <a:spcAft>
-                <a:spcPts val="700"/>
-              </a:spcAft>
-            </a:pPr>
-            <a:r>
-              <a:rPr sz="919" b="1">
+                <a:spcPct val="103000"/>
+              </a:lnSpc>
+              <a:spcAft>
+                <a:spcPts val="450"/>
+              </a:spcAft>
+            </a:pPr>
+            <a:r>
+              <a:rPr sz="840" b="1">
                 <a:solidFill>
                   <a:srgbClr val="314359"/>
                 </a:solidFill>
@@ -15785,7 +15788,7 @@
               <a:t>2.9   </a:t>
             </a:r>
             <a:r>
-              <a:rPr sz="919">
+              <a:rPr sz="840">
                 <a:solidFill>
                   <a:srgbClr val="314359"/>
                 </a:solidFill>
@@ -15794,7 +15797,7 @@
               <a:t>A non-linear path — honestly priced</a:t>
             </a:r>
             <a:r>
-              <a:rPr sz="760" i="1">
+              <a:rPr sz="680" i="1">
                 <a:solidFill>
                   <a:srgbClr val="556A83"/>
                 </a:solidFill>
@@ -15806,14 +15809,14 @@
           <a:p>
             <a:pPr>
               <a:lnSpc>
-                <a:spcPct val="104000"/>
-              </a:lnSpc>
-              <a:spcAft>
-                <a:spcPts val="700"/>
-              </a:spcAft>
-            </a:pPr>
-            <a:r>
-              <a:rPr sz="919" b="1">
+                <a:spcPct val="103000"/>
+              </a:lnSpc>
+              <a:spcAft>
+                <a:spcPts val="450"/>
+              </a:spcAft>
+            </a:pPr>
+            <a:r>
+              <a:rPr sz="840" b="1">
                 <a:solidFill>
                   <a:srgbClr val="314359"/>
                 </a:solidFill>
@@ -15822,7 +15825,7 @@
               <a:t>2.10   </a:t>
             </a:r>
             <a:r>
-              <a:rPr sz="919">
+              <a:rPr sz="840">
                 <a:solidFill>
                   <a:srgbClr val="314359"/>
                 </a:solidFill>
@@ -15831,7 +15834,7 @@
               <a:t>Risk reframing for the investment committee</a:t>
             </a:r>
             <a:r>
-              <a:rPr sz="760" i="1">
+              <a:rPr sz="680" i="1">
                 <a:solidFill>
                   <a:srgbClr val="556A83"/>
                 </a:solidFill>
@@ -15843,14 +15846,14 @@
           <a:p>
             <a:pPr>
               <a:lnSpc>
-                <a:spcPct val="104000"/>
-              </a:lnSpc>
-              <a:spcAft>
-                <a:spcPts val="700"/>
-              </a:spcAft>
-            </a:pPr>
-            <a:r>
-              <a:rPr sz="919" b="1">
+                <a:spcPct val="103000"/>
+              </a:lnSpc>
+              <a:spcAft>
+                <a:spcPts val="450"/>
+              </a:spcAft>
+            </a:pPr>
+            <a:r>
+              <a:rPr sz="840" b="1">
                 <a:solidFill>
                   <a:srgbClr val="314359"/>
                 </a:solidFill>
@@ -15859,7 +15862,7 @@
               <a:t>2.11   </a:t>
             </a:r>
             <a:r>
-              <a:rPr sz="919">
+              <a:rPr sz="840">
                 <a:solidFill>
                   <a:srgbClr val="314359"/>
                 </a:solidFill>
@@ -15868,7 +15871,7 @@
               <a:t>Proof: outperformance with downside protection</a:t>
             </a:r>
             <a:r>
-              <a:rPr sz="760" i="1">
+              <a:rPr sz="680" i="1">
                 <a:solidFill>
                   <a:srgbClr val="556A83"/>
                 </a:solidFill>
@@ -15880,14 +15883,14 @@
           <a:p>
             <a:pPr>
               <a:lnSpc>
-                <a:spcPct val="104000"/>
-              </a:lnSpc>
-              <a:spcAft>
-                <a:spcPts val="700"/>
-              </a:spcAft>
-            </a:pPr>
-            <a:r>
-              <a:rPr sz="919" b="1">
+                <a:spcPct val="103000"/>
+              </a:lnSpc>
+              <a:spcAft>
+                <a:spcPts val="450"/>
+              </a:spcAft>
+            </a:pPr>
+            <a:r>
+              <a:rPr sz="840" b="1">
                 <a:solidFill>
                   <a:srgbClr val="314359"/>
                 </a:solidFill>
@@ -15896,7 +15899,7 @@
               <a:t>2.12   </a:t>
             </a:r>
             <a:r>
-              <a:rPr sz="919">
+              <a:rPr sz="840">
                 <a:solidFill>
                   <a:srgbClr val="314359"/>
                 </a:solidFill>
@@ -15905,7 +15908,7 @@
               <a:t>AIP Fund II — transactions (2015–present)</a:t>
             </a:r>
             <a:r>
-              <a:rPr sz="760" i="1">
+              <a:rPr sz="680" i="1">
                 <a:solidFill>
                   <a:srgbClr val="556A83"/>
                 </a:solidFill>
@@ -15917,14 +15920,14 @@
           <a:p>
             <a:pPr>
               <a:lnSpc>
-                <a:spcPct val="104000"/>
-              </a:lnSpc>
-              <a:spcAft>
-                <a:spcPts val="700"/>
-              </a:spcAft>
-            </a:pPr>
-            <a:r>
-              <a:rPr sz="919" b="1">
+                <a:spcPct val="103000"/>
+              </a:lnSpc>
+              <a:spcAft>
+                <a:spcPts val="450"/>
+              </a:spcAft>
+            </a:pPr>
+            <a:r>
+              <a:rPr sz="840" b="1">
                 <a:solidFill>
                   <a:srgbClr val="314359"/>
                 </a:solidFill>
@@ -15933,7 +15936,7 @@
               <a:t>2.13   </a:t>
             </a:r>
             <a:r>
-              <a:rPr sz="919">
+              <a:rPr sz="840">
                 <a:solidFill>
                   <a:srgbClr val="314359"/>
                 </a:solidFill>
@@ -15942,7 +15945,7 @@
               <a:t>Prior period — transactions (2006–2014)</a:t>
             </a:r>
             <a:r>
-              <a:rPr sz="760" i="1">
+              <a:rPr sz="680" i="1">
                 <a:solidFill>
                   <a:srgbClr val="556A83"/>
                 </a:solidFill>
@@ -15954,14 +15957,14 @@
           <a:p>
             <a:pPr>
               <a:lnSpc>
-                <a:spcPct val="104000"/>
-              </a:lnSpc>
-              <a:spcAft>
-                <a:spcPts val="700"/>
-              </a:spcAft>
-            </a:pPr>
-            <a:r>
-              <a:rPr sz="919" b="1">
+                <a:spcPct val="103000"/>
+              </a:lnSpc>
+              <a:spcAft>
+                <a:spcPts val="450"/>
+              </a:spcAft>
+            </a:pPr>
+            <a:r>
+              <a:rPr sz="840" b="1">
                 <a:solidFill>
                   <a:srgbClr val="314359"/>
                 </a:solidFill>
@@ -15970,7 +15973,7 @@
               <a:t>2.14   </a:t>
             </a:r>
             <a:r>
-              <a:rPr sz="919">
+              <a:rPr sz="840">
                 <a:solidFill>
                   <a:srgbClr val="314359"/>
                 </a:solidFill>
@@ -15982,14 +15985,14 @@
           <a:p>
             <a:pPr>
               <a:lnSpc>
-                <a:spcPct val="104000"/>
-              </a:lnSpc>
-              <a:spcAft>
-                <a:spcPts val="700"/>
-              </a:spcAft>
-            </a:pPr>
-            <a:r>
-              <a:rPr sz="919" b="1">
+                <a:spcPct val="103000"/>
+              </a:lnSpc>
+              <a:spcAft>
+                <a:spcPts val="450"/>
+              </a:spcAft>
+            </a:pPr>
+            <a:r>
+              <a:rPr sz="840" b="1">
                 <a:solidFill>
                   <a:srgbClr val="314359"/>
                 </a:solidFill>
@@ -15998,7 +16001,7 @@
               <a:t>2.15   </a:t>
             </a:r>
             <a:r>
-              <a:rPr sz="919">
+              <a:rPr sz="840">
                 <a:solidFill>
                   <a:srgbClr val="314359"/>
                 </a:solidFill>
@@ -16010,14 +16013,14 @@
           <a:p>
             <a:pPr>
               <a:lnSpc>
-                <a:spcPct val="104000"/>
-              </a:lnSpc>
-              <a:spcAft>
-                <a:spcPts val="700"/>
-              </a:spcAft>
-            </a:pPr>
-            <a:r>
-              <a:rPr sz="919" b="1">
+                <a:spcPct val="103000"/>
+              </a:lnSpc>
+              <a:spcAft>
+                <a:spcPts val="450"/>
+              </a:spcAft>
+            </a:pPr>
+            <a:r>
+              <a:rPr sz="840" b="1">
                 <a:solidFill>
                   <a:srgbClr val="314359"/>
                 </a:solidFill>
@@ -16026,7 +16029,7 @@
               <a:t>2.16   </a:t>
             </a:r>
             <a:r>
-              <a:rPr sz="919">
+              <a:rPr sz="840">
                 <a:solidFill>
                   <a:srgbClr val="314359"/>
                 </a:solidFill>
@@ -16038,14 +16041,14 @@
           <a:p>
             <a:pPr>
               <a:lnSpc>
-                <a:spcPct val="104000"/>
-              </a:lnSpc>
-              <a:spcAft>
-                <a:spcPts val="700"/>
-              </a:spcAft>
-            </a:pPr>
-            <a:r>
-              <a:rPr sz="919" b="1">
+                <a:spcPct val="103000"/>
+              </a:lnSpc>
+              <a:spcAft>
+                <a:spcPts val="450"/>
+              </a:spcAft>
+            </a:pPr>
+            <a:r>
+              <a:rPr sz="840" b="1">
                 <a:solidFill>
                   <a:srgbClr val="314359"/>
                 </a:solidFill>
@@ -16054,7 +16057,7 @@
               <a:t>2.17   </a:t>
             </a:r>
             <a:r>
-              <a:rPr sz="919">
+              <a:rPr sz="840">
                 <a:solidFill>
                   <a:srgbClr val="314359"/>
                 </a:solidFill>
@@ -16063,7 +16066,7 @@
               <a:t>What it does to an allocator’s portfolio</a:t>
             </a:r>
             <a:r>
-              <a:rPr sz="760" i="1">
+              <a:rPr sz="680" i="1">
                 <a:solidFill>
                   <a:srgbClr val="556A83"/>
                 </a:solidFill>
@@ -16075,14 +16078,14 @@
           <a:p>
             <a:pPr>
               <a:lnSpc>
-                <a:spcPct val="104000"/>
-              </a:lnSpc>
-              <a:spcAft>
-                <a:spcPts val="700"/>
-              </a:spcAft>
-            </a:pPr>
-            <a:r>
-              <a:rPr sz="919" b="1">
+                <a:spcPct val="103000"/>
+              </a:lnSpc>
+              <a:spcAft>
+                <a:spcPts val="450"/>
+              </a:spcAft>
+            </a:pPr>
+            <a:r>
+              <a:rPr sz="840" b="1">
                 <a:solidFill>
                   <a:srgbClr val="314359"/>
                 </a:solidFill>
@@ -16091,7 +16094,118 @@
               <a:t>2.18   </a:t>
             </a:r>
             <a:r>
-              <a:rPr sz="919">
+              <a:rPr sz="840">
+                <a:solidFill>
+                  <a:srgbClr val="314359"/>
+                </a:solidFill>
+                <a:latin typeface="Arial"/>
+              </a:rPr>
+              <a:t>Lower downside risk compounds into better outcomes</a:t>
+            </a:r>
+            <a:r>
+              <a:rPr sz="680" i="1">
+                <a:solidFill>
+                  <a:srgbClr val="556A83"/>
+                </a:solidFill>
+                <a:latin typeface="Arial"/>
+              </a:rPr>
+              <a:t>   (Table 7)</a:t>
+            </a:r>
+          </a:p>
+          <a:p>
+            <a:pPr>
+              <a:lnSpc>
+                <a:spcPct val="103000"/>
+              </a:lnSpc>
+              <a:spcAft>
+                <a:spcPts val="450"/>
+              </a:spcAft>
+            </a:pPr>
+            <a:r>
+              <a:rPr sz="840" b="1">
+                <a:solidFill>
+                  <a:srgbClr val="314359"/>
+                </a:solidFill>
+                <a:latin typeface="Arial"/>
+              </a:rPr>
+              <a:t>2.19   </a:t>
+            </a:r>
+            <a:r>
+              <a:rPr sz="840">
+                <a:solidFill>
+                  <a:srgbClr val="314359"/>
+                </a:solidFill>
+                <a:latin typeface="Arial"/>
+              </a:rPr>
+              <a:t>A complement to global equities, not a duplicate</a:t>
+            </a:r>
+            <a:r>
+              <a:rPr sz="680" i="1">
+                <a:solidFill>
+                  <a:srgbClr val="556A83"/>
+                </a:solidFill>
+                <a:latin typeface="Arial"/>
+              </a:rPr>
+              <a:t>   (Figure 6)</a:t>
+            </a:r>
+          </a:p>
+          <a:p>
+            <a:pPr>
+              <a:lnSpc>
+                <a:spcPct val="103000"/>
+              </a:lnSpc>
+              <a:spcAft>
+                <a:spcPts val="450"/>
+              </a:spcAft>
+            </a:pPr>
+            <a:r>
+              <a:rPr sz="840" b="1">
+                <a:solidFill>
+                  <a:srgbClr val="314359"/>
+                </a:solidFill>
+                <a:latin typeface="Arial"/>
+              </a:rPr>
+              <a:t>2.20   </a:t>
+            </a:r>
+            <a:r>
+              <a:rPr sz="840">
+                <a:solidFill>
+                  <a:srgbClr val="314359"/>
+                </a:solidFill>
+                <a:latin typeface="Arial"/>
+              </a:rPr>
+              <a:t>What a blend does to the whole portfolio</a:t>
+            </a:r>
+            <a:r>
+              <a:rPr sz="680" i="1">
+                <a:solidFill>
+                  <a:srgbClr val="556A83"/>
+                </a:solidFill>
+                <a:latin typeface="Arial"/>
+              </a:rPr>
+              <a:t>   (Figure 7)</a:t>
+            </a:r>
+          </a:p>
+          <a:p>
+            <a:pPr>
+              <a:lnSpc>
+                <a:spcPct val="103000"/>
+              </a:lnSpc>
+              <a:spcAft>
+                <a:spcPts val="450"/>
+              </a:spcAft>
+            </a:pPr>
+            <a:r>
+              <a:rPr sz="840" b="1">
+                <a:solidFill>
+                  <a:srgbClr val="314359"/>
+                </a:solidFill>
+                <a:latin typeface="Arial"/>
+              </a:rPr>
+              <a:t>2.21   </a:t>
+            </a:r>
+            <a:r>
+              <a:rPr sz="840">
                 <a:solidFill>
                   <a:srgbClr val="314359"/>
                 </a:solidFill>
@@ -35528,21 +35642,63 @@
                 </a:solidFill>
                 <a:latin typeface="Arial"/>
               </a:rPr>
-              <a:t>Ownership Model</a:t>
-            </a:r>
-          </a:p>
-        </p:txBody>
-      </p:sp>
-      <p:sp>
-        <p:nvSpPr>
-          <p:cNvPr id="5" name="Rectangle 4"/>
+              <a:t>Risk-Adjusted Outcomes</a:t>
+            </a:r>
+          </a:p>
+        </p:txBody>
+      </p:sp>
+      <p:sp>
+        <p:nvSpPr>
+          <p:cNvPr id="5" name="TextBox 4"/>
+          <p:cNvSpPr txBox="1"/>
+          <p:nvPr/>
+        </p:nvSpPr>
+        <p:spPr>
+          <a:xfrm>
+            <a:off x="7242229" y="263347"/>
+            <a:ext cx="2084884" cy="292608"/>
+          </a:xfrm>
+          <a:prstGeom prst="rect">
+            <a:avLst/>
+          </a:prstGeom>
+          <a:noFill/>
+        </p:spPr>
+        <p:txBody>
+          <a:bodyPr wrap="square" anchor="t" lIns="0" rIns="0" tIns="0" bIns="0">
+            <a:spAutoFit/>
+          </a:bodyPr>
+          <a:lstStyle/>
+          <a:p>
+            <a:pPr algn="r">
+              <a:lnSpc>
+                <a:spcPct val="110000"/>
+              </a:lnSpc>
+              <a:spcAft>
+                <a:spcPts val="0"/>
+              </a:spcAft>
+            </a:pPr>
+            <a:r>
+              <a:rPr sz="880" b="1" i="0">
+                <a:solidFill>
+                  <a:srgbClr val="556A83"/>
+                </a:solidFill>
+                <a:latin typeface="Arial"/>
+              </a:rPr>
+              <a:t>Table 7</a:t>
+            </a:r>
+          </a:p>
+        </p:txBody>
+      </p:sp>
+      <p:sp>
+        <p:nvSpPr>
+          <p:cNvPr id="6" name="Rectangle 5"/>
           <p:cNvSpPr/>
           <p:nvPr/>
         </p:nvSpPr>
         <p:spPr>
           <a:xfrm>
             <a:off x="0" y="604723"/>
-            <a:ext cx="9753600" cy="1024128"/>
+            <a:ext cx="9753600" cy="1414272"/>
           </a:xfrm>
           <a:prstGeom prst="rect">
             <a:avLst/>
@@ -35579,7 +35735,7 @@
       </p:sp>
       <p:sp>
         <p:nvSpPr>
-          <p:cNvPr id="6" name="TextBox 5"/>
+          <p:cNvPr id="7" name="TextBox 6"/>
           <p:cNvSpPr txBox="1"/>
           <p:nvPr/>
         </p:nvSpPr>
@@ -35614,14 +35770,56 @@
                 </a:solidFill>
                 <a:latin typeface="Times New Roman"/>
               </a:rPr>
-              <a:t>2.18 Responsible ownership, by construction</a:t>
-            </a:r>
-          </a:p>
-        </p:txBody>
-      </p:sp>
-      <p:sp>
-        <p:nvSpPr>
-          <p:cNvPr id="7" name="TextBox 6"/>
+              <a:t>2.18 Lower downside risk compounds into better outcomes</a:t>
+            </a:r>
+          </a:p>
+        </p:txBody>
+      </p:sp>
+      <p:sp>
+        <p:nvSpPr>
+          <p:cNvPr id="8" name="TextBox 7"/>
+          <p:cNvSpPr txBox="1"/>
+          <p:nvPr/>
+        </p:nvSpPr>
+        <p:spPr>
+          <a:xfrm>
+            <a:off x="453553" y="1511808"/>
+            <a:ext cx="8705305" cy="487680"/>
+          </a:xfrm>
+          <a:prstGeom prst="rect">
+            <a:avLst/>
+          </a:prstGeom>
+          <a:noFill/>
+        </p:spPr>
+        <p:txBody>
+          <a:bodyPr wrap="square" anchor="t" lIns="0" rIns="0" tIns="0" bIns="0">
+            <a:spAutoFit/>
+          </a:bodyPr>
+          <a:lstStyle/>
+          <a:p>
+            <a:pPr algn="l">
+              <a:lnSpc>
+                <a:spcPct val="110000"/>
+              </a:lnSpc>
+              <a:spcAft>
+                <a:spcPts val="0"/>
+              </a:spcAft>
+            </a:pPr>
+            <a:r>
+              <a:rPr sz="1040" b="0" i="1">
+                <a:solidFill>
+                  <a:srgbClr val="556A83"/>
+                </a:solidFill>
+                <a:latin typeface="Arial"/>
+              </a:rPr>
+              <a:t>Athanase carries higher total volatility than the market — but its downside volatility is lower, which is what protects compounding.</a:t>
+            </a:r>
+          </a:p>
+        </p:txBody>
+      </p:sp>
+      <p:sp>
+        <p:nvSpPr>
+          <p:cNvPr id="9" name="TextBox 8"/>
           <p:cNvSpPr txBox="1"/>
           <p:nvPr/>
         </p:nvSpPr>
@@ -35663,14 +35861,58 @@
       </p:sp>
       <p:sp>
         <p:nvSpPr>
-          <p:cNvPr id="8" name="TextBox 7"/>
-          <p:cNvSpPr txBox="1"/>
-          <p:nvPr/>
-        </p:nvSpPr>
-        <p:spPr>
-          <a:xfrm>
-            <a:off x="548653" y="1901952"/>
-            <a:ext cx="8705305" cy="4584192"/>
+          <p:cNvPr id="10" name="Rectangle 9"/>
+          <p:cNvSpPr/>
+          <p:nvPr/>
+        </p:nvSpPr>
+        <p:spPr>
+          <a:xfrm>
+            <a:off x="438922" y="2292096"/>
+            <a:ext cx="2889576" cy="1248460"/>
+          </a:xfrm>
+          <a:prstGeom prst="rect">
+            <a:avLst/>
+          </a:prstGeom>
+          <a:solidFill>
+            <a:srgbClr val="F6F7F9"/>
+          </a:solidFill>
+          <a:ln>
+            <a:noFill/>
+          </a:ln>
+          <a:effectLst/>
+        </p:spPr>
+        <p:style>
+          <a:lnRef idx="1">
+            <a:schemeClr val="accent1"/>
+          </a:lnRef>
+          <a:fillRef idx="3">
+            <a:schemeClr val="accent1"/>
+          </a:fillRef>
+          <a:effectRef idx="2">
+            <a:schemeClr val="accent1"/>
+          </a:effectRef>
+          <a:fontRef idx="minor">
+            <a:schemeClr val="lt1"/>
+          </a:fontRef>
+        </p:style>
+        <p:txBody>
+          <a:bodyPr rtlCol="0" anchor="ctr"/>
+          <a:lstStyle/>
+          <a:p>
+            <a:pPr algn="ctr"/>
+          </a:p>
+        </p:txBody>
+      </p:sp>
+      <p:sp>
+        <p:nvSpPr>
+          <p:cNvPr id="11" name="TextBox 10"/>
+          <p:cNvSpPr txBox="1"/>
+          <p:nvPr/>
+        </p:nvSpPr>
+        <p:spPr>
+          <a:xfrm>
+            <a:off x="585230" y="2428646"/>
+            <a:ext cx="2596960" cy="292608"/>
           </a:xfrm>
           <a:prstGeom prst="rect">
             <a:avLst/>
@@ -35683,151 +35925,3620 @@
           </a:bodyPr>
           <a:lstStyle/>
           <a:p>
-            <a:pPr marL="186949" indent="-186949">
-              <a:lnSpc>
-                <a:spcPct val="112000"/>
-              </a:lnSpc>
-              <a:spcAft>
-                <a:spcPts val="1400"/>
-              </a:spcAft>
-            </a:pPr>
-            <a:r>
-              <a:rPr sz="1280" b="1">
+            <a:pPr algn="l">
+              <a:lnSpc>
+                <a:spcPct val="110000"/>
+              </a:lnSpc>
+              <a:spcAft>
+                <a:spcPts val="0"/>
+              </a:spcAft>
+            </a:pPr>
+            <a:r>
+              <a:rPr sz="840" b="1" i="0">
                 <a:solidFill>
                   <a:srgbClr val="314359"/>
                 </a:solidFill>
                 <a:latin typeface="Arial"/>
               </a:rPr>
-              <a:t>›  </a:t>
-            </a:r>
-            <a:r>
-              <a:rPr sz="1280" b="1">
+              <a:t>ANNUALISED RETURN</a:t>
+            </a:r>
+          </a:p>
+        </p:txBody>
+      </p:sp>
+      <p:sp>
+        <p:nvSpPr>
+          <p:cNvPr id="12" name="TextBox 11"/>
+          <p:cNvSpPr txBox="1"/>
+          <p:nvPr/>
+        </p:nvSpPr>
+        <p:spPr>
+          <a:xfrm>
+            <a:off x="585230" y="2740761"/>
+            <a:ext cx="2596960" cy="780288"/>
+          </a:xfrm>
+          <a:prstGeom prst="rect">
+            <a:avLst/>
+          </a:prstGeom>
+          <a:noFill/>
+        </p:spPr>
+        <p:txBody>
+          <a:bodyPr wrap="square" anchor="t" lIns="0" rIns="0" tIns="0" bIns="0">
+            <a:spAutoFit/>
+          </a:bodyPr>
+          <a:lstStyle/>
+          <a:p>
+            <a:pPr>
+              <a:spcAft>
+                <a:spcPts val="200"/>
+              </a:spcAft>
+            </a:pPr>
+            <a:r>
+              <a:rPr sz="880">
+                <a:solidFill>
+                  <a:srgbClr val="556A83"/>
+                </a:solidFill>
+                <a:latin typeface="Arial"/>
+              </a:rPr>
+              <a:t>MSCI  </a:t>
+            </a:r>
+            <a:r>
+              <a:rPr sz="1520" b="1">
                 <a:solidFill>
                   <a:srgbClr val="314359"/>
                 </a:solidFill>
-                <a:latin typeface="Arial"/>
-              </a:rPr>
-              <a:t>Governance is the lever.</a:t>
-            </a:r>
-            <a:r>
-              <a:rPr sz="1280">
-                <a:solidFill>
-                  <a:srgbClr val="0E1620"/>
-                </a:solidFill>
-                <a:latin typeface="Arial"/>
-              </a:rPr>
-              <a:t>  Value is created through board representation and active promotion of strong corporate governance across all holdings.</a:t>
-            </a:r>
-          </a:p>
-          <a:p>
-            <a:pPr marL="186949" indent="-186949">
-              <a:lnSpc>
-                <a:spcPct val="112000"/>
-              </a:lnSpc>
-              <a:spcAft>
-                <a:spcPts val="1400"/>
-              </a:spcAft>
-            </a:pPr>
-            <a:r>
-              <a:rPr sz="1280" b="1">
+                <a:latin typeface="Times New Roman"/>
+              </a:rPr>
+              <a:t>6.1%</a:t>
+            </a:r>
+          </a:p>
+          <a:p>
+            <a:r>
+              <a:rPr sz="880">
+                <a:solidFill>
+                  <a:srgbClr val="556A83"/>
+                </a:solidFill>
+                <a:latin typeface="Arial"/>
+              </a:rPr>
+              <a:t>AIP   </a:t>
+            </a:r>
+            <a:r>
+              <a:rPr sz="1520" b="1">
+                <a:solidFill>
+                  <a:srgbClr val="152130"/>
+                </a:solidFill>
+                <a:latin typeface="Times New Roman"/>
+              </a:rPr>
+              <a:t>16.0%</a:t>
+            </a:r>
+          </a:p>
+        </p:txBody>
+      </p:sp>
+      <p:sp>
+        <p:nvSpPr>
+          <p:cNvPr id="13" name="Rectangle 12"/>
+          <p:cNvSpPr/>
+          <p:nvPr/>
+        </p:nvSpPr>
+        <p:spPr>
+          <a:xfrm>
+            <a:off x="3416283" y="2292096"/>
+            <a:ext cx="2889576" cy="1248460"/>
+          </a:xfrm>
+          <a:prstGeom prst="rect">
+            <a:avLst/>
+          </a:prstGeom>
+          <a:solidFill>
+            <a:srgbClr val="F6F7F9"/>
+          </a:solidFill>
+          <a:ln>
+            <a:noFill/>
+          </a:ln>
+          <a:effectLst/>
+        </p:spPr>
+        <p:style>
+          <a:lnRef idx="1">
+            <a:schemeClr val="accent1"/>
+          </a:lnRef>
+          <a:fillRef idx="3">
+            <a:schemeClr val="accent1"/>
+          </a:fillRef>
+          <a:effectRef idx="2">
+            <a:schemeClr val="accent1"/>
+          </a:effectRef>
+          <a:fontRef idx="minor">
+            <a:schemeClr val="lt1"/>
+          </a:fontRef>
+        </p:style>
+        <p:txBody>
+          <a:bodyPr rtlCol="0" anchor="ctr"/>
+          <a:lstStyle/>
+          <a:p>
+            <a:pPr algn="ctr"/>
+          </a:p>
+        </p:txBody>
+      </p:sp>
+      <p:sp>
+        <p:nvSpPr>
+          <p:cNvPr id="14" name="TextBox 13"/>
+          <p:cNvSpPr txBox="1"/>
+          <p:nvPr/>
+        </p:nvSpPr>
+        <p:spPr>
+          <a:xfrm>
+            <a:off x="3562591" y="2428646"/>
+            <a:ext cx="2596960" cy="292608"/>
+          </a:xfrm>
+          <a:prstGeom prst="rect">
+            <a:avLst/>
+          </a:prstGeom>
+          <a:noFill/>
+        </p:spPr>
+        <p:txBody>
+          <a:bodyPr wrap="square" anchor="t" lIns="0" rIns="0" tIns="0" bIns="0">
+            <a:spAutoFit/>
+          </a:bodyPr>
+          <a:lstStyle/>
+          <a:p>
+            <a:pPr algn="l">
+              <a:lnSpc>
+                <a:spcPct val="110000"/>
+              </a:lnSpc>
+              <a:spcAft>
+                <a:spcPts val="0"/>
+              </a:spcAft>
+            </a:pPr>
+            <a:r>
+              <a:rPr sz="840" b="1" i="0">
                 <a:solidFill>
                   <a:srgbClr val="314359"/>
                 </a:solidFill>
                 <a:latin typeface="Arial"/>
               </a:rPr>
-              <a:t>›  </a:t>
-            </a:r>
-            <a:r>
-              <a:rPr sz="1280" b="1">
+              <a:t>TOTAL VOLATILITY</a:t>
+            </a:r>
+          </a:p>
+        </p:txBody>
+      </p:sp>
+      <p:sp>
+        <p:nvSpPr>
+          <p:cNvPr id="15" name="TextBox 14"/>
+          <p:cNvSpPr txBox="1"/>
+          <p:nvPr/>
+        </p:nvSpPr>
+        <p:spPr>
+          <a:xfrm>
+            <a:off x="3562591" y="2740761"/>
+            <a:ext cx="2596960" cy="780288"/>
+          </a:xfrm>
+          <a:prstGeom prst="rect">
+            <a:avLst/>
+          </a:prstGeom>
+          <a:noFill/>
+        </p:spPr>
+        <p:txBody>
+          <a:bodyPr wrap="square" anchor="t" lIns="0" rIns="0" tIns="0" bIns="0">
+            <a:spAutoFit/>
+          </a:bodyPr>
+          <a:lstStyle/>
+          <a:p>
+            <a:pPr>
+              <a:spcAft>
+                <a:spcPts val="200"/>
+              </a:spcAft>
+            </a:pPr>
+            <a:r>
+              <a:rPr sz="880">
+                <a:solidFill>
+                  <a:srgbClr val="556A83"/>
+                </a:solidFill>
+                <a:latin typeface="Arial"/>
+              </a:rPr>
+              <a:t>MSCI  </a:t>
+            </a:r>
+            <a:r>
+              <a:rPr sz="1520" b="1">
                 <a:solidFill>
                   <a:srgbClr val="314359"/>
                 </a:solidFill>
-                <a:latin typeface="Arial"/>
-              </a:rPr>
-              <a:t>Five improvement dimensions.</a:t>
-            </a:r>
-            <a:r>
-              <a:rPr sz="1280">
-                <a:solidFill>
-                  <a:srgbClr val="0E1620"/>
-                </a:solidFill>
-                <a:latin typeface="Arial"/>
-              </a:rPr>
-              <a:t>  Operational, financial, structural, environmental and social improvements — each tied to enterprise value.</a:t>
-            </a:r>
-          </a:p>
-          <a:p>
-            <a:pPr marL="186949" indent="-186949">
-              <a:lnSpc>
-                <a:spcPct val="112000"/>
-              </a:lnSpc>
-              <a:spcAft>
-                <a:spcPts val="1400"/>
-              </a:spcAft>
-            </a:pPr>
-            <a:r>
-              <a:rPr sz="1280" b="1">
+                <a:latin typeface="Times New Roman"/>
+              </a:rPr>
+              <a:t>16.3%</a:t>
+            </a:r>
+          </a:p>
+          <a:p>
+            <a:r>
+              <a:rPr sz="880">
+                <a:solidFill>
+                  <a:srgbClr val="556A83"/>
+                </a:solidFill>
+                <a:latin typeface="Arial"/>
+              </a:rPr>
+              <a:t>AIP   </a:t>
+            </a:r>
+            <a:r>
+              <a:rPr sz="1520" b="1">
+                <a:solidFill>
+                  <a:srgbClr val="152130"/>
+                </a:solidFill>
+                <a:latin typeface="Times New Roman"/>
+              </a:rPr>
+              <a:t>27.0%</a:t>
+            </a:r>
+          </a:p>
+        </p:txBody>
+      </p:sp>
+      <p:sp>
+        <p:nvSpPr>
+          <p:cNvPr id="16" name="Rectangle 15"/>
+          <p:cNvSpPr/>
+          <p:nvPr/>
+        </p:nvSpPr>
+        <p:spPr>
+          <a:xfrm>
+            <a:off x="6393644" y="2292096"/>
+            <a:ext cx="2889576" cy="1248460"/>
+          </a:xfrm>
+          <a:prstGeom prst="rect">
+            <a:avLst/>
+          </a:prstGeom>
+          <a:solidFill>
+            <a:srgbClr val="F6F7F9"/>
+          </a:solidFill>
+          <a:ln>
+            <a:noFill/>
+          </a:ln>
+          <a:effectLst/>
+        </p:spPr>
+        <p:style>
+          <a:lnRef idx="1">
+            <a:schemeClr val="accent1"/>
+          </a:lnRef>
+          <a:fillRef idx="3">
+            <a:schemeClr val="accent1"/>
+          </a:fillRef>
+          <a:effectRef idx="2">
+            <a:schemeClr val="accent1"/>
+          </a:effectRef>
+          <a:fontRef idx="minor">
+            <a:schemeClr val="lt1"/>
+          </a:fontRef>
+        </p:style>
+        <p:txBody>
+          <a:bodyPr rtlCol="0" anchor="ctr"/>
+          <a:lstStyle/>
+          <a:p>
+            <a:pPr algn="ctr"/>
+          </a:p>
+        </p:txBody>
+      </p:sp>
+      <p:sp>
+        <p:nvSpPr>
+          <p:cNvPr id="17" name="TextBox 16"/>
+          <p:cNvSpPr txBox="1"/>
+          <p:nvPr/>
+        </p:nvSpPr>
+        <p:spPr>
+          <a:xfrm>
+            <a:off x="6539952" y="2428646"/>
+            <a:ext cx="2596960" cy="292608"/>
+          </a:xfrm>
+          <a:prstGeom prst="rect">
+            <a:avLst/>
+          </a:prstGeom>
+          <a:noFill/>
+        </p:spPr>
+        <p:txBody>
+          <a:bodyPr wrap="square" anchor="t" lIns="0" rIns="0" tIns="0" bIns="0">
+            <a:spAutoFit/>
+          </a:bodyPr>
+          <a:lstStyle/>
+          <a:p>
+            <a:pPr algn="l">
+              <a:lnSpc>
+                <a:spcPct val="110000"/>
+              </a:lnSpc>
+              <a:spcAft>
+                <a:spcPts val="0"/>
+              </a:spcAft>
+            </a:pPr>
+            <a:r>
+              <a:rPr sz="840" b="1" i="0">
                 <a:solidFill>
                   <a:srgbClr val="314359"/>
                 </a:solidFill>
                 <a:latin typeface="Arial"/>
               </a:rPr>
-              <a:t>›  </a:t>
-            </a:r>
-            <a:r>
-              <a:rPr sz="1280" b="1">
+              <a:t>DOWNSIDE VOLATILITY</a:t>
+            </a:r>
+          </a:p>
+        </p:txBody>
+      </p:sp>
+      <p:sp>
+        <p:nvSpPr>
+          <p:cNvPr id="18" name="TextBox 17"/>
+          <p:cNvSpPr txBox="1"/>
+          <p:nvPr/>
+        </p:nvSpPr>
+        <p:spPr>
+          <a:xfrm>
+            <a:off x="6539952" y="2740761"/>
+            <a:ext cx="2596960" cy="780288"/>
+          </a:xfrm>
+          <a:prstGeom prst="rect">
+            <a:avLst/>
+          </a:prstGeom>
+          <a:noFill/>
+        </p:spPr>
+        <p:txBody>
+          <a:bodyPr wrap="square" anchor="t" lIns="0" rIns="0" tIns="0" bIns="0">
+            <a:spAutoFit/>
+          </a:bodyPr>
+          <a:lstStyle/>
+          <a:p>
+            <a:pPr>
+              <a:spcAft>
+                <a:spcPts val="200"/>
+              </a:spcAft>
+            </a:pPr>
+            <a:r>
+              <a:rPr sz="880">
+                <a:solidFill>
+                  <a:srgbClr val="556A83"/>
+                </a:solidFill>
+                <a:latin typeface="Arial"/>
+              </a:rPr>
+              <a:t>MSCI  </a:t>
+            </a:r>
+            <a:r>
+              <a:rPr sz="1520" b="1">
                 <a:solidFill>
                   <a:srgbClr val="314359"/>
                 </a:solidFill>
-                <a:latin typeface="Arial"/>
-              </a:rPr>
-              <a:t>PRI signatory since 2019,</a:t>
-            </a:r>
-            <a:r>
-              <a:rPr sz="1280">
-                <a:solidFill>
-                  <a:srgbClr val="0E1620"/>
-                </a:solidFill>
-                <a:latin typeface="Arial"/>
-              </a:rPr>
-              <a:t>  adhering to the Six Principles for Responsible Investment.</a:t>
-            </a:r>
-          </a:p>
-          <a:p>
-            <a:pPr marL="186949" indent="-186949">
-              <a:lnSpc>
-                <a:spcPct val="112000"/>
-              </a:lnSpc>
-              <a:spcAft>
-                <a:spcPts val="1400"/>
-              </a:spcAft>
-            </a:pPr>
-            <a:r>
-              <a:rPr sz="1280" b="1">
+                <a:latin typeface="Times New Roman"/>
+              </a:rPr>
+              <a:t>11.5%</a:t>
+            </a:r>
+          </a:p>
+          <a:p>
+            <a:r>
+              <a:rPr sz="880">
+                <a:solidFill>
+                  <a:srgbClr val="556A83"/>
+                </a:solidFill>
+                <a:latin typeface="Arial"/>
+              </a:rPr>
+              <a:t>AIP   </a:t>
+            </a:r>
+            <a:r>
+              <a:rPr sz="1520" b="1">
+                <a:solidFill>
+                  <a:srgbClr val="152130"/>
+                </a:solidFill>
+                <a:latin typeface="Times New Roman"/>
+              </a:rPr>
+              <a:t>10.9%</a:t>
+            </a:r>
+          </a:p>
+        </p:txBody>
+      </p:sp>
+      <p:sp>
+        <p:nvSpPr>
+          <p:cNvPr id="19" name="TextBox 18"/>
+          <p:cNvSpPr txBox="1"/>
+          <p:nvPr/>
+        </p:nvSpPr>
+        <p:spPr>
+          <a:xfrm>
+            <a:off x="6781360" y="3579571"/>
+            <a:ext cx="2889576" cy="390144"/>
+          </a:xfrm>
+          <a:prstGeom prst="rect">
+            <a:avLst/>
+          </a:prstGeom>
+          <a:noFill/>
+        </p:spPr>
+        <p:txBody>
+          <a:bodyPr wrap="square" anchor="t" lIns="0" rIns="0" tIns="0" bIns="0">
+            <a:spAutoFit/>
+          </a:bodyPr>
+          <a:lstStyle/>
+          <a:p>
+            <a:pPr algn="l">
+              <a:lnSpc>
+                <a:spcPct val="105000"/>
+              </a:lnSpc>
+              <a:spcAft>
+                <a:spcPts val="0"/>
+              </a:spcAft>
+            </a:pPr>
+            <a:r>
+              <a:rPr sz="800" b="1" i="0">
+                <a:solidFill>
+                  <a:srgbClr val="152130"/>
+                </a:solidFill>
+                <a:latin typeface="Arial"/>
+              </a:rPr>
+              <a:t>↑ Athanase downside volatility is LOWER than the market’s.</a:t>
+            </a:r>
+          </a:p>
+        </p:txBody>
+      </p:sp>
+      <p:sp>
+        <p:nvSpPr>
+          <p:cNvPr id="20" name="TextBox 19"/>
+          <p:cNvSpPr txBox="1"/>
+          <p:nvPr/>
+        </p:nvSpPr>
+        <p:spPr>
+          <a:xfrm>
+            <a:off x="438922" y="3901440"/>
+            <a:ext cx="8778459" cy="292608"/>
+          </a:xfrm>
+          <a:prstGeom prst="rect">
+            <a:avLst/>
+          </a:prstGeom>
+          <a:noFill/>
+        </p:spPr>
+        <p:txBody>
+          <a:bodyPr wrap="square" anchor="t" lIns="0" rIns="0" tIns="0" bIns="0">
+            <a:spAutoFit/>
+          </a:bodyPr>
+          <a:lstStyle/>
+          <a:p>
+            <a:pPr algn="l">
+              <a:lnSpc>
+                <a:spcPct val="110000"/>
+              </a:lnSpc>
+              <a:spcAft>
+                <a:spcPts val="0"/>
+              </a:spcAft>
+            </a:pPr>
+            <a:r>
+              <a:rPr sz="880" b="1" i="0">
                 <a:solidFill>
                   <a:srgbClr val="314359"/>
                 </a:solidFill>
                 <a:latin typeface="Arial"/>
               </a:rPr>
-              <a:t>›  </a:t>
-            </a:r>
-            <a:r>
-              <a:rPr sz="1280" b="1">
+              <a:t>EXPECTED VALUE OF 100 INVESTED, BY HOLDING PERIOD</a:t>
+            </a:r>
+          </a:p>
+        </p:txBody>
+      </p:sp>
+      <p:sp>
+        <p:nvSpPr>
+          <p:cNvPr id="21" name="Rectangle 20"/>
+          <p:cNvSpPr/>
+          <p:nvPr/>
+        </p:nvSpPr>
+        <p:spPr>
+          <a:xfrm>
+            <a:off x="438922" y="4194048"/>
+            <a:ext cx="2560384" cy="341376"/>
+          </a:xfrm>
+          <a:prstGeom prst="rect">
+            <a:avLst/>
+          </a:prstGeom>
+          <a:solidFill>
+            <a:srgbClr val="314359"/>
+          </a:solidFill>
+          <a:ln>
+            <a:noFill/>
+          </a:ln>
+          <a:effectLst/>
+        </p:spPr>
+        <p:style>
+          <a:lnRef idx="1">
+            <a:schemeClr val="accent1"/>
+          </a:lnRef>
+          <a:fillRef idx="3">
+            <a:schemeClr val="accent1"/>
+          </a:fillRef>
+          <a:effectRef idx="2">
+            <a:schemeClr val="accent1"/>
+          </a:effectRef>
+          <a:fontRef idx="minor">
+            <a:schemeClr val="lt1"/>
+          </a:fontRef>
+        </p:style>
+        <p:txBody>
+          <a:bodyPr rtlCol="0" anchor="ctr"/>
+          <a:lstStyle/>
+          <a:p>
+            <a:pPr algn="ctr"/>
+          </a:p>
+        </p:txBody>
+      </p:sp>
+      <p:sp>
+        <p:nvSpPr>
+          <p:cNvPr id="22" name="TextBox 21"/>
+          <p:cNvSpPr txBox="1"/>
+          <p:nvPr/>
+        </p:nvSpPr>
+        <p:spPr>
+          <a:xfrm>
+            <a:off x="526707" y="4194048"/>
+            <a:ext cx="2414076" cy="341376"/>
+          </a:xfrm>
+          <a:prstGeom prst="rect">
+            <a:avLst/>
+          </a:prstGeom>
+          <a:noFill/>
+        </p:spPr>
+        <p:txBody>
+          <a:bodyPr wrap="square" anchor="ctr" lIns="0" rIns="0" tIns="0" bIns="0">
+            <a:spAutoFit/>
+          </a:bodyPr>
+          <a:lstStyle/>
+          <a:p>
+            <a:pPr algn="l">
+              <a:lnSpc>
+                <a:spcPct val="110000"/>
+              </a:lnSpc>
+              <a:spcAft>
+                <a:spcPts val="0"/>
+              </a:spcAft>
+            </a:pPr>
+            <a:r>
+              <a:rPr sz="960" b="1" i="0">
+                <a:solidFill>
+                  <a:srgbClr val="FFFFFF"/>
+                </a:solidFill>
+                <a:latin typeface="Arial"/>
+              </a:rPr>
+              <a:t/>
+            </a:r>
+          </a:p>
+        </p:txBody>
+      </p:sp>
+      <p:sp>
+        <p:nvSpPr>
+          <p:cNvPr id="23" name="Rectangle 22"/>
+          <p:cNvSpPr/>
+          <p:nvPr/>
+        </p:nvSpPr>
+        <p:spPr>
+          <a:xfrm>
+            <a:off x="2999307" y="4194048"/>
+            <a:ext cx="1578841" cy="341376"/>
+          </a:xfrm>
+          <a:prstGeom prst="rect">
+            <a:avLst/>
+          </a:prstGeom>
+          <a:solidFill>
+            <a:srgbClr val="314359"/>
+          </a:solidFill>
+          <a:ln>
+            <a:noFill/>
+          </a:ln>
+          <a:effectLst/>
+        </p:spPr>
+        <p:style>
+          <a:lnRef idx="1">
+            <a:schemeClr val="accent1"/>
+          </a:lnRef>
+          <a:fillRef idx="3">
+            <a:schemeClr val="accent1"/>
+          </a:fillRef>
+          <a:effectRef idx="2">
+            <a:schemeClr val="accent1"/>
+          </a:effectRef>
+          <a:fontRef idx="minor">
+            <a:schemeClr val="lt1"/>
+          </a:fontRef>
+        </p:style>
+        <p:txBody>
+          <a:bodyPr rtlCol="0" anchor="ctr"/>
+          <a:lstStyle/>
+          <a:p>
+            <a:pPr algn="ctr"/>
+          </a:p>
+        </p:txBody>
+      </p:sp>
+      <p:sp>
+        <p:nvSpPr>
+          <p:cNvPr id="24" name="TextBox 23"/>
+          <p:cNvSpPr txBox="1"/>
+          <p:nvPr/>
+        </p:nvSpPr>
+        <p:spPr>
+          <a:xfrm>
+            <a:off x="3087091" y="4194048"/>
+            <a:ext cx="1432534" cy="341376"/>
+          </a:xfrm>
+          <a:prstGeom prst="rect">
+            <a:avLst/>
+          </a:prstGeom>
+          <a:noFill/>
+        </p:spPr>
+        <p:txBody>
+          <a:bodyPr wrap="square" anchor="ctr" lIns="0" rIns="0" tIns="0" bIns="0">
+            <a:spAutoFit/>
+          </a:bodyPr>
+          <a:lstStyle/>
+          <a:p>
+            <a:pPr algn="r">
+              <a:lnSpc>
+                <a:spcPct val="110000"/>
+              </a:lnSpc>
+              <a:spcAft>
+                <a:spcPts val="0"/>
+              </a:spcAft>
+            </a:pPr>
+            <a:r>
+              <a:rPr sz="960" b="1" i="0">
+                <a:solidFill>
+                  <a:srgbClr val="FFFFFF"/>
+                </a:solidFill>
+                <a:latin typeface="Arial"/>
+              </a:rPr>
+              <a:t>3 years</a:t>
+            </a:r>
+          </a:p>
+        </p:txBody>
+      </p:sp>
+      <p:sp>
+        <p:nvSpPr>
+          <p:cNvPr id="25" name="Rectangle 24"/>
+          <p:cNvSpPr/>
+          <p:nvPr/>
+        </p:nvSpPr>
+        <p:spPr>
+          <a:xfrm>
+            <a:off x="4578148" y="4194048"/>
+            <a:ext cx="1578841" cy="341376"/>
+          </a:xfrm>
+          <a:prstGeom prst="rect">
+            <a:avLst/>
+          </a:prstGeom>
+          <a:solidFill>
+            <a:srgbClr val="314359"/>
+          </a:solidFill>
+          <a:ln>
+            <a:noFill/>
+          </a:ln>
+          <a:effectLst/>
+        </p:spPr>
+        <p:style>
+          <a:lnRef idx="1">
+            <a:schemeClr val="accent1"/>
+          </a:lnRef>
+          <a:fillRef idx="3">
+            <a:schemeClr val="accent1"/>
+          </a:fillRef>
+          <a:effectRef idx="2">
+            <a:schemeClr val="accent1"/>
+          </a:effectRef>
+          <a:fontRef idx="minor">
+            <a:schemeClr val="lt1"/>
+          </a:fontRef>
+        </p:style>
+        <p:txBody>
+          <a:bodyPr rtlCol="0" anchor="ctr"/>
+          <a:lstStyle/>
+          <a:p>
+            <a:pPr algn="ctr"/>
+          </a:p>
+        </p:txBody>
+      </p:sp>
+      <p:sp>
+        <p:nvSpPr>
+          <p:cNvPr id="26" name="TextBox 25"/>
+          <p:cNvSpPr txBox="1"/>
+          <p:nvPr/>
+        </p:nvSpPr>
+        <p:spPr>
+          <a:xfrm>
+            <a:off x="4665933" y="4194048"/>
+            <a:ext cx="1432534" cy="341376"/>
+          </a:xfrm>
+          <a:prstGeom prst="rect">
+            <a:avLst/>
+          </a:prstGeom>
+          <a:noFill/>
+        </p:spPr>
+        <p:txBody>
+          <a:bodyPr wrap="square" anchor="ctr" lIns="0" rIns="0" tIns="0" bIns="0">
+            <a:spAutoFit/>
+          </a:bodyPr>
+          <a:lstStyle/>
+          <a:p>
+            <a:pPr algn="r">
+              <a:lnSpc>
+                <a:spcPct val="110000"/>
+              </a:lnSpc>
+              <a:spcAft>
+                <a:spcPts val="0"/>
+              </a:spcAft>
+            </a:pPr>
+            <a:r>
+              <a:rPr sz="960" b="1" i="0">
+                <a:solidFill>
+                  <a:srgbClr val="FFFFFF"/>
+                </a:solidFill>
+                <a:latin typeface="Arial"/>
+              </a:rPr>
+              <a:t>5 years</a:t>
+            </a:r>
+          </a:p>
+        </p:txBody>
+      </p:sp>
+      <p:sp>
+        <p:nvSpPr>
+          <p:cNvPr id="27" name="Rectangle 26"/>
+          <p:cNvSpPr/>
+          <p:nvPr/>
+        </p:nvSpPr>
+        <p:spPr>
+          <a:xfrm>
+            <a:off x="6156990" y="4194048"/>
+            <a:ext cx="1578841" cy="341376"/>
+          </a:xfrm>
+          <a:prstGeom prst="rect">
+            <a:avLst/>
+          </a:prstGeom>
+          <a:solidFill>
+            <a:srgbClr val="314359"/>
+          </a:solidFill>
+          <a:ln>
+            <a:noFill/>
+          </a:ln>
+          <a:effectLst/>
+        </p:spPr>
+        <p:style>
+          <a:lnRef idx="1">
+            <a:schemeClr val="accent1"/>
+          </a:lnRef>
+          <a:fillRef idx="3">
+            <a:schemeClr val="accent1"/>
+          </a:fillRef>
+          <a:effectRef idx="2">
+            <a:schemeClr val="accent1"/>
+          </a:effectRef>
+          <a:fontRef idx="minor">
+            <a:schemeClr val="lt1"/>
+          </a:fontRef>
+        </p:style>
+        <p:txBody>
+          <a:bodyPr rtlCol="0" anchor="ctr"/>
+          <a:lstStyle/>
+          <a:p>
+            <a:pPr algn="ctr"/>
+          </a:p>
+        </p:txBody>
+      </p:sp>
+      <p:sp>
+        <p:nvSpPr>
+          <p:cNvPr id="28" name="TextBox 27"/>
+          <p:cNvSpPr txBox="1"/>
+          <p:nvPr/>
+        </p:nvSpPr>
+        <p:spPr>
+          <a:xfrm>
+            <a:off x="6244775" y="4194048"/>
+            <a:ext cx="1432534" cy="341376"/>
+          </a:xfrm>
+          <a:prstGeom prst="rect">
+            <a:avLst/>
+          </a:prstGeom>
+          <a:noFill/>
+        </p:spPr>
+        <p:txBody>
+          <a:bodyPr wrap="square" anchor="ctr" lIns="0" rIns="0" tIns="0" bIns="0">
+            <a:spAutoFit/>
+          </a:bodyPr>
+          <a:lstStyle/>
+          <a:p>
+            <a:pPr algn="r">
+              <a:lnSpc>
+                <a:spcPct val="110000"/>
+              </a:lnSpc>
+              <a:spcAft>
+                <a:spcPts val="0"/>
+              </a:spcAft>
+            </a:pPr>
+            <a:r>
+              <a:rPr sz="960" b="1" i="0">
+                <a:solidFill>
+                  <a:srgbClr val="FFFFFF"/>
+                </a:solidFill>
+                <a:latin typeface="Arial"/>
+              </a:rPr>
+              <a:t>7 years</a:t>
+            </a:r>
+          </a:p>
+        </p:txBody>
+      </p:sp>
+      <p:sp>
+        <p:nvSpPr>
+          <p:cNvPr id="29" name="Rectangle 28"/>
+          <p:cNvSpPr/>
+          <p:nvPr/>
+        </p:nvSpPr>
+        <p:spPr>
+          <a:xfrm>
+            <a:off x="7735832" y="4194048"/>
+            <a:ext cx="1578841" cy="341376"/>
+          </a:xfrm>
+          <a:prstGeom prst="rect">
+            <a:avLst/>
+          </a:prstGeom>
+          <a:solidFill>
+            <a:srgbClr val="314359"/>
+          </a:solidFill>
+          <a:ln>
+            <a:noFill/>
+          </a:ln>
+          <a:effectLst/>
+        </p:spPr>
+        <p:style>
+          <a:lnRef idx="1">
+            <a:schemeClr val="accent1"/>
+          </a:lnRef>
+          <a:fillRef idx="3">
+            <a:schemeClr val="accent1"/>
+          </a:fillRef>
+          <a:effectRef idx="2">
+            <a:schemeClr val="accent1"/>
+          </a:effectRef>
+          <a:fontRef idx="minor">
+            <a:schemeClr val="lt1"/>
+          </a:fontRef>
+        </p:style>
+        <p:txBody>
+          <a:bodyPr rtlCol="0" anchor="ctr"/>
+          <a:lstStyle/>
+          <a:p>
+            <a:pPr algn="ctr"/>
+          </a:p>
+        </p:txBody>
+      </p:sp>
+      <p:sp>
+        <p:nvSpPr>
+          <p:cNvPr id="30" name="TextBox 29"/>
+          <p:cNvSpPr txBox="1"/>
+          <p:nvPr/>
+        </p:nvSpPr>
+        <p:spPr>
+          <a:xfrm>
+            <a:off x="7823617" y="4194048"/>
+            <a:ext cx="1432534" cy="341376"/>
+          </a:xfrm>
+          <a:prstGeom prst="rect">
+            <a:avLst/>
+          </a:prstGeom>
+          <a:noFill/>
+        </p:spPr>
+        <p:txBody>
+          <a:bodyPr wrap="square" anchor="ctr" lIns="0" rIns="0" tIns="0" bIns="0">
+            <a:spAutoFit/>
+          </a:bodyPr>
+          <a:lstStyle/>
+          <a:p>
+            <a:pPr algn="r">
+              <a:lnSpc>
+                <a:spcPct val="110000"/>
+              </a:lnSpc>
+              <a:spcAft>
+                <a:spcPts val="0"/>
+              </a:spcAft>
+            </a:pPr>
+            <a:r>
+              <a:rPr sz="960" b="1" i="0">
+                <a:solidFill>
+                  <a:srgbClr val="FFFFFF"/>
+                </a:solidFill>
+                <a:latin typeface="Arial"/>
+              </a:rPr>
+              <a:t>10 years</a:t>
+            </a:r>
+          </a:p>
+        </p:txBody>
+      </p:sp>
+      <p:sp>
+        <p:nvSpPr>
+          <p:cNvPr id="31" name="Rectangle 30"/>
+          <p:cNvSpPr/>
+          <p:nvPr/>
+        </p:nvSpPr>
+        <p:spPr>
+          <a:xfrm>
+            <a:off x="438922" y="4535424"/>
+            <a:ext cx="2560384" cy="341376"/>
+          </a:xfrm>
+          <a:prstGeom prst="rect">
+            <a:avLst/>
+          </a:prstGeom>
+          <a:solidFill>
+            <a:srgbClr val="F6F7F9"/>
+          </a:solidFill>
+          <a:ln>
+            <a:noFill/>
+          </a:ln>
+          <a:effectLst/>
+        </p:spPr>
+        <p:style>
+          <a:lnRef idx="1">
+            <a:schemeClr val="accent1"/>
+          </a:lnRef>
+          <a:fillRef idx="3">
+            <a:schemeClr val="accent1"/>
+          </a:fillRef>
+          <a:effectRef idx="2">
+            <a:schemeClr val="accent1"/>
+          </a:effectRef>
+          <a:fontRef idx="minor">
+            <a:schemeClr val="lt1"/>
+          </a:fontRef>
+        </p:style>
+        <p:txBody>
+          <a:bodyPr rtlCol="0" anchor="ctr"/>
+          <a:lstStyle/>
+          <a:p>
+            <a:pPr algn="ctr"/>
+          </a:p>
+        </p:txBody>
+      </p:sp>
+      <p:sp>
+        <p:nvSpPr>
+          <p:cNvPr id="32" name="TextBox 31"/>
+          <p:cNvSpPr txBox="1"/>
+          <p:nvPr/>
+        </p:nvSpPr>
+        <p:spPr>
+          <a:xfrm>
+            <a:off x="526707" y="4535424"/>
+            <a:ext cx="2414076" cy="341376"/>
+          </a:xfrm>
+          <a:prstGeom prst="rect">
+            <a:avLst/>
+          </a:prstGeom>
+          <a:noFill/>
+        </p:spPr>
+        <p:txBody>
+          <a:bodyPr wrap="square" anchor="ctr" lIns="0" rIns="0" tIns="0" bIns="0">
+            <a:spAutoFit/>
+          </a:bodyPr>
+          <a:lstStyle/>
+          <a:p>
+            <a:pPr algn="l">
+              <a:lnSpc>
+                <a:spcPct val="110000"/>
+              </a:lnSpc>
+              <a:spcAft>
+                <a:spcPts val="0"/>
+              </a:spcAft>
+            </a:pPr>
+            <a:r>
+              <a:rPr sz="919" b="0" i="0">
+                <a:solidFill>
+                  <a:srgbClr val="556A83"/>
+                </a:solidFill>
+                <a:latin typeface="Arial"/>
+              </a:rPr>
+              <a:t>Median outcome — MSCI</a:t>
+            </a:r>
+          </a:p>
+        </p:txBody>
+      </p:sp>
+      <p:sp>
+        <p:nvSpPr>
+          <p:cNvPr id="33" name="Rectangle 32"/>
+          <p:cNvSpPr/>
+          <p:nvPr/>
+        </p:nvSpPr>
+        <p:spPr>
+          <a:xfrm>
+            <a:off x="2999307" y="4535424"/>
+            <a:ext cx="1578841" cy="341376"/>
+          </a:xfrm>
+          <a:prstGeom prst="rect">
+            <a:avLst/>
+          </a:prstGeom>
+          <a:solidFill>
+            <a:srgbClr val="F6F7F9"/>
+          </a:solidFill>
+          <a:ln>
+            <a:noFill/>
+          </a:ln>
+          <a:effectLst/>
+        </p:spPr>
+        <p:style>
+          <a:lnRef idx="1">
+            <a:schemeClr val="accent1"/>
+          </a:lnRef>
+          <a:fillRef idx="3">
+            <a:schemeClr val="accent1"/>
+          </a:fillRef>
+          <a:effectRef idx="2">
+            <a:schemeClr val="accent1"/>
+          </a:effectRef>
+          <a:fontRef idx="minor">
+            <a:schemeClr val="lt1"/>
+          </a:fontRef>
+        </p:style>
+        <p:txBody>
+          <a:bodyPr rtlCol="0" anchor="ctr"/>
+          <a:lstStyle/>
+          <a:p>
+            <a:pPr algn="ctr"/>
+          </a:p>
+        </p:txBody>
+      </p:sp>
+      <p:sp>
+        <p:nvSpPr>
+          <p:cNvPr id="34" name="TextBox 33"/>
+          <p:cNvSpPr txBox="1"/>
+          <p:nvPr/>
+        </p:nvSpPr>
+        <p:spPr>
+          <a:xfrm>
+            <a:off x="3072460" y="4535424"/>
+            <a:ext cx="1432534" cy="341376"/>
+          </a:xfrm>
+          <a:prstGeom prst="rect">
+            <a:avLst/>
+          </a:prstGeom>
+          <a:noFill/>
+        </p:spPr>
+        <p:txBody>
+          <a:bodyPr wrap="square" anchor="ctr" lIns="0" rIns="0" tIns="0" bIns="0">
+            <a:spAutoFit/>
+          </a:bodyPr>
+          <a:lstStyle/>
+          <a:p>
+            <a:pPr algn="r">
+              <a:lnSpc>
+                <a:spcPct val="110000"/>
+              </a:lnSpc>
+              <a:spcAft>
+                <a:spcPts val="0"/>
+              </a:spcAft>
+            </a:pPr>
+            <a:r>
+              <a:rPr sz="1000" b="0" i="0">
+                <a:solidFill>
+                  <a:srgbClr val="556A83"/>
+                </a:solidFill>
+                <a:latin typeface="Arial"/>
+              </a:rPr>
+              <a:t>119</a:t>
+            </a:r>
+          </a:p>
+        </p:txBody>
+      </p:sp>
+      <p:sp>
+        <p:nvSpPr>
+          <p:cNvPr id="35" name="Rectangle 34"/>
+          <p:cNvSpPr/>
+          <p:nvPr/>
+        </p:nvSpPr>
+        <p:spPr>
+          <a:xfrm>
+            <a:off x="4578148" y="4535424"/>
+            <a:ext cx="1578841" cy="341376"/>
+          </a:xfrm>
+          <a:prstGeom prst="rect">
+            <a:avLst/>
+          </a:prstGeom>
+          <a:solidFill>
+            <a:srgbClr val="F6F7F9"/>
+          </a:solidFill>
+          <a:ln>
+            <a:noFill/>
+          </a:ln>
+          <a:effectLst/>
+        </p:spPr>
+        <p:style>
+          <a:lnRef idx="1">
+            <a:schemeClr val="accent1"/>
+          </a:lnRef>
+          <a:fillRef idx="3">
+            <a:schemeClr val="accent1"/>
+          </a:fillRef>
+          <a:effectRef idx="2">
+            <a:schemeClr val="accent1"/>
+          </a:effectRef>
+          <a:fontRef idx="minor">
+            <a:schemeClr val="lt1"/>
+          </a:fontRef>
+        </p:style>
+        <p:txBody>
+          <a:bodyPr rtlCol="0" anchor="ctr"/>
+          <a:lstStyle/>
+          <a:p>
+            <a:pPr algn="ctr"/>
+          </a:p>
+        </p:txBody>
+      </p:sp>
+      <p:sp>
+        <p:nvSpPr>
+          <p:cNvPr id="36" name="TextBox 35"/>
+          <p:cNvSpPr txBox="1"/>
+          <p:nvPr/>
+        </p:nvSpPr>
+        <p:spPr>
+          <a:xfrm>
+            <a:off x="4651302" y="4535424"/>
+            <a:ext cx="1432534" cy="341376"/>
+          </a:xfrm>
+          <a:prstGeom prst="rect">
+            <a:avLst/>
+          </a:prstGeom>
+          <a:noFill/>
+        </p:spPr>
+        <p:txBody>
+          <a:bodyPr wrap="square" anchor="ctr" lIns="0" rIns="0" tIns="0" bIns="0">
+            <a:spAutoFit/>
+          </a:bodyPr>
+          <a:lstStyle/>
+          <a:p>
+            <a:pPr algn="r">
+              <a:lnSpc>
+                <a:spcPct val="110000"/>
+              </a:lnSpc>
+              <a:spcAft>
+                <a:spcPts val="0"/>
+              </a:spcAft>
+            </a:pPr>
+            <a:r>
+              <a:rPr sz="1000" b="0" i="0">
+                <a:solidFill>
+                  <a:srgbClr val="556A83"/>
+                </a:solidFill>
+                <a:latin typeface="Arial"/>
+              </a:rPr>
+              <a:t>134</a:t>
+            </a:r>
+          </a:p>
+        </p:txBody>
+      </p:sp>
+      <p:sp>
+        <p:nvSpPr>
+          <p:cNvPr id="37" name="Rectangle 36"/>
+          <p:cNvSpPr/>
+          <p:nvPr/>
+        </p:nvSpPr>
+        <p:spPr>
+          <a:xfrm>
+            <a:off x="6156990" y="4535424"/>
+            <a:ext cx="1578841" cy="341376"/>
+          </a:xfrm>
+          <a:prstGeom prst="rect">
+            <a:avLst/>
+          </a:prstGeom>
+          <a:solidFill>
+            <a:srgbClr val="F6F7F9"/>
+          </a:solidFill>
+          <a:ln>
+            <a:noFill/>
+          </a:ln>
+          <a:effectLst/>
+        </p:spPr>
+        <p:style>
+          <a:lnRef idx="1">
+            <a:schemeClr val="accent1"/>
+          </a:lnRef>
+          <a:fillRef idx="3">
+            <a:schemeClr val="accent1"/>
+          </a:fillRef>
+          <a:effectRef idx="2">
+            <a:schemeClr val="accent1"/>
+          </a:effectRef>
+          <a:fontRef idx="minor">
+            <a:schemeClr val="lt1"/>
+          </a:fontRef>
+        </p:style>
+        <p:txBody>
+          <a:bodyPr rtlCol="0" anchor="ctr"/>
+          <a:lstStyle/>
+          <a:p>
+            <a:pPr algn="ctr"/>
+          </a:p>
+        </p:txBody>
+      </p:sp>
+      <p:sp>
+        <p:nvSpPr>
+          <p:cNvPr id="38" name="TextBox 37"/>
+          <p:cNvSpPr txBox="1"/>
+          <p:nvPr/>
+        </p:nvSpPr>
+        <p:spPr>
+          <a:xfrm>
+            <a:off x="6230144" y="4535424"/>
+            <a:ext cx="1432534" cy="341376"/>
+          </a:xfrm>
+          <a:prstGeom prst="rect">
+            <a:avLst/>
+          </a:prstGeom>
+          <a:noFill/>
+        </p:spPr>
+        <p:txBody>
+          <a:bodyPr wrap="square" anchor="ctr" lIns="0" rIns="0" tIns="0" bIns="0">
+            <a:spAutoFit/>
+          </a:bodyPr>
+          <a:lstStyle/>
+          <a:p>
+            <a:pPr algn="r">
+              <a:lnSpc>
+                <a:spcPct val="110000"/>
+              </a:lnSpc>
+              <a:spcAft>
+                <a:spcPts val="0"/>
+              </a:spcAft>
+            </a:pPr>
+            <a:r>
+              <a:rPr sz="1000" b="0" i="0">
+                <a:solidFill>
+                  <a:srgbClr val="556A83"/>
+                </a:solidFill>
+                <a:latin typeface="Arial"/>
+              </a:rPr>
+              <a:t>151</a:t>
+            </a:r>
+          </a:p>
+        </p:txBody>
+      </p:sp>
+      <p:sp>
+        <p:nvSpPr>
+          <p:cNvPr id="39" name="Rectangle 38"/>
+          <p:cNvSpPr/>
+          <p:nvPr/>
+        </p:nvSpPr>
+        <p:spPr>
+          <a:xfrm>
+            <a:off x="7735832" y="4535424"/>
+            <a:ext cx="1578841" cy="341376"/>
+          </a:xfrm>
+          <a:prstGeom prst="rect">
+            <a:avLst/>
+          </a:prstGeom>
+          <a:solidFill>
+            <a:srgbClr val="F6F7F9"/>
+          </a:solidFill>
+          <a:ln>
+            <a:noFill/>
+          </a:ln>
+          <a:effectLst/>
+        </p:spPr>
+        <p:style>
+          <a:lnRef idx="1">
+            <a:schemeClr val="accent1"/>
+          </a:lnRef>
+          <a:fillRef idx="3">
+            <a:schemeClr val="accent1"/>
+          </a:fillRef>
+          <a:effectRef idx="2">
+            <a:schemeClr val="accent1"/>
+          </a:effectRef>
+          <a:fontRef idx="minor">
+            <a:schemeClr val="lt1"/>
+          </a:fontRef>
+        </p:style>
+        <p:txBody>
+          <a:bodyPr rtlCol="0" anchor="ctr"/>
+          <a:lstStyle/>
+          <a:p>
+            <a:pPr algn="ctr"/>
+          </a:p>
+        </p:txBody>
+      </p:sp>
+      <p:sp>
+        <p:nvSpPr>
+          <p:cNvPr id="40" name="TextBox 39"/>
+          <p:cNvSpPr txBox="1"/>
+          <p:nvPr/>
+        </p:nvSpPr>
+        <p:spPr>
+          <a:xfrm>
+            <a:off x="7808986" y="4535424"/>
+            <a:ext cx="1432534" cy="341376"/>
+          </a:xfrm>
+          <a:prstGeom prst="rect">
+            <a:avLst/>
+          </a:prstGeom>
+          <a:noFill/>
+        </p:spPr>
+        <p:txBody>
+          <a:bodyPr wrap="square" anchor="ctr" lIns="0" rIns="0" tIns="0" bIns="0">
+            <a:spAutoFit/>
+          </a:bodyPr>
+          <a:lstStyle/>
+          <a:p>
+            <a:pPr algn="r">
+              <a:lnSpc>
+                <a:spcPct val="110000"/>
+              </a:lnSpc>
+              <a:spcAft>
+                <a:spcPts val="0"/>
+              </a:spcAft>
+            </a:pPr>
+            <a:r>
+              <a:rPr sz="1000" b="0" i="0">
+                <a:solidFill>
+                  <a:srgbClr val="556A83"/>
+                </a:solidFill>
+                <a:latin typeface="Arial"/>
+              </a:rPr>
+              <a:t>181</a:t>
+            </a:r>
+          </a:p>
+        </p:txBody>
+      </p:sp>
+      <p:sp>
+        <p:nvSpPr>
+          <p:cNvPr id="41" name="Rectangle 40"/>
+          <p:cNvSpPr/>
+          <p:nvPr/>
+        </p:nvSpPr>
+        <p:spPr>
+          <a:xfrm>
+            <a:off x="438922" y="4876800"/>
+            <a:ext cx="2560384" cy="341376"/>
+          </a:xfrm>
+          <a:prstGeom prst="rect">
+            <a:avLst/>
+          </a:prstGeom>
+          <a:solidFill>
+            <a:srgbClr val="FFFFFF"/>
+          </a:solidFill>
+          <a:ln>
+            <a:noFill/>
+          </a:ln>
+          <a:effectLst/>
+        </p:spPr>
+        <p:style>
+          <a:lnRef idx="1">
+            <a:schemeClr val="accent1"/>
+          </a:lnRef>
+          <a:fillRef idx="3">
+            <a:schemeClr val="accent1"/>
+          </a:fillRef>
+          <a:effectRef idx="2">
+            <a:schemeClr val="accent1"/>
+          </a:effectRef>
+          <a:fontRef idx="minor">
+            <a:schemeClr val="lt1"/>
+          </a:fontRef>
+        </p:style>
+        <p:txBody>
+          <a:bodyPr rtlCol="0" anchor="ctr"/>
+          <a:lstStyle/>
+          <a:p>
+            <a:pPr algn="ctr"/>
+          </a:p>
+        </p:txBody>
+      </p:sp>
+      <p:sp>
+        <p:nvSpPr>
+          <p:cNvPr id="42" name="TextBox 41"/>
+          <p:cNvSpPr txBox="1"/>
+          <p:nvPr/>
+        </p:nvSpPr>
+        <p:spPr>
+          <a:xfrm>
+            <a:off x="526707" y="4876800"/>
+            <a:ext cx="2414076" cy="341376"/>
+          </a:xfrm>
+          <a:prstGeom prst="rect">
+            <a:avLst/>
+          </a:prstGeom>
+          <a:noFill/>
+        </p:spPr>
+        <p:txBody>
+          <a:bodyPr wrap="square" anchor="ctr" lIns="0" rIns="0" tIns="0" bIns="0">
+            <a:spAutoFit/>
+          </a:bodyPr>
+          <a:lstStyle/>
+          <a:p>
+            <a:pPr algn="l">
+              <a:lnSpc>
+                <a:spcPct val="110000"/>
+              </a:lnSpc>
+              <a:spcAft>
+                <a:spcPts val="0"/>
+              </a:spcAft>
+            </a:pPr>
+            <a:r>
+              <a:rPr sz="919" b="1" i="0">
+                <a:solidFill>
+                  <a:srgbClr val="152130"/>
+                </a:solidFill>
+                <a:latin typeface="Arial"/>
+              </a:rPr>
+              <a:t>Median outcome — Athanase</a:t>
+            </a:r>
+          </a:p>
+        </p:txBody>
+      </p:sp>
+      <p:sp>
+        <p:nvSpPr>
+          <p:cNvPr id="43" name="Rectangle 42"/>
+          <p:cNvSpPr/>
+          <p:nvPr/>
+        </p:nvSpPr>
+        <p:spPr>
+          <a:xfrm>
+            <a:off x="2999307" y="4876800"/>
+            <a:ext cx="1578841" cy="341376"/>
+          </a:xfrm>
+          <a:prstGeom prst="rect">
+            <a:avLst/>
+          </a:prstGeom>
+          <a:solidFill>
+            <a:srgbClr val="FFFFFF"/>
+          </a:solidFill>
+          <a:ln>
+            <a:noFill/>
+          </a:ln>
+          <a:effectLst/>
+        </p:spPr>
+        <p:style>
+          <a:lnRef idx="1">
+            <a:schemeClr val="accent1"/>
+          </a:lnRef>
+          <a:fillRef idx="3">
+            <a:schemeClr val="accent1"/>
+          </a:fillRef>
+          <a:effectRef idx="2">
+            <a:schemeClr val="accent1"/>
+          </a:effectRef>
+          <a:fontRef idx="minor">
+            <a:schemeClr val="lt1"/>
+          </a:fontRef>
+        </p:style>
+        <p:txBody>
+          <a:bodyPr rtlCol="0" anchor="ctr"/>
+          <a:lstStyle/>
+          <a:p>
+            <a:pPr algn="ctr"/>
+          </a:p>
+        </p:txBody>
+      </p:sp>
+      <p:sp>
+        <p:nvSpPr>
+          <p:cNvPr id="44" name="TextBox 43"/>
+          <p:cNvSpPr txBox="1"/>
+          <p:nvPr/>
+        </p:nvSpPr>
+        <p:spPr>
+          <a:xfrm>
+            <a:off x="3072460" y="4876800"/>
+            <a:ext cx="1432534" cy="341376"/>
+          </a:xfrm>
+          <a:prstGeom prst="rect">
+            <a:avLst/>
+          </a:prstGeom>
+          <a:noFill/>
+        </p:spPr>
+        <p:txBody>
+          <a:bodyPr wrap="square" anchor="ctr" lIns="0" rIns="0" tIns="0" bIns="0">
+            <a:spAutoFit/>
+          </a:bodyPr>
+          <a:lstStyle/>
+          <a:p>
+            <a:pPr algn="r">
+              <a:lnSpc>
+                <a:spcPct val="110000"/>
+              </a:lnSpc>
+              <a:spcAft>
+                <a:spcPts val="0"/>
+              </a:spcAft>
+            </a:pPr>
+            <a:r>
+              <a:rPr sz="1000" b="1" i="0">
                 <a:solidFill>
                   <a:srgbClr val="314359"/>
                 </a:solidFill>
                 <a:latin typeface="Arial"/>
               </a:rPr>
-              <a:t>Credible oversight.</a:t>
-            </a:r>
-            <a:r>
-              <a:rPr sz="1280">
-                <a:solidFill>
-                  <a:srgbClr val="0E1620"/>
-                </a:solidFill>
-                <a:latin typeface="Arial"/>
-              </a:rPr>
-              <a:t>  SEB custodian · MUFG administrator · KPMG auditor · Swedish FI-registered AIFM.</a:t>
+              <a:t>156</a:t>
+            </a:r>
+          </a:p>
+        </p:txBody>
+      </p:sp>
+      <p:sp>
+        <p:nvSpPr>
+          <p:cNvPr id="45" name="Rectangle 44"/>
+          <p:cNvSpPr/>
+          <p:nvPr/>
+        </p:nvSpPr>
+        <p:spPr>
+          <a:xfrm>
+            <a:off x="4578148" y="4876800"/>
+            <a:ext cx="1578841" cy="341376"/>
+          </a:xfrm>
+          <a:prstGeom prst="rect">
+            <a:avLst/>
+          </a:prstGeom>
+          <a:solidFill>
+            <a:srgbClr val="FFFFFF"/>
+          </a:solidFill>
+          <a:ln>
+            <a:noFill/>
+          </a:ln>
+          <a:effectLst/>
+        </p:spPr>
+        <p:style>
+          <a:lnRef idx="1">
+            <a:schemeClr val="accent1"/>
+          </a:lnRef>
+          <a:fillRef idx="3">
+            <a:schemeClr val="accent1"/>
+          </a:fillRef>
+          <a:effectRef idx="2">
+            <a:schemeClr val="accent1"/>
+          </a:effectRef>
+          <a:fontRef idx="minor">
+            <a:schemeClr val="lt1"/>
+          </a:fontRef>
+        </p:style>
+        <p:txBody>
+          <a:bodyPr rtlCol="0" anchor="ctr"/>
+          <a:lstStyle/>
+          <a:p>
+            <a:pPr algn="ctr"/>
+          </a:p>
+        </p:txBody>
+      </p:sp>
+      <p:sp>
+        <p:nvSpPr>
+          <p:cNvPr id="46" name="TextBox 45"/>
+          <p:cNvSpPr txBox="1"/>
+          <p:nvPr/>
+        </p:nvSpPr>
+        <p:spPr>
+          <a:xfrm>
+            <a:off x="4651302" y="4876800"/>
+            <a:ext cx="1432534" cy="341376"/>
+          </a:xfrm>
+          <a:prstGeom prst="rect">
+            <a:avLst/>
+          </a:prstGeom>
+          <a:noFill/>
+        </p:spPr>
+        <p:txBody>
+          <a:bodyPr wrap="square" anchor="ctr" lIns="0" rIns="0" tIns="0" bIns="0">
+            <a:spAutoFit/>
+          </a:bodyPr>
+          <a:lstStyle/>
+          <a:p>
+            <a:pPr algn="r">
+              <a:lnSpc>
+                <a:spcPct val="110000"/>
+              </a:lnSpc>
+              <a:spcAft>
+                <a:spcPts val="0"/>
+              </a:spcAft>
+            </a:pPr>
+            <a:r>
+              <a:rPr sz="1000" b="1" i="0">
+                <a:solidFill>
+                  <a:srgbClr val="314359"/>
+                </a:solidFill>
+                <a:latin typeface="Arial"/>
+              </a:rPr>
+              <a:t>210</a:t>
+            </a:r>
+          </a:p>
+        </p:txBody>
+      </p:sp>
+      <p:sp>
+        <p:nvSpPr>
+          <p:cNvPr id="47" name="Rectangle 46"/>
+          <p:cNvSpPr/>
+          <p:nvPr/>
+        </p:nvSpPr>
+        <p:spPr>
+          <a:xfrm>
+            <a:off x="6156990" y="4876800"/>
+            <a:ext cx="1578841" cy="341376"/>
+          </a:xfrm>
+          <a:prstGeom prst="rect">
+            <a:avLst/>
+          </a:prstGeom>
+          <a:solidFill>
+            <a:srgbClr val="FFFFFF"/>
+          </a:solidFill>
+          <a:ln>
+            <a:noFill/>
+          </a:ln>
+          <a:effectLst/>
+        </p:spPr>
+        <p:style>
+          <a:lnRef idx="1">
+            <a:schemeClr val="accent1"/>
+          </a:lnRef>
+          <a:fillRef idx="3">
+            <a:schemeClr val="accent1"/>
+          </a:fillRef>
+          <a:effectRef idx="2">
+            <a:schemeClr val="accent1"/>
+          </a:effectRef>
+          <a:fontRef idx="minor">
+            <a:schemeClr val="lt1"/>
+          </a:fontRef>
+        </p:style>
+        <p:txBody>
+          <a:bodyPr rtlCol="0" anchor="ctr"/>
+          <a:lstStyle/>
+          <a:p>
+            <a:pPr algn="ctr"/>
+          </a:p>
+        </p:txBody>
+      </p:sp>
+      <p:sp>
+        <p:nvSpPr>
+          <p:cNvPr id="48" name="TextBox 47"/>
+          <p:cNvSpPr txBox="1"/>
+          <p:nvPr/>
+        </p:nvSpPr>
+        <p:spPr>
+          <a:xfrm>
+            <a:off x="6230144" y="4876800"/>
+            <a:ext cx="1432534" cy="341376"/>
+          </a:xfrm>
+          <a:prstGeom prst="rect">
+            <a:avLst/>
+          </a:prstGeom>
+          <a:noFill/>
+        </p:spPr>
+        <p:txBody>
+          <a:bodyPr wrap="square" anchor="ctr" lIns="0" rIns="0" tIns="0" bIns="0">
+            <a:spAutoFit/>
+          </a:bodyPr>
+          <a:lstStyle/>
+          <a:p>
+            <a:pPr algn="r">
+              <a:lnSpc>
+                <a:spcPct val="110000"/>
+              </a:lnSpc>
+              <a:spcAft>
+                <a:spcPts val="0"/>
+              </a:spcAft>
+            </a:pPr>
+            <a:r>
+              <a:rPr sz="1000" b="1" i="0">
+                <a:solidFill>
+                  <a:srgbClr val="314359"/>
+                </a:solidFill>
+                <a:latin typeface="Arial"/>
+              </a:rPr>
+              <a:t>283</a:t>
+            </a:r>
+          </a:p>
+        </p:txBody>
+      </p:sp>
+      <p:sp>
+        <p:nvSpPr>
+          <p:cNvPr id="49" name="Rectangle 48"/>
+          <p:cNvSpPr/>
+          <p:nvPr/>
+        </p:nvSpPr>
+        <p:spPr>
+          <a:xfrm>
+            <a:off x="7735832" y="4876800"/>
+            <a:ext cx="1578841" cy="341376"/>
+          </a:xfrm>
+          <a:prstGeom prst="rect">
+            <a:avLst/>
+          </a:prstGeom>
+          <a:solidFill>
+            <a:srgbClr val="FFFFFF"/>
+          </a:solidFill>
+          <a:ln>
+            <a:noFill/>
+          </a:ln>
+          <a:effectLst/>
+        </p:spPr>
+        <p:style>
+          <a:lnRef idx="1">
+            <a:schemeClr val="accent1"/>
+          </a:lnRef>
+          <a:fillRef idx="3">
+            <a:schemeClr val="accent1"/>
+          </a:fillRef>
+          <a:effectRef idx="2">
+            <a:schemeClr val="accent1"/>
+          </a:effectRef>
+          <a:fontRef idx="minor">
+            <a:schemeClr val="lt1"/>
+          </a:fontRef>
+        </p:style>
+        <p:txBody>
+          <a:bodyPr rtlCol="0" anchor="ctr"/>
+          <a:lstStyle/>
+          <a:p>
+            <a:pPr algn="ctr"/>
+          </a:p>
+        </p:txBody>
+      </p:sp>
+      <p:sp>
+        <p:nvSpPr>
+          <p:cNvPr id="50" name="TextBox 49"/>
+          <p:cNvSpPr txBox="1"/>
+          <p:nvPr/>
+        </p:nvSpPr>
+        <p:spPr>
+          <a:xfrm>
+            <a:off x="7808986" y="4876800"/>
+            <a:ext cx="1432534" cy="341376"/>
+          </a:xfrm>
+          <a:prstGeom prst="rect">
+            <a:avLst/>
+          </a:prstGeom>
+          <a:noFill/>
+        </p:spPr>
+        <p:txBody>
+          <a:bodyPr wrap="square" anchor="ctr" lIns="0" rIns="0" tIns="0" bIns="0">
+            <a:spAutoFit/>
+          </a:bodyPr>
+          <a:lstStyle/>
+          <a:p>
+            <a:pPr algn="r">
+              <a:lnSpc>
+                <a:spcPct val="110000"/>
+              </a:lnSpc>
+              <a:spcAft>
+                <a:spcPts val="0"/>
+              </a:spcAft>
+            </a:pPr>
+            <a:r>
+              <a:rPr sz="1000" b="1" i="0">
+                <a:solidFill>
+                  <a:srgbClr val="314359"/>
+                </a:solidFill>
+                <a:latin typeface="Arial"/>
+              </a:rPr>
+              <a:t>443</a:t>
+            </a:r>
+          </a:p>
+        </p:txBody>
+      </p:sp>
+      <p:sp>
+        <p:nvSpPr>
+          <p:cNvPr id="51" name="Rectangle 50"/>
+          <p:cNvSpPr/>
+          <p:nvPr/>
+        </p:nvSpPr>
+        <p:spPr>
+          <a:xfrm>
+            <a:off x="438922" y="5218176"/>
+            <a:ext cx="2560384" cy="341376"/>
+          </a:xfrm>
+          <a:prstGeom prst="rect">
+            <a:avLst/>
+          </a:prstGeom>
+          <a:solidFill>
+            <a:srgbClr val="F6F7F9"/>
+          </a:solidFill>
+          <a:ln>
+            <a:noFill/>
+          </a:ln>
+          <a:effectLst/>
+        </p:spPr>
+        <p:style>
+          <a:lnRef idx="1">
+            <a:schemeClr val="accent1"/>
+          </a:lnRef>
+          <a:fillRef idx="3">
+            <a:schemeClr val="accent1"/>
+          </a:fillRef>
+          <a:effectRef idx="2">
+            <a:schemeClr val="accent1"/>
+          </a:effectRef>
+          <a:fontRef idx="minor">
+            <a:schemeClr val="lt1"/>
+          </a:fontRef>
+        </p:style>
+        <p:txBody>
+          <a:bodyPr rtlCol="0" anchor="ctr"/>
+          <a:lstStyle/>
+          <a:p>
+            <a:pPr algn="ctr"/>
+          </a:p>
+        </p:txBody>
+      </p:sp>
+      <p:sp>
+        <p:nvSpPr>
+          <p:cNvPr id="52" name="TextBox 51"/>
+          <p:cNvSpPr txBox="1"/>
+          <p:nvPr/>
+        </p:nvSpPr>
+        <p:spPr>
+          <a:xfrm>
+            <a:off x="526707" y="5218176"/>
+            <a:ext cx="2414076" cy="341376"/>
+          </a:xfrm>
+          <a:prstGeom prst="rect">
+            <a:avLst/>
+          </a:prstGeom>
+          <a:noFill/>
+        </p:spPr>
+        <p:txBody>
+          <a:bodyPr wrap="square" anchor="ctr" lIns="0" rIns="0" tIns="0" bIns="0">
+            <a:spAutoFit/>
+          </a:bodyPr>
+          <a:lstStyle/>
+          <a:p>
+            <a:pPr algn="l">
+              <a:lnSpc>
+                <a:spcPct val="110000"/>
+              </a:lnSpc>
+              <a:spcAft>
+                <a:spcPts val="0"/>
+              </a:spcAft>
+            </a:pPr>
+            <a:r>
+              <a:rPr sz="919" b="0" i="0">
+                <a:solidFill>
+                  <a:srgbClr val="556A83"/>
+                </a:solidFill>
+                <a:latin typeface="Arial"/>
+              </a:rPr>
+              <a:t>Adverse case* — MSCI</a:t>
+            </a:r>
+          </a:p>
+        </p:txBody>
+      </p:sp>
+      <p:sp>
+        <p:nvSpPr>
+          <p:cNvPr id="53" name="Rectangle 52"/>
+          <p:cNvSpPr/>
+          <p:nvPr/>
+        </p:nvSpPr>
+        <p:spPr>
+          <a:xfrm>
+            <a:off x="2999307" y="5218176"/>
+            <a:ext cx="1578841" cy="341376"/>
+          </a:xfrm>
+          <a:prstGeom prst="rect">
+            <a:avLst/>
+          </a:prstGeom>
+          <a:solidFill>
+            <a:srgbClr val="F6F7F9"/>
+          </a:solidFill>
+          <a:ln>
+            <a:noFill/>
+          </a:ln>
+          <a:effectLst/>
+        </p:spPr>
+        <p:style>
+          <a:lnRef idx="1">
+            <a:schemeClr val="accent1"/>
+          </a:lnRef>
+          <a:fillRef idx="3">
+            <a:schemeClr val="accent1"/>
+          </a:fillRef>
+          <a:effectRef idx="2">
+            <a:schemeClr val="accent1"/>
+          </a:effectRef>
+          <a:fontRef idx="minor">
+            <a:schemeClr val="lt1"/>
+          </a:fontRef>
+        </p:style>
+        <p:txBody>
+          <a:bodyPr rtlCol="0" anchor="ctr"/>
+          <a:lstStyle/>
+          <a:p>
+            <a:pPr algn="ctr"/>
+          </a:p>
+        </p:txBody>
+      </p:sp>
+      <p:sp>
+        <p:nvSpPr>
+          <p:cNvPr id="54" name="TextBox 53"/>
+          <p:cNvSpPr txBox="1"/>
+          <p:nvPr/>
+        </p:nvSpPr>
+        <p:spPr>
+          <a:xfrm>
+            <a:off x="3072460" y="5218176"/>
+            <a:ext cx="1432534" cy="341376"/>
+          </a:xfrm>
+          <a:prstGeom prst="rect">
+            <a:avLst/>
+          </a:prstGeom>
+          <a:noFill/>
+        </p:spPr>
+        <p:txBody>
+          <a:bodyPr wrap="square" anchor="ctr" lIns="0" rIns="0" tIns="0" bIns="0">
+            <a:spAutoFit/>
+          </a:bodyPr>
+          <a:lstStyle/>
+          <a:p>
+            <a:pPr algn="r">
+              <a:lnSpc>
+                <a:spcPct val="110000"/>
+              </a:lnSpc>
+              <a:spcAft>
+                <a:spcPts val="0"/>
+              </a:spcAft>
+            </a:pPr>
+            <a:r>
+              <a:rPr sz="1000" b="0" i="0">
+                <a:solidFill>
+                  <a:srgbClr val="556A83"/>
+                </a:solidFill>
+                <a:latin typeface="Arial"/>
+              </a:rPr>
+              <a:t>98</a:t>
+            </a:r>
+          </a:p>
+        </p:txBody>
+      </p:sp>
+      <p:sp>
+        <p:nvSpPr>
+          <p:cNvPr id="55" name="Rectangle 54"/>
+          <p:cNvSpPr/>
+          <p:nvPr/>
+        </p:nvSpPr>
+        <p:spPr>
+          <a:xfrm>
+            <a:off x="4578148" y="5218176"/>
+            <a:ext cx="1578841" cy="341376"/>
+          </a:xfrm>
+          <a:prstGeom prst="rect">
+            <a:avLst/>
+          </a:prstGeom>
+          <a:solidFill>
+            <a:srgbClr val="F6F7F9"/>
+          </a:solidFill>
+          <a:ln>
+            <a:noFill/>
+          </a:ln>
+          <a:effectLst/>
+        </p:spPr>
+        <p:style>
+          <a:lnRef idx="1">
+            <a:schemeClr val="accent1"/>
+          </a:lnRef>
+          <a:fillRef idx="3">
+            <a:schemeClr val="accent1"/>
+          </a:fillRef>
+          <a:effectRef idx="2">
+            <a:schemeClr val="accent1"/>
+          </a:effectRef>
+          <a:fontRef idx="minor">
+            <a:schemeClr val="lt1"/>
+          </a:fontRef>
+        </p:style>
+        <p:txBody>
+          <a:bodyPr rtlCol="0" anchor="ctr"/>
+          <a:lstStyle/>
+          <a:p>
+            <a:pPr algn="ctr"/>
+          </a:p>
+        </p:txBody>
+      </p:sp>
+      <p:sp>
+        <p:nvSpPr>
+          <p:cNvPr id="56" name="TextBox 55"/>
+          <p:cNvSpPr txBox="1"/>
+          <p:nvPr/>
+        </p:nvSpPr>
+        <p:spPr>
+          <a:xfrm>
+            <a:off x="4651302" y="5218176"/>
+            <a:ext cx="1432534" cy="341376"/>
+          </a:xfrm>
+          <a:prstGeom prst="rect">
+            <a:avLst/>
+          </a:prstGeom>
+          <a:noFill/>
+        </p:spPr>
+        <p:txBody>
+          <a:bodyPr wrap="square" anchor="ctr" lIns="0" rIns="0" tIns="0" bIns="0">
+            <a:spAutoFit/>
+          </a:bodyPr>
+          <a:lstStyle/>
+          <a:p>
+            <a:pPr algn="r">
+              <a:lnSpc>
+                <a:spcPct val="110000"/>
+              </a:lnSpc>
+              <a:spcAft>
+                <a:spcPts val="0"/>
+              </a:spcAft>
+            </a:pPr>
+            <a:r>
+              <a:rPr sz="1000" b="0" i="0">
+                <a:solidFill>
+                  <a:srgbClr val="556A83"/>
+                </a:solidFill>
+                <a:latin typeface="Arial"/>
+              </a:rPr>
+              <a:t>105</a:t>
+            </a:r>
+          </a:p>
+        </p:txBody>
+      </p:sp>
+      <p:sp>
+        <p:nvSpPr>
+          <p:cNvPr id="57" name="Rectangle 56"/>
+          <p:cNvSpPr/>
+          <p:nvPr/>
+        </p:nvSpPr>
+        <p:spPr>
+          <a:xfrm>
+            <a:off x="6156990" y="5218176"/>
+            <a:ext cx="1578841" cy="341376"/>
+          </a:xfrm>
+          <a:prstGeom prst="rect">
+            <a:avLst/>
+          </a:prstGeom>
+          <a:solidFill>
+            <a:srgbClr val="F6F7F9"/>
+          </a:solidFill>
+          <a:ln>
+            <a:noFill/>
+          </a:ln>
+          <a:effectLst/>
+        </p:spPr>
+        <p:style>
+          <a:lnRef idx="1">
+            <a:schemeClr val="accent1"/>
+          </a:lnRef>
+          <a:fillRef idx="3">
+            <a:schemeClr val="accent1"/>
+          </a:fillRef>
+          <a:effectRef idx="2">
+            <a:schemeClr val="accent1"/>
+          </a:effectRef>
+          <a:fontRef idx="minor">
+            <a:schemeClr val="lt1"/>
+          </a:fontRef>
+        </p:style>
+        <p:txBody>
+          <a:bodyPr rtlCol="0" anchor="ctr"/>
+          <a:lstStyle/>
+          <a:p>
+            <a:pPr algn="ctr"/>
+          </a:p>
+        </p:txBody>
+      </p:sp>
+      <p:sp>
+        <p:nvSpPr>
+          <p:cNvPr id="58" name="TextBox 57"/>
+          <p:cNvSpPr txBox="1"/>
+          <p:nvPr/>
+        </p:nvSpPr>
+        <p:spPr>
+          <a:xfrm>
+            <a:off x="6230144" y="5218176"/>
+            <a:ext cx="1432534" cy="341376"/>
+          </a:xfrm>
+          <a:prstGeom prst="rect">
+            <a:avLst/>
+          </a:prstGeom>
+          <a:noFill/>
+        </p:spPr>
+        <p:txBody>
+          <a:bodyPr wrap="square" anchor="ctr" lIns="0" rIns="0" tIns="0" bIns="0">
+            <a:spAutoFit/>
+          </a:bodyPr>
+          <a:lstStyle/>
+          <a:p>
+            <a:pPr algn="r">
+              <a:lnSpc>
+                <a:spcPct val="110000"/>
+              </a:lnSpc>
+              <a:spcAft>
+                <a:spcPts val="0"/>
+              </a:spcAft>
+            </a:pPr>
+            <a:r>
+              <a:rPr sz="1000" b="0" i="0">
+                <a:solidFill>
+                  <a:srgbClr val="556A83"/>
+                </a:solidFill>
+                <a:latin typeface="Arial"/>
+              </a:rPr>
+              <a:t>113</a:t>
+            </a:r>
+          </a:p>
+        </p:txBody>
+      </p:sp>
+      <p:sp>
+        <p:nvSpPr>
+          <p:cNvPr id="59" name="Rectangle 58"/>
+          <p:cNvSpPr/>
+          <p:nvPr/>
+        </p:nvSpPr>
+        <p:spPr>
+          <a:xfrm>
+            <a:off x="7735832" y="5218176"/>
+            <a:ext cx="1578841" cy="341376"/>
+          </a:xfrm>
+          <a:prstGeom prst="rect">
+            <a:avLst/>
+          </a:prstGeom>
+          <a:solidFill>
+            <a:srgbClr val="F6F7F9"/>
+          </a:solidFill>
+          <a:ln>
+            <a:noFill/>
+          </a:ln>
+          <a:effectLst/>
+        </p:spPr>
+        <p:style>
+          <a:lnRef idx="1">
+            <a:schemeClr val="accent1"/>
+          </a:lnRef>
+          <a:fillRef idx="3">
+            <a:schemeClr val="accent1"/>
+          </a:fillRef>
+          <a:effectRef idx="2">
+            <a:schemeClr val="accent1"/>
+          </a:effectRef>
+          <a:fontRef idx="minor">
+            <a:schemeClr val="lt1"/>
+          </a:fontRef>
+        </p:style>
+        <p:txBody>
+          <a:bodyPr rtlCol="0" anchor="ctr"/>
+          <a:lstStyle/>
+          <a:p>
+            <a:pPr algn="ctr"/>
+          </a:p>
+        </p:txBody>
+      </p:sp>
+      <p:sp>
+        <p:nvSpPr>
+          <p:cNvPr id="60" name="TextBox 59"/>
+          <p:cNvSpPr txBox="1"/>
+          <p:nvPr/>
+        </p:nvSpPr>
+        <p:spPr>
+          <a:xfrm>
+            <a:off x="7808986" y="5218176"/>
+            <a:ext cx="1432534" cy="341376"/>
+          </a:xfrm>
+          <a:prstGeom prst="rect">
+            <a:avLst/>
+          </a:prstGeom>
+          <a:noFill/>
+        </p:spPr>
+        <p:txBody>
+          <a:bodyPr wrap="square" anchor="ctr" lIns="0" rIns="0" tIns="0" bIns="0">
+            <a:spAutoFit/>
+          </a:bodyPr>
+          <a:lstStyle/>
+          <a:p>
+            <a:pPr algn="r">
+              <a:lnSpc>
+                <a:spcPct val="110000"/>
+              </a:lnSpc>
+              <a:spcAft>
+                <a:spcPts val="0"/>
+              </a:spcAft>
+            </a:pPr>
+            <a:r>
+              <a:rPr sz="1000" b="0" i="0">
+                <a:solidFill>
+                  <a:srgbClr val="556A83"/>
+                </a:solidFill>
+                <a:latin typeface="Arial"/>
+              </a:rPr>
+              <a:t>128</a:t>
+            </a:r>
+          </a:p>
+        </p:txBody>
+      </p:sp>
+      <p:sp>
+        <p:nvSpPr>
+          <p:cNvPr id="61" name="Rectangle 60"/>
+          <p:cNvSpPr/>
+          <p:nvPr/>
+        </p:nvSpPr>
+        <p:spPr>
+          <a:xfrm>
+            <a:off x="438922" y="5559552"/>
+            <a:ext cx="2560384" cy="341376"/>
+          </a:xfrm>
+          <a:prstGeom prst="rect">
+            <a:avLst/>
+          </a:prstGeom>
+          <a:solidFill>
+            <a:srgbClr val="FFFFFF"/>
+          </a:solidFill>
+          <a:ln>
+            <a:noFill/>
+          </a:ln>
+          <a:effectLst/>
+        </p:spPr>
+        <p:style>
+          <a:lnRef idx="1">
+            <a:schemeClr val="accent1"/>
+          </a:lnRef>
+          <a:fillRef idx="3">
+            <a:schemeClr val="accent1"/>
+          </a:fillRef>
+          <a:effectRef idx="2">
+            <a:schemeClr val="accent1"/>
+          </a:effectRef>
+          <a:fontRef idx="minor">
+            <a:schemeClr val="lt1"/>
+          </a:fontRef>
+        </p:style>
+        <p:txBody>
+          <a:bodyPr rtlCol="0" anchor="ctr"/>
+          <a:lstStyle/>
+          <a:p>
+            <a:pPr algn="ctr"/>
+          </a:p>
+        </p:txBody>
+      </p:sp>
+      <p:sp>
+        <p:nvSpPr>
+          <p:cNvPr id="62" name="TextBox 61"/>
+          <p:cNvSpPr txBox="1"/>
+          <p:nvPr/>
+        </p:nvSpPr>
+        <p:spPr>
+          <a:xfrm>
+            <a:off x="526707" y="5559552"/>
+            <a:ext cx="2414076" cy="341376"/>
+          </a:xfrm>
+          <a:prstGeom prst="rect">
+            <a:avLst/>
+          </a:prstGeom>
+          <a:noFill/>
+        </p:spPr>
+        <p:txBody>
+          <a:bodyPr wrap="square" anchor="ctr" lIns="0" rIns="0" tIns="0" bIns="0">
+            <a:spAutoFit/>
+          </a:bodyPr>
+          <a:lstStyle/>
+          <a:p>
+            <a:pPr algn="l">
+              <a:lnSpc>
+                <a:spcPct val="110000"/>
+              </a:lnSpc>
+              <a:spcAft>
+                <a:spcPts val="0"/>
+              </a:spcAft>
+            </a:pPr>
+            <a:r>
+              <a:rPr sz="919" b="1" i="0">
+                <a:solidFill>
+                  <a:srgbClr val="152130"/>
+                </a:solidFill>
+                <a:latin typeface="Arial"/>
+              </a:rPr>
+              <a:t>Adverse case* — Athanase</a:t>
+            </a:r>
+          </a:p>
+        </p:txBody>
+      </p:sp>
+      <p:sp>
+        <p:nvSpPr>
+          <p:cNvPr id="63" name="Rectangle 62"/>
+          <p:cNvSpPr/>
+          <p:nvPr/>
+        </p:nvSpPr>
+        <p:spPr>
+          <a:xfrm>
+            <a:off x="2999307" y="5559552"/>
+            <a:ext cx="1578841" cy="341376"/>
+          </a:xfrm>
+          <a:prstGeom prst="rect">
+            <a:avLst/>
+          </a:prstGeom>
+          <a:solidFill>
+            <a:srgbClr val="FFFFFF"/>
+          </a:solidFill>
+          <a:ln>
+            <a:noFill/>
+          </a:ln>
+          <a:effectLst/>
+        </p:spPr>
+        <p:style>
+          <a:lnRef idx="1">
+            <a:schemeClr val="accent1"/>
+          </a:lnRef>
+          <a:fillRef idx="3">
+            <a:schemeClr val="accent1"/>
+          </a:fillRef>
+          <a:effectRef idx="2">
+            <a:schemeClr val="accent1"/>
+          </a:effectRef>
+          <a:fontRef idx="minor">
+            <a:schemeClr val="lt1"/>
+          </a:fontRef>
+        </p:style>
+        <p:txBody>
+          <a:bodyPr rtlCol="0" anchor="ctr"/>
+          <a:lstStyle/>
+          <a:p>
+            <a:pPr algn="ctr"/>
+          </a:p>
+        </p:txBody>
+      </p:sp>
+      <p:sp>
+        <p:nvSpPr>
+          <p:cNvPr id="64" name="TextBox 63"/>
+          <p:cNvSpPr txBox="1"/>
+          <p:nvPr/>
+        </p:nvSpPr>
+        <p:spPr>
+          <a:xfrm>
+            <a:off x="3072460" y="5559552"/>
+            <a:ext cx="1432534" cy="341376"/>
+          </a:xfrm>
+          <a:prstGeom prst="rect">
+            <a:avLst/>
+          </a:prstGeom>
+          <a:noFill/>
+        </p:spPr>
+        <p:txBody>
+          <a:bodyPr wrap="square" anchor="ctr" lIns="0" rIns="0" tIns="0" bIns="0">
+            <a:spAutoFit/>
+          </a:bodyPr>
+          <a:lstStyle/>
+          <a:p>
+            <a:pPr algn="r">
+              <a:lnSpc>
+                <a:spcPct val="110000"/>
+              </a:lnSpc>
+              <a:spcAft>
+                <a:spcPts val="0"/>
+              </a:spcAft>
+            </a:pPr>
+            <a:r>
+              <a:rPr sz="1000" b="1" i="0">
+                <a:solidFill>
+                  <a:srgbClr val="314359"/>
+                </a:solidFill>
+                <a:latin typeface="Arial"/>
+              </a:rPr>
+              <a:t>132</a:t>
+            </a:r>
+          </a:p>
+        </p:txBody>
+      </p:sp>
+      <p:sp>
+        <p:nvSpPr>
+          <p:cNvPr id="65" name="Rectangle 64"/>
+          <p:cNvSpPr/>
+          <p:nvPr/>
+        </p:nvSpPr>
+        <p:spPr>
+          <a:xfrm>
+            <a:off x="4578148" y="5559552"/>
+            <a:ext cx="1578841" cy="341376"/>
+          </a:xfrm>
+          <a:prstGeom prst="rect">
+            <a:avLst/>
+          </a:prstGeom>
+          <a:solidFill>
+            <a:srgbClr val="FFFFFF"/>
+          </a:solidFill>
+          <a:ln>
+            <a:noFill/>
+          </a:ln>
+          <a:effectLst/>
+        </p:spPr>
+        <p:style>
+          <a:lnRef idx="1">
+            <a:schemeClr val="accent1"/>
+          </a:lnRef>
+          <a:fillRef idx="3">
+            <a:schemeClr val="accent1"/>
+          </a:fillRef>
+          <a:effectRef idx="2">
+            <a:schemeClr val="accent1"/>
+          </a:effectRef>
+          <a:fontRef idx="minor">
+            <a:schemeClr val="lt1"/>
+          </a:fontRef>
+        </p:style>
+        <p:txBody>
+          <a:bodyPr rtlCol="0" anchor="ctr"/>
+          <a:lstStyle/>
+          <a:p>
+            <a:pPr algn="ctr"/>
+          </a:p>
+        </p:txBody>
+      </p:sp>
+      <p:sp>
+        <p:nvSpPr>
+          <p:cNvPr id="66" name="TextBox 65"/>
+          <p:cNvSpPr txBox="1"/>
+          <p:nvPr/>
+        </p:nvSpPr>
+        <p:spPr>
+          <a:xfrm>
+            <a:off x="4651302" y="5559552"/>
+            <a:ext cx="1432534" cy="341376"/>
+          </a:xfrm>
+          <a:prstGeom prst="rect">
+            <a:avLst/>
+          </a:prstGeom>
+          <a:noFill/>
+        </p:spPr>
+        <p:txBody>
+          <a:bodyPr wrap="square" anchor="ctr" lIns="0" rIns="0" tIns="0" bIns="0">
+            <a:spAutoFit/>
+          </a:bodyPr>
+          <a:lstStyle/>
+          <a:p>
+            <a:pPr algn="r">
+              <a:lnSpc>
+                <a:spcPct val="110000"/>
+              </a:lnSpc>
+              <a:spcAft>
+                <a:spcPts val="0"/>
+              </a:spcAft>
+            </a:pPr>
+            <a:r>
+              <a:rPr sz="1000" b="1" i="0">
+                <a:solidFill>
+                  <a:srgbClr val="314359"/>
+                </a:solidFill>
+                <a:latin typeface="Arial"/>
+              </a:rPr>
+              <a:t>170</a:t>
+            </a:r>
+          </a:p>
+        </p:txBody>
+      </p:sp>
+      <p:sp>
+        <p:nvSpPr>
+          <p:cNvPr id="67" name="Rectangle 66"/>
+          <p:cNvSpPr/>
+          <p:nvPr/>
+        </p:nvSpPr>
+        <p:spPr>
+          <a:xfrm>
+            <a:off x="6156990" y="5559552"/>
+            <a:ext cx="1578841" cy="341376"/>
+          </a:xfrm>
+          <a:prstGeom prst="rect">
+            <a:avLst/>
+          </a:prstGeom>
+          <a:solidFill>
+            <a:srgbClr val="FFFFFF"/>
+          </a:solidFill>
+          <a:ln>
+            <a:noFill/>
+          </a:ln>
+          <a:effectLst/>
+        </p:spPr>
+        <p:style>
+          <a:lnRef idx="1">
+            <a:schemeClr val="accent1"/>
+          </a:lnRef>
+          <a:fillRef idx="3">
+            <a:schemeClr val="accent1"/>
+          </a:fillRef>
+          <a:effectRef idx="2">
+            <a:schemeClr val="accent1"/>
+          </a:effectRef>
+          <a:fontRef idx="minor">
+            <a:schemeClr val="lt1"/>
+          </a:fontRef>
+        </p:style>
+        <p:txBody>
+          <a:bodyPr rtlCol="0" anchor="ctr"/>
+          <a:lstStyle/>
+          <a:p>
+            <a:pPr algn="ctr"/>
+          </a:p>
+        </p:txBody>
+      </p:sp>
+      <p:sp>
+        <p:nvSpPr>
+          <p:cNvPr id="68" name="TextBox 67"/>
+          <p:cNvSpPr txBox="1"/>
+          <p:nvPr/>
+        </p:nvSpPr>
+        <p:spPr>
+          <a:xfrm>
+            <a:off x="6230144" y="5559552"/>
+            <a:ext cx="1432534" cy="341376"/>
+          </a:xfrm>
+          <a:prstGeom prst="rect">
+            <a:avLst/>
+          </a:prstGeom>
+          <a:noFill/>
+        </p:spPr>
+        <p:txBody>
+          <a:bodyPr wrap="square" anchor="ctr" lIns="0" rIns="0" tIns="0" bIns="0">
+            <a:spAutoFit/>
+          </a:bodyPr>
+          <a:lstStyle/>
+          <a:p>
+            <a:pPr algn="r">
+              <a:lnSpc>
+                <a:spcPct val="110000"/>
+              </a:lnSpc>
+              <a:spcAft>
+                <a:spcPts val="0"/>
+              </a:spcAft>
+            </a:pPr>
+            <a:r>
+              <a:rPr sz="1000" b="1" i="0">
+                <a:solidFill>
+                  <a:srgbClr val="314359"/>
+                </a:solidFill>
+                <a:latin typeface="Arial"/>
+              </a:rPr>
+              <a:t>220</a:t>
+            </a:r>
+          </a:p>
+        </p:txBody>
+      </p:sp>
+      <p:sp>
+        <p:nvSpPr>
+          <p:cNvPr id="69" name="Rectangle 68"/>
+          <p:cNvSpPr/>
+          <p:nvPr/>
+        </p:nvSpPr>
+        <p:spPr>
+          <a:xfrm>
+            <a:off x="7735832" y="5559552"/>
+            <a:ext cx="1578841" cy="341376"/>
+          </a:xfrm>
+          <a:prstGeom prst="rect">
+            <a:avLst/>
+          </a:prstGeom>
+          <a:solidFill>
+            <a:srgbClr val="FFFFFF"/>
+          </a:solidFill>
+          <a:ln>
+            <a:noFill/>
+          </a:ln>
+          <a:effectLst/>
+        </p:spPr>
+        <p:style>
+          <a:lnRef idx="1">
+            <a:schemeClr val="accent1"/>
+          </a:lnRef>
+          <a:fillRef idx="3">
+            <a:schemeClr val="accent1"/>
+          </a:fillRef>
+          <a:effectRef idx="2">
+            <a:schemeClr val="accent1"/>
+          </a:effectRef>
+          <a:fontRef idx="minor">
+            <a:schemeClr val="lt1"/>
+          </a:fontRef>
+        </p:style>
+        <p:txBody>
+          <a:bodyPr rtlCol="0" anchor="ctr"/>
+          <a:lstStyle/>
+          <a:p>
+            <a:pPr algn="ctr"/>
+          </a:p>
+        </p:txBody>
+      </p:sp>
+      <p:sp>
+        <p:nvSpPr>
+          <p:cNvPr id="70" name="TextBox 69"/>
+          <p:cNvSpPr txBox="1"/>
+          <p:nvPr/>
+        </p:nvSpPr>
+        <p:spPr>
+          <a:xfrm>
+            <a:off x="7808986" y="5559552"/>
+            <a:ext cx="1432534" cy="341376"/>
+          </a:xfrm>
+          <a:prstGeom prst="rect">
+            <a:avLst/>
+          </a:prstGeom>
+          <a:noFill/>
+        </p:spPr>
+        <p:txBody>
+          <a:bodyPr wrap="square" anchor="ctr" lIns="0" rIns="0" tIns="0" bIns="0">
+            <a:spAutoFit/>
+          </a:bodyPr>
+          <a:lstStyle/>
+          <a:p>
+            <a:pPr algn="r">
+              <a:lnSpc>
+                <a:spcPct val="110000"/>
+              </a:lnSpc>
+              <a:spcAft>
+                <a:spcPts val="0"/>
+              </a:spcAft>
+            </a:pPr>
+            <a:r>
+              <a:rPr sz="1000" b="1" i="0">
+                <a:solidFill>
+                  <a:srgbClr val="314359"/>
+                </a:solidFill>
+                <a:latin typeface="Arial"/>
+              </a:rPr>
+              <a:t>328</a:t>
+            </a:r>
+          </a:p>
+        </p:txBody>
+      </p:sp>
+      <p:sp>
+        <p:nvSpPr>
+          <p:cNvPr id="71" name="Rectangle 70"/>
+          <p:cNvSpPr/>
+          <p:nvPr/>
+        </p:nvSpPr>
+        <p:spPr>
+          <a:xfrm>
+            <a:off x="438922" y="5900928"/>
+            <a:ext cx="2560384" cy="341376"/>
+          </a:xfrm>
+          <a:prstGeom prst="rect">
+            <a:avLst/>
+          </a:prstGeom>
+          <a:solidFill>
+            <a:srgbClr val="F6F7F9"/>
+          </a:solidFill>
+          <a:ln>
+            <a:noFill/>
+          </a:ln>
+          <a:effectLst/>
+        </p:spPr>
+        <p:style>
+          <a:lnRef idx="1">
+            <a:schemeClr val="accent1"/>
+          </a:lnRef>
+          <a:fillRef idx="3">
+            <a:schemeClr val="accent1"/>
+          </a:fillRef>
+          <a:effectRef idx="2">
+            <a:schemeClr val="accent1"/>
+          </a:effectRef>
+          <a:fontRef idx="minor">
+            <a:schemeClr val="lt1"/>
+          </a:fontRef>
+        </p:style>
+        <p:txBody>
+          <a:bodyPr rtlCol="0" anchor="ctr"/>
+          <a:lstStyle/>
+          <a:p>
+            <a:pPr algn="ctr"/>
+          </a:p>
+        </p:txBody>
+      </p:sp>
+      <p:sp>
+        <p:nvSpPr>
+          <p:cNvPr id="72" name="TextBox 71"/>
+          <p:cNvSpPr txBox="1"/>
+          <p:nvPr/>
+        </p:nvSpPr>
+        <p:spPr>
+          <a:xfrm>
+            <a:off x="526707" y="5900928"/>
+            <a:ext cx="2414076" cy="341376"/>
+          </a:xfrm>
+          <a:prstGeom prst="rect">
+            <a:avLst/>
+          </a:prstGeom>
+          <a:noFill/>
+        </p:spPr>
+        <p:txBody>
+          <a:bodyPr wrap="square" anchor="ctr" lIns="0" rIns="0" tIns="0" bIns="0">
+            <a:spAutoFit/>
+          </a:bodyPr>
+          <a:lstStyle/>
+          <a:p>
+            <a:pPr algn="l">
+              <a:lnSpc>
+                <a:spcPct val="110000"/>
+              </a:lnSpc>
+              <a:spcAft>
+                <a:spcPts val="0"/>
+              </a:spcAft>
+            </a:pPr>
+            <a:r>
+              <a:rPr sz="919" b="0" i="0">
+                <a:solidFill>
+                  <a:srgbClr val="556A83"/>
+                </a:solidFill>
+                <a:latin typeface="Arial"/>
+              </a:rPr>
+              <a:t>Chance of a loss — MSCI</a:t>
+            </a:r>
+          </a:p>
+        </p:txBody>
+      </p:sp>
+      <p:sp>
+        <p:nvSpPr>
+          <p:cNvPr id="73" name="Rectangle 72"/>
+          <p:cNvSpPr/>
+          <p:nvPr/>
+        </p:nvSpPr>
+        <p:spPr>
+          <a:xfrm>
+            <a:off x="2999307" y="5900928"/>
+            <a:ext cx="1578841" cy="341376"/>
+          </a:xfrm>
+          <a:prstGeom prst="rect">
+            <a:avLst/>
+          </a:prstGeom>
+          <a:solidFill>
+            <a:srgbClr val="F6F7F9"/>
+          </a:solidFill>
+          <a:ln>
+            <a:noFill/>
+          </a:ln>
+          <a:effectLst/>
+        </p:spPr>
+        <p:style>
+          <a:lnRef idx="1">
+            <a:schemeClr val="accent1"/>
+          </a:lnRef>
+          <a:fillRef idx="3">
+            <a:schemeClr val="accent1"/>
+          </a:fillRef>
+          <a:effectRef idx="2">
+            <a:schemeClr val="accent1"/>
+          </a:effectRef>
+          <a:fontRef idx="minor">
+            <a:schemeClr val="lt1"/>
+          </a:fontRef>
+        </p:style>
+        <p:txBody>
+          <a:bodyPr rtlCol="0" anchor="ctr"/>
+          <a:lstStyle/>
+          <a:p>
+            <a:pPr algn="ctr"/>
+          </a:p>
+        </p:txBody>
+      </p:sp>
+      <p:sp>
+        <p:nvSpPr>
+          <p:cNvPr id="74" name="TextBox 73"/>
+          <p:cNvSpPr txBox="1"/>
+          <p:nvPr/>
+        </p:nvSpPr>
+        <p:spPr>
+          <a:xfrm>
+            <a:off x="3072460" y="5900928"/>
+            <a:ext cx="1432534" cy="341376"/>
+          </a:xfrm>
+          <a:prstGeom prst="rect">
+            <a:avLst/>
+          </a:prstGeom>
+          <a:noFill/>
+        </p:spPr>
+        <p:txBody>
+          <a:bodyPr wrap="square" anchor="ctr" lIns="0" rIns="0" tIns="0" bIns="0">
+            <a:spAutoFit/>
+          </a:bodyPr>
+          <a:lstStyle/>
+          <a:p>
+            <a:pPr algn="r">
+              <a:lnSpc>
+                <a:spcPct val="110000"/>
+              </a:lnSpc>
+              <a:spcAft>
+                <a:spcPts val="0"/>
+              </a:spcAft>
+            </a:pPr>
+            <a:r>
+              <a:rPr sz="1000" b="0" i="0">
+                <a:solidFill>
+                  <a:srgbClr val="556A83"/>
+                </a:solidFill>
+                <a:latin typeface="Arial"/>
+              </a:rPr>
+              <a:t>18%</a:t>
+            </a:r>
+          </a:p>
+        </p:txBody>
+      </p:sp>
+      <p:sp>
+        <p:nvSpPr>
+          <p:cNvPr id="75" name="Rectangle 74"/>
+          <p:cNvSpPr/>
+          <p:nvPr/>
+        </p:nvSpPr>
+        <p:spPr>
+          <a:xfrm>
+            <a:off x="4578148" y="5900928"/>
+            <a:ext cx="1578841" cy="341376"/>
+          </a:xfrm>
+          <a:prstGeom prst="rect">
+            <a:avLst/>
+          </a:prstGeom>
+          <a:solidFill>
+            <a:srgbClr val="F6F7F9"/>
+          </a:solidFill>
+          <a:ln>
+            <a:noFill/>
+          </a:ln>
+          <a:effectLst/>
+        </p:spPr>
+        <p:style>
+          <a:lnRef idx="1">
+            <a:schemeClr val="accent1"/>
+          </a:lnRef>
+          <a:fillRef idx="3">
+            <a:schemeClr val="accent1"/>
+          </a:fillRef>
+          <a:effectRef idx="2">
+            <a:schemeClr val="accent1"/>
+          </a:effectRef>
+          <a:fontRef idx="minor">
+            <a:schemeClr val="lt1"/>
+          </a:fontRef>
+        </p:style>
+        <p:txBody>
+          <a:bodyPr rtlCol="0" anchor="ctr"/>
+          <a:lstStyle/>
+          <a:p>
+            <a:pPr algn="ctr"/>
+          </a:p>
+        </p:txBody>
+      </p:sp>
+      <p:sp>
+        <p:nvSpPr>
+          <p:cNvPr id="76" name="TextBox 75"/>
+          <p:cNvSpPr txBox="1"/>
+          <p:nvPr/>
+        </p:nvSpPr>
+        <p:spPr>
+          <a:xfrm>
+            <a:off x="4651302" y="5900928"/>
+            <a:ext cx="1432534" cy="341376"/>
+          </a:xfrm>
+          <a:prstGeom prst="rect">
+            <a:avLst/>
+          </a:prstGeom>
+          <a:noFill/>
+        </p:spPr>
+        <p:txBody>
+          <a:bodyPr wrap="square" anchor="ctr" lIns="0" rIns="0" tIns="0" bIns="0">
+            <a:spAutoFit/>
+          </a:bodyPr>
+          <a:lstStyle/>
+          <a:p>
+            <a:pPr algn="r">
+              <a:lnSpc>
+                <a:spcPct val="110000"/>
+              </a:lnSpc>
+              <a:spcAft>
+                <a:spcPts val="0"/>
+              </a:spcAft>
+            </a:pPr>
+            <a:r>
+              <a:rPr sz="1000" b="0" i="0">
+                <a:solidFill>
+                  <a:srgbClr val="556A83"/>
+                </a:solidFill>
+                <a:latin typeface="Arial"/>
+              </a:rPr>
+              <a:t>12%</a:t>
+            </a:r>
+          </a:p>
+        </p:txBody>
+      </p:sp>
+      <p:sp>
+        <p:nvSpPr>
+          <p:cNvPr id="77" name="Rectangle 76"/>
+          <p:cNvSpPr/>
+          <p:nvPr/>
+        </p:nvSpPr>
+        <p:spPr>
+          <a:xfrm>
+            <a:off x="6156990" y="5900928"/>
+            <a:ext cx="1578841" cy="341376"/>
+          </a:xfrm>
+          <a:prstGeom prst="rect">
+            <a:avLst/>
+          </a:prstGeom>
+          <a:solidFill>
+            <a:srgbClr val="F6F7F9"/>
+          </a:solidFill>
+          <a:ln>
+            <a:noFill/>
+          </a:ln>
+          <a:effectLst/>
+        </p:spPr>
+        <p:style>
+          <a:lnRef idx="1">
+            <a:schemeClr val="accent1"/>
+          </a:lnRef>
+          <a:fillRef idx="3">
+            <a:schemeClr val="accent1"/>
+          </a:fillRef>
+          <a:effectRef idx="2">
+            <a:schemeClr val="accent1"/>
+          </a:effectRef>
+          <a:fontRef idx="minor">
+            <a:schemeClr val="lt1"/>
+          </a:fontRef>
+        </p:style>
+        <p:txBody>
+          <a:bodyPr rtlCol="0" anchor="ctr"/>
+          <a:lstStyle/>
+          <a:p>
+            <a:pPr algn="ctr"/>
+          </a:p>
+        </p:txBody>
+      </p:sp>
+      <p:sp>
+        <p:nvSpPr>
+          <p:cNvPr id="78" name="TextBox 77"/>
+          <p:cNvSpPr txBox="1"/>
+          <p:nvPr/>
+        </p:nvSpPr>
+        <p:spPr>
+          <a:xfrm>
+            <a:off x="6230144" y="5900928"/>
+            <a:ext cx="1432534" cy="341376"/>
+          </a:xfrm>
+          <a:prstGeom prst="rect">
+            <a:avLst/>
+          </a:prstGeom>
+          <a:noFill/>
+        </p:spPr>
+        <p:txBody>
+          <a:bodyPr wrap="square" anchor="ctr" lIns="0" rIns="0" tIns="0" bIns="0">
+            <a:spAutoFit/>
+          </a:bodyPr>
+          <a:lstStyle/>
+          <a:p>
+            <a:pPr algn="r">
+              <a:lnSpc>
+                <a:spcPct val="110000"/>
+              </a:lnSpc>
+              <a:spcAft>
+                <a:spcPts val="0"/>
+              </a:spcAft>
+            </a:pPr>
+            <a:r>
+              <a:rPr sz="1000" b="0" i="0">
+                <a:solidFill>
+                  <a:srgbClr val="556A83"/>
+                </a:solidFill>
+                <a:latin typeface="Arial"/>
+              </a:rPr>
+              <a:t>8%</a:t>
+            </a:r>
+          </a:p>
+        </p:txBody>
+      </p:sp>
+      <p:sp>
+        <p:nvSpPr>
+          <p:cNvPr id="79" name="Rectangle 78"/>
+          <p:cNvSpPr/>
+          <p:nvPr/>
+        </p:nvSpPr>
+        <p:spPr>
+          <a:xfrm>
+            <a:off x="7735832" y="5900928"/>
+            <a:ext cx="1578841" cy="341376"/>
+          </a:xfrm>
+          <a:prstGeom prst="rect">
+            <a:avLst/>
+          </a:prstGeom>
+          <a:solidFill>
+            <a:srgbClr val="F6F7F9"/>
+          </a:solidFill>
+          <a:ln>
+            <a:noFill/>
+          </a:ln>
+          <a:effectLst/>
+        </p:spPr>
+        <p:style>
+          <a:lnRef idx="1">
+            <a:schemeClr val="accent1"/>
+          </a:lnRef>
+          <a:fillRef idx="3">
+            <a:schemeClr val="accent1"/>
+          </a:fillRef>
+          <a:effectRef idx="2">
+            <a:schemeClr val="accent1"/>
+          </a:effectRef>
+          <a:fontRef idx="minor">
+            <a:schemeClr val="lt1"/>
+          </a:fontRef>
+        </p:style>
+        <p:txBody>
+          <a:bodyPr rtlCol="0" anchor="ctr"/>
+          <a:lstStyle/>
+          <a:p>
+            <a:pPr algn="ctr"/>
+          </a:p>
+        </p:txBody>
+      </p:sp>
+      <p:sp>
+        <p:nvSpPr>
+          <p:cNvPr id="80" name="TextBox 79"/>
+          <p:cNvSpPr txBox="1"/>
+          <p:nvPr/>
+        </p:nvSpPr>
+        <p:spPr>
+          <a:xfrm>
+            <a:off x="7808986" y="5900928"/>
+            <a:ext cx="1432534" cy="341376"/>
+          </a:xfrm>
+          <a:prstGeom prst="rect">
+            <a:avLst/>
+          </a:prstGeom>
+          <a:noFill/>
+        </p:spPr>
+        <p:txBody>
+          <a:bodyPr wrap="square" anchor="ctr" lIns="0" rIns="0" tIns="0" bIns="0">
+            <a:spAutoFit/>
+          </a:bodyPr>
+          <a:lstStyle/>
+          <a:p>
+            <a:pPr algn="r">
+              <a:lnSpc>
+                <a:spcPct val="110000"/>
+              </a:lnSpc>
+              <a:spcAft>
+                <a:spcPts val="0"/>
+              </a:spcAft>
+            </a:pPr>
+            <a:r>
+              <a:rPr sz="1000" b="0" i="0">
+                <a:solidFill>
+                  <a:srgbClr val="556A83"/>
+                </a:solidFill>
+                <a:latin typeface="Arial"/>
+              </a:rPr>
+              <a:t>5%</a:t>
+            </a:r>
+          </a:p>
+        </p:txBody>
+      </p:sp>
+      <p:sp>
+        <p:nvSpPr>
+          <p:cNvPr id="81" name="Rectangle 80"/>
+          <p:cNvSpPr/>
+          <p:nvPr/>
+        </p:nvSpPr>
+        <p:spPr>
+          <a:xfrm>
+            <a:off x="438922" y="6242304"/>
+            <a:ext cx="2560384" cy="341376"/>
+          </a:xfrm>
+          <a:prstGeom prst="rect">
+            <a:avLst/>
+          </a:prstGeom>
+          <a:solidFill>
+            <a:srgbClr val="FFFFFF"/>
+          </a:solidFill>
+          <a:ln>
+            <a:noFill/>
+          </a:ln>
+          <a:effectLst/>
+        </p:spPr>
+        <p:style>
+          <a:lnRef idx="1">
+            <a:schemeClr val="accent1"/>
+          </a:lnRef>
+          <a:fillRef idx="3">
+            <a:schemeClr val="accent1"/>
+          </a:fillRef>
+          <a:effectRef idx="2">
+            <a:schemeClr val="accent1"/>
+          </a:effectRef>
+          <a:fontRef idx="minor">
+            <a:schemeClr val="lt1"/>
+          </a:fontRef>
+        </p:style>
+        <p:txBody>
+          <a:bodyPr rtlCol="0" anchor="ctr"/>
+          <a:lstStyle/>
+          <a:p>
+            <a:pPr algn="ctr"/>
+          </a:p>
+        </p:txBody>
+      </p:sp>
+      <p:sp>
+        <p:nvSpPr>
+          <p:cNvPr id="82" name="TextBox 81"/>
+          <p:cNvSpPr txBox="1"/>
+          <p:nvPr/>
+        </p:nvSpPr>
+        <p:spPr>
+          <a:xfrm>
+            <a:off x="526707" y="6242304"/>
+            <a:ext cx="2414076" cy="341376"/>
+          </a:xfrm>
+          <a:prstGeom prst="rect">
+            <a:avLst/>
+          </a:prstGeom>
+          <a:noFill/>
+        </p:spPr>
+        <p:txBody>
+          <a:bodyPr wrap="square" anchor="ctr" lIns="0" rIns="0" tIns="0" bIns="0">
+            <a:spAutoFit/>
+          </a:bodyPr>
+          <a:lstStyle/>
+          <a:p>
+            <a:pPr algn="l">
+              <a:lnSpc>
+                <a:spcPct val="110000"/>
+              </a:lnSpc>
+              <a:spcAft>
+                <a:spcPts val="0"/>
+              </a:spcAft>
+            </a:pPr>
+            <a:r>
+              <a:rPr sz="919" b="1" i="0">
+                <a:solidFill>
+                  <a:srgbClr val="152130"/>
+                </a:solidFill>
+                <a:latin typeface="Arial"/>
+              </a:rPr>
+              <a:t>Chance of a loss — Athanase</a:t>
+            </a:r>
+          </a:p>
+        </p:txBody>
+      </p:sp>
+      <p:sp>
+        <p:nvSpPr>
+          <p:cNvPr id="83" name="Rectangle 82"/>
+          <p:cNvSpPr/>
+          <p:nvPr/>
+        </p:nvSpPr>
+        <p:spPr>
+          <a:xfrm>
+            <a:off x="2999307" y="6242304"/>
+            <a:ext cx="1578841" cy="341376"/>
+          </a:xfrm>
+          <a:prstGeom prst="rect">
+            <a:avLst/>
+          </a:prstGeom>
+          <a:solidFill>
+            <a:srgbClr val="FFFFFF"/>
+          </a:solidFill>
+          <a:ln>
+            <a:noFill/>
+          </a:ln>
+          <a:effectLst/>
+        </p:spPr>
+        <p:style>
+          <a:lnRef idx="1">
+            <a:schemeClr val="accent1"/>
+          </a:lnRef>
+          <a:fillRef idx="3">
+            <a:schemeClr val="accent1"/>
+          </a:fillRef>
+          <a:effectRef idx="2">
+            <a:schemeClr val="accent1"/>
+          </a:effectRef>
+          <a:fontRef idx="minor">
+            <a:schemeClr val="lt1"/>
+          </a:fontRef>
+        </p:style>
+        <p:txBody>
+          <a:bodyPr rtlCol="0" anchor="ctr"/>
+          <a:lstStyle/>
+          <a:p>
+            <a:pPr algn="ctr"/>
+          </a:p>
+        </p:txBody>
+      </p:sp>
+      <p:sp>
+        <p:nvSpPr>
+          <p:cNvPr id="84" name="TextBox 83"/>
+          <p:cNvSpPr txBox="1"/>
+          <p:nvPr/>
+        </p:nvSpPr>
+        <p:spPr>
+          <a:xfrm>
+            <a:off x="3072460" y="6242304"/>
+            <a:ext cx="1432534" cy="341376"/>
+          </a:xfrm>
+          <a:prstGeom prst="rect">
+            <a:avLst/>
+          </a:prstGeom>
+          <a:noFill/>
+        </p:spPr>
+        <p:txBody>
+          <a:bodyPr wrap="square" anchor="ctr" lIns="0" rIns="0" tIns="0" bIns="0">
+            <a:spAutoFit/>
+          </a:bodyPr>
+          <a:lstStyle/>
+          <a:p>
+            <a:pPr algn="r">
+              <a:lnSpc>
+                <a:spcPct val="110000"/>
+              </a:lnSpc>
+              <a:spcAft>
+                <a:spcPts val="0"/>
+              </a:spcAft>
+            </a:pPr>
+            <a:r>
+              <a:rPr sz="1000" b="1" i="0">
+                <a:solidFill>
+                  <a:srgbClr val="314359"/>
+                </a:solidFill>
+                <a:latin typeface="Arial"/>
+              </a:rPr>
+              <a:t>1%</a:t>
+            </a:r>
+          </a:p>
+        </p:txBody>
+      </p:sp>
+      <p:sp>
+        <p:nvSpPr>
+          <p:cNvPr id="85" name="Rectangle 84"/>
+          <p:cNvSpPr/>
+          <p:nvPr/>
+        </p:nvSpPr>
+        <p:spPr>
+          <a:xfrm>
+            <a:off x="4578148" y="6242304"/>
+            <a:ext cx="1578841" cy="341376"/>
+          </a:xfrm>
+          <a:prstGeom prst="rect">
+            <a:avLst/>
+          </a:prstGeom>
+          <a:solidFill>
+            <a:srgbClr val="FFFFFF"/>
+          </a:solidFill>
+          <a:ln>
+            <a:noFill/>
+          </a:ln>
+          <a:effectLst/>
+        </p:spPr>
+        <p:style>
+          <a:lnRef idx="1">
+            <a:schemeClr val="accent1"/>
+          </a:lnRef>
+          <a:fillRef idx="3">
+            <a:schemeClr val="accent1"/>
+          </a:fillRef>
+          <a:effectRef idx="2">
+            <a:schemeClr val="accent1"/>
+          </a:effectRef>
+          <a:fontRef idx="minor">
+            <a:schemeClr val="lt1"/>
+          </a:fontRef>
+        </p:style>
+        <p:txBody>
+          <a:bodyPr rtlCol="0" anchor="ctr"/>
+          <a:lstStyle/>
+          <a:p>
+            <a:pPr algn="ctr"/>
+          </a:p>
+        </p:txBody>
+      </p:sp>
+      <p:sp>
+        <p:nvSpPr>
+          <p:cNvPr id="86" name="TextBox 85"/>
+          <p:cNvSpPr txBox="1"/>
+          <p:nvPr/>
+        </p:nvSpPr>
+        <p:spPr>
+          <a:xfrm>
+            <a:off x="4651302" y="6242304"/>
+            <a:ext cx="1432534" cy="341376"/>
+          </a:xfrm>
+          <a:prstGeom prst="rect">
+            <a:avLst/>
+          </a:prstGeom>
+          <a:noFill/>
+        </p:spPr>
+        <p:txBody>
+          <a:bodyPr wrap="square" anchor="ctr" lIns="0" rIns="0" tIns="0" bIns="0">
+            <a:spAutoFit/>
+          </a:bodyPr>
+          <a:lstStyle/>
+          <a:p>
+            <a:pPr algn="r">
+              <a:lnSpc>
+                <a:spcPct val="110000"/>
+              </a:lnSpc>
+              <a:spcAft>
+                <a:spcPts val="0"/>
+              </a:spcAft>
+            </a:pPr>
+            <a:r>
+              <a:rPr sz="1000" b="1" i="0">
+                <a:solidFill>
+                  <a:srgbClr val="314359"/>
+                </a:solidFill>
+                <a:latin typeface="Arial"/>
+              </a:rPr>
+              <a:t>0%</a:t>
+            </a:r>
+          </a:p>
+        </p:txBody>
+      </p:sp>
+      <p:sp>
+        <p:nvSpPr>
+          <p:cNvPr id="87" name="Rectangle 86"/>
+          <p:cNvSpPr/>
+          <p:nvPr/>
+        </p:nvSpPr>
+        <p:spPr>
+          <a:xfrm>
+            <a:off x="6156990" y="6242304"/>
+            <a:ext cx="1578841" cy="341376"/>
+          </a:xfrm>
+          <a:prstGeom prst="rect">
+            <a:avLst/>
+          </a:prstGeom>
+          <a:solidFill>
+            <a:srgbClr val="FFFFFF"/>
+          </a:solidFill>
+          <a:ln>
+            <a:noFill/>
+          </a:ln>
+          <a:effectLst/>
+        </p:spPr>
+        <p:style>
+          <a:lnRef idx="1">
+            <a:schemeClr val="accent1"/>
+          </a:lnRef>
+          <a:fillRef idx="3">
+            <a:schemeClr val="accent1"/>
+          </a:fillRef>
+          <a:effectRef idx="2">
+            <a:schemeClr val="accent1"/>
+          </a:effectRef>
+          <a:fontRef idx="minor">
+            <a:schemeClr val="lt1"/>
+          </a:fontRef>
+        </p:style>
+        <p:txBody>
+          <a:bodyPr rtlCol="0" anchor="ctr"/>
+          <a:lstStyle/>
+          <a:p>
+            <a:pPr algn="ctr"/>
+          </a:p>
+        </p:txBody>
+      </p:sp>
+      <p:sp>
+        <p:nvSpPr>
+          <p:cNvPr id="88" name="TextBox 87"/>
+          <p:cNvSpPr txBox="1"/>
+          <p:nvPr/>
+        </p:nvSpPr>
+        <p:spPr>
+          <a:xfrm>
+            <a:off x="6230144" y="6242304"/>
+            <a:ext cx="1432534" cy="341376"/>
+          </a:xfrm>
+          <a:prstGeom prst="rect">
+            <a:avLst/>
+          </a:prstGeom>
+          <a:noFill/>
+        </p:spPr>
+        <p:txBody>
+          <a:bodyPr wrap="square" anchor="ctr" lIns="0" rIns="0" tIns="0" bIns="0">
+            <a:spAutoFit/>
+          </a:bodyPr>
+          <a:lstStyle/>
+          <a:p>
+            <a:pPr algn="r">
+              <a:lnSpc>
+                <a:spcPct val="110000"/>
+              </a:lnSpc>
+              <a:spcAft>
+                <a:spcPts val="0"/>
+              </a:spcAft>
+            </a:pPr>
+            <a:r>
+              <a:rPr sz="1000" b="1" i="0">
+                <a:solidFill>
+                  <a:srgbClr val="314359"/>
+                </a:solidFill>
+                <a:latin typeface="Arial"/>
+              </a:rPr>
+              <a:t>0%</a:t>
+            </a:r>
+          </a:p>
+        </p:txBody>
+      </p:sp>
+      <p:sp>
+        <p:nvSpPr>
+          <p:cNvPr id="89" name="Rectangle 88"/>
+          <p:cNvSpPr/>
+          <p:nvPr/>
+        </p:nvSpPr>
+        <p:spPr>
+          <a:xfrm>
+            <a:off x="7735832" y="6242304"/>
+            <a:ext cx="1578841" cy="341376"/>
+          </a:xfrm>
+          <a:prstGeom prst="rect">
+            <a:avLst/>
+          </a:prstGeom>
+          <a:solidFill>
+            <a:srgbClr val="FFFFFF"/>
+          </a:solidFill>
+          <a:ln>
+            <a:noFill/>
+          </a:ln>
+          <a:effectLst/>
+        </p:spPr>
+        <p:style>
+          <a:lnRef idx="1">
+            <a:schemeClr val="accent1"/>
+          </a:lnRef>
+          <a:fillRef idx="3">
+            <a:schemeClr val="accent1"/>
+          </a:fillRef>
+          <a:effectRef idx="2">
+            <a:schemeClr val="accent1"/>
+          </a:effectRef>
+          <a:fontRef idx="minor">
+            <a:schemeClr val="lt1"/>
+          </a:fontRef>
+        </p:style>
+        <p:txBody>
+          <a:bodyPr rtlCol="0" anchor="ctr"/>
+          <a:lstStyle/>
+          <a:p>
+            <a:pPr algn="ctr"/>
+          </a:p>
+        </p:txBody>
+      </p:sp>
+      <p:sp>
+        <p:nvSpPr>
+          <p:cNvPr id="90" name="TextBox 89"/>
+          <p:cNvSpPr txBox="1"/>
+          <p:nvPr/>
+        </p:nvSpPr>
+        <p:spPr>
+          <a:xfrm>
+            <a:off x="7808986" y="6242304"/>
+            <a:ext cx="1432534" cy="341376"/>
+          </a:xfrm>
+          <a:prstGeom prst="rect">
+            <a:avLst/>
+          </a:prstGeom>
+          <a:noFill/>
+        </p:spPr>
+        <p:txBody>
+          <a:bodyPr wrap="square" anchor="ctr" lIns="0" rIns="0" tIns="0" bIns="0">
+            <a:spAutoFit/>
+          </a:bodyPr>
+          <a:lstStyle/>
+          <a:p>
+            <a:pPr algn="r">
+              <a:lnSpc>
+                <a:spcPct val="110000"/>
+              </a:lnSpc>
+              <a:spcAft>
+                <a:spcPts val="0"/>
+              </a:spcAft>
+            </a:pPr>
+            <a:r>
+              <a:rPr sz="1000" b="1" i="0">
+                <a:solidFill>
+                  <a:srgbClr val="314359"/>
+                </a:solidFill>
+                <a:latin typeface="Arial"/>
+              </a:rPr>
+              <a:t>0%</a:t>
+            </a:r>
+          </a:p>
+        </p:txBody>
+      </p:sp>
+      <p:sp>
+        <p:nvSpPr>
+          <p:cNvPr id="91" name="Rectangle 90"/>
+          <p:cNvSpPr/>
+          <p:nvPr/>
+        </p:nvSpPr>
+        <p:spPr>
+          <a:xfrm>
+            <a:off x="438922" y="6661708"/>
+            <a:ext cx="8873559" cy="370636"/>
+          </a:xfrm>
+          <a:prstGeom prst="rect">
+            <a:avLst/>
+          </a:prstGeom>
+          <a:solidFill>
+            <a:srgbClr val="152130"/>
+          </a:solidFill>
+          <a:ln>
+            <a:noFill/>
+          </a:ln>
+          <a:effectLst/>
+        </p:spPr>
+        <p:style>
+          <a:lnRef idx="1">
+            <a:schemeClr val="accent1"/>
+          </a:lnRef>
+          <a:fillRef idx="3">
+            <a:schemeClr val="accent1"/>
+          </a:fillRef>
+          <a:effectRef idx="2">
+            <a:schemeClr val="accent1"/>
+          </a:effectRef>
+          <a:fontRef idx="minor">
+            <a:schemeClr val="lt1"/>
+          </a:fontRef>
+        </p:style>
+        <p:txBody>
+          <a:bodyPr rtlCol="0" anchor="ctr"/>
+          <a:lstStyle/>
+          <a:p>
+            <a:pPr algn="ctr"/>
+          </a:p>
+        </p:txBody>
+      </p:sp>
+      <p:sp>
+        <p:nvSpPr>
+          <p:cNvPr id="92" name="TextBox 91"/>
+          <p:cNvSpPr txBox="1"/>
+          <p:nvPr/>
+        </p:nvSpPr>
+        <p:spPr>
+          <a:xfrm>
+            <a:off x="570599" y="6661708"/>
+            <a:ext cx="8632151" cy="370636"/>
+          </a:xfrm>
+          <a:prstGeom prst="rect">
+            <a:avLst/>
+          </a:prstGeom>
+          <a:noFill/>
+        </p:spPr>
+        <p:txBody>
+          <a:bodyPr wrap="square" anchor="ctr" lIns="0" rIns="0" tIns="0" bIns="0">
+            <a:spAutoFit/>
+          </a:bodyPr>
+          <a:lstStyle/>
+          <a:p>
+            <a:pPr algn="l">
+              <a:lnSpc>
+                <a:spcPct val="110000"/>
+              </a:lnSpc>
+              <a:spcAft>
+                <a:spcPts val="0"/>
+              </a:spcAft>
+            </a:pPr>
+            <a:r>
+              <a:rPr sz="919" b="0" i="1">
+                <a:solidFill>
+                  <a:srgbClr val="FFFFFF"/>
+                </a:solidFill>
+                <a:latin typeface="Arial"/>
+              </a:rPr>
+              <a:t>Even in the adverse case, Athanase’s lower downside volatility leaves an investor ahead at every horizon — and the gap widens with time.</a:t>
+            </a:r>
+          </a:p>
+        </p:txBody>
+      </p:sp>
+      <p:sp>
+        <p:nvSpPr>
+          <p:cNvPr id="93" name="TextBox 92"/>
+          <p:cNvSpPr txBox="1"/>
+          <p:nvPr/>
+        </p:nvSpPr>
+        <p:spPr>
+          <a:xfrm>
+            <a:off x="438922" y="7110374"/>
+            <a:ext cx="9217382" cy="390144"/>
+          </a:xfrm>
+          <a:prstGeom prst="rect">
+            <a:avLst/>
+          </a:prstGeom>
+          <a:noFill/>
+        </p:spPr>
+        <p:txBody>
+          <a:bodyPr wrap="square" anchor="t" lIns="0" rIns="0" tIns="0" bIns="0">
+            <a:spAutoFit/>
+          </a:bodyPr>
+          <a:lstStyle/>
+          <a:p>
+            <a:pPr algn="l">
+              <a:lnSpc>
+                <a:spcPct val="110000"/>
+              </a:lnSpc>
+              <a:spcAft>
+                <a:spcPts val="0"/>
+              </a:spcAft>
+            </a:pPr>
+            <a:r>
+              <a:rPr sz="600" b="0" i="0">
+                <a:solidFill>
+                  <a:srgbClr val="556A83"/>
+                </a:solidFill>
+                <a:latin typeface="Arial"/>
+              </a:rPr>
+              <a:t>Source: monthly net returns, 235 months (2006–2025). *Adverse case = one downside-deviation outcome (≈1-in-6), narrowing with horizon as dd/√T. Illustrative; past performance is not indicative of future results.</a:t>
             </a:r>
           </a:p>
         </p:txBody>
@@ -35865,7 +39576,7 @@
             <a:avLst/>
           </a:prstGeom>
           <a:solidFill>
-            <a:srgbClr val="152130"/>
+            <a:srgbClr val="FFFFFF"/>
           </a:solidFill>
           <a:ln>
             <a:noFill/>
@@ -35896,7 +39607,7 @@
       </p:sp>
       <p:pic>
         <p:nvPicPr>
-          <p:cNvPr id="3" name="Picture 2" descr="logo_white.png"/>
+          <p:cNvPr id="3" name="Picture 2" descr="mark_dark.png"/>
           <p:cNvPicPr>
             <a:picLocks noChangeAspect="1"/>
           </p:cNvPicPr>
@@ -35910,8 +39621,8 @@
         </p:blipFill>
         <p:spPr>
           <a:xfrm>
-            <a:off x="438922" y="536448"/>
-            <a:ext cx="1768098" cy="380399"/>
+            <a:off x="402346" y="234086"/>
+            <a:ext cx="224012" cy="190199"/>
           </a:xfrm>
           <a:prstGeom prst="rect">
             <a:avLst/>
@@ -35920,20 +39631,104 @@
       </p:pic>
       <p:sp>
         <p:nvSpPr>
-          <p:cNvPr id="4" name="Rectangle 3"/>
+          <p:cNvPr id="4" name="TextBox 3"/>
+          <p:cNvSpPr txBox="1"/>
+          <p:nvPr/>
+        </p:nvSpPr>
+        <p:spPr>
+          <a:xfrm>
+            <a:off x="716907" y="263347"/>
+            <a:ext cx="5120768" cy="292608"/>
+          </a:xfrm>
+          <a:prstGeom prst="rect">
+            <a:avLst/>
+          </a:prstGeom>
+          <a:noFill/>
+        </p:spPr>
+        <p:txBody>
+          <a:bodyPr wrap="square" anchor="t" lIns="0" rIns="0" tIns="0" bIns="0">
+            <a:spAutoFit/>
+          </a:bodyPr>
+          <a:lstStyle/>
+          <a:p>
+            <a:pPr algn="l">
+              <a:lnSpc>
+                <a:spcPct val="110000"/>
+              </a:lnSpc>
+              <a:spcAft>
+                <a:spcPts val="0"/>
+              </a:spcAft>
+            </a:pPr>
+            <a:r>
+              <a:rPr sz="880" b="0" i="0">
+                <a:solidFill>
+                  <a:srgbClr val="556A83"/>
+                </a:solidFill>
+                <a:latin typeface="Arial"/>
+              </a:rPr>
+              <a:t>Risk-Adjusted Outcomes</a:t>
+            </a:r>
+          </a:p>
+        </p:txBody>
+      </p:sp>
+      <p:sp>
+        <p:nvSpPr>
+          <p:cNvPr id="5" name="TextBox 4"/>
+          <p:cNvSpPr txBox="1"/>
+          <p:nvPr/>
+        </p:nvSpPr>
+        <p:spPr>
+          <a:xfrm>
+            <a:off x="7242229" y="263347"/>
+            <a:ext cx="2084884" cy="292608"/>
+          </a:xfrm>
+          <a:prstGeom prst="rect">
+            <a:avLst/>
+          </a:prstGeom>
+          <a:noFill/>
+        </p:spPr>
+        <p:txBody>
+          <a:bodyPr wrap="square" anchor="t" lIns="0" rIns="0" tIns="0" bIns="0">
+            <a:spAutoFit/>
+          </a:bodyPr>
+          <a:lstStyle/>
+          <a:p>
+            <a:pPr algn="r">
+              <a:lnSpc>
+                <a:spcPct val="110000"/>
+              </a:lnSpc>
+              <a:spcAft>
+                <a:spcPts val="0"/>
+              </a:spcAft>
+            </a:pPr>
+            <a:r>
+              <a:rPr sz="880" b="1" i="0">
+                <a:solidFill>
+                  <a:srgbClr val="556A83"/>
+                </a:solidFill>
+                <a:latin typeface="Arial"/>
+              </a:rPr>
+              <a:t>Figure 6</a:t>
+            </a:r>
+          </a:p>
+        </p:txBody>
+      </p:sp>
+      <p:sp>
+        <p:nvSpPr>
+          <p:cNvPr id="6" name="Rectangle 5"/>
           <p:cNvSpPr/>
           <p:nvPr/>
         </p:nvSpPr>
         <p:spPr>
           <a:xfrm>
-            <a:off x="0" y="2633472"/>
-            <a:ext cx="365769" cy="29802"/>
+            <a:off x="0" y="604723"/>
+            <a:ext cx="9753600" cy="1414272"/>
           </a:xfrm>
           <a:prstGeom prst="rect">
             <a:avLst/>
           </a:prstGeom>
           <a:solidFill>
-            <a:srgbClr val="556A83"/>
+            <a:srgbClr val="F6F7F9"/>
           </a:solidFill>
           <a:ln>
             <a:noFill/>
@@ -35964,14 +39759,930 @@
       </p:sp>
       <p:sp>
         <p:nvSpPr>
+          <p:cNvPr id="7" name="TextBox 6"/>
+          <p:cNvSpPr txBox="1"/>
+          <p:nvPr/>
+        </p:nvSpPr>
+        <p:spPr>
+          <a:xfrm>
+            <a:off x="438922" y="721766"/>
+            <a:ext cx="8851613" cy="829056"/>
+          </a:xfrm>
+          <a:prstGeom prst="rect">
+            <a:avLst/>
+          </a:prstGeom>
+          <a:noFill/>
+        </p:spPr>
+        <p:txBody>
+          <a:bodyPr wrap="square" anchor="t" lIns="0" rIns="0" tIns="0" bIns="0">
+            <a:spAutoFit/>
+          </a:bodyPr>
+          <a:lstStyle/>
+          <a:p>
+            <a:pPr algn="l">
+              <a:lnSpc>
+                <a:spcPct val="110000"/>
+              </a:lnSpc>
+              <a:spcAft>
+                <a:spcPts val="200"/>
+              </a:spcAft>
+            </a:pPr>
+            <a:r>
+              <a:rPr sz="2400" b="0" i="0" spc="-90">
+                <a:solidFill>
+                  <a:srgbClr val="314359"/>
+                </a:solidFill>
+                <a:latin typeface="Times New Roman"/>
+              </a:rPr>
+              <a:t>2.19 A complement to global equities, not a duplicate</a:t>
+            </a:r>
+          </a:p>
+        </p:txBody>
+      </p:sp>
+      <p:sp>
+        <p:nvSpPr>
+          <p:cNvPr id="8" name="TextBox 7"/>
+          <p:cNvSpPr txBox="1"/>
+          <p:nvPr/>
+        </p:nvSpPr>
+        <p:spPr>
+          <a:xfrm>
+            <a:off x="453553" y="1511808"/>
+            <a:ext cx="8705305" cy="487680"/>
+          </a:xfrm>
+          <a:prstGeom prst="rect">
+            <a:avLst/>
+          </a:prstGeom>
+          <a:noFill/>
+        </p:spPr>
+        <p:txBody>
+          <a:bodyPr wrap="square" anchor="t" lIns="0" rIns="0" tIns="0" bIns="0">
+            <a:spAutoFit/>
+          </a:bodyPr>
+          <a:lstStyle/>
+          <a:p>
+            <a:pPr algn="l">
+              <a:lnSpc>
+                <a:spcPct val="110000"/>
+              </a:lnSpc>
+              <a:spcAft>
+                <a:spcPts val="0"/>
+              </a:spcAft>
+            </a:pPr>
+            <a:r>
+              <a:rPr sz="1040" b="0" i="1">
+                <a:solidFill>
+                  <a:srgbClr val="556A83"/>
+                </a:solidFill>
+                <a:latin typeface="Arial"/>
+              </a:rPr>
+              <a:t>What a global-equity holder asks of a new manager: do you keep up in rallies, lose less in selloffs, and add something the index can’t?</a:t>
+            </a:r>
+          </a:p>
+        </p:txBody>
+      </p:sp>
+      <p:sp>
+        <p:nvSpPr>
+          <p:cNvPr id="9" name="TextBox 8"/>
+          <p:cNvSpPr txBox="1"/>
+          <p:nvPr/>
+        </p:nvSpPr>
+        <p:spPr>
+          <a:xfrm>
+            <a:off x="6583844" y="6876288"/>
+            <a:ext cx="2926153" cy="292608"/>
+          </a:xfrm>
+          <a:prstGeom prst="rect">
+            <a:avLst/>
+          </a:prstGeom>
+          <a:noFill/>
+        </p:spPr>
+        <p:txBody>
+          <a:bodyPr wrap="square" anchor="t" lIns="0" rIns="0" tIns="0" bIns="0">
+            <a:spAutoFit/>
+          </a:bodyPr>
+          <a:lstStyle/>
+          <a:p>
+            <a:pPr algn="r">
+              <a:lnSpc>
+                <a:spcPct val="110000"/>
+              </a:lnSpc>
+              <a:spcAft>
+                <a:spcPts val="0"/>
+              </a:spcAft>
+            </a:pPr>
+            <a:r>
+              <a:rPr sz="680" b="0" i="0">
+                <a:solidFill>
+                  <a:srgbClr val="556A83"/>
+                </a:solidFill>
+                <a:latin typeface="Arial"/>
+              </a:rPr>
+              <a:t>Strictly confidential          25</a:t>
+            </a:r>
+          </a:p>
+        </p:txBody>
+      </p:sp>
+      <p:pic>
+        <p:nvPicPr>
+          <p:cNvPr id="10" name="Picture 9" descr="mc_capture.png"/>
+          <p:cNvPicPr>
+            <a:picLocks noChangeAspect="1"/>
+          </p:cNvPicPr>
+          <p:nvPr/>
+        </p:nvPicPr>
+        <p:blipFill>
+          <a:blip r:embed="rId3"/>
+          <a:stretch>
+            <a:fillRect/>
+          </a:stretch>
+        </p:blipFill>
+        <p:spPr>
+          <a:xfrm>
+            <a:off x="402346" y="2194560"/>
+            <a:ext cx="3627489" cy="2999306"/>
+          </a:xfrm>
+          <a:prstGeom prst="rect">
+            <a:avLst/>
+          </a:prstGeom>
+        </p:spPr>
+      </p:pic>
+      <p:sp>
+        <p:nvSpPr>
+          <p:cNvPr id="11" name="Rectangle 10"/>
+          <p:cNvSpPr/>
+          <p:nvPr/>
+        </p:nvSpPr>
+        <p:spPr>
+          <a:xfrm>
+            <a:off x="4791575" y="2243328"/>
+            <a:ext cx="4535537" cy="1170432"/>
+          </a:xfrm>
+          <a:prstGeom prst="rect">
+            <a:avLst/>
+          </a:prstGeom>
+          <a:solidFill>
+            <a:srgbClr val="F6F7F9"/>
+          </a:solidFill>
+          <a:ln>
+            <a:noFill/>
+          </a:ln>
+          <a:effectLst/>
+        </p:spPr>
+        <p:style>
+          <a:lnRef idx="1">
+            <a:schemeClr val="accent1"/>
+          </a:lnRef>
+          <a:fillRef idx="3">
+            <a:schemeClr val="accent1"/>
+          </a:fillRef>
+          <a:effectRef idx="2">
+            <a:schemeClr val="accent1"/>
+          </a:effectRef>
+          <a:fontRef idx="minor">
+            <a:schemeClr val="lt1"/>
+          </a:fontRef>
+        </p:style>
+        <p:txBody>
+          <a:bodyPr rtlCol="0" anchor="ctr"/>
+          <a:lstStyle/>
+          <a:p>
+            <a:pPr algn="ctr"/>
+          </a:p>
+        </p:txBody>
+      </p:sp>
+      <p:sp>
+        <p:nvSpPr>
+          <p:cNvPr id="12" name="TextBox 11"/>
+          <p:cNvSpPr txBox="1"/>
+          <p:nvPr/>
+        </p:nvSpPr>
+        <p:spPr>
+          <a:xfrm>
+            <a:off x="4952514" y="2360371"/>
+            <a:ext cx="4213660" cy="243840"/>
+          </a:xfrm>
+          <a:prstGeom prst="rect">
+            <a:avLst/>
+          </a:prstGeom>
+          <a:noFill/>
+        </p:spPr>
+        <p:txBody>
+          <a:bodyPr wrap="square" anchor="t" lIns="0" rIns="0" tIns="0" bIns="0">
+            <a:spAutoFit/>
+          </a:bodyPr>
+          <a:lstStyle/>
+          <a:p>
+            <a:pPr algn="l">
+              <a:lnSpc>
+                <a:spcPct val="110000"/>
+              </a:lnSpc>
+              <a:spcAft>
+                <a:spcPts val="0"/>
+              </a:spcAft>
+            </a:pPr>
+            <a:r>
+              <a:rPr sz="840" b="1" i="0">
+                <a:solidFill>
+                  <a:srgbClr val="314359"/>
+                </a:solidFill>
+                <a:latin typeface="Arial"/>
+              </a:rPr>
+              <a:t>CAPTURE ASYMMETRY</a:t>
+            </a:r>
+          </a:p>
+        </p:txBody>
+      </p:sp>
+      <p:sp>
+        <p:nvSpPr>
+          <p:cNvPr id="13" name="TextBox 12"/>
+          <p:cNvSpPr txBox="1"/>
+          <p:nvPr/>
+        </p:nvSpPr>
+        <p:spPr>
+          <a:xfrm>
+            <a:off x="4952514" y="2594457"/>
+            <a:ext cx="4213660" cy="341376"/>
+          </a:xfrm>
+          <a:prstGeom prst="rect">
+            <a:avLst/>
+          </a:prstGeom>
+          <a:noFill/>
+        </p:spPr>
+        <p:txBody>
+          <a:bodyPr wrap="square" anchor="t" lIns="0" rIns="0" tIns="0" bIns="0">
+            <a:spAutoFit/>
+          </a:bodyPr>
+          <a:lstStyle/>
+          <a:p>
+            <a:pPr algn="l">
+              <a:lnSpc>
+                <a:spcPct val="110000"/>
+              </a:lnSpc>
+              <a:spcAft>
+                <a:spcPts val="0"/>
+              </a:spcAft>
+            </a:pPr>
+            <a:r>
+              <a:rPr sz="1360" b="1" i="0">
+                <a:solidFill>
+                  <a:srgbClr val="314359"/>
+                </a:solidFill>
+                <a:latin typeface="Times New Roman"/>
+              </a:rPr>
+              <a:t>93% up  /  43% down</a:t>
+            </a:r>
+          </a:p>
+        </p:txBody>
+      </p:sp>
+      <p:sp>
+        <p:nvSpPr>
+          <p:cNvPr id="14" name="TextBox 13"/>
+          <p:cNvSpPr txBox="1"/>
+          <p:nvPr/>
+        </p:nvSpPr>
+        <p:spPr>
+          <a:xfrm>
+            <a:off x="4952514" y="2965094"/>
+            <a:ext cx="4213660" cy="438912"/>
+          </a:xfrm>
+          <a:prstGeom prst="rect">
+            <a:avLst/>
+          </a:prstGeom>
+          <a:noFill/>
+        </p:spPr>
+        <p:txBody>
+          <a:bodyPr wrap="square" anchor="t" lIns="0" rIns="0" tIns="0" bIns="0">
+            <a:spAutoFit/>
+          </a:bodyPr>
+          <a:lstStyle/>
+          <a:p>
+            <a:pPr algn="l">
+              <a:lnSpc>
+                <a:spcPct val="112000"/>
+              </a:lnSpc>
+              <a:spcAft>
+                <a:spcPts val="0"/>
+              </a:spcAft>
+            </a:pPr>
+            <a:r>
+              <a:rPr sz="840" b="0" i="0">
+                <a:solidFill>
+                  <a:srgbClr val="0E1620"/>
+                </a:solidFill>
+                <a:latin typeface="Arial"/>
+              </a:rPr>
+              <a:t>Keeps pace with rallies but takes less than half of selloffs — the essence of the edge.</a:t>
+            </a:r>
+          </a:p>
+        </p:txBody>
+      </p:sp>
+      <p:sp>
+        <p:nvSpPr>
+          <p:cNvPr id="15" name="Rectangle 14"/>
+          <p:cNvSpPr/>
+          <p:nvPr/>
+        </p:nvSpPr>
+        <p:spPr>
+          <a:xfrm>
+            <a:off x="4791575" y="3530803"/>
+            <a:ext cx="4535537" cy="1170432"/>
+          </a:xfrm>
+          <a:prstGeom prst="rect">
+            <a:avLst/>
+          </a:prstGeom>
+          <a:solidFill>
+            <a:srgbClr val="F6F7F9"/>
+          </a:solidFill>
+          <a:ln>
+            <a:noFill/>
+          </a:ln>
+          <a:effectLst/>
+        </p:spPr>
+        <p:style>
+          <a:lnRef idx="1">
+            <a:schemeClr val="accent1"/>
+          </a:lnRef>
+          <a:fillRef idx="3">
+            <a:schemeClr val="accent1"/>
+          </a:fillRef>
+          <a:effectRef idx="2">
+            <a:schemeClr val="accent1"/>
+          </a:effectRef>
+          <a:fontRef idx="minor">
+            <a:schemeClr val="lt1"/>
+          </a:fontRef>
+        </p:style>
+        <p:txBody>
+          <a:bodyPr rtlCol="0" anchor="ctr"/>
+          <a:lstStyle/>
+          <a:p>
+            <a:pPr algn="ctr"/>
+          </a:p>
+        </p:txBody>
+      </p:sp>
+      <p:sp>
+        <p:nvSpPr>
+          <p:cNvPr id="16" name="TextBox 15"/>
+          <p:cNvSpPr txBox="1"/>
+          <p:nvPr/>
+        </p:nvSpPr>
+        <p:spPr>
+          <a:xfrm>
+            <a:off x="4952514" y="3647846"/>
+            <a:ext cx="4213660" cy="243840"/>
+          </a:xfrm>
+          <a:prstGeom prst="rect">
+            <a:avLst/>
+          </a:prstGeom>
+          <a:noFill/>
+        </p:spPr>
+        <p:txBody>
+          <a:bodyPr wrap="square" anchor="t" lIns="0" rIns="0" tIns="0" bIns="0">
+            <a:spAutoFit/>
+          </a:bodyPr>
+          <a:lstStyle/>
+          <a:p>
+            <a:pPr algn="l">
+              <a:lnSpc>
+                <a:spcPct val="110000"/>
+              </a:lnSpc>
+              <a:spcAft>
+                <a:spcPts val="0"/>
+              </a:spcAft>
+            </a:pPr>
+            <a:r>
+              <a:rPr sz="840" b="1" i="0">
+                <a:solidFill>
+                  <a:srgbClr val="314359"/>
+                </a:solidFill>
+                <a:latin typeface="Arial"/>
+              </a:rPr>
+              <a:t>DIVERSIFICATION</a:t>
+            </a:r>
+          </a:p>
+        </p:txBody>
+      </p:sp>
+      <p:sp>
+        <p:nvSpPr>
+          <p:cNvPr id="17" name="TextBox 16"/>
+          <p:cNvSpPr txBox="1"/>
+          <p:nvPr/>
+        </p:nvSpPr>
+        <p:spPr>
+          <a:xfrm>
+            <a:off x="4952514" y="3881932"/>
+            <a:ext cx="4213660" cy="341376"/>
+          </a:xfrm>
+          <a:prstGeom prst="rect">
+            <a:avLst/>
+          </a:prstGeom>
+          <a:noFill/>
+        </p:spPr>
+        <p:txBody>
+          <a:bodyPr wrap="square" anchor="t" lIns="0" rIns="0" tIns="0" bIns="0">
+            <a:spAutoFit/>
+          </a:bodyPr>
+          <a:lstStyle/>
+          <a:p>
+            <a:pPr algn="l">
+              <a:lnSpc>
+                <a:spcPct val="110000"/>
+              </a:lnSpc>
+              <a:spcAft>
+                <a:spcPts val="0"/>
+              </a:spcAft>
+            </a:pPr>
+            <a:r>
+              <a:rPr sz="1360" b="1" i="0">
+                <a:solidFill>
+                  <a:srgbClr val="314359"/>
+                </a:solidFill>
+                <a:latin typeface="Times New Roman"/>
+              </a:rPr>
+              <a:t>0.44 correlation  ·  0.73 beta</a:t>
+            </a:r>
+          </a:p>
+        </p:txBody>
+      </p:sp>
+      <p:sp>
+        <p:nvSpPr>
+          <p:cNvPr id="18" name="TextBox 17"/>
+          <p:cNvSpPr txBox="1"/>
+          <p:nvPr/>
+        </p:nvSpPr>
+        <p:spPr>
+          <a:xfrm>
+            <a:off x="4952514" y="4252569"/>
+            <a:ext cx="4213660" cy="438912"/>
+          </a:xfrm>
+          <a:prstGeom prst="rect">
+            <a:avLst/>
+          </a:prstGeom>
+          <a:noFill/>
+        </p:spPr>
+        <p:txBody>
+          <a:bodyPr wrap="square" anchor="t" lIns="0" rIns="0" tIns="0" bIns="0">
+            <a:spAutoFit/>
+          </a:bodyPr>
+          <a:lstStyle/>
+          <a:p>
+            <a:pPr algn="l">
+              <a:lnSpc>
+                <a:spcPct val="112000"/>
+              </a:lnSpc>
+              <a:spcAft>
+                <a:spcPts val="0"/>
+              </a:spcAft>
+            </a:pPr>
+            <a:r>
+              <a:rPr sz="840" b="0" i="0">
+                <a:solidFill>
+                  <a:srgbClr val="0E1620"/>
+                </a:solidFill>
+                <a:latin typeface="Arial"/>
+              </a:rPr>
+              <a:t>Low correlation to your existing equity book — a genuine diversifier, not levered beta.</a:t>
+            </a:r>
+          </a:p>
+        </p:txBody>
+      </p:sp>
+      <p:sp>
+        <p:nvSpPr>
+          <p:cNvPr id="19" name="Rectangle 18"/>
+          <p:cNvSpPr/>
+          <p:nvPr/>
+        </p:nvSpPr>
+        <p:spPr>
+          <a:xfrm>
+            <a:off x="4791575" y="4818278"/>
+            <a:ext cx="4535537" cy="1170432"/>
+          </a:xfrm>
+          <a:prstGeom prst="rect">
+            <a:avLst/>
+          </a:prstGeom>
+          <a:solidFill>
+            <a:srgbClr val="F6F7F9"/>
+          </a:solidFill>
+          <a:ln>
+            <a:noFill/>
+          </a:ln>
+          <a:effectLst/>
+        </p:spPr>
+        <p:style>
+          <a:lnRef idx="1">
+            <a:schemeClr val="accent1"/>
+          </a:lnRef>
+          <a:fillRef idx="3">
+            <a:schemeClr val="accent1"/>
+          </a:fillRef>
+          <a:effectRef idx="2">
+            <a:schemeClr val="accent1"/>
+          </a:effectRef>
+          <a:fontRef idx="minor">
+            <a:schemeClr val="lt1"/>
+          </a:fontRef>
+        </p:style>
+        <p:txBody>
+          <a:bodyPr rtlCol="0" anchor="ctr"/>
+          <a:lstStyle/>
+          <a:p>
+            <a:pPr algn="ctr"/>
+          </a:p>
+        </p:txBody>
+      </p:sp>
+      <p:sp>
+        <p:nvSpPr>
+          <p:cNvPr id="20" name="TextBox 19"/>
+          <p:cNvSpPr txBox="1"/>
+          <p:nvPr/>
+        </p:nvSpPr>
+        <p:spPr>
+          <a:xfrm>
+            <a:off x="4952514" y="4935321"/>
+            <a:ext cx="4213660" cy="243840"/>
+          </a:xfrm>
+          <a:prstGeom prst="rect">
+            <a:avLst/>
+          </a:prstGeom>
+          <a:noFill/>
+        </p:spPr>
+        <p:txBody>
+          <a:bodyPr wrap="square" anchor="t" lIns="0" rIns="0" tIns="0" bIns="0">
+            <a:spAutoFit/>
+          </a:bodyPr>
+          <a:lstStyle/>
+          <a:p>
+            <a:pPr algn="l">
+              <a:lnSpc>
+                <a:spcPct val="110000"/>
+              </a:lnSpc>
+              <a:spcAft>
+                <a:spcPts val="0"/>
+              </a:spcAft>
+            </a:pPr>
+            <a:r>
+              <a:rPr sz="840" b="1" i="0">
+                <a:solidFill>
+                  <a:srgbClr val="314359"/>
+                </a:solidFill>
+                <a:latin typeface="Arial"/>
+              </a:rPr>
+              <a:t>RELIABILITY OVER TIME</a:t>
+            </a:r>
+          </a:p>
+        </p:txBody>
+      </p:sp>
+      <p:sp>
+        <p:nvSpPr>
+          <p:cNvPr id="21" name="TextBox 20"/>
+          <p:cNvSpPr txBox="1"/>
+          <p:nvPr/>
+        </p:nvSpPr>
+        <p:spPr>
+          <a:xfrm>
+            <a:off x="4952514" y="5169408"/>
+            <a:ext cx="4213660" cy="341376"/>
+          </a:xfrm>
+          <a:prstGeom prst="rect">
+            <a:avLst/>
+          </a:prstGeom>
+          <a:noFill/>
+        </p:spPr>
+        <p:txBody>
+          <a:bodyPr wrap="square" anchor="t" lIns="0" rIns="0" tIns="0" bIns="0">
+            <a:spAutoFit/>
+          </a:bodyPr>
+          <a:lstStyle/>
+          <a:p>
+            <a:pPr algn="l">
+              <a:lnSpc>
+                <a:spcPct val="110000"/>
+              </a:lnSpc>
+              <a:spcAft>
+                <a:spcPts val="0"/>
+              </a:spcAft>
+            </a:pPr>
+            <a:r>
+              <a:rPr sz="1360" b="1" i="0">
+                <a:solidFill>
+                  <a:srgbClr val="314359"/>
+                </a:solidFill>
+                <a:latin typeface="Times New Roman"/>
+              </a:rPr>
+              <a:t>Beat MSCI in 90% of 5-yr and 100% of 7-yr windows</a:t>
+            </a:r>
+          </a:p>
+        </p:txBody>
+      </p:sp>
+      <p:sp>
+        <p:nvSpPr>
+          <p:cNvPr id="22" name="TextBox 21"/>
+          <p:cNvSpPr txBox="1"/>
+          <p:nvPr/>
+        </p:nvSpPr>
+        <p:spPr>
+          <a:xfrm>
+            <a:off x="4952514" y="5540044"/>
+            <a:ext cx="4213660" cy="438912"/>
+          </a:xfrm>
+          <a:prstGeom prst="rect">
+            <a:avLst/>
+          </a:prstGeom>
+          <a:noFill/>
+        </p:spPr>
+        <p:txBody>
+          <a:bodyPr wrap="square" anchor="t" lIns="0" rIns="0" tIns="0" bIns="0">
+            <a:spAutoFit/>
+          </a:bodyPr>
+          <a:lstStyle/>
+          <a:p>
+            <a:pPr algn="l">
+              <a:lnSpc>
+                <a:spcPct val="112000"/>
+              </a:lnSpc>
+              <a:spcAft>
+                <a:spcPts val="0"/>
+              </a:spcAft>
+            </a:pPr>
+            <a:r>
+              <a:rPr sz="840" b="0" i="0">
+                <a:solidFill>
+                  <a:srgbClr val="0E1620"/>
+                </a:solidFill>
+                <a:latin typeface="Arial"/>
+              </a:rPr>
+              <a:t>Over every rolling 7-year holding period in 20 years, Athanase out-returned the index.</a:t>
+            </a:r>
+          </a:p>
+        </p:txBody>
+      </p:sp>
+      <p:sp>
+        <p:nvSpPr>
+          <p:cNvPr id="23" name="Rectangle 22"/>
+          <p:cNvSpPr/>
+          <p:nvPr/>
+        </p:nvSpPr>
+        <p:spPr>
+          <a:xfrm>
+            <a:off x="438922" y="6456883"/>
+            <a:ext cx="8873559" cy="448665"/>
+          </a:xfrm>
+          <a:prstGeom prst="rect">
+            <a:avLst/>
+          </a:prstGeom>
+          <a:solidFill>
+            <a:srgbClr val="152130"/>
+          </a:solidFill>
+          <a:ln>
+            <a:noFill/>
+          </a:ln>
+          <a:effectLst/>
+        </p:spPr>
+        <p:style>
+          <a:lnRef idx="1">
+            <a:schemeClr val="accent1"/>
+          </a:lnRef>
+          <a:fillRef idx="3">
+            <a:schemeClr val="accent1"/>
+          </a:fillRef>
+          <a:effectRef idx="2">
+            <a:schemeClr val="accent1"/>
+          </a:effectRef>
+          <a:fontRef idx="minor">
+            <a:schemeClr val="lt1"/>
+          </a:fontRef>
+        </p:style>
+        <p:txBody>
+          <a:bodyPr rtlCol="0" anchor="ctr"/>
+          <a:lstStyle/>
+          <a:p>
+            <a:pPr algn="ctr"/>
+          </a:p>
+        </p:txBody>
+      </p:sp>
+      <p:sp>
+        <p:nvSpPr>
+          <p:cNvPr id="24" name="TextBox 23"/>
+          <p:cNvSpPr txBox="1"/>
+          <p:nvPr/>
+        </p:nvSpPr>
+        <p:spPr>
+          <a:xfrm>
+            <a:off x="570599" y="6456883"/>
+            <a:ext cx="8632151" cy="448665"/>
+          </a:xfrm>
+          <a:prstGeom prst="rect">
+            <a:avLst/>
+          </a:prstGeom>
+          <a:noFill/>
+        </p:spPr>
+        <p:txBody>
+          <a:bodyPr wrap="square" anchor="ctr" lIns="0" rIns="0" tIns="0" bIns="0">
+            <a:spAutoFit/>
+          </a:bodyPr>
+          <a:lstStyle/>
+          <a:p>
+            <a:pPr algn="l">
+              <a:lnSpc>
+                <a:spcPct val="110000"/>
+              </a:lnSpc>
+              <a:spcAft>
+                <a:spcPts val="0"/>
+              </a:spcAft>
+            </a:pPr>
+            <a:r>
+              <a:rPr sz="960" b="0" i="1">
+                <a:solidFill>
+                  <a:srgbClr val="FFFFFF"/>
+                </a:solidFill>
+                <a:latin typeface="Arial"/>
+              </a:rPr>
+              <a:t>Athanase captures 93% of the market’s upside but only 43% of its downside — at 0.44 correlation, it improves the whole portfolio, not just one line of it.</a:t>
+            </a:r>
+          </a:p>
+        </p:txBody>
+      </p:sp>
+      <p:sp>
+        <p:nvSpPr>
+          <p:cNvPr id="25" name="TextBox 24"/>
+          <p:cNvSpPr txBox="1"/>
+          <p:nvPr/>
+        </p:nvSpPr>
+        <p:spPr>
+          <a:xfrm>
+            <a:off x="438922" y="6983577"/>
+            <a:ext cx="9217382" cy="390144"/>
+          </a:xfrm>
+          <a:prstGeom prst="rect">
+            <a:avLst/>
+          </a:prstGeom>
+          <a:noFill/>
+        </p:spPr>
+        <p:txBody>
+          <a:bodyPr wrap="square" anchor="t" lIns="0" rIns="0" tIns="0" bIns="0">
+            <a:spAutoFit/>
+          </a:bodyPr>
+          <a:lstStyle/>
+          <a:p>
+            <a:pPr algn="l">
+              <a:lnSpc>
+                <a:spcPct val="110000"/>
+              </a:lnSpc>
+              <a:spcAft>
+                <a:spcPts val="0"/>
+              </a:spcAft>
+            </a:pPr>
+            <a:r>
+              <a:rPr sz="600" b="0" i="0">
+                <a:solidFill>
+                  <a:srgbClr val="556A83"/>
+                </a:solidFill>
+                <a:latin typeface="Arial"/>
+              </a:rPr>
+              <a:t>Source: monthly net returns, 235 months (2006–2025). Capture = compounded Athanase return in the market’s up/down months ÷ the market’s. Past performance is not indicative of future results.</a:t>
+            </a:r>
+          </a:p>
+        </p:txBody>
+      </p:sp>
+    </p:spTree>
+  </p:cSld>
+  <p:clrMapOvr>
+    <a:masterClrMapping/>
+  </p:clrMapOvr>
+</p:sld>
+</file>
+
+<file path=ppt/slides/slide29.xml><?xml version="1.0" encoding="utf-8"?>
+<p:sld xmlns:a="http://schemas.openxmlformats.org/drawingml/2006/main" xmlns:p="http://schemas.openxmlformats.org/presentationml/2006/main" xmlns:r="http://schemas.openxmlformats.org/officeDocument/2006/relationships">
+  <p:cSld>
+    <p:spTree>
+      <p:nvGrpSpPr>
+        <p:cNvPr id="1" name=""/>
+        <p:cNvGrpSpPr/>
+        <p:nvPr/>
+      </p:nvGrpSpPr>
+      <p:grpSpPr/>
+      <p:sp>
+        <p:nvSpPr>
+          <p:cNvPr id="2" name="Rectangle 1"/>
+          <p:cNvSpPr/>
+          <p:nvPr/>
+        </p:nvSpPr>
+        <p:spPr>
+          <a:xfrm>
+            <a:off x="0" y="0"/>
+            <a:ext cx="9753600" cy="7315200"/>
+          </a:xfrm>
+          <a:prstGeom prst="rect">
+            <a:avLst/>
+          </a:prstGeom>
+          <a:solidFill>
+            <a:srgbClr val="FFFFFF"/>
+          </a:solidFill>
+          <a:ln>
+            <a:noFill/>
+          </a:ln>
+          <a:effectLst/>
+        </p:spPr>
+        <p:style>
+          <a:lnRef idx="1">
+            <a:schemeClr val="accent1"/>
+          </a:lnRef>
+          <a:fillRef idx="3">
+            <a:schemeClr val="accent1"/>
+          </a:fillRef>
+          <a:effectRef idx="2">
+            <a:schemeClr val="accent1"/>
+          </a:effectRef>
+          <a:fontRef idx="minor">
+            <a:schemeClr val="lt1"/>
+          </a:fontRef>
+        </p:style>
+        <p:txBody>
+          <a:bodyPr rtlCol="0" anchor="ctr"/>
+          <a:lstStyle/>
+          <a:p>
+            <a:pPr algn="ctr"/>
+          </a:p>
+        </p:txBody>
+      </p:sp>
+      <p:pic>
+        <p:nvPicPr>
+          <p:cNvPr id="3" name="Picture 2" descr="mark_dark.png"/>
+          <p:cNvPicPr>
+            <a:picLocks noChangeAspect="1"/>
+          </p:cNvPicPr>
+          <p:nvPr/>
+        </p:nvPicPr>
+        <p:blipFill>
+          <a:blip r:embed="rId2"/>
+          <a:stretch>
+            <a:fillRect/>
+          </a:stretch>
+        </p:blipFill>
+        <p:spPr>
+          <a:xfrm>
+            <a:off x="402346" y="234086"/>
+            <a:ext cx="224012" cy="190199"/>
+          </a:xfrm>
+          <a:prstGeom prst="rect">
+            <a:avLst/>
+          </a:prstGeom>
+        </p:spPr>
+      </p:pic>
+      <p:sp>
+        <p:nvSpPr>
+          <p:cNvPr id="4" name="TextBox 3"/>
+          <p:cNvSpPr txBox="1"/>
+          <p:nvPr/>
+        </p:nvSpPr>
+        <p:spPr>
+          <a:xfrm>
+            <a:off x="716907" y="263347"/>
+            <a:ext cx="5120768" cy="292608"/>
+          </a:xfrm>
+          <a:prstGeom prst="rect">
+            <a:avLst/>
+          </a:prstGeom>
+          <a:noFill/>
+        </p:spPr>
+        <p:txBody>
+          <a:bodyPr wrap="square" anchor="t" lIns="0" rIns="0" tIns="0" bIns="0">
+            <a:spAutoFit/>
+          </a:bodyPr>
+          <a:lstStyle/>
+          <a:p>
+            <a:pPr algn="l">
+              <a:lnSpc>
+                <a:spcPct val="110000"/>
+              </a:lnSpc>
+              <a:spcAft>
+                <a:spcPts val="0"/>
+              </a:spcAft>
+            </a:pPr>
+            <a:r>
+              <a:rPr sz="880" b="0" i="0">
+                <a:solidFill>
+                  <a:srgbClr val="556A83"/>
+                </a:solidFill>
+                <a:latin typeface="Arial"/>
+              </a:rPr>
+              <a:t>Risk-Adjusted Outcomes</a:t>
+            </a:r>
+          </a:p>
+        </p:txBody>
+      </p:sp>
+      <p:sp>
+        <p:nvSpPr>
           <p:cNvPr id="5" name="TextBox 4"/>
           <p:cNvSpPr txBox="1"/>
           <p:nvPr/>
         </p:nvSpPr>
         <p:spPr>
           <a:xfrm>
-            <a:off x="438922" y="2877312"/>
-            <a:ext cx="8046921" cy="1560576"/>
+            <a:off x="7242229" y="263347"/>
+            <a:ext cx="2084884" cy="292608"/>
           </a:xfrm>
           <a:prstGeom prst="rect">
             <a:avLst/>
@@ -35984,24 +40695,763 @@
           </a:bodyPr>
           <a:lstStyle/>
           <a:p>
+            <a:pPr algn="r">
+              <a:lnSpc>
+                <a:spcPct val="110000"/>
+              </a:lnSpc>
+              <a:spcAft>
+                <a:spcPts val="0"/>
+              </a:spcAft>
+            </a:pPr>
+            <a:r>
+              <a:rPr sz="880" b="1" i="0">
+                <a:solidFill>
+                  <a:srgbClr val="556A83"/>
+                </a:solidFill>
+                <a:latin typeface="Arial"/>
+              </a:rPr>
+              <a:t>Figure 7</a:t>
+            </a:r>
+          </a:p>
+        </p:txBody>
+      </p:sp>
+      <p:sp>
+        <p:nvSpPr>
+          <p:cNvPr id="6" name="Rectangle 5"/>
+          <p:cNvSpPr/>
+          <p:nvPr/>
+        </p:nvSpPr>
+        <p:spPr>
+          <a:xfrm>
+            <a:off x="0" y="604723"/>
+            <a:ext cx="9753600" cy="1414272"/>
+          </a:xfrm>
+          <a:prstGeom prst="rect">
+            <a:avLst/>
+          </a:prstGeom>
+          <a:solidFill>
+            <a:srgbClr val="F6F7F9"/>
+          </a:solidFill>
+          <a:ln>
+            <a:noFill/>
+          </a:ln>
+          <a:effectLst/>
+        </p:spPr>
+        <p:style>
+          <a:lnRef idx="1">
+            <a:schemeClr val="accent1"/>
+          </a:lnRef>
+          <a:fillRef idx="3">
+            <a:schemeClr val="accent1"/>
+          </a:fillRef>
+          <a:effectRef idx="2">
+            <a:schemeClr val="accent1"/>
+          </a:effectRef>
+          <a:fontRef idx="minor">
+            <a:schemeClr val="lt1"/>
+          </a:fontRef>
+        </p:style>
+        <p:txBody>
+          <a:bodyPr rtlCol="0" anchor="ctr"/>
+          <a:lstStyle/>
+          <a:p>
+            <a:pPr algn="ctr"/>
+          </a:p>
+        </p:txBody>
+      </p:sp>
+      <p:sp>
+        <p:nvSpPr>
+          <p:cNvPr id="7" name="TextBox 6"/>
+          <p:cNvSpPr txBox="1"/>
+          <p:nvPr/>
+        </p:nvSpPr>
+        <p:spPr>
+          <a:xfrm>
+            <a:off x="438922" y="721766"/>
+            <a:ext cx="8851613" cy="829056"/>
+          </a:xfrm>
+          <a:prstGeom prst="rect">
+            <a:avLst/>
+          </a:prstGeom>
+          <a:noFill/>
+        </p:spPr>
+        <p:txBody>
+          <a:bodyPr wrap="square" anchor="t" lIns="0" rIns="0" tIns="0" bIns="0">
+            <a:spAutoFit/>
+          </a:bodyPr>
+          <a:lstStyle/>
+          <a:p>
             <a:pPr algn="l">
               <a:lnSpc>
                 <a:spcPct val="110000"/>
               </a:lnSpc>
               <a:spcAft>
-                <a:spcPts val="800"/>
-              </a:spcAft>
-            </a:pPr>
-            <a:r>
-              <a:rPr sz="2080" b="0" i="0" spc="-78">
+                <a:spcPts val="200"/>
+              </a:spcAft>
+            </a:pPr>
+            <a:r>
+              <a:rPr sz="2400" b="0" i="0" spc="-90">
+                <a:solidFill>
+                  <a:srgbClr val="314359"/>
+                </a:solidFill>
+                <a:latin typeface="Times New Roman"/>
+              </a:rPr>
+              <a:t>2.20 What a blend does to the whole portfolio</a:t>
+            </a:r>
+          </a:p>
+        </p:txBody>
+      </p:sp>
+      <p:sp>
+        <p:nvSpPr>
+          <p:cNvPr id="8" name="TextBox 7"/>
+          <p:cNvSpPr txBox="1"/>
+          <p:nvPr/>
+        </p:nvSpPr>
+        <p:spPr>
+          <a:xfrm>
+            <a:off x="453553" y="1511808"/>
+            <a:ext cx="8705305" cy="487680"/>
+          </a:xfrm>
+          <a:prstGeom prst="rect">
+            <a:avLst/>
+          </a:prstGeom>
+          <a:noFill/>
+        </p:spPr>
+        <p:txBody>
+          <a:bodyPr wrap="square" anchor="t" lIns="0" rIns="0" tIns="0" bIns="0">
+            <a:spAutoFit/>
+          </a:bodyPr>
+          <a:lstStyle/>
+          <a:p>
+            <a:pPr algn="l">
+              <a:lnSpc>
+                <a:spcPct val="110000"/>
+              </a:lnSpc>
+              <a:spcAft>
+                <a:spcPts val="0"/>
+              </a:spcAft>
+            </a:pPr>
+            <a:r>
+              <a:rPr sz="1040" b="0" i="1">
+                <a:solidFill>
+                  <a:srgbClr val="556A83"/>
+                </a:solidFill>
+                <a:latin typeface="Arial"/>
+              </a:rPr>
+              <a:t>Adding Athanase to a global-equity book moves the portfolio up and to the left — more return for less downside risk, thanks to low correlation.</a:t>
+            </a:r>
+          </a:p>
+        </p:txBody>
+      </p:sp>
+      <p:sp>
+        <p:nvSpPr>
+          <p:cNvPr id="9" name="TextBox 8"/>
+          <p:cNvSpPr txBox="1"/>
+          <p:nvPr/>
+        </p:nvSpPr>
+        <p:spPr>
+          <a:xfrm>
+            <a:off x="6583844" y="6876288"/>
+            <a:ext cx="2926153" cy="292608"/>
+          </a:xfrm>
+          <a:prstGeom prst="rect">
+            <a:avLst/>
+          </a:prstGeom>
+          <a:noFill/>
+        </p:spPr>
+        <p:txBody>
+          <a:bodyPr wrap="square" anchor="t" lIns="0" rIns="0" tIns="0" bIns="0">
+            <a:spAutoFit/>
+          </a:bodyPr>
+          <a:lstStyle/>
+          <a:p>
+            <a:pPr algn="r">
+              <a:lnSpc>
+                <a:spcPct val="110000"/>
+              </a:lnSpc>
+              <a:spcAft>
+                <a:spcPts val="0"/>
+              </a:spcAft>
+            </a:pPr>
+            <a:r>
+              <a:rPr sz="680" b="0" i="0">
+                <a:solidFill>
+                  <a:srgbClr val="556A83"/>
+                </a:solidFill>
+                <a:latin typeface="Arial"/>
+              </a:rPr>
+              <a:t>Strictly confidential          26</a:t>
+            </a:r>
+          </a:p>
+        </p:txBody>
+      </p:sp>
+      <p:pic>
+        <p:nvPicPr>
+          <p:cNvPr id="10" name="Picture 9" descr="mc_frontier.png"/>
+          <p:cNvPicPr>
+            <a:picLocks noChangeAspect="1"/>
+          </p:cNvPicPr>
+          <p:nvPr/>
+        </p:nvPicPr>
+        <p:blipFill>
+          <a:blip r:embed="rId3"/>
+          <a:stretch>
+            <a:fillRect/>
+          </a:stretch>
+        </p:blipFill>
+        <p:spPr>
+          <a:xfrm>
+            <a:off x="402346" y="2194560"/>
+            <a:ext cx="6002145" cy="2999306"/>
+          </a:xfrm>
+          <a:prstGeom prst="rect">
+            <a:avLst/>
+          </a:prstGeom>
+        </p:spPr>
+      </p:pic>
+      <p:sp>
+        <p:nvSpPr>
+          <p:cNvPr id="11" name="Rectangle 10"/>
+          <p:cNvSpPr/>
+          <p:nvPr/>
+        </p:nvSpPr>
+        <p:spPr>
+          <a:xfrm>
+            <a:off x="6510690" y="2262835"/>
+            <a:ext cx="2816422" cy="1170432"/>
+          </a:xfrm>
+          <a:prstGeom prst="rect">
+            <a:avLst/>
+          </a:prstGeom>
+          <a:solidFill>
+            <a:srgbClr val="F6F7F9"/>
+          </a:solidFill>
+          <a:ln>
+            <a:noFill/>
+          </a:ln>
+          <a:effectLst/>
+        </p:spPr>
+        <p:style>
+          <a:lnRef idx="1">
+            <a:schemeClr val="accent1"/>
+          </a:lnRef>
+          <a:fillRef idx="3">
+            <a:schemeClr val="accent1"/>
+          </a:fillRef>
+          <a:effectRef idx="2">
+            <a:schemeClr val="accent1"/>
+          </a:effectRef>
+          <a:fontRef idx="minor">
+            <a:schemeClr val="lt1"/>
+          </a:fontRef>
+        </p:style>
+        <p:txBody>
+          <a:bodyPr rtlCol="0" anchor="ctr"/>
+          <a:lstStyle/>
+          <a:p>
+            <a:pPr algn="ctr"/>
+          </a:p>
+        </p:txBody>
+      </p:sp>
+      <p:sp>
+        <p:nvSpPr>
+          <p:cNvPr id="12" name="TextBox 11"/>
+          <p:cNvSpPr txBox="1"/>
+          <p:nvPr/>
+        </p:nvSpPr>
+        <p:spPr>
+          <a:xfrm>
+            <a:off x="6671629" y="2379878"/>
+            <a:ext cx="2494545" cy="243840"/>
+          </a:xfrm>
+          <a:prstGeom prst="rect">
+            <a:avLst/>
+          </a:prstGeom>
+          <a:noFill/>
+        </p:spPr>
+        <p:txBody>
+          <a:bodyPr wrap="square" anchor="t" lIns="0" rIns="0" tIns="0" bIns="0">
+            <a:spAutoFit/>
+          </a:bodyPr>
+          <a:lstStyle/>
+          <a:p>
+            <a:pPr algn="l">
+              <a:lnSpc>
+                <a:spcPct val="110000"/>
+              </a:lnSpc>
+              <a:spcAft>
+                <a:spcPts val="0"/>
+              </a:spcAft>
+            </a:pPr>
+            <a:r>
+              <a:rPr sz="840" b="1" i="0">
+                <a:solidFill>
+                  <a:srgbClr val="314359"/>
+                </a:solidFill>
+                <a:latin typeface="Arial"/>
+              </a:rPr>
+              <a:t>ALL GLOBAL EQUITIES</a:t>
+            </a:r>
+          </a:p>
+        </p:txBody>
+      </p:sp>
+      <p:sp>
+        <p:nvSpPr>
+          <p:cNvPr id="13" name="TextBox 12"/>
+          <p:cNvSpPr txBox="1"/>
+          <p:nvPr/>
+        </p:nvSpPr>
+        <p:spPr>
+          <a:xfrm>
+            <a:off x="6671629" y="2633472"/>
+            <a:ext cx="2494545" cy="438912"/>
+          </a:xfrm>
+          <a:prstGeom prst="rect">
+            <a:avLst/>
+          </a:prstGeom>
+          <a:noFill/>
+        </p:spPr>
+        <p:txBody>
+          <a:bodyPr wrap="square" anchor="t" lIns="0" rIns="0" tIns="0" bIns="0">
+            <a:spAutoFit/>
+          </a:bodyPr>
+          <a:lstStyle/>
+          <a:p>
+            <a:pPr>
+              <a:spcAft>
+                <a:spcPts val="0"/>
+              </a:spcAft>
+            </a:pPr>
+            <a:r>
+              <a:rPr sz="1280" b="1">
+                <a:solidFill>
+                  <a:srgbClr val="314359"/>
+                </a:solidFill>
+                <a:latin typeface="Times New Roman"/>
+              </a:rPr>
+              <a:t>6.1% return</a:t>
+            </a:r>
+            <a:r>
+              <a:rPr sz="960">
+                <a:solidFill>
+                  <a:srgbClr val="314359"/>
+                </a:solidFill>
+                <a:latin typeface="Arial"/>
+              </a:rPr>
+              <a:t>   ·   11.5% downside risk</a:t>
+            </a:r>
+          </a:p>
+        </p:txBody>
+      </p:sp>
+      <p:sp>
+        <p:nvSpPr>
+          <p:cNvPr id="14" name="TextBox 13"/>
+          <p:cNvSpPr txBox="1"/>
+          <p:nvPr/>
+        </p:nvSpPr>
+        <p:spPr>
+          <a:xfrm>
+            <a:off x="6671629" y="3062630"/>
+            <a:ext cx="2494545" cy="292608"/>
+          </a:xfrm>
+          <a:prstGeom prst="rect">
+            <a:avLst/>
+          </a:prstGeom>
+          <a:noFill/>
+        </p:spPr>
+        <p:txBody>
+          <a:bodyPr wrap="square" anchor="t" lIns="0" rIns="0" tIns="0" bIns="0">
+            <a:spAutoFit/>
+          </a:bodyPr>
+          <a:lstStyle/>
+          <a:p>
+            <a:pPr algn="l">
+              <a:lnSpc>
+                <a:spcPct val="110000"/>
+              </a:lnSpc>
+              <a:spcAft>
+                <a:spcPts val="0"/>
+              </a:spcAft>
+            </a:pPr>
+            <a:r>
+              <a:rPr sz="840" b="0" i="0">
+                <a:solidFill>
+                  <a:srgbClr val="0E1620"/>
+                </a:solidFill>
+                <a:latin typeface="Arial"/>
+              </a:rPr>
+              <a:t>100% MSCI World IMI</a:t>
+            </a:r>
+          </a:p>
+        </p:txBody>
+      </p:sp>
+      <p:sp>
+        <p:nvSpPr>
+          <p:cNvPr id="15" name="Rectangle 14"/>
+          <p:cNvSpPr/>
+          <p:nvPr/>
+        </p:nvSpPr>
+        <p:spPr>
+          <a:xfrm>
+            <a:off x="6510690" y="3569817"/>
+            <a:ext cx="2816422" cy="1170432"/>
+          </a:xfrm>
+          <a:prstGeom prst="rect">
+            <a:avLst/>
+          </a:prstGeom>
+          <a:solidFill>
+            <a:srgbClr val="F6F7F9"/>
+          </a:solidFill>
+          <a:ln>
+            <a:noFill/>
+          </a:ln>
+          <a:effectLst/>
+        </p:spPr>
+        <p:style>
+          <a:lnRef idx="1">
+            <a:schemeClr val="accent1"/>
+          </a:lnRef>
+          <a:fillRef idx="3">
+            <a:schemeClr val="accent1"/>
+          </a:fillRef>
+          <a:effectRef idx="2">
+            <a:schemeClr val="accent1"/>
+          </a:effectRef>
+          <a:fontRef idx="minor">
+            <a:schemeClr val="lt1"/>
+          </a:fontRef>
+        </p:style>
+        <p:txBody>
+          <a:bodyPr rtlCol="0" anchor="ctr"/>
+          <a:lstStyle/>
+          <a:p>
+            <a:pPr algn="ctr"/>
+          </a:p>
+        </p:txBody>
+      </p:sp>
+      <p:sp>
+        <p:nvSpPr>
+          <p:cNvPr id="16" name="TextBox 15"/>
+          <p:cNvSpPr txBox="1"/>
+          <p:nvPr/>
+        </p:nvSpPr>
+        <p:spPr>
+          <a:xfrm>
+            <a:off x="6671629" y="3686860"/>
+            <a:ext cx="2494545" cy="243840"/>
+          </a:xfrm>
+          <a:prstGeom prst="rect">
+            <a:avLst/>
+          </a:prstGeom>
+          <a:noFill/>
+        </p:spPr>
+        <p:txBody>
+          <a:bodyPr wrap="square" anchor="t" lIns="0" rIns="0" tIns="0" bIns="0">
+            <a:spAutoFit/>
+          </a:bodyPr>
+          <a:lstStyle/>
+          <a:p>
+            <a:pPr algn="l">
+              <a:lnSpc>
+                <a:spcPct val="110000"/>
+              </a:lnSpc>
+              <a:spcAft>
+                <a:spcPts val="0"/>
+              </a:spcAft>
+            </a:pPr>
+            <a:r>
+              <a:rPr sz="840" b="1" i="0">
+                <a:solidFill>
+                  <a:srgbClr val="314359"/>
+                </a:solidFill>
+                <a:latin typeface="Arial"/>
+              </a:rPr>
+              <a:t>ADD A PRUDENT 8% SLEEVE</a:t>
+            </a:r>
+          </a:p>
+        </p:txBody>
+      </p:sp>
+      <p:sp>
+        <p:nvSpPr>
+          <p:cNvPr id="17" name="TextBox 16"/>
+          <p:cNvSpPr txBox="1"/>
+          <p:nvPr/>
+        </p:nvSpPr>
+        <p:spPr>
+          <a:xfrm>
+            <a:off x="6671629" y="3940454"/>
+            <a:ext cx="2494545" cy="438912"/>
+          </a:xfrm>
+          <a:prstGeom prst="rect">
+            <a:avLst/>
+          </a:prstGeom>
+          <a:noFill/>
+        </p:spPr>
+        <p:txBody>
+          <a:bodyPr wrap="square" anchor="t" lIns="0" rIns="0" tIns="0" bIns="0">
+            <a:spAutoFit/>
+          </a:bodyPr>
+          <a:lstStyle/>
+          <a:p>
+            <a:pPr>
+              <a:spcAft>
+                <a:spcPts val="0"/>
+              </a:spcAft>
+            </a:pPr>
+            <a:r>
+              <a:rPr sz="1280" b="1">
+                <a:solidFill>
+                  <a:srgbClr val="314359"/>
+                </a:solidFill>
+                <a:latin typeface="Times New Roman"/>
+              </a:rPr>
+              <a:t>7.3% return</a:t>
+            </a:r>
+            <a:r>
+              <a:rPr sz="960">
+                <a:solidFill>
+                  <a:srgbClr val="314359"/>
+                </a:solidFill>
+                <a:latin typeface="Arial"/>
+              </a:rPr>
+              <a:t>   ·   11.1% downside risk</a:t>
+            </a:r>
+          </a:p>
+        </p:txBody>
+      </p:sp>
+      <p:sp>
+        <p:nvSpPr>
+          <p:cNvPr id="18" name="TextBox 17"/>
+          <p:cNvSpPr txBox="1"/>
+          <p:nvPr/>
+        </p:nvSpPr>
+        <p:spPr>
+          <a:xfrm>
+            <a:off x="6671629" y="4369612"/>
+            <a:ext cx="2494545" cy="292608"/>
+          </a:xfrm>
+          <a:prstGeom prst="rect">
+            <a:avLst/>
+          </a:prstGeom>
+          <a:noFill/>
+        </p:spPr>
+        <p:txBody>
+          <a:bodyPr wrap="square" anchor="t" lIns="0" rIns="0" tIns="0" bIns="0">
+            <a:spAutoFit/>
+          </a:bodyPr>
+          <a:lstStyle/>
+          <a:p>
+            <a:pPr algn="l">
+              <a:lnSpc>
+                <a:spcPct val="110000"/>
+              </a:lnSpc>
+              <a:spcAft>
+                <a:spcPts val="0"/>
+              </a:spcAft>
+            </a:pPr>
+            <a:r>
+              <a:rPr sz="840" b="0" i="0">
+                <a:solidFill>
+                  <a:srgbClr val="0E1620"/>
+                </a:solidFill>
+                <a:latin typeface="Arial"/>
+              </a:rPr>
+              <a:t>92% MSCI  /  8% Athanase</a:t>
+            </a:r>
+          </a:p>
+        </p:txBody>
+      </p:sp>
+      <p:sp>
+        <p:nvSpPr>
+          <p:cNvPr id="19" name="TextBox 18"/>
+          <p:cNvSpPr txBox="1"/>
+          <p:nvPr/>
+        </p:nvSpPr>
+        <p:spPr>
+          <a:xfrm>
+            <a:off x="6510690" y="4896307"/>
+            <a:ext cx="2816422" cy="292608"/>
+          </a:xfrm>
+          <a:prstGeom prst="rect">
+            <a:avLst/>
+          </a:prstGeom>
+          <a:noFill/>
+        </p:spPr>
+        <p:txBody>
+          <a:bodyPr wrap="square" anchor="t" lIns="0" rIns="0" tIns="0" bIns="0">
+            <a:spAutoFit/>
+          </a:bodyPr>
+          <a:lstStyle/>
+          <a:p>
+            <a:pPr algn="l">
+              <a:lnSpc>
+                <a:spcPct val="110000"/>
+              </a:lnSpc>
+              <a:spcAft>
+                <a:spcPts val="0"/>
+              </a:spcAft>
+            </a:pPr>
+            <a:r>
+              <a:rPr sz="840" b="1" i="0">
+                <a:solidFill>
+                  <a:srgbClr val="314359"/>
+                </a:solidFill>
+                <a:latin typeface="Arial"/>
+              </a:rPr>
+              <a:t>HOW TO READ IT</a:t>
+            </a:r>
+          </a:p>
+        </p:txBody>
+      </p:sp>
+      <p:sp>
+        <p:nvSpPr>
+          <p:cNvPr id="20" name="TextBox 19"/>
+          <p:cNvSpPr txBox="1"/>
+          <p:nvPr/>
+        </p:nvSpPr>
+        <p:spPr>
+          <a:xfrm>
+            <a:off x="6510690" y="5169408"/>
+            <a:ext cx="2816422" cy="1853184"/>
+          </a:xfrm>
+          <a:prstGeom prst="rect">
+            <a:avLst/>
+          </a:prstGeom>
+          <a:noFill/>
+        </p:spPr>
+        <p:txBody>
+          <a:bodyPr wrap="square" anchor="t" lIns="0" rIns="0" tIns="0" bIns="0">
+            <a:spAutoFit/>
+          </a:bodyPr>
+          <a:lstStyle/>
+          <a:p>
+            <a:pPr algn="l">
+              <a:lnSpc>
+                <a:spcPct val="116000"/>
+              </a:lnSpc>
+              <a:spcAft>
+                <a:spcPts val="0"/>
+              </a:spcAft>
+            </a:pPr>
+            <a:r>
+              <a:rPr sz="840" b="0" i="0">
+                <a:solidFill>
+                  <a:srgbClr val="0E1620"/>
+                </a:solidFill>
+                <a:latin typeface="Arial"/>
+              </a:rPr>
+              <a:t>Every blend on the curve beats holding equities alone, and the benefit keeps building until past half the portfolio (downside risk bottoms near 60%). That is a directional case to size up — within prudent limits — not a target: a 59% position would breach concentration, liquidity and the 3–8% sizing discipline. Even an 8% sleeve already moves the portfolio the right way.</a:t>
+            </a:r>
+          </a:p>
+        </p:txBody>
+      </p:sp>
+      <p:sp>
+        <p:nvSpPr>
+          <p:cNvPr id="21" name="Rectangle 20"/>
+          <p:cNvSpPr/>
+          <p:nvPr/>
+        </p:nvSpPr>
+        <p:spPr>
+          <a:xfrm>
+            <a:off x="438922" y="6456883"/>
+            <a:ext cx="8873559" cy="448665"/>
+          </a:xfrm>
+          <a:prstGeom prst="rect">
+            <a:avLst/>
+          </a:prstGeom>
+          <a:solidFill>
+            <a:srgbClr val="152130"/>
+          </a:solidFill>
+          <a:ln>
+            <a:noFill/>
+          </a:ln>
+          <a:effectLst/>
+        </p:spPr>
+        <p:style>
+          <a:lnRef idx="1">
+            <a:schemeClr val="accent1"/>
+          </a:lnRef>
+          <a:fillRef idx="3">
+            <a:schemeClr val="accent1"/>
+          </a:fillRef>
+          <a:effectRef idx="2">
+            <a:schemeClr val="accent1"/>
+          </a:effectRef>
+          <a:fontRef idx="minor">
+            <a:schemeClr val="lt1"/>
+          </a:fontRef>
+        </p:style>
+        <p:txBody>
+          <a:bodyPr rtlCol="0" anchor="ctr"/>
+          <a:lstStyle/>
+          <a:p>
+            <a:pPr algn="ctr"/>
+          </a:p>
+        </p:txBody>
+      </p:sp>
+      <p:sp>
+        <p:nvSpPr>
+          <p:cNvPr id="22" name="TextBox 21"/>
+          <p:cNvSpPr txBox="1"/>
+          <p:nvPr/>
+        </p:nvSpPr>
+        <p:spPr>
+          <a:xfrm>
+            <a:off x="570599" y="6456883"/>
+            <a:ext cx="8632151" cy="448665"/>
+          </a:xfrm>
+          <a:prstGeom prst="rect">
+            <a:avLst/>
+          </a:prstGeom>
+          <a:noFill/>
+        </p:spPr>
+        <p:txBody>
+          <a:bodyPr wrap="square" anchor="ctr" lIns="0" rIns="0" tIns="0" bIns="0">
+            <a:spAutoFit/>
+          </a:bodyPr>
+          <a:lstStyle/>
+          <a:p>
+            <a:pPr algn="l">
+              <a:lnSpc>
+                <a:spcPct val="110000"/>
+              </a:lnSpc>
+              <a:spcAft>
+                <a:spcPts val="0"/>
+              </a:spcAft>
+            </a:pPr>
+            <a:r>
+              <a:rPr sz="960" b="0" i="1">
                 <a:solidFill>
                   <a:srgbClr val="FFFFFF"/>
                 </a:solidFill>
-                <a:latin typeface="Times New Roman"/>
-              </a:rPr>
-              <a:t>The asset class rewards patient, governance-minded capital.</a:t>
-            </a:r>
-          </a:p>
+                <a:latin typeface="Arial"/>
+              </a:rPr>
+              <a:t>The blend is not a trade-off — every allocation improves the portfolio, so the case is to size up within prudent 3–8% limits, not to chase the mathematical optimum.</a:t>
+            </a:r>
+          </a:p>
+        </p:txBody>
+      </p:sp>
+      <p:sp>
+        <p:nvSpPr>
+          <p:cNvPr id="23" name="TextBox 22"/>
+          <p:cNvSpPr txBox="1"/>
+          <p:nvPr/>
+        </p:nvSpPr>
+        <p:spPr>
+          <a:xfrm>
+            <a:off x="438922" y="6983577"/>
+            <a:ext cx="9217382" cy="390144"/>
+          </a:xfrm>
+          <a:prstGeom prst="rect">
+            <a:avLst/>
+          </a:prstGeom>
+          <a:noFill/>
+        </p:spPr>
+        <p:txBody>
+          <a:bodyPr wrap="square" anchor="t" lIns="0" rIns="0" tIns="0" bIns="0">
+            <a:spAutoFit/>
+          </a:bodyPr>
+          <a:lstStyle/>
           <a:p>
             <a:pPr algn="l">
               <a:lnSpc>
@@ -36012,173 +41462,13 @@
               </a:spcAft>
             </a:pPr>
             <a:r>
-              <a:rPr sz="1440" b="0" i="1">
-                <a:solidFill>
-                  <a:srgbClr val="E2E5E9"/>
-                </a:solidFill>
-                <a:latin typeface="Times New Roman"/>
-              </a:rPr>
-              <a:t>Among engaged owners, Athanase brings the team, the discipline and the 20-year proof to deliver it.</a:t>
-            </a:r>
-          </a:p>
-        </p:txBody>
-      </p:sp>
-      <p:sp>
-        <p:nvSpPr>
-          <p:cNvPr id="6" name="TextBox 5"/>
-          <p:cNvSpPr txBox="1"/>
-          <p:nvPr/>
-        </p:nvSpPr>
-        <p:spPr>
-          <a:xfrm>
-            <a:off x="438922" y="5266944"/>
-            <a:ext cx="4389229" cy="1365504"/>
-          </a:xfrm>
-          <a:prstGeom prst="rect">
-            <a:avLst/>
-          </a:prstGeom>
-          <a:noFill/>
-        </p:spPr>
-        <p:txBody>
-          <a:bodyPr wrap="square" anchor="t" lIns="0" rIns="0" tIns="0" bIns="0">
-            <a:spAutoFit/>
-          </a:bodyPr>
-          <a:lstStyle/>
-          <a:p>
-            <a:pPr algn="l">
-              <a:lnSpc>
-                <a:spcPct val="110000"/>
-              </a:lnSpc>
-              <a:spcAft>
-                <a:spcPts val="200"/>
-              </a:spcAft>
-            </a:pPr>
-            <a:r>
-              <a:rPr sz="1200" b="1" i="0">
-                <a:solidFill>
-                  <a:srgbClr val="FFFFFF"/>
-                </a:solidFill>
-                <a:latin typeface="Arial"/>
-              </a:rPr>
-              <a:t>Stefan Charette</a:t>
-            </a:r>
-          </a:p>
-          <a:p>
-            <a:pPr algn="l">
-              <a:lnSpc>
-                <a:spcPct val="110000"/>
-              </a:lnSpc>
-              <a:spcAft>
-                <a:spcPts val="800"/>
-              </a:spcAft>
-            </a:pPr>
-            <a:r>
-              <a:rPr sz="960" b="0" i="0">
-                <a:solidFill>
-                  <a:srgbClr val="E2E5E9"/>
-                </a:solidFill>
-                <a:latin typeface="Arial"/>
-              </a:rPr>
-              <a:t>Athanase Industrial Partner</a:t>
-            </a:r>
-          </a:p>
-          <a:p>
-            <a:pPr algn="l">
-              <a:lnSpc>
-                <a:spcPct val="110000"/>
-              </a:lnSpc>
-              <a:spcAft>
-                <a:spcPts val="0"/>
-              </a:spcAft>
-            </a:pPr>
-            <a:r>
-              <a:rPr sz="960" b="0" i="0">
+              <a:rPr sz="600" b="0" i="0">
                 <a:solidFill>
                   <a:srgbClr val="556A83"/>
                 </a:solidFill>
                 <a:latin typeface="Arial"/>
               </a:rPr>
-              <a:t>charette@athanase.se   ·   +46 73 994 7079</a:t>
-            </a:r>
-          </a:p>
-        </p:txBody>
-      </p:sp>
-      <p:sp>
-        <p:nvSpPr>
-          <p:cNvPr id="7" name="TextBox 6"/>
-          <p:cNvSpPr txBox="1"/>
-          <p:nvPr/>
-        </p:nvSpPr>
-        <p:spPr>
-          <a:xfrm>
-            <a:off x="6583844" y="5266944"/>
-            <a:ext cx="2779845" cy="1463040"/>
-          </a:xfrm>
-          <a:prstGeom prst="rect">
-            <a:avLst/>
-          </a:prstGeom>
-          <a:noFill/>
-        </p:spPr>
-        <p:txBody>
-          <a:bodyPr wrap="square" anchor="t" lIns="0" rIns="0" tIns="0" bIns="0">
-            <a:spAutoFit/>
-          </a:bodyPr>
-          <a:lstStyle/>
-          <a:p>
-            <a:pPr algn="l">
-              <a:lnSpc>
-                <a:spcPct val="110000"/>
-              </a:lnSpc>
-              <a:spcAft>
-                <a:spcPts val="400"/>
-              </a:spcAft>
-            </a:pPr>
-            <a:r>
-              <a:rPr sz="960" b="1" i="0">
-                <a:solidFill>
-                  <a:srgbClr val="FFFFFF"/>
-                </a:solidFill>
-                <a:latin typeface="Arial"/>
-              </a:rPr>
-              <a:t>Offices</a:t>
-            </a:r>
-          </a:p>
-          <a:p>
-            <a:pPr algn="l">
-              <a:lnSpc>
-                <a:spcPct val="110000"/>
-              </a:lnSpc>
-              <a:spcAft>
-                <a:spcPts val="400"/>
-              </a:spcAft>
-            </a:pPr>
-            <a:r>
-              <a:rPr sz="880" b="0" i="0">
-                <a:solidFill>
-                  <a:srgbClr val="556A83"/>
-                </a:solidFill>
-                <a:latin typeface="Arial"/>
-              </a:rPr>
-              <a:t>Birger Jarlsgatan 6, 114 34 Stockholm, Sweden</a:t>
-            </a:r>
-          </a:p>
-          <a:p>
-            <a:pPr algn="l">
-              <a:lnSpc>
-                <a:spcPct val="110000"/>
-              </a:lnSpc>
-              <a:spcAft>
-                <a:spcPts val="0"/>
-              </a:spcAft>
-            </a:pPr>
-            <a:r>
-              <a:rPr sz="880" b="0" i="0">
-                <a:solidFill>
-                  <a:srgbClr val="556A83"/>
-                </a:solidFill>
-                <a:latin typeface="Arial"/>
-              </a:rPr>
-              <a:t>Landmark Square, West Bay Road, Grand Cayman</a:t>
+              <a:t>Source: monthly net returns, 235 months (2006–2025), monthly rebalanced blends. The minimum-risk point is in-sample and shown for shape, not as advice. Illustrative; past performance is not indicative of future results.</a:t>
             </a:r>
           </a:p>
         </p:txBody>
@@ -36393,6 +41683,784 @@
                 <a:latin typeface="Times New Roman"/>
               </a:rPr>
               <a:t>Why allocate to engaged ownership</a:t>
+            </a:r>
+          </a:p>
+        </p:txBody>
+      </p:sp>
+    </p:spTree>
+  </p:cSld>
+  <p:clrMapOvr>
+    <a:masterClrMapping/>
+  </p:clrMapOvr>
+</p:sld>
+</file>
+
+<file path=ppt/slides/slide30.xml><?xml version="1.0" encoding="utf-8"?>
+<p:sld xmlns:a="http://schemas.openxmlformats.org/drawingml/2006/main" xmlns:p="http://schemas.openxmlformats.org/presentationml/2006/main" xmlns:r="http://schemas.openxmlformats.org/officeDocument/2006/relationships">
+  <p:cSld>
+    <p:spTree>
+      <p:nvGrpSpPr>
+        <p:cNvPr id="1" name=""/>
+        <p:cNvGrpSpPr/>
+        <p:nvPr/>
+      </p:nvGrpSpPr>
+      <p:grpSpPr/>
+      <p:sp>
+        <p:nvSpPr>
+          <p:cNvPr id="2" name="Rectangle 1"/>
+          <p:cNvSpPr/>
+          <p:nvPr/>
+        </p:nvSpPr>
+        <p:spPr>
+          <a:xfrm>
+            <a:off x="0" y="0"/>
+            <a:ext cx="9753600" cy="7315200"/>
+          </a:xfrm>
+          <a:prstGeom prst="rect">
+            <a:avLst/>
+          </a:prstGeom>
+          <a:solidFill>
+            <a:srgbClr val="FFFFFF"/>
+          </a:solidFill>
+          <a:ln>
+            <a:noFill/>
+          </a:ln>
+          <a:effectLst/>
+        </p:spPr>
+        <p:style>
+          <a:lnRef idx="1">
+            <a:schemeClr val="accent1"/>
+          </a:lnRef>
+          <a:fillRef idx="3">
+            <a:schemeClr val="accent1"/>
+          </a:fillRef>
+          <a:effectRef idx="2">
+            <a:schemeClr val="accent1"/>
+          </a:effectRef>
+          <a:fontRef idx="minor">
+            <a:schemeClr val="lt1"/>
+          </a:fontRef>
+        </p:style>
+        <p:txBody>
+          <a:bodyPr rtlCol="0" anchor="ctr"/>
+          <a:lstStyle/>
+          <a:p>
+            <a:pPr algn="ctr"/>
+          </a:p>
+        </p:txBody>
+      </p:sp>
+      <p:pic>
+        <p:nvPicPr>
+          <p:cNvPr id="3" name="Picture 2" descr="mark_dark.png"/>
+          <p:cNvPicPr>
+            <a:picLocks noChangeAspect="1"/>
+          </p:cNvPicPr>
+          <p:nvPr/>
+        </p:nvPicPr>
+        <p:blipFill>
+          <a:blip r:embed="rId2"/>
+          <a:stretch>
+            <a:fillRect/>
+          </a:stretch>
+        </p:blipFill>
+        <p:spPr>
+          <a:xfrm>
+            <a:off x="402346" y="234086"/>
+            <a:ext cx="224012" cy="190199"/>
+          </a:xfrm>
+          <a:prstGeom prst="rect">
+            <a:avLst/>
+          </a:prstGeom>
+        </p:spPr>
+      </p:pic>
+      <p:sp>
+        <p:nvSpPr>
+          <p:cNvPr id="4" name="TextBox 3"/>
+          <p:cNvSpPr txBox="1"/>
+          <p:nvPr/>
+        </p:nvSpPr>
+        <p:spPr>
+          <a:xfrm>
+            <a:off x="716907" y="263347"/>
+            <a:ext cx="5120768" cy="292608"/>
+          </a:xfrm>
+          <a:prstGeom prst="rect">
+            <a:avLst/>
+          </a:prstGeom>
+          <a:noFill/>
+        </p:spPr>
+        <p:txBody>
+          <a:bodyPr wrap="square" anchor="t" lIns="0" rIns="0" tIns="0" bIns="0">
+            <a:spAutoFit/>
+          </a:bodyPr>
+          <a:lstStyle/>
+          <a:p>
+            <a:pPr algn="l">
+              <a:lnSpc>
+                <a:spcPct val="110000"/>
+              </a:lnSpc>
+              <a:spcAft>
+                <a:spcPts val="0"/>
+              </a:spcAft>
+            </a:pPr>
+            <a:r>
+              <a:rPr sz="880" b="0" i="0">
+                <a:solidFill>
+                  <a:srgbClr val="556A83"/>
+                </a:solidFill>
+                <a:latin typeface="Arial"/>
+              </a:rPr>
+              <a:t>Ownership Model</a:t>
+            </a:r>
+          </a:p>
+        </p:txBody>
+      </p:sp>
+      <p:sp>
+        <p:nvSpPr>
+          <p:cNvPr id="5" name="Rectangle 4"/>
+          <p:cNvSpPr/>
+          <p:nvPr/>
+        </p:nvSpPr>
+        <p:spPr>
+          <a:xfrm>
+            <a:off x="0" y="604723"/>
+            <a:ext cx="9753600" cy="1024128"/>
+          </a:xfrm>
+          <a:prstGeom prst="rect">
+            <a:avLst/>
+          </a:prstGeom>
+          <a:solidFill>
+            <a:srgbClr val="F6F7F9"/>
+          </a:solidFill>
+          <a:ln>
+            <a:noFill/>
+          </a:ln>
+          <a:effectLst/>
+        </p:spPr>
+        <p:style>
+          <a:lnRef idx="1">
+            <a:schemeClr val="accent1"/>
+          </a:lnRef>
+          <a:fillRef idx="3">
+            <a:schemeClr val="accent1"/>
+          </a:fillRef>
+          <a:effectRef idx="2">
+            <a:schemeClr val="accent1"/>
+          </a:effectRef>
+          <a:fontRef idx="minor">
+            <a:schemeClr val="lt1"/>
+          </a:fontRef>
+        </p:style>
+        <p:txBody>
+          <a:bodyPr rtlCol="0" anchor="ctr"/>
+          <a:lstStyle/>
+          <a:p>
+            <a:pPr algn="ctr"/>
+          </a:p>
+        </p:txBody>
+      </p:sp>
+      <p:sp>
+        <p:nvSpPr>
+          <p:cNvPr id="6" name="TextBox 5"/>
+          <p:cNvSpPr txBox="1"/>
+          <p:nvPr/>
+        </p:nvSpPr>
+        <p:spPr>
+          <a:xfrm>
+            <a:off x="438922" y="721766"/>
+            <a:ext cx="8851613" cy="829056"/>
+          </a:xfrm>
+          <a:prstGeom prst="rect">
+            <a:avLst/>
+          </a:prstGeom>
+          <a:noFill/>
+        </p:spPr>
+        <p:txBody>
+          <a:bodyPr wrap="square" anchor="t" lIns="0" rIns="0" tIns="0" bIns="0">
+            <a:spAutoFit/>
+          </a:bodyPr>
+          <a:lstStyle/>
+          <a:p>
+            <a:pPr algn="l">
+              <a:lnSpc>
+                <a:spcPct val="110000"/>
+              </a:lnSpc>
+              <a:spcAft>
+                <a:spcPts val="200"/>
+              </a:spcAft>
+            </a:pPr>
+            <a:r>
+              <a:rPr sz="2400" b="0" i="0" spc="-90">
+                <a:solidFill>
+                  <a:srgbClr val="314359"/>
+                </a:solidFill>
+                <a:latin typeface="Times New Roman"/>
+              </a:rPr>
+              <a:t>2.21 Responsible ownership, by construction</a:t>
+            </a:r>
+          </a:p>
+        </p:txBody>
+      </p:sp>
+      <p:sp>
+        <p:nvSpPr>
+          <p:cNvPr id="7" name="TextBox 6"/>
+          <p:cNvSpPr txBox="1"/>
+          <p:nvPr/>
+        </p:nvSpPr>
+        <p:spPr>
+          <a:xfrm>
+            <a:off x="6583844" y="6876288"/>
+            <a:ext cx="2926153" cy="292608"/>
+          </a:xfrm>
+          <a:prstGeom prst="rect">
+            <a:avLst/>
+          </a:prstGeom>
+          <a:noFill/>
+        </p:spPr>
+        <p:txBody>
+          <a:bodyPr wrap="square" anchor="t" lIns="0" rIns="0" tIns="0" bIns="0">
+            <a:spAutoFit/>
+          </a:bodyPr>
+          <a:lstStyle/>
+          <a:p>
+            <a:pPr algn="r">
+              <a:lnSpc>
+                <a:spcPct val="110000"/>
+              </a:lnSpc>
+              <a:spcAft>
+                <a:spcPts val="0"/>
+              </a:spcAft>
+            </a:pPr>
+            <a:r>
+              <a:rPr sz="680" b="0" i="0">
+                <a:solidFill>
+                  <a:srgbClr val="556A83"/>
+                </a:solidFill>
+                <a:latin typeface="Arial"/>
+              </a:rPr>
+              <a:t>Strictly confidential          27</a:t>
+            </a:r>
+          </a:p>
+        </p:txBody>
+      </p:sp>
+      <p:sp>
+        <p:nvSpPr>
+          <p:cNvPr id="8" name="TextBox 7"/>
+          <p:cNvSpPr txBox="1"/>
+          <p:nvPr/>
+        </p:nvSpPr>
+        <p:spPr>
+          <a:xfrm>
+            <a:off x="548653" y="1901952"/>
+            <a:ext cx="8705305" cy="4584192"/>
+          </a:xfrm>
+          <a:prstGeom prst="rect">
+            <a:avLst/>
+          </a:prstGeom>
+          <a:noFill/>
+        </p:spPr>
+        <p:txBody>
+          <a:bodyPr wrap="square" anchor="t" lIns="0" rIns="0" tIns="0" bIns="0">
+            <a:spAutoFit/>
+          </a:bodyPr>
+          <a:lstStyle/>
+          <a:p>
+            <a:pPr marL="186949" indent="-186949">
+              <a:lnSpc>
+                <a:spcPct val="112000"/>
+              </a:lnSpc>
+              <a:spcAft>
+                <a:spcPts val="1400"/>
+              </a:spcAft>
+            </a:pPr>
+            <a:r>
+              <a:rPr sz="1280" b="1">
+                <a:solidFill>
+                  <a:srgbClr val="314359"/>
+                </a:solidFill>
+                <a:latin typeface="Arial"/>
+              </a:rPr>
+              <a:t>›  </a:t>
+            </a:r>
+            <a:r>
+              <a:rPr sz="1280" b="1">
+                <a:solidFill>
+                  <a:srgbClr val="314359"/>
+                </a:solidFill>
+                <a:latin typeface="Arial"/>
+              </a:rPr>
+              <a:t>Governance is the lever.</a:t>
+            </a:r>
+            <a:r>
+              <a:rPr sz="1280">
+                <a:solidFill>
+                  <a:srgbClr val="0E1620"/>
+                </a:solidFill>
+                <a:latin typeface="Arial"/>
+              </a:rPr>
+              <a:t>  Value is created through board representation and active promotion of strong corporate governance across all holdings.</a:t>
+            </a:r>
+          </a:p>
+          <a:p>
+            <a:pPr marL="186949" indent="-186949">
+              <a:lnSpc>
+                <a:spcPct val="112000"/>
+              </a:lnSpc>
+              <a:spcAft>
+                <a:spcPts val="1400"/>
+              </a:spcAft>
+            </a:pPr>
+            <a:r>
+              <a:rPr sz="1280" b="1">
+                <a:solidFill>
+                  <a:srgbClr val="314359"/>
+                </a:solidFill>
+                <a:latin typeface="Arial"/>
+              </a:rPr>
+              <a:t>›  </a:t>
+            </a:r>
+            <a:r>
+              <a:rPr sz="1280" b="1">
+                <a:solidFill>
+                  <a:srgbClr val="314359"/>
+                </a:solidFill>
+                <a:latin typeface="Arial"/>
+              </a:rPr>
+              <a:t>Five improvement dimensions.</a:t>
+            </a:r>
+            <a:r>
+              <a:rPr sz="1280">
+                <a:solidFill>
+                  <a:srgbClr val="0E1620"/>
+                </a:solidFill>
+                <a:latin typeface="Arial"/>
+              </a:rPr>
+              <a:t>  Operational, financial, structural, environmental and social improvements — each tied to enterprise value.</a:t>
+            </a:r>
+          </a:p>
+          <a:p>
+            <a:pPr marL="186949" indent="-186949">
+              <a:lnSpc>
+                <a:spcPct val="112000"/>
+              </a:lnSpc>
+              <a:spcAft>
+                <a:spcPts val="1400"/>
+              </a:spcAft>
+            </a:pPr>
+            <a:r>
+              <a:rPr sz="1280" b="1">
+                <a:solidFill>
+                  <a:srgbClr val="314359"/>
+                </a:solidFill>
+                <a:latin typeface="Arial"/>
+              </a:rPr>
+              <a:t>›  </a:t>
+            </a:r>
+            <a:r>
+              <a:rPr sz="1280" b="1">
+                <a:solidFill>
+                  <a:srgbClr val="314359"/>
+                </a:solidFill>
+                <a:latin typeface="Arial"/>
+              </a:rPr>
+              <a:t>PRI signatory since 2019,</a:t>
+            </a:r>
+            <a:r>
+              <a:rPr sz="1280">
+                <a:solidFill>
+                  <a:srgbClr val="0E1620"/>
+                </a:solidFill>
+                <a:latin typeface="Arial"/>
+              </a:rPr>
+              <a:t>  adhering to the Six Principles for Responsible Investment.</a:t>
+            </a:r>
+          </a:p>
+          <a:p>
+            <a:pPr marL="186949" indent="-186949">
+              <a:lnSpc>
+                <a:spcPct val="112000"/>
+              </a:lnSpc>
+              <a:spcAft>
+                <a:spcPts val="1400"/>
+              </a:spcAft>
+            </a:pPr>
+            <a:r>
+              <a:rPr sz="1280" b="1">
+                <a:solidFill>
+                  <a:srgbClr val="314359"/>
+                </a:solidFill>
+                <a:latin typeface="Arial"/>
+              </a:rPr>
+              <a:t>›  </a:t>
+            </a:r>
+            <a:r>
+              <a:rPr sz="1280" b="1">
+                <a:solidFill>
+                  <a:srgbClr val="314359"/>
+                </a:solidFill>
+                <a:latin typeface="Arial"/>
+              </a:rPr>
+              <a:t>Credible oversight.</a:t>
+            </a:r>
+            <a:r>
+              <a:rPr sz="1280">
+                <a:solidFill>
+                  <a:srgbClr val="0E1620"/>
+                </a:solidFill>
+                <a:latin typeface="Arial"/>
+              </a:rPr>
+              <a:t>  SEB custodian · MUFG administrator · KPMG auditor · Swedish FI-registered AIFM.</a:t>
+            </a:r>
+          </a:p>
+        </p:txBody>
+      </p:sp>
+    </p:spTree>
+  </p:cSld>
+  <p:clrMapOvr>
+    <a:masterClrMapping/>
+  </p:clrMapOvr>
+</p:sld>
+</file>
+
+<file path=ppt/slides/slide31.xml><?xml version="1.0" encoding="utf-8"?>
+<p:sld xmlns:a="http://schemas.openxmlformats.org/drawingml/2006/main" xmlns:p="http://schemas.openxmlformats.org/presentationml/2006/main" xmlns:r="http://schemas.openxmlformats.org/officeDocument/2006/relationships">
+  <p:cSld>
+    <p:spTree>
+      <p:nvGrpSpPr>
+        <p:cNvPr id="1" name=""/>
+        <p:cNvGrpSpPr/>
+        <p:nvPr/>
+      </p:nvGrpSpPr>
+      <p:grpSpPr/>
+      <p:sp>
+        <p:nvSpPr>
+          <p:cNvPr id="2" name="Rectangle 1"/>
+          <p:cNvSpPr/>
+          <p:nvPr/>
+        </p:nvSpPr>
+        <p:spPr>
+          <a:xfrm>
+            <a:off x="0" y="0"/>
+            <a:ext cx="9753600" cy="7315200"/>
+          </a:xfrm>
+          <a:prstGeom prst="rect">
+            <a:avLst/>
+          </a:prstGeom>
+          <a:solidFill>
+            <a:srgbClr val="152130"/>
+          </a:solidFill>
+          <a:ln>
+            <a:noFill/>
+          </a:ln>
+          <a:effectLst/>
+        </p:spPr>
+        <p:style>
+          <a:lnRef idx="1">
+            <a:schemeClr val="accent1"/>
+          </a:lnRef>
+          <a:fillRef idx="3">
+            <a:schemeClr val="accent1"/>
+          </a:fillRef>
+          <a:effectRef idx="2">
+            <a:schemeClr val="accent1"/>
+          </a:effectRef>
+          <a:fontRef idx="minor">
+            <a:schemeClr val="lt1"/>
+          </a:fontRef>
+        </p:style>
+        <p:txBody>
+          <a:bodyPr rtlCol="0" anchor="ctr"/>
+          <a:lstStyle/>
+          <a:p>
+            <a:pPr algn="ctr"/>
+          </a:p>
+        </p:txBody>
+      </p:sp>
+      <p:pic>
+        <p:nvPicPr>
+          <p:cNvPr id="3" name="Picture 2" descr="logo_white.png"/>
+          <p:cNvPicPr>
+            <a:picLocks noChangeAspect="1"/>
+          </p:cNvPicPr>
+          <p:nvPr/>
+        </p:nvPicPr>
+        <p:blipFill>
+          <a:blip r:embed="rId2"/>
+          <a:stretch>
+            <a:fillRect/>
+          </a:stretch>
+        </p:blipFill>
+        <p:spPr>
+          <a:xfrm>
+            <a:off x="438922" y="536448"/>
+            <a:ext cx="1768098" cy="380399"/>
+          </a:xfrm>
+          <a:prstGeom prst="rect">
+            <a:avLst/>
+          </a:prstGeom>
+        </p:spPr>
+      </p:pic>
+      <p:sp>
+        <p:nvSpPr>
+          <p:cNvPr id="4" name="Rectangle 3"/>
+          <p:cNvSpPr/>
+          <p:nvPr/>
+        </p:nvSpPr>
+        <p:spPr>
+          <a:xfrm>
+            <a:off x="0" y="2633472"/>
+            <a:ext cx="365769" cy="29802"/>
+          </a:xfrm>
+          <a:prstGeom prst="rect">
+            <a:avLst/>
+          </a:prstGeom>
+          <a:solidFill>
+            <a:srgbClr val="556A83"/>
+          </a:solidFill>
+          <a:ln>
+            <a:noFill/>
+          </a:ln>
+          <a:effectLst/>
+        </p:spPr>
+        <p:style>
+          <a:lnRef idx="1">
+            <a:schemeClr val="accent1"/>
+          </a:lnRef>
+          <a:fillRef idx="3">
+            <a:schemeClr val="accent1"/>
+          </a:fillRef>
+          <a:effectRef idx="2">
+            <a:schemeClr val="accent1"/>
+          </a:effectRef>
+          <a:fontRef idx="minor">
+            <a:schemeClr val="lt1"/>
+          </a:fontRef>
+        </p:style>
+        <p:txBody>
+          <a:bodyPr rtlCol="0" anchor="ctr"/>
+          <a:lstStyle/>
+          <a:p>
+            <a:pPr algn="ctr"/>
+          </a:p>
+        </p:txBody>
+      </p:sp>
+      <p:sp>
+        <p:nvSpPr>
+          <p:cNvPr id="5" name="TextBox 4"/>
+          <p:cNvSpPr txBox="1"/>
+          <p:nvPr/>
+        </p:nvSpPr>
+        <p:spPr>
+          <a:xfrm>
+            <a:off x="438922" y="2877312"/>
+            <a:ext cx="8046921" cy="1560576"/>
+          </a:xfrm>
+          <a:prstGeom prst="rect">
+            <a:avLst/>
+          </a:prstGeom>
+          <a:noFill/>
+        </p:spPr>
+        <p:txBody>
+          <a:bodyPr wrap="square" anchor="t" lIns="0" rIns="0" tIns="0" bIns="0">
+            <a:spAutoFit/>
+          </a:bodyPr>
+          <a:lstStyle/>
+          <a:p>
+            <a:pPr algn="l">
+              <a:lnSpc>
+                <a:spcPct val="110000"/>
+              </a:lnSpc>
+              <a:spcAft>
+                <a:spcPts val="800"/>
+              </a:spcAft>
+            </a:pPr>
+            <a:r>
+              <a:rPr sz="2080" b="0" i="0" spc="-78">
+                <a:solidFill>
+                  <a:srgbClr val="FFFFFF"/>
+                </a:solidFill>
+                <a:latin typeface="Times New Roman"/>
+              </a:rPr>
+              <a:t>The asset class rewards patient, governance-minded capital.</a:t>
+            </a:r>
+          </a:p>
+          <a:p>
+            <a:pPr algn="l">
+              <a:lnSpc>
+                <a:spcPct val="110000"/>
+              </a:lnSpc>
+              <a:spcAft>
+                <a:spcPts val="0"/>
+              </a:spcAft>
+            </a:pPr>
+            <a:r>
+              <a:rPr sz="1440" b="0" i="1">
+                <a:solidFill>
+                  <a:srgbClr val="E2E5E9"/>
+                </a:solidFill>
+                <a:latin typeface="Times New Roman"/>
+              </a:rPr>
+              <a:t>Among engaged owners, Athanase brings the team, the discipline and the 20-year proof to deliver it.</a:t>
+            </a:r>
+          </a:p>
+        </p:txBody>
+      </p:sp>
+      <p:sp>
+        <p:nvSpPr>
+          <p:cNvPr id="6" name="TextBox 5"/>
+          <p:cNvSpPr txBox="1"/>
+          <p:nvPr/>
+        </p:nvSpPr>
+        <p:spPr>
+          <a:xfrm>
+            <a:off x="438922" y="5266944"/>
+            <a:ext cx="4389229" cy="1365504"/>
+          </a:xfrm>
+          <a:prstGeom prst="rect">
+            <a:avLst/>
+          </a:prstGeom>
+          <a:noFill/>
+        </p:spPr>
+        <p:txBody>
+          <a:bodyPr wrap="square" anchor="t" lIns="0" rIns="0" tIns="0" bIns="0">
+            <a:spAutoFit/>
+          </a:bodyPr>
+          <a:lstStyle/>
+          <a:p>
+            <a:pPr algn="l">
+              <a:lnSpc>
+                <a:spcPct val="110000"/>
+              </a:lnSpc>
+              <a:spcAft>
+                <a:spcPts val="200"/>
+              </a:spcAft>
+            </a:pPr>
+            <a:r>
+              <a:rPr sz="1200" b="1" i="0">
+                <a:solidFill>
+                  <a:srgbClr val="FFFFFF"/>
+                </a:solidFill>
+                <a:latin typeface="Arial"/>
+              </a:rPr>
+              <a:t>Stefan Charette</a:t>
+            </a:r>
+          </a:p>
+          <a:p>
+            <a:pPr algn="l">
+              <a:lnSpc>
+                <a:spcPct val="110000"/>
+              </a:lnSpc>
+              <a:spcAft>
+                <a:spcPts val="800"/>
+              </a:spcAft>
+            </a:pPr>
+            <a:r>
+              <a:rPr sz="960" b="0" i="0">
+                <a:solidFill>
+                  <a:srgbClr val="E2E5E9"/>
+                </a:solidFill>
+                <a:latin typeface="Arial"/>
+              </a:rPr>
+              <a:t>Athanase Industrial Partner</a:t>
+            </a:r>
+          </a:p>
+          <a:p>
+            <a:pPr algn="l">
+              <a:lnSpc>
+                <a:spcPct val="110000"/>
+              </a:lnSpc>
+              <a:spcAft>
+                <a:spcPts val="0"/>
+              </a:spcAft>
+            </a:pPr>
+            <a:r>
+              <a:rPr sz="960" b="0" i="0">
+                <a:solidFill>
+                  <a:srgbClr val="556A83"/>
+                </a:solidFill>
+                <a:latin typeface="Arial"/>
+              </a:rPr>
+              <a:t>charette@athanase.se   ·   +46 73 994 7079</a:t>
+            </a:r>
+          </a:p>
+        </p:txBody>
+      </p:sp>
+      <p:sp>
+        <p:nvSpPr>
+          <p:cNvPr id="7" name="TextBox 6"/>
+          <p:cNvSpPr txBox="1"/>
+          <p:nvPr/>
+        </p:nvSpPr>
+        <p:spPr>
+          <a:xfrm>
+            <a:off x="6583844" y="5266944"/>
+            <a:ext cx="2779845" cy="1463040"/>
+          </a:xfrm>
+          <a:prstGeom prst="rect">
+            <a:avLst/>
+          </a:prstGeom>
+          <a:noFill/>
+        </p:spPr>
+        <p:txBody>
+          <a:bodyPr wrap="square" anchor="t" lIns="0" rIns="0" tIns="0" bIns="0">
+            <a:spAutoFit/>
+          </a:bodyPr>
+          <a:lstStyle/>
+          <a:p>
+            <a:pPr algn="l">
+              <a:lnSpc>
+                <a:spcPct val="110000"/>
+              </a:lnSpc>
+              <a:spcAft>
+                <a:spcPts val="400"/>
+              </a:spcAft>
+            </a:pPr>
+            <a:r>
+              <a:rPr sz="960" b="1" i="0">
+                <a:solidFill>
+                  <a:srgbClr val="FFFFFF"/>
+                </a:solidFill>
+                <a:latin typeface="Arial"/>
+              </a:rPr>
+              <a:t>Offices</a:t>
+            </a:r>
+          </a:p>
+          <a:p>
+            <a:pPr algn="l">
+              <a:lnSpc>
+                <a:spcPct val="110000"/>
+              </a:lnSpc>
+              <a:spcAft>
+                <a:spcPts val="400"/>
+              </a:spcAft>
+            </a:pPr>
+            <a:r>
+              <a:rPr sz="880" b="0" i="0">
+                <a:solidFill>
+                  <a:srgbClr val="556A83"/>
+                </a:solidFill>
+                <a:latin typeface="Arial"/>
+              </a:rPr>
+              <a:t>Birger Jarlsgatan 6, 114 34 Stockholm, Sweden</a:t>
+            </a:r>
+          </a:p>
+          <a:p>
+            <a:pPr algn="l">
+              <a:lnSpc>
+                <a:spcPct val="110000"/>
+              </a:lnSpc>
+              <a:spcAft>
+                <a:spcPts val="0"/>
+              </a:spcAft>
+            </a:pPr>
+            <a:r>
+              <a:rPr sz="880" b="0" i="0">
+                <a:solidFill>
+                  <a:srgbClr val="556A83"/>
+                </a:solidFill>
+                <a:latin typeface="Arial"/>
+              </a:rPr>
+              <a:t>Landmark Square, West Bay Road, Grand Cayman</a:t>
             </a:r>
           </a:p>
         </p:txBody>

--- a/Athanase_Engaged_Ownership_Allocator_Deck.pptx
+++ b/Athanase_Engaged_Ownership_Allocator_Deck.pptx
@@ -37,6 +37,14 @@
     <p:sldId id="285" r:id="rId36"/>
     <p:sldId id="286" r:id="rId37"/>
     <p:sldId id="287" r:id="rId38"/>
+    <p:sldId id="288" r:id="rId39"/>
+    <p:sldId id="289" r:id="rId40"/>
+    <p:sldId id="290" r:id="rId41"/>
+    <p:sldId id="291" r:id="rId42"/>
+    <p:sldId id="292" r:id="rId43"/>
+    <p:sldId id="293" r:id="rId44"/>
+    <p:sldId id="294" r:id="rId45"/>
+    <p:sldId id="295" r:id="rId46"/>
   </p:sldIdLst>
   <p:sldSz cx="9753600" cy="7315200" type="screen4x3"/>
   <p:notesSz cx="6858000" cy="9144000"/>
@@ -16851,6 +16859,219 @@
                 </a:solidFill>
                 <a:latin typeface="Arial"/>
               </a:rPr>
+              <a:t>What allocators actually earn from private equity</a:t>
+            </a:r>
+            <a:r>
+              <a:rPr sz="680" i="1">
+                <a:solidFill>
+                  <a:srgbClr val="556A83"/>
+                </a:solidFill>
+                <a:latin typeface="Arial"/>
+              </a:rPr>
+              <a:t>   (Table 9)</a:t>
+            </a:r>
+          </a:p>
+          <a:p>
+            <a:pPr>
+              <a:lnSpc>
+                <a:spcPct val="103000"/>
+              </a:lnSpc>
+              <a:spcAft>
+                <a:spcPts val="450"/>
+              </a:spcAft>
+            </a:pPr>
+            <a:r>
+              <a:rPr sz="840" b="1">
+                <a:solidFill>
+                  <a:srgbClr val="314359"/>
+                </a:solidFill>
+                <a:latin typeface="Arial"/>
+              </a:rPr>
+              <a:t>2.23   </a:t>
+            </a:r>
+            <a:r>
+              <a:rPr sz="840">
+                <a:solidFill>
+                  <a:srgbClr val="314359"/>
+                </a:solidFill>
+                <a:latin typeface="Arial"/>
+              </a:rPr>
+              <a:t>Switching a private-equity sleeve into Athanase</a:t>
+            </a:r>
+            <a:r>
+              <a:rPr sz="680" i="1">
+                <a:solidFill>
+                  <a:srgbClr val="556A83"/>
+                </a:solidFill>
+                <a:latin typeface="Arial"/>
+              </a:rPr>
+              <a:t>   (Figure 8)</a:t>
+            </a:r>
+          </a:p>
+          <a:p>
+            <a:pPr>
+              <a:lnSpc>
+                <a:spcPct val="103000"/>
+              </a:lnSpc>
+              <a:spcAft>
+                <a:spcPts val="450"/>
+              </a:spcAft>
+            </a:pPr>
+            <a:r>
+              <a:rPr sz="840" b="1">
+                <a:solidFill>
+                  <a:srgbClr val="314359"/>
+                </a:solidFill>
+                <a:latin typeface="Arial"/>
+              </a:rPr>
+              <a:t>2.24   </a:t>
+            </a:r>
+            <a:r>
+              <a:rPr sz="840">
+                <a:solidFill>
+                  <a:srgbClr val="314359"/>
+                </a:solidFill>
+                <a:latin typeface="Arial"/>
+              </a:rPr>
+              <a:t>The volatility gap is settled in the literature</a:t>
+            </a:r>
+            <a:r>
+              <a:rPr sz="680" i="1">
+                <a:solidFill>
+                  <a:srgbClr val="556A83"/>
+                </a:solidFill>
+                <a:latin typeface="Arial"/>
+              </a:rPr>
+              <a:t>   (Figure 9)</a:t>
+            </a:r>
+          </a:p>
+          <a:p>
+            <a:pPr>
+              <a:lnSpc>
+                <a:spcPct val="103000"/>
+              </a:lnSpc>
+              <a:spcAft>
+                <a:spcPts val="450"/>
+              </a:spcAft>
+            </a:pPr>
+            <a:r>
+              <a:rPr sz="840" b="1">
+                <a:solidFill>
+                  <a:srgbClr val="314359"/>
+                </a:solidFill>
+                <a:latin typeface="Arial"/>
+              </a:rPr>
+              <a:t>2.25   </a:t>
+            </a:r>
+            <a:r>
+              <a:rPr sz="840">
+                <a:solidFill>
+                  <a:srgbClr val="314359"/>
+                </a:solidFill>
+                <a:latin typeface="Arial"/>
+              </a:rPr>
+              <a:t>Same headline volatility — far lower real risk</a:t>
+            </a:r>
+            <a:r>
+              <a:rPr sz="680" i="1">
+                <a:solidFill>
+                  <a:srgbClr val="556A83"/>
+                </a:solidFill>
+                <a:latin typeface="Arial"/>
+              </a:rPr>
+              <a:t>   (Figure 10)</a:t>
+            </a:r>
+          </a:p>
+          <a:p>
+            <a:pPr>
+              <a:lnSpc>
+                <a:spcPct val="103000"/>
+              </a:lnSpc>
+              <a:spcAft>
+                <a:spcPts val="450"/>
+              </a:spcAft>
+            </a:pPr>
+            <a:r>
+              <a:rPr sz="840" b="1">
+                <a:solidFill>
+                  <a:srgbClr val="314359"/>
+                </a:solidFill>
+                <a:latin typeface="Arial"/>
+              </a:rPr>
+              <a:t>2.26   </a:t>
+            </a:r>
+            <a:r>
+              <a:rPr sz="840">
+                <a:solidFill>
+                  <a:srgbClr val="314359"/>
+                </a:solidFill>
+                <a:latin typeface="Arial"/>
+              </a:rPr>
+              <a:t>PE’s “diversification” is an artefact — Athanase’s is real</a:t>
+            </a:r>
+            <a:r>
+              <a:rPr sz="680" i="1">
+                <a:solidFill>
+                  <a:srgbClr val="556A83"/>
+                </a:solidFill>
+                <a:latin typeface="Arial"/>
+              </a:rPr>
+              <a:t>   (Figure 11)</a:t>
+            </a:r>
+          </a:p>
+          <a:p>
+            <a:pPr>
+              <a:lnSpc>
+                <a:spcPct val="103000"/>
+              </a:lnSpc>
+              <a:spcAft>
+                <a:spcPts val="450"/>
+              </a:spcAft>
+            </a:pPr>
+            <a:r>
+              <a:rPr sz="840" b="1">
+                <a:solidFill>
+                  <a:srgbClr val="314359"/>
+                </a:solidFill>
+                <a:latin typeface="Arial"/>
+              </a:rPr>
+              <a:t>2.27   </a:t>
+            </a:r>
+            <a:r>
+              <a:rPr sz="840">
+                <a:solidFill>
+                  <a:srgbClr val="314359"/>
+                </a:solidFill>
+                <a:latin typeface="Arial"/>
+              </a:rPr>
+              <a:t>When the tide goes out: the drawdown trap</a:t>
+            </a:r>
+          </a:p>
+          <a:p>
+            <a:pPr>
+              <a:lnSpc>
+                <a:spcPct val="103000"/>
+              </a:lnSpc>
+              <a:spcAft>
+                <a:spcPts val="450"/>
+              </a:spcAft>
+            </a:pPr>
+            <a:r>
+              <a:rPr sz="840" b="1">
+                <a:solidFill>
+                  <a:srgbClr val="314359"/>
+                </a:solidFill>
+                <a:latin typeface="Arial"/>
+              </a:rPr>
+              <a:t>2.28   </a:t>
+            </a:r>
+            <a:r>
+              <a:rPr sz="840">
+                <a:solidFill>
+                  <a:srgbClr val="314359"/>
+                </a:solidFill>
+                <a:latin typeface="Arial"/>
+              </a:rPr>
               <a:t>Responsible ownership, by construction</a:t>
             </a:r>
           </a:p>
@@ -44036,21 +44257,63 @@
                 </a:solidFill>
                 <a:latin typeface="Arial"/>
               </a:rPr>
-              <a:t>Ownership Model</a:t>
-            </a:r>
-          </a:p>
-        </p:txBody>
-      </p:sp>
-      <p:sp>
-        <p:nvSpPr>
-          <p:cNvPr id="5" name="Rectangle 4"/>
+              <a:t>Private Equity</a:t>
+            </a:r>
+          </a:p>
+        </p:txBody>
+      </p:sp>
+      <p:sp>
+        <p:nvSpPr>
+          <p:cNvPr id="5" name="TextBox 4"/>
+          <p:cNvSpPr txBox="1"/>
+          <p:nvPr/>
+        </p:nvSpPr>
+        <p:spPr>
+          <a:xfrm>
+            <a:off x="7242229" y="263347"/>
+            <a:ext cx="2084884" cy="292608"/>
+          </a:xfrm>
+          <a:prstGeom prst="rect">
+            <a:avLst/>
+          </a:prstGeom>
+          <a:noFill/>
+        </p:spPr>
+        <p:txBody>
+          <a:bodyPr wrap="square" anchor="t" lIns="0" rIns="0" tIns="0" bIns="0">
+            <a:spAutoFit/>
+          </a:bodyPr>
+          <a:lstStyle/>
+          <a:p>
+            <a:pPr algn="r">
+              <a:lnSpc>
+                <a:spcPct val="110000"/>
+              </a:lnSpc>
+              <a:spcAft>
+                <a:spcPts val="0"/>
+              </a:spcAft>
+            </a:pPr>
+            <a:r>
+              <a:rPr sz="880" b="1" i="0">
+                <a:solidFill>
+                  <a:srgbClr val="556A83"/>
+                </a:solidFill>
+                <a:latin typeface="Arial"/>
+              </a:rPr>
+              <a:t>Table 9</a:t>
+            </a:r>
+          </a:p>
+        </p:txBody>
+      </p:sp>
+      <p:sp>
+        <p:nvSpPr>
+          <p:cNvPr id="6" name="Rectangle 5"/>
           <p:cNvSpPr/>
           <p:nvPr/>
         </p:nvSpPr>
         <p:spPr>
           <a:xfrm>
             <a:off x="0" y="604723"/>
-            <a:ext cx="9753600" cy="1024128"/>
+            <a:ext cx="9753600" cy="1414272"/>
           </a:xfrm>
           <a:prstGeom prst="rect">
             <a:avLst/>
@@ -44087,7 +44350,7 @@
       </p:sp>
       <p:sp>
         <p:nvSpPr>
-          <p:cNvPr id="6" name="TextBox 5"/>
+          <p:cNvPr id="7" name="TextBox 6"/>
           <p:cNvSpPr txBox="1"/>
           <p:nvPr/>
         </p:nvSpPr>
@@ -44122,14 +44385,56 @@
                 </a:solidFill>
                 <a:latin typeface="Times New Roman"/>
               </a:rPr>
-              <a:t>2.22 Responsible ownership, by construction</a:t>
-            </a:r>
-          </a:p>
-        </p:txBody>
-      </p:sp>
-      <p:sp>
-        <p:nvSpPr>
-          <p:cNvPr id="7" name="TextBox 6"/>
+              <a:t>2.22 What allocators actually earn from private equity</a:t>
+            </a:r>
+          </a:p>
+        </p:txBody>
+      </p:sp>
+      <p:sp>
+        <p:nvSpPr>
+          <p:cNvPr id="8" name="TextBox 7"/>
+          <p:cNvSpPr txBox="1"/>
+          <p:nvPr/>
+        </p:nvSpPr>
+        <p:spPr>
+          <a:xfrm>
+            <a:off x="453553" y="1511808"/>
+            <a:ext cx="8705305" cy="487680"/>
+          </a:xfrm>
+          <a:prstGeom prst="rect">
+            <a:avLst/>
+          </a:prstGeom>
+          <a:noFill/>
+        </p:spPr>
+        <p:txBody>
+          <a:bodyPr wrap="square" anchor="t" lIns="0" rIns="0" tIns="0" bIns="0">
+            <a:spAutoFit/>
+          </a:bodyPr>
+          <a:lstStyle/>
+          <a:p>
+            <a:pPr algn="l">
+              <a:lnSpc>
+                <a:spcPct val="110000"/>
+              </a:lnSpc>
+              <a:spcAft>
+                <a:spcPts val="0"/>
+              </a:spcAft>
+            </a:pPr>
+            <a:r>
+              <a:rPr sz="1040" b="0" i="1">
+                <a:solidFill>
+                  <a:srgbClr val="556A83"/>
+                </a:solidFill>
+                <a:latin typeface="Arial"/>
+              </a:rPr>
+              <a:t>Stripping out headline-IRR marketing, cash-matched (PME) data shows PE earns a real ~3–6 pt premium over public markets — but lands below Athanase.</a:t>
+            </a:r>
+          </a:p>
+        </p:txBody>
+      </p:sp>
+      <p:sp>
+        <p:nvSpPr>
+          <p:cNvPr id="9" name="TextBox 8"/>
           <p:cNvSpPr txBox="1"/>
           <p:nvPr/>
         </p:nvSpPr>
@@ -44169,16 +44474,84 @@
           </a:p>
         </p:txBody>
       </p:sp>
-      <p:sp>
-        <p:nvSpPr>
-          <p:cNvPr id="8" name="TextBox 7"/>
-          <p:cNvSpPr txBox="1"/>
-          <p:nvPr/>
-        </p:nvSpPr>
-        <p:spPr>
-          <a:xfrm>
-            <a:off x="548653" y="1901952"/>
-            <a:ext cx="8705305" cy="4584192"/>
+      <p:pic>
+        <p:nvPicPr>
+          <p:cNvPr id="10" name="Picture 9" descr="d_pe_realised.png"/>
+          <p:cNvPicPr>
+            <a:picLocks noChangeAspect="1"/>
+          </p:cNvPicPr>
+          <p:nvPr/>
+        </p:nvPicPr>
+        <p:blipFill>
+          <a:blip r:embed="rId3"/>
+          <a:stretch>
+            <a:fillRect/>
+          </a:stretch>
+        </p:blipFill>
+        <p:spPr>
+          <a:xfrm>
+            <a:off x="402346" y="2243328"/>
+            <a:ext cx="5791184" cy="2816422"/>
+          </a:xfrm>
+          <a:prstGeom prst="rect">
+            <a:avLst/>
+          </a:prstGeom>
+        </p:spPr>
+      </p:pic>
+      <p:sp>
+        <p:nvSpPr>
+          <p:cNvPr id="11" name="Rectangle 10"/>
+          <p:cNvSpPr/>
+          <p:nvPr/>
+        </p:nvSpPr>
+        <p:spPr>
+          <a:xfrm>
+            <a:off x="6547266" y="2292096"/>
+            <a:ext cx="2779845" cy="1131417"/>
+          </a:xfrm>
+          <a:prstGeom prst="rect">
+            <a:avLst/>
+          </a:prstGeom>
+          <a:solidFill>
+            <a:srgbClr val="F6F7F9"/>
+          </a:solidFill>
+          <a:ln>
+            <a:noFill/>
+          </a:ln>
+          <a:effectLst/>
+        </p:spPr>
+        <p:style>
+          <a:lnRef idx="1">
+            <a:schemeClr val="accent1"/>
+          </a:lnRef>
+          <a:fillRef idx="3">
+            <a:schemeClr val="accent1"/>
+          </a:fillRef>
+          <a:effectRef idx="2">
+            <a:schemeClr val="accent1"/>
+          </a:effectRef>
+          <a:fontRef idx="minor">
+            <a:schemeClr val="lt1"/>
+          </a:fontRef>
+        </p:style>
+        <p:txBody>
+          <a:bodyPr rtlCol="0" anchor="ctr"/>
+          <a:lstStyle/>
+          <a:p>
+            <a:pPr algn="ctr"/>
+          </a:p>
+        </p:txBody>
+      </p:sp>
+      <p:sp>
+        <p:nvSpPr>
+          <p:cNvPr id="12" name="TextBox 11"/>
+          <p:cNvSpPr txBox="1"/>
+          <p:nvPr/>
+        </p:nvSpPr>
+        <p:spPr>
+          <a:xfrm>
+            <a:off x="6693574" y="2389632"/>
+            <a:ext cx="2487230" cy="243840"/>
           </a:xfrm>
           <a:prstGeom prst="rect">
             <a:avLst/>
@@ -44191,151 +44564,448 @@
           </a:bodyPr>
           <a:lstStyle/>
           <a:p>
-            <a:pPr marL="186949" indent="-186949">
+            <a:pPr algn="l">
+              <a:lnSpc>
+                <a:spcPct val="110000"/>
+              </a:lnSpc>
+              <a:spcAft>
+                <a:spcPts val="0"/>
+              </a:spcAft>
+            </a:pPr>
+            <a:r>
+              <a:rPr sz="840" b="1" i="0">
+                <a:solidFill>
+                  <a:srgbClr val="314359"/>
+                </a:solidFill>
+                <a:latin typeface="Arial"/>
+              </a:rPr>
+              <a:t>HEADLINE ≠ REALISED</a:t>
+            </a:r>
+          </a:p>
+        </p:txBody>
+      </p:sp>
+      <p:sp>
+        <p:nvSpPr>
+          <p:cNvPr id="13" name="TextBox 12"/>
+          <p:cNvSpPr txBox="1"/>
+          <p:nvPr/>
+        </p:nvSpPr>
+        <p:spPr>
+          <a:xfrm>
+            <a:off x="6693574" y="2643225"/>
+            <a:ext cx="2487230" cy="760780"/>
+          </a:xfrm>
+          <a:prstGeom prst="rect">
+            <a:avLst/>
+          </a:prstGeom>
+          <a:noFill/>
+        </p:spPr>
+        <p:txBody>
+          <a:bodyPr wrap="square" anchor="t" lIns="0" rIns="0" tIns="0" bIns="0">
+            <a:spAutoFit/>
+          </a:bodyPr>
+          <a:lstStyle/>
+          <a:p>
+            <a:pPr algn="l">
               <a:lnSpc>
                 <a:spcPct val="112000"/>
               </a:lnSpc>
               <a:spcAft>
-                <a:spcPts val="1400"/>
-              </a:spcAft>
-            </a:pPr>
-            <a:r>
-              <a:rPr sz="1280" b="1">
+                <a:spcPts val="0"/>
+              </a:spcAft>
+            </a:pPr>
+            <a:r>
+              <a:rPr sz="840" b="0" i="0">
+                <a:solidFill>
+                  <a:srgbClr val="0E1620"/>
+                </a:solidFill>
+                <a:latin typeface="Arial"/>
+              </a:rPr>
+              <a:t>Top-quartile IRR is shown as ~18–22%, struck on drawn capital. Cash-matched to public markets, the real figure is far lower.</a:t>
+            </a:r>
+          </a:p>
+        </p:txBody>
+      </p:sp>
+      <p:sp>
+        <p:nvSpPr>
+          <p:cNvPr id="14" name="Rectangle 13"/>
+          <p:cNvSpPr/>
+          <p:nvPr/>
+        </p:nvSpPr>
+        <p:spPr>
+          <a:xfrm>
+            <a:off x="6547266" y="3560064"/>
+            <a:ext cx="2779845" cy="1131417"/>
+          </a:xfrm>
+          <a:prstGeom prst="rect">
+            <a:avLst/>
+          </a:prstGeom>
+          <a:solidFill>
+            <a:srgbClr val="F6F7F9"/>
+          </a:solidFill>
+          <a:ln>
+            <a:noFill/>
+          </a:ln>
+          <a:effectLst/>
+        </p:spPr>
+        <p:style>
+          <a:lnRef idx="1">
+            <a:schemeClr val="accent1"/>
+          </a:lnRef>
+          <a:fillRef idx="3">
+            <a:schemeClr val="accent1"/>
+          </a:fillRef>
+          <a:effectRef idx="2">
+            <a:schemeClr val="accent1"/>
+          </a:effectRef>
+          <a:fontRef idx="minor">
+            <a:schemeClr val="lt1"/>
+          </a:fontRef>
+        </p:style>
+        <p:txBody>
+          <a:bodyPr rtlCol="0" anchor="ctr"/>
+          <a:lstStyle/>
+          <a:p>
+            <a:pPr algn="ctr"/>
+          </a:p>
+        </p:txBody>
+      </p:sp>
+      <p:sp>
+        <p:nvSpPr>
+          <p:cNvPr id="15" name="TextBox 14"/>
+          <p:cNvSpPr txBox="1"/>
+          <p:nvPr/>
+        </p:nvSpPr>
+        <p:spPr>
+          <a:xfrm>
+            <a:off x="6693574" y="3657600"/>
+            <a:ext cx="2487230" cy="243840"/>
+          </a:xfrm>
+          <a:prstGeom prst="rect">
+            <a:avLst/>
+          </a:prstGeom>
+          <a:noFill/>
+        </p:spPr>
+        <p:txBody>
+          <a:bodyPr wrap="square" anchor="t" lIns="0" rIns="0" tIns="0" bIns="0">
+            <a:spAutoFit/>
+          </a:bodyPr>
+          <a:lstStyle/>
+          <a:p>
+            <a:pPr algn="l">
+              <a:lnSpc>
+                <a:spcPct val="110000"/>
+              </a:lnSpc>
+              <a:spcAft>
+                <a:spcPts val="0"/>
+              </a:spcAft>
+            </a:pPr>
+            <a:r>
+              <a:rPr sz="840" b="1" i="0">
                 <a:solidFill>
                   <a:srgbClr val="314359"/>
                 </a:solidFill>
                 <a:latin typeface="Arial"/>
               </a:rPr>
-              <a:t>›  </a:t>
-            </a:r>
-            <a:r>
-              <a:rPr sz="1280" b="1">
+              <a:t>THE REAL PREMIUM IS GENUINE</a:t>
+            </a:r>
+          </a:p>
+        </p:txBody>
+      </p:sp>
+      <p:sp>
+        <p:nvSpPr>
+          <p:cNvPr id="16" name="TextBox 15"/>
+          <p:cNvSpPr txBox="1"/>
+          <p:nvPr/>
+        </p:nvSpPr>
+        <p:spPr>
+          <a:xfrm>
+            <a:off x="6693574" y="3911193"/>
+            <a:ext cx="2487230" cy="760780"/>
+          </a:xfrm>
+          <a:prstGeom prst="rect">
+            <a:avLst/>
+          </a:prstGeom>
+          <a:noFill/>
+        </p:spPr>
+        <p:txBody>
+          <a:bodyPr wrap="square" anchor="t" lIns="0" rIns="0" tIns="0" bIns="0">
+            <a:spAutoFit/>
+          </a:bodyPr>
+          <a:lstStyle/>
+          <a:p>
+            <a:pPr algn="l">
+              <a:lnSpc>
+                <a:spcPct val="112000"/>
+              </a:lnSpc>
+              <a:spcAft>
+                <a:spcPts val="0"/>
+              </a:spcAft>
+            </a:pPr>
+            <a:r>
+              <a:rPr sz="840" b="0" i="0">
+                <a:solidFill>
+                  <a:srgbClr val="0E1620"/>
+                </a:solidFill>
+                <a:latin typeface="Arial"/>
+              </a:rPr>
+              <a:t>PME studies agree: ~1.2× wealth multiple, a real 3–5 pt premium (Cambridge; Kaplan-Harris-Jenkinson / Burgiss; Cliffwater; BVCA).</a:t>
+            </a:r>
+          </a:p>
+        </p:txBody>
+      </p:sp>
+      <p:sp>
+        <p:nvSpPr>
+          <p:cNvPr id="17" name="Rectangle 16"/>
+          <p:cNvSpPr/>
+          <p:nvPr/>
+        </p:nvSpPr>
+        <p:spPr>
+          <a:xfrm>
+            <a:off x="6547266" y="4828032"/>
+            <a:ext cx="2779845" cy="1131417"/>
+          </a:xfrm>
+          <a:prstGeom prst="rect">
+            <a:avLst/>
+          </a:prstGeom>
+          <a:solidFill>
+            <a:srgbClr val="F6F7F9"/>
+          </a:solidFill>
+          <a:ln>
+            <a:noFill/>
+          </a:ln>
+          <a:effectLst/>
+        </p:spPr>
+        <p:style>
+          <a:lnRef idx="1">
+            <a:schemeClr val="accent1"/>
+          </a:lnRef>
+          <a:fillRef idx="3">
+            <a:schemeClr val="accent1"/>
+          </a:fillRef>
+          <a:effectRef idx="2">
+            <a:schemeClr val="accent1"/>
+          </a:effectRef>
+          <a:fontRef idx="minor">
+            <a:schemeClr val="lt1"/>
+          </a:fontRef>
+        </p:style>
+        <p:txBody>
+          <a:bodyPr rtlCol="0" anchor="ctr"/>
+          <a:lstStyle/>
+          <a:p>
+            <a:pPr algn="ctr"/>
+          </a:p>
+        </p:txBody>
+      </p:sp>
+      <p:sp>
+        <p:nvSpPr>
+          <p:cNvPr id="18" name="TextBox 17"/>
+          <p:cNvSpPr txBox="1"/>
+          <p:nvPr/>
+        </p:nvSpPr>
+        <p:spPr>
+          <a:xfrm>
+            <a:off x="6693574" y="4925568"/>
+            <a:ext cx="2487230" cy="243840"/>
+          </a:xfrm>
+          <a:prstGeom prst="rect">
+            <a:avLst/>
+          </a:prstGeom>
+          <a:noFill/>
+        </p:spPr>
+        <p:txBody>
+          <a:bodyPr wrap="square" anchor="t" lIns="0" rIns="0" tIns="0" bIns="0">
+            <a:spAutoFit/>
+          </a:bodyPr>
+          <a:lstStyle/>
+          <a:p>
+            <a:pPr algn="l">
+              <a:lnSpc>
+                <a:spcPct val="110000"/>
+              </a:lnSpc>
+              <a:spcAft>
+                <a:spcPts val="0"/>
+              </a:spcAft>
+            </a:pPr>
+            <a:r>
+              <a:rPr sz="840" b="1" i="0">
                 <a:solidFill>
                   <a:srgbClr val="314359"/>
                 </a:solidFill>
                 <a:latin typeface="Arial"/>
               </a:rPr>
-              <a:t>Governance is the lever.</a:t>
-            </a:r>
-            <a:r>
-              <a:rPr sz="1280">
+              <a:t>BUT BELOW ATHANASE</a:t>
+            </a:r>
+          </a:p>
+        </p:txBody>
+      </p:sp>
+      <p:sp>
+        <p:nvSpPr>
+          <p:cNvPr id="19" name="TextBox 18"/>
+          <p:cNvSpPr txBox="1"/>
+          <p:nvPr/>
+        </p:nvSpPr>
+        <p:spPr>
+          <a:xfrm>
+            <a:off x="6693574" y="5179161"/>
+            <a:ext cx="2487230" cy="760780"/>
+          </a:xfrm>
+          <a:prstGeom prst="rect">
+            <a:avLst/>
+          </a:prstGeom>
+          <a:noFill/>
+        </p:spPr>
+        <p:txBody>
+          <a:bodyPr wrap="square" anchor="t" lIns="0" rIns="0" tIns="0" bIns="0">
+            <a:spAutoFit/>
+          </a:bodyPr>
+          <a:lstStyle/>
+          <a:p>
+            <a:pPr algn="l">
+              <a:lnSpc>
+                <a:spcPct val="112000"/>
+              </a:lnSpc>
+              <a:spcAft>
+                <a:spcPts val="0"/>
+              </a:spcAft>
+            </a:pPr>
+            <a:r>
+              <a:rPr sz="840" b="0" i="0">
                 <a:solidFill>
                   <a:srgbClr val="0E1620"/>
                 </a:solidFill>
                 <a:latin typeface="Arial"/>
               </a:rPr>
-              <a:t>  Value is created through board representation and active promotion of strong corporate governance across all holdings.</a:t>
-            </a:r>
-          </a:p>
-          <a:p>
-            <a:pPr marL="186949" indent="-186949">
-              <a:lnSpc>
-                <a:spcPct val="112000"/>
-              </a:lnSpc>
-              <a:spcAft>
-                <a:spcPts val="1400"/>
-              </a:spcAft>
-            </a:pPr>
-            <a:r>
-              <a:rPr sz="1280" b="1">
-                <a:solidFill>
-                  <a:srgbClr val="314359"/>
-                </a:solidFill>
-                <a:latin typeface="Arial"/>
-              </a:rPr>
-              <a:t>›  </a:t>
-            </a:r>
-            <a:r>
-              <a:rPr sz="1280" b="1">
-                <a:solidFill>
-                  <a:srgbClr val="314359"/>
-                </a:solidFill>
-                <a:latin typeface="Arial"/>
-              </a:rPr>
-              <a:t>Five improvement dimensions.</a:t>
-            </a:r>
-            <a:r>
-              <a:rPr sz="1280">
-                <a:solidFill>
-                  <a:srgbClr val="0E1620"/>
-                </a:solidFill>
-                <a:latin typeface="Arial"/>
-              </a:rPr>
-              <a:t>  Operational, financial, structural, environmental and social improvements — each tied to enterprise value.</a:t>
-            </a:r>
-          </a:p>
-          <a:p>
-            <a:pPr marL="186949" indent="-186949">
-              <a:lnSpc>
-                <a:spcPct val="112000"/>
-              </a:lnSpc>
-              <a:spcAft>
-                <a:spcPts val="1400"/>
-              </a:spcAft>
-            </a:pPr>
-            <a:r>
-              <a:rPr sz="1280" b="1">
-                <a:solidFill>
-                  <a:srgbClr val="314359"/>
-                </a:solidFill>
-                <a:latin typeface="Arial"/>
-              </a:rPr>
-              <a:t>›  </a:t>
-            </a:r>
-            <a:r>
-              <a:rPr sz="1280" b="1">
-                <a:solidFill>
-                  <a:srgbClr val="314359"/>
-                </a:solidFill>
-                <a:latin typeface="Arial"/>
-              </a:rPr>
-              <a:t>PRI signatory since 2019,</a:t>
-            </a:r>
-            <a:r>
-              <a:rPr sz="1280">
-                <a:solidFill>
-                  <a:srgbClr val="0E1620"/>
-                </a:solidFill>
-                <a:latin typeface="Arial"/>
-              </a:rPr>
-              <a:t>  adhering to the Six Principles for Responsible Investment.</a:t>
-            </a:r>
-          </a:p>
-          <a:p>
-            <a:pPr marL="186949" indent="-186949">
-              <a:lnSpc>
-                <a:spcPct val="112000"/>
-              </a:lnSpc>
-              <a:spcAft>
-                <a:spcPts val="1400"/>
-              </a:spcAft>
-            </a:pPr>
-            <a:r>
-              <a:rPr sz="1280" b="1">
-                <a:solidFill>
-                  <a:srgbClr val="314359"/>
-                </a:solidFill>
-                <a:latin typeface="Arial"/>
-              </a:rPr>
-              <a:t>›  </a:t>
-            </a:r>
-            <a:r>
-              <a:rPr sz="1280" b="1">
-                <a:solidFill>
-                  <a:srgbClr val="314359"/>
-                </a:solidFill>
-                <a:latin typeface="Arial"/>
-              </a:rPr>
-              <a:t>Credible oversight.</a:t>
-            </a:r>
-            <a:r>
-              <a:rPr sz="1280">
-                <a:solidFill>
-                  <a:srgbClr val="0E1620"/>
-                </a:solidFill>
-                <a:latin typeface="Arial"/>
-              </a:rPr>
-              <a:t>  SEB custodian · MUFG administrator · KPMG auditor · Swedish FI-registered AIFM.</a:t>
+              <a:t>Allocators realise ~11–14% from PE. Athanase has delivered ~16% — net, real, and fully invested from day one.</a:t>
+            </a:r>
+          </a:p>
+        </p:txBody>
+      </p:sp>
+      <p:sp>
+        <p:nvSpPr>
+          <p:cNvPr id="20" name="Rectangle 19"/>
+          <p:cNvSpPr/>
+          <p:nvPr/>
+        </p:nvSpPr>
+        <p:spPr>
+          <a:xfrm>
+            <a:off x="438922" y="6456883"/>
+            <a:ext cx="8873559" cy="448665"/>
+          </a:xfrm>
+          <a:prstGeom prst="rect">
+            <a:avLst/>
+          </a:prstGeom>
+          <a:solidFill>
+            <a:srgbClr val="152130"/>
+          </a:solidFill>
+          <a:ln>
+            <a:noFill/>
+          </a:ln>
+          <a:effectLst/>
+        </p:spPr>
+        <p:style>
+          <a:lnRef idx="1">
+            <a:schemeClr val="accent1"/>
+          </a:lnRef>
+          <a:fillRef idx="3">
+            <a:schemeClr val="accent1"/>
+          </a:fillRef>
+          <a:effectRef idx="2">
+            <a:schemeClr val="accent1"/>
+          </a:effectRef>
+          <a:fontRef idx="minor">
+            <a:schemeClr val="lt1"/>
+          </a:fontRef>
+        </p:style>
+        <p:txBody>
+          <a:bodyPr rtlCol="0" anchor="ctr"/>
+          <a:lstStyle/>
+          <a:p>
+            <a:pPr algn="ctr"/>
+          </a:p>
+        </p:txBody>
+      </p:sp>
+      <p:sp>
+        <p:nvSpPr>
+          <p:cNvPr id="21" name="TextBox 20"/>
+          <p:cNvSpPr txBox="1"/>
+          <p:nvPr/>
+        </p:nvSpPr>
+        <p:spPr>
+          <a:xfrm>
+            <a:off x="570599" y="6456883"/>
+            <a:ext cx="8632151" cy="448665"/>
+          </a:xfrm>
+          <a:prstGeom prst="rect">
+            <a:avLst/>
+          </a:prstGeom>
+          <a:noFill/>
+        </p:spPr>
+        <p:txBody>
+          <a:bodyPr wrap="square" anchor="ctr" lIns="0" rIns="0" tIns="0" bIns="0">
+            <a:spAutoFit/>
+          </a:bodyPr>
+          <a:lstStyle/>
+          <a:p>
+            <a:pPr algn="l">
+              <a:lnSpc>
+                <a:spcPct val="110000"/>
+              </a:lnSpc>
+              <a:spcAft>
+                <a:spcPts val="0"/>
+              </a:spcAft>
+            </a:pPr>
+            <a:r>
+              <a:rPr sz="960" b="0" i="1">
+                <a:solidFill>
+                  <a:srgbClr val="FFFFFF"/>
+                </a:solidFill>
+                <a:latin typeface="Arial"/>
+              </a:rPr>
+              <a:t>PE’s premium over public markets is real — but Athanase’s ~16% sits above even what the best allocators realise, with daily liquidity.</a:t>
+            </a:r>
+          </a:p>
+        </p:txBody>
+      </p:sp>
+      <p:sp>
+        <p:nvSpPr>
+          <p:cNvPr id="22" name="TextBox 21"/>
+          <p:cNvSpPr txBox="1"/>
+          <p:nvPr/>
+        </p:nvSpPr>
+        <p:spPr>
+          <a:xfrm>
+            <a:off x="438922" y="6944563"/>
+            <a:ext cx="9217382" cy="487680"/>
+          </a:xfrm>
+          <a:prstGeom prst="rect">
+            <a:avLst/>
+          </a:prstGeom>
+          <a:noFill/>
+        </p:spPr>
+        <p:txBody>
+          <a:bodyPr wrap="square" anchor="t" lIns="0" rIns="0" tIns="0" bIns="0">
+            <a:spAutoFit/>
+          </a:bodyPr>
+          <a:lstStyle/>
+          <a:p>
+            <a:pPr algn="l">
+              <a:lnSpc>
+                <a:spcPct val="110000"/>
+              </a:lnSpc>
+              <a:spcAft>
+                <a:spcPts val="0"/>
+              </a:spcAft>
+            </a:pPr>
+            <a:r>
+              <a:rPr sz="600" b="0" i="0">
+                <a:solidFill>
+                  <a:srgbClr val="556A83"/>
+                </a:solidFill>
+                <a:latin typeface="Arial"/>
+              </a:rPr>
+              <a:t>Sources: Cliffwater (US state pensions, 2000–22) PE 11.4% vs PME 5.8%; BVCA / Capital Dynamics (UK &amp; Europe, 2001–23) 14.1% vs 7.7%; corroborated by Cambridge Associates mPME 1.15–1.25× and Kaplan-Harris-Jenkinson KS-PME 1.20–1.27×. Athanase real, net, 2006–2025. See references.</a:t>
             </a:r>
           </a:p>
         </p:txBody>
@@ -44373,7 +45043,7 @@
             <a:avLst/>
           </a:prstGeom>
           <a:solidFill>
-            <a:srgbClr val="152130"/>
+            <a:srgbClr val="FFFFFF"/>
           </a:solidFill>
           <a:ln>
             <a:noFill/>
@@ -44404,7 +45074,7 @@
       </p:sp>
       <p:pic>
         <p:nvPicPr>
-          <p:cNvPr id="3" name="Picture 2" descr="logo_white.png"/>
+          <p:cNvPr id="3" name="Picture 2" descr="mark_dark.png"/>
           <p:cNvPicPr>
             <a:picLocks noChangeAspect="1"/>
           </p:cNvPicPr>
@@ -44418,6 +45088,5877 @@
         </p:blipFill>
         <p:spPr>
           <a:xfrm>
+            <a:off x="402346" y="234086"/>
+            <a:ext cx="224012" cy="190199"/>
+          </a:xfrm>
+          <a:prstGeom prst="rect">
+            <a:avLst/>
+          </a:prstGeom>
+        </p:spPr>
+      </p:pic>
+      <p:sp>
+        <p:nvSpPr>
+          <p:cNvPr id="4" name="TextBox 3"/>
+          <p:cNvSpPr txBox="1"/>
+          <p:nvPr/>
+        </p:nvSpPr>
+        <p:spPr>
+          <a:xfrm>
+            <a:off x="716907" y="263347"/>
+            <a:ext cx="5120768" cy="292608"/>
+          </a:xfrm>
+          <a:prstGeom prst="rect">
+            <a:avLst/>
+          </a:prstGeom>
+          <a:noFill/>
+        </p:spPr>
+        <p:txBody>
+          <a:bodyPr wrap="square" anchor="t" lIns="0" rIns="0" tIns="0" bIns="0">
+            <a:spAutoFit/>
+          </a:bodyPr>
+          <a:lstStyle/>
+          <a:p>
+            <a:pPr algn="l">
+              <a:lnSpc>
+                <a:spcPct val="110000"/>
+              </a:lnSpc>
+              <a:spcAft>
+                <a:spcPts val="0"/>
+              </a:spcAft>
+            </a:pPr>
+            <a:r>
+              <a:rPr sz="880" b="0" i="0">
+                <a:solidFill>
+                  <a:srgbClr val="556A83"/>
+                </a:solidFill>
+                <a:latin typeface="Arial"/>
+              </a:rPr>
+              <a:t>Private Equity</a:t>
+            </a:r>
+          </a:p>
+        </p:txBody>
+      </p:sp>
+      <p:sp>
+        <p:nvSpPr>
+          <p:cNvPr id="5" name="TextBox 4"/>
+          <p:cNvSpPr txBox="1"/>
+          <p:nvPr/>
+        </p:nvSpPr>
+        <p:spPr>
+          <a:xfrm>
+            <a:off x="7242229" y="263347"/>
+            <a:ext cx="2084884" cy="292608"/>
+          </a:xfrm>
+          <a:prstGeom prst="rect">
+            <a:avLst/>
+          </a:prstGeom>
+          <a:noFill/>
+        </p:spPr>
+        <p:txBody>
+          <a:bodyPr wrap="square" anchor="t" lIns="0" rIns="0" tIns="0" bIns="0">
+            <a:spAutoFit/>
+          </a:bodyPr>
+          <a:lstStyle/>
+          <a:p>
+            <a:pPr algn="r">
+              <a:lnSpc>
+                <a:spcPct val="110000"/>
+              </a:lnSpc>
+              <a:spcAft>
+                <a:spcPts val="0"/>
+              </a:spcAft>
+            </a:pPr>
+            <a:r>
+              <a:rPr sz="880" b="1" i="0">
+                <a:solidFill>
+                  <a:srgbClr val="556A83"/>
+                </a:solidFill>
+                <a:latin typeface="Arial"/>
+              </a:rPr>
+              <a:t>Figure 8</a:t>
+            </a:r>
+          </a:p>
+        </p:txBody>
+      </p:sp>
+      <p:sp>
+        <p:nvSpPr>
+          <p:cNvPr id="6" name="Rectangle 5"/>
+          <p:cNvSpPr/>
+          <p:nvPr/>
+        </p:nvSpPr>
+        <p:spPr>
+          <a:xfrm>
+            <a:off x="0" y="604723"/>
+            <a:ext cx="9753600" cy="1414272"/>
+          </a:xfrm>
+          <a:prstGeom prst="rect">
+            <a:avLst/>
+          </a:prstGeom>
+          <a:solidFill>
+            <a:srgbClr val="F6F7F9"/>
+          </a:solidFill>
+          <a:ln>
+            <a:noFill/>
+          </a:ln>
+          <a:effectLst/>
+        </p:spPr>
+        <p:style>
+          <a:lnRef idx="1">
+            <a:schemeClr val="accent1"/>
+          </a:lnRef>
+          <a:fillRef idx="3">
+            <a:schemeClr val="accent1"/>
+          </a:fillRef>
+          <a:effectRef idx="2">
+            <a:schemeClr val="accent1"/>
+          </a:effectRef>
+          <a:fontRef idx="minor">
+            <a:schemeClr val="lt1"/>
+          </a:fontRef>
+        </p:style>
+        <p:txBody>
+          <a:bodyPr rtlCol="0" anchor="ctr"/>
+          <a:lstStyle/>
+          <a:p>
+            <a:pPr algn="ctr"/>
+          </a:p>
+        </p:txBody>
+      </p:sp>
+      <p:sp>
+        <p:nvSpPr>
+          <p:cNvPr id="7" name="TextBox 6"/>
+          <p:cNvSpPr txBox="1"/>
+          <p:nvPr/>
+        </p:nvSpPr>
+        <p:spPr>
+          <a:xfrm>
+            <a:off x="438922" y="721766"/>
+            <a:ext cx="8851613" cy="829056"/>
+          </a:xfrm>
+          <a:prstGeom prst="rect">
+            <a:avLst/>
+          </a:prstGeom>
+          <a:noFill/>
+        </p:spPr>
+        <p:txBody>
+          <a:bodyPr wrap="square" anchor="t" lIns="0" rIns="0" tIns="0" bIns="0">
+            <a:spAutoFit/>
+          </a:bodyPr>
+          <a:lstStyle/>
+          <a:p>
+            <a:pPr algn="l">
+              <a:lnSpc>
+                <a:spcPct val="110000"/>
+              </a:lnSpc>
+              <a:spcAft>
+                <a:spcPts val="200"/>
+              </a:spcAft>
+            </a:pPr>
+            <a:r>
+              <a:rPr sz="2400" b="0" i="0" spc="-90">
+                <a:solidFill>
+                  <a:srgbClr val="314359"/>
+                </a:solidFill>
+                <a:latin typeface="Times New Roman"/>
+              </a:rPr>
+              <a:t>2.23 Switching a private-equity sleeve into Athanase</a:t>
+            </a:r>
+          </a:p>
+        </p:txBody>
+      </p:sp>
+      <p:sp>
+        <p:nvSpPr>
+          <p:cNvPr id="8" name="TextBox 7"/>
+          <p:cNvSpPr txBox="1"/>
+          <p:nvPr/>
+        </p:nvSpPr>
+        <p:spPr>
+          <a:xfrm>
+            <a:off x="453553" y="1511808"/>
+            <a:ext cx="8705305" cy="487680"/>
+          </a:xfrm>
+          <a:prstGeom prst="rect">
+            <a:avLst/>
+          </a:prstGeom>
+          <a:noFill/>
+        </p:spPr>
+        <p:txBody>
+          <a:bodyPr wrap="square" anchor="t" lIns="0" rIns="0" tIns="0" bIns="0">
+            <a:spAutoFit/>
+          </a:bodyPr>
+          <a:lstStyle/>
+          <a:p>
+            <a:pPr algn="l">
+              <a:lnSpc>
+                <a:spcPct val="110000"/>
+              </a:lnSpc>
+              <a:spcAft>
+                <a:spcPts val="0"/>
+              </a:spcAft>
+            </a:pPr>
+            <a:r>
+              <a:rPr sz="1040" b="0" i="1">
+                <a:solidFill>
+                  <a:srgbClr val="556A83"/>
+                </a:solidFill>
+                <a:latin typeface="Arial"/>
+              </a:rPr>
+              <a:t>On true risk, PE and Athanase carry similar volatility — but Athanase’s is mostly upside, and it returns more, with daily liquidity.</a:t>
+            </a:r>
+          </a:p>
+        </p:txBody>
+      </p:sp>
+      <p:sp>
+        <p:nvSpPr>
+          <p:cNvPr id="9" name="TextBox 8"/>
+          <p:cNvSpPr txBox="1"/>
+          <p:nvPr/>
+        </p:nvSpPr>
+        <p:spPr>
+          <a:xfrm>
+            <a:off x="6583844" y="6876288"/>
+            <a:ext cx="2926153" cy="292608"/>
+          </a:xfrm>
+          <a:prstGeom prst="rect">
+            <a:avLst/>
+          </a:prstGeom>
+          <a:noFill/>
+        </p:spPr>
+        <p:txBody>
+          <a:bodyPr wrap="square" anchor="t" lIns="0" rIns="0" tIns="0" bIns="0">
+            <a:spAutoFit/>
+          </a:bodyPr>
+          <a:lstStyle/>
+          <a:p>
+            <a:pPr algn="r">
+              <a:lnSpc>
+                <a:spcPct val="110000"/>
+              </a:lnSpc>
+              <a:spcAft>
+                <a:spcPts val="0"/>
+              </a:spcAft>
+            </a:pPr>
+            <a:r>
+              <a:rPr sz="680" b="0" i="0">
+                <a:solidFill>
+                  <a:srgbClr val="556A83"/>
+                </a:solidFill>
+                <a:latin typeface="Arial"/>
+              </a:rPr>
+              <a:t>Strictly confidential          29</a:t>
+            </a:r>
+          </a:p>
+        </p:txBody>
+      </p:sp>
+      <p:pic>
+        <p:nvPicPr>
+          <p:cNvPr id="10" name="Picture 9" descr="d_pe_scatter.png"/>
+          <p:cNvPicPr>
+            <a:picLocks noChangeAspect="1"/>
+          </p:cNvPicPr>
+          <p:nvPr/>
+        </p:nvPicPr>
+        <p:blipFill>
+          <a:blip r:embed="rId3"/>
+          <a:stretch>
+            <a:fillRect/>
+          </a:stretch>
+        </p:blipFill>
+        <p:spPr>
+          <a:xfrm>
+            <a:off x="402346" y="2243328"/>
+            <a:ext cx="4004070" cy="2816422"/>
+          </a:xfrm>
+          <a:prstGeom prst="rect">
+            <a:avLst/>
+          </a:prstGeom>
+        </p:spPr>
+      </p:pic>
+      <p:sp>
+        <p:nvSpPr>
+          <p:cNvPr id="11" name="TextBox 10"/>
+          <p:cNvSpPr txBox="1"/>
+          <p:nvPr/>
+        </p:nvSpPr>
+        <p:spPr>
+          <a:xfrm>
+            <a:off x="512076" y="6096000"/>
+            <a:ext cx="4535537" cy="390144"/>
+          </a:xfrm>
+          <a:prstGeom prst="rect">
+            <a:avLst/>
+          </a:prstGeom>
+          <a:noFill/>
+        </p:spPr>
+        <p:txBody>
+          <a:bodyPr wrap="square" anchor="t" lIns="0" rIns="0" tIns="0" bIns="0">
+            <a:spAutoFit/>
+          </a:bodyPr>
+          <a:lstStyle/>
+          <a:p>
+            <a:pPr algn="l">
+              <a:lnSpc>
+                <a:spcPct val="112000"/>
+              </a:lnSpc>
+              <a:spcAft>
+                <a:spcPts val="0"/>
+              </a:spcAft>
+            </a:pPr>
+            <a:r>
+              <a:rPr sz="800" b="0" i="1">
+                <a:solidFill>
+                  <a:srgbClr val="556A83"/>
+                </a:solidFill>
+                <a:latin typeface="Arial"/>
+              </a:rPr>
+              <a:t>De-smoothed, PE’s ~10% reported vol is really ~28% (PIMCO; AQR beta 1.5–1.6) — about Athanase’s 27%, but levered downside, not upside.</a:t>
+            </a:r>
+          </a:p>
+        </p:txBody>
+      </p:sp>
+      <p:sp>
+        <p:nvSpPr>
+          <p:cNvPr id="12" name="Rectangle 11"/>
+          <p:cNvSpPr/>
+          <p:nvPr/>
+        </p:nvSpPr>
+        <p:spPr>
+          <a:xfrm>
+            <a:off x="5157345" y="2262835"/>
+            <a:ext cx="4169768" cy="819302"/>
+          </a:xfrm>
+          <a:prstGeom prst="rect">
+            <a:avLst/>
+          </a:prstGeom>
+          <a:solidFill>
+            <a:srgbClr val="F6F7F9"/>
+          </a:solidFill>
+          <a:ln>
+            <a:noFill/>
+          </a:ln>
+          <a:effectLst/>
+        </p:spPr>
+        <p:style>
+          <a:lnRef idx="1">
+            <a:schemeClr val="accent1"/>
+          </a:lnRef>
+          <a:fillRef idx="3">
+            <a:schemeClr val="accent1"/>
+          </a:fillRef>
+          <a:effectRef idx="2">
+            <a:schemeClr val="accent1"/>
+          </a:effectRef>
+          <a:fontRef idx="minor">
+            <a:schemeClr val="lt1"/>
+          </a:fontRef>
+        </p:style>
+        <p:txBody>
+          <a:bodyPr rtlCol="0" anchor="ctr"/>
+          <a:lstStyle/>
+          <a:p>
+            <a:pPr algn="ctr"/>
+          </a:p>
+        </p:txBody>
+      </p:sp>
+      <p:sp>
+        <p:nvSpPr>
+          <p:cNvPr id="13" name="TextBox 12"/>
+          <p:cNvSpPr txBox="1"/>
+          <p:nvPr/>
+        </p:nvSpPr>
+        <p:spPr>
+          <a:xfrm>
+            <a:off x="5303652" y="2360371"/>
+            <a:ext cx="1463076" cy="243840"/>
+          </a:xfrm>
+          <a:prstGeom prst="rect">
+            <a:avLst/>
+          </a:prstGeom>
+          <a:noFill/>
+        </p:spPr>
+        <p:txBody>
+          <a:bodyPr wrap="square" anchor="t" lIns="0" rIns="0" tIns="0" bIns="0">
+            <a:spAutoFit/>
+          </a:bodyPr>
+          <a:lstStyle/>
+          <a:p>
+            <a:pPr algn="l">
+              <a:lnSpc>
+                <a:spcPct val="110000"/>
+              </a:lnSpc>
+              <a:spcAft>
+                <a:spcPts val="0"/>
+              </a:spcAft>
+            </a:pPr>
+            <a:r>
+              <a:rPr sz="760" b="1" i="0">
+                <a:solidFill>
+                  <a:srgbClr val="314359"/>
+                </a:solidFill>
+                <a:latin typeface="Arial"/>
+              </a:rPr>
+              <a:t>RETURN</a:t>
+            </a:r>
+          </a:p>
+        </p:txBody>
+      </p:sp>
+      <p:sp>
+        <p:nvSpPr>
+          <p:cNvPr id="14" name="TextBox 13"/>
+          <p:cNvSpPr txBox="1"/>
+          <p:nvPr/>
+        </p:nvSpPr>
+        <p:spPr>
+          <a:xfrm>
+            <a:off x="6656997" y="2350617"/>
+            <a:ext cx="2487230" cy="292608"/>
+          </a:xfrm>
+          <a:prstGeom prst="rect">
+            <a:avLst/>
+          </a:prstGeom>
+          <a:noFill/>
+        </p:spPr>
+        <p:txBody>
+          <a:bodyPr wrap="square" anchor="t" lIns="0" rIns="0" tIns="0" bIns="0">
+            <a:spAutoFit/>
+          </a:bodyPr>
+          <a:lstStyle/>
+          <a:p>
+            <a:pPr algn="l">
+              <a:lnSpc>
+                <a:spcPct val="110000"/>
+              </a:lnSpc>
+              <a:spcAft>
+                <a:spcPts val="0"/>
+              </a:spcAft>
+            </a:pPr>
+            <a:r>
+              <a:rPr sz="1000" b="1" i="0">
+                <a:solidFill>
+                  <a:srgbClr val="314359"/>
+                </a:solidFill>
+                <a:latin typeface="Times New Roman"/>
+              </a:rPr>
+              <a:t>~16% vs ~11–14% realised</a:t>
+            </a:r>
+          </a:p>
+        </p:txBody>
+      </p:sp>
+      <p:sp>
+        <p:nvSpPr>
+          <p:cNvPr id="15" name="TextBox 14"/>
+          <p:cNvSpPr txBox="1"/>
+          <p:nvPr/>
+        </p:nvSpPr>
+        <p:spPr>
+          <a:xfrm>
+            <a:off x="5303652" y="2652979"/>
+            <a:ext cx="3877152" cy="409651"/>
+          </a:xfrm>
+          <a:prstGeom prst="rect">
+            <a:avLst/>
+          </a:prstGeom>
+          <a:noFill/>
+        </p:spPr>
+        <p:txBody>
+          <a:bodyPr wrap="square" anchor="t" lIns="0" rIns="0" tIns="0" bIns="0">
+            <a:spAutoFit/>
+          </a:bodyPr>
+          <a:lstStyle/>
+          <a:p>
+            <a:pPr algn="l">
+              <a:lnSpc>
+                <a:spcPct val="108000"/>
+              </a:lnSpc>
+              <a:spcAft>
+                <a:spcPts val="0"/>
+              </a:spcAft>
+            </a:pPr>
+            <a:r>
+              <a:rPr sz="800" b="0" i="0">
+                <a:solidFill>
+                  <a:srgbClr val="0E1620"/>
+                </a:solidFill>
+                <a:latin typeface="Arial"/>
+              </a:rPr>
+              <a:t>Above what even the best allocators realise from PE (Cliffwater; BVCA).</a:t>
+            </a:r>
+          </a:p>
+        </p:txBody>
+      </p:sp>
+      <p:sp>
+        <p:nvSpPr>
+          <p:cNvPr id="16" name="Rectangle 15"/>
+          <p:cNvSpPr/>
+          <p:nvPr/>
+        </p:nvSpPr>
+        <p:spPr>
+          <a:xfrm>
+            <a:off x="5157345" y="3179673"/>
+            <a:ext cx="4169768" cy="819302"/>
+          </a:xfrm>
+          <a:prstGeom prst="rect">
+            <a:avLst/>
+          </a:prstGeom>
+          <a:solidFill>
+            <a:srgbClr val="F6F7F9"/>
+          </a:solidFill>
+          <a:ln>
+            <a:noFill/>
+          </a:ln>
+          <a:effectLst/>
+        </p:spPr>
+        <p:style>
+          <a:lnRef idx="1">
+            <a:schemeClr val="accent1"/>
+          </a:lnRef>
+          <a:fillRef idx="3">
+            <a:schemeClr val="accent1"/>
+          </a:fillRef>
+          <a:effectRef idx="2">
+            <a:schemeClr val="accent1"/>
+          </a:effectRef>
+          <a:fontRef idx="minor">
+            <a:schemeClr val="lt1"/>
+          </a:fontRef>
+        </p:style>
+        <p:txBody>
+          <a:bodyPr rtlCol="0" anchor="ctr"/>
+          <a:lstStyle/>
+          <a:p>
+            <a:pPr algn="ctr"/>
+          </a:p>
+        </p:txBody>
+      </p:sp>
+      <p:sp>
+        <p:nvSpPr>
+          <p:cNvPr id="17" name="TextBox 16"/>
+          <p:cNvSpPr txBox="1"/>
+          <p:nvPr/>
+        </p:nvSpPr>
+        <p:spPr>
+          <a:xfrm>
+            <a:off x="5303652" y="3277209"/>
+            <a:ext cx="1463076" cy="243840"/>
+          </a:xfrm>
+          <a:prstGeom prst="rect">
+            <a:avLst/>
+          </a:prstGeom>
+          <a:noFill/>
+        </p:spPr>
+        <p:txBody>
+          <a:bodyPr wrap="square" anchor="t" lIns="0" rIns="0" tIns="0" bIns="0">
+            <a:spAutoFit/>
+          </a:bodyPr>
+          <a:lstStyle/>
+          <a:p>
+            <a:pPr algn="l">
+              <a:lnSpc>
+                <a:spcPct val="110000"/>
+              </a:lnSpc>
+              <a:spcAft>
+                <a:spcPts val="0"/>
+              </a:spcAft>
+            </a:pPr>
+            <a:r>
+              <a:rPr sz="760" b="1" i="0">
+                <a:solidFill>
+                  <a:srgbClr val="314359"/>
+                </a:solidFill>
+                <a:latin typeface="Arial"/>
+              </a:rPr>
+              <a:t>LIQUIDITY</a:t>
+            </a:r>
+          </a:p>
+        </p:txBody>
+      </p:sp>
+      <p:sp>
+        <p:nvSpPr>
+          <p:cNvPr id="18" name="TextBox 17"/>
+          <p:cNvSpPr txBox="1"/>
+          <p:nvPr/>
+        </p:nvSpPr>
+        <p:spPr>
+          <a:xfrm>
+            <a:off x="6656997" y="3267456"/>
+            <a:ext cx="2487230" cy="292608"/>
+          </a:xfrm>
+          <a:prstGeom prst="rect">
+            <a:avLst/>
+          </a:prstGeom>
+          <a:noFill/>
+        </p:spPr>
+        <p:txBody>
+          <a:bodyPr wrap="square" anchor="t" lIns="0" rIns="0" tIns="0" bIns="0">
+            <a:spAutoFit/>
+          </a:bodyPr>
+          <a:lstStyle/>
+          <a:p>
+            <a:pPr algn="l">
+              <a:lnSpc>
+                <a:spcPct val="110000"/>
+              </a:lnSpc>
+              <a:spcAft>
+                <a:spcPts val="0"/>
+              </a:spcAft>
+            </a:pPr>
+            <a:r>
+              <a:rPr sz="1000" b="1" i="0">
+                <a:solidFill>
+                  <a:srgbClr val="314359"/>
+                </a:solidFill>
+                <a:latin typeface="Times New Roman"/>
+              </a:rPr>
+              <a:t>Daily vs 10-yr lock-up</a:t>
+            </a:r>
+          </a:p>
+        </p:txBody>
+      </p:sp>
+      <p:sp>
+        <p:nvSpPr>
+          <p:cNvPr id="19" name="TextBox 18"/>
+          <p:cNvSpPr txBox="1"/>
+          <p:nvPr/>
+        </p:nvSpPr>
+        <p:spPr>
+          <a:xfrm>
+            <a:off x="5303652" y="3569817"/>
+            <a:ext cx="3877152" cy="409651"/>
+          </a:xfrm>
+          <a:prstGeom prst="rect">
+            <a:avLst/>
+          </a:prstGeom>
+          <a:noFill/>
+        </p:spPr>
+        <p:txBody>
+          <a:bodyPr wrap="square" anchor="t" lIns="0" rIns="0" tIns="0" bIns="0">
+            <a:spAutoFit/>
+          </a:bodyPr>
+          <a:lstStyle/>
+          <a:p>
+            <a:pPr algn="l">
+              <a:lnSpc>
+                <a:spcPct val="108000"/>
+              </a:lnSpc>
+              <a:spcAft>
+                <a:spcPts val="0"/>
+              </a:spcAft>
+            </a:pPr>
+            <a:r>
+              <a:rPr sz="800" b="0" i="0">
+                <a:solidFill>
+                  <a:srgbClr val="0E1620"/>
+                </a:solidFill>
+                <a:latin typeface="Arial"/>
+              </a:rPr>
+              <a:t>Listed positions you can exit; no blind-pool capital calls.</a:t>
+            </a:r>
+          </a:p>
+        </p:txBody>
+      </p:sp>
+      <p:sp>
+        <p:nvSpPr>
+          <p:cNvPr id="20" name="Rectangle 19"/>
+          <p:cNvSpPr/>
+          <p:nvPr/>
+        </p:nvSpPr>
+        <p:spPr>
+          <a:xfrm>
+            <a:off x="5157345" y="4096512"/>
+            <a:ext cx="4169768" cy="819302"/>
+          </a:xfrm>
+          <a:prstGeom prst="rect">
+            <a:avLst/>
+          </a:prstGeom>
+          <a:solidFill>
+            <a:srgbClr val="F6F7F9"/>
+          </a:solidFill>
+          <a:ln>
+            <a:noFill/>
+          </a:ln>
+          <a:effectLst/>
+        </p:spPr>
+        <p:style>
+          <a:lnRef idx="1">
+            <a:schemeClr val="accent1"/>
+          </a:lnRef>
+          <a:fillRef idx="3">
+            <a:schemeClr val="accent1"/>
+          </a:fillRef>
+          <a:effectRef idx="2">
+            <a:schemeClr val="accent1"/>
+          </a:effectRef>
+          <a:fontRef idx="minor">
+            <a:schemeClr val="lt1"/>
+          </a:fontRef>
+        </p:style>
+        <p:txBody>
+          <a:bodyPr rtlCol="0" anchor="ctr"/>
+          <a:lstStyle/>
+          <a:p>
+            <a:pPr algn="ctr"/>
+          </a:p>
+        </p:txBody>
+      </p:sp>
+      <p:sp>
+        <p:nvSpPr>
+          <p:cNvPr id="21" name="TextBox 20"/>
+          <p:cNvSpPr txBox="1"/>
+          <p:nvPr/>
+        </p:nvSpPr>
+        <p:spPr>
+          <a:xfrm>
+            <a:off x="5303652" y="4194048"/>
+            <a:ext cx="1463076" cy="243840"/>
+          </a:xfrm>
+          <a:prstGeom prst="rect">
+            <a:avLst/>
+          </a:prstGeom>
+          <a:noFill/>
+        </p:spPr>
+        <p:txBody>
+          <a:bodyPr wrap="square" anchor="t" lIns="0" rIns="0" tIns="0" bIns="0">
+            <a:spAutoFit/>
+          </a:bodyPr>
+          <a:lstStyle/>
+          <a:p>
+            <a:pPr algn="l">
+              <a:lnSpc>
+                <a:spcPct val="110000"/>
+              </a:lnSpc>
+              <a:spcAft>
+                <a:spcPts val="0"/>
+              </a:spcAft>
+            </a:pPr>
+            <a:r>
+              <a:rPr sz="760" b="1" i="0">
+                <a:solidFill>
+                  <a:srgbClr val="314359"/>
+                </a:solidFill>
+                <a:latin typeface="Arial"/>
+              </a:rPr>
+              <a:t>FEES &amp; CAPITAL</a:t>
+            </a:r>
+          </a:p>
+        </p:txBody>
+      </p:sp>
+      <p:sp>
+        <p:nvSpPr>
+          <p:cNvPr id="22" name="TextBox 21"/>
+          <p:cNvSpPr txBox="1"/>
+          <p:nvPr/>
+        </p:nvSpPr>
+        <p:spPr>
+          <a:xfrm>
+            <a:off x="6656997" y="4184294"/>
+            <a:ext cx="2487230" cy="292608"/>
+          </a:xfrm>
+          <a:prstGeom prst="rect">
+            <a:avLst/>
+          </a:prstGeom>
+          <a:noFill/>
+        </p:spPr>
+        <p:txBody>
+          <a:bodyPr wrap="square" anchor="t" lIns="0" rIns="0" tIns="0" bIns="0">
+            <a:spAutoFit/>
+          </a:bodyPr>
+          <a:lstStyle/>
+          <a:p>
+            <a:pPr algn="l">
+              <a:lnSpc>
+                <a:spcPct val="110000"/>
+              </a:lnSpc>
+              <a:spcAft>
+                <a:spcPts val="0"/>
+              </a:spcAft>
+            </a:pPr>
+            <a:r>
+              <a:rPr sz="1000" b="1" i="0">
+                <a:solidFill>
+                  <a:srgbClr val="314359"/>
+                </a:solidFill>
+                <a:latin typeface="Times New Roman"/>
+              </a:rPr>
+              <a:t>Lower drag, fully invested</a:t>
+            </a:r>
+          </a:p>
+        </p:txBody>
+      </p:sp>
+      <p:sp>
+        <p:nvSpPr>
+          <p:cNvPr id="23" name="TextBox 22"/>
+          <p:cNvSpPr txBox="1"/>
+          <p:nvPr/>
+        </p:nvSpPr>
+        <p:spPr>
+          <a:xfrm>
+            <a:off x="5303652" y="4486656"/>
+            <a:ext cx="3877152" cy="409651"/>
+          </a:xfrm>
+          <a:prstGeom prst="rect">
+            <a:avLst/>
+          </a:prstGeom>
+          <a:noFill/>
+        </p:spPr>
+        <p:txBody>
+          <a:bodyPr wrap="square" anchor="t" lIns="0" rIns="0" tIns="0" bIns="0">
+            <a:spAutoFit/>
+          </a:bodyPr>
+          <a:lstStyle/>
+          <a:p>
+            <a:pPr algn="l">
+              <a:lnSpc>
+                <a:spcPct val="108000"/>
+              </a:lnSpc>
+              <a:spcAft>
+                <a:spcPts val="0"/>
+              </a:spcAft>
+            </a:pPr>
+            <a:r>
+              <a:rPr sz="800" b="0" i="0">
+                <a:solidFill>
+                  <a:srgbClr val="0E1620"/>
+                </a:solidFill>
+                <a:latin typeface="Arial"/>
+              </a:rPr>
+              <a:t>No fees on undeployed dry powder waiting in a queue.</a:t>
+            </a:r>
+          </a:p>
+        </p:txBody>
+      </p:sp>
+      <p:sp>
+        <p:nvSpPr>
+          <p:cNvPr id="24" name="Rectangle 23"/>
+          <p:cNvSpPr/>
+          <p:nvPr/>
+        </p:nvSpPr>
+        <p:spPr>
+          <a:xfrm>
+            <a:off x="5157345" y="5013350"/>
+            <a:ext cx="4169768" cy="819302"/>
+          </a:xfrm>
+          <a:prstGeom prst="rect">
+            <a:avLst/>
+          </a:prstGeom>
+          <a:solidFill>
+            <a:srgbClr val="F6F7F9"/>
+          </a:solidFill>
+          <a:ln>
+            <a:noFill/>
+          </a:ln>
+          <a:effectLst/>
+        </p:spPr>
+        <p:style>
+          <a:lnRef idx="1">
+            <a:schemeClr val="accent1"/>
+          </a:lnRef>
+          <a:fillRef idx="3">
+            <a:schemeClr val="accent1"/>
+          </a:fillRef>
+          <a:effectRef idx="2">
+            <a:schemeClr val="accent1"/>
+          </a:effectRef>
+          <a:fontRef idx="minor">
+            <a:schemeClr val="lt1"/>
+          </a:fontRef>
+        </p:style>
+        <p:txBody>
+          <a:bodyPr rtlCol="0" anchor="ctr"/>
+          <a:lstStyle/>
+          <a:p>
+            <a:pPr algn="ctr"/>
+          </a:p>
+        </p:txBody>
+      </p:sp>
+      <p:sp>
+        <p:nvSpPr>
+          <p:cNvPr id="25" name="TextBox 24"/>
+          <p:cNvSpPr txBox="1"/>
+          <p:nvPr/>
+        </p:nvSpPr>
+        <p:spPr>
+          <a:xfrm>
+            <a:off x="5303652" y="5110886"/>
+            <a:ext cx="1463076" cy="243840"/>
+          </a:xfrm>
+          <a:prstGeom prst="rect">
+            <a:avLst/>
+          </a:prstGeom>
+          <a:noFill/>
+        </p:spPr>
+        <p:txBody>
+          <a:bodyPr wrap="square" anchor="t" lIns="0" rIns="0" tIns="0" bIns="0">
+            <a:spAutoFit/>
+          </a:bodyPr>
+          <a:lstStyle/>
+          <a:p>
+            <a:pPr algn="l">
+              <a:lnSpc>
+                <a:spcPct val="110000"/>
+              </a:lnSpc>
+              <a:spcAft>
+                <a:spcPts val="0"/>
+              </a:spcAft>
+            </a:pPr>
+            <a:r>
+              <a:rPr sz="760" b="1" i="0">
+                <a:solidFill>
+                  <a:srgbClr val="314359"/>
+                </a:solidFill>
+                <a:latin typeface="Arial"/>
+              </a:rPr>
+              <a:t>TRANSPARENCY</a:t>
+            </a:r>
+          </a:p>
+        </p:txBody>
+      </p:sp>
+      <p:sp>
+        <p:nvSpPr>
+          <p:cNvPr id="26" name="TextBox 25"/>
+          <p:cNvSpPr txBox="1"/>
+          <p:nvPr/>
+        </p:nvSpPr>
+        <p:spPr>
+          <a:xfrm>
+            <a:off x="6656997" y="5101132"/>
+            <a:ext cx="2487230" cy="292608"/>
+          </a:xfrm>
+          <a:prstGeom prst="rect">
+            <a:avLst/>
+          </a:prstGeom>
+          <a:noFill/>
+        </p:spPr>
+        <p:txBody>
+          <a:bodyPr wrap="square" anchor="t" lIns="0" rIns="0" tIns="0" bIns="0">
+            <a:spAutoFit/>
+          </a:bodyPr>
+          <a:lstStyle/>
+          <a:p>
+            <a:pPr algn="l">
+              <a:lnSpc>
+                <a:spcPct val="110000"/>
+              </a:lnSpc>
+              <a:spcAft>
+                <a:spcPts val="0"/>
+              </a:spcAft>
+            </a:pPr>
+            <a:r>
+              <a:rPr sz="1000" b="1" i="0">
+                <a:solidFill>
+                  <a:srgbClr val="314359"/>
+                </a:solidFill>
+                <a:latin typeface="Times New Roman"/>
+              </a:rPr>
+              <a:t>Daily marks, real control</a:t>
+            </a:r>
+          </a:p>
+        </p:txBody>
+      </p:sp>
+      <p:sp>
+        <p:nvSpPr>
+          <p:cNvPr id="27" name="TextBox 26"/>
+          <p:cNvSpPr txBox="1"/>
+          <p:nvPr/>
+        </p:nvSpPr>
+        <p:spPr>
+          <a:xfrm>
+            <a:off x="5303652" y="5403494"/>
+            <a:ext cx="3877152" cy="409651"/>
+          </a:xfrm>
+          <a:prstGeom prst="rect">
+            <a:avLst/>
+          </a:prstGeom>
+          <a:noFill/>
+        </p:spPr>
+        <p:txBody>
+          <a:bodyPr wrap="square" anchor="t" lIns="0" rIns="0" tIns="0" bIns="0">
+            <a:spAutoFit/>
+          </a:bodyPr>
+          <a:lstStyle/>
+          <a:p>
+            <a:pPr algn="l">
+              <a:lnSpc>
+                <a:spcPct val="108000"/>
+              </a:lnSpc>
+              <a:spcAft>
+                <a:spcPts val="0"/>
+              </a:spcAft>
+            </a:pPr>
+            <a:r>
+              <a:rPr sz="800" b="0" i="0">
+                <a:solidFill>
+                  <a:srgbClr val="0E1620"/>
+                </a:solidFill>
+                <a:latin typeface="Arial"/>
+              </a:rPr>
+              <a:t>A public scoreboard plus board control of cash flow, capex and pay.</a:t>
+            </a:r>
+          </a:p>
+        </p:txBody>
+      </p:sp>
+      <p:sp>
+        <p:nvSpPr>
+          <p:cNvPr id="28" name="Rectangle 27"/>
+          <p:cNvSpPr/>
+          <p:nvPr/>
+        </p:nvSpPr>
+        <p:spPr>
+          <a:xfrm>
+            <a:off x="5157345" y="5930188"/>
+            <a:ext cx="4169768" cy="819302"/>
+          </a:xfrm>
+          <a:prstGeom prst="rect">
+            <a:avLst/>
+          </a:prstGeom>
+          <a:solidFill>
+            <a:srgbClr val="F6F7F9"/>
+          </a:solidFill>
+          <a:ln>
+            <a:noFill/>
+          </a:ln>
+          <a:effectLst/>
+        </p:spPr>
+        <p:style>
+          <a:lnRef idx="1">
+            <a:schemeClr val="accent1"/>
+          </a:lnRef>
+          <a:fillRef idx="3">
+            <a:schemeClr val="accent1"/>
+          </a:fillRef>
+          <a:effectRef idx="2">
+            <a:schemeClr val="accent1"/>
+          </a:effectRef>
+          <a:fontRef idx="minor">
+            <a:schemeClr val="lt1"/>
+          </a:fontRef>
+        </p:style>
+        <p:txBody>
+          <a:bodyPr rtlCol="0" anchor="ctr"/>
+          <a:lstStyle/>
+          <a:p>
+            <a:pPr algn="ctr"/>
+          </a:p>
+        </p:txBody>
+      </p:sp>
+      <p:sp>
+        <p:nvSpPr>
+          <p:cNvPr id="29" name="TextBox 28"/>
+          <p:cNvSpPr txBox="1"/>
+          <p:nvPr/>
+        </p:nvSpPr>
+        <p:spPr>
+          <a:xfrm>
+            <a:off x="5303652" y="6027724"/>
+            <a:ext cx="1463076" cy="243840"/>
+          </a:xfrm>
+          <a:prstGeom prst="rect">
+            <a:avLst/>
+          </a:prstGeom>
+          <a:noFill/>
+        </p:spPr>
+        <p:txBody>
+          <a:bodyPr wrap="square" anchor="t" lIns="0" rIns="0" tIns="0" bIns="0">
+            <a:spAutoFit/>
+          </a:bodyPr>
+          <a:lstStyle/>
+          <a:p>
+            <a:pPr algn="l">
+              <a:lnSpc>
+                <a:spcPct val="110000"/>
+              </a:lnSpc>
+              <a:spcAft>
+                <a:spcPts val="0"/>
+              </a:spcAft>
+            </a:pPr>
+            <a:r>
+              <a:rPr sz="760" b="1" i="0">
+                <a:solidFill>
+                  <a:srgbClr val="314359"/>
+                </a:solidFill>
+                <a:latin typeface="Arial"/>
+              </a:rPr>
+              <a:t>RISK, HONESTLY</a:t>
+            </a:r>
+          </a:p>
+        </p:txBody>
+      </p:sp>
+      <p:sp>
+        <p:nvSpPr>
+          <p:cNvPr id="30" name="TextBox 29"/>
+          <p:cNvSpPr txBox="1"/>
+          <p:nvPr/>
+        </p:nvSpPr>
+        <p:spPr>
+          <a:xfrm>
+            <a:off x="6656997" y="6017971"/>
+            <a:ext cx="2487230" cy="292608"/>
+          </a:xfrm>
+          <a:prstGeom prst="rect">
+            <a:avLst/>
+          </a:prstGeom>
+          <a:noFill/>
+        </p:spPr>
+        <p:txBody>
+          <a:bodyPr wrap="square" anchor="t" lIns="0" rIns="0" tIns="0" bIns="0">
+            <a:spAutoFit/>
+          </a:bodyPr>
+          <a:lstStyle/>
+          <a:p>
+            <a:pPr algn="l">
+              <a:lnSpc>
+                <a:spcPct val="110000"/>
+              </a:lnSpc>
+              <a:spcAft>
+                <a:spcPts val="0"/>
+              </a:spcAft>
+            </a:pPr>
+            <a:r>
+              <a:rPr sz="1000" b="1" i="0">
+                <a:solidFill>
+                  <a:srgbClr val="314359"/>
+                </a:solidFill>
+                <a:latin typeface="Times New Roman"/>
+              </a:rPr>
+              <a:t>Similar vol, opposite shape</a:t>
+            </a:r>
+          </a:p>
+        </p:txBody>
+      </p:sp>
+      <p:sp>
+        <p:nvSpPr>
+          <p:cNvPr id="31" name="TextBox 30"/>
+          <p:cNvSpPr txBox="1"/>
+          <p:nvPr/>
+        </p:nvSpPr>
+        <p:spPr>
+          <a:xfrm>
+            <a:off x="5303652" y="6320332"/>
+            <a:ext cx="3877152" cy="409651"/>
+          </a:xfrm>
+          <a:prstGeom prst="rect">
+            <a:avLst/>
+          </a:prstGeom>
+          <a:noFill/>
+        </p:spPr>
+        <p:txBody>
+          <a:bodyPr wrap="square" anchor="t" lIns="0" rIns="0" tIns="0" bIns="0">
+            <a:spAutoFit/>
+          </a:bodyPr>
+          <a:lstStyle/>
+          <a:p>
+            <a:pPr algn="l">
+              <a:lnSpc>
+                <a:spcPct val="108000"/>
+              </a:lnSpc>
+              <a:spcAft>
+                <a:spcPts val="0"/>
+              </a:spcAft>
+            </a:pPr>
+            <a:r>
+              <a:rPr sz="800" b="0" i="0">
+                <a:solidFill>
+                  <a:srgbClr val="0E1620"/>
+                </a:solidFill>
+                <a:latin typeface="Arial"/>
+              </a:rPr>
+              <a:t>PE’s true ~28% vol is levered downside; Athanase’s 27% is mostly upside (downside only ~11%).</a:t>
+            </a:r>
+          </a:p>
+        </p:txBody>
+      </p:sp>
+      <p:sp>
+        <p:nvSpPr>
+          <p:cNvPr id="32" name="Rectangle 31"/>
+          <p:cNvSpPr/>
+          <p:nvPr/>
+        </p:nvSpPr>
+        <p:spPr>
+          <a:xfrm>
+            <a:off x="438922" y="6456883"/>
+            <a:ext cx="8873559" cy="448665"/>
+          </a:xfrm>
+          <a:prstGeom prst="rect">
+            <a:avLst/>
+          </a:prstGeom>
+          <a:solidFill>
+            <a:srgbClr val="152130"/>
+          </a:solidFill>
+          <a:ln>
+            <a:noFill/>
+          </a:ln>
+          <a:effectLst/>
+        </p:spPr>
+        <p:style>
+          <a:lnRef idx="1">
+            <a:schemeClr val="accent1"/>
+          </a:lnRef>
+          <a:fillRef idx="3">
+            <a:schemeClr val="accent1"/>
+          </a:fillRef>
+          <a:effectRef idx="2">
+            <a:schemeClr val="accent1"/>
+          </a:effectRef>
+          <a:fontRef idx="minor">
+            <a:schemeClr val="lt1"/>
+          </a:fontRef>
+        </p:style>
+        <p:txBody>
+          <a:bodyPr rtlCol="0" anchor="ctr"/>
+          <a:lstStyle/>
+          <a:p>
+            <a:pPr algn="ctr"/>
+          </a:p>
+        </p:txBody>
+      </p:sp>
+      <p:sp>
+        <p:nvSpPr>
+          <p:cNvPr id="33" name="TextBox 32"/>
+          <p:cNvSpPr txBox="1"/>
+          <p:nvPr/>
+        </p:nvSpPr>
+        <p:spPr>
+          <a:xfrm>
+            <a:off x="570599" y="6456883"/>
+            <a:ext cx="8632151" cy="448665"/>
+          </a:xfrm>
+          <a:prstGeom prst="rect">
+            <a:avLst/>
+          </a:prstGeom>
+          <a:noFill/>
+        </p:spPr>
+        <p:txBody>
+          <a:bodyPr wrap="square" anchor="ctr" lIns="0" rIns="0" tIns="0" bIns="0">
+            <a:spAutoFit/>
+          </a:bodyPr>
+          <a:lstStyle/>
+          <a:p>
+            <a:pPr algn="l">
+              <a:lnSpc>
+                <a:spcPct val="110000"/>
+              </a:lnSpc>
+              <a:spcAft>
+                <a:spcPts val="0"/>
+              </a:spcAft>
+            </a:pPr>
+            <a:r>
+              <a:rPr sz="960" b="0" i="1">
+                <a:solidFill>
+                  <a:srgbClr val="FFFFFF"/>
+                </a:solidFill>
+                <a:latin typeface="Arial"/>
+              </a:rPr>
+              <a:t>Once PE’s smoothing is removed, the two carry similar volatility — but Athanase returns more, its risk is upside not downside, and it stays liquid and transparent.</a:t>
+            </a:r>
+          </a:p>
+        </p:txBody>
+      </p:sp>
+      <p:sp>
+        <p:nvSpPr>
+          <p:cNvPr id="34" name="TextBox 33"/>
+          <p:cNvSpPr txBox="1"/>
+          <p:nvPr/>
+        </p:nvSpPr>
+        <p:spPr>
+          <a:xfrm>
+            <a:off x="438922" y="6944563"/>
+            <a:ext cx="9217382" cy="487680"/>
+          </a:xfrm>
+          <a:prstGeom prst="rect">
+            <a:avLst/>
+          </a:prstGeom>
+          <a:noFill/>
+        </p:spPr>
+        <p:txBody>
+          <a:bodyPr wrap="square" anchor="t" lIns="0" rIns="0" tIns="0" bIns="0">
+            <a:spAutoFit/>
+          </a:bodyPr>
+          <a:lstStyle/>
+          <a:p>
+            <a:pPr algn="l">
+              <a:lnSpc>
+                <a:spcPct val="110000"/>
+              </a:lnSpc>
+              <a:spcAft>
+                <a:spcPts val="0"/>
+              </a:spcAft>
+            </a:pPr>
+            <a:r>
+              <a:rPr sz="600" b="0" i="0">
+                <a:solidFill>
+                  <a:srgbClr val="556A83"/>
+                </a:solidFill>
+                <a:latin typeface="Arial"/>
+              </a:rPr>
+              <a:t>Athanase: net monthly returns, 235 months (2006–2025), real (total vol 27%). PE realised ~11–14% vs headline IRR ~18–22%; reported ~10% vol de-smoothed to ~25–30% (PIMCO; AQR beta 1.5–1.6). See references.</a:t>
+            </a:r>
+          </a:p>
+        </p:txBody>
+      </p:sp>
+    </p:spTree>
+  </p:cSld>
+  <p:clrMapOvr>
+    <a:masterClrMapping/>
+  </p:clrMapOvr>
+</p:sld>
+</file>
+
+<file path=ppt/slides/slide33.xml><?xml version="1.0" encoding="utf-8"?>
+<p:sld xmlns:a="http://schemas.openxmlformats.org/drawingml/2006/main" xmlns:p="http://schemas.openxmlformats.org/presentationml/2006/main" xmlns:r="http://schemas.openxmlformats.org/officeDocument/2006/relationships">
+  <p:cSld>
+    <p:spTree>
+      <p:nvGrpSpPr>
+        <p:cNvPr id="1" name=""/>
+        <p:cNvGrpSpPr/>
+        <p:nvPr/>
+      </p:nvGrpSpPr>
+      <p:grpSpPr/>
+      <p:sp>
+        <p:nvSpPr>
+          <p:cNvPr id="2" name="Rectangle 1"/>
+          <p:cNvSpPr/>
+          <p:nvPr/>
+        </p:nvSpPr>
+        <p:spPr>
+          <a:xfrm>
+            <a:off x="0" y="0"/>
+            <a:ext cx="9753600" cy="7315200"/>
+          </a:xfrm>
+          <a:prstGeom prst="rect">
+            <a:avLst/>
+          </a:prstGeom>
+          <a:solidFill>
+            <a:srgbClr val="FFFFFF"/>
+          </a:solidFill>
+          <a:ln>
+            <a:noFill/>
+          </a:ln>
+          <a:effectLst/>
+        </p:spPr>
+        <p:style>
+          <a:lnRef idx="1">
+            <a:schemeClr val="accent1"/>
+          </a:lnRef>
+          <a:fillRef idx="3">
+            <a:schemeClr val="accent1"/>
+          </a:fillRef>
+          <a:effectRef idx="2">
+            <a:schemeClr val="accent1"/>
+          </a:effectRef>
+          <a:fontRef idx="minor">
+            <a:schemeClr val="lt1"/>
+          </a:fontRef>
+        </p:style>
+        <p:txBody>
+          <a:bodyPr rtlCol="0" anchor="ctr"/>
+          <a:lstStyle/>
+          <a:p>
+            <a:pPr algn="ctr"/>
+          </a:p>
+        </p:txBody>
+      </p:sp>
+      <p:pic>
+        <p:nvPicPr>
+          <p:cNvPr id="3" name="Picture 2" descr="mark_dark.png"/>
+          <p:cNvPicPr>
+            <a:picLocks noChangeAspect="1"/>
+          </p:cNvPicPr>
+          <p:nvPr/>
+        </p:nvPicPr>
+        <p:blipFill>
+          <a:blip r:embed="rId2"/>
+          <a:stretch>
+            <a:fillRect/>
+          </a:stretch>
+        </p:blipFill>
+        <p:spPr>
+          <a:xfrm>
+            <a:off x="402346" y="234086"/>
+            <a:ext cx="224012" cy="190199"/>
+          </a:xfrm>
+          <a:prstGeom prst="rect">
+            <a:avLst/>
+          </a:prstGeom>
+        </p:spPr>
+      </p:pic>
+      <p:sp>
+        <p:nvSpPr>
+          <p:cNvPr id="4" name="TextBox 3"/>
+          <p:cNvSpPr txBox="1"/>
+          <p:nvPr/>
+        </p:nvSpPr>
+        <p:spPr>
+          <a:xfrm>
+            <a:off x="716907" y="263347"/>
+            <a:ext cx="5120768" cy="292608"/>
+          </a:xfrm>
+          <a:prstGeom prst="rect">
+            <a:avLst/>
+          </a:prstGeom>
+          <a:noFill/>
+        </p:spPr>
+        <p:txBody>
+          <a:bodyPr wrap="square" anchor="t" lIns="0" rIns="0" tIns="0" bIns="0">
+            <a:spAutoFit/>
+          </a:bodyPr>
+          <a:lstStyle/>
+          <a:p>
+            <a:pPr algn="l">
+              <a:lnSpc>
+                <a:spcPct val="110000"/>
+              </a:lnSpc>
+              <a:spcAft>
+                <a:spcPts val="0"/>
+              </a:spcAft>
+            </a:pPr>
+            <a:r>
+              <a:rPr sz="880" b="0" i="0">
+                <a:solidFill>
+                  <a:srgbClr val="556A83"/>
+                </a:solidFill>
+                <a:latin typeface="Arial"/>
+              </a:rPr>
+              <a:t>Private Equity</a:t>
+            </a:r>
+          </a:p>
+        </p:txBody>
+      </p:sp>
+      <p:sp>
+        <p:nvSpPr>
+          <p:cNvPr id="5" name="TextBox 4"/>
+          <p:cNvSpPr txBox="1"/>
+          <p:nvPr/>
+        </p:nvSpPr>
+        <p:spPr>
+          <a:xfrm>
+            <a:off x="7242229" y="263347"/>
+            <a:ext cx="2084884" cy="292608"/>
+          </a:xfrm>
+          <a:prstGeom prst="rect">
+            <a:avLst/>
+          </a:prstGeom>
+          <a:noFill/>
+        </p:spPr>
+        <p:txBody>
+          <a:bodyPr wrap="square" anchor="t" lIns="0" rIns="0" tIns="0" bIns="0">
+            <a:spAutoFit/>
+          </a:bodyPr>
+          <a:lstStyle/>
+          <a:p>
+            <a:pPr algn="r">
+              <a:lnSpc>
+                <a:spcPct val="110000"/>
+              </a:lnSpc>
+              <a:spcAft>
+                <a:spcPts val="0"/>
+              </a:spcAft>
+            </a:pPr>
+            <a:r>
+              <a:rPr sz="880" b="1" i="0">
+                <a:solidFill>
+                  <a:srgbClr val="556A83"/>
+                </a:solidFill>
+                <a:latin typeface="Arial"/>
+              </a:rPr>
+              <a:t>Figure 9</a:t>
+            </a:r>
+          </a:p>
+        </p:txBody>
+      </p:sp>
+      <p:sp>
+        <p:nvSpPr>
+          <p:cNvPr id="6" name="Rectangle 5"/>
+          <p:cNvSpPr/>
+          <p:nvPr/>
+        </p:nvSpPr>
+        <p:spPr>
+          <a:xfrm>
+            <a:off x="0" y="604723"/>
+            <a:ext cx="9753600" cy="1414272"/>
+          </a:xfrm>
+          <a:prstGeom prst="rect">
+            <a:avLst/>
+          </a:prstGeom>
+          <a:solidFill>
+            <a:srgbClr val="F6F7F9"/>
+          </a:solidFill>
+          <a:ln>
+            <a:noFill/>
+          </a:ln>
+          <a:effectLst/>
+        </p:spPr>
+        <p:style>
+          <a:lnRef idx="1">
+            <a:schemeClr val="accent1"/>
+          </a:lnRef>
+          <a:fillRef idx="3">
+            <a:schemeClr val="accent1"/>
+          </a:fillRef>
+          <a:effectRef idx="2">
+            <a:schemeClr val="accent1"/>
+          </a:effectRef>
+          <a:fontRef idx="minor">
+            <a:schemeClr val="lt1"/>
+          </a:fontRef>
+        </p:style>
+        <p:txBody>
+          <a:bodyPr rtlCol="0" anchor="ctr"/>
+          <a:lstStyle/>
+          <a:p>
+            <a:pPr algn="ctr"/>
+          </a:p>
+        </p:txBody>
+      </p:sp>
+      <p:sp>
+        <p:nvSpPr>
+          <p:cNvPr id="7" name="TextBox 6"/>
+          <p:cNvSpPr txBox="1"/>
+          <p:nvPr/>
+        </p:nvSpPr>
+        <p:spPr>
+          <a:xfrm>
+            <a:off x="438922" y="721766"/>
+            <a:ext cx="8851613" cy="829056"/>
+          </a:xfrm>
+          <a:prstGeom prst="rect">
+            <a:avLst/>
+          </a:prstGeom>
+          <a:noFill/>
+        </p:spPr>
+        <p:txBody>
+          <a:bodyPr wrap="square" anchor="t" lIns="0" rIns="0" tIns="0" bIns="0">
+            <a:spAutoFit/>
+          </a:bodyPr>
+          <a:lstStyle/>
+          <a:p>
+            <a:pPr algn="l">
+              <a:lnSpc>
+                <a:spcPct val="110000"/>
+              </a:lnSpc>
+              <a:spcAft>
+                <a:spcPts val="200"/>
+              </a:spcAft>
+            </a:pPr>
+            <a:r>
+              <a:rPr sz="2400" b="0" i="0" spc="-90">
+                <a:solidFill>
+                  <a:srgbClr val="314359"/>
+                </a:solidFill>
+                <a:latin typeface="Times New Roman"/>
+              </a:rPr>
+              <a:t>2.24 The volatility gap is settled in the literature</a:t>
+            </a:r>
+          </a:p>
+        </p:txBody>
+      </p:sp>
+      <p:sp>
+        <p:nvSpPr>
+          <p:cNvPr id="8" name="TextBox 7"/>
+          <p:cNvSpPr txBox="1"/>
+          <p:nvPr/>
+        </p:nvSpPr>
+        <p:spPr>
+          <a:xfrm>
+            <a:off x="453553" y="1511808"/>
+            <a:ext cx="8705305" cy="487680"/>
+          </a:xfrm>
+          <a:prstGeom prst="rect">
+            <a:avLst/>
+          </a:prstGeom>
+          <a:noFill/>
+        </p:spPr>
+        <p:txBody>
+          <a:bodyPr wrap="square" anchor="t" lIns="0" rIns="0" tIns="0" bIns="0">
+            <a:spAutoFit/>
+          </a:bodyPr>
+          <a:lstStyle/>
+          <a:p>
+            <a:pPr algn="l">
+              <a:lnSpc>
+                <a:spcPct val="110000"/>
+              </a:lnSpc>
+              <a:spcAft>
+                <a:spcPts val="0"/>
+              </a:spcAft>
+            </a:pPr>
+            <a:r>
+              <a:rPr sz="1040" b="0" i="1">
+                <a:solidFill>
+                  <a:srgbClr val="556A83"/>
+                </a:solidFill>
+                <a:latin typeface="Arial"/>
+              </a:rPr>
+              <a:t>Cash-flow models, secondary-market prices and econometric unsmoothing all converge: PE’s true risk is roughly 2–3× its reported figure.</a:t>
+            </a:r>
+          </a:p>
+        </p:txBody>
+      </p:sp>
+      <p:sp>
+        <p:nvSpPr>
+          <p:cNvPr id="9" name="TextBox 8"/>
+          <p:cNvSpPr txBox="1"/>
+          <p:nvPr/>
+        </p:nvSpPr>
+        <p:spPr>
+          <a:xfrm>
+            <a:off x="6583844" y="6876288"/>
+            <a:ext cx="2926153" cy="292608"/>
+          </a:xfrm>
+          <a:prstGeom prst="rect">
+            <a:avLst/>
+          </a:prstGeom>
+          <a:noFill/>
+        </p:spPr>
+        <p:txBody>
+          <a:bodyPr wrap="square" anchor="t" lIns="0" rIns="0" tIns="0" bIns="0">
+            <a:spAutoFit/>
+          </a:bodyPr>
+          <a:lstStyle/>
+          <a:p>
+            <a:pPr algn="r">
+              <a:lnSpc>
+                <a:spcPct val="110000"/>
+              </a:lnSpc>
+              <a:spcAft>
+                <a:spcPts val="0"/>
+              </a:spcAft>
+            </a:pPr>
+            <a:r>
+              <a:rPr sz="680" b="0" i="0">
+                <a:solidFill>
+                  <a:srgbClr val="556A83"/>
+                </a:solidFill>
+                <a:latin typeface="Arial"/>
+              </a:rPr>
+              <a:t>Strictly confidential          30</a:t>
+            </a:r>
+          </a:p>
+        </p:txBody>
+      </p:sp>
+      <p:pic>
+        <p:nvPicPr>
+          <p:cNvPr id="10" name="Picture 9" descr="d_pe_evidence.png"/>
+          <p:cNvPicPr>
+            <a:picLocks noChangeAspect="1"/>
+          </p:cNvPicPr>
+          <p:nvPr/>
+        </p:nvPicPr>
+        <p:blipFill>
+          <a:blip r:embed="rId3"/>
+          <a:stretch>
+            <a:fillRect/>
+          </a:stretch>
+        </p:blipFill>
+        <p:spPr>
+          <a:xfrm>
+            <a:off x="365769" y="2243328"/>
+            <a:ext cx="4834738" cy="2889576"/>
+          </a:xfrm>
+          <a:prstGeom prst="rect">
+            <a:avLst/>
+          </a:prstGeom>
+        </p:spPr>
+      </p:pic>
+      <p:sp>
+        <p:nvSpPr>
+          <p:cNvPr id="11" name="Rectangle 10"/>
+          <p:cNvSpPr/>
+          <p:nvPr/>
+        </p:nvSpPr>
+        <p:spPr>
+          <a:xfrm>
+            <a:off x="6218075" y="2292096"/>
+            <a:ext cx="3109037" cy="877824"/>
+          </a:xfrm>
+          <a:prstGeom prst="rect">
+            <a:avLst/>
+          </a:prstGeom>
+          <a:solidFill>
+            <a:srgbClr val="F6F7F9"/>
+          </a:solidFill>
+          <a:ln>
+            <a:noFill/>
+          </a:ln>
+          <a:effectLst/>
+        </p:spPr>
+        <p:style>
+          <a:lnRef idx="1">
+            <a:schemeClr val="accent1"/>
+          </a:lnRef>
+          <a:fillRef idx="3">
+            <a:schemeClr val="accent1"/>
+          </a:fillRef>
+          <a:effectRef idx="2">
+            <a:schemeClr val="accent1"/>
+          </a:effectRef>
+          <a:fontRef idx="minor">
+            <a:schemeClr val="lt1"/>
+          </a:fontRef>
+        </p:style>
+        <p:txBody>
+          <a:bodyPr rtlCol="0" anchor="ctr"/>
+          <a:lstStyle/>
+          <a:p>
+            <a:pPr algn="ctr"/>
+          </a:p>
+        </p:txBody>
+      </p:sp>
+      <p:sp>
+        <p:nvSpPr>
+          <p:cNvPr id="12" name="TextBox 11"/>
+          <p:cNvSpPr txBox="1"/>
+          <p:nvPr/>
+        </p:nvSpPr>
+        <p:spPr>
+          <a:xfrm>
+            <a:off x="6364383" y="2389632"/>
+            <a:ext cx="2816422" cy="243840"/>
+          </a:xfrm>
+          <a:prstGeom prst="rect">
+            <a:avLst/>
+          </a:prstGeom>
+          <a:noFill/>
+        </p:spPr>
+        <p:txBody>
+          <a:bodyPr wrap="square" anchor="t" lIns="0" rIns="0" tIns="0" bIns="0">
+            <a:spAutoFit/>
+          </a:bodyPr>
+          <a:lstStyle/>
+          <a:p>
+            <a:pPr algn="l">
+              <a:lnSpc>
+                <a:spcPct val="110000"/>
+              </a:lnSpc>
+              <a:spcAft>
+                <a:spcPts val="0"/>
+              </a:spcAft>
+            </a:pPr>
+            <a:r>
+              <a:rPr sz="800" b="1" i="0">
+                <a:solidFill>
+                  <a:srgbClr val="314359"/>
+                </a:solidFill>
+                <a:latin typeface="Arial"/>
+              </a:rPr>
+              <a:t>CASH-FLOW NPV MODEL</a:t>
+            </a:r>
+          </a:p>
+        </p:txBody>
+      </p:sp>
+      <p:sp>
+        <p:nvSpPr>
+          <p:cNvPr id="13" name="TextBox 12"/>
+          <p:cNvSpPr txBox="1"/>
+          <p:nvPr/>
+        </p:nvSpPr>
+        <p:spPr>
+          <a:xfrm>
+            <a:off x="6364383" y="2613964"/>
+            <a:ext cx="2816422" cy="536448"/>
+          </a:xfrm>
+          <a:prstGeom prst="rect">
+            <a:avLst/>
+          </a:prstGeom>
+          <a:noFill/>
+        </p:spPr>
+        <p:txBody>
+          <a:bodyPr wrap="square" anchor="t" lIns="0" rIns="0" tIns="0" bIns="0">
+            <a:spAutoFit/>
+          </a:bodyPr>
+          <a:lstStyle/>
+          <a:p>
+            <a:pPr algn="l">
+              <a:lnSpc>
+                <a:spcPct val="110000"/>
+              </a:lnSpc>
+              <a:spcAft>
+                <a:spcPts val="0"/>
+              </a:spcAft>
+            </a:pPr>
+            <a:r>
+              <a:rPr sz="760" b="0" i="0">
+                <a:solidFill>
+                  <a:srgbClr val="0E1620"/>
+                </a:solidFill>
+                <a:latin typeface="Arial"/>
+              </a:rPr>
+              <a:t>Buyout vol 25% (vs 11% index), beta &gt; 1 — Ang, Chen, Goetzmann &amp; Phalippou (2018), J. Finance.</a:t>
+            </a:r>
+          </a:p>
+        </p:txBody>
+      </p:sp>
+      <p:sp>
+        <p:nvSpPr>
+          <p:cNvPr id="14" name="Rectangle 13"/>
+          <p:cNvSpPr/>
+          <p:nvPr/>
+        </p:nvSpPr>
+        <p:spPr>
+          <a:xfrm>
+            <a:off x="6218075" y="3286963"/>
+            <a:ext cx="3109037" cy="877824"/>
+          </a:xfrm>
+          <a:prstGeom prst="rect">
+            <a:avLst/>
+          </a:prstGeom>
+          <a:solidFill>
+            <a:srgbClr val="F6F7F9"/>
+          </a:solidFill>
+          <a:ln>
+            <a:noFill/>
+          </a:ln>
+          <a:effectLst/>
+        </p:spPr>
+        <p:style>
+          <a:lnRef idx="1">
+            <a:schemeClr val="accent1"/>
+          </a:lnRef>
+          <a:fillRef idx="3">
+            <a:schemeClr val="accent1"/>
+          </a:fillRef>
+          <a:effectRef idx="2">
+            <a:schemeClr val="accent1"/>
+          </a:effectRef>
+          <a:fontRef idx="minor">
+            <a:schemeClr val="lt1"/>
+          </a:fontRef>
+        </p:style>
+        <p:txBody>
+          <a:bodyPr rtlCol="0" anchor="ctr"/>
+          <a:lstStyle/>
+          <a:p>
+            <a:pPr algn="ctr"/>
+          </a:p>
+        </p:txBody>
+      </p:sp>
+      <p:sp>
+        <p:nvSpPr>
+          <p:cNvPr id="15" name="TextBox 14"/>
+          <p:cNvSpPr txBox="1"/>
+          <p:nvPr/>
+        </p:nvSpPr>
+        <p:spPr>
+          <a:xfrm>
+            <a:off x="6364383" y="3384499"/>
+            <a:ext cx="2816422" cy="243840"/>
+          </a:xfrm>
+          <a:prstGeom prst="rect">
+            <a:avLst/>
+          </a:prstGeom>
+          <a:noFill/>
+        </p:spPr>
+        <p:txBody>
+          <a:bodyPr wrap="square" anchor="t" lIns="0" rIns="0" tIns="0" bIns="0">
+            <a:spAutoFit/>
+          </a:bodyPr>
+          <a:lstStyle/>
+          <a:p>
+            <a:pPr algn="l">
+              <a:lnSpc>
+                <a:spcPct val="110000"/>
+              </a:lnSpc>
+              <a:spcAft>
+                <a:spcPts val="0"/>
+              </a:spcAft>
+            </a:pPr>
+            <a:r>
+              <a:rPr sz="800" b="1" i="0">
+                <a:solidFill>
+                  <a:srgbClr val="314359"/>
+                </a:solidFill>
+                <a:latin typeface="Arial"/>
+              </a:rPr>
+              <a:t>SECONDARY-MARKET PRICES</a:t>
+            </a:r>
+          </a:p>
+        </p:txBody>
+      </p:sp>
+      <p:sp>
+        <p:nvSpPr>
+          <p:cNvPr id="16" name="TextBox 15"/>
+          <p:cNvSpPr txBox="1"/>
+          <p:nvPr/>
+        </p:nvSpPr>
+        <p:spPr>
+          <a:xfrm>
+            <a:off x="6364383" y="3608832"/>
+            <a:ext cx="2816422" cy="536448"/>
+          </a:xfrm>
+          <a:prstGeom prst="rect">
+            <a:avLst/>
+          </a:prstGeom>
+          <a:noFill/>
+        </p:spPr>
+        <p:txBody>
+          <a:bodyPr wrap="square" anchor="t" lIns="0" rIns="0" tIns="0" bIns="0">
+            <a:spAutoFit/>
+          </a:bodyPr>
+          <a:lstStyle/>
+          <a:p>
+            <a:pPr algn="l">
+              <a:lnSpc>
+                <a:spcPct val="110000"/>
+              </a:lnSpc>
+              <a:spcAft>
+                <a:spcPts val="0"/>
+              </a:spcAft>
+            </a:pPr>
+            <a:r>
+              <a:rPr sz="760" b="0" i="0">
+                <a:solidFill>
+                  <a:srgbClr val="0E1620"/>
+                </a:solidFill>
+                <a:latin typeface="Arial"/>
+              </a:rPr>
+              <a:t>Traded-stake beta &gt; 2.0 vs &lt; 0.5 on NAV — Boyer, Nadauld, Vorkink &amp; Weisbach (2018).</a:t>
+            </a:r>
+          </a:p>
+        </p:txBody>
+      </p:sp>
+      <p:sp>
+        <p:nvSpPr>
+          <p:cNvPr id="17" name="Rectangle 16"/>
+          <p:cNvSpPr/>
+          <p:nvPr/>
+        </p:nvSpPr>
+        <p:spPr>
+          <a:xfrm>
+            <a:off x="6218075" y="4281830"/>
+            <a:ext cx="3109037" cy="877824"/>
+          </a:xfrm>
+          <a:prstGeom prst="rect">
+            <a:avLst/>
+          </a:prstGeom>
+          <a:solidFill>
+            <a:srgbClr val="F6F7F9"/>
+          </a:solidFill>
+          <a:ln>
+            <a:noFill/>
+          </a:ln>
+          <a:effectLst/>
+        </p:spPr>
+        <p:style>
+          <a:lnRef idx="1">
+            <a:schemeClr val="accent1"/>
+          </a:lnRef>
+          <a:fillRef idx="3">
+            <a:schemeClr val="accent1"/>
+          </a:fillRef>
+          <a:effectRef idx="2">
+            <a:schemeClr val="accent1"/>
+          </a:effectRef>
+          <a:fontRef idx="minor">
+            <a:schemeClr val="lt1"/>
+          </a:fontRef>
+        </p:style>
+        <p:txBody>
+          <a:bodyPr rtlCol="0" anchor="ctr"/>
+          <a:lstStyle/>
+          <a:p>
+            <a:pPr algn="ctr"/>
+          </a:p>
+        </p:txBody>
+      </p:sp>
+      <p:sp>
+        <p:nvSpPr>
+          <p:cNvPr id="18" name="TextBox 17"/>
+          <p:cNvSpPr txBox="1"/>
+          <p:nvPr/>
+        </p:nvSpPr>
+        <p:spPr>
+          <a:xfrm>
+            <a:off x="6364383" y="4379366"/>
+            <a:ext cx="2816422" cy="243840"/>
+          </a:xfrm>
+          <a:prstGeom prst="rect">
+            <a:avLst/>
+          </a:prstGeom>
+          <a:noFill/>
+        </p:spPr>
+        <p:txBody>
+          <a:bodyPr wrap="square" anchor="t" lIns="0" rIns="0" tIns="0" bIns="0">
+            <a:spAutoFit/>
+          </a:bodyPr>
+          <a:lstStyle/>
+          <a:p>
+            <a:pPr algn="l">
+              <a:lnSpc>
+                <a:spcPct val="110000"/>
+              </a:lnSpc>
+              <a:spcAft>
+                <a:spcPts val="0"/>
+              </a:spcAft>
+            </a:pPr>
+            <a:r>
+              <a:rPr sz="800" b="1" i="0">
+                <a:solidFill>
+                  <a:srgbClr val="314359"/>
+                </a:solidFill>
+                <a:latin typeface="Arial"/>
+              </a:rPr>
+              <a:t>ECONOMETRIC UNSMOOTHING</a:t>
+            </a:r>
+          </a:p>
+        </p:txBody>
+      </p:sp>
+      <p:sp>
+        <p:nvSpPr>
+          <p:cNvPr id="19" name="TextBox 18"/>
+          <p:cNvSpPr txBox="1"/>
+          <p:nvPr/>
+        </p:nvSpPr>
+        <p:spPr>
+          <a:xfrm>
+            <a:off x="6364383" y="4603699"/>
+            <a:ext cx="2816422" cy="536448"/>
+          </a:xfrm>
+          <a:prstGeom prst="rect">
+            <a:avLst/>
+          </a:prstGeom>
+          <a:noFill/>
+        </p:spPr>
+        <p:txBody>
+          <a:bodyPr wrap="square" anchor="t" lIns="0" rIns="0" tIns="0" bIns="0">
+            <a:spAutoFit/>
+          </a:bodyPr>
+          <a:lstStyle/>
+          <a:p>
+            <a:pPr algn="l">
+              <a:lnSpc>
+                <a:spcPct val="110000"/>
+              </a:lnSpc>
+              <a:spcAft>
+                <a:spcPts val="0"/>
+              </a:spcAft>
+            </a:pPr>
+            <a:r>
+              <a:rPr sz="760" b="0" i="0">
+                <a:solidFill>
+                  <a:srgbClr val="0E1620"/>
+                </a:solidFill>
+                <a:latin typeface="Arial"/>
+              </a:rPr>
+              <a:t>Illiquidity creates spurious smoothness — Getmansky, Lo &amp; Makarov (2004), JFE (cited 1,300+).</a:t>
+            </a:r>
+          </a:p>
+        </p:txBody>
+      </p:sp>
+      <p:sp>
+        <p:nvSpPr>
+          <p:cNvPr id="20" name="Rectangle 19"/>
+          <p:cNvSpPr/>
+          <p:nvPr/>
+        </p:nvSpPr>
+        <p:spPr>
+          <a:xfrm>
+            <a:off x="6218075" y="5276697"/>
+            <a:ext cx="3109037" cy="877824"/>
+          </a:xfrm>
+          <a:prstGeom prst="rect">
+            <a:avLst/>
+          </a:prstGeom>
+          <a:solidFill>
+            <a:srgbClr val="F6F7F9"/>
+          </a:solidFill>
+          <a:ln>
+            <a:noFill/>
+          </a:ln>
+          <a:effectLst/>
+        </p:spPr>
+        <p:style>
+          <a:lnRef idx="1">
+            <a:schemeClr val="accent1"/>
+          </a:lnRef>
+          <a:fillRef idx="3">
+            <a:schemeClr val="accent1"/>
+          </a:fillRef>
+          <a:effectRef idx="2">
+            <a:schemeClr val="accent1"/>
+          </a:effectRef>
+          <a:fontRef idx="minor">
+            <a:schemeClr val="lt1"/>
+          </a:fontRef>
+        </p:style>
+        <p:txBody>
+          <a:bodyPr rtlCol="0" anchor="ctr"/>
+          <a:lstStyle/>
+          <a:p>
+            <a:pPr algn="ctr"/>
+          </a:p>
+        </p:txBody>
+      </p:sp>
+      <p:sp>
+        <p:nvSpPr>
+          <p:cNvPr id="21" name="TextBox 20"/>
+          <p:cNvSpPr txBox="1"/>
+          <p:nvPr/>
+        </p:nvSpPr>
+        <p:spPr>
+          <a:xfrm>
+            <a:off x="6364383" y="5374233"/>
+            <a:ext cx="2816422" cy="243840"/>
+          </a:xfrm>
+          <a:prstGeom prst="rect">
+            <a:avLst/>
+          </a:prstGeom>
+          <a:noFill/>
+        </p:spPr>
+        <p:txBody>
+          <a:bodyPr wrap="square" anchor="t" lIns="0" rIns="0" tIns="0" bIns="0">
+            <a:spAutoFit/>
+          </a:bodyPr>
+          <a:lstStyle/>
+          <a:p>
+            <a:pPr algn="l">
+              <a:lnSpc>
+                <a:spcPct val="110000"/>
+              </a:lnSpc>
+              <a:spcAft>
+                <a:spcPts val="0"/>
+              </a:spcAft>
+            </a:pPr>
+            <a:r>
+              <a:rPr sz="800" b="1" i="0">
+                <a:solidFill>
+                  <a:srgbClr val="314359"/>
+                </a:solidFill>
+                <a:latin typeface="Arial"/>
+              </a:rPr>
+              <a:t>CATERING / “LAUNDERING”</a:t>
+            </a:r>
+          </a:p>
+        </p:txBody>
+      </p:sp>
+      <p:sp>
+        <p:nvSpPr>
+          <p:cNvPr id="22" name="TextBox 21"/>
+          <p:cNvSpPr txBox="1"/>
+          <p:nvPr/>
+        </p:nvSpPr>
+        <p:spPr>
+          <a:xfrm>
+            <a:off x="6364383" y="5598566"/>
+            <a:ext cx="2816422" cy="536448"/>
+          </a:xfrm>
+          <a:prstGeom prst="rect">
+            <a:avLst/>
+          </a:prstGeom>
+          <a:noFill/>
+        </p:spPr>
+        <p:txBody>
+          <a:bodyPr wrap="square" anchor="t" lIns="0" rIns="0" tIns="0" bIns="0">
+            <a:spAutoFit/>
+          </a:bodyPr>
+          <a:lstStyle/>
+          <a:p>
+            <a:pPr algn="l">
+              <a:lnSpc>
+                <a:spcPct val="110000"/>
+              </a:lnSpc>
+              <a:spcAft>
+                <a:spcPts val="0"/>
+              </a:spcAft>
+            </a:pPr>
+            <a:r>
+              <a:rPr sz="760" b="0" i="0">
+                <a:solidFill>
+                  <a:srgbClr val="0E1620"/>
+                </a:solidFill>
+                <a:latin typeface="Arial"/>
+              </a:rPr>
+              <a:t>GPs smooth because LPs value the “phony happiness” — Jackson, Ling &amp; Naranjo (2022); Couts et al. (2020).</a:t>
+            </a:r>
+          </a:p>
+        </p:txBody>
+      </p:sp>
+      <p:sp>
+        <p:nvSpPr>
+          <p:cNvPr id="23" name="Rectangle 22"/>
+          <p:cNvSpPr/>
+          <p:nvPr/>
+        </p:nvSpPr>
+        <p:spPr>
+          <a:xfrm>
+            <a:off x="438922" y="6456883"/>
+            <a:ext cx="8873559" cy="448665"/>
+          </a:xfrm>
+          <a:prstGeom prst="rect">
+            <a:avLst/>
+          </a:prstGeom>
+          <a:solidFill>
+            <a:srgbClr val="152130"/>
+          </a:solidFill>
+          <a:ln>
+            <a:noFill/>
+          </a:ln>
+          <a:effectLst/>
+        </p:spPr>
+        <p:style>
+          <a:lnRef idx="1">
+            <a:schemeClr val="accent1"/>
+          </a:lnRef>
+          <a:fillRef idx="3">
+            <a:schemeClr val="accent1"/>
+          </a:fillRef>
+          <a:effectRef idx="2">
+            <a:schemeClr val="accent1"/>
+          </a:effectRef>
+          <a:fontRef idx="minor">
+            <a:schemeClr val="lt1"/>
+          </a:fontRef>
+        </p:style>
+        <p:txBody>
+          <a:bodyPr rtlCol="0" anchor="ctr"/>
+          <a:lstStyle/>
+          <a:p>
+            <a:pPr algn="ctr"/>
+          </a:p>
+        </p:txBody>
+      </p:sp>
+      <p:sp>
+        <p:nvSpPr>
+          <p:cNvPr id="24" name="TextBox 23"/>
+          <p:cNvSpPr txBox="1"/>
+          <p:nvPr/>
+        </p:nvSpPr>
+        <p:spPr>
+          <a:xfrm>
+            <a:off x="570599" y="6456883"/>
+            <a:ext cx="8632151" cy="448665"/>
+          </a:xfrm>
+          <a:prstGeom prst="rect">
+            <a:avLst/>
+          </a:prstGeom>
+          <a:noFill/>
+        </p:spPr>
+        <p:txBody>
+          <a:bodyPr wrap="square" anchor="ctr" lIns="0" rIns="0" tIns="0" bIns="0">
+            <a:spAutoFit/>
+          </a:bodyPr>
+          <a:lstStyle/>
+          <a:p>
+            <a:pPr algn="l">
+              <a:lnSpc>
+                <a:spcPct val="110000"/>
+              </a:lnSpc>
+              <a:spcAft>
+                <a:spcPts val="0"/>
+              </a:spcAft>
+            </a:pPr>
+            <a:r>
+              <a:rPr sz="960" b="0" i="1">
+                <a:solidFill>
+                  <a:srgbClr val="FFFFFF"/>
+                </a:solidFill>
+                <a:latin typeface="Arial"/>
+              </a:rPr>
+              <a:t>Independent methods, the same answer: PE is a highly-levered equity portfolio whose reported smoothness is an artefact.</a:t>
+            </a:r>
+          </a:p>
+        </p:txBody>
+      </p:sp>
+      <p:sp>
+        <p:nvSpPr>
+          <p:cNvPr id="25" name="TextBox 24"/>
+          <p:cNvSpPr txBox="1"/>
+          <p:nvPr/>
+        </p:nvSpPr>
+        <p:spPr>
+          <a:xfrm>
+            <a:off x="438922" y="6944563"/>
+            <a:ext cx="9217382" cy="487680"/>
+          </a:xfrm>
+          <a:prstGeom prst="rect">
+            <a:avLst/>
+          </a:prstGeom>
+          <a:noFill/>
+        </p:spPr>
+        <p:txBody>
+          <a:bodyPr wrap="square" anchor="t" lIns="0" rIns="0" tIns="0" bIns="0">
+            <a:spAutoFit/>
+          </a:bodyPr>
+          <a:lstStyle/>
+          <a:p>
+            <a:pPr algn="l">
+              <a:lnSpc>
+                <a:spcPct val="110000"/>
+              </a:lnSpc>
+              <a:spcAft>
+                <a:spcPts val="0"/>
+              </a:spcAft>
+            </a:pPr>
+            <a:r>
+              <a:rPr sz="560" b="0" i="0">
+                <a:solidFill>
+                  <a:srgbClr val="556A83"/>
+                </a:solidFill>
+                <a:latin typeface="Arial"/>
+              </a:rPr>
+              <a:t>Sources: Ang, Chen, Goetzmann &amp; Phalippou (2018); Boyer, Nadauld, Vorkink &amp; Weisbach (2018); Getmansky, Lo &amp; Makarov (2004); Couts, Gonçalves &amp; Rossi (2020); Jackson, Ling &amp; Naranjo (2022); PIMCO (2022); AQR. Bars show vol-equivalent risk; beta rows scaled for comparison. See references.</a:t>
+            </a:r>
+          </a:p>
+        </p:txBody>
+      </p:sp>
+    </p:spTree>
+  </p:cSld>
+  <p:clrMapOvr>
+    <a:masterClrMapping/>
+  </p:clrMapOvr>
+</p:sld>
+</file>
+
+<file path=ppt/slides/slide34.xml><?xml version="1.0" encoding="utf-8"?>
+<p:sld xmlns:a="http://schemas.openxmlformats.org/drawingml/2006/main" xmlns:p="http://schemas.openxmlformats.org/presentationml/2006/main" xmlns:r="http://schemas.openxmlformats.org/officeDocument/2006/relationships">
+  <p:cSld>
+    <p:spTree>
+      <p:nvGrpSpPr>
+        <p:cNvPr id="1" name=""/>
+        <p:cNvGrpSpPr/>
+        <p:nvPr/>
+      </p:nvGrpSpPr>
+      <p:grpSpPr/>
+      <p:sp>
+        <p:nvSpPr>
+          <p:cNvPr id="2" name="Rectangle 1"/>
+          <p:cNvSpPr/>
+          <p:nvPr/>
+        </p:nvSpPr>
+        <p:spPr>
+          <a:xfrm>
+            <a:off x="0" y="0"/>
+            <a:ext cx="9753600" cy="7315200"/>
+          </a:xfrm>
+          <a:prstGeom prst="rect">
+            <a:avLst/>
+          </a:prstGeom>
+          <a:solidFill>
+            <a:srgbClr val="FFFFFF"/>
+          </a:solidFill>
+          <a:ln>
+            <a:noFill/>
+          </a:ln>
+          <a:effectLst/>
+        </p:spPr>
+        <p:style>
+          <a:lnRef idx="1">
+            <a:schemeClr val="accent1"/>
+          </a:lnRef>
+          <a:fillRef idx="3">
+            <a:schemeClr val="accent1"/>
+          </a:fillRef>
+          <a:effectRef idx="2">
+            <a:schemeClr val="accent1"/>
+          </a:effectRef>
+          <a:fontRef idx="minor">
+            <a:schemeClr val="lt1"/>
+          </a:fontRef>
+        </p:style>
+        <p:txBody>
+          <a:bodyPr rtlCol="0" anchor="ctr"/>
+          <a:lstStyle/>
+          <a:p>
+            <a:pPr algn="ctr"/>
+          </a:p>
+        </p:txBody>
+      </p:sp>
+      <p:pic>
+        <p:nvPicPr>
+          <p:cNvPr id="3" name="Picture 2" descr="mark_dark.png"/>
+          <p:cNvPicPr>
+            <a:picLocks noChangeAspect="1"/>
+          </p:cNvPicPr>
+          <p:nvPr/>
+        </p:nvPicPr>
+        <p:blipFill>
+          <a:blip r:embed="rId2"/>
+          <a:stretch>
+            <a:fillRect/>
+          </a:stretch>
+        </p:blipFill>
+        <p:spPr>
+          <a:xfrm>
+            <a:off x="402346" y="234086"/>
+            <a:ext cx="224012" cy="190199"/>
+          </a:xfrm>
+          <a:prstGeom prst="rect">
+            <a:avLst/>
+          </a:prstGeom>
+        </p:spPr>
+      </p:pic>
+      <p:sp>
+        <p:nvSpPr>
+          <p:cNvPr id="4" name="TextBox 3"/>
+          <p:cNvSpPr txBox="1"/>
+          <p:nvPr/>
+        </p:nvSpPr>
+        <p:spPr>
+          <a:xfrm>
+            <a:off x="716907" y="263347"/>
+            <a:ext cx="5120768" cy="292608"/>
+          </a:xfrm>
+          <a:prstGeom prst="rect">
+            <a:avLst/>
+          </a:prstGeom>
+          <a:noFill/>
+        </p:spPr>
+        <p:txBody>
+          <a:bodyPr wrap="square" anchor="t" lIns="0" rIns="0" tIns="0" bIns="0">
+            <a:spAutoFit/>
+          </a:bodyPr>
+          <a:lstStyle/>
+          <a:p>
+            <a:pPr algn="l">
+              <a:lnSpc>
+                <a:spcPct val="110000"/>
+              </a:lnSpc>
+              <a:spcAft>
+                <a:spcPts val="0"/>
+              </a:spcAft>
+            </a:pPr>
+            <a:r>
+              <a:rPr sz="880" b="0" i="0">
+                <a:solidFill>
+                  <a:srgbClr val="556A83"/>
+                </a:solidFill>
+                <a:latin typeface="Arial"/>
+              </a:rPr>
+              <a:t>Private Equity</a:t>
+            </a:r>
+          </a:p>
+        </p:txBody>
+      </p:sp>
+      <p:sp>
+        <p:nvSpPr>
+          <p:cNvPr id="5" name="TextBox 4"/>
+          <p:cNvSpPr txBox="1"/>
+          <p:nvPr/>
+        </p:nvSpPr>
+        <p:spPr>
+          <a:xfrm>
+            <a:off x="7242229" y="263347"/>
+            <a:ext cx="2084884" cy="292608"/>
+          </a:xfrm>
+          <a:prstGeom prst="rect">
+            <a:avLst/>
+          </a:prstGeom>
+          <a:noFill/>
+        </p:spPr>
+        <p:txBody>
+          <a:bodyPr wrap="square" anchor="t" lIns="0" rIns="0" tIns="0" bIns="0">
+            <a:spAutoFit/>
+          </a:bodyPr>
+          <a:lstStyle/>
+          <a:p>
+            <a:pPr algn="r">
+              <a:lnSpc>
+                <a:spcPct val="110000"/>
+              </a:lnSpc>
+              <a:spcAft>
+                <a:spcPts val="0"/>
+              </a:spcAft>
+            </a:pPr>
+            <a:r>
+              <a:rPr sz="880" b="1" i="0">
+                <a:solidFill>
+                  <a:srgbClr val="556A83"/>
+                </a:solidFill>
+                <a:latin typeface="Arial"/>
+              </a:rPr>
+              <a:t>Figure 10</a:t>
+            </a:r>
+          </a:p>
+        </p:txBody>
+      </p:sp>
+      <p:sp>
+        <p:nvSpPr>
+          <p:cNvPr id="6" name="Rectangle 5"/>
+          <p:cNvSpPr/>
+          <p:nvPr/>
+        </p:nvSpPr>
+        <p:spPr>
+          <a:xfrm>
+            <a:off x="0" y="604723"/>
+            <a:ext cx="9753600" cy="1414272"/>
+          </a:xfrm>
+          <a:prstGeom prst="rect">
+            <a:avLst/>
+          </a:prstGeom>
+          <a:solidFill>
+            <a:srgbClr val="F6F7F9"/>
+          </a:solidFill>
+          <a:ln>
+            <a:noFill/>
+          </a:ln>
+          <a:effectLst/>
+        </p:spPr>
+        <p:style>
+          <a:lnRef idx="1">
+            <a:schemeClr val="accent1"/>
+          </a:lnRef>
+          <a:fillRef idx="3">
+            <a:schemeClr val="accent1"/>
+          </a:fillRef>
+          <a:effectRef idx="2">
+            <a:schemeClr val="accent1"/>
+          </a:effectRef>
+          <a:fontRef idx="minor">
+            <a:schemeClr val="lt1"/>
+          </a:fontRef>
+        </p:style>
+        <p:txBody>
+          <a:bodyPr rtlCol="0" anchor="ctr"/>
+          <a:lstStyle/>
+          <a:p>
+            <a:pPr algn="ctr"/>
+          </a:p>
+        </p:txBody>
+      </p:sp>
+      <p:sp>
+        <p:nvSpPr>
+          <p:cNvPr id="7" name="TextBox 6"/>
+          <p:cNvSpPr txBox="1"/>
+          <p:nvPr/>
+        </p:nvSpPr>
+        <p:spPr>
+          <a:xfrm>
+            <a:off x="438922" y="721766"/>
+            <a:ext cx="8851613" cy="829056"/>
+          </a:xfrm>
+          <a:prstGeom prst="rect">
+            <a:avLst/>
+          </a:prstGeom>
+          <a:noFill/>
+        </p:spPr>
+        <p:txBody>
+          <a:bodyPr wrap="square" anchor="t" lIns="0" rIns="0" tIns="0" bIns="0">
+            <a:spAutoFit/>
+          </a:bodyPr>
+          <a:lstStyle/>
+          <a:p>
+            <a:pPr algn="l">
+              <a:lnSpc>
+                <a:spcPct val="110000"/>
+              </a:lnSpc>
+              <a:spcAft>
+                <a:spcPts val="200"/>
+              </a:spcAft>
+            </a:pPr>
+            <a:r>
+              <a:rPr sz="2400" b="0" i="0" spc="-90">
+                <a:solidFill>
+                  <a:srgbClr val="314359"/>
+                </a:solidFill>
+                <a:latin typeface="Times New Roman"/>
+              </a:rPr>
+              <a:t>2.25 Same headline volatility — far lower real risk</a:t>
+            </a:r>
+          </a:p>
+        </p:txBody>
+      </p:sp>
+      <p:sp>
+        <p:nvSpPr>
+          <p:cNvPr id="8" name="TextBox 7"/>
+          <p:cNvSpPr txBox="1"/>
+          <p:nvPr/>
+        </p:nvSpPr>
+        <p:spPr>
+          <a:xfrm>
+            <a:off x="453553" y="1511808"/>
+            <a:ext cx="8705305" cy="487680"/>
+          </a:xfrm>
+          <a:prstGeom prst="rect">
+            <a:avLst/>
+          </a:prstGeom>
+          <a:noFill/>
+        </p:spPr>
+        <p:txBody>
+          <a:bodyPr wrap="square" anchor="t" lIns="0" rIns="0" tIns="0" bIns="0">
+            <a:spAutoFit/>
+          </a:bodyPr>
+          <a:lstStyle/>
+          <a:p>
+            <a:pPr algn="l">
+              <a:lnSpc>
+                <a:spcPct val="110000"/>
+              </a:lnSpc>
+              <a:spcAft>
+                <a:spcPts val="0"/>
+              </a:spcAft>
+            </a:pPr>
+            <a:r>
+              <a:rPr sz="1040" b="0" i="1">
+                <a:solidFill>
+                  <a:srgbClr val="556A83"/>
+                </a:solidFill>
+                <a:latin typeface="Arial"/>
+              </a:rPr>
+              <a:t>Volatility is not symmetric. PE’s true risk is levered downside; Athanase’s is mostly upside, so its real loss risk is a fraction of PE’s.</a:t>
+            </a:r>
+          </a:p>
+        </p:txBody>
+      </p:sp>
+      <p:sp>
+        <p:nvSpPr>
+          <p:cNvPr id="9" name="TextBox 8"/>
+          <p:cNvSpPr txBox="1"/>
+          <p:nvPr/>
+        </p:nvSpPr>
+        <p:spPr>
+          <a:xfrm>
+            <a:off x="6583844" y="6876288"/>
+            <a:ext cx="2926153" cy="292608"/>
+          </a:xfrm>
+          <a:prstGeom prst="rect">
+            <a:avLst/>
+          </a:prstGeom>
+          <a:noFill/>
+        </p:spPr>
+        <p:txBody>
+          <a:bodyPr wrap="square" anchor="t" lIns="0" rIns="0" tIns="0" bIns="0">
+            <a:spAutoFit/>
+          </a:bodyPr>
+          <a:lstStyle/>
+          <a:p>
+            <a:pPr algn="r">
+              <a:lnSpc>
+                <a:spcPct val="110000"/>
+              </a:lnSpc>
+              <a:spcAft>
+                <a:spcPts val="0"/>
+              </a:spcAft>
+            </a:pPr>
+            <a:r>
+              <a:rPr sz="680" b="0" i="0">
+                <a:solidFill>
+                  <a:srgbClr val="556A83"/>
+                </a:solidFill>
+                <a:latin typeface="Arial"/>
+              </a:rPr>
+              <a:t>Strictly confidential          31</a:t>
+            </a:r>
+          </a:p>
+        </p:txBody>
+      </p:sp>
+      <p:pic>
+        <p:nvPicPr>
+          <p:cNvPr id="10" name="Picture 9" descr="d_pe_realrisk.png"/>
+          <p:cNvPicPr>
+            <a:picLocks noChangeAspect="1"/>
+          </p:cNvPicPr>
+          <p:nvPr/>
+        </p:nvPicPr>
+        <p:blipFill>
+          <a:blip r:embed="rId3"/>
+          <a:stretch>
+            <a:fillRect/>
+          </a:stretch>
+        </p:blipFill>
+        <p:spPr>
+          <a:xfrm>
+            <a:off x="402346" y="2243328"/>
+            <a:ext cx="4014211" cy="2816422"/>
+          </a:xfrm>
+          <a:prstGeom prst="rect">
+            <a:avLst/>
+          </a:prstGeom>
+        </p:spPr>
+      </p:pic>
+      <p:sp>
+        <p:nvSpPr>
+          <p:cNvPr id="11" name="Rectangle 10"/>
+          <p:cNvSpPr/>
+          <p:nvPr/>
+        </p:nvSpPr>
+        <p:spPr>
+          <a:xfrm>
+            <a:off x="5157345" y="2292096"/>
+            <a:ext cx="4169768" cy="1706880"/>
+          </a:xfrm>
+          <a:prstGeom prst="rect">
+            <a:avLst/>
+          </a:prstGeom>
+          <a:solidFill>
+            <a:srgbClr val="F6F7F9"/>
+          </a:solidFill>
+          <a:ln>
+            <a:noFill/>
+          </a:ln>
+          <a:effectLst/>
+        </p:spPr>
+        <p:style>
+          <a:lnRef idx="1">
+            <a:schemeClr val="accent1"/>
+          </a:lnRef>
+          <a:fillRef idx="3">
+            <a:schemeClr val="accent1"/>
+          </a:fillRef>
+          <a:effectRef idx="2">
+            <a:schemeClr val="accent1"/>
+          </a:effectRef>
+          <a:fontRef idx="minor">
+            <a:schemeClr val="lt1"/>
+          </a:fontRef>
+        </p:style>
+        <p:txBody>
+          <a:bodyPr rtlCol="0" anchor="ctr"/>
+          <a:lstStyle/>
+          <a:p>
+            <a:pPr algn="ctr"/>
+          </a:p>
+        </p:txBody>
+      </p:sp>
+      <p:sp>
+        <p:nvSpPr>
+          <p:cNvPr id="12" name="TextBox 11"/>
+          <p:cNvSpPr txBox="1"/>
+          <p:nvPr/>
+        </p:nvSpPr>
+        <p:spPr>
+          <a:xfrm>
+            <a:off x="5340229" y="2438400"/>
+            <a:ext cx="3803999" cy="292608"/>
+          </a:xfrm>
+          <a:prstGeom prst="rect">
+            <a:avLst/>
+          </a:prstGeom>
+          <a:noFill/>
+        </p:spPr>
+        <p:txBody>
+          <a:bodyPr wrap="square" anchor="t" lIns="0" rIns="0" tIns="0" bIns="0">
+            <a:spAutoFit/>
+          </a:bodyPr>
+          <a:lstStyle/>
+          <a:p>
+            <a:pPr algn="l">
+              <a:lnSpc>
+                <a:spcPct val="110000"/>
+              </a:lnSpc>
+              <a:spcAft>
+                <a:spcPts val="0"/>
+              </a:spcAft>
+            </a:pPr>
+            <a:r>
+              <a:rPr sz="880" b="1" i="0">
+                <a:solidFill>
+                  <a:srgbClr val="314359"/>
+                </a:solidFill>
+                <a:latin typeface="Arial"/>
+              </a:rPr>
+              <a:t>CHANCE OF A 30%+ LOSS OVER THREE YEARS</a:t>
+            </a:r>
+          </a:p>
+        </p:txBody>
+      </p:sp>
+      <p:sp>
+        <p:nvSpPr>
+          <p:cNvPr id="13" name="TextBox 12"/>
+          <p:cNvSpPr txBox="1"/>
+          <p:nvPr/>
+        </p:nvSpPr>
+        <p:spPr>
+          <a:xfrm>
+            <a:off x="5340229" y="2789529"/>
+            <a:ext cx="3803999" cy="1072896"/>
+          </a:xfrm>
+          <a:prstGeom prst="rect">
+            <a:avLst/>
+          </a:prstGeom>
+          <a:noFill/>
+        </p:spPr>
+        <p:txBody>
+          <a:bodyPr wrap="square" anchor="t" lIns="0" rIns="0" tIns="0" bIns="0">
+            <a:spAutoFit/>
+          </a:bodyPr>
+          <a:lstStyle/>
+          <a:p>
+            <a:pPr>
+              <a:spcAft>
+                <a:spcPts val="200"/>
+              </a:spcAft>
+            </a:pPr>
+            <a:r>
+              <a:rPr sz="2560" b="1">
+                <a:solidFill>
+                  <a:srgbClr val="556A83"/>
+                </a:solidFill>
+                <a:latin typeface="Times New Roman"/>
+              </a:rPr>
+              <a:t>~16%</a:t>
+            </a:r>
+            <a:r>
+              <a:rPr sz="1040">
+                <a:solidFill>
+                  <a:srgbClr val="556A83"/>
+                </a:solidFill>
+                <a:latin typeface="Arial"/>
+              </a:rPr>
+              <a:t>   private equity</a:t>
+            </a:r>
+          </a:p>
+          <a:p>
+            <a:r>
+              <a:rPr sz="2560" b="1">
+                <a:solidFill>
+                  <a:srgbClr val="152130"/>
+                </a:solidFill>
+                <a:latin typeface="Times New Roman"/>
+              </a:rPr>
+              <a:t>~2%</a:t>
+            </a:r>
+            <a:r>
+              <a:rPr sz="1040">
+                <a:solidFill>
+                  <a:srgbClr val="556A83"/>
+                </a:solidFill>
+                <a:latin typeface="Arial"/>
+              </a:rPr>
+              <a:t>   Athanase (actual 3-yr windows)</a:t>
+            </a:r>
+          </a:p>
+        </p:txBody>
+      </p:sp>
+      <p:sp>
+        <p:nvSpPr>
+          <p:cNvPr id="14" name="Rectangle 13"/>
+          <p:cNvSpPr/>
+          <p:nvPr/>
+        </p:nvSpPr>
+        <p:spPr>
+          <a:xfrm>
+            <a:off x="5157345" y="4213555"/>
+            <a:ext cx="4169768" cy="936345"/>
+          </a:xfrm>
+          <a:prstGeom prst="rect">
+            <a:avLst/>
+          </a:prstGeom>
+          <a:solidFill>
+            <a:srgbClr val="F6F7F9"/>
+          </a:solidFill>
+          <a:ln>
+            <a:noFill/>
+          </a:ln>
+          <a:effectLst/>
+        </p:spPr>
+        <p:style>
+          <a:lnRef idx="1">
+            <a:schemeClr val="accent1"/>
+          </a:lnRef>
+          <a:fillRef idx="3">
+            <a:schemeClr val="accent1"/>
+          </a:fillRef>
+          <a:effectRef idx="2">
+            <a:schemeClr val="accent1"/>
+          </a:effectRef>
+          <a:fontRef idx="minor">
+            <a:schemeClr val="lt1"/>
+          </a:fontRef>
+        </p:style>
+        <p:txBody>
+          <a:bodyPr rtlCol="0" anchor="ctr"/>
+          <a:lstStyle/>
+          <a:p>
+            <a:pPr algn="ctr"/>
+          </a:p>
+        </p:txBody>
+      </p:sp>
+      <p:sp>
+        <p:nvSpPr>
+          <p:cNvPr id="15" name="TextBox 14"/>
+          <p:cNvSpPr txBox="1"/>
+          <p:nvPr/>
+        </p:nvSpPr>
+        <p:spPr>
+          <a:xfrm>
+            <a:off x="5340229" y="4330598"/>
+            <a:ext cx="3803999" cy="243840"/>
+          </a:xfrm>
+          <a:prstGeom prst="rect">
+            <a:avLst/>
+          </a:prstGeom>
+          <a:noFill/>
+        </p:spPr>
+        <p:txBody>
+          <a:bodyPr wrap="square" anchor="t" lIns="0" rIns="0" tIns="0" bIns="0">
+            <a:spAutoFit/>
+          </a:bodyPr>
+          <a:lstStyle/>
+          <a:p>
+            <a:pPr algn="l">
+              <a:lnSpc>
+                <a:spcPct val="110000"/>
+              </a:lnSpc>
+              <a:spcAft>
+                <a:spcPts val="0"/>
+              </a:spcAft>
+            </a:pPr>
+            <a:r>
+              <a:rPr sz="840" b="1" i="0">
+                <a:solidFill>
+                  <a:srgbClr val="314359"/>
+                </a:solidFill>
+                <a:latin typeface="Arial"/>
+              </a:rPr>
+              <a:t>VOLATILITY ≠ RISK OF LOSS</a:t>
+            </a:r>
+          </a:p>
+        </p:txBody>
+      </p:sp>
+      <p:sp>
+        <p:nvSpPr>
+          <p:cNvPr id="16" name="TextBox 15"/>
+          <p:cNvSpPr txBox="1"/>
+          <p:nvPr/>
+        </p:nvSpPr>
+        <p:spPr>
+          <a:xfrm>
+            <a:off x="5340229" y="4584192"/>
+            <a:ext cx="3803999" cy="536448"/>
+          </a:xfrm>
+          <a:prstGeom prst="rect">
+            <a:avLst/>
+          </a:prstGeom>
+          <a:noFill/>
+        </p:spPr>
+        <p:txBody>
+          <a:bodyPr wrap="square" anchor="t" lIns="0" rIns="0" tIns="0" bIns="0">
+            <a:spAutoFit/>
+          </a:bodyPr>
+          <a:lstStyle/>
+          <a:p>
+            <a:pPr algn="l">
+              <a:lnSpc>
+                <a:spcPct val="112000"/>
+              </a:lnSpc>
+              <a:spcAft>
+                <a:spcPts val="0"/>
+              </a:spcAft>
+            </a:pPr>
+            <a:r>
+              <a:rPr sz="840" b="0" i="0">
+                <a:solidFill>
+                  <a:srgbClr val="0E1620"/>
+                </a:solidFill>
+                <a:latin typeface="Arial"/>
+              </a:rPr>
+              <a:t>PE’s ~28% true vol is dominated by downside (levered, left-skewed). Athanase’s 27% is mostly upside — downside deviation only ~11%.</a:t>
+            </a:r>
+          </a:p>
+        </p:txBody>
+      </p:sp>
+      <p:sp>
+        <p:nvSpPr>
+          <p:cNvPr id="17" name="Rectangle 16"/>
+          <p:cNvSpPr/>
+          <p:nvPr/>
+        </p:nvSpPr>
+        <p:spPr>
+          <a:xfrm>
+            <a:off x="5157345" y="5266944"/>
+            <a:ext cx="4169768" cy="936345"/>
+          </a:xfrm>
+          <a:prstGeom prst="rect">
+            <a:avLst/>
+          </a:prstGeom>
+          <a:solidFill>
+            <a:srgbClr val="F6F7F9"/>
+          </a:solidFill>
+          <a:ln>
+            <a:noFill/>
+          </a:ln>
+          <a:effectLst/>
+        </p:spPr>
+        <p:style>
+          <a:lnRef idx="1">
+            <a:schemeClr val="accent1"/>
+          </a:lnRef>
+          <a:fillRef idx="3">
+            <a:schemeClr val="accent1"/>
+          </a:fillRef>
+          <a:effectRef idx="2">
+            <a:schemeClr val="accent1"/>
+          </a:effectRef>
+          <a:fontRef idx="minor">
+            <a:schemeClr val="lt1"/>
+          </a:fontRef>
+        </p:style>
+        <p:txBody>
+          <a:bodyPr rtlCol="0" anchor="ctr"/>
+          <a:lstStyle/>
+          <a:p>
+            <a:pPr algn="ctr"/>
+          </a:p>
+        </p:txBody>
+      </p:sp>
+      <p:sp>
+        <p:nvSpPr>
+          <p:cNvPr id="18" name="TextBox 17"/>
+          <p:cNvSpPr txBox="1"/>
+          <p:nvPr/>
+        </p:nvSpPr>
+        <p:spPr>
+          <a:xfrm>
+            <a:off x="5340229" y="5383987"/>
+            <a:ext cx="3803999" cy="243840"/>
+          </a:xfrm>
+          <a:prstGeom prst="rect">
+            <a:avLst/>
+          </a:prstGeom>
+          <a:noFill/>
+        </p:spPr>
+        <p:txBody>
+          <a:bodyPr wrap="square" anchor="t" lIns="0" rIns="0" tIns="0" bIns="0">
+            <a:spAutoFit/>
+          </a:bodyPr>
+          <a:lstStyle/>
+          <a:p>
+            <a:pPr algn="l">
+              <a:lnSpc>
+                <a:spcPct val="110000"/>
+              </a:lnSpc>
+              <a:spcAft>
+                <a:spcPts val="0"/>
+              </a:spcAft>
+            </a:pPr>
+            <a:r>
+              <a:rPr sz="840" b="1" i="0">
+                <a:solidFill>
+                  <a:srgbClr val="314359"/>
+                </a:solidFill>
+                <a:latin typeface="Arial"/>
+              </a:rPr>
+              <a:t>THE RISK THAT MATTERS</a:t>
+            </a:r>
+          </a:p>
+        </p:txBody>
+      </p:sp>
+      <p:sp>
+        <p:nvSpPr>
+          <p:cNvPr id="19" name="TextBox 18"/>
+          <p:cNvSpPr txBox="1"/>
+          <p:nvPr/>
+        </p:nvSpPr>
+        <p:spPr>
+          <a:xfrm>
+            <a:off x="5340229" y="5637580"/>
+            <a:ext cx="3803999" cy="536448"/>
+          </a:xfrm>
+          <a:prstGeom prst="rect">
+            <a:avLst/>
+          </a:prstGeom>
+          <a:noFill/>
+        </p:spPr>
+        <p:txBody>
+          <a:bodyPr wrap="square" anchor="t" lIns="0" rIns="0" tIns="0" bIns="0">
+            <a:spAutoFit/>
+          </a:bodyPr>
+          <a:lstStyle/>
+          <a:p>
+            <a:pPr algn="l">
+              <a:lnSpc>
+                <a:spcPct val="112000"/>
+              </a:lnSpc>
+              <a:spcAft>
+                <a:spcPts val="0"/>
+              </a:spcAft>
+            </a:pPr>
+            <a:r>
+              <a:rPr sz="840" b="0" i="0">
+                <a:solidFill>
+                  <a:srgbClr val="0E1620"/>
+                </a:solidFill>
+                <a:latin typeface="Arial"/>
+              </a:rPr>
+              <a:t>On large permanent loss — what allocators actually fear — Athanase’s real risk is roughly one-eighth of private equity’s.</a:t>
+            </a:r>
+          </a:p>
+        </p:txBody>
+      </p:sp>
+      <p:sp>
+        <p:nvSpPr>
+          <p:cNvPr id="20" name="Rectangle 19"/>
+          <p:cNvSpPr/>
+          <p:nvPr/>
+        </p:nvSpPr>
+        <p:spPr>
+          <a:xfrm>
+            <a:off x="438922" y="6456883"/>
+            <a:ext cx="8873559" cy="448665"/>
+          </a:xfrm>
+          <a:prstGeom prst="rect">
+            <a:avLst/>
+          </a:prstGeom>
+          <a:solidFill>
+            <a:srgbClr val="152130"/>
+          </a:solidFill>
+          <a:ln>
+            <a:noFill/>
+          </a:ln>
+          <a:effectLst/>
+        </p:spPr>
+        <p:style>
+          <a:lnRef idx="1">
+            <a:schemeClr val="accent1"/>
+          </a:lnRef>
+          <a:fillRef idx="3">
+            <a:schemeClr val="accent1"/>
+          </a:fillRef>
+          <a:effectRef idx="2">
+            <a:schemeClr val="accent1"/>
+          </a:effectRef>
+          <a:fontRef idx="minor">
+            <a:schemeClr val="lt1"/>
+          </a:fontRef>
+        </p:style>
+        <p:txBody>
+          <a:bodyPr rtlCol="0" anchor="ctr"/>
+          <a:lstStyle/>
+          <a:p>
+            <a:pPr algn="ctr"/>
+          </a:p>
+        </p:txBody>
+      </p:sp>
+      <p:sp>
+        <p:nvSpPr>
+          <p:cNvPr id="21" name="TextBox 20"/>
+          <p:cNvSpPr txBox="1"/>
+          <p:nvPr/>
+        </p:nvSpPr>
+        <p:spPr>
+          <a:xfrm>
+            <a:off x="570599" y="6456883"/>
+            <a:ext cx="8632151" cy="448665"/>
+          </a:xfrm>
+          <a:prstGeom prst="rect">
+            <a:avLst/>
+          </a:prstGeom>
+          <a:noFill/>
+        </p:spPr>
+        <p:txBody>
+          <a:bodyPr wrap="square" anchor="ctr" lIns="0" rIns="0" tIns="0" bIns="0">
+            <a:spAutoFit/>
+          </a:bodyPr>
+          <a:lstStyle/>
+          <a:p>
+            <a:pPr algn="l">
+              <a:lnSpc>
+                <a:spcPct val="110000"/>
+              </a:lnSpc>
+              <a:spcAft>
+                <a:spcPts val="0"/>
+              </a:spcAft>
+            </a:pPr>
+            <a:r>
+              <a:rPr sz="960" b="0" i="1">
+                <a:solidFill>
+                  <a:srgbClr val="FFFFFF"/>
+                </a:solidFill>
+                <a:latin typeface="Arial"/>
+              </a:rPr>
+              <a:t>Matched on true volatility, Athanase carries far less of the risk that actually hurts: its downside is a fraction of private equity’s.</a:t>
+            </a:r>
+          </a:p>
+        </p:txBody>
+      </p:sp>
+      <p:sp>
+        <p:nvSpPr>
+          <p:cNvPr id="22" name="TextBox 21"/>
+          <p:cNvSpPr txBox="1"/>
+          <p:nvPr/>
+        </p:nvSpPr>
+        <p:spPr>
+          <a:xfrm>
+            <a:off x="438922" y="6944563"/>
+            <a:ext cx="9217382" cy="487680"/>
+          </a:xfrm>
+          <a:prstGeom prst="rect">
+            <a:avLst/>
+          </a:prstGeom>
+          <a:noFill/>
+        </p:spPr>
+        <p:txBody>
+          <a:bodyPr wrap="square" anchor="t" lIns="0" rIns="0" tIns="0" bIns="0">
+            <a:spAutoFit/>
+          </a:bodyPr>
+          <a:lstStyle/>
+          <a:p>
+            <a:pPr algn="l">
+              <a:lnSpc>
+                <a:spcPct val="110000"/>
+              </a:lnSpc>
+              <a:spcAft>
+                <a:spcPts val="0"/>
+              </a:spcAft>
+            </a:pPr>
+            <a:r>
+              <a:rPr sz="600" b="0" i="0">
+                <a:solidFill>
+                  <a:srgbClr val="556A83"/>
+                </a:solidFill>
+                <a:latin typeface="Arial"/>
+              </a:rPr>
+              <a:t>Athanase downside vol 11% vs total 27% (real); 30%+ loss in 2% of actual rolling 3-yr windows. PE de-smoothed total vol ~28%, ~15–16% chance of a 30% drawdown over 3 years (PIMCO, 2022). See references.</a:t>
+            </a:r>
+          </a:p>
+        </p:txBody>
+      </p:sp>
+    </p:spTree>
+  </p:cSld>
+  <p:clrMapOvr>
+    <a:masterClrMapping/>
+  </p:clrMapOvr>
+</p:sld>
+</file>
+
+<file path=ppt/slides/slide35.xml><?xml version="1.0" encoding="utf-8"?>
+<p:sld xmlns:a="http://schemas.openxmlformats.org/drawingml/2006/main" xmlns:p="http://schemas.openxmlformats.org/presentationml/2006/main" xmlns:r="http://schemas.openxmlformats.org/officeDocument/2006/relationships">
+  <p:cSld>
+    <p:spTree>
+      <p:nvGrpSpPr>
+        <p:cNvPr id="1" name=""/>
+        <p:cNvGrpSpPr/>
+        <p:nvPr/>
+      </p:nvGrpSpPr>
+      <p:grpSpPr/>
+      <p:sp>
+        <p:nvSpPr>
+          <p:cNvPr id="2" name="Rectangle 1"/>
+          <p:cNvSpPr/>
+          <p:nvPr/>
+        </p:nvSpPr>
+        <p:spPr>
+          <a:xfrm>
+            <a:off x="0" y="0"/>
+            <a:ext cx="9753600" cy="7315200"/>
+          </a:xfrm>
+          <a:prstGeom prst="rect">
+            <a:avLst/>
+          </a:prstGeom>
+          <a:solidFill>
+            <a:srgbClr val="FFFFFF"/>
+          </a:solidFill>
+          <a:ln>
+            <a:noFill/>
+          </a:ln>
+          <a:effectLst/>
+        </p:spPr>
+        <p:style>
+          <a:lnRef idx="1">
+            <a:schemeClr val="accent1"/>
+          </a:lnRef>
+          <a:fillRef idx="3">
+            <a:schemeClr val="accent1"/>
+          </a:fillRef>
+          <a:effectRef idx="2">
+            <a:schemeClr val="accent1"/>
+          </a:effectRef>
+          <a:fontRef idx="minor">
+            <a:schemeClr val="lt1"/>
+          </a:fontRef>
+        </p:style>
+        <p:txBody>
+          <a:bodyPr rtlCol="0" anchor="ctr"/>
+          <a:lstStyle/>
+          <a:p>
+            <a:pPr algn="ctr"/>
+          </a:p>
+        </p:txBody>
+      </p:sp>
+      <p:pic>
+        <p:nvPicPr>
+          <p:cNvPr id="3" name="Picture 2" descr="mark_dark.png"/>
+          <p:cNvPicPr>
+            <a:picLocks noChangeAspect="1"/>
+          </p:cNvPicPr>
+          <p:nvPr/>
+        </p:nvPicPr>
+        <p:blipFill>
+          <a:blip r:embed="rId2"/>
+          <a:stretch>
+            <a:fillRect/>
+          </a:stretch>
+        </p:blipFill>
+        <p:spPr>
+          <a:xfrm>
+            <a:off x="402346" y="234086"/>
+            <a:ext cx="224012" cy="190199"/>
+          </a:xfrm>
+          <a:prstGeom prst="rect">
+            <a:avLst/>
+          </a:prstGeom>
+        </p:spPr>
+      </p:pic>
+      <p:sp>
+        <p:nvSpPr>
+          <p:cNvPr id="4" name="TextBox 3"/>
+          <p:cNvSpPr txBox="1"/>
+          <p:nvPr/>
+        </p:nvSpPr>
+        <p:spPr>
+          <a:xfrm>
+            <a:off x="716907" y="263347"/>
+            <a:ext cx="5120768" cy="292608"/>
+          </a:xfrm>
+          <a:prstGeom prst="rect">
+            <a:avLst/>
+          </a:prstGeom>
+          <a:noFill/>
+        </p:spPr>
+        <p:txBody>
+          <a:bodyPr wrap="square" anchor="t" lIns="0" rIns="0" tIns="0" bIns="0">
+            <a:spAutoFit/>
+          </a:bodyPr>
+          <a:lstStyle/>
+          <a:p>
+            <a:pPr algn="l">
+              <a:lnSpc>
+                <a:spcPct val="110000"/>
+              </a:lnSpc>
+              <a:spcAft>
+                <a:spcPts val="0"/>
+              </a:spcAft>
+            </a:pPr>
+            <a:r>
+              <a:rPr sz="880" b="0" i="0">
+                <a:solidFill>
+                  <a:srgbClr val="556A83"/>
+                </a:solidFill>
+                <a:latin typeface="Arial"/>
+              </a:rPr>
+              <a:t>Private Equity</a:t>
+            </a:r>
+          </a:p>
+        </p:txBody>
+      </p:sp>
+      <p:sp>
+        <p:nvSpPr>
+          <p:cNvPr id="5" name="TextBox 4"/>
+          <p:cNvSpPr txBox="1"/>
+          <p:nvPr/>
+        </p:nvSpPr>
+        <p:spPr>
+          <a:xfrm>
+            <a:off x="7242229" y="263347"/>
+            <a:ext cx="2084884" cy="292608"/>
+          </a:xfrm>
+          <a:prstGeom prst="rect">
+            <a:avLst/>
+          </a:prstGeom>
+          <a:noFill/>
+        </p:spPr>
+        <p:txBody>
+          <a:bodyPr wrap="square" anchor="t" lIns="0" rIns="0" tIns="0" bIns="0">
+            <a:spAutoFit/>
+          </a:bodyPr>
+          <a:lstStyle/>
+          <a:p>
+            <a:pPr algn="r">
+              <a:lnSpc>
+                <a:spcPct val="110000"/>
+              </a:lnSpc>
+              <a:spcAft>
+                <a:spcPts val="0"/>
+              </a:spcAft>
+            </a:pPr>
+            <a:r>
+              <a:rPr sz="880" b="1" i="0">
+                <a:solidFill>
+                  <a:srgbClr val="556A83"/>
+                </a:solidFill>
+                <a:latin typeface="Arial"/>
+              </a:rPr>
+              <a:t>Figure 11</a:t>
+            </a:r>
+          </a:p>
+        </p:txBody>
+      </p:sp>
+      <p:sp>
+        <p:nvSpPr>
+          <p:cNvPr id="6" name="Rectangle 5"/>
+          <p:cNvSpPr/>
+          <p:nvPr/>
+        </p:nvSpPr>
+        <p:spPr>
+          <a:xfrm>
+            <a:off x="0" y="604723"/>
+            <a:ext cx="9753600" cy="1414272"/>
+          </a:xfrm>
+          <a:prstGeom prst="rect">
+            <a:avLst/>
+          </a:prstGeom>
+          <a:solidFill>
+            <a:srgbClr val="F6F7F9"/>
+          </a:solidFill>
+          <a:ln>
+            <a:noFill/>
+          </a:ln>
+          <a:effectLst/>
+        </p:spPr>
+        <p:style>
+          <a:lnRef idx="1">
+            <a:schemeClr val="accent1"/>
+          </a:lnRef>
+          <a:fillRef idx="3">
+            <a:schemeClr val="accent1"/>
+          </a:fillRef>
+          <a:effectRef idx="2">
+            <a:schemeClr val="accent1"/>
+          </a:effectRef>
+          <a:fontRef idx="minor">
+            <a:schemeClr val="lt1"/>
+          </a:fontRef>
+        </p:style>
+        <p:txBody>
+          <a:bodyPr rtlCol="0" anchor="ctr"/>
+          <a:lstStyle/>
+          <a:p>
+            <a:pPr algn="ctr"/>
+          </a:p>
+        </p:txBody>
+      </p:sp>
+      <p:sp>
+        <p:nvSpPr>
+          <p:cNvPr id="7" name="TextBox 6"/>
+          <p:cNvSpPr txBox="1"/>
+          <p:nvPr/>
+        </p:nvSpPr>
+        <p:spPr>
+          <a:xfrm>
+            <a:off x="438922" y="721766"/>
+            <a:ext cx="8851613" cy="829056"/>
+          </a:xfrm>
+          <a:prstGeom prst="rect">
+            <a:avLst/>
+          </a:prstGeom>
+          <a:noFill/>
+        </p:spPr>
+        <p:txBody>
+          <a:bodyPr wrap="square" anchor="t" lIns="0" rIns="0" tIns="0" bIns="0">
+            <a:spAutoFit/>
+          </a:bodyPr>
+          <a:lstStyle/>
+          <a:p>
+            <a:pPr algn="l">
+              <a:lnSpc>
+                <a:spcPct val="110000"/>
+              </a:lnSpc>
+              <a:spcAft>
+                <a:spcPts val="200"/>
+              </a:spcAft>
+            </a:pPr>
+            <a:r>
+              <a:rPr sz="2400" b="0" i="0" spc="-90">
+                <a:solidFill>
+                  <a:srgbClr val="314359"/>
+                </a:solidFill>
+                <a:latin typeface="Times New Roman"/>
+              </a:rPr>
+              <a:t>2.26 PE’s “diversification” is an artefact — Athanase’s is real</a:t>
+            </a:r>
+          </a:p>
+        </p:txBody>
+      </p:sp>
+      <p:sp>
+        <p:nvSpPr>
+          <p:cNvPr id="8" name="TextBox 7"/>
+          <p:cNvSpPr txBox="1"/>
+          <p:nvPr/>
+        </p:nvSpPr>
+        <p:spPr>
+          <a:xfrm>
+            <a:off x="453553" y="1511808"/>
+            <a:ext cx="8705305" cy="487680"/>
+          </a:xfrm>
+          <a:prstGeom prst="rect">
+            <a:avLst/>
+          </a:prstGeom>
+          <a:noFill/>
+        </p:spPr>
+        <p:txBody>
+          <a:bodyPr wrap="square" anchor="t" lIns="0" rIns="0" tIns="0" bIns="0">
+            <a:spAutoFit/>
+          </a:bodyPr>
+          <a:lstStyle/>
+          <a:p>
+            <a:pPr algn="l">
+              <a:lnSpc>
+                <a:spcPct val="110000"/>
+              </a:lnSpc>
+              <a:spcAft>
+                <a:spcPts val="0"/>
+              </a:spcAft>
+            </a:pPr>
+            <a:r>
+              <a:rPr sz="1040" b="0" i="1">
+                <a:solidFill>
+                  <a:srgbClr val="556A83"/>
+                </a:solidFill>
+                <a:latin typeface="Arial"/>
+              </a:rPr>
+              <a:t>De-smoothed, PE is ~0.9 correlated to public equities: the same risk factors, just reported late. Athanase is genuinely uncorrelated.</a:t>
+            </a:r>
+          </a:p>
+        </p:txBody>
+      </p:sp>
+      <p:sp>
+        <p:nvSpPr>
+          <p:cNvPr id="9" name="TextBox 8"/>
+          <p:cNvSpPr txBox="1"/>
+          <p:nvPr/>
+        </p:nvSpPr>
+        <p:spPr>
+          <a:xfrm>
+            <a:off x="6583844" y="6876288"/>
+            <a:ext cx="2926153" cy="292608"/>
+          </a:xfrm>
+          <a:prstGeom prst="rect">
+            <a:avLst/>
+          </a:prstGeom>
+          <a:noFill/>
+        </p:spPr>
+        <p:txBody>
+          <a:bodyPr wrap="square" anchor="t" lIns="0" rIns="0" tIns="0" bIns="0">
+            <a:spAutoFit/>
+          </a:bodyPr>
+          <a:lstStyle/>
+          <a:p>
+            <a:pPr algn="r">
+              <a:lnSpc>
+                <a:spcPct val="110000"/>
+              </a:lnSpc>
+              <a:spcAft>
+                <a:spcPts val="0"/>
+              </a:spcAft>
+            </a:pPr>
+            <a:r>
+              <a:rPr sz="680" b="0" i="0">
+                <a:solidFill>
+                  <a:srgbClr val="556A83"/>
+                </a:solidFill>
+                <a:latin typeface="Arial"/>
+              </a:rPr>
+              <a:t>Strictly confidential          32</a:t>
+            </a:r>
+          </a:p>
+        </p:txBody>
+      </p:sp>
+      <p:pic>
+        <p:nvPicPr>
+          <p:cNvPr id="10" name="Picture 9" descr="d_pe_corr.png"/>
+          <p:cNvPicPr>
+            <a:picLocks noChangeAspect="1"/>
+          </p:cNvPicPr>
+          <p:nvPr/>
+        </p:nvPicPr>
+        <p:blipFill>
+          <a:blip r:embed="rId3"/>
+          <a:stretch>
+            <a:fillRect/>
+          </a:stretch>
+        </p:blipFill>
+        <p:spPr>
+          <a:xfrm>
+            <a:off x="402346" y="2243328"/>
+            <a:ext cx="4160624" cy="2816422"/>
+          </a:xfrm>
+          <a:prstGeom prst="rect">
+            <a:avLst/>
+          </a:prstGeom>
+        </p:spPr>
+      </p:pic>
+      <p:sp>
+        <p:nvSpPr>
+          <p:cNvPr id="11" name="Rectangle 10"/>
+          <p:cNvSpPr/>
+          <p:nvPr/>
+        </p:nvSpPr>
+        <p:spPr>
+          <a:xfrm>
+            <a:off x="5267075" y="2292096"/>
+            <a:ext cx="4060037" cy="1111909"/>
+          </a:xfrm>
+          <a:prstGeom prst="rect">
+            <a:avLst/>
+          </a:prstGeom>
+          <a:solidFill>
+            <a:srgbClr val="F6F7F9"/>
+          </a:solidFill>
+          <a:ln>
+            <a:noFill/>
+          </a:ln>
+          <a:effectLst/>
+        </p:spPr>
+        <p:style>
+          <a:lnRef idx="1">
+            <a:schemeClr val="accent1"/>
+          </a:lnRef>
+          <a:fillRef idx="3">
+            <a:schemeClr val="accent1"/>
+          </a:fillRef>
+          <a:effectRef idx="2">
+            <a:schemeClr val="accent1"/>
+          </a:effectRef>
+          <a:fontRef idx="minor">
+            <a:schemeClr val="lt1"/>
+          </a:fontRef>
+        </p:style>
+        <p:txBody>
+          <a:bodyPr rtlCol="0" anchor="ctr"/>
+          <a:lstStyle/>
+          <a:p>
+            <a:pPr algn="ctr"/>
+          </a:p>
+        </p:txBody>
+      </p:sp>
+      <p:sp>
+        <p:nvSpPr>
+          <p:cNvPr id="12" name="TextBox 11"/>
+          <p:cNvSpPr txBox="1"/>
+          <p:nvPr/>
+        </p:nvSpPr>
+        <p:spPr>
+          <a:xfrm>
+            <a:off x="5428014" y="2409139"/>
+            <a:ext cx="3738160" cy="243840"/>
+          </a:xfrm>
+          <a:prstGeom prst="rect">
+            <a:avLst/>
+          </a:prstGeom>
+          <a:noFill/>
+        </p:spPr>
+        <p:txBody>
+          <a:bodyPr wrap="square" anchor="t" lIns="0" rIns="0" tIns="0" bIns="0">
+            <a:spAutoFit/>
+          </a:bodyPr>
+          <a:lstStyle/>
+          <a:p>
+            <a:pPr algn="l">
+              <a:lnSpc>
+                <a:spcPct val="110000"/>
+              </a:lnSpc>
+              <a:spcAft>
+                <a:spcPts val="0"/>
+              </a:spcAft>
+            </a:pPr>
+            <a:r>
+              <a:rPr sz="840" b="1" i="0">
+                <a:solidFill>
+                  <a:srgbClr val="314359"/>
+                </a:solidFill>
+                <a:latin typeface="Arial"/>
+              </a:rPr>
+              <a:t>THE SMOOTHING ILLUSION</a:t>
+            </a:r>
+          </a:p>
+        </p:txBody>
+      </p:sp>
+      <p:sp>
+        <p:nvSpPr>
+          <p:cNvPr id="13" name="TextBox 12"/>
+          <p:cNvSpPr txBox="1"/>
+          <p:nvPr/>
+        </p:nvSpPr>
+        <p:spPr>
+          <a:xfrm>
+            <a:off x="5428014" y="2662732"/>
+            <a:ext cx="3738160" cy="702259"/>
+          </a:xfrm>
+          <a:prstGeom prst="rect">
+            <a:avLst/>
+          </a:prstGeom>
+          <a:noFill/>
+        </p:spPr>
+        <p:txBody>
+          <a:bodyPr wrap="square" anchor="t" lIns="0" rIns="0" tIns="0" bIns="0">
+            <a:spAutoFit/>
+          </a:bodyPr>
+          <a:lstStyle/>
+          <a:p>
+            <a:pPr algn="l">
+              <a:lnSpc>
+                <a:spcPct val="112000"/>
+              </a:lnSpc>
+              <a:spcAft>
+                <a:spcPts val="0"/>
+              </a:spcAft>
+            </a:pPr>
+            <a:r>
+              <a:rPr sz="840" b="0" i="0">
+                <a:solidFill>
+                  <a:srgbClr val="0E1620"/>
+                </a:solidFill>
+                <a:latin typeface="Arial"/>
+              </a:rPr>
+              <a:t>Quarterly appraisals lag the market, so reported correlation looks low (0.75, beta 0.41). De-smoothed it is 0.89 / beta 0.87 (Two Sigma, 2024).</a:t>
+            </a:r>
+          </a:p>
+        </p:txBody>
+      </p:sp>
+      <p:sp>
+        <p:nvSpPr>
+          <p:cNvPr id="14" name="Rectangle 13"/>
+          <p:cNvSpPr/>
+          <p:nvPr/>
+        </p:nvSpPr>
+        <p:spPr>
+          <a:xfrm>
+            <a:off x="5267075" y="3540555"/>
+            <a:ext cx="4060037" cy="1111909"/>
+          </a:xfrm>
+          <a:prstGeom prst="rect">
+            <a:avLst/>
+          </a:prstGeom>
+          <a:solidFill>
+            <a:srgbClr val="F6F7F9"/>
+          </a:solidFill>
+          <a:ln>
+            <a:noFill/>
+          </a:ln>
+          <a:effectLst/>
+        </p:spPr>
+        <p:style>
+          <a:lnRef idx="1">
+            <a:schemeClr val="accent1"/>
+          </a:lnRef>
+          <a:fillRef idx="3">
+            <a:schemeClr val="accent1"/>
+          </a:fillRef>
+          <a:effectRef idx="2">
+            <a:schemeClr val="accent1"/>
+          </a:effectRef>
+          <a:fontRef idx="minor">
+            <a:schemeClr val="lt1"/>
+          </a:fontRef>
+        </p:style>
+        <p:txBody>
+          <a:bodyPr rtlCol="0" anchor="ctr"/>
+          <a:lstStyle/>
+          <a:p>
+            <a:pPr algn="ctr"/>
+          </a:p>
+        </p:txBody>
+      </p:sp>
+      <p:sp>
+        <p:nvSpPr>
+          <p:cNvPr id="15" name="TextBox 14"/>
+          <p:cNvSpPr txBox="1"/>
+          <p:nvPr/>
+        </p:nvSpPr>
+        <p:spPr>
+          <a:xfrm>
+            <a:off x="5428014" y="3657598"/>
+            <a:ext cx="3738160" cy="243840"/>
+          </a:xfrm>
+          <a:prstGeom prst="rect">
+            <a:avLst/>
+          </a:prstGeom>
+          <a:noFill/>
+        </p:spPr>
+        <p:txBody>
+          <a:bodyPr wrap="square" anchor="t" lIns="0" rIns="0" tIns="0" bIns="0">
+            <a:spAutoFit/>
+          </a:bodyPr>
+          <a:lstStyle/>
+          <a:p>
+            <a:pPr algn="l">
+              <a:lnSpc>
+                <a:spcPct val="110000"/>
+              </a:lnSpc>
+              <a:spcAft>
+                <a:spcPts val="0"/>
+              </a:spcAft>
+            </a:pPr>
+            <a:r>
+              <a:rPr sz="840" b="1" i="0">
+                <a:solidFill>
+                  <a:srgbClr val="314359"/>
+                </a:solidFill>
+                <a:latin typeface="Arial"/>
+              </a:rPr>
+              <a:t>SAME RISK FACTORS</a:t>
+            </a:r>
+          </a:p>
+        </p:txBody>
+      </p:sp>
+      <p:sp>
+        <p:nvSpPr>
+          <p:cNvPr id="16" name="TextBox 15"/>
+          <p:cNvSpPr txBox="1"/>
+          <p:nvPr/>
+        </p:nvSpPr>
+        <p:spPr>
+          <a:xfrm>
+            <a:off x="5428014" y="3911192"/>
+            <a:ext cx="3738160" cy="702259"/>
+          </a:xfrm>
+          <a:prstGeom prst="rect">
+            <a:avLst/>
+          </a:prstGeom>
+          <a:noFill/>
+        </p:spPr>
+        <p:txBody>
+          <a:bodyPr wrap="square" anchor="t" lIns="0" rIns="0" tIns="0" bIns="0">
+            <a:spAutoFit/>
+          </a:bodyPr>
+          <a:lstStyle/>
+          <a:p>
+            <a:pPr algn="l">
+              <a:lnSpc>
+                <a:spcPct val="112000"/>
+              </a:lnSpc>
+              <a:spcAft>
+                <a:spcPts val="0"/>
+              </a:spcAft>
+            </a:pPr>
+            <a:r>
+              <a:rPr sz="840" b="0" i="0">
+                <a:solidFill>
+                  <a:srgbClr val="0E1620"/>
+                </a:solidFill>
+                <a:latin typeface="Arial"/>
+              </a:rPr>
+              <a:t>PE is long-only levered equity driven by GDP, rates and earnings; over 10–20 yrs its correlation to small/mid-caps is ~0.89–0.92.</a:t>
+            </a:r>
+          </a:p>
+        </p:txBody>
+      </p:sp>
+      <p:sp>
+        <p:nvSpPr>
+          <p:cNvPr id="17" name="Rectangle 16"/>
+          <p:cNvSpPr/>
+          <p:nvPr/>
+        </p:nvSpPr>
+        <p:spPr>
+          <a:xfrm>
+            <a:off x="5267075" y="4789015"/>
+            <a:ext cx="4060037" cy="1111909"/>
+          </a:xfrm>
+          <a:prstGeom prst="rect">
+            <a:avLst/>
+          </a:prstGeom>
+          <a:solidFill>
+            <a:srgbClr val="F6F7F9"/>
+          </a:solidFill>
+          <a:ln>
+            <a:noFill/>
+          </a:ln>
+          <a:effectLst/>
+        </p:spPr>
+        <p:style>
+          <a:lnRef idx="1">
+            <a:schemeClr val="accent1"/>
+          </a:lnRef>
+          <a:fillRef idx="3">
+            <a:schemeClr val="accent1"/>
+          </a:fillRef>
+          <a:effectRef idx="2">
+            <a:schemeClr val="accent1"/>
+          </a:effectRef>
+          <a:fontRef idx="minor">
+            <a:schemeClr val="lt1"/>
+          </a:fontRef>
+        </p:style>
+        <p:txBody>
+          <a:bodyPr rtlCol="0" anchor="ctr"/>
+          <a:lstStyle/>
+          <a:p>
+            <a:pPr algn="ctr"/>
+          </a:p>
+        </p:txBody>
+      </p:sp>
+      <p:sp>
+        <p:nvSpPr>
+          <p:cNvPr id="18" name="TextBox 17"/>
+          <p:cNvSpPr txBox="1"/>
+          <p:nvPr/>
+        </p:nvSpPr>
+        <p:spPr>
+          <a:xfrm>
+            <a:off x="5428014" y="4906058"/>
+            <a:ext cx="3738160" cy="243840"/>
+          </a:xfrm>
+          <a:prstGeom prst="rect">
+            <a:avLst/>
+          </a:prstGeom>
+          <a:noFill/>
+        </p:spPr>
+        <p:txBody>
+          <a:bodyPr wrap="square" anchor="t" lIns="0" rIns="0" tIns="0" bIns="0">
+            <a:spAutoFit/>
+          </a:bodyPr>
+          <a:lstStyle/>
+          <a:p>
+            <a:pPr algn="l">
+              <a:lnSpc>
+                <a:spcPct val="110000"/>
+              </a:lnSpc>
+              <a:spcAft>
+                <a:spcPts val="0"/>
+              </a:spcAft>
+            </a:pPr>
+            <a:r>
+              <a:rPr sz="840" b="1" i="0">
+                <a:solidFill>
+                  <a:srgbClr val="314359"/>
+                </a:solidFill>
+                <a:latin typeface="Arial"/>
+              </a:rPr>
+              <a:t>THE CRISIS MIRAGE</a:t>
+            </a:r>
+          </a:p>
+        </p:txBody>
+      </p:sp>
+      <p:sp>
+        <p:nvSpPr>
+          <p:cNvPr id="19" name="TextBox 18"/>
+          <p:cNvSpPr txBox="1"/>
+          <p:nvPr/>
+        </p:nvSpPr>
+        <p:spPr>
+          <a:xfrm>
+            <a:off x="5428014" y="5159652"/>
+            <a:ext cx="3738160" cy="702259"/>
+          </a:xfrm>
+          <a:prstGeom prst="rect">
+            <a:avLst/>
+          </a:prstGeom>
+          <a:noFill/>
+        </p:spPr>
+        <p:txBody>
+          <a:bodyPr wrap="square" anchor="t" lIns="0" rIns="0" tIns="0" bIns="0">
+            <a:spAutoFit/>
+          </a:bodyPr>
+          <a:lstStyle/>
+          <a:p>
+            <a:pPr algn="l">
+              <a:lnSpc>
+                <a:spcPct val="112000"/>
+              </a:lnSpc>
+              <a:spcAft>
+                <a:spcPts val="0"/>
+              </a:spcAft>
+            </a:pPr>
+            <a:r>
+              <a:rPr sz="840" b="0" i="0">
+                <a:solidFill>
+                  <a:srgbClr val="0E1620"/>
+                </a:solidFill>
+                <a:latin typeface="Arial"/>
+              </a:rPr>
+              <a:t>In severe drawdowns true correlation converges toward 1.0 — PE takes the same hit, it just reports the markdown later.</a:t>
+            </a:r>
+          </a:p>
+        </p:txBody>
+      </p:sp>
+      <p:sp>
+        <p:nvSpPr>
+          <p:cNvPr id="20" name="Rectangle 19"/>
+          <p:cNvSpPr/>
+          <p:nvPr/>
+        </p:nvSpPr>
+        <p:spPr>
+          <a:xfrm>
+            <a:off x="438922" y="6456883"/>
+            <a:ext cx="8873559" cy="448665"/>
+          </a:xfrm>
+          <a:prstGeom prst="rect">
+            <a:avLst/>
+          </a:prstGeom>
+          <a:solidFill>
+            <a:srgbClr val="152130"/>
+          </a:solidFill>
+          <a:ln>
+            <a:noFill/>
+          </a:ln>
+          <a:effectLst/>
+        </p:spPr>
+        <p:style>
+          <a:lnRef idx="1">
+            <a:schemeClr val="accent1"/>
+          </a:lnRef>
+          <a:fillRef idx="3">
+            <a:schemeClr val="accent1"/>
+          </a:fillRef>
+          <a:effectRef idx="2">
+            <a:schemeClr val="accent1"/>
+          </a:effectRef>
+          <a:fontRef idx="minor">
+            <a:schemeClr val="lt1"/>
+          </a:fontRef>
+        </p:style>
+        <p:txBody>
+          <a:bodyPr rtlCol="0" anchor="ctr"/>
+          <a:lstStyle/>
+          <a:p>
+            <a:pPr algn="ctr"/>
+          </a:p>
+        </p:txBody>
+      </p:sp>
+      <p:sp>
+        <p:nvSpPr>
+          <p:cNvPr id="21" name="TextBox 20"/>
+          <p:cNvSpPr txBox="1"/>
+          <p:nvPr/>
+        </p:nvSpPr>
+        <p:spPr>
+          <a:xfrm>
+            <a:off x="570599" y="6456883"/>
+            <a:ext cx="8632151" cy="448665"/>
+          </a:xfrm>
+          <a:prstGeom prst="rect">
+            <a:avLst/>
+          </a:prstGeom>
+          <a:noFill/>
+        </p:spPr>
+        <p:txBody>
+          <a:bodyPr wrap="square" anchor="ctr" lIns="0" rIns="0" tIns="0" bIns="0">
+            <a:spAutoFit/>
+          </a:bodyPr>
+          <a:lstStyle/>
+          <a:p>
+            <a:pPr algn="l">
+              <a:lnSpc>
+                <a:spcPct val="110000"/>
+              </a:lnSpc>
+              <a:spcAft>
+                <a:spcPts val="0"/>
+              </a:spcAft>
+            </a:pPr>
+            <a:r>
+              <a:rPr sz="960" b="0" i="1">
+                <a:solidFill>
+                  <a:srgbClr val="FFFFFF"/>
+                </a:solidFill>
+                <a:latin typeface="Arial"/>
+              </a:rPr>
+              <a:t>PE adds leveraged beta dressed as diversification. Athanase, at 0.44 correlation, is the genuine diversifier in a public-equity portfolio.</a:t>
+            </a:r>
+          </a:p>
+        </p:txBody>
+      </p:sp>
+      <p:sp>
+        <p:nvSpPr>
+          <p:cNvPr id="22" name="TextBox 21"/>
+          <p:cNvSpPr txBox="1"/>
+          <p:nvPr/>
+        </p:nvSpPr>
+        <p:spPr>
+          <a:xfrm>
+            <a:off x="438922" y="6944563"/>
+            <a:ext cx="9217382" cy="487680"/>
+          </a:xfrm>
+          <a:prstGeom prst="rect">
+            <a:avLst/>
+          </a:prstGeom>
+          <a:noFill/>
+        </p:spPr>
+        <p:txBody>
+          <a:bodyPr wrap="square" anchor="t" lIns="0" rIns="0" tIns="0" bIns="0">
+            <a:spAutoFit/>
+          </a:bodyPr>
+          <a:lstStyle/>
+          <a:p>
+            <a:pPr algn="l">
+              <a:lnSpc>
+                <a:spcPct val="110000"/>
+              </a:lnSpc>
+              <a:spcAft>
+                <a:spcPts val="0"/>
+              </a:spcAft>
+            </a:pPr>
+            <a:r>
+              <a:rPr sz="600" b="0" i="0">
+                <a:solidFill>
+                  <a:srgbClr val="556A83"/>
+                </a:solidFill>
+                <a:latin typeface="Arial"/>
+              </a:rPr>
+              <a:t>Athanase correlation 0.44 / beta 0.73 to MSCI World IMI (real). PE reported 0.75 / beta 0.41 de-smoothed to 0.89 / beta 0.87 (Two Sigma / Venn, 2024); long-horizon PE–small/mid-cap correlation ~0.89–0.92. See references.</a:t>
+            </a:r>
+          </a:p>
+        </p:txBody>
+      </p:sp>
+    </p:spTree>
+  </p:cSld>
+  <p:clrMapOvr>
+    <a:masterClrMapping/>
+  </p:clrMapOvr>
+</p:sld>
+</file>
+
+<file path=ppt/slides/slide36.xml><?xml version="1.0" encoding="utf-8"?>
+<p:sld xmlns:a="http://schemas.openxmlformats.org/drawingml/2006/main" xmlns:p="http://schemas.openxmlformats.org/presentationml/2006/main" xmlns:r="http://schemas.openxmlformats.org/officeDocument/2006/relationships">
+  <p:cSld>
+    <p:spTree>
+      <p:nvGrpSpPr>
+        <p:cNvPr id="1" name=""/>
+        <p:cNvGrpSpPr/>
+        <p:nvPr/>
+      </p:nvGrpSpPr>
+      <p:grpSpPr/>
+      <p:sp>
+        <p:nvSpPr>
+          <p:cNvPr id="2" name="Rectangle 1"/>
+          <p:cNvSpPr/>
+          <p:nvPr/>
+        </p:nvSpPr>
+        <p:spPr>
+          <a:xfrm>
+            <a:off x="0" y="0"/>
+            <a:ext cx="9753600" cy="7315200"/>
+          </a:xfrm>
+          <a:prstGeom prst="rect">
+            <a:avLst/>
+          </a:prstGeom>
+          <a:solidFill>
+            <a:srgbClr val="FFFFFF"/>
+          </a:solidFill>
+          <a:ln>
+            <a:noFill/>
+          </a:ln>
+          <a:effectLst/>
+        </p:spPr>
+        <p:style>
+          <a:lnRef idx="1">
+            <a:schemeClr val="accent1"/>
+          </a:lnRef>
+          <a:fillRef idx="3">
+            <a:schemeClr val="accent1"/>
+          </a:fillRef>
+          <a:effectRef idx="2">
+            <a:schemeClr val="accent1"/>
+          </a:effectRef>
+          <a:fontRef idx="minor">
+            <a:schemeClr val="lt1"/>
+          </a:fontRef>
+        </p:style>
+        <p:txBody>
+          <a:bodyPr rtlCol="0" anchor="ctr"/>
+          <a:lstStyle/>
+          <a:p>
+            <a:pPr algn="ctr"/>
+          </a:p>
+        </p:txBody>
+      </p:sp>
+      <p:pic>
+        <p:nvPicPr>
+          <p:cNvPr id="3" name="Picture 2" descr="mark_dark.png"/>
+          <p:cNvPicPr>
+            <a:picLocks noChangeAspect="1"/>
+          </p:cNvPicPr>
+          <p:nvPr/>
+        </p:nvPicPr>
+        <p:blipFill>
+          <a:blip r:embed="rId2"/>
+          <a:stretch>
+            <a:fillRect/>
+          </a:stretch>
+        </p:blipFill>
+        <p:spPr>
+          <a:xfrm>
+            <a:off x="402346" y="234086"/>
+            <a:ext cx="224012" cy="190199"/>
+          </a:xfrm>
+          <a:prstGeom prst="rect">
+            <a:avLst/>
+          </a:prstGeom>
+        </p:spPr>
+      </p:pic>
+      <p:sp>
+        <p:nvSpPr>
+          <p:cNvPr id="4" name="TextBox 3"/>
+          <p:cNvSpPr txBox="1"/>
+          <p:nvPr/>
+        </p:nvSpPr>
+        <p:spPr>
+          <a:xfrm>
+            <a:off x="716907" y="263347"/>
+            <a:ext cx="5120768" cy="292608"/>
+          </a:xfrm>
+          <a:prstGeom prst="rect">
+            <a:avLst/>
+          </a:prstGeom>
+          <a:noFill/>
+        </p:spPr>
+        <p:txBody>
+          <a:bodyPr wrap="square" anchor="t" lIns="0" rIns="0" tIns="0" bIns="0">
+            <a:spAutoFit/>
+          </a:bodyPr>
+          <a:lstStyle/>
+          <a:p>
+            <a:pPr algn="l">
+              <a:lnSpc>
+                <a:spcPct val="110000"/>
+              </a:lnSpc>
+              <a:spcAft>
+                <a:spcPts val="0"/>
+              </a:spcAft>
+            </a:pPr>
+            <a:r>
+              <a:rPr sz="880" b="0" i="0">
+                <a:solidFill>
+                  <a:srgbClr val="556A83"/>
+                </a:solidFill>
+                <a:latin typeface="Arial"/>
+              </a:rPr>
+              <a:t>Private Equity</a:t>
+            </a:r>
+          </a:p>
+        </p:txBody>
+      </p:sp>
+      <p:sp>
+        <p:nvSpPr>
+          <p:cNvPr id="5" name="Rectangle 4"/>
+          <p:cNvSpPr/>
+          <p:nvPr/>
+        </p:nvSpPr>
+        <p:spPr>
+          <a:xfrm>
+            <a:off x="0" y="604723"/>
+            <a:ext cx="9753600" cy="1414272"/>
+          </a:xfrm>
+          <a:prstGeom prst="rect">
+            <a:avLst/>
+          </a:prstGeom>
+          <a:solidFill>
+            <a:srgbClr val="F6F7F9"/>
+          </a:solidFill>
+          <a:ln>
+            <a:noFill/>
+          </a:ln>
+          <a:effectLst/>
+        </p:spPr>
+        <p:style>
+          <a:lnRef idx="1">
+            <a:schemeClr val="accent1"/>
+          </a:lnRef>
+          <a:fillRef idx="3">
+            <a:schemeClr val="accent1"/>
+          </a:fillRef>
+          <a:effectRef idx="2">
+            <a:schemeClr val="accent1"/>
+          </a:effectRef>
+          <a:fontRef idx="minor">
+            <a:schemeClr val="lt1"/>
+          </a:fontRef>
+        </p:style>
+        <p:txBody>
+          <a:bodyPr rtlCol="0" anchor="ctr"/>
+          <a:lstStyle/>
+          <a:p>
+            <a:pPr algn="ctr"/>
+          </a:p>
+        </p:txBody>
+      </p:sp>
+      <p:sp>
+        <p:nvSpPr>
+          <p:cNvPr id="6" name="TextBox 5"/>
+          <p:cNvSpPr txBox="1"/>
+          <p:nvPr/>
+        </p:nvSpPr>
+        <p:spPr>
+          <a:xfrm>
+            <a:off x="438922" y="721766"/>
+            <a:ext cx="8851613" cy="829056"/>
+          </a:xfrm>
+          <a:prstGeom prst="rect">
+            <a:avLst/>
+          </a:prstGeom>
+          <a:noFill/>
+        </p:spPr>
+        <p:txBody>
+          <a:bodyPr wrap="square" anchor="t" lIns="0" rIns="0" tIns="0" bIns="0">
+            <a:spAutoFit/>
+          </a:bodyPr>
+          <a:lstStyle/>
+          <a:p>
+            <a:pPr algn="l">
+              <a:lnSpc>
+                <a:spcPct val="110000"/>
+              </a:lnSpc>
+              <a:spcAft>
+                <a:spcPts val="200"/>
+              </a:spcAft>
+            </a:pPr>
+            <a:r>
+              <a:rPr sz="2400" b="0" i="0" spc="-90">
+                <a:solidFill>
+                  <a:srgbClr val="314359"/>
+                </a:solidFill>
+                <a:latin typeface="Times New Roman"/>
+              </a:rPr>
+              <a:t>2.27 When the tide goes out: the drawdown trap</a:t>
+            </a:r>
+          </a:p>
+        </p:txBody>
+      </p:sp>
+      <p:sp>
+        <p:nvSpPr>
+          <p:cNvPr id="7" name="TextBox 6"/>
+          <p:cNvSpPr txBox="1"/>
+          <p:nvPr/>
+        </p:nvSpPr>
+        <p:spPr>
+          <a:xfrm>
+            <a:off x="453553" y="1511808"/>
+            <a:ext cx="8705305" cy="487680"/>
+          </a:xfrm>
+          <a:prstGeom prst="rect">
+            <a:avLst/>
+          </a:prstGeom>
+          <a:noFill/>
+        </p:spPr>
+        <p:txBody>
+          <a:bodyPr wrap="square" anchor="t" lIns="0" rIns="0" tIns="0" bIns="0">
+            <a:spAutoFit/>
+          </a:bodyPr>
+          <a:lstStyle/>
+          <a:p>
+            <a:pPr algn="l">
+              <a:lnSpc>
+                <a:spcPct val="110000"/>
+              </a:lnSpc>
+              <a:spcAft>
+                <a:spcPts val="0"/>
+              </a:spcAft>
+            </a:pPr>
+            <a:r>
+              <a:rPr sz="1040" b="0" i="1">
+                <a:solidFill>
+                  <a:srgbClr val="556A83"/>
+                </a:solidFill>
+                <a:latin typeface="Arial"/>
+              </a:rPr>
+              <a:t>PE’s smooth marks feel safe in calm markets — but in a shock they trigger the exact sequence that gets a CIO fired. Engaged ownership is the fiduciary safe harbour.</a:t>
+            </a:r>
+          </a:p>
+        </p:txBody>
+      </p:sp>
+      <p:sp>
+        <p:nvSpPr>
+          <p:cNvPr id="8" name="TextBox 7"/>
+          <p:cNvSpPr txBox="1"/>
+          <p:nvPr/>
+        </p:nvSpPr>
+        <p:spPr>
+          <a:xfrm>
+            <a:off x="6583844" y="6876288"/>
+            <a:ext cx="2926153" cy="292608"/>
+          </a:xfrm>
+          <a:prstGeom prst="rect">
+            <a:avLst/>
+          </a:prstGeom>
+          <a:noFill/>
+        </p:spPr>
+        <p:txBody>
+          <a:bodyPr wrap="square" anchor="t" lIns="0" rIns="0" tIns="0" bIns="0">
+            <a:spAutoFit/>
+          </a:bodyPr>
+          <a:lstStyle/>
+          <a:p>
+            <a:pPr algn="r">
+              <a:lnSpc>
+                <a:spcPct val="110000"/>
+              </a:lnSpc>
+              <a:spcAft>
+                <a:spcPts val="0"/>
+              </a:spcAft>
+            </a:pPr>
+            <a:r>
+              <a:rPr sz="680" b="0" i="0">
+                <a:solidFill>
+                  <a:srgbClr val="556A83"/>
+                </a:solidFill>
+                <a:latin typeface="Arial"/>
+              </a:rPr>
+              <a:t>Strictly confidential          33</a:t>
+            </a:r>
+          </a:p>
+        </p:txBody>
+      </p:sp>
+      <p:sp>
+        <p:nvSpPr>
+          <p:cNvPr id="9" name="TextBox 8"/>
+          <p:cNvSpPr txBox="1"/>
+          <p:nvPr/>
+        </p:nvSpPr>
+        <p:spPr>
+          <a:xfrm>
+            <a:off x="512076" y="2292096"/>
+            <a:ext cx="4316075" cy="292608"/>
+          </a:xfrm>
+          <a:prstGeom prst="rect">
+            <a:avLst/>
+          </a:prstGeom>
+          <a:noFill/>
+        </p:spPr>
+        <p:txBody>
+          <a:bodyPr wrap="square" anchor="t" lIns="0" rIns="0" tIns="0" bIns="0">
+            <a:spAutoFit/>
+          </a:bodyPr>
+          <a:lstStyle/>
+          <a:p>
+            <a:pPr algn="l">
+              <a:lnSpc>
+                <a:spcPct val="110000"/>
+              </a:lnSpc>
+              <a:spcAft>
+                <a:spcPts val="0"/>
+              </a:spcAft>
+            </a:pPr>
+            <a:r>
+              <a:rPr sz="919" b="1" i="0">
+                <a:solidFill>
+                  <a:srgbClr val="314359"/>
+                </a:solidFill>
+                <a:latin typeface="Arial"/>
+              </a:rPr>
+              <a:t>THE TRAP — HELD AT FAKE NAVs IN A CRASH</a:t>
+            </a:r>
+          </a:p>
+        </p:txBody>
+      </p:sp>
+      <p:sp>
+        <p:nvSpPr>
+          <p:cNvPr id="10" name="Rectangle 9"/>
+          <p:cNvSpPr/>
+          <p:nvPr/>
+        </p:nvSpPr>
+        <p:spPr>
+          <a:xfrm>
+            <a:off x="512076" y="2701747"/>
+            <a:ext cx="4316075" cy="1092403"/>
+          </a:xfrm>
+          <a:prstGeom prst="rect">
+            <a:avLst/>
+          </a:prstGeom>
+          <a:solidFill>
+            <a:srgbClr val="F6F7F9"/>
+          </a:solidFill>
+          <a:ln>
+            <a:noFill/>
+          </a:ln>
+          <a:effectLst/>
+        </p:spPr>
+        <p:style>
+          <a:lnRef idx="1">
+            <a:schemeClr val="accent1"/>
+          </a:lnRef>
+          <a:fillRef idx="3">
+            <a:schemeClr val="accent1"/>
+          </a:fillRef>
+          <a:effectRef idx="2">
+            <a:schemeClr val="accent1"/>
+          </a:effectRef>
+          <a:fontRef idx="minor">
+            <a:schemeClr val="lt1"/>
+          </a:fontRef>
+        </p:style>
+        <p:txBody>
+          <a:bodyPr rtlCol="0" anchor="ctr"/>
+          <a:lstStyle/>
+          <a:p>
+            <a:pPr algn="ctr"/>
+          </a:p>
+        </p:txBody>
+      </p:sp>
+      <p:sp>
+        <p:nvSpPr>
+          <p:cNvPr id="11" name="TextBox 10"/>
+          <p:cNvSpPr txBox="1"/>
+          <p:nvPr/>
+        </p:nvSpPr>
+        <p:spPr>
+          <a:xfrm>
+            <a:off x="643753" y="2828544"/>
+            <a:ext cx="4060037" cy="292608"/>
+          </a:xfrm>
+          <a:prstGeom prst="rect">
+            <a:avLst/>
+          </a:prstGeom>
+          <a:noFill/>
+        </p:spPr>
+        <p:txBody>
+          <a:bodyPr wrap="square" anchor="t" lIns="0" rIns="0" tIns="0" bIns="0">
+            <a:spAutoFit/>
+          </a:bodyPr>
+          <a:lstStyle/>
+          <a:p>
+            <a:pPr algn="l">
+              <a:lnSpc>
+                <a:spcPct val="110000"/>
+              </a:lnSpc>
+              <a:spcAft>
+                <a:spcPts val="0"/>
+              </a:spcAft>
+            </a:pPr>
+            <a:r>
+              <a:rPr sz="960" b="1" i="0">
+                <a:solidFill>
+                  <a:srgbClr val="314359"/>
+                </a:solidFill>
+                <a:latin typeface="Times New Roman"/>
+              </a:rPr>
+              <a:t>1 · The denominator effect</a:t>
+            </a:r>
+          </a:p>
+        </p:txBody>
+      </p:sp>
+      <p:sp>
+        <p:nvSpPr>
+          <p:cNvPr id="12" name="TextBox 11"/>
+          <p:cNvSpPr txBox="1"/>
+          <p:nvPr/>
+        </p:nvSpPr>
+        <p:spPr>
+          <a:xfrm>
+            <a:off x="643753" y="3150412"/>
+            <a:ext cx="4060037" cy="643737"/>
+          </a:xfrm>
+          <a:prstGeom prst="rect">
+            <a:avLst/>
+          </a:prstGeom>
+          <a:noFill/>
+        </p:spPr>
+        <p:txBody>
+          <a:bodyPr wrap="square" anchor="t" lIns="0" rIns="0" tIns="0" bIns="0">
+            <a:spAutoFit/>
+          </a:bodyPr>
+          <a:lstStyle/>
+          <a:p>
+            <a:pPr algn="l">
+              <a:lnSpc>
+                <a:spcPct val="112000"/>
+              </a:lnSpc>
+              <a:spcAft>
+                <a:spcPts val="0"/>
+              </a:spcAft>
+            </a:pPr>
+            <a:r>
+              <a:rPr sz="840" b="0" i="0">
+                <a:solidFill>
+                  <a:srgbClr val="0E1620"/>
+                </a:solidFill>
+                <a:latin typeface="Arial"/>
+              </a:rPr>
+              <a:t>Public equities fall 25%; PE is marked flat. The PE weight jumps from 15% to 22%+ — an instant breach of board concentration limits.</a:t>
+            </a:r>
+          </a:p>
+        </p:txBody>
+      </p:sp>
+      <p:sp>
+        <p:nvSpPr>
+          <p:cNvPr id="13" name="Rectangle 12"/>
+          <p:cNvSpPr/>
+          <p:nvPr/>
+        </p:nvSpPr>
+        <p:spPr>
+          <a:xfrm>
+            <a:off x="512076" y="3891686"/>
+            <a:ext cx="4316075" cy="1092403"/>
+          </a:xfrm>
+          <a:prstGeom prst="rect">
+            <a:avLst/>
+          </a:prstGeom>
+          <a:solidFill>
+            <a:srgbClr val="F6F7F9"/>
+          </a:solidFill>
+          <a:ln>
+            <a:noFill/>
+          </a:ln>
+          <a:effectLst/>
+        </p:spPr>
+        <p:style>
+          <a:lnRef idx="1">
+            <a:schemeClr val="accent1"/>
+          </a:lnRef>
+          <a:fillRef idx="3">
+            <a:schemeClr val="accent1"/>
+          </a:fillRef>
+          <a:effectRef idx="2">
+            <a:schemeClr val="accent1"/>
+          </a:effectRef>
+          <a:fontRef idx="minor">
+            <a:schemeClr val="lt1"/>
+          </a:fontRef>
+        </p:style>
+        <p:txBody>
+          <a:bodyPr rtlCol="0" anchor="ctr"/>
+          <a:lstStyle/>
+          <a:p>
+            <a:pPr algn="ctr"/>
+          </a:p>
+        </p:txBody>
+      </p:sp>
+      <p:sp>
+        <p:nvSpPr>
+          <p:cNvPr id="14" name="TextBox 13"/>
+          <p:cNvSpPr txBox="1"/>
+          <p:nvPr/>
+        </p:nvSpPr>
+        <p:spPr>
+          <a:xfrm>
+            <a:off x="643753" y="4018483"/>
+            <a:ext cx="4060037" cy="292608"/>
+          </a:xfrm>
+          <a:prstGeom prst="rect">
+            <a:avLst/>
+          </a:prstGeom>
+          <a:noFill/>
+        </p:spPr>
+        <p:txBody>
+          <a:bodyPr wrap="square" anchor="t" lIns="0" rIns="0" tIns="0" bIns="0">
+            <a:spAutoFit/>
+          </a:bodyPr>
+          <a:lstStyle/>
+          <a:p>
+            <a:pPr algn="l">
+              <a:lnSpc>
+                <a:spcPct val="110000"/>
+              </a:lnSpc>
+              <a:spcAft>
+                <a:spcPts val="0"/>
+              </a:spcAft>
+            </a:pPr>
+            <a:r>
+              <a:rPr sz="960" b="1" i="0">
+                <a:solidFill>
+                  <a:srgbClr val="314359"/>
+                </a:solidFill>
+                <a:latin typeface="Times New Roman"/>
+              </a:rPr>
+              <a:t>2 · The liquidity death spiral</a:t>
+            </a:r>
+          </a:p>
+        </p:txBody>
+      </p:sp>
+      <p:sp>
+        <p:nvSpPr>
+          <p:cNvPr id="15" name="TextBox 14"/>
+          <p:cNvSpPr txBox="1"/>
+          <p:nvPr/>
+        </p:nvSpPr>
+        <p:spPr>
+          <a:xfrm>
+            <a:off x="643753" y="4340352"/>
+            <a:ext cx="4060037" cy="643737"/>
+          </a:xfrm>
+          <a:prstGeom prst="rect">
+            <a:avLst/>
+          </a:prstGeom>
+          <a:noFill/>
+        </p:spPr>
+        <p:txBody>
+          <a:bodyPr wrap="square" anchor="t" lIns="0" rIns="0" tIns="0" bIns="0">
+            <a:spAutoFit/>
+          </a:bodyPr>
+          <a:lstStyle/>
+          <a:p>
+            <a:pPr algn="l">
+              <a:lnSpc>
+                <a:spcPct val="112000"/>
+              </a:lnSpc>
+              <a:spcAft>
+                <a:spcPts val="0"/>
+              </a:spcAft>
+            </a:pPr>
+            <a:r>
+              <a:rPr sz="840" b="0" i="0">
+                <a:solidFill>
+                  <a:srgbClr val="0E1620"/>
+                </a:solidFill>
+                <a:latin typeface="Arial"/>
+              </a:rPr>
+              <a:t>Distributions stop but capital calls keep coming. To meet them, the allocator is forced to sell liquid equities at the bottom.</a:t>
+            </a:r>
+          </a:p>
+        </p:txBody>
+      </p:sp>
+      <p:sp>
+        <p:nvSpPr>
+          <p:cNvPr id="16" name="Rectangle 15"/>
+          <p:cNvSpPr/>
+          <p:nvPr/>
+        </p:nvSpPr>
+        <p:spPr>
+          <a:xfrm>
+            <a:off x="512076" y="5081625"/>
+            <a:ext cx="4316075" cy="1092403"/>
+          </a:xfrm>
+          <a:prstGeom prst="rect">
+            <a:avLst/>
+          </a:prstGeom>
+          <a:solidFill>
+            <a:srgbClr val="F6F7F9"/>
+          </a:solidFill>
+          <a:ln>
+            <a:noFill/>
+          </a:ln>
+          <a:effectLst/>
+        </p:spPr>
+        <p:style>
+          <a:lnRef idx="1">
+            <a:schemeClr val="accent1"/>
+          </a:lnRef>
+          <a:fillRef idx="3">
+            <a:schemeClr val="accent1"/>
+          </a:fillRef>
+          <a:effectRef idx="2">
+            <a:schemeClr val="accent1"/>
+          </a:effectRef>
+          <a:fontRef idx="minor">
+            <a:schemeClr val="lt1"/>
+          </a:fontRef>
+        </p:style>
+        <p:txBody>
+          <a:bodyPr rtlCol="0" anchor="ctr"/>
+          <a:lstStyle/>
+          <a:p>
+            <a:pPr algn="ctr"/>
+          </a:p>
+        </p:txBody>
+      </p:sp>
+      <p:sp>
+        <p:nvSpPr>
+          <p:cNvPr id="17" name="TextBox 16"/>
+          <p:cNvSpPr txBox="1"/>
+          <p:nvPr/>
+        </p:nvSpPr>
+        <p:spPr>
+          <a:xfrm>
+            <a:off x="643753" y="5208422"/>
+            <a:ext cx="4060037" cy="292608"/>
+          </a:xfrm>
+          <a:prstGeom prst="rect">
+            <a:avLst/>
+          </a:prstGeom>
+          <a:noFill/>
+        </p:spPr>
+        <p:txBody>
+          <a:bodyPr wrap="square" anchor="t" lIns="0" rIns="0" tIns="0" bIns="0">
+            <a:spAutoFit/>
+          </a:bodyPr>
+          <a:lstStyle/>
+          <a:p>
+            <a:pPr algn="l">
+              <a:lnSpc>
+                <a:spcPct val="110000"/>
+              </a:lnSpc>
+              <a:spcAft>
+                <a:spcPts val="0"/>
+              </a:spcAft>
+            </a:pPr>
+            <a:r>
+              <a:rPr sz="960" b="1" i="0">
+                <a:solidFill>
+                  <a:srgbClr val="314359"/>
+                </a:solidFill>
+                <a:latin typeface="Times New Roman"/>
+              </a:rPr>
+              <a:t>3 · The secondary-market humiliation</a:t>
+            </a:r>
+          </a:p>
+        </p:txBody>
+      </p:sp>
+      <p:sp>
+        <p:nvSpPr>
+          <p:cNvPr id="18" name="TextBox 17"/>
+          <p:cNvSpPr txBox="1"/>
+          <p:nvPr/>
+        </p:nvSpPr>
+        <p:spPr>
+          <a:xfrm>
+            <a:off x="643753" y="5530291"/>
+            <a:ext cx="4060037" cy="643737"/>
+          </a:xfrm>
+          <a:prstGeom prst="rect">
+            <a:avLst/>
+          </a:prstGeom>
+          <a:noFill/>
+        </p:spPr>
+        <p:txBody>
+          <a:bodyPr wrap="square" anchor="t" lIns="0" rIns="0" tIns="0" bIns="0">
+            <a:spAutoFit/>
+          </a:bodyPr>
+          <a:lstStyle/>
+          <a:p>
+            <a:pPr algn="l">
+              <a:lnSpc>
+                <a:spcPct val="112000"/>
+              </a:lnSpc>
+              <a:spcAft>
+                <a:spcPts val="0"/>
+              </a:spcAft>
+            </a:pPr>
+            <a:r>
+              <a:rPr sz="840" b="0" i="0">
+                <a:solidFill>
+                  <a:srgbClr val="0E1620"/>
+                </a:solidFill>
+                <a:latin typeface="Arial"/>
+              </a:rPr>
+              <a:t>To cure the breach, PE stakes are sold at 15–25% haircuts — publicly crystallising losses and proving the “low volatility” was a fiction.</a:t>
+            </a:r>
+          </a:p>
+        </p:txBody>
+      </p:sp>
+      <p:sp>
+        <p:nvSpPr>
+          <p:cNvPr id="19" name="TextBox 18"/>
+          <p:cNvSpPr txBox="1"/>
+          <p:nvPr/>
+        </p:nvSpPr>
+        <p:spPr>
+          <a:xfrm>
+            <a:off x="5084191" y="2292096"/>
+            <a:ext cx="4279499" cy="292608"/>
+          </a:xfrm>
+          <a:prstGeom prst="rect">
+            <a:avLst/>
+          </a:prstGeom>
+          <a:noFill/>
+        </p:spPr>
+        <p:txBody>
+          <a:bodyPr wrap="square" anchor="t" lIns="0" rIns="0" tIns="0" bIns="0">
+            <a:spAutoFit/>
+          </a:bodyPr>
+          <a:lstStyle/>
+          <a:p>
+            <a:pPr algn="l">
+              <a:lnSpc>
+                <a:spcPct val="110000"/>
+              </a:lnSpc>
+              <a:spcAft>
+                <a:spcPts val="0"/>
+              </a:spcAft>
+            </a:pPr>
+            <a:r>
+              <a:rPr sz="919" b="1" i="0">
+                <a:solidFill>
+                  <a:srgbClr val="314359"/>
+                </a:solidFill>
+                <a:latin typeface="Arial"/>
+              </a:rPr>
+              <a:t>THE SAFE HARBOUR — ENGAGED OWNERSHIP</a:t>
+            </a:r>
+          </a:p>
+        </p:txBody>
+      </p:sp>
+      <p:sp>
+        <p:nvSpPr>
+          <p:cNvPr id="20" name="Rectangle 19"/>
+          <p:cNvSpPr/>
+          <p:nvPr/>
+        </p:nvSpPr>
+        <p:spPr>
+          <a:xfrm>
+            <a:off x="5084191" y="2701747"/>
+            <a:ext cx="4279499" cy="1092403"/>
+          </a:xfrm>
+          <a:prstGeom prst="rect">
+            <a:avLst/>
+          </a:prstGeom>
+          <a:solidFill>
+            <a:srgbClr val="F6F7F9"/>
+          </a:solidFill>
+          <a:ln>
+            <a:noFill/>
+          </a:ln>
+          <a:effectLst/>
+        </p:spPr>
+        <p:style>
+          <a:lnRef idx="1">
+            <a:schemeClr val="accent1"/>
+          </a:lnRef>
+          <a:fillRef idx="3">
+            <a:schemeClr val="accent1"/>
+          </a:fillRef>
+          <a:effectRef idx="2">
+            <a:schemeClr val="accent1"/>
+          </a:effectRef>
+          <a:fontRef idx="minor">
+            <a:schemeClr val="lt1"/>
+          </a:fontRef>
+        </p:style>
+        <p:txBody>
+          <a:bodyPr rtlCol="0" anchor="ctr"/>
+          <a:lstStyle/>
+          <a:p>
+            <a:pPr algn="ctr"/>
+          </a:p>
+        </p:txBody>
+      </p:sp>
+      <p:sp>
+        <p:nvSpPr>
+          <p:cNvPr id="21" name="TextBox 20"/>
+          <p:cNvSpPr txBox="1"/>
+          <p:nvPr/>
+        </p:nvSpPr>
+        <p:spPr>
+          <a:xfrm>
+            <a:off x="5215868" y="2828544"/>
+            <a:ext cx="4023460" cy="292608"/>
+          </a:xfrm>
+          <a:prstGeom prst="rect">
+            <a:avLst/>
+          </a:prstGeom>
+          <a:noFill/>
+        </p:spPr>
+        <p:txBody>
+          <a:bodyPr wrap="square" anchor="t" lIns="0" rIns="0" tIns="0" bIns="0">
+            <a:spAutoFit/>
+          </a:bodyPr>
+          <a:lstStyle/>
+          <a:p>
+            <a:pPr algn="l">
+              <a:lnSpc>
+                <a:spcPct val="110000"/>
+              </a:lnSpc>
+              <a:spcAft>
+                <a:spcPts val="0"/>
+              </a:spcAft>
+            </a:pPr>
+            <a:r>
+              <a:rPr sz="960" b="1" i="0">
+                <a:solidFill>
+                  <a:srgbClr val="152130"/>
+                </a:solidFill>
+                <a:latin typeface="Times New Roman"/>
+              </a:rPr>
+              <a:t>Honest pricing keeps weights balanced</a:t>
+            </a:r>
+          </a:p>
+        </p:txBody>
+      </p:sp>
+      <p:sp>
+        <p:nvSpPr>
+          <p:cNvPr id="22" name="TextBox 21"/>
+          <p:cNvSpPr txBox="1"/>
+          <p:nvPr/>
+        </p:nvSpPr>
+        <p:spPr>
+          <a:xfrm>
+            <a:off x="5215868" y="3150412"/>
+            <a:ext cx="4023460" cy="643737"/>
+          </a:xfrm>
+          <a:prstGeom prst="rect">
+            <a:avLst/>
+          </a:prstGeom>
+          <a:noFill/>
+        </p:spPr>
+        <p:txBody>
+          <a:bodyPr wrap="square" anchor="t" lIns="0" rIns="0" tIns="0" bIns="0">
+            <a:spAutoFit/>
+          </a:bodyPr>
+          <a:lstStyle/>
+          <a:p>
+            <a:pPr algn="l">
+              <a:lnSpc>
+                <a:spcPct val="112000"/>
+              </a:lnSpc>
+              <a:spcAft>
+                <a:spcPts val="0"/>
+              </a:spcAft>
+            </a:pPr>
+            <a:r>
+              <a:rPr sz="840" b="0" i="0">
+                <a:solidFill>
+                  <a:srgbClr val="0E1620"/>
+                </a:solidFill>
+                <a:latin typeface="Arial"/>
+              </a:rPr>
+              <a:t>Daily marks mean the sleeve falls with the market — so the denominator effect never fires and no threshold is breached.</a:t>
+            </a:r>
+          </a:p>
+        </p:txBody>
+      </p:sp>
+      <p:sp>
+        <p:nvSpPr>
+          <p:cNvPr id="23" name="Rectangle 22"/>
+          <p:cNvSpPr/>
+          <p:nvPr/>
+        </p:nvSpPr>
+        <p:spPr>
+          <a:xfrm>
+            <a:off x="5084191" y="3891686"/>
+            <a:ext cx="4279499" cy="1092403"/>
+          </a:xfrm>
+          <a:prstGeom prst="rect">
+            <a:avLst/>
+          </a:prstGeom>
+          <a:solidFill>
+            <a:srgbClr val="F6F7F9"/>
+          </a:solidFill>
+          <a:ln>
+            <a:noFill/>
+          </a:ln>
+          <a:effectLst/>
+        </p:spPr>
+        <p:style>
+          <a:lnRef idx="1">
+            <a:schemeClr val="accent1"/>
+          </a:lnRef>
+          <a:fillRef idx="3">
+            <a:schemeClr val="accent1"/>
+          </a:fillRef>
+          <a:effectRef idx="2">
+            <a:schemeClr val="accent1"/>
+          </a:effectRef>
+          <a:fontRef idx="minor">
+            <a:schemeClr val="lt1"/>
+          </a:fontRef>
+        </p:style>
+        <p:txBody>
+          <a:bodyPr rtlCol="0" anchor="ctr"/>
+          <a:lstStyle/>
+          <a:p>
+            <a:pPr algn="ctr"/>
+          </a:p>
+        </p:txBody>
+      </p:sp>
+      <p:sp>
+        <p:nvSpPr>
+          <p:cNvPr id="24" name="TextBox 23"/>
+          <p:cNvSpPr txBox="1"/>
+          <p:nvPr/>
+        </p:nvSpPr>
+        <p:spPr>
+          <a:xfrm>
+            <a:off x="5215868" y="4018483"/>
+            <a:ext cx="4023460" cy="292608"/>
+          </a:xfrm>
+          <a:prstGeom prst="rect">
+            <a:avLst/>
+          </a:prstGeom>
+          <a:noFill/>
+        </p:spPr>
+        <p:txBody>
+          <a:bodyPr wrap="square" anchor="t" lIns="0" rIns="0" tIns="0" bIns="0">
+            <a:spAutoFit/>
+          </a:bodyPr>
+          <a:lstStyle/>
+          <a:p>
+            <a:pPr algn="l">
+              <a:lnSpc>
+                <a:spcPct val="110000"/>
+              </a:lnSpc>
+              <a:spcAft>
+                <a:spcPts val="0"/>
+              </a:spcAft>
+            </a:pPr>
+            <a:r>
+              <a:rPr sz="960" b="1" i="0">
+                <a:solidFill>
+                  <a:srgbClr val="152130"/>
+                </a:solidFill>
+                <a:latin typeface="Times New Roman"/>
+              </a:rPr>
+              <a:t>Zero capital-call liability</a:t>
+            </a:r>
+          </a:p>
+        </p:txBody>
+      </p:sp>
+      <p:sp>
+        <p:nvSpPr>
+          <p:cNvPr id="25" name="TextBox 24"/>
+          <p:cNvSpPr txBox="1"/>
+          <p:nvPr/>
+        </p:nvSpPr>
+        <p:spPr>
+          <a:xfrm>
+            <a:off x="5215868" y="4340352"/>
+            <a:ext cx="4023460" cy="643737"/>
+          </a:xfrm>
+          <a:prstGeom prst="rect">
+            <a:avLst/>
+          </a:prstGeom>
+          <a:noFill/>
+        </p:spPr>
+        <p:txBody>
+          <a:bodyPr wrap="square" anchor="t" lIns="0" rIns="0" tIns="0" bIns="0">
+            <a:spAutoFit/>
+          </a:bodyPr>
+          <a:lstStyle/>
+          <a:p>
+            <a:pPr algn="l">
+              <a:lnSpc>
+                <a:spcPct val="112000"/>
+              </a:lnSpc>
+              <a:spcAft>
+                <a:spcPts val="0"/>
+              </a:spcAft>
+            </a:pPr>
+            <a:r>
+              <a:rPr sz="840" b="0" i="0">
+                <a:solidFill>
+                  <a:srgbClr val="0E1620"/>
+                </a:solidFill>
+                <a:latin typeface="Arial"/>
+              </a:rPr>
+              <a:t>No blind pools, no surprise calls. The allocator is never forced to become a distressed seller of other assets.</a:t>
+            </a:r>
+          </a:p>
+        </p:txBody>
+      </p:sp>
+      <p:sp>
+        <p:nvSpPr>
+          <p:cNvPr id="26" name="Rectangle 25"/>
+          <p:cNvSpPr/>
+          <p:nvPr/>
+        </p:nvSpPr>
+        <p:spPr>
+          <a:xfrm>
+            <a:off x="5084191" y="5081625"/>
+            <a:ext cx="4279499" cy="1092403"/>
+          </a:xfrm>
+          <a:prstGeom prst="rect">
+            <a:avLst/>
+          </a:prstGeom>
+          <a:solidFill>
+            <a:srgbClr val="F6F7F9"/>
+          </a:solidFill>
+          <a:ln>
+            <a:noFill/>
+          </a:ln>
+          <a:effectLst/>
+        </p:spPr>
+        <p:style>
+          <a:lnRef idx="1">
+            <a:schemeClr val="accent1"/>
+          </a:lnRef>
+          <a:fillRef idx="3">
+            <a:schemeClr val="accent1"/>
+          </a:fillRef>
+          <a:effectRef idx="2">
+            <a:schemeClr val="accent1"/>
+          </a:effectRef>
+          <a:fontRef idx="minor">
+            <a:schemeClr val="lt1"/>
+          </a:fontRef>
+        </p:style>
+        <p:txBody>
+          <a:bodyPr rtlCol="0" anchor="ctr"/>
+          <a:lstStyle/>
+          <a:p>
+            <a:pPr algn="ctr"/>
+          </a:p>
+        </p:txBody>
+      </p:sp>
+      <p:sp>
+        <p:nvSpPr>
+          <p:cNvPr id="27" name="TextBox 26"/>
+          <p:cNvSpPr txBox="1"/>
+          <p:nvPr/>
+        </p:nvSpPr>
+        <p:spPr>
+          <a:xfrm>
+            <a:off x="5215868" y="5208422"/>
+            <a:ext cx="4023460" cy="292608"/>
+          </a:xfrm>
+          <a:prstGeom prst="rect">
+            <a:avLst/>
+          </a:prstGeom>
+          <a:noFill/>
+        </p:spPr>
+        <p:txBody>
+          <a:bodyPr wrap="square" anchor="t" lIns="0" rIns="0" tIns="0" bIns="0">
+            <a:spAutoFit/>
+          </a:bodyPr>
+          <a:lstStyle/>
+          <a:p>
+            <a:pPr algn="l">
+              <a:lnSpc>
+                <a:spcPct val="110000"/>
+              </a:lnSpc>
+              <a:spcAft>
+                <a:spcPts val="0"/>
+              </a:spcAft>
+            </a:pPr>
+            <a:r>
+              <a:rPr sz="960" b="1" i="0">
+                <a:solidFill>
+                  <a:srgbClr val="152130"/>
+                </a:solidFill>
+                <a:latin typeface="Times New Roman"/>
+              </a:rPr>
+              <a:t>Alpha from turnarounds, not leverage</a:t>
+            </a:r>
+          </a:p>
+        </p:txBody>
+      </p:sp>
+      <p:sp>
+        <p:nvSpPr>
+          <p:cNvPr id="28" name="TextBox 27"/>
+          <p:cNvSpPr txBox="1"/>
+          <p:nvPr/>
+        </p:nvSpPr>
+        <p:spPr>
+          <a:xfrm>
+            <a:off x="5215868" y="5530291"/>
+            <a:ext cx="4023460" cy="643737"/>
+          </a:xfrm>
+          <a:prstGeom prst="rect">
+            <a:avLst/>
+          </a:prstGeom>
+          <a:noFill/>
+        </p:spPr>
+        <p:txBody>
+          <a:bodyPr wrap="square" anchor="t" lIns="0" rIns="0" tIns="0" bIns="0">
+            <a:spAutoFit/>
+          </a:bodyPr>
+          <a:lstStyle/>
+          <a:p>
+            <a:pPr algn="l">
+              <a:lnSpc>
+                <a:spcPct val="112000"/>
+              </a:lnSpc>
+              <a:spcAft>
+                <a:spcPts val="0"/>
+              </a:spcAft>
+            </a:pPr>
+            <a:r>
+              <a:rPr sz="840" b="0" i="0">
+                <a:solidFill>
+                  <a:srgbClr val="0E1620"/>
+                </a:solidFill>
+                <a:latin typeface="Arial"/>
+              </a:rPr>
+              <a:t>Returns come from board-led operational change in high-ROIIC mid-caps — not the leverage and multiple-expansion that break in a downturn.</a:t>
+            </a:r>
+          </a:p>
+        </p:txBody>
+      </p:sp>
+      <p:sp>
+        <p:nvSpPr>
+          <p:cNvPr id="29" name="Rectangle 28"/>
+          <p:cNvSpPr/>
+          <p:nvPr/>
+        </p:nvSpPr>
+        <p:spPr>
+          <a:xfrm>
+            <a:off x="438922" y="6456883"/>
+            <a:ext cx="8873559" cy="448665"/>
+          </a:xfrm>
+          <a:prstGeom prst="rect">
+            <a:avLst/>
+          </a:prstGeom>
+          <a:solidFill>
+            <a:srgbClr val="152130"/>
+          </a:solidFill>
+          <a:ln>
+            <a:noFill/>
+          </a:ln>
+          <a:effectLst/>
+        </p:spPr>
+        <p:style>
+          <a:lnRef idx="1">
+            <a:schemeClr val="accent1"/>
+          </a:lnRef>
+          <a:fillRef idx="3">
+            <a:schemeClr val="accent1"/>
+          </a:fillRef>
+          <a:effectRef idx="2">
+            <a:schemeClr val="accent1"/>
+          </a:effectRef>
+          <a:fontRef idx="minor">
+            <a:schemeClr val="lt1"/>
+          </a:fontRef>
+        </p:style>
+        <p:txBody>
+          <a:bodyPr rtlCol="0" anchor="ctr"/>
+          <a:lstStyle/>
+          <a:p>
+            <a:pPr algn="ctr"/>
+          </a:p>
+        </p:txBody>
+      </p:sp>
+      <p:sp>
+        <p:nvSpPr>
+          <p:cNvPr id="30" name="TextBox 29"/>
+          <p:cNvSpPr txBox="1"/>
+          <p:nvPr/>
+        </p:nvSpPr>
+        <p:spPr>
+          <a:xfrm>
+            <a:off x="570599" y="6456883"/>
+            <a:ext cx="8632151" cy="448665"/>
+          </a:xfrm>
+          <a:prstGeom prst="rect">
+            <a:avLst/>
+          </a:prstGeom>
+          <a:noFill/>
+        </p:spPr>
+        <p:txBody>
+          <a:bodyPr wrap="square" anchor="ctr" lIns="0" rIns="0" tIns="0" bIns="0">
+            <a:spAutoFit/>
+          </a:bodyPr>
+          <a:lstStyle/>
+          <a:p>
+            <a:pPr algn="l">
+              <a:lnSpc>
+                <a:spcPct val="110000"/>
+              </a:lnSpc>
+              <a:spcAft>
+                <a:spcPts val="0"/>
+              </a:spcAft>
+            </a:pPr>
+            <a:r>
+              <a:rPr sz="960" b="0" i="1">
+                <a:solidFill>
+                  <a:srgbClr val="FFFFFF"/>
+                </a:solidFill>
+                <a:latin typeface="Arial"/>
+              </a:rPr>
+              <a:t>When the tide goes out, artificially-priced illiquid assets are indefensible to a board. Engaged ownership delivers PE-like alpha while protecting portfolio balance, liquidity — and the allocator’s seat.</a:t>
+            </a:r>
+          </a:p>
+        </p:txBody>
+      </p:sp>
+      <p:sp>
+        <p:nvSpPr>
+          <p:cNvPr id="31" name="TextBox 30"/>
+          <p:cNvSpPr txBox="1"/>
+          <p:nvPr/>
+        </p:nvSpPr>
+        <p:spPr>
+          <a:xfrm>
+            <a:off x="438922" y="6983577"/>
+            <a:ext cx="9217382" cy="390144"/>
+          </a:xfrm>
+          <a:prstGeom prst="rect">
+            <a:avLst/>
+          </a:prstGeom>
+          <a:noFill/>
+        </p:spPr>
+        <p:txBody>
+          <a:bodyPr wrap="square" anchor="t" lIns="0" rIns="0" tIns="0" bIns="0">
+            <a:spAutoFit/>
+          </a:bodyPr>
+          <a:lstStyle/>
+          <a:p>
+            <a:pPr algn="l">
+              <a:lnSpc>
+                <a:spcPct val="110000"/>
+              </a:lnSpc>
+              <a:spcAft>
+                <a:spcPts val="0"/>
+              </a:spcAft>
+            </a:pPr>
+            <a:r>
+              <a:rPr sz="600" b="0" i="0">
+                <a:solidFill>
+                  <a:srgbClr val="556A83"/>
+                </a:solidFill>
+                <a:latin typeface="Arial"/>
+              </a:rPr>
+              <a:t>Mechanism described follows from PE’s appraisal-based marking and capital-call structure (see references). Illustrative; for professional investors, not investment advice.</a:t>
+            </a:r>
+          </a:p>
+        </p:txBody>
+      </p:sp>
+    </p:spTree>
+  </p:cSld>
+  <p:clrMapOvr>
+    <a:masterClrMapping/>
+  </p:clrMapOvr>
+</p:sld>
+</file>
+
+<file path=ppt/slides/slide37.xml><?xml version="1.0" encoding="utf-8"?>
+<p:sld xmlns:a="http://schemas.openxmlformats.org/drawingml/2006/main" xmlns:p="http://schemas.openxmlformats.org/presentationml/2006/main" xmlns:r="http://schemas.openxmlformats.org/officeDocument/2006/relationships">
+  <p:cSld>
+    <p:spTree>
+      <p:nvGrpSpPr>
+        <p:cNvPr id="1" name=""/>
+        <p:cNvGrpSpPr/>
+        <p:nvPr/>
+      </p:nvGrpSpPr>
+      <p:grpSpPr/>
+      <p:sp>
+        <p:nvSpPr>
+          <p:cNvPr id="2" name="Rectangle 1"/>
+          <p:cNvSpPr/>
+          <p:nvPr/>
+        </p:nvSpPr>
+        <p:spPr>
+          <a:xfrm>
+            <a:off x="0" y="0"/>
+            <a:ext cx="9753600" cy="7315200"/>
+          </a:xfrm>
+          <a:prstGeom prst="rect">
+            <a:avLst/>
+          </a:prstGeom>
+          <a:solidFill>
+            <a:srgbClr val="FFFFFF"/>
+          </a:solidFill>
+          <a:ln>
+            <a:noFill/>
+          </a:ln>
+          <a:effectLst/>
+        </p:spPr>
+        <p:style>
+          <a:lnRef idx="1">
+            <a:schemeClr val="accent1"/>
+          </a:lnRef>
+          <a:fillRef idx="3">
+            <a:schemeClr val="accent1"/>
+          </a:fillRef>
+          <a:effectRef idx="2">
+            <a:schemeClr val="accent1"/>
+          </a:effectRef>
+          <a:fontRef idx="minor">
+            <a:schemeClr val="lt1"/>
+          </a:fontRef>
+        </p:style>
+        <p:txBody>
+          <a:bodyPr rtlCol="0" anchor="ctr"/>
+          <a:lstStyle/>
+          <a:p>
+            <a:pPr algn="ctr"/>
+          </a:p>
+        </p:txBody>
+      </p:sp>
+      <p:pic>
+        <p:nvPicPr>
+          <p:cNvPr id="3" name="Picture 2" descr="mark_dark.png"/>
+          <p:cNvPicPr>
+            <a:picLocks noChangeAspect="1"/>
+          </p:cNvPicPr>
+          <p:nvPr/>
+        </p:nvPicPr>
+        <p:blipFill>
+          <a:blip r:embed="rId2"/>
+          <a:stretch>
+            <a:fillRect/>
+          </a:stretch>
+        </p:blipFill>
+        <p:spPr>
+          <a:xfrm>
+            <a:off x="402346" y="234086"/>
+            <a:ext cx="224012" cy="190199"/>
+          </a:xfrm>
+          <a:prstGeom prst="rect">
+            <a:avLst/>
+          </a:prstGeom>
+        </p:spPr>
+      </p:pic>
+      <p:sp>
+        <p:nvSpPr>
+          <p:cNvPr id="4" name="TextBox 3"/>
+          <p:cNvSpPr txBox="1"/>
+          <p:nvPr/>
+        </p:nvSpPr>
+        <p:spPr>
+          <a:xfrm>
+            <a:off x="716907" y="263347"/>
+            <a:ext cx="5120768" cy="292608"/>
+          </a:xfrm>
+          <a:prstGeom prst="rect">
+            <a:avLst/>
+          </a:prstGeom>
+          <a:noFill/>
+        </p:spPr>
+        <p:txBody>
+          <a:bodyPr wrap="square" anchor="t" lIns="0" rIns="0" tIns="0" bIns="0">
+            <a:spAutoFit/>
+          </a:bodyPr>
+          <a:lstStyle/>
+          <a:p>
+            <a:pPr algn="l">
+              <a:lnSpc>
+                <a:spcPct val="110000"/>
+              </a:lnSpc>
+              <a:spcAft>
+                <a:spcPts val="0"/>
+              </a:spcAft>
+            </a:pPr>
+            <a:r>
+              <a:rPr sz="880" b="0" i="0">
+                <a:solidFill>
+                  <a:srgbClr val="556A83"/>
+                </a:solidFill>
+                <a:latin typeface="Arial"/>
+              </a:rPr>
+              <a:t>Ownership Model</a:t>
+            </a:r>
+          </a:p>
+        </p:txBody>
+      </p:sp>
+      <p:sp>
+        <p:nvSpPr>
+          <p:cNvPr id="5" name="Rectangle 4"/>
+          <p:cNvSpPr/>
+          <p:nvPr/>
+        </p:nvSpPr>
+        <p:spPr>
+          <a:xfrm>
+            <a:off x="0" y="604723"/>
+            <a:ext cx="9753600" cy="1024128"/>
+          </a:xfrm>
+          <a:prstGeom prst="rect">
+            <a:avLst/>
+          </a:prstGeom>
+          <a:solidFill>
+            <a:srgbClr val="F6F7F9"/>
+          </a:solidFill>
+          <a:ln>
+            <a:noFill/>
+          </a:ln>
+          <a:effectLst/>
+        </p:spPr>
+        <p:style>
+          <a:lnRef idx="1">
+            <a:schemeClr val="accent1"/>
+          </a:lnRef>
+          <a:fillRef idx="3">
+            <a:schemeClr val="accent1"/>
+          </a:fillRef>
+          <a:effectRef idx="2">
+            <a:schemeClr val="accent1"/>
+          </a:effectRef>
+          <a:fontRef idx="minor">
+            <a:schemeClr val="lt1"/>
+          </a:fontRef>
+        </p:style>
+        <p:txBody>
+          <a:bodyPr rtlCol="0" anchor="ctr"/>
+          <a:lstStyle/>
+          <a:p>
+            <a:pPr algn="ctr"/>
+          </a:p>
+        </p:txBody>
+      </p:sp>
+      <p:sp>
+        <p:nvSpPr>
+          <p:cNvPr id="6" name="TextBox 5"/>
+          <p:cNvSpPr txBox="1"/>
+          <p:nvPr/>
+        </p:nvSpPr>
+        <p:spPr>
+          <a:xfrm>
+            <a:off x="438922" y="721766"/>
+            <a:ext cx="8851613" cy="829056"/>
+          </a:xfrm>
+          <a:prstGeom prst="rect">
+            <a:avLst/>
+          </a:prstGeom>
+          <a:noFill/>
+        </p:spPr>
+        <p:txBody>
+          <a:bodyPr wrap="square" anchor="t" lIns="0" rIns="0" tIns="0" bIns="0">
+            <a:spAutoFit/>
+          </a:bodyPr>
+          <a:lstStyle/>
+          <a:p>
+            <a:pPr algn="l">
+              <a:lnSpc>
+                <a:spcPct val="110000"/>
+              </a:lnSpc>
+              <a:spcAft>
+                <a:spcPts val="200"/>
+              </a:spcAft>
+            </a:pPr>
+            <a:r>
+              <a:rPr sz="2400" b="0" i="0" spc="-90">
+                <a:solidFill>
+                  <a:srgbClr val="314359"/>
+                </a:solidFill>
+                <a:latin typeface="Times New Roman"/>
+              </a:rPr>
+              <a:t>2.28 Responsible ownership, by construction</a:t>
+            </a:r>
+          </a:p>
+        </p:txBody>
+      </p:sp>
+      <p:sp>
+        <p:nvSpPr>
+          <p:cNvPr id="7" name="TextBox 6"/>
+          <p:cNvSpPr txBox="1"/>
+          <p:nvPr/>
+        </p:nvSpPr>
+        <p:spPr>
+          <a:xfrm>
+            <a:off x="6583844" y="6876288"/>
+            <a:ext cx="2926153" cy="292608"/>
+          </a:xfrm>
+          <a:prstGeom prst="rect">
+            <a:avLst/>
+          </a:prstGeom>
+          <a:noFill/>
+        </p:spPr>
+        <p:txBody>
+          <a:bodyPr wrap="square" anchor="t" lIns="0" rIns="0" tIns="0" bIns="0">
+            <a:spAutoFit/>
+          </a:bodyPr>
+          <a:lstStyle/>
+          <a:p>
+            <a:pPr algn="r">
+              <a:lnSpc>
+                <a:spcPct val="110000"/>
+              </a:lnSpc>
+              <a:spcAft>
+                <a:spcPts val="0"/>
+              </a:spcAft>
+            </a:pPr>
+            <a:r>
+              <a:rPr sz="680" b="0" i="0">
+                <a:solidFill>
+                  <a:srgbClr val="556A83"/>
+                </a:solidFill>
+                <a:latin typeface="Arial"/>
+              </a:rPr>
+              <a:t>Strictly confidential          34</a:t>
+            </a:r>
+          </a:p>
+        </p:txBody>
+      </p:sp>
+      <p:sp>
+        <p:nvSpPr>
+          <p:cNvPr id="8" name="TextBox 7"/>
+          <p:cNvSpPr txBox="1"/>
+          <p:nvPr/>
+        </p:nvSpPr>
+        <p:spPr>
+          <a:xfrm>
+            <a:off x="548653" y="1901952"/>
+            <a:ext cx="8705305" cy="4584192"/>
+          </a:xfrm>
+          <a:prstGeom prst="rect">
+            <a:avLst/>
+          </a:prstGeom>
+          <a:noFill/>
+        </p:spPr>
+        <p:txBody>
+          <a:bodyPr wrap="square" anchor="t" lIns="0" rIns="0" tIns="0" bIns="0">
+            <a:spAutoFit/>
+          </a:bodyPr>
+          <a:lstStyle/>
+          <a:p>
+            <a:pPr marL="186949" indent="-186949">
+              <a:lnSpc>
+                <a:spcPct val="112000"/>
+              </a:lnSpc>
+              <a:spcAft>
+                <a:spcPts val="1400"/>
+              </a:spcAft>
+            </a:pPr>
+            <a:r>
+              <a:rPr sz="1280" b="1">
+                <a:solidFill>
+                  <a:srgbClr val="314359"/>
+                </a:solidFill>
+                <a:latin typeface="Arial"/>
+              </a:rPr>
+              <a:t>›  </a:t>
+            </a:r>
+            <a:r>
+              <a:rPr sz="1280" b="1">
+                <a:solidFill>
+                  <a:srgbClr val="314359"/>
+                </a:solidFill>
+                <a:latin typeface="Arial"/>
+              </a:rPr>
+              <a:t>Governance is the lever.</a:t>
+            </a:r>
+            <a:r>
+              <a:rPr sz="1280">
+                <a:solidFill>
+                  <a:srgbClr val="0E1620"/>
+                </a:solidFill>
+                <a:latin typeface="Arial"/>
+              </a:rPr>
+              <a:t>  Value is created through board representation and active promotion of strong corporate governance across all holdings.</a:t>
+            </a:r>
+          </a:p>
+          <a:p>
+            <a:pPr marL="186949" indent="-186949">
+              <a:lnSpc>
+                <a:spcPct val="112000"/>
+              </a:lnSpc>
+              <a:spcAft>
+                <a:spcPts val="1400"/>
+              </a:spcAft>
+            </a:pPr>
+            <a:r>
+              <a:rPr sz="1280" b="1">
+                <a:solidFill>
+                  <a:srgbClr val="314359"/>
+                </a:solidFill>
+                <a:latin typeface="Arial"/>
+              </a:rPr>
+              <a:t>›  </a:t>
+            </a:r>
+            <a:r>
+              <a:rPr sz="1280" b="1">
+                <a:solidFill>
+                  <a:srgbClr val="314359"/>
+                </a:solidFill>
+                <a:latin typeface="Arial"/>
+              </a:rPr>
+              <a:t>Five improvement dimensions.</a:t>
+            </a:r>
+            <a:r>
+              <a:rPr sz="1280">
+                <a:solidFill>
+                  <a:srgbClr val="0E1620"/>
+                </a:solidFill>
+                <a:latin typeface="Arial"/>
+              </a:rPr>
+              <a:t>  Operational, financial, structural, environmental and social improvements — each tied to enterprise value.</a:t>
+            </a:r>
+          </a:p>
+          <a:p>
+            <a:pPr marL="186949" indent="-186949">
+              <a:lnSpc>
+                <a:spcPct val="112000"/>
+              </a:lnSpc>
+              <a:spcAft>
+                <a:spcPts val="1400"/>
+              </a:spcAft>
+            </a:pPr>
+            <a:r>
+              <a:rPr sz="1280" b="1">
+                <a:solidFill>
+                  <a:srgbClr val="314359"/>
+                </a:solidFill>
+                <a:latin typeface="Arial"/>
+              </a:rPr>
+              <a:t>›  </a:t>
+            </a:r>
+            <a:r>
+              <a:rPr sz="1280" b="1">
+                <a:solidFill>
+                  <a:srgbClr val="314359"/>
+                </a:solidFill>
+                <a:latin typeface="Arial"/>
+              </a:rPr>
+              <a:t>PRI signatory since 2019,</a:t>
+            </a:r>
+            <a:r>
+              <a:rPr sz="1280">
+                <a:solidFill>
+                  <a:srgbClr val="0E1620"/>
+                </a:solidFill>
+                <a:latin typeface="Arial"/>
+              </a:rPr>
+              <a:t>  adhering to the Six Principles for Responsible Investment.</a:t>
+            </a:r>
+          </a:p>
+          <a:p>
+            <a:pPr marL="186949" indent="-186949">
+              <a:lnSpc>
+                <a:spcPct val="112000"/>
+              </a:lnSpc>
+              <a:spcAft>
+                <a:spcPts val="1400"/>
+              </a:spcAft>
+            </a:pPr>
+            <a:r>
+              <a:rPr sz="1280" b="1">
+                <a:solidFill>
+                  <a:srgbClr val="314359"/>
+                </a:solidFill>
+                <a:latin typeface="Arial"/>
+              </a:rPr>
+              <a:t>›  </a:t>
+            </a:r>
+            <a:r>
+              <a:rPr sz="1280" b="1">
+                <a:solidFill>
+                  <a:srgbClr val="314359"/>
+                </a:solidFill>
+                <a:latin typeface="Arial"/>
+              </a:rPr>
+              <a:t>Credible oversight.</a:t>
+            </a:r>
+            <a:r>
+              <a:rPr sz="1280">
+                <a:solidFill>
+                  <a:srgbClr val="0E1620"/>
+                </a:solidFill>
+                <a:latin typeface="Arial"/>
+              </a:rPr>
+              <a:t>  SEB custodian · MUFG administrator · KPMG auditor · Swedish FI-registered AIFM.</a:t>
+            </a:r>
+          </a:p>
+        </p:txBody>
+      </p:sp>
+    </p:spTree>
+  </p:cSld>
+  <p:clrMapOvr>
+    <a:masterClrMapping/>
+  </p:clrMapOvr>
+</p:sld>
+</file>
+
+<file path=ppt/slides/slide38.xml><?xml version="1.0" encoding="utf-8"?>
+<p:sld xmlns:a="http://schemas.openxmlformats.org/drawingml/2006/main" xmlns:p="http://schemas.openxmlformats.org/presentationml/2006/main" xmlns:r="http://schemas.openxmlformats.org/officeDocument/2006/relationships">
+  <p:cSld>
+    <p:spTree>
+      <p:nvGrpSpPr>
+        <p:cNvPr id="1" name=""/>
+        <p:cNvGrpSpPr/>
+        <p:nvPr/>
+      </p:nvGrpSpPr>
+      <p:grpSpPr/>
+      <p:sp>
+        <p:nvSpPr>
+          <p:cNvPr id="2" name="Rectangle 1"/>
+          <p:cNvSpPr/>
+          <p:nvPr/>
+        </p:nvSpPr>
+        <p:spPr>
+          <a:xfrm>
+            <a:off x="0" y="0"/>
+            <a:ext cx="9753600" cy="7315200"/>
+          </a:xfrm>
+          <a:prstGeom prst="rect">
+            <a:avLst/>
+          </a:prstGeom>
+          <a:solidFill>
+            <a:srgbClr val="152130"/>
+          </a:solidFill>
+          <a:ln>
+            <a:noFill/>
+          </a:ln>
+          <a:effectLst/>
+        </p:spPr>
+        <p:style>
+          <a:lnRef idx="1">
+            <a:schemeClr val="accent1"/>
+          </a:lnRef>
+          <a:fillRef idx="3">
+            <a:schemeClr val="accent1"/>
+          </a:fillRef>
+          <a:effectRef idx="2">
+            <a:schemeClr val="accent1"/>
+          </a:effectRef>
+          <a:fontRef idx="minor">
+            <a:schemeClr val="lt1"/>
+          </a:fontRef>
+        </p:style>
+        <p:txBody>
+          <a:bodyPr rtlCol="0" anchor="ctr"/>
+          <a:lstStyle/>
+          <a:p>
+            <a:pPr algn="ctr"/>
+          </a:p>
+        </p:txBody>
+      </p:sp>
+      <p:pic>
+        <p:nvPicPr>
+          <p:cNvPr id="3" name="Picture 2" descr="logo_white.png"/>
+          <p:cNvPicPr>
+            <a:picLocks noChangeAspect="1"/>
+          </p:cNvPicPr>
+          <p:nvPr/>
+        </p:nvPicPr>
+        <p:blipFill>
+          <a:blip r:embed="rId2"/>
+          <a:stretch>
+            <a:fillRect/>
+          </a:stretch>
+        </p:blipFill>
+        <p:spPr>
+          <a:xfrm>
             <a:off x="438922" y="536448"/>
             <a:ext cx="1768098" cy="380399"/>
           </a:xfrm>
@@ -44687,6 +51228,952 @@
                 <a:latin typeface="Arial"/>
               </a:rPr>
               <a:t>Landmark Square, West Bay Road, Grand Cayman</a:t>
+            </a:r>
+          </a:p>
+        </p:txBody>
+      </p:sp>
+    </p:spTree>
+  </p:cSld>
+  <p:clrMapOvr>
+    <a:masterClrMapping/>
+  </p:clrMapOvr>
+</p:sld>
+</file>
+
+<file path=ppt/slides/slide39.xml><?xml version="1.0" encoding="utf-8"?>
+<p:sld xmlns:a="http://schemas.openxmlformats.org/drawingml/2006/main" xmlns:p="http://schemas.openxmlformats.org/presentationml/2006/main" xmlns:r="http://schemas.openxmlformats.org/officeDocument/2006/relationships">
+  <p:cSld>
+    <p:spTree>
+      <p:nvGrpSpPr>
+        <p:cNvPr id="1" name=""/>
+        <p:cNvGrpSpPr/>
+        <p:nvPr/>
+      </p:nvGrpSpPr>
+      <p:grpSpPr/>
+      <p:sp>
+        <p:nvSpPr>
+          <p:cNvPr id="2" name="Rectangle 1"/>
+          <p:cNvSpPr/>
+          <p:nvPr/>
+        </p:nvSpPr>
+        <p:spPr>
+          <a:xfrm>
+            <a:off x="0" y="0"/>
+            <a:ext cx="9753600" cy="7315200"/>
+          </a:xfrm>
+          <a:prstGeom prst="rect">
+            <a:avLst/>
+          </a:prstGeom>
+          <a:solidFill>
+            <a:srgbClr val="FFFFFF"/>
+          </a:solidFill>
+          <a:ln>
+            <a:noFill/>
+          </a:ln>
+          <a:effectLst/>
+        </p:spPr>
+        <p:style>
+          <a:lnRef idx="1">
+            <a:schemeClr val="accent1"/>
+          </a:lnRef>
+          <a:fillRef idx="3">
+            <a:schemeClr val="accent1"/>
+          </a:fillRef>
+          <a:effectRef idx="2">
+            <a:schemeClr val="accent1"/>
+          </a:effectRef>
+          <a:fontRef idx="minor">
+            <a:schemeClr val="lt1"/>
+          </a:fontRef>
+        </p:style>
+        <p:txBody>
+          <a:bodyPr rtlCol="0" anchor="ctr"/>
+          <a:lstStyle/>
+          <a:p>
+            <a:pPr algn="ctr"/>
+          </a:p>
+        </p:txBody>
+      </p:sp>
+      <p:pic>
+        <p:nvPicPr>
+          <p:cNvPr id="3" name="Picture 2" descr="mark_dark.png"/>
+          <p:cNvPicPr>
+            <a:picLocks noChangeAspect="1"/>
+          </p:cNvPicPr>
+          <p:nvPr/>
+        </p:nvPicPr>
+        <p:blipFill>
+          <a:blip r:embed="rId2"/>
+          <a:stretch>
+            <a:fillRect/>
+          </a:stretch>
+        </p:blipFill>
+        <p:spPr>
+          <a:xfrm>
+            <a:off x="402346" y="234086"/>
+            <a:ext cx="224012" cy="190199"/>
+          </a:xfrm>
+          <a:prstGeom prst="rect">
+            <a:avLst/>
+          </a:prstGeom>
+        </p:spPr>
+      </p:pic>
+      <p:sp>
+        <p:nvSpPr>
+          <p:cNvPr id="4" name="TextBox 3"/>
+          <p:cNvSpPr txBox="1"/>
+          <p:nvPr/>
+        </p:nvSpPr>
+        <p:spPr>
+          <a:xfrm>
+            <a:off x="716907" y="263347"/>
+            <a:ext cx="5120768" cy="292608"/>
+          </a:xfrm>
+          <a:prstGeom prst="rect">
+            <a:avLst/>
+          </a:prstGeom>
+          <a:noFill/>
+        </p:spPr>
+        <p:txBody>
+          <a:bodyPr wrap="square" anchor="t" lIns="0" rIns="0" tIns="0" bIns="0">
+            <a:spAutoFit/>
+          </a:bodyPr>
+          <a:lstStyle/>
+          <a:p>
+            <a:pPr algn="l">
+              <a:lnSpc>
+                <a:spcPct val="110000"/>
+              </a:lnSpc>
+              <a:spcAft>
+                <a:spcPts val="0"/>
+              </a:spcAft>
+            </a:pPr>
+            <a:r>
+              <a:rPr sz="880" b="0" i="0">
+                <a:solidFill>
+                  <a:srgbClr val="556A83"/>
+                </a:solidFill>
+                <a:latin typeface="Arial"/>
+              </a:rPr>
+              <a:t>References</a:t>
+            </a:r>
+          </a:p>
+        </p:txBody>
+      </p:sp>
+      <p:sp>
+        <p:nvSpPr>
+          <p:cNvPr id="5" name="TextBox 4"/>
+          <p:cNvSpPr txBox="1"/>
+          <p:nvPr/>
+        </p:nvSpPr>
+        <p:spPr>
+          <a:xfrm>
+            <a:off x="6876460" y="263347"/>
+            <a:ext cx="2450653" cy="292608"/>
+          </a:xfrm>
+          <a:prstGeom prst="rect">
+            <a:avLst/>
+          </a:prstGeom>
+          <a:noFill/>
+        </p:spPr>
+        <p:txBody>
+          <a:bodyPr wrap="square" anchor="t" lIns="0" rIns="0" tIns="0" bIns="0">
+            <a:spAutoFit/>
+          </a:bodyPr>
+          <a:lstStyle/>
+          <a:p>
+            <a:pPr algn="r">
+              <a:lnSpc>
+                <a:spcPct val="110000"/>
+              </a:lnSpc>
+              <a:spcAft>
+                <a:spcPts val="0"/>
+              </a:spcAft>
+            </a:pPr>
+            <a:r>
+              <a:rPr sz="880" b="1" i="0">
+                <a:solidFill>
+                  <a:srgbClr val="556A83"/>
+                </a:solidFill>
+                <a:latin typeface="Arial"/>
+              </a:rPr>
+              <a:t>1 of 2</a:t>
+            </a:r>
+          </a:p>
+        </p:txBody>
+      </p:sp>
+      <p:sp>
+        <p:nvSpPr>
+          <p:cNvPr id="6" name="Rectangle 5"/>
+          <p:cNvSpPr/>
+          <p:nvPr/>
+        </p:nvSpPr>
+        <p:spPr>
+          <a:xfrm>
+            <a:off x="0" y="604723"/>
+            <a:ext cx="9753600" cy="897331"/>
+          </a:xfrm>
+          <a:prstGeom prst="rect">
+            <a:avLst/>
+          </a:prstGeom>
+          <a:solidFill>
+            <a:srgbClr val="F6F7F9"/>
+          </a:solidFill>
+          <a:ln>
+            <a:noFill/>
+          </a:ln>
+          <a:effectLst/>
+        </p:spPr>
+        <p:style>
+          <a:lnRef idx="1">
+            <a:schemeClr val="accent1"/>
+          </a:lnRef>
+          <a:fillRef idx="3">
+            <a:schemeClr val="accent1"/>
+          </a:fillRef>
+          <a:effectRef idx="2">
+            <a:schemeClr val="accent1"/>
+          </a:effectRef>
+          <a:fontRef idx="minor">
+            <a:schemeClr val="lt1"/>
+          </a:fontRef>
+        </p:style>
+        <p:txBody>
+          <a:bodyPr rtlCol="0" anchor="ctr"/>
+          <a:lstStyle/>
+          <a:p>
+            <a:pPr algn="ctr"/>
+          </a:p>
+        </p:txBody>
+      </p:sp>
+      <p:sp>
+        <p:nvSpPr>
+          <p:cNvPr id="7" name="TextBox 6"/>
+          <p:cNvSpPr txBox="1"/>
+          <p:nvPr/>
+        </p:nvSpPr>
+        <p:spPr>
+          <a:xfrm>
+            <a:off x="438922" y="702259"/>
+            <a:ext cx="8851613" cy="682752"/>
+          </a:xfrm>
+          <a:prstGeom prst="rect">
+            <a:avLst/>
+          </a:prstGeom>
+          <a:noFill/>
+        </p:spPr>
+        <p:txBody>
+          <a:bodyPr wrap="square" anchor="t" lIns="0" rIns="0" tIns="0" bIns="0">
+            <a:spAutoFit/>
+          </a:bodyPr>
+          <a:lstStyle/>
+          <a:p>
+            <a:pPr algn="l">
+              <a:lnSpc>
+                <a:spcPct val="110000"/>
+              </a:lnSpc>
+              <a:spcAft>
+                <a:spcPts val="0"/>
+              </a:spcAft>
+            </a:pPr>
+            <a:r>
+              <a:rPr sz="2080" b="0" i="0" spc="-78">
+                <a:solidFill>
+                  <a:srgbClr val="314359"/>
+                </a:solidFill>
+                <a:latin typeface="Times New Roman"/>
+              </a:rPr>
+              <a:t>References &amp; Methodology — Peer-reviewed literature</a:t>
+            </a:r>
+          </a:p>
+        </p:txBody>
+      </p:sp>
+      <p:sp>
+        <p:nvSpPr>
+          <p:cNvPr id="8" name="TextBox 7"/>
+          <p:cNvSpPr txBox="1"/>
+          <p:nvPr/>
+        </p:nvSpPr>
+        <p:spPr>
+          <a:xfrm>
+            <a:off x="6583844" y="6876288"/>
+            <a:ext cx="2926153" cy="292608"/>
+          </a:xfrm>
+          <a:prstGeom prst="rect">
+            <a:avLst/>
+          </a:prstGeom>
+          <a:noFill/>
+        </p:spPr>
+        <p:txBody>
+          <a:bodyPr wrap="square" anchor="t" lIns="0" rIns="0" tIns="0" bIns="0">
+            <a:spAutoFit/>
+          </a:bodyPr>
+          <a:lstStyle/>
+          <a:p>
+            <a:pPr algn="r">
+              <a:lnSpc>
+                <a:spcPct val="110000"/>
+              </a:lnSpc>
+              <a:spcAft>
+                <a:spcPts val="0"/>
+              </a:spcAft>
+            </a:pPr>
+            <a:r>
+              <a:rPr sz="680" b="0" i="0">
+                <a:solidFill>
+                  <a:srgbClr val="556A83"/>
+                </a:solidFill>
+                <a:latin typeface="Arial"/>
+              </a:rPr>
+              <a:t>Strictly confidential          35</a:t>
+            </a:r>
+          </a:p>
+        </p:txBody>
+      </p:sp>
+      <p:sp>
+        <p:nvSpPr>
+          <p:cNvPr id="9" name="TextBox 8"/>
+          <p:cNvSpPr txBox="1"/>
+          <p:nvPr/>
+        </p:nvSpPr>
+        <p:spPr>
+          <a:xfrm>
+            <a:off x="438922" y="1706880"/>
+            <a:ext cx="4389229" cy="292608"/>
+          </a:xfrm>
+          <a:prstGeom prst="rect">
+            <a:avLst/>
+          </a:prstGeom>
+          <a:noFill/>
+        </p:spPr>
+        <p:txBody>
+          <a:bodyPr wrap="square" anchor="t" lIns="0" rIns="0" tIns="0" bIns="0">
+            <a:spAutoFit/>
+          </a:bodyPr>
+          <a:lstStyle/>
+          <a:p>
+            <a:pPr algn="l">
+              <a:lnSpc>
+                <a:spcPct val="110000"/>
+              </a:lnSpc>
+              <a:spcAft>
+                <a:spcPts val="0"/>
+              </a:spcAft>
+            </a:pPr>
+            <a:r>
+              <a:rPr sz="919" b="1" i="0">
+                <a:solidFill>
+                  <a:srgbClr val="314359"/>
+                </a:solidFill>
+                <a:latin typeface="Arial"/>
+              </a:rPr>
+              <a:t>ENGAGED OWNERSHIP / ACTIVISM (PART I)</a:t>
+            </a:r>
+          </a:p>
+        </p:txBody>
+      </p:sp>
+      <p:sp>
+        <p:nvSpPr>
+          <p:cNvPr id="10" name="TextBox 9"/>
+          <p:cNvSpPr txBox="1"/>
+          <p:nvPr/>
+        </p:nvSpPr>
+        <p:spPr>
+          <a:xfrm>
+            <a:off x="438922" y="2067763"/>
+            <a:ext cx="4389229" cy="4876800"/>
+          </a:xfrm>
+          <a:prstGeom prst="rect">
+            <a:avLst/>
+          </a:prstGeom>
+          <a:noFill/>
+        </p:spPr>
+        <p:txBody>
+          <a:bodyPr wrap="square" anchor="t" lIns="0" rIns="0" tIns="0" bIns="0">
+            <a:spAutoFit/>
+          </a:bodyPr>
+          <a:lstStyle/>
+          <a:p>
+            <a:pPr marL="190200" indent="-190200">
+              <a:lnSpc>
+                <a:spcPct val="104000"/>
+              </a:lnSpc>
+              <a:spcAft>
+                <a:spcPts val="550"/>
+              </a:spcAft>
+            </a:pPr>
+            <a:r>
+              <a:rPr sz="720" i="0">
+                <a:solidFill>
+                  <a:srgbClr val="0E1620"/>
+                </a:solidFill>
+                <a:latin typeface="Arial"/>
+              </a:rPr>
+              <a:t>Bebchuk, L. A., Brav, A., &amp; Jiang, W. (2015). The long-term effects of hedge fund activism. </a:t>
+            </a:r>
+            <a:r>
+              <a:rPr sz="720" i="1">
+                <a:solidFill>
+                  <a:srgbClr val="0E1620"/>
+                </a:solidFill>
+                <a:latin typeface="Arial"/>
+              </a:rPr>
+              <a:t>Columbia Law Review, 115</a:t>
+            </a:r>
+            <a:r>
+              <a:rPr sz="720" i="0">
+                <a:solidFill>
+                  <a:srgbClr val="0E1620"/>
+                </a:solidFill>
+                <a:latin typeface="Arial"/>
+              </a:rPr>
+              <a:t>(5), 1085–1156.</a:t>
+            </a:r>
+          </a:p>
+          <a:p>
+            <a:pPr marL="190200" indent="-190200">
+              <a:lnSpc>
+                <a:spcPct val="104000"/>
+              </a:lnSpc>
+              <a:spcAft>
+                <a:spcPts val="550"/>
+              </a:spcAft>
+            </a:pPr>
+            <a:r>
+              <a:rPr sz="720" i="0">
+                <a:solidFill>
+                  <a:srgbClr val="0E1620"/>
+                </a:solidFill>
+                <a:latin typeface="Arial"/>
+              </a:rPr>
+              <a:t>Brav, A., Jiang, W., Partnoy, F., &amp; Thomas, R. (2008). Hedge fund activism, corporate governance, and firm performance. </a:t>
+            </a:r>
+            <a:r>
+              <a:rPr sz="720" i="1">
+                <a:solidFill>
+                  <a:srgbClr val="0E1620"/>
+                </a:solidFill>
+                <a:latin typeface="Arial"/>
+              </a:rPr>
+              <a:t>The Journal of Finance, 63</a:t>
+            </a:r>
+            <a:r>
+              <a:rPr sz="720" i="0">
+                <a:solidFill>
+                  <a:srgbClr val="0E1620"/>
+                </a:solidFill>
+                <a:latin typeface="Arial"/>
+              </a:rPr>
+              <a:t>(4), 1729–1775. https://doi.org/10.1111/j.1540-6261.2008.01373.x</a:t>
+            </a:r>
+          </a:p>
+          <a:p>
+            <a:pPr marL="190200" indent="-190200">
+              <a:lnSpc>
+                <a:spcPct val="104000"/>
+              </a:lnSpc>
+              <a:spcAft>
+                <a:spcPts val="550"/>
+              </a:spcAft>
+            </a:pPr>
+            <a:r>
+              <a:rPr sz="720" i="0">
+                <a:solidFill>
+                  <a:srgbClr val="0E1620"/>
+                </a:solidFill>
+                <a:latin typeface="Arial"/>
+              </a:rPr>
+              <a:t>Brav, A., Jiang, W., &amp; Kim, H. (2015). The real effects of hedge fund activism: Productivity, asset allocation, and labor outcomes. </a:t>
+            </a:r>
+            <a:r>
+              <a:rPr sz="720" i="1">
+                <a:solidFill>
+                  <a:srgbClr val="0E1620"/>
+                </a:solidFill>
+                <a:latin typeface="Arial"/>
+              </a:rPr>
+              <a:t>The Review of Financial Studies, 28</a:t>
+            </a:r>
+            <a:r>
+              <a:rPr sz="720" i="0">
+                <a:solidFill>
+                  <a:srgbClr val="0E1620"/>
+                </a:solidFill>
+                <a:latin typeface="Arial"/>
+              </a:rPr>
+              <a:t>(10), 2723–2769. https://doi.org/10.1093/rfs/hhv037</a:t>
+            </a:r>
+          </a:p>
+          <a:p>
+            <a:pPr marL="190200" indent="-190200">
+              <a:lnSpc>
+                <a:spcPct val="104000"/>
+              </a:lnSpc>
+              <a:spcAft>
+                <a:spcPts val="550"/>
+              </a:spcAft>
+            </a:pPr>
+            <a:r>
+              <a:rPr sz="720" i="0">
+                <a:solidFill>
+                  <a:srgbClr val="0E1620"/>
+                </a:solidFill>
+                <a:latin typeface="Arial"/>
+              </a:rPr>
+              <a:t>Klein, A., &amp; Zur, E. (2009). Entrepreneurial shareholder activism: Hedge funds and other private investors. </a:t>
+            </a:r>
+            <a:r>
+              <a:rPr sz="720" i="1">
+                <a:solidFill>
+                  <a:srgbClr val="0E1620"/>
+                </a:solidFill>
+                <a:latin typeface="Arial"/>
+              </a:rPr>
+              <a:t>The Journal of Finance, 64</a:t>
+            </a:r>
+            <a:r>
+              <a:rPr sz="720" i="0">
+                <a:solidFill>
+                  <a:srgbClr val="0E1620"/>
+                </a:solidFill>
+                <a:latin typeface="Arial"/>
+              </a:rPr>
+              <a:t>(1), 187–229. https://doi.org/10.1111/j.1540-6261.2008.01432.x</a:t>
+            </a:r>
+          </a:p>
+        </p:txBody>
+      </p:sp>
+      <p:sp>
+        <p:nvSpPr>
+          <p:cNvPr id="11" name="TextBox 10"/>
+          <p:cNvSpPr txBox="1"/>
+          <p:nvPr/>
+        </p:nvSpPr>
+        <p:spPr>
+          <a:xfrm>
+            <a:off x="5084191" y="1706880"/>
+            <a:ext cx="4279499" cy="292608"/>
+          </a:xfrm>
+          <a:prstGeom prst="rect">
+            <a:avLst/>
+          </a:prstGeom>
+          <a:noFill/>
+        </p:spPr>
+        <p:txBody>
+          <a:bodyPr wrap="square" anchor="t" lIns="0" rIns="0" tIns="0" bIns="0">
+            <a:spAutoFit/>
+          </a:bodyPr>
+          <a:lstStyle/>
+          <a:p>
+            <a:pPr algn="l">
+              <a:lnSpc>
+                <a:spcPct val="110000"/>
+              </a:lnSpc>
+              <a:spcAft>
+                <a:spcPts val="0"/>
+              </a:spcAft>
+            </a:pPr>
+            <a:r>
+              <a:rPr sz="919" b="1" i="0">
+                <a:solidFill>
+                  <a:srgbClr val="314359"/>
+                </a:solidFill>
+                <a:latin typeface="Arial"/>
+              </a:rPr>
+              <a:t>PRIVATE EQUITY RISK &amp; RETURN (PART II)</a:t>
+            </a:r>
+          </a:p>
+        </p:txBody>
+      </p:sp>
+      <p:sp>
+        <p:nvSpPr>
+          <p:cNvPr id="12" name="TextBox 11"/>
+          <p:cNvSpPr txBox="1"/>
+          <p:nvPr/>
+        </p:nvSpPr>
+        <p:spPr>
+          <a:xfrm>
+            <a:off x="5084191" y="2067763"/>
+            <a:ext cx="4279499" cy="4876800"/>
+          </a:xfrm>
+          <a:prstGeom prst="rect">
+            <a:avLst/>
+          </a:prstGeom>
+          <a:noFill/>
+        </p:spPr>
+        <p:txBody>
+          <a:bodyPr wrap="square" anchor="t" lIns="0" rIns="0" tIns="0" bIns="0">
+            <a:spAutoFit/>
+          </a:bodyPr>
+          <a:lstStyle/>
+          <a:p>
+            <a:pPr marL="190200" indent="-190200">
+              <a:lnSpc>
+                <a:spcPct val="104000"/>
+              </a:lnSpc>
+              <a:spcAft>
+                <a:spcPts val="550"/>
+              </a:spcAft>
+            </a:pPr>
+            <a:r>
+              <a:rPr sz="680" i="0">
+                <a:solidFill>
+                  <a:srgbClr val="0E1620"/>
+                </a:solidFill>
+                <a:latin typeface="Arial"/>
+              </a:rPr>
+              <a:t>Ang, A., Chen, B., Goetzmann, W. N., &amp; Phalippou, L. (2018). Estimating private equity returns from limited partner cash flows. </a:t>
+            </a:r>
+            <a:r>
+              <a:rPr sz="680" i="1">
+                <a:solidFill>
+                  <a:srgbClr val="0E1620"/>
+                </a:solidFill>
+                <a:latin typeface="Arial"/>
+              </a:rPr>
+              <a:t>The Journal of Finance, 73</a:t>
+            </a:r>
+            <a:r>
+              <a:rPr sz="680" i="0">
+                <a:solidFill>
+                  <a:srgbClr val="0E1620"/>
+                </a:solidFill>
+                <a:latin typeface="Arial"/>
+              </a:rPr>
+              <a:t>(4), 1751–1783. https://doi.org/10.1111/jofi.12688</a:t>
+            </a:r>
+          </a:p>
+          <a:p>
+            <a:pPr marL="190200" indent="-190200">
+              <a:lnSpc>
+                <a:spcPct val="104000"/>
+              </a:lnSpc>
+              <a:spcAft>
+                <a:spcPts val="550"/>
+              </a:spcAft>
+            </a:pPr>
+            <a:r>
+              <a:rPr sz="680" i="0">
+                <a:solidFill>
+                  <a:srgbClr val="0E1620"/>
+                </a:solidFill>
+                <a:latin typeface="Arial"/>
+              </a:rPr>
+              <a:t>Boyer, B. H., Nadauld, T. D., Vorkink, K. P., &amp; Weisbach, M. S. (2018). Private equity indices based on secondary market transactions. </a:t>
+            </a:r>
+            <a:r>
+              <a:rPr sz="680" i="1">
+                <a:solidFill>
+                  <a:srgbClr val="0E1620"/>
+                </a:solidFill>
+                <a:latin typeface="Arial"/>
+              </a:rPr>
+              <a:t>SSRN Electronic Journal</a:t>
+            </a:r>
+            <a:r>
+              <a:rPr sz="680" i="0">
+                <a:solidFill>
+                  <a:srgbClr val="0E1620"/>
+                </a:solidFill>
+                <a:latin typeface="Arial"/>
+              </a:rPr>
+              <a:t>. https://doi.org/10.2139/ssrn.3272357</a:t>
+            </a:r>
+          </a:p>
+          <a:p>
+            <a:pPr marL="190200" indent="-190200">
+              <a:lnSpc>
+                <a:spcPct val="104000"/>
+              </a:lnSpc>
+              <a:spcAft>
+                <a:spcPts val="550"/>
+              </a:spcAft>
+            </a:pPr>
+            <a:r>
+              <a:rPr sz="680" i="0">
+                <a:solidFill>
+                  <a:srgbClr val="0E1620"/>
+                </a:solidFill>
+                <a:latin typeface="Arial"/>
+              </a:rPr>
+              <a:t>Buchner, A., Kaserer, C., &amp; Wagner, N. F. (2010). Private equity funds: Valuation, systematic risk and illiquidity. </a:t>
+            </a:r>
+            <a:r>
+              <a:rPr sz="680" i="1">
+                <a:solidFill>
+                  <a:srgbClr val="0E1620"/>
+                </a:solidFill>
+                <a:latin typeface="Arial"/>
+              </a:rPr>
+              <a:t>SSRN Electronic Journal</a:t>
+            </a:r>
+            <a:r>
+              <a:rPr sz="680" i="0">
+                <a:solidFill>
+                  <a:srgbClr val="0E1620"/>
+                </a:solidFill>
+                <a:latin typeface="Arial"/>
+              </a:rPr>
+              <a:t>. https://doi.org/10.2139/ssrn.1102471</a:t>
+            </a:r>
+          </a:p>
+          <a:p>
+            <a:pPr marL="190200" indent="-190200">
+              <a:lnSpc>
+                <a:spcPct val="104000"/>
+              </a:lnSpc>
+              <a:spcAft>
+                <a:spcPts val="550"/>
+              </a:spcAft>
+            </a:pPr>
+            <a:r>
+              <a:rPr sz="680" i="0">
+                <a:solidFill>
+                  <a:srgbClr val="0E1620"/>
+                </a:solidFill>
+                <a:latin typeface="Arial"/>
+              </a:rPr>
+              <a:t>Couts, S., Gonçalves, A. S., &amp; Rossi, A. (2020). Unsmoothing returns of illiquid funds. </a:t>
+            </a:r>
+            <a:r>
+              <a:rPr sz="680" i="1">
+                <a:solidFill>
+                  <a:srgbClr val="0E1620"/>
+                </a:solidFill>
+                <a:latin typeface="Arial"/>
+              </a:rPr>
+              <a:t>SSRN Electronic Journal</a:t>
+            </a:r>
+            <a:r>
+              <a:rPr sz="680" i="0">
+                <a:solidFill>
+                  <a:srgbClr val="0E1620"/>
+                </a:solidFill>
+                <a:latin typeface="Arial"/>
+              </a:rPr>
+              <a:t>. https://doi.org/10.2139/ssrn.3544854</a:t>
+            </a:r>
+          </a:p>
+          <a:p>
+            <a:pPr marL="190200" indent="-190200">
+              <a:lnSpc>
+                <a:spcPct val="104000"/>
+              </a:lnSpc>
+              <a:spcAft>
+                <a:spcPts val="550"/>
+              </a:spcAft>
+            </a:pPr>
+            <a:r>
+              <a:rPr sz="680" i="0">
+                <a:solidFill>
+                  <a:srgbClr val="0E1620"/>
+                </a:solidFill>
+                <a:latin typeface="Arial"/>
+              </a:rPr>
+              <a:t>Getmansky, M., Lo, A. W., &amp; Makarov, I. (2004). An econometric model of serial correlation and illiquidity in hedge fund returns. </a:t>
+            </a:r>
+            <a:r>
+              <a:rPr sz="680" i="1">
+                <a:solidFill>
+                  <a:srgbClr val="0E1620"/>
+                </a:solidFill>
+                <a:latin typeface="Arial"/>
+              </a:rPr>
+              <a:t>Journal of Financial Economics, 74</a:t>
+            </a:r>
+            <a:r>
+              <a:rPr sz="680" i="0">
+                <a:solidFill>
+                  <a:srgbClr val="0E1620"/>
+                </a:solidFill>
+                <a:latin typeface="Arial"/>
+              </a:rPr>
+              <a:t>(3), 529–609. https://doi.org/10.1016/j.jfineco.2004.04.001</a:t>
+            </a:r>
+          </a:p>
+          <a:p>
+            <a:pPr marL="190200" indent="-190200">
+              <a:lnSpc>
+                <a:spcPct val="104000"/>
+              </a:lnSpc>
+              <a:spcAft>
+                <a:spcPts val="550"/>
+              </a:spcAft>
+            </a:pPr>
+            <a:r>
+              <a:rPr sz="680" i="0">
+                <a:solidFill>
+                  <a:srgbClr val="0E1620"/>
+                </a:solidFill>
+                <a:latin typeface="Arial"/>
+              </a:rPr>
+              <a:t>Harris, R. S., Jenkinson, T., &amp; Kaplan, S. N. (2014). Private equity performance: What do we know? </a:t>
+            </a:r>
+            <a:r>
+              <a:rPr sz="680" i="1">
+                <a:solidFill>
+                  <a:srgbClr val="0E1620"/>
+                </a:solidFill>
+                <a:latin typeface="Arial"/>
+              </a:rPr>
+              <a:t>The Journal of Finance, 69</a:t>
+            </a:r>
+            <a:r>
+              <a:rPr sz="680" i="0">
+                <a:solidFill>
+                  <a:srgbClr val="0E1620"/>
+                </a:solidFill>
+                <a:latin typeface="Arial"/>
+              </a:rPr>
+              <a:t>(5), 1851–1882. https://doi.org/10.1111/jofi.12154</a:t>
+            </a:r>
+          </a:p>
+          <a:p>
+            <a:pPr marL="190200" indent="-190200">
+              <a:lnSpc>
+                <a:spcPct val="104000"/>
+              </a:lnSpc>
+              <a:spcAft>
+                <a:spcPts val="550"/>
+              </a:spcAft>
+            </a:pPr>
+            <a:r>
+              <a:rPr sz="680" i="0">
+                <a:solidFill>
+                  <a:srgbClr val="0E1620"/>
+                </a:solidFill>
+                <a:latin typeface="Arial"/>
+              </a:rPr>
+              <a:t>Hayley, S., &amp; Sefiloglu, O. (2022). Biases in private equity returns. </a:t>
+            </a:r>
+            <a:r>
+              <a:rPr sz="680" i="1">
+                <a:solidFill>
+                  <a:srgbClr val="0E1620"/>
+                </a:solidFill>
+                <a:latin typeface="Arial"/>
+              </a:rPr>
+              <a:t>SSRN Electronic Journal</a:t>
+            </a:r>
+            <a:r>
+              <a:rPr sz="680" i="0">
+                <a:solidFill>
+                  <a:srgbClr val="0E1620"/>
+                </a:solidFill>
+                <a:latin typeface="Arial"/>
+              </a:rPr>
+              <a:t>. https://doi.org/10.2139/ssrn.4245715</a:t>
+            </a:r>
+          </a:p>
+          <a:p>
+            <a:pPr marL="190200" indent="-190200">
+              <a:lnSpc>
+                <a:spcPct val="104000"/>
+              </a:lnSpc>
+              <a:spcAft>
+                <a:spcPts val="550"/>
+              </a:spcAft>
+            </a:pPr>
+            <a:r>
+              <a:rPr sz="680" i="0">
+                <a:solidFill>
+                  <a:srgbClr val="0E1620"/>
+                </a:solidFill>
+                <a:latin typeface="Arial"/>
+              </a:rPr>
+              <a:t>Jackson, B., Ling, D. C., &amp; Naranjo, A. (2022). Catering and return manipulation in private equity. </a:t>
+            </a:r>
+            <a:r>
+              <a:rPr sz="680" i="1">
+                <a:solidFill>
+                  <a:srgbClr val="0E1620"/>
+                </a:solidFill>
+                <a:latin typeface="Arial"/>
+              </a:rPr>
+              <a:t>SSRN Electronic Journal</a:t>
+            </a:r>
+            <a:r>
+              <a:rPr sz="680" i="0">
+                <a:solidFill>
+                  <a:srgbClr val="0E1620"/>
+                </a:solidFill>
+                <a:latin typeface="Arial"/>
+              </a:rPr>
+              <a:t>. https://doi.org/10.2139/ssrn.4244467</a:t>
+            </a:r>
+          </a:p>
+          <a:p>
+            <a:pPr marL="190200" indent="-190200">
+              <a:lnSpc>
+                <a:spcPct val="104000"/>
+              </a:lnSpc>
+              <a:spcAft>
+                <a:spcPts val="550"/>
+              </a:spcAft>
+            </a:pPr>
+            <a:r>
+              <a:rPr sz="680" i="0">
+                <a:solidFill>
+                  <a:srgbClr val="0E1620"/>
+                </a:solidFill>
+                <a:latin typeface="Arial"/>
+              </a:rPr>
+              <a:t>Meyer, T. (2020). Hidden in plain sight — the impact of undrawn commitments. </a:t>
+            </a:r>
+            <a:r>
+              <a:rPr sz="680" i="1">
+                <a:solidFill>
+                  <a:srgbClr val="0E1620"/>
+                </a:solidFill>
+                <a:latin typeface="Arial"/>
+              </a:rPr>
+              <a:t>The Journal of Alternative Investments, 23</a:t>
+            </a:r>
+            <a:r>
+              <a:rPr sz="680" i="0">
+                <a:solidFill>
+                  <a:srgbClr val="0E1620"/>
+                </a:solidFill>
+                <a:latin typeface="Arial"/>
+              </a:rPr>
+              <a:t>(2), 94–110. https://doi.org/10.3905/jai.2020.1.101</a:t>
+            </a:r>
+          </a:p>
+          <a:p>
+            <a:pPr marL="190200" indent="-190200">
+              <a:lnSpc>
+                <a:spcPct val="104000"/>
+              </a:lnSpc>
+              <a:spcAft>
+                <a:spcPts val="550"/>
+              </a:spcAft>
+            </a:pPr>
+            <a:r>
+              <a:rPr sz="680" i="0">
+                <a:solidFill>
+                  <a:srgbClr val="0E1620"/>
+                </a:solidFill>
+                <a:latin typeface="Arial"/>
+              </a:rPr>
+              <a:t>Phalippou, L. (2020). An inconvenient fact: Private equity returns and the billionaire factory. </a:t>
+            </a:r>
+            <a:r>
+              <a:rPr sz="680" i="1">
+                <a:solidFill>
+                  <a:srgbClr val="0E1620"/>
+                </a:solidFill>
+                <a:latin typeface="Arial"/>
+              </a:rPr>
+              <a:t>The Journal of Investing, 30</a:t>
+            </a:r>
+            <a:r>
+              <a:rPr sz="680" i="0">
+                <a:solidFill>
+                  <a:srgbClr val="0E1620"/>
+                </a:solidFill>
+                <a:latin typeface="Arial"/>
+              </a:rPr>
+              <a:t>(1), 11–39. https://doi.org/10.3905/joi.2020.1.153</a:t>
             </a:r>
           </a:p>
         </p:txBody>
@@ -45193,6 +52680,929 @@
                 <a:latin typeface="Arial"/>
               </a:rPr>
               <a:t>  Returns tied to a specific change at a specific company — scarce in a beta-dominated portfolio.</a:t>
+            </a:r>
+          </a:p>
+        </p:txBody>
+      </p:sp>
+    </p:spTree>
+  </p:cSld>
+  <p:clrMapOvr>
+    <a:masterClrMapping/>
+  </p:clrMapOvr>
+</p:sld>
+</file>
+
+<file path=ppt/slides/slide40.xml><?xml version="1.0" encoding="utf-8"?>
+<p:sld xmlns:a="http://schemas.openxmlformats.org/drawingml/2006/main" xmlns:p="http://schemas.openxmlformats.org/presentationml/2006/main" xmlns:r="http://schemas.openxmlformats.org/officeDocument/2006/relationships">
+  <p:cSld>
+    <p:spTree>
+      <p:nvGrpSpPr>
+        <p:cNvPr id="1" name=""/>
+        <p:cNvGrpSpPr/>
+        <p:nvPr/>
+      </p:nvGrpSpPr>
+      <p:grpSpPr/>
+      <p:sp>
+        <p:nvSpPr>
+          <p:cNvPr id="2" name="Rectangle 1"/>
+          <p:cNvSpPr/>
+          <p:nvPr/>
+        </p:nvSpPr>
+        <p:spPr>
+          <a:xfrm>
+            <a:off x="0" y="0"/>
+            <a:ext cx="9753600" cy="7315200"/>
+          </a:xfrm>
+          <a:prstGeom prst="rect">
+            <a:avLst/>
+          </a:prstGeom>
+          <a:solidFill>
+            <a:srgbClr val="FFFFFF"/>
+          </a:solidFill>
+          <a:ln>
+            <a:noFill/>
+          </a:ln>
+          <a:effectLst/>
+        </p:spPr>
+        <p:style>
+          <a:lnRef idx="1">
+            <a:schemeClr val="accent1"/>
+          </a:lnRef>
+          <a:fillRef idx="3">
+            <a:schemeClr val="accent1"/>
+          </a:fillRef>
+          <a:effectRef idx="2">
+            <a:schemeClr val="accent1"/>
+          </a:effectRef>
+          <a:fontRef idx="minor">
+            <a:schemeClr val="lt1"/>
+          </a:fontRef>
+        </p:style>
+        <p:txBody>
+          <a:bodyPr rtlCol="0" anchor="ctr"/>
+          <a:lstStyle/>
+          <a:p>
+            <a:pPr algn="ctr"/>
+          </a:p>
+        </p:txBody>
+      </p:sp>
+      <p:pic>
+        <p:nvPicPr>
+          <p:cNvPr id="3" name="Picture 2" descr="mark_dark.png"/>
+          <p:cNvPicPr>
+            <a:picLocks noChangeAspect="1"/>
+          </p:cNvPicPr>
+          <p:nvPr/>
+        </p:nvPicPr>
+        <p:blipFill>
+          <a:blip r:embed="rId2"/>
+          <a:stretch>
+            <a:fillRect/>
+          </a:stretch>
+        </p:blipFill>
+        <p:spPr>
+          <a:xfrm>
+            <a:off x="402346" y="234086"/>
+            <a:ext cx="224012" cy="190199"/>
+          </a:xfrm>
+          <a:prstGeom prst="rect">
+            <a:avLst/>
+          </a:prstGeom>
+        </p:spPr>
+      </p:pic>
+      <p:sp>
+        <p:nvSpPr>
+          <p:cNvPr id="4" name="TextBox 3"/>
+          <p:cNvSpPr txBox="1"/>
+          <p:nvPr/>
+        </p:nvSpPr>
+        <p:spPr>
+          <a:xfrm>
+            <a:off x="716907" y="263347"/>
+            <a:ext cx="5120768" cy="292608"/>
+          </a:xfrm>
+          <a:prstGeom prst="rect">
+            <a:avLst/>
+          </a:prstGeom>
+          <a:noFill/>
+        </p:spPr>
+        <p:txBody>
+          <a:bodyPr wrap="square" anchor="t" lIns="0" rIns="0" tIns="0" bIns="0">
+            <a:spAutoFit/>
+          </a:bodyPr>
+          <a:lstStyle/>
+          <a:p>
+            <a:pPr algn="l">
+              <a:lnSpc>
+                <a:spcPct val="110000"/>
+              </a:lnSpc>
+              <a:spcAft>
+                <a:spcPts val="0"/>
+              </a:spcAft>
+            </a:pPr>
+            <a:r>
+              <a:rPr sz="880" b="0" i="0">
+                <a:solidFill>
+                  <a:srgbClr val="556A83"/>
+                </a:solidFill>
+                <a:latin typeface="Arial"/>
+              </a:rPr>
+              <a:t>References</a:t>
+            </a:r>
+          </a:p>
+        </p:txBody>
+      </p:sp>
+      <p:sp>
+        <p:nvSpPr>
+          <p:cNvPr id="5" name="TextBox 4"/>
+          <p:cNvSpPr txBox="1"/>
+          <p:nvPr/>
+        </p:nvSpPr>
+        <p:spPr>
+          <a:xfrm>
+            <a:off x="6876460" y="263347"/>
+            <a:ext cx="2450653" cy="292608"/>
+          </a:xfrm>
+          <a:prstGeom prst="rect">
+            <a:avLst/>
+          </a:prstGeom>
+          <a:noFill/>
+        </p:spPr>
+        <p:txBody>
+          <a:bodyPr wrap="square" anchor="t" lIns="0" rIns="0" tIns="0" bIns="0">
+            <a:spAutoFit/>
+          </a:bodyPr>
+          <a:lstStyle/>
+          <a:p>
+            <a:pPr algn="r">
+              <a:lnSpc>
+                <a:spcPct val="110000"/>
+              </a:lnSpc>
+              <a:spcAft>
+                <a:spcPts val="0"/>
+              </a:spcAft>
+            </a:pPr>
+            <a:r>
+              <a:rPr sz="880" b="1" i="0">
+                <a:solidFill>
+                  <a:srgbClr val="556A83"/>
+                </a:solidFill>
+                <a:latin typeface="Arial"/>
+              </a:rPr>
+              <a:t>2 of 2</a:t>
+            </a:r>
+          </a:p>
+        </p:txBody>
+      </p:sp>
+      <p:sp>
+        <p:nvSpPr>
+          <p:cNvPr id="6" name="Rectangle 5"/>
+          <p:cNvSpPr/>
+          <p:nvPr/>
+        </p:nvSpPr>
+        <p:spPr>
+          <a:xfrm>
+            <a:off x="0" y="604723"/>
+            <a:ext cx="9753600" cy="897331"/>
+          </a:xfrm>
+          <a:prstGeom prst="rect">
+            <a:avLst/>
+          </a:prstGeom>
+          <a:solidFill>
+            <a:srgbClr val="F6F7F9"/>
+          </a:solidFill>
+          <a:ln>
+            <a:noFill/>
+          </a:ln>
+          <a:effectLst/>
+        </p:spPr>
+        <p:style>
+          <a:lnRef idx="1">
+            <a:schemeClr val="accent1"/>
+          </a:lnRef>
+          <a:fillRef idx="3">
+            <a:schemeClr val="accent1"/>
+          </a:fillRef>
+          <a:effectRef idx="2">
+            <a:schemeClr val="accent1"/>
+          </a:effectRef>
+          <a:fontRef idx="minor">
+            <a:schemeClr val="lt1"/>
+          </a:fontRef>
+        </p:style>
+        <p:txBody>
+          <a:bodyPr rtlCol="0" anchor="ctr"/>
+          <a:lstStyle/>
+          <a:p>
+            <a:pPr algn="ctr"/>
+          </a:p>
+        </p:txBody>
+      </p:sp>
+      <p:sp>
+        <p:nvSpPr>
+          <p:cNvPr id="7" name="TextBox 6"/>
+          <p:cNvSpPr txBox="1"/>
+          <p:nvPr/>
+        </p:nvSpPr>
+        <p:spPr>
+          <a:xfrm>
+            <a:off x="438922" y="702259"/>
+            <a:ext cx="8851613" cy="682752"/>
+          </a:xfrm>
+          <a:prstGeom prst="rect">
+            <a:avLst/>
+          </a:prstGeom>
+          <a:noFill/>
+        </p:spPr>
+        <p:txBody>
+          <a:bodyPr wrap="square" anchor="t" lIns="0" rIns="0" tIns="0" bIns="0">
+            <a:spAutoFit/>
+          </a:bodyPr>
+          <a:lstStyle/>
+          <a:p>
+            <a:pPr algn="l">
+              <a:lnSpc>
+                <a:spcPct val="110000"/>
+              </a:lnSpc>
+              <a:spcAft>
+                <a:spcPts val="0"/>
+              </a:spcAft>
+            </a:pPr>
+            <a:r>
+              <a:rPr sz="2080" b="0" i="0" spc="-78">
+                <a:solidFill>
+                  <a:srgbClr val="314359"/>
+                </a:solidFill>
+                <a:latin typeface="Times New Roman"/>
+              </a:rPr>
+              <a:t>References &amp; Methodology — Datasets, practitioner research &amp; methodology</a:t>
+            </a:r>
+          </a:p>
+        </p:txBody>
+      </p:sp>
+      <p:sp>
+        <p:nvSpPr>
+          <p:cNvPr id="8" name="TextBox 7"/>
+          <p:cNvSpPr txBox="1"/>
+          <p:nvPr/>
+        </p:nvSpPr>
+        <p:spPr>
+          <a:xfrm>
+            <a:off x="6583844" y="6876288"/>
+            <a:ext cx="2926153" cy="292608"/>
+          </a:xfrm>
+          <a:prstGeom prst="rect">
+            <a:avLst/>
+          </a:prstGeom>
+          <a:noFill/>
+        </p:spPr>
+        <p:txBody>
+          <a:bodyPr wrap="square" anchor="t" lIns="0" rIns="0" tIns="0" bIns="0">
+            <a:spAutoFit/>
+          </a:bodyPr>
+          <a:lstStyle/>
+          <a:p>
+            <a:pPr algn="r">
+              <a:lnSpc>
+                <a:spcPct val="110000"/>
+              </a:lnSpc>
+              <a:spcAft>
+                <a:spcPts val="0"/>
+              </a:spcAft>
+            </a:pPr>
+            <a:r>
+              <a:rPr sz="680" b="0" i="0">
+                <a:solidFill>
+                  <a:srgbClr val="556A83"/>
+                </a:solidFill>
+                <a:latin typeface="Arial"/>
+              </a:rPr>
+              <a:t>Strictly confidential          36</a:t>
+            </a:r>
+          </a:p>
+        </p:txBody>
+      </p:sp>
+      <p:sp>
+        <p:nvSpPr>
+          <p:cNvPr id="9" name="TextBox 8"/>
+          <p:cNvSpPr txBox="1"/>
+          <p:nvPr/>
+        </p:nvSpPr>
+        <p:spPr>
+          <a:xfrm>
+            <a:off x="438922" y="1706880"/>
+            <a:ext cx="4389229" cy="292608"/>
+          </a:xfrm>
+          <a:prstGeom prst="rect">
+            <a:avLst/>
+          </a:prstGeom>
+          <a:noFill/>
+        </p:spPr>
+        <p:txBody>
+          <a:bodyPr wrap="square" anchor="t" lIns="0" rIns="0" tIns="0" bIns="0">
+            <a:spAutoFit/>
+          </a:bodyPr>
+          <a:lstStyle/>
+          <a:p>
+            <a:pPr algn="l">
+              <a:lnSpc>
+                <a:spcPct val="110000"/>
+              </a:lnSpc>
+              <a:spcAft>
+                <a:spcPts val="0"/>
+              </a:spcAft>
+            </a:pPr>
+            <a:r>
+              <a:rPr sz="919" b="1" i="0">
+                <a:solidFill>
+                  <a:srgbClr val="314359"/>
+                </a:solidFill>
+                <a:latin typeface="Arial"/>
+              </a:rPr>
+              <a:t>INDUSTRY DATASETS &amp; PRACTITIONER RESEARCH</a:t>
+            </a:r>
+          </a:p>
+        </p:txBody>
+      </p:sp>
+      <p:sp>
+        <p:nvSpPr>
+          <p:cNvPr id="10" name="TextBox 9"/>
+          <p:cNvSpPr txBox="1"/>
+          <p:nvPr/>
+        </p:nvSpPr>
+        <p:spPr>
+          <a:xfrm>
+            <a:off x="438922" y="2067763"/>
+            <a:ext cx="4389229" cy="4876800"/>
+          </a:xfrm>
+          <a:prstGeom prst="rect">
+            <a:avLst/>
+          </a:prstGeom>
+          <a:noFill/>
+        </p:spPr>
+        <p:txBody>
+          <a:bodyPr wrap="square" anchor="t" lIns="0" rIns="0" tIns="0" bIns="0">
+            <a:spAutoFit/>
+          </a:bodyPr>
+          <a:lstStyle/>
+          <a:p>
+            <a:pPr marL="190200" indent="-190200">
+              <a:lnSpc>
+                <a:spcPct val="104000"/>
+              </a:lnSpc>
+              <a:spcAft>
+                <a:spcPts val="550"/>
+              </a:spcAft>
+            </a:pPr>
+            <a:r>
+              <a:rPr sz="680" i="0">
+                <a:solidFill>
+                  <a:srgbClr val="0E1620"/>
+                </a:solidFill>
+                <a:latin typeface="Arial"/>
+              </a:rPr>
+              <a:t>Asness, C. S. (2023). The volatility-laundering hidden in private-asset marks. </a:t>
+            </a:r>
+            <a:r>
+              <a:rPr sz="680" i="1">
+                <a:solidFill>
+                  <a:srgbClr val="0E1620"/>
+                </a:solidFill>
+                <a:latin typeface="Arial"/>
+              </a:rPr>
+              <a:t>AQR Capital Management — Cliff’s Perspectives.</a:t>
+            </a:r>
+          </a:p>
+          <a:p>
+            <a:pPr marL="190200" indent="-190200">
+              <a:lnSpc>
+                <a:spcPct val="104000"/>
+              </a:lnSpc>
+              <a:spcAft>
+                <a:spcPts val="550"/>
+              </a:spcAft>
+            </a:pPr>
+            <a:r>
+              <a:rPr sz="680" i="0">
+                <a:solidFill>
+                  <a:srgbClr val="0E1620"/>
+                </a:solidFill>
+                <a:latin typeface="Arial"/>
+              </a:rPr>
+              <a:t>British Private Equity &amp; Venture Capital Association &amp; Capital Dynamics. (2024). </a:t>
+            </a:r>
+            <a:r>
+              <a:rPr sz="680" i="1">
+                <a:solidFill>
+                  <a:srgbClr val="0E1620"/>
+                </a:solidFill>
+                <a:latin typeface="Arial"/>
+              </a:rPr>
+              <a:t>BVCA Private Equity Performance Measurement Survey (PME+).</a:t>
+            </a:r>
+            <a:r>
+              <a:rPr sz="680" i="0">
+                <a:solidFill>
+                  <a:srgbClr val="0E1620"/>
+                </a:solidFill>
+                <a:latin typeface="Arial"/>
+              </a:rPr>
+              <a:t> London: BVCA.</a:t>
+            </a:r>
+          </a:p>
+          <a:p>
+            <a:pPr marL="190200" indent="-190200">
+              <a:lnSpc>
+                <a:spcPct val="104000"/>
+              </a:lnSpc>
+              <a:spcAft>
+                <a:spcPts val="550"/>
+              </a:spcAft>
+            </a:pPr>
+            <a:r>
+              <a:rPr sz="680" i="0">
+                <a:solidFill>
+                  <a:srgbClr val="0E1620"/>
+                </a:solidFill>
+                <a:latin typeface="Arial"/>
+              </a:rPr>
+              <a:t>Cambridge Associates. (2024). </a:t>
+            </a:r>
+            <a:r>
+              <a:rPr sz="680" i="1">
+                <a:solidFill>
+                  <a:srgbClr val="0E1620"/>
+                </a:solidFill>
+                <a:latin typeface="Arial"/>
+              </a:rPr>
+              <a:t>US Private Equity Index and Selected Benchmark Statistics (Q2 2024).</a:t>
+            </a:r>
+            <a:r>
+              <a:rPr sz="680" i="0">
+                <a:solidFill>
+                  <a:srgbClr val="0E1620"/>
+                </a:solidFill>
+                <a:latin typeface="Arial"/>
+              </a:rPr>
+              <a:t> Boston: Cambridge Associates LLC.</a:t>
+            </a:r>
+          </a:p>
+          <a:p>
+            <a:pPr marL="190200" indent="-190200">
+              <a:lnSpc>
+                <a:spcPct val="104000"/>
+              </a:lnSpc>
+              <a:spcAft>
+                <a:spcPts val="550"/>
+              </a:spcAft>
+            </a:pPr>
+            <a:r>
+              <a:rPr sz="680" i="0">
+                <a:solidFill>
+                  <a:srgbClr val="0E1620"/>
+                </a:solidFill>
+                <a:latin typeface="Arial"/>
+              </a:rPr>
+              <a:t>Cliffwater LLC. (2023). </a:t>
+            </a:r>
+            <a:r>
+              <a:rPr sz="680" i="1">
+                <a:solidFill>
+                  <a:srgbClr val="0E1620"/>
+                </a:solidFill>
+                <a:latin typeface="Arial"/>
+              </a:rPr>
+              <a:t>Long-term private equity performance in US state pension plans (2000–2022).</a:t>
+            </a:r>
+            <a:r>
+              <a:rPr sz="680" i="0">
+                <a:solidFill>
+                  <a:srgbClr val="0E1620"/>
+                </a:solidFill>
+                <a:latin typeface="Arial"/>
+              </a:rPr>
+              <a:t> Marina del Rey: Cliffwater LLC.</a:t>
+            </a:r>
+          </a:p>
+          <a:p>
+            <a:pPr marL="190200" indent="-190200">
+              <a:lnSpc>
+                <a:spcPct val="104000"/>
+              </a:lnSpc>
+              <a:spcAft>
+                <a:spcPts val="550"/>
+              </a:spcAft>
+            </a:pPr>
+            <a:r>
+              <a:rPr sz="680" i="0">
+                <a:solidFill>
+                  <a:srgbClr val="0E1620"/>
+                </a:solidFill>
+                <a:latin typeface="Arial"/>
+              </a:rPr>
+              <a:t>Financial Reporting Council. (2020). </a:t>
+            </a:r>
+            <a:r>
+              <a:rPr sz="680" i="1">
+                <a:solidFill>
+                  <a:srgbClr val="0E1620"/>
+                </a:solidFill>
+                <a:latin typeface="Arial"/>
+              </a:rPr>
+              <a:t>The UK Stewardship Code 2020.</a:t>
+            </a:r>
+            <a:r>
+              <a:rPr sz="680" i="0">
+                <a:solidFill>
+                  <a:srgbClr val="0E1620"/>
+                </a:solidFill>
+                <a:latin typeface="Arial"/>
+              </a:rPr>
+              <a:t> London: FRC.</a:t>
+            </a:r>
+          </a:p>
+          <a:p>
+            <a:pPr marL="190200" indent="-190200">
+              <a:lnSpc>
+                <a:spcPct val="104000"/>
+              </a:lnSpc>
+              <a:spcAft>
+                <a:spcPts val="550"/>
+              </a:spcAft>
+            </a:pPr>
+            <a:r>
+              <a:rPr sz="680" i="0">
+                <a:solidFill>
+                  <a:srgbClr val="0E1620"/>
+                </a:solidFill>
+                <a:latin typeface="Arial"/>
+              </a:rPr>
+              <a:t>Morningstar. (2023). </a:t>
+            </a:r>
+            <a:r>
+              <a:rPr sz="680" i="1">
+                <a:solidFill>
+                  <a:srgbClr val="0E1620"/>
+                </a:solidFill>
+                <a:latin typeface="Arial"/>
+              </a:rPr>
+              <a:t>Volatility laundering: How private equity funds understate the risk of their investments.</a:t>
+            </a:r>
+            <a:r>
+              <a:rPr sz="680" i="0">
+                <a:solidFill>
+                  <a:srgbClr val="0E1620"/>
+                </a:solidFill>
+                <a:latin typeface="Arial"/>
+              </a:rPr>
+              <a:t> Chicago: Morningstar, Inc.</a:t>
+            </a:r>
+          </a:p>
+          <a:p>
+            <a:pPr marL="190200" indent="-190200">
+              <a:lnSpc>
+                <a:spcPct val="104000"/>
+              </a:lnSpc>
+              <a:spcAft>
+                <a:spcPts val="550"/>
+              </a:spcAft>
+            </a:pPr>
+            <a:r>
+              <a:rPr sz="680" i="0">
+                <a:solidFill>
+                  <a:srgbClr val="0E1620"/>
+                </a:solidFill>
+                <a:latin typeface="Arial"/>
+              </a:rPr>
+              <a:t>PIMCO. (2022). </a:t>
+            </a:r>
+            <a:r>
+              <a:rPr sz="680" i="1">
+                <a:solidFill>
+                  <a:srgbClr val="0E1620"/>
+                </a:solidFill>
+                <a:latin typeface="Arial"/>
+              </a:rPr>
+              <a:t>The discreet charm of private assets: De-smoothing and the true volatility of private equity.</a:t>
+            </a:r>
+            <a:r>
+              <a:rPr sz="680" i="0">
+                <a:solidFill>
+                  <a:srgbClr val="0E1620"/>
+                </a:solidFill>
+                <a:latin typeface="Arial"/>
+              </a:rPr>
+              <a:t> Newport Beach: PIMCO.</a:t>
+            </a:r>
+          </a:p>
+          <a:p>
+            <a:pPr marL="190200" indent="-190200">
+              <a:lnSpc>
+                <a:spcPct val="104000"/>
+              </a:lnSpc>
+              <a:spcAft>
+                <a:spcPts val="550"/>
+              </a:spcAft>
+            </a:pPr>
+            <a:r>
+              <a:rPr sz="680" i="0">
+                <a:solidFill>
+                  <a:srgbClr val="0E1620"/>
+                </a:solidFill>
+                <a:latin typeface="Arial"/>
+              </a:rPr>
+              <a:t>Principles for Responsible Investment. (2021). </a:t>
+            </a:r>
+            <a:r>
+              <a:rPr sz="680" i="1">
+                <a:solidFill>
+                  <a:srgbClr val="0E1620"/>
+                </a:solidFill>
+                <a:latin typeface="Arial"/>
+              </a:rPr>
+              <a:t>What are the Principles for Responsible Investment?</a:t>
+            </a:r>
+            <a:r>
+              <a:rPr sz="680" i="0">
+                <a:solidFill>
+                  <a:srgbClr val="0E1620"/>
+                </a:solidFill>
+                <a:latin typeface="Arial"/>
+              </a:rPr>
+              <a:t> London: UN PRI.</a:t>
+            </a:r>
+          </a:p>
+          <a:p>
+            <a:pPr marL="190200" indent="-190200">
+              <a:lnSpc>
+                <a:spcPct val="104000"/>
+              </a:lnSpc>
+              <a:spcAft>
+                <a:spcPts val="550"/>
+              </a:spcAft>
+            </a:pPr>
+            <a:r>
+              <a:rPr sz="680" i="0">
+                <a:solidFill>
+                  <a:srgbClr val="0E1620"/>
+                </a:solidFill>
+                <a:latin typeface="Arial"/>
+              </a:rPr>
+              <a:t>Two Sigma Investments. (2024). </a:t>
+            </a:r>
+            <a:r>
+              <a:rPr sz="680" i="1">
+                <a:solidFill>
+                  <a:srgbClr val="0E1620"/>
+                </a:solidFill>
+                <a:latin typeface="Arial"/>
+              </a:rPr>
+              <a:t>The alternative truth of private equity (Venn by Two Sigma).</a:t>
+            </a:r>
+            <a:r>
+              <a:rPr sz="680" i="0">
+                <a:solidFill>
+                  <a:srgbClr val="0E1620"/>
+                </a:solidFill>
+                <a:latin typeface="Arial"/>
+              </a:rPr>
+              <a:t> New York: Two Sigma.</a:t>
+            </a:r>
+          </a:p>
+        </p:txBody>
+      </p:sp>
+      <p:sp>
+        <p:nvSpPr>
+          <p:cNvPr id="11" name="TextBox 10"/>
+          <p:cNvSpPr txBox="1"/>
+          <p:nvPr/>
+        </p:nvSpPr>
+        <p:spPr>
+          <a:xfrm>
+            <a:off x="5084191" y="1706880"/>
+            <a:ext cx="4279499" cy="292608"/>
+          </a:xfrm>
+          <a:prstGeom prst="rect">
+            <a:avLst/>
+          </a:prstGeom>
+          <a:noFill/>
+        </p:spPr>
+        <p:txBody>
+          <a:bodyPr wrap="square" anchor="t" lIns="0" rIns="0" tIns="0" bIns="0">
+            <a:spAutoFit/>
+          </a:bodyPr>
+          <a:lstStyle/>
+          <a:p>
+            <a:pPr algn="l">
+              <a:lnSpc>
+                <a:spcPct val="110000"/>
+              </a:lnSpc>
+              <a:spcAft>
+                <a:spcPts val="0"/>
+              </a:spcAft>
+            </a:pPr>
+            <a:r>
+              <a:rPr sz="919" b="1" i="0">
+                <a:solidFill>
+                  <a:srgbClr val="314359"/>
+                </a:solidFill>
+                <a:latin typeface="Arial"/>
+              </a:rPr>
+              <a:t>DATA &amp; METHODOLOGY</a:t>
+            </a:r>
+          </a:p>
+        </p:txBody>
+      </p:sp>
+      <p:sp>
+        <p:nvSpPr>
+          <p:cNvPr id="12" name="TextBox 11"/>
+          <p:cNvSpPr txBox="1"/>
+          <p:nvPr/>
+        </p:nvSpPr>
+        <p:spPr>
+          <a:xfrm>
+            <a:off x="5084191" y="2067763"/>
+            <a:ext cx="4279499" cy="4486656"/>
+          </a:xfrm>
+          <a:prstGeom prst="rect">
+            <a:avLst/>
+          </a:prstGeom>
+          <a:noFill/>
+        </p:spPr>
+        <p:txBody>
+          <a:bodyPr wrap="square" anchor="t" lIns="0" rIns="0" tIns="0" bIns="0">
+            <a:spAutoFit/>
+          </a:bodyPr>
+          <a:lstStyle/>
+          <a:p>
+            <a:pPr algn="l">
+              <a:lnSpc>
+                <a:spcPct val="115000"/>
+              </a:lnSpc>
+              <a:spcAft>
+                <a:spcPts val="600"/>
+              </a:spcAft>
+            </a:pPr>
+            <a:r>
+              <a:rPr sz="760" b="0" i="0">
+                <a:solidFill>
+                  <a:srgbClr val="0E1620"/>
+                </a:solidFill>
+                <a:latin typeface="Arial"/>
+              </a:rPr>
+              <a:t>All Athanase figures are computed from the fund’s audited net monthly return series (235 months, 2006–2025):</a:t>
+            </a:r>
+          </a:p>
+          <a:p>
+            <a:pPr marL="117046" indent="-117046">
+              <a:lnSpc>
+                <a:spcPct val="112000"/>
+              </a:lnSpc>
+              <a:spcAft>
+                <a:spcPts val="400"/>
+              </a:spcAft>
+            </a:pPr>
+            <a:r>
+              <a:rPr sz="720">
+                <a:solidFill>
+                  <a:srgbClr val="0E1620"/>
+                </a:solidFill>
+                <a:latin typeface="Arial"/>
+              </a:rPr>
+              <a:t>•  Annualised return — geometric compounding of monthly net returns (16.0%).</a:t>
+            </a:r>
+          </a:p>
+          <a:p>
+            <a:pPr marL="117046" indent="-117046">
+              <a:lnSpc>
+                <a:spcPct val="112000"/>
+              </a:lnSpc>
+              <a:spcAft>
+                <a:spcPts val="400"/>
+              </a:spcAft>
+            </a:pPr>
+            <a:r>
+              <a:rPr sz="720">
+                <a:solidFill>
+                  <a:srgbClr val="0E1620"/>
+                </a:solidFill>
+                <a:latin typeface="Arial"/>
+              </a:rPr>
+              <a:t>•  Total volatility — st. dev. of monthly returns × √12 (27.0%).</a:t>
+            </a:r>
+          </a:p>
+          <a:p>
+            <a:pPr marL="117046" indent="-117046">
+              <a:lnSpc>
+                <a:spcPct val="112000"/>
+              </a:lnSpc>
+              <a:spcAft>
+                <a:spcPts val="400"/>
+              </a:spcAft>
+            </a:pPr>
+            <a:r>
+              <a:rPr sz="720">
+                <a:solidFill>
+                  <a:srgbClr val="0E1620"/>
+                </a:solidFill>
+                <a:latin typeface="Arial"/>
+              </a:rPr>
+              <a:t>•  Downside volatility — deviation of negative months below a 0% MAR × √12 (10.9%).</a:t>
+            </a:r>
+          </a:p>
+          <a:p>
+            <a:pPr marL="117046" indent="-117046">
+              <a:lnSpc>
+                <a:spcPct val="112000"/>
+              </a:lnSpc>
+              <a:spcAft>
+                <a:spcPts val="400"/>
+              </a:spcAft>
+            </a:pPr>
+            <a:r>
+              <a:rPr sz="720">
+                <a:solidFill>
+                  <a:srgbClr val="0E1620"/>
+                </a:solidFill>
+                <a:latin typeface="Arial"/>
+              </a:rPr>
+              <a:t>•  Correlation / beta — versus MSCI World IMI over the common period (0.44 / 0.73).</a:t>
+            </a:r>
+          </a:p>
+          <a:p>
+            <a:pPr marL="117046" indent="-117046">
+              <a:lnSpc>
+                <a:spcPct val="112000"/>
+              </a:lnSpc>
+              <a:spcAft>
+                <a:spcPts val="400"/>
+              </a:spcAft>
+            </a:pPr>
+            <a:r>
+              <a:rPr sz="720">
+                <a:solidFill>
+                  <a:srgbClr val="0E1620"/>
+                </a:solidFill>
+                <a:latin typeface="Arial"/>
+              </a:rPr>
+              <a:t>•  Large-loss frequency — share of rolling 36-month windows below −30% (≈2%).</a:t>
+            </a:r>
+          </a:p>
+          <a:p>
+            <a:pPr marL="117046" indent="-117046">
+              <a:lnSpc>
+                <a:spcPct val="112000"/>
+              </a:lnSpc>
+              <a:spcAft>
+                <a:spcPts val="400"/>
+              </a:spcAft>
+            </a:pPr>
+            <a:r>
+              <a:rPr sz="720">
+                <a:solidFill>
+                  <a:srgbClr val="0E1620"/>
+                </a:solidFill>
+                <a:latin typeface="Arial"/>
+              </a:rPr>
+              <a:t>•  Up/down capture — compounded Athanase return in the market’s up/down months ÷ the market’s.</a:t>
+            </a:r>
+          </a:p>
+          <a:p>
+            <a:pPr marL="117046" indent="-117046">
+              <a:lnSpc>
+                <a:spcPct val="112000"/>
+              </a:lnSpc>
+              <a:spcAft>
+                <a:spcPts val="400"/>
+              </a:spcAft>
+            </a:pPr>
+            <a:r>
+              <a:rPr sz="720">
+                <a:solidFill>
+                  <a:srgbClr val="0E1620"/>
+                </a:solidFill>
+                <a:latin typeface="Arial"/>
+              </a:rPr>
+              <a:t>•  Efficient frontier — monthly-rebalanced MSCI/Athanase blends; minimum-risk point is in-sample.</a:t>
+            </a:r>
+          </a:p>
+          <a:p>
+            <a:pPr algn="l">
+              <a:lnSpc>
+                <a:spcPct val="115000"/>
+              </a:lnSpc>
+              <a:spcAft>
+                <a:spcPts val="0"/>
+              </a:spcAft>
+            </a:pPr>
+            <a:r>
+              <a:rPr sz="680" b="0" i="1">
+                <a:solidFill>
+                  <a:srgbClr val="556A83"/>
+                </a:solidFill>
+                <a:latin typeface="Arial"/>
+              </a:rPr>
+              <a:t>Private-equity figures are taken from the cited research. De-smoothed / true-economic / committed-capital values reflect that literature rather than reported (appraisal-based) data; bridge and illustrative magnitudes reconcile cited endpoints and are labelled as such. For professional investors; not investment advice. Past performance is not indicative of future results.</a:t>
             </a:r>
           </a:p>
         </p:txBody>

--- a/Athanase_Engaged_Ownership_Allocator_Deck.pptx
+++ b/Athanase_Engaged_Ownership_Allocator_Deck.pptx
@@ -45424,8 +45424,8 @@
         </p:nvSpPr>
         <p:spPr>
           <a:xfrm>
-            <a:off x="5157345" y="2262835"/>
-            <a:ext cx="4169768" cy="819302"/>
+            <a:off x="5157345" y="2223819"/>
+            <a:ext cx="4169768" cy="760780"/>
           </a:xfrm>
           <a:prstGeom prst="rect">
             <a:avLst/>
@@ -45468,7 +45468,7 @@
         </p:nvSpPr>
         <p:spPr>
           <a:xfrm>
-            <a:off x="5303652" y="2360371"/>
+            <a:off x="5303652" y="2311602"/>
             <a:ext cx="1463076" cy="243840"/>
           </a:xfrm>
           <a:prstGeom prst="rect">
@@ -45510,7 +45510,7 @@
         </p:nvSpPr>
         <p:spPr>
           <a:xfrm>
-            <a:off x="6656997" y="2350617"/>
+            <a:off x="6656997" y="2301848"/>
             <a:ext cx="2487230" cy="292608"/>
           </a:xfrm>
           <a:prstGeom prst="rect">
@@ -45552,8 +45552,8 @@
         </p:nvSpPr>
         <p:spPr>
           <a:xfrm>
-            <a:off x="5303652" y="2652979"/>
-            <a:ext cx="3877152" cy="409651"/>
+            <a:off x="5303652" y="2574949"/>
+            <a:ext cx="3877152" cy="390144"/>
           </a:xfrm>
           <a:prstGeom prst="rect">
             <a:avLst/>
@@ -45568,14 +45568,14 @@
           <a:p>
             <a:pPr algn="l">
               <a:lnSpc>
-                <a:spcPct val="108000"/>
-              </a:lnSpc>
-              <a:spcAft>
-                <a:spcPts val="0"/>
-              </a:spcAft>
-            </a:pPr>
-            <a:r>
-              <a:rPr sz="800" b="0" i="0">
+                <a:spcPct val="105000"/>
+              </a:lnSpc>
+              <a:spcAft>
+                <a:spcPts val="0"/>
+              </a:spcAft>
+            </a:pPr>
+            <a:r>
+              <a:rPr sz="760" b="0" i="0">
                 <a:solidFill>
                   <a:srgbClr val="0E1620"/>
                 </a:solidFill>
@@ -45594,8 +45594,8 @@
         </p:nvSpPr>
         <p:spPr>
           <a:xfrm>
-            <a:off x="5157345" y="3179673"/>
-            <a:ext cx="4169768" cy="819302"/>
+            <a:off x="5157345" y="3043122"/>
+            <a:ext cx="4169768" cy="760780"/>
           </a:xfrm>
           <a:prstGeom prst="rect">
             <a:avLst/>
@@ -45638,7 +45638,7 @@
         </p:nvSpPr>
         <p:spPr>
           <a:xfrm>
-            <a:off x="5303652" y="3277209"/>
+            <a:off x="5303652" y="3130904"/>
             <a:ext cx="1463076" cy="243840"/>
           </a:xfrm>
           <a:prstGeom prst="rect">
@@ -45680,7 +45680,7 @@
         </p:nvSpPr>
         <p:spPr>
           <a:xfrm>
-            <a:off x="6656997" y="3267456"/>
+            <a:off x="6656997" y="3121150"/>
             <a:ext cx="2487230" cy="292608"/>
           </a:xfrm>
           <a:prstGeom prst="rect">
@@ -45722,8 +45722,8 @@
         </p:nvSpPr>
         <p:spPr>
           <a:xfrm>
-            <a:off x="5303652" y="3569817"/>
-            <a:ext cx="3877152" cy="409651"/>
+            <a:off x="5303652" y="3394251"/>
+            <a:ext cx="3877152" cy="390144"/>
           </a:xfrm>
           <a:prstGeom prst="rect">
             <a:avLst/>
@@ -45738,14 +45738,14 @@
           <a:p>
             <a:pPr algn="l">
               <a:lnSpc>
-                <a:spcPct val="108000"/>
-              </a:lnSpc>
-              <a:spcAft>
-                <a:spcPts val="0"/>
-              </a:spcAft>
-            </a:pPr>
-            <a:r>
-              <a:rPr sz="800" b="0" i="0">
+                <a:spcPct val="105000"/>
+              </a:lnSpc>
+              <a:spcAft>
+                <a:spcPts val="0"/>
+              </a:spcAft>
+            </a:pPr>
+            <a:r>
+              <a:rPr sz="760" b="0" i="0">
                 <a:solidFill>
                   <a:srgbClr val="0E1620"/>
                 </a:solidFill>
@@ -45764,8 +45764,8 @@
         </p:nvSpPr>
         <p:spPr>
           <a:xfrm>
-            <a:off x="5157345" y="4096512"/>
-            <a:ext cx="4169768" cy="819302"/>
+            <a:off x="5157345" y="3862424"/>
+            <a:ext cx="4169768" cy="760780"/>
           </a:xfrm>
           <a:prstGeom prst="rect">
             <a:avLst/>
@@ -45808,7 +45808,7 @@
         </p:nvSpPr>
         <p:spPr>
           <a:xfrm>
-            <a:off x="5303652" y="4194048"/>
+            <a:off x="5303652" y="3950206"/>
             <a:ext cx="1463076" cy="243840"/>
           </a:xfrm>
           <a:prstGeom prst="rect">
@@ -45850,7 +45850,7 @@
         </p:nvSpPr>
         <p:spPr>
           <a:xfrm>
-            <a:off x="6656997" y="4184294"/>
+            <a:off x="6656997" y="3940453"/>
             <a:ext cx="2487230" cy="292608"/>
           </a:xfrm>
           <a:prstGeom prst="rect">
@@ -45892,8 +45892,8 @@
         </p:nvSpPr>
         <p:spPr>
           <a:xfrm>
-            <a:off x="5303652" y="4486656"/>
-            <a:ext cx="3877152" cy="409651"/>
+            <a:off x="5303652" y="4213554"/>
+            <a:ext cx="3877152" cy="390144"/>
           </a:xfrm>
           <a:prstGeom prst="rect">
             <a:avLst/>
@@ -45908,14 +45908,14 @@
           <a:p>
             <a:pPr algn="l">
               <a:lnSpc>
-                <a:spcPct val="108000"/>
-              </a:lnSpc>
-              <a:spcAft>
-                <a:spcPts val="0"/>
-              </a:spcAft>
-            </a:pPr>
-            <a:r>
-              <a:rPr sz="800" b="0" i="0">
+                <a:spcPct val="105000"/>
+              </a:lnSpc>
+              <a:spcAft>
+                <a:spcPts val="0"/>
+              </a:spcAft>
+            </a:pPr>
+            <a:r>
+              <a:rPr sz="760" b="0" i="0">
                 <a:solidFill>
                   <a:srgbClr val="0E1620"/>
                 </a:solidFill>
@@ -45934,8 +45934,8 @@
         </p:nvSpPr>
         <p:spPr>
           <a:xfrm>
-            <a:off x="5157345" y="5013350"/>
-            <a:ext cx="4169768" cy="819302"/>
+            <a:off x="5157345" y="4681726"/>
+            <a:ext cx="4169768" cy="760780"/>
           </a:xfrm>
           <a:prstGeom prst="rect">
             <a:avLst/>
@@ -45978,7 +45978,7 @@
         </p:nvSpPr>
         <p:spPr>
           <a:xfrm>
-            <a:off x="5303652" y="5110886"/>
+            <a:off x="5303652" y="4769509"/>
             <a:ext cx="1463076" cy="243840"/>
           </a:xfrm>
           <a:prstGeom prst="rect">
@@ -46020,7 +46020,7 @@
         </p:nvSpPr>
         <p:spPr>
           <a:xfrm>
-            <a:off x="6656997" y="5101132"/>
+            <a:off x="6656997" y="4759755"/>
             <a:ext cx="2487230" cy="292608"/>
           </a:xfrm>
           <a:prstGeom prst="rect">
@@ -46062,8 +46062,8 @@
         </p:nvSpPr>
         <p:spPr>
           <a:xfrm>
-            <a:off x="5303652" y="5403494"/>
-            <a:ext cx="3877152" cy="409651"/>
+            <a:off x="5303652" y="5032856"/>
+            <a:ext cx="3877152" cy="390144"/>
           </a:xfrm>
           <a:prstGeom prst="rect">
             <a:avLst/>
@@ -46078,14 +46078,14 @@
           <a:p>
             <a:pPr algn="l">
               <a:lnSpc>
-                <a:spcPct val="108000"/>
-              </a:lnSpc>
-              <a:spcAft>
-                <a:spcPts val="0"/>
-              </a:spcAft>
-            </a:pPr>
-            <a:r>
-              <a:rPr sz="800" b="0" i="0">
+                <a:spcPct val="105000"/>
+              </a:lnSpc>
+              <a:spcAft>
+                <a:spcPts val="0"/>
+              </a:spcAft>
+            </a:pPr>
+            <a:r>
+              <a:rPr sz="760" b="0" i="0">
                 <a:solidFill>
                   <a:srgbClr val="0E1620"/>
                 </a:solidFill>
@@ -46104,8 +46104,8 @@
         </p:nvSpPr>
         <p:spPr>
           <a:xfrm>
-            <a:off x="5157345" y="5930188"/>
-            <a:ext cx="4169768" cy="819302"/>
+            <a:off x="5157345" y="5501029"/>
+            <a:ext cx="4169768" cy="760780"/>
           </a:xfrm>
           <a:prstGeom prst="rect">
             <a:avLst/>
@@ -46148,7 +46148,7 @@
         </p:nvSpPr>
         <p:spPr>
           <a:xfrm>
-            <a:off x="5303652" y="6027724"/>
+            <a:off x="5303652" y="5588811"/>
             <a:ext cx="1463076" cy="243840"/>
           </a:xfrm>
           <a:prstGeom prst="rect">
@@ -46190,7 +46190,7 @@
         </p:nvSpPr>
         <p:spPr>
           <a:xfrm>
-            <a:off x="6656997" y="6017971"/>
+            <a:off x="6656997" y="5579058"/>
             <a:ext cx="2487230" cy="292608"/>
           </a:xfrm>
           <a:prstGeom prst="rect">
@@ -46232,8 +46232,8 @@
         </p:nvSpPr>
         <p:spPr>
           <a:xfrm>
-            <a:off x="5303652" y="6320332"/>
-            <a:ext cx="3877152" cy="409651"/>
+            <a:off x="5303652" y="5852158"/>
+            <a:ext cx="3877152" cy="390144"/>
           </a:xfrm>
           <a:prstGeom prst="rect">
             <a:avLst/>
@@ -46248,14 +46248,14 @@
           <a:p>
             <a:pPr algn="l">
               <a:lnSpc>
-                <a:spcPct val="108000"/>
-              </a:lnSpc>
-              <a:spcAft>
-                <a:spcPts val="0"/>
-              </a:spcAft>
-            </a:pPr>
-            <a:r>
-              <a:rPr sz="800" b="0" i="0">
+                <a:spcPct val="105000"/>
+              </a:lnSpc>
+              <a:spcAft>
+                <a:spcPts val="0"/>
+              </a:spcAft>
+            </a:pPr>
+            <a:r>
+              <a:rPr sz="760" b="0" i="0">
                 <a:solidFill>
                   <a:srgbClr val="0E1620"/>
                 </a:solidFill>

--- a/Athanase_Engaged_Ownership_Allocator_Deck.pptx
+++ b/Athanase_Engaged_Ownership_Allocator_Deck.pptx
@@ -19016,7 +19016,7 @@
                 </a:solidFill>
                 <a:latin typeface="Times New Roman"/>
               </a:rPr>
-              <a:t>Haldex AB</a:t>
+              <a:t>What downside protection means</a:t>
             </a:r>
           </a:p>
           <a:p>
@@ -19035,7 +19035,7 @@
                 </a:solidFill>
                 <a:latin typeface="Arial"/>
               </a:rPr>
-              <a:t>81% IRR · 3.9x money multiple. Spun off Concentric, refocused the core, re-invested in 2020 for a further 2.0x in under two years.</a:t>
+              <a:t>In the market’s down months Athanase fell ~1.5% on average versus the market’s ~3.8% — losing less than half as much when it matters.</a:t>
             </a:r>
           </a:p>
           <a:p>
@@ -19054,7 +19054,7 @@
                 </a:solidFill>
                 <a:latin typeface="Times New Roman"/>
               </a:rPr>
-              <a:t>Compounding</a:t>
+              <a:t>Positive when the market wasn’t</a:t>
             </a:r>
           </a:p>
           <a:p>
@@ -19073,7 +19073,7 @@
                 </a:solidFill>
                 <a:latin typeface="Arial"/>
               </a:rPr>
-              <a:t>~18x gross vs ~14x for MSCI IMI since 2006, with EBITA growth of +14.5% across portfolio companies.</a:t>
+              <a:t>Across the six worst years for global equities, Athanase outperformed in five — and stayed positive in two: +9% in 2015 and +0.3% in 2022, while the market fell −6% and −20%.</a:t>
             </a:r>
           </a:p>
           <a:p>
@@ -19092,7 +19092,7 @@
                 </a:solidFill>
                 <a:latin typeface="Times New Roman"/>
               </a:rPr>
-              <a:t>Hit rate</a:t>
+              <a:t>Why it compounds</a:t>
             </a:r>
           </a:p>
           <a:p>
@@ -19111,7 +19111,7 @@
                 </a:solidFill>
                 <a:latin typeface="Arial"/>
               </a:rPr>
-              <a:t>39 larger investments since 2006 — profitable in 36, lost money in only 3.</a:t>
+              <a:t>Losing less in drawdowns leaves more capital working in the recovery — the engine behind ~18x growth vs ~14x for MSCI IMI since 2006.</a:t>
             </a:r>
           </a:p>
         </p:txBody>
@@ -35298,7 +35298,7 @@
                 <a:spcPct val="113000"/>
               </a:lnSpc>
               <a:spcAft>
-                <a:spcPts val="900"/>
+                <a:spcPts val="1100"/>
               </a:spcAft>
             </a:pPr>
             <a:r>
@@ -35317,7 +35317,7 @@
                 <a:spcPct val="113000"/>
               </a:lnSpc>
               <a:spcAft>
-                <a:spcPts val="900"/>
+                <a:spcPts val="1100"/>
               </a:spcAft>
             </a:pPr>
             <a:r>
@@ -35336,7 +35336,7 @@
                 <a:spcPct val="113000"/>
               </a:lnSpc>
               <a:spcAft>
-                <a:spcPts val="900"/>
+                <a:spcPts val="1100"/>
               </a:spcAft>
             </a:pPr>
             <a:r>
@@ -35347,25 +35347,6 @@
                 <a:latin typeface="Arial"/>
               </a:rPr>
               <a:t>Two decade-definers, not one: Klarna 28× (2007) and Athanase Tech 5.4× (2021)</a:t>
-            </a:r>
-          </a:p>
-          <a:p>
-            <a:pPr algn="l">
-              <a:lnSpc>
-                <a:spcPct val="113000"/>
-              </a:lnSpc>
-              <a:spcAft>
-                <a:spcPts val="900"/>
-              </a:spcAft>
-            </a:pPr>
-            <a:r>
-              <a:rPr sz="1120" b="0" i="0">
-                <a:solidFill>
-                  <a:srgbClr val="0E1620"/>
-                </a:solidFill>
-                <a:latin typeface="Arial"/>
-              </a:rPr>
-              <a:t>Robust: even excluding Athanase Tech entirely, AIPFII still ~10% net annualised</a:t>
             </a:r>
           </a:p>
         </p:txBody>

--- a/Athanase_Engaged_Ownership_Allocator_Deck.pptx
+++ b/Athanase_Engaged_Ownership_Allocator_Deck.pptx
@@ -7657,7 +7657,7 @@
                 </a:solidFill>
                 <a:latin typeface="Arial"/>
               </a:rPr>
-              <a:t>One investment team, working together across four vehicles since 1992 — operators, allocators and board directors.</a:t>
+              <a:t>An integrated investment team — and an independent operations, finance and control function that safeguards investor capital.</a:t>
             </a:r>
           </a:p>
         </p:txBody>
@@ -7706,14 +7706,56 @@
       </p:sp>
       <p:sp>
         <p:nvSpPr>
-          <p:cNvPr id="9" name="Rectangle 8"/>
+          <p:cNvPr id="9" name="TextBox 8"/>
+          <p:cNvSpPr txBox="1"/>
+          <p:nvPr/>
+        </p:nvSpPr>
+        <p:spPr>
+          <a:xfrm>
+            <a:off x="438922" y="2126284"/>
+            <a:ext cx="5852306" cy="292608"/>
+          </a:xfrm>
+          <a:prstGeom prst="rect">
+            <a:avLst/>
+          </a:prstGeom>
+          <a:noFill/>
+        </p:spPr>
+        <p:txBody>
+          <a:bodyPr wrap="square" anchor="t" lIns="0" rIns="0" tIns="0" bIns="0">
+            <a:spAutoFit/>
+          </a:bodyPr>
+          <a:lstStyle/>
+          <a:p>
+            <a:pPr algn="l">
+              <a:lnSpc>
+                <a:spcPct val="110000"/>
+              </a:lnSpc>
+              <a:spcAft>
+                <a:spcPts val="0"/>
+              </a:spcAft>
+            </a:pPr>
+            <a:r>
+              <a:rPr sz="880" b="1" i="0">
+                <a:solidFill>
+                  <a:srgbClr val="314359"/>
+                </a:solidFill>
+                <a:latin typeface="Arial"/>
+              </a:rPr>
+              <a:t>INVESTMENT TEAM</a:t>
+            </a:r>
+          </a:p>
+        </p:txBody>
+      </p:sp>
+      <p:sp>
+        <p:nvSpPr>
+          <p:cNvPr id="10" name="Rectangle 9"/>
           <p:cNvSpPr/>
           <p:nvPr/>
         </p:nvSpPr>
         <p:spPr>
           <a:xfrm>
-            <a:off x="438922" y="2292096"/>
-            <a:ext cx="2904207" cy="1872691"/>
+            <a:off x="438922" y="2438400"/>
+            <a:ext cx="1704484" cy="1463040"/>
           </a:xfrm>
           <a:prstGeom prst="rect">
             <a:avLst/>
@@ -7750,14 +7792,14 @@
       </p:sp>
       <p:sp>
         <p:nvSpPr>
-          <p:cNvPr id="10" name="Rectangle 9"/>
+          <p:cNvPr id="11" name="Rectangle 10"/>
           <p:cNvSpPr/>
           <p:nvPr/>
         </p:nvSpPr>
         <p:spPr>
           <a:xfrm>
-            <a:off x="438922" y="2292096"/>
-            <a:ext cx="51207" cy="1872691"/>
+            <a:off x="438922" y="2438400"/>
+            <a:ext cx="43892" cy="1463040"/>
           </a:xfrm>
           <a:prstGeom prst="rect">
             <a:avLst/>
@@ -7794,14 +7836,14 @@
       </p:sp>
       <p:sp>
         <p:nvSpPr>
-          <p:cNvPr id="11" name="TextBox 10"/>
-          <p:cNvSpPr txBox="1"/>
-          <p:nvPr/>
-        </p:nvSpPr>
-        <p:spPr>
-          <a:xfrm>
-            <a:off x="621807" y="2448153"/>
-            <a:ext cx="2611591" cy="292608"/>
+          <p:cNvPr id="12" name="TextBox 11"/>
+          <p:cNvSpPr txBox="1"/>
+          <p:nvPr/>
+        </p:nvSpPr>
+        <p:spPr>
+          <a:xfrm>
+            <a:off x="585230" y="2565196"/>
+            <a:ext cx="1470391" cy="292608"/>
           </a:xfrm>
           <a:prstGeom prst="rect">
             <a:avLst/>
@@ -7823,7 +7865,7 @@
               </a:spcAft>
             </a:pPr>
             <a:r>
-              <a:rPr sz="1120" b="1" i="0">
+              <a:rPr sz="1000" b="1" i="0">
                 <a:solidFill>
                   <a:srgbClr val="314359"/>
                 </a:solidFill>
@@ -7836,14 +7878,14 @@
       </p:sp>
       <p:sp>
         <p:nvSpPr>
-          <p:cNvPr id="12" name="TextBox 11"/>
-          <p:cNvSpPr txBox="1"/>
-          <p:nvPr/>
-        </p:nvSpPr>
-        <p:spPr>
-          <a:xfrm>
-            <a:off x="621807" y="2740761"/>
-            <a:ext cx="2611591" cy="243840"/>
+          <p:cNvPr id="13" name="TextBox 12"/>
+          <p:cNvSpPr txBox="1"/>
+          <p:nvPr/>
+        </p:nvSpPr>
+        <p:spPr>
+          <a:xfrm>
+            <a:off x="585230" y="2848051"/>
+            <a:ext cx="1470391" cy="234086"/>
           </a:xfrm>
           <a:prstGeom prst="rect">
             <a:avLst/>
@@ -7865,7 +7907,7 @@
               </a:spcAft>
             </a:pPr>
             <a:r>
-              <a:rPr sz="760" b="1" i="0">
+              <a:rPr sz="680" b="1" i="0">
                 <a:solidFill>
                   <a:srgbClr val="314359"/>
                 </a:solidFill>
@@ -7878,14 +7920,14 @@
       </p:sp>
       <p:sp>
         <p:nvSpPr>
-          <p:cNvPr id="13" name="TextBox 12"/>
-          <p:cNvSpPr txBox="1"/>
-          <p:nvPr/>
-        </p:nvSpPr>
-        <p:spPr>
-          <a:xfrm>
-            <a:off x="621807" y="3023616"/>
-            <a:ext cx="2575014" cy="1072896"/>
+          <p:cNvPr id="14" name="TextBox 13"/>
+          <p:cNvSpPr txBox="1"/>
+          <p:nvPr/>
+        </p:nvSpPr>
+        <p:spPr>
+          <a:xfrm>
+            <a:off x="585230" y="3101644"/>
+            <a:ext cx="1455761" cy="682752"/>
           </a:xfrm>
           <a:prstGeom prst="rect">
             <a:avLst/>
@@ -7900,34 +7942,34 @@
           <a:p>
             <a:pPr algn="l">
               <a:lnSpc>
-                <a:spcPct val="113000"/>
-              </a:lnSpc>
-              <a:spcAft>
-                <a:spcPts val="0"/>
-              </a:spcAft>
-            </a:pPr>
-            <a:r>
-              <a:rPr sz="800" b="0" i="0">
+                <a:spcPct val="110000"/>
+              </a:lnSpc>
+              <a:spcAft>
+                <a:spcPts val="0"/>
+              </a:spcAft>
+            </a:pPr>
+            <a:r>
+              <a:rPr sz="720" b="0" i="0">
                 <a:solidFill>
                   <a:srgbClr val="0E1620"/>
                 </a:solidFill>
                 <a:latin typeface="Arial"/>
               </a:rPr>
-              <a:t>Leads the same team since 2006. Former CEO/CIO of industrial conglomerate Brokk; earlier Lehman Brothers and Salomon Smith Barney.</a:t>
-            </a:r>
-          </a:p>
-        </p:txBody>
-      </p:sp>
-      <p:sp>
-        <p:nvSpPr>
-          <p:cNvPr id="14" name="Rectangle 13"/>
+              <a:t>Ex-CEO/CIO of Brokk; Lehman Brothers, Salomon Smith Barney.</a:t>
+            </a:r>
+          </a:p>
+        </p:txBody>
+      </p:sp>
+      <p:sp>
+        <p:nvSpPr>
+          <p:cNvPr id="15" name="Rectangle 14"/>
           <p:cNvSpPr/>
           <p:nvPr/>
         </p:nvSpPr>
         <p:spPr>
           <a:xfrm>
-            <a:off x="3416283" y="2292096"/>
-            <a:ext cx="2904207" cy="1872691"/>
+            <a:off x="2231191" y="2438400"/>
+            <a:ext cx="1704484" cy="1463040"/>
           </a:xfrm>
           <a:prstGeom prst="rect">
             <a:avLst/>
@@ -7964,14 +8006,14 @@
       </p:sp>
       <p:sp>
         <p:nvSpPr>
-          <p:cNvPr id="15" name="Rectangle 14"/>
+          <p:cNvPr id="16" name="Rectangle 15"/>
           <p:cNvSpPr/>
           <p:nvPr/>
         </p:nvSpPr>
         <p:spPr>
           <a:xfrm>
-            <a:off x="3416283" y="2292096"/>
-            <a:ext cx="51207" cy="1872691"/>
+            <a:off x="2231191" y="2438400"/>
+            <a:ext cx="43892" cy="1463040"/>
           </a:xfrm>
           <a:prstGeom prst="rect">
             <a:avLst/>
@@ -8008,14 +8050,14 @@
       </p:sp>
       <p:sp>
         <p:nvSpPr>
-          <p:cNvPr id="16" name="TextBox 15"/>
-          <p:cNvSpPr txBox="1"/>
-          <p:nvPr/>
-        </p:nvSpPr>
-        <p:spPr>
-          <a:xfrm>
-            <a:off x="3599168" y="2448153"/>
-            <a:ext cx="2611591" cy="292608"/>
+          <p:cNvPr id="17" name="TextBox 16"/>
+          <p:cNvSpPr txBox="1"/>
+          <p:nvPr/>
+        </p:nvSpPr>
+        <p:spPr>
+          <a:xfrm>
+            <a:off x="2377499" y="2565196"/>
+            <a:ext cx="1470391" cy="292608"/>
           </a:xfrm>
           <a:prstGeom prst="rect">
             <a:avLst/>
@@ -8037,7 +8079,7 @@
               </a:spcAft>
             </a:pPr>
             <a:r>
-              <a:rPr sz="1120" b="1" i="0">
+              <a:rPr sz="1000" b="1" i="0">
                 <a:solidFill>
                   <a:srgbClr val="314359"/>
                 </a:solidFill>
@@ -8050,14 +8092,14 @@
       </p:sp>
       <p:sp>
         <p:nvSpPr>
-          <p:cNvPr id="17" name="TextBox 16"/>
-          <p:cNvSpPr txBox="1"/>
-          <p:nvPr/>
-        </p:nvSpPr>
-        <p:spPr>
-          <a:xfrm>
-            <a:off x="3599168" y="2740761"/>
-            <a:ext cx="2611591" cy="243840"/>
+          <p:cNvPr id="18" name="TextBox 17"/>
+          <p:cNvSpPr txBox="1"/>
+          <p:nvPr/>
+        </p:nvSpPr>
+        <p:spPr>
+          <a:xfrm>
+            <a:off x="2377499" y="2848051"/>
+            <a:ext cx="1470391" cy="234086"/>
           </a:xfrm>
           <a:prstGeom prst="rect">
             <a:avLst/>
@@ -8079,7 +8121,7 @@
               </a:spcAft>
             </a:pPr>
             <a:r>
-              <a:rPr sz="760" b="1" i="0">
+              <a:rPr sz="680" b="1" i="0">
                 <a:solidFill>
                   <a:srgbClr val="314359"/>
                 </a:solidFill>
@@ -8092,14 +8134,14 @@
       </p:sp>
       <p:sp>
         <p:nvSpPr>
-          <p:cNvPr id="18" name="TextBox 17"/>
-          <p:cNvSpPr txBox="1"/>
-          <p:nvPr/>
-        </p:nvSpPr>
-        <p:spPr>
-          <a:xfrm>
-            <a:off x="3599168" y="3023616"/>
-            <a:ext cx="2575014" cy="1072896"/>
+          <p:cNvPr id="19" name="TextBox 18"/>
+          <p:cNvSpPr txBox="1"/>
+          <p:nvPr/>
+        </p:nvSpPr>
+        <p:spPr>
+          <a:xfrm>
+            <a:off x="2377499" y="3101644"/>
+            <a:ext cx="1455761" cy="682752"/>
           </a:xfrm>
           <a:prstGeom prst="rect">
             <a:avLst/>
@@ -8114,34 +8156,34 @@
           <a:p>
             <a:pPr algn="l">
               <a:lnSpc>
-                <a:spcPct val="113000"/>
-              </a:lnSpc>
-              <a:spcAft>
-                <a:spcPts val="0"/>
-              </a:spcAft>
-            </a:pPr>
-            <a:r>
-              <a:rPr sz="800" b="0" i="0">
+                <a:spcPct val="110000"/>
+              </a:lnSpc>
+              <a:spcAft>
+                <a:spcPts val="0"/>
+              </a:spcAft>
+            </a:pPr>
+            <a:r>
+              <a:rPr sz="720" b="0" i="0">
                 <a:solidFill>
                   <a:srgbClr val="0E1620"/>
                 </a:solidFill>
                 <a:latin typeface="Arial"/>
               </a:rPr>
-              <a:t>Co-founder &amp; CEO of Tradimus; Senior VP at Electrolux; owner-operator of a group of private tech companies — deep industrial operating experience.</a:t>
-            </a:r>
-          </a:p>
-        </p:txBody>
-      </p:sp>
-      <p:sp>
-        <p:nvSpPr>
-          <p:cNvPr id="19" name="Rectangle 18"/>
+              <a:t>Ex-CEO of Tradimus; Senior VP, Electrolux; tech owner-operator.</a:t>
+            </a:r>
+          </a:p>
+        </p:txBody>
+      </p:sp>
+      <p:sp>
+        <p:nvSpPr>
+          <p:cNvPr id="20" name="Rectangle 19"/>
           <p:cNvSpPr/>
           <p:nvPr/>
         </p:nvSpPr>
         <p:spPr>
           <a:xfrm>
-            <a:off x="6393644" y="2292096"/>
-            <a:ext cx="2904207" cy="1872691"/>
+            <a:off x="4023460" y="2438400"/>
+            <a:ext cx="1704484" cy="1463040"/>
           </a:xfrm>
           <a:prstGeom prst="rect">
             <a:avLst/>
@@ -8178,14 +8220,14 @@
       </p:sp>
       <p:sp>
         <p:nvSpPr>
-          <p:cNvPr id="20" name="Rectangle 19"/>
+          <p:cNvPr id="21" name="Rectangle 20"/>
           <p:cNvSpPr/>
           <p:nvPr/>
         </p:nvSpPr>
         <p:spPr>
           <a:xfrm>
-            <a:off x="6393644" y="2292096"/>
-            <a:ext cx="51207" cy="1872691"/>
+            <a:off x="4023460" y="2438400"/>
+            <a:ext cx="43892" cy="1463040"/>
           </a:xfrm>
           <a:prstGeom prst="rect">
             <a:avLst/>
@@ -8222,14 +8264,14 @@
       </p:sp>
       <p:sp>
         <p:nvSpPr>
-          <p:cNvPr id="21" name="TextBox 20"/>
-          <p:cNvSpPr txBox="1"/>
-          <p:nvPr/>
-        </p:nvSpPr>
-        <p:spPr>
-          <a:xfrm>
-            <a:off x="6576529" y="2448153"/>
-            <a:ext cx="2611591" cy="292608"/>
+          <p:cNvPr id="22" name="TextBox 21"/>
+          <p:cNvSpPr txBox="1"/>
+          <p:nvPr/>
+        </p:nvSpPr>
+        <p:spPr>
+          <a:xfrm>
+            <a:off x="4169768" y="2565196"/>
+            <a:ext cx="1470391" cy="292608"/>
           </a:xfrm>
           <a:prstGeom prst="rect">
             <a:avLst/>
@@ -8251,7 +8293,7 @@
               </a:spcAft>
             </a:pPr>
             <a:r>
-              <a:rPr sz="1120" b="1" i="0">
+              <a:rPr sz="1000" b="1" i="0">
                 <a:solidFill>
                   <a:srgbClr val="314359"/>
                 </a:solidFill>
@@ -8264,14 +8306,14 @@
       </p:sp>
       <p:sp>
         <p:nvSpPr>
-          <p:cNvPr id="22" name="TextBox 21"/>
-          <p:cNvSpPr txBox="1"/>
-          <p:nvPr/>
-        </p:nvSpPr>
-        <p:spPr>
-          <a:xfrm>
-            <a:off x="6576529" y="2740761"/>
-            <a:ext cx="2611591" cy="243840"/>
+          <p:cNvPr id="23" name="TextBox 22"/>
+          <p:cNvSpPr txBox="1"/>
+          <p:nvPr/>
+        </p:nvSpPr>
+        <p:spPr>
+          <a:xfrm>
+            <a:off x="4169768" y="2848051"/>
+            <a:ext cx="1470391" cy="234086"/>
           </a:xfrm>
           <a:prstGeom prst="rect">
             <a:avLst/>
@@ -8293,7 +8335,7 @@
               </a:spcAft>
             </a:pPr>
             <a:r>
-              <a:rPr sz="760" b="1" i="0">
+              <a:rPr sz="680" b="1" i="0">
                 <a:solidFill>
                   <a:srgbClr val="314359"/>
                 </a:solidFill>
@@ -8306,14 +8348,14 @@
       </p:sp>
       <p:sp>
         <p:nvSpPr>
-          <p:cNvPr id="23" name="TextBox 22"/>
-          <p:cNvSpPr txBox="1"/>
-          <p:nvPr/>
-        </p:nvSpPr>
-        <p:spPr>
-          <a:xfrm>
-            <a:off x="6576529" y="3023616"/>
-            <a:ext cx="2575014" cy="1072896"/>
+          <p:cNvPr id="24" name="TextBox 23"/>
+          <p:cNvSpPr txBox="1"/>
+          <p:nvPr/>
+        </p:nvSpPr>
+        <p:spPr>
+          <a:xfrm>
+            <a:off x="4169768" y="3101644"/>
+            <a:ext cx="1455761" cy="682752"/>
           </a:xfrm>
           <a:prstGeom prst="rect">
             <a:avLst/>
@@ -8328,34 +8370,34 @@
           <a:p>
             <a:pPr algn="l">
               <a:lnSpc>
-                <a:spcPct val="113000"/>
-              </a:lnSpc>
-              <a:spcAft>
-                <a:spcPts val="0"/>
-              </a:spcAft>
-            </a:pPr>
-            <a:r>
-              <a:rPr sz="800" b="0" i="0">
+                <a:spcPct val="110000"/>
+              </a:lnSpc>
+              <a:spcAft>
+                <a:spcPts val="0"/>
+              </a:spcAft>
+            </a:pPr>
+            <a:r>
+              <a:rPr sz="720" b="0" i="0">
                 <a:solidFill>
                   <a:srgbClr val="0E1620"/>
                 </a:solidFill>
                 <a:latin typeface="Arial"/>
               </a:rPr>
-              <a:t>Responsible PM at Adrigo, Catella, Pan Capital and Nordea; equity research at Brummer &amp; Partners and Cazenove.</a:t>
-            </a:r>
-          </a:p>
-        </p:txBody>
-      </p:sp>
-      <p:sp>
-        <p:nvSpPr>
-          <p:cNvPr id="24" name="Rectangle 23"/>
+              <a:t>Ex-PM at Adrigo, Catella, Pan Capital and Nordea.</a:t>
+            </a:r>
+          </a:p>
+        </p:txBody>
+      </p:sp>
+      <p:sp>
+        <p:nvSpPr>
+          <p:cNvPr id="25" name="Rectangle 24"/>
           <p:cNvSpPr/>
           <p:nvPr/>
         </p:nvSpPr>
         <p:spPr>
           <a:xfrm>
-            <a:off x="438922" y="4320844"/>
-            <a:ext cx="2904207" cy="1872691"/>
+            <a:off x="5815729" y="2438400"/>
+            <a:ext cx="1704484" cy="1463040"/>
           </a:xfrm>
           <a:prstGeom prst="rect">
             <a:avLst/>
@@ -8392,14 +8434,14 @@
       </p:sp>
       <p:sp>
         <p:nvSpPr>
-          <p:cNvPr id="25" name="Rectangle 24"/>
+          <p:cNvPr id="26" name="Rectangle 25"/>
           <p:cNvSpPr/>
           <p:nvPr/>
         </p:nvSpPr>
         <p:spPr>
           <a:xfrm>
-            <a:off x="438922" y="4320844"/>
-            <a:ext cx="51207" cy="1872691"/>
+            <a:off x="5815729" y="2438400"/>
+            <a:ext cx="43892" cy="1463040"/>
           </a:xfrm>
           <a:prstGeom prst="rect">
             <a:avLst/>
@@ -8436,14 +8478,14 @@
       </p:sp>
       <p:sp>
         <p:nvSpPr>
-          <p:cNvPr id="26" name="TextBox 25"/>
-          <p:cNvSpPr txBox="1"/>
-          <p:nvPr/>
-        </p:nvSpPr>
-        <p:spPr>
-          <a:xfrm>
-            <a:off x="621807" y="4476902"/>
-            <a:ext cx="2611591" cy="292608"/>
+          <p:cNvPr id="27" name="TextBox 26"/>
+          <p:cNvSpPr txBox="1"/>
+          <p:nvPr/>
+        </p:nvSpPr>
+        <p:spPr>
+          <a:xfrm>
+            <a:off x="5962037" y="2565196"/>
+            <a:ext cx="1470391" cy="292608"/>
           </a:xfrm>
           <a:prstGeom prst="rect">
             <a:avLst/>
@@ -8465,7 +8507,7 @@
               </a:spcAft>
             </a:pPr>
             <a:r>
-              <a:rPr sz="1120" b="1" i="0">
+              <a:rPr sz="1000" b="1" i="0">
                 <a:solidFill>
                   <a:srgbClr val="314359"/>
                 </a:solidFill>
@@ -8478,14 +8520,14 @@
       </p:sp>
       <p:sp>
         <p:nvSpPr>
-          <p:cNvPr id="27" name="TextBox 26"/>
-          <p:cNvSpPr txBox="1"/>
-          <p:nvPr/>
-        </p:nvSpPr>
-        <p:spPr>
-          <a:xfrm>
-            <a:off x="621807" y="4769510"/>
-            <a:ext cx="2611591" cy="243840"/>
+          <p:cNvPr id="28" name="TextBox 27"/>
+          <p:cNvSpPr txBox="1"/>
+          <p:nvPr/>
+        </p:nvSpPr>
+        <p:spPr>
+          <a:xfrm>
+            <a:off x="5962037" y="2848051"/>
+            <a:ext cx="1470391" cy="234086"/>
           </a:xfrm>
           <a:prstGeom prst="rect">
             <a:avLst/>
@@ -8507,7 +8549,7 @@
               </a:spcAft>
             </a:pPr>
             <a:r>
-              <a:rPr sz="760" b="1" i="0">
+              <a:rPr sz="680" b="1" i="0">
                 <a:solidFill>
                   <a:srgbClr val="314359"/>
                 </a:solidFill>
@@ -8520,14 +8562,14 @@
       </p:sp>
       <p:sp>
         <p:nvSpPr>
-          <p:cNvPr id="28" name="TextBox 27"/>
-          <p:cNvSpPr txBox="1"/>
-          <p:nvPr/>
-        </p:nvSpPr>
-        <p:spPr>
-          <a:xfrm>
-            <a:off x="621807" y="5052364"/>
-            <a:ext cx="2575014" cy="1072896"/>
+          <p:cNvPr id="29" name="TextBox 28"/>
+          <p:cNvSpPr txBox="1"/>
+          <p:nvPr/>
+        </p:nvSpPr>
+        <p:spPr>
+          <a:xfrm>
+            <a:off x="5962037" y="3101644"/>
+            <a:ext cx="1455761" cy="682752"/>
           </a:xfrm>
           <a:prstGeom prst="rect">
             <a:avLst/>
@@ -8542,34 +8584,34 @@
           <a:p>
             <a:pPr algn="l">
               <a:lnSpc>
-                <a:spcPct val="113000"/>
-              </a:lnSpc>
-              <a:spcAft>
-                <a:spcPts val="0"/>
-              </a:spcAft>
-            </a:pPr>
-            <a:r>
-              <a:rPr sz="800" b="0" i="0">
+                <a:spcPct val="110000"/>
+              </a:lnSpc>
+              <a:spcAft>
+                <a:spcPts val="0"/>
+              </a:spcAft>
+            </a:pPr>
+            <a:r>
+              <a:rPr sz="720" b="0" i="0">
                 <a:solidFill>
                   <a:srgbClr val="0E1620"/>
                 </a:solidFill>
                 <a:latin typeface="Arial"/>
               </a:rPr>
-              <a:t>PM and Head of Research of the same team since 1996; former CEO &amp; CIO of HQ Fonder; multiple senior roles at Carnegie.</a:t>
-            </a:r>
-          </a:p>
-        </p:txBody>
-      </p:sp>
-      <p:sp>
-        <p:nvSpPr>
-          <p:cNvPr id="29" name="Rectangle 28"/>
+              <a:t>On the team since 1996; ex-CEO/CIO of HQ Fonder; Carnegie.</a:t>
+            </a:r>
+          </a:p>
+        </p:txBody>
+      </p:sp>
+      <p:sp>
+        <p:nvSpPr>
+          <p:cNvPr id="30" name="Rectangle 29"/>
           <p:cNvSpPr/>
           <p:nvPr/>
         </p:nvSpPr>
         <p:spPr>
           <a:xfrm>
-            <a:off x="3416283" y="4320844"/>
-            <a:ext cx="2904207" cy="1872691"/>
+            <a:off x="7607998" y="2438400"/>
+            <a:ext cx="1704484" cy="1463040"/>
           </a:xfrm>
           <a:prstGeom prst="rect">
             <a:avLst/>
@@ -8606,14 +8648,14 @@
       </p:sp>
       <p:sp>
         <p:nvSpPr>
-          <p:cNvPr id="30" name="Rectangle 29"/>
+          <p:cNvPr id="31" name="Rectangle 30"/>
           <p:cNvSpPr/>
           <p:nvPr/>
         </p:nvSpPr>
         <p:spPr>
           <a:xfrm>
-            <a:off x="3416283" y="4320844"/>
-            <a:ext cx="51207" cy="1872691"/>
+            <a:off x="7607998" y="2438400"/>
+            <a:ext cx="43892" cy="1463040"/>
           </a:xfrm>
           <a:prstGeom prst="rect">
             <a:avLst/>
@@ -8650,14 +8692,14 @@
       </p:sp>
       <p:sp>
         <p:nvSpPr>
-          <p:cNvPr id="31" name="TextBox 30"/>
-          <p:cNvSpPr txBox="1"/>
-          <p:nvPr/>
-        </p:nvSpPr>
-        <p:spPr>
-          <a:xfrm>
-            <a:off x="3599168" y="4476902"/>
-            <a:ext cx="2611591" cy="292608"/>
+          <p:cNvPr id="32" name="TextBox 31"/>
+          <p:cNvSpPr txBox="1"/>
+          <p:nvPr/>
+        </p:nvSpPr>
+        <p:spPr>
+          <a:xfrm>
+            <a:off x="7754305" y="2565196"/>
+            <a:ext cx="1470391" cy="292608"/>
           </a:xfrm>
           <a:prstGeom prst="rect">
             <a:avLst/>
@@ -8679,7 +8721,7 @@
               </a:spcAft>
             </a:pPr>
             <a:r>
-              <a:rPr sz="1120" b="1" i="0">
+              <a:rPr sz="1000" b="1" i="0">
                 <a:solidFill>
                   <a:srgbClr val="314359"/>
                 </a:solidFill>
@@ -8692,14 +8734,14 @@
       </p:sp>
       <p:sp>
         <p:nvSpPr>
-          <p:cNvPr id="32" name="TextBox 31"/>
-          <p:cNvSpPr txBox="1"/>
-          <p:nvPr/>
-        </p:nvSpPr>
-        <p:spPr>
-          <a:xfrm>
-            <a:off x="3599168" y="4769510"/>
-            <a:ext cx="2611591" cy="243840"/>
+          <p:cNvPr id="33" name="TextBox 32"/>
+          <p:cNvSpPr txBox="1"/>
+          <p:nvPr/>
+        </p:nvSpPr>
+        <p:spPr>
+          <a:xfrm>
+            <a:off x="7754305" y="2848051"/>
+            <a:ext cx="1470391" cy="234086"/>
           </a:xfrm>
           <a:prstGeom prst="rect">
             <a:avLst/>
@@ -8721,7 +8763,7 @@
               </a:spcAft>
             </a:pPr>
             <a:r>
-              <a:rPr sz="760" b="1" i="0">
+              <a:rPr sz="680" b="1" i="0">
                 <a:solidFill>
                   <a:srgbClr val="314359"/>
                 </a:solidFill>
@@ -8734,14 +8776,14 @@
       </p:sp>
       <p:sp>
         <p:nvSpPr>
-          <p:cNvPr id="33" name="TextBox 32"/>
-          <p:cNvSpPr txBox="1"/>
-          <p:nvPr/>
-        </p:nvSpPr>
-        <p:spPr>
-          <a:xfrm>
-            <a:off x="3599168" y="5052364"/>
-            <a:ext cx="2575014" cy="1072896"/>
+          <p:cNvPr id="34" name="TextBox 33"/>
+          <p:cNvSpPr txBox="1"/>
+          <p:nvPr/>
+        </p:nvSpPr>
+        <p:spPr>
+          <a:xfrm>
+            <a:off x="7754305" y="3101644"/>
+            <a:ext cx="1455761" cy="682752"/>
           </a:xfrm>
           <a:prstGeom prst="rect">
             <a:avLst/>
@@ -8756,34 +8798,76 @@
           <a:p>
             <a:pPr algn="l">
               <a:lnSpc>
-                <a:spcPct val="113000"/>
-              </a:lnSpc>
-              <a:spcAft>
-                <a:spcPts val="0"/>
-              </a:spcAft>
-            </a:pPr>
-            <a:r>
-              <a:rPr sz="800" b="0" i="0">
+                <a:spcPct val="110000"/>
+              </a:lnSpc>
+              <a:spcAft>
+                <a:spcPts val="0"/>
+              </a:spcAft>
+            </a:pPr>
+            <a:r>
+              <a:rPr sz="720" b="0" i="0">
                 <a:solidFill>
                   <a:srgbClr val="0E1620"/>
                 </a:solidFill>
                 <a:latin typeface="Arial"/>
               </a:rPr>
-              <a:t>On the same investment team since 2006; former CFO of portfolio company Global Batterier — operator and financier.</a:t>
-            </a:r>
-          </a:p>
-        </p:txBody>
-      </p:sp>
-      <p:sp>
-        <p:nvSpPr>
-          <p:cNvPr id="34" name="Rectangle 33"/>
+              <a:t>On the team since 2006; ex-CFO of Global Batterier.</a:t>
+            </a:r>
+          </a:p>
+        </p:txBody>
+      </p:sp>
+      <p:sp>
+        <p:nvSpPr>
+          <p:cNvPr id="35" name="TextBox 34"/>
+          <p:cNvSpPr txBox="1"/>
+          <p:nvPr/>
+        </p:nvSpPr>
+        <p:spPr>
+          <a:xfrm>
+            <a:off x="438922" y="4096512"/>
+            <a:ext cx="6583844" cy="292608"/>
+          </a:xfrm>
+          <a:prstGeom prst="rect">
+            <a:avLst/>
+          </a:prstGeom>
+          <a:noFill/>
+        </p:spPr>
+        <p:txBody>
+          <a:bodyPr wrap="square" anchor="t" lIns="0" rIns="0" tIns="0" bIns="0">
+            <a:spAutoFit/>
+          </a:bodyPr>
+          <a:lstStyle/>
+          <a:p>
+            <a:pPr algn="l">
+              <a:lnSpc>
+                <a:spcPct val="110000"/>
+              </a:lnSpc>
+              <a:spcAft>
+                <a:spcPts val="0"/>
+              </a:spcAft>
+            </a:pPr>
+            <a:r>
+              <a:rPr sz="880" b="1" i="0">
+                <a:solidFill>
+                  <a:srgbClr val="314359"/>
+                </a:solidFill>
+                <a:latin typeface="Arial"/>
+              </a:rPr>
+              <a:t>OPERATIONS, FINANCE &amp; CONTROL — INDEPENDENT OF THE INVESTMENT TEAM</a:t>
+            </a:r>
+          </a:p>
+        </p:txBody>
+      </p:sp>
+      <p:sp>
+        <p:nvSpPr>
+          <p:cNvPr id="36" name="Rectangle 35"/>
           <p:cNvSpPr/>
           <p:nvPr/>
         </p:nvSpPr>
         <p:spPr>
           <a:xfrm>
-            <a:off x="6393644" y="4320844"/>
-            <a:ext cx="2904207" cy="1872691"/>
+            <a:off x="438922" y="4408626"/>
+            <a:ext cx="2165353" cy="1414272"/>
           </a:xfrm>
           <a:prstGeom prst="rect">
             <a:avLst/>
@@ -8820,14 +8904,14 @@
       </p:sp>
       <p:sp>
         <p:nvSpPr>
-          <p:cNvPr id="35" name="Rectangle 34"/>
+          <p:cNvPr id="37" name="Rectangle 36"/>
           <p:cNvSpPr/>
           <p:nvPr/>
         </p:nvSpPr>
         <p:spPr>
           <a:xfrm>
-            <a:off x="6393644" y="4320844"/>
-            <a:ext cx="51207" cy="1872691"/>
+            <a:off x="438922" y="4408626"/>
+            <a:ext cx="43892" cy="1414272"/>
           </a:xfrm>
           <a:prstGeom prst="rect">
             <a:avLst/>
@@ -8864,14 +8948,14 @@
       </p:sp>
       <p:sp>
         <p:nvSpPr>
-          <p:cNvPr id="36" name="TextBox 35"/>
-          <p:cNvSpPr txBox="1"/>
-          <p:nvPr/>
-        </p:nvSpPr>
-        <p:spPr>
-          <a:xfrm>
-            <a:off x="6576529" y="4476902"/>
-            <a:ext cx="2611591" cy="292608"/>
+          <p:cNvPr id="38" name="TextBox 37"/>
+          <p:cNvSpPr txBox="1"/>
+          <p:nvPr/>
+        </p:nvSpPr>
+        <p:spPr>
+          <a:xfrm>
+            <a:off x="585230" y="4535422"/>
+            <a:ext cx="1931261" cy="292608"/>
           </a:xfrm>
           <a:prstGeom prst="rect">
             <a:avLst/>
@@ -8893,7 +8977,7 @@
               </a:spcAft>
             </a:pPr>
             <a:r>
-              <a:rPr sz="1120" b="1" i="0">
+              <a:rPr sz="1000" b="1" i="0">
                 <a:solidFill>
                   <a:srgbClr val="314359"/>
                 </a:solidFill>
@@ -8906,14 +8990,14 @@
       </p:sp>
       <p:sp>
         <p:nvSpPr>
-          <p:cNvPr id="37" name="TextBox 36"/>
-          <p:cNvSpPr txBox="1"/>
-          <p:nvPr/>
-        </p:nvSpPr>
-        <p:spPr>
-          <a:xfrm>
-            <a:off x="6576529" y="4769510"/>
-            <a:ext cx="2611591" cy="243840"/>
+          <p:cNvPr id="39" name="TextBox 38"/>
+          <p:cNvSpPr txBox="1"/>
+          <p:nvPr/>
+        </p:nvSpPr>
+        <p:spPr>
+          <a:xfrm>
+            <a:off x="585230" y="4818277"/>
+            <a:ext cx="1931261" cy="234086"/>
           </a:xfrm>
           <a:prstGeom prst="rect">
             <a:avLst/>
@@ -8935,7 +9019,7 @@
               </a:spcAft>
             </a:pPr>
             <a:r>
-              <a:rPr sz="760" b="1" i="0">
+              <a:rPr sz="680" b="1" i="0">
                 <a:solidFill>
                   <a:srgbClr val="314359"/>
                 </a:solidFill>
@@ -8948,14 +9032,14 @@
       </p:sp>
       <p:sp>
         <p:nvSpPr>
-          <p:cNvPr id="38" name="TextBox 37"/>
-          <p:cNvSpPr txBox="1"/>
-          <p:nvPr/>
-        </p:nvSpPr>
-        <p:spPr>
-          <a:xfrm>
-            <a:off x="6576529" y="5052364"/>
-            <a:ext cx="2575014" cy="1072896"/>
+          <p:cNvPr id="40" name="TextBox 39"/>
+          <p:cNvSpPr txBox="1"/>
+          <p:nvPr/>
+        </p:nvSpPr>
+        <p:spPr>
+          <a:xfrm>
+            <a:off x="585230" y="5071870"/>
+            <a:ext cx="1916630" cy="682752"/>
           </a:xfrm>
           <a:prstGeom prst="rect">
             <a:avLst/>
@@ -8970,34 +9054,122 @@
           <a:p>
             <a:pPr algn="l">
               <a:lnSpc>
-                <a:spcPct val="113000"/>
-              </a:lnSpc>
-              <a:spcAft>
-                <a:spcPts val="0"/>
-              </a:spcAft>
-            </a:pPr>
-            <a:r>
-              <a:rPr sz="800" b="0" i="0">
+                <a:spcPct val="110000"/>
+              </a:lnSpc>
+              <a:spcAft>
+                <a:spcPts val="0"/>
+              </a:spcAft>
+            </a:pPr>
+            <a:r>
+              <a:rPr sz="720" b="0" i="0">
                 <a:solidFill>
                   <a:srgbClr val="0E1620"/>
                 </a:solidFill>
                 <a:latin typeface="Arial"/>
               </a:rPr>
-              <a:t>Previously COO/CFO at Captor Fund Management; risk manager at Carnegie Investment Bank and AB Industrivärden.</a:t>
-            </a:r>
-          </a:p>
-        </p:txBody>
-      </p:sp>
-      <p:sp>
-        <p:nvSpPr>
-          <p:cNvPr id="39" name="TextBox 38"/>
-          <p:cNvSpPr txBox="1"/>
-          <p:nvPr/>
-        </p:nvSpPr>
-        <p:spPr>
-          <a:xfrm>
-            <a:off x="438922" y="6339840"/>
-            <a:ext cx="8924767" cy="487680"/>
+              <a:t>Ex-COO/CFO of Captor Fund Mgmt; risk manager at Carnegie and AB Industrivärden.</a:t>
+            </a:r>
+          </a:p>
+        </p:txBody>
+      </p:sp>
+      <p:sp>
+        <p:nvSpPr>
+          <p:cNvPr id="41" name="Rectangle 40"/>
+          <p:cNvSpPr/>
+          <p:nvPr/>
+        </p:nvSpPr>
+        <p:spPr>
+          <a:xfrm>
+            <a:off x="2699376" y="4408626"/>
+            <a:ext cx="2165353" cy="1414272"/>
+          </a:xfrm>
+          <a:prstGeom prst="rect">
+            <a:avLst/>
+          </a:prstGeom>
+          <a:solidFill>
+            <a:srgbClr val="F6F7F9"/>
+          </a:solidFill>
+          <a:ln>
+            <a:noFill/>
+          </a:ln>
+          <a:effectLst/>
+        </p:spPr>
+        <p:style>
+          <a:lnRef idx="1">
+            <a:schemeClr val="accent1"/>
+          </a:lnRef>
+          <a:fillRef idx="3">
+            <a:schemeClr val="accent1"/>
+          </a:fillRef>
+          <a:effectRef idx="2">
+            <a:schemeClr val="accent1"/>
+          </a:effectRef>
+          <a:fontRef idx="minor">
+            <a:schemeClr val="lt1"/>
+          </a:fontRef>
+        </p:style>
+        <p:txBody>
+          <a:bodyPr rtlCol="0" anchor="ctr"/>
+          <a:lstStyle/>
+          <a:p>
+            <a:pPr algn="ctr"/>
+          </a:p>
+        </p:txBody>
+      </p:sp>
+      <p:sp>
+        <p:nvSpPr>
+          <p:cNvPr id="42" name="Rectangle 41"/>
+          <p:cNvSpPr/>
+          <p:nvPr/>
+        </p:nvSpPr>
+        <p:spPr>
+          <a:xfrm>
+            <a:off x="2699376" y="4408626"/>
+            <a:ext cx="43892" cy="1414272"/>
+          </a:xfrm>
+          <a:prstGeom prst="rect">
+            <a:avLst/>
+          </a:prstGeom>
+          <a:solidFill>
+            <a:srgbClr val="152130"/>
+          </a:solidFill>
+          <a:ln>
+            <a:noFill/>
+          </a:ln>
+          <a:effectLst/>
+        </p:spPr>
+        <p:style>
+          <a:lnRef idx="1">
+            <a:schemeClr val="accent1"/>
+          </a:lnRef>
+          <a:fillRef idx="3">
+            <a:schemeClr val="accent1"/>
+          </a:fillRef>
+          <a:effectRef idx="2">
+            <a:schemeClr val="accent1"/>
+          </a:effectRef>
+          <a:fontRef idx="minor">
+            <a:schemeClr val="lt1"/>
+          </a:fontRef>
+        </p:style>
+        <p:txBody>
+          <a:bodyPr rtlCol="0" anchor="ctr"/>
+          <a:lstStyle/>
+          <a:p>
+            <a:pPr algn="ctr"/>
+          </a:p>
+        </p:txBody>
+      </p:sp>
+      <p:sp>
+        <p:nvSpPr>
+          <p:cNvPr id="43" name="TextBox 42"/>
+          <p:cNvSpPr txBox="1"/>
+          <p:nvPr/>
+        </p:nvSpPr>
+        <p:spPr>
+          <a:xfrm>
+            <a:off x="2845683" y="4535422"/>
+            <a:ext cx="1931261" cy="292608"/>
           </a:xfrm>
           <a:prstGeom prst="rect">
             <a:avLst/>
@@ -9019,13 +9191,611 @@
               </a:spcAft>
             </a:pPr>
             <a:r>
-              <a:rPr sz="1000" b="0" i="1">
+              <a:rPr sz="1000" b="1" i="0">
                 <a:solidFill>
                   <a:srgbClr val="314359"/>
                 </a:solidFill>
-                <a:latin typeface="Arial"/>
-              </a:rPr>
-              <a:t>Supported by a dedicated fund-operations, risk and technology team — the same unit has compounded capital through every cycle since 1992.</a:t>
+                <a:latin typeface="Times New Roman"/>
+              </a:rPr>
+              <a:t>Grant Loon</a:t>
+            </a:r>
+          </a:p>
+        </p:txBody>
+      </p:sp>
+      <p:sp>
+        <p:nvSpPr>
+          <p:cNvPr id="44" name="TextBox 43"/>
+          <p:cNvSpPr txBox="1"/>
+          <p:nvPr/>
+        </p:nvSpPr>
+        <p:spPr>
+          <a:xfrm>
+            <a:off x="2845683" y="4818277"/>
+            <a:ext cx="1931261" cy="234086"/>
+          </a:xfrm>
+          <a:prstGeom prst="rect">
+            <a:avLst/>
+          </a:prstGeom>
+          <a:noFill/>
+        </p:spPr>
+        <p:txBody>
+          <a:bodyPr wrap="square" anchor="t" lIns="0" rIns="0" tIns="0" bIns="0">
+            <a:spAutoFit/>
+          </a:bodyPr>
+          <a:lstStyle/>
+          <a:p>
+            <a:pPr algn="l">
+              <a:lnSpc>
+                <a:spcPct val="110000"/>
+              </a:lnSpc>
+              <a:spcAft>
+                <a:spcPts val="0"/>
+              </a:spcAft>
+            </a:pPr>
+            <a:r>
+              <a:rPr sz="680" b="1" i="0">
+                <a:solidFill>
+                  <a:srgbClr val="314359"/>
+                </a:solidFill>
+                <a:latin typeface="Arial"/>
+              </a:rPr>
+              <a:t>HEAD OF FUND OPERATIONS</a:t>
+            </a:r>
+          </a:p>
+        </p:txBody>
+      </p:sp>
+      <p:sp>
+        <p:nvSpPr>
+          <p:cNvPr id="45" name="TextBox 44"/>
+          <p:cNvSpPr txBox="1"/>
+          <p:nvPr/>
+        </p:nvSpPr>
+        <p:spPr>
+          <a:xfrm>
+            <a:off x="2845683" y="5071870"/>
+            <a:ext cx="1916630" cy="682752"/>
+          </a:xfrm>
+          <a:prstGeom prst="rect">
+            <a:avLst/>
+          </a:prstGeom>
+          <a:noFill/>
+        </p:spPr>
+        <p:txBody>
+          <a:bodyPr wrap="square" anchor="t" lIns="0" rIns="0" tIns="0" bIns="0">
+            <a:spAutoFit/>
+          </a:bodyPr>
+          <a:lstStyle/>
+          <a:p>
+            <a:pPr algn="l">
+              <a:lnSpc>
+                <a:spcPct val="110000"/>
+              </a:lnSpc>
+              <a:spcAft>
+                <a:spcPts val="0"/>
+              </a:spcAft>
+            </a:pPr>
+            <a:r>
+              <a:rPr sz="720" b="0" i="0">
+                <a:solidFill>
+                  <a:srgbClr val="0E1620"/>
+                </a:solidFill>
+                <a:latin typeface="Arial"/>
+              </a:rPr>
+              <a:t>Ex-COO of Madrague Capital and Port Capital; Soros, Commerzbank, Morgan Stanley.</a:t>
+            </a:r>
+          </a:p>
+        </p:txBody>
+      </p:sp>
+      <p:sp>
+        <p:nvSpPr>
+          <p:cNvPr id="46" name="Rectangle 45"/>
+          <p:cNvSpPr/>
+          <p:nvPr/>
+        </p:nvSpPr>
+        <p:spPr>
+          <a:xfrm>
+            <a:off x="4959829" y="4408626"/>
+            <a:ext cx="2165353" cy="1414272"/>
+          </a:xfrm>
+          <a:prstGeom prst="rect">
+            <a:avLst/>
+          </a:prstGeom>
+          <a:solidFill>
+            <a:srgbClr val="F6F7F9"/>
+          </a:solidFill>
+          <a:ln>
+            <a:noFill/>
+          </a:ln>
+          <a:effectLst/>
+        </p:spPr>
+        <p:style>
+          <a:lnRef idx="1">
+            <a:schemeClr val="accent1"/>
+          </a:lnRef>
+          <a:fillRef idx="3">
+            <a:schemeClr val="accent1"/>
+          </a:fillRef>
+          <a:effectRef idx="2">
+            <a:schemeClr val="accent1"/>
+          </a:effectRef>
+          <a:fontRef idx="minor">
+            <a:schemeClr val="lt1"/>
+          </a:fontRef>
+        </p:style>
+        <p:txBody>
+          <a:bodyPr rtlCol="0" anchor="ctr"/>
+          <a:lstStyle/>
+          <a:p>
+            <a:pPr algn="ctr"/>
+          </a:p>
+        </p:txBody>
+      </p:sp>
+      <p:sp>
+        <p:nvSpPr>
+          <p:cNvPr id="47" name="Rectangle 46"/>
+          <p:cNvSpPr/>
+          <p:nvPr/>
+        </p:nvSpPr>
+        <p:spPr>
+          <a:xfrm>
+            <a:off x="4959829" y="4408626"/>
+            <a:ext cx="43892" cy="1414272"/>
+          </a:xfrm>
+          <a:prstGeom prst="rect">
+            <a:avLst/>
+          </a:prstGeom>
+          <a:solidFill>
+            <a:srgbClr val="152130"/>
+          </a:solidFill>
+          <a:ln>
+            <a:noFill/>
+          </a:ln>
+          <a:effectLst/>
+        </p:spPr>
+        <p:style>
+          <a:lnRef idx="1">
+            <a:schemeClr val="accent1"/>
+          </a:lnRef>
+          <a:fillRef idx="3">
+            <a:schemeClr val="accent1"/>
+          </a:fillRef>
+          <a:effectRef idx="2">
+            <a:schemeClr val="accent1"/>
+          </a:effectRef>
+          <a:fontRef idx="minor">
+            <a:schemeClr val="lt1"/>
+          </a:fontRef>
+        </p:style>
+        <p:txBody>
+          <a:bodyPr rtlCol="0" anchor="ctr"/>
+          <a:lstStyle/>
+          <a:p>
+            <a:pPr algn="ctr"/>
+          </a:p>
+        </p:txBody>
+      </p:sp>
+      <p:sp>
+        <p:nvSpPr>
+          <p:cNvPr id="48" name="TextBox 47"/>
+          <p:cNvSpPr txBox="1"/>
+          <p:nvPr/>
+        </p:nvSpPr>
+        <p:spPr>
+          <a:xfrm>
+            <a:off x="5106137" y="4535422"/>
+            <a:ext cx="1931261" cy="292608"/>
+          </a:xfrm>
+          <a:prstGeom prst="rect">
+            <a:avLst/>
+          </a:prstGeom>
+          <a:noFill/>
+        </p:spPr>
+        <p:txBody>
+          <a:bodyPr wrap="square" anchor="t" lIns="0" rIns="0" tIns="0" bIns="0">
+            <a:spAutoFit/>
+          </a:bodyPr>
+          <a:lstStyle/>
+          <a:p>
+            <a:pPr algn="l">
+              <a:lnSpc>
+                <a:spcPct val="110000"/>
+              </a:lnSpc>
+              <a:spcAft>
+                <a:spcPts val="0"/>
+              </a:spcAft>
+            </a:pPr>
+            <a:r>
+              <a:rPr sz="1000" b="1" i="0">
+                <a:solidFill>
+                  <a:srgbClr val="314359"/>
+                </a:solidFill>
+                <a:latin typeface="Times New Roman"/>
+              </a:rPr>
+              <a:t>Eva Andersson</a:t>
+            </a:r>
+          </a:p>
+        </p:txBody>
+      </p:sp>
+      <p:sp>
+        <p:nvSpPr>
+          <p:cNvPr id="49" name="TextBox 48"/>
+          <p:cNvSpPr txBox="1"/>
+          <p:nvPr/>
+        </p:nvSpPr>
+        <p:spPr>
+          <a:xfrm>
+            <a:off x="5106137" y="4818277"/>
+            <a:ext cx="1931261" cy="234086"/>
+          </a:xfrm>
+          <a:prstGeom prst="rect">
+            <a:avLst/>
+          </a:prstGeom>
+          <a:noFill/>
+        </p:spPr>
+        <p:txBody>
+          <a:bodyPr wrap="square" anchor="t" lIns="0" rIns="0" tIns="0" bIns="0">
+            <a:spAutoFit/>
+          </a:bodyPr>
+          <a:lstStyle/>
+          <a:p>
+            <a:pPr algn="l">
+              <a:lnSpc>
+                <a:spcPct val="110000"/>
+              </a:lnSpc>
+              <a:spcAft>
+                <a:spcPts val="0"/>
+              </a:spcAft>
+            </a:pPr>
+            <a:r>
+              <a:rPr sz="680" b="1" i="0">
+                <a:solidFill>
+                  <a:srgbClr val="314359"/>
+                </a:solidFill>
+                <a:latin typeface="Arial"/>
+              </a:rPr>
+              <a:t>FUND OPERATIONS</a:t>
+            </a:r>
+          </a:p>
+        </p:txBody>
+      </p:sp>
+      <p:sp>
+        <p:nvSpPr>
+          <p:cNvPr id="50" name="TextBox 49"/>
+          <p:cNvSpPr txBox="1"/>
+          <p:nvPr/>
+        </p:nvSpPr>
+        <p:spPr>
+          <a:xfrm>
+            <a:off x="5106137" y="5071870"/>
+            <a:ext cx="1916630" cy="682752"/>
+          </a:xfrm>
+          <a:prstGeom prst="rect">
+            <a:avLst/>
+          </a:prstGeom>
+          <a:noFill/>
+        </p:spPr>
+        <p:txBody>
+          <a:bodyPr wrap="square" anchor="t" lIns="0" rIns="0" tIns="0" bIns="0">
+            <a:spAutoFit/>
+          </a:bodyPr>
+          <a:lstStyle/>
+          <a:p>
+            <a:pPr algn="l">
+              <a:lnSpc>
+                <a:spcPct val="110000"/>
+              </a:lnSpc>
+              <a:spcAft>
+                <a:spcPts val="0"/>
+              </a:spcAft>
+            </a:pPr>
+            <a:r>
+              <a:rPr sz="720" b="0" i="0">
+                <a:solidFill>
+                  <a:srgbClr val="0E1620"/>
+                </a:solidFill>
+                <a:latin typeface="Arial"/>
+              </a:rPr>
+              <a:t>MBA, Business School London; sales-executive background.</a:t>
+            </a:r>
+          </a:p>
+        </p:txBody>
+      </p:sp>
+      <p:sp>
+        <p:nvSpPr>
+          <p:cNvPr id="51" name="Rectangle 50"/>
+          <p:cNvSpPr/>
+          <p:nvPr/>
+        </p:nvSpPr>
+        <p:spPr>
+          <a:xfrm>
+            <a:off x="7220283" y="4408626"/>
+            <a:ext cx="2165353" cy="1414272"/>
+          </a:xfrm>
+          <a:prstGeom prst="rect">
+            <a:avLst/>
+          </a:prstGeom>
+          <a:solidFill>
+            <a:srgbClr val="F6F7F9"/>
+          </a:solidFill>
+          <a:ln>
+            <a:noFill/>
+          </a:ln>
+          <a:effectLst/>
+        </p:spPr>
+        <p:style>
+          <a:lnRef idx="1">
+            <a:schemeClr val="accent1"/>
+          </a:lnRef>
+          <a:fillRef idx="3">
+            <a:schemeClr val="accent1"/>
+          </a:fillRef>
+          <a:effectRef idx="2">
+            <a:schemeClr val="accent1"/>
+          </a:effectRef>
+          <a:fontRef idx="minor">
+            <a:schemeClr val="lt1"/>
+          </a:fontRef>
+        </p:style>
+        <p:txBody>
+          <a:bodyPr rtlCol="0" anchor="ctr"/>
+          <a:lstStyle/>
+          <a:p>
+            <a:pPr algn="ctr"/>
+          </a:p>
+        </p:txBody>
+      </p:sp>
+      <p:sp>
+        <p:nvSpPr>
+          <p:cNvPr id="52" name="Rectangle 51"/>
+          <p:cNvSpPr/>
+          <p:nvPr/>
+        </p:nvSpPr>
+        <p:spPr>
+          <a:xfrm>
+            <a:off x="7220283" y="4408626"/>
+            <a:ext cx="43892" cy="1414272"/>
+          </a:xfrm>
+          <a:prstGeom prst="rect">
+            <a:avLst/>
+          </a:prstGeom>
+          <a:solidFill>
+            <a:srgbClr val="152130"/>
+          </a:solidFill>
+          <a:ln>
+            <a:noFill/>
+          </a:ln>
+          <a:effectLst/>
+        </p:spPr>
+        <p:style>
+          <a:lnRef idx="1">
+            <a:schemeClr val="accent1"/>
+          </a:lnRef>
+          <a:fillRef idx="3">
+            <a:schemeClr val="accent1"/>
+          </a:fillRef>
+          <a:effectRef idx="2">
+            <a:schemeClr val="accent1"/>
+          </a:effectRef>
+          <a:fontRef idx="minor">
+            <a:schemeClr val="lt1"/>
+          </a:fontRef>
+        </p:style>
+        <p:txBody>
+          <a:bodyPr rtlCol="0" anchor="ctr"/>
+          <a:lstStyle/>
+          <a:p>
+            <a:pPr algn="ctr"/>
+          </a:p>
+        </p:txBody>
+      </p:sp>
+      <p:sp>
+        <p:nvSpPr>
+          <p:cNvPr id="53" name="TextBox 52"/>
+          <p:cNvSpPr txBox="1"/>
+          <p:nvPr/>
+        </p:nvSpPr>
+        <p:spPr>
+          <a:xfrm>
+            <a:off x="7366590" y="4535422"/>
+            <a:ext cx="1931261" cy="292608"/>
+          </a:xfrm>
+          <a:prstGeom prst="rect">
+            <a:avLst/>
+          </a:prstGeom>
+          <a:noFill/>
+        </p:spPr>
+        <p:txBody>
+          <a:bodyPr wrap="square" anchor="t" lIns="0" rIns="0" tIns="0" bIns="0">
+            <a:spAutoFit/>
+          </a:bodyPr>
+          <a:lstStyle/>
+          <a:p>
+            <a:pPr algn="l">
+              <a:lnSpc>
+                <a:spcPct val="110000"/>
+              </a:lnSpc>
+              <a:spcAft>
+                <a:spcPts val="0"/>
+              </a:spcAft>
+            </a:pPr>
+            <a:r>
+              <a:rPr sz="1000" b="1" i="0">
+                <a:solidFill>
+                  <a:srgbClr val="314359"/>
+                </a:solidFill>
+                <a:latin typeface="Times New Roman"/>
+              </a:rPr>
+              <a:t>Zetong Liu</a:t>
+            </a:r>
+          </a:p>
+        </p:txBody>
+      </p:sp>
+      <p:sp>
+        <p:nvSpPr>
+          <p:cNvPr id="54" name="TextBox 53"/>
+          <p:cNvSpPr txBox="1"/>
+          <p:nvPr/>
+        </p:nvSpPr>
+        <p:spPr>
+          <a:xfrm>
+            <a:off x="7366590" y="4818277"/>
+            <a:ext cx="1931261" cy="234086"/>
+          </a:xfrm>
+          <a:prstGeom prst="rect">
+            <a:avLst/>
+          </a:prstGeom>
+          <a:noFill/>
+        </p:spPr>
+        <p:txBody>
+          <a:bodyPr wrap="square" anchor="t" lIns="0" rIns="0" tIns="0" bIns="0">
+            <a:spAutoFit/>
+          </a:bodyPr>
+          <a:lstStyle/>
+          <a:p>
+            <a:pPr algn="l">
+              <a:lnSpc>
+                <a:spcPct val="110000"/>
+              </a:lnSpc>
+              <a:spcAft>
+                <a:spcPts val="0"/>
+              </a:spcAft>
+            </a:pPr>
+            <a:r>
+              <a:rPr sz="680" b="1" i="0">
+                <a:solidFill>
+                  <a:srgbClr val="314359"/>
+                </a:solidFill>
+                <a:latin typeface="Arial"/>
+              </a:rPr>
+              <a:t>TECHNOLOGY</a:t>
+            </a:r>
+          </a:p>
+        </p:txBody>
+      </p:sp>
+      <p:sp>
+        <p:nvSpPr>
+          <p:cNvPr id="55" name="TextBox 54"/>
+          <p:cNvSpPr txBox="1"/>
+          <p:nvPr/>
+        </p:nvSpPr>
+        <p:spPr>
+          <a:xfrm>
+            <a:off x="7366590" y="5071870"/>
+            <a:ext cx="1916630" cy="682752"/>
+          </a:xfrm>
+          <a:prstGeom prst="rect">
+            <a:avLst/>
+          </a:prstGeom>
+          <a:noFill/>
+        </p:spPr>
+        <p:txBody>
+          <a:bodyPr wrap="square" anchor="t" lIns="0" rIns="0" tIns="0" bIns="0">
+            <a:spAutoFit/>
+          </a:bodyPr>
+          <a:lstStyle/>
+          <a:p>
+            <a:pPr algn="l">
+              <a:lnSpc>
+                <a:spcPct val="110000"/>
+              </a:lnSpc>
+              <a:spcAft>
+                <a:spcPts val="0"/>
+              </a:spcAft>
+            </a:pPr>
+            <a:r>
+              <a:rPr sz="720" b="0" i="0">
+                <a:solidFill>
+                  <a:srgbClr val="0E1620"/>
+                </a:solidFill>
+                <a:latin typeface="Arial"/>
+              </a:rPr>
+              <a:t>MSc applied &amp; computational mathematics, KTH; projects for the Swiss Finance Institute / EPFL.</a:t>
+            </a:r>
+          </a:p>
+        </p:txBody>
+      </p:sp>
+      <p:sp>
+        <p:nvSpPr>
+          <p:cNvPr id="56" name="Rectangle 55"/>
+          <p:cNvSpPr/>
+          <p:nvPr/>
+        </p:nvSpPr>
+        <p:spPr>
+          <a:xfrm>
+            <a:off x="438922" y="6164275"/>
+            <a:ext cx="8873559" cy="604723"/>
+          </a:xfrm>
+          <a:prstGeom prst="rect">
+            <a:avLst/>
+          </a:prstGeom>
+          <a:solidFill>
+            <a:srgbClr val="152130"/>
+          </a:solidFill>
+          <a:ln>
+            <a:noFill/>
+          </a:ln>
+          <a:effectLst/>
+        </p:spPr>
+        <p:style>
+          <a:lnRef idx="1">
+            <a:schemeClr val="accent1"/>
+          </a:lnRef>
+          <a:fillRef idx="3">
+            <a:schemeClr val="accent1"/>
+          </a:fillRef>
+          <a:effectRef idx="2">
+            <a:schemeClr val="accent1"/>
+          </a:effectRef>
+          <a:fontRef idx="minor">
+            <a:schemeClr val="lt1"/>
+          </a:fontRef>
+        </p:style>
+        <p:txBody>
+          <a:bodyPr rtlCol="0" anchor="ctr"/>
+          <a:lstStyle/>
+          <a:p>
+            <a:pPr algn="ctr"/>
+          </a:p>
+        </p:txBody>
+      </p:sp>
+      <p:sp>
+        <p:nvSpPr>
+          <p:cNvPr id="57" name="TextBox 56"/>
+          <p:cNvSpPr txBox="1"/>
+          <p:nvPr/>
+        </p:nvSpPr>
+        <p:spPr>
+          <a:xfrm>
+            <a:off x="585230" y="6164275"/>
+            <a:ext cx="8558998" cy="604723"/>
+          </a:xfrm>
+          <a:prstGeom prst="rect">
+            <a:avLst/>
+          </a:prstGeom>
+          <a:noFill/>
+        </p:spPr>
+        <p:txBody>
+          <a:bodyPr wrap="square" anchor="ctr" lIns="0" rIns="0" tIns="0" bIns="0">
+            <a:spAutoFit/>
+          </a:bodyPr>
+          <a:lstStyle/>
+          <a:p>
+            <a:pPr algn="l">
+              <a:lnSpc>
+                <a:spcPct val="110000"/>
+              </a:lnSpc>
+              <a:spcAft>
+                <a:spcPts val="0"/>
+              </a:spcAft>
+            </a:pPr>
+            <a:r>
+              <a:rPr sz="960" b="0" i="1">
+                <a:solidFill>
+                  <a:srgbClr val="FFFFFF"/>
+                </a:solidFill>
+                <a:latin typeface="Arial"/>
+              </a:rPr>
+              <a:t>Segregation of duties protects investors: operations, valuation and risk sit apart from investment decisions — with SEB (custody), MUFG (administration) and KPMG (audit) independently verifying every NAV and fee.</a:t>
             </a:r>
           </a:p>
         </p:txBody>

--- a/Athanase_Engaged_Ownership_Allocator_Deck.pptx
+++ b/Athanase_Engaged_Ownership_Allocator_Deck.pptx
@@ -5869,7 +5869,7 @@
                 </a:solidFill>
                 <a:latin typeface="Times New Roman"/>
               </a:rPr>
-              <a:t>18%</a:t>
+              <a:t>16%</a:t>
             </a:r>
           </a:p>
           <a:p>
@@ -5888,7 +5888,7 @@
                 </a:solidFill>
                 <a:latin typeface="Arial"/>
               </a:rPr>
-              <a:t>net annual IRR</a:t>
+              <a:t>annualised NET</a:t>
             </a:r>
           </a:p>
           <a:p>
@@ -5907,7 +5907,7 @@
                 </a:solidFill>
                 <a:latin typeface="Arial"/>
               </a:rPr>
-              <a:t>since inception</a:t>
+              <a:t>return since 2006</a:t>
             </a:r>
           </a:p>
         </p:txBody>
@@ -6117,7 +6117,7 @@
                 </a:solidFill>
                 <a:latin typeface="Times New Roman"/>
               </a:rPr>
-              <a:t>7.1%</a:t>
+              <a:t>18×</a:t>
             </a:r>
           </a:p>
           <a:p>
@@ -6136,7 +6136,7 @@
                 </a:solidFill>
                 <a:latin typeface="Arial"/>
               </a:rPr>
-              <a:t>minimum annual</a:t>
+              <a:t>growth of capital</a:t>
             </a:r>
           </a:p>
           <a:p>
@@ -6155,7 +6155,7 @@
                 </a:solidFill>
                 <a:latin typeface="Arial"/>
               </a:rPr>
-              <a:t>net return*</a:t>
+              <a:t>since 2006*</a:t>
             </a:r>
           </a:p>
         </p:txBody>
@@ -6206,7 +6206,7 @@
                 </a:solidFill>
                 <a:latin typeface="Arial"/>
               </a:rPr>
-              <a:t>Average net return of 18.6%</a:t>
+              <a:t>16.1% annualised NET</a:t>
             </a:r>
             <a:r>
               <a:rPr sz="1200">
@@ -6215,7 +6215,7 @@
                 </a:solidFill>
                 <a:latin typeface="Arial"/>
               </a:rPr>
-              <a:t>  (17.1% vs MSCI IMI 7.6% since inception), regardless of entry month.</a:t>
+              <a:t>  vs MSCI IMI 6.1% — net of all fees, since 2006.</a:t>
             </a:r>
           </a:p>
           <a:p>
@@ -6331,7 +6331,7 @@
                 </a:solidFill>
                 <a:latin typeface="Arial"/>
               </a:rPr>
-              <a:t>*Invested any month since 2006 and held to Dec 2025. Inception 2015-02-23.</a:t>
+              <a:t>*Net monthly returns over 19.5 invested years (Öresund/Creades Jan 2006–Jun 2014; AIPFII from 23 Feb 2015). Annualised on actual invested time. Past performance is not indicative of future results.</a:t>
             </a:r>
           </a:p>
         </p:txBody>
@@ -26580,7 +26580,7 @@
                 </a:solidFill>
                 <a:latin typeface="Arial"/>
               </a:rPr>
-              <a:t>Losing less in drawdowns leaves more capital working in the recovery — the engine behind ~18x growth vs ~14x for MSCI IMI since 2006.</a:t>
+              <a:t>Losing less in drawdowns leaves more capital working in the recovery — the engine behind 18× growth of capital vs 3.2× for the market since 2006.</a:t>
             </a:r>
           </a:p>
         </p:txBody>
@@ -41918,7 +41918,7 @@
                 </a:solidFill>
                 <a:latin typeface="Arial"/>
               </a:rPr>
-              <a:t>A prospective LP’s investment committee reconciled the security-level (StatPro) data and the 236-month LP-level NET return series.</a:t>
+              <a:t>A prospective LP’s investment committee reconciled the security-level (StatPro) data against the LP-level NET return series.</a:t>
             </a:r>
           </a:p>
         </p:txBody>
@@ -42046,7 +42046,7 @@
                 </a:solidFill>
                 <a:latin typeface="Times New Roman"/>
               </a:rPr>
-              <a:t>+1,402%</a:t>
+              <a:t>+1,743%</a:t>
             </a:r>
           </a:p>
           <a:p>
@@ -42084,7 +42084,7 @@
                 </a:solidFill>
                 <a:latin typeface="Arial"/>
               </a:rPr>
-              <a:t>over 19.7 years</a:t>
+              <a:t>over 19.5 years</a:t>
             </a:r>
           </a:p>
         </p:txBody>
@@ -42170,7 +42170,7 @@
                 </a:solidFill>
                 <a:latin typeface="Times New Roman"/>
               </a:rPr>
-              <a:t>+14.8%</a:t>
+              <a:t>+16.1%</a:t>
             </a:r>
           </a:p>
           <a:p>
@@ -42208,7 +42208,7 @@
                 </a:solidFill>
                 <a:latin typeface="Arial"/>
               </a:rPr>
-              <a:t>(time-weighted, all fees)</a:t>
+              <a:t>(net of all fees)</a:t>
             </a:r>
           </a:p>
         </p:txBody>
@@ -42294,7 +42294,7 @@
                 </a:solidFill>
                 <a:latin typeface="Times New Roman"/>
               </a:rPr>
-              <a:t>+6.0 pts</a:t>
+              <a:t>+10 pts</a:t>
             </a:r>
           </a:p>
           <a:p>
@@ -42332,7 +42332,7 @@
                 </a:solidFill>
                 <a:latin typeface="Arial"/>
               </a:rPr>
-              <a:t>net, for 20 years</a:t>
+              <a:t>net, vs the market</a:t>
             </a:r>
           </a:p>
         </p:txBody>
@@ -42418,7 +42418,7 @@
                 </a:solidFill>
                 <a:latin typeface="Times New Roman"/>
               </a:rPr>
-              <a:t>3.11×</a:t>
+              <a:t>5.8×</a:t>
             </a:r>
           </a:p>
           <a:p>
@@ -46119,7 +46119,7 @@
                 </a:solidFill>
                 <a:latin typeface="Times New Roman"/>
               </a:rPr>
-              <a:t>16.0%</a:t>
+              <a:t>16.1%</a:t>
             </a:r>
           </a:p>
         </p:txBody>
@@ -47199,7 +47199,7 @@
                 </a:solidFill>
                 <a:latin typeface="Arial"/>
               </a:rPr>
-              <a:t>134</a:t>
+              <a:t>135</a:t>
             </a:r>
           </a:p>
         </p:txBody>
@@ -47285,7 +47285,7 @@
                 </a:solidFill>
                 <a:latin typeface="Arial"/>
               </a:rPr>
-              <a:t>151</a:t>
+              <a:t>152</a:t>
             </a:r>
           </a:p>
         </p:txBody>
@@ -47543,7 +47543,7 @@
                 </a:solidFill>
                 <a:latin typeface="Arial"/>
               </a:rPr>
-              <a:t>156</a:t>
+              <a:t>157</a:t>
             </a:r>
           </a:p>
         </p:txBody>
@@ -47629,7 +47629,7 @@
                 </a:solidFill>
                 <a:latin typeface="Arial"/>
               </a:rPr>
-              <a:t>210</a:t>
+              <a:t>211</a:t>
             </a:r>
           </a:p>
         </p:txBody>
@@ -47715,7 +47715,7 @@
                 </a:solidFill>
                 <a:latin typeface="Arial"/>
               </a:rPr>
-              <a:t>283</a:t>
+              <a:t>284</a:t>
             </a:r>
           </a:p>
         </p:txBody>
@@ -47801,7 +47801,7 @@
                 </a:solidFill>
                 <a:latin typeface="Arial"/>
               </a:rPr>
-              <a:t>443</a:t>
+              <a:t>445</a:t>
             </a:r>
           </a:p>
         </p:txBody>
@@ -48403,7 +48403,7 @@
                 </a:solidFill>
                 <a:latin typeface="Arial"/>
               </a:rPr>
-              <a:t>132</a:t>
+              <a:t>133</a:t>
             </a:r>
           </a:p>
         </p:txBody>
@@ -48575,7 +48575,7 @@
                 </a:solidFill>
                 <a:latin typeface="Arial"/>
               </a:rPr>
-              <a:t>220</a:t>
+              <a:t>221</a:t>
             </a:r>
           </a:p>
         </p:txBody>
@@ -48661,7 +48661,7 @@
                 </a:solidFill>
                 <a:latin typeface="Arial"/>
               </a:rPr>
-              <a:t>328</a:t>
+              <a:t>330</a:t>
             </a:r>
           </a:p>
         </p:txBody>
@@ -60900,7 +60900,7 @@
                 </a:solidFill>
                 <a:latin typeface="Arial"/>
               </a:rPr>
-              <a:t>All Athanase figures are computed from the fund’s audited net monthly return series (235 months, 2006–2025):</a:t>
+              <a:t>All Athanase figures are computed from the fund’s audited net monthly return series across two vehicles (Öresund/Creades Jan 2006–Jun 2014; AIPFII from 23 Feb 2015):</a:t>
             </a:r>
           </a:p>
           <a:p>
@@ -60919,7 +60919,7 @@
                 </a:solidFill>
                 <a:latin typeface="Arial"/>
               </a:rPr>
-              <a:t>•  Annualised return — geometric compounding of monthly net returns (16.0%).</a:t>
+              <a:t>•  Annualised return — cumulative net return compounded, then annualised over actual invested time (19.51 yrs, excluding the 2014–15 setup gap): 16.1%.</a:t>
             </a:r>
           </a:p>
           <a:p>

--- a/Athanase_Engaged_Ownership_Allocator_Deck.pptx
+++ b/Athanase_Engaged_Ownership_Allocator_Deck.pptx
@@ -5869,7 +5869,7 @@
                 </a:solidFill>
                 <a:latin typeface="Times New Roman"/>
               </a:rPr>
-              <a:t>16%</a:t>
+              <a:t>19%</a:t>
             </a:r>
           </a:p>
           <a:p>
@@ -5888,7 +5888,7 @@
                 </a:solidFill>
                 <a:latin typeface="Arial"/>
               </a:rPr>
-              <a:t>annualised NET</a:t>
+              <a:t>avg annualised NET,</a:t>
             </a:r>
           </a:p>
           <a:p>
@@ -5907,7 +5907,7 @@
                 </a:solidFill>
                 <a:latin typeface="Arial"/>
               </a:rPr>
-              <a:t>return since 2006</a:t>
+              <a:t>any entry month*</a:t>
             </a:r>
           </a:p>
         </p:txBody>
@@ -6155,7 +6155,7 @@
                 </a:solidFill>
                 <a:latin typeface="Arial"/>
               </a:rPr>
-              <a:t>since 2006*</a:t>
+              <a:t>since 2006</a:t>
             </a:r>
           </a:p>
         </p:txBody>
@@ -6206,7 +6206,7 @@
                 </a:solidFill>
                 <a:latin typeface="Arial"/>
               </a:rPr>
-              <a:t>16.1% annualised NET</a:t>
+              <a:t>~19% average annualised return*</a:t>
             </a:r>
             <a:r>
               <a:rPr sz="1200">
@@ -6215,7 +6215,7 @@
                 </a:solidFill>
                 <a:latin typeface="Arial"/>
               </a:rPr>
-              <a:t>  vs MSCI IMI 6.1% — net of all fees, since 2006.</a:t>
+              <a:t>  whatever month you invested and held to today — entry timing has barely mattered.</a:t>
             </a:r>
           </a:p>
           <a:p>
@@ -6243,7 +6243,7 @@
                 </a:solidFill>
                 <a:latin typeface="Arial"/>
               </a:rPr>
-              <a:t>+14.5% EBITA growth</a:t>
+              <a:t>16.1% time-weighted NET since 2006</a:t>
             </a:r>
             <a:r>
               <a:rPr sz="1200">
@@ -6252,7 +6252,7 @@
                 </a:solidFill>
                 <a:latin typeface="Arial"/>
               </a:rPr>
-              <a:t>  in portfolio companies during the ownership period.</a:t>
+              <a:t>  vs MSCI IMI 6.1% — net of all fees.</a:t>
             </a:r>
           </a:p>
           <a:p>
@@ -6331,7 +6331,7 @@
                 </a:solidFill>
                 <a:latin typeface="Arial"/>
               </a:rPr>
-              <a:t>*Net monthly returns over 19.5 invested years (Öresund/Creades Jan 2006–Jun 2014; AIPFII from 23 Feb 2015). Annualised on actual invested time. Past performance is not indicative of future results.</a:t>
+              <a:t>*Average of the annualised NET return earned investing in each individual month and holding to the end (107 entry months, AIPFII). Time-weighted figure annualised over actual invested time. Past performance is not indicative of future results.</a:t>
             </a:r>
           </a:p>
         </p:txBody>

--- a/Athanase_Engaged_Ownership_Allocator_Deck.pptx
+++ b/Athanase_Engaged_Ownership_Allocator_Deck.pptx
@@ -5993,7 +5993,7 @@
                 </a:solidFill>
                 <a:latin typeface="Times New Roman"/>
               </a:rPr>
-              <a:t>20 yrs</a:t>
+              <a:t>7%</a:t>
             </a:r>
           </a:p>
           <a:p>
@@ -6012,7 +6012,7 @@
                 </a:solidFill>
                 <a:latin typeface="Arial"/>
               </a:rPr>
-              <a:t>team working</a:t>
+              <a:t>worst-ever entry,</a:t>
             </a:r>
           </a:p>
           <a:p>
@@ -6031,7 +6031,7 @@
                 </a:solidFill>
                 <a:latin typeface="Arial"/>
               </a:rPr>
-              <a:t>together</a:t>
+              <a:t>still positive*</a:t>
             </a:r>
           </a:p>
         </p:txBody>
@@ -6243,6 +6243,43 @@
                 </a:solidFill>
                 <a:latin typeface="Arial"/>
               </a:rPr>
+              <a:t>~7% in the single worst entry month</a:t>
+            </a:r>
+            <a:r>
+              <a:rPr sz="1200">
+                <a:solidFill>
+                  <a:srgbClr val="0E1620"/>
+                </a:solidFill>
+                <a:latin typeface="Arial"/>
+              </a:rPr>
+              <a:t>  even the unluckiest possible entry still compounded at a mid-single-digit net return — no investor lost over the holding period.</a:t>
+            </a:r>
+          </a:p>
+          <a:p>
+            <a:pPr marL="175264" indent="-175264">
+              <a:lnSpc>
+                <a:spcPct val="112000"/>
+              </a:lnSpc>
+              <a:spcAft>
+                <a:spcPts val="1000"/>
+              </a:spcAft>
+            </a:pPr>
+            <a:r>
+              <a:rPr sz="1200" b="1">
+                <a:solidFill>
+                  <a:srgbClr val="314359"/>
+                </a:solidFill>
+                <a:latin typeface="Arial"/>
+              </a:rPr>
+              <a:t>›  </a:t>
+            </a:r>
+            <a:r>
+              <a:rPr sz="1200" b="1">
+                <a:solidFill>
+                  <a:srgbClr val="314359"/>
+                </a:solidFill>
+                <a:latin typeface="Arial"/>
+              </a:rPr>
               <a:t>16.1% time-weighted NET since 2006</a:t>
             </a:r>
             <a:r>
@@ -6253,43 +6290,6 @@
                 <a:latin typeface="Arial"/>
               </a:rPr>
               <a:t>  vs MSCI IMI 6.1% — net of all fees.</a:t>
-            </a:r>
-          </a:p>
-          <a:p>
-            <a:pPr marL="175264" indent="-175264">
-              <a:lnSpc>
-                <a:spcPct val="112000"/>
-              </a:lnSpc>
-              <a:spcAft>
-                <a:spcPts val="1000"/>
-              </a:spcAft>
-            </a:pPr>
-            <a:r>
-              <a:rPr sz="1200" b="1">
-                <a:solidFill>
-                  <a:srgbClr val="314359"/>
-                </a:solidFill>
-                <a:latin typeface="Arial"/>
-              </a:rPr>
-              <a:t>›  </a:t>
-            </a:r>
-            <a:r>
-              <a:rPr sz="1200" b="1">
-                <a:solidFill>
-                  <a:srgbClr val="314359"/>
-                </a:solidFill>
-                <a:latin typeface="Arial"/>
-              </a:rPr>
-              <a:t>+0.2% in down markets</a:t>
-            </a:r>
-            <a:r>
-              <a:rPr sz="1200">
-                <a:solidFill>
-                  <a:srgbClr val="0E1620"/>
-                </a:solidFill>
-                <a:latin typeface="Arial"/>
-              </a:rPr>
-              <a:t>  versus the market at –1.7% — downside protection when it matters most.</a:t>
             </a:r>
           </a:p>
         </p:txBody>

--- a/Athanase_Engaged_Ownership_Allocator_Deck.pptx
+++ b/Athanase_Engaged_Ownership_Allocator_Deck.pptx
@@ -6070,7 +6070,7 @@
                 </a:solidFill>
                 <a:latin typeface="Times New Roman"/>
               </a:rPr>
-              <a:t>2.1 Athanase at a glance</a:t>
+              <a:t>2.1.1 Athanase at a glance</a:t>
             </a:r>
           </a:p>
         </p:txBody>
@@ -6998,7 +6998,7 @@
                 </a:solidFill>
                 <a:latin typeface="Times New Roman"/>
               </a:rPr>
-              <a:t>2.2 An integrated team, 20 years together</a:t>
+              <a:t>2.1.2 An integrated team, 20 years together</a:t>
             </a:r>
           </a:p>
         </p:txBody>
@@ -8068,7 +8068,7 @@
                 </a:solidFill>
                 <a:latin typeface="Times New Roman"/>
               </a:rPr>
-              <a:t>2.3 The people behind the track record</a:t>
+              <a:t>2.1.3 The people behind the track record</a:t>
             </a:r>
           </a:p>
         </p:txBody>
@@ -10504,7 +10504,7 @@
                 </a:solidFill>
                 <a:latin typeface="Times New Roman"/>
               </a:rPr>
-              <a:t>2.4 A disciplined, repeatable selection process</a:t>
+              <a:t>2.1.4 A disciplined, repeatable selection process</a:t>
             </a:r>
           </a:p>
         </p:txBody>
@@ -12040,7 +12040,7 @@
                 </a:solidFill>
                 <a:latin typeface="Times New Roman"/>
               </a:rPr>
-              <a:t>2.5 A risk system that engineers out permanent loss</a:t>
+              <a:t>2.1.5 A risk system that engineers out permanent loss</a:t>
             </a:r>
           </a:p>
         </p:txBody>
@@ -13148,7 +13148,7 @@
                 </a:solidFill>
                 <a:latin typeface="Times New Roman"/>
               </a:rPr>
-              <a:t>2.6 The ownership playbook, honed over 40 investments</a:t>
+              <a:t>2.1.6 The ownership playbook, honed over 40 investments</a:t>
             </a:r>
           </a:p>
         </p:txBody>
@@ -15417,7 +15417,7 @@
                 </a:solidFill>
                 <a:latin typeface="Arial"/>
               </a:rPr>
-              <a:t>2.1   </a:t>
+              <a:t>2.1.1   </a:t>
             </a:r>
             <a:r>
               <a:rPr sz="840">
@@ -15445,7 +15445,7 @@
                 </a:solidFill>
                 <a:latin typeface="Arial"/>
               </a:rPr>
-              <a:t>2.2   </a:t>
+              <a:t>2.1.2   </a:t>
             </a:r>
             <a:r>
               <a:rPr sz="840">
@@ -15473,7 +15473,7 @@
                 </a:solidFill>
                 <a:latin typeface="Arial"/>
               </a:rPr>
-              <a:t>2.3   </a:t>
+              <a:t>2.1.3   </a:t>
             </a:r>
             <a:r>
               <a:rPr sz="840">
@@ -15501,7 +15501,7 @@
                 </a:solidFill>
                 <a:latin typeface="Arial"/>
               </a:rPr>
-              <a:t>2.4   </a:t>
+              <a:t>2.1.4   </a:t>
             </a:r>
             <a:r>
               <a:rPr sz="840">
@@ -15538,7 +15538,7 @@
                 </a:solidFill>
                 <a:latin typeface="Arial"/>
               </a:rPr>
-              <a:t>2.5   </a:t>
+              <a:t>2.1.5   </a:t>
             </a:r>
             <a:r>
               <a:rPr sz="840">
@@ -15575,7 +15575,7 @@
                 </a:solidFill>
                 <a:latin typeface="Arial"/>
               </a:rPr>
-              <a:t>2.6   </a:t>
+              <a:t>2.1.6   </a:t>
             </a:r>
             <a:r>
               <a:rPr sz="840">
@@ -15603,7 +15603,7 @@
                 </a:solidFill>
                 <a:latin typeface="Arial"/>
               </a:rPr>
-              <a:t>2.7   </a:t>
+              <a:t>2.2.1   </a:t>
             </a:r>
             <a:r>
               <a:rPr sz="840">
@@ -15640,7 +15640,7 @@
                 </a:solidFill>
                 <a:latin typeface="Arial"/>
               </a:rPr>
-              <a:t>2.8   </a:t>
+              <a:t>2.2.2   </a:t>
             </a:r>
             <a:r>
               <a:rPr sz="840">
@@ -15677,7 +15677,7 @@
                 </a:solidFill>
                 <a:latin typeface="Arial"/>
               </a:rPr>
-              <a:t>2.9   </a:t>
+              <a:t>2.2.3   </a:t>
             </a:r>
             <a:r>
               <a:rPr sz="840">
@@ -15714,7 +15714,7 @@
                 </a:solidFill>
                 <a:latin typeface="Arial"/>
               </a:rPr>
-              <a:t>2.10   </a:t>
+              <a:t>2.2.4   </a:t>
             </a:r>
             <a:r>
               <a:rPr sz="840">
@@ -15751,7 +15751,7 @@
                 </a:solidFill>
                 <a:latin typeface="Arial"/>
               </a:rPr>
-              <a:t>2.11   </a:t>
+              <a:t>2.2.5   </a:t>
             </a:r>
             <a:r>
               <a:rPr sz="840">
@@ -15788,7 +15788,7 @@
                 </a:solidFill>
                 <a:latin typeface="Arial"/>
               </a:rPr>
-              <a:t>2.12   </a:t>
+              <a:t>2.3.1   </a:t>
             </a:r>
             <a:r>
               <a:rPr sz="840">
@@ -15816,7 +15816,7 @@
                 </a:solidFill>
                 <a:latin typeface="Arial"/>
               </a:rPr>
-              <a:t>2.13   </a:t>
+              <a:t>2.3.2   </a:t>
             </a:r>
             <a:r>
               <a:rPr sz="840">
@@ -15844,7 +15844,7 @@
                 </a:solidFill>
                 <a:latin typeface="Arial"/>
               </a:rPr>
-              <a:t>2.14   </a:t>
+              <a:t>2.3.3   </a:t>
             </a:r>
             <a:r>
               <a:rPr sz="840">
@@ -15881,7 +15881,7 @@
                 </a:solidFill>
                 <a:latin typeface="Arial"/>
               </a:rPr>
-              <a:t>2.15   </a:t>
+              <a:t>2.3.4   </a:t>
             </a:r>
             <a:r>
               <a:rPr sz="840">
@@ -15918,7 +15918,7 @@
                 </a:solidFill>
                 <a:latin typeface="Arial"/>
               </a:rPr>
-              <a:t>2.16   </a:t>
+              <a:t>2.4.1   </a:t>
             </a:r>
             <a:r>
               <a:rPr sz="840">
@@ -15955,7 +15955,7 @@
                 </a:solidFill>
                 <a:latin typeface="Arial"/>
               </a:rPr>
-              <a:t>2.17   </a:t>
+              <a:t>2.4.2   </a:t>
             </a:r>
             <a:r>
               <a:rPr sz="840">
@@ -15992,7 +15992,7 @@
                 </a:solidFill>
                 <a:latin typeface="Arial"/>
               </a:rPr>
-              <a:t>2.18   </a:t>
+              <a:t>2.4.3   </a:t>
             </a:r>
             <a:r>
               <a:rPr sz="840">
@@ -16029,7 +16029,7 @@
                 </a:solidFill>
                 <a:latin typeface="Arial"/>
               </a:rPr>
-              <a:t>2.19   </a:t>
+              <a:t>2.4.4   </a:t>
             </a:r>
             <a:r>
               <a:rPr sz="840">
@@ -16057,7 +16057,7 @@
                 </a:solidFill>
                 <a:latin typeface="Arial"/>
               </a:rPr>
-              <a:t>2.20   </a:t>
+              <a:t>2.4.5   </a:t>
             </a:r>
             <a:r>
               <a:rPr sz="840">
@@ -16085,7 +16085,7 @@
                 </a:solidFill>
                 <a:latin typeface="Arial"/>
               </a:rPr>
-              <a:t>2.21   </a:t>
+              <a:t>2.4.6   </a:t>
             </a:r>
             <a:r>
               <a:rPr sz="840">
@@ -16113,7 +16113,7 @@
                 </a:solidFill>
                 <a:latin typeface="Arial"/>
               </a:rPr>
-              <a:t>2.22   </a:t>
+              <a:t>2.5.1   </a:t>
             </a:r>
             <a:r>
               <a:rPr sz="840">
@@ -16150,7 +16150,7 @@
                 </a:solidFill>
                 <a:latin typeface="Arial"/>
               </a:rPr>
-              <a:t>2.23   </a:t>
+              <a:t>2.5.2   </a:t>
             </a:r>
             <a:r>
               <a:rPr sz="840">
@@ -16187,7 +16187,7 @@
                 </a:solidFill>
                 <a:latin typeface="Arial"/>
               </a:rPr>
-              <a:t>2.24   </a:t>
+              <a:t>2.5.3   </a:t>
             </a:r>
             <a:r>
               <a:rPr sz="840">
@@ -16224,7 +16224,7 @@
                 </a:solidFill>
                 <a:latin typeface="Arial"/>
               </a:rPr>
-              <a:t>2.25   </a:t>
+              <a:t>2.5.4   </a:t>
             </a:r>
             <a:r>
               <a:rPr sz="840">
@@ -16261,7 +16261,7 @@
                 </a:solidFill>
                 <a:latin typeface="Arial"/>
               </a:rPr>
-              <a:t>2.26   </a:t>
+              <a:t>2.6.1   </a:t>
             </a:r>
             <a:r>
               <a:rPr sz="840">
@@ -16298,7 +16298,7 @@
                 </a:solidFill>
                 <a:latin typeface="Arial"/>
               </a:rPr>
-              <a:t>2.27   </a:t>
+              <a:t>2.6.2   </a:t>
             </a:r>
             <a:r>
               <a:rPr sz="840">
@@ -16335,7 +16335,7 @@
                 </a:solidFill>
                 <a:latin typeface="Arial"/>
               </a:rPr>
-              <a:t>2.28   </a:t>
+              <a:t>2.6.3   </a:t>
             </a:r>
             <a:r>
               <a:rPr sz="840">
@@ -16372,7 +16372,7 @@
                 </a:solidFill>
                 <a:latin typeface="Arial"/>
               </a:rPr>
-              <a:t>2.29   </a:t>
+              <a:t>2.6.4   </a:t>
             </a:r>
             <a:r>
               <a:rPr sz="840">
@@ -16409,7 +16409,7 @@
                 </a:solidFill>
                 <a:latin typeface="Arial"/>
               </a:rPr>
-              <a:t>2.30   </a:t>
+              <a:t>2.6.5   </a:t>
             </a:r>
             <a:r>
               <a:rPr sz="840">
@@ -16446,7 +16446,7 @@
                 </a:solidFill>
                 <a:latin typeface="Arial"/>
               </a:rPr>
-              <a:t>2.31   </a:t>
+              <a:t>2.6.6   </a:t>
             </a:r>
             <a:r>
               <a:rPr sz="840">
@@ -16474,7 +16474,7 @@
                 </a:solidFill>
                 <a:latin typeface="Arial"/>
               </a:rPr>
-              <a:t>2.32   </a:t>
+              <a:t>2.6.7   </a:t>
             </a:r>
             <a:r>
               <a:rPr sz="840">
@@ -16739,7 +16739,7 @@
                 </a:solidFill>
                 <a:latin typeface="Times New Roman"/>
               </a:rPr>
-              <a:t>2.7 The inefficiency Athanase harvests</a:t>
+              <a:t>2.2.1 The inefficiency Athanase harvests</a:t>
             </a:r>
           </a:p>
         </p:txBody>
@@ -17310,7 +17310,7 @@
                 </a:solidFill>
                 <a:latin typeface="Times New Roman"/>
               </a:rPr>
-              <a:t>2.8 We don’t buy broken companies — we buy hidden cores</a:t>
+              <a:t>2.2.2 We don’t buy broken companies — we buy hidden cores</a:t>
             </a:r>
           </a:p>
         </p:txBody>
@@ -18329,7 +18329,7 @@
                 </a:solidFill>
                 <a:latin typeface="Times New Roman"/>
               </a:rPr>
-              <a:t>2.9 Quality-core constructivism — how we differ</a:t>
+              <a:t>2.2.3 Quality-core constructivism — how we differ</a:t>
             </a:r>
           </a:p>
         </p:txBody>
@@ -20259,7 +20259,7 @@
                 </a:solidFill>
                 <a:latin typeface="Times New Roman"/>
               </a:rPr>
-              <a:t>2.10 We don’t need to be right more than ~50%</a:t>
+              <a:t>2.2.4 We don’t need to be right more than ~50%</a:t>
             </a:r>
           </a:p>
         </p:txBody>
@@ -21931,7 +21931,7 @@
                 </a:solidFill>
                 <a:latin typeface="Times New Roman"/>
               </a:rPr>
-              <a:t>2.11 The same playbook as mid-market PE — without its costs</a:t>
+              <a:t>2.2.5 The same playbook as mid-market PE — without its costs</a:t>
             </a:r>
           </a:p>
         </p:txBody>
@@ -24524,7 +24524,7 @@
                 </a:solidFill>
                 <a:latin typeface="Times New Roman"/>
               </a:rPr>
-              <a:t>2.12 A risk system built to avoid permanent loss</a:t>
+              <a:t>2.3.1 A risk system built to avoid permanent loss</a:t>
             </a:r>
           </a:p>
         </p:txBody>
@@ -25062,7 +25062,7 @@
                 </a:solidFill>
                 <a:latin typeface="Times New Roman"/>
               </a:rPr>
-              <a:t>2.13 The visible risks are the engine — not the cost</a:t>
+              <a:t>2.3.2 The visible risks are the engine — not the cost</a:t>
             </a:r>
           </a:p>
         </p:txBody>
@@ -25610,7 +25610,7 @@
                 </a:solidFill>
                 <a:latin typeface="Times New Roman"/>
               </a:rPr>
-              <a:t>2.14 A non-linear path — honestly priced</a:t>
+              <a:t>2.3.3 A non-linear path — honestly priced</a:t>
             </a:r>
           </a:p>
         </p:txBody>
@@ -26144,7 +26144,7 @@
                 </a:solidFill>
                 <a:latin typeface="Times New Roman"/>
               </a:rPr>
-              <a:t>2.15 Risk reframing for the investment committee</a:t>
+              <a:t>2.3.4 Risk reframing for the investment committee</a:t>
             </a:r>
           </a:p>
         </p:txBody>
@@ -28391,7 +28391,7 @@
                 </a:solidFill>
                 <a:latin typeface="Times New Roman"/>
               </a:rPr>
-              <a:t>2.16 Proof: outperformance with downside protection</a:t>
+              <a:t>2.4.1 Proof: outperformance with downside protection</a:t>
             </a:r>
           </a:p>
         </p:txBody>
@@ -28844,7 +28844,7 @@
                 </a:solidFill>
                 <a:latin typeface="Times New Roman"/>
               </a:rPr>
-              <a:t>2.17 AIP Fund II — transactions (2015–present)</a:t>
+              <a:t>2.4.2 AIP Fund II — transactions (2015–present)</a:t>
             </a:r>
           </a:p>
         </p:txBody>
@@ -37052,7 +37052,7 @@
                 </a:solidFill>
                 <a:latin typeface="Times New Roman"/>
               </a:rPr>
-              <a:t>2.18 Prior period — transactions (2006–2014)</a:t>
+              <a:t>2.4.3 Prior period — transactions (2006–2014)</a:t>
             </a:r>
           </a:p>
         </p:txBody>
@@ -43670,7 +43670,7 @@
                 </a:solidFill>
                 <a:latin typeface="Times New Roman"/>
               </a:rPr>
-              <a:t>2.19 Independently validated: 20 years, net of every fee</a:t>
+              <a:t>2.4.4 Independently validated: 20 years, net of every fee</a:t>
             </a:r>
           </a:p>
         </p:txBody>
@@ -44640,7 +44640,7 @@
                 </a:solidFill>
                 <a:latin typeface="Times New Roman"/>
               </a:rPr>
-              <a:t>2.20 Repeatable and conviction-sized — not lucky</a:t>
+              <a:t>2.4.5 Repeatable and conviction-sized — not lucky</a:t>
             </a:r>
           </a:p>
         </p:txBody>
@@ -45178,7 +45178,7 @@
                 </a:solidFill>
                 <a:latin typeface="Times New Roman"/>
               </a:rPr>
-              <a:t>2.21 Why a non-linear path won’t get you fired</a:t>
+              <a:t>2.4.6 Why a non-linear path won’t get you fired</a:t>
             </a:r>
           </a:p>
         </p:txBody>
@@ -46249,7 +46249,7 @@
                 </a:solidFill>
                 <a:latin typeface="Times New Roman"/>
               </a:rPr>
-              <a:t>2.22 What it does to an allocator’s portfolio</a:t>
+              <a:t>2.5.1 What it does to an allocator’s portfolio</a:t>
             </a:r>
           </a:p>
         </p:txBody>
@@ -48122,7 +48122,7 @@
                 </a:solidFill>
                 <a:latin typeface="Times New Roman"/>
               </a:rPr>
-              <a:t>2.23 Lower downside risk compounds into better outcomes</a:t>
+              <a:t>2.5.2 Lower downside risk compounds into better outcomes</a:t>
             </a:r>
           </a:p>
         </p:txBody>
@@ -52652,7 +52652,7 @@
                 </a:solidFill>
                 <a:latin typeface="Times New Roman"/>
               </a:rPr>
-              <a:t>2.24 A complement to global equities, not a duplicate</a:t>
+              <a:t>2.5.3 A complement to global equities, not a duplicate</a:t>
             </a:r>
           </a:p>
         </p:txBody>
@@ -53654,7 +53654,7 @@
                 </a:solidFill>
                 <a:latin typeface="Times New Roman"/>
               </a:rPr>
-              <a:t>2.25 What a blend does to the whole portfolio</a:t>
+              <a:t>2.5.4 What a blend does to the whole portfolio</a:t>
             </a:r>
           </a:p>
         </p:txBody>
@@ -55029,7 +55029,7 @@
                 </a:solidFill>
                 <a:latin typeface="Times New Roman"/>
               </a:rPr>
-              <a:t>2.26 What allocators actually earn from private equity</a:t>
+              <a:t>2.6.1 What allocators actually earn from private equity</a:t>
             </a:r>
           </a:p>
         </p:txBody>
@@ -55905,7 +55905,7 @@
                 </a:solidFill>
                 <a:latin typeface="Times New Roman"/>
               </a:rPr>
-              <a:t>2.27 Switching a private-equity sleeve into Athanase</a:t>
+              <a:t>2.6.2 Switching a private-equity sleeve into Athanase</a:t>
             </a:r>
           </a:p>
         </p:txBody>
@@ -57289,7 +57289,7 @@
                 </a:solidFill>
                 <a:latin typeface="Times New Roman"/>
               </a:rPr>
-              <a:t>2.28 The volatility gap is settled in the literature</a:t>
+              <a:t>2.6.3 The volatility gap is settled in the literature</a:t>
             </a:r>
           </a:p>
         </p:txBody>
@@ -58293,7 +58293,7 @@
                 </a:solidFill>
                 <a:latin typeface="Times New Roman"/>
               </a:rPr>
-              <a:t>2.29 Same headline volatility — far lower real risk</a:t>
+              <a:t>2.6.4 Same headline volatility — far lower real risk</a:t>
             </a:r>
           </a:p>
         </p:txBody>
@@ -59195,7 +59195,7 @@
                 </a:solidFill>
                 <a:latin typeface="Times New Roman"/>
               </a:rPr>
-              <a:t>2.30 PE’s “diversification” is an artefact — Athanase’s is real</a:t>
+              <a:t>2.6.5 PE’s “diversification” is an artefact — Athanase’s is real</a:t>
             </a:r>
           </a:p>
         </p:txBody>
@@ -60029,7 +60029,7 @@
                 </a:solidFill>
                 <a:latin typeface="Times New Roman"/>
               </a:rPr>
-              <a:t>2.31 When the tide goes out: the drawdown trap</a:t>
+              <a:t>2.6.6 When the tide goes out: the drawdown trap</a:t>
             </a:r>
           </a:p>
         </p:txBody>
@@ -61307,7 +61307,7 @@
                 </a:solidFill>
                 <a:latin typeface="Times New Roman"/>
               </a:rPr>
-              <a:t>2.32 Responsible ownership, by construction</a:t>
+              <a:t>2.6.7 Responsible ownership, by construction</a:t>
             </a:r>
           </a:p>
         </p:txBody>

--- a/Athanase_Engaged_Ownership_Allocator_Deck.pptx
+++ b/Athanase_Engaged_Ownership_Allocator_Deck.pptx
@@ -4861,7 +4861,7 @@
                 </a:solidFill>
                 <a:latin typeface="Times New Roman"/>
               </a:rPr>
-              <a:t>1.7 What separates a great engaged owner</a:t>
+              <a:t>7 What separates a great engaged owner</a:t>
             </a:r>
           </a:p>
         </p:txBody>
@@ -6070,7 +6070,7 @@
                 </a:solidFill>
                 <a:latin typeface="Times New Roman"/>
               </a:rPr>
-              <a:t>2.1.1 Athanase at a glance</a:t>
+              <a:t>1.1 Athanase at a glance</a:t>
             </a:r>
           </a:p>
         </p:txBody>
@@ -6998,7 +6998,7 @@
                 </a:solidFill>
                 <a:latin typeface="Times New Roman"/>
               </a:rPr>
-              <a:t>2.1.2 An integrated team, 20 years together</a:t>
+              <a:t>1.2 An integrated team, 20 years together</a:t>
             </a:r>
           </a:p>
         </p:txBody>
@@ -8068,7 +8068,7 @@
                 </a:solidFill>
                 <a:latin typeface="Times New Roman"/>
               </a:rPr>
-              <a:t>2.1.3 The people behind the track record</a:t>
+              <a:t>1.3 The people behind the track record</a:t>
             </a:r>
           </a:p>
         </p:txBody>
@@ -10504,7 +10504,7 @@
                 </a:solidFill>
                 <a:latin typeface="Times New Roman"/>
               </a:rPr>
-              <a:t>2.1.4 A disciplined, repeatable selection process</a:t>
+              <a:t>1.4 A disciplined, repeatable selection process</a:t>
             </a:r>
           </a:p>
         </p:txBody>
@@ -12040,7 +12040,7 @@
                 </a:solidFill>
                 <a:latin typeface="Times New Roman"/>
               </a:rPr>
-              <a:t>2.1.5 A risk system that engineers out permanent loss</a:t>
+              <a:t>1.5 A risk system that engineers out permanent loss</a:t>
             </a:r>
           </a:p>
         </p:txBody>
@@ -13148,7 +13148,7 @@
                 </a:solidFill>
                 <a:latin typeface="Times New Roman"/>
               </a:rPr>
-              <a:t>2.1.6 The ownership playbook, honed over 40 investments</a:t>
+              <a:t>1.6 The ownership playbook, honed over 40 investments</a:t>
             </a:r>
           </a:p>
         </p:txBody>
@@ -15118,8 +15118,8 @@
         </p:nvSpPr>
         <p:spPr>
           <a:xfrm>
-            <a:off x="512076" y="2389632"/>
-            <a:ext cx="4279499" cy="4584192"/>
+            <a:off x="512076" y="2311603"/>
+            <a:ext cx="4279499" cy="5559552"/>
           </a:xfrm>
           <a:prstGeom prst="rect">
             <a:avLst/>
@@ -15134,7 +15134,7 @@
           <a:p>
             <a:pPr>
               <a:lnSpc>
-                <a:spcPct val="103000"/>
+                <a:spcPct val="102000"/>
               </a:lnSpc>
               <a:spcAft>
                 <a:spcPts val="700"/>
@@ -15147,7 +15147,7 @@
                 </a:solidFill>
                 <a:latin typeface="Arial"/>
               </a:rPr>
-              <a:t>1.1   </a:t>
+              <a:t>1   </a:t>
             </a:r>
             <a:r>
               <a:rPr sz="919">
@@ -15162,7 +15162,7 @@
           <a:p>
             <a:pPr>
               <a:lnSpc>
-                <a:spcPct val="103000"/>
+                <a:spcPct val="102000"/>
               </a:lnSpc>
               <a:spcAft>
                 <a:spcPts val="700"/>
@@ -15175,7 +15175,7 @@
                 </a:solidFill>
                 <a:latin typeface="Arial"/>
               </a:rPr>
-              <a:t>1.2   </a:t>
+              <a:t>2   </a:t>
             </a:r>
             <a:r>
               <a:rPr sz="919">
@@ -15190,7 +15190,7 @@
           <a:p>
             <a:pPr>
               <a:lnSpc>
-                <a:spcPct val="103000"/>
+                <a:spcPct val="102000"/>
               </a:lnSpc>
               <a:spcAft>
                 <a:spcPts val="700"/>
@@ -15203,7 +15203,7 @@
                 </a:solidFill>
                 <a:latin typeface="Arial"/>
               </a:rPr>
-              <a:t>1.3   </a:t>
+              <a:t>3   </a:t>
             </a:r>
             <a:r>
               <a:rPr sz="919">
@@ -15218,7 +15218,7 @@
           <a:p>
             <a:pPr>
               <a:lnSpc>
-                <a:spcPct val="103000"/>
+                <a:spcPct val="102000"/>
               </a:lnSpc>
               <a:spcAft>
                 <a:spcPts val="700"/>
@@ -15231,7 +15231,7 @@
                 </a:solidFill>
                 <a:latin typeface="Arial"/>
               </a:rPr>
-              <a:t>1.4   </a:t>
+              <a:t>4   </a:t>
             </a:r>
             <a:r>
               <a:rPr sz="919">
@@ -15246,7 +15246,7 @@
           <a:p>
             <a:pPr>
               <a:lnSpc>
-                <a:spcPct val="103000"/>
+                <a:spcPct val="102000"/>
               </a:lnSpc>
               <a:spcAft>
                 <a:spcPts val="700"/>
@@ -15259,7 +15259,7 @@
                 </a:solidFill>
                 <a:latin typeface="Arial"/>
               </a:rPr>
-              <a:t>1.5   </a:t>
+              <a:t>5   </a:t>
             </a:r>
             <a:r>
               <a:rPr sz="919">
@@ -15283,7 +15283,7 @@
           <a:p>
             <a:pPr>
               <a:lnSpc>
-                <a:spcPct val="103000"/>
+                <a:spcPct val="102000"/>
               </a:lnSpc>
               <a:spcAft>
                 <a:spcPts val="700"/>
@@ -15296,7 +15296,7 @@
                 </a:solidFill>
                 <a:latin typeface="Arial"/>
               </a:rPr>
-              <a:t>1.6   </a:t>
+              <a:t>6   </a:t>
             </a:r>
             <a:r>
               <a:rPr sz="919">
@@ -15311,7 +15311,7 @@
           <a:p>
             <a:pPr>
               <a:lnSpc>
-                <a:spcPct val="103000"/>
+                <a:spcPct val="102000"/>
               </a:lnSpc>
               <a:spcAft>
                 <a:spcPts val="700"/>
@@ -15324,7 +15324,7 @@
                 </a:solidFill>
                 <a:latin typeface="Arial"/>
               </a:rPr>
-              <a:t>1.7   </a:t>
+              <a:t>7   </a:t>
             </a:r>
             <a:r>
               <a:rPr sz="919">
@@ -15388,8 +15388,8 @@
         </p:nvSpPr>
         <p:spPr>
           <a:xfrm>
-            <a:off x="5157345" y="2389632"/>
-            <a:ext cx="4279499" cy="4584192"/>
+            <a:off x="5157345" y="2311603"/>
+            <a:ext cx="4279499" cy="5559552"/>
           </a:xfrm>
           <a:prstGeom prst="rect">
             <a:avLst/>
@@ -15404,51 +15404,73 @@
           <a:p>
             <a:pPr>
               <a:lnSpc>
-                <a:spcPct val="103000"/>
-              </a:lnSpc>
-              <a:spcAft>
-                <a:spcPts val="450"/>
-              </a:spcAft>
-            </a:pPr>
-            <a:r>
-              <a:rPr sz="840" b="1">
+                <a:spcPct val="100000"/>
+              </a:lnSpc>
+              <a:spcBef>
+                <a:spcPts val="0"/>
+              </a:spcBef>
+              <a:spcAft>
+                <a:spcPts val="150"/>
+              </a:spcAft>
+            </a:pPr>
+            <a:r>
+              <a:rPr sz="760" b="1">
                 <a:solidFill>
                   <a:srgbClr val="314359"/>
                 </a:solidFill>
-                <a:latin typeface="Arial"/>
-              </a:rPr>
-              <a:t>2.1.1   </a:t>
-            </a:r>
-            <a:r>
-              <a:rPr sz="840">
+                <a:latin typeface="Times New Roman"/>
+              </a:rPr>
+              <a:t>1   Team &amp; operations</a:t>
+            </a:r>
+          </a:p>
+          <a:p>
+            <a:pPr>
+              <a:lnSpc>
+                <a:spcPct val="100000"/>
+              </a:lnSpc>
+              <a:spcAft>
+                <a:spcPts val="150"/>
+              </a:spcAft>
+            </a:pPr>
+            <a:r>
+              <a:rPr sz="720" b="0">
                 <a:solidFill>
                   <a:srgbClr val="314359"/>
                 </a:solidFill>
                 <a:latin typeface="Arial"/>
               </a:rPr>
+              <a:t>      1.1   </a:t>
+            </a:r>
+            <a:r>
+              <a:rPr sz="720">
+                <a:solidFill>
+                  <a:srgbClr val="314359"/>
+                </a:solidFill>
+                <a:latin typeface="Arial"/>
+              </a:rPr>
               <a:t>Athanase at a glance</a:t>
             </a:r>
           </a:p>
           <a:p>
             <a:pPr>
               <a:lnSpc>
-                <a:spcPct val="103000"/>
-              </a:lnSpc>
-              <a:spcAft>
-                <a:spcPts val="450"/>
-              </a:spcAft>
-            </a:pPr>
-            <a:r>
-              <a:rPr sz="840" b="1">
+                <a:spcPct val="100000"/>
+              </a:lnSpc>
+              <a:spcAft>
+                <a:spcPts val="150"/>
+              </a:spcAft>
+            </a:pPr>
+            <a:r>
+              <a:rPr sz="720" b="0">
                 <a:solidFill>
                   <a:srgbClr val="314359"/>
                 </a:solidFill>
                 <a:latin typeface="Arial"/>
               </a:rPr>
-              <a:t>2.1.2   </a:t>
-            </a:r>
-            <a:r>
-              <a:rPr sz="840">
+              <a:t>      1.2   </a:t>
+            </a:r>
+            <a:r>
+              <a:rPr sz="720">
                 <a:solidFill>
                   <a:srgbClr val="314359"/>
                 </a:solidFill>
@@ -15460,23 +15482,23 @@
           <a:p>
             <a:pPr>
               <a:lnSpc>
-                <a:spcPct val="103000"/>
-              </a:lnSpc>
-              <a:spcAft>
-                <a:spcPts val="450"/>
-              </a:spcAft>
-            </a:pPr>
-            <a:r>
-              <a:rPr sz="840" b="1">
+                <a:spcPct val="100000"/>
+              </a:lnSpc>
+              <a:spcAft>
+                <a:spcPts val="150"/>
+              </a:spcAft>
+            </a:pPr>
+            <a:r>
+              <a:rPr sz="720" b="0">
                 <a:solidFill>
                   <a:srgbClr val="314359"/>
                 </a:solidFill>
                 <a:latin typeface="Arial"/>
               </a:rPr>
-              <a:t>2.1.3   </a:t>
-            </a:r>
-            <a:r>
-              <a:rPr sz="840">
+              <a:t>      1.3   </a:t>
+            </a:r>
+            <a:r>
+              <a:rPr sz="720">
                 <a:solidFill>
                   <a:srgbClr val="314359"/>
                 </a:solidFill>
@@ -15488,23 +15510,23 @@
           <a:p>
             <a:pPr>
               <a:lnSpc>
-                <a:spcPct val="103000"/>
-              </a:lnSpc>
-              <a:spcAft>
-                <a:spcPts val="450"/>
-              </a:spcAft>
-            </a:pPr>
-            <a:r>
-              <a:rPr sz="840" b="1">
+                <a:spcPct val="100000"/>
+              </a:lnSpc>
+              <a:spcAft>
+                <a:spcPts val="150"/>
+              </a:spcAft>
+            </a:pPr>
+            <a:r>
+              <a:rPr sz="720" b="0">
                 <a:solidFill>
                   <a:srgbClr val="314359"/>
                 </a:solidFill>
                 <a:latin typeface="Arial"/>
               </a:rPr>
-              <a:t>2.1.4   </a:t>
-            </a:r>
-            <a:r>
-              <a:rPr sz="840">
+              <a:t>      1.4   </a:t>
+            </a:r>
+            <a:r>
+              <a:rPr sz="720">
                 <a:solidFill>
                   <a:srgbClr val="314359"/>
                 </a:solidFill>
@@ -15513,7 +15535,7 @@
               <a:t>A disciplined, repeatable selection process</a:t>
             </a:r>
             <a:r>
-              <a:rPr sz="680" i="1">
+              <a:rPr sz="560" i="1">
                 <a:solidFill>
                   <a:srgbClr val="556A83"/>
                 </a:solidFill>
@@ -15525,23 +15547,23 @@
           <a:p>
             <a:pPr>
               <a:lnSpc>
-                <a:spcPct val="103000"/>
-              </a:lnSpc>
-              <a:spcAft>
-                <a:spcPts val="450"/>
-              </a:spcAft>
-            </a:pPr>
-            <a:r>
-              <a:rPr sz="840" b="1">
+                <a:spcPct val="100000"/>
+              </a:lnSpc>
+              <a:spcAft>
+                <a:spcPts val="150"/>
+              </a:spcAft>
+            </a:pPr>
+            <a:r>
+              <a:rPr sz="720" b="0">
                 <a:solidFill>
                   <a:srgbClr val="314359"/>
                 </a:solidFill>
                 <a:latin typeface="Arial"/>
               </a:rPr>
-              <a:t>2.1.5   </a:t>
-            </a:r>
-            <a:r>
-              <a:rPr sz="840">
+              <a:t>      1.5   </a:t>
+            </a:r>
+            <a:r>
+              <a:rPr sz="720">
                 <a:solidFill>
                   <a:srgbClr val="314359"/>
                 </a:solidFill>
@@ -15550,7 +15572,7 @@
               <a:t>A risk system that engineers out permanent loss</a:t>
             </a:r>
             <a:r>
-              <a:rPr sz="680" i="1">
+              <a:rPr sz="560" i="1">
                 <a:solidFill>
                   <a:srgbClr val="556A83"/>
                 </a:solidFill>
@@ -15562,23 +15584,23 @@
           <a:p>
             <a:pPr>
               <a:lnSpc>
-                <a:spcPct val="103000"/>
-              </a:lnSpc>
-              <a:spcAft>
-                <a:spcPts val="450"/>
-              </a:spcAft>
-            </a:pPr>
-            <a:r>
-              <a:rPr sz="840" b="1">
+                <a:spcPct val="100000"/>
+              </a:lnSpc>
+              <a:spcAft>
+                <a:spcPts val="150"/>
+              </a:spcAft>
+            </a:pPr>
+            <a:r>
+              <a:rPr sz="720" b="0">
                 <a:solidFill>
                   <a:srgbClr val="314359"/>
                 </a:solidFill>
                 <a:latin typeface="Arial"/>
               </a:rPr>
-              <a:t>2.1.6   </a:t>
-            </a:r>
-            <a:r>
-              <a:rPr sz="840">
+              <a:t>      1.6   </a:t>
+            </a:r>
+            <a:r>
+              <a:rPr sz="720">
                 <a:solidFill>
                   <a:srgbClr val="314359"/>
                 </a:solidFill>
@@ -15590,32 +15612,54 @@
           <a:p>
             <a:pPr>
               <a:lnSpc>
-                <a:spcPct val="103000"/>
-              </a:lnSpc>
-              <a:spcAft>
-                <a:spcPts val="450"/>
-              </a:spcAft>
-            </a:pPr>
-            <a:r>
-              <a:rPr sz="840" b="1">
+                <a:spcPct val="100000"/>
+              </a:lnSpc>
+              <a:spcBef>
+                <a:spcPts val="300"/>
+              </a:spcBef>
+              <a:spcAft>
+                <a:spcPts val="150"/>
+              </a:spcAft>
+            </a:pPr>
+            <a:r>
+              <a:rPr sz="760" b="1">
                 <a:solidFill>
                   <a:srgbClr val="314359"/>
                 </a:solidFill>
-                <a:latin typeface="Arial"/>
-              </a:rPr>
-              <a:t>2.2.1   </a:t>
-            </a:r>
-            <a:r>
-              <a:rPr sz="840">
+                <a:latin typeface="Times New Roman"/>
+              </a:rPr>
+              <a:t>2   The opportunity &amp; our edge</a:t>
+            </a:r>
+          </a:p>
+          <a:p>
+            <a:pPr>
+              <a:lnSpc>
+                <a:spcPct val="100000"/>
+              </a:lnSpc>
+              <a:spcAft>
+                <a:spcPts val="150"/>
+              </a:spcAft>
+            </a:pPr>
+            <a:r>
+              <a:rPr sz="720" b="0">
                 <a:solidFill>
                   <a:srgbClr val="314359"/>
                 </a:solidFill>
                 <a:latin typeface="Arial"/>
               </a:rPr>
+              <a:t>      2.1   </a:t>
+            </a:r>
+            <a:r>
+              <a:rPr sz="720">
+                <a:solidFill>
+                  <a:srgbClr val="314359"/>
+                </a:solidFill>
+                <a:latin typeface="Arial"/>
+              </a:rPr>
               <a:t>The inefficiency Athanase harvests</a:t>
             </a:r>
             <a:r>
-              <a:rPr sz="680" i="1">
+              <a:rPr sz="560" i="1">
                 <a:solidFill>
                   <a:srgbClr val="556A83"/>
                 </a:solidFill>
@@ -15627,23 +15671,23 @@
           <a:p>
             <a:pPr>
               <a:lnSpc>
-                <a:spcPct val="103000"/>
-              </a:lnSpc>
-              <a:spcAft>
-                <a:spcPts val="450"/>
-              </a:spcAft>
-            </a:pPr>
-            <a:r>
-              <a:rPr sz="840" b="1">
+                <a:spcPct val="100000"/>
+              </a:lnSpc>
+              <a:spcAft>
+                <a:spcPts val="150"/>
+              </a:spcAft>
+            </a:pPr>
+            <a:r>
+              <a:rPr sz="720" b="0">
                 <a:solidFill>
                   <a:srgbClr val="314359"/>
                 </a:solidFill>
                 <a:latin typeface="Arial"/>
               </a:rPr>
-              <a:t>2.2.2   </a:t>
-            </a:r>
-            <a:r>
-              <a:rPr sz="840">
+              <a:t>      2.2   </a:t>
+            </a:r>
+            <a:r>
+              <a:rPr sz="720">
                 <a:solidFill>
                   <a:srgbClr val="314359"/>
                 </a:solidFill>
@@ -15652,7 +15696,7 @@
               <a:t>We don’t buy broken companies — we buy hidden cores</a:t>
             </a:r>
             <a:r>
-              <a:rPr sz="680" i="1">
+              <a:rPr sz="560" i="1">
                 <a:solidFill>
                   <a:srgbClr val="556A83"/>
                 </a:solidFill>
@@ -15664,23 +15708,23 @@
           <a:p>
             <a:pPr>
               <a:lnSpc>
-                <a:spcPct val="103000"/>
-              </a:lnSpc>
-              <a:spcAft>
-                <a:spcPts val="450"/>
-              </a:spcAft>
-            </a:pPr>
-            <a:r>
-              <a:rPr sz="840" b="1">
+                <a:spcPct val="100000"/>
+              </a:lnSpc>
+              <a:spcAft>
+                <a:spcPts val="150"/>
+              </a:spcAft>
+            </a:pPr>
+            <a:r>
+              <a:rPr sz="720" b="0">
                 <a:solidFill>
                   <a:srgbClr val="314359"/>
                 </a:solidFill>
                 <a:latin typeface="Arial"/>
               </a:rPr>
-              <a:t>2.2.3   </a:t>
-            </a:r>
-            <a:r>
-              <a:rPr sz="840">
+              <a:t>      2.3   </a:t>
+            </a:r>
+            <a:r>
+              <a:rPr sz="720">
                 <a:solidFill>
                   <a:srgbClr val="314359"/>
                 </a:solidFill>
@@ -15689,7 +15733,7 @@
               <a:t>Quality-core constructivism — how we differ</a:t>
             </a:r>
             <a:r>
-              <a:rPr sz="680" i="1">
+              <a:rPr sz="560" i="1">
                 <a:solidFill>
                   <a:srgbClr val="556A83"/>
                 </a:solidFill>
@@ -15701,23 +15745,23 @@
           <a:p>
             <a:pPr>
               <a:lnSpc>
-                <a:spcPct val="103000"/>
-              </a:lnSpc>
-              <a:spcAft>
-                <a:spcPts val="450"/>
-              </a:spcAft>
-            </a:pPr>
-            <a:r>
-              <a:rPr sz="840" b="1">
+                <a:spcPct val="100000"/>
+              </a:lnSpc>
+              <a:spcAft>
+                <a:spcPts val="150"/>
+              </a:spcAft>
+            </a:pPr>
+            <a:r>
+              <a:rPr sz="720" b="0">
                 <a:solidFill>
                   <a:srgbClr val="314359"/>
                 </a:solidFill>
                 <a:latin typeface="Arial"/>
               </a:rPr>
-              <a:t>2.2.4   </a:t>
-            </a:r>
-            <a:r>
-              <a:rPr sz="840">
+              <a:t>      2.4   </a:t>
+            </a:r>
+            <a:r>
+              <a:rPr sz="720">
                 <a:solidFill>
                   <a:srgbClr val="314359"/>
                 </a:solidFill>
@@ -15726,7 +15770,7 @@
               <a:t>We don’t need to be right more than ~50%</a:t>
             </a:r>
             <a:r>
-              <a:rPr sz="680" i="1">
+              <a:rPr sz="560" i="1">
                 <a:solidFill>
                   <a:srgbClr val="556A83"/>
                 </a:solidFill>
@@ -15738,23 +15782,23 @@
           <a:p>
             <a:pPr>
               <a:lnSpc>
-                <a:spcPct val="103000"/>
-              </a:lnSpc>
-              <a:spcAft>
-                <a:spcPts val="450"/>
-              </a:spcAft>
-            </a:pPr>
-            <a:r>
-              <a:rPr sz="840" b="1">
+                <a:spcPct val="100000"/>
+              </a:lnSpc>
+              <a:spcAft>
+                <a:spcPts val="150"/>
+              </a:spcAft>
+            </a:pPr>
+            <a:r>
+              <a:rPr sz="720" b="0">
                 <a:solidFill>
                   <a:srgbClr val="314359"/>
                 </a:solidFill>
                 <a:latin typeface="Arial"/>
               </a:rPr>
-              <a:t>2.2.5   </a:t>
-            </a:r>
-            <a:r>
-              <a:rPr sz="840">
+              <a:t>      2.5   </a:t>
+            </a:r>
+            <a:r>
+              <a:rPr sz="720">
                 <a:solidFill>
                   <a:srgbClr val="314359"/>
                 </a:solidFill>
@@ -15763,7 +15807,7 @@
               <a:t>The same playbook as mid-market PE — without its costs</a:t>
             </a:r>
             <a:r>
-              <a:rPr sz="680" i="1">
+              <a:rPr sz="560" i="1">
                 <a:solidFill>
                   <a:srgbClr val="556A83"/>
                 </a:solidFill>
@@ -15775,51 +15819,73 @@
           <a:p>
             <a:pPr>
               <a:lnSpc>
-                <a:spcPct val="103000"/>
-              </a:lnSpc>
-              <a:spcAft>
-                <a:spcPts val="450"/>
-              </a:spcAft>
-            </a:pPr>
-            <a:r>
-              <a:rPr sz="840" b="1">
+                <a:spcPct val="100000"/>
+              </a:lnSpc>
+              <a:spcBef>
+                <a:spcPts val="300"/>
+              </a:spcBef>
+              <a:spcAft>
+                <a:spcPts val="150"/>
+              </a:spcAft>
+            </a:pPr>
+            <a:r>
+              <a:rPr sz="760" b="1">
                 <a:solidFill>
                   <a:srgbClr val="314359"/>
                 </a:solidFill>
-                <a:latin typeface="Arial"/>
-              </a:rPr>
-              <a:t>2.3.1   </a:t>
-            </a:r>
-            <a:r>
-              <a:rPr sz="840">
+                <a:latin typeface="Times New Roman"/>
+              </a:rPr>
+              <a:t>3   Risk, honestly</a:t>
+            </a:r>
+          </a:p>
+          <a:p>
+            <a:pPr>
+              <a:lnSpc>
+                <a:spcPct val="100000"/>
+              </a:lnSpc>
+              <a:spcAft>
+                <a:spcPts val="150"/>
+              </a:spcAft>
+            </a:pPr>
+            <a:r>
+              <a:rPr sz="720" b="0">
                 <a:solidFill>
                   <a:srgbClr val="314359"/>
                 </a:solidFill>
                 <a:latin typeface="Arial"/>
               </a:rPr>
+              <a:t>      3.1   </a:t>
+            </a:r>
+            <a:r>
+              <a:rPr sz="720">
+                <a:solidFill>
+                  <a:srgbClr val="314359"/>
+                </a:solidFill>
+                <a:latin typeface="Arial"/>
+              </a:rPr>
               <a:t>A risk system built to avoid permanent loss</a:t>
             </a:r>
           </a:p>
           <a:p>
             <a:pPr>
               <a:lnSpc>
-                <a:spcPct val="103000"/>
-              </a:lnSpc>
-              <a:spcAft>
-                <a:spcPts val="450"/>
-              </a:spcAft>
-            </a:pPr>
-            <a:r>
-              <a:rPr sz="840" b="1">
+                <a:spcPct val="100000"/>
+              </a:lnSpc>
+              <a:spcAft>
+                <a:spcPts val="150"/>
+              </a:spcAft>
+            </a:pPr>
+            <a:r>
+              <a:rPr sz="720" b="0">
                 <a:solidFill>
                   <a:srgbClr val="314359"/>
                 </a:solidFill>
                 <a:latin typeface="Arial"/>
               </a:rPr>
-              <a:t>2.3.2   </a:t>
-            </a:r>
-            <a:r>
-              <a:rPr sz="840">
+              <a:t>      3.2   </a:t>
+            </a:r>
+            <a:r>
+              <a:rPr sz="720">
                 <a:solidFill>
                   <a:srgbClr val="314359"/>
                 </a:solidFill>
@@ -15831,23 +15897,23 @@
           <a:p>
             <a:pPr>
               <a:lnSpc>
-                <a:spcPct val="103000"/>
-              </a:lnSpc>
-              <a:spcAft>
-                <a:spcPts val="450"/>
-              </a:spcAft>
-            </a:pPr>
-            <a:r>
-              <a:rPr sz="840" b="1">
+                <a:spcPct val="100000"/>
+              </a:lnSpc>
+              <a:spcAft>
+                <a:spcPts val="150"/>
+              </a:spcAft>
+            </a:pPr>
+            <a:r>
+              <a:rPr sz="720" b="0">
                 <a:solidFill>
                   <a:srgbClr val="314359"/>
                 </a:solidFill>
                 <a:latin typeface="Arial"/>
               </a:rPr>
-              <a:t>2.3.3   </a:t>
-            </a:r>
-            <a:r>
-              <a:rPr sz="840">
+              <a:t>      3.3   </a:t>
+            </a:r>
+            <a:r>
+              <a:rPr sz="720">
                 <a:solidFill>
                   <a:srgbClr val="314359"/>
                 </a:solidFill>
@@ -15856,7 +15922,7 @@
               <a:t>A non-linear path — honestly priced</a:t>
             </a:r>
             <a:r>
-              <a:rPr sz="680" i="1">
+              <a:rPr sz="560" i="1">
                 <a:solidFill>
                   <a:srgbClr val="556A83"/>
                 </a:solidFill>
@@ -15868,23 +15934,23 @@
           <a:p>
             <a:pPr>
               <a:lnSpc>
-                <a:spcPct val="103000"/>
-              </a:lnSpc>
-              <a:spcAft>
-                <a:spcPts val="450"/>
-              </a:spcAft>
-            </a:pPr>
-            <a:r>
-              <a:rPr sz="840" b="1">
+                <a:spcPct val="100000"/>
+              </a:lnSpc>
+              <a:spcAft>
+                <a:spcPts val="150"/>
+              </a:spcAft>
+            </a:pPr>
+            <a:r>
+              <a:rPr sz="720" b="0">
                 <a:solidFill>
                   <a:srgbClr val="314359"/>
                 </a:solidFill>
                 <a:latin typeface="Arial"/>
               </a:rPr>
-              <a:t>2.3.4   </a:t>
-            </a:r>
-            <a:r>
-              <a:rPr sz="840">
+              <a:t>      3.4   </a:t>
+            </a:r>
+            <a:r>
+              <a:rPr sz="720">
                 <a:solidFill>
                   <a:srgbClr val="314359"/>
                 </a:solidFill>
@@ -15893,7 +15959,7 @@
               <a:t>Risk reframing for the investment committee</a:t>
             </a:r>
             <a:r>
-              <a:rPr sz="680" i="1">
+              <a:rPr sz="560" i="1">
                 <a:solidFill>
                   <a:srgbClr val="556A83"/>
                 </a:solidFill>
@@ -15905,32 +15971,54 @@
           <a:p>
             <a:pPr>
               <a:lnSpc>
-                <a:spcPct val="103000"/>
-              </a:lnSpc>
-              <a:spcAft>
-                <a:spcPts val="450"/>
-              </a:spcAft>
-            </a:pPr>
-            <a:r>
-              <a:rPr sz="840" b="1">
+                <a:spcPct val="100000"/>
+              </a:lnSpc>
+              <a:spcBef>
+                <a:spcPts val="300"/>
+              </a:spcBef>
+              <a:spcAft>
+                <a:spcPts val="150"/>
+              </a:spcAft>
+            </a:pPr>
+            <a:r>
+              <a:rPr sz="760" b="1">
                 <a:solidFill>
                   <a:srgbClr val="314359"/>
                 </a:solidFill>
-                <a:latin typeface="Arial"/>
-              </a:rPr>
-              <a:t>2.4.1   </a:t>
-            </a:r>
-            <a:r>
-              <a:rPr sz="840">
+                <a:latin typeface="Times New Roman"/>
+              </a:rPr>
+              <a:t>4   The 20-year track record</a:t>
+            </a:r>
+          </a:p>
+          <a:p>
+            <a:pPr>
+              <a:lnSpc>
+                <a:spcPct val="100000"/>
+              </a:lnSpc>
+              <a:spcAft>
+                <a:spcPts val="150"/>
+              </a:spcAft>
+            </a:pPr>
+            <a:r>
+              <a:rPr sz="720" b="0">
                 <a:solidFill>
                   <a:srgbClr val="314359"/>
                 </a:solidFill>
                 <a:latin typeface="Arial"/>
               </a:rPr>
+              <a:t>      4.1   </a:t>
+            </a:r>
+            <a:r>
+              <a:rPr sz="720">
+                <a:solidFill>
+                  <a:srgbClr val="314359"/>
+                </a:solidFill>
+                <a:latin typeface="Arial"/>
+              </a:rPr>
               <a:t>Proof: outperformance with downside protection</a:t>
             </a:r>
             <a:r>
-              <a:rPr sz="680" i="1">
+              <a:rPr sz="560" i="1">
                 <a:solidFill>
                   <a:srgbClr val="556A83"/>
                 </a:solidFill>
@@ -15942,23 +16030,23 @@
           <a:p>
             <a:pPr>
               <a:lnSpc>
-                <a:spcPct val="103000"/>
-              </a:lnSpc>
-              <a:spcAft>
-                <a:spcPts val="450"/>
-              </a:spcAft>
-            </a:pPr>
-            <a:r>
-              <a:rPr sz="840" b="1">
+                <a:spcPct val="100000"/>
+              </a:lnSpc>
+              <a:spcAft>
+                <a:spcPts val="150"/>
+              </a:spcAft>
+            </a:pPr>
+            <a:r>
+              <a:rPr sz="720" b="0">
                 <a:solidFill>
                   <a:srgbClr val="314359"/>
                 </a:solidFill>
                 <a:latin typeface="Arial"/>
               </a:rPr>
-              <a:t>2.4.2   </a:t>
-            </a:r>
-            <a:r>
-              <a:rPr sz="840">
+              <a:t>      4.2   </a:t>
+            </a:r>
+            <a:r>
+              <a:rPr sz="720">
                 <a:solidFill>
                   <a:srgbClr val="314359"/>
                 </a:solidFill>
@@ -15967,7 +16055,7 @@
               <a:t>AIP Fund II — transactions (2015–present)</a:t>
             </a:r>
             <a:r>
-              <a:rPr sz="680" i="1">
+              <a:rPr sz="560" i="1">
                 <a:solidFill>
                   <a:srgbClr val="556A83"/>
                 </a:solidFill>
@@ -15979,23 +16067,23 @@
           <a:p>
             <a:pPr>
               <a:lnSpc>
-                <a:spcPct val="103000"/>
-              </a:lnSpc>
-              <a:spcAft>
-                <a:spcPts val="450"/>
-              </a:spcAft>
-            </a:pPr>
-            <a:r>
-              <a:rPr sz="840" b="1">
+                <a:spcPct val="100000"/>
+              </a:lnSpc>
+              <a:spcAft>
+                <a:spcPts val="150"/>
+              </a:spcAft>
+            </a:pPr>
+            <a:r>
+              <a:rPr sz="720" b="0">
                 <a:solidFill>
                   <a:srgbClr val="314359"/>
                 </a:solidFill>
                 <a:latin typeface="Arial"/>
               </a:rPr>
-              <a:t>2.4.3   </a:t>
-            </a:r>
-            <a:r>
-              <a:rPr sz="840">
+              <a:t>      4.3   </a:t>
+            </a:r>
+            <a:r>
+              <a:rPr sz="720">
                 <a:solidFill>
                   <a:srgbClr val="314359"/>
                 </a:solidFill>
@@ -16004,7 +16092,7 @@
               <a:t>Prior period — transactions (2006–2014)</a:t>
             </a:r>
             <a:r>
-              <a:rPr sz="680" i="1">
+              <a:rPr sz="560" i="1">
                 <a:solidFill>
                   <a:srgbClr val="556A83"/>
                 </a:solidFill>
@@ -16016,23 +16104,23 @@
           <a:p>
             <a:pPr>
               <a:lnSpc>
-                <a:spcPct val="103000"/>
-              </a:lnSpc>
-              <a:spcAft>
-                <a:spcPts val="450"/>
-              </a:spcAft>
-            </a:pPr>
-            <a:r>
-              <a:rPr sz="840" b="1">
+                <a:spcPct val="100000"/>
+              </a:lnSpc>
+              <a:spcAft>
+                <a:spcPts val="150"/>
+              </a:spcAft>
+            </a:pPr>
+            <a:r>
+              <a:rPr sz="720" b="0">
                 <a:solidFill>
                   <a:srgbClr val="314359"/>
                 </a:solidFill>
                 <a:latin typeface="Arial"/>
               </a:rPr>
-              <a:t>2.4.4   </a:t>
-            </a:r>
-            <a:r>
-              <a:rPr sz="840">
+              <a:t>      4.4   </a:t>
+            </a:r>
+            <a:r>
+              <a:rPr sz="720">
                 <a:solidFill>
                   <a:srgbClr val="314359"/>
                 </a:solidFill>
@@ -16044,23 +16132,23 @@
           <a:p>
             <a:pPr>
               <a:lnSpc>
-                <a:spcPct val="103000"/>
-              </a:lnSpc>
-              <a:spcAft>
-                <a:spcPts val="450"/>
-              </a:spcAft>
-            </a:pPr>
-            <a:r>
-              <a:rPr sz="840" b="1">
+                <a:spcPct val="100000"/>
+              </a:lnSpc>
+              <a:spcAft>
+                <a:spcPts val="150"/>
+              </a:spcAft>
+            </a:pPr>
+            <a:r>
+              <a:rPr sz="720" b="0">
                 <a:solidFill>
                   <a:srgbClr val="314359"/>
                 </a:solidFill>
                 <a:latin typeface="Arial"/>
               </a:rPr>
-              <a:t>2.4.5   </a:t>
-            </a:r>
-            <a:r>
-              <a:rPr sz="840">
+              <a:t>      4.5   </a:t>
+            </a:r>
+            <a:r>
+              <a:rPr sz="720">
                 <a:solidFill>
                   <a:srgbClr val="314359"/>
                 </a:solidFill>
@@ -16072,23 +16160,23 @@
           <a:p>
             <a:pPr>
               <a:lnSpc>
-                <a:spcPct val="103000"/>
-              </a:lnSpc>
-              <a:spcAft>
-                <a:spcPts val="450"/>
-              </a:spcAft>
-            </a:pPr>
-            <a:r>
-              <a:rPr sz="840" b="1">
+                <a:spcPct val="100000"/>
+              </a:lnSpc>
+              <a:spcAft>
+                <a:spcPts val="150"/>
+              </a:spcAft>
+            </a:pPr>
+            <a:r>
+              <a:rPr sz="720" b="0">
                 <a:solidFill>
                   <a:srgbClr val="314359"/>
                 </a:solidFill>
                 <a:latin typeface="Arial"/>
               </a:rPr>
-              <a:t>2.4.6   </a:t>
-            </a:r>
-            <a:r>
-              <a:rPr sz="840">
+              <a:t>      4.6   </a:t>
+            </a:r>
+            <a:r>
+              <a:rPr sz="720">
                 <a:solidFill>
                   <a:srgbClr val="314359"/>
                 </a:solidFill>
@@ -16100,32 +16188,54 @@
           <a:p>
             <a:pPr>
               <a:lnSpc>
-                <a:spcPct val="103000"/>
-              </a:lnSpc>
-              <a:spcAft>
-                <a:spcPts val="450"/>
-              </a:spcAft>
-            </a:pPr>
-            <a:r>
-              <a:rPr sz="840" b="1">
+                <a:spcPct val="100000"/>
+              </a:lnSpc>
+              <a:spcBef>
+                <a:spcPts val="300"/>
+              </a:spcBef>
+              <a:spcAft>
+                <a:spcPts val="150"/>
+              </a:spcAft>
+            </a:pPr>
+            <a:r>
+              <a:rPr sz="760" b="1">
                 <a:solidFill>
                   <a:srgbClr val="314359"/>
                 </a:solidFill>
-                <a:latin typeface="Arial"/>
-              </a:rPr>
-              <a:t>2.5.1   </a:t>
-            </a:r>
-            <a:r>
-              <a:rPr sz="840">
+                <a:latin typeface="Times New Roman"/>
+              </a:rPr>
+              <a:t>5   What it means for your portfolio</a:t>
+            </a:r>
+          </a:p>
+          <a:p>
+            <a:pPr>
+              <a:lnSpc>
+                <a:spcPct val="100000"/>
+              </a:lnSpc>
+              <a:spcAft>
+                <a:spcPts val="150"/>
+              </a:spcAft>
+            </a:pPr>
+            <a:r>
+              <a:rPr sz="720" b="0">
                 <a:solidFill>
                   <a:srgbClr val="314359"/>
                 </a:solidFill>
                 <a:latin typeface="Arial"/>
               </a:rPr>
+              <a:t>      5.1   </a:t>
+            </a:r>
+            <a:r>
+              <a:rPr sz="720">
+                <a:solidFill>
+                  <a:srgbClr val="314359"/>
+                </a:solidFill>
+                <a:latin typeface="Arial"/>
+              </a:rPr>
               <a:t>What it does to an allocator’s portfolio</a:t>
             </a:r>
             <a:r>
-              <a:rPr sz="680" i="1">
+              <a:rPr sz="560" i="1">
                 <a:solidFill>
                   <a:srgbClr val="556A83"/>
                 </a:solidFill>
@@ -16137,23 +16247,23 @@
           <a:p>
             <a:pPr>
               <a:lnSpc>
-                <a:spcPct val="103000"/>
-              </a:lnSpc>
-              <a:spcAft>
-                <a:spcPts val="450"/>
-              </a:spcAft>
-            </a:pPr>
-            <a:r>
-              <a:rPr sz="840" b="1">
+                <a:spcPct val="100000"/>
+              </a:lnSpc>
+              <a:spcAft>
+                <a:spcPts val="150"/>
+              </a:spcAft>
+            </a:pPr>
+            <a:r>
+              <a:rPr sz="720" b="0">
                 <a:solidFill>
                   <a:srgbClr val="314359"/>
                 </a:solidFill>
                 <a:latin typeface="Arial"/>
               </a:rPr>
-              <a:t>2.5.2   </a:t>
-            </a:r>
-            <a:r>
-              <a:rPr sz="840">
+              <a:t>      5.2   </a:t>
+            </a:r>
+            <a:r>
+              <a:rPr sz="720">
                 <a:solidFill>
                   <a:srgbClr val="314359"/>
                 </a:solidFill>
@@ -16162,7 +16272,7 @@
               <a:t>Lower downside risk compounds into better outcomes</a:t>
             </a:r>
             <a:r>
-              <a:rPr sz="680" i="1">
+              <a:rPr sz="560" i="1">
                 <a:solidFill>
                   <a:srgbClr val="556A83"/>
                 </a:solidFill>
@@ -16174,23 +16284,23 @@
           <a:p>
             <a:pPr>
               <a:lnSpc>
-                <a:spcPct val="103000"/>
-              </a:lnSpc>
-              <a:spcAft>
-                <a:spcPts val="450"/>
-              </a:spcAft>
-            </a:pPr>
-            <a:r>
-              <a:rPr sz="840" b="1">
+                <a:spcPct val="100000"/>
+              </a:lnSpc>
+              <a:spcAft>
+                <a:spcPts val="150"/>
+              </a:spcAft>
+            </a:pPr>
+            <a:r>
+              <a:rPr sz="720" b="0">
                 <a:solidFill>
                   <a:srgbClr val="314359"/>
                 </a:solidFill>
                 <a:latin typeface="Arial"/>
               </a:rPr>
-              <a:t>2.5.3   </a:t>
-            </a:r>
-            <a:r>
-              <a:rPr sz="840">
+              <a:t>      5.3   </a:t>
+            </a:r>
+            <a:r>
+              <a:rPr sz="720">
                 <a:solidFill>
                   <a:srgbClr val="314359"/>
                 </a:solidFill>
@@ -16199,7 +16309,7 @@
               <a:t>A complement to global equities, not a duplicate</a:t>
             </a:r>
             <a:r>
-              <a:rPr sz="680" i="1">
+              <a:rPr sz="560" i="1">
                 <a:solidFill>
                   <a:srgbClr val="556A83"/>
                 </a:solidFill>
@@ -16211,23 +16321,23 @@
           <a:p>
             <a:pPr>
               <a:lnSpc>
-                <a:spcPct val="103000"/>
-              </a:lnSpc>
-              <a:spcAft>
-                <a:spcPts val="450"/>
-              </a:spcAft>
-            </a:pPr>
-            <a:r>
-              <a:rPr sz="840" b="1">
+                <a:spcPct val="100000"/>
+              </a:lnSpc>
+              <a:spcAft>
+                <a:spcPts val="150"/>
+              </a:spcAft>
+            </a:pPr>
+            <a:r>
+              <a:rPr sz="720" b="0">
                 <a:solidFill>
                   <a:srgbClr val="314359"/>
                 </a:solidFill>
                 <a:latin typeface="Arial"/>
               </a:rPr>
-              <a:t>2.5.4   </a:t>
-            </a:r>
-            <a:r>
-              <a:rPr sz="840">
+              <a:t>      5.4   </a:t>
+            </a:r>
+            <a:r>
+              <a:rPr sz="720">
                 <a:solidFill>
                   <a:srgbClr val="314359"/>
                 </a:solidFill>
@@ -16236,7 +16346,7 @@
               <a:t>What a blend does to the whole portfolio</a:t>
             </a:r>
             <a:r>
-              <a:rPr sz="680" i="1">
+              <a:rPr sz="560" i="1">
                 <a:solidFill>
                   <a:srgbClr val="556A83"/>
                 </a:solidFill>
@@ -16248,32 +16358,54 @@
           <a:p>
             <a:pPr>
               <a:lnSpc>
-                <a:spcPct val="103000"/>
-              </a:lnSpc>
-              <a:spcAft>
-                <a:spcPts val="450"/>
-              </a:spcAft>
-            </a:pPr>
-            <a:r>
-              <a:rPr sz="840" b="1">
+                <a:spcPct val="100000"/>
+              </a:lnSpc>
+              <a:spcBef>
+                <a:spcPts val="300"/>
+              </a:spcBef>
+              <a:spcAft>
+                <a:spcPts val="150"/>
+              </a:spcAft>
+            </a:pPr>
+            <a:r>
+              <a:rPr sz="760" b="1">
                 <a:solidFill>
                   <a:srgbClr val="314359"/>
                 </a:solidFill>
-                <a:latin typeface="Arial"/>
-              </a:rPr>
-              <a:t>2.6.1   </a:t>
-            </a:r>
-            <a:r>
-              <a:rPr sz="840">
+                <a:latin typeface="Times New Roman"/>
+              </a:rPr>
+              <a:t>6   Versus private equity</a:t>
+            </a:r>
+          </a:p>
+          <a:p>
+            <a:pPr>
+              <a:lnSpc>
+                <a:spcPct val="100000"/>
+              </a:lnSpc>
+              <a:spcAft>
+                <a:spcPts val="150"/>
+              </a:spcAft>
+            </a:pPr>
+            <a:r>
+              <a:rPr sz="720" b="0">
                 <a:solidFill>
                   <a:srgbClr val="314359"/>
                 </a:solidFill>
                 <a:latin typeface="Arial"/>
               </a:rPr>
+              <a:t>      6.1   </a:t>
+            </a:r>
+            <a:r>
+              <a:rPr sz="720">
+                <a:solidFill>
+                  <a:srgbClr val="314359"/>
+                </a:solidFill>
+                <a:latin typeface="Arial"/>
+              </a:rPr>
               <a:t>What allocators actually earn from private equity</a:t>
             </a:r>
             <a:r>
-              <a:rPr sz="680" i="1">
+              <a:rPr sz="560" i="1">
                 <a:solidFill>
                   <a:srgbClr val="556A83"/>
                 </a:solidFill>
@@ -16285,23 +16417,23 @@
           <a:p>
             <a:pPr>
               <a:lnSpc>
-                <a:spcPct val="103000"/>
-              </a:lnSpc>
-              <a:spcAft>
-                <a:spcPts val="450"/>
-              </a:spcAft>
-            </a:pPr>
-            <a:r>
-              <a:rPr sz="840" b="1">
+                <a:spcPct val="100000"/>
+              </a:lnSpc>
+              <a:spcAft>
+                <a:spcPts val="150"/>
+              </a:spcAft>
+            </a:pPr>
+            <a:r>
+              <a:rPr sz="720" b="0">
                 <a:solidFill>
                   <a:srgbClr val="314359"/>
                 </a:solidFill>
                 <a:latin typeface="Arial"/>
               </a:rPr>
-              <a:t>2.6.2   </a:t>
-            </a:r>
-            <a:r>
-              <a:rPr sz="840">
+              <a:t>      6.2   </a:t>
+            </a:r>
+            <a:r>
+              <a:rPr sz="720">
                 <a:solidFill>
                   <a:srgbClr val="314359"/>
                 </a:solidFill>
@@ -16310,7 +16442,7 @@
               <a:t>Switching a private-equity sleeve into Athanase</a:t>
             </a:r>
             <a:r>
-              <a:rPr sz="680" i="1">
+              <a:rPr sz="560" i="1">
                 <a:solidFill>
                   <a:srgbClr val="556A83"/>
                 </a:solidFill>
@@ -16322,23 +16454,23 @@
           <a:p>
             <a:pPr>
               <a:lnSpc>
-                <a:spcPct val="103000"/>
-              </a:lnSpc>
-              <a:spcAft>
-                <a:spcPts val="450"/>
-              </a:spcAft>
-            </a:pPr>
-            <a:r>
-              <a:rPr sz="840" b="1">
+                <a:spcPct val="100000"/>
+              </a:lnSpc>
+              <a:spcAft>
+                <a:spcPts val="150"/>
+              </a:spcAft>
+            </a:pPr>
+            <a:r>
+              <a:rPr sz="720" b="0">
                 <a:solidFill>
                   <a:srgbClr val="314359"/>
                 </a:solidFill>
                 <a:latin typeface="Arial"/>
               </a:rPr>
-              <a:t>2.6.3   </a:t>
-            </a:r>
-            <a:r>
-              <a:rPr sz="840">
+              <a:t>      6.3   </a:t>
+            </a:r>
+            <a:r>
+              <a:rPr sz="720">
                 <a:solidFill>
                   <a:srgbClr val="314359"/>
                 </a:solidFill>
@@ -16347,7 +16479,7 @@
               <a:t>The volatility gap is settled in the literature</a:t>
             </a:r>
             <a:r>
-              <a:rPr sz="680" i="1">
+              <a:rPr sz="560" i="1">
                 <a:solidFill>
                   <a:srgbClr val="556A83"/>
                 </a:solidFill>
@@ -16359,23 +16491,23 @@
           <a:p>
             <a:pPr>
               <a:lnSpc>
-                <a:spcPct val="103000"/>
-              </a:lnSpc>
-              <a:spcAft>
-                <a:spcPts val="450"/>
-              </a:spcAft>
-            </a:pPr>
-            <a:r>
-              <a:rPr sz="840" b="1">
+                <a:spcPct val="100000"/>
+              </a:lnSpc>
+              <a:spcAft>
+                <a:spcPts val="150"/>
+              </a:spcAft>
+            </a:pPr>
+            <a:r>
+              <a:rPr sz="720" b="0">
                 <a:solidFill>
                   <a:srgbClr val="314359"/>
                 </a:solidFill>
                 <a:latin typeface="Arial"/>
               </a:rPr>
-              <a:t>2.6.4   </a:t>
-            </a:r>
-            <a:r>
-              <a:rPr sz="840">
+              <a:t>      6.4   </a:t>
+            </a:r>
+            <a:r>
+              <a:rPr sz="720">
                 <a:solidFill>
                   <a:srgbClr val="314359"/>
                 </a:solidFill>
@@ -16384,7 +16516,7 @@
               <a:t>Same headline volatility — far lower real risk</a:t>
             </a:r>
             <a:r>
-              <a:rPr sz="680" i="1">
+              <a:rPr sz="560" i="1">
                 <a:solidFill>
                   <a:srgbClr val="556A83"/>
                 </a:solidFill>
@@ -16396,23 +16528,23 @@
           <a:p>
             <a:pPr>
               <a:lnSpc>
-                <a:spcPct val="103000"/>
-              </a:lnSpc>
-              <a:spcAft>
-                <a:spcPts val="450"/>
-              </a:spcAft>
-            </a:pPr>
-            <a:r>
-              <a:rPr sz="840" b="1">
+                <a:spcPct val="100000"/>
+              </a:lnSpc>
+              <a:spcAft>
+                <a:spcPts val="150"/>
+              </a:spcAft>
+            </a:pPr>
+            <a:r>
+              <a:rPr sz="720" b="0">
                 <a:solidFill>
                   <a:srgbClr val="314359"/>
                 </a:solidFill>
                 <a:latin typeface="Arial"/>
               </a:rPr>
-              <a:t>2.6.5   </a:t>
-            </a:r>
-            <a:r>
-              <a:rPr sz="840">
+              <a:t>      6.5   </a:t>
+            </a:r>
+            <a:r>
+              <a:rPr sz="720">
                 <a:solidFill>
                   <a:srgbClr val="314359"/>
                 </a:solidFill>
@@ -16421,7 +16553,7 @@
               <a:t>PE’s “diversification” is an artefact — Athanase’s is real</a:t>
             </a:r>
             <a:r>
-              <a:rPr sz="680" i="1">
+              <a:rPr sz="560" i="1">
                 <a:solidFill>
                   <a:srgbClr val="556A83"/>
                 </a:solidFill>
@@ -16433,23 +16565,23 @@
           <a:p>
             <a:pPr>
               <a:lnSpc>
-                <a:spcPct val="103000"/>
-              </a:lnSpc>
-              <a:spcAft>
-                <a:spcPts val="450"/>
-              </a:spcAft>
-            </a:pPr>
-            <a:r>
-              <a:rPr sz="840" b="1">
+                <a:spcPct val="100000"/>
+              </a:lnSpc>
+              <a:spcAft>
+                <a:spcPts val="150"/>
+              </a:spcAft>
+            </a:pPr>
+            <a:r>
+              <a:rPr sz="720" b="0">
                 <a:solidFill>
                   <a:srgbClr val="314359"/>
                 </a:solidFill>
                 <a:latin typeface="Arial"/>
               </a:rPr>
-              <a:t>2.6.6   </a:t>
-            </a:r>
-            <a:r>
-              <a:rPr sz="840">
+              <a:t>      6.6   </a:t>
+            </a:r>
+            <a:r>
+              <a:rPr sz="720">
                 <a:solidFill>
                   <a:srgbClr val="314359"/>
                 </a:solidFill>
@@ -16461,23 +16593,23 @@
           <a:p>
             <a:pPr>
               <a:lnSpc>
-                <a:spcPct val="103000"/>
-              </a:lnSpc>
-              <a:spcAft>
-                <a:spcPts val="450"/>
-              </a:spcAft>
-            </a:pPr>
-            <a:r>
-              <a:rPr sz="840" b="1">
+                <a:spcPct val="100000"/>
+              </a:lnSpc>
+              <a:spcAft>
+                <a:spcPts val="150"/>
+              </a:spcAft>
+            </a:pPr>
+            <a:r>
+              <a:rPr sz="720" b="0">
                 <a:solidFill>
                   <a:srgbClr val="314359"/>
                 </a:solidFill>
                 <a:latin typeface="Arial"/>
               </a:rPr>
-              <a:t>2.6.7   </a:t>
-            </a:r>
-            <a:r>
-              <a:rPr sz="840">
+              <a:t>      6.7   </a:t>
+            </a:r>
+            <a:r>
+              <a:rPr sz="720">
                 <a:solidFill>
                   <a:srgbClr val="314359"/>
                 </a:solidFill>
@@ -16739,7 +16871,7 @@
                 </a:solidFill>
                 <a:latin typeface="Times New Roman"/>
               </a:rPr>
-              <a:t>2.2.1 The inefficiency Athanase harvests</a:t>
+              <a:t>2.1 The inefficiency Athanase harvests</a:t>
             </a:r>
           </a:p>
         </p:txBody>
@@ -17310,7 +17442,7 @@
                 </a:solidFill>
                 <a:latin typeface="Times New Roman"/>
               </a:rPr>
-              <a:t>2.2.2 We don’t buy broken companies — we buy hidden cores</a:t>
+              <a:t>2.2 We don’t buy broken companies — we buy hidden cores</a:t>
             </a:r>
           </a:p>
         </p:txBody>
@@ -18329,7 +18461,7 @@
                 </a:solidFill>
                 <a:latin typeface="Times New Roman"/>
               </a:rPr>
-              <a:t>2.2.3 Quality-core constructivism — how we differ</a:t>
+              <a:t>2.3 Quality-core constructivism — how we differ</a:t>
             </a:r>
           </a:p>
         </p:txBody>
@@ -20259,7 +20391,7 @@
                 </a:solidFill>
                 <a:latin typeface="Times New Roman"/>
               </a:rPr>
-              <a:t>2.2.4 We don’t need to be right more than ~50%</a:t>
+              <a:t>2.4 We don’t need to be right more than ~50%</a:t>
             </a:r>
           </a:p>
         </p:txBody>
@@ -21931,7 +22063,7 @@
                 </a:solidFill>
                 <a:latin typeface="Times New Roman"/>
               </a:rPr>
-              <a:t>2.2.5 The same playbook as mid-market PE — without its costs</a:t>
+              <a:t>2.5 The same playbook as mid-market PE — without its costs</a:t>
             </a:r>
           </a:p>
         </p:txBody>
@@ -24524,7 +24656,7 @@
                 </a:solidFill>
                 <a:latin typeface="Times New Roman"/>
               </a:rPr>
-              <a:t>2.3.1 A risk system built to avoid permanent loss</a:t>
+              <a:t>3.1 A risk system built to avoid permanent loss</a:t>
             </a:r>
           </a:p>
         </p:txBody>
@@ -25062,7 +25194,7 @@
                 </a:solidFill>
                 <a:latin typeface="Times New Roman"/>
               </a:rPr>
-              <a:t>2.3.2 The visible risks are the engine — not the cost</a:t>
+              <a:t>3.2 The visible risks are the engine — not the cost</a:t>
             </a:r>
           </a:p>
         </p:txBody>
@@ -25610,7 +25742,7 @@
                 </a:solidFill>
                 <a:latin typeface="Times New Roman"/>
               </a:rPr>
-              <a:t>2.3.3 A non-linear path — honestly priced</a:t>
+              <a:t>3.3 A non-linear path — honestly priced</a:t>
             </a:r>
           </a:p>
         </p:txBody>
@@ -26144,7 +26276,7 @@
                 </a:solidFill>
                 <a:latin typeface="Times New Roman"/>
               </a:rPr>
-              <a:t>2.3.4 Risk reframing for the investment committee</a:t>
+              <a:t>3.4 Risk reframing for the investment committee</a:t>
             </a:r>
           </a:p>
         </p:txBody>
@@ -28391,7 +28523,7 @@
                 </a:solidFill>
                 <a:latin typeface="Times New Roman"/>
               </a:rPr>
-              <a:t>2.4.1 Proof: outperformance with downside protection</a:t>
+              <a:t>4.1 Proof: outperformance with downside protection</a:t>
             </a:r>
           </a:p>
         </p:txBody>
@@ -28844,7 +28976,7 @@
                 </a:solidFill>
                 <a:latin typeface="Times New Roman"/>
               </a:rPr>
-              <a:t>2.4.2 AIP Fund II — transactions (2015–present)</a:t>
+              <a:t>4.2 AIP Fund II — transactions (2015–present)</a:t>
             </a:r>
           </a:p>
         </p:txBody>
@@ -37052,7 +37184,7 @@
                 </a:solidFill>
                 <a:latin typeface="Times New Roman"/>
               </a:rPr>
-              <a:t>2.4.3 Prior period — transactions (2006–2014)</a:t>
+              <a:t>4.3 Prior period — transactions (2006–2014)</a:t>
             </a:r>
           </a:p>
         </p:txBody>
@@ -43670,7 +43802,7 @@
                 </a:solidFill>
                 <a:latin typeface="Times New Roman"/>
               </a:rPr>
-              <a:t>2.4.4 Independently validated: 20 years, net of every fee</a:t>
+              <a:t>4.4 Independently validated: 20 years, net of every fee</a:t>
             </a:r>
           </a:p>
         </p:txBody>
@@ -44640,7 +44772,7 @@
                 </a:solidFill>
                 <a:latin typeface="Times New Roman"/>
               </a:rPr>
-              <a:t>2.4.5 Repeatable and conviction-sized — not lucky</a:t>
+              <a:t>4.5 Repeatable and conviction-sized — not lucky</a:t>
             </a:r>
           </a:p>
         </p:txBody>
@@ -45178,7 +45310,7 @@
                 </a:solidFill>
                 <a:latin typeface="Times New Roman"/>
               </a:rPr>
-              <a:t>2.4.6 Why a non-linear path won’t get you fired</a:t>
+              <a:t>4.6 Why a non-linear path won’t get you fired</a:t>
             </a:r>
           </a:p>
         </p:txBody>
@@ -46249,7 +46381,7 @@
                 </a:solidFill>
                 <a:latin typeface="Times New Roman"/>
               </a:rPr>
-              <a:t>2.5.1 What it does to an allocator’s portfolio</a:t>
+              <a:t>5.1 What it does to an allocator’s portfolio</a:t>
             </a:r>
           </a:p>
         </p:txBody>
@@ -48122,7 +48254,7 @@
                 </a:solidFill>
                 <a:latin typeface="Times New Roman"/>
               </a:rPr>
-              <a:t>2.5.2 Lower downside risk compounds into better outcomes</a:t>
+              <a:t>5.2 Lower downside risk compounds into better outcomes</a:t>
             </a:r>
           </a:p>
         </p:txBody>
@@ -52104,7 +52236,7 @@
                 </a:solidFill>
                 <a:latin typeface="Times New Roman"/>
               </a:rPr>
-              <a:t>1.1 A catalyst-driven source of return</a:t>
+              <a:t>1 A catalyst-driven source of return</a:t>
             </a:r>
           </a:p>
         </p:txBody>
@@ -52652,7 +52784,7 @@
                 </a:solidFill>
                 <a:latin typeface="Times New Roman"/>
               </a:rPr>
-              <a:t>2.5.3 A complement to global equities, not a duplicate</a:t>
+              <a:t>5.3 A complement to global equities, not a duplicate</a:t>
             </a:r>
           </a:p>
         </p:txBody>
@@ -53654,7 +53786,7 @@
                 </a:solidFill>
                 <a:latin typeface="Times New Roman"/>
               </a:rPr>
-              <a:t>2.5.4 What a blend does to the whole portfolio</a:t>
+              <a:t>5.4 What a blend does to the whole portfolio</a:t>
             </a:r>
           </a:p>
         </p:txBody>
@@ -55029,7 +55161,7 @@
                 </a:solidFill>
                 <a:latin typeface="Times New Roman"/>
               </a:rPr>
-              <a:t>2.6.1 What allocators actually earn from private equity</a:t>
+              <a:t>6.1 What allocators actually earn from private equity</a:t>
             </a:r>
           </a:p>
         </p:txBody>
@@ -55905,7 +56037,7 @@
                 </a:solidFill>
                 <a:latin typeface="Times New Roman"/>
               </a:rPr>
-              <a:t>2.6.2 Switching a private-equity sleeve into Athanase</a:t>
+              <a:t>6.2 Switching a private-equity sleeve into Athanase</a:t>
             </a:r>
           </a:p>
         </p:txBody>
@@ -57289,7 +57421,7 @@
                 </a:solidFill>
                 <a:latin typeface="Times New Roman"/>
               </a:rPr>
-              <a:t>2.6.3 The volatility gap is settled in the literature</a:t>
+              <a:t>6.3 The volatility gap is settled in the literature</a:t>
             </a:r>
           </a:p>
         </p:txBody>
@@ -58293,7 +58425,7 @@
                 </a:solidFill>
                 <a:latin typeface="Times New Roman"/>
               </a:rPr>
-              <a:t>2.6.4 Same headline volatility — far lower real risk</a:t>
+              <a:t>6.4 Same headline volatility — far lower real risk</a:t>
             </a:r>
           </a:p>
         </p:txBody>
@@ -59195,7 +59327,7 @@
                 </a:solidFill>
                 <a:latin typeface="Times New Roman"/>
               </a:rPr>
-              <a:t>2.6.5 PE’s “diversification” is an artefact — Athanase’s is real</a:t>
+              <a:t>6.5 PE’s “diversification” is an artefact — Athanase’s is real</a:t>
             </a:r>
           </a:p>
         </p:txBody>
@@ -60029,7 +60161,7 @@
                 </a:solidFill>
                 <a:latin typeface="Times New Roman"/>
               </a:rPr>
-              <a:t>2.6.6 When the tide goes out: the drawdown trap</a:t>
+              <a:t>6.6 When the tide goes out: the drawdown trap</a:t>
             </a:r>
           </a:p>
         </p:txBody>
@@ -61307,7 +61439,7 @@
                 </a:solidFill>
                 <a:latin typeface="Times New Roman"/>
               </a:rPr>
-              <a:t>2.6.7 Responsible ownership, by construction</a:t>
+              <a:t>6.7 Responsible ownership, by construction</a:t>
             </a:r>
           </a:p>
         </p:txBody>
@@ -61734,7 +61866,7 @@
                 </a:solidFill>
                 <a:latin typeface="Times New Roman"/>
               </a:rPr>
-              <a:t>1.2 Aligned with horizon and fiduciary duty</a:t>
+              <a:t>2 Aligned with horizon and fiduciary duty</a:t>
             </a:r>
           </a:p>
         </p:txBody>
@@ -64381,7 +64513,7 @@
                 </a:solidFill>
                 <a:latin typeface="Times New Roman"/>
               </a:rPr>
-              <a:t>1.3 Diversification and the total-portfolio view</a:t>
+              <a:t>3 Diversification and the total-portfolio view</a:t>
             </a:r>
           </a:p>
         </p:txBody>
@@ -64808,7 +64940,7 @@
                 </a:solidFill>
                 <a:latin typeface="Times New Roman"/>
               </a:rPr>
-              <a:t>1.4 Governance and the ESG synergy</a:t>
+              <a:t>4 Governance and the ESG synergy</a:t>
             </a:r>
           </a:p>
         </p:txBody>
@@ -65277,7 +65409,7 @@
                 </a:solidFill>
                 <a:latin typeface="Times New Roman"/>
               </a:rPr>
-              <a:t>1.5 Why mid-market is the sweet spot</a:t>
+              <a:t>5 Why mid-market is the sweet spot</a:t>
             </a:r>
           </a:p>
         </p:txBody>
@@ -67337,7 +67469,7 @@
                 </a:solidFill>
                 <a:latin typeface="Times New Roman"/>
               </a:rPr>
-              <a:t>1.6 Why mid-cap management listens</a:t>
+              <a:t>6 Why mid-cap management listens</a:t>
             </a:r>
           </a:p>
         </p:txBody>

--- a/Athanase_Engaged_Ownership_Allocator_Deck.pptx
+++ b/Athanase_Engaged_Ownership_Allocator_Deck.pptx
@@ -15212,7 +15212,7 @@
         </p:nvSpPr>
         <p:spPr>
           <a:xfrm>
-            <a:off x="512076" y="1901952"/>
+            <a:off x="512076" y="1784908"/>
             <a:ext cx="4279499" cy="390144"/>
           </a:xfrm>
           <a:prstGeom prst="rect">
@@ -15254,8 +15254,8 @@
         </p:nvSpPr>
         <p:spPr>
           <a:xfrm>
-            <a:off x="512076" y="2311603"/>
-            <a:ext cx="4279499" cy="5559552"/>
+            <a:off x="512076" y="2175052"/>
+            <a:ext cx="4279499" cy="5169408"/>
           </a:xfrm>
           <a:prstGeom prst="rect">
             <a:avLst/>
@@ -15510,7 +15510,7 @@
         </p:nvSpPr>
         <p:spPr>
           <a:xfrm>
-            <a:off x="5157345" y="1901952"/>
+            <a:off x="5157345" y="1784908"/>
             <a:ext cx="4279499" cy="390144"/>
           </a:xfrm>
           <a:prstGeom prst="rect">
@@ -15552,8 +15552,8 @@
         </p:nvSpPr>
         <p:spPr>
           <a:xfrm>
-            <a:off x="5157345" y="2311603"/>
-            <a:ext cx="4279499" cy="5559552"/>
+            <a:off x="5157345" y="2175052"/>
+            <a:ext cx="4279499" cy="5169408"/>
           </a:xfrm>
           <a:prstGeom prst="rect">
             <a:avLst/>
@@ -15574,7 +15574,7 @@
                 <a:spcPts val="0"/>
               </a:spcBef>
               <a:spcAft>
-                <a:spcPts val="150"/>
+                <a:spcPts val="100"/>
               </a:spcAft>
             </a:pPr>
             <a:r>
@@ -15593,7 +15593,7 @@
                 <a:spcPct val="100000"/>
               </a:lnSpc>
               <a:spcAft>
-                <a:spcPts val="150"/>
+                <a:spcPts val="80"/>
               </a:spcAft>
             </a:pPr>
             <a:r>
@@ -15621,7 +15621,7 @@
                 <a:spcPct val="100000"/>
               </a:lnSpc>
               <a:spcAft>
-                <a:spcPts val="150"/>
+                <a:spcPts val="80"/>
               </a:spcAft>
             </a:pPr>
             <a:r>
@@ -15649,7 +15649,7 @@
                 <a:spcPct val="100000"/>
               </a:lnSpc>
               <a:spcAft>
-                <a:spcPts val="150"/>
+                <a:spcPts val="80"/>
               </a:spcAft>
             </a:pPr>
             <a:r>
@@ -15677,7 +15677,7 @@
                 <a:spcPct val="100000"/>
               </a:lnSpc>
               <a:spcAft>
-                <a:spcPts val="150"/>
+                <a:spcPts val="80"/>
               </a:spcAft>
             </a:pPr>
             <a:r>
@@ -15714,7 +15714,7 @@
                 <a:spcPct val="100000"/>
               </a:lnSpc>
               <a:spcAft>
-                <a:spcPts val="150"/>
+                <a:spcPts val="80"/>
               </a:spcAft>
             </a:pPr>
             <a:r>
@@ -15751,7 +15751,7 @@
                 <a:spcPct val="100000"/>
               </a:lnSpc>
               <a:spcAft>
-                <a:spcPts val="150"/>
+                <a:spcPts val="80"/>
               </a:spcAft>
             </a:pPr>
             <a:r>
@@ -15779,10 +15779,10 @@
                 <a:spcPct val="100000"/>
               </a:lnSpc>
               <a:spcBef>
-                <a:spcPts val="300"/>
+                <a:spcPts val="200"/>
               </a:spcBef>
               <a:spcAft>
-                <a:spcPts val="150"/>
+                <a:spcPts val="100"/>
               </a:spcAft>
             </a:pPr>
             <a:r>
@@ -15801,7 +15801,7 @@
                 <a:spcPct val="100000"/>
               </a:lnSpc>
               <a:spcAft>
-                <a:spcPts val="150"/>
+                <a:spcPts val="80"/>
               </a:spcAft>
             </a:pPr>
             <a:r>
@@ -15838,7 +15838,7 @@
                 <a:spcPct val="100000"/>
               </a:lnSpc>
               <a:spcAft>
-                <a:spcPts val="150"/>
+                <a:spcPts val="80"/>
               </a:spcAft>
             </a:pPr>
             <a:r>
@@ -15875,7 +15875,7 @@
                 <a:spcPct val="100000"/>
               </a:lnSpc>
               <a:spcAft>
-                <a:spcPts val="150"/>
+                <a:spcPts val="80"/>
               </a:spcAft>
             </a:pPr>
             <a:r>
@@ -15912,7 +15912,7 @@
                 <a:spcPct val="100000"/>
               </a:lnSpc>
               <a:spcAft>
-                <a:spcPts val="150"/>
+                <a:spcPts val="80"/>
               </a:spcAft>
             </a:pPr>
             <a:r>
@@ -15949,7 +15949,7 @@
                 <a:spcPct val="100000"/>
               </a:lnSpc>
               <a:spcAft>
-                <a:spcPts val="150"/>
+                <a:spcPts val="80"/>
               </a:spcAft>
             </a:pPr>
             <a:r>
@@ -15986,10 +15986,10 @@
                 <a:spcPct val="100000"/>
               </a:lnSpc>
               <a:spcBef>
-                <a:spcPts val="300"/>
+                <a:spcPts val="200"/>
               </a:spcBef>
               <a:spcAft>
-                <a:spcPts val="150"/>
+                <a:spcPts val="100"/>
               </a:spcAft>
             </a:pPr>
             <a:r>
@@ -16008,7 +16008,7 @@
                 <a:spcPct val="100000"/>
               </a:lnSpc>
               <a:spcAft>
-                <a:spcPts val="150"/>
+                <a:spcPts val="80"/>
               </a:spcAft>
             </a:pPr>
             <a:r>
@@ -16036,7 +16036,7 @@
                 <a:spcPct val="100000"/>
               </a:lnSpc>
               <a:spcAft>
-                <a:spcPts val="150"/>
+                <a:spcPts val="80"/>
               </a:spcAft>
             </a:pPr>
             <a:r>
@@ -16064,7 +16064,7 @@
                 <a:spcPct val="100000"/>
               </a:lnSpc>
               <a:spcAft>
-                <a:spcPts val="150"/>
+                <a:spcPts val="80"/>
               </a:spcAft>
             </a:pPr>
             <a:r>
@@ -16101,7 +16101,7 @@
                 <a:spcPct val="100000"/>
               </a:lnSpc>
               <a:spcAft>
-                <a:spcPts val="150"/>
+                <a:spcPts val="80"/>
               </a:spcAft>
             </a:pPr>
             <a:r>
@@ -16138,10 +16138,10 @@
                 <a:spcPct val="100000"/>
               </a:lnSpc>
               <a:spcBef>
-                <a:spcPts val="300"/>
+                <a:spcPts val="200"/>
               </a:spcBef>
               <a:spcAft>
-                <a:spcPts val="150"/>
+                <a:spcPts val="100"/>
               </a:spcAft>
             </a:pPr>
             <a:r>
@@ -16160,7 +16160,7 @@
                 <a:spcPct val="100000"/>
               </a:lnSpc>
               <a:spcAft>
-                <a:spcPts val="150"/>
+                <a:spcPts val="80"/>
               </a:spcAft>
             </a:pPr>
             <a:r>
@@ -16197,7 +16197,7 @@
                 <a:spcPct val="100000"/>
               </a:lnSpc>
               <a:spcAft>
-                <a:spcPts val="150"/>
+                <a:spcPts val="80"/>
               </a:spcAft>
             </a:pPr>
             <a:r>
@@ -16234,7 +16234,7 @@
                 <a:spcPct val="100000"/>
               </a:lnSpc>
               <a:spcAft>
-                <a:spcPts val="150"/>
+                <a:spcPts val="80"/>
               </a:spcAft>
             </a:pPr>
             <a:r>
@@ -16271,7 +16271,7 @@
                 <a:spcPct val="100000"/>
               </a:lnSpc>
               <a:spcAft>
-                <a:spcPts val="150"/>
+                <a:spcPts val="80"/>
               </a:spcAft>
             </a:pPr>
             <a:r>
@@ -16299,7 +16299,7 @@
                 <a:spcPct val="100000"/>
               </a:lnSpc>
               <a:spcAft>
-                <a:spcPts val="150"/>
+                <a:spcPts val="80"/>
               </a:spcAft>
             </a:pPr>
             <a:r>
@@ -16327,7 +16327,7 @@
                 <a:spcPct val="100000"/>
               </a:lnSpc>
               <a:spcAft>
-                <a:spcPts val="150"/>
+                <a:spcPts val="80"/>
               </a:spcAft>
             </a:pPr>
             <a:r>
@@ -16355,10 +16355,10 @@
                 <a:spcPct val="100000"/>
               </a:lnSpc>
               <a:spcBef>
-                <a:spcPts val="300"/>
+                <a:spcPts val="200"/>
               </a:spcBef>
               <a:spcAft>
-                <a:spcPts val="150"/>
+                <a:spcPts val="100"/>
               </a:spcAft>
             </a:pPr>
             <a:r>
@@ -16377,7 +16377,7 @@
                 <a:spcPct val="100000"/>
               </a:lnSpc>
               <a:spcAft>
-                <a:spcPts val="150"/>
+                <a:spcPts val="80"/>
               </a:spcAft>
             </a:pPr>
             <a:r>
@@ -16414,7 +16414,7 @@
                 <a:spcPct val="100000"/>
               </a:lnSpc>
               <a:spcAft>
-                <a:spcPts val="150"/>
+                <a:spcPts val="80"/>
               </a:spcAft>
             </a:pPr>
             <a:r>
@@ -16451,7 +16451,7 @@
                 <a:spcPct val="100000"/>
               </a:lnSpc>
               <a:spcAft>
-                <a:spcPts val="150"/>
+                <a:spcPts val="80"/>
               </a:spcAft>
             </a:pPr>
             <a:r>
@@ -16488,7 +16488,7 @@
                 <a:spcPct val="100000"/>
               </a:lnSpc>
               <a:spcAft>
-                <a:spcPts val="150"/>
+                <a:spcPts val="80"/>
               </a:spcAft>
             </a:pPr>
             <a:r>
@@ -16525,10 +16525,10 @@
                 <a:spcPct val="100000"/>
               </a:lnSpc>
               <a:spcBef>
-                <a:spcPts val="300"/>
+                <a:spcPts val="200"/>
               </a:spcBef>
               <a:spcAft>
-                <a:spcPts val="150"/>
+                <a:spcPts val="100"/>
               </a:spcAft>
             </a:pPr>
             <a:r>
@@ -16547,7 +16547,7 @@
                 <a:spcPct val="100000"/>
               </a:lnSpc>
               <a:spcAft>
-                <a:spcPts val="150"/>
+                <a:spcPts val="80"/>
               </a:spcAft>
             </a:pPr>
             <a:r>
@@ -16584,7 +16584,7 @@
                 <a:spcPct val="100000"/>
               </a:lnSpc>
               <a:spcAft>
-                <a:spcPts val="150"/>
+                <a:spcPts val="80"/>
               </a:spcAft>
             </a:pPr>
             <a:r>
@@ -16621,7 +16621,7 @@
                 <a:spcPct val="100000"/>
               </a:lnSpc>
               <a:spcAft>
-                <a:spcPts val="150"/>
+                <a:spcPts val="80"/>
               </a:spcAft>
             </a:pPr>
             <a:r>
@@ -16658,7 +16658,7 @@
                 <a:spcPct val="100000"/>
               </a:lnSpc>
               <a:spcAft>
-                <a:spcPts val="150"/>
+                <a:spcPts val="80"/>
               </a:spcAft>
             </a:pPr>
             <a:r>
@@ -16695,7 +16695,7 @@
                 <a:spcPct val="100000"/>
               </a:lnSpc>
               <a:spcAft>
-                <a:spcPts val="150"/>
+                <a:spcPts val="80"/>
               </a:spcAft>
             </a:pPr>
             <a:r>
@@ -16732,7 +16732,7 @@
                 <a:spcPct val="100000"/>
               </a:lnSpc>
               <a:spcAft>
-                <a:spcPts val="150"/>
+                <a:spcPts val="80"/>
               </a:spcAft>
             </a:pPr>
             <a:r>
@@ -16760,7 +16760,7 @@
                 <a:spcPct val="100000"/>
               </a:lnSpc>
               <a:spcAft>
-                <a:spcPts val="150"/>
+                <a:spcPts val="80"/>
               </a:spcAft>
             </a:pPr>
             <a:r>
